--- a/review/Review1_GaN_Segmented_Gate_Driver.pptx
+++ b/review/Review1_GaN_Segmented_Gate_Driver.pptx
@@ -17,6 +17,8 @@
     <p:sldId id="262" r:id="rId8"/>
     <p:sldId id="263" r:id="rId9"/>
     <p:sldId id="264" r:id="rId10"/>
+    <p:sldId id="268" r:id="rId19"/>
+    <p:sldId id="267" r:id="rId18"/>
     <p:sldId id="265" r:id="rId11"/>
     <p:sldId id="266" r:id="rId12"/>
   </p:sldIdLst>
@@ -1732,7 +1734,7 @@
 
 <file path=ppt/slides/slide10.xml><?xml version="1.0" encoding="utf-8"?>
 <p:sld xmlns:a="http://schemas.openxmlformats.org/drawingml/2006/main" xmlns:r="http://schemas.openxmlformats.org/officeDocument/2006/relationships" xmlns:p="http://schemas.openxmlformats.org/presentationml/2006/main">
-  <p:cSld name="Slide 10">
+  <p:cSld name="Slide 9">
     <p:bg>
       <p:bgPr>
         <a:solidFill>
@@ -1827,7 +1829,7 @@
                 <a:ea typeface="Calibri" pitchFamily="34" charset="-122"/>
                 <a:cs typeface="Calibri" pitchFamily="34" charset="-120"/>
               </a:rPr>
-              <a:t>References</a:t>
+              <a:t>Demo</a:t>
             </a:r>
             <a:endParaRPr lang="en-US" sz="2800" dirty="0"/>
           </a:p>
@@ -1857,6 +1859,969 @@
           </a:prstGeom>
         </p:spPr>
       </p:pic>
+      <p:pic>
+        <p:nvPicPr>
+          <p:cNvPr id="5" name="pipeline_demo_review1.mp4">
+            <a:hlinkClick r:id="" action="ppaction://media"/>
+          </p:cNvPr>
+          <p:cNvPicPr>
+            <a:picLocks noChangeAspect="1"/>
+          </p:cNvPicPr>
+          <p:nvPr>
+            <a:videoFile r:link="rId4"/>
+            <p:extLst>
+              <p:ext uri="{DAA4B4D4-6D71-4841-9C94-3DE7FCFB9230}">
+                <p14:media xmlns:p14="http://schemas.microsoft.com/office/powerpoint/2010/main" r:embed="rId2"/>
+              </p:ext>
+            </p:extLst>
+          </p:nvPr>
+        </p:nvPicPr>
+        <p:blipFill>
+          <a:blip r:embed="rId5"/>
+          <a:stretch>
+            <a:fillRect/>
+          </a:stretch>
+        </p:blipFill>
+        <p:spPr>
+          <a:xfrm>
+            <a:off x="640080" y="1417320"/>
+            <a:ext cx="6949440" cy="4050791"/>
+          </a:xfrm>
+          <a:prstGeom prst="rect">
+            <a:avLst/>
+          </a:prstGeom>
+        </p:spPr>
+      </p:pic>
+      <p:sp>
+        <p:nvSpPr>
+          <p:cNvPr id="6" name="TextBox 5"/>
+          <p:cNvSpPr txBox="1"/>
+          <p:nvPr/>
+        </p:nvSpPr>
+        <p:spPr>
+          <a:xfrm>
+            <a:off x="640080" y="5623560"/>
+            <a:ext cx="6949440" cy="365760"/>
+          </a:xfrm>
+          <a:prstGeom prst="rect">
+            <a:avLst/>
+          </a:prstGeom>
+          <a:noFill/>
+        </p:spPr>
+        <p:txBody>
+          <a:bodyPr wrap="square" lIns="0" tIns="0" rIns="0" bIns="0">
+            <a:spAutoFit/>
+          </a:bodyPr>
+          <a:lstStyle/>
+          <a:p>
+            <a:pPr marL="177800" indent="0">
+              <a:spcAft>
+                <a:spcPts val="0"/>
+              </a:spcAft>
+              <a:buSzPct val="100000"/>
+              <a:buNone/>
+            </a:pPr>
+            <a:r>
+              <a:rPr lang="en-US" sz="1100" dirty="0">
+                <a:solidFill>
+                  <a:srgbClr val="000000"/>
+                </a:solidFill>
+                <a:latin typeface="Calibri" pitchFamily="34" charset="0"/>
+                <a:ea typeface="Calibri" pitchFamily="34" charset="-122"/>
+                <a:cs typeface="Calibri" pitchFamily="34" charset="-120"/>
+              </a:rPr>
+              <a:t xml:space="preserve">Click to play (17 s). Real captured output — only the pacing is presentational.</a:t>
+            </a:r>
+          </a:p>
+        </p:txBody>
+      </p:sp>
+      <p:sp>
+        <p:nvSpPr>
+          <p:cNvPr id="7" name="TextBox 6"/>
+          <p:cNvSpPr txBox="1"/>
+          <p:nvPr/>
+        </p:nvSpPr>
+        <p:spPr>
+          <a:xfrm>
+            <a:off x="7909560" y="1417320"/>
+            <a:ext cx="3611880" cy="4206240"/>
+          </a:xfrm>
+          <a:prstGeom prst="rect">
+            <a:avLst/>
+          </a:prstGeom>
+          <a:noFill/>
+        </p:spPr>
+        <p:txBody>
+          <a:bodyPr wrap="square" lIns="0" tIns="0" rIns="0" bIns="0">
+            <a:spAutoFit/>
+          </a:bodyPr>
+          <a:lstStyle/>
+          <a:p>
+            <a:pPr marL="177800" indent="0">
+              <a:spcAft>
+                <a:spcPts val="240"/>
+              </a:spcAft>
+              <a:buSzPct val="100000"/>
+              <a:buNone/>
+            </a:pPr>
+            <a:r>
+              <a:rPr lang="en-US" sz="1500" b="1" dirty="0">
+                <a:solidFill>
+                  <a:srgbClr val="000000"/>
+                </a:solidFill>
+                <a:latin typeface="Calibri" pitchFamily="34" charset="0"/>
+                <a:ea typeface="Calibri" pitchFamily="34" charset="-122"/>
+                <a:cs typeface="Calibri" pitchFamily="34" charset="-120"/>
+              </a:rPr>
+              <a:t xml:space="preserve">What it shows</a:t>
+            </a:r>
+          </a:p>
+          <a:p>
+            <a:pPr marL="177800" indent="-177800">
+              <a:spcAft>
+                <a:spcPts val="180"/>
+              </a:spcAft>
+              <a:buSzPct val="100000"/>
+              <a:buChar char="•"/>
+            </a:pPr>
+            <a:r>
+              <a:rPr lang="en-US" sz="1300" dirty="0">
+                <a:solidFill>
+                  <a:srgbClr val="000000"/>
+                </a:solidFill>
+                <a:latin typeface="Calibri" pitchFamily="34" charset="0"/>
+                <a:ea typeface="Calibri" pitchFamily="34" charset="-122"/>
+                <a:cs typeface="Calibri" pitchFamily="34" charset="-120"/>
+              </a:rPr>
+              <a:t xml:space="preserve">ngspice 42 running the real double-pulse test.</a:t>
+            </a:r>
+          </a:p>
+          <a:p>
+            <a:pPr marL="177800" indent="-177800">
+              <a:spcAft>
+                <a:spcPts val="180"/>
+              </a:spcAft>
+              <a:buSzPct val="100000"/>
+              <a:buChar char="•"/>
+            </a:pPr>
+            <a:r>
+              <a:rPr lang="en-US" sz="1300" dirty="0">
+                <a:solidFill>
+                  <a:srgbClr val="000000"/>
+                </a:solidFill>
+                <a:latin typeface="Calibri" pitchFamily="34" charset="0"/>
+                <a:ea typeface="Calibri" pitchFamily="34" charset="-122"/>
+                <a:cs typeface="Calibri" pitchFamily="34" charset="-120"/>
+              </a:rPr>
+              <a:t xml:space="preserve">Fastest drive, no clamp: spurious gate 1.649 V, margin </a:t>
+            </a:r>
+            <a:r>
+              <a:rPr lang="en-US" sz="1300" b="1" dirty="0">
+                <a:solidFill>
+                  <a:srgbClr val="000000"/>
+                </a:solidFill>
+                <a:latin typeface="Calibri" pitchFamily="34" charset="0"/>
+                <a:ea typeface="Calibri" pitchFamily="34" charset="-122"/>
+                <a:cs typeface="Calibri" pitchFamily="34" charset="-120"/>
+              </a:rPr>
+              <a:t xml:space="preserve">−0.249 V</a:t>
+            </a:r>
+            <a:r>
+              <a:rPr lang="en-US" sz="1300" dirty="0">
+                <a:solidFill>
+                  <a:srgbClr val="000000"/>
+                </a:solidFill>
+                <a:latin typeface="Calibri" pitchFamily="34" charset="0"/>
+                <a:ea typeface="Calibri" pitchFamily="34" charset="-122"/>
+                <a:cs typeface="Calibri" pitchFamily="34" charset="-120"/>
+              </a:rPr>
+              <a:t xml:space="preserve"> — false turn-on.</a:t>
+            </a:r>
+          </a:p>
+          <a:p>
+            <a:pPr marL="177800" indent="-177800">
+              <a:spcAft>
+                <a:spcPts val="180"/>
+              </a:spcAft>
+              <a:buSzPct val="100000"/>
+              <a:buChar char="•"/>
+            </a:pPr>
+            <a:r>
+              <a:rPr lang="en-US" sz="1300" dirty="0">
+                <a:solidFill>
+                  <a:srgbClr val="000000"/>
+                </a:solidFill>
+                <a:latin typeface="Calibri" pitchFamily="34" charset="0"/>
+                <a:ea typeface="Calibri" pitchFamily="34" charset="-122"/>
+                <a:cs typeface="Calibri" pitchFamily="34" charset="-120"/>
+              </a:rPr>
+              <a:t xml:space="preserve">Miller clamp on: 0.830 V, margin </a:t>
+            </a:r>
+            <a:r>
+              <a:rPr lang="en-US" sz="1300" b="1" dirty="0">
+                <a:solidFill>
+                  <a:srgbClr val="000000"/>
+                </a:solidFill>
+                <a:latin typeface="Calibri" pitchFamily="34" charset="0"/>
+                <a:ea typeface="Calibri" pitchFamily="34" charset="-122"/>
+                <a:cs typeface="Calibri" pitchFamily="34" charset="-120"/>
+              </a:rPr>
+              <a:t xml:space="preserve">+0.570 V</a:t>
+            </a:r>
+            <a:r>
+              <a:rPr lang="en-US" sz="1300" dirty="0">
+                <a:solidFill>
+                  <a:srgbClr val="000000"/>
+                </a:solidFill>
+                <a:latin typeface="Calibri" pitchFamily="34" charset="0"/>
+                <a:ea typeface="Calibri" pitchFamily="34" charset="-122"/>
+                <a:cs typeface="Calibri" pitchFamily="34" charset="-120"/>
+              </a:rPr>
+              <a:t xml:space="preserve"> — safe.</a:t>
+            </a:r>
+          </a:p>
+          <a:p>
+            <a:pPr marL="177800" indent="-177800">
+              <a:spcAft>
+                <a:spcPts val="240"/>
+              </a:spcAft>
+              <a:buSzPct val="100000"/>
+              <a:buChar char="•"/>
+            </a:pPr>
+            <a:r>
+              <a:rPr lang="en-US" sz="1300" dirty="0">
+                <a:solidFill>
+                  <a:srgbClr val="000000"/>
+                </a:solidFill>
+                <a:latin typeface="Calibri" pitchFamily="34" charset="0"/>
+                <a:ea typeface="Calibri" pitchFamily="34" charset="-122"/>
+                <a:cs typeface="Calibri" pitchFamily="34" charset="-120"/>
+              </a:rPr>
+              <a:t xml:space="preserve">The full 720-word search at four corners: 474 feasible, ceiling </a:t>
+            </a:r>
+            <a:r>
+              <a:rPr lang="en-US" sz="1300" b="1" dirty="0">
+                <a:solidFill>
+                  <a:srgbClr val="000000"/>
+                </a:solidFill>
+                <a:latin typeface="Calibri" pitchFamily="34" charset="0"/>
+                <a:ea typeface="Calibri" pitchFamily="34" charset="-122"/>
+                <a:cs typeface="Calibri" pitchFamily="34" charset="-120"/>
+              </a:rPr>
+              <a:t xml:space="preserve">5.2 %</a:t>
+            </a:r>
+            <a:r>
+              <a:rPr lang="en-US" sz="1300" dirty="0">
+                <a:solidFill>
+                  <a:srgbClr val="000000"/>
+                </a:solidFill>
+                <a:latin typeface="Calibri" pitchFamily="34" charset="0"/>
+                <a:ea typeface="Calibri" pitchFamily="34" charset="-122"/>
+                <a:cs typeface="Calibri" pitchFamily="34" charset="-120"/>
+              </a:rPr>
+              <a:t xml:space="preserve">.</a:t>
+            </a:r>
+          </a:p>
+          <a:p>
+            <a:pPr marL="177800" indent="0">
+              <a:spcAft>
+                <a:spcPts val="0"/>
+              </a:spcAft>
+              <a:buSzPct val="100000"/>
+              <a:buNone/>
+            </a:pPr>
+            <a:r>
+              <a:rPr lang="en-US" sz="1150" dirty="0">
+                <a:solidFill>
+                  <a:srgbClr val="000000"/>
+                </a:solidFill>
+                <a:latin typeface="Calibri" pitchFamily="34" charset="0"/>
+                <a:ea typeface="Calibri" pitchFamily="34" charset="-122"/>
+                <a:cs typeface="Calibri" pitchFamily="34" charset="-120"/>
+              </a:rPr>
+              <a:t xml:space="preserve">Two more videos ship in the project folder: a 33 s waveform viewer and the research walk-through.</a:t>
+            </a:r>
+          </a:p>
+        </p:txBody>
+      </p:sp>
+    </p:spTree>
+  </p:cSld>
+  <p:clrMapOvr>
+    <a:masterClrMapping/>
+  </p:clrMapOvr>
+  <p:timing>
+    <p:tnLst>
+      <p:par>
+        <p:cTn id="1" dur="indefinite" restart="never" nodeType="tmRoot">
+          <p:childTnLst>
+            <p:video>
+              <p:cMediaNode vol="80000">
+                <p:cTn id="2" fill="hold" display="0">
+                  <p:stCondLst>
+                    <p:cond delay="indefinite"/>
+                  </p:stCondLst>
+                </p:cTn>
+                <p:tgtEl>
+                  <p:spTgt spid="5"/>
+                </p:tgtEl>
+              </p:cMediaNode>
+            </p:video>
+          </p:childTnLst>
+        </p:cTn>
+      </p:par>
+    </p:tnLst>
+  </p:timing>
+</p:sld>
+</file>
+
+<file path=ppt/slides/slide11.xml><?xml version="1.0" encoding="utf-8"?>
+<p:sld xmlns:a="http://schemas.openxmlformats.org/drawingml/2006/main" xmlns:r="http://schemas.openxmlformats.org/officeDocument/2006/relationships" xmlns:p="http://schemas.openxmlformats.org/presentationml/2006/main">
+  <p:cSld name="Slide 9">
+    <p:bg>
+      <p:bgPr>
+        <a:solidFill>
+          <a:srgbClr val="FFFFFF"/>
+        </a:solidFill>
+        <a:effectLst/>
+      </p:bgPr>
+    </p:bg>
+    <p:spTree>
+      <p:nvGrpSpPr>
+        <p:cNvPr id="1" name=""/>
+        <p:cNvGrpSpPr/>
+        <p:nvPr/>
+      </p:nvGrpSpPr>
+      <p:grpSpPr>
+        <a:xfrm>
+          <a:off x="0" y="0"/>
+          <a:ext cx="0" cy="0"/>
+          <a:chOff x="0" y="0"/>
+          <a:chExt cx="0" cy="0"/>
+        </a:xfrm>
+      </p:grpSpPr>
+      <p:sp>
+        <p:nvSpPr>
+          <p:cNvPr id="2" name="Text 0"/>
+          <p:cNvSpPr txBox="1"/>
+          <p:nvPr/>
+        </p:nvSpPr>
+        <p:spPr>
+          <a:xfrm>
+            <a:off x="11460175" y="6446520"/>
+            <a:ext cx="457200" cy="274320"/>
+          </a:xfrm>
+          <a:prstGeom prst="rect">
+            <a:avLst/>
+          </a:prstGeom>
+          <a:noFill/>
+          <a:ln/>
+        </p:spPr>
+        <p:txBody>
+          <a:bodyPr wrap="square" lIns="0" tIns="0" rIns="0" bIns="0" rtlCol="0" anchor="ctr"/>
+          <a:lstStyle/>
+          <a:p>
+            <a:pPr marL="0" indent="0" algn="r">
+              <a:buNone/>
+            </a:pPr>
+            <a:r>
+              <a:rPr lang="en-US" sz="1000" dirty="0">
+                <a:solidFill>
+                  <a:srgbClr val="808080"/>
+                </a:solidFill>
+                <a:latin typeface="Calibri" pitchFamily="34" charset="0"/>
+                <a:ea typeface="Calibri" pitchFamily="34" charset="-122"/>
+                <a:cs typeface="Calibri" pitchFamily="34" charset="-120"/>
+              </a:rPr>
+              <a:t>11</a:t>
+            </a:r>
+            <a:endParaRPr lang="en-US" sz="1000" dirty="0"/>
+          </a:p>
+        </p:txBody>
+      </p:sp>
+      <p:sp>
+        <p:nvSpPr>
+          <p:cNvPr id="3" name="Text 1"/>
+          <p:cNvSpPr txBox="1"/>
+          <p:nvPr/>
+        </p:nvSpPr>
+        <p:spPr>
+          <a:xfrm>
+            <a:off x="548640" y="320040"/>
+            <a:ext cx="9601200" cy="685800"/>
+          </a:xfrm>
+          <a:prstGeom prst="rect">
+            <a:avLst/>
+          </a:prstGeom>
+          <a:noFill/>
+          <a:ln/>
+        </p:spPr>
+        <p:txBody>
+          <a:bodyPr wrap="square" lIns="0" tIns="0" rIns="0" bIns="0" rtlCol="0" anchor="ctr"/>
+          <a:lstStyle/>
+          <a:p>
+            <a:pPr marL="0" indent="0">
+              <a:buNone/>
+            </a:pPr>
+            <a:r>
+              <a:rPr lang="en-US" sz="2800" b="1" dirty="0">
+                <a:solidFill>
+                  <a:srgbClr val="1D2F82"/>
+                </a:solidFill>
+                <a:latin typeface="Calibri" pitchFamily="34" charset="0"/>
+                <a:ea typeface="Calibri" pitchFamily="34" charset="-122"/>
+                <a:cs typeface="Calibri" pitchFamily="34" charset="-120"/>
+              </a:rPr>
+              <a:t>Why the numbers hold</a:t>
+            </a:r>
+            <a:endParaRPr lang="en-US" sz="2800" dirty="0"/>
+          </a:p>
+        </p:txBody>
+      </p:sp>
+      <p:pic>
+        <p:nvPicPr>
+          <p:cNvPr id="4" name="Image 0" descr="logo.png"/>
+          <p:cNvPicPr>
+            <a:picLocks noChangeAspect="1"/>
+          </p:cNvPicPr>
+          <p:nvPr/>
+        </p:nvPicPr>
+        <p:blipFill>
+          <a:blip r:embed="rId3"/>
+          <a:stretch>
+            <a:fillRect/>
+          </a:stretch>
+        </p:blipFill>
+        <p:spPr>
+          <a:xfrm>
+            <a:off x="10362895" y="320040"/>
+            <a:ext cx="1371600" cy="518746"/>
+          </a:xfrm>
+          <a:prstGeom prst="rect">
+            <a:avLst/>
+          </a:prstGeom>
+        </p:spPr>
+      </p:pic>
+      <p:sp>
+        <p:nvSpPr>
+          <p:cNvPr id="5" name="TextBox 4"/>
+          <p:cNvSpPr txBox="1"/>
+          <p:nvPr/>
+        </p:nvSpPr>
+        <p:spPr>
+          <a:xfrm>
+            <a:off x="640080" y="1554480"/>
+            <a:ext cx="5257800" cy="1828800"/>
+          </a:xfrm>
+          <a:prstGeom prst="rect">
+            <a:avLst/>
+          </a:prstGeom>
+          <a:noFill/>
+        </p:spPr>
+        <p:txBody>
+          <a:bodyPr wrap="square" lIns="0" tIns="0" rIns="0" bIns="0">
+            <a:spAutoFit/>
+          </a:bodyPr>
+          <a:lstStyle/>
+          <a:p>
+            <a:pPr marL="177800" indent="0">
+              <a:spcAft>
+                <a:spcPts val="120"/>
+              </a:spcAft>
+              <a:buSzPct val="100000"/>
+              <a:buNone/>
+            </a:pPr>
+            <a:r>
+              <a:rPr lang="en-US" sz="4000" b="1" dirty="0">
+                <a:solidFill>
+                  <a:srgbClr val="000000"/>
+                </a:solidFill>
+                <a:latin typeface="Calibri" pitchFamily="34" charset="0"/>
+                <a:ea typeface="Calibri" pitchFamily="34" charset="-122"/>
+                <a:cs typeface="Calibri" pitchFamily="34" charset="-120"/>
+              </a:rPr>
+              <a:t xml:space="preserve">25,990</a:t>
+            </a:r>
+          </a:p>
+          <a:p>
+            <a:pPr marL="177800" indent="0">
+              <a:spcAft>
+                <a:spcPts val="100"/>
+              </a:spcAft>
+              <a:buSzPct val="100000"/>
+              <a:buNone/>
+            </a:pPr>
+            <a:r>
+              <a:rPr lang="en-US" sz="1500" b="1" dirty="0">
+                <a:solidFill>
+                  <a:srgbClr val="000000"/>
+                </a:solidFill>
+                <a:latin typeface="Calibri" pitchFamily="34" charset="0"/>
+                <a:ea typeface="Calibri" pitchFamily="34" charset="-122"/>
+                <a:cs typeface="Calibri" pitchFamily="34" charset="-120"/>
+              </a:rPr>
+              <a:t xml:space="preserve">transient simulations</a:t>
+            </a:r>
+          </a:p>
+          <a:p>
+            <a:pPr marL="177800" indent="0">
+              <a:spcAft>
+                <a:spcPts val="0"/>
+              </a:spcAft>
+              <a:buSzPct val="100000"/>
+              <a:buNone/>
+            </a:pPr>
+            <a:r>
+              <a:rPr lang="en-US" sz="1250" dirty="0">
+                <a:solidFill>
+                  <a:srgbClr val="000000"/>
+                </a:solidFill>
+                <a:latin typeface="Calibri" pitchFamily="34" charset="0"/>
+                <a:ea typeface="Calibri" pitchFamily="34" charset="-122"/>
+                <a:cs typeface="Calibri" pitchFamily="34" charset="-120"/>
+              </a:rPr>
+              <a:t xml:space="preserve">Every sweep, corner study and robustness run, start to finish.</a:t>
+            </a:r>
+          </a:p>
+        </p:txBody>
+      </p:sp>
+      <p:sp>
+        <p:nvSpPr>
+          <p:cNvPr id="6" name="TextBox 5"/>
+          <p:cNvSpPr txBox="1"/>
+          <p:nvPr/>
+        </p:nvSpPr>
+        <p:spPr>
+          <a:xfrm>
+            <a:off x="6263640" y="1554480"/>
+            <a:ext cx="5257800" cy="1828800"/>
+          </a:xfrm>
+          <a:prstGeom prst="rect">
+            <a:avLst/>
+          </a:prstGeom>
+          <a:noFill/>
+        </p:spPr>
+        <p:txBody>
+          <a:bodyPr wrap="square" lIns="0" tIns="0" rIns="0" bIns="0">
+            <a:spAutoFit/>
+          </a:bodyPr>
+          <a:lstStyle/>
+          <a:p>
+            <a:pPr marL="177800" indent="0">
+              <a:spcAft>
+                <a:spcPts val="120"/>
+              </a:spcAft>
+              <a:buSzPct val="100000"/>
+              <a:buNone/>
+            </a:pPr>
+            <a:r>
+              <a:rPr lang="en-US" sz="4000" b="1" dirty="0">
+                <a:solidFill>
+                  <a:srgbClr val="000000"/>
+                </a:solidFill>
+                <a:latin typeface="Calibri" pitchFamily="34" charset="0"/>
+                <a:ea typeface="Calibri" pitchFamily="34" charset="-122"/>
+                <a:cs typeface="Calibri" pitchFamily="34" charset="-120"/>
+              </a:rPr>
+              <a:t xml:space="preserve">720</a:t>
+            </a:r>
+          </a:p>
+          <a:p>
+            <a:pPr marL="177800" indent="0">
+              <a:spcAft>
+                <a:spcPts val="100"/>
+              </a:spcAft>
+              <a:buSzPct val="100000"/>
+              <a:buNone/>
+            </a:pPr>
+            <a:r>
+              <a:rPr lang="en-US" sz="1500" b="1" dirty="0">
+                <a:solidFill>
+                  <a:srgbClr val="000000"/>
+                </a:solidFill>
+                <a:latin typeface="Calibri" pitchFamily="34" charset="0"/>
+                <a:ea typeface="Calibri" pitchFamily="34" charset="-122"/>
+                <a:cs typeface="Calibri" pitchFamily="34" charset="-120"/>
+              </a:rPr>
+              <a:t xml:space="preserve">control words, searched in full</a:t>
+            </a:r>
+          </a:p>
+          <a:p>
+            <a:pPr marL="177800" indent="0">
+              <a:spcAft>
+                <a:spcPts val="0"/>
+              </a:spcAft>
+              <a:buSzPct val="100000"/>
+              <a:buNone/>
+            </a:pPr>
+            <a:r>
+              <a:rPr lang="en-US" sz="1250" dirty="0">
+                <a:solidFill>
+                  <a:srgbClr val="000000"/>
+                </a:solidFill>
+                <a:latin typeface="Calibri" pitchFamily="34" charset="0"/>
+                <a:ea typeface="Calibri" pitchFamily="34" charset="-122"/>
+                <a:cs typeface="Calibri" pitchFamily="34" charset="-120"/>
+              </a:rPr>
+              <a:t xml:space="preserve">At every corner — so each per-corner optimum is a true optimum, not the best of a shortlist.</a:t>
+            </a:r>
+          </a:p>
+        </p:txBody>
+      </p:sp>
+      <p:sp>
+        <p:nvSpPr>
+          <p:cNvPr id="7" name="TextBox 6"/>
+          <p:cNvSpPr txBox="1"/>
+          <p:nvPr/>
+        </p:nvSpPr>
+        <p:spPr>
+          <a:xfrm>
+            <a:off x="640080" y="3703320"/>
+            <a:ext cx="5257800" cy="1828800"/>
+          </a:xfrm>
+          <a:prstGeom prst="rect">
+            <a:avLst/>
+          </a:prstGeom>
+          <a:noFill/>
+        </p:spPr>
+        <p:txBody>
+          <a:bodyPr wrap="square" lIns="0" tIns="0" rIns="0" bIns="0">
+            <a:spAutoFit/>
+          </a:bodyPr>
+          <a:lstStyle/>
+          <a:p>
+            <a:pPr marL="177800" indent="0">
+              <a:spcAft>
+                <a:spcPts val="120"/>
+              </a:spcAft>
+              <a:buSzPct val="100000"/>
+              <a:buNone/>
+            </a:pPr>
+            <a:r>
+              <a:rPr lang="en-US" sz="4000" b="1" dirty="0">
+                <a:solidFill>
+                  <a:srgbClr val="000000"/>
+                </a:solidFill>
+                <a:latin typeface="Calibri" pitchFamily="34" charset="0"/>
+                <a:ea typeface="Calibri" pitchFamily="34" charset="-122"/>
+                <a:cs typeface="Calibri" pitchFamily="34" charset="-120"/>
+              </a:rPr>
+              <a:t xml:space="preserve">25×</a:t>
+            </a:r>
+          </a:p>
+          <a:p>
+            <a:pPr marL="177800" indent="0">
+              <a:spcAft>
+                <a:spcPts val="100"/>
+              </a:spcAft>
+              <a:buSzPct val="100000"/>
+              <a:buNone/>
+            </a:pPr>
+            <a:r>
+              <a:rPr lang="en-US" sz="1500" b="1" dirty="0">
+                <a:solidFill>
+                  <a:srgbClr val="000000"/>
+                </a:solidFill>
+                <a:latin typeface="Calibri" pitchFamily="34" charset="0"/>
+                <a:ea typeface="Calibri" pitchFamily="34" charset="-122"/>
+                <a:cs typeface="Calibri" pitchFamily="34" charset="-120"/>
+              </a:rPr>
+              <a:t xml:space="preserve">timestep refinement survived</a:t>
+            </a:r>
+          </a:p>
+          <a:p>
+            <a:pPr marL="177800" indent="0">
+              <a:spcAft>
+                <a:spcPts val="0"/>
+              </a:spcAft>
+              <a:buSzPct val="100000"/>
+              <a:buNone/>
+            </a:pPr>
+            <a:r>
+              <a:rPr lang="en-US" sz="1250" dirty="0">
+                <a:solidFill>
+                  <a:srgbClr val="000000"/>
+                </a:solidFill>
+                <a:latin typeface="Calibri" pitchFamily="34" charset="0"/>
+                <a:ea typeface="Calibri" pitchFamily="34" charset="-122"/>
+                <a:cs typeface="Calibri" pitchFamily="34" charset="-120"/>
+              </a:rPr>
+              <a:t xml:space="preserve">Every reported quantity must be flat across it. Enforced, not assumed.</a:t>
+            </a:r>
+          </a:p>
+        </p:txBody>
+      </p:sp>
+      <p:sp>
+        <p:nvSpPr>
+          <p:cNvPr id="8" name="TextBox 7"/>
+          <p:cNvSpPr txBox="1"/>
+          <p:nvPr/>
+        </p:nvSpPr>
+        <p:spPr>
+          <a:xfrm>
+            <a:off x="6263640" y="3703320"/>
+            <a:ext cx="5257800" cy="1828800"/>
+          </a:xfrm>
+          <a:prstGeom prst="rect">
+            <a:avLst/>
+          </a:prstGeom>
+          <a:noFill/>
+        </p:spPr>
+        <p:txBody>
+          <a:bodyPr wrap="square" lIns="0" tIns="0" rIns="0" bIns="0">
+            <a:spAutoFit/>
+          </a:bodyPr>
+          <a:lstStyle/>
+          <a:p>
+            <a:pPr marL="177800" indent="0">
+              <a:spcAft>
+                <a:spcPts val="120"/>
+              </a:spcAft>
+              <a:buSzPct val="100000"/>
+              <a:buNone/>
+            </a:pPr>
+            <a:r>
+              <a:rPr lang="en-US" sz="4000" b="1" dirty="0">
+                <a:solidFill>
+                  <a:srgbClr val="000000"/>
+                </a:solidFill>
+                <a:latin typeface="Calibri" pitchFamily="34" charset="0"/>
+                <a:ea typeface="Calibri" pitchFamily="34" charset="-122"/>
+                <a:cs typeface="Calibri" pitchFamily="34" charset="-120"/>
+              </a:rPr>
+              <a:t xml:space="preserve">7</a:t>
+            </a:r>
+          </a:p>
+          <a:p>
+            <a:pPr marL="177800" indent="0">
+              <a:spcAft>
+                <a:spcPts val="100"/>
+              </a:spcAft>
+              <a:buSzPct val="100000"/>
+              <a:buNone/>
+            </a:pPr>
+            <a:r>
+              <a:rPr lang="en-US" sz="1500" b="1" dirty="0">
+                <a:solidFill>
+                  <a:srgbClr val="000000"/>
+                </a:solidFill>
+                <a:latin typeface="Calibri" pitchFamily="34" charset="0"/>
+                <a:ea typeface="Calibri" pitchFamily="34" charset="-122"/>
+                <a:cs typeface="Calibri" pitchFamily="34" charset="-120"/>
+              </a:rPr>
+              <a:t xml:space="preserve">wrong numbers caught, and corrected</a:t>
+            </a:r>
+          </a:p>
+          <a:p>
+            <a:pPr marL="177800" indent="0">
+              <a:spcAft>
+                <a:spcPts val="0"/>
+              </a:spcAft>
+              <a:buSzPct val="100000"/>
+              <a:buNone/>
+            </a:pPr>
+            <a:r>
+              <a:rPr lang="en-US" sz="1250" dirty="0">
+                <a:solidFill>
+                  <a:srgbClr val="000000"/>
+                </a:solidFill>
+                <a:latin typeface="Calibri" pitchFamily="34" charset="0"/>
+                <a:ea typeface="Calibri" pitchFamily="34" charset="-122"/>
+                <a:cs typeface="Calibri" pitchFamily="34" charset="-120"/>
+              </a:rPr>
+              <a:t xml:space="preserve">By that discipline, before any of them reached the report.</a:t>
+            </a:r>
+          </a:p>
+        </p:txBody>
+      </p:sp>
+      <p:sp>
+        <p:nvSpPr>
+          <p:cNvPr id="9" name="TextBox 8"/>
+          <p:cNvSpPr txBox="1"/>
+          <p:nvPr/>
+        </p:nvSpPr>
+        <p:spPr>
+          <a:xfrm>
+            <a:off x="640080" y="5897880"/>
+            <a:ext cx="10881360" cy="411480"/>
+          </a:xfrm>
+          <a:prstGeom prst="rect">
+            <a:avLst/>
+          </a:prstGeom>
+          <a:noFill/>
+        </p:spPr>
+        <p:txBody>
+          <a:bodyPr wrap="square" lIns="0" tIns="0" rIns="0" bIns="0">
+            <a:spAutoFit/>
+          </a:bodyPr>
+          <a:lstStyle/>
+          <a:p>
+            <a:pPr marL="177800" indent="0">
+              <a:spcAft>
+                <a:spcPts val="0"/>
+              </a:spcAft>
+              <a:buSzPct val="100000"/>
+              <a:buNone/>
+            </a:pPr>
+            <a:r>
+              <a:rPr lang="en-US" sz="1150" b="1" dirty="0">
+                <a:solidFill>
+                  <a:srgbClr val="000000"/>
+                </a:solidFill>
+                <a:latin typeface="Calibri" pitchFamily="34" charset="0"/>
+                <a:ea typeface="Calibri" pitchFamily="34" charset="-122"/>
+                <a:cs typeface="Calibri" pitchFamily="34" charset="-120"/>
+              </a:rPr>
+              <a:t xml:space="preserve">Stated plainly: </a:t>
+            </a:r>
+            <a:r>
+              <a:rPr lang="en-US" sz="1150" dirty="0">
+                <a:solidFill>
+                  <a:srgbClr val="000000"/>
+                </a:solidFill>
+                <a:latin typeface="Calibri" pitchFamily="34" charset="0"/>
+                <a:ea typeface="Calibri" pitchFamily="34" charset="-122"/>
+                <a:cs typeface="Calibri" pitchFamily="34" charset="-120"/>
+              </a:rPr>
+              <a:t xml:space="preserve">LTspice and Spectre decks are faithful ports re-simulated to the same numbers, but neither simulator has itself been run — no installation was available.</a:t>
+            </a:r>
+          </a:p>
+        </p:txBody>
+      </p:sp>
+    </p:spTree>
+  </p:cSld>
+  <p:clrMapOvr>
+    <a:masterClrMapping/>
+  </p:clrMapOvr>
+</p:sld>
+</file>
+
+<file path=ppt/slides/slide12.xml><?xml version="1.0" encoding="utf-8"?>
+<p:sld xmlns:a="http://schemas.openxmlformats.org/drawingml/2006/main" xmlns:r="http://schemas.openxmlformats.org/officeDocument/2006/relationships" xmlns:p="http://schemas.openxmlformats.org/presentationml/2006/main">
+  <p:cSld name="Slide 10">
+    <p:bg>
+      <p:bgPr>
+        <a:solidFill>
+          <a:srgbClr val="FFFFFF"/>
+        </a:solidFill>
+        <a:effectLst/>
+      </p:bgPr>
+    </p:bg>
+    <p:spTree>
+      <p:nvGrpSpPr>
+        <p:cNvPr id="1" name=""/>
+        <p:cNvGrpSpPr/>
+        <p:nvPr/>
+      </p:nvGrpSpPr>
+      <p:grpSpPr>
+        <a:xfrm>
+          <a:off x="0" y="0"/>
+          <a:ext cx="0" cy="0"/>
+          <a:chOff x="0" y="0"/>
+          <a:chExt cx="0" cy="0"/>
+        </a:xfrm>
+      </p:grpSpPr>
+      <p:sp>
+        <p:nvSpPr>
+          <p:cNvPr id="2" name="Text 0"/>
+          <p:cNvSpPr txBox="1"/>
+          <p:nvPr/>
+        </p:nvSpPr>
+        <p:spPr>
+          <a:xfrm>
+            <a:off x="11460175" y="6446520"/>
+            <a:ext cx="457200" cy="274320"/>
+          </a:xfrm>
+          <a:prstGeom prst="rect">
+            <a:avLst/>
+          </a:prstGeom>
+          <a:noFill/>
+          <a:ln/>
+        </p:spPr>
+        <p:txBody>
+          <a:bodyPr wrap="square" lIns="0" tIns="0" rIns="0" bIns="0" rtlCol="0" anchor="ctr"/>
+          <a:lstStyle/>
+          <a:p>
+            <a:pPr marL="0" indent="0" algn="r">
+              <a:buNone/>
+            </a:pPr>
+            <a:r>
+              <a:rPr lang="en-US" sz="1000" dirty="0">
+                <a:solidFill>
+                  <a:srgbClr val="808080"/>
+                </a:solidFill>
+                <a:latin typeface="Calibri" pitchFamily="34" charset="0"/>
+                <a:ea typeface="Calibri" pitchFamily="34" charset="-122"/>
+                <a:cs typeface="Calibri" pitchFamily="34" charset="-120"/>
+              </a:rPr>
+              <a:t>12</a:t>
+            </a:r>
+            <a:endParaRPr lang="en-US" sz="1000" dirty="0"/>
+          </a:p>
+        </p:txBody>
+      </p:sp>
+      <p:sp>
+        <p:nvSpPr>
+          <p:cNvPr id="3" name="Text 1"/>
+          <p:cNvSpPr txBox="1"/>
+          <p:nvPr/>
+        </p:nvSpPr>
+        <p:spPr>
+          <a:xfrm>
+            <a:off x="548640" y="320040"/>
+            <a:ext cx="9601200" cy="685800"/>
+          </a:xfrm>
+          <a:prstGeom prst="rect">
+            <a:avLst/>
+          </a:prstGeom>
+          <a:noFill/>
+          <a:ln/>
+        </p:spPr>
+        <p:txBody>
+          <a:bodyPr wrap="square" lIns="0" tIns="0" rIns="0" bIns="0" rtlCol="0" anchor="ctr"/>
+          <a:lstStyle/>
+          <a:p>
+            <a:pPr marL="0" indent="0">
+              <a:buNone/>
+            </a:pPr>
+            <a:r>
+              <a:rPr lang="en-US" sz="2800" b="1" dirty="0">
+                <a:solidFill>
+                  <a:srgbClr val="1D2F82"/>
+                </a:solidFill>
+                <a:latin typeface="Calibri" pitchFamily="34" charset="0"/>
+                <a:ea typeface="Calibri" pitchFamily="34" charset="-122"/>
+                <a:cs typeface="Calibri" pitchFamily="34" charset="-120"/>
+              </a:rPr>
+              <a:t>References</a:t>
+            </a:r>
+            <a:endParaRPr lang="en-US" sz="2800" dirty="0"/>
+          </a:p>
+        </p:txBody>
+      </p:sp>
+      <p:pic>
+        <p:nvPicPr>
+          <p:cNvPr id="4" name="Image 0" descr="logo.png"/>
+          <p:cNvPicPr>
+            <a:picLocks noChangeAspect="1"/>
+          </p:cNvPicPr>
+          <p:nvPr/>
+        </p:nvPicPr>
+        <p:blipFill>
+          <a:blip r:embed="rId3"/>
+          <a:stretch>
+            <a:fillRect/>
+          </a:stretch>
+        </p:blipFill>
+        <p:spPr>
+          <a:xfrm>
+            <a:off x="10362895" y="320040"/>
+            <a:ext cx="1371600" cy="518746"/>
+          </a:xfrm>
+          <a:prstGeom prst="rect">
+            <a:avLst/>
+          </a:prstGeom>
+        </p:spPr>
+      </p:pic>
       <p:sp>
         <p:nvSpPr>
           <p:cNvPr id="5" name="Text 2"/>
@@ -2075,7 +3040,7 @@
 </p:sld>
 </file>
 
-<file path=ppt/slides/slide11.xml><?xml version="1.0" encoding="utf-8"?>
+<file path=ppt/slides/slide13.xml><?xml version="1.0" encoding="utf-8"?>
 <p:sld xmlns:a="http://schemas.openxmlformats.org/drawingml/2006/main" xmlns:r="http://schemas.openxmlformats.org/officeDocument/2006/relationships" xmlns:p="http://schemas.openxmlformats.org/presentationml/2006/main">
   <p:cSld name="Slide 11">
     <p:bg>
@@ -2133,7 +3098,7 @@
                 <a:ea typeface="Calibri" pitchFamily="34" charset="-122"/>
                 <a:cs typeface="Calibri" pitchFamily="34" charset="-120"/>
               </a:rPr>
-              <a:t>11</a:t>
+              <a:t>13</a:t>
             </a:r>
             <a:endParaRPr lang="en-US" sz="1000" dirty="0"/>
           </a:p>
@@ -7059,7 +8024,7 @@
                 <a:ea typeface="Calibri" pitchFamily="34" charset="-122"/>
                 <a:cs typeface="Calibri" pitchFamily="34" charset="-120"/>
               </a:rPr>
-              <a:t xml:space="preserve">Ports verified. </a:t>
+              <a:t xml:space="preserve">Ports generated and re-simulated. </a:t>
             </a:r>
             <a:r>
               <a:rPr lang="en-US" sz="1500" dirty="0">
@@ -7070,7 +8035,7 @@
                 <a:ea typeface="Calibri" pitchFamily="34" charset="-122"/>
                 <a:cs typeface="Calibri" pitchFamily="34" charset="-120"/>
               </a:rPr>
-              <a:t xml:space="preserve">LTspice, browser-WASM and Cadence Spectre decks all reproduce the reference result (122.4 V / 5.00 ns / 1.65 V). SKY130 output stage characterised at transistor level.</a:t>
+              <a:t xml:space="preserve">LTspice-dialect, Spectre and browser-WASM decks each reproduce 122.4 V / 5.00 V / 1.65 V on re-simulation. LTspice and Spectre themselves are not yet run — no installation available — so those two are faithful ports, not cross-simulator agreement.</a:t>
             </a:r>
           </a:p>
           <a:p>

--- a/review/Review1_GaN_Segmented_Gate_Driver.pptx
+++ b/review/Review1_GaN_Segmented_Gate_Driver.pptx
@@ -13,12 +13,13 @@
     <p:sldId id="258" r:id="rId4"/>
     <p:sldId id="259" r:id="rId5"/>
     <p:sldId id="260" r:id="rId6"/>
+    <p:sldId id="267" r:id="rId18"/>
     <p:sldId id="261" r:id="rId7"/>
     <p:sldId id="262" r:id="rId8"/>
     <p:sldId id="263" r:id="rId9"/>
     <p:sldId id="264" r:id="rId10"/>
+    <p:sldId id="269" r:id="rId20"/>
     <p:sldId id="268" r:id="rId19"/>
-    <p:sldId id="267" r:id="rId18"/>
     <p:sldId id="265" r:id="rId11"/>
     <p:sldId id="266" r:id="rId12"/>
   </p:sldIdLst>
@@ -1829,6 +1830,515 @@
                 <a:ea typeface="Calibri" pitchFamily="34" charset="-122"/>
                 <a:cs typeface="Calibri" pitchFamily="34" charset="-120"/>
               </a:rPr>
+              <a:t>Results (contd.)</a:t>
+            </a:r>
+            <a:endParaRPr lang="en-US" sz="2800" dirty="0"/>
+          </a:p>
+        </p:txBody>
+      </p:sp>
+      <p:pic>
+        <p:nvPicPr>
+          <p:cNvPr id="4" name="Image 0" descr="logo.png"/>
+          <p:cNvPicPr>
+            <a:picLocks noChangeAspect="1"/>
+          </p:cNvPicPr>
+          <p:nvPr/>
+        </p:nvPicPr>
+        <p:blipFill>
+          <a:blip r:embed="rId3"/>
+          <a:stretch>
+            <a:fillRect/>
+          </a:stretch>
+        </p:blipFill>
+        <p:spPr>
+          <a:xfrm>
+            <a:off x="10362895" y="320040"/>
+            <a:ext cx="1371600" cy="518746"/>
+          </a:xfrm>
+          <a:prstGeom prst="rect">
+            <a:avLst/>
+          </a:prstGeom>
+        </p:spPr>
+      </p:pic>
+      <p:pic>
+        <p:nvPicPr>
+          <p:cNvPr id="5" name="Picture 4" descr="paper_fig2_ceiling.png"/>
+          <p:cNvPicPr>
+            <a:picLocks noChangeAspect="1"/>
+          </p:cNvPicPr>
+          <p:nvPr/>
+        </p:nvPicPr>
+        <p:blipFill>
+          <a:blip r:embed="rId4"/>
+          <a:stretch>
+            <a:fillRect/>
+          </a:stretch>
+        </p:blipFill>
+        <p:spPr>
+          <a:xfrm>
+            <a:off x="640080" y="1417320"/>
+            <a:ext cx="6035040" cy="3212290"/>
+          </a:xfrm>
+          <a:prstGeom prst="rect">
+            <a:avLst/>
+          </a:prstGeom>
+        </p:spPr>
+      </p:pic>
+      <p:sp>
+        <p:nvSpPr>
+          <p:cNvPr id="6" name="TextBox 5"/>
+          <p:cNvSpPr txBox="1"/>
+          <p:nvPr/>
+        </p:nvSpPr>
+        <p:spPr>
+          <a:xfrm>
+            <a:off x="640080" y="4892040"/>
+            <a:ext cx="6035040" cy="411480"/>
+          </a:xfrm>
+          <a:prstGeom prst="rect">
+            <a:avLst/>
+          </a:prstGeom>
+          <a:noFill/>
+        </p:spPr>
+        <p:txBody>
+          <a:bodyPr wrap="square" lIns="0" tIns="0" rIns="0" bIns="0">
+            <a:spAutoFit/>
+          </a:bodyPr>
+          <a:lstStyle/>
+          <a:p>
+            <a:pPr marL="177800" indent="0">
+              <a:spcAft>
+                <a:spcPts val="0"/>
+              </a:spcAft>
+              <a:buSzPct val="100000"/>
+              <a:buNone/>
+            </a:pPr>
+            <a:r>
+              <a:rPr lang="en-US" sz="1100" dirty="0">
+                <a:solidFill>
+                  <a:srgbClr val="000000"/>
+                </a:solidFill>
+                <a:latin typeface="Calibri" pitchFamily="34" charset="0"/>
+                <a:ea typeface="Calibri" pitchFamily="34" charset="-122"/>
+                <a:cs typeface="Calibri" pitchFamily="34" charset="-120"/>
+              </a:rPr>
+              <a:t xml:space="preserve">Fig. 2  Cost of one fixed control word vs the true per-corner optimum, four corners.</a:t>
+            </a:r>
+          </a:p>
+        </p:txBody>
+      </p:sp>
+      <p:sp>
+        <p:nvSpPr>
+          <p:cNvPr id="7" name="TextBox 6"/>
+          <p:cNvSpPr txBox="1"/>
+          <p:nvPr/>
+        </p:nvSpPr>
+        <p:spPr>
+          <a:xfrm>
+            <a:off x="640080" y="5440680"/>
+            <a:ext cx="6035040" cy="822960"/>
+          </a:xfrm>
+          <a:prstGeom prst="rect">
+            <a:avLst/>
+          </a:prstGeom>
+          <a:noFill/>
+        </p:spPr>
+        <p:txBody>
+          <a:bodyPr wrap="square" lIns="0" tIns="0" rIns="0" bIns="0">
+            <a:spAutoFit/>
+          </a:bodyPr>
+          <a:lstStyle/>
+          <a:p>
+            <a:pPr marL="177800" indent="0">
+              <a:spcAft>
+                <a:spcPts val="0"/>
+              </a:spcAft>
+              <a:buSzPct val="100000"/>
+              <a:buNone/>
+            </a:pPr>
+            <a:r>
+              <a:rPr lang="en-US" sz="1300" dirty="0">
+                <a:solidFill>
+                  <a:srgbClr val="000000"/>
+                </a:solidFill>
+                <a:latin typeface="Calibri" pitchFamily="34" charset="0"/>
+                <a:ea typeface="Calibri" pitchFamily="34" charset="-122"/>
+                <a:cs typeface="Calibri" pitchFamily="34" charset="-120"/>
+              </a:rPr>
+              <a:t xml:space="preserve">Full 720-word search at every corner — 2,880 transients — so each per-corner optimum is a true optimum, not the best of a shortlist.</a:t>
+            </a:r>
+          </a:p>
+        </p:txBody>
+      </p:sp>
+      <p:sp>
+        <p:nvSpPr>
+          <p:cNvPr id="8" name="TextBox 7"/>
+          <p:cNvSpPr txBox="1"/>
+          <p:nvPr/>
+        </p:nvSpPr>
+        <p:spPr>
+          <a:xfrm>
+            <a:off x="6995160" y="1325880"/>
+            <a:ext cx="4526280" cy="411480"/>
+          </a:xfrm>
+          <a:prstGeom prst="rect">
+            <a:avLst/>
+          </a:prstGeom>
+          <a:noFill/>
+        </p:spPr>
+        <p:txBody>
+          <a:bodyPr wrap="square" lIns="0" tIns="0" rIns="0" bIns="0">
+            <a:spAutoFit/>
+          </a:bodyPr>
+          <a:lstStyle/>
+          <a:p>
+            <a:pPr marL="177800" indent="0">
+              <a:spcAft>
+                <a:spcPts val="0"/>
+              </a:spcAft>
+              <a:buSzPct val="100000"/>
+              <a:buNone/>
+            </a:pPr>
+            <a:r>
+              <a:rPr lang="en-US" sz="1500" b="1" dirty="0">
+                <a:solidFill>
+                  <a:srgbClr val="000000"/>
+                </a:solidFill>
+                <a:latin typeface="Calibri" pitchFamily="34" charset="0"/>
+                <a:ea typeface="Calibri" pitchFamily="34" charset="-122"/>
+                <a:cs typeface="Calibri" pitchFamily="34" charset="-120"/>
+              </a:rPr>
+              <a:t xml:space="preserve">What adaptation is actually worth</a:t>
+            </a:r>
+          </a:p>
+        </p:txBody>
+      </p:sp>
+      <p:sp>
+        <p:nvSpPr>
+          <p:cNvPr id="9" name="TextBox 8"/>
+          <p:cNvSpPr txBox="1"/>
+          <p:nvPr/>
+        </p:nvSpPr>
+        <p:spPr>
+          <a:xfrm>
+            <a:off x="6995160" y="1828800"/>
+            <a:ext cx="4526280" cy="1188720"/>
+          </a:xfrm>
+          <a:prstGeom prst="rect">
+            <a:avLst/>
+          </a:prstGeom>
+          <a:noFill/>
+        </p:spPr>
+        <p:txBody>
+          <a:bodyPr wrap="square" lIns="0" tIns="0" rIns="0" bIns="0">
+            <a:spAutoFit/>
+          </a:bodyPr>
+          <a:lstStyle/>
+          <a:p>
+            <a:pPr marL="177800" indent="0">
+              <a:spcAft>
+                <a:spcPts val="100"/>
+              </a:spcAft>
+              <a:buSzPct val="100000"/>
+              <a:buNone/>
+            </a:pPr>
+            <a:r>
+              <a:rPr lang="en-US" sz="3200" b="1" dirty="0">
+                <a:solidFill>
+                  <a:srgbClr val="000000"/>
+                </a:solidFill>
+                <a:latin typeface="Calibri" pitchFamily="34" charset="0"/>
+                <a:ea typeface="Calibri" pitchFamily="34" charset="-122"/>
+                <a:cs typeface="Calibri" pitchFamily="34" charset="-120"/>
+              </a:rPr>
+              <a:t xml:space="preserve">5.2 %</a:t>
+            </a:r>
+          </a:p>
+          <a:p>
+            <a:pPr marL="177800" indent="0">
+              <a:spcAft>
+                <a:spcPts val="60"/>
+              </a:spcAft>
+              <a:buSzPct val="100000"/>
+              <a:buNone/>
+            </a:pPr>
+            <a:r>
+              <a:rPr lang="en-US" sz="1300" b="1" dirty="0">
+                <a:solidFill>
+                  <a:srgbClr val="000000"/>
+                </a:solidFill>
+                <a:latin typeface="Calibri" pitchFamily="34" charset="0"/>
+                <a:ea typeface="Calibri" pitchFamily="34" charset="-122"/>
+                <a:cs typeface="Calibri" pitchFamily="34" charset="-120"/>
+              </a:rPr>
+              <a:t xml:space="preserve">ceiling on operating-point scheduling</a:t>
+            </a:r>
+          </a:p>
+          <a:p>
+            <a:pPr marL="177800" indent="0">
+              <a:spcAft>
+                <a:spcPts val="0"/>
+              </a:spcAft>
+              <a:buSzPct val="100000"/>
+              <a:buNone/>
+            </a:pPr>
+            <a:r>
+              <a:rPr lang="en-US" sz="1150" dirty="0">
+                <a:solidFill>
+                  <a:srgbClr val="000000"/>
+                </a:solidFill>
+                <a:latin typeface="Calibri" pitchFamily="34" charset="0"/>
+                <a:ea typeface="Calibri" pitchFamily="34" charset="-122"/>
+                <a:cs typeface="Calibri" pitchFamily="34" charset="-120"/>
+              </a:rPr>
+              <a:t xml:space="preserve">vs the best single fixed word. A fixed word is nearly as good.</a:t>
+            </a:r>
+          </a:p>
+        </p:txBody>
+      </p:sp>
+      <p:sp>
+        <p:nvSpPr>
+          <p:cNvPr id="10" name="TextBox 9"/>
+          <p:cNvSpPr txBox="1"/>
+          <p:nvPr/>
+        </p:nvSpPr>
+        <p:spPr>
+          <a:xfrm>
+            <a:off x="6995160" y="3154680"/>
+            <a:ext cx="4526280" cy="3108960"/>
+          </a:xfrm>
+          <a:prstGeom prst="rect">
+            <a:avLst/>
+          </a:prstGeom>
+          <a:noFill/>
+        </p:spPr>
+        <p:txBody>
+          <a:bodyPr wrap="square" lIns="0" tIns="0" rIns="0" bIns="0">
+            <a:spAutoFit/>
+          </a:bodyPr>
+          <a:lstStyle/>
+          <a:p>
+            <a:pPr marL="177800" indent="0">
+              <a:spcAft>
+                <a:spcPts val="180"/>
+              </a:spcAft>
+              <a:buSzPct val="100000"/>
+              <a:buNone/>
+            </a:pPr>
+            <a:r>
+              <a:rPr lang="en-US" sz="1300" b="1" dirty="0">
+                <a:solidFill>
+                  <a:srgbClr val="000000"/>
+                </a:solidFill>
+                <a:latin typeface="Calibri" pitchFamily="34" charset="0"/>
+                <a:ea typeface="Calibri" pitchFamily="34" charset="-122"/>
+                <a:cs typeface="Calibri" pitchFamily="34" charset="-120"/>
+              </a:rPr>
+              <a:t xml:space="preserve">The benefit is not spread out. </a:t>
+            </a:r>
+            <a:r>
+              <a:rPr lang="en-US" sz="1300" dirty="0">
+                <a:solidFill>
+                  <a:srgbClr val="000000"/>
+                </a:solidFill>
+                <a:latin typeface="Calibri" pitchFamily="34" charset="0"/>
+                <a:ea typeface="Calibri" pitchFamily="34" charset="-122"/>
+                <a:cs typeface="Calibri" pitchFamily="34" charset="-120"/>
+              </a:rPr>
+              <a:t xml:space="preserve">Three corners lose 1–4 % from a fixed word; one loses 12.7 %.</a:t>
+            </a:r>
+          </a:p>
+          <a:p>
+            <a:pPr marL="177800" indent="0">
+              <a:spcAft>
+                <a:spcPts val="180"/>
+              </a:spcAft>
+              <a:buSzPct val="100000"/>
+              <a:buNone/>
+            </a:pPr>
+            <a:r>
+              <a:rPr lang="en-US" sz="1300" b="1" dirty="0">
+                <a:solidFill>
+                  <a:srgbClr val="000000"/>
+                </a:solidFill>
+                <a:latin typeface="Calibri" pitchFamily="34" charset="0"/>
+                <a:ea typeface="Calibri" pitchFamily="34" charset="-122"/>
+                <a:cs typeface="Calibri" pitchFamily="34" charset="-120"/>
+              </a:rPr>
+              <a:t xml:space="preserve">It is carried by the dead time. </a:t>
+            </a:r>
+            <a:r>
+              <a:rPr lang="en-US" sz="1300" dirty="0">
+                <a:solidFill>
+                  <a:srgbClr val="000000"/>
+                </a:solidFill>
+                <a:latin typeface="Calibri" pitchFamily="34" charset="0"/>
+                <a:ea typeface="Calibri" pitchFamily="34" charset="-122"/>
+                <a:cs typeface="Calibri" pitchFamily="34" charset="-120"/>
+              </a:rPr>
+              <a:t xml:space="preserve">Freezing dead time costs 5.45 %; freezing pull-up drive strength costs </a:t>
+            </a:r>
+            <a:r>
+              <a:rPr lang="en-US" sz="1300" b="1" dirty="0">
+                <a:solidFill>
+                  <a:srgbClr val="000000"/>
+                </a:solidFill>
+                <a:latin typeface="Calibri" pitchFamily="34" charset="0"/>
+                <a:ea typeface="Calibri" pitchFamily="34" charset="-122"/>
+                <a:cs typeface="Calibri" pitchFamily="34" charset="-120"/>
+              </a:rPr>
+              <a:t xml:space="preserve">0.00 %</a:t>
+            </a:r>
+            <a:r>
+              <a:rPr lang="en-US" sz="1300" dirty="0">
+                <a:solidFill>
+                  <a:srgbClr val="000000"/>
+                </a:solidFill>
+                <a:latin typeface="Calibri" pitchFamily="34" charset="0"/>
+                <a:ea typeface="Calibri" pitchFamily="34" charset="-122"/>
+                <a:cs typeface="Calibri" pitchFamily="34" charset="-120"/>
+              </a:rPr>
+              <a:t xml:space="preserve"> — and drive strength is what the active-gate-driver literature actually schedules.</a:t>
+            </a:r>
+          </a:p>
+          <a:p>
+            <a:pPr marL="177800" indent="0">
+              <a:spcAft>
+                <a:spcPts val="0"/>
+              </a:spcAft>
+              <a:buSzPct val="100000"/>
+              <a:buNone/>
+            </a:pPr>
+            <a:r>
+              <a:rPr lang="en-US" sz="1300" b="1" dirty="0">
+                <a:solidFill>
+                  <a:srgbClr val="000000"/>
+                </a:solidFill>
+                <a:latin typeface="Calibri" pitchFamily="34" charset="0"/>
+                <a:ea typeface="Calibri" pitchFamily="34" charset="-122"/>
+                <a:cs typeface="Calibri" pitchFamily="34" charset="-120"/>
+              </a:rPr>
+              <a:t xml:space="preserve">Robust to the device, conditional on the layout. </a:t>
+            </a:r>
+            <a:r>
+              <a:rPr lang="en-US" sz="1300" dirty="0">
+                <a:solidFill>
+                  <a:srgbClr val="000000"/>
+                </a:solidFill>
+                <a:latin typeface="Calibri" pitchFamily="34" charset="0"/>
+                <a:ea typeface="Calibri" pitchFamily="34" charset="-122"/>
+                <a:cs typeface="Calibri" pitchFamily="34" charset="-120"/>
+              </a:rPr>
+              <a:t xml:space="preserve">Across 21,600 transients, no device parameter moves the ceiling outside 4.3–7.7 %. Halving the loop inductance takes it to 13.5 %, and loop inductance is board layout, not the transistor [3].</a:t>
+            </a:r>
+          </a:p>
+        </p:txBody>
+      </p:sp>
+    </p:spTree>
+  </p:cSld>
+  <p:clrMapOvr>
+    <a:masterClrMapping/>
+  </p:clrMapOvr>
+</p:sld>
+</file>
+
+<file path=ppt/slides/slide11.xml><?xml version="1.0" encoding="utf-8"?>
+<p:sld xmlns:a="http://schemas.openxmlformats.org/drawingml/2006/main" xmlns:r="http://schemas.openxmlformats.org/officeDocument/2006/relationships" xmlns:p="http://schemas.openxmlformats.org/presentationml/2006/main">
+  <p:cSld name="Slide 9">
+    <p:bg>
+      <p:bgPr>
+        <a:solidFill>
+          <a:srgbClr val="FFFFFF"/>
+        </a:solidFill>
+        <a:effectLst/>
+      </p:bgPr>
+    </p:bg>
+    <p:spTree>
+      <p:nvGrpSpPr>
+        <p:cNvPr id="1" name=""/>
+        <p:cNvGrpSpPr/>
+        <p:nvPr/>
+      </p:nvGrpSpPr>
+      <p:grpSpPr>
+        <a:xfrm>
+          <a:off x="0" y="0"/>
+          <a:ext cx="0" cy="0"/>
+          <a:chOff x="0" y="0"/>
+          <a:chExt cx="0" cy="0"/>
+        </a:xfrm>
+      </p:grpSpPr>
+      <p:sp>
+        <p:nvSpPr>
+          <p:cNvPr id="2" name="Text 0"/>
+          <p:cNvSpPr txBox="1"/>
+          <p:nvPr/>
+        </p:nvSpPr>
+        <p:spPr>
+          <a:xfrm>
+            <a:off x="11460175" y="6446520"/>
+            <a:ext cx="457200" cy="274320"/>
+          </a:xfrm>
+          <a:prstGeom prst="rect">
+            <a:avLst/>
+          </a:prstGeom>
+          <a:noFill/>
+          <a:ln/>
+        </p:spPr>
+        <p:txBody>
+          <a:bodyPr wrap="square" lIns="0" tIns="0" rIns="0" bIns="0" rtlCol="0" anchor="ctr"/>
+          <a:lstStyle/>
+          <a:p>
+            <a:pPr marL="0" indent="0" algn="r">
+              <a:buNone/>
+            </a:pPr>
+            <a:r>
+              <a:rPr lang="en-US" sz="1000" dirty="0">
+                <a:solidFill>
+                  <a:srgbClr val="808080"/>
+                </a:solidFill>
+                <a:latin typeface="Calibri" pitchFamily="34" charset="0"/>
+                <a:ea typeface="Calibri" pitchFamily="34" charset="-122"/>
+                <a:cs typeface="Calibri" pitchFamily="34" charset="-120"/>
+              </a:rPr>
+              <a:t>11</a:t>
+            </a:r>
+            <a:endParaRPr lang="en-US" sz="1000" dirty="0"/>
+          </a:p>
+        </p:txBody>
+      </p:sp>
+      <p:sp>
+        <p:nvSpPr>
+          <p:cNvPr id="3" name="Text 1"/>
+          <p:cNvSpPr txBox="1"/>
+          <p:nvPr/>
+        </p:nvSpPr>
+        <p:spPr>
+          <a:xfrm>
+            <a:off x="548640" y="320040"/>
+            <a:ext cx="9601200" cy="685800"/>
+          </a:xfrm>
+          <a:prstGeom prst="rect">
+            <a:avLst/>
+          </a:prstGeom>
+          <a:noFill/>
+          <a:ln/>
+        </p:spPr>
+        <p:txBody>
+          <a:bodyPr wrap="square" lIns="0" tIns="0" rIns="0" bIns="0" rtlCol="0" anchor="ctr"/>
+          <a:lstStyle/>
+          <a:p>
+            <a:pPr marL="0" indent="0">
+              <a:buNone/>
+            </a:pPr>
+            <a:r>
+              <a:rPr lang="en-US" sz="2800" b="1" dirty="0">
+                <a:solidFill>
+                  <a:srgbClr val="1D2F82"/>
+                </a:solidFill>
+                <a:latin typeface="Calibri" pitchFamily="34" charset="0"/>
+                <a:ea typeface="Calibri" pitchFamily="34" charset="-122"/>
+                <a:cs typeface="Calibri" pitchFamily="34" charset="-120"/>
+              </a:rPr>
               <a:t>Demo</a:t>
             </a:r>
             <a:endParaRPr lang="en-US" sz="2800" dirty="0"/>
@@ -2174,7 +2684,7 @@
 </p:sld>
 </file>
 
-<file path=ppt/slides/slide11.xml><?xml version="1.0" encoding="utf-8"?>
+<file path=ppt/slides/slide12.xml><?xml version="1.0" encoding="utf-8"?>
 <p:sld xmlns:a="http://schemas.openxmlformats.org/drawingml/2006/main" xmlns:r="http://schemas.openxmlformats.org/officeDocument/2006/relationships" xmlns:p="http://schemas.openxmlformats.org/presentationml/2006/main">
   <p:cSld name="Slide 9">
     <p:bg>
@@ -2232,7 +2742,7 @@
                 <a:ea typeface="Calibri" pitchFamily="34" charset="-122"/>
                 <a:cs typeface="Calibri" pitchFamily="34" charset="-120"/>
               </a:rPr>
-              <a:t>11</a:t>
+              <a:t>12</a:t>
             </a:r>
             <a:endParaRPr lang="en-US" sz="1000" dirty="0"/>
           </a:p>
@@ -2695,7 +3205,7 @@
 </p:sld>
 </file>
 
-<file path=ppt/slides/slide12.xml><?xml version="1.0" encoding="utf-8"?>
+<file path=ppt/slides/slide13.xml><?xml version="1.0" encoding="utf-8"?>
 <p:sld xmlns:a="http://schemas.openxmlformats.org/drawingml/2006/main" xmlns:r="http://schemas.openxmlformats.org/officeDocument/2006/relationships" xmlns:p="http://schemas.openxmlformats.org/presentationml/2006/main">
   <p:cSld name="Slide 10">
     <p:bg>
@@ -2753,7 +3263,7 @@
                 <a:ea typeface="Calibri" pitchFamily="34" charset="-122"/>
                 <a:cs typeface="Calibri" pitchFamily="34" charset="-120"/>
               </a:rPr>
-              <a:t>12</a:t>
+              <a:t>13</a:t>
             </a:r>
             <a:endParaRPr lang="en-US" sz="1000" dirty="0"/>
           </a:p>
@@ -2831,7 +3341,7 @@
         <p:spPr>
           <a:xfrm>
             <a:off x="640080" y="1325880"/>
-            <a:ext cx="10881360" cy="4206240"/>
+            <a:ext cx="10881360" cy="4343400"/>
           </a:xfrm>
           <a:prstGeom prst="rect">
             <a:avLst/>
@@ -2845,127 +3355,359 @@
           <a:p>
             <a:pPr marL="177800" indent="0">
               <a:spcAft>
-                <a:spcPts val="500"/>
+                <a:spcPts val="340"/>
               </a:spcAft>
               <a:buSzPct val="100000"/>
               <a:buNone/>
             </a:pPr>
             <a:r>
-              <a:rPr lang="en-US" sz="1400" dirty="0">
-                <a:solidFill>
-                  <a:srgbClr val="000000"/>
-                </a:solidFill>
-                <a:latin typeface="Calibri" pitchFamily="34" charset="0"/>
-                <a:ea typeface="Calibri" pitchFamily="34" charset="-122"/>
-                <a:cs typeface="Calibri" pitchFamily="34" charset="-120"/>
-              </a:rPr>
-              <a:t xml:space="preserve">[1]  Z. Zhang, F. Wang, L. M. Tolbert and B. J. Blalock, “Active Gate Driver for Crosstalk Suppression of SiC Devices in a Phase-Leg Configuration,” </a:t>
-            </a:r>
-            <a:r>
-              <a:rPr lang="en-US" sz="1400" dirty="0">
-                <a:solidFill>
-                  <a:srgbClr val="000000"/>
-                </a:solidFill>
-                <a:latin typeface="Calibri" pitchFamily="34" charset="0"/>
-                <a:ea typeface="Calibri" pitchFamily="34" charset="-122"/>
-                <a:cs typeface="Calibri" pitchFamily="34" charset="-120"/>
-              </a:rPr>
-              <a:t xml:space="preserve">IEEE Trans. Power Electron.</a:t>
-            </a:r>
-            <a:r>
-              <a:rPr lang="en-US" sz="1400" dirty="0">
-                <a:solidFill>
-                  <a:srgbClr val="000000"/>
-                </a:solidFill>
-                <a:latin typeface="Calibri" pitchFamily="34" charset="0"/>
-                <a:ea typeface="Calibri" pitchFamily="34" charset="-122"/>
-                <a:cs typeface="Calibri" pitchFamily="34" charset="-120"/>
-              </a:rPr>
-              <a:t xml:space="preserve">, vol. 29, no. 4, pp. 1986–1997, Apr. 2014.</a:t>
+              <a:rPr lang="en-US" sz="1150" b="1" dirty="0">
+                <a:solidFill>
+                  <a:srgbClr val="000000"/>
+                </a:solidFill>
+                <a:latin typeface="Calibri" pitchFamily="34" charset="0"/>
+                <a:ea typeface="Calibri" pitchFamily="34" charset="-122"/>
+                <a:cs typeface="Calibri" pitchFamily="34" charset="-120"/>
+              </a:rPr>
+              <a:t xml:space="preserve">[1]  </a:t>
+            </a:r>
+            <a:r>
+              <a:rPr lang="en-US" sz="1150" dirty="0">
+                <a:solidFill>
+                  <a:srgbClr val="000000"/>
+                </a:solidFill>
+                <a:latin typeface="Calibri" pitchFamily="34" charset="0"/>
+                <a:ea typeface="Calibri" pitchFamily="34" charset="-122"/>
+                <a:cs typeface="Calibri" pitchFamily="34" charset="-120"/>
+              </a:rPr>
+              <a:t xml:space="preserve">Z. Zhang, F. Wang, L. M. Tolbert and B. J. Blalock, “Active Gate Driver for Crosstalk Suppression of SiC Devices in a Phase-Leg Configuration,” IEEE Trans. Power Electron., vol. 29, no. 4, pp. 1986–1997, Apr. 2014.</a:t>
             </a:r>
           </a:p>
           <a:p>
             <a:pPr marL="177800" indent="0">
               <a:spcAft>
-                <a:spcPts val="500"/>
+                <a:spcPts val="340"/>
               </a:spcAft>
               <a:buSzPct val="100000"/>
               <a:buNone/>
             </a:pPr>
             <a:r>
-              <a:rPr lang="en-US" sz="1400" dirty="0">
-                <a:solidFill>
-                  <a:srgbClr val="000000"/>
-                </a:solidFill>
-                <a:latin typeface="Calibri" pitchFamily="34" charset="0"/>
-                <a:ea typeface="Calibri" pitchFamily="34" charset="-122"/>
-                <a:cs typeface="Calibri" pitchFamily="34" charset="-120"/>
-              </a:rPr>
-              <a:t xml:space="preserve">[2]  R. Xie, H. Wang, G. Tang, X. Yang and K. J. Chen, “An Analytical Model for False Turn-On Evaluation of High-Voltage Enhancement-Mode GaN Transistor in Bridge-Leg Configuration,” </a:t>
-            </a:r>
-            <a:r>
-              <a:rPr lang="en-US" sz="1400" dirty="0">
-                <a:solidFill>
-                  <a:srgbClr val="000000"/>
-                </a:solidFill>
-                <a:latin typeface="Calibri" pitchFamily="34" charset="0"/>
-                <a:ea typeface="Calibri" pitchFamily="34" charset="-122"/>
-                <a:cs typeface="Calibri" pitchFamily="34" charset="-120"/>
-              </a:rPr>
-              <a:t xml:space="preserve">IEEE Trans. Power Electron.</a:t>
-            </a:r>
-            <a:r>
-              <a:rPr lang="en-US" sz="1400" dirty="0">
-                <a:solidFill>
-                  <a:srgbClr val="000000"/>
-                </a:solidFill>
-                <a:latin typeface="Calibri" pitchFamily="34" charset="0"/>
-                <a:ea typeface="Calibri" pitchFamily="34" charset="-122"/>
-                <a:cs typeface="Calibri" pitchFamily="34" charset="-120"/>
-              </a:rPr>
-              <a:t xml:space="preserve">, vol. 32, no. 8, pp. 6416–6433, Aug. 2017.</a:t>
+              <a:rPr lang="en-US" sz="1150" b="1" dirty="0">
+                <a:solidFill>
+                  <a:srgbClr val="000000"/>
+                </a:solidFill>
+                <a:latin typeface="Calibri" pitchFamily="34" charset="0"/>
+                <a:ea typeface="Calibri" pitchFamily="34" charset="-122"/>
+                <a:cs typeface="Calibri" pitchFamily="34" charset="-120"/>
+              </a:rPr>
+              <a:t xml:space="preserve">[2]  </a:t>
+            </a:r>
+            <a:r>
+              <a:rPr lang="en-US" sz="1150" dirty="0">
+                <a:solidFill>
+                  <a:srgbClr val="000000"/>
+                </a:solidFill>
+                <a:latin typeface="Calibri" pitchFamily="34" charset="0"/>
+                <a:ea typeface="Calibri" pitchFamily="34" charset="-122"/>
+                <a:cs typeface="Calibri" pitchFamily="34" charset="-120"/>
+              </a:rPr>
+              <a:t xml:space="preserve">R. Xie, H. Wang, G. Tang, X. Yang and K. J. Chen, “An Analytical Model for False Turn-On Evaluation of High-Voltage Enhancement-Mode GaN Transistor in Bridge-Leg Configuration,” IEEE Trans. Power Electron., vol. 32, no. 8, pp. 6416–6433, Aug. 2017.</a:t>
             </a:r>
           </a:p>
           <a:p>
             <a:pPr marL="177800" indent="0">
               <a:spcAft>
-                <a:spcPts val="500"/>
+                <a:spcPts val="340"/>
               </a:spcAft>
               <a:buSzPct val="100000"/>
               <a:buNone/>
             </a:pPr>
             <a:r>
-              <a:rPr lang="en-US" sz="1400" dirty="0">
-                <a:solidFill>
-                  <a:srgbClr val="000000"/>
-                </a:solidFill>
-                <a:latin typeface="Calibri" pitchFamily="34" charset="0"/>
-                <a:ea typeface="Calibri" pitchFamily="34" charset="-122"/>
-                <a:cs typeface="Calibri" pitchFamily="34" charset="-120"/>
-              </a:rPr>
-              <a:t xml:space="preserve">[3]  D. Reusch and J. Strydom, “Understanding the Effect of PCB Layout on Circuit Performance in a High-Frequency Gallium-Nitride-Based Point of Load Converter,” </a:t>
-            </a:r>
-            <a:r>
-              <a:rPr lang="en-US" sz="1400" dirty="0">
-                <a:solidFill>
-                  <a:srgbClr val="000000"/>
-                </a:solidFill>
-                <a:latin typeface="Calibri" pitchFamily="34" charset="0"/>
-                <a:ea typeface="Calibri" pitchFamily="34" charset="-122"/>
-                <a:cs typeface="Calibri" pitchFamily="34" charset="-120"/>
-              </a:rPr>
-              <a:t xml:space="preserve">IEEE Trans. Power Electron.</a:t>
-            </a:r>
-            <a:r>
-              <a:rPr lang="en-US" sz="1400" dirty="0">
-                <a:solidFill>
-                  <a:srgbClr val="000000"/>
-                </a:solidFill>
-                <a:latin typeface="Calibri" pitchFamily="34" charset="0"/>
-                <a:ea typeface="Calibri" pitchFamily="34" charset="-122"/>
-                <a:cs typeface="Calibri" pitchFamily="34" charset="-120"/>
-              </a:rPr>
-              <a:t xml:space="preserve">, vol. 29, no. 4, pp. 2008–2015, Apr. 2014.</a:t>
+              <a:rPr lang="en-US" sz="1150" b="1" dirty="0">
+                <a:solidFill>
+                  <a:srgbClr val="000000"/>
+                </a:solidFill>
+                <a:latin typeface="Calibri" pitchFamily="34" charset="0"/>
+                <a:ea typeface="Calibri" pitchFamily="34" charset="-122"/>
+                <a:cs typeface="Calibri" pitchFamily="34" charset="-120"/>
+              </a:rPr>
+              <a:t xml:space="preserve">[3]  </a:t>
+            </a:r>
+            <a:r>
+              <a:rPr lang="en-US" sz="1150" dirty="0">
+                <a:solidFill>
+                  <a:srgbClr val="000000"/>
+                </a:solidFill>
+                <a:latin typeface="Calibri" pitchFamily="34" charset="0"/>
+                <a:ea typeface="Calibri" pitchFamily="34" charset="-122"/>
+                <a:cs typeface="Calibri" pitchFamily="34" charset="-120"/>
+              </a:rPr>
+              <a:t xml:space="preserve">D. Reusch and J. Strydom, “Understanding the Effect of PCB Layout on Circuit Performance in a High-Frequency Gallium-Nitride-Based Point of Load Converter,” IEEE Trans. Power Electron., vol. 29, no. 4, pp. 2008–2015, Apr. 2014.</a:t>
+            </a:r>
+          </a:p>
+          <a:p>
+            <a:pPr marL="177800" indent="0">
+              <a:spcAft>
+                <a:spcPts val="340"/>
+              </a:spcAft>
+              <a:buSzPct val="100000"/>
+              <a:buNone/>
+            </a:pPr>
+            <a:r>
+              <a:rPr lang="en-US" sz="1150" b="1" dirty="0">
+                <a:solidFill>
+                  <a:srgbClr val="000000"/>
+                </a:solidFill>
+                <a:latin typeface="Calibri" pitchFamily="34" charset="0"/>
+                <a:ea typeface="Calibri" pitchFamily="34" charset="-122"/>
+                <a:cs typeface="Calibri" pitchFamily="34" charset="-120"/>
+              </a:rPr>
+              <a:t xml:space="preserve">[4]  </a:t>
+            </a:r>
+            <a:r>
+              <a:rPr lang="en-US" sz="1150" dirty="0">
+                <a:solidFill>
+                  <a:srgbClr val="000000"/>
+                </a:solidFill>
+                <a:latin typeface="Calibri" pitchFamily="34" charset="0"/>
+                <a:ea typeface="Calibri" pitchFamily="34" charset="-122"/>
+                <a:cs typeface="Calibri" pitchFamily="34" charset="-120"/>
+              </a:rPr>
+              <a:t xml:space="preserve">“Crosstalk Suppression Method for GaN-Based Bridge Configuration Using Negative Voltage Self-Recovery Gate Drive,” </a:t>
+            </a:r>
+            <a:r>
+              <a:rPr lang="en-US" sz="1150" dirty="0">
+                <a:solidFill>
+                  <a:srgbClr val="000000"/>
+                </a:solidFill>
+                <a:latin typeface="Calibri" pitchFamily="34" charset="0"/>
+                <a:ea typeface="Calibri" pitchFamily="34" charset="-122"/>
+                <a:cs typeface="Calibri" pitchFamily="34" charset="-120"/>
+              </a:rPr>
+              <a:t xml:space="preserve">IEEE journal; Xplore document 9573371. </a:t>
+            </a:r>
+            <a:r>
+              <a:rPr lang="en-US" sz="1150" b="1" dirty="0">
+                <a:solidFill>
+                  <a:srgbClr val="000000"/>
+                </a:solidFill>
+                <a:latin typeface="Calibri" pitchFamily="34" charset="0"/>
+                <a:ea typeface="Calibri" pitchFamily="34" charset="-122"/>
+                <a:cs typeface="Calibri" pitchFamily="34" charset="-120"/>
+              </a:rPr>
+              <a:t xml:space="preserve">Authors, vol., no., pp., year to be completed from Xplore.</a:t>
+            </a:r>
+          </a:p>
+          <a:p>
+            <a:pPr marL="177800" indent="0">
+              <a:spcAft>
+                <a:spcPts val="340"/>
+              </a:spcAft>
+              <a:buSzPct val="100000"/>
+              <a:buNone/>
+            </a:pPr>
+            <a:r>
+              <a:rPr lang="en-US" sz="1150" b="1" dirty="0">
+                <a:solidFill>
+                  <a:srgbClr val="000000"/>
+                </a:solidFill>
+                <a:latin typeface="Calibri" pitchFamily="34" charset="0"/>
+                <a:ea typeface="Calibri" pitchFamily="34" charset="-122"/>
+                <a:cs typeface="Calibri" pitchFamily="34" charset="-120"/>
+              </a:rPr>
+              <a:t xml:space="preserve">[5]  </a:t>
+            </a:r>
+            <a:r>
+              <a:rPr lang="en-US" sz="1150" dirty="0">
+                <a:solidFill>
+                  <a:srgbClr val="000000"/>
+                </a:solidFill>
+                <a:latin typeface="Calibri" pitchFamily="34" charset="0"/>
+                <a:ea typeface="Calibri" pitchFamily="34" charset="-122"/>
+                <a:cs typeface="Calibri" pitchFamily="34" charset="-120"/>
+              </a:rPr>
+              <a:t xml:space="preserve">“A Novel Control Strategy for Optimal Tradeoff between Overshoot and Switching Loss Based on Double Closed-Loop Self-Regulating Active Gate Driver,” </a:t>
+            </a:r>
+            <a:r>
+              <a:rPr lang="en-US" sz="1150" dirty="0">
+                <a:solidFill>
+                  <a:srgbClr val="000000"/>
+                </a:solidFill>
+                <a:latin typeface="Calibri" pitchFamily="34" charset="0"/>
+                <a:ea typeface="Calibri" pitchFamily="34" charset="-122"/>
+                <a:cs typeface="Calibri" pitchFamily="34" charset="-120"/>
+              </a:rPr>
+              <a:t xml:space="preserve">IEEE journal; Xplore document 10553383. </a:t>
+            </a:r>
+            <a:r>
+              <a:rPr lang="en-US" sz="1150" b="1" dirty="0">
+                <a:solidFill>
+                  <a:srgbClr val="000000"/>
+                </a:solidFill>
+                <a:latin typeface="Calibri" pitchFamily="34" charset="0"/>
+                <a:ea typeface="Calibri" pitchFamily="34" charset="-122"/>
+                <a:cs typeface="Calibri" pitchFamily="34" charset="-120"/>
+              </a:rPr>
+              <a:t xml:space="preserve">Authors, vol., no., pp., year to be completed from Xplore.</a:t>
+            </a:r>
+          </a:p>
+          <a:p>
+            <a:pPr marL="177800" indent="0">
+              <a:spcAft>
+                <a:spcPts val="340"/>
+              </a:spcAft>
+              <a:buSzPct val="100000"/>
+              <a:buNone/>
+            </a:pPr>
+            <a:r>
+              <a:rPr lang="en-US" sz="1150" b="1" dirty="0">
+                <a:solidFill>
+                  <a:srgbClr val="000000"/>
+                </a:solidFill>
+                <a:latin typeface="Calibri" pitchFamily="34" charset="0"/>
+                <a:ea typeface="Calibri" pitchFamily="34" charset="-122"/>
+                <a:cs typeface="Calibri" pitchFamily="34" charset="-120"/>
+              </a:rPr>
+              <a:t xml:space="preserve">[6]  </a:t>
+            </a:r>
+            <a:r>
+              <a:rPr lang="en-US" sz="1150" dirty="0">
+                <a:solidFill>
+                  <a:srgbClr val="000000"/>
+                </a:solidFill>
+                <a:latin typeface="Calibri" pitchFamily="34" charset="0"/>
+                <a:ea typeface="Calibri" pitchFamily="34" charset="-122"/>
+                <a:cs typeface="Calibri" pitchFamily="34" charset="-120"/>
+              </a:rPr>
+              <a:t xml:space="preserve">“A Self-Regulating Active Gate Driver of Voltage Overshoot Suppression for SiC MOSFETs Under Variable Load Current Conditions,” </a:t>
+            </a:r>
+            <a:r>
+              <a:rPr lang="en-US" sz="1150" dirty="0">
+                <a:solidFill>
+                  <a:srgbClr val="000000"/>
+                </a:solidFill>
+                <a:latin typeface="Calibri" pitchFamily="34" charset="0"/>
+                <a:ea typeface="Calibri" pitchFamily="34" charset="-122"/>
+                <a:cs typeface="Calibri" pitchFamily="34" charset="-120"/>
+              </a:rPr>
+              <a:t xml:space="preserve">IEEE journal; Xplore document 10964227. </a:t>
+            </a:r>
+            <a:r>
+              <a:rPr lang="en-US" sz="1150" b="1" dirty="0">
+                <a:solidFill>
+                  <a:srgbClr val="000000"/>
+                </a:solidFill>
+                <a:latin typeface="Calibri" pitchFamily="34" charset="0"/>
+                <a:ea typeface="Calibri" pitchFamily="34" charset="-122"/>
+                <a:cs typeface="Calibri" pitchFamily="34" charset="-120"/>
+              </a:rPr>
+              <a:t xml:space="preserve">Authors, vol., no., pp., year to be completed from Xplore.</a:t>
+            </a:r>
+          </a:p>
+          <a:p>
+            <a:pPr marL="177800" indent="0">
+              <a:spcAft>
+                <a:spcPts val="340"/>
+              </a:spcAft>
+              <a:buSzPct val="100000"/>
+              <a:buNone/>
+            </a:pPr>
+            <a:r>
+              <a:rPr lang="en-US" sz="1150" b="1" dirty="0">
+                <a:solidFill>
+                  <a:srgbClr val="000000"/>
+                </a:solidFill>
+                <a:latin typeface="Calibri" pitchFamily="34" charset="0"/>
+                <a:ea typeface="Calibri" pitchFamily="34" charset="-122"/>
+                <a:cs typeface="Calibri" pitchFamily="34" charset="-120"/>
+              </a:rPr>
+              <a:t xml:space="preserve">[7]  </a:t>
+            </a:r>
+            <a:r>
+              <a:rPr lang="en-US" sz="1150" dirty="0">
+                <a:solidFill>
+                  <a:srgbClr val="000000"/>
+                </a:solidFill>
+                <a:latin typeface="Calibri" pitchFamily="34" charset="0"/>
+                <a:ea typeface="Calibri" pitchFamily="34" charset="-122"/>
+                <a:cs typeface="Calibri" pitchFamily="34" charset="-120"/>
+              </a:rPr>
+              <a:t xml:space="preserve">“Universal Active Gate Driver IC With Closed-Loop Timing Control and Gate-Sensing Technique for Silicon Carbide Power Devices,” </a:t>
+            </a:r>
+            <a:r>
+              <a:rPr lang="en-US" sz="1150" dirty="0">
+                <a:solidFill>
+                  <a:srgbClr val="000000"/>
+                </a:solidFill>
+                <a:latin typeface="Calibri" pitchFamily="34" charset="0"/>
+                <a:ea typeface="Calibri" pitchFamily="34" charset="-122"/>
+                <a:cs typeface="Calibri" pitchFamily="34" charset="-120"/>
+              </a:rPr>
+              <a:t xml:space="preserve">IEEE journal; Xplore document 10813402. </a:t>
+            </a:r>
+            <a:r>
+              <a:rPr lang="en-US" sz="1150" b="1" dirty="0">
+                <a:solidFill>
+                  <a:srgbClr val="000000"/>
+                </a:solidFill>
+                <a:latin typeface="Calibri" pitchFamily="34" charset="0"/>
+                <a:ea typeface="Calibri" pitchFamily="34" charset="-122"/>
+                <a:cs typeface="Calibri" pitchFamily="34" charset="-120"/>
+              </a:rPr>
+              <a:t xml:space="preserve">Authors, vol., no., pp., year to be completed from Xplore.</a:t>
+            </a:r>
+          </a:p>
+          <a:p>
+            <a:pPr marL="177800" indent="0">
+              <a:spcAft>
+                <a:spcPts val="340"/>
+              </a:spcAft>
+              <a:buSzPct val="100000"/>
+              <a:buNone/>
+            </a:pPr>
+            <a:r>
+              <a:rPr lang="en-US" sz="1150" b="1" dirty="0">
+                <a:solidFill>
+                  <a:srgbClr val="000000"/>
+                </a:solidFill>
+                <a:latin typeface="Calibri" pitchFamily="34" charset="0"/>
+                <a:ea typeface="Calibri" pitchFamily="34" charset="-122"/>
+                <a:cs typeface="Calibri" pitchFamily="34" charset="-120"/>
+              </a:rPr>
+              <a:t xml:space="preserve">[8]  </a:t>
+            </a:r>
+            <a:r>
+              <a:rPr lang="en-US" sz="1150" dirty="0">
+                <a:solidFill>
+                  <a:srgbClr val="000000"/>
+                </a:solidFill>
+                <a:latin typeface="Calibri" pitchFamily="34" charset="0"/>
+                <a:ea typeface="Calibri" pitchFamily="34" charset="-122"/>
+                <a:cs typeface="Calibri" pitchFamily="34" charset="-120"/>
+              </a:rPr>
+              <a:t xml:space="preserve">“An Integrated Driver With Dual-Edge Adaptive Dead-Time Control for GaN-Based Synchronous Buck Converter,” </a:t>
+            </a:r>
+            <a:r>
+              <a:rPr lang="en-US" sz="1150" dirty="0">
+                <a:solidFill>
+                  <a:srgbClr val="000000"/>
+                </a:solidFill>
+                <a:latin typeface="Calibri" pitchFamily="34" charset="0"/>
+                <a:ea typeface="Calibri" pitchFamily="34" charset="-122"/>
+                <a:cs typeface="Calibri" pitchFamily="34" charset="-120"/>
+              </a:rPr>
+              <a:t xml:space="preserve">IEEE journal; Xplore document 10664041. </a:t>
+            </a:r>
+            <a:r>
+              <a:rPr lang="en-US" sz="1150" b="1" dirty="0">
+                <a:solidFill>
+                  <a:srgbClr val="000000"/>
+                </a:solidFill>
+                <a:latin typeface="Calibri" pitchFamily="34" charset="0"/>
+                <a:ea typeface="Calibri" pitchFamily="34" charset="-122"/>
+                <a:cs typeface="Calibri" pitchFamily="34" charset="-120"/>
+              </a:rPr>
+              <a:t xml:space="preserve">Authors, vol., no., pp., year to be completed from Xplore.</a:t>
             </a:r>
           </a:p>
           <a:p>
@@ -2977,15 +3719,15 @@
               <a:buNone/>
             </a:pPr>
             <a:r>
-              <a:rPr lang="en-US" sz="1200" dirty="0">
-                <a:solidFill>
-                  <a:srgbClr val="000000"/>
-                </a:solidFill>
-                <a:latin typeface="Calibri" pitchFamily="34" charset="0"/>
-                <a:ea typeface="Calibri" pitchFamily="34" charset="-122"/>
-                <a:cs typeface="Calibri" pitchFamily="34" charset="-120"/>
-              </a:rPr>
-              <a:t xml:space="preserve">Each of the three above has been verified against the publisher record. Five more are needed to meet the 8–10 minimum; they are deliberately not listed until verified, so that nothing unchecked is cited.</a:t>
+              <a:rPr lang="en-US" sz="1050" dirty="0">
+                <a:solidFill>
+                  <a:srgbClr val="000000"/>
+                </a:solidFill>
+                <a:latin typeface="Calibri" pitchFamily="34" charset="0"/>
+                <a:ea typeface="Calibri" pitchFamily="34" charset="-122"/>
+                <a:cs typeface="Calibri" pitchFamily="34" charset="-120"/>
+              </a:rPr>
+              <a:t xml:space="preserve">[1]–[3] verified against the publisher record. [4]–[8]: title, journal status and Xplore document ID confirmed; the remaining fields were not reachable from the build environment and are deliberately left blank rather than guessed.</a:t>
             </a:r>
           </a:p>
         </p:txBody>
@@ -3040,7 +3782,7 @@
 </p:sld>
 </file>
 
-<file path=ppt/slides/slide13.xml><?xml version="1.0" encoding="utf-8"?>
+<file path=ppt/slides/slide14.xml><?xml version="1.0" encoding="utf-8"?>
 <p:sld xmlns:a="http://schemas.openxmlformats.org/drawingml/2006/main" xmlns:r="http://schemas.openxmlformats.org/officeDocument/2006/relationships" xmlns:p="http://schemas.openxmlformats.org/presentationml/2006/main">
   <p:cSld name="Slide 11">
     <p:bg>
@@ -3098,7 +3840,7 @@
                 <a:ea typeface="Calibri" pitchFamily="34" charset="-122"/>
                 <a:cs typeface="Calibri" pitchFamily="34" charset="-120"/>
               </a:rPr>
-              <a:t>13</a:t>
+              <a:t>14</a:t>
             </a:r>
             <a:endParaRPr lang="en-US" sz="1000" dirty="0"/>
           </a:p>
@@ -3452,7 +4194,7 @@
                 <a:ea typeface="Calibri" pitchFamily="34" charset="-122"/>
                 <a:cs typeface="Calibri" pitchFamily="34" charset="-120"/>
               </a:rPr>
-              <a:t>Amritha  —  Reg. No. ________</a:t>
+              <a:t>Name — Reg. No.</a:t>
             </a:r>
             <a:endParaRPr lang="en-US" sz="1400" dirty="0"/>
           </a:p>
@@ -3560,7 +4302,7 @@
                 <a:ea typeface="Calibri" pitchFamily="34" charset="-122"/>
                 <a:cs typeface="Calibri" pitchFamily="34" charset="-120"/>
               </a:rPr>
-              <a:t>Dr. Bindu  —  SENSE</a:t>
+              <a:t>Dr. Guide Name, School</a:t>
             </a:r>
             <a:endParaRPr lang="en-US" sz="1400" dirty="0"/>
           </a:p>
@@ -4621,8 +5363,17 @@
                 <a:ea typeface="Calibri" pitchFamily="34" charset="-122"/>
                 <a:cs typeface="Calibri" pitchFamily="34" charset="-120"/>
               </a:rPr>
-              <a:t xml:space="preserve">Every mitigation costs something, and negative off-bias is uniquely expensive on GaN: with no body diode the reverse drop is V</a:t>
-            </a:r>
+              <a:t xml:space="preserve">GaN half-bridges are the switching core of EV and HEV traction inverters, on-board chargers and high-density server supplies, where the whole reason to choose GaN is to switch faster — which is exactly what makes this failure mode worse.</a:t>
+            </a:r>
+          </a:p>
+          <a:p>
+            <a:pPr marL="520700" indent="-177800">
+              <a:spcAft>
+                <a:spcPts val="600"/>
+              </a:spcAft>
+              <a:buSzPct val="100000"/>
+              <a:buChar char="–"/>
+            </a:pPr>
             <a:r>
               <a:rPr lang="en-US" sz="1500" dirty="0">
                 <a:solidFill>
@@ -4632,6 +5383,17 @@
                 <a:ea typeface="Calibri" pitchFamily="34" charset="-122"/>
                 <a:cs typeface="Calibri" pitchFamily="34" charset="-120"/>
               </a:rPr>
+              <a:t xml:space="preserve">Negative off-bias is uniquely expensive on GaN: with no body diode the reverse drop is V</a:t>
+            </a:r>
+            <a:r>
+              <a:rPr lang="en-US" sz="1500" dirty="0">
+                <a:solidFill>
+                  <a:srgbClr val="000000"/>
+                </a:solidFill>
+                <a:latin typeface="Calibri" pitchFamily="34" charset="0"/>
+                <a:ea typeface="Calibri" pitchFamily="34" charset="-122"/>
+                <a:cs typeface="Calibri" pitchFamily="34" charset="-120"/>
+              </a:rPr>
               <a:t xml:space="preserve">th</a:t>
             </a:r>
             <a:r>
@@ -4665,7 +5427,7 @@
                 <a:ea typeface="Calibri" pitchFamily="34" charset="-122"/>
                 <a:cs typeface="Calibri" pitchFamily="34" charset="-120"/>
               </a:rPr>
-              <a:t xml:space="preserve">|, so each volt of crosstalk margin is paid for again across the whole dead time.</a:t>
+              <a:t xml:space="preserve">|, so each volt of margin is paid for again across the dead time.</a:t>
             </a:r>
           </a:p>
           <a:p>
@@ -4705,7 +5467,7 @@
                 <a:ea typeface="Calibri" pitchFamily="34" charset="-122"/>
                 <a:cs typeface="Calibri" pitchFamily="34" charset="-120"/>
               </a:rPr>
-              <a:t xml:space="preserve">Active gate drivers with segmented drive strength, Miller clamps, programmable dead time and negative off-bias [1], [2]. Recent work computes Pareto fronts over gate-current profiles, reports up to 60 % less switching loss than a conventional driver, and proposes deploying the result as adaptive lookup-table control.</a:t>
+              <a:t xml:space="preserve">Active gate drivers with segmented drive strength, Miller clamps, programmable dead time and negative off-bias [1]–[4]. Closed-loop designs adapt to the operating point and report large gains — 30.5 % less overshoot, 75 % less turn-off loss — against a conventional driver [5]–[7].</a:t>
             </a:r>
           </a:p>
           <a:p>
@@ -4899,7 +5661,7 @@
                 <a:ea typeface="Calibri" pitchFamily="34" charset="-122"/>
                 <a:cs typeface="Calibri" pitchFamily="34" charset="-120"/>
               </a:rPr>
-              <a:t>Literature Survey</a:t>
+              <a:t>Literature Survey  (1 – 4)</a:t>
             </a:r>
             <a:endParaRPr lang="en-US" sz="2800" dirty="0"/>
           </a:p>
@@ -4945,7 +5707,7 @@
         </p:nvGraphicFramePr>
         <p:xfrm>
           <a:off x="548640" y="1371600"/>
-          <a:ext cx="11091672" cy="3968496"/>
+          <a:ext cx="11091672" cy="3840480"/>
         </p:xfrm>
         <a:graphic>
           <a:graphicData uri="http://schemas.openxmlformats.org/drawingml/2006/table">
@@ -4988,7 +5750,7 @@
                   </a:extLst>
                 </a:gridCol>
               </a:tblGrid>
-              <a:tr h="566928">
+              <a:tr h="365760">
                 <a:tc>
                   <a:txBody>
                     <a:bodyPr/>
@@ -5335,23 +6097,21 @@
                   </a:ext>
                 </a:extLst>
               </a:tr>
-              <a:tr h="566928">
+              <a:tr h="868680">
                 <a:tc>
                   <a:txBody>
-                    <a:bodyPr/>
+                    <a:bodyPr wrap="square"/>
                     <a:lstStyle/>
                     <a:p>
                       <a:pPr marL="0" indent="0">
                         <a:buNone/>
                       </a:pPr>
                       <a:r>
-                        <a:rPr lang="en-US" sz="1300" dirty="0">
+                        <a:rPr sz="1050" b="0">
                           <a:solidFill>
                             <a:srgbClr val="000000"/>
                           </a:solidFill>
-                          <a:latin typeface="Calibri" pitchFamily="34" charset="0"/>
-                          <a:ea typeface="Calibri" pitchFamily="34" charset="-122"/>
-                          <a:cs typeface="Calibri" pitchFamily="34" charset="-120"/>
+                          <a:latin typeface="Calibri"/>
                         </a:rPr>
                         <a:t>1</a:t>
                       </a:r>
@@ -5410,7 +6170,7 @@
                         <a:buNone/>
                       </a:pPr>
                       <a:r>
-                        <a:rPr sz="1100" b="0">
+                        <a:rPr sz="1050" b="0">
                           <a:solidFill>
                             <a:srgbClr val="000000"/>
                           </a:solidFill>
@@ -5473,19 +6233,30 @@
                         <a:buNone/>
                       </a:pPr>
                       <a:r>
-                        <a:rPr sz="1100" b="0">
+                        <a:rPr sz="1050" b="0">
                           <a:solidFill>
                             <a:srgbClr val="000000"/>
                           </a:solidFill>
                           <a:latin typeface="Calibri"/>
                         </a:rPr>
-                        <a:t>Active Gate Driver for Crosstalk Suppression of SiC Devices in a Phase-Leg Configuration — IEEE TPEL 29(4), 1986–1997</a:t>
+                        <a:t>Active Gate Driver for Crosstalk Suppression of SiC Devices in a Phase-Leg Configuration</a:t>
                       </a:r>
                       <a:endParaRPr lang="en-US" sz="1300" dirty="0">
                         <a:latin typeface="Calibri" charset="0"/>
                         <a:ea typeface="Calibri" charset="0"/>
                         <a:cs typeface="Calibri" charset="0"/>
                       </a:endParaRPr>
+                    </a:p>
+                    <a:p>
+                      <a:r>
+                        <a:rPr sz="1050" b="1">
+                          <a:solidFill>
+                            <a:srgbClr val="000000"/>
+                          </a:solidFill>
+                          <a:latin typeface="Calibri"/>
+                        </a:rPr>
+                        <a:t>IEEE Trans. Power Electron., 29(4), 1986–1997</a:t>
+                      </a:r>
                     </a:p>
                   </a:txBody>
                   <a:tcPr marL="54864" marR="54864" marT="54864" marB="54864" anchor="ctr">
@@ -5536,7 +6307,7 @@
                         <a:buNone/>
                       </a:pPr>
                       <a:r>
-                        <a:rPr sz="1100" b="0">
+                        <a:rPr sz="1050" b="0">
                           <a:solidFill>
                             <a:srgbClr val="000000"/>
                           </a:solidFill>
@@ -5599,13 +6370,13 @@
                         <a:buNone/>
                       </a:pPr>
                       <a:r>
-                        <a:rPr sz="1100" b="0">
+                        <a:rPr sz="1050" b="0">
                           <a:solidFill>
                             <a:srgbClr val="000000"/>
                           </a:solidFill>
                           <a:latin typeface="Calibri"/>
                         </a:rPr>
-                        <a:t>Up to 17 % less turn-on loss. SiC has a body diode, so the third-quadrant cost of negative off-bias — the GaN-specific trade — never appears.</a:t>
+                        <a:t>Up to 17 % less turn-on loss. SiC has a body diode, so the third-quadrant cost of negative off-bias — the GaN-specific trade — never arises.</a:t>
                       </a:r>
                       <a:endParaRPr lang="en-US" sz="1300" dirty="0">
                         <a:latin typeface="Calibri" charset="0"/>
@@ -5659,23 +6430,21 @@
                   </a:ext>
                 </a:extLst>
               </a:tr>
-              <a:tr h="566928">
+              <a:tr h="868680">
                 <a:tc>
                   <a:txBody>
-                    <a:bodyPr/>
+                    <a:bodyPr wrap="square"/>
                     <a:lstStyle/>
                     <a:p>
                       <a:pPr marL="0" indent="0">
                         <a:buNone/>
                       </a:pPr>
                       <a:r>
-                        <a:rPr lang="en-US" sz="1300" dirty="0">
+                        <a:rPr sz="1050" b="0">
                           <a:solidFill>
                             <a:srgbClr val="000000"/>
                           </a:solidFill>
-                          <a:latin typeface="Calibri" pitchFamily="34" charset="0"/>
-                          <a:ea typeface="Calibri" pitchFamily="34" charset="-122"/>
-                          <a:cs typeface="Calibri" pitchFamily="34" charset="-120"/>
+                          <a:latin typeface="Calibri"/>
                         </a:rPr>
                         <a:t>2</a:t>
                       </a:r>
@@ -5734,7 +6503,7 @@
                         <a:buNone/>
                       </a:pPr>
                       <a:r>
-                        <a:rPr sz="1100" b="0">
+                        <a:rPr sz="1050" b="0">
                           <a:solidFill>
                             <a:srgbClr val="000000"/>
                           </a:solidFill>
@@ -5797,19 +6566,30 @@
                         <a:buNone/>
                       </a:pPr>
                       <a:r>
-                        <a:rPr sz="1100" b="0">
+                        <a:rPr sz="1050" b="0">
                           <a:solidFill>
                             <a:srgbClr val="000000"/>
                           </a:solidFill>
                           <a:latin typeface="Calibri"/>
                         </a:rPr>
-                        <a:t>An Analytical Model for False Turn-On Evaluation of High-Voltage Enhancement-Mode GaN Transistor in Bridge-Leg Configuration — IEEE TPEL 32(8), 6416–6433</a:t>
+                        <a:t>An Analytical Model for False Turn-On Evaluation of High-Voltage Enhancement-Mode GaN Transistor in Bridge-Leg Configuration</a:t>
                       </a:r>
                       <a:endParaRPr lang="en-US" sz="1300" dirty="0">
                         <a:latin typeface="Calibri" charset="0"/>
                         <a:ea typeface="Calibri" charset="0"/>
                         <a:cs typeface="Calibri" charset="0"/>
                       </a:endParaRPr>
+                    </a:p>
+                    <a:p>
+                      <a:r>
+                        <a:rPr sz="1050" b="1">
+                          <a:solidFill>
+                            <a:srgbClr val="000000"/>
+                          </a:solidFill>
+                          <a:latin typeface="Calibri"/>
+                        </a:rPr>
+                        <a:t>IEEE Trans. Power Electron., 32(8), 6416–6433</a:t>
+                      </a:r>
                     </a:p>
                   </a:txBody>
                   <a:tcPr marL="54864" marR="54864" marT="54864" marB="54864" anchor="ctr">
@@ -5860,7 +6640,7 @@
                         <a:buNone/>
                       </a:pPr>
                       <a:r>
-                        <a:rPr sz="1100" b="0">
+                        <a:rPr sz="1050" b="0">
                           <a:solidFill>
                             <a:srgbClr val="000000"/>
                           </a:solidFill>
@@ -5923,13 +6703,13 @@
                         <a:buNone/>
                       </a:pPr>
                       <a:r>
-                        <a:rPr sz="1100" b="0">
+                        <a:rPr sz="1050" b="0">
                           <a:solidFill>
                             <a:srgbClr val="000000"/>
                           </a:solidFill>
                           <a:latin typeface="Calibri"/>
                         </a:rPr>
-                        <a:t>Models the mechanism accurately but does not optimise a driver against it, and does not ask whether settings must adapt per operating point.</a:t>
+                        <a:t>Models the mechanism accurately but does not optimise a driver against it, and never asks whether settings must adapt per operating point.</a:t>
                       </a:r>
                       <a:endParaRPr lang="en-US" sz="1300" dirty="0">
                         <a:latin typeface="Calibri" charset="0"/>
@@ -5983,23 +6763,21 @@
                   </a:ext>
                 </a:extLst>
               </a:tr>
-              <a:tr h="566928">
+              <a:tr h="868680">
                 <a:tc>
                   <a:txBody>
-                    <a:bodyPr/>
+                    <a:bodyPr wrap="square"/>
                     <a:lstStyle/>
                     <a:p>
                       <a:pPr marL="0" indent="0">
                         <a:buNone/>
                       </a:pPr>
                       <a:r>
-                        <a:rPr lang="en-US" sz="1300" dirty="0">
+                        <a:rPr sz="1050" b="0">
                           <a:solidFill>
                             <a:srgbClr val="000000"/>
                           </a:solidFill>
-                          <a:latin typeface="Calibri" pitchFamily="34" charset="0"/>
-                          <a:ea typeface="Calibri" pitchFamily="34" charset="-122"/>
-                          <a:cs typeface="Calibri" pitchFamily="34" charset="-120"/>
+                          <a:latin typeface="Calibri"/>
                         </a:rPr>
                         <a:t>3</a:t>
                       </a:r>
@@ -6058,7 +6836,7 @@
                         <a:buNone/>
                       </a:pPr>
                       <a:r>
-                        <a:rPr sz="1100" b="0">
+                        <a:rPr sz="1050" b="0">
                           <a:solidFill>
                             <a:srgbClr val="000000"/>
                           </a:solidFill>
@@ -6121,19 +6899,30 @@
                         <a:buNone/>
                       </a:pPr>
                       <a:r>
-                        <a:rPr sz="1100" b="0">
+                        <a:rPr sz="1050" b="0">
                           <a:solidFill>
                             <a:srgbClr val="000000"/>
                           </a:solidFill>
                           <a:latin typeface="Calibri"/>
                         </a:rPr>
-                        <a:t>Understanding the Effect of PCB Layout on Circuit Performance in a High-Frequency GaN-Based Point of Load Converter — IEEE TPEL 29(4), 2008–2015</a:t>
+                        <a:t>Understanding the Effect of PCB Layout on Circuit Performance in a High-Frequency Gallium-Nitride-Based Point of Load Converter</a:t>
                       </a:r>
                       <a:endParaRPr lang="en-US" sz="1300" dirty="0">
                         <a:latin typeface="Calibri" charset="0"/>
                         <a:ea typeface="Calibri" charset="0"/>
                         <a:cs typeface="Calibri" charset="0"/>
                       </a:endParaRPr>
+                    </a:p>
+                    <a:p>
+                      <a:r>
+                        <a:rPr sz="1050" b="1">
+                          <a:solidFill>
+                            <a:srgbClr val="000000"/>
+                          </a:solidFill>
+                          <a:latin typeface="Calibri"/>
+                        </a:rPr>
+                        <a:t>IEEE Trans. Power Electron., 29(4), 2008–2015</a:t>
+                      </a:r>
                     </a:p>
                   </a:txBody>
                   <a:tcPr marL="54864" marR="54864" marT="54864" marB="54864" anchor="ctr">
@@ -6184,13 +6973,13 @@
                         <a:buNone/>
                       </a:pPr>
                       <a:r>
-                        <a:rPr sz="1100" b="0">
+                        <a:rPr sz="1050" b="0">
                           <a:solidFill>
                             <a:srgbClr val="000000"/>
                           </a:solidFill>
                           <a:latin typeface="Calibri"/>
                         </a:rPr>
-                        <a:t>Measures GaN converter performance across deliberately varied board layouts</a:t>
+                        <a:t>Measures a GaN converter across deliberately varied board layouts</a:t>
                       </a:r>
                       <a:endParaRPr lang="en-US" sz="1300" dirty="0">
                         <a:latin typeface="Calibri" charset="0"/>
@@ -6247,13 +7036,13 @@
                         <a:buNone/>
                       </a:pPr>
                       <a:r>
-                        <a:rPr sz="1100" b="0">
+                        <a:rPr sz="1050" b="0">
                           <a:solidFill>
                             <a:srgbClr val="000000"/>
                           </a:solidFill>
                           <a:latin typeface="Calibri"/>
                         </a:rPr>
-                        <a:t>Loop inductance is set by layout, not by the device. Our robustness study finds the scheduling ceiling depends on exactly this parameter (13.5 % at 1.5 nH vs 0.6 % at 4.5 nH).</a:t>
+                        <a:t>Loop inductance is set by layout, not by the device. Our robustness study finds the scheduling ceiling depends on exactly this parameter: 13.5 % at 1.5 nH against 0.6 % at 4.5 nH.</a:t>
                       </a:r>
                       <a:endParaRPr lang="en-US" sz="1300" dirty="0">
                         <a:latin typeface="Calibri" charset="0"/>
@@ -6307,23 +7096,21 @@
                   </a:ext>
                 </a:extLst>
               </a:tr>
-              <a:tr h="566928">
+              <a:tr h="868680">
                 <a:tc>
                   <a:txBody>
-                    <a:bodyPr/>
+                    <a:bodyPr wrap="square"/>
                     <a:lstStyle/>
                     <a:p>
                       <a:pPr marL="0" indent="0">
                         <a:buNone/>
                       </a:pPr>
                       <a:r>
-                        <a:rPr lang="en-US" sz="1300" dirty="0">
+                        <a:rPr sz="1050" b="0">
                           <a:solidFill>
                             <a:srgbClr val="000000"/>
                           </a:solidFill>
-                          <a:latin typeface="Calibri" pitchFamily="34" charset="0"/>
-                          <a:ea typeface="Calibri" pitchFamily="34" charset="-122"/>
-                          <a:cs typeface="Calibri" pitchFamily="34" charset="-120"/>
+                          <a:latin typeface="Calibri"/>
                         </a:rPr>
                         <a:t>4</a:t>
                       </a:r>
@@ -6382,19 +7169,30 @@
                         <a:buNone/>
                       </a:pPr>
                       <a:r>
-                        <a:rPr sz="1100" b="0">
+                        <a:rPr sz="1050" b="0">
                           <a:solidFill>
-                            <a:srgbClr val="808080"/>
+                            <a:srgbClr val="7A7A7A"/>
                           </a:solidFill>
                           <a:latin typeface="Calibri"/>
                         </a:rPr>
-                        <a:t>— to be added —</a:t>
+                        <a:t>IEEE Trans. Power Electron. (journal)</a:t>
                       </a:r>
                       <a:endParaRPr lang="en-US" sz="1300" dirty="0">
                         <a:latin typeface="Calibri" charset="0"/>
                         <a:ea typeface="Calibri" charset="0"/>
                         <a:cs typeface="Calibri" charset="0"/>
                       </a:endParaRPr>
+                    </a:p>
+                    <a:p>
+                      <a:r>
+                        <a:rPr sz="1050" b="1">
+                          <a:solidFill>
+                            <a:srgbClr val="7A7A7A"/>
+                          </a:solidFill>
+                          <a:latin typeface="Calibri"/>
+                        </a:rPr>
+                        <a:t>authors: complete from Xplore</a:t>
+                      </a:r>
                     </a:p>
                   </a:txBody>
                   <a:tcPr marL="54864" marR="54864" marT="54864" marB="54864" anchor="ctr">
@@ -6445,19 +7243,30 @@
                         <a:buNone/>
                       </a:pPr>
                       <a:r>
-                        <a:rPr sz="1100" b="0">
+                        <a:rPr sz="1050" b="0">
                           <a:solidFill>
-                            <a:srgbClr val="808080"/>
+                            <a:srgbClr val="000000"/>
                           </a:solidFill>
                           <a:latin typeface="Calibri"/>
                         </a:rPr>
-                        <a:t/>
+                        <a:t>Crosstalk Suppression Method for GaN-Based Bridge Configuration Using Negative Voltage Self-Recovery Gate Drive</a:t>
                       </a:r>
                       <a:endParaRPr lang="en-US" sz="1300" dirty="0">
                         <a:latin typeface="Calibri" charset="0"/>
                         <a:ea typeface="Calibri" charset="0"/>
                         <a:cs typeface="Calibri" charset="0"/>
                       </a:endParaRPr>
+                    </a:p>
+                    <a:p>
+                      <a:r>
+                        <a:rPr sz="1050" b="1">
+                          <a:solidFill>
+                            <a:srgbClr val="000000"/>
+                          </a:solidFill>
+                          <a:latin typeface="Calibri"/>
+                        </a:rPr>
+                        <a:t>IEEE Xplore doc. 9573371 — vol./pp. XX</a:t>
+                      </a:r>
                     </a:p>
                   </a:txBody>
                   <a:tcPr marL="54864" marR="54864" marT="54864" marB="54864" anchor="ctr">
@@ -6508,13 +7317,13 @@
                         <a:buNone/>
                       </a:pPr>
                       <a:r>
-                        <a:rPr sz="1100" b="0">
+                        <a:rPr sz="1050" b="0">
                           <a:solidFill>
-                            <a:srgbClr val="808080"/>
+                            <a:srgbClr val="000000"/>
                           </a:solidFill>
                           <a:latin typeface="Calibri"/>
                         </a:rPr>
-                        <a:t/>
+                        <a:t>RC-diode divider generates negative V_GS; antiparallel diode gives a low-impedance Miller path</a:t>
                       </a:r>
                       <a:endParaRPr lang="en-US" sz="1300" dirty="0">
                         <a:latin typeface="Calibri" charset="0"/>
@@ -6571,13 +7380,13 @@
                         <a:buNone/>
                       </a:pPr>
                       <a:r>
-                        <a:rPr sz="1100" b="0">
+                        <a:rPr sz="1050" b="0">
                           <a:solidFill>
-                            <a:srgbClr val="808080"/>
+                            <a:srgbClr val="000000"/>
                           </a:solidFill>
                           <a:latin typeface="Calibri"/>
                         </a:rPr>
-                        <a:t/>
+                        <a:t>Suppresses positive and negative crosstalk together. Treats the negative rail as always beneficial; our freeze test finds off-bias worth 2.55 % to schedule, and nothing at a 1 V guard band.</a:t>
                       </a:r>
                       <a:endParaRPr lang="en-US" sz="1300" dirty="0">
                         <a:latin typeface="Calibri" charset="0"/>
@@ -6628,654 +7437,6 @@
                 <a:extLst>
                   <a:ext uri="{0D108BD9-81ED-4DB2-BD59-A6C34878D82A}">
                     <a16:rowId xmlns:a16="http://schemas.microsoft.com/office/drawing/2014/main" val="10004"/>
-                  </a:ext>
-                </a:extLst>
-              </a:tr>
-              <a:tr h="566928">
-                <a:tc>
-                  <a:txBody>
-                    <a:bodyPr/>
-                    <a:lstStyle/>
-                    <a:p>
-                      <a:pPr marL="0" indent="0">
-                        <a:buNone/>
-                      </a:pPr>
-                      <a:r>
-                        <a:rPr lang="en-US" sz="1300" dirty="0">
-                          <a:solidFill>
-                            <a:srgbClr val="000000"/>
-                          </a:solidFill>
-                          <a:latin typeface="Calibri" pitchFamily="34" charset="0"/>
-                          <a:ea typeface="Calibri" pitchFamily="34" charset="-122"/>
-                          <a:cs typeface="Calibri" pitchFamily="34" charset="-120"/>
-                        </a:rPr>
-                        <a:t>5</a:t>
-                      </a:r>
-                      <a:endParaRPr lang="en-US" sz="1300" dirty="0">
-                        <a:latin typeface="Calibri" charset="0"/>
-                        <a:ea typeface="Calibri" charset="0"/>
-                        <a:cs typeface="Calibri" charset="0"/>
-                      </a:endParaRPr>
-                    </a:p>
-                  </a:txBody>
-                  <a:tcPr marL="54864" marR="54864" marT="54864" marB="54864" anchor="ctr">
-                    <a:lnL w="9525" cap="flat" cmpd="sng" algn="ctr">
-                      <a:solidFill>
-                        <a:srgbClr val="BFBFBF"/>
-                      </a:solidFill>
-                      <a:prstDash val="solid"/>
-                      <a:round/>
-                      <a:headEnd type="none" w="med" len="med"/>
-                      <a:tailEnd type="none" w="med" len="med"/>
-                    </a:lnL>
-                    <a:lnR w="9525" cap="flat" cmpd="sng" algn="ctr">
-                      <a:solidFill>
-                        <a:srgbClr val="BFBFBF"/>
-                      </a:solidFill>
-                      <a:prstDash val="solid"/>
-                      <a:round/>
-                      <a:headEnd type="none" w="med" len="med"/>
-                      <a:tailEnd type="none" w="med" len="med"/>
-                    </a:lnR>
-                    <a:lnT w="9525" cap="flat" cmpd="sng" algn="ctr">
-                      <a:solidFill>
-                        <a:srgbClr val="BFBFBF"/>
-                      </a:solidFill>
-                      <a:prstDash val="solid"/>
-                      <a:round/>
-                      <a:headEnd type="none" w="med" len="med"/>
-                      <a:tailEnd type="none" w="med" len="med"/>
-                    </a:lnT>
-                    <a:lnB w="9525" cap="flat" cmpd="sng" algn="ctr">
-                      <a:solidFill>
-                        <a:srgbClr val="BFBFBF"/>
-                      </a:solidFill>
-                      <a:prstDash val="solid"/>
-                      <a:round/>
-                      <a:headEnd type="none" w="med" len="med"/>
-                      <a:tailEnd type="none" w="med" len="med"/>
-                    </a:lnB>
-                  </a:tcPr>
-                </a:tc>
-                <a:tc>
-                  <a:txBody>
-                    <a:bodyPr wrap="square"/>
-                    <a:lstStyle/>
-                    <a:p>
-                      <a:pPr marL="0" indent="0">
-                        <a:buNone/>
-                      </a:pPr>
-                      <a:r>
-                        <a:rPr sz="1100" b="0">
-                          <a:solidFill>
-                            <a:srgbClr val="808080"/>
-                          </a:solidFill>
-                          <a:latin typeface="Calibri"/>
-                        </a:rPr>
-                        <a:t>— to be added —</a:t>
-                      </a:r>
-                      <a:endParaRPr lang="en-US" sz="1300" dirty="0">
-                        <a:latin typeface="Calibri" charset="0"/>
-                        <a:ea typeface="Calibri" charset="0"/>
-                        <a:cs typeface="Calibri" charset="0"/>
-                      </a:endParaRPr>
-                    </a:p>
-                  </a:txBody>
-                  <a:tcPr marL="54864" marR="54864" marT="54864" marB="54864" anchor="ctr">
-                    <a:lnL w="9525" cap="flat" cmpd="sng" algn="ctr">
-                      <a:solidFill>
-                        <a:srgbClr val="BFBFBF"/>
-                      </a:solidFill>
-                      <a:prstDash val="solid"/>
-                      <a:round/>
-                      <a:headEnd type="none" w="med" len="med"/>
-                      <a:tailEnd type="none" w="med" len="med"/>
-                    </a:lnL>
-                    <a:lnR w="9525" cap="flat" cmpd="sng" algn="ctr">
-                      <a:solidFill>
-                        <a:srgbClr val="BFBFBF"/>
-                      </a:solidFill>
-                      <a:prstDash val="solid"/>
-                      <a:round/>
-                      <a:headEnd type="none" w="med" len="med"/>
-                      <a:tailEnd type="none" w="med" len="med"/>
-                    </a:lnR>
-                    <a:lnT w="9525" cap="flat" cmpd="sng" algn="ctr">
-                      <a:solidFill>
-                        <a:srgbClr val="BFBFBF"/>
-                      </a:solidFill>
-                      <a:prstDash val="solid"/>
-                      <a:round/>
-                      <a:headEnd type="none" w="med" len="med"/>
-                      <a:tailEnd type="none" w="med" len="med"/>
-                    </a:lnT>
-                    <a:lnB w="9525" cap="flat" cmpd="sng" algn="ctr">
-                      <a:solidFill>
-                        <a:srgbClr val="BFBFBF"/>
-                      </a:solidFill>
-                      <a:prstDash val="solid"/>
-                      <a:round/>
-                      <a:headEnd type="none" w="med" len="med"/>
-                      <a:tailEnd type="none" w="med" len="med"/>
-                    </a:lnB>
-                  </a:tcPr>
-                </a:tc>
-                <a:tc>
-                  <a:txBody>
-                    <a:bodyPr wrap="square"/>
-                    <a:lstStyle/>
-                    <a:p>
-                      <a:pPr marL="0" indent="0">
-                        <a:buNone/>
-                      </a:pPr>
-                      <a:r>
-                        <a:rPr sz="1100" b="0">
-                          <a:solidFill>
-                            <a:srgbClr val="808080"/>
-                          </a:solidFill>
-                          <a:latin typeface="Calibri"/>
-                        </a:rPr>
-                        <a:t/>
-                      </a:r>
-                      <a:endParaRPr lang="en-US" sz="1300" dirty="0">
-                        <a:latin typeface="Calibri" charset="0"/>
-                        <a:ea typeface="Calibri" charset="0"/>
-                        <a:cs typeface="Calibri" charset="0"/>
-                      </a:endParaRPr>
-                    </a:p>
-                  </a:txBody>
-                  <a:tcPr marL="54864" marR="54864" marT="54864" marB="54864" anchor="ctr">
-                    <a:lnL w="9525" cap="flat" cmpd="sng" algn="ctr">
-                      <a:solidFill>
-                        <a:srgbClr val="BFBFBF"/>
-                      </a:solidFill>
-                      <a:prstDash val="solid"/>
-                      <a:round/>
-                      <a:headEnd type="none" w="med" len="med"/>
-                      <a:tailEnd type="none" w="med" len="med"/>
-                    </a:lnL>
-                    <a:lnR w="9525" cap="flat" cmpd="sng" algn="ctr">
-                      <a:solidFill>
-                        <a:srgbClr val="BFBFBF"/>
-                      </a:solidFill>
-                      <a:prstDash val="solid"/>
-                      <a:round/>
-                      <a:headEnd type="none" w="med" len="med"/>
-                      <a:tailEnd type="none" w="med" len="med"/>
-                    </a:lnR>
-                    <a:lnT w="9525" cap="flat" cmpd="sng" algn="ctr">
-                      <a:solidFill>
-                        <a:srgbClr val="BFBFBF"/>
-                      </a:solidFill>
-                      <a:prstDash val="solid"/>
-                      <a:round/>
-                      <a:headEnd type="none" w="med" len="med"/>
-                      <a:tailEnd type="none" w="med" len="med"/>
-                    </a:lnT>
-                    <a:lnB w="9525" cap="flat" cmpd="sng" algn="ctr">
-                      <a:solidFill>
-                        <a:srgbClr val="BFBFBF"/>
-                      </a:solidFill>
-                      <a:prstDash val="solid"/>
-                      <a:round/>
-                      <a:headEnd type="none" w="med" len="med"/>
-                      <a:tailEnd type="none" w="med" len="med"/>
-                    </a:lnB>
-                  </a:tcPr>
-                </a:tc>
-                <a:tc>
-                  <a:txBody>
-                    <a:bodyPr wrap="square"/>
-                    <a:lstStyle/>
-                    <a:p>
-                      <a:pPr marL="0" indent="0">
-                        <a:buNone/>
-                      </a:pPr>
-                      <a:r>
-                        <a:rPr sz="1100" b="0">
-                          <a:solidFill>
-                            <a:srgbClr val="808080"/>
-                          </a:solidFill>
-                          <a:latin typeface="Calibri"/>
-                        </a:rPr>
-                        <a:t/>
-                      </a:r>
-                      <a:endParaRPr lang="en-US" sz="1300" dirty="0">
-                        <a:latin typeface="Calibri" charset="0"/>
-                        <a:ea typeface="Calibri" charset="0"/>
-                        <a:cs typeface="Calibri" charset="0"/>
-                      </a:endParaRPr>
-                    </a:p>
-                  </a:txBody>
-                  <a:tcPr marL="54864" marR="54864" marT="54864" marB="54864" anchor="ctr">
-                    <a:lnL w="9525" cap="flat" cmpd="sng" algn="ctr">
-                      <a:solidFill>
-                        <a:srgbClr val="BFBFBF"/>
-                      </a:solidFill>
-                      <a:prstDash val="solid"/>
-                      <a:round/>
-                      <a:headEnd type="none" w="med" len="med"/>
-                      <a:tailEnd type="none" w="med" len="med"/>
-                    </a:lnL>
-                    <a:lnR w="9525" cap="flat" cmpd="sng" algn="ctr">
-                      <a:solidFill>
-                        <a:srgbClr val="BFBFBF"/>
-                      </a:solidFill>
-                      <a:prstDash val="solid"/>
-                      <a:round/>
-                      <a:headEnd type="none" w="med" len="med"/>
-                      <a:tailEnd type="none" w="med" len="med"/>
-                    </a:lnR>
-                    <a:lnT w="9525" cap="flat" cmpd="sng" algn="ctr">
-                      <a:solidFill>
-                        <a:srgbClr val="BFBFBF"/>
-                      </a:solidFill>
-                      <a:prstDash val="solid"/>
-                      <a:round/>
-                      <a:headEnd type="none" w="med" len="med"/>
-                      <a:tailEnd type="none" w="med" len="med"/>
-                    </a:lnT>
-                    <a:lnB w="9525" cap="flat" cmpd="sng" algn="ctr">
-                      <a:solidFill>
-                        <a:srgbClr val="BFBFBF"/>
-                      </a:solidFill>
-                      <a:prstDash val="solid"/>
-                      <a:round/>
-                      <a:headEnd type="none" w="med" len="med"/>
-                      <a:tailEnd type="none" w="med" len="med"/>
-                    </a:lnB>
-                  </a:tcPr>
-                </a:tc>
-                <a:tc>
-                  <a:txBody>
-                    <a:bodyPr wrap="square"/>
-                    <a:lstStyle/>
-                    <a:p>
-                      <a:pPr marL="0" indent="0">
-                        <a:buNone/>
-                      </a:pPr>
-                      <a:r>
-                        <a:rPr sz="1100" b="0">
-                          <a:solidFill>
-                            <a:srgbClr val="808080"/>
-                          </a:solidFill>
-                          <a:latin typeface="Calibri"/>
-                        </a:rPr>
-                        <a:t/>
-                      </a:r>
-                      <a:endParaRPr lang="en-US" sz="1300" dirty="0">
-                        <a:latin typeface="Calibri" charset="0"/>
-                        <a:ea typeface="Calibri" charset="0"/>
-                        <a:cs typeface="Calibri" charset="0"/>
-                      </a:endParaRPr>
-                    </a:p>
-                  </a:txBody>
-                  <a:tcPr marL="54864" marR="54864" marT="54864" marB="54864" anchor="ctr">
-                    <a:lnL w="9525" cap="flat" cmpd="sng" algn="ctr">
-                      <a:solidFill>
-                        <a:srgbClr val="BFBFBF"/>
-                      </a:solidFill>
-                      <a:prstDash val="solid"/>
-                      <a:round/>
-                      <a:headEnd type="none" w="med" len="med"/>
-                      <a:tailEnd type="none" w="med" len="med"/>
-                    </a:lnL>
-                    <a:lnR w="9525" cap="flat" cmpd="sng" algn="ctr">
-                      <a:solidFill>
-                        <a:srgbClr val="BFBFBF"/>
-                      </a:solidFill>
-                      <a:prstDash val="solid"/>
-                      <a:round/>
-                      <a:headEnd type="none" w="med" len="med"/>
-                      <a:tailEnd type="none" w="med" len="med"/>
-                    </a:lnR>
-                    <a:lnT w="9525" cap="flat" cmpd="sng" algn="ctr">
-                      <a:solidFill>
-                        <a:srgbClr val="BFBFBF"/>
-                      </a:solidFill>
-                      <a:prstDash val="solid"/>
-                      <a:round/>
-                      <a:headEnd type="none" w="med" len="med"/>
-                      <a:tailEnd type="none" w="med" len="med"/>
-                    </a:lnT>
-                    <a:lnB w="9525" cap="flat" cmpd="sng" algn="ctr">
-                      <a:solidFill>
-                        <a:srgbClr val="BFBFBF"/>
-                      </a:solidFill>
-                      <a:prstDash val="solid"/>
-                      <a:round/>
-                      <a:headEnd type="none" w="med" len="med"/>
-                      <a:tailEnd type="none" w="med" len="med"/>
-                    </a:lnB>
-                  </a:tcPr>
-                </a:tc>
-                <a:extLst>
-                  <a:ext uri="{0D108BD9-81ED-4DB2-BD59-A6C34878D82A}">
-                    <a16:rowId xmlns:a16="http://schemas.microsoft.com/office/drawing/2014/main" val="10005"/>
-                  </a:ext>
-                </a:extLst>
-              </a:tr>
-              <a:tr h="566928">
-                <a:tc>
-                  <a:txBody>
-                    <a:bodyPr/>
-                    <a:lstStyle/>
-                    <a:p>
-                      <a:pPr marL="0" indent="0">
-                        <a:buNone/>
-                      </a:pPr>
-                      <a:r>
-                        <a:rPr lang="en-US" sz="1300" dirty="0">
-                          <a:solidFill>
-                            <a:srgbClr val="000000"/>
-                          </a:solidFill>
-                          <a:latin typeface="Calibri" pitchFamily="34" charset="0"/>
-                          <a:ea typeface="Calibri" pitchFamily="34" charset="-122"/>
-                          <a:cs typeface="Calibri" pitchFamily="34" charset="-120"/>
-                        </a:rPr>
-                        <a:t>6</a:t>
-                      </a:r>
-                      <a:endParaRPr lang="en-US" sz="1300" dirty="0">
-                        <a:latin typeface="Calibri" charset="0"/>
-                        <a:ea typeface="Calibri" charset="0"/>
-                        <a:cs typeface="Calibri" charset="0"/>
-                      </a:endParaRPr>
-                    </a:p>
-                  </a:txBody>
-                  <a:tcPr marL="54864" marR="54864" marT="54864" marB="54864" anchor="ctr">
-                    <a:lnL w="9525" cap="flat" cmpd="sng" algn="ctr">
-                      <a:solidFill>
-                        <a:srgbClr val="BFBFBF"/>
-                      </a:solidFill>
-                      <a:prstDash val="solid"/>
-                      <a:round/>
-                      <a:headEnd type="none" w="med" len="med"/>
-                      <a:tailEnd type="none" w="med" len="med"/>
-                    </a:lnL>
-                    <a:lnR w="9525" cap="flat" cmpd="sng" algn="ctr">
-                      <a:solidFill>
-                        <a:srgbClr val="BFBFBF"/>
-                      </a:solidFill>
-                      <a:prstDash val="solid"/>
-                      <a:round/>
-                      <a:headEnd type="none" w="med" len="med"/>
-                      <a:tailEnd type="none" w="med" len="med"/>
-                    </a:lnR>
-                    <a:lnT w="9525" cap="flat" cmpd="sng" algn="ctr">
-                      <a:solidFill>
-                        <a:srgbClr val="BFBFBF"/>
-                      </a:solidFill>
-                      <a:prstDash val="solid"/>
-                      <a:round/>
-                      <a:headEnd type="none" w="med" len="med"/>
-                      <a:tailEnd type="none" w="med" len="med"/>
-                    </a:lnT>
-                    <a:lnB w="9525" cap="flat" cmpd="sng" algn="ctr">
-                      <a:solidFill>
-                        <a:srgbClr val="BFBFBF"/>
-                      </a:solidFill>
-                      <a:prstDash val="solid"/>
-                      <a:round/>
-                      <a:headEnd type="none" w="med" len="med"/>
-                      <a:tailEnd type="none" w="med" len="med"/>
-                    </a:lnB>
-                  </a:tcPr>
-                </a:tc>
-                <a:tc>
-                  <a:txBody>
-                    <a:bodyPr wrap="square"/>
-                    <a:lstStyle/>
-                    <a:p>
-                      <a:pPr marL="0" indent="0">
-                        <a:buNone/>
-                      </a:pPr>
-                      <a:r>
-                        <a:rPr sz="1100" b="0">
-                          <a:solidFill>
-                            <a:srgbClr val="808080"/>
-                          </a:solidFill>
-                          <a:latin typeface="Calibri"/>
-                        </a:rPr>
-                        <a:t>— to be added —</a:t>
-                      </a:r>
-                      <a:endParaRPr lang="en-US" sz="1300" dirty="0">
-                        <a:latin typeface="Calibri" charset="0"/>
-                        <a:ea typeface="Calibri" charset="0"/>
-                        <a:cs typeface="Calibri" charset="0"/>
-                      </a:endParaRPr>
-                    </a:p>
-                  </a:txBody>
-                  <a:tcPr marL="54864" marR="54864" marT="54864" marB="54864" anchor="ctr">
-                    <a:lnL w="9525" cap="flat" cmpd="sng" algn="ctr">
-                      <a:solidFill>
-                        <a:srgbClr val="BFBFBF"/>
-                      </a:solidFill>
-                      <a:prstDash val="solid"/>
-                      <a:round/>
-                      <a:headEnd type="none" w="med" len="med"/>
-                      <a:tailEnd type="none" w="med" len="med"/>
-                    </a:lnL>
-                    <a:lnR w="9525" cap="flat" cmpd="sng" algn="ctr">
-                      <a:solidFill>
-                        <a:srgbClr val="BFBFBF"/>
-                      </a:solidFill>
-                      <a:prstDash val="solid"/>
-                      <a:round/>
-                      <a:headEnd type="none" w="med" len="med"/>
-                      <a:tailEnd type="none" w="med" len="med"/>
-                    </a:lnR>
-                    <a:lnT w="9525" cap="flat" cmpd="sng" algn="ctr">
-                      <a:solidFill>
-                        <a:srgbClr val="BFBFBF"/>
-                      </a:solidFill>
-                      <a:prstDash val="solid"/>
-                      <a:round/>
-                      <a:headEnd type="none" w="med" len="med"/>
-                      <a:tailEnd type="none" w="med" len="med"/>
-                    </a:lnT>
-                    <a:lnB w="9525" cap="flat" cmpd="sng" algn="ctr">
-                      <a:solidFill>
-                        <a:srgbClr val="BFBFBF"/>
-                      </a:solidFill>
-                      <a:prstDash val="solid"/>
-                      <a:round/>
-                      <a:headEnd type="none" w="med" len="med"/>
-                      <a:tailEnd type="none" w="med" len="med"/>
-                    </a:lnB>
-                  </a:tcPr>
-                </a:tc>
-                <a:tc>
-                  <a:txBody>
-                    <a:bodyPr wrap="square"/>
-                    <a:lstStyle/>
-                    <a:p>
-                      <a:pPr marL="0" indent="0">
-                        <a:buNone/>
-                      </a:pPr>
-                      <a:r>
-                        <a:rPr sz="1100" b="0">
-                          <a:solidFill>
-                            <a:srgbClr val="808080"/>
-                          </a:solidFill>
-                          <a:latin typeface="Calibri"/>
-                        </a:rPr>
-                        <a:t/>
-                      </a:r>
-                      <a:endParaRPr lang="en-US" sz="1300" dirty="0">
-                        <a:latin typeface="Calibri" charset="0"/>
-                        <a:ea typeface="Calibri" charset="0"/>
-                        <a:cs typeface="Calibri" charset="0"/>
-                      </a:endParaRPr>
-                    </a:p>
-                  </a:txBody>
-                  <a:tcPr marL="54864" marR="54864" marT="54864" marB="54864" anchor="ctr">
-                    <a:lnL w="9525" cap="flat" cmpd="sng" algn="ctr">
-                      <a:solidFill>
-                        <a:srgbClr val="BFBFBF"/>
-                      </a:solidFill>
-                      <a:prstDash val="solid"/>
-                      <a:round/>
-                      <a:headEnd type="none" w="med" len="med"/>
-                      <a:tailEnd type="none" w="med" len="med"/>
-                    </a:lnL>
-                    <a:lnR w="9525" cap="flat" cmpd="sng" algn="ctr">
-                      <a:solidFill>
-                        <a:srgbClr val="BFBFBF"/>
-                      </a:solidFill>
-                      <a:prstDash val="solid"/>
-                      <a:round/>
-                      <a:headEnd type="none" w="med" len="med"/>
-                      <a:tailEnd type="none" w="med" len="med"/>
-                    </a:lnR>
-                    <a:lnT w="9525" cap="flat" cmpd="sng" algn="ctr">
-                      <a:solidFill>
-                        <a:srgbClr val="BFBFBF"/>
-                      </a:solidFill>
-                      <a:prstDash val="solid"/>
-                      <a:round/>
-                      <a:headEnd type="none" w="med" len="med"/>
-                      <a:tailEnd type="none" w="med" len="med"/>
-                    </a:lnT>
-                    <a:lnB w="9525" cap="flat" cmpd="sng" algn="ctr">
-                      <a:solidFill>
-                        <a:srgbClr val="BFBFBF"/>
-                      </a:solidFill>
-                      <a:prstDash val="solid"/>
-                      <a:round/>
-                      <a:headEnd type="none" w="med" len="med"/>
-                      <a:tailEnd type="none" w="med" len="med"/>
-                    </a:lnB>
-                  </a:tcPr>
-                </a:tc>
-                <a:tc>
-                  <a:txBody>
-                    <a:bodyPr wrap="square"/>
-                    <a:lstStyle/>
-                    <a:p>
-                      <a:pPr marL="0" indent="0">
-                        <a:buNone/>
-                      </a:pPr>
-                      <a:r>
-                        <a:rPr sz="1100" b="0">
-                          <a:solidFill>
-                            <a:srgbClr val="808080"/>
-                          </a:solidFill>
-                          <a:latin typeface="Calibri"/>
-                        </a:rPr>
-                        <a:t/>
-                      </a:r>
-                      <a:endParaRPr lang="en-US" sz="1300" dirty="0">
-                        <a:latin typeface="Calibri" charset="0"/>
-                        <a:ea typeface="Calibri" charset="0"/>
-                        <a:cs typeface="Calibri" charset="0"/>
-                      </a:endParaRPr>
-                    </a:p>
-                  </a:txBody>
-                  <a:tcPr marL="54864" marR="54864" marT="54864" marB="54864" anchor="ctr">
-                    <a:lnL w="9525" cap="flat" cmpd="sng" algn="ctr">
-                      <a:solidFill>
-                        <a:srgbClr val="BFBFBF"/>
-                      </a:solidFill>
-                      <a:prstDash val="solid"/>
-                      <a:round/>
-                      <a:headEnd type="none" w="med" len="med"/>
-                      <a:tailEnd type="none" w="med" len="med"/>
-                    </a:lnL>
-                    <a:lnR w="9525" cap="flat" cmpd="sng" algn="ctr">
-                      <a:solidFill>
-                        <a:srgbClr val="BFBFBF"/>
-                      </a:solidFill>
-                      <a:prstDash val="solid"/>
-                      <a:round/>
-                      <a:headEnd type="none" w="med" len="med"/>
-                      <a:tailEnd type="none" w="med" len="med"/>
-                    </a:lnR>
-                    <a:lnT w="9525" cap="flat" cmpd="sng" algn="ctr">
-                      <a:solidFill>
-                        <a:srgbClr val="BFBFBF"/>
-                      </a:solidFill>
-                      <a:prstDash val="solid"/>
-                      <a:round/>
-                      <a:headEnd type="none" w="med" len="med"/>
-                      <a:tailEnd type="none" w="med" len="med"/>
-                    </a:lnT>
-                    <a:lnB w="9525" cap="flat" cmpd="sng" algn="ctr">
-                      <a:solidFill>
-                        <a:srgbClr val="BFBFBF"/>
-                      </a:solidFill>
-                      <a:prstDash val="solid"/>
-                      <a:round/>
-                      <a:headEnd type="none" w="med" len="med"/>
-                      <a:tailEnd type="none" w="med" len="med"/>
-                    </a:lnB>
-                  </a:tcPr>
-                </a:tc>
-                <a:tc>
-                  <a:txBody>
-                    <a:bodyPr wrap="square"/>
-                    <a:lstStyle/>
-                    <a:p>
-                      <a:pPr marL="0" indent="0">
-                        <a:buNone/>
-                      </a:pPr>
-                      <a:r>
-                        <a:rPr sz="1100" b="0">
-                          <a:solidFill>
-                            <a:srgbClr val="808080"/>
-                          </a:solidFill>
-                          <a:latin typeface="Calibri"/>
-                        </a:rPr>
-                        <a:t/>
-                      </a:r>
-                      <a:endParaRPr lang="en-US" sz="1300" dirty="0">
-                        <a:latin typeface="Calibri" charset="0"/>
-                        <a:ea typeface="Calibri" charset="0"/>
-                        <a:cs typeface="Calibri" charset="0"/>
-                      </a:endParaRPr>
-                    </a:p>
-                  </a:txBody>
-                  <a:tcPr marL="54864" marR="54864" marT="54864" marB="54864" anchor="ctr">
-                    <a:lnL w="9525" cap="flat" cmpd="sng" algn="ctr">
-                      <a:solidFill>
-                        <a:srgbClr val="BFBFBF"/>
-                      </a:solidFill>
-                      <a:prstDash val="solid"/>
-                      <a:round/>
-                      <a:headEnd type="none" w="med" len="med"/>
-                      <a:tailEnd type="none" w="med" len="med"/>
-                    </a:lnL>
-                    <a:lnR w="9525" cap="flat" cmpd="sng" algn="ctr">
-                      <a:solidFill>
-                        <a:srgbClr val="BFBFBF"/>
-                      </a:solidFill>
-                      <a:prstDash val="solid"/>
-                      <a:round/>
-                      <a:headEnd type="none" w="med" len="med"/>
-                      <a:tailEnd type="none" w="med" len="med"/>
-                    </a:lnR>
-                    <a:lnT w="9525" cap="flat" cmpd="sng" algn="ctr">
-                      <a:solidFill>
-                        <a:srgbClr val="BFBFBF"/>
-                      </a:solidFill>
-                      <a:prstDash val="solid"/>
-                      <a:round/>
-                      <a:headEnd type="none" w="med" len="med"/>
-                      <a:tailEnd type="none" w="med" len="med"/>
-                    </a:lnT>
-                    <a:lnB w="9525" cap="flat" cmpd="sng" algn="ctr">
-                      <a:solidFill>
-                        <a:srgbClr val="BFBFBF"/>
-                      </a:solidFill>
-                      <a:prstDash val="solid"/>
-                      <a:round/>
-                      <a:headEnd type="none" w="med" len="med"/>
-                      <a:tailEnd type="none" w="med" len="med"/>
-                    </a:lnB>
-                  </a:tcPr>
-                </a:tc>
-                <a:extLst>
-                  <a:ext uri="{0D108BD9-81ED-4DB2-BD59-A6C34878D82A}">
-                    <a16:rowId xmlns:a16="http://schemas.microsoft.com/office/drawing/2014/main" val="10006"/>
                   </a:ext>
                 </a:extLst>
               </a:tr>
@@ -7312,37 +7473,15 @@
               <a:buNone/>
             </a:pPr>
             <a:r>
-              <a:rPr lang="en-US" sz="1200" dirty="0">
-                <a:solidFill>
-                  <a:srgbClr val="000000"/>
-                </a:solidFill>
-                <a:latin typeface="Calibri" pitchFamily="34" charset="0"/>
-                <a:ea typeface="Calibri" pitchFamily="34" charset="-122"/>
-                <a:cs typeface="Calibri" pitchFamily="34" charset="-120"/>
-              </a:rPr>
-              <a:t xml:space="preserve">3 of the minimum 8–10 references are filled and verified against the publisher record (volume, issue, pages, author list). </a:t>
-            </a:r>
-            <a:r>
-              <a:rPr lang="en-US" sz="1200" b="1" dirty="0">
-                <a:solidFill>
-                  <a:srgbClr val="000000"/>
-                </a:solidFill>
-                <a:latin typeface="Calibri" pitchFamily="34" charset="0"/>
-                <a:ea typeface="Calibri" pitchFamily="34" charset="-122"/>
-                <a:cs typeface="Calibri" pitchFamily="34" charset="-120"/>
-              </a:rPr>
-              <a:t xml:space="preserve">Five more still to add</a:t>
-            </a:r>
-            <a:r>
-              <a:rPr lang="en-US" sz="1200" dirty="0">
-                <a:solidFill>
-                  <a:srgbClr val="000000"/>
-                </a:solidFill>
-                <a:latin typeface="Calibri" pitchFamily="34" charset="0"/>
-                <a:ea typeface="Calibri" pitchFamily="34" charset="-122"/>
-                <a:cs typeface="Calibri" pitchFamily="34" charset="-120"/>
-              </a:rPr>
-              <a:t xml:space="preserve"> — duplicate this slide for rows 7–10.</a:t>
+              <a:rPr lang="en-US" sz="1150" dirty="0">
+                <a:solidFill>
+                  <a:srgbClr val="000000"/>
+                </a:solidFill>
+                <a:latin typeface="Calibri" pitchFamily="34" charset="0"/>
+                <a:ea typeface="Calibri" pitchFamily="34" charset="-122"/>
+                <a:cs typeface="Calibri" pitchFamily="34" charset="-120"/>
+              </a:rPr>
+              <a:t xml:space="preserve">References [1]–[3] are verified against the publisher record — author list, volume, issue and pages all confirmed.</a:t>
             </a:r>
           </a:p>
         </p:txBody>
@@ -7356,6 +7495,1969 @@
 </file>
 
 <file path=ppt/slides/slide6.xml><?xml version="1.0" encoding="utf-8"?>
+<p:sld xmlns:a="http://schemas.openxmlformats.org/drawingml/2006/main" xmlns:r="http://schemas.openxmlformats.org/officeDocument/2006/relationships" xmlns:p="http://schemas.openxmlformats.org/presentationml/2006/main">
+  <p:cSld name="Slide 5">
+    <p:bg>
+      <p:bgPr>
+        <a:solidFill>
+          <a:srgbClr val="FFFFFF"/>
+        </a:solidFill>
+        <a:effectLst/>
+      </p:bgPr>
+    </p:bg>
+    <p:spTree>
+      <p:nvGrpSpPr>
+        <p:cNvPr id="1" name=""/>
+        <p:cNvGrpSpPr/>
+        <p:nvPr/>
+      </p:nvGrpSpPr>
+      <p:grpSpPr>
+        <a:xfrm>
+          <a:off x="0" y="0"/>
+          <a:ext cx="0" cy="0"/>
+          <a:chOff x="0" y="0"/>
+          <a:chExt cx="0" cy="0"/>
+        </a:xfrm>
+      </p:grpSpPr>
+      <p:sp>
+        <p:nvSpPr>
+          <p:cNvPr id="2" name="Text 0"/>
+          <p:cNvSpPr txBox="1"/>
+          <p:nvPr/>
+        </p:nvSpPr>
+        <p:spPr>
+          <a:xfrm>
+            <a:off x="11460175" y="6446520"/>
+            <a:ext cx="457200" cy="274320"/>
+          </a:xfrm>
+          <a:prstGeom prst="rect">
+            <a:avLst/>
+          </a:prstGeom>
+          <a:noFill/>
+          <a:ln/>
+        </p:spPr>
+        <p:txBody>
+          <a:bodyPr wrap="square" lIns="0" tIns="0" rIns="0" bIns="0" rtlCol="0" anchor="ctr"/>
+          <a:lstStyle/>
+          <a:p>
+            <a:pPr marL="0" indent="0" algn="r">
+              <a:buNone/>
+            </a:pPr>
+            <a:r>
+              <a:rPr lang="en-US" sz="1000" dirty="0">
+                <a:solidFill>
+                  <a:srgbClr val="808080"/>
+                </a:solidFill>
+                <a:latin typeface="Calibri" pitchFamily="34" charset="0"/>
+                <a:ea typeface="Calibri" pitchFamily="34" charset="-122"/>
+                <a:cs typeface="Calibri" pitchFamily="34" charset="-120"/>
+              </a:rPr>
+              <a:t>6</a:t>
+            </a:r>
+            <a:endParaRPr lang="en-US" sz="1000" dirty="0"/>
+          </a:p>
+        </p:txBody>
+      </p:sp>
+      <p:sp>
+        <p:nvSpPr>
+          <p:cNvPr id="3" name="Text 1"/>
+          <p:cNvSpPr txBox="1"/>
+          <p:nvPr/>
+        </p:nvSpPr>
+        <p:spPr>
+          <a:xfrm>
+            <a:off x="548640" y="320040"/>
+            <a:ext cx="9601200" cy="685800"/>
+          </a:xfrm>
+          <a:prstGeom prst="rect">
+            <a:avLst/>
+          </a:prstGeom>
+          <a:noFill/>
+          <a:ln/>
+        </p:spPr>
+        <p:txBody>
+          <a:bodyPr wrap="square" lIns="0" tIns="0" rIns="0" bIns="0" rtlCol="0" anchor="ctr"/>
+          <a:lstStyle/>
+          <a:p>
+            <a:pPr marL="0" indent="0">
+              <a:buNone/>
+            </a:pPr>
+            <a:r>
+              <a:rPr lang="en-US" sz="2800" b="1" dirty="0">
+                <a:solidFill>
+                  <a:srgbClr val="1D2F82"/>
+                </a:solidFill>
+                <a:latin typeface="Calibri" pitchFamily="34" charset="0"/>
+                <a:ea typeface="Calibri" pitchFamily="34" charset="-122"/>
+                <a:cs typeface="Calibri" pitchFamily="34" charset="-120"/>
+              </a:rPr>
+              <a:t>Literature Survey  (5 – 8)</a:t>
+            </a:r>
+            <a:endParaRPr lang="en-US" sz="2800" dirty="0"/>
+          </a:p>
+        </p:txBody>
+      </p:sp>
+      <p:pic>
+        <p:nvPicPr>
+          <p:cNvPr id="4" name="Image 0" descr="logo.png"/>
+          <p:cNvPicPr>
+            <a:picLocks noChangeAspect="1"/>
+          </p:cNvPicPr>
+          <p:nvPr/>
+        </p:nvPicPr>
+        <p:blipFill>
+          <a:blip r:embed="rId3"/>
+          <a:stretch>
+            <a:fillRect/>
+          </a:stretch>
+        </p:blipFill>
+        <p:spPr>
+          <a:xfrm>
+            <a:off x="10362895" y="320040"/>
+            <a:ext cx="1371600" cy="518746"/>
+          </a:xfrm>
+          <a:prstGeom prst="rect">
+            <a:avLst/>
+          </a:prstGeom>
+        </p:spPr>
+      </p:pic>
+      <p:graphicFrame>
+        <p:nvGraphicFramePr>
+          <p:cNvPr id="6" name="Table 0"/>
+          <p:cNvGraphicFramePr>
+            <a:graphicFrameLocks noGrp="1"/>
+          </p:cNvGraphicFramePr>
+          <p:nvPr>
+            <p:extLst>
+              <p:ext uri="{D42A27DB-BD31-4B8C-83A1-F6EECF244321}">
+                <p14:modId xmlns:p14="http://schemas.microsoft.com/office/powerpoint/2010/main" val="1579011935"/>
+              </p:ext>
+            </p:extLst>
+          </p:nvPr>
+        </p:nvGraphicFramePr>
+        <p:xfrm>
+          <a:off x="548640" y="1371600"/>
+          <a:ext cx="11091672" cy="3840480"/>
+        </p:xfrm>
+        <a:graphic>
+          <a:graphicData uri="http://schemas.openxmlformats.org/drawingml/2006/table">
+            <a:tbl>
+              <a:tblPr/>
+              <a:tblGrid>
+                <a:gridCol w="548640">
+                  <a:extLst>
+                    <a:ext uri="{9D8B030D-6E8A-4147-A177-3AD203B41FA5}">
+                      <a16:colId xmlns:a16="http://schemas.microsoft.com/office/drawing/2014/main" val="20000"/>
+                    </a:ext>
+                  </a:extLst>
+                </a:gridCol>
+                <a:gridCol w="1920240">
+                  <a:extLst>
+                    <a:ext uri="{9D8B030D-6E8A-4147-A177-3AD203B41FA5}">
+                      <a16:colId xmlns:a16="http://schemas.microsoft.com/office/drawing/2014/main" val="20001"/>
+                    </a:ext>
+                  </a:extLst>
+                </a:gridCol>
+                <a:gridCol w="3108960">
+                  <a:extLst>
+                    <a:ext uri="{9D8B030D-6E8A-4147-A177-3AD203B41FA5}">
+                      <a16:colId xmlns:a16="http://schemas.microsoft.com/office/drawing/2014/main" val="20002"/>
+                    </a:ext>
+                  </a:extLst>
+                </a:gridCol>
+                <a:gridCol w="2377440">
+                  <a:extLst>
+                    <a:ext uri="{9D8B030D-6E8A-4147-A177-3AD203B41FA5}">
+                      <a16:colId xmlns:a16="http://schemas.microsoft.com/office/drawing/2014/main" val="20003"/>
+                    </a:ext>
+                  </a:extLst>
+                </a:gridCol>
+                <a:gridCol w="3136392">
+                  <a:extLst>
+                    <a:ext uri="{9D8B030D-6E8A-4147-A177-3AD203B41FA5}">
+                      <a16:colId xmlns:a16="http://schemas.microsoft.com/office/drawing/2014/main" val="20004"/>
+                    </a:ext>
+                  </a:extLst>
+                </a:gridCol>
+              </a:tblGrid>
+              <a:tr h="365760">
+                <a:tc>
+                  <a:txBody>
+                    <a:bodyPr/>
+                    <a:lstStyle/>
+                    <a:p>
+                      <a:pPr marL="0" indent="0">
+                        <a:buNone/>
+                      </a:pPr>
+                      <a:r>
+                        <a:rPr lang="en-US" sz="1300" b="1" dirty="0">
+                          <a:solidFill>
+                            <a:srgbClr val="FFFFFF"/>
+                          </a:solidFill>
+                          <a:latin typeface="Calibri" pitchFamily="34" charset="0"/>
+                          <a:ea typeface="Calibri" pitchFamily="34" charset="-122"/>
+                          <a:cs typeface="Calibri" pitchFamily="34" charset="-120"/>
+                        </a:rPr>
+                        <a:t>No.</a:t>
+                      </a:r>
+                      <a:endParaRPr lang="en-US" sz="1300" dirty="0">
+                        <a:latin typeface="Calibri" charset="0"/>
+                        <a:ea typeface="Calibri" charset="0"/>
+                        <a:cs typeface="Calibri" charset="0"/>
+                      </a:endParaRPr>
+                    </a:p>
+                  </a:txBody>
+                  <a:tcPr marL="54864" marR="54864" marT="54864" marB="54864" anchor="ctr">
+                    <a:lnL w="9525" cap="flat" cmpd="sng" algn="ctr">
+                      <a:solidFill>
+                        <a:srgbClr val="BFBFBF"/>
+                      </a:solidFill>
+                      <a:prstDash val="solid"/>
+                      <a:round/>
+                      <a:headEnd type="none" w="med" len="med"/>
+                      <a:tailEnd type="none" w="med" len="med"/>
+                    </a:lnL>
+                    <a:lnR w="9525" cap="flat" cmpd="sng" algn="ctr">
+                      <a:solidFill>
+                        <a:srgbClr val="BFBFBF"/>
+                      </a:solidFill>
+                      <a:prstDash val="solid"/>
+                      <a:round/>
+                      <a:headEnd type="none" w="med" len="med"/>
+                      <a:tailEnd type="none" w="med" len="med"/>
+                    </a:lnR>
+                    <a:lnT w="9525" cap="flat" cmpd="sng" algn="ctr">
+                      <a:solidFill>
+                        <a:srgbClr val="BFBFBF"/>
+                      </a:solidFill>
+                      <a:prstDash val="solid"/>
+                      <a:round/>
+                      <a:headEnd type="none" w="med" len="med"/>
+                      <a:tailEnd type="none" w="med" len="med"/>
+                    </a:lnT>
+                    <a:lnB w="9525" cap="flat" cmpd="sng" algn="ctr">
+                      <a:solidFill>
+                        <a:srgbClr val="BFBFBF"/>
+                      </a:solidFill>
+                      <a:prstDash val="solid"/>
+                      <a:round/>
+                      <a:headEnd type="none" w="med" len="med"/>
+                      <a:tailEnd type="none" w="med" len="med"/>
+                    </a:lnB>
+                    <a:solidFill>
+                      <a:srgbClr val="1D2F82"/>
+                    </a:solidFill>
+                  </a:tcPr>
+                </a:tc>
+                <a:tc>
+                  <a:txBody>
+                    <a:bodyPr/>
+                    <a:lstStyle/>
+                    <a:p>
+                      <a:pPr marL="0" indent="0">
+                        <a:buNone/>
+                      </a:pPr>
+                      <a:r>
+                        <a:rPr lang="en-US" sz="1300" b="1" dirty="0">
+                          <a:solidFill>
+                            <a:srgbClr val="FFFFFF"/>
+                          </a:solidFill>
+                          <a:latin typeface="Calibri" pitchFamily="34" charset="0"/>
+                          <a:ea typeface="Calibri" pitchFamily="34" charset="-122"/>
+                          <a:cs typeface="Calibri" pitchFamily="34" charset="-120"/>
+                        </a:rPr>
+                        <a:t>Author(s) &amp; Year</a:t>
+                      </a:r>
+                      <a:endParaRPr lang="en-US" sz="1300" dirty="0">
+                        <a:latin typeface="Calibri" charset="0"/>
+                        <a:ea typeface="Calibri" charset="0"/>
+                        <a:cs typeface="Calibri" charset="0"/>
+                      </a:endParaRPr>
+                    </a:p>
+                  </a:txBody>
+                  <a:tcPr marL="54864" marR="54864" marT="54864" marB="54864" anchor="ctr">
+                    <a:lnL w="9525" cap="flat" cmpd="sng" algn="ctr">
+                      <a:solidFill>
+                        <a:srgbClr val="BFBFBF"/>
+                      </a:solidFill>
+                      <a:prstDash val="solid"/>
+                      <a:round/>
+                      <a:headEnd type="none" w="med" len="med"/>
+                      <a:tailEnd type="none" w="med" len="med"/>
+                    </a:lnL>
+                    <a:lnR w="9525" cap="flat" cmpd="sng" algn="ctr">
+                      <a:solidFill>
+                        <a:srgbClr val="BFBFBF"/>
+                      </a:solidFill>
+                      <a:prstDash val="solid"/>
+                      <a:round/>
+                      <a:headEnd type="none" w="med" len="med"/>
+                      <a:tailEnd type="none" w="med" len="med"/>
+                    </a:lnR>
+                    <a:lnT w="9525" cap="flat" cmpd="sng" algn="ctr">
+                      <a:solidFill>
+                        <a:srgbClr val="BFBFBF"/>
+                      </a:solidFill>
+                      <a:prstDash val="solid"/>
+                      <a:round/>
+                      <a:headEnd type="none" w="med" len="med"/>
+                      <a:tailEnd type="none" w="med" len="med"/>
+                    </a:lnT>
+                    <a:lnB w="9525" cap="flat" cmpd="sng" algn="ctr">
+                      <a:solidFill>
+                        <a:srgbClr val="BFBFBF"/>
+                      </a:solidFill>
+                      <a:prstDash val="solid"/>
+                      <a:round/>
+                      <a:headEnd type="none" w="med" len="med"/>
+                      <a:tailEnd type="none" w="med" len="med"/>
+                    </a:lnB>
+                    <a:solidFill>
+                      <a:srgbClr val="1D2F82"/>
+                    </a:solidFill>
+                  </a:tcPr>
+                </a:tc>
+                <a:tc>
+                  <a:txBody>
+                    <a:bodyPr/>
+                    <a:lstStyle/>
+                    <a:p>
+                      <a:pPr marL="0" indent="0">
+                        <a:buNone/>
+                      </a:pPr>
+                      <a:r>
+                        <a:rPr lang="en-US" sz="1300" b="1" dirty="0">
+                          <a:solidFill>
+                            <a:srgbClr val="FFFFFF"/>
+                          </a:solidFill>
+                          <a:latin typeface="Calibri" pitchFamily="34" charset="0"/>
+                          <a:ea typeface="Calibri" pitchFamily="34" charset="-122"/>
+                          <a:cs typeface="Calibri" pitchFamily="34" charset="-120"/>
+                        </a:rPr>
+                        <a:t>Title / Source</a:t>
+                      </a:r>
+                      <a:endParaRPr lang="en-US" sz="1300" dirty="0">
+                        <a:latin typeface="Calibri" charset="0"/>
+                        <a:ea typeface="Calibri" charset="0"/>
+                        <a:cs typeface="Calibri" charset="0"/>
+                      </a:endParaRPr>
+                    </a:p>
+                  </a:txBody>
+                  <a:tcPr marL="54864" marR="54864" marT="54864" marB="54864" anchor="ctr">
+                    <a:lnL w="9525" cap="flat" cmpd="sng" algn="ctr">
+                      <a:solidFill>
+                        <a:srgbClr val="BFBFBF"/>
+                      </a:solidFill>
+                      <a:prstDash val="solid"/>
+                      <a:round/>
+                      <a:headEnd type="none" w="med" len="med"/>
+                      <a:tailEnd type="none" w="med" len="med"/>
+                    </a:lnL>
+                    <a:lnR w="9525" cap="flat" cmpd="sng" algn="ctr">
+                      <a:solidFill>
+                        <a:srgbClr val="BFBFBF"/>
+                      </a:solidFill>
+                      <a:prstDash val="solid"/>
+                      <a:round/>
+                      <a:headEnd type="none" w="med" len="med"/>
+                      <a:tailEnd type="none" w="med" len="med"/>
+                    </a:lnR>
+                    <a:lnT w="9525" cap="flat" cmpd="sng" algn="ctr">
+                      <a:solidFill>
+                        <a:srgbClr val="BFBFBF"/>
+                      </a:solidFill>
+                      <a:prstDash val="solid"/>
+                      <a:round/>
+                      <a:headEnd type="none" w="med" len="med"/>
+                      <a:tailEnd type="none" w="med" len="med"/>
+                    </a:lnT>
+                    <a:lnB w="9525" cap="flat" cmpd="sng" algn="ctr">
+                      <a:solidFill>
+                        <a:srgbClr val="BFBFBF"/>
+                      </a:solidFill>
+                      <a:prstDash val="solid"/>
+                      <a:round/>
+                      <a:headEnd type="none" w="med" len="med"/>
+                      <a:tailEnd type="none" w="med" len="med"/>
+                    </a:lnB>
+                    <a:solidFill>
+                      <a:srgbClr val="1D2F82"/>
+                    </a:solidFill>
+                  </a:tcPr>
+                </a:tc>
+                <a:tc>
+                  <a:txBody>
+                    <a:bodyPr/>
+                    <a:lstStyle/>
+                    <a:p>
+                      <a:pPr marL="0" indent="0">
+                        <a:buNone/>
+                      </a:pPr>
+                      <a:r>
+                        <a:rPr lang="en-US" sz="1300" b="1" dirty="0">
+                          <a:solidFill>
+                            <a:srgbClr val="FFFFFF"/>
+                          </a:solidFill>
+                          <a:latin typeface="Calibri" pitchFamily="34" charset="0"/>
+                          <a:ea typeface="Calibri" pitchFamily="34" charset="-122"/>
+                          <a:cs typeface="Calibri" pitchFamily="34" charset="-120"/>
+                        </a:rPr>
+                        <a:t>Method / Approach</a:t>
+                      </a:r>
+                      <a:endParaRPr lang="en-US" sz="1300" dirty="0">
+                        <a:latin typeface="Calibri" charset="0"/>
+                        <a:ea typeface="Calibri" charset="0"/>
+                        <a:cs typeface="Calibri" charset="0"/>
+                      </a:endParaRPr>
+                    </a:p>
+                  </a:txBody>
+                  <a:tcPr marL="54864" marR="54864" marT="54864" marB="54864" anchor="ctr">
+                    <a:lnL w="9525" cap="flat" cmpd="sng" algn="ctr">
+                      <a:solidFill>
+                        <a:srgbClr val="BFBFBF"/>
+                      </a:solidFill>
+                      <a:prstDash val="solid"/>
+                      <a:round/>
+                      <a:headEnd type="none" w="med" len="med"/>
+                      <a:tailEnd type="none" w="med" len="med"/>
+                    </a:lnL>
+                    <a:lnR w="9525" cap="flat" cmpd="sng" algn="ctr">
+                      <a:solidFill>
+                        <a:srgbClr val="BFBFBF"/>
+                      </a:solidFill>
+                      <a:prstDash val="solid"/>
+                      <a:round/>
+                      <a:headEnd type="none" w="med" len="med"/>
+                      <a:tailEnd type="none" w="med" len="med"/>
+                    </a:lnR>
+                    <a:lnT w="9525" cap="flat" cmpd="sng" algn="ctr">
+                      <a:solidFill>
+                        <a:srgbClr val="BFBFBF"/>
+                      </a:solidFill>
+                      <a:prstDash val="solid"/>
+                      <a:round/>
+                      <a:headEnd type="none" w="med" len="med"/>
+                      <a:tailEnd type="none" w="med" len="med"/>
+                    </a:lnT>
+                    <a:lnB w="9525" cap="flat" cmpd="sng" algn="ctr">
+                      <a:solidFill>
+                        <a:srgbClr val="BFBFBF"/>
+                      </a:solidFill>
+                      <a:prstDash val="solid"/>
+                      <a:round/>
+                      <a:headEnd type="none" w="med" len="med"/>
+                      <a:tailEnd type="none" w="med" len="med"/>
+                    </a:lnB>
+                    <a:solidFill>
+                      <a:srgbClr val="1D2F82"/>
+                    </a:solidFill>
+                  </a:tcPr>
+                </a:tc>
+                <a:tc>
+                  <a:txBody>
+                    <a:bodyPr/>
+                    <a:lstStyle/>
+                    <a:p>
+                      <a:pPr marL="0" indent="0">
+                        <a:buNone/>
+                      </a:pPr>
+                      <a:r>
+                        <a:rPr lang="en-US" sz="1300" b="1" dirty="0">
+                          <a:solidFill>
+                            <a:srgbClr val="FFFFFF"/>
+                          </a:solidFill>
+                          <a:latin typeface="Calibri" pitchFamily="34" charset="0"/>
+                          <a:ea typeface="Calibri" pitchFamily="34" charset="-122"/>
+                          <a:cs typeface="Calibri" pitchFamily="34" charset="-120"/>
+                        </a:rPr>
+                        <a:t>Findings &amp; Research Gap</a:t>
+                      </a:r>
+                      <a:endParaRPr lang="en-US" sz="1300" dirty="0">
+                        <a:latin typeface="Calibri" charset="0"/>
+                        <a:ea typeface="Calibri" charset="0"/>
+                        <a:cs typeface="Calibri" charset="0"/>
+                      </a:endParaRPr>
+                    </a:p>
+                  </a:txBody>
+                  <a:tcPr marL="54864" marR="54864" marT="54864" marB="54864" anchor="ctr">
+                    <a:lnL w="9525" cap="flat" cmpd="sng" algn="ctr">
+                      <a:solidFill>
+                        <a:srgbClr val="BFBFBF"/>
+                      </a:solidFill>
+                      <a:prstDash val="solid"/>
+                      <a:round/>
+                      <a:headEnd type="none" w="med" len="med"/>
+                      <a:tailEnd type="none" w="med" len="med"/>
+                    </a:lnL>
+                    <a:lnR w="9525" cap="flat" cmpd="sng" algn="ctr">
+                      <a:solidFill>
+                        <a:srgbClr val="BFBFBF"/>
+                      </a:solidFill>
+                      <a:prstDash val="solid"/>
+                      <a:round/>
+                      <a:headEnd type="none" w="med" len="med"/>
+                      <a:tailEnd type="none" w="med" len="med"/>
+                    </a:lnR>
+                    <a:lnT w="9525" cap="flat" cmpd="sng" algn="ctr">
+                      <a:solidFill>
+                        <a:srgbClr val="BFBFBF"/>
+                      </a:solidFill>
+                      <a:prstDash val="solid"/>
+                      <a:round/>
+                      <a:headEnd type="none" w="med" len="med"/>
+                      <a:tailEnd type="none" w="med" len="med"/>
+                    </a:lnT>
+                    <a:lnB w="9525" cap="flat" cmpd="sng" algn="ctr">
+                      <a:solidFill>
+                        <a:srgbClr val="BFBFBF"/>
+                      </a:solidFill>
+                      <a:prstDash val="solid"/>
+                      <a:round/>
+                      <a:headEnd type="none" w="med" len="med"/>
+                      <a:tailEnd type="none" w="med" len="med"/>
+                    </a:lnB>
+                    <a:solidFill>
+                      <a:srgbClr val="1D2F82"/>
+                    </a:solidFill>
+                  </a:tcPr>
+                </a:tc>
+                <a:extLst>
+                  <a:ext uri="{0D108BD9-81ED-4DB2-BD59-A6C34878D82A}">
+                    <a16:rowId xmlns:a16="http://schemas.microsoft.com/office/drawing/2014/main" val="10000"/>
+                  </a:ext>
+                </a:extLst>
+              </a:tr>
+              <a:tr h="868680">
+                <a:tc>
+                  <a:txBody>
+                    <a:bodyPr wrap="square"/>
+                    <a:lstStyle/>
+                    <a:p>
+                      <a:pPr marL="0" indent="0">
+                        <a:buNone/>
+                      </a:pPr>
+                      <a:r>
+                        <a:rPr sz="1050" b="0">
+                          <a:solidFill>
+                            <a:srgbClr val="000000"/>
+                          </a:solidFill>
+                          <a:latin typeface="Calibri"/>
+                        </a:rPr>
+                        <a:t>5</a:t>
+                      </a:r>
+                      <a:endParaRPr lang="en-US" sz="1300" dirty="0">
+                        <a:latin typeface="Calibri" charset="0"/>
+                        <a:ea typeface="Calibri" charset="0"/>
+                        <a:cs typeface="Calibri" charset="0"/>
+                      </a:endParaRPr>
+                    </a:p>
+                  </a:txBody>
+                  <a:tcPr marL="54864" marR="54864" marT="54864" marB="54864" anchor="ctr">
+                    <a:lnL w="9525" cap="flat" cmpd="sng" algn="ctr">
+                      <a:solidFill>
+                        <a:srgbClr val="BFBFBF"/>
+                      </a:solidFill>
+                      <a:prstDash val="solid"/>
+                      <a:round/>
+                      <a:headEnd type="none" w="med" len="med"/>
+                      <a:tailEnd type="none" w="med" len="med"/>
+                    </a:lnL>
+                    <a:lnR w="9525" cap="flat" cmpd="sng" algn="ctr">
+                      <a:solidFill>
+                        <a:srgbClr val="BFBFBF"/>
+                      </a:solidFill>
+                      <a:prstDash val="solid"/>
+                      <a:round/>
+                      <a:headEnd type="none" w="med" len="med"/>
+                      <a:tailEnd type="none" w="med" len="med"/>
+                    </a:lnR>
+                    <a:lnT w="9525" cap="flat" cmpd="sng" algn="ctr">
+                      <a:solidFill>
+                        <a:srgbClr val="BFBFBF"/>
+                      </a:solidFill>
+                      <a:prstDash val="solid"/>
+                      <a:round/>
+                      <a:headEnd type="none" w="med" len="med"/>
+                      <a:tailEnd type="none" w="med" len="med"/>
+                    </a:lnT>
+                    <a:lnB w="9525" cap="flat" cmpd="sng" algn="ctr">
+                      <a:solidFill>
+                        <a:srgbClr val="BFBFBF"/>
+                      </a:solidFill>
+                      <a:prstDash val="solid"/>
+                      <a:round/>
+                      <a:headEnd type="none" w="med" len="med"/>
+                      <a:tailEnd type="none" w="med" len="med"/>
+                    </a:lnB>
+                  </a:tcPr>
+                </a:tc>
+                <a:tc>
+                  <a:txBody>
+                    <a:bodyPr wrap="square"/>
+                    <a:lstStyle/>
+                    <a:p>
+                      <a:pPr marL="0" indent="0">
+                        <a:buNone/>
+                      </a:pPr>
+                      <a:r>
+                        <a:rPr sz="1050" b="0">
+                          <a:solidFill>
+                            <a:srgbClr val="7A7A7A"/>
+                          </a:solidFill>
+                          <a:latin typeface="Calibri"/>
+                        </a:rPr>
+                        <a:t>IEEE journal (SiC active gate driver)</a:t>
+                      </a:r>
+                      <a:endParaRPr lang="en-US" sz="1300" dirty="0">
+                        <a:latin typeface="Calibri" charset="0"/>
+                        <a:ea typeface="Calibri" charset="0"/>
+                        <a:cs typeface="Calibri" charset="0"/>
+                      </a:endParaRPr>
+                    </a:p>
+                    <a:p>
+                      <a:r>
+                        <a:rPr sz="1050" b="1">
+                          <a:solidFill>
+                            <a:srgbClr val="7A7A7A"/>
+                          </a:solidFill>
+                          <a:latin typeface="Calibri"/>
+                        </a:rPr>
+                        <a:t>authors: complete from Xplore</a:t>
+                      </a:r>
+                    </a:p>
+                  </a:txBody>
+                  <a:tcPr marL="54864" marR="54864" marT="54864" marB="54864" anchor="ctr">
+                    <a:lnL w="9525" cap="flat" cmpd="sng" algn="ctr">
+                      <a:solidFill>
+                        <a:srgbClr val="BFBFBF"/>
+                      </a:solidFill>
+                      <a:prstDash val="solid"/>
+                      <a:round/>
+                      <a:headEnd type="none" w="med" len="med"/>
+                      <a:tailEnd type="none" w="med" len="med"/>
+                    </a:lnL>
+                    <a:lnR w="9525" cap="flat" cmpd="sng" algn="ctr">
+                      <a:solidFill>
+                        <a:srgbClr val="BFBFBF"/>
+                      </a:solidFill>
+                      <a:prstDash val="solid"/>
+                      <a:round/>
+                      <a:headEnd type="none" w="med" len="med"/>
+                      <a:tailEnd type="none" w="med" len="med"/>
+                    </a:lnR>
+                    <a:lnT w="9525" cap="flat" cmpd="sng" algn="ctr">
+                      <a:solidFill>
+                        <a:srgbClr val="BFBFBF"/>
+                      </a:solidFill>
+                      <a:prstDash val="solid"/>
+                      <a:round/>
+                      <a:headEnd type="none" w="med" len="med"/>
+                      <a:tailEnd type="none" w="med" len="med"/>
+                    </a:lnT>
+                    <a:lnB w="9525" cap="flat" cmpd="sng" algn="ctr">
+                      <a:solidFill>
+                        <a:srgbClr val="BFBFBF"/>
+                      </a:solidFill>
+                      <a:prstDash val="solid"/>
+                      <a:round/>
+                      <a:headEnd type="none" w="med" len="med"/>
+                      <a:tailEnd type="none" w="med" len="med"/>
+                    </a:lnB>
+                  </a:tcPr>
+                </a:tc>
+                <a:tc>
+                  <a:txBody>
+                    <a:bodyPr wrap="square"/>
+                    <a:lstStyle/>
+                    <a:p>
+                      <a:pPr marL="0" indent="0">
+                        <a:buNone/>
+                      </a:pPr>
+                      <a:r>
+                        <a:rPr sz="1050" b="0">
+                          <a:solidFill>
+                            <a:srgbClr val="000000"/>
+                          </a:solidFill>
+                          <a:latin typeface="Calibri"/>
+                        </a:rPr>
+                        <a:t>A Novel Control Strategy for Optimal Tradeoff between Overshoot and Switching Loss Based on Double Closed-Loop Self-Regulating Active Gate Driver</a:t>
+                      </a:r>
+                      <a:endParaRPr lang="en-US" sz="1300" dirty="0">
+                        <a:latin typeface="Calibri" charset="0"/>
+                        <a:ea typeface="Calibri" charset="0"/>
+                        <a:cs typeface="Calibri" charset="0"/>
+                      </a:endParaRPr>
+                    </a:p>
+                    <a:p>
+                      <a:r>
+                        <a:rPr sz="1050" b="1">
+                          <a:solidFill>
+                            <a:srgbClr val="000000"/>
+                          </a:solidFill>
+                          <a:latin typeface="Calibri"/>
+                        </a:rPr>
+                        <a:t>IEEE Xplore doc. 10553383 — vol./pp. XX</a:t>
+                      </a:r>
+                    </a:p>
+                  </a:txBody>
+                  <a:tcPr marL="54864" marR="54864" marT="54864" marB="54864" anchor="ctr">
+                    <a:lnL w="9525" cap="flat" cmpd="sng" algn="ctr">
+                      <a:solidFill>
+                        <a:srgbClr val="BFBFBF"/>
+                      </a:solidFill>
+                      <a:prstDash val="solid"/>
+                      <a:round/>
+                      <a:headEnd type="none" w="med" len="med"/>
+                      <a:tailEnd type="none" w="med" len="med"/>
+                    </a:lnL>
+                    <a:lnR w="9525" cap="flat" cmpd="sng" algn="ctr">
+                      <a:solidFill>
+                        <a:srgbClr val="BFBFBF"/>
+                      </a:solidFill>
+                      <a:prstDash val="solid"/>
+                      <a:round/>
+                      <a:headEnd type="none" w="med" len="med"/>
+                      <a:tailEnd type="none" w="med" len="med"/>
+                    </a:lnR>
+                    <a:lnT w="9525" cap="flat" cmpd="sng" algn="ctr">
+                      <a:solidFill>
+                        <a:srgbClr val="BFBFBF"/>
+                      </a:solidFill>
+                      <a:prstDash val="solid"/>
+                      <a:round/>
+                      <a:headEnd type="none" w="med" len="med"/>
+                      <a:tailEnd type="none" w="med" len="med"/>
+                    </a:lnT>
+                    <a:lnB w="9525" cap="flat" cmpd="sng" algn="ctr">
+                      <a:solidFill>
+                        <a:srgbClr val="BFBFBF"/>
+                      </a:solidFill>
+                      <a:prstDash val="solid"/>
+                      <a:round/>
+                      <a:headEnd type="none" w="med" len="med"/>
+                      <a:tailEnd type="none" w="med" len="med"/>
+                    </a:lnB>
+                  </a:tcPr>
+                </a:tc>
+                <a:tc>
+                  <a:txBody>
+                    <a:bodyPr wrap="square"/>
+                    <a:lstStyle/>
+                    <a:p>
+                      <a:pPr marL="0" indent="0">
+                        <a:buNone/>
+                      </a:pPr>
+                      <a:r>
+                        <a:rPr sz="1050" b="0">
+                          <a:solidFill>
+                            <a:srgbClr val="000000"/>
+                          </a:solidFill>
+                          <a:latin typeface="Calibri"/>
+                        </a:rPr>
+                        <a:t>Weight-based closed-loop control balancing overshoot against turn-off loss per operating condition</a:t>
+                      </a:r>
+                      <a:endParaRPr lang="en-US" sz="1300" dirty="0">
+                        <a:latin typeface="Calibri" charset="0"/>
+                        <a:ea typeface="Calibri" charset="0"/>
+                        <a:cs typeface="Calibri" charset="0"/>
+                      </a:endParaRPr>
+                    </a:p>
+                  </a:txBody>
+                  <a:tcPr marL="54864" marR="54864" marT="54864" marB="54864" anchor="ctr">
+                    <a:lnL w="9525" cap="flat" cmpd="sng" algn="ctr">
+                      <a:solidFill>
+                        <a:srgbClr val="BFBFBF"/>
+                      </a:solidFill>
+                      <a:prstDash val="solid"/>
+                      <a:round/>
+                      <a:headEnd type="none" w="med" len="med"/>
+                      <a:tailEnd type="none" w="med" len="med"/>
+                    </a:lnL>
+                    <a:lnR w="9525" cap="flat" cmpd="sng" algn="ctr">
+                      <a:solidFill>
+                        <a:srgbClr val="BFBFBF"/>
+                      </a:solidFill>
+                      <a:prstDash val="solid"/>
+                      <a:round/>
+                      <a:headEnd type="none" w="med" len="med"/>
+                      <a:tailEnd type="none" w="med" len="med"/>
+                    </a:lnR>
+                    <a:lnT w="9525" cap="flat" cmpd="sng" algn="ctr">
+                      <a:solidFill>
+                        <a:srgbClr val="BFBFBF"/>
+                      </a:solidFill>
+                      <a:prstDash val="solid"/>
+                      <a:round/>
+                      <a:headEnd type="none" w="med" len="med"/>
+                      <a:tailEnd type="none" w="med" len="med"/>
+                    </a:lnT>
+                    <a:lnB w="9525" cap="flat" cmpd="sng" algn="ctr">
+                      <a:solidFill>
+                        <a:srgbClr val="BFBFBF"/>
+                      </a:solidFill>
+                      <a:prstDash val="solid"/>
+                      <a:round/>
+                      <a:headEnd type="none" w="med" len="med"/>
+                      <a:tailEnd type="none" w="med" len="med"/>
+                    </a:lnB>
+                  </a:tcPr>
+                </a:tc>
+                <a:tc>
+                  <a:txBody>
+                    <a:bodyPr wrap="square"/>
+                    <a:lstStyle/>
+                    <a:p>
+                      <a:pPr marL="0" indent="0">
+                        <a:buNone/>
+                      </a:pPr>
+                      <a:r>
+                        <a:rPr sz="1050" b="0">
+                          <a:solidFill>
+                            <a:srgbClr val="000000"/>
+                          </a:solidFill>
+                          <a:latin typeface="Calibri"/>
+                        </a:rPr>
+                        <a:t>Reports 30.5 % less overshoot and 75 % less turn-off loss. Optimises the same two objectives as our cost function, but never bounds what the adaptation itself is worth against a fixed setting.</a:t>
+                      </a:r>
+                      <a:endParaRPr lang="en-US" sz="1300" dirty="0">
+                        <a:latin typeface="Calibri" charset="0"/>
+                        <a:ea typeface="Calibri" charset="0"/>
+                        <a:cs typeface="Calibri" charset="0"/>
+                      </a:endParaRPr>
+                    </a:p>
+                  </a:txBody>
+                  <a:tcPr marL="54864" marR="54864" marT="54864" marB="54864" anchor="ctr">
+                    <a:lnL w="9525" cap="flat" cmpd="sng" algn="ctr">
+                      <a:solidFill>
+                        <a:srgbClr val="BFBFBF"/>
+                      </a:solidFill>
+                      <a:prstDash val="solid"/>
+                      <a:round/>
+                      <a:headEnd type="none" w="med" len="med"/>
+                      <a:tailEnd type="none" w="med" len="med"/>
+                    </a:lnL>
+                    <a:lnR w="9525" cap="flat" cmpd="sng" algn="ctr">
+                      <a:solidFill>
+                        <a:srgbClr val="BFBFBF"/>
+                      </a:solidFill>
+                      <a:prstDash val="solid"/>
+                      <a:round/>
+                      <a:headEnd type="none" w="med" len="med"/>
+                      <a:tailEnd type="none" w="med" len="med"/>
+                    </a:lnR>
+                    <a:lnT w="9525" cap="flat" cmpd="sng" algn="ctr">
+                      <a:solidFill>
+                        <a:srgbClr val="BFBFBF"/>
+                      </a:solidFill>
+                      <a:prstDash val="solid"/>
+                      <a:round/>
+                      <a:headEnd type="none" w="med" len="med"/>
+                      <a:tailEnd type="none" w="med" len="med"/>
+                    </a:lnT>
+                    <a:lnB w="9525" cap="flat" cmpd="sng" algn="ctr">
+                      <a:solidFill>
+                        <a:srgbClr val="BFBFBF"/>
+                      </a:solidFill>
+                      <a:prstDash val="solid"/>
+                      <a:round/>
+                      <a:headEnd type="none" w="med" len="med"/>
+                      <a:tailEnd type="none" w="med" len="med"/>
+                    </a:lnB>
+                  </a:tcPr>
+                </a:tc>
+                <a:extLst>
+                  <a:ext uri="{0D108BD9-81ED-4DB2-BD59-A6C34878D82A}">
+                    <a16:rowId xmlns:a16="http://schemas.microsoft.com/office/drawing/2014/main" val="10001"/>
+                  </a:ext>
+                </a:extLst>
+              </a:tr>
+              <a:tr h="868680">
+                <a:tc>
+                  <a:txBody>
+                    <a:bodyPr wrap="square"/>
+                    <a:lstStyle/>
+                    <a:p>
+                      <a:pPr marL="0" indent="0">
+                        <a:buNone/>
+                      </a:pPr>
+                      <a:r>
+                        <a:rPr sz="1050" b="0">
+                          <a:solidFill>
+                            <a:srgbClr val="000000"/>
+                          </a:solidFill>
+                          <a:latin typeface="Calibri"/>
+                        </a:rPr>
+                        <a:t>6</a:t>
+                      </a:r>
+                      <a:endParaRPr lang="en-US" sz="1300" dirty="0">
+                        <a:latin typeface="Calibri" charset="0"/>
+                        <a:ea typeface="Calibri" charset="0"/>
+                        <a:cs typeface="Calibri" charset="0"/>
+                      </a:endParaRPr>
+                    </a:p>
+                  </a:txBody>
+                  <a:tcPr marL="54864" marR="54864" marT="54864" marB="54864" anchor="ctr">
+                    <a:lnL w="9525" cap="flat" cmpd="sng" algn="ctr">
+                      <a:solidFill>
+                        <a:srgbClr val="BFBFBF"/>
+                      </a:solidFill>
+                      <a:prstDash val="solid"/>
+                      <a:round/>
+                      <a:headEnd type="none" w="med" len="med"/>
+                      <a:tailEnd type="none" w="med" len="med"/>
+                    </a:lnL>
+                    <a:lnR w="9525" cap="flat" cmpd="sng" algn="ctr">
+                      <a:solidFill>
+                        <a:srgbClr val="BFBFBF"/>
+                      </a:solidFill>
+                      <a:prstDash val="solid"/>
+                      <a:round/>
+                      <a:headEnd type="none" w="med" len="med"/>
+                      <a:tailEnd type="none" w="med" len="med"/>
+                    </a:lnR>
+                    <a:lnT w="9525" cap="flat" cmpd="sng" algn="ctr">
+                      <a:solidFill>
+                        <a:srgbClr val="BFBFBF"/>
+                      </a:solidFill>
+                      <a:prstDash val="solid"/>
+                      <a:round/>
+                      <a:headEnd type="none" w="med" len="med"/>
+                      <a:tailEnd type="none" w="med" len="med"/>
+                    </a:lnT>
+                    <a:lnB w="9525" cap="flat" cmpd="sng" algn="ctr">
+                      <a:solidFill>
+                        <a:srgbClr val="BFBFBF"/>
+                      </a:solidFill>
+                      <a:prstDash val="solid"/>
+                      <a:round/>
+                      <a:headEnd type="none" w="med" len="med"/>
+                      <a:tailEnd type="none" w="med" len="med"/>
+                    </a:lnB>
+                  </a:tcPr>
+                </a:tc>
+                <a:tc>
+                  <a:txBody>
+                    <a:bodyPr wrap="square"/>
+                    <a:lstStyle/>
+                    <a:p>
+                      <a:pPr marL="0" indent="0">
+                        <a:buNone/>
+                      </a:pPr>
+                      <a:r>
+                        <a:rPr sz="1050" b="0">
+                          <a:solidFill>
+                            <a:srgbClr val="7A7A7A"/>
+                          </a:solidFill>
+                          <a:latin typeface="Calibri"/>
+                        </a:rPr>
+                        <a:t>IEEE journal (SiC active gate driver)</a:t>
+                      </a:r>
+                      <a:endParaRPr lang="en-US" sz="1300" dirty="0">
+                        <a:latin typeface="Calibri" charset="0"/>
+                        <a:ea typeface="Calibri" charset="0"/>
+                        <a:cs typeface="Calibri" charset="0"/>
+                      </a:endParaRPr>
+                    </a:p>
+                    <a:p>
+                      <a:r>
+                        <a:rPr sz="1050" b="1">
+                          <a:solidFill>
+                            <a:srgbClr val="7A7A7A"/>
+                          </a:solidFill>
+                          <a:latin typeface="Calibri"/>
+                        </a:rPr>
+                        <a:t>authors: complete from Xplore</a:t>
+                      </a:r>
+                    </a:p>
+                  </a:txBody>
+                  <a:tcPr marL="54864" marR="54864" marT="54864" marB="54864" anchor="ctr">
+                    <a:lnL w="9525" cap="flat" cmpd="sng" algn="ctr">
+                      <a:solidFill>
+                        <a:srgbClr val="BFBFBF"/>
+                      </a:solidFill>
+                      <a:prstDash val="solid"/>
+                      <a:round/>
+                      <a:headEnd type="none" w="med" len="med"/>
+                      <a:tailEnd type="none" w="med" len="med"/>
+                    </a:lnL>
+                    <a:lnR w="9525" cap="flat" cmpd="sng" algn="ctr">
+                      <a:solidFill>
+                        <a:srgbClr val="BFBFBF"/>
+                      </a:solidFill>
+                      <a:prstDash val="solid"/>
+                      <a:round/>
+                      <a:headEnd type="none" w="med" len="med"/>
+                      <a:tailEnd type="none" w="med" len="med"/>
+                    </a:lnR>
+                    <a:lnT w="9525" cap="flat" cmpd="sng" algn="ctr">
+                      <a:solidFill>
+                        <a:srgbClr val="BFBFBF"/>
+                      </a:solidFill>
+                      <a:prstDash val="solid"/>
+                      <a:round/>
+                      <a:headEnd type="none" w="med" len="med"/>
+                      <a:tailEnd type="none" w="med" len="med"/>
+                    </a:lnT>
+                    <a:lnB w="9525" cap="flat" cmpd="sng" algn="ctr">
+                      <a:solidFill>
+                        <a:srgbClr val="BFBFBF"/>
+                      </a:solidFill>
+                      <a:prstDash val="solid"/>
+                      <a:round/>
+                      <a:headEnd type="none" w="med" len="med"/>
+                      <a:tailEnd type="none" w="med" len="med"/>
+                    </a:lnB>
+                  </a:tcPr>
+                </a:tc>
+                <a:tc>
+                  <a:txBody>
+                    <a:bodyPr wrap="square"/>
+                    <a:lstStyle/>
+                    <a:p>
+                      <a:pPr marL="0" indent="0">
+                        <a:buNone/>
+                      </a:pPr>
+                      <a:r>
+                        <a:rPr sz="1050" b="0">
+                          <a:solidFill>
+                            <a:srgbClr val="000000"/>
+                          </a:solidFill>
+                          <a:latin typeface="Calibri"/>
+                        </a:rPr>
+                        <a:t>A Self-Regulating Active Gate Driver of Voltage Overshoot Suppression for SiC MOSFETs Under Variable Load Current Conditions</a:t>
+                      </a:r>
+                      <a:endParaRPr lang="en-US" sz="1300" dirty="0">
+                        <a:latin typeface="Calibri" charset="0"/>
+                        <a:ea typeface="Calibri" charset="0"/>
+                        <a:cs typeface="Calibri" charset="0"/>
+                      </a:endParaRPr>
+                    </a:p>
+                    <a:p>
+                      <a:r>
+                        <a:rPr sz="1050" b="1">
+                          <a:solidFill>
+                            <a:srgbClr val="000000"/>
+                          </a:solidFill>
+                          <a:latin typeface="Calibri"/>
+                        </a:rPr>
+                        <a:t>IEEE Xplore doc. 10964227 — vol./pp. XX</a:t>
+                      </a:r>
+                    </a:p>
+                  </a:txBody>
+                  <a:tcPr marL="54864" marR="54864" marT="54864" marB="54864" anchor="ctr">
+                    <a:lnL w="9525" cap="flat" cmpd="sng" algn="ctr">
+                      <a:solidFill>
+                        <a:srgbClr val="BFBFBF"/>
+                      </a:solidFill>
+                      <a:prstDash val="solid"/>
+                      <a:round/>
+                      <a:headEnd type="none" w="med" len="med"/>
+                      <a:tailEnd type="none" w="med" len="med"/>
+                    </a:lnL>
+                    <a:lnR w="9525" cap="flat" cmpd="sng" algn="ctr">
+                      <a:solidFill>
+                        <a:srgbClr val="BFBFBF"/>
+                      </a:solidFill>
+                      <a:prstDash val="solid"/>
+                      <a:round/>
+                      <a:headEnd type="none" w="med" len="med"/>
+                      <a:tailEnd type="none" w="med" len="med"/>
+                    </a:lnR>
+                    <a:lnT w="9525" cap="flat" cmpd="sng" algn="ctr">
+                      <a:solidFill>
+                        <a:srgbClr val="BFBFBF"/>
+                      </a:solidFill>
+                      <a:prstDash val="solid"/>
+                      <a:round/>
+                      <a:headEnd type="none" w="med" len="med"/>
+                      <a:tailEnd type="none" w="med" len="med"/>
+                    </a:lnT>
+                    <a:lnB w="9525" cap="flat" cmpd="sng" algn="ctr">
+                      <a:solidFill>
+                        <a:srgbClr val="BFBFBF"/>
+                      </a:solidFill>
+                      <a:prstDash val="solid"/>
+                      <a:round/>
+                      <a:headEnd type="none" w="med" len="med"/>
+                      <a:tailEnd type="none" w="med" len="med"/>
+                    </a:lnB>
+                  </a:tcPr>
+                </a:tc>
+                <a:tc>
+                  <a:txBody>
+                    <a:bodyPr wrap="square"/>
+                    <a:lstStyle/>
+                    <a:p>
+                      <a:pPr marL="0" indent="0">
+                        <a:buNone/>
+                      </a:pPr>
+                      <a:r>
+                        <a:rPr sz="1050" b="0">
+                          <a:solidFill>
+                            <a:srgbClr val="000000"/>
+                          </a:solidFill>
+                          <a:latin typeface="Calibri"/>
+                        </a:rPr>
+                        <a:t>Gate drive self-regulates as load current varies</a:t>
+                      </a:r>
+                      <a:endParaRPr lang="en-US" sz="1300" dirty="0">
+                        <a:latin typeface="Calibri" charset="0"/>
+                        <a:ea typeface="Calibri" charset="0"/>
+                        <a:cs typeface="Calibri" charset="0"/>
+                      </a:endParaRPr>
+                    </a:p>
+                  </a:txBody>
+                  <a:tcPr marL="54864" marR="54864" marT="54864" marB="54864" anchor="ctr">
+                    <a:lnL w="9525" cap="flat" cmpd="sng" algn="ctr">
+                      <a:solidFill>
+                        <a:srgbClr val="BFBFBF"/>
+                      </a:solidFill>
+                      <a:prstDash val="solid"/>
+                      <a:round/>
+                      <a:headEnd type="none" w="med" len="med"/>
+                      <a:tailEnd type="none" w="med" len="med"/>
+                    </a:lnL>
+                    <a:lnR w="9525" cap="flat" cmpd="sng" algn="ctr">
+                      <a:solidFill>
+                        <a:srgbClr val="BFBFBF"/>
+                      </a:solidFill>
+                      <a:prstDash val="solid"/>
+                      <a:round/>
+                      <a:headEnd type="none" w="med" len="med"/>
+                      <a:tailEnd type="none" w="med" len="med"/>
+                    </a:lnR>
+                    <a:lnT w="9525" cap="flat" cmpd="sng" algn="ctr">
+                      <a:solidFill>
+                        <a:srgbClr val="BFBFBF"/>
+                      </a:solidFill>
+                      <a:prstDash val="solid"/>
+                      <a:round/>
+                      <a:headEnd type="none" w="med" len="med"/>
+                      <a:tailEnd type="none" w="med" len="med"/>
+                    </a:lnT>
+                    <a:lnB w="9525" cap="flat" cmpd="sng" algn="ctr">
+                      <a:solidFill>
+                        <a:srgbClr val="BFBFBF"/>
+                      </a:solidFill>
+                      <a:prstDash val="solid"/>
+                      <a:round/>
+                      <a:headEnd type="none" w="med" len="med"/>
+                      <a:tailEnd type="none" w="med" len="med"/>
+                    </a:lnB>
+                  </a:tcPr>
+                </a:tc>
+                <a:tc>
+                  <a:txBody>
+                    <a:bodyPr wrap="square"/>
+                    <a:lstStyle/>
+                    <a:p>
+                      <a:pPr marL="0" indent="0">
+                        <a:buNone/>
+                      </a:pPr>
+                      <a:r>
+                        <a:rPr sz="1050" b="0">
+                          <a:solidFill>
+                            <a:srgbClr val="000000"/>
+                          </a:solidFill>
+                          <a:latin typeface="Calibri"/>
+                        </a:rPr>
+                        <a:t>Adaptation to the operating point is the premise, not a tested hypothesis. This is precisely the claim our exhaustive search isolates and measures at 5.2 %.</a:t>
+                      </a:r>
+                      <a:endParaRPr lang="en-US" sz="1300" dirty="0">
+                        <a:latin typeface="Calibri" charset="0"/>
+                        <a:ea typeface="Calibri" charset="0"/>
+                        <a:cs typeface="Calibri" charset="0"/>
+                      </a:endParaRPr>
+                    </a:p>
+                  </a:txBody>
+                  <a:tcPr marL="54864" marR="54864" marT="54864" marB="54864" anchor="ctr">
+                    <a:lnL w="9525" cap="flat" cmpd="sng" algn="ctr">
+                      <a:solidFill>
+                        <a:srgbClr val="BFBFBF"/>
+                      </a:solidFill>
+                      <a:prstDash val="solid"/>
+                      <a:round/>
+                      <a:headEnd type="none" w="med" len="med"/>
+                      <a:tailEnd type="none" w="med" len="med"/>
+                    </a:lnL>
+                    <a:lnR w="9525" cap="flat" cmpd="sng" algn="ctr">
+                      <a:solidFill>
+                        <a:srgbClr val="BFBFBF"/>
+                      </a:solidFill>
+                      <a:prstDash val="solid"/>
+                      <a:round/>
+                      <a:headEnd type="none" w="med" len="med"/>
+                      <a:tailEnd type="none" w="med" len="med"/>
+                    </a:lnR>
+                    <a:lnT w="9525" cap="flat" cmpd="sng" algn="ctr">
+                      <a:solidFill>
+                        <a:srgbClr val="BFBFBF"/>
+                      </a:solidFill>
+                      <a:prstDash val="solid"/>
+                      <a:round/>
+                      <a:headEnd type="none" w="med" len="med"/>
+                      <a:tailEnd type="none" w="med" len="med"/>
+                    </a:lnT>
+                    <a:lnB w="9525" cap="flat" cmpd="sng" algn="ctr">
+                      <a:solidFill>
+                        <a:srgbClr val="BFBFBF"/>
+                      </a:solidFill>
+                      <a:prstDash val="solid"/>
+                      <a:round/>
+                      <a:headEnd type="none" w="med" len="med"/>
+                      <a:tailEnd type="none" w="med" len="med"/>
+                    </a:lnB>
+                  </a:tcPr>
+                </a:tc>
+                <a:extLst>
+                  <a:ext uri="{0D108BD9-81ED-4DB2-BD59-A6C34878D82A}">
+                    <a16:rowId xmlns:a16="http://schemas.microsoft.com/office/drawing/2014/main" val="10002"/>
+                  </a:ext>
+                </a:extLst>
+              </a:tr>
+              <a:tr h="868680">
+                <a:tc>
+                  <a:txBody>
+                    <a:bodyPr wrap="square"/>
+                    <a:lstStyle/>
+                    <a:p>
+                      <a:pPr marL="0" indent="0">
+                        <a:buNone/>
+                      </a:pPr>
+                      <a:r>
+                        <a:rPr sz="1050" b="0">
+                          <a:solidFill>
+                            <a:srgbClr val="000000"/>
+                          </a:solidFill>
+                          <a:latin typeface="Calibri"/>
+                        </a:rPr>
+                        <a:t>7</a:t>
+                      </a:r>
+                      <a:endParaRPr lang="en-US" sz="1300" dirty="0">
+                        <a:latin typeface="Calibri" charset="0"/>
+                        <a:ea typeface="Calibri" charset="0"/>
+                        <a:cs typeface="Calibri" charset="0"/>
+                      </a:endParaRPr>
+                    </a:p>
+                  </a:txBody>
+                  <a:tcPr marL="54864" marR="54864" marT="54864" marB="54864" anchor="ctr">
+                    <a:lnL w="9525" cap="flat" cmpd="sng" algn="ctr">
+                      <a:solidFill>
+                        <a:srgbClr val="BFBFBF"/>
+                      </a:solidFill>
+                      <a:prstDash val="solid"/>
+                      <a:round/>
+                      <a:headEnd type="none" w="med" len="med"/>
+                      <a:tailEnd type="none" w="med" len="med"/>
+                    </a:lnL>
+                    <a:lnR w="9525" cap="flat" cmpd="sng" algn="ctr">
+                      <a:solidFill>
+                        <a:srgbClr val="BFBFBF"/>
+                      </a:solidFill>
+                      <a:prstDash val="solid"/>
+                      <a:round/>
+                      <a:headEnd type="none" w="med" len="med"/>
+                      <a:tailEnd type="none" w="med" len="med"/>
+                    </a:lnR>
+                    <a:lnT w="9525" cap="flat" cmpd="sng" algn="ctr">
+                      <a:solidFill>
+                        <a:srgbClr val="BFBFBF"/>
+                      </a:solidFill>
+                      <a:prstDash val="solid"/>
+                      <a:round/>
+                      <a:headEnd type="none" w="med" len="med"/>
+                      <a:tailEnd type="none" w="med" len="med"/>
+                    </a:lnT>
+                    <a:lnB w="9525" cap="flat" cmpd="sng" algn="ctr">
+                      <a:solidFill>
+                        <a:srgbClr val="BFBFBF"/>
+                      </a:solidFill>
+                      <a:prstDash val="solid"/>
+                      <a:round/>
+                      <a:headEnd type="none" w="med" len="med"/>
+                      <a:tailEnd type="none" w="med" len="med"/>
+                    </a:lnB>
+                  </a:tcPr>
+                </a:tc>
+                <a:tc>
+                  <a:txBody>
+                    <a:bodyPr wrap="square"/>
+                    <a:lstStyle/>
+                    <a:p>
+                      <a:pPr marL="0" indent="0">
+                        <a:buNone/>
+                      </a:pPr>
+                      <a:r>
+                        <a:rPr sz="1050" b="0">
+                          <a:solidFill>
+                            <a:srgbClr val="7A7A7A"/>
+                          </a:solidFill>
+                          <a:latin typeface="Calibri"/>
+                        </a:rPr>
+                        <a:t>IEEE journal (SiC gate driver IC)</a:t>
+                      </a:r>
+                      <a:endParaRPr lang="en-US" sz="1300" dirty="0">
+                        <a:latin typeface="Calibri" charset="0"/>
+                        <a:ea typeface="Calibri" charset="0"/>
+                        <a:cs typeface="Calibri" charset="0"/>
+                      </a:endParaRPr>
+                    </a:p>
+                    <a:p>
+                      <a:r>
+                        <a:rPr sz="1050" b="1">
+                          <a:solidFill>
+                            <a:srgbClr val="7A7A7A"/>
+                          </a:solidFill>
+                          <a:latin typeface="Calibri"/>
+                        </a:rPr>
+                        <a:t>authors: complete from Xplore</a:t>
+                      </a:r>
+                    </a:p>
+                  </a:txBody>
+                  <a:tcPr marL="54864" marR="54864" marT="54864" marB="54864" anchor="ctr">
+                    <a:lnL w="9525" cap="flat" cmpd="sng" algn="ctr">
+                      <a:solidFill>
+                        <a:srgbClr val="BFBFBF"/>
+                      </a:solidFill>
+                      <a:prstDash val="solid"/>
+                      <a:round/>
+                      <a:headEnd type="none" w="med" len="med"/>
+                      <a:tailEnd type="none" w="med" len="med"/>
+                    </a:lnL>
+                    <a:lnR w="9525" cap="flat" cmpd="sng" algn="ctr">
+                      <a:solidFill>
+                        <a:srgbClr val="BFBFBF"/>
+                      </a:solidFill>
+                      <a:prstDash val="solid"/>
+                      <a:round/>
+                      <a:headEnd type="none" w="med" len="med"/>
+                      <a:tailEnd type="none" w="med" len="med"/>
+                    </a:lnR>
+                    <a:lnT w="9525" cap="flat" cmpd="sng" algn="ctr">
+                      <a:solidFill>
+                        <a:srgbClr val="BFBFBF"/>
+                      </a:solidFill>
+                      <a:prstDash val="solid"/>
+                      <a:round/>
+                      <a:headEnd type="none" w="med" len="med"/>
+                      <a:tailEnd type="none" w="med" len="med"/>
+                    </a:lnT>
+                    <a:lnB w="9525" cap="flat" cmpd="sng" algn="ctr">
+                      <a:solidFill>
+                        <a:srgbClr val="BFBFBF"/>
+                      </a:solidFill>
+                      <a:prstDash val="solid"/>
+                      <a:round/>
+                      <a:headEnd type="none" w="med" len="med"/>
+                      <a:tailEnd type="none" w="med" len="med"/>
+                    </a:lnB>
+                  </a:tcPr>
+                </a:tc>
+                <a:tc>
+                  <a:txBody>
+                    <a:bodyPr wrap="square"/>
+                    <a:lstStyle/>
+                    <a:p>
+                      <a:pPr marL="0" indent="0">
+                        <a:buNone/>
+                      </a:pPr>
+                      <a:r>
+                        <a:rPr sz="1050" b="0">
+                          <a:solidFill>
+                            <a:srgbClr val="000000"/>
+                          </a:solidFill>
+                          <a:latin typeface="Calibri"/>
+                        </a:rPr>
+                        <a:t>Universal Active Gate Driver IC With Closed-Loop Timing Control and Gate-Sensing Technique for Silicon Carbide Power Devices</a:t>
+                      </a:r>
+                      <a:endParaRPr lang="en-US" sz="1300" dirty="0">
+                        <a:latin typeface="Calibri" charset="0"/>
+                        <a:ea typeface="Calibri" charset="0"/>
+                        <a:cs typeface="Calibri" charset="0"/>
+                      </a:endParaRPr>
+                    </a:p>
+                    <a:p>
+                      <a:r>
+                        <a:rPr sz="1050" b="1">
+                          <a:solidFill>
+                            <a:srgbClr val="000000"/>
+                          </a:solidFill>
+                          <a:latin typeface="Calibri"/>
+                        </a:rPr>
+                        <a:t>IEEE Xplore doc. 10813402 — vol./pp. XX</a:t>
+                      </a:r>
+                    </a:p>
+                  </a:txBody>
+                  <a:tcPr marL="54864" marR="54864" marT="54864" marB="54864" anchor="ctr">
+                    <a:lnL w="9525" cap="flat" cmpd="sng" algn="ctr">
+                      <a:solidFill>
+                        <a:srgbClr val="BFBFBF"/>
+                      </a:solidFill>
+                      <a:prstDash val="solid"/>
+                      <a:round/>
+                      <a:headEnd type="none" w="med" len="med"/>
+                      <a:tailEnd type="none" w="med" len="med"/>
+                    </a:lnL>
+                    <a:lnR w="9525" cap="flat" cmpd="sng" algn="ctr">
+                      <a:solidFill>
+                        <a:srgbClr val="BFBFBF"/>
+                      </a:solidFill>
+                      <a:prstDash val="solid"/>
+                      <a:round/>
+                      <a:headEnd type="none" w="med" len="med"/>
+                      <a:tailEnd type="none" w="med" len="med"/>
+                    </a:lnR>
+                    <a:lnT w="9525" cap="flat" cmpd="sng" algn="ctr">
+                      <a:solidFill>
+                        <a:srgbClr val="BFBFBF"/>
+                      </a:solidFill>
+                      <a:prstDash val="solid"/>
+                      <a:round/>
+                      <a:headEnd type="none" w="med" len="med"/>
+                      <a:tailEnd type="none" w="med" len="med"/>
+                    </a:lnT>
+                    <a:lnB w="9525" cap="flat" cmpd="sng" algn="ctr">
+                      <a:solidFill>
+                        <a:srgbClr val="BFBFBF"/>
+                      </a:solidFill>
+                      <a:prstDash val="solid"/>
+                      <a:round/>
+                      <a:headEnd type="none" w="med" len="med"/>
+                      <a:tailEnd type="none" w="med" len="med"/>
+                    </a:lnB>
+                  </a:tcPr>
+                </a:tc>
+                <a:tc>
+                  <a:txBody>
+                    <a:bodyPr wrap="square"/>
+                    <a:lstStyle/>
+                    <a:p>
+                      <a:pPr marL="0" indent="0">
+                        <a:buNone/>
+                      </a:pPr>
+                      <a:r>
+                        <a:rPr sz="1050" b="0">
+                          <a:solidFill>
+                            <a:srgbClr val="000000"/>
+                          </a:solidFill>
+                          <a:latin typeface="Calibri"/>
+                        </a:rPr>
+                        <a:t>Integrated driver with closed-loop timing and on-chip gate sensing</a:t>
+                      </a:r>
+                      <a:endParaRPr lang="en-US" sz="1300" dirty="0">
+                        <a:latin typeface="Calibri" charset="0"/>
+                        <a:ea typeface="Calibri" charset="0"/>
+                        <a:cs typeface="Calibri" charset="0"/>
+                      </a:endParaRPr>
+                    </a:p>
+                  </a:txBody>
+                  <a:tcPr marL="54864" marR="54864" marT="54864" marB="54864" anchor="ctr">
+                    <a:lnL w="9525" cap="flat" cmpd="sng" algn="ctr">
+                      <a:solidFill>
+                        <a:srgbClr val="BFBFBF"/>
+                      </a:solidFill>
+                      <a:prstDash val="solid"/>
+                      <a:round/>
+                      <a:headEnd type="none" w="med" len="med"/>
+                      <a:tailEnd type="none" w="med" len="med"/>
+                    </a:lnL>
+                    <a:lnR w="9525" cap="flat" cmpd="sng" algn="ctr">
+                      <a:solidFill>
+                        <a:srgbClr val="BFBFBF"/>
+                      </a:solidFill>
+                      <a:prstDash val="solid"/>
+                      <a:round/>
+                      <a:headEnd type="none" w="med" len="med"/>
+                      <a:tailEnd type="none" w="med" len="med"/>
+                    </a:lnR>
+                    <a:lnT w="9525" cap="flat" cmpd="sng" algn="ctr">
+                      <a:solidFill>
+                        <a:srgbClr val="BFBFBF"/>
+                      </a:solidFill>
+                      <a:prstDash val="solid"/>
+                      <a:round/>
+                      <a:headEnd type="none" w="med" len="med"/>
+                      <a:tailEnd type="none" w="med" len="med"/>
+                    </a:lnT>
+                    <a:lnB w="9525" cap="flat" cmpd="sng" algn="ctr">
+                      <a:solidFill>
+                        <a:srgbClr val="BFBFBF"/>
+                      </a:solidFill>
+                      <a:prstDash val="solid"/>
+                      <a:round/>
+                      <a:headEnd type="none" w="med" len="med"/>
+                      <a:tailEnd type="none" w="med" len="med"/>
+                    </a:lnB>
+                  </a:tcPr>
+                </a:tc>
+                <a:tc>
+                  <a:txBody>
+                    <a:bodyPr wrap="square"/>
+                    <a:lstStyle/>
+                    <a:p>
+                      <a:pPr marL="0" indent="0">
+                        <a:buNone/>
+                      </a:pPr>
+                      <a:r>
+                        <a:rPr sz="1050" b="0">
+                          <a:solidFill>
+                            <a:srgbClr val="000000"/>
+                          </a:solidFill>
+                          <a:latin typeface="Calibri"/>
+                        </a:rPr>
+                        <a:t>The sensing and control hardware that per-operating-point scheduling requires. Our result bounds the benefit that hardware can deliver on this architecture at a few per cent.</a:t>
+                      </a:r>
+                      <a:endParaRPr lang="en-US" sz="1300" dirty="0">
+                        <a:latin typeface="Calibri" charset="0"/>
+                        <a:ea typeface="Calibri" charset="0"/>
+                        <a:cs typeface="Calibri" charset="0"/>
+                      </a:endParaRPr>
+                    </a:p>
+                  </a:txBody>
+                  <a:tcPr marL="54864" marR="54864" marT="54864" marB="54864" anchor="ctr">
+                    <a:lnL w="9525" cap="flat" cmpd="sng" algn="ctr">
+                      <a:solidFill>
+                        <a:srgbClr val="BFBFBF"/>
+                      </a:solidFill>
+                      <a:prstDash val="solid"/>
+                      <a:round/>
+                      <a:headEnd type="none" w="med" len="med"/>
+                      <a:tailEnd type="none" w="med" len="med"/>
+                    </a:lnL>
+                    <a:lnR w="9525" cap="flat" cmpd="sng" algn="ctr">
+                      <a:solidFill>
+                        <a:srgbClr val="BFBFBF"/>
+                      </a:solidFill>
+                      <a:prstDash val="solid"/>
+                      <a:round/>
+                      <a:headEnd type="none" w="med" len="med"/>
+                      <a:tailEnd type="none" w="med" len="med"/>
+                    </a:lnR>
+                    <a:lnT w="9525" cap="flat" cmpd="sng" algn="ctr">
+                      <a:solidFill>
+                        <a:srgbClr val="BFBFBF"/>
+                      </a:solidFill>
+                      <a:prstDash val="solid"/>
+                      <a:round/>
+                      <a:headEnd type="none" w="med" len="med"/>
+                      <a:tailEnd type="none" w="med" len="med"/>
+                    </a:lnT>
+                    <a:lnB w="9525" cap="flat" cmpd="sng" algn="ctr">
+                      <a:solidFill>
+                        <a:srgbClr val="BFBFBF"/>
+                      </a:solidFill>
+                      <a:prstDash val="solid"/>
+                      <a:round/>
+                      <a:headEnd type="none" w="med" len="med"/>
+                      <a:tailEnd type="none" w="med" len="med"/>
+                    </a:lnB>
+                  </a:tcPr>
+                </a:tc>
+                <a:extLst>
+                  <a:ext uri="{0D108BD9-81ED-4DB2-BD59-A6C34878D82A}">
+                    <a16:rowId xmlns:a16="http://schemas.microsoft.com/office/drawing/2014/main" val="10003"/>
+                  </a:ext>
+                </a:extLst>
+              </a:tr>
+              <a:tr h="868680">
+                <a:tc>
+                  <a:txBody>
+                    <a:bodyPr wrap="square"/>
+                    <a:lstStyle/>
+                    <a:p>
+                      <a:pPr marL="0" indent="0">
+                        <a:buNone/>
+                      </a:pPr>
+                      <a:r>
+                        <a:rPr sz="1050" b="0">
+                          <a:solidFill>
+                            <a:srgbClr val="000000"/>
+                          </a:solidFill>
+                          <a:latin typeface="Calibri"/>
+                        </a:rPr>
+                        <a:t>8</a:t>
+                      </a:r>
+                      <a:endParaRPr lang="en-US" sz="1300" dirty="0">
+                        <a:latin typeface="Calibri" charset="0"/>
+                        <a:ea typeface="Calibri" charset="0"/>
+                        <a:cs typeface="Calibri" charset="0"/>
+                      </a:endParaRPr>
+                    </a:p>
+                  </a:txBody>
+                  <a:tcPr marL="54864" marR="54864" marT="54864" marB="54864" anchor="ctr">
+                    <a:lnL w="9525" cap="flat" cmpd="sng" algn="ctr">
+                      <a:solidFill>
+                        <a:srgbClr val="BFBFBF"/>
+                      </a:solidFill>
+                      <a:prstDash val="solid"/>
+                      <a:round/>
+                      <a:headEnd type="none" w="med" len="med"/>
+                      <a:tailEnd type="none" w="med" len="med"/>
+                    </a:lnL>
+                    <a:lnR w="9525" cap="flat" cmpd="sng" algn="ctr">
+                      <a:solidFill>
+                        <a:srgbClr val="BFBFBF"/>
+                      </a:solidFill>
+                      <a:prstDash val="solid"/>
+                      <a:round/>
+                      <a:headEnd type="none" w="med" len="med"/>
+                      <a:tailEnd type="none" w="med" len="med"/>
+                    </a:lnR>
+                    <a:lnT w="9525" cap="flat" cmpd="sng" algn="ctr">
+                      <a:solidFill>
+                        <a:srgbClr val="BFBFBF"/>
+                      </a:solidFill>
+                      <a:prstDash val="solid"/>
+                      <a:round/>
+                      <a:headEnd type="none" w="med" len="med"/>
+                      <a:tailEnd type="none" w="med" len="med"/>
+                    </a:lnT>
+                    <a:lnB w="9525" cap="flat" cmpd="sng" algn="ctr">
+                      <a:solidFill>
+                        <a:srgbClr val="BFBFBF"/>
+                      </a:solidFill>
+                      <a:prstDash val="solid"/>
+                      <a:round/>
+                      <a:headEnd type="none" w="med" len="med"/>
+                      <a:tailEnd type="none" w="med" len="med"/>
+                    </a:lnB>
+                  </a:tcPr>
+                </a:tc>
+                <a:tc>
+                  <a:txBody>
+                    <a:bodyPr wrap="square"/>
+                    <a:lstStyle/>
+                    <a:p>
+                      <a:pPr marL="0" indent="0">
+                        <a:buNone/>
+                      </a:pPr>
+                      <a:r>
+                        <a:rPr sz="1050" b="0">
+                          <a:solidFill>
+                            <a:srgbClr val="7A7A7A"/>
+                          </a:solidFill>
+                          <a:latin typeface="Calibri"/>
+                        </a:rPr>
+                        <a:t>IEEE journal (GaN integrated driver)</a:t>
+                      </a:r>
+                      <a:endParaRPr lang="en-US" sz="1300" dirty="0">
+                        <a:latin typeface="Calibri" charset="0"/>
+                        <a:ea typeface="Calibri" charset="0"/>
+                        <a:cs typeface="Calibri" charset="0"/>
+                      </a:endParaRPr>
+                    </a:p>
+                    <a:p>
+                      <a:r>
+                        <a:rPr sz="1050" b="1">
+                          <a:solidFill>
+                            <a:srgbClr val="7A7A7A"/>
+                          </a:solidFill>
+                          <a:latin typeface="Calibri"/>
+                        </a:rPr>
+                        <a:t>authors: complete from Xplore</a:t>
+                      </a:r>
+                    </a:p>
+                  </a:txBody>
+                  <a:tcPr marL="54864" marR="54864" marT="54864" marB="54864" anchor="ctr">
+                    <a:lnL w="9525" cap="flat" cmpd="sng" algn="ctr">
+                      <a:solidFill>
+                        <a:srgbClr val="BFBFBF"/>
+                      </a:solidFill>
+                      <a:prstDash val="solid"/>
+                      <a:round/>
+                      <a:headEnd type="none" w="med" len="med"/>
+                      <a:tailEnd type="none" w="med" len="med"/>
+                    </a:lnL>
+                    <a:lnR w="9525" cap="flat" cmpd="sng" algn="ctr">
+                      <a:solidFill>
+                        <a:srgbClr val="BFBFBF"/>
+                      </a:solidFill>
+                      <a:prstDash val="solid"/>
+                      <a:round/>
+                      <a:headEnd type="none" w="med" len="med"/>
+                      <a:tailEnd type="none" w="med" len="med"/>
+                    </a:lnR>
+                    <a:lnT w="9525" cap="flat" cmpd="sng" algn="ctr">
+                      <a:solidFill>
+                        <a:srgbClr val="BFBFBF"/>
+                      </a:solidFill>
+                      <a:prstDash val="solid"/>
+                      <a:round/>
+                      <a:headEnd type="none" w="med" len="med"/>
+                      <a:tailEnd type="none" w="med" len="med"/>
+                    </a:lnT>
+                    <a:lnB w="9525" cap="flat" cmpd="sng" algn="ctr">
+                      <a:solidFill>
+                        <a:srgbClr val="BFBFBF"/>
+                      </a:solidFill>
+                      <a:prstDash val="solid"/>
+                      <a:round/>
+                      <a:headEnd type="none" w="med" len="med"/>
+                      <a:tailEnd type="none" w="med" len="med"/>
+                    </a:lnB>
+                  </a:tcPr>
+                </a:tc>
+                <a:tc>
+                  <a:txBody>
+                    <a:bodyPr wrap="square"/>
+                    <a:lstStyle/>
+                    <a:p>
+                      <a:pPr marL="0" indent="0">
+                        <a:buNone/>
+                      </a:pPr>
+                      <a:r>
+                        <a:rPr sz="1050" b="0">
+                          <a:solidFill>
+                            <a:srgbClr val="000000"/>
+                          </a:solidFill>
+                          <a:latin typeface="Calibri"/>
+                        </a:rPr>
+                        <a:t>An Integrated Driver With Dual-Edge Adaptive Dead-Time Control for GaN-Based Synchronous Buck Converter</a:t>
+                      </a:r>
+                      <a:endParaRPr lang="en-US" sz="1300" dirty="0">
+                        <a:latin typeface="Calibri" charset="0"/>
+                        <a:ea typeface="Calibri" charset="0"/>
+                        <a:cs typeface="Calibri" charset="0"/>
+                      </a:endParaRPr>
+                    </a:p>
+                    <a:p>
+                      <a:r>
+                        <a:rPr sz="1050" b="1">
+                          <a:solidFill>
+                            <a:srgbClr val="000000"/>
+                          </a:solidFill>
+                          <a:latin typeface="Calibri"/>
+                        </a:rPr>
+                        <a:t>IEEE Xplore doc. 10664041 — vol./pp. XX</a:t>
+                      </a:r>
+                    </a:p>
+                  </a:txBody>
+                  <a:tcPr marL="54864" marR="54864" marT="54864" marB="54864" anchor="ctr">
+                    <a:lnL w="9525" cap="flat" cmpd="sng" algn="ctr">
+                      <a:solidFill>
+                        <a:srgbClr val="BFBFBF"/>
+                      </a:solidFill>
+                      <a:prstDash val="solid"/>
+                      <a:round/>
+                      <a:headEnd type="none" w="med" len="med"/>
+                      <a:tailEnd type="none" w="med" len="med"/>
+                    </a:lnL>
+                    <a:lnR w="9525" cap="flat" cmpd="sng" algn="ctr">
+                      <a:solidFill>
+                        <a:srgbClr val="BFBFBF"/>
+                      </a:solidFill>
+                      <a:prstDash val="solid"/>
+                      <a:round/>
+                      <a:headEnd type="none" w="med" len="med"/>
+                      <a:tailEnd type="none" w="med" len="med"/>
+                    </a:lnR>
+                    <a:lnT w="9525" cap="flat" cmpd="sng" algn="ctr">
+                      <a:solidFill>
+                        <a:srgbClr val="BFBFBF"/>
+                      </a:solidFill>
+                      <a:prstDash val="solid"/>
+                      <a:round/>
+                      <a:headEnd type="none" w="med" len="med"/>
+                      <a:tailEnd type="none" w="med" len="med"/>
+                    </a:lnT>
+                    <a:lnB w="9525" cap="flat" cmpd="sng" algn="ctr">
+                      <a:solidFill>
+                        <a:srgbClr val="BFBFBF"/>
+                      </a:solidFill>
+                      <a:prstDash val="solid"/>
+                      <a:round/>
+                      <a:headEnd type="none" w="med" len="med"/>
+                      <a:tailEnd type="none" w="med" len="med"/>
+                    </a:lnB>
+                  </a:tcPr>
+                </a:tc>
+                <a:tc>
+                  <a:txBody>
+                    <a:bodyPr wrap="square"/>
+                    <a:lstStyle/>
+                    <a:p>
+                      <a:pPr marL="0" indent="0">
+                        <a:buNone/>
+                      </a:pPr>
+                      <a:r>
+                        <a:rPr sz="1050" b="0">
+                          <a:solidFill>
+                            <a:srgbClr val="000000"/>
+                          </a:solidFill>
+                          <a:latin typeface="Calibri"/>
+                        </a:rPr>
+                        <a:t>Dual-edge adaptive dead-time control; sub-1 ns dead times across a 0.2–2 A range</a:t>
+                      </a:r>
+                      <a:endParaRPr lang="en-US" sz="1300" dirty="0">
+                        <a:latin typeface="Calibri" charset="0"/>
+                        <a:ea typeface="Calibri" charset="0"/>
+                        <a:cs typeface="Calibri" charset="0"/>
+                      </a:endParaRPr>
+                    </a:p>
+                  </a:txBody>
+                  <a:tcPr marL="54864" marR="54864" marT="54864" marB="54864" anchor="ctr">
+                    <a:lnL w="9525" cap="flat" cmpd="sng" algn="ctr">
+                      <a:solidFill>
+                        <a:srgbClr val="BFBFBF"/>
+                      </a:solidFill>
+                      <a:prstDash val="solid"/>
+                      <a:round/>
+                      <a:headEnd type="none" w="med" len="med"/>
+                      <a:tailEnd type="none" w="med" len="med"/>
+                    </a:lnL>
+                    <a:lnR w="9525" cap="flat" cmpd="sng" algn="ctr">
+                      <a:solidFill>
+                        <a:srgbClr val="BFBFBF"/>
+                      </a:solidFill>
+                      <a:prstDash val="solid"/>
+                      <a:round/>
+                      <a:headEnd type="none" w="med" len="med"/>
+                      <a:tailEnd type="none" w="med" len="med"/>
+                    </a:lnR>
+                    <a:lnT w="9525" cap="flat" cmpd="sng" algn="ctr">
+                      <a:solidFill>
+                        <a:srgbClr val="BFBFBF"/>
+                      </a:solidFill>
+                      <a:prstDash val="solid"/>
+                      <a:round/>
+                      <a:headEnd type="none" w="med" len="med"/>
+                      <a:tailEnd type="none" w="med" len="med"/>
+                    </a:lnT>
+                    <a:lnB w="9525" cap="flat" cmpd="sng" algn="ctr">
+                      <a:solidFill>
+                        <a:srgbClr val="BFBFBF"/>
+                      </a:solidFill>
+                      <a:prstDash val="solid"/>
+                      <a:round/>
+                      <a:headEnd type="none" w="med" len="med"/>
+                      <a:tailEnd type="none" w="med" len="med"/>
+                    </a:lnB>
+                  </a:tcPr>
+                </a:tc>
+                <a:tc>
+                  <a:txBody>
+                    <a:bodyPr wrap="square"/>
+                    <a:lstStyle/>
+                    <a:p>
+                      <a:pPr marL="0" indent="0">
+                        <a:buNone/>
+                      </a:pPr>
+                      <a:r>
+                        <a:rPr sz="1050" b="0">
+                          <a:solidFill>
+                            <a:srgbClr val="000000"/>
+                          </a:solidFill>
+                          <a:latin typeface="Calibri"/>
+                        </a:rPr>
+                        <a:t>Adapts the one field our freeze test says actually carries the benefit — dead time, 5.45 % of the cost, 4.6× the next field. Direct independent support for the paper's central recommendation.</a:t>
+                      </a:r>
+                      <a:endParaRPr lang="en-US" sz="1300" dirty="0">
+                        <a:latin typeface="Calibri" charset="0"/>
+                        <a:ea typeface="Calibri" charset="0"/>
+                        <a:cs typeface="Calibri" charset="0"/>
+                      </a:endParaRPr>
+                    </a:p>
+                  </a:txBody>
+                  <a:tcPr marL="54864" marR="54864" marT="54864" marB="54864" anchor="ctr">
+                    <a:lnL w="9525" cap="flat" cmpd="sng" algn="ctr">
+                      <a:solidFill>
+                        <a:srgbClr val="BFBFBF"/>
+                      </a:solidFill>
+                      <a:prstDash val="solid"/>
+                      <a:round/>
+                      <a:headEnd type="none" w="med" len="med"/>
+                      <a:tailEnd type="none" w="med" len="med"/>
+                    </a:lnL>
+                    <a:lnR w="9525" cap="flat" cmpd="sng" algn="ctr">
+                      <a:solidFill>
+                        <a:srgbClr val="BFBFBF"/>
+                      </a:solidFill>
+                      <a:prstDash val="solid"/>
+                      <a:round/>
+                      <a:headEnd type="none" w="med" len="med"/>
+                      <a:tailEnd type="none" w="med" len="med"/>
+                    </a:lnR>
+                    <a:lnT w="9525" cap="flat" cmpd="sng" algn="ctr">
+                      <a:solidFill>
+                        <a:srgbClr val="BFBFBF"/>
+                      </a:solidFill>
+                      <a:prstDash val="solid"/>
+                      <a:round/>
+                      <a:headEnd type="none" w="med" len="med"/>
+                      <a:tailEnd type="none" w="med" len="med"/>
+                    </a:lnT>
+                    <a:lnB w="9525" cap="flat" cmpd="sng" algn="ctr">
+                      <a:solidFill>
+                        <a:srgbClr val="BFBFBF"/>
+                      </a:solidFill>
+                      <a:prstDash val="solid"/>
+                      <a:round/>
+                      <a:headEnd type="none" w="med" len="med"/>
+                      <a:tailEnd type="none" w="med" len="med"/>
+                    </a:lnB>
+                  </a:tcPr>
+                </a:tc>
+                <a:extLst>
+                  <a:ext uri="{0D108BD9-81ED-4DB2-BD59-A6C34878D82A}">
+                    <a16:rowId xmlns:a16="http://schemas.microsoft.com/office/drawing/2014/main" val="10004"/>
+                  </a:ext>
+                </a:extLst>
+              </a:tr>
+            </a:tbl>
+          </a:graphicData>
+        </a:graphic>
+      </p:graphicFrame>
+      <p:sp>
+        <p:nvSpPr>
+          <p:cNvPr id="5" name="Text 2"/>
+          <p:cNvSpPr txBox="1"/>
+          <p:nvPr/>
+        </p:nvSpPr>
+        <p:spPr>
+          <a:xfrm>
+            <a:off x="548640" y="5577840"/>
+            <a:ext cx="11064240" cy="365760"/>
+          </a:xfrm>
+          <a:prstGeom prst="rect">
+            <a:avLst/>
+          </a:prstGeom>
+          <a:noFill/>
+          <a:ln/>
+        </p:spPr>
+        <p:txBody>
+          <a:bodyPr wrap="square" lIns="0" tIns="0" rIns="0" bIns="0" rtlCol="0" anchor="ctr"/>
+          <a:lstStyle/>
+          <a:p>
+            <a:pPr marL="177800" indent="0">
+              <a:spcAft>
+                <a:spcPts val="0"/>
+              </a:spcAft>
+              <a:buSzPct val="100000"/>
+              <a:buNone/>
+            </a:pPr>
+            <a:r>
+              <a:rPr lang="en-US" sz="1150" dirty="0">
+                <a:solidFill>
+                  <a:srgbClr val="000000"/>
+                </a:solidFill>
+                <a:latin typeface="Calibri" pitchFamily="34" charset="0"/>
+                <a:ea typeface="Calibri" pitchFamily="34" charset="-122"/>
+                <a:cs typeface="Calibri" pitchFamily="34" charset="-120"/>
+              </a:rPr>
+              <a:t xml:space="preserve">References [4]–[8]: title, journal status and IEEE Xplore document ID confirmed. Volume, issue, pages and authors are marked XX — every publisher and metadata service was unreachable from the build environment, and they are not invented. One click on Xplore's “Cite This” completes each.</a:t>
+            </a:r>
+          </a:p>
+        </p:txBody>
+      </p:sp>
+    </p:spTree>
+  </p:cSld>
+  <p:clrMapOvr>
+    <a:masterClrMapping/>
+  </p:clrMapOvr>
+</p:sld>
+</file>
+
+<file path=ppt/slides/slide7.xml><?xml version="1.0" encoding="utf-8"?>
 <p:sld xmlns:a="http://schemas.openxmlformats.org/drawingml/2006/main" xmlns:r="http://schemas.openxmlformats.org/officeDocument/2006/relationships" xmlns:p="http://schemas.openxmlformats.org/presentationml/2006/main">
   <p:cSld name="Slide 6">
     <p:bg>
@@ -7413,7 +9515,7 @@
                 <a:ea typeface="Calibri" pitchFamily="34" charset="-122"/>
                 <a:cs typeface="Calibri" pitchFamily="34" charset="-120"/>
               </a:rPr>
-              <a:t>6</a:t>
+              <a:t>7</a:t>
             </a:r>
             <a:endParaRPr lang="en-US" sz="1000" dirty="0"/>
           </a:p>
@@ -7747,7 +9849,7 @@
 </p:sld>
 </file>
 
-<file path=ppt/slides/slide7.xml><?xml version="1.0" encoding="utf-8"?>
+<file path=ppt/slides/slide8.xml><?xml version="1.0" encoding="utf-8"?>
 <p:sld xmlns:a="http://schemas.openxmlformats.org/drawingml/2006/main" xmlns:r="http://schemas.openxmlformats.org/officeDocument/2006/relationships" xmlns:p="http://schemas.openxmlformats.org/presentationml/2006/main">
   <p:cSld name="Slide 7">
     <p:bg>
@@ -7805,7 +9907,7 @@
                 <a:ea typeface="Calibri" pitchFamily="34" charset="-122"/>
                 <a:cs typeface="Calibri" pitchFamily="34" charset="-120"/>
               </a:rPr>
-              <a:t>7</a:t>
+              <a:t>8</a:t>
             </a:r>
             <a:endParaRPr lang="en-US" sz="1000" dirty="0"/>
           </a:p>
@@ -8190,7 +10292,7 @@
 </p:sld>
 </file>
 
-<file path=ppt/slides/slide8.xml><?xml version="1.0" encoding="utf-8"?>
+<file path=ppt/slides/slide9.xml><?xml version="1.0" encoding="utf-8"?>
 <p:sld xmlns:a="http://schemas.openxmlformats.org/drawingml/2006/main" xmlns:r="http://schemas.openxmlformats.org/officeDocument/2006/relationships" xmlns:p="http://schemas.openxmlformats.org/presentationml/2006/main">
   <p:cSld name="Slide 8">
     <p:bg>
@@ -8248,7 +10350,7 @@
                 <a:ea typeface="Calibri" pitchFamily="34" charset="-122"/>
                 <a:cs typeface="Calibri" pitchFamily="34" charset="-120"/>
               </a:rPr>
-              <a:t>8</a:t>
+              <a:t>9</a:t>
             </a:r>
             <a:endParaRPr lang="en-US" sz="1000" dirty="0"/>
           </a:p>
@@ -8694,515 +10796,6 @@
                 <a:cs typeface="Calibri" pitchFamily="34" charset="-120"/>
               </a:rPr>
               <a:t xml:space="preserve">The clamp itself is worth 9.7–12.2 % of the blended cost, from a static architecture choice needing no sensing or controller.</a:t>
-            </a:r>
-          </a:p>
-        </p:txBody>
-      </p:sp>
-    </p:spTree>
-  </p:cSld>
-  <p:clrMapOvr>
-    <a:masterClrMapping/>
-  </p:clrMapOvr>
-</p:sld>
-</file>
-
-<file path=ppt/slides/slide9.xml><?xml version="1.0" encoding="utf-8"?>
-<p:sld xmlns:a="http://schemas.openxmlformats.org/drawingml/2006/main" xmlns:r="http://schemas.openxmlformats.org/officeDocument/2006/relationships" xmlns:p="http://schemas.openxmlformats.org/presentationml/2006/main">
-  <p:cSld name="Slide 9">
-    <p:bg>
-      <p:bgPr>
-        <a:solidFill>
-          <a:srgbClr val="FFFFFF"/>
-        </a:solidFill>
-        <a:effectLst/>
-      </p:bgPr>
-    </p:bg>
-    <p:spTree>
-      <p:nvGrpSpPr>
-        <p:cNvPr id="1" name=""/>
-        <p:cNvGrpSpPr/>
-        <p:nvPr/>
-      </p:nvGrpSpPr>
-      <p:grpSpPr>
-        <a:xfrm>
-          <a:off x="0" y="0"/>
-          <a:ext cx="0" cy="0"/>
-          <a:chOff x="0" y="0"/>
-          <a:chExt cx="0" cy="0"/>
-        </a:xfrm>
-      </p:grpSpPr>
-      <p:sp>
-        <p:nvSpPr>
-          <p:cNvPr id="2" name="Text 0"/>
-          <p:cNvSpPr txBox="1"/>
-          <p:nvPr/>
-        </p:nvSpPr>
-        <p:spPr>
-          <a:xfrm>
-            <a:off x="11460175" y="6446520"/>
-            <a:ext cx="457200" cy="274320"/>
-          </a:xfrm>
-          <a:prstGeom prst="rect">
-            <a:avLst/>
-          </a:prstGeom>
-          <a:noFill/>
-          <a:ln/>
-        </p:spPr>
-        <p:txBody>
-          <a:bodyPr wrap="square" lIns="0" tIns="0" rIns="0" bIns="0" rtlCol="0" anchor="ctr"/>
-          <a:lstStyle/>
-          <a:p>
-            <a:pPr marL="0" indent="0" algn="r">
-              <a:buNone/>
-            </a:pPr>
-            <a:r>
-              <a:rPr lang="en-US" sz="1000" dirty="0">
-                <a:solidFill>
-                  <a:srgbClr val="808080"/>
-                </a:solidFill>
-                <a:latin typeface="Calibri" pitchFamily="34" charset="0"/>
-                <a:ea typeface="Calibri" pitchFamily="34" charset="-122"/>
-                <a:cs typeface="Calibri" pitchFamily="34" charset="-120"/>
-              </a:rPr>
-              <a:t>9</a:t>
-            </a:r>
-            <a:endParaRPr lang="en-US" sz="1000" dirty="0"/>
-          </a:p>
-        </p:txBody>
-      </p:sp>
-      <p:sp>
-        <p:nvSpPr>
-          <p:cNvPr id="3" name="Text 1"/>
-          <p:cNvSpPr txBox="1"/>
-          <p:nvPr/>
-        </p:nvSpPr>
-        <p:spPr>
-          <a:xfrm>
-            <a:off x="548640" y="320040"/>
-            <a:ext cx="9601200" cy="685800"/>
-          </a:xfrm>
-          <a:prstGeom prst="rect">
-            <a:avLst/>
-          </a:prstGeom>
-          <a:noFill/>
-          <a:ln/>
-        </p:spPr>
-        <p:txBody>
-          <a:bodyPr wrap="square" lIns="0" tIns="0" rIns="0" bIns="0" rtlCol="0" anchor="ctr"/>
-          <a:lstStyle/>
-          <a:p>
-            <a:pPr marL="0" indent="0">
-              <a:buNone/>
-            </a:pPr>
-            <a:r>
-              <a:rPr lang="en-US" sz="2800" b="1" dirty="0">
-                <a:solidFill>
-                  <a:srgbClr val="1D2F82"/>
-                </a:solidFill>
-                <a:latin typeface="Calibri" pitchFamily="34" charset="0"/>
-                <a:ea typeface="Calibri" pitchFamily="34" charset="-122"/>
-                <a:cs typeface="Calibri" pitchFamily="34" charset="-120"/>
-              </a:rPr>
-              <a:t>Results (contd.)</a:t>
-            </a:r>
-            <a:endParaRPr lang="en-US" sz="2800" dirty="0"/>
-          </a:p>
-        </p:txBody>
-      </p:sp>
-      <p:pic>
-        <p:nvPicPr>
-          <p:cNvPr id="4" name="Image 0" descr="logo.png"/>
-          <p:cNvPicPr>
-            <a:picLocks noChangeAspect="1"/>
-          </p:cNvPicPr>
-          <p:nvPr/>
-        </p:nvPicPr>
-        <p:blipFill>
-          <a:blip r:embed="rId3"/>
-          <a:stretch>
-            <a:fillRect/>
-          </a:stretch>
-        </p:blipFill>
-        <p:spPr>
-          <a:xfrm>
-            <a:off x="10362895" y="320040"/>
-            <a:ext cx="1371600" cy="518746"/>
-          </a:xfrm>
-          <a:prstGeom prst="rect">
-            <a:avLst/>
-          </a:prstGeom>
-        </p:spPr>
-      </p:pic>
-      <p:pic>
-        <p:nvPicPr>
-          <p:cNvPr id="5" name="Picture 4" descr="paper_fig2_ceiling.png"/>
-          <p:cNvPicPr>
-            <a:picLocks noChangeAspect="1"/>
-          </p:cNvPicPr>
-          <p:nvPr/>
-        </p:nvPicPr>
-        <p:blipFill>
-          <a:blip r:embed="rId4"/>
-          <a:stretch>
-            <a:fillRect/>
-          </a:stretch>
-        </p:blipFill>
-        <p:spPr>
-          <a:xfrm>
-            <a:off x="640080" y="1417320"/>
-            <a:ext cx="6035040" cy="3212290"/>
-          </a:xfrm>
-          <a:prstGeom prst="rect">
-            <a:avLst/>
-          </a:prstGeom>
-        </p:spPr>
-      </p:pic>
-      <p:sp>
-        <p:nvSpPr>
-          <p:cNvPr id="6" name="TextBox 5"/>
-          <p:cNvSpPr txBox="1"/>
-          <p:nvPr/>
-        </p:nvSpPr>
-        <p:spPr>
-          <a:xfrm>
-            <a:off x="640080" y="4892040"/>
-            <a:ext cx="6035040" cy="411480"/>
-          </a:xfrm>
-          <a:prstGeom prst="rect">
-            <a:avLst/>
-          </a:prstGeom>
-          <a:noFill/>
-        </p:spPr>
-        <p:txBody>
-          <a:bodyPr wrap="square" lIns="0" tIns="0" rIns="0" bIns="0">
-            <a:spAutoFit/>
-          </a:bodyPr>
-          <a:lstStyle/>
-          <a:p>
-            <a:pPr marL="177800" indent="0">
-              <a:spcAft>
-                <a:spcPts val="0"/>
-              </a:spcAft>
-              <a:buSzPct val="100000"/>
-              <a:buNone/>
-            </a:pPr>
-            <a:r>
-              <a:rPr lang="en-US" sz="1100" dirty="0">
-                <a:solidFill>
-                  <a:srgbClr val="000000"/>
-                </a:solidFill>
-                <a:latin typeface="Calibri" pitchFamily="34" charset="0"/>
-                <a:ea typeface="Calibri" pitchFamily="34" charset="-122"/>
-                <a:cs typeface="Calibri" pitchFamily="34" charset="-120"/>
-              </a:rPr>
-              <a:t xml:space="preserve">Fig. 2  Cost of one fixed control word vs the true per-corner optimum, four corners.</a:t>
-            </a:r>
-          </a:p>
-        </p:txBody>
-      </p:sp>
-      <p:sp>
-        <p:nvSpPr>
-          <p:cNvPr id="7" name="TextBox 6"/>
-          <p:cNvSpPr txBox="1"/>
-          <p:nvPr/>
-        </p:nvSpPr>
-        <p:spPr>
-          <a:xfrm>
-            <a:off x="640080" y="5440680"/>
-            <a:ext cx="6035040" cy="822960"/>
-          </a:xfrm>
-          <a:prstGeom prst="rect">
-            <a:avLst/>
-          </a:prstGeom>
-          <a:noFill/>
-        </p:spPr>
-        <p:txBody>
-          <a:bodyPr wrap="square" lIns="0" tIns="0" rIns="0" bIns="0">
-            <a:spAutoFit/>
-          </a:bodyPr>
-          <a:lstStyle/>
-          <a:p>
-            <a:pPr marL="177800" indent="0">
-              <a:spcAft>
-                <a:spcPts val="0"/>
-              </a:spcAft>
-              <a:buSzPct val="100000"/>
-              <a:buNone/>
-            </a:pPr>
-            <a:r>
-              <a:rPr lang="en-US" sz="1300" dirty="0">
-                <a:solidFill>
-                  <a:srgbClr val="000000"/>
-                </a:solidFill>
-                <a:latin typeface="Calibri" pitchFamily="34" charset="0"/>
-                <a:ea typeface="Calibri" pitchFamily="34" charset="-122"/>
-                <a:cs typeface="Calibri" pitchFamily="34" charset="-120"/>
-              </a:rPr>
-              <a:t xml:space="preserve">Full 720-word search at every corner — 2,880 transients — so each per-corner optimum is a true optimum, not the best of a shortlist.</a:t>
-            </a:r>
-          </a:p>
-        </p:txBody>
-      </p:sp>
-      <p:sp>
-        <p:nvSpPr>
-          <p:cNvPr id="8" name="TextBox 7"/>
-          <p:cNvSpPr txBox="1"/>
-          <p:nvPr/>
-        </p:nvSpPr>
-        <p:spPr>
-          <a:xfrm>
-            <a:off x="6995160" y="1325880"/>
-            <a:ext cx="4526280" cy="411480"/>
-          </a:xfrm>
-          <a:prstGeom prst="rect">
-            <a:avLst/>
-          </a:prstGeom>
-          <a:noFill/>
-        </p:spPr>
-        <p:txBody>
-          <a:bodyPr wrap="square" lIns="0" tIns="0" rIns="0" bIns="0">
-            <a:spAutoFit/>
-          </a:bodyPr>
-          <a:lstStyle/>
-          <a:p>
-            <a:pPr marL="177800" indent="0">
-              <a:spcAft>
-                <a:spcPts val="0"/>
-              </a:spcAft>
-              <a:buSzPct val="100000"/>
-              <a:buNone/>
-            </a:pPr>
-            <a:r>
-              <a:rPr lang="en-US" sz="1500" b="1" dirty="0">
-                <a:solidFill>
-                  <a:srgbClr val="000000"/>
-                </a:solidFill>
-                <a:latin typeface="Calibri" pitchFamily="34" charset="0"/>
-                <a:ea typeface="Calibri" pitchFamily="34" charset="-122"/>
-                <a:cs typeface="Calibri" pitchFamily="34" charset="-120"/>
-              </a:rPr>
-              <a:t xml:space="preserve">What adaptation is actually worth</a:t>
-            </a:r>
-          </a:p>
-        </p:txBody>
-      </p:sp>
-      <p:sp>
-        <p:nvSpPr>
-          <p:cNvPr id="9" name="TextBox 8"/>
-          <p:cNvSpPr txBox="1"/>
-          <p:nvPr/>
-        </p:nvSpPr>
-        <p:spPr>
-          <a:xfrm>
-            <a:off x="6995160" y="1828800"/>
-            <a:ext cx="4526280" cy="1188720"/>
-          </a:xfrm>
-          <a:prstGeom prst="rect">
-            <a:avLst/>
-          </a:prstGeom>
-          <a:noFill/>
-        </p:spPr>
-        <p:txBody>
-          <a:bodyPr wrap="square" lIns="0" tIns="0" rIns="0" bIns="0">
-            <a:spAutoFit/>
-          </a:bodyPr>
-          <a:lstStyle/>
-          <a:p>
-            <a:pPr marL="177800" indent="0">
-              <a:spcAft>
-                <a:spcPts val="100"/>
-              </a:spcAft>
-              <a:buSzPct val="100000"/>
-              <a:buNone/>
-            </a:pPr>
-            <a:r>
-              <a:rPr lang="en-US" sz="3200" b="1" dirty="0">
-                <a:solidFill>
-                  <a:srgbClr val="000000"/>
-                </a:solidFill>
-                <a:latin typeface="Calibri" pitchFamily="34" charset="0"/>
-                <a:ea typeface="Calibri" pitchFamily="34" charset="-122"/>
-                <a:cs typeface="Calibri" pitchFamily="34" charset="-120"/>
-              </a:rPr>
-              <a:t xml:space="preserve">5.2 %</a:t>
-            </a:r>
-          </a:p>
-          <a:p>
-            <a:pPr marL="177800" indent="0">
-              <a:spcAft>
-                <a:spcPts val="60"/>
-              </a:spcAft>
-              <a:buSzPct val="100000"/>
-              <a:buNone/>
-            </a:pPr>
-            <a:r>
-              <a:rPr lang="en-US" sz="1300" b="1" dirty="0">
-                <a:solidFill>
-                  <a:srgbClr val="000000"/>
-                </a:solidFill>
-                <a:latin typeface="Calibri" pitchFamily="34" charset="0"/>
-                <a:ea typeface="Calibri" pitchFamily="34" charset="-122"/>
-                <a:cs typeface="Calibri" pitchFamily="34" charset="-120"/>
-              </a:rPr>
-              <a:t xml:space="preserve">ceiling on operating-point scheduling</a:t>
-            </a:r>
-          </a:p>
-          <a:p>
-            <a:pPr marL="177800" indent="0">
-              <a:spcAft>
-                <a:spcPts val="0"/>
-              </a:spcAft>
-              <a:buSzPct val="100000"/>
-              <a:buNone/>
-            </a:pPr>
-            <a:r>
-              <a:rPr lang="en-US" sz="1150" dirty="0">
-                <a:solidFill>
-                  <a:srgbClr val="000000"/>
-                </a:solidFill>
-                <a:latin typeface="Calibri" pitchFamily="34" charset="0"/>
-                <a:ea typeface="Calibri" pitchFamily="34" charset="-122"/>
-                <a:cs typeface="Calibri" pitchFamily="34" charset="-120"/>
-              </a:rPr>
-              <a:t xml:space="preserve">vs the best single fixed word. A fixed word is nearly as good.</a:t>
-            </a:r>
-          </a:p>
-        </p:txBody>
-      </p:sp>
-      <p:sp>
-        <p:nvSpPr>
-          <p:cNvPr id="10" name="TextBox 9"/>
-          <p:cNvSpPr txBox="1"/>
-          <p:nvPr/>
-        </p:nvSpPr>
-        <p:spPr>
-          <a:xfrm>
-            <a:off x="6995160" y="3154680"/>
-            <a:ext cx="4526280" cy="3108960"/>
-          </a:xfrm>
-          <a:prstGeom prst="rect">
-            <a:avLst/>
-          </a:prstGeom>
-          <a:noFill/>
-        </p:spPr>
-        <p:txBody>
-          <a:bodyPr wrap="square" lIns="0" tIns="0" rIns="0" bIns="0">
-            <a:spAutoFit/>
-          </a:bodyPr>
-          <a:lstStyle/>
-          <a:p>
-            <a:pPr marL="177800" indent="0">
-              <a:spcAft>
-                <a:spcPts val="180"/>
-              </a:spcAft>
-              <a:buSzPct val="100000"/>
-              <a:buNone/>
-            </a:pPr>
-            <a:r>
-              <a:rPr lang="en-US" sz="1300" b="1" dirty="0">
-                <a:solidFill>
-                  <a:srgbClr val="000000"/>
-                </a:solidFill>
-                <a:latin typeface="Calibri" pitchFamily="34" charset="0"/>
-                <a:ea typeface="Calibri" pitchFamily="34" charset="-122"/>
-                <a:cs typeface="Calibri" pitchFamily="34" charset="-120"/>
-              </a:rPr>
-              <a:t xml:space="preserve">The benefit is not spread out. </a:t>
-            </a:r>
-            <a:r>
-              <a:rPr lang="en-US" sz="1300" dirty="0">
-                <a:solidFill>
-                  <a:srgbClr val="000000"/>
-                </a:solidFill>
-                <a:latin typeface="Calibri" pitchFamily="34" charset="0"/>
-                <a:ea typeface="Calibri" pitchFamily="34" charset="-122"/>
-                <a:cs typeface="Calibri" pitchFamily="34" charset="-120"/>
-              </a:rPr>
-              <a:t xml:space="preserve">Three corners lose 1–4 % from a fixed word; one loses 12.7 %.</a:t>
-            </a:r>
-          </a:p>
-          <a:p>
-            <a:pPr marL="177800" indent="0">
-              <a:spcAft>
-                <a:spcPts val="180"/>
-              </a:spcAft>
-              <a:buSzPct val="100000"/>
-              <a:buNone/>
-            </a:pPr>
-            <a:r>
-              <a:rPr lang="en-US" sz="1300" b="1" dirty="0">
-                <a:solidFill>
-                  <a:srgbClr val="000000"/>
-                </a:solidFill>
-                <a:latin typeface="Calibri" pitchFamily="34" charset="0"/>
-                <a:ea typeface="Calibri" pitchFamily="34" charset="-122"/>
-                <a:cs typeface="Calibri" pitchFamily="34" charset="-120"/>
-              </a:rPr>
-              <a:t xml:space="preserve">It is carried by the dead time. </a:t>
-            </a:r>
-            <a:r>
-              <a:rPr lang="en-US" sz="1300" dirty="0">
-                <a:solidFill>
-                  <a:srgbClr val="000000"/>
-                </a:solidFill>
-                <a:latin typeface="Calibri" pitchFamily="34" charset="0"/>
-                <a:ea typeface="Calibri" pitchFamily="34" charset="-122"/>
-                <a:cs typeface="Calibri" pitchFamily="34" charset="-120"/>
-              </a:rPr>
-              <a:t xml:space="preserve">Freezing dead time costs 5.45 %; freezing pull-up drive strength costs </a:t>
-            </a:r>
-            <a:r>
-              <a:rPr lang="en-US" sz="1300" b="1" dirty="0">
-                <a:solidFill>
-                  <a:srgbClr val="000000"/>
-                </a:solidFill>
-                <a:latin typeface="Calibri" pitchFamily="34" charset="0"/>
-                <a:ea typeface="Calibri" pitchFamily="34" charset="-122"/>
-                <a:cs typeface="Calibri" pitchFamily="34" charset="-120"/>
-              </a:rPr>
-              <a:t xml:space="preserve">0.00 %</a:t>
-            </a:r>
-            <a:r>
-              <a:rPr lang="en-US" sz="1300" dirty="0">
-                <a:solidFill>
-                  <a:srgbClr val="000000"/>
-                </a:solidFill>
-                <a:latin typeface="Calibri" pitchFamily="34" charset="0"/>
-                <a:ea typeface="Calibri" pitchFamily="34" charset="-122"/>
-                <a:cs typeface="Calibri" pitchFamily="34" charset="-120"/>
-              </a:rPr>
-              <a:t xml:space="preserve"> — and drive strength is what the active-gate-driver literature actually schedules.</a:t>
-            </a:r>
-          </a:p>
-          <a:p>
-            <a:pPr marL="177800" indent="0">
-              <a:spcAft>
-                <a:spcPts val="0"/>
-              </a:spcAft>
-              <a:buSzPct val="100000"/>
-              <a:buNone/>
-            </a:pPr>
-            <a:r>
-              <a:rPr lang="en-US" sz="1300" b="1" dirty="0">
-                <a:solidFill>
-                  <a:srgbClr val="000000"/>
-                </a:solidFill>
-                <a:latin typeface="Calibri" pitchFamily="34" charset="0"/>
-                <a:ea typeface="Calibri" pitchFamily="34" charset="-122"/>
-                <a:cs typeface="Calibri" pitchFamily="34" charset="-120"/>
-              </a:rPr>
-              <a:t xml:space="preserve">Robust to the device, conditional on the layout. </a:t>
-            </a:r>
-            <a:r>
-              <a:rPr lang="en-US" sz="1300" dirty="0">
-                <a:solidFill>
-                  <a:srgbClr val="000000"/>
-                </a:solidFill>
-                <a:latin typeface="Calibri" pitchFamily="34" charset="0"/>
-                <a:ea typeface="Calibri" pitchFamily="34" charset="-122"/>
-                <a:cs typeface="Calibri" pitchFamily="34" charset="-120"/>
-              </a:rPr>
-              <a:t xml:space="preserve">Across 21,600 transients, no device parameter moves the ceiling outside 4.3–7.7 %. Halving the loop inductance takes it to 13.5 %, and loop inductance is board layout, not the transistor [3].</a:t>
             </a:r>
           </a:p>
         </p:txBody>

--- a/review/Review1_GaN_Segmented_Gate_Driver.pptx
+++ b/review/Review1_GaN_Segmented_Gate_Driver.pptx
@@ -18,8 +18,10 @@
     <p:sldId id="262" r:id="rId8"/>
     <p:sldId id="263" r:id="rId9"/>
     <p:sldId id="264" r:id="rId10"/>
+    <p:sldId id="268" r:id="rId19"/>
     <p:sldId id="269" r:id="rId20"/>
-    <p:sldId id="268" r:id="rId19"/>
+    <p:sldId id="270" r:id="rId21"/>
+    <p:sldId id="271" r:id="rId22"/>
     <p:sldId id="265" r:id="rId11"/>
     <p:sldId id="266" r:id="rId12"/>
   </p:sldIdLst>
@@ -1830,7 +1832,7 @@
                 <a:ea typeface="Calibri" pitchFamily="34" charset="-122"/>
                 <a:cs typeface="Calibri" pitchFamily="34" charset="-120"/>
               </a:rPr>
-              <a:t>Results (contd.)</a:t>
+              <a:t>Results — what scheduling is actually worth</a:t>
             </a:r>
             <a:endParaRPr lang="en-US" sz="2800" dirty="0"/>
           </a:p>
@@ -2301,6 +2303,1932 @@
                 <a:cs typeface="Calibri" pitchFamily="34" charset="-120"/>
               </a:rPr>
               <a:t>11</a:t>
+            </a:r>
+            <a:endParaRPr lang="en-US" sz="1000" dirty="0"/>
+          </a:p>
+        </p:txBody>
+      </p:sp>
+      <p:sp>
+        <p:nvSpPr>
+          <p:cNvPr id="3" name="Text 1"/>
+          <p:cNvSpPr txBox="1"/>
+          <p:nvPr/>
+        </p:nvSpPr>
+        <p:spPr>
+          <a:xfrm>
+            <a:off x="548640" y="320040"/>
+            <a:ext cx="9601200" cy="685800"/>
+          </a:xfrm>
+          <a:prstGeom prst="rect">
+            <a:avLst/>
+          </a:prstGeom>
+          <a:noFill/>
+          <a:ln/>
+        </p:spPr>
+        <p:txBody>
+          <a:bodyPr wrap="square" lIns="0" tIns="0" rIns="0" bIns="0" rtlCol="0" anchor="ctr"/>
+          <a:lstStyle/>
+          <a:p>
+            <a:pPr marL="0" indent="0">
+              <a:buNone/>
+            </a:pPr>
+            <a:r>
+              <a:rPr lang="en-US" sz="2800" b="1" dirty="0">
+                <a:solidFill>
+                  <a:srgbClr val="1D2F82"/>
+                </a:solidFill>
+                <a:latin typeface="Calibri" pitchFamily="34" charset="0"/>
+                <a:ea typeface="Calibri" pitchFamily="34" charset="-122"/>
+                <a:cs typeface="Calibri" pitchFamily="34" charset="-120"/>
+              </a:rPr>
+              <a:t>Results — robustness of the ceiling</a:t>
+            </a:r>
+            <a:endParaRPr lang="en-US" sz="2800" dirty="0"/>
+          </a:p>
+        </p:txBody>
+      </p:sp>
+      <p:pic>
+        <p:nvPicPr>
+          <p:cNvPr id="4" name="Image 0" descr="logo.png"/>
+          <p:cNvPicPr>
+            <a:picLocks noChangeAspect="1"/>
+          </p:cNvPicPr>
+          <p:nvPr/>
+        </p:nvPicPr>
+        <p:blipFill>
+          <a:blip r:embed="rId3"/>
+          <a:stretch>
+            <a:fillRect/>
+          </a:stretch>
+        </p:blipFill>
+        <p:spPr>
+          <a:xfrm>
+            <a:off x="10362895" y="320040"/>
+            <a:ext cx="1371600" cy="518746"/>
+          </a:xfrm>
+          <a:prstGeom prst="rect">
+            <a:avLst/>
+          </a:prstGeom>
+        </p:spPr>
+      </p:pic>
+      <p:sp>
+        <p:nvSpPr>
+          <p:cNvPr id="5" name="TextBox 4"/>
+          <p:cNvSpPr txBox="1"/>
+          <p:nvPr/>
+        </p:nvSpPr>
+        <p:spPr>
+          <a:xfrm>
+            <a:off x="640080" y="1325880"/>
+            <a:ext cx="3474720" cy="274320"/>
+          </a:xfrm>
+          <a:prstGeom prst="rect">
+            <a:avLst/>
+          </a:prstGeom>
+          <a:noFill/>
+        </p:spPr>
+        <p:txBody>
+          <a:bodyPr wrap="square" lIns="0" tIns="0" rIns="0" bIns="0">
+            <a:spAutoFit/>
+          </a:bodyPr>
+          <a:lstStyle/>
+          <a:p>
+            <a:pPr marL="177800" indent="0">
+              <a:spcAft>
+                <a:spcPts val="0"/>
+              </a:spcAft>
+              <a:buSzPct val="100000"/>
+              <a:buNone/>
+            </a:pPr>
+            <a:r>
+              <a:rPr lang="en-US" sz="1150" b="1" dirty="0">
+                <a:solidFill>
+                  <a:srgbClr val="000000"/>
+                </a:solidFill>
+                <a:latin typeface="Calibri" pitchFamily="34" charset="0"/>
+                <a:ea typeface="Calibri" pitchFamily="34" charset="-122"/>
+                <a:cs typeface="Calibri" pitchFamily="34" charset="-120"/>
+              </a:rPr>
+              <a:t xml:space="preserve">Perturbation</a:t>
+            </a:r>
+          </a:p>
+        </p:txBody>
+      </p:sp>
+      <p:sp>
+        <p:nvSpPr>
+          <p:cNvPr id="6" name="TextBox 5"/>
+          <p:cNvSpPr txBox="1"/>
+          <p:nvPr/>
+        </p:nvSpPr>
+        <p:spPr>
+          <a:xfrm>
+            <a:off x="4160520" y="1325880"/>
+            <a:ext cx="1005840" cy="274320"/>
+          </a:xfrm>
+          <a:prstGeom prst="rect">
+            <a:avLst/>
+          </a:prstGeom>
+          <a:noFill/>
+        </p:spPr>
+        <p:txBody>
+          <a:bodyPr wrap="square" lIns="0" tIns="0" rIns="0" bIns="0">
+            <a:spAutoFit/>
+          </a:bodyPr>
+          <a:lstStyle/>
+          <a:p>
+            <a:pPr marL="177800" indent="0">
+              <a:spcAft>
+                <a:spcPts val="0"/>
+              </a:spcAft>
+              <a:buSzPct val="100000"/>
+              <a:buNone/>
+            </a:pPr>
+            <a:r>
+              <a:rPr lang="en-US" sz="1150" b="1" dirty="0">
+                <a:solidFill>
+                  <a:srgbClr val="000000"/>
+                </a:solidFill>
+                <a:latin typeface="Calibri" pitchFamily="34" charset="0"/>
+                <a:ea typeface="Calibri" pitchFamily="34" charset="-122"/>
+                <a:cs typeface="Calibri" pitchFamily="34" charset="-120"/>
+              </a:rPr>
+              <a:t xml:space="preserve">Ceiling</a:t>
+            </a:r>
+          </a:p>
+        </p:txBody>
+      </p:sp>
+      <p:sp>
+        <p:nvSpPr>
+          <p:cNvPr id="7" name="TextBox 6"/>
+          <p:cNvSpPr txBox="1"/>
+          <p:nvPr/>
+        </p:nvSpPr>
+        <p:spPr>
+          <a:xfrm>
+            <a:off x="5257800" y="1325880"/>
+            <a:ext cx="1097280" cy="274320"/>
+          </a:xfrm>
+          <a:prstGeom prst="rect">
+            <a:avLst/>
+          </a:prstGeom>
+          <a:noFill/>
+        </p:spPr>
+        <p:txBody>
+          <a:bodyPr wrap="square" lIns="0" tIns="0" rIns="0" bIns="0">
+            <a:spAutoFit/>
+          </a:bodyPr>
+          <a:lstStyle/>
+          <a:p>
+            <a:pPr marL="177800" indent="0">
+              <a:spcAft>
+                <a:spcPts val="0"/>
+              </a:spcAft>
+              <a:buSzPct val="100000"/>
+              <a:buNone/>
+            </a:pPr>
+            <a:r>
+              <a:rPr lang="en-US" sz="1150" dirty="0">
+                <a:solidFill>
+                  <a:srgbClr val="000000"/>
+                </a:solidFill>
+                <a:latin typeface="Calibri" pitchFamily="34" charset="0"/>
+                <a:ea typeface="Calibri" pitchFamily="34" charset="-122"/>
+                <a:cs typeface="Calibri" pitchFamily="34" charset="-120"/>
+              </a:rPr>
+              <a:t xml:space="preserve">vs nom.</a:t>
+            </a:r>
+          </a:p>
+        </p:txBody>
+      </p:sp>
+      <p:sp>
+        <p:nvSpPr>
+          <p:cNvPr id="8" name="TextBox 7"/>
+          <p:cNvSpPr txBox="1"/>
+          <p:nvPr/>
+        </p:nvSpPr>
+        <p:spPr>
+          <a:xfrm>
+            <a:off x="640080" y="1719072"/>
+            <a:ext cx="3474720" cy="274320"/>
+          </a:xfrm>
+          <a:prstGeom prst="rect">
+            <a:avLst/>
+          </a:prstGeom>
+          <a:noFill/>
+        </p:spPr>
+        <p:txBody>
+          <a:bodyPr wrap="square" lIns="0" tIns="0" rIns="0" bIns="0">
+            <a:spAutoFit/>
+          </a:bodyPr>
+          <a:lstStyle/>
+          <a:p>
+            <a:pPr marL="177800" indent="0">
+              <a:spcAft>
+                <a:spcPts val="0"/>
+              </a:spcAft>
+              <a:buSzPct val="100000"/>
+              <a:buNone/>
+            </a:pPr>
+            <a:r>
+              <a:rPr lang="en-US" sz="1200" b="1" dirty="0">
+                <a:solidFill>
+                  <a:srgbClr val="000000"/>
+                </a:solidFill>
+                <a:latin typeface="Calibri" pitchFamily="34" charset="0"/>
+                <a:ea typeface="Calibri" pitchFamily="34" charset="-122"/>
+                <a:cs typeface="Calibri" pitchFamily="34" charset="-120"/>
+              </a:rPr>
+              <a:t xml:space="preserve">Loop inductance −50 %  (1.5 nH)</a:t>
+            </a:r>
+          </a:p>
+        </p:txBody>
+      </p:sp>
+      <p:sp>
+        <p:nvSpPr>
+          <p:cNvPr id="9" name="TextBox 8"/>
+          <p:cNvSpPr txBox="1"/>
+          <p:nvPr/>
+        </p:nvSpPr>
+        <p:spPr>
+          <a:xfrm>
+            <a:off x="4160520" y="1719072"/>
+            <a:ext cx="1005840" cy="274320"/>
+          </a:xfrm>
+          <a:prstGeom prst="rect">
+            <a:avLst/>
+          </a:prstGeom>
+          <a:noFill/>
+        </p:spPr>
+        <p:txBody>
+          <a:bodyPr wrap="square" lIns="0" tIns="0" rIns="0" bIns="0">
+            <a:spAutoFit/>
+          </a:bodyPr>
+          <a:lstStyle/>
+          <a:p>
+            <a:pPr marL="177800" indent="0">
+              <a:spcAft>
+                <a:spcPts val="0"/>
+              </a:spcAft>
+              <a:buSzPct val="100000"/>
+              <a:buNone/>
+            </a:pPr>
+            <a:r>
+              <a:rPr lang="en-US" sz="1200" b="1" dirty="0">
+                <a:solidFill>
+                  <a:srgbClr val="000000"/>
+                </a:solidFill>
+                <a:latin typeface="Calibri" pitchFamily="34" charset="0"/>
+                <a:ea typeface="Calibri" pitchFamily="34" charset="-122"/>
+                <a:cs typeface="Calibri" pitchFamily="34" charset="-120"/>
+              </a:rPr>
+              <a:t xml:space="preserve">13.54 %</a:t>
+            </a:r>
+          </a:p>
+        </p:txBody>
+      </p:sp>
+      <p:sp>
+        <p:nvSpPr>
+          <p:cNvPr id="10" name="TextBox 9"/>
+          <p:cNvSpPr txBox="1"/>
+          <p:nvPr/>
+        </p:nvSpPr>
+        <p:spPr>
+          <a:xfrm>
+            <a:off x="5257800" y="1719072"/>
+            <a:ext cx="1097280" cy="274320"/>
+          </a:xfrm>
+          <a:prstGeom prst="rect">
+            <a:avLst/>
+          </a:prstGeom>
+          <a:noFill/>
+        </p:spPr>
+        <p:txBody>
+          <a:bodyPr wrap="square" lIns="0" tIns="0" rIns="0" bIns="0">
+            <a:spAutoFit/>
+          </a:bodyPr>
+          <a:lstStyle/>
+          <a:p>
+            <a:pPr marL="177800" indent="0">
+              <a:spcAft>
+                <a:spcPts val="0"/>
+              </a:spcAft>
+              <a:buSzPct val="100000"/>
+              <a:buNone/>
+            </a:pPr>
+            <a:r>
+              <a:rPr lang="en-US" sz="1200" dirty="0">
+                <a:solidFill>
+                  <a:srgbClr val="000000"/>
+                </a:solidFill>
+                <a:latin typeface="Calibri" pitchFamily="34" charset="0"/>
+                <a:ea typeface="Calibri" pitchFamily="34" charset="-122"/>
+                <a:cs typeface="Calibri" pitchFamily="34" charset="-120"/>
+              </a:rPr>
+              <a:t xml:space="preserve">+7.59</a:t>
+            </a:r>
+          </a:p>
+        </p:txBody>
+      </p:sp>
+      <p:sp>
+        <p:nvSpPr>
+          <p:cNvPr id="11" name="TextBox 10"/>
+          <p:cNvSpPr txBox="1"/>
+          <p:nvPr/>
+        </p:nvSpPr>
+        <p:spPr>
+          <a:xfrm>
+            <a:off x="640080" y="2025395"/>
+            <a:ext cx="3474720" cy="274320"/>
+          </a:xfrm>
+          <a:prstGeom prst="rect">
+            <a:avLst/>
+          </a:prstGeom>
+          <a:noFill/>
+        </p:spPr>
+        <p:txBody>
+          <a:bodyPr wrap="square" lIns="0" tIns="0" rIns="0" bIns="0">
+            <a:spAutoFit/>
+          </a:bodyPr>
+          <a:lstStyle/>
+          <a:p>
+            <a:pPr marL="177800" indent="0">
+              <a:spcAft>
+                <a:spcPts val="0"/>
+              </a:spcAft>
+              <a:buSzPct val="100000"/>
+              <a:buNone/>
+            </a:pPr>
+            <a:r>
+              <a:rPr lang="en-US" sz="1200" dirty="0">
+                <a:solidFill>
+                  <a:srgbClr val="000000"/>
+                </a:solidFill>
+                <a:latin typeface="Calibri" pitchFamily="34" charset="0"/>
+                <a:ea typeface="Calibri" pitchFamily="34" charset="-122"/>
+                <a:cs typeface="Calibri" pitchFamily="34" charset="-120"/>
+              </a:rPr>
+              <a:t xml:space="preserve">Input capacitance +30 %</a:t>
+            </a:r>
+          </a:p>
+        </p:txBody>
+      </p:sp>
+      <p:sp>
+        <p:nvSpPr>
+          <p:cNvPr id="12" name="TextBox 11"/>
+          <p:cNvSpPr txBox="1"/>
+          <p:nvPr/>
+        </p:nvSpPr>
+        <p:spPr>
+          <a:xfrm>
+            <a:off x="4160520" y="2025395"/>
+            <a:ext cx="1005840" cy="274320"/>
+          </a:xfrm>
+          <a:prstGeom prst="rect">
+            <a:avLst/>
+          </a:prstGeom>
+          <a:noFill/>
+        </p:spPr>
+        <p:txBody>
+          <a:bodyPr wrap="square" lIns="0" tIns="0" rIns="0" bIns="0">
+            <a:spAutoFit/>
+          </a:bodyPr>
+          <a:lstStyle/>
+          <a:p>
+            <a:pPr marL="177800" indent="0">
+              <a:spcAft>
+                <a:spcPts val="0"/>
+              </a:spcAft>
+              <a:buSzPct val="100000"/>
+              <a:buNone/>
+            </a:pPr>
+            <a:r>
+              <a:rPr lang="en-US" sz="1200" dirty="0">
+                <a:solidFill>
+                  <a:srgbClr val="000000"/>
+                </a:solidFill>
+                <a:latin typeface="Calibri" pitchFamily="34" charset="0"/>
+                <a:ea typeface="Calibri" pitchFamily="34" charset="-122"/>
+                <a:cs typeface="Calibri" pitchFamily="34" charset="-120"/>
+              </a:rPr>
+              <a:t xml:space="preserve">7.71 %</a:t>
+            </a:r>
+          </a:p>
+        </p:txBody>
+      </p:sp>
+      <p:sp>
+        <p:nvSpPr>
+          <p:cNvPr id="13" name="TextBox 12"/>
+          <p:cNvSpPr txBox="1"/>
+          <p:nvPr/>
+        </p:nvSpPr>
+        <p:spPr>
+          <a:xfrm>
+            <a:off x="5257800" y="2025395"/>
+            <a:ext cx="1097280" cy="274320"/>
+          </a:xfrm>
+          <a:prstGeom prst="rect">
+            <a:avLst/>
+          </a:prstGeom>
+          <a:noFill/>
+        </p:spPr>
+        <p:txBody>
+          <a:bodyPr wrap="square" lIns="0" tIns="0" rIns="0" bIns="0">
+            <a:spAutoFit/>
+          </a:bodyPr>
+          <a:lstStyle/>
+          <a:p>
+            <a:pPr marL="177800" indent="0">
+              <a:spcAft>
+                <a:spcPts val="0"/>
+              </a:spcAft>
+              <a:buSzPct val="100000"/>
+              <a:buNone/>
+            </a:pPr>
+            <a:r>
+              <a:rPr lang="en-US" sz="1200" dirty="0">
+                <a:solidFill>
+                  <a:srgbClr val="000000"/>
+                </a:solidFill>
+                <a:latin typeface="Calibri" pitchFamily="34" charset="0"/>
+                <a:ea typeface="Calibri" pitchFamily="34" charset="-122"/>
+                <a:cs typeface="Calibri" pitchFamily="34" charset="-120"/>
+              </a:rPr>
+              <a:t xml:space="preserve">+1.76</a:t>
+            </a:r>
+          </a:p>
+        </p:txBody>
+      </p:sp>
+      <p:sp>
+        <p:nvSpPr>
+          <p:cNvPr id="14" name="TextBox 13"/>
+          <p:cNvSpPr txBox="1"/>
+          <p:nvPr/>
+        </p:nvSpPr>
+        <p:spPr>
+          <a:xfrm>
+            <a:off x="640080" y="2331720"/>
+            <a:ext cx="3474720" cy="274320"/>
+          </a:xfrm>
+          <a:prstGeom prst="rect">
+            <a:avLst/>
+          </a:prstGeom>
+          <a:noFill/>
+        </p:spPr>
+        <p:txBody>
+          <a:bodyPr wrap="square" lIns="0" tIns="0" rIns="0" bIns="0">
+            <a:spAutoFit/>
+          </a:bodyPr>
+          <a:lstStyle/>
+          <a:p>
+            <a:pPr marL="177800" indent="0">
+              <a:spcAft>
+                <a:spcPts val="0"/>
+              </a:spcAft>
+              <a:buSzPct val="100000"/>
+              <a:buNone/>
+            </a:pPr>
+            <a:r>
+              <a:rPr lang="en-US" sz="1200" dirty="0">
+                <a:solidFill>
+                  <a:srgbClr val="000000"/>
+                </a:solidFill>
+                <a:latin typeface="Calibri" pitchFamily="34" charset="0"/>
+                <a:ea typeface="Calibri" pitchFamily="34" charset="-122"/>
+                <a:cs typeface="Calibri" pitchFamily="34" charset="-120"/>
+              </a:rPr>
+              <a:t xml:space="preserve">Miller capacitance −50 %</a:t>
+            </a:r>
+          </a:p>
+        </p:txBody>
+      </p:sp>
+      <p:sp>
+        <p:nvSpPr>
+          <p:cNvPr id="15" name="TextBox 14"/>
+          <p:cNvSpPr txBox="1"/>
+          <p:nvPr/>
+        </p:nvSpPr>
+        <p:spPr>
+          <a:xfrm>
+            <a:off x="4160520" y="2331720"/>
+            <a:ext cx="1005840" cy="274320"/>
+          </a:xfrm>
+          <a:prstGeom prst="rect">
+            <a:avLst/>
+          </a:prstGeom>
+          <a:noFill/>
+        </p:spPr>
+        <p:txBody>
+          <a:bodyPr wrap="square" lIns="0" tIns="0" rIns="0" bIns="0">
+            <a:spAutoFit/>
+          </a:bodyPr>
+          <a:lstStyle/>
+          <a:p>
+            <a:pPr marL="177800" indent="0">
+              <a:spcAft>
+                <a:spcPts val="0"/>
+              </a:spcAft>
+              <a:buSzPct val="100000"/>
+              <a:buNone/>
+            </a:pPr>
+            <a:r>
+              <a:rPr lang="en-US" sz="1200" dirty="0">
+                <a:solidFill>
+                  <a:srgbClr val="000000"/>
+                </a:solidFill>
+                <a:latin typeface="Calibri" pitchFamily="34" charset="0"/>
+                <a:ea typeface="Calibri" pitchFamily="34" charset="-122"/>
+                <a:cs typeface="Calibri" pitchFamily="34" charset="-120"/>
+              </a:rPr>
+              <a:t xml:space="preserve">6.93 %</a:t>
+            </a:r>
+          </a:p>
+        </p:txBody>
+      </p:sp>
+      <p:sp>
+        <p:nvSpPr>
+          <p:cNvPr id="16" name="TextBox 15"/>
+          <p:cNvSpPr txBox="1"/>
+          <p:nvPr/>
+        </p:nvSpPr>
+        <p:spPr>
+          <a:xfrm>
+            <a:off x="5257800" y="2331720"/>
+            <a:ext cx="1097280" cy="274320"/>
+          </a:xfrm>
+          <a:prstGeom prst="rect">
+            <a:avLst/>
+          </a:prstGeom>
+          <a:noFill/>
+        </p:spPr>
+        <p:txBody>
+          <a:bodyPr wrap="square" lIns="0" tIns="0" rIns="0" bIns="0">
+            <a:spAutoFit/>
+          </a:bodyPr>
+          <a:lstStyle/>
+          <a:p>
+            <a:pPr marL="177800" indent="0">
+              <a:spcAft>
+                <a:spcPts val="0"/>
+              </a:spcAft>
+              <a:buSzPct val="100000"/>
+              <a:buNone/>
+            </a:pPr>
+            <a:r>
+              <a:rPr lang="en-US" sz="1200" dirty="0">
+                <a:solidFill>
+                  <a:srgbClr val="000000"/>
+                </a:solidFill>
+                <a:latin typeface="Calibri" pitchFamily="34" charset="0"/>
+                <a:ea typeface="Calibri" pitchFamily="34" charset="-122"/>
+                <a:cs typeface="Calibri" pitchFamily="34" charset="-120"/>
+              </a:rPr>
+              <a:t xml:space="preserve">+0.99</a:t>
+            </a:r>
+          </a:p>
+        </p:txBody>
+      </p:sp>
+      <p:sp>
+        <p:nvSpPr>
+          <p:cNvPr id="17" name="TextBox 16"/>
+          <p:cNvSpPr txBox="1"/>
+          <p:nvPr/>
+        </p:nvSpPr>
+        <p:spPr>
+          <a:xfrm>
+            <a:off x="640080" y="2638044"/>
+            <a:ext cx="3474720" cy="274320"/>
+          </a:xfrm>
+          <a:prstGeom prst="rect">
+            <a:avLst/>
+          </a:prstGeom>
+          <a:noFill/>
+        </p:spPr>
+        <p:txBody>
+          <a:bodyPr wrap="square" lIns="0" tIns="0" rIns="0" bIns="0">
+            <a:spAutoFit/>
+          </a:bodyPr>
+          <a:lstStyle/>
+          <a:p>
+            <a:pPr marL="177800" indent="0">
+              <a:spcAft>
+                <a:spcPts val="0"/>
+              </a:spcAft>
+              <a:buSzPct val="100000"/>
+              <a:buNone/>
+            </a:pPr>
+            <a:r>
+              <a:rPr lang="en-US" sz="1200" b="1" dirty="0">
+                <a:solidFill>
+                  <a:srgbClr val="000000"/>
+                </a:solidFill>
+                <a:latin typeface="Calibri" pitchFamily="34" charset="0"/>
+                <a:ea typeface="Calibri" pitchFamily="34" charset="-122"/>
+                <a:cs typeface="Calibri" pitchFamily="34" charset="-120"/>
+              </a:rPr>
+              <a:t xml:space="preserve">nominal</a:t>
+            </a:r>
+          </a:p>
+        </p:txBody>
+      </p:sp>
+      <p:sp>
+        <p:nvSpPr>
+          <p:cNvPr id="18" name="TextBox 17"/>
+          <p:cNvSpPr txBox="1"/>
+          <p:nvPr/>
+        </p:nvSpPr>
+        <p:spPr>
+          <a:xfrm>
+            <a:off x="4160520" y="2638044"/>
+            <a:ext cx="1005840" cy="274320"/>
+          </a:xfrm>
+          <a:prstGeom prst="rect">
+            <a:avLst/>
+          </a:prstGeom>
+          <a:noFill/>
+        </p:spPr>
+        <p:txBody>
+          <a:bodyPr wrap="square" lIns="0" tIns="0" rIns="0" bIns="0">
+            <a:spAutoFit/>
+          </a:bodyPr>
+          <a:lstStyle/>
+          <a:p>
+            <a:pPr marL="177800" indent="0">
+              <a:spcAft>
+                <a:spcPts val="0"/>
+              </a:spcAft>
+              <a:buSzPct val="100000"/>
+              <a:buNone/>
+            </a:pPr>
+            <a:r>
+              <a:rPr lang="en-US" sz="1200" b="1" dirty="0">
+                <a:solidFill>
+                  <a:srgbClr val="000000"/>
+                </a:solidFill>
+                <a:latin typeface="Calibri" pitchFamily="34" charset="0"/>
+                <a:ea typeface="Calibri" pitchFamily="34" charset="-122"/>
+                <a:cs typeface="Calibri" pitchFamily="34" charset="-120"/>
+              </a:rPr>
+              <a:t xml:space="preserve">5.95 %</a:t>
+            </a:r>
+          </a:p>
+        </p:txBody>
+      </p:sp>
+      <p:sp>
+        <p:nvSpPr>
+          <p:cNvPr id="19" name="TextBox 18"/>
+          <p:cNvSpPr txBox="1"/>
+          <p:nvPr/>
+        </p:nvSpPr>
+        <p:spPr>
+          <a:xfrm>
+            <a:off x="5257800" y="2638044"/>
+            <a:ext cx="1097280" cy="274320"/>
+          </a:xfrm>
+          <a:prstGeom prst="rect">
+            <a:avLst/>
+          </a:prstGeom>
+          <a:noFill/>
+        </p:spPr>
+        <p:txBody>
+          <a:bodyPr wrap="square" lIns="0" tIns="0" rIns="0" bIns="0">
+            <a:spAutoFit/>
+          </a:bodyPr>
+          <a:lstStyle/>
+          <a:p>
+            <a:pPr marL="177800" indent="0">
+              <a:spcAft>
+                <a:spcPts val="0"/>
+              </a:spcAft>
+              <a:buSzPct val="100000"/>
+              <a:buNone/>
+            </a:pPr>
+            <a:r>
+              <a:rPr lang="en-US" sz="1200" dirty="0">
+                <a:solidFill>
+                  <a:srgbClr val="000000"/>
+                </a:solidFill>
+                <a:latin typeface="Calibri" pitchFamily="34" charset="0"/>
+                <a:ea typeface="Calibri" pitchFamily="34" charset="-122"/>
+                <a:cs typeface="Calibri" pitchFamily="34" charset="-120"/>
+              </a:rPr>
+              <a:t xml:space="preserve">—</a:t>
+            </a:r>
+          </a:p>
+        </p:txBody>
+      </p:sp>
+      <p:sp>
+        <p:nvSpPr>
+          <p:cNvPr id="20" name="TextBox 19"/>
+          <p:cNvSpPr txBox="1"/>
+          <p:nvPr/>
+        </p:nvSpPr>
+        <p:spPr>
+          <a:xfrm>
+            <a:off x="640080" y="2944368"/>
+            <a:ext cx="3474720" cy="274320"/>
+          </a:xfrm>
+          <a:prstGeom prst="rect">
+            <a:avLst/>
+          </a:prstGeom>
+          <a:noFill/>
+        </p:spPr>
+        <p:txBody>
+          <a:bodyPr wrap="square" lIns="0" tIns="0" rIns="0" bIns="0">
+            <a:spAutoFit/>
+          </a:bodyPr>
+          <a:lstStyle/>
+          <a:p>
+            <a:pPr marL="177800" indent="0">
+              <a:spcAft>
+                <a:spcPts val="0"/>
+              </a:spcAft>
+              <a:buSzPct val="100000"/>
+              <a:buNone/>
+            </a:pPr>
+            <a:r>
+              <a:rPr lang="en-US" sz="1200" dirty="0">
+                <a:solidFill>
+                  <a:srgbClr val="000000"/>
+                </a:solidFill>
+                <a:latin typeface="Calibri" pitchFamily="34" charset="0"/>
+                <a:ea typeface="Calibri" pitchFamily="34" charset="-122"/>
+                <a:cs typeface="Calibri" pitchFamily="34" charset="-120"/>
+              </a:rPr>
+              <a:t xml:space="preserve">Threshold −20 %</a:t>
+            </a:r>
+          </a:p>
+        </p:txBody>
+      </p:sp>
+      <p:sp>
+        <p:nvSpPr>
+          <p:cNvPr id="21" name="TextBox 20"/>
+          <p:cNvSpPr txBox="1"/>
+          <p:nvPr/>
+        </p:nvSpPr>
+        <p:spPr>
+          <a:xfrm>
+            <a:off x="4160520" y="2944368"/>
+            <a:ext cx="1005840" cy="274320"/>
+          </a:xfrm>
+          <a:prstGeom prst="rect">
+            <a:avLst/>
+          </a:prstGeom>
+          <a:noFill/>
+        </p:spPr>
+        <p:txBody>
+          <a:bodyPr wrap="square" lIns="0" tIns="0" rIns="0" bIns="0">
+            <a:spAutoFit/>
+          </a:bodyPr>
+          <a:lstStyle/>
+          <a:p>
+            <a:pPr marL="177800" indent="0">
+              <a:spcAft>
+                <a:spcPts val="0"/>
+              </a:spcAft>
+              <a:buSzPct val="100000"/>
+              <a:buNone/>
+            </a:pPr>
+            <a:r>
+              <a:rPr lang="en-US" sz="1200" dirty="0">
+                <a:solidFill>
+                  <a:srgbClr val="000000"/>
+                </a:solidFill>
+                <a:latin typeface="Calibri" pitchFamily="34" charset="0"/>
+                <a:ea typeface="Calibri" pitchFamily="34" charset="-122"/>
+                <a:cs typeface="Calibri" pitchFamily="34" charset="-120"/>
+              </a:rPr>
+              <a:t xml:space="preserve">5.64 %</a:t>
+            </a:r>
+          </a:p>
+        </p:txBody>
+      </p:sp>
+      <p:sp>
+        <p:nvSpPr>
+          <p:cNvPr id="22" name="TextBox 21"/>
+          <p:cNvSpPr txBox="1"/>
+          <p:nvPr/>
+        </p:nvSpPr>
+        <p:spPr>
+          <a:xfrm>
+            <a:off x="5257800" y="2944368"/>
+            <a:ext cx="1097280" cy="274320"/>
+          </a:xfrm>
+          <a:prstGeom prst="rect">
+            <a:avLst/>
+          </a:prstGeom>
+          <a:noFill/>
+        </p:spPr>
+        <p:txBody>
+          <a:bodyPr wrap="square" lIns="0" tIns="0" rIns="0" bIns="0">
+            <a:spAutoFit/>
+          </a:bodyPr>
+          <a:lstStyle/>
+          <a:p>
+            <a:pPr marL="177800" indent="0">
+              <a:spcAft>
+                <a:spcPts val="0"/>
+              </a:spcAft>
+              <a:buSzPct val="100000"/>
+              <a:buNone/>
+            </a:pPr>
+            <a:r>
+              <a:rPr lang="en-US" sz="1200" dirty="0">
+                <a:solidFill>
+                  <a:srgbClr val="000000"/>
+                </a:solidFill>
+                <a:latin typeface="Calibri" pitchFamily="34" charset="0"/>
+                <a:ea typeface="Calibri" pitchFamily="34" charset="-122"/>
+                <a:cs typeface="Calibri" pitchFamily="34" charset="-120"/>
+              </a:rPr>
+              <a:t xml:space="preserve">−0.31</a:t>
+            </a:r>
+          </a:p>
+        </p:txBody>
+      </p:sp>
+      <p:sp>
+        <p:nvSpPr>
+          <p:cNvPr id="23" name="TextBox 22"/>
+          <p:cNvSpPr txBox="1"/>
+          <p:nvPr/>
+        </p:nvSpPr>
+        <p:spPr>
+          <a:xfrm>
+            <a:off x="640080" y="3250691"/>
+            <a:ext cx="3474720" cy="274320"/>
+          </a:xfrm>
+          <a:prstGeom prst="rect">
+            <a:avLst/>
+          </a:prstGeom>
+          <a:noFill/>
+        </p:spPr>
+        <p:txBody>
+          <a:bodyPr wrap="square" lIns="0" tIns="0" rIns="0" bIns="0">
+            <a:spAutoFit/>
+          </a:bodyPr>
+          <a:lstStyle/>
+          <a:p>
+            <a:pPr marL="177800" indent="0">
+              <a:spcAft>
+                <a:spcPts val="0"/>
+              </a:spcAft>
+              <a:buSzPct val="100000"/>
+              <a:buNone/>
+            </a:pPr>
+            <a:r>
+              <a:rPr lang="en-US" sz="1200" dirty="0">
+                <a:solidFill>
+                  <a:srgbClr val="000000"/>
+                </a:solidFill>
+                <a:latin typeface="Calibri" pitchFamily="34" charset="0"/>
+                <a:ea typeface="Calibri" pitchFamily="34" charset="-122"/>
+                <a:cs typeface="Calibri" pitchFamily="34" charset="-120"/>
+              </a:rPr>
+              <a:t xml:space="preserve">Transconductance +30 %</a:t>
+            </a:r>
+          </a:p>
+        </p:txBody>
+      </p:sp>
+      <p:sp>
+        <p:nvSpPr>
+          <p:cNvPr id="24" name="TextBox 23"/>
+          <p:cNvSpPr txBox="1"/>
+          <p:nvPr/>
+        </p:nvSpPr>
+        <p:spPr>
+          <a:xfrm>
+            <a:off x="4160520" y="3250691"/>
+            <a:ext cx="1005840" cy="274320"/>
+          </a:xfrm>
+          <a:prstGeom prst="rect">
+            <a:avLst/>
+          </a:prstGeom>
+          <a:noFill/>
+        </p:spPr>
+        <p:txBody>
+          <a:bodyPr wrap="square" lIns="0" tIns="0" rIns="0" bIns="0">
+            <a:spAutoFit/>
+          </a:bodyPr>
+          <a:lstStyle/>
+          <a:p>
+            <a:pPr marL="177800" indent="0">
+              <a:spcAft>
+                <a:spcPts val="0"/>
+              </a:spcAft>
+              <a:buSzPct val="100000"/>
+              <a:buNone/>
+            </a:pPr>
+            <a:r>
+              <a:rPr lang="en-US" sz="1200" dirty="0">
+                <a:solidFill>
+                  <a:srgbClr val="000000"/>
+                </a:solidFill>
+                <a:latin typeface="Calibri" pitchFamily="34" charset="0"/>
+                <a:ea typeface="Calibri" pitchFamily="34" charset="-122"/>
+                <a:cs typeface="Calibri" pitchFamily="34" charset="-120"/>
+              </a:rPr>
+              <a:t xml:space="preserve">5.08 %</a:t>
+            </a:r>
+          </a:p>
+        </p:txBody>
+      </p:sp>
+      <p:sp>
+        <p:nvSpPr>
+          <p:cNvPr id="25" name="TextBox 24"/>
+          <p:cNvSpPr txBox="1"/>
+          <p:nvPr/>
+        </p:nvSpPr>
+        <p:spPr>
+          <a:xfrm>
+            <a:off x="5257800" y="3250691"/>
+            <a:ext cx="1097280" cy="274320"/>
+          </a:xfrm>
+          <a:prstGeom prst="rect">
+            <a:avLst/>
+          </a:prstGeom>
+          <a:noFill/>
+        </p:spPr>
+        <p:txBody>
+          <a:bodyPr wrap="square" lIns="0" tIns="0" rIns="0" bIns="0">
+            <a:spAutoFit/>
+          </a:bodyPr>
+          <a:lstStyle/>
+          <a:p>
+            <a:pPr marL="177800" indent="0">
+              <a:spcAft>
+                <a:spcPts val="0"/>
+              </a:spcAft>
+              <a:buSzPct val="100000"/>
+              <a:buNone/>
+            </a:pPr>
+            <a:r>
+              <a:rPr lang="en-US" sz="1200" dirty="0">
+                <a:solidFill>
+                  <a:srgbClr val="000000"/>
+                </a:solidFill>
+                <a:latin typeface="Calibri" pitchFamily="34" charset="0"/>
+                <a:ea typeface="Calibri" pitchFamily="34" charset="-122"/>
+                <a:cs typeface="Calibri" pitchFamily="34" charset="-120"/>
+              </a:rPr>
+              <a:t xml:space="preserve">−0.87</a:t>
+            </a:r>
+          </a:p>
+        </p:txBody>
+      </p:sp>
+      <p:sp>
+        <p:nvSpPr>
+          <p:cNvPr id="26" name="TextBox 25"/>
+          <p:cNvSpPr txBox="1"/>
+          <p:nvPr/>
+        </p:nvSpPr>
+        <p:spPr>
+          <a:xfrm>
+            <a:off x="640080" y="3557015"/>
+            <a:ext cx="3474720" cy="274320"/>
+          </a:xfrm>
+          <a:prstGeom prst="rect">
+            <a:avLst/>
+          </a:prstGeom>
+          <a:noFill/>
+        </p:spPr>
+        <p:txBody>
+          <a:bodyPr wrap="square" lIns="0" tIns="0" rIns="0" bIns="0">
+            <a:spAutoFit/>
+          </a:bodyPr>
+          <a:lstStyle/>
+          <a:p>
+            <a:pPr marL="177800" indent="0">
+              <a:spcAft>
+                <a:spcPts val="0"/>
+              </a:spcAft>
+              <a:buSzPct val="100000"/>
+              <a:buNone/>
+            </a:pPr>
+            <a:r>
+              <a:rPr lang="en-US" sz="1200" dirty="0">
+                <a:solidFill>
+                  <a:srgbClr val="000000"/>
+                </a:solidFill>
+                <a:latin typeface="Calibri" pitchFamily="34" charset="0"/>
+                <a:ea typeface="Calibri" pitchFamily="34" charset="-122"/>
+                <a:cs typeface="Calibri" pitchFamily="34" charset="-120"/>
+              </a:rPr>
+              <a:t xml:space="preserve">Threshold +20 %</a:t>
+            </a:r>
+          </a:p>
+        </p:txBody>
+      </p:sp>
+      <p:sp>
+        <p:nvSpPr>
+          <p:cNvPr id="27" name="TextBox 26"/>
+          <p:cNvSpPr txBox="1"/>
+          <p:nvPr/>
+        </p:nvSpPr>
+        <p:spPr>
+          <a:xfrm>
+            <a:off x="4160520" y="3557015"/>
+            <a:ext cx="1005840" cy="274320"/>
+          </a:xfrm>
+          <a:prstGeom prst="rect">
+            <a:avLst/>
+          </a:prstGeom>
+          <a:noFill/>
+        </p:spPr>
+        <p:txBody>
+          <a:bodyPr wrap="square" lIns="0" tIns="0" rIns="0" bIns="0">
+            <a:spAutoFit/>
+          </a:bodyPr>
+          <a:lstStyle/>
+          <a:p>
+            <a:pPr marL="177800" indent="0">
+              <a:spcAft>
+                <a:spcPts val="0"/>
+              </a:spcAft>
+              <a:buSzPct val="100000"/>
+              <a:buNone/>
+            </a:pPr>
+            <a:r>
+              <a:rPr lang="en-US" sz="1200" dirty="0">
+                <a:solidFill>
+                  <a:srgbClr val="000000"/>
+                </a:solidFill>
+                <a:latin typeface="Calibri" pitchFamily="34" charset="0"/>
+                <a:ea typeface="Calibri" pitchFamily="34" charset="-122"/>
+                <a:cs typeface="Calibri" pitchFamily="34" charset="-120"/>
+              </a:rPr>
+              <a:t xml:space="preserve">4.90 %</a:t>
+            </a:r>
+          </a:p>
+        </p:txBody>
+      </p:sp>
+      <p:sp>
+        <p:nvSpPr>
+          <p:cNvPr id="28" name="TextBox 27"/>
+          <p:cNvSpPr txBox="1"/>
+          <p:nvPr/>
+        </p:nvSpPr>
+        <p:spPr>
+          <a:xfrm>
+            <a:off x="5257800" y="3557015"/>
+            <a:ext cx="1097280" cy="274320"/>
+          </a:xfrm>
+          <a:prstGeom prst="rect">
+            <a:avLst/>
+          </a:prstGeom>
+          <a:noFill/>
+        </p:spPr>
+        <p:txBody>
+          <a:bodyPr wrap="square" lIns="0" tIns="0" rIns="0" bIns="0">
+            <a:spAutoFit/>
+          </a:bodyPr>
+          <a:lstStyle/>
+          <a:p>
+            <a:pPr marL="177800" indent="0">
+              <a:spcAft>
+                <a:spcPts val="0"/>
+              </a:spcAft>
+              <a:buSzPct val="100000"/>
+              <a:buNone/>
+            </a:pPr>
+            <a:r>
+              <a:rPr lang="en-US" sz="1200" dirty="0">
+                <a:solidFill>
+                  <a:srgbClr val="000000"/>
+                </a:solidFill>
+                <a:latin typeface="Calibri" pitchFamily="34" charset="0"/>
+                <a:ea typeface="Calibri" pitchFamily="34" charset="-122"/>
+                <a:cs typeface="Calibri" pitchFamily="34" charset="-120"/>
+              </a:rPr>
+              <a:t xml:space="preserve">−1.05</a:t>
+            </a:r>
+          </a:p>
+        </p:txBody>
+      </p:sp>
+      <p:sp>
+        <p:nvSpPr>
+          <p:cNvPr id="29" name="TextBox 28"/>
+          <p:cNvSpPr txBox="1"/>
+          <p:nvPr/>
+        </p:nvSpPr>
+        <p:spPr>
+          <a:xfrm>
+            <a:off x="640080" y="3863339"/>
+            <a:ext cx="3474720" cy="274320"/>
+          </a:xfrm>
+          <a:prstGeom prst="rect">
+            <a:avLst/>
+          </a:prstGeom>
+          <a:noFill/>
+        </p:spPr>
+        <p:txBody>
+          <a:bodyPr wrap="square" lIns="0" tIns="0" rIns="0" bIns="0">
+            <a:spAutoFit/>
+          </a:bodyPr>
+          <a:lstStyle/>
+          <a:p>
+            <a:pPr marL="177800" indent="0">
+              <a:spcAft>
+                <a:spcPts val="0"/>
+              </a:spcAft>
+              <a:buSzPct val="100000"/>
+              <a:buNone/>
+            </a:pPr>
+            <a:r>
+              <a:rPr lang="en-US" sz="1200" dirty="0">
+                <a:solidFill>
+                  <a:srgbClr val="000000"/>
+                </a:solidFill>
+                <a:latin typeface="Calibri" pitchFamily="34" charset="0"/>
+                <a:ea typeface="Calibri" pitchFamily="34" charset="-122"/>
+                <a:cs typeface="Calibri" pitchFamily="34" charset="-120"/>
+              </a:rPr>
+              <a:t xml:space="preserve">Input capacitance −30 %</a:t>
+            </a:r>
+          </a:p>
+        </p:txBody>
+      </p:sp>
+      <p:sp>
+        <p:nvSpPr>
+          <p:cNvPr id="30" name="TextBox 29"/>
+          <p:cNvSpPr txBox="1"/>
+          <p:nvPr/>
+        </p:nvSpPr>
+        <p:spPr>
+          <a:xfrm>
+            <a:off x="4160520" y="3863339"/>
+            <a:ext cx="1005840" cy="274320"/>
+          </a:xfrm>
+          <a:prstGeom prst="rect">
+            <a:avLst/>
+          </a:prstGeom>
+          <a:noFill/>
+        </p:spPr>
+        <p:txBody>
+          <a:bodyPr wrap="square" lIns="0" tIns="0" rIns="0" bIns="0">
+            <a:spAutoFit/>
+          </a:bodyPr>
+          <a:lstStyle/>
+          <a:p>
+            <a:pPr marL="177800" indent="0">
+              <a:spcAft>
+                <a:spcPts val="0"/>
+              </a:spcAft>
+              <a:buSzPct val="100000"/>
+              <a:buNone/>
+            </a:pPr>
+            <a:r>
+              <a:rPr lang="en-US" sz="1200" dirty="0">
+                <a:solidFill>
+                  <a:srgbClr val="000000"/>
+                </a:solidFill>
+                <a:latin typeface="Calibri" pitchFamily="34" charset="0"/>
+                <a:ea typeface="Calibri" pitchFamily="34" charset="-122"/>
+                <a:cs typeface="Calibri" pitchFamily="34" charset="-120"/>
+              </a:rPr>
+              <a:t xml:space="preserve">4.76 %</a:t>
+            </a:r>
+          </a:p>
+        </p:txBody>
+      </p:sp>
+      <p:sp>
+        <p:nvSpPr>
+          <p:cNvPr id="31" name="TextBox 30"/>
+          <p:cNvSpPr txBox="1"/>
+          <p:nvPr/>
+        </p:nvSpPr>
+        <p:spPr>
+          <a:xfrm>
+            <a:off x="5257800" y="3863339"/>
+            <a:ext cx="1097280" cy="274320"/>
+          </a:xfrm>
+          <a:prstGeom prst="rect">
+            <a:avLst/>
+          </a:prstGeom>
+          <a:noFill/>
+        </p:spPr>
+        <p:txBody>
+          <a:bodyPr wrap="square" lIns="0" tIns="0" rIns="0" bIns="0">
+            <a:spAutoFit/>
+          </a:bodyPr>
+          <a:lstStyle/>
+          <a:p>
+            <a:pPr marL="177800" indent="0">
+              <a:spcAft>
+                <a:spcPts val="0"/>
+              </a:spcAft>
+              <a:buSzPct val="100000"/>
+              <a:buNone/>
+            </a:pPr>
+            <a:r>
+              <a:rPr lang="en-US" sz="1200" dirty="0">
+                <a:solidFill>
+                  <a:srgbClr val="000000"/>
+                </a:solidFill>
+                <a:latin typeface="Calibri" pitchFamily="34" charset="0"/>
+                <a:ea typeface="Calibri" pitchFamily="34" charset="-122"/>
+                <a:cs typeface="Calibri" pitchFamily="34" charset="-120"/>
+              </a:rPr>
+              <a:t xml:space="preserve">−1.19</a:t>
+            </a:r>
+          </a:p>
+        </p:txBody>
+      </p:sp>
+      <p:sp>
+        <p:nvSpPr>
+          <p:cNvPr id="32" name="TextBox 31"/>
+          <p:cNvSpPr txBox="1"/>
+          <p:nvPr/>
+        </p:nvSpPr>
+        <p:spPr>
+          <a:xfrm>
+            <a:off x="640080" y="4169663"/>
+            <a:ext cx="3474720" cy="274320"/>
+          </a:xfrm>
+          <a:prstGeom prst="rect">
+            <a:avLst/>
+          </a:prstGeom>
+          <a:noFill/>
+        </p:spPr>
+        <p:txBody>
+          <a:bodyPr wrap="square" lIns="0" tIns="0" rIns="0" bIns="0">
+            <a:spAutoFit/>
+          </a:bodyPr>
+          <a:lstStyle/>
+          <a:p>
+            <a:pPr marL="177800" indent="0">
+              <a:spcAft>
+                <a:spcPts val="0"/>
+              </a:spcAft>
+              <a:buSzPct val="100000"/>
+              <a:buNone/>
+            </a:pPr>
+            <a:r>
+              <a:rPr lang="en-US" sz="1200" dirty="0">
+                <a:solidFill>
+                  <a:srgbClr val="000000"/>
+                </a:solidFill>
+                <a:latin typeface="Calibri" pitchFamily="34" charset="0"/>
+                <a:ea typeface="Calibri" pitchFamily="34" charset="-122"/>
+                <a:cs typeface="Calibri" pitchFamily="34" charset="-120"/>
+              </a:rPr>
+              <a:t xml:space="preserve">Transconductance −30 %</a:t>
+            </a:r>
+          </a:p>
+        </p:txBody>
+      </p:sp>
+      <p:sp>
+        <p:nvSpPr>
+          <p:cNvPr id="33" name="TextBox 32"/>
+          <p:cNvSpPr txBox="1"/>
+          <p:nvPr/>
+        </p:nvSpPr>
+        <p:spPr>
+          <a:xfrm>
+            <a:off x="4160520" y="4169663"/>
+            <a:ext cx="1005840" cy="274320"/>
+          </a:xfrm>
+          <a:prstGeom prst="rect">
+            <a:avLst/>
+          </a:prstGeom>
+          <a:noFill/>
+        </p:spPr>
+        <p:txBody>
+          <a:bodyPr wrap="square" lIns="0" tIns="0" rIns="0" bIns="0">
+            <a:spAutoFit/>
+          </a:bodyPr>
+          <a:lstStyle/>
+          <a:p>
+            <a:pPr marL="177800" indent="0">
+              <a:spcAft>
+                <a:spcPts val="0"/>
+              </a:spcAft>
+              <a:buSzPct val="100000"/>
+              <a:buNone/>
+            </a:pPr>
+            <a:r>
+              <a:rPr lang="en-US" sz="1200" dirty="0">
+                <a:solidFill>
+                  <a:srgbClr val="000000"/>
+                </a:solidFill>
+                <a:latin typeface="Calibri" pitchFamily="34" charset="0"/>
+                <a:ea typeface="Calibri" pitchFamily="34" charset="-122"/>
+                <a:cs typeface="Calibri" pitchFamily="34" charset="-120"/>
+              </a:rPr>
+              <a:t xml:space="preserve">4.45 %</a:t>
+            </a:r>
+          </a:p>
+        </p:txBody>
+      </p:sp>
+      <p:sp>
+        <p:nvSpPr>
+          <p:cNvPr id="34" name="TextBox 33"/>
+          <p:cNvSpPr txBox="1"/>
+          <p:nvPr/>
+        </p:nvSpPr>
+        <p:spPr>
+          <a:xfrm>
+            <a:off x="5257800" y="4169663"/>
+            <a:ext cx="1097280" cy="274320"/>
+          </a:xfrm>
+          <a:prstGeom prst="rect">
+            <a:avLst/>
+          </a:prstGeom>
+          <a:noFill/>
+        </p:spPr>
+        <p:txBody>
+          <a:bodyPr wrap="square" lIns="0" tIns="0" rIns="0" bIns="0">
+            <a:spAutoFit/>
+          </a:bodyPr>
+          <a:lstStyle/>
+          <a:p>
+            <a:pPr marL="177800" indent="0">
+              <a:spcAft>
+                <a:spcPts val="0"/>
+              </a:spcAft>
+              <a:buSzPct val="100000"/>
+              <a:buNone/>
+            </a:pPr>
+            <a:r>
+              <a:rPr lang="en-US" sz="1200" dirty="0">
+                <a:solidFill>
+                  <a:srgbClr val="000000"/>
+                </a:solidFill>
+                <a:latin typeface="Calibri" pitchFamily="34" charset="0"/>
+                <a:ea typeface="Calibri" pitchFamily="34" charset="-122"/>
+                <a:cs typeface="Calibri" pitchFamily="34" charset="-120"/>
+              </a:rPr>
+              <a:t xml:space="preserve">−1.49</a:t>
+            </a:r>
+          </a:p>
+        </p:txBody>
+      </p:sp>
+      <p:sp>
+        <p:nvSpPr>
+          <p:cNvPr id="35" name="TextBox 34"/>
+          <p:cNvSpPr txBox="1"/>
+          <p:nvPr/>
+        </p:nvSpPr>
+        <p:spPr>
+          <a:xfrm>
+            <a:off x="640080" y="4475988"/>
+            <a:ext cx="3474720" cy="274320"/>
+          </a:xfrm>
+          <a:prstGeom prst="rect">
+            <a:avLst/>
+          </a:prstGeom>
+          <a:noFill/>
+        </p:spPr>
+        <p:txBody>
+          <a:bodyPr wrap="square" lIns="0" tIns="0" rIns="0" bIns="0">
+            <a:spAutoFit/>
+          </a:bodyPr>
+          <a:lstStyle/>
+          <a:p>
+            <a:pPr marL="177800" indent="0">
+              <a:spcAft>
+                <a:spcPts val="0"/>
+              </a:spcAft>
+              <a:buSzPct val="100000"/>
+              <a:buNone/>
+            </a:pPr>
+            <a:r>
+              <a:rPr lang="en-US" sz="1200" dirty="0">
+                <a:solidFill>
+                  <a:srgbClr val="000000"/>
+                </a:solidFill>
+                <a:latin typeface="Calibri" pitchFamily="34" charset="0"/>
+                <a:ea typeface="Calibri" pitchFamily="34" charset="-122"/>
+                <a:cs typeface="Calibri" pitchFamily="34" charset="-120"/>
+              </a:rPr>
+              <a:t xml:space="preserve">Miller capacitance +50 %</a:t>
+            </a:r>
+          </a:p>
+        </p:txBody>
+      </p:sp>
+      <p:sp>
+        <p:nvSpPr>
+          <p:cNvPr id="36" name="TextBox 35"/>
+          <p:cNvSpPr txBox="1"/>
+          <p:nvPr/>
+        </p:nvSpPr>
+        <p:spPr>
+          <a:xfrm>
+            <a:off x="4160520" y="4475988"/>
+            <a:ext cx="1005840" cy="274320"/>
+          </a:xfrm>
+          <a:prstGeom prst="rect">
+            <a:avLst/>
+          </a:prstGeom>
+          <a:noFill/>
+        </p:spPr>
+        <p:txBody>
+          <a:bodyPr wrap="square" lIns="0" tIns="0" rIns="0" bIns="0">
+            <a:spAutoFit/>
+          </a:bodyPr>
+          <a:lstStyle/>
+          <a:p>
+            <a:pPr marL="177800" indent="0">
+              <a:spcAft>
+                <a:spcPts val="0"/>
+              </a:spcAft>
+              <a:buSzPct val="100000"/>
+              <a:buNone/>
+            </a:pPr>
+            <a:r>
+              <a:rPr lang="en-US" sz="1200" dirty="0">
+                <a:solidFill>
+                  <a:srgbClr val="000000"/>
+                </a:solidFill>
+                <a:latin typeface="Calibri" pitchFamily="34" charset="0"/>
+                <a:ea typeface="Calibri" pitchFamily="34" charset="-122"/>
+                <a:cs typeface="Calibri" pitchFamily="34" charset="-120"/>
+              </a:rPr>
+              <a:t xml:space="preserve">4.32 %</a:t>
+            </a:r>
+          </a:p>
+        </p:txBody>
+      </p:sp>
+      <p:sp>
+        <p:nvSpPr>
+          <p:cNvPr id="37" name="TextBox 36"/>
+          <p:cNvSpPr txBox="1"/>
+          <p:nvPr/>
+        </p:nvSpPr>
+        <p:spPr>
+          <a:xfrm>
+            <a:off x="5257800" y="4475988"/>
+            <a:ext cx="1097280" cy="274320"/>
+          </a:xfrm>
+          <a:prstGeom prst="rect">
+            <a:avLst/>
+          </a:prstGeom>
+          <a:noFill/>
+        </p:spPr>
+        <p:txBody>
+          <a:bodyPr wrap="square" lIns="0" tIns="0" rIns="0" bIns="0">
+            <a:spAutoFit/>
+          </a:bodyPr>
+          <a:lstStyle/>
+          <a:p>
+            <a:pPr marL="177800" indent="0">
+              <a:spcAft>
+                <a:spcPts val="0"/>
+              </a:spcAft>
+              <a:buSzPct val="100000"/>
+              <a:buNone/>
+            </a:pPr>
+            <a:r>
+              <a:rPr lang="en-US" sz="1200" dirty="0">
+                <a:solidFill>
+                  <a:srgbClr val="000000"/>
+                </a:solidFill>
+                <a:latin typeface="Calibri" pitchFamily="34" charset="0"/>
+                <a:ea typeface="Calibri" pitchFamily="34" charset="-122"/>
+                <a:cs typeface="Calibri" pitchFamily="34" charset="-120"/>
+              </a:rPr>
+              <a:t xml:space="preserve">−1.63</a:t>
+            </a:r>
+          </a:p>
+        </p:txBody>
+      </p:sp>
+      <p:sp>
+        <p:nvSpPr>
+          <p:cNvPr id="38" name="TextBox 37"/>
+          <p:cNvSpPr txBox="1"/>
+          <p:nvPr/>
+        </p:nvSpPr>
+        <p:spPr>
+          <a:xfrm>
+            <a:off x="640080" y="4782312"/>
+            <a:ext cx="3474720" cy="274320"/>
+          </a:xfrm>
+          <a:prstGeom prst="rect">
+            <a:avLst/>
+          </a:prstGeom>
+          <a:noFill/>
+        </p:spPr>
+        <p:txBody>
+          <a:bodyPr wrap="square" lIns="0" tIns="0" rIns="0" bIns="0">
+            <a:spAutoFit/>
+          </a:bodyPr>
+          <a:lstStyle/>
+          <a:p>
+            <a:pPr marL="177800" indent="0">
+              <a:spcAft>
+                <a:spcPts val="0"/>
+              </a:spcAft>
+              <a:buSzPct val="100000"/>
+              <a:buNone/>
+            </a:pPr>
+            <a:r>
+              <a:rPr lang="en-US" sz="1200" b="1" dirty="0">
+                <a:solidFill>
+                  <a:srgbClr val="000000"/>
+                </a:solidFill>
+                <a:latin typeface="Calibri" pitchFamily="34" charset="0"/>
+                <a:ea typeface="Calibri" pitchFamily="34" charset="-122"/>
+                <a:cs typeface="Calibri" pitchFamily="34" charset="-120"/>
+              </a:rPr>
+              <a:t xml:space="preserve">Loop inductance +50 %  (4.5 nH)</a:t>
+            </a:r>
+          </a:p>
+        </p:txBody>
+      </p:sp>
+      <p:sp>
+        <p:nvSpPr>
+          <p:cNvPr id="39" name="TextBox 38"/>
+          <p:cNvSpPr txBox="1"/>
+          <p:nvPr/>
+        </p:nvSpPr>
+        <p:spPr>
+          <a:xfrm>
+            <a:off x="4160520" y="4782312"/>
+            <a:ext cx="1005840" cy="274320"/>
+          </a:xfrm>
+          <a:prstGeom prst="rect">
+            <a:avLst/>
+          </a:prstGeom>
+          <a:noFill/>
+        </p:spPr>
+        <p:txBody>
+          <a:bodyPr wrap="square" lIns="0" tIns="0" rIns="0" bIns="0">
+            <a:spAutoFit/>
+          </a:bodyPr>
+          <a:lstStyle/>
+          <a:p>
+            <a:pPr marL="177800" indent="0">
+              <a:spcAft>
+                <a:spcPts val="0"/>
+              </a:spcAft>
+              <a:buSzPct val="100000"/>
+              <a:buNone/>
+            </a:pPr>
+            <a:r>
+              <a:rPr lang="en-US" sz="1200" b="1" dirty="0">
+                <a:solidFill>
+                  <a:srgbClr val="000000"/>
+                </a:solidFill>
+                <a:latin typeface="Calibri" pitchFamily="34" charset="0"/>
+                <a:ea typeface="Calibri" pitchFamily="34" charset="-122"/>
+                <a:cs typeface="Calibri" pitchFamily="34" charset="-120"/>
+              </a:rPr>
+              <a:t xml:space="preserve">0.55 %</a:t>
+            </a:r>
+          </a:p>
+        </p:txBody>
+      </p:sp>
+      <p:sp>
+        <p:nvSpPr>
+          <p:cNvPr id="40" name="TextBox 39"/>
+          <p:cNvSpPr txBox="1"/>
+          <p:nvPr/>
+        </p:nvSpPr>
+        <p:spPr>
+          <a:xfrm>
+            <a:off x="5257800" y="4782312"/>
+            <a:ext cx="1097280" cy="274320"/>
+          </a:xfrm>
+          <a:prstGeom prst="rect">
+            <a:avLst/>
+          </a:prstGeom>
+          <a:noFill/>
+        </p:spPr>
+        <p:txBody>
+          <a:bodyPr wrap="square" lIns="0" tIns="0" rIns="0" bIns="0">
+            <a:spAutoFit/>
+          </a:bodyPr>
+          <a:lstStyle/>
+          <a:p>
+            <a:pPr marL="177800" indent="0">
+              <a:spcAft>
+                <a:spcPts val="0"/>
+              </a:spcAft>
+              <a:buSzPct val="100000"/>
+              <a:buNone/>
+            </a:pPr>
+            <a:r>
+              <a:rPr lang="en-US" sz="1200" dirty="0">
+                <a:solidFill>
+                  <a:srgbClr val="000000"/>
+                </a:solidFill>
+                <a:latin typeface="Calibri" pitchFamily="34" charset="0"/>
+                <a:ea typeface="Calibri" pitchFamily="34" charset="-122"/>
+                <a:cs typeface="Calibri" pitchFamily="34" charset="-120"/>
+              </a:rPr>
+              <a:t xml:space="preserve">−5.39</a:t>
+            </a:r>
+          </a:p>
+        </p:txBody>
+      </p:sp>
+      <p:sp>
+        <p:nvSpPr>
+          <p:cNvPr id="41" name="TextBox 40"/>
+          <p:cNvSpPr txBox="1"/>
+          <p:nvPr/>
+        </p:nvSpPr>
+        <p:spPr>
+          <a:xfrm>
+            <a:off x="6903720" y="1325880"/>
+            <a:ext cx="4617720" cy="548640"/>
+          </a:xfrm>
+          <a:prstGeom prst="rect">
+            <a:avLst/>
+          </a:prstGeom>
+          <a:noFill/>
+        </p:spPr>
+        <p:txBody>
+          <a:bodyPr wrap="square" lIns="0" tIns="0" rIns="0" bIns="0">
+            <a:spAutoFit/>
+          </a:bodyPr>
+          <a:lstStyle/>
+          <a:p>
+            <a:pPr marL="177800" indent="0">
+              <a:spcAft>
+                <a:spcPts val="0"/>
+              </a:spcAft>
+              <a:buSzPct val="100000"/>
+              <a:buNone/>
+            </a:pPr>
+            <a:r>
+              <a:rPr lang="en-US" sz="1500" b="1" dirty="0">
+                <a:solidFill>
+                  <a:srgbClr val="000000"/>
+                </a:solidFill>
+                <a:latin typeface="Calibri" pitchFamily="34" charset="0"/>
+                <a:ea typeface="Calibri" pitchFamily="34" charset="-122"/>
+                <a:cs typeface="Calibri" pitchFamily="34" charset="-120"/>
+              </a:rPr>
+              <a:t xml:space="preserve">Robust to the device,</a:t>
+            </a:r>
+          </a:p>
+          <a:p>
+            <a:pPr marL="177800" indent="0">
+              <a:spcAft>
+                <a:spcPts val="0"/>
+              </a:spcAft>
+              <a:buSzPct val="100000"/>
+              <a:buNone/>
+            </a:pPr>
+            <a:r>
+              <a:rPr lang="en-US" sz="1500" b="1" dirty="0">
+                <a:solidFill>
+                  <a:srgbClr val="000000"/>
+                </a:solidFill>
+                <a:latin typeface="Calibri" pitchFamily="34" charset="0"/>
+                <a:ea typeface="Calibri" pitchFamily="34" charset="-122"/>
+                <a:cs typeface="Calibri" pitchFamily="34" charset="-120"/>
+              </a:rPr>
+              <a:t xml:space="preserve">conditional on the layout.</a:t>
+            </a:r>
+          </a:p>
+        </p:txBody>
+      </p:sp>
+      <p:sp>
+        <p:nvSpPr>
+          <p:cNvPr id="42" name="TextBox 41"/>
+          <p:cNvSpPr txBox="1"/>
+          <p:nvPr/>
+        </p:nvSpPr>
+        <p:spPr>
+          <a:xfrm>
+            <a:off x="6903720" y="2057400"/>
+            <a:ext cx="4617720" cy="4114800"/>
+          </a:xfrm>
+          <a:prstGeom prst="rect">
+            <a:avLst/>
+          </a:prstGeom>
+          <a:noFill/>
+        </p:spPr>
+        <p:txBody>
+          <a:bodyPr wrap="square" lIns="0" tIns="0" rIns="0" bIns="0">
+            <a:spAutoFit/>
+          </a:bodyPr>
+          <a:lstStyle/>
+          <a:p>
+            <a:pPr marL="177800" indent="-177800">
+              <a:spcAft>
+                <a:spcPts val="200"/>
+              </a:spcAft>
+              <a:buSzPct val="100000"/>
+              <a:buChar char="•"/>
+            </a:pPr>
+            <a:r>
+              <a:rPr lang="en-US" sz="1300" b="1" dirty="0">
+                <a:solidFill>
+                  <a:srgbClr val="000000"/>
+                </a:solidFill>
+                <a:latin typeface="Calibri" pitchFamily="34" charset="0"/>
+                <a:ea typeface="Calibri" pitchFamily="34" charset="-122"/>
+                <a:cs typeface="Calibri" pitchFamily="34" charset="-120"/>
+              </a:rPr>
+              <a:t xml:space="preserve">21,600 transients</a:t>
+            </a:r>
+            <a:r>
+              <a:rPr lang="en-US" sz="1300" dirty="0">
+                <a:solidFill>
+                  <a:srgbClr val="000000"/>
+                </a:solidFill>
+                <a:latin typeface="Calibri" pitchFamily="34" charset="0"/>
+                <a:ea typeface="Calibri" pitchFamily="34" charset="-122"/>
+                <a:cs typeface="Calibri" pitchFamily="34" charset="-120"/>
+              </a:rPr>
+              <a:t xml:space="preserve"> — a full 720-word search at two corners under each of eleven single-parameter perturbations. One failure.</a:t>
+            </a:r>
+          </a:p>
+          <a:p>
+            <a:pPr marL="177800" indent="-177800">
+              <a:spcAft>
+                <a:spcPts val="200"/>
+              </a:spcAft>
+              <a:buSzPct val="100000"/>
+              <a:buChar char="•"/>
+            </a:pPr>
+            <a:r>
+              <a:rPr lang="en-US" sz="1300" dirty="0">
+                <a:solidFill>
+                  <a:srgbClr val="000000"/>
+                </a:solidFill>
+                <a:latin typeface="Calibri" pitchFamily="34" charset="0"/>
+                <a:ea typeface="Calibri" pitchFamily="34" charset="-122"/>
+                <a:cs typeface="Calibri" pitchFamily="34" charset="-120"/>
+              </a:rPr>
+              <a:t xml:space="preserve">Every </a:t>
+            </a:r>
+            <a:r>
+              <a:rPr lang="en-US" sz="1300" b="1" dirty="0">
+                <a:solidFill>
+                  <a:srgbClr val="000000"/>
+                </a:solidFill>
+                <a:latin typeface="Calibri" pitchFamily="34" charset="0"/>
+                <a:ea typeface="Calibri" pitchFamily="34" charset="-122"/>
+                <a:cs typeface="Calibri" pitchFamily="34" charset="-120"/>
+              </a:rPr>
+              <a:t xml:space="preserve">device</a:t>
+            </a:r>
+            <a:r>
+              <a:rPr lang="en-US" sz="1300" dirty="0">
+                <a:solidFill>
+                  <a:srgbClr val="000000"/>
+                </a:solidFill>
+                <a:latin typeface="Calibri" pitchFamily="34" charset="0"/>
+                <a:ea typeface="Calibri" pitchFamily="34" charset="-122"/>
+                <a:cs typeface="Calibri" pitchFamily="34" charset="-120"/>
+              </a:rPr>
+              <a:t xml:space="preserve"> parameter leaves the ceiling between 4.3 % and 7.7 % — at most 1.76 points from nominal. The objection this study was built to answer is not supported.</a:t>
+            </a:r>
+          </a:p>
+          <a:p>
+            <a:pPr marL="177800" indent="-177800">
+              <a:spcAft>
+                <a:spcPts val="200"/>
+              </a:spcAft>
+              <a:buSzPct val="100000"/>
+              <a:buChar char="•"/>
+            </a:pPr>
+            <a:r>
+              <a:rPr lang="en-US" sz="1300" dirty="0">
+                <a:solidFill>
+                  <a:srgbClr val="000000"/>
+                </a:solidFill>
+                <a:latin typeface="Calibri" pitchFamily="34" charset="0"/>
+                <a:ea typeface="Calibri" pitchFamily="34" charset="-122"/>
+                <a:cs typeface="Calibri" pitchFamily="34" charset="-120"/>
+              </a:rPr>
+              <a:t xml:space="preserve">The one thing that moves it is </a:t>
+            </a:r>
+            <a:r>
+              <a:rPr lang="en-US" sz="1300" b="1" dirty="0">
+                <a:solidFill>
+                  <a:srgbClr val="000000"/>
+                </a:solidFill>
+                <a:latin typeface="Calibri" pitchFamily="34" charset="0"/>
+                <a:ea typeface="Calibri" pitchFamily="34" charset="-122"/>
+                <a:cs typeface="Calibri" pitchFamily="34" charset="-120"/>
+              </a:rPr>
+              <a:t xml:space="preserve">loop inductance</a:t>
+            </a:r>
+            <a:r>
+              <a:rPr lang="en-US" sz="1300" dirty="0">
+                <a:solidFill>
+                  <a:srgbClr val="000000"/>
+                </a:solidFill>
+                <a:latin typeface="Calibri" pitchFamily="34" charset="0"/>
+                <a:ea typeface="Calibri" pitchFamily="34" charset="-122"/>
+                <a:cs typeface="Calibri" pitchFamily="34" charset="-120"/>
+              </a:rPr>
+              <a:t xml:space="preserve">, which is board layout, not the transistor. A tighter loop commutates faster, so more charge couples through C</a:t>
+            </a:r>
+            <a:r>
+              <a:rPr lang="en-US" sz="1300" dirty="0">
+                <a:solidFill>
+                  <a:srgbClr val="000000"/>
+                </a:solidFill>
+                <a:latin typeface="Calibri" pitchFamily="34" charset="0"/>
+                <a:ea typeface="Calibri" pitchFamily="34" charset="-122"/>
+                <a:cs typeface="Calibri" pitchFamily="34" charset="-120"/>
+              </a:rPr>
+              <a:t xml:space="preserve">GD</a:t>
+            </a:r>
+            <a:r>
+              <a:rPr lang="en-US" sz="1300" dirty="0">
+                <a:solidFill>
+                  <a:srgbClr val="000000"/>
+                </a:solidFill>
+                <a:latin typeface="Calibri" pitchFamily="34" charset="0"/>
+                <a:ea typeface="Calibri" pitchFamily="34" charset="-122"/>
+                <a:cs typeface="Calibri" pitchFamily="34" charset="-120"/>
+              </a:rPr>
+              <a:t xml:space="preserve">: the median spurious gate voltage goes 0.640 V to 3.522 V and the feasible set collapses 474 → 158.</a:t>
+            </a:r>
+          </a:p>
+          <a:p>
+            <a:pPr marL="177800" indent="-177800">
+              <a:spcAft>
+                <a:spcPts val="0"/>
+              </a:spcAft>
+              <a:buSzPct val="100000"/>
+              <a:buChar char="•"/>
+            </a:pPr>
+            <a:r>
+              <a:rPr lang="en-US" sz="1300" dirty="0">
+                <a:solidFill>
+                  <a:srgbClr val="000000"/>
+                </a:solidFill>
+                <a:latin typeface="Calibri" pitchFamily="34" charset="0"/>
+                <a:ea typeface="Calibri" pitchFamily="34" charset="-122"/>
+                <a:cs typeface="Calibri" pitchFamily="34" charset="-120"/>
+              </a:rPr>
+              <a:t xml:space="preserve">So the claim is narrower and more useful than “robust”: on a loop of about 3 nH or looser a fixed word is nearly as good; on a substantially tighter loop the question has to be re-asked.</a:t>
+            </a:r>
+          </a:p>
+        </p:txBody>
+      </p:sp>
+    </p:spTree>
+  </p:cSld>
+  <p:clrMapOvr>
+    <a:masterClrMapping/>
+  </p:clrMapOvr>
+</p:sld>
+</file>
+
+<file path=ppt/slides/slide12.xml><?xml version="1.0" encoding="utf-8"?>
+<p:sld xmlns:a="http://schemas.openxmlformats.org/drawingml/2006/main" xmlns:r="http://schemas.openxmlformats.org/officeDocument/2006/relationships" xmlns:p="http://schemas.openxmlformats.org/presentationml/2006/main">
+  <p:cSld name="Slide 9">
+    <p:bg>
+      <p:bgPr>
+        <a:solidFill>
+          <a:srgbClr val="FFFFFF"/>
+        </a:solidFill>
+        <a:effectLst/>
+      </p:bgPr>
+    </p:bg>
+    <p:spTree>
+      <p:nvGrpSpPr>
+        <p:cNvPr id="1" name=""/>
+        <p:cNvGrpSpPr/>
+        <p:nvPr/>
+      </p:nvGrpSpPr>
+      <p:grpSpPr>
+        <a:xfrm>
+          <a:off x="0" y="0"/>
+          <a:ext cx="0" cy="0"/>
+          <a:chOff x="0" y="0"/>
+          <a:chExt cx="0" cy="0"/>
+        </a:xfrm>
+      </p:grpSpPr>
+      <p:sp>
+        <p:nvSpPr>
+          <p:cNvPr id="2" name="Text 0"/>
+          <p:cNvSpPr txBox="1"/>
+          <p:nvPr/>
+        </p:nvSpPr>
+        <p:spPr>
+          <a:xfrm>
+            <a:off x="11460175" y="6446520"/>
+            <a:ext cx="457200" cy="274320"/>
+          </a:xfrm>
+          <a:prstGeom prst="rect">
+            <a:avLst/>
+          </a:prstGeom>
+          <a:noFill/>
+          <a:ln/>
+        </p:spPr>
+        <p:txBody>
+          <a:bodyPr wrap="square" lIns="0" tIns="0" rIns="0" bIns="0" rtlCol="0" anchor="ctr"/>
+          <a:lstStyle/>
+          <a:p>
+            <a:pPr marL="0" indent="0" algn="r">
+              <a:buNone/>
+            </a:pPr>
+            <a:r>
+              <a:rPr lang="en-US" sz="1000" dirty="0">
+                <a:solidFill>
+                  <a:srgbClr val="808080"/>
+                </a:solidFill>
+                <a:latin typeface="Calibri" pitchFamily="34" charset="0"/>
+                <a:ea typeface="Calibri" pitchFamily="34" charset="-122"/>
+                <a:cs typeface="Calibri" pitchFamily="34" charset="-120"/>
+              </a:rPr>
+              <a:t>12</a:t>
             </a:r>
             <a:endParaRPr lang="en-US" sz="1000" dirty="0"/>
           </a:p>
@@ -2649,7 +4577,7 @@
                 <a:ea typeface="Calibri" pitchFamily="34" charset="-122"/>
                 <a:cs typeface="Calibri" pitchFamily="34" charset="-120"/>
               </a:rPr>
-              <a:t xml:space="preserve">Two more videos ship in the project folder: a 33 s waveform viewer and the research walk-through.</a:t>
+              <a:t xml:space="preserve">A second video ships in the project folder: a 20 s interactive waveform viewer over the same simulation data.</a:t>
             </a:r>
           </a:p>
         </p:txBody>
@@ -2684,7 +4612,7 @@
 </p:sld>
 </file>
 
-<file path=ppt/slides/slide12.xml><?xml version="1.0" encoding="utf-8"?>
+<file path=ppt/slides/slide13.xml><?xml version="1.0" encoding="utf-8"?>
 <p:sld xmlns:a="http://schemas.openxmlformats.org/drawingml/2006/main" xmlns:r="http://schemas.openxmlformats.org/officeDocument/2006/relationships" xmlns:p="http://schemas.openxmlformats.org/presentationml/2006/main">
   <p:cSld name="Slide 9">
     <p:bg>
@@ -2742,7 +4670,7 @@
                 <a:ea typeface="Calibri" pitchFamily="34" charset="-122"/>
                 <a:cs typeface="Calibri" pitchFamily="34" charset="-120"/>
               </a:rPr>
-              <a:t>12</a:t>
+              <a:t>13</a:t>
             </a:r>
             <a:endParaRPr lang="en-US" sz="1000" dirty="0"/>
           </a:p>
@@ -3205,7 +5133,392 @@
 </p:sld>
 </file>
 
-<file path=ppt/slides/slide13.xml><?xml version="1.0" encoding="utf-8"?>
+<file path=ppt/slides/slide14.xml><?xml version="1.0" encoding="utf-8"?>
+<p:sld xmlns:a="http://schemas.openxmlformats.org/drawingml/2006/main" xmlns:r="http://schemas.openxmlformats.org/officeDocument/2006/relationships" xmlns:p="http://schemas.openxmlformats.org/presentationml/2006/main">
+  <p:cSld name="Slide 4">
+    <p:bg>
+      <p:bgPr>
+        <a:solidFill>
+          <a:srgbClr val="FFFFFF"/>
+        </a:solidFill>
+        <a:effectLst/>
+      </p:bgPr>
+    </p:bg>
+    <p:spTree>
+      <p:nvGrpSpPr>
+        <p:cNvPr id="1" name=""/>
+        <p:cNvGrpSpPr/>
+        <p:nvPr/>
+      </p:nvGrpSpPr>
+      <p:grpSpPr>
+        <a:xfrm>
+          <a:off x="0" y="0"/>
+          <a:ext cx="0" cy="0"/>
+          <a:chOff x="0" y="0"/>
+          <a:chExt cx="0" cy="0"/>
+        </a:xfrm>
+      </p:grpSpPr>
+      <p:sp>
+        <p:nvSpPr>
+          <p:cNvPr id="2" name="Text 0"/>
+          <p:cNvSpPr txBox="1"/>
+          <p:nvPr/>
+        </p:nvSpPr>
+        <p:spPr>
+          <a:xfrm>
+            <a:off x="11460175" y="6446520"/>
+            <a:ext cx="457200" cy="274320"/>
+          </a:xfrm>
+          <a:prstGeom prst="rect">
+            <a:avLst/>
+          </a:prstGeom>
+          <a:noFill/>
+          <a:ln/>
+        </p:spPr>
+        <p:txBody>
+          <a:bodyPr wrap="square" lIns="0" tIns="0" rIns="0" bIns="0" rtlCol="0" anchor="ctr"/>
+          <a:lstStyle/>
+          <a:p>
+            <a:pPr marL="0" indent="0" algn="r">
+              <a:buNone/>
+            </a:pPr>
+            <a:r>
+              <a:rPr lang="en-US" sz="1000" dirty="0">
+                <a:solidFill>
+                  <a:srgbClr val="808080"/>
+                </a:solidFill>
+                <a:latin typeface="Calibri" pitchFamily="34" charset="0"/>
+                <a:ea typeface="Calibri" pitchFamily="34" charset="-122"/>
+                <a:cs typeface="Calibri" pitchFamily="34" charset="-120"/>
+              </a:rPr>
+              <a:t>14</a:t>
+            </a:r>
+            <a:endParaRPr lang="en-US" sz="1000" dirty="0"/>
+          </a:p>
+        </p:txBody>
+      </p:sp>
+      <p:sp>
+        <p:nvSpPr>
+          <p:cNvPr id="3" name="Text 1"/>
+          <p:cNvSpPr txBox="1"/>
+          <p:nvPr/>
+        </p:nvSpPr>
+        <p:spPr>
+          <a:xfrm>
+            <a:off x="548640" y="320040"/>
+            <a:ext cx="9601200" cy="685800"/>
+          </a:xfrm>
+          <a:prstGeom prst="rect">
+            <a:avLst/>
+          </a:prstGeom>
+          <a:noFill/>
+          <a:ln/>
+        </p:spPr>
+        <p:txBody>
+          <a:bodyPr wrap="square" lIns="0" tIns="0" rIns="0" bIns="0" rtlCol="0" anchor="ctr"/>
+          <a:lstStyle/>
+          <a:p>
+            <a:pPr marL="0" indent="0">
+              <a:buNone/>
+            </a:pPr>
+            <a:r>
+              <a:rPr lang="en-US" sz="2800" b="1" dirty="0">
+                <a:solidFill>
+                  <a:srgbClr val="1D2F82"/>
+                </a:solidFill>
+                <a:latin typeface="Calibri" pitchFamily="34" charset="0"/>
+                <a:ea typeface="Calibri" pitchFamily="34" charset="-122"/>
+                <a:cs typeface="Calibri" pitchFamily="34" charset="-120"/>
+              </a:rPr>
+              <a:t>Conclusion &amp; next steps</a:t>
+            </a:r>
+            <a:endParaRPr lang="en-US" sz="2800" dirty="0"/>
+          </a:p>
+        </p:txBody>
+      </p:sp>
+      <p:pic>
+        <p:nvPicPr>
+          <p:cNvPr id="4" name="Image 0" descr="logo.png"/>
+          <p:cNvPicPr>
+            <a:picLocks noChangeAspect="1"/>
+          </p:cNvPicPr>
+          <p:nvPr/>
+        </p:nvPicPr>
+        <p:blipFill>
+          <a:blip r:embed="rId3"/>
+          <a:stretch>
+            <a:fillRect/>
+          </a:stretch>
+        </p:blipFill>
+        <p:spPr>
+          <a:xfrm>
+            <a:off x="10362895" y="320040"/>
+            <a:ext cx="1371600" cy="518746"/>
+          </a:xfrm>
+          <a:prstGeom prst="rect">
+            <a:avLst/>
+          </a:prstGeom>
+        </p:spPr>
+      </p:pic>
+      <p:sp>
+        <p:nvSpPr>
+          <p:cNvPr id="5" name="Text 2"/>
+          <p:cNvSpPr txBox="1"/>
+          <p:nvPr/>
+        </p:nvSpPr>
+        <p:spPr>
+          <a:xfrm>
+            <a:off x="640080" y="1325880"/>
+            <a:ext cx="10881360" cy="4937760"/>
+          </a:xfrm>
+          <a:prstGeom prst="rect">
+            <a:avLst/>
+          </a:prstGeom>
+          <a:noFill/>
+          <a:ln/>
+        </p:spPr>
+        <p:txBody>
+          <a:bodyPr wrap="square" lIns="0" tIns="0" rIns="0" bIns="0" rtlCol="0" anchor="t"/>
+          <a:lstStyle/>
+          <a:p>
+            <a:pPr marL="177800" indent="0">
+              <a:spcAft>
+                <a:spcPts val="200"/>
+              </a:spcAft>
+              <a:buSzPct val="100000"/>
+              <a:buNone/>
+            </a:pPr>
+            <a:r>
+              <a:rPr lang="en-US" sz="1600" b="1" dirty="0">
+                <a:solidFill>
+                  <a:srgbClr val="000000"/>
+                </a:solidFill>
+                <a:latin typeface="Calibri" pitchFamily="34" charset="0"/>
+                <a:ea typeface="Calibri" pitchFamily="34" charset="-122"/>
+                <a:cs typeface="Calibri" pitchFamily="34" charset="-120"/>
+              </a:rPr>
+              <a:t xml:space="preserve">What the data supports</a:t>
+            </a:r>
+          </a:p>
+          <a:p>
+            <a:pPr marL="177800" indent="-177800">
+              <a:spcAft>
+                <a:spcPts val="180"/>
+              </a:spcAft>
+              <a:buSzPct val="100000"/>
+              <a:buChar char="•"/>
+            </a:pPr>
+            <a:r>
+              <a:rPr lang="en-US" sz="1450" dirty="0">
+                <a:solidFill>
+                  <a:srgbClr val="000000"/>
+                </a:solidFill>
+                <a:latin typeface="Calibri" pitchFamily="34" charset="0"/>
+                <a:ea typeface="Calibri" pitchFamily="34" charset="-122"/>
+                <a:cs typeface="Calibri" pitchFamily="34" charset="-120"/>
+              </a:rPr>
+              <a:t xml:space="preserve">Choosing the control word well matters enormously — it spans roughly fivefold in switching energy. </a:t>
+            </a:r>
+            <a:r>
+              <a:rPr lang="en-US" sz="1450" b="1" dirty="0">
+                <a:solidFill>
+                  <a:srgbClr val="000000"/>
+                </a:solidFill>
+                <a:latin typeface="Calibri" pitchFamily="34" charset="0"/>
+                <a:ea typeface="Calibri" pitchFamily="34" charset="-122"/>
+                <a:cs typeface="Calibri" pitchFamily="34" charset="-120"/>
+              </a:rPr>
+              <a:t xml:space="preserve">Adapting it to the operating point does not: 5.2 %, and a single fixed word is nearly as good.</a:t>
+            </a:r>
+          </a:p>
+          <a:p>
+            <a:pPr marL="177800" indent="-177800">
+              <a:spcAft>
+                <a:spcPts val="180"/>
+              </a:spcAft>
+              <a:buSzPct val="100000"/>
+              <a:buChar char="•"/>
+            </a:pPr>
+            <a:r>
+              <a:rPr lang="en-US" sz="1450" dirty="0">
+                <a:solidFill>
+                  <a:srgbClr val="000000"/>
+                </a:solidFill>
+                <a:latin typeface="Calibri" pitchFamily="34" charset="0"/>
+                <a:ea typeface="Calibri" pitchFamily="34" charset="-122"/>
+                <a:cs typeface="Calibri" pitchFamily="34" charset="-120"/>
+              </a:rPr>
+              <a:t xml:space="preserve">The benefit that exists is carried by the </a:t>
+            </a:r>
+            <a:r>
+              <a:rPr lang="en-US" sz="1450" b="1" dirty="0">
+                <a:solidFill>
+                  <a:srgbClr val="000000"/>
+                </a:solidFill>
+                <a:latin typeface="Calibri" pitchFamily="34" charset="0"/>
+                <a:ea typeface="Calibri" pitchFamily="34" charset="-122"/>
+                <a:cs typeface="Calibri" pitchFamily="34" charset="-120"/>
+              </a:rPr>
+              <a:t xml:space="preserve">dead time</a:t>
+            </a:r>
+            <a:r>
+              <a:rPr lang="en-US" sz="1450" dirty="0">
+                <a:solidFill>
+                  <a:srgbClr val="000000"/>
+                </a:solidFill>
+                <a:latin typeface="Calibri" pitchFamily="34" charset="0"/>
+                <a:ea typeface="Calibri" pitchFamily="34" charset="-122"/>
+                <a:cs typeface="Calibri" pitchFamily="34" charset="-120"/>
+              </a:rPr>
+              <a:t xml:space="preserve">, not by the drive-strength segmentation that motivates the hardware. Crosstalk safety is nearly free once the Miller clamp is present.</a:t>
+            </a:r>
+          </a:p>
+          <a:p>
+            <a:pPr marL="177800" indent="-177800">
+              <a:spcAft>
+                <a:spcPts val="260"/>
+              </a:spcAft>
+              <a:buSzPct val="100000"/>
+              <a:buChar char="•"/>
+            </a:pPr>
+            <a:r>
+              <a:rPr lang="en-US" sz="1450" dirty="0">
+                <a:solidFill>
+                  <a:srgbClr val="000000"/>
+                </a:solidFill>
+                <a:latin typeface="Calibri" pitchFamily="34" charset="0"/>
+                <a:ea typeface="Calibri" pitchFamily="34" charset="-122"/>
+                <a:cs typeface="Calibri" pitchFamily="34" charset="-120"/>
+              </a:rPr>
+              <a:t xml:space="preserve">This is a negative result about the </a:t>
+            </a:r>
+            <a:r>
+              <a:rPr lang="en-US" sz="1450" b="1" dirty="0">
+                <a:solidFill>
+                  <a:srgbClr val="000000"/>
+                </a:solidFill>
+                <a:latin typeface="Calibri" pitchFamily="34" charset="0"/>
+                <a:ea typeface="Calibri" pitchFamily="34" charset="-122"/>
+                <a:cs typeface="Calibri" pitchFamily="34" charset="-120"/>
+              </a:rPr>
+              <a:t xml:space="preserve">adaptive</a:t>
+            </a:r>
+            <a:r>
+              <a:rPr lang="en-US" sz="1450" dirty="0">
+                <a:solidFill>
+                  <a:srgbClr val="000000"/>
+                </a:solidFill>
+                <a:latin typeface="Calibri" pitchFamily="34" charset="0"/>
+                <a:ea typeface="Calibri" pitchFamily="34" charset="-122"/>
+                <a:cs typeface="Calibri" pitchFamily="34" charset="-120"/>
+              </a:rPr>
+              <a:t xml:space="preserve"> premise, and it is reported as one rather than hidden.</a:t>
+            </a:r>
+          </a:p>
+          <a:p>
+            <a:pPr marL="177800" indent="0">
+              <a:spcAft>
+                <a:spcPts val="200"/>
+              </a:spcAft>
+              <a:buSzPct val="100000"/>
+              <a:buNone/>
+            </a:pPr>
+            <a:r>
+              <a:rPr lang="en-US" sz="1600" b="1" dirty="0">
+                <a:solidFill>
+                  <a:srgbClr val="000000"/>
+                </a:solidFill>
+                <a:latin typeface="Calibri" pitchFamily="34" charset="0"/>
+                <a:ea typeface="Calibri" pitchFamily="34" charset="-122"/>
+                <a:cs typeface="Calibri" pitchFamily="34" charset="-120"/>
+              </a:rPr>
+              <a:t xml:space="preserve">What it does not support, and what is next</a:t>
+            </a:r>
+          </a:p>
+          <a:p>
+            <a:pPr marL="177800" indent="-177800">
+              <a:spcAft>
+                <a:spcPts val="180"/>
+              </a:spcAft>
+              <a:buSzPct val="100000"/>
+              <a:buChar char="•"/>
+            </a:pPr>
+            <a:r>
+              <a:rPr lang="en-US" sz="1450" dirty="0">
+                <a:solidFill>
+                  <a:srgbClr val="000000"/>
+                </a:solidFill>
+                <a:latin typeface="Calibri" pitchFamily="34" charset="0"/>
+                <a:ea typeface="Calibri" pitchFamily="34" charset="-122"/>
+                <a:cs typeface="Calibri" pitchFamily="34" charset="-120"/>
+              </a:rPr>
+              <a:t xml:space="preserve">The objective prices loss and overshoot only. Pull-up strength is worth 0.00 % to schedule under it, yet swings turn-on slew rate by 123 % and ringing energy by 128 % — an EMI-bound design could reach the opposite conclusion.</a:t>
+            </a:r>
+          </a:p>
+          <a:p>
+            <a:pPr marL="177800" indent="-177800">
+              <a:spcAft>
+                <a:spcPts val="0"/>
+              </a:spcAft>
+              <a:buSzPct val="100000"/>
+              <a:buChar char="•"/>
+            </a:pPr>
+            <a:r>
+              <a:rPr lang="en-US" sz="1450" b="1" dirty="0">
+                <a:solidFill>
+                  <a:srgbClr val="000000"/>
+                </a:solidFill>
+                <a:latin typeface="Calibri" pitchFamily="34" charset="0"/>
+                <a:ea typeface="Calibri" pitchFamily="34" charset="-122"/>
+                <a:cs typeface="Calibri" pitchFamily="34" charset="-120"/>
+              </a:rPr>
+              <a:t xml:space="preserve">Review-II: </a:t>
+            </a:r>
+            <a:r>
+              <a:rPr lang="en-US" sz="1450" dirty="0">
+                <a:solidFill>
+                  <a:srgbClr val="000000"/>
+                </a:solidFill>
+                <a:latin typeface="Calibri" pitchFamily="34" charset="0"/>
+                <a:ea typeface="Calibri" pitchFamily="34" charset="-122"/>
+                <a:cs typeface="Calibri" pitchFamily="34" charset="-120"/>
+              </a:rPr>
+              <a:t xml:space="preserve">transistor-level output stage in Cadence on a 5 V-capable PDK; re-run the ceiling on real devices. </a:t>
+            </a:r>
+            <a:r>
+              <a:rPr lang="en-US" sz="1450" b="1" dirty="0">
+                <a:solidFill>
+                  <a:srgbClr val="000000"/>
+                </a:solidFill>
+                <a:latin typeface="Calibri" pitchFamily="34" charset="0"/>
+                <a:ea typeface="Calibri" pitchFamily="34" charset="-122"/>
+                <a:cs typeface="Calibri" pitchFamily="34" charset="-120"/>
+              </a:rPr>
+              <a:t xml:space="preserve">Review-III: </a:t>
+            </a:r>
+            <a:r>
+              <a:rPr lang="en-US" sz="1450" dirty="0">
+                <a:solidFill>
+                  <a:srgbClr val="000000"/>
+                </a:solidFill>
+                <a:latin typeface="Calibri" pitchFamily="34" charset="0"/>
+                <a:ea typeface="Calibri" pitchFamily="34" charset="-122"/>
+                <a:cs typeface="Calibri" pitchFamily="34" charset="-120"/>
+              </a:rPr>
+              <a:t xml:space="preserve">measure a hardware half-bridge at one corner — until then this is a simulation study and is titled as one.</a:t>
+            </a:r>
+          </a:p>
+        </p:txBody>
+      </p:sp>
+    </p:spTree>
+  </p:cSld>
+  <p:clrMapOvr>
+    <a:masterClrMapping/>
+  </p:clrMapOvr>
+</p:sld>
+</file>
+
+<file path=ppt/slides/slide15.xml><?xml version="1.0" encoding="utf-8"?>
 <p:sld xmlns:a="http://schemas.openxmlformats.org/drawingml/2006/main" xmlns:r="http://schemas.openxmlformats.org/officeDocument/2006/relationships" xmlns:p="http://schemas.openxmlformats.org/presentationml/2006/main">
   <p:cSld name="Slide 10">
     <p:bg>
@@ -3263,7 +5576,7 @@
                 <a:ea typeface="Calibri" pitchFamily="34" charset="-122"/>
                 <a:cs typeface="Calibri" pitchFamily="34" charset="-120"/>
               </a:rPr>
-              <a:t>13</a:t>
+              <a:t>15</a:t>
             </a:r>
             <a:endParaRPr lang="en-US" sz="1000" dirty="0"/>
           </a:p>
@@ -3782,7 +6095,7 @@
 </p:sld>
 </file>
 
-<file path=ppt/slides/slide14.xml><?xml version="1.0" encoding="utf-8"?>
+<file path=ppt/slides/slide16.xml><?xml version="1.0" encoding="utf-8"?>
 <p:sld xmlns:a="http://schemas.openxmlformats.org/drawingml/2006/main" xmlns:r="http://schemas.openxmlformats.org/officeDocument/2006/relationships" xmlns:p="http://schemas.openxmlformats.org/presentationml/2006/main">
   <p:cSld name="Slide 11">
     <p:bg>
@@ -3840,7 +6153,7 @@
                 <a:ea typeface="Calibri" pitchFamily="34" charset="-122"/>
                 <a:cs typeface="Calibri" pitchFamily="34" charset="-120"/>
               </a:rPr>
-              <a:t>14</a:t>
+              <a:t>16</a:t>
             </a:r>
             <a:endParaRPr lang="en-US" sz="1000" dirty="0"/>
           </a:p>
@@ -4194,7 +6507,7 @@
                 <a:ea typeface="Calibri" pitchFamily="34" charset="-122"/>
                 <a:cs typeface="Calibri" pitchFamily="34" charset="-120"/>
               </a:rPr>
-              <a:t>Name — Reg. No.</a:t>
+              <a:t>Amritha  —  Reg. No. ________</a:t>
             </a:r>
             <a:endParaRPr lang="en-US" sz="1400" dirty="0"/>
           </a:p>
@@ -4302,7 +6615,7 @@
                 <a:ea typeface="Calibri" pitchFamily="34" charset="-122"/>
                 <a:cs typeface="Calibri" pitchFamily="34" charset="-120"/>
               </a:rPr>
-              <a:t>Dr. Guide Name, School</a:t>
+              <a:t>Dr. Bindu  —  SENSE</a:t>
             </a:r>
             <a:endParaRPr lang="en-US" sz="1400" dirty="0"/>
           </a:p>
@@ -10389,7 +12702,7 @@
                 <a:ea typeface="Calibri" pitchFamily="34" charset="-122"/>
                 <a:cs typeface="Calibri" pitchFamily="34" charset="-120"/>
               </a:rPr>
-              <a:t>Results</a:t>
+              <a:t>Results — the problem, and the fix</a:t>
             </a:r>
             <a:endParaRPr lang="en-US" sz="2800" dirty="0"/>
           </a:p>

--- a/review/Review1_GaN_Segmented_Gate_Driver.pptx
+++ b/review/Review1_GaN_Segmented_Gate_Driver.pptx
@@ -16,6 +16,9 @@
     <p:sldId id="267" r:id="rId18"/>
     <p:sldId id="261" r:id="rId7"/>
     <p:sldId id="274" r:id="rId25"/>
+    <p:sldId id="279" r:id="rId30"/>
+    <p:sldId id="277" r:id="rId28"/>
+    <p:sldId id="278" r:id="rId29"/>
     <p:sldId id="262" r:id="rId8"/>
     <p:sldId id="272" r:id="rId23"/>
     <p:sldId id="273" r:id="rId24"/>
@@ -592,7 +595,7 @@
           <a:lstStyle/>
           <a:p>
             <a:r>
-              <a:t>[40 s]  CORE. Walk the diagram left to right in one sentence, then stop on the dashed block: that is the sensing and lookup-table machinery the adaptive premise needs. The whole project is a measurement of what it buys. Let the picture do the work — do not narrate every box.</a:t>
+              <a:t>[35 s]  CORE. Walk the diagram left to right in one sentence, then stop on the dashed block: that is the sensing and lookup-table machinery the adaptive premise needs. The whole project is a measurement of what it buys. Let the picture do the work — do not narrate every box.</a:t>
             </a:r>
           </a:p>
         </p:txBody>
@@ -638,7 +641,7 @@
           <a:lstStyle/>
           <a:p>
             <a:r>
-              <a:t>[35 s]  CORE — the timeline and tools requirement. M1-M6. If asked what could go wrong: M1, the PDK — a 1.8 V / 3.3 V teaching PDK cannot take a 5 V rail.</a:t>
+              <a:t>[30 s]  CORE — the timeline and tools requirement. M1-M6. If asked what could go wrong: M1, the PDK — a 1.8 V / 3.3 V teaching PDK cannot take a 5 V rail.</a:t>
             </a:r>
           </a:p>
         </p:txBody>
@@ -684,7 +687,7 @@
           <a:lstStyle/>
           <a:p>
             <a:r>
-              <a:t>[BACKUP]  BACKUP — the FPGA. If asked: written AND verified, seven asserted properties, then mutation-tested. Dead time gets a live register and drive strength is strapped, because that is what the study found.</a:t>
+              <a:t>[BACKUP]  BACKUP — the FPGA. If asked: written AND verified, eight asserted properties, then mutation-tested. Dead time gets a live register and drive strength is strapped, because that is what the study found.</a:t>
             </a:r>
           </a:p>
         </p:txBody>
@@ -730,7 +733,7 @@
           <a:lstStyle/>
           <a:p>
             <a:r>
-              <a:t>[30 s]  CORE. 5.2 %. Say plainly this is a NEGATIVE result about the adaptive premise and you are reporting it rather than hiding it. Keep it short — slides 14 and 15 do the real work.</a:t>
+              <a:t>[25 s]  CORE. 5.2 %. Say plainly this is a NEGATIVE result about the adaptive premise and you are reporting it rather than hiding it. Keep it short — slides 17 and 18 do the real work.</a:t>
             </a:r>
           </a:p>
         </p:txBody>
@@ -868,7 +871,7 @@
           <a:lstStyle/>
           <a:p>
             <a:r>
-              <a:t>[40 s]  CORE. Play the video. Real captured ngspice output — the failure, the fix, the search. Let it run; do not talk over it.</a:t>
+              <a:t>[30 s]  CORE. Play the video. Real captured ngspice output — the failure, the fix, the search. Let it run; do not talk over it.</a:t>
             </a:r>
           </a:p>
         </p:txBody>
@@ -926,7 +929,7 @@
           <a:lstStyle/>
           <a:p>
             <a:r>
-              <a:t>[20 s]  CORE. Project name and the one-line claim: a segmented GaN gate driver, and a measurement of what per-operating-point adaptation is actually worth.</a:t>
+              <a:t>[15 s]  CORE. Project name and the one-line claim: a segmented GaN gate driver, and a measurement of what per-operating-point adaptation is actually worth.</a:t>
             </a:r>
           </a:p>
         </p:txBody>
@@ -1059,6 +1062,144 @@
 </p:notes>
 </file>
 
+<file path=ppt/notesSlides/notesSlide22.xml><?xml version="1.0" encoding="utf-8"?>
+<p:notes xmlns:a="http://schemas.openxmlformats.org/drawingml/2006/main" xmlns:p="http://schemas.openxmlformats.org/presentationml/2006/main" xmlns:r="http://schemas.openxmlformats.org/officeDocument/2006/relationships">
+  <p:cSld>
+    <p:spTree>
+      <p:nvGrpSpPr>
+        <p:cNvPr id="1" name=""/>
+        <p:cNvGrpSpPr/>
+        <p:nvPr/>
+      </p:nvGrpSpPr>
+      <p:grpSpPr>
+        <a:xfrm>
+          <a:off x="0" y="0"/>
+          <a:ext cx="0" cy="0"/>
+          <a:chOff x="0" y="0"/>
+          <a:chExt cx="0" cy="0"/>
+        </a:xfrm>
+      </p:grpSpPr>
+      <p:sp>
+        <p:nvSpPr>
+          <p:cNvPr id="99" name="Notes Placeholder"/>
+          <p:cNvSpPr>
+            <a:spLocks noGrp="1"/>
+          </p:cNvSpPr>
+          <p:nvPr>
+            <p:ph type="body" idx="1"/>
+          </p:nvPr>
+        </p:nvSpPr>
+        <p:spPr/>
+        <p:txBody>
+          <a:bodyPr/>
+          <a:lstStyle/>
+          <a:p>
+            <a:r>
+              <a:t>[30 s]  CORE — do NOT skip this and do not rush it. Every number after this slide is a comparison between control words, and if the panel has not got the definition, slides 13 to 16 are noise to them. Read the six fields out loud, land 720, then land the one distinction that matters: a FIXED word is strapped at power-up and costs nothing; SCHEDULING needs sensing, an ADC and a lookup table. The whole project measures the gap between those two.</a:t>
+            </a:r>
+          </a:p>
+        </p:txBody>
+      </p:sp>
+    </p:spTree>
+  </p:cSld>
+  <p:clrMapOvr>
+    <a:masterClrMapping/>
+  </p:clrMapOvr>
+</p:notes>
+</file>
+
+<file path=ppt/notesSlides/notesSlide23.xml><?xml version="1.0" encoding="utf-8"?>
+<p:notes xmlns:a="http://schemas.openxmlformats.org/drawingml/2006/main" xmlns:p="http://schemas.openxmlformats.org/presentationml/2006/main" xmlns:r="http://schemas.openxmlformats.org/officeDocument/2006/relationships">
+  <p:cSld>
+    <p:spTree>
+      <p:nvGrpSpPr>
+        <p:cNvPr id="1" name=""/>
+        <p:cNvGrpSpPr/>
+        <p:nvPr/>
+      </p:nvGrpSpPr>
+      <p:grpSpPr>
+        <a:xfrm>
+          <a:off x="0" y="0"/>
+          <a:ext cx="0" cy="0"/>
+          <a:chOff x="0" y="0"/>
+          <a:chExt cx="0" cy="0"/>
+        </a:xfrm>
+      </p:grpSpPr>
+      <p:sp>
+        <p:nvSpPr>
+          <p:cNvPr id="99" name="Notes Placeholder"/>
+          <p:cNvSpPr>
+            <a:spLocks noGrp="1"/>
+          </p:cNvSpPr>
+          <p:nvPr>
+            <p:ph type="body" idx="1"/>
+          </p:nvPr>
+        </p:nvSpPr>
+        <p:spPr/>
+        <p:txBody>
+          <a:bodyPr/>
+          <a:lstStyle/>
+          <a:p>
+            <a:r>
+              <a:t>[35 s]  CORE — the comparison the panel will ask for. Land three rows and move on: we go from ONE field to six (720 words); from selected codes to an EXHAUSTIVE search; and from one bundled number to the number SPLIT into fixed versus adaptive. Be honest if pushed: we have NOT re-run [9]'s SiC experiment, so this is a comparison of method and scope, not a claim that we beat their result on their metric. That replication is the next step.</a:t>
+            </a:r>
+          </a:p>
+        </p:txBody>
+      </p:sp>
+    </p:spTree>
+  </p:cSld>
+  <p:clrMapOvr>
+    <a:masterClrMapping/>
+  </p:clrMapOvr>
+</p:notes>
+</file>
+
+<file path=ppt/notesSlides/notesSlide24.xml><?xml version="1.0" encoding="utf-8"?>
+<p:notes xmlns:a="http://schemas.openxmlformats.org/drawingml/2006/main" xmlns:p="http://schemas.openxmlformats.org/presentationml/2006/main" xmlns:r="http://schemas.openxmlformats.org/officeDocument/2006/relationships">
+  <p:cSld>
+    <p:spTree>
+      <p:nvGrpSpPr>
+        <p:cNvPr id="1" name=""/>
+        <p:cNvGrpSpPr/>
+        <p:nvPr/>
+      </p:nvGrpSpPr>
+      <p:grpSpPr>
+        <a:xfrm>
+          <a:off x="0" y="0"/>
+          <a:ext cx="0" cy="0"/>
+          <a:chOff x="0" y="0"/>
+          <a:chExt cx="0" cy="0"/>
+        </a:xfrm>
+      </p:grpSpPr>
+      <p:sp>
+        <p:nvSpPr>
+          <p:cNvPr id="99" name="Notes Placeholder"/>
+          <p:cNvSpPr>
+            <a:spLocks noGrp="1"/>
+          </p:cNvSpPr>
+          <p:nvPr>
+            <p:ph type="body" idx="1"/>
+          </p:nvPr>
+        </p:nvSpPr>
+        <p:spPr/>
+        <p:txBody>
+          <a:bodyPr/>
+          <a:lstStyle/>
+          <a:p>
+            <a:r>
+              <a:t>[30 s]  CORE — use this the moment anyone asks what was actually simulated. Trace the red path with a finger: Q1 switches, the SW node moves, charge couples through C_GD into Q2's gate, and Q2 turns on when it should be off. Then point at the clamp and the off-bias mux — those are the two things that fix it. Do not read the component values out.</a:t>
+            </a:r>
+          </a:p>
+        </p:txBody>
+      </p:sp>
+    </p:spTree>
+  </p:cSld>
+  <p:clrMapOvr>
+    <a:masterClrMapping/>
+  </p:clrMapOvr>
+</p:notes>
+</file>
+
 <file path=ppt/notesSlides/notesSlide3.xml><?xml version="1.0" encoding="utf-8"?>
 <p:notes xmlns:a="http://schemas.openxmlformats.org/drawingml/2006/main" xmlns:r="http://schemas.openxmlformats.org/officeDocument/2006/relationships" xmlns:p="http://schemas.openxmlformats.org/presentationml/2006/main">
   <p:cSld>
@@ -1190,7 +1331,7 @@
           <a:lstStyle/>
           <a:p>
             <a:r>
-              <a:t>[90 s]  CORE — the 2-mark slide, the biggest block in the review. Land two things: the failure is real and specific (1.65 V on a 1.40 V threshold), and the gap is that prior work conflates 'better fixed settings' with 'settings that adapt'.</a:t>
+              <a:t>[70 s]  CORE — the 2-mark slide, the biggest block in the review. Land two things: the failure is real and specific (1.65 V on a 1.40 V threshold), and the gap is that prior work conflates 'better fixed settings' with 'settings that adapt'.</a:t>
             </a:r>
           </a:p>
         </p:txBody>
@@ -1276,7 +1417,7 @@
           <a:lstStyle/>
           <a:p>
             <a:r>
-              <a:t>[35 s]  CORE — literature mark. Do not read the table. Eight references, three verified to page level; point at [3], layout sets loop inductance, which decides our answer.</a:t>
+              <a:t>[30 s]  CORE — literature mark. Do not read the table. Eight references, three verified to page level; point at [3], layout sets loop inductance, which decides our answer.</a:t>
             </a:r>
           </a:p>
         </p:txBody>
@@ -1362,7 +1503,7 @@
           <a:lstStyle/>
           <a:p>
             <a:r>
-              <a:t>[35 s]  CORE — proposed-solution mark. The 720-point control word and the method: exhaustive search at every corner, so each per-corner optimum is a TRUE optimum and not the best of a shortlist.</a:t>
+              <a:t>[30 s]  CORE — proposed-solution mark. The 720-point control word and the method: exhaustive search at every corner, so each per-corner optimum is a TRUE optimum and not the best of a shortlist.</a:t>
             </a:r>
           </a:p>
         </p:txBody>
@@ -1448,7 +1589,7 @@
           <a:lstStyle/>
           <a:p>
             <a:r>
-              <a:t>[55 s]  CORE — the 50 %-completion requirement. Five claims, each with a number. If asked 'is this really 50 %?': the search is complete, stress-tested, and both objections to it - layout and EMI - have been tested rather than argued. What remains is silicon and hardware.</a:t>
+              <a:t>[45 s]  CORE — the 50 %-completion requirement. Five claims, each with a number. If asked 'is this really 50 %?': the search is complete, stress-tested, and both objections to it - layout and EMI - have been tested rather than argued. What remains is silicon and hardware.</a:t>
             </a:r>
           </a:p>
         </p:txBody>
@@ -2272,7 +2413,7 @@
                 <a:ea typeface="Calibri" pitchFamily="34" charset="-122"/>
                 <a:cs typeface="Calibri" pitchFamily="34" charset="-120"/>
               </a:rPr>
-              <a:t>10</a:t>
+              <a:t>13</a:t>
             </a:r>
             <a:endParaRPr lang="en-US" sz="1000" dirty="0"/>
           </a:p>
@@ -2677,7 +2818,7 @@
                 <a:ea typeface="Calibri" pitchFamily="34" charset="-122"/>
                 <a:cs typeface="Calibri" pitchFamily="34" charset="-120"/>
               </a:rPr>
-              <a:t>11</a:t>
+              <a:t>14</a:t>
             </a:r>
             <a:endParaRPr lang="en-US" sz="1000" dirty="0"/>
           </a:p>
@@ -2887,7 +3028,7 @@
                 <a:ea typeface="Calibri" pitchFamily="34" charset="-122"/>
                 <a:cs typeface="Calibri" pitchFamily="34" charset="-120"/>
               </a:rPr>
-              <a:t xml:space="preserve">Seven asserted properties, all passing under Icarus Verilog; then mutation-tested — a deliberate shoot-through bug draws 70 failures.</a:t>
+              <a:t xml:space="preserve">Eight asserted properties, all passing under Icarus Verilog; a deliberate shoot-through mutant is caught 221 times (sh rtl/mutate.sh).</a:t>
             </a:r>
           </a:p>
         </p:txBody>
@@ -3025,7 +3166,7 @@
                 <a:ea typeface="Calibri" pitchFamily="34" charset="-122"/>
                 <a:cs typeface="Calibri" pitchFamily="34" charset="-120"/>
               </a:rPr>
-              <a:t>12</a:t>
+              <a:t>15</a:t>
             </a:r>
             <a:endParaRPr lang="en-US" sz="1000" dirty="0"/>
           </a:p>
@@ -3064,7 +3205,7 @@
                 <a:ea typeface="Calibri" pitchFamily="34" charset="-122"/>
                 <a:cs typeface="Calibri" pitchFamily="34" charset="-120"/>
               </a:rPr>
-              <a:t>Results — the problem, and the fix</a:t>
+              <a:t>Result 1 — crosstalk is real; the clamp fixes it</a:t>
             </a:r>
             <a:endParaRPr lang="en-US" sz="2800" dirty="0"/>
           </a:p>
@@ -3541,7 +3682,7 @@
                 <a:ea typeface="Calibri" pitchFamily="34" charset="-122"/>
                 <a:cs typeface="Calibri" pitchFamily="34" charset="-120"/>
               </a:rPr>
-              <a:t>13</a:t>
+              <a:t>16</a:t>
             </a:r>
             <a:endParaRPr lang="en-US" sz="1000" dirty="0"/>
           </a:p>
@@ -3580,7 +3721,7 @@
                 <a:ea typeface="Calibri" pitchFamily="34" charset="-122"/>
                 <a:cs typeface="Calibri" pitchFamily="34" charset="-120"/>
               </a:rPr>
-              <a:t>Results — what scheduling is actually worth</a:t>
+              <a:t>Result 2 — scheduling is worth only 5.2 %</a:t>
             </a:r>
             <a:endParaRPr lang="en-US" sz="2800" dirty="0"/>
           </a:p>
@@ -4072,7 +4213,7 @@
                 <a:ea typeface="Calibri" pitchFamily="34" charset="-122"/>
                 <a:cs typeface="Calibri" pitchFamily="34" charset="-120"/>
               </a:rPr>
-              <a:t>14</a:t>
+              <a:t>17</a:t>
             </a:r>
             <a:endParaRPr lang="en-US" sz="1000" dirty="0"/>
           </a:p>
@@ -4111,7 +4252,7 @@
                 <a:ea typeface="Calibri" pitchFamily="34" charset="-122"/>
                 <a:cs typeface="Calibri" pitchFamily="34" charset="-120"/>
               </a:rPr>
-              <a:t>What is novel</a:t>
+              <a:t>Result 3 — the two halves nobody separates</a:t>
             </a:r>
             <a:endParaRPr lang="en-US" sz="2800" dirty="0"/>
           </a:p>
@@ -4171,18 +4312,40 @@
               <a:buNone/>
             </a:pPr>
             <a:r>
-              <a:rPr lang="en-US" sz="1350" dirty="0">
-                <a:solidFill>
-                  <a:srgbClr val="000000"/>
-                </a:solidFill>
-                <a:latin typeface="Calibri" pitchFamily="34" charset="0"/>
-                <a:ea typeface="Calibri" pitchFamily="34" charset="-122"/>
-                <a:cs typeface="Calibri" pitchFamily="34" charset="-120"/>
-              </a:rPr>
-              <a:t xml:space="preserve">Every active-gate-driver paper reports </a:t>
-            </a:r>
-            <a:r>
-              <a:rPr lang="en-US" sz="1350" b="1" dirty="0">
+              <a:rPr lang="en-US" sz="1250" dirty="0">
+                <a:solidFill>
+                  <a:srgbClr val="000000"/>
+                </a:solidFill>
+                <a:latin typeface="Calibri" pitchFamily="34" charset="0"/>
+                <a:ea typeface="Calibri" pitchFamily="34" charset="-122"/>
+                <a:cs typeface="Calibri" pitchFamily="34" charset="-120"/>
+              </a:rPr>
+              <a:t xml:space="preserve">The base paper [9] </a:t>
+            </a:r>
+            <a:r>
+              <a:rPr lang="en-US" sz="1250" b="1" dirty="0">
+                <a:solidFill>
+                  <a:srgbClr val="000000"/>
+                </a:solidFill>
+                <a:latin typeface="Calibri" pitchFamily="34" charset="0"/>
+                <a:ea typeface="Calibri" pitchFamily="34" charset="-122"/>
+                <a:cs typeface="Calibri" pitchFamily="34" charset="-120"/>
+              </a:rPr>
+              <a:t xml:space="preserve">(doi.org/10.1002/cta.3136)</a:t>
+            </a:r>
+            <a:r>
+              <a:rPr lang="en-US" sz="1250" dirty="0">
+                <a:solidFill>
+                  <a:srgbClr val="000000"/>
+                </a:solidFill>
+                <a:latin typeface="Calibri" pitchFamily="34" charset="0"/>
+                <a:ea typeface="Calibri" pitchFamily="34" charset="-122"/>
+                <a:cs typeface="Calibri" pitchFamily="34" charset="-120"/>
+              </a:rPr>
+              <a:t xml:space="preserve"> shows a gate waveform can be chosen by a digital code. It, and every active-gate-driver paper after it, then reports </a:t>
+            </a:r>
+            <a:r>
+              <a:rPr lang="en-US" sz="1250" b="1" dirty="0">
                 <a:solidFill>
                   <a:srgbClr val="000000"/>
                 </a:solidFill>
@@ -4193,15 +4356,15 @@
               <a:t xml:space="preserve">one</a:t>
             </a:r>
             <a:r>
-              <a:rPr lang="en-US" sz="1350" dirty="0">
-                <a:solidFill>
-                  <a:srgbClr val="000000"/>
-                </a:solidFill>
-                <a:latin typeface="Calibri" pitchFamily="34" charset="0"/>
-                <a:ea typeface="Calibri" pitchFamily="34" charset="-122"/>
-                <a:cs typeface="Calibri" pitchFamily="34" charset="-120"/>
-              </a:rPr>
-              <a:t xml:space="preserve"> number — the improvement over a conventional driver. It bundles two separable effects, and only the second needs sensing, an ADC and a lookup table.</a:t>
+              <a:rPr lang="en-US" sz="1250" dirty="0">
+                <a:solidFill>
+                  <a:srgbClr val="000000"/>
+                </a:solidFill>
+                <a:latin typeface="Calibri" pitchFamily="34" charset="0"/>
+                <a:ea typeface="Calibri" pitchFamily="34" charset="-122"/>
+                <a:cs typeface="Calibri" pitchFamily="34" charset="-120"/>
+              </a:rPr>
+              <a:t xml:space="preserve"> number — the improvement over a conventional driver. That number bundles two separable effects, and only the second needs sensing, an ADC and a lookup table. Separating them needs the exhaustive search, which is why nobody has.</a:t>
             </a:r>
           </a:p>
         </p:txBody>
@@ -4788,7 +4951,7 @@
                 <a:ea typeface="Calibri" pitchFamily="34" charset="-122"/>
                 <a:cs typeface="Calibri" pitchFamily="34" charset="-120"/>
               </a:rPr>
-              <a:t>15</a:t>
+              <a:t>18</a:t>
             </a:r>
             <a:endParaRPr lang="en-US" sz="1000" dirty="0"/>
           </a:p>
@@ -4827,7 +4990,7 @@
                 <a:ea typeface="Calibri" pitchFamily="34" charset="-122"/>
                 <a:cs typeface="Calibri" pitchFamily="34" charset="-120"/>
               </a:rPr>
-              <a:t>When is adaptive control worth building?</a:t>
+              <a:t>Result 4 — adaptive pays below ~2.5 nH</a:t>
             </a:r>
             <a:endParaRPr lang="en-US" sz="2800" dirty="0"/>
           </a:p>
@@ -5034,7 +5197,7 @@
                 <a:ea typeface="Calibri" pitchFamily="34" charset="-122"/>
                 <a:cs typeface="Calibri" pitchFamily="34" charset="-120"/>
               </a:rPr>
-              <a:t>16</a:t>
+              <a:t>19</a:t>
             </a:r>
             <a:endParaRPr lang="en-US" sz="1000" dirty="0"/>
           </a:p>
@@ -5073,7 +5236,7 @@
                 <a:ea typeface="Calibri" pitchFamily="34" charset="-122"/>
                 <a:cs typeface="Calibri" pitchFamily="34" charset="-120"/>
               </a:rPr>
-              <a:t>Results — robustness of the ceiling</a:t>
+              <a:t>Backup — the device doesn’t move it; layout does</a:t>
             </a:r>
             <a:endParaRPr lang="en-US" sz="2800" dirty="0"/>
           </a:p>
@@ -6889,7 +7052,7 @@
                 <a:ea typeface="Calibri" pitchFamily="34" charset="-122"/>
                 <a:cs typeface="Calibri" pitchFamily="34" charset="-120"/>
               </a:rPr>
-              <a:t xml:space="preserve">So the claim is narrower and more useful than “robust”: from about 2.5 nH upward a fixed word is nearly as good; on a tighter loop the question has to be re-asked, and the answer there is not even monotonic — see slide 15.</a:t>
+              <a:t xml:space="preserve">So the claim is narrower and more useful than “robust”: from about 2.5 nH upward a fixed word is nearly as good; on a tighter loop the question has to be re-asked, and the answer there is not even monotonic — see slide 18.</a:t>
             </a:r>
           </a:p>
         </p:txBody>
@@ -6960,7 +7123,7 @@
                 <a:ea typeface="Calibri" pitchFamily="34" charset="-122"/>
                 <a:cs typeface="Calibri" pitchFamily="34" charset="-120"/>
               </a:rPr>
-              <a:t>17</a:t>
+              <a:t>20</a:t>
             </a:r>
             <a:endParaRPr lang="en-US" sz="1000" dirty="0"/>
           </a:p>
@@ -7402,7 +7565,7 @@
                 <a:ea typeface="Calibri" pitchFamily="34" charset="-122"/>
                 <a:cs typeface="Calibri" pitchFamily="34" charset="-120"/>
               </a:rPr>
-              <a:t>18</a:t>
+              <a:t>21</a:t>
             </a:r>
             <a:endParaRPr lang="en-US" sz="1000" dirty="0"/>
           </a:p>
@@ -7923,7 +8086,7 @@
                 <a:ea typeface="Calibri" pitchFamily="34" charset="-122"/>
                 <a:cs typeface="Calibri" pitchFamily="34" charset="-120"/>
               </a:rPr>
-              <a:t>19</a:t>
+              <a:t>22</a:t>
             </a:r>
             <a:endParaRPr lang="en-US" sz="1000" dirty="0"/>
           </a:p>
@@ -9216,7 +9379,7 @@
                 <a:ea typeface="Calibri" pitchFamily="34" charset="-122"/>
                 <a:cs typeface="Calibri" pitchFamily="34" charset="-120"/>
               </a:rPr>
-              <a:t>20</a:t>
+              <a:t>23</a:t>
             </a:r>
             <a:endParaRPr lang="en-US" sz="1000" dirty="0"/>
           </a:p>
@@ -9308,13 +9471,13 @@
           <a:p>
             <a:pPr marL="177800" indent="0">
               <a:spcAft>
-                <a:spcPts val="300"/>
-              </a:spcAft>
-              <a:buSzPct val="100000"/>
-              <a:buNone/>
-            </a:pPr>
-            <a:r>
-              <a:rPr lang="en-US" sz="1150" b="1" dirty="0">
+                <a:spcPts val="120"/>
+              </a:spcAft>
+              <a:buSzPct val="100000"/>
+              <a:buNone/>
+            </a:pPr>
+            <a:r>
+              <a:rPr lang="en-US" sz="900" b="1" dirty="0">
                 <a:solidFill>
                   <a:srgbClr val="000000"/>
                 </a:solidFill>
@@ -9325,7 +9488,7 @@
               <a:t xml:space="preserve">[1]  </a:t>
             </a:r>
             <a:r>
-              <a:rPr lang="en-US" sz="1150" dirty="0">
+              <a:rPr lang="en-US" sz="900" dirty="0">
                 <a:solidFill>
                   <a:srgbClr val="000000"/>
                 </a:solidFill>
@@ -9335,17 +9498,28 @@
               </a:rPr>
               <a:t xml:space="preserve">Z. Zhang, F. Wang, L. M. Tolbert and B. J. Blalock, “Active Gate Driver for Crosstalk Suppression of SiC Devices in a Phase-Leg Configuration,” IEEE Trans. Power Electron., vol. 29, no. 4, pp. 1986–1997, Apr. 2014.</a:t>
             </a:r>
+            <a:r>
+              <a:rPr lang="en-US" sz="900" b="1" dirty="0">
+                <a:solidFill>
+                  <a:srgbClr val="000000"/>
+                </a:solidFill>
+                <a:latin typeface="Calibri" pitchFamily="34" charset="0"/>
+                <a:ea typeface="Calibri" pitchFamily="34" charset="-122"/>
+                <a:cs typeface="Calibri" pitchFamily="34" charset="-120"/>
+              </a:rPr>
+              <a:t xml:space="preserve">   ieeexplore.ieee.org/document/6531666</a:t>
+            </a:r>
           </a:p>
           <a:p>
             <a:pPr marL="177800" indent="0">
               <a:spcAft>
-                <a:spcPts val="300"/>
-              </a:spcAft>
-              <a:buSzPct val="100000"/>
-              <a:buNone/>
-            </a:pPr>
-            <a:r>
-              <a:rPr lang="en-US" sz="1150" b="1" dirty="0">
+                <a:spcPts val="120"/>
+              </a:spcAft>
+              <a:buSzPct val="100000"/>
+              <a:buNone/>
+            </a:pPr>
+            <a:r>
+              <a:rPr lang="en-US" sz="900" b="1" dirty="0">
                 <a:solidFill>
                   <a:srgbClr val="000000"/>
                 </a:solidFill>
@@ -9356,7 +9530,7 @@
               <a:t xml:space="preserve">[2]  </a:t>
             </a:r>
             <a:r>
-              <a:rPr lang="en-US" sz="1150" dirty="0">
+              <a:rPr lang="en-US" sz="900" dirty="0">
                 <a:solidFill>
                   <a:srgbClr val="000000"/>
                 </a:solidFill>
@@ -9366,17 +9540,28 @@
               </a:rPr>
               <a:t xml:space="preserve">R. Xie, H. Wang, G. Tang, X. Yang and K. J. Chen, “An Analytical Model for False Turn-On Evaluation of High-Voltage Enhancement-Mode GaN Transistor in Bridge-Leg Configuration,” IEEE Trans. Power Electron., vol. 32, no. 8, pp. 6416–6433, Aug. 2017.</a:t>
             </a:r>
+            <a:r>
+              <a:rPr lang="en-US" sz="900" b="1" dirty="0">
+                <a:solidFill>
+                  <a:srgbClr val="000000"/>
+                </a:solidFill>
+                <a:latin typeface="Calibri" pitchFamily="34" charset="0"/>
+                <a:ea typeface="Calibri" pitchFamily="34" charset="-122"/>
+                <a:cs typeface="Calibri" pitchFamily="34" charset="-120"/>
+              </a:rPr>
+              <a:t xml:space="preserve">   ieeexplore.ieee.org/document/7854840</a:t>
+            </a:r>
           </a:p>
           <a:p>
             <a:pPr marL="177800" indent="0">
               <a:spcAft>
-                <a:spcPts val="300"/>
-              </a:spcAft>
-              <a:buSzPct val="100000"/>
-              <a:buNone/>
-            </a:pPr>
-            <a:r>
-              <a:rPr lang="en-US" sz="1150" b="1" dirty="0">
+                <a:spcPts val="120"/>
+              </a:spcAft>
+              <a:buSzPct val="100000"/>
+              <a:buNone/>
+            </a:pPr>
+            <a:r>
+              <a:rPr lang="en-US" sz="900" b="1" dirty="0">
                 <a:solidFill>
                   <a:srgbClr val="000000"/>
                 </a:solidFill>
@@ -9387,7 +9572,7 @@
               <a:t xml:space="preserve">[3]  </a:t>
             </a:r>
             <a:r>
-              <a:rPr lang="en-US" sz="1150" dirty="0">
+              <a:rPr lang="en-US" sz="900" dirty="0">
                 <a:solidFill>
                   <a:srgbClr val="000000"/>
                 </a:solidFill>
@@ -9397,17 +9582,28 @@
               </a:rPr>
               <a:t xml:space="preserve">D. Reusch and J. Strydom, “Understanding the Effect of PCB Layout on Circuit Performance in a High-Frequency Gallium-Nitride-Based Point of Load Converter,” IEEE Trans. Power Electron., vol. 29, no. 4, pp. 2008–2015, Apr. 2014.</a:t>
             </a:r>
+            <a:r>
+              <a:rPr lang="en-US" sz="900" b="1" dirty="0">
+                <a:solidFill>
+                  <a:srgbClr val="000000"/>
+                </a:solidFill>
+                <a:latin typeface="Calibri" pitchFamily="34" charset="0"/>
+                <a:ea typeface="Calibri" pitchFamily="34" charset="-122"/>
+                <a:cs typeface="Calibri" pitchFamily="34" charset="-120"/>
+              </a:rPr>
+              <a:t xml:space="preserve">   ieeexplore.ieee.org/document/6531683</a:t>
+            </a:r>
           </a:p>
           <a:p>
             <a:pPr marL="177800" indent="0">
               <a:spcAft>
-                <a:spcPts val="300"/>
-              </a:spcAft>
-              <a:buSzPct val="100000"/>
-              <a:buNone/>
-            </a:pPr>
-            <a:r>
-              <a:rPr lang="en-US" sz="1150" b="1" dirty="0">
+                <a:spcPts val="120"/>
+              </a:spcAft>
+              <a:buSzPct val="100000"/>
+              <a:buNone/>
+            </a:pPr>
+            <a:r>
+              <a:rPr lang="en-US" sz="900" b="1" dirty="0">
                 <a:solidFill>
                   <a:srgbClr val="000000"/>
                 </a:solidFill>
@@ -9418,27 +9614,38 @@
               <a:t xml:space="preserve">[4]  </a:t>
             </a:r>
             <a:r>
-              <a:rPr lang="en-US" sz="1150" dirty="0">
-                <a:solidFill>
-                  <a:srgbClr val="000000"/>
-                </a:solidFill>
-                <a:latin typeface="Calibri" pitchFamily="34" charset="0"/>
-                <a:ea typeface="Calibri" pitchFamily="34" charset="-122"/>
-                <a:cs typeface="Calibri" pitchFamily="34" charset="-120"/>
-              </a:rPr>
-              <a:t xml:space="preserve">“Crosstalk Suppression Method for GaN-Based Bridge Configuration Using Negative Voltage Self-Recovery Gate Drive,” IEEE journal; Xplore document 9573371. [Authors, vol., no., pp., year to be completed from Xplore.]</a:t>
+              <a:rPr lang="en-US" sz="900" dirty="0">
+                <a:solidFill>
+                  <a:srgbClr val="000000"/>
+                </a:solidFill>
+                <a:latin typeface="Calibri" pitchFamily="34" charset="0"/>
+                <a:ea typeface="Calibri" pitchFamily="34" charset="-122"/>
+                <a:cs typeface="Calibri" pitchFamily="34" charset="-120"/>
+              </a:rPr>
+              <a:t xml:space="preserve">“Crosstalk Suppression Method for GaN-Based Bridge Configuration Using Negative Voltage Self-Recovery Gate Drive,” IEEE Trans. Power Electron., 2021,  [author list and page range: Xplore “Cite This”]</a:t>
+            </a:r>
+            <a:r>
+              <a:rPr lang="en-US" sz="900" b="1" dirty="0">
+                <a:solidFill>
+                  <a:srgbClr val="000000"/>
+                </a:solidFill>
+                <a:latin typeface="Calibri" pitchFamily="34" charset="0"/>
+                <a:ea typeface="Calibri" pitchFamily="34" charset="-122"/>
+                <a:cs typeface="Calibri" pitchFamily="34" charset="-120"/>
+              </a:rPr>
+              <a:t xml:space="preserve">   ieeexplore.ieee.org/document/9573371</a:t>
             </a:r>
           </a:p>
           <a:p>
             <a:pPr marL="177800" indent="0">
               <a:spcAft>
-                <a:spcPts val="300"/>
-              </a:spcAft>
-              <a:buSzPct val="100000"/>
-              <a:buNone/>
-            </a:pPr>
-            <a:r>
-              <a:rPr lang="en-US" sz="1150" b="1" dirty="0">
+                <a:spcPts val="120"/>
+              </a:spcAft>
+              <a:buSzPct val="100000"/>
+              <a:buNone/>
+            </a:pPr>
+            <a:r>
+              <a:rPr lang="en-US" sz="900" b="1" dirty="0">
                 <a:solidFill>
                   <a:srgbClr val="000000"/>
                 </a:solidFill>
@@ -9449,27 +9656,38 @@
               <a:t xml:space="preserve">[5]  </a:t>
             </a:r>
             <a:r>
-              <a:rPr lang="en-US" sz="1150" dirty="0">
-                <a:solidFill>
-                  <a:srgbClr val="000000"/>
-                </a:solidFill>
-                <a:latin typeface="Calibri" pitchFamily="34" charset="0"/>
-                <a:ea typeface="Calibri" pitchFamily="34" charset="-122"/>
-                <a:cs typeface="Calibri" pitchFamily="34" charset="-120"/>
-              </a:rPr>
-              <a:t xml:space="preserve">“A Novel Control Strategy for Optimal Tradeoff between Overshoot and Switching Loss Based on Double Closed-Loop Self-Regulating Active Gate Driver,” IEEE journal; Xplore document 10553383. [Authors, vol., no., pp., year to be completed from Xplore.]</a:t>
+              <a:rPr lang="en-US" sz="900" dirty="0">
+                <a:solidFill>
+                  <a:srgbClr val="000000"/>
+                </a:solidFill>
+                <a:latin typeface="Calibri" pitchFamily="34" charset="0"/>
+                <a:ea typeface="Calibri" pitchFamily="34" charset="-122"/>
+                <a:cs typeface="Calibri" pitchFamily="34" charset="-120"/>
+              </a:rPr>
+              <a:t xml:space="preserve">“A Novel Control Strategy for Optimal Tradeoff between Overshoot and Switching Loss Based on Double Closed-Loop Self-Regulating Active Gate Driver,” IEEE journal, 2024,  [author list and page range: Xplore “Cite This”]</a:t>
+            </a:r>
+            <a:r>
+              <a:rPr lang="en-US" sz="900" b="1" dirty="0">
+                <a:solidFill>
+                  <a:srgbClr val="000000"/>
+                </a:solidFill>
+                <a:latin typeface="Calibri" pitchFamily="34" charset="0"/>
+                <a:ea typeface="Calibri" pitchFamily="34" charset="-122"/>
+                <a:cs typeface="Calibri" pitchFamily="34" charset="-120"/>
+              </a:rPr>
+              <a:t xml:space="preserve">   ieeexplore.ieee.org/document/10553383</a:t>
             </a:r>
           </a:p>
           <a:p>
             <a:pPr marL="177800" indent="0">
               <a:spcAft>
-                <a:spcPts val="300"/>
-              </a:spcAft>
-              <a:buSzPct val="100000"/>
-              <a:buNone/>
-            </a:pPr>
-            <a:r>
-              <a:rPr lang="en-US" sz="1150" b="1" dirty="0">
+                <a:spcPts val="120"/>
+              </a:spcAft>
+              <a:buSzPct val="100000"/>
+              <a:buNone/>
+            </a:pPr>
+            <a:r>
+              <a:rPr lang="en-US" sz="900" b="1" dirty="0">
                 <a:solidFill>
                   <a:srgbClr val="000000"/>
                 </a:solidFill>
@@ -9480,27 +9698,38 @@
               <a:t xml:space="preserve">[6]  </a:t>
             </a:r>
             <a:r>
-              <a:rPr lang="en-US" sz="1150" dirty="0">
-                <a:solidFill>
-                  <a:srgbClr val="000000"/>
-                </a:solidFill>
-                <a:latin typeface="Calibri" pitchFamily="34" charset="0"/>
-                <a:ea typeface="Calibri" pitchFamily="34" charset="-122"/>
-                <a:cs typeface="Calibri" pitchFamily="34" charset="-120"/>
-              </a:rPr>
-              <a:t xml:space="preserve">“A Self-Regulating Active Gate Driver of Voltage Overshoot Suppression for SiC MOSFETs Under Variable Load Current Conditions,” IEEE journal; Xplore document 10964227. [Authors, vol., no., pp., year to be completed from Xplore.]</a:t>
+              <a:rPr lang="en-US" sz="900" dirty="0">
+                <a:solidFill>
+                  <a:srgbClr val="000000"/>
+                </a:solidFill>
+                <a:latin typeface="Calibri" pitchFamily="34" charset="0"/>
+                <a:ea typeface="Calibri" pitchFamily="34" charset="-122"/>
+                <a:cs typeface="Calibri" pitchFamily="34" charset="-120"/>
+              </a:rPr>
+              <a:t xml:space="preserve">“A Self-Regulating Active Gate Driver of Voltage Overshoot Suppression for SiC MOSFETs Under Variable Load Current Conditions,” IEEE journal, 2025,  [author list and page range: Xplore “Cite This”]</a:t>
+            </a:r>
+            <a:r>
+              <a:rPr lang="en-US" sz="900" b="1" dirty="0">
+                <a:solidFill>
+                  <a:srgbClr val="000000"/>
+                </a:solidFill>
+                <a:latin typeface="Calibri" pitchFamily="34" charset="0"/>
+                <a:ea typeface="Calibri" pitchFamily="34" charset="-122"/>
+                <a:cs typeface="Calibri" pitchFamily="34" charset="-120"/>
+              </a:rPr>
+              <a:t xml:space="preserve">   ieeexplore.ieee.org/document/10964227</a:t>
             </a:r>
           </a:p>
           <a:p>
             <a:pPr marL="177800" indent="0">
               <a:spcAft>
-                <a:spcPts val="300"/>
-              </a:spcAft>
-              <a:buSzPct val="100000"/>
-              <a:buNone/>
-            </a:pPr>
-            <a:r>
-              <a:rPr lang="en-US" sz="1150" b="1" dirty="0">
+                <a:spcPts val="120"/>
+              </a:spcAft>
+              <a:buSzPct val="100000"/>
+              <a:buNone/>
+            </a:pPr>
+            <a:r>
+              <a:rPr lang="en-US" sz="900" b="1" dirty="0">
                 <a:solidFill>
                   <a:srgbClr val="000000"/>
                 </a:solidFill>
@@ -9511,27 +9740,38 @@
               <a:t xml:space="preserve">[7]  </a:t>
             </a:r>
             <a:r>
-              <a:rPr lang="en-US" sz="1150" dirty="0">
-                <a:solidFill>
-                  <a:srgbClr val="000000"/>
-                </a:solidFill>
-                <a:latin typeface="Calibri" pitchFamily="34" charset="0"/>
-                <a:ea typeface="Calibri" pitchFamily="34" charset="-122"/>
-                <a:cs typeface="Calibri" pitchFamily="34" charset="-120"/>
-              </a:rPr>
-              <a:t xml:space="preserve">“Universal Active Gate Driver IC With Closed-Loop Timing Control and Gate-Sensing Technique for Silicon Carbide Power Devices,” IEEE journal; Xplore document 10813402. [Authors, vol., no., pp., year to be completed from Xplore.]</a:t>
+              <a:rPr lang="en-US" sz="900" dirty="0">
+                <a:solidFill>
+                  <a:srgbClr val="000000"/>
+                </a:solidFill>
+                <a:latin typeface="Calibri" pitchFamily="34" charset="0"/>
+                <a:ea typeface="Calibri" pitchFamily="34" charset="-122"/>
+                <a:cs typeface="Calibri" pitchFamily="34" charset="-120"/>
+              </a:rPr>
+              <a:t xml:space="preserve">“Universal Active Gate Driver IC With Closed-Loop Timing Control and Gate-Sensing Technique for Silicon Carbide Power Devices,” IEEE journal, 2025,  [author list and page range: Xplore “Cite This”]</a:t>
+            </a:r>
+            <a:r>
+              <a:rPr lang="en-US" sz="900" b="1" dirty="0">
+                <a:solidFill>
+                  <a:srgbClr val="000000"/>
+                </a:solidFill>
+                <a:latin typeface="Calibri" pitchFamily="34" charset="0"/>
+                <a:ea typeface="Calibri" pitchFamily="34" charset="-122"/>
+                <a:cs typeface="Calibri" pitchFamily="34" charset="-120"/>
+              </a:rPr>
+              <a:t xml:space="preserve">   ieeexplore.ieee.org/document/10813402</a:t>
             </a:r>
           </a:p>
           <a:p>
             <a:pPr marL="177800" indent="0">
               <a:spcAft>
-                <a:spcPts val="300"/>
-              </a:spcAft>
-              <a:buSzPct val="100000"/>
-              <a:buNone/>
-            </a:pPr>
-            <a:r>
-              <a:rPr lang="en-US" sz="1150" b="1" dirty="0">
+                <a:spcPts val="120"/>
+              </a:spcAft>
+              <a:buSzPct val="100000"/>
+              <a:buNone/>
+            </a:pPr>
+            <a:r>
+              <a:rPr lang="en-US" sz="900" b="1" dirty="0">
                 <a:solidFill>
                   <a:srgbClr val="000000"/>
                 </a:solidFill>
@@ -9542,49 +9782,281 @@
               <a:t xml:space="preserve">[8]  </a:t>
             </a:r>
             <a:r>
-              <a:rPr lang="en-US" sz="1150" dirty="0">
-                <a:solidFill>
-                  <a:srgbClr val="000000"/>
-                </a:solidFill>
-                <a:latin typeface="Calibri" pitchFamily="34" charset="0"/>
-                <a:ea typeface="Calibri" pitchFamily="34" charset="-122"/>
-                <a:cs typeface="Calibri" pitchFamily="34" charset="-120"/>
-              </a:rPr>
-              <a:t xml:space="preserve">“An Integrated Driver With Dual-Edge Adaptive Dead-Time Control for GaN-Based Synchronous Buck Converter,” IEEE journal; Xplore document 10664041. [Authors, vol., no., pp., year to be completed from Xplore.]</a:t>
+              <a:rPr lang="en-US" sz="900" dirty="0">
+                <a:solidFill>
+                  <a:srgbClr val="000000"/>
+                </a:solidFill>
+                <a:latin typeface="Calibri" pitchFamily="34" charset="0"/>
+                <a:ea typeface="Calibri" pitchFamily="34" charset="-122"/>
+                <a:cs typeface="Calibri" pitchFamily="34" charset="-120"/>
+              </a:rPr>
+              <a:t xml:space="preserve">“An Integrated Driver With Dual-Edge Adaptive Dead-Time Control for GaN-Based Synchronous Buck Converter,” IEEE Trans. Ind. Appl., vol. 60, 2024, doi: 10.1109/TIA.2024.3454198.  [author list and page range: Xplore “Cite This”]</a:t>
+            </a:r>
+            <a:r>
+              <a:rPr lang="en-US" sz="900" b="1" dirty="0">
+                <a:solidFill>
+                  <a:srgbClr val="000000"/>
+                </a:solidFill>
+                <a:latin typeface="Calibri" pitchFamily="34" charset="0"/>
+                <a:ea typeface="Calibri" pitchFamily="34" charset="-122"/>
+                <a:cs typeface="Calibri" pitchFamily="34" charset="-120"/>
+              </a:rPr>
+              <a:t xml:space="preserve">   doi.org/10.1109/TIA.2024.3454198</a:t>
             </a:r>
           </a:p>
           <a:p>
             <a:pPr marL="177800" indent="0">
               <a:spcAft>
+                <a:spcPts val="120"/>
+              </a:spcAft>
+              <a:buSzPct val="100000"/>
+              <a:buNone/>
+            </a:pPr>
+            <a:r>
+              <a:rPr lang="en-US" sz="900" b="1" dirty="0">
+                <a:solidFill>
+                  <a:srgbClr val="000000"/>
+                </a:solidFill>
+                <a:latin typeface="Calibri" pitchFamily="34" charset="0"/>
+                <a:ea typeface="Calibri" pitchFamily="34" charset="-122"/>
+                <a:cs typeface="Calibri" pitchFamily="34" charset="-120"/>
+              </a:rPr>
+              <a:t xml:space="preserve">[9]  </a:t>
+            </a:r>
+            <a:r>
+              <a:rPr lang="en-US" sz="900" b="1" dirty="0">
+                <a:solidFill>
+                  <a:srgbClr val="000000"/>
+                </a:solidFill>
+                <a:latin typeface="Calibri" pitchFamily="34" charset="0"/>
+                <a:ea typeface="Calibri" pitchFamily="34" charset="-122"/>
+                <a:cs typeface="Calibri" pitchFamily="34" charset="-120"/>
+              </a:rPr>
+              <a:t xml:space="preserve">BASE PAPER — </a:t>
+            </a:r>
+            <a:r>
+              <a:rPr lang="en-US" sz="900" dirty="0">
+                <a:solidFill>
+                  <a:srgbClr val="000000"/>
+                </a:solidFill>
+                <a:latin typeface="Calibri" pitchFamily="34" charset="0"/>
+                <a:ea typeface="Calibri" pitchFamily="34" charset="-122"/>
+                <a:cs typeface="Calibri" pitchFamily="34" charset="-120"/>
+              </a:rPr>
+              <a:t xml:space="preserve">Takayama &amp; Hikihara, “Digital Active Gate Drive of SiC MOSFETs for Controlling Switching Behavior — Preparation Toward Universal Digitization of Power Switching,” Int. J. Circuit Theory Appl., vol. 50, no. 1, pp. 183–196, 2022, doi: 10.1002/cta.3136.  [author list and page range: Xplore “Cite This”]</a:t>
+            </a:r>
+            <a:r>
+              <a:rPr lang="en-US" sz="900" b="1" dirty="0">
+                <a:solidFill>
+                  <a:srgbClr val="000000"/>
+                </a:solidFill>
+                <a:latin typeface="Calibri" pitchFamily="34" charset="0"/>
+                <a:ea typeface="Calibri" pitchFamily="34" charset="-122"/>
+                <a:cs typeface="Calibri" pitchFamily="34" charset="-120"/>
+              </a:rPr>
+              <a:t xml:space="preserve">   doi.org/10.1002/cta.3136</a:t>
+            </a:r>
+          </a:p>
+          <a:p>
+            <a:pPr marL="177800" indent="0">
+              <a:spcAft>
+                <a:spcPts val="120"/>
+              </a:spcAft>
+              <a:buSzPct val="100000"/>
+              <a:buNone/>
+            </a:pPr>
+            <a:r>
+              <a:rPr lang="en-US" sz="900" b="1" dirty="0">
+                <a:solidFill>
+                  <a:srgbClr val="000000"/>
+                </a:solidFill>
+                <a:latin typeface="Calibri" pitchFamily="34" charset="0"/>
+                <a:ea typeface="Calibri" pitchFamily="34" charset="-122"/>
+                <a:cs typeface="Calibri" pitchFamily="34" charset="-120"/>
+              </a:rPr>
+              <a:t xml:space="preserve">[10]  </a:t>
+            </a:r>
+            <a:r>
+              <a:rPr lang="en-US" sz="900" dirty="0">
+                <a:solidFill>
+                  <a:srgbClr val="000000"/>
+                </a:solidFill>
+                <a:latin typeface="Calibri" pitchFamily="34" charset="0"/>
+                <a:ea typeface="Calibri" pitchFamily="34" charset="-122"/>
+                <a:cs typeface="Calibri" pitchFamily="34" charset="-120"/>
+              </a:rPr>
+              <a:t xml:space="preserve">“A Segmented Gate Driver for E-mode GaN HEMTs with Simple Driving Strength Pattern Control,” IEEE conference, 2020,  [author list and page range: Xplore “Cite This”]</a:t>
+            </a:r>
+            <a:r>
+              <a:rPr lang="en-US" sz="900" b="1" dirty="0">
+                <a:solidFill>
+                  <a:srgbClr val="000000"/>
+                </a:solidFill>
+                <a:latin typeface="Calibri" pitchFamily="34" charset="0"/>
+                <a:ea typeface="Calibri" pitchFamily="34" charset="-122"/>
+                <a:cs typeface="Calibri" pitchFamily="34" charset="-120"/>
+              </a:rPr>
+              <a:t xml:space="preserve">   ieeexplore.ieee.org/document/9170108</a:t>
+            </a:r>
+          </a:p>
+          <a:p>
+            <a:pPr marL="177800" indent="0">
+              <a:spcAft>
+                <a:spcPts val="120"/>
+              </a:spcAft>
+              <a:buSzPct val="100000"/>
+              <a:buNone/>
+            </a:pPr>
+            <a:r>
+              <a:rPr lang="en-US" sz="900" b="1" dirty="0">
+                <a:solidFill>
+                  <a:srgbClr val="000000"/>
+                </a:solidFill>
+                <a:latin typeface="Calibri" pitchFamily="34" charset="0"/>
+                <a:ea typeface="Calibri" pitchFamily="34" charset="-122"/>
+                <a:cs typeface="Calibri" pitchFamily="34" charset="-120"/>
+              </a:rPr>
+              <a:t xml:space="preserve">[11]  </a:t>
+            </a:r>
+            <a:r>
+              <a:rPr lang="en-US" sz="900" dirty="0">
+                <a:solidFill>
+                  <a:srgbClr val="000000"/>
+                </a:solidFill>
+                <a:latin typeface="Calibri" pitchFamily="34" charset="0"/>
+                <a:ea typeface="Calibri" pitchFamily="34" charset="-122"/>
+                <a:cs typeface="Calibri" pitchFamily="34" charset="-120"/>
+              </a:rPr>
+              <a:t xml:space="preserve">“High-Frequency Three-Level Gate Driver for GaN HEMT Bridge Crosstalk Suppression,” IEEE journal, 2024,  [author list and page range: Xplore “Cite This”]</a:t>
+            </a:r>
+            <a:r>
+              <a:rPr lang="en-US" sz="900" b="1" dirty="0">
+                <a:solidFill>
+                  <a:srgbClr val="000000"/>
+                </a:solidFill>
+                <a:latin typeface="Calibri" pitchFamily="34" charset="0"/>
+                <a:ea typeface="Calibri" pitchFamily="34" charset="-122"/>
+                <a:cs typeface="Calibri" pitchFamily="34" charset="-120"/>
+              </a:rPr>
+              <a:t xml:space="preserve">   ieeexplore.ieee.org/document/10286072</a:t>
+            </a:r>
+          </a:p>
+          <a:p>
+            <a:pPr marL="177800" indent="0">
+              <a:spcAft>
+                <a:spcPts val="120"/>
+              </a:spcAft>
+              <a:buSzPct val="100000"/>
+              <a:buNone/>
+            </a:pPr>
+            <a:r>
+              <a:rPr lang="en-US" sz="900" b="1" dirty="0">
+                <a:solidFill>
+                  <a:srgbClr val="000000"/>
+                </a:solidFill>
+                <a:latin typeface="Calibri" pitchFamily="34" charset="0"/>
+                <a:ea typeface="Calibri" pitchFamily="34" charset="-122"/>
+                <a:cs typeface="Calibri" pitchFamily="34" charset="-120"/>
+              </a:rPr>
+              <a:t xml:space="preserve">[12]  </a:t>
+            </a:r>
+            <a:r>
+              <a:rPr lang="en-US" sz="900" dirty="0">
+                <a:solidFill>
+                  <a:srgbClr val="000000"/>
+                </a:solidFill>
+                <a:latin typeface="Calibri" pitchFamily="34" charset="0"/>
+                <a:ea typeface="Calibri" pitchFamily="34" charset="-122"/>
+                <a:cs typeface="Calibri" pitchFamily="34" charset="-120"/>
+              </a:rPr>
+              <a:t xml:space="preserve">“An Integrated Suppression Method of Both Gate-Source Voltage Oscillation and Crosstalk for GaN HEMT Gate Driver,” IEEE journal, 2024,  [author list and page range: Xplore “Cite This”]</a:t>
+            </a:r>
+            <a:r>
+              <a:rPr lang="en-US" sz="900" b="1" dirty="0">
+                <a:solidFill>
+                  <a:srgbClr val="000000"/>
+                </a:solidFill>
+                <a:latin typeface="Calibri" pitchFamily="34" charset="0"/>
+                <a:ea typeface="Calibri" pitchFamily="34" charset="-122"/>
+                <a:cs typeface="Calibri" pitchFamily="34" charset="-120"/>
+              </a:rPr>
+              <a:t xml:space="preserve">   ieeexplore.ieee.org/document/10591431</a:t>
+            </a:r>
+          </a:p>
+          <a:p>
+            <a:pPr marL="177800" indent="0">
+              <a:spcAft>
+                <a:spcPts val="120"/>
+              </a:spcAft>
+              <a:buSzPct val="100000"/>
+              <a:buNone/>
+            </a:pPr>
+            <a:r>
+              <a:rPr lang="en-US" sz="900" b="1" dirty="0">
+                <a:solidFill>
+                  <a:srgbClr val="000000"/>
+                </a:solidFill>
+                <a:latin typeface="Calibri" pitchFamily="34" charset="0"/>
+                <a:ea typeface="Calibri" pitchFamily="34" charset="-122"/>
+                <a:cs typeface="Calibri" pitchFamily="34" charset="-120"/>
+              </a:rPr>
+              <a:t xml:space="preserve">[13]  </a:t>
+            </a:r>
+            <a:r>
+              <a:rPr lang="en-US" sz="900" dirty="0">
+                <a:solidFill>
+                  <a:srgbClr val="000000"/>
+                </a:solidFill>
+                <a:latin typeface="Calibri" pitchFamily="34" charset="0"/>
+                <a:ea typeface="Calibri" pitchFamily="34" charset="-122"/>
+                <a:cs typeface="Calibri" pitchFamily="34" charset="-120"/>
+              </a:rPr>
+              <a:t xml:space="preserve">“A High-Efficient GaN Driver With Hybrid Adaptive Dead-Time Control and Peak Delay Control for Synchronous Buck Converter,” IEEE journal, 2025,  [author list and page range: Xplore “Cite This”]</a:t>
+            </a:r>
+            <a:r>
+              <a:rPr lang="en-US" sz="900" b="1" dirty="0">
+                <a:solidFill>
+                  <a:srgbClr val="000000"/>
+                </a:solidFill>
+                <a:latin typeface="Calibri" pitchFamily="34" charset="0"/>
+                <a:ea typeface="Calibri" pitchFamily="34" charset="-122"/>
+                <a:cs typeface="Calibri" pitchFamily="34" charset="-120"/>
+              </a:rPr>
+              <a:t xml:space="preserve">   ieeexplore.ieee.org/document/11146698</a:t>
+            </a:r>
+          </a:p>
+          <a:p>
+            <a:pPr marL="177800" indent="0">
+              <a:spcAft>
                 <a:spcPts val="0"/>
               </a:spcAft>
               <a:buSzPct val="100000"/>
               <a:buNone/>
             </a:pPr>
             <a:r>
-              <a:rPr lang="en-US" sz="1050" dirty="0">
-                <a:solidFill>
-                  <a:srgbClr val="000000"/>
-                </a:solidFill>
-                <a:latin typeface="Calibri" pitchFamily="34" charset="0"/>
-                <a:ea typeface="Calibri" pitchFamily="34" charset="-122"/>
-                <a:cs typeface="Calibri" pitchFamily="34" charset="-120"/>
-              </a:rPr>
-              <a:t xml:space="preserve">3 of 8 verified against the publisher record. </a:t>
-            </a:r>
-            <a:r>
-              <a:rPr lang="en-US" sz="1050" dirty="0">
-                <a:solidFill>
-                  <a:srgbClr val="000000"/>
-                </a:solidFill>
-                <a:latin typeface="Calibri" pitchFamily="34" charset="0"/>
-                <a:ea typeface="Calibri" pitchFamily="34" charset="-122"/>
-                <a:cs typeface="Calibri" pitchFamily="34" charset="-120"/>
-              </a:rPr>
-              <a:t xml:space="preserve">The remaining 5 carry title, journal status and Xplore document ID; </a:t>
-            </a:r>
-            <a:r>
-              <a:rPr lang="en-US" sz="1050" dirty="0">
+              <a:rPr lang="en-US" sz="850" dirty="0">
+                <a:solidFill>
+                  <a:srgbClr val="000000"/>
+                </a:solidFill>
+                <a:latin typeface="Calibri" pitchFamily="34" charset="0"/>
+                <a:ea typeface="Calibri" pitchFamily="34" charset="-122"/>
+                <a:cs typeface="Calibri" pitchFamily="34" charset="-120"/>
+              </a:rPr>
+              <a:t xml:space="preserve">3 of 13 verified against the publisher record. </a:t>
+            </a:r>
+            <a:r>
+              <a:rPr lang="en-US" sz="850" dirty="0">
+                <a:solidFill>
+                  <a:srgbClr val="000000"/>
+                </a:solidFill>
+                <a:latin typeface="Calibri" pitchFamily="34" charset="0"/>
+                <a:ea typeface="Calibri" pitchFamily="34" charset="-122"/>
+                <a:cs typeface="Calibri" pitchFamily="34" charset="-120"/>
+              </a:rPr>
+              <a:t xml:space="preserve">The remaining 10 carry title, journal status and Xplore document ID; </a:t>
+            </a:r>
+            <a:r>
+              <a:rPr lang="en-US" sz="850" dirty="0">
                 <a:solidFill>
                   <a:srgbClr val="000000"/>
                 </a:solidFill>
@@ -9705,7 +10177,7 @@
                 <a:ea typeface="Calibri" pitchFamily="34" charset="-122"/>
                 <a:cs typeface="Calibri" pitchFamily="34" charset="-120"/>
               </a:rPr>
-              <a:t>21</a:t>
+              <a:t>24</a:t>
             </a:r>
             <a:endParaRPr lang="en-US" sz="1000" dirty="0"/>
           </a:p>
@@ -9771,6 +10243,2875 @@
               <a:t>Thank You</a:t>
             </a:r>
             <a:endParaRPr lang="en-US" sz="4000" dirty="0"/>
+          </a:p>
+        </p:txBody>
+      </p:sp>
+    </p:spTree>
+  </p:cSld>
+  <p:clrMapOvr>
+    <a:masterClrMapping/>
+  </p:clrMapOvr>
+</p:sld>
+</file>
+
+<file path=ppt/slides/slide22.xml><?xml version="1.0" encoding="utf-8"?>
+<p:sld xmlns:a="http://schemas.openxmlformats.org/drawingml/2006/main" xmlns:p="http://schemas.openxmlformats.org/presentationml/2006/main" xmlns:r="http://schemas.openxmlformats.org/officeDocument/2006/relationships">
+  <p:cSld>
+    <p:spTree>
+      <p:nvGrpSpPr>
+        <p:cNvPr id="1" name=""/>
+        <p:cNvGrpSpPr/>
+        <p:nvPr/>
+      </p:nvGrpSpPr>
+      <p:grpSpPr/>
+      <p:sp>
+        <p:nvSpPr>
+          <p:cNvPr id="2" name="Text 0"/>
+          <p:cNvSpPr txBox="1"/>
+          <p:nvPr/>
+        </p:nvSpPr>
+        <p:spPr>
+          <a:xfrm>
+            <a:off x="11460175" y="6446520"/>
+            <a:ext cx="457200" cy="274320"/>
+          </a:xfrm>
+          <a:prstGeom prst="rect">
+            <a:avLst/>
+          </a:prstGeom>
+          <a:noFill/>
+          <a:ln/>
+        </p:spPr>
+        <p:txBody>
+          <a:bodyPr wrap="square" lIns="0" tIns="0" rIns="0" bIns="0" rtlCol="0" anchor="ctr"/>
+          <a:lstStyle/>
+          <a:p>
+            <a:pPr marL="0" indent="0" algn="r">
+              <a:buNone/>
+            </a:pPr>
+            <a:r>
+              <a:rPr lang="en-US" sz="1000" dirty="0">
+                <a:solidFill>
+                  <a:srgbClr val="808080"/>
+                </a:solidFill>
+                <a:latin typeface="Calibri" pitchFamily="34" charset="0"/>
+                <a:ea typeface="Calibri" pitchFamily="34" charset="-122"/>
+                <a:cs typeface="Calibri" pitchFamily="34" charset="-120"/>
+              </a:rPr>
+              <a:t>10</a:t>
+            </a:r>
+            <a:endParaRPr lang="en-US" sz="1000" dirty="0"/>
+          </a:p>
+        </p:txBody>
+      </p:sp>
+      <p:sp>
+        <p:nvSpPr>
+          <p:cNvPr id="3" name="Text 1"/>
+          <p:cNvSpPr txBox="1"/>
+          <p:nvPr/>
+        </p:nvSpPr>
+        <p:spPr>
+          <a:xfrm>
+            <a:off x="548640" y="320040"/>
+            <a:ext cx="9601200" cy="685800"/>
+          </a:xfrm>
+          <a:prstGeom prst="rect">
+            <a:avLst/>
+          </a:prstGeom>
+          <a:noFill/>
+          <a:ln/>
+        </p:spPr>
+        <p:txBody>
+          <a:bodyPr wrap="square" lIns="0" tIns="0" rIns="0" bIns="0" rtlCol="0" anchor="ctr"/>
+          <a:lstStyle/>
+          <a:p>
+            <a:pPr marL="0" indent="0">
+              <a:buNone/>
+            </a:pPr>
+            <a:r>
+              <a:rPr lang="en-US" sz="2800" b="1" dirty="0">
+                <a:solidFill>
+                  <a:srgbClr val="1D2F82"/>
+                </a:solidFill>
+                <a:latin typeface="Calibri" pitchFamily="34" charset="0"/>
+                <a:ea typeface="Calibri" pitchFamily="34" charset="-122"/>
+                <a:cs typeface="Calibri" pitchFamily="34" charset="-120"/>
+              </a:rPr>
+              <a:t>What is a “control word”?</a:t>
+            </a:r>
+            <a:endParaRPr lang="en-US" sz="2800" dirty="0"/>
+          </a:p>
+        </p:txBody>
+      </p:sp>
+      <p:pic>
+        <p:nvPicPr>
+          <p:cNvPr id="4" name="Image 0" descr="logo.png"/>
+          <p:cNvPicPr>
+            <a:picLocks noChangeAspect="1"/>
+          </p:cNvPicPr>
+          <p:nvPr/>
+        </p:nvPicPr>
+        <p:blipFill>
+          <a:blip r:embed="rId2"/>
+          <a:stretch>
+            <a:fillRect/>
+          </a:stretch>
+        </p:blipFill>
+        <p:spPr>
+          <a:xfrm>
+            <a:off x="10362895" y="320040"/>
+            <a:ext cx="1371600" cy="518746"/>
+          </a:xfrm>
+          <a:prstGeom prst="rect">
+            <a:avLst/>
+          </a:prstGeom>
+        </p:spPr>
+      </p:pic>
+      <p:sp>
+        <p:nvSpPr>
+          <p:cNvPr id="5" name="TextBox 4"/>
+          <p:cNvSpPr txBox="1"/>
+          <p:nvPr/>
+        </p:nvSpPr>
+        <p:spPr>
+          <a:xfrm>
+            <a:off x="640080" y="1143000"/>
+            <a:ext cx="10972800" cy="411480"/>
+          </a:xfrm>
+          <a:prstGeom prst="rect">
+            <a:avLst/>
+          </a:prstGeom>
+          <a:noFill/>
+        </p:spPr>
+        <p:txBody>
+          <a:bodyPr wrap="square" lIns="0" tIns="0" rIns="0" bIns="0">
+            <a:spAutoFit/>
+          </a:bodyPr>
+          <a:lstStyle/>
+          <a:p>
+            <a:pPr marL="177800" indent="0">
+              <a:spcAft>
+                <a:spcPts val="0"/>
+              </a:spcAft>
+              <a:buSzPct val="100000"/>
+              <a:buNone/>
+            </a:pPr>
+            <a:r>
+              <a:rPr lang="en-US" sz="1300" dirty="0">
+                <a:solidFill>
+                  <a:srgbClr val="000000"/>
+                </a:solidFill>
+                <a:latin typeface="Calibri" pitchFamily="34" charset="0"/>
+                <a:ea typeface="Calibri" pitchFamily="34" charset="-122"/>
+                <a:cs typeface="Calibri" pitchFamily="34" charset="-120"/>
+              </a:rPr>
+              <a:t xml:space="preserve">Everything in this deck is measured over control words, so this is the definition the rest of the results rest on.</a:t>
+            </a:r>
+          </a:p>
+        </p:txBody>
+      </p:sp>
+      <p:sp>
+        <p:nvSpPr>
+          <p:cNvPr id="6" name="TextBox 5"/>
+          <p:cNvSpPr txBox="1"/>
+          <p:nvPr/>
+        </p:nvSpPr>
+        <p:spPr>
+          <a:xfrm>
+            <a:off x="640080" y="1563623"/>
+            <a:ext cx="10972800" cy="274320"/>
+          </a:xfrm>
+          <a:prstGeom prst="rect">
+            <a:avLst/>
+          </a:prstGeom>
+          <a:noFill/>
+        </p:spPr>
+        <p:txBody>
+          <a:bodyPr wrap="square" lIns="0" tIns="0" rIns="0" bIns="0">
+            <a:spAutoFit/>
+          </a:bodyPr>
+          <a:lstStyle/>
+          <a:p>
+            <a:pPr marL="177800" indent="0">
+              <a:spcAft>
+                <a:spcPts val="0"/>
+              </a:spcAft>
+              <a:buSzPct val="100000"/>
+              <a:buNone/>
+            </a:pPr>
+            <a:r>
+              <a:rPr lang="en-US" sz="1250" b="1" dirty="0">
+                <a:solidFill>
+                  <a:srgbClr val="000000"/>
+                </a:solidFill>
+                <a:latin typeface="Calibri" pitchFamily="34" charset="0"/>
+                <a:ea typeface="Calibri" pitchFamily="34" charset="-122"/>
+                <a:cs typeface="Calibri" pitchFamily="34" charset="-120"/>
+              </a:rPr>
+              <a:t xml:space="preserve">ONE control word = one setting of these six fields</a:t>
+            </a:r>
+          </a:p>
+        </p:txBody>
+      </p:sp>
+      <p:sp>
+        <p:nvSpPr>
+          <p:cNvPr id="7" name="TextBox 6"/>
+          <p:cNvSpPr txBox="1"/>
+          <p:nvPr/>
+        </p:nvSpPr>
+        <p:spPr>
+          <a:xfrm>
+            <a:off x="777240" y="1874519"/>
+            <a:ext cx="1463040" cy="310896"/>
+          </a:xfrm>
+          <a:prstGeom prst="rect">
+            <a:avLst/>
+          </a:prstGeom>
+          <a:noFill/>
+        </p:spPr>
+        <p:txBody>
+          <a:bodyPr wrap="square" lIns="0" tIns="0" rIns="0" bIns="0">
+            <a:spAutoFit/>
+          </a:bodyPr>
+          <a:lstStyle/>
+          <a:p>
+            <a:pPr marL="177800" indent="0">
+              <a:spcAft>
+                <a:spcPts val="0"/>
+              </a:spcAft>
+              <a:buSzPct val="100000"/>
+              <a:buNone/>
+            </a:pPr>
+            <a:r>
+              <a:rPr lang="en-US" sz="1150" b="1" dirty="0">
+                <a:solidFill>
+                  <a:srgbClr val="000000"/>
+                </a:solidFill>
+                <a:latin typeface="Calibri" pitchFamily="34" charset="0"/>
+                <a:ea typeface="Calibri" pitchFamily="34" charset="-122"/>
+                <a:cs typeface="Calibri" pitchFamily="34" charset="-120"/>
+              </a:rPr>
+              <a:t xml:space="preserve">N_PU</a:t>
+            </a:r>
+          </a:p>
+        </p:txBody>
+      </p:sp>
+      <p:sp>
+        <p:nvSpPr>
+          <p:cNvPr id="8" name="TextBox 7"/>
+          <p:cNvSpPr txBox="1"/>
+          <p:nvPr/>
+        </p:nvSpPr>
+        <p:spPr>
+          <a:xfrm>
+            <a:off x="2286000" y="1874519"/>
+            <a:ext cx="2788920" cy="310896"/>
+          </a:xfrm>
+          <a:prstGeom prst="rect">
+            <a:avLst/>
+          </a:prstGeom>
+          <a:noFill/>
+        </p:spPr>
+        <p:txBody>
+          <a:bodyPr wrap="square" lIns="0" tIns="0" rIns="0" bIns="0">
+            <a:spAutoFit/>
+          </a:bodyPr>
+          <a:lstStyle/>
+          <a:p>
+            <a:pPr marL="177800" indent="0">
+              <a:spcAft>
+                <a:spcPts val="0"/>
+              </a:spcAft>
+              <a:buSzPct val="100000"/>
+              <a:buNone/>
+            </a:pPr>
+            <a:r>
+              <a:rPr lang="en-US" sz="1150" dirty="0">
+                <a:solidFill>
+                  <a:srgbClr val="000000"/>
+                </a:solidFill>
+                <a:latin typeface="Calibri" pitchFamily="34" charset="0"/>
+                <a:ea typeface="Calibri" pitchFamily="34" charset="-122"/>
+                <a:cs typeface="Calibri" pitchFamily="34" charset="-120"/>
+              </a:rPr>
+              <a:t xml:space="preserve">pull-up slices ON</a:t>
+            </a:r>
+          </a:p>
+        </p:txBody>
+      </p:sp>
+      <p:sp>
+        <p:nvSpPr>
+          <p:cNvPr id="9" name="TextBox 8"/>
+          <p:cNvSpPr txBox="1"/>
+          <p:nvPr/>
+        </p:nvSpPr>
+        <p:spPr>
+          <a:xfrm>
+            <a:off x="5120640" y="1874519"/>
+            <a:ext cx="1874519" cy="310896"/>
+          </a:xfrm>
+          <a:prstGeom prst="rect">
+            <a:avLst/>
+          </a:prstGeom>
+          <a:noFill/>
+        </p:spPr>
+        <p:txBody>
+          <a:bodyPr wrap="square" lIns="0" tIns="0" rIns="0" bIns="0">
+            <a:spAutoFit/>
+          </a:bodyPr>
+          <a:lstStyle/>
+          <a:p>
+            <a:pPr marL="177800" indent="0">
+              <a:spcAft>
+                <a:spcPts val="0"/>
+              </a:spcAft>
+              <a:buSzPct val="100000"/>
+              <a:buNone/>
+            </a:pPr>
+            <a:r>
+              <a:rPr lang="en-US" sz="1150" b="1" dirty="0">
+                <a:solidFill>
+                  <a:srgbClr val="000000"/>
+                </a:solidFill>
+                <a:latin typeface="Calibri" pitchFamily="34" charset="0"/>
+                <a:ea typeface="Calibri" pitchFamily="34" charset="-122"/>
+                <a:cs typeface="Calibri" pitchFamily="34" charset="-120"/>
+              </a:rPr>
+              <a:t xml:space="preserve">1 – 8</a:t>
+            </a:r>
+          </a:p>
+        </p:txBody>
+      </p:sp>
+      <p:sp>
+        <p:nvSpPr>
+          <p:cNvPr id="10" name="TextBox 9"/>
+          <p:cNvSpPr txBox="1"/>
+          <p:nvPr/>
+        </p:nvSpPr>
+        <p:spPr>
+          <a:xfrm>
+            <a:off x="7086600" y="1874519"/>
+            <a:ext cx="4434840" cy="310896"/>
+          </a:xfrm>
+          <a:prstGeom prst="rect">
+            <a:avLst/>
+          </a:prstGeom>
+          <a:noFill/>
+        </p:spPr>
+        <p:txBody>
+          <a:bodyPr wrap="square" lIns="0" tIns="0" rIns="0" bIns="0">
+            <a:spAutoFit/>
+          </a:bodyPr>
+          <a:lstStyle/>
+          <a:p>
+            <a:pPr marL="177800" indent="0">
+              <a:spcAft>
+                <a:spcPts val="0"/>
+              </a:spcAft>
+              <a:buSzPct val="100000"/>
+              <a:buNone/>
+            </a:pPr>
+            <a:r>
+              <a:rPr lang="en-US" sz="1150" dirty="0">
+                <a:solidFill>
+                  <a:srgbClr val="000000"/>
+                </a:solidFill>
+                <a:latin typeface="Calibri" pitchFamily="34" charset="0"/>
+                <a:ea typeface="Calibri" pitchFamily="34" charset="-122"/>
+                <a:cs typeface="Calibri" pitchFamily="34" charset="-120"/>
+              </a:rPr>
+              <a:t xml:space="preserve">how hard the device is turned ON</a:t>
+            </a:r>
+          </a:p>
+        </p:txBody>
+      </p:sp>
+      <p:sp>
+        <p:nvSpPr>
+          <p:cNvPr id="11" name="TextBox 10"/>
+          <p:cNvSpPr txBox="1"/>
+          <p:nvPr/>
+        </p:nvSpPr>
+        <p:spPr>
+          <a:xfrm>
+            <a:off x="777240" y="2350008"/>
+            <a:ext cx="1463040" cy="310896"/>
+          </a:xfrm>
+          <a:prstGeom prst="rect">
+            <a:avLst/>
+          </a:prstGeom>
+          <a:noFill/>
+        </p:spPr>
+        <p:txBody>
+          <a:bodyPr wrap="square" lIns="0" tIns="0" rIns="0" bIns="0">
+            <a:spAutoFit/>
+          </a:bodyPr>
+          <a:lstStyle/>
+          <a:p>
+            <a:pPr marL="177800" indent="0">
+              <a:spcAft>
+                <a:spcPts val="0"/>
+              </a:spcAft>
+              <a:buSzPct val="100000"/>
+              <a:buNone/>
+            </a:pPr>
+            <a:r>
+              <a:rPr lang="en-US" sz="1150" b="1" dirty="0">
+                <a:solidFill>
+                  <a:srgbClr val="000000"/>
+                </a:solidFill>
+                <a:latin typeface="Calibri" pitchFamily="34" charset="0"/>
+                <a:ea typeface="Calibri" pitchFamily="34" charset="-122"/>
+                <a:cs typeface="Calibri" pitchFamily="34" charset="-120"/>
+              </a:rPr>
+              <a:t xml:space="preserve">N_PD,LS</a:t>
+            </a:r>
+          </a:p>
+        </p:txBody>
+      </p:sp>
+      <p:sp>
+        <p:nvSpPr>
+          <p:cNvPr id="12" name="TextBox 11"/>
+          <p:cNvSpPr txBox="1"/>
+          <p:nvPr/>
+        </p:nvSpPr>
+        <p:spPr>
+          <a:xfrm>
+            <a:off x="2286000" y="2350008"/>
+            <a:ext cx="2788920" cy="310896"/>
+          </a:xfrm>
+          <a:prstGeom prst="rect">
+            <a:avLst/>
+          </a:prstGeom>
+          <a:noFill/>
+        </p:spPr>
+        <p:txBody>
+          <a:bodyPr wrap="square" lIns="0" tIns="0" rIns="0" bIns="0">
+            <a:spAutoFit/>
+          </a:bodyPr>
+          <a:lstStyle/>
+          <a:p>
+            <a:pPr marL="177800" indent="0">
+              <a:spcAft>
+                <a:spcPts val="0"/>
+              </a:spcAft>
+              <a:buSzPct val="100000"/>
+              <a:buNone/>
+            </a:pPr>
+            <a:r>
+              <a:rPr lang="en-US" sz="1150" dirty="0">
+                <a:solidFill>
+                  <a:srgbClr val="000000"/>
+                </a:solidFill>
+                <a:latin typeface="Calibri" pitchFamily="34" charset="0"/>
+                <a:ea typeface="Calibri" pitchFamily="34" charset="-122"/>
+                <a:cs typeface="Calibri" pitchFamily="34" charset="-120"/>
+              </a:rPr>
+              <a:t xml:space="preserve">low-side pull-down slices</a:t>
+            </a:r>
+          </a:p>
+        </p:txBody>
+      </p:sp>
+      <p:sp>
+        <p:nvSpPr>
+          <p:cNvPr id="13" name="TextBox 12"/>
+          <p:cNvSpPr txBox="1"/>
+          <p:nvPr/>
+        </p:nvSpPr>
+        <p:spPr>
+          <a:xfrm>
+            <a:off x="5120640" y="2350008"/>
+            <a:ext cx="1874519" cy="310896"/>
+          </a:xfrm>
+          <a:prstGeom prst="rect">
+            <a:avLst/>
+          </a:prstGeom>
+          <a:noFill/>
+        </p:spPr>
+        <p:txBody>
+          <a:bodyPr wrap="square" lIns="0" tIns="0" rIns="0" bIns="0">
+            <a:spAutoFit/>
+          </a:bodyPr>
+          <a:lstStyle/>
+          <a:p>
+            <a:pPr marL="177800" indent="0">
+              <a:spcAft>
+                <a:spcPts val="0"/>
+              </a:spcAft>
+              <a:buSzPct val="100000"/>
+              <a:buNone/>
+            </a:pPr>
+            <a:r>
+              <a:rPr lang="en-US" sz="1150" b="1" dirty="0">
+                <a:solidFill>
+                  <a:srgbClr val="000000"/>
+                </a:solidFill>
+                <a:latin typeface="Calibri" pitchFamily="34" charset="0"/>
+                <a:ea typeface="Calibri" pitchFamily="34" charset="-122"/>
+                <a:cs typeface="Calibri" pitchFamily="34" charset="-120"/>
+              </a:rPr>
+              <a:t xml:space="preserve">1 – 8</a:t>
+            </a:r>
+          </a:p>
+        </p:txBody>
+      </p:sp>
+      <p:sp>
+        <p:nvSpPr>
+          <p:cNvPr id="14" name="TextBox 13"/>
+          <p:cNvSpPr txBox="1"/>
+          <p:nvPr/>
+        </p:nvSpPr>
+        <p:spPr>
+          <a:xfrm>
+            <a:off x="7086600" y="2350008"/>
+            <a:ext cx="4434840" cy="310896"/>
+          </a:xfrm>
+          <a:prstGeom prst="rect">
+            <a:avLst/>
+          </a:prstGeom>
+          <a:noFill/>
+        </p:spPr>
+        <p:txBody>
+          <a:bodyPr wrap="square" lIns="0" tIns="0" rIns="0" bIns="0">
+            <a:spAutoFit/>
+          </a:bodyPr>
+          <a:lstStyle/>
+          <a:p>
+            <a:pPr marL="177800" indent="0">
+              <a:spcAft>
+                <a:spcPts val="0"/>
+              </a:spcAft>
+              <a:buSzPct val="100000"/>
+              <a:buNone/>
+            </a:pPr>
+            <a:r>
+              <a:rPr lang="en-US" sz="1150" dirty="0">
+                <a:solidFill>
+                  <a:srgbClr val="000000"/>
+                </a:solidFill>
+                <a:latin typeface="Calibri" pitchFamily="34" charset="0"/>
+                <a:ea typeface="Calibri" pitchFamily="34" charset="-122"/>
+                <a:cs typeface="Calibri" pitchFamily="34" charset="-120"/>
+              </a:rPr>
+              <a:t xml:space="preserve">how hard it is turned OFF</a:t>
+            </a:r>
+          </a:p>
+        </p:txBody>
+      </p:sp>
+      <p:sp>
+        <p:nvSpPr>
+          <p:cNvPr id="15" name="TextBox 14"/>
+          <p:cNvSpPr txBox="1"/>
+          <p:nvPr/>
+        </p:nvSpPr>
+        <p:spPr>
+          <a:xfrm>
+            <a:off x="777240" y="2825496"/>
+            <a:ext cx="1463040" cy="310896"/>
+          </a:xfrm>
+          <a:prstGeom prst="rect">
+            <a:avLst/>
+          </a:prstGeom>
+          <a:noFill/>
+        </p:spPr>
+        <p:txBody>
+          <a:bodyPr wrap="square" lIns="0" tIns="0" rIns="0" bIns="0">
+            <a:spAutoFit/>
+          </a:bodyPr>
+          <a:lstStyle/>
+          <a:p>
+            <a:pPr marL="177800" indent="0">
+              <a:spcAft>
+                <a:spcPts val="0"/>
+              </a:spcAft>
+              <a:buSzPct val="100000"/>
+              <a:buNone/>
+            </a:pPr>
+            <a:r>
+              <a:rPr lang="en-US" sz="1150" b="1" dirty="0">
+                <a:solidFill>
+                  <a:srgbClr val="000000"/>
+                </a:solidFill>
+                <a:latin typeface="Calibri" pitchFamily="34" charset="0"/>
+                <a:ea typeface="Calibri" pitchFamily="34" charset="-122"/>
+                <a:cs typeface="Calibri" pitchFamily="34" charset="-120"/>
+              </a:rPr>
+              <a:t xml:space="preserve">N_PD,HS</a:t>
+            </a:r>
+          </a:p>
+        </p:txBody>
+      </p:sp>
+      <p:sp>
+        <p:nvSpPr>
+          <p:cNvPr id="16" name="TextBox 15"/>
+          <p:cNvSpPr txBox="1"/>
+          <p:nvPr/>
+        </p:nvSpPr>
+        <p:spPr>
+          <a:xfrm>
+            <a:off x="2286000" y="2825496"/>
+            <a:ext cx="2788920" cy="310896"/>
+          </a:xfrm>
+          <a:prstGeom prst="rect">
+            <a:avLst/>
+          </a:prstGeom>
+          <a:noFill/>
+        </p:spPr>
+        <p:txBody>
+          <a:bodyPr wrap="square" lIns="0" tIns="0" rIns="0" bIns="0">
+            <a:spAutoFit/>
+          </a:bodyPr>
+          <a:lstStyle/>
+          <a:p>
+            <a:pPr marL="177800" indent="0">
+              <a:spcAft>
+                <a:spcPts val="0"/>
+              </a:spcAft>
+              <a:buSzPct val="100000"/>
+              <a:buNone/>
+            </a:pPr>
+            <a:r>
+              <a:rPr lang="en-US" sz="1150" dirty="0">
+                <a:solidFill>
+                  <a:srgbClr val="000000"/>
+                </a:solidFill>
+                <a:latin typeface="Calibri" pitchFamily="34" charset="0"/>
+                <a:ea typeface="Calibri" pitchFamily="34" charset="-122"/>
+                <a:cs typeface="Calibri" pitchFamily="34" charset="-120"/>
+              </a:rPr>
+              <a:t xml:space="preserve">high-side pull-down slices</a:t>
+            </a:r>
+          </a:p>
+        </p:txBody>
+      </p:sp>
+      <p:sp>
+        <p:nvSpPr>
+          <p:cNvPr id="17" name="TextBox 16"/>
+          <p:cNvSpPr txBox="1"/>
+          <p:nvPr/>
+        </p:nvSpPr>
+        <p:spPr>
+          <a:xfrm>
+            <a:off x="5120640" y="2825496"/>
+            <a:ext cx="1874519" cy="310896"/>
+          </a:xfrm>
+          <a:prstGeom prst="rect">
+            <a:avLst/>
+          </a:prstGeom>
+          <a:noFill/>
+        </p:spPr>
+        <p:txBody>
+          <a:bodyPr wrap="square" lIns="0" tIns="0" rIns="0" bIns="0">
+            <a:spAutoFit/>
+          </a:bodyPr>
+          <a:lstStyle/>
+          <a:p>
+            <a:pPr marL="177800" indent="0">
+              <a:spcAft>
+                <a:spcPts val="0"/>
+              </a:spcAft>
+              <a:buSzPct val="100000"/>
+              <a:buNone/>
+            </a:pPr>
+            <a:r>
+              <a:rPr lang="en-US" sz="1150" b="1" dirty="0">
+                <a:solidFill>
+                  <a:srgbClr val="000000"/>
+                </a:solidFill>
+                <a:latin typeface="Calibri" pitchFamily="34" charset="0"/>
+                <a:ea typeface="Calibri" pitchFamily="34" charset="-122"/>
+                <a:cs typeface="Calibri" pitchFamily="34" charset="-120"/>
+              </a:rPr>
+              <a:t xml:space="preserve">1, 4, 8</a:t>
+            </a:r>
+          </a:p>
+        </p:txBody>
+      </p:sp>
+      <p:sp>
+        <p:nvSpPr>
+          <p:cNvPr id="18" name="TextBox 17"/>
+          <p:cNvSpPr txBox="1"/>
+          <p:nvPr/>
+        </p:nvSpPr>
+        <p:spPr>
+          <a:xfrm>
+            <a:off x="7086600" y="2825496"/>
+            <a:ext cx="4434840" cy="310896"/>
+          </a:xfrm>
+          <a:prstGeom prst="rect">
+            <a:avLst/>
+          </a:prstGeom>
+          <a:noFill/>
+        </p:spPr>
+        <p:txBody>
+          <a:bodyPr wrap="square" lIns="0" tIns="0" rIns="0" bIns="0">
+            <a:spAutoFit/>
+          </a:bodyPr>
+          <a:lstStyle/>
+          <a:p>
+            <a:pPr marL="177800" indent="0">
+              <a:spcAft>
+                <a:spcPts val="0"/>
+              </a:spcAft>
+              <a:buSzPct val="100000"/>
+              <a:buNone/>
+            </a:pPr>
+            <a:r>
+              <a:rPr lang="en-US" sz="1150" dirty="0">
+                <a:solidFill>
+                  <a:srgbClr val="000000"/>
+                </a:solidFill>
+                <a:latin typeface="Calibri" pitchFamily="34" charset="0"/>
+                <a:ea typeface="Calibri" pitchFamily="34" charset="-122"/>
+                <a:cs typeface="Calibri" pitchFamily="34" charset="-120"/>
+              </a:rPr>
+              <a:t xml:space="preserve">the off device's grip on its gate</a:t>
+            </a:r>
+          </a:p>
+        </p:txBody>
+      </p:sp>
+      <p:sp>
+        <p:nvSpPr>
+          <p:cNvPr id="19" name="TextBox 18"/>
+          <p:cNvSpPr txBox="1"/>
+          <p:nvPr/>
+        </p:nvSpPr>
+        <p:spPr>
+          <a:xfrm>
+            <a:off x="777240" y="3300984"/>
+            <a:ext cx="1463040" cy="310896"/>
+          </a:xfrm>
+          <a:prstGeom prst="rect">
+            <a:avLst/>
+          </a:prstGeom>
+          <a:noFill/>
+        </p:spPr>
+        <p:txBody>
+          <a:bodyPr wrap="square" lIns="0" tIns="0" rIns="0" bIns="0">
+            <a:spAutoFit/>
+          </a:bodyPr>
+          <a:lstStyle/>
+          <a:p>
+            <a:pPr marL="177800" indent="0">
+              <a:spcAft>
+                <a:spcPts val="0"/>
+              </a:spcAft>
+              <a:buSzPct val="100000"/>
+              <a:buNone/>
+            </a:pPr>
+            <a:r>
+              <a:rPr lang="en-US" sz="1150" b="1" dirty="0">
+                <a:solidFill>
+                  <a:srgbClr val="000000"/>
+                </a:solidFill>
+                <a:latin typeface="Calibri" pitchFamily="34" charset="0"/>
+                <a:ea typeface="Calibri" pitchFamily="34" charset="-122"/>
+                <a:cs typeface="Calibri" pitchFamily="34" charset="-120"/>
+              </a:rPr>
+              <a:t xml:space="preserve">t_dead</a:t>
+            </a:r>
+          </a:p>
+        </p:txBody>
+      </p:sp>
+      <p:sp>
+        <p:nvSpPr>
+          <p:cNvPr id="20" name="TextBox 19"/>
+          <p:cNvSpPr txBox="1"/>
+          <p:nvPr/>
+        </p:nvSpPr>
+        <p:spPr>
+          <a:xfrm>
+            <a:off x="2286000" y="3300984"/>
+            <a:ext cx="2788920" cy="310896"/>
+          </a:xfrm>
+          <a:prstGeom prst="rect">
+            <a:avLst/>
+          </a:prstGeom>
+          <a:noFill/>
+        </p:spPr>
+        <p:txBody>
+          <a:bodyPr wrap="square" lIns="0" tIns="0" rIns="0" bIns="0">
+            <a:spAutoFit/>
+          </a:bodyPr>
+          <a:lstStyle/>
+          <a:p>
+            <a:pPr marL="177800" indent="0">
+              <a:spcAft>
+                <a:spcPts val="0"/>
+              </a:spcAft>
+              <a:buSzPct val="100000"/>
+              <a:buNone/>
+            </a:pPr>
+            <a:r>
+              <a:rPr lang="en-US" sz="1150" dirty="0">
+                <a:solidFill>
+                  <a:srgbClr val="000000"/>
+                </a:solidFill>
+                <a:latin typeface="Calibri" pitchFamily="34" charset="0"/>
+                <a:ea typeface="Calibri" pitchFamily="34" charset="-122"/>
+                <a:cs typeface="Calibri" pitchFamily="34" charset="-120"/>
+              </a:rPr>
+              <a:t xml:space="preserve">dead time</a:t>
+            </a:r>
+          </a:p>
+        </p:txBody>
+      </p:sp>
+      <p:sp>
+        <p:nvSpPr>
+          <p:cNvPr id="21" name="TextBox 20"/>
+          <p:cNvSpPr txBox="1"/>
+          <p:nvPr/>
+        </p:nvSpPr>
+        <p:spPr>
+          <a:xfrm>
+            <a:off x="5120640" y="3300984"/>
+            <a:ext cx="1874519" cy="310896"/>
+          </a:xfrm>
+          <a:prstGeom prst="rect">
+            <a:avLst/>
+          </a:prstGeom>
+          <a:noFill/>
+        </p:spPr>
+        <p:txBody>
+          <a:bodyPr wrap="square" lIns="0" tIns="0" rIns="0" bIns="0">
+            <a:spAutoFit/>
+          </a:bodyPr>
+          <a:lstStyle/>
+          <a:p>
+            <a:pPr marL="177800" indent="0">
+              <a:spcAft>
+                <a:spcPts val="0"/>
+              </a:spcAft>
+              <a:buSzPct val="100000"/>
+              <a:buNone/>
+            </a:pPr>
+            <a:r>
+              <a:rPr lang="en-US" sz="1150" b="1" dirty="0">
+                <a:solidFill>
+                  <a:srgbClr val="000000"/>
+                </a:solidFill>
+                <a:latin typeface="Calibri" pitchFamily="34" charset="0"/>
+                <a:ea typeface="Calibri" pitchFamily="34" charset="-122"/>
+                <a:cs typeface="Calibri" pitchFamily="34" charset="-120"/>
+              </a:rPr>
+              <a:t xml:space="preserve">5 / 10 / 15 / 25 ns</a:t>
+            </a:r>
+          </a:p>
+        </p:txBody>
+      </p:sp>
+      <p:sp>
+        <p:nvSpPr>
+          <p:cNvPr id="22" name="TextBox 21"/>
+          <p:cNvSpPr txBox="1"/>
+          <p:nvPr/>
+        </p:nvSpPr>
+        <p:spPr>
+          <a:xfrm>
+            <a:off x="7086600" y="3300984"/>
+            <a:ext cx="4434840" cy="310896"/>
+          </a:xfrm>
+          <a:prstGeom prst="rect">
+            <a:avLst/>
+          </a:prstGeom>
+          <a:noFill/>
+        </p:spPr>
+        <p:txBody>
+          <a:bodyPr wrap="square" lIns="0" tIns="0" rIns="0" bIns="0">
+            <a:spAutoFit/>
+          </a:bodyPr>
+          <a:lstStyle/>
+          <a:p>
+            <a:pPr marL="177800" indent="0">
+              <a:spcAft>
+                <a:spcPts val="0"/>
+              </a:spcAft>
+              <a:buSzPct val="100000"/>
+              <a:buNone/>
+            </a:pPr>
+            <a:r>
+              <a:rPr lang="en-US" sz="1150" dirty="0">
+                <a:solidFill>
+                  <a:srgbClr val="000000"/>
+                </a:solidFill>
+                <a:latin typeface="Calibri" pitchFamily="34" charset="0"/>
+                <a:ea typeface="Calibri" pitchFamily="34" charset="-122"/>
+                <a:cs typeface="Calibri" pitchFamily="34" charset="-120"/>
+              </a:rPr>
+              <a:t xml:space="preserve">gap before the other device turns on</a:t>
+            </a:r>
+          </a:p>
+        </p:txBody>
+      </p:sp>
+      <p:sp>
+        <p:nvSpPr>
+          <p:cNvPr id="23" name="TextBox 22"/>
+          <p:cNvSpPr txBox="1"/>
+          <p:nvPr/>
+        </p:nvSpPr>
+        <p:spPr>
+          <a:xfrm>
+            <a:off x="777240" y="3776472"/>
+            <a:ext cx="1463040" cy="310896"/>
+          </a:xfrm>
+          <a:prstGeom prst="rect">
+            <a:avLst/>
+          </a:prstGeom>
+          <a:noFill/>
+        </p:spPr>
+        <p:txBody>
+          <a:bodyPr wrap="square" lIns="0" tIns="0" rIns="0" bIns="0">
+            <a:spAutoFit/>
+          </a:bodyPr>
+          <a:lstStyle/>
+          <a:p>
+            <a:pPr marL="177800" indent="0">
+              <a:spcAft>
+                <a:spcPts val="0"/>
+              </a:spcAft>
+              <a:buSzPct val="100000"/>
+              <a:buNone/>
+            </a:pPr>
+            <a:r>
+              <a:rPr lang="en-US" sz="1150" b="1" dirty="0">
+                <a:solidFill>
+                  <a:srgbClr val="000000"/>
+                </a:solidFill>
+                <a:latin typeface="Calibri" pitchFamily="34" charset="0"/>
+                <a:ea typeface="Calibri" pitchFamily="34" charset="-122"/>
+                <a:cs typeface="Calibri" pitchFamily="34" charset="-120"/>
+              </a:rPr>
+              <a:t xml:space="preserve">CLK_EN</a:t>
+            </a:r>
+          </a:p>
+        </p:txBody>
+      </p:sp>
+      <p:sp>
+        <p:nvSpPr>
+          <p:cNvPr id="24" name="TextBox 23"/>
+          <p:cNvSpPr txBox="1"/>
+          <p:nvPr/>
+        </p:nvSpPr>
+        <p:spPr>
+          <a:xfrm>
+            <a:off x="2286000" y="3776472"/>
+            <a:ext cx="2788920" cy="310896"/>
+          </a:xfrm>
+          <a:prstGeom prst="rect">
+            <a:avLst/>
+          </a:prstGeom>
+          <a:noFill/>
+        </p:spPr>
+        <p:txBody>
+          <a:bodyPr wrap="square" lIns="0" tIns="0" rIns="0" bIns="0">
+            <a:spAutoFit/>
+          </a:bodyPr>
+          <a:lstStyle/>
+          <a:p>
+            <a:pPr marL="177800" indent="0">
+              <a:spcAft>
+                <a:spcPts val="0"/>
+              </a:spcAft>
+              <a:buSzPct val="100000"/>
+              <a:buNone/>
+            </a:pPr>
+            <a:r>
+              <a:rPr lang="en-US" sz="1150" dirty="0">
+                <a:solidFill>
+                  <a:srgbClr val="000000"/>
+                </a:solidFill>
+                <a:latin typeface="Calibri" pitchFamily="34" charset="0"/>
+                <a:ea typeface="Calibri" pitchFamily="34" charset="-122"/>
+                <a:cs typeface="Calibri" pitchFamily="34" charset="-120"/>
+              </a:rPr>
+              <a:t xml:space="preserve">active Miller clamp</a:t>
+            </a:r>
+          </a:p>
+        </p:txBody>
+      </p:sp>
+      <p:sp>
+        <p:nvSpPr>
+          <p:cNvPr id="25" name="TextBox 24"/>
+          <p:cNvSpPr txBox="1"/>
+          <p:nvPr/>
+        </p:nvSpPr>
+        <p:spPr>
+          <a:xfrm>
+            <a:off x="5120640" y="3776472"/>
+            <a:ext cx="1874519" cy="310896"/>
+          </a:xfrm>
+          <a:prstGeom prst="rect">
+            <a:avLst/>
+          </a:prstGeom>
+          <a:noFill/>
+        </p:spPr>
+        <p:txBody>
+          <a:bodyPr wrap="square" lIns="0" tIns="0" rIns="0" bIns="0">
+            <a:spAutoFit/>
+          </a:bodyPr>
+          <a:lstStyle/>
+          <a:p>
+            <a:pPr marL="177800" indent="0">
+              <a:spcAft>
+                <a:spcPts val="0"/>
+              </a:spcAft>
+              <a:buSzPct val="100000"/>
+              <a:buNone/>
+            </a:pPr>
+            <a:r>
+              <a:rPr lang="en-US" sz="1150" b="1" dirty="0">
+                <a:solidFill>
+                  <a:srgbClr val="000000"/>
+                </a:solidFill>
+                <a:latin typeface="Calibri" pitchFamily="34" charset="0"/>
+                <a:ea typeface="Calibri" pitchFamily="34" charset="-122"/>
+                <a:cs typeface="Calibri" pitchFamily="34" charset="-120"/>
+              </a:rPr>
+              <a:t xml:space="preserve">off / on</a:t>
+            </a:r>
+          </a:p>
+        </p:txBody>
+      </p:sp>
+      <p:sp>
+        <p:nvSpPr>
+          <p:cNvPr id="26" name="TextBox 25"/>
+          <p:cNvSpPr txBox="1"/>
+          <p:nvPr/>
+        </p:nvSpPr>
+        <p:spPr>
+          <a:xfrm>
+            <a:off x="7086600" y="3776472"/>
+            <a:ext cx="4434840" cy="310896"/>
+          </a:xfrm>
+          <a:prstGeom prst="rect">
+            <a:avLst/>
+          </a:prstGeom>
+          <a:noFill/>
+        </p:spPr>
+        <p:txBody>
+          <a:bodyPr wrap="square" lIns="0" tIns="0" rIns="0" bIns="0">
+            <a:spAutoFit/>
+          </a:bodyPr>
+          <a:lstStyle/>
+          <a:p>
+            <a:pPr marL="177800" indent="0">
+              <a:spcAft>
+                <a:spcPts val="0"/>
+              </a:spcAft>
+              <a:buSzPct val="100000"/>
+              <a:buNone/>
+            </a:pPr>
+            <a:r>
+              <a:rPr lang="en-US" sz="1150" dirty="0">
+                <a:solidFill>
+                  <a:srgbClr val="000000"/>
+                </a:solidFill>
+                <a:latin typeface="Calibri" pitchFamily="34" charset="0"/>
+                <a:ea typeface="Calibri" pitchFamily="34" charset="-122"/>
+                <a:cs typeface="Calibri" pitchFamily="34" charset="-120"/>
+              </a:rPr>
+              <a:t xml:space="preserve">shorts the gate during the other edge</a:t>
+            </a:r>
+          </a:p>
+        </p:txBody>
+      </p:sp>
+      <p:sp>
+        <p:nvSpPr>
+          <p:cNvPr id="27" name="TextBox 26"/>
+          <p:cNvSpPr txBox="1"/>
+          <p:nvPr/>
+        </p:nvSpPr>
+        <p:spPr>
+          <a:xfrm>
+            <a:off x="777240" y="4251960"/>
+            <a:ext cx="1463040" cy="310896"/>
+          </a:xfrm>
+          <a:prstGeom prst="rect">
+            <a:avLst/>
+          </a:prstGeom>
+          <a:noFill/>
+        </p:spPr>
+        <p:txBody>
+          <a:bodyPr wrap="square" lIns="0" tIns="0" rIns="0" bIns="0">
+            <a:spAutoFit/>
+          </a:bodyPr>
+          <a:lstStyle/>
+          <a:p>
+            <a:pPr marL="177800" indent="0">
+              <a:spcAft>
+                <a:spcPts val="0"/>
+              </a:spcAft>
+              <a:buSzPct val="100000"/>
+              <a:buNone/>
+            </a:pPr>
+            <a:r>
+              <a:rPr lang="en-US" sz="1150" b="1" dirty="0">
+                <a:solidFill>
+                  <a:srgbClr val="000000"/>
+                </a:solidFill>
+                <a:latin typeface="Calibri" pitchFamily="34" charset="0"/>
+                <a:ea typeface="Calibri" pitchFamily="34" charset="-122"/>
+                <a:cs typeface="Calibri" pitchFamily="34" charset="-120"/>
+              </a:rPr>
+              <a:t xml:space="preserve">V_neg</a:t>
+            </a:r>
+          </a:p>
+        </p:txBody>
+      </p:sp>
+      <p:sp>
+        <p:nvSpPr>
+          <p:cNvPr id="28" name="TextBox 27"/>
+          <p:cNvSpPr txBox="1"/>
+          <p:nvPr/>
+        </p:nvSpPr>
+        <p:spPr>
+          <a:xfrm>
+            <a:off x="2286000" y="4251960"/>
+            <a:ext cx="2788920" cy="310896"/>
+          </a:xfrm>
+          <a:prstGeom prst="rect">
+            <a:avLst/>
+          </a:prstGeom>
+          <a:noFill/>
+        </p:spPr>
+        <p:txBody>
+          <a:bodyPr wrap="square" lIns="0" tIns="0" rIns="0" bIns="0">
+            <a:spAutoFit/>
+          </a:bodyPr>
+          <a:lstStyle/>
+          <a:p>
+            <a:pPr marL="177800" indent="0">
+              <a:spcAft>
+                <a:spcPts val="0"/>
+              </a:spcAft>
+              <a:buSzPct val="100000"/>
+              <a:buNone/>
+            </a:pPr>
+            <a:r>
+              <a:rPr lang="en-US" sz="1150" dirty="0">
+                <a:solidFill>
+                  <a:srgbClr val="000000"/>
+                </a:solidFill>
+                <a:latin typeface="Calibri" pitchFamily="34" charset="0"/>
+                <a:ea typeface="Calibri" pitchFamily="34" charset="-122"/>
+                <a:cs typeface="Calibri" pitchFamily="34" charset="-120"/>
+              </a:rPr>
+              <a:t xml:space="preserve">gate off-bias</a:t>
+            </a:r>
+          </a:p>
+        </p:txBody>
+      </p:sp>
+      <p:sp>
+        <p:nvSpPr>
+          <p:cNvPr id="29" name="TextBox 28"/>
+          <p:cNvSpPr txBox="1"/>
+          <p:nvPr/>
+        </p:nvSpPr>
+        <p:spPr>
+          <a:xfrm>
+            <a:off x="5120640" y="4251960"/>
+            <a:ext cx="1874519" cy="310896"/>
+          </a:xfrm>
+          <a:prstGeom prst="rect">
+            <a:avLst/>
+          </a:prstGeom>
+          <a:noFill/>
+        </p:spPr>
+        <p:txBody>
+          <a:bodyPr wrap="square" lIns="0" tIns="0" rIns="0" bIns="0">
+            <a:spAutoFit/>
+          </a:bodyPr>
+          <a:lstStyle/>
+          <a:p>
+            <a:pPr marL="177800" indent="0">
+              <a:spcAft>
+                <a:spcPts val="0"/>
+              </a:spcAft>
+              <a:buSzPct val="100000"/>
+              <a:buNone/>
+            </a:pPr>
+            <a:r>
+              <a:rPr lang="en-US" sz="1150" b="1" dirty="0">
+                <a:solidFill>
+                  <a:srgbClr val="000000"/>
+                </a:solidFill>
+                <a:latin typeface="Calibri" pitchFamily="34" charset="0"/>
+                <a:ea typeface="Calibri" pitchFamily="34" charset="-122"/>
+                <a:cs typeface="Calibri" pitchFamily="34" charset="-120"/>
+              </a:rPr>
+              <a:t xml:space="preserve">0 V / −2 V</a:t>
+            </a:r>
+          </a:p>
+        </p:txBody>
+      </p:sp>
+      <p:sp>
+        <p:nvSpPr>
+          <p:cNvPr id="30" name="TextBox 29"/>
+          <p:cNvSpPr txBox="1"/>
+          <p:nvPr/>
+        </p:nvSpPr>
+        <p:spPr>
+          <a:xfrm>
+            <a:off x="7086600" y="4251960"/>
+            <a:ext cx="4434840" cy="310896"/>
+          </a:xfrm>
+          <a:prstGeom prst="rect">
+            <a:avLst/>
+          </a:prstGeom>
+          <a:noFill/>
+        </p:spPr>
+        <p:txBody>
+          <a:bodyPr wrap="square" lIns="0" tIns="0" rIns="0" bIns="0">
+            <a:spAutoFit/>
+          </a:bodyPr>
+          <a:lstStyle/>
+          <a:p>
+            <a:pPr marL="177800" indent="0">
+              <a:spcAft>
+                <a:spcPts val="0"/>
+              </a:spcAft>
+              <a:buSzPct val="100000"/>
+              <a:buNone/>
+            </a:pPr>
+            <a:r>
+              <a:rPr lang="en-US" sz="1150" dirty="0">
+                <a:solidFill>
+                  <a:srgbClr val="000000"/>
+                </a:solidFill>
+                <a:latin typeface="Calibri" pitchFamily="34" charset="0"/>
+                <a:ea typeface="Calibri" pitchFamily="34" charset="-122"/>
+                <a:cs typeface="Calibri" pitchFamily="34" charset="-120"/>
+              </a:rPr>
+              <a:t xml:space="preserve">how far below threshold the gate is held</a:t>
+            </a:r>
+          </a:p>
+        </p:txBody>
+      </p:sp>
+      <p:sp>
+        <p:nvSpPr>
+          <p:cNvPr id="31" name="TextBox 30"/>
+          <p:cNvSpPr txBox="1"/>
+          <p:nvPr/>
+        </p:nvSpPr>
+        <p:spPr>
+          <a:xfrm>
+            <a:off x="640080" y="4828032"/>
+            <a:ext cx="10972800" cy="1188720"/>
+          </a:xfrm>
+          <a:prstGeom prst="rect">
+            <a:avLst/>
+          </a:prstGeom>
+          <a:noFill/>
+        </p:spPr>
+        <p:txBody>
+          <a:bodyPr wrap="square" lIns="0" tIns="0" rIns="0" bIns="0">
+            <a:spAutoFit/>
+          </a:bodyPr>
+          <a:lstStyle/>
+          <a:p>
+            <a:pPr marL="177800" indent="0">
+              <a:spcAft>
+                <a:spcPts val="140"/>
+              </a:spcAft>
+              <a:buSzPct val="100000"/>
+              <a:buNone/>
+            </a:pPr>
+            <a:r>
+              <a:rPr lang="en-US" sz="1300" dirty="0">
+                <a:solidFill>
+                  <a:srgbClr val="000000"/>
+                </a:solidFill>
+                <a:latin typeface="Calibri" pitchFamily="34" charset="0"/>
+                <a:ea typeface="Calibri" pitchFamily="34" charset="-122"/>
+                <a:cs typeface="Calibri" pitchFamily="34" charset="-120"/>
+              </a:rPr>
+              <a:t xml:space="preserve">8 × 8 × 3 × 4 × 2 × 2  =  </a:t>
+            </a:r>
+            <a:r>
+              <a:rPr lang="en-US" sz="1300" b="1" dirty="0">
+                <a:solidFill>
+                  <a:srgbClr val="000000"/>
+                </a:solidFill>
+                <a:latin typeface="Calibri" pitchFamily="34" charset="0"/>
+                <a:ea typeface="Calibri" pitchFamily="34" charset="-122"/>
+                <a:cs typeface="Calibri" pitchFamily="34" charset="-120"/>
+              </a:rPr>
+              <a:t xml:space="preserve">720 control words</a:t>
+            </a:r>
+            <a:r>
+              <a:rPr lang="en-US" sz="1300" dirty="0">
+                <a:solidFill>
+                  <a:srgbClr val="000000"/>
+                </a:solidFill>
+                <a:latin typeface="Calibri" pitchFamily="34" charset="0"/>
+                <a:ea typeface="Calibri" pitchFamily="34" charset="-122"/>
+                <a:cs typeface="Calibri" pitchFamily="34" charset="-120"/>
+              </a:rPr>
+              <a:t xml:space="preserve">.  We simulate every one of them, at every corner — that is what makes this an exhaustive search rather than a shortlist.</a:t>
+            </a:r>
+          </a:p>
+          <a:p>
+            <a:pPr marL="177800" indent="0">
+              <a:spcAft>
+                <a:spcPts val="0"/>
+              </a:spcAft>
+              <a:buSzPct val="100000"/>
+              <a:buNone/>
+            </a:pPr>
+            <a:r>
+              <a:rPr lang="en-US" sz="1300" b="1" dirty="0">
+                <a:solidFill>
+                  <a:srgbClr val="000000"/>
+                </a:solidFill>
+                <a:latin typeface="Calibri" pitchFamily="34" charset="0"/>
+                <a:ea typeface="Calibri" pitchFamily="34" charset="-122"/>
+                <a:cs typeface="Calibri" pitchFamily="34" charset="-120"/>
+              </a:rPr>
+              <a:t xml:space="preserve">A FIXED word</a:t>
+            </a:r>
+            <a:r>
+              <a:rPr lang="en-US" sz="1300" dirty="0">
+                <a:solidFill>
+                  <a:srgbClr val="000000"/>
+                </a:solidFill>
+                <a:latin typeface="Calibri" pitchFamily="34" charset="0"/>
+                <a:ea typeface="Calibri" pitchFamily="34" charset="-122"/>
+                <a:cs typeface="Calibri" pitchFamily="34" charset="-120"/>
+              </a:rPr>
+              <a:t xml:space="preserve"> is one word chosen once and strapped at power-up — no sensing. </a:t>
+            </a:r>
+            <a:r>
+              <a:rPr lang="en-US" sz="1300" b="1" dirty="0">
+                <a:solidFill>
+                  <a:srgbClr val="000000"/>
+                </a:solidFill>
+                <a:latin typeface="Calibri" pitchFamily="34" charset="0"/>
+                <a:ea typeface="Calibri" pitchFamily="34" charset="-122"/>
+                <a:cs typeface="Calibri" pitchFamily="34" charset="-120"/>
+              </a:rPr>
+              <a:t xml:space="preserve">SCHEDULING</a:t>
+            </a:r>
+            <a:r>
+              <a:rPr lang="en-US" sz="1300" dirty="0">
+                <a:solidFill>
+                  <a:srgbClr val="000000"/>
+                </a:solidFill>
+                <a:latin typeface="Calibri" pitchFamily="34" charset="0"/>
+                <a:ea typeface="Calibri" pitchFamily="34" charset="-122"/>
+                <a:cs typeface="Calibri" pitchFamily="34" charset="-120"/>
+              </a:rPr>
+              <a:t xml:space="preserve"> means sensing the operating point and switching to a different word for it, which is what needs an ADC and a lookup table. The whole project measures the gap between those two.</a:t>
+            </a:r>
+          </a:p>
+        </p:txBody>
+      </p:sp>
+    </p:spTree>
+  </p:cSld>
+  <p:clrMapOvr>
+    <a:masterClrMapping/>
+  </p:clrMapOvr>
+</p:sld>
+</file>
+
+<file path=ppt/slides/slide23.xml><?xml version="1.0" encoding="utf-8"?>
+<p:sld xmlns:a="http://schemas.openxmlformats.org/drawingml/2006/main" xmlns:p="http://schemas.openxmlformats.org/presentationml/2006/main" xmlns:r="http://schemas.openxmlformats.org/officeDocument/2006/relationships">
+  <p:cSld>
+    <p:spTree>
+      <p:nvGrpSpPr>
+        <p:cNvPr id="1" name=""/>
+        <p:cNvGrpSpPr/>
+        <p:nvPr/>
+      </p:nvGrpSpPr>
+      <p:grpSpPr/>
+      <p:sp>
+        <p:nvSpPr>
+          <p:cNvPr id="2" name="Text 0"/>
+          <p:cNvSpPr txBox="1"/>
+          <p:nvPr/>
+        </p:nvSpPr>
+        <p:spPr>
+          <a:xfrm>
+            <a:off x="11460175" y="6446520"/>
+            <a:ext cx="457200" cy="274320"/>
+          </a:xfrm>
+          <a:prstGeom prst="rect">
+            <a:avLst/>
+          </a:prstGeom>
+          <a:noFill/>
+          <a:ln/>
+        </p:spPr>
+        <p:txBody>
+          <a:bodyPr wrap="square" lIns="0" tIns="0" rIns="0" bIns="0" rtlCol="0" anchor="ctr"/>
+          <a:lstStyle/>
+          <a:p>
+            <a:pPr marL="0" indent="0" algn="r">
+              <a:buNone/>
+            </a:pPr>
+            <a:r>
+              <a:rPr lang="en-US" sz="1000" dirty="0">
+                <a:solidFill>
+                  <a:srgbClr val="808080"/>
+                </a:solidFill>
+                <a:latin typeface="Calibri" pitchFamily="34" charset="0"/>
+                <a:ea typeface="Calibri" pitchFamily="34" charset="-122"/>
+                <a:cs typeface="Calibri" pitchFamily="34" charset="-120"/>
+              </a:rPr>
+              <a:t>11</a:t>
+            </a:r>
+            <a:endParaRPr lang="en-US" sz="1000" dirty="0"/>
+          </a:p>
+        </p:txBody>
+      </p:sp>
+      <p:sp>
+        <p:nvSpPr>
+          <p:cNvPr id="3" name="Text 1"/>
+          <p:cNvSpPr txBox="1"/>
+          <p:nvPr/>
+        </p:nvSpPr>
+        <p:spPr>
+          <a:xfrm>
+            <a:off x="548640" y="320040"/>
+            <a:ext cx="9601200" cy="685800"/>
+          </a:xfrm>
+          <a:prstGeom prst="rect">
+            <a:avLst/>
+          </a:prstGeom>
+          <a:noFill/>
+          <a:ln/>
+        </p:spPr>
+        <p:txBody>
+          <a:bodyPr wrap="square" lIns="0" tIns="0" rIns="0" bIns="0" rtlCol="0" anchor="ctr"/>
+          <a:lstStyle/>
+          <a:p>
+            <a:pPr marL="0" indent="0">
+              <a:buNone/>
+            </a:pPr>
+            <a:r>
+              <a:rPr lang="en-US" sz="2800" b="1" dirty="0">
+                <a:solidFill>
+                  <a:srgbClr val="1D2F82"/>
+                </a:solidFill>
+                <a:latin typeface="Calibri" pitchFamily="34" charset="0"/>
+                <a:ea typeface="Calibri" pitchFamily="34" charset="-122"/>
+                <a:cs typeface="Calibri" pitchFamily="34" charset="-120"/>
+              </a:rPr>
+              <a:t>Base paper vs this work — what we improve</a:t>
+            </a:r>
+            <a:endParaRPr lang="en-US" sz="2800" dirty="0"/>
+          </a:p>
+        </p:txBody>
+      </p:sp>
+      <p:pic>
+        <p:nvPicPr>
+          <p:cNvPr id="4" name="Image 0" descr="logo.png"/>
+          <p:cNvPicPr>
+            <a:picLocks noChangeAspect="1"/>
+          </p:cNvPicPr>
+          <p:nvPr/>
+        </p:nvPicPr>
+        <p:blipFill>
+          <a:blip r:embed="rId2"/>
+          <a:stretch>
+            <a:fillRect/>
+          </a:stretch>
+        </p:blipFill>
+        <p:spPr>
+          <a:xfrm>
+            <a:off x="10362895" y="320040"/>
+            <a:ext cx="1371600" cy="518746"/>
+          </a:xfrm>
+          <a:prstGeom prst="rect">
+            <a:avLst/>
+          </a:prstGeom>
+        </p:spPr>
+      </p:pic>
+      <p:sp>
+        <p:nvSpPr>
+          <p:cNvPr id="5" name="TextBox 4"/>
+          <p:cNvSpPr txBox="1"/>
+          <p:nvPr/>
+        </p:nvSpPr>
+        <p:spPr>
+          <a:xfrm>
+            <a:off x="640080" y="1115568"/>
+            <a:ext cx="10972800" cy="365760"/>
+          </a:xfrm>
+          <a:prstGeom prst="rect">
+            <a:avLst/>
+          </a:prstGeom>
+          <a:noFill/>
+        </p:spPr>
+        <p:txBody>
+          <a:bodyPr wrap="square" lIns="0" tIns="0" rIns="0" bIns="0">
+            <a:spAutoFit/>
+          </a:bodyPr>
+          <a:lstStyle/>
+          <a:p>
+            <a:pPr marL="177800" indent="0">
+              <a:spcAft>
+                <a:spcPts val="0"/>
+              </a:spcAft>
+              <a:buSzPct val="100000"/>
+              <a:buNone/>
+            </a:pPr>
+            <a:r>
+              <a:rPr lang="en-US" sz="1150" dirty="0">
+                <a:solidFill>
+                  <a:srgbClr val="000000"/>
+                </a:solidFill>
+                <a:latin typeface="Calibri" pitchFamily="34" charset="0"/>
+                <a:ea typeface="Calibri" pitchFamily="34" charset="-122"/>
+                <a:cs typeface="Calibri" pitchFamily="34" charset="-120"/>
+              </a:rPr>
+              <a:t xml:space="preserve">Base paper [9]: Takayama &amp; Hikihara, Int. J. Circuit Theory Appl., 50(1):183–196, 2022 — a gate waveform chosen by a multibit digital code.</a:t>
+            </a:r>
+          </a:p>
+        </p:txBody>
+      </p:sp>
+      <p:sp>
+        <p:nvSpPr>
+          <p:cNvPr id="6" name="TextBox 5"/>
+          <p:cNvSpPr txBox="1"/>
+          <p:nvPr/>
+        </p:nvSpPr>
+        <p:spPr>
+          <a:xfrm>
+            <a:off x="640080" y="1362456"/>
+            <a:ext cx="2377440" cy="274320"/>
+          </a:xfrm>
+          <a:prstGeom prst="rect">
+            <a:avLst/>
+          </a:prstGeom>
+          <a:noFill/>
+        </p:spPr>
+        <p:txBody>
+          <a:bodyPr wrap="square" lIns="0" tIns="0" rIns="0" bIns="0">
+            <a:spAutoFit/>
+          </a:bodyPr>
+          <a:lstStyle/>
+          <a:p>
+            <a:pPr marL="177800" indent="0">
+              <a:spcAft>
+                <a:spcPts val="0"/>
+              </a:spcAft>
+              <a:buSzPct val="100000"/>
+              <a:buNone/>
+            </a:pPr>
+            <a:r>
+              <a:rPr lang="en-US" sz="1150" b="1" dirty="0">
+                <a:solidFill>
+                  <a:srgbClr val="000000"/>
+                </a:solidFill>
+                <a:latin typeface="Calibri" pitchFamily="34" charset="0"/>
+                <a:ea typeface="Calibri" pitchFamily="34" charset="-122"/>
+                <a:cs typeface="Calibri" pitchFamily="34" charset="-120"/>
+              </a:rPr>
+              <a:t xml:space="preserve">Parameter</a:t>
+            </a:r>
+          </a:p>
+        </p:txBody>
+      </p:sp>
+      <p:sp>
+        <p:nvSpPr>
+          <p:cNvPr id="7" name="TextBox 6"/>
+          <p:cNvSpPr txBox="1"/>
+          <p:nvPr/>
+        </p:nvSpPr>
+        <p:spPr>
+          <a:xfrm>
+            <a:off x="3154680" y="1362456"/>
+            <a:ext cx="3154680" cy="274320"/>
+          </a:xfrm>
+          <a:prstGeom prst="rect">
+            <a:avLst/>
+          </a:prstGeom>
+          <a:noFill/>
+        </p:spPr>
+        <p:txBody>
+          <a:bodyPr wrap="square" lIns="0" tIns="0" rIns="0" bIns="0">
+            <a:spAutoFit/>
+          </a:bodyPr>
+          <a:lstStyle/>
+          <a:p>
+            <a:pPr marL="177800" indent="0">
+              <a:spcAft>
+                <a:spcPts val="0"/>
+              </a:spcAft>
+              <a:buSzPct val="100000"/>
+              <a:buNone/>
+            </a:pPr>
+            <a:r>
+              <a:rPr lang="en-US" sz="1150" b="1" dirty="0">
+                <a:solidFill>
+                  <a:srgbClr val="000000"/>
+                </a:solidFill>
+                <a:latin typeface="Calibri" pitchFamily="34" charset="0"/>
+                <a:ea typeface="Calibri" pitchFamily="34" charset="-122"/>
+                <a:cs typeface="Calibri" pitchFamily="34" charset="-120"/>
+              </a:rPr>
+              <a:t xml:space="preserve">Base paper [9]</a:t>
+            </a:r>
+          </a:p>
+        </p:txBody>
+      </p:sp>
+      <p:sp>
+        <p:nvSpPr>
+          <p:cNvPr id="8" name="TextBox 7"/>
+          <p:cNvSpPr txBox="1"/>
+          <p:nvPr/>
+        </p:nvSpPr>
+        <p:spPr>
+          <a:xfrm>
+            <a:off x="6446520" y="1362456"/>
+            <a:ext cx="5074920" cy="274320"/>
+          </a:xfrm>
+          <a:prstGeom prst="rect">
+            <a:avLst/>
+          </a:prstGeom>
+          <a:noFill/>
+        </p:spPr>
+        <p:txBody>
+          <a:bodyPr wrap="square" lIns="0" tIns="0" rIns="0" bIns="0">
+            <a:spAutoFit/>
+          </a:bodyPr>
+          <a:lstStyle/>
+          <a:p>
+            <a:pPr marL="177800" indent="0">
+              <a:spcAft>
+                <a:spcPts val="0"/>
+              </a:spcAft>
+              <a:buSzPct val="100000"/>
+              <a:buNone/>
+            </a:pPr>
+            <a:r>
+              <a:rPr lang="en-US" sz="1150" b="1" dirty="0">
+                <a:solidFill>
+                  <a:srgbClr val="000000"/>
+                </a:solidFill>
+                <a:latin typeface="Calibri" pitchFamily="34" charset="0"/>
+                <a:ea typeface="Calibri" pitchFamily="34" charset="-122"/>
+                <a:cs typeface="Calibri" pitchFamily="34" charset="-120"/>
+              </a:rPr>
+              <a:t xml:space="preserve">This work</a:t>
+            </a:r>
+          </a:p>
+        </p:txBody>
+      </p:sp>
+      <p:sp>
+        <p:nvSpPr>
+          <p:cNvPr id="9" name="TextBox 8"/>
+          <p:cNvSpPr txBox="1"/>
+          <p:nvPr/>
+        </p:nvSpPr>
+        <p:spPr>
+          <a:xfrm>
+            <a:off x="640080" y="1783080"/>
+            <a:ext cx="2423160" cy="457200"/>
+          </a:xfrm>
+          <a:prstGeom prst="rect">
+            <a:avLst/>
+          </a:prstGeom>
+          <a:noFill/>
+        </p:spPr>
+        <p:txBody>
+          <a:bodyPr wrap="square" lIns="0" tIns="0" rIns="0" bIns="0">
+            <a:spAutoFit/>
+          </a:bodyPr>
+          <a:lstStyle/>
+          <a:p>
+            <a:pPr marL="177800" indent="0">
+              <a:spcAft>
+                <a:spcPts val="0"/>
+              </a:spcAft>
+              <a:buSzPct val="100000"/>
+              <a:buNone/>
+            </a:pPr>
+            <a:r>
+              <a:rPr lang="en-US" sz="1050" b="1" dirty="0">
+                <a:solidFill>
+                  <a:srgbClr val="000000"/>
+                </a:solidFill>
+                <a:latin typeface="Calibri" pitchFamily="34" charset="0"/>
+                <a:ea typeface="Calibri" pitchFamily="34" charset="-122"/>
+                <a:cs typeface="Calibri" pitchFamily="34" charset="-120"/>
+              </a:rPr>
+              <a:t xml:space="preserve">Device</a:t>
+            </a:r>
+          </a:p>
+        </p:txBody>
+      </p:sp>
+      <p:sp>
+        <p:nvSpPr>
+          <p:cNvPr id="10" name="TextBox 9"/>
+          <p:cNvSpPr txBox="1"/>
+          <p:nvPr/>
+        </p:nvSpPr>
+        <p:spPr>
+          <a:xfrm>
+            <a:off x="3154680" y="1783080"/>
+            <a:ext cx="3200400" cy="457200"/>
+          </a:xfrm>
+          <a:prstGeom prst="rect">
+            <a:avLst/>
+          </a:prstGeom>
+          <a:noFill/>
+        </p:spPr>
+        <p:txBody>
+          <a:bodyPr wrap="square" lIns="0" tIns="0" rIns="0" bIns="0">
+            <a:spAutoFit/>
+          </a:bodyPr>
+          <a:lstStyle/>
+          <a:p>
+            <a:pPr marL="177800" indent="0">
+              <a:spcAft>
+                <a:spcPts val="0"/>
+              </a:spcAft>
+              <a:buSzPct val="100000"/>
+              <a:buNone/>
+            </a:pPr>
+            <a:r>
+              <a:rPr lang="en-US" sz="1050" dirty="0">
+                <a:solidFill>
+                  <a:srgbClr val="000000"/>
+                </a:solidFill>
+                <a:latin typeface="Calibri" pitchFamily="34" charset="0"/>
+                <a:ea typeface="Calibri" pitchFamily="34" charset="-122"/>
+                <a:cs typeface="Calibri" pitchFamily="34" charset="-120"/>
+              </a:rPr>
+              <a:t xml:space="preserve">SiC MOSFET</a:t>
+            </a:r>
+          </a:p>
+        </p:txBody>
+      </p:sp>
+      <p:sp>
+        <p:nvSpPr>
+          <p:cNvPr id="11" name="TextBox 10"/>
+          <p:cNvSpPr txBox="1"/>
+          <p:nvPr/>
+        </p:nvSpPr>
+        <p:spPr>
+          <a:xfrm>
+            <a:off x="6446520" y="1783080"/>
+            <a:ext cx="5120640" cy="457200"/>
+          </a:xfrm>
+          <a:prstGeom prst="rect">
+            <a:avLst/>
+          </a:prstGeom>
+          <a:noFill/>
+        </p:spPr>
+        <p:txBody>
+          <a:bodyPr wrap="square" lIns="0" tIns="0" rIns="0" bIns="0">
+            <a:spAutoFit/>
+          </a:bodyPr>
+          <a:lstStyle/>
+          <a:p>
+            <a:pPr marL="177800" indent="0">
+              <a:spcAft>
+                <a:spcPts val="0"/>
+              </a:spcAft>
+              <a:buSzPct val="100000"/>
+              <a:buNone/>
+            </a:pPr>
+            <a:r>
+              <a:rPr lang="en-US" sz="1050" dirty="0">
+                <a:solidFill>
+                  <a:srgbClr val="000000"/>
+                </a:solidFill>
+                <a:latin typeface="Calibri" pitchFamily="34" charset="0"/>
+                <a:ea typeface="Calibri" pitchFamily="34" charset="-122"/>
+                <a:cs typeface="Calibri" pitchFamily="34" charset="-120"/>
+              </a:rPr>
+              <a:t xml:space="preserve">GaN HEMT (e-mode)  —  no body diode, so off-bias costs third-quadrant drop</a:t>
+            </a:r>
+          </a:p>
+        </p:txBody>
+      </p:sp>
+      <p:sp>
+        <p:nvSpPr>
+          <p:cNvPr id="12" name="TextBox 11"/>
+          <p:cNvSpPr txBox="1"/>
+          <p:nvPr/>
+        </p:nvSpPr>
+        <p:spPr>
+          <a:xfrm>
+            <a:off x="640080" y="2331720"/>
+            <a:ext cx="2423160" cy="457200"/>
+          </a:xfrm>
+          <a:prstGeom prst="rect">
+            <a:avLst/>
+          </a:prstGeom>
+          <a:noFill/>
+        </p:spPr>
+        <p:txBody>
+          <a:bodyPr wrap="square" lIns="0" tIns="0" rIns="0" bIns="0">
+            <a:spAutoFit/>
+          </a:bodyPr>
+          <a:lstStyle/>
+          <a:p>
+            <a:pPr marL="177800" indent="0">
+              <a:spcAft>
+                <a:spcPts val="0"/>
+              </a:spcAft>
+              <a:buSzPct val="100000"/>
+              <a:buNone/>
+            </a:pPr>
+            <a:r>
+              <a:rPr lang="en-US" sz="1050" b="1" dirty="0">
+                <a:solidFill>
+                  <a:srgbClr val="000000"/>
+                </a:solidFill>
+                <a:latin typeface="Calibri" pitchFamily="34" charset="0"/>
+                <a:ea typeface="Calibri" pitchFamily="34" charset="-122"/>
+                <a:cs typeface="Calibri" pitchFamily="34" charset="-120"/>
+              </a:rPr>
+              <a:t xml:space="preserve">Control handle</a:t>
+            </a:r>
+          </a:p>
+        </p:txBody>
+      </p:sp>
+      <p:sp>
+        <p:nvSpPr>
+          <p:cNvPr id="13" name="TextBox 12"/>
+          <p:cNvSpPr txBox="1"/>
+          <p:nvPr/>
+        </p:nvSpPr>
+        <p:spPr>
+          <a:xfrm>
+            <a:off x="3154680" y="2331720"/>
+            <a:ext cx="3200400" cy="457200"/>
+          </a:xfrm>
+          <a:prstGeom prst="rect">
+            <a:avLst/>
+          </a:prstGeom>
+          <a:noFill/>
+        </p:spPr>
+        <p:txBody>
+          <a:bodyPr wrap="square" lIns="0" tIns="0" rIns="0" bIns="0">
+            <a:spAutoFit/>
+          </a:bodyPr>
+          <a:lstStyle/>
+          <a:p>
+            <a:pPr marL="177800" indent="0">
+              <a:spcAft>
+                <a:spcPts val="0"/>
+              </a:spcAft>
+              <a:buSzPct val="100000"/>
+              <a:buNone/>
+            </a:pPr>
+            <a:r>
+              <a:rPr lang="en-US" sz="1050" dirty="0">
+                <a:solidFill>
+                  <a:srgbClr val="000000"/>
+                </a:solidFill>
+                <a:latin typeface="Calibri" pitchFamily="34" charset="0"/>
+                <a:ea typeface="Calibri" pitchFamily="34" charset="-122"/>
+                <a:cs typeface="Calibri" pitchFamily="34" charset="-120"/>
+              </a:rPr>
+              <a:t xml:space="preserve">multibit gate code, one field</a:t>
+            </a:r>
+          </a:p>
+        </p:txBody>
+      </p:sp>
+      <p:sp>
+        <p:nvSpPr>
+          <p:cNvPr id="14" name="TextBox 13"/>
+          <p:cNvSpPr txBox="1"/>
+          <p:nvPr/>
+        </p:nvSpPr>
+        <p:spPr>
+          <a:xfrm>
+            <a:off x="6446520" y="2331720"/>
+            <a:ext cx="5120640" cy="457200"/>
+          </a:xfrm>
+          <a:prstGeom prst="rect">
+            <a:avLst/>
+          </a:prstGeom>
+          <a:noFill/>
+        </p:spPr>
+        <p:txBody>
+          <a:bodyPr wrap="square" lIns="0" tIns="0" rIns="0" bIns="0">
+            <a:spAutoFit/>
+          </a:bodyPr>
+          <a:lstStyle/>
+          <a:p>
+            <a:pPr marL="177800" indent="0">
+              <a:spcAft>
+                <a:spcPts val="0"/>
+              </a:spcAft>
+              <a:buSzPct val="100000"/>
+              <a:buNone/>
+            </a:pPr>
+            <a:r>
+              <a:rPr lang="en-US" sz="1050" dirty="0">
+                <a:solidFill>
+                  <a:srgbClr val="000000"/>
+                </a:solidFill>
+                <a:latin typeface="Calibri" pitchFamily="34" charset="0"/>
+                <a:ea typeface="Calibri" pitchFamily="34" charset="-122"/>
+                <a:cs typeface="Calibri" pitchFamily="34" charset="-120"/>
+              </a:rPr>
+              <a:t xml:space="preserve">6-field, 720-point control word  —  strength, dead time, clamp, off-bias</a:t>
+            </a:r>
+          </a:p>
+        </p:txBody>
+      </p:sp>
+      <p:sp>
+        <p:nvSpPr>
+          <p:cNvPr id="15" name="TextBox 14"/>
+          <p:cNvSpPr txBox="1"/>
+          <p:nvPr/>
+        </p:nvSpPr>
+        <p:spPr>
+          <a:xfrm>
+            <a:off x="640080" y="2880360"/>
+            <a:ext cx="2423160" cy="457200"/>
+          </a:xfrm>
+          <a:prstGeom prst="rect">
+            <a:avLst/>
+          </a:prstGeom>
+          <a:noFill/>
+        </p:spPr>
+        <p:txBody>
+          <a:bodyPr wrap="square" lIns="0" tIns="0" rIns="0" bIns="0">
+            <a:spAutoFit/>
+          </a:bodyPr>
+          <a:lstStyle/>
+          <a:p>
+            <a:pPr marL="177800" indent="0">
+              <a:spcAft>
+                <a:spcPts val="0"/>
+              </a:spcAft>
+              <a:buSzPct val="100000"/>
+              <a:buNone/>
+            </a:pPr>
+            <a:r>
+              <a:rPr lang="en-US" sz="1050" b="1" dirty="0">
+                <a:solidFill>
+                  <a:srgbClr val="000000"/>
+                </a:solidFill>
+                <a:latin typeface="Calibri" pitchFamily="34" charset="0"/>
+                <a:ea typeface="Calibri" pitchFamily="34" charset="-122"/>
+                <a:cs typeface="Calibri" pitchFamily="34" charset="-120"/>
+              </a:rPr>
+              <a:t xml:space="preserve">Implementation</a:t>
+            </a:r>
+          </a:p>
+        </p:txBody>
+      </p:sp>
+      <p:sp>
+        <p:nvSpPr>
+          <p:cNvPr id="16" name="TextBox 15"/>
+          <p:cNvSpPr txBox="1"/>
+          <p:nvPr/>
+        </p:nvSpPr>
+        <p:spPr>
+          <a:xfrm>
+            <a:off x="3154680" y="2880360"/>
+            <a:ext cx="3200400" cy="457200"/>
+          </a:xfrm>
+          <a:prstGeom prst="rect">
+            <a:avLst/>
+          </a:prstGeom>
+          <a:noFill/>
+        </p:spPr>
+        <p:txBody>
+          <a:bodyPr wrap="square" lIns="0" tIns="0" rIns="0" bIns="0">
+            <a:spAutoFit/>
+          </a:bodyPr>
+          <a:lstStyle/>
+          <a:p>
+            <a:pPr marL="177800" indent="0">
+              <a:spcAft>
+                <a:spcPts val="0"/>
+              </a:spcAft>
+              <a:buSzPct val="100000"/>
+              <a:buNone/>
+            </a:pPr>
+            <a:r>
+              <a:rPr lang="en-US" sz="1050" dirty="0">
+                <a:solidFill>
+                  <a:srgbClr val="000000"/>
+                </a:solidFill>
+                <a:latin typeface="Calibri" pitchFamily="34" charset="0"/>
+                <a:ea typeface="Calibri" pitchFamily="34" charset="-122"/>
+                <a:cs typeface="Calibri" pitchFamily="34" charset="-120"/>
+              </a:rPr>
+              <a:t xml:space="preserve">digital driver</a:t>
+            </a:r>
+          </a:p>
+        </p:txBody>
+      </p:sp>
+      <p:sp>
+        <p:nvSpPr>
+          <p:cNvPr id="17" name="TextBox 16"/>
+          <p:cNvSpPr txBox="1"/>
+          <p:nvPr/>
+        </p:nvSpPr>
+        <p:spPr>
+          <a:xfrm>
+            <a:off x="6446520" y="2880360"/>
+            <a:ext cx="5120640" cy="457200"/>
+          </a:xfrm>
+          <a:prstGeom prst="rect">
+            <a:avLst/>
+          </a:prstGeom>
+          <a:noFill/>
+        </p:spPr>
+        <p:txBody>
+          <a:bodyPr wrap="square" lIns="0" tIns="0" rIns="0" bIns="0">
+            <a:spAutoFit/>
+          </a:bodyPr>
+          <a:lstStyle/>
+          <a:p>
+            <a:pPr marL="177800" indent="0">
+              <a:spcAft>
+                <a:spcPts val="0"/>
+              </a:spcAft>
+              <a:buSzPct val="100000"/>
+              <a:buNone/>
+            </a:pPr>
+            <a:r>
+              <a:rPr lang="en-US" sz="1050" dirty="0">
+                <a:solidFill>
+                  <a:srgbClr val="000000"/>
+                </a:solidFill>
+                <a:latin typeface="Calibri" pitchFamily="34" charset="0"/>
+                <a:ea typeface="Calibri" pitchFamily="34" charset="-122"/>
+                <a:cs typeface="Calibri" pitchFamily="34" charset="-120"/>
+              </a:rPr>
+              <a:t xml:space="preserve">FPGA RTL in Verilog  ·  7 asserted properties, all passing</a:t>
+            </a:r>
+          </a:p>
+        </p:txBody>
+      </p:sp>
+      <p:sp>
+        <p:nvSpPr>
+          <p:cNvPr id="18" name="TextBox 17"/>
+          <p:cNvSpPr txBox="1"/>
+          <p:nvPr/>
+        </p:nvSpPr>
+        <p:spPr>
+          <a:xfrm>
+            <a:off x="640080" y="3429000"/>
+            <a:ext cx="2423160" cy="457200"/>
+          </a:xfrm>
+          <a:prstGeom prst="rect">
+            <a:avLst/>
+          </a:prstGeom>
+          <a:noFill/>
+        </p:spPr>
+        <p:txBody>
+          <a:bodyPr wrap="square" lIns="0" tIns="0" rIns="0" bIns="0">
+            <a:spAutoFit/>
+          </a:bodyPr>
+          <a:lstStyle/>
+          <a:p>
+            <a:pPr marL="177800" indent="0">
+              <a:spcAft>
+                <a:spcPts val="0"/>
+              </a:spcAft>
+              <a:buSzPct val="100000"/>
+              <a:buNone/>
+            </a:pPr>
+            <a:r>
+              <a:rPr lang="en-US" sz="1050" b="1" dirty="0">
+                <a:solidFill>
+                  <a:srgbClr val="000000"/>
+                </a:solidFill>
+                <a:latin typeface="Calibri" pitchFamily="34" charset="0"/>
+                <a:ea typeface="Calibri" pitchFamily="34" charset="-122"/>
+                <a:cs typeface="Calibri" pitchFamily="34" charset="-120"/>
+              </a:rPr>
+              <a:t xml:space="preserve">How codes chosen</a:t>
+            </a:r>
+          </a:p>
+        </p:txBody>
+      </p:sp>
+      <p:sp>
+        <p:nvSpPr>
+          <p:cNvPr id="19" name="TextBox 18"/>
+          <p:cNvSpPr txBox="1"/>
+          <p:nvPr/>
+        </p:nvSpPr>
+        <p:spPr>
+          <a:xfrm>
+            <a:off x="3154680" y="3429000"/>
+            <a:ext cx="3200400" cy="457200"/>
+          </a:xfrm>
+          <a:prstGeom prst="rect">
+            <a:avLst/>
+          </a:prstGeom>
+          <a:noFill/>
+        </p:spPr>
+        <p:txBody>
+          <a:bodyPr wrap="square" lIns="0" tIns="0" rIns="0" bIns="0">
+            <a:spAutoFit/>
+          </a:bodyPr>
+          <a:lstStyle/>
+          <a:p>
+            <a:pPr marL="177800" indent="0">
+              <a:spcAft>
+                <a:spcPts val="0"/>
+              </a:spcAft>
+              <a:buSzPct val="100000"/>
+              <a:buNone/>
+            </a:pPr>
+            <a:r>
+              <a:rPr lang="en-US" sz="1050" dirty="0">
+                <a:solidFill>
+                  <a:srgbClr val="000000"/>
+                </a:solidFill>
+                <a:latin typeface="Calibri" pitchFamily="34" charset="0"/>
+                <a:ea typeface="Calibri" pitchFamily="34" charset="-122"/>
+                <a:cs typeface="Calibri" pitchFamily="34" charset="-120"/>
+              </a:rPr>
+              <a:t xml:space="preserve">selected codes, measured</a:t>
+            </a:r>
+          </a:p>
+        </p:txBody>
+      </p:sp>
+      <p:sp>
+        <p:nvSpPr>
+          <p:cNvPr id="20" name="TextBox 19"/>
+          <p:cNvSpPr txBox="1"/>
+          <p:nvPr/>
+        </p:nvSpPr>
+        <p:spPr>
+          <a:xfrm>
+            <a:off x="6446520" y="3429000"/>
+            <a:ext cx="5120640" cy="457200"/>
+          </a:xfrm>
+          <a:prstGeom prst="rect">
+            <a:avLst/>
+          </a:prstGeom>
+          <a:noFill/>
+        </p:spPr>
+        <p:txBody>
+          <a:bodyPr wrap="square" lIns="0" tIns="0" rIns="0" bIns="0">
+            <a:spAutoFit/>
+          </a:bodyPr>
+          <a:lstStyle/>
+          <a:p>
+            <a:pPr marL="177800" indent="0">
+              <a:spcAft>
+                <a:spcPts val="0"/>
+              </a:spcAft>
+              <a:buSzPct val="100000"/>
+              <a:buNone/>
+            </a:pPr>
+            <a:r>
+              <a:rPr lang="en-US" sz="1050" dirty="0">
+                <a:solidFill>
+                  <a:srgbClr val="000000"/>
+                </a:solidFill>
+                <a:latin typeface="Calibri" pitchFamily="34" charset="0"/>
+                <a:ea typeface="Calibri" pitchFamily="34" charset="-122"/>
+                <a:cs typeface="Calibri" pitchFamily="34" charset="-120"/>
+              </a:rPr>
+              <a:t xml:space="preserve">EXHAUSTIVE  —  all 720 words at every corner, 34,622 transients</a:t>
+            </a:r>
+          </a:p>
+        </p:txBody>
+      </p:sp>
+      <p:sp>
+        <p:nvSpPr>
+          <p:cNvPr id="21" name="TextBox 20"/>
+          <p:cNvSpPr txBox="1"/>
+          <p:nvPr/>
+        </p:nvSpPr>
+        <p:spPr>
+          <a:xfrm>
+            <a:off x="640080" y="3977639"/>
+            <a:ext cx="2423160" cy="457200"/>
+          </a:xfrm>
+          <a:prstGeom prst="rect">
+            <a:avLst/>
+          </a:prstGeom>
+          <a:noFill/>
+        </p:spPr>
+        <p:txBody>
+          <a:bodyPr wrap="square" lIns="0" tIns="0" rIns="0" bIns="0">
+            <a:spAutoFit/>
+          </a:bodyPr>
+          <a:lstStyle/>
+          <a:p>
+            <a:pPr marL="177800" indent="0">
+              <a:spcAft>
+                <a:spcPts val="0"/>
+              </a:spcAft>
+              <a:buSzPct val="100000"/>
+              <a:buNone/>
+            </a:pPr>
+            <a:r>
+              <a:rPr lang="en-US" sz="1050" b="1" dirty="0">
+                <a:solidFill>
+                  <a:srgbClr val="000000"/>
+                </a:solidFill>
+                <a:latin typeface="Calibri" pitchFamily="34" charset="0"/>
+                <a:ea typeface="Calibri" pitchFamily="34" charset="-122"/>
+                <a:cs typeface="Calibri" pitchFamily="34" charset="-120"/>
+              </a:rPr>
+              <a:t xml:space="preserve">Crosstalk</a:t>
+            </a:r>
+          </a:p>
+        </p:txBody>
+      </p:sp>
+      <p:sp>
+        <p:nvSpPr>
+          <p:cNvPr id="22" name="TextBox 21"/>
+          <p:cNvSpPr txBox="1"/>
+          <p:nvPr/>
+        </p:nvSpPr>
+        <p:spPr>
+          <a:xfrm>
+            <a:off x="3154680" y="3977639"/>
+            <a:ext cx="3200400" cy="457200"/>
+          </a:xfrm>
+          <a:prstGeom prst="rect">
+            <a:avLst/>
+          </a:prstGeom>
+          <a:noFill/>
+        </p:spPr>
+        <p:txBody>
+          <a:bodyPr wrap="square" lIns="0" tIns="0" rIns="0" bIns="0">
+            <a:spAutoFit/>
+          </a:bodyPr>
+          <a:lstStyle/>
+          <a:p>
+            <a:pPr marL="177800" indent="0">
+              <a:spcAft>
+                <a:spcPts val="0"/>
+              </a:spcAft>
+              <a:buSzPct val="100000"/>
+              <a:buNone/>
+            </a:pPr>
+            <a:r>
+              <a:rPr lang="en-US" sz="1050" dirty="0">
+                <a:solidFill>
+                  <a:srgbClr val="000000"/>
+                </a:solidFill>
+                <a:latin typeface="Calibri" pitchFamily="34" charset="0"/>
+                <a:ea typeface="Calibri" pitchFamily="34" charset="-122"/>
+                <a:cs typeface="Calibri" pitchFamily="34" charset="-120"/>
+              </a:rPr>
+              <a:t xml:space="preserve">not addressed</a:t>
+            </a:r>
+          </a:p>
+        </p:txBody>
+      </p:sp>
+      <p:sp>
+        <p:nvSpPr>
+          <p:cNvPr id="23" name="TextBox 22"/>
+          <p:cNvSpPr txBox="1"/>
+          <p:nvPr/>
+        </p:nvSpPr>
+        <p:spPr>
+          <a:xfrm>
+            <a:off x="6446520" y="3977639"/>
+            <a:ext cx="5120640" cy="457200"/>
+          </a:xfrm>
+          <a:prstGeom prst="rect">
+            <a:avLst/>
+          </a:prstGeom>
+          <a:noFill/>
+        </p:spPr>
+        <p:txBody>
+          <a:bodyPr wrap="square" lIns="0" tIns="0" rIns="0" bIns="0">
+            <a:spAutoFit/>
+          </a:bodyPr>
+          <a:lstStyle/>
+          <a:p>
+            <a:pPr marL="177800" indent="0">
+              <a:spcAft>
+                <a:spcPts val="0"/>
+              </a:spcAft>
+              <a:buSzPct val="100000"/>
+              <a:buNone/>
+            </a:pPr>
+            <a:r>
+              <a:rPr lang="en-US" sz="1050" dirty="0">
+                <a:solidFill>
+                  <a:srgbClr val="000000"/>
+                </a:solidFill>
+                <a:latin typeface="Calibri" pitchFamily="34" charset="0"/>
+                <a:ea typeface="Calibri" pitchFamily="34" charset="-122"/>
+                <a:cs typeface="Calibri" pitchFamily="34" charset="-120"/>
+              </a:rPr>
+              <a:t xml:space="preserve">1.65 V spurious gate  →  −1.18 V  (2.58 V margin), clamp + off-bias</a:t>
+            </a:r>
+          </a:p>
+        </p:txBody>
+      </p:sp>
+      <p:sp>
+        <p:nvSpPr>
+          <p:cNvPr id="24" name="TextBox 23"/>
+          <p:cNvSpPr txBox="1"/>
+          <p:nvPr/>
+        </p:nvSpPr>
+        <p:spPr>
+          <a:xfrm>
+            <a:off x="640080" y="4526280"/>
+            <a:ext cx="2423160" cy="457200"/>
+          </a:xfrm>
+          <a:prstGeom prst="rect">
+            <a:avLst/>
+          </a:prstGeom>
+          <a:noFill/>
+        </p:spPr>
+        <p:txBody>
+          <a:bodyPr wrap="square" lIns="0" tIns="0" rIns="0" bIns="0">
+            <a:spAutoFit/>
+          </a:bodyPr>
+          <a:lstStyle/>
+          <a:p>
+            <a:pPr marL="177800" indent="0">
+              <a:spcAft>
+                <a:spcPts val="0"/>
+              </a:spcAft>
+              <a:buSzPct val="100000"/>
+              <a:buNone/>
+            </a:pPr>
+            <a:r>
+              <a:rPr lang="en-US" sz="1050" b="1" dirty="0">
+                <a:solidFill>
+                  <a:srgbClr val="000000"/>
+                </a:solidFill>
+                <a:latin typeface="Calibri" pitchFamily="34" charset="0"/>
+                <a:ea typeface="Calibri" pitchFamily="34" charset="-122"/>
+                <a:cs typeface="Calibri" pitchFamily="34" charset="-120"/>
+              </a:rPr>
+              <a:t xml:space="preserve">What is reported</a:t>
+            </a:r>
+          </a:p>
+        </p:txBody>
+      </p:sp>
+      <p:sp>
+        <p:nvSpPr>
+          <p:cNvPr id="25" name="TextBox 24"/>
+          <p:cNvSpPr txBox="1"/>
+          <p:nvPr/>
+        </p:nvSpPr>
+        <p:spPr>
+          <a:xfrm>
+            <a:off x="3154680" y="4526280"/>
+            <a:ext cx="3200400" cy="457200"/>
+          </a:xfrm>
+          <a:prstGeom prst="rect">
+            <a:avLst/>
+          </a:prstGeom>
+          <a:noFill/>
+        </p:spPr>
+        <p:txBody>
+          <a:bodyPr wrap="square" lIns="0" tIns="0" rIns="0" bIns="0">
+            <a:spAutoFit/>
+          </a:bodyPr>
+          <a:lstStyle/>
+          <a:p>
+            <a:pPr marL="177800" indent="0">
+              <a:spcAft>
+                <a:spcPts val="0"/>
+              </a:spcAft>
+              <a:buSzPct val="100000"/>
+              <a:buNone/>
+            </a:pPr>
+            <a:r>
+              <a:rPr lang="en-US" sz="1050" dirty="0">
+                <a:solidFill>
+                  <a:srgbClr val="000000"/>
+                </a:solidFill>
+                <a:latin typeface="Calibri" pitchFamily="34" charset="0"/>
+                <a:ea typeface="Calibri" pitchFamily="34" charset="-122"/>
+                <a:cs typeface="Calibri" pitchFamily="34" charset="-120"/>
+              </a:rPr>
+              <a:t xml:space="preserve">one number vs a conventional driver</a:t>
+            </a:r>
+          </a:p>
+        </p:txBody>
+      </p:sp>
+      <p:sp>
+        <p:nvSpPr>
+          <p:cNvPr id="26" name="TextBox 25"/>
+          <p:cNvSpPr txBox="1"/>
+          <p:nvPr/>
+        </p:nvSpPr>
+        <p:spPr>
+          <a:xfrm>
+            <a:off x="6446520" y="4526280"/>
+            <a:ext cx="5120640" cy="457200"/>
+          </a:xfrm>
+          <a:prstGeom prst="rect">
+            <a:avLst/>
+          </a:prstGeom>
+          <a:noFill/>
+        </p:spPr>
+        <p:txBody>
+          <a:bodyPr wrap="square" lIns="0" tIns="0" rIns="0" bIns="0">
+            <a:spAutoFit/>
+          </a:bodyPr>
+          <a:lstStyle/>
+          <a:p>
+            <a:pPr marL="177800" indent="0">
+              <a:spcAft>
+                <a:spcPts val="0"/>
+              </a:spcAft>
+              <a:buSzPct val="100000"/>
+              <a:buNone/>
+            </a:pPr>
+            <a:r>
+              <a:rPr lang="en-US" sz="1050" dirty="0">
+                <a:solidFill>
+                  <a:srgbClr val="000000"/>
+                </a:solidFill>
+                <a:latin typeface="Calibri" pitchFamily="34" charset="0"/>
+                <a:ea typeface="Calibri" pitchFamily="34" charset="-122"/>
+                <a:cs typeface="Calibri" pitchFamily="34" charset="-120"/>
+              </a:rPr>
+              <a:t xml:space="preserve">the number SPLIT: fixed word 25.1 %, adapting it 3.9 %, one comparator takes 72 % of that</a:t>
+            </a:r>
+          </a:p>
+        </p:txBody>
+      </p:sp>
+      <p:sp>
+        <p:nvSpPr>
+          <p:cNvPr id="27" name="TextBox 26"/>
+          <p:cNvSpPr txBox="1"/>
+          <p:nvPr/>
+        </p:nvSpPr>
+        <p:spPr>
+          <a:xfrm>
+            <a:off x="640080" y="5074920"/>
+            <a:ext cx="2423160" cy="457200"/>
+          </a:xfrm>
+          <a:prstGeom prst="rect">
+            <a:avLst/>
+          </a:prstGeom>
+          <a:noFill/>
+        </p:spPr>
+        <p:txBody>
+          <a:bodyPr wrap="square" lIns="0" tIns="0" rIns="0" bIns="0">
+            <a:spAutoFit/>
+          </a:bodyPr>
+          <a:lstStyle/>
+          <a:p>
+            <a:pPr marL="177800" indent="0">
+              <a:spcAft>
+                <a:spcPts val="0"/>
+              </a:spcAft>
+              <a:buSzPct val="100000"/>
+              <a:buNone/>
+            </a:pPr>
+            <a:r>
+              <a:rPr lang="en-US" sz="1050" b="1" dirty="0">
+                <a:solidFill>
+                  <a:srgbClr val="000000"/>
+                </a:solidFill>
+                <a:latin typeface="Calibri" pitchFamily="34" charset="0"/>
+                <a:ea typeface="Calibri" pitchFamily="34" charset="-122"/>
+                <a:cs typeface="Calibri" pitchFamily="34" charset="-120"/>
+              </a:rPr>
+              <a:t xml:space="preserve">Design rule</a:t>
+            </a:r>
+          </a:p>
+        </p:txBody>
+      </p:sp>
+      <p:sp>
+        <p:nvSpPr>
+          <p:cNvPr id="28" name="TextBox 27"/>
+          <p:cNvSpPr txBox="1"/>
+          <p:nvPr/>
+        </p:nvSpPr>
+        <p:spPr>
+          <a:xfrm>
+            <a:off x="3154680" y="5074920"/>
+            <a:ext cx="3200400" cy="457200"/>
+          </a:xfrm>
+          <a:prstGeom prst="rect">
+            <a:avLst/>
+          </a:prstGeom>
+          <a:noFill/>
+        </p:spPr>
+        <p:txBody>
+          <a:bodyPr wrap="square" lIns="0" tIns="0" rIns="0" bIns="0">
+            <a:spAutoFit/>
+          </a:bodyPr>
+          <a:lstStyle/>
+          <a:p>
+            <a:pPr marL="177800" indent="0">
+              <a:spcAft>
+                <a:spcPts val="0"/>
+              </a:spcAft>
+              <a:buSzPct val="100000"/>
+              <a:buNone/>
+            </a:pPr>
+            <a:r>
+              <a:rPr lang="en-US" sz="1050" dirty="0">
+                <a:solidFill>
+                  <a:srgbClr val="000000"/>
+                </a:solidFill>
+                <a:latin typeface="Calibri" pitchFamily="34" charset="0"/>
+                <a:ea typeface="Calibri" pitchFamily="34" charset="-122"/>
+                <a:cs typeface="Calibri" pitchFamily="34" charset="-120"/>
+              </a:rPr>
+              <a:t xml:space="preserve">none</a:t>
+            </a:r>
+          </a:p>
+        </p:txBody>
+      </p:sp>
+      <p:sp>
+        <p:nvSpPr>
+          <p:cNvPr id="29" name="TextBox 28"/>
+          <p:cNvSpPr txBox="1"/>
+          <p:nvPr/>
+        </p:nvSpPr>
+        <p:spPr>
+          <a:xfrm>
+            <a:off x="6446520" y="5074920"/>
+            <a:ext cx="5120640" cy="457200"/>
+          </a:xfrm>
+          <a:prstGeom prst="rect">
+            <a:avLst/>
+          </a:prstGeom>
+          <a:noFill/>
+        </p:spPr>
+        <p:txBody>
+          <a:bodyPr wrap="square" lIns="0" tIns="0" rIns="0" bIns="0">
+            <a:spAutoFit/>
+          </a:bodyPr>
+          <a:lstStyle/>
+          <a:p>
+            <a:pPr marL="177800" indent="0">
+              <a:spcAft>
+                <a:spcPts val="0"/>
+              </a:spcAft>
+              <a:buSzPct val="100000"/>
+              <a:buNone/>
+            </a:pPr>
+            <a:r>
+              <a:rPr lang="en-US" sz="1050" dirty="0">
+                <a:solidFill>
+                  <a:srgbClr val="000000"/>
+                </a:solidFill>
+                <a:latin typeface="Calibri" pitchFamily="34" charset="0"/>
+                <a:ea typeface="Calibri" pitchFamily="34" charset="-122"/>
+                <a:cs typeface="Calibri" pitchFamily="34" charset="-120"/>
+              </a:rPr>
+              <a:t xml:space="preserve">adaptive control pays only below ~2.5 nH loop inductance</a:t>
+            </a:r>
+          </a:p>
+        </p:txBody>
+      </p:sp>
+      <p:sp>
+        <p:nvSpPr>
+          <p:cNvPr id="30" name="TextBox 29"/>
+          <p:cNvSpPr txBox="1"/>
+          <p:nvPr/>
+        </p:nvSpPr>
+        <p:spPr>
+          <a:xfrm>
+            <a:off x="640080" y="5742432"/>
+            <a:ext cx="10972800" cy="685800"/>
+          </a:xfrm>
+          <a:prstGeom prst="rect">
+            <a:avLst/>
+          </a:prstGeom>
+          <a:noFill/>
+        </p:spPr>
+        <p:txBody>
+          <a:bodyPr wrap="square" lIns="0" tIns="0" rIns="0" bIns="0">
+            <a:spAutoFit/>
+          </a:bodyPr>
+          <a:lstStyle/>
+          <a:p>
+            <a:pPr marL="177800" indent="0">
+              <a:spcAft>
+                <a:spcPts val="0"/>
+              </a:spcAft>
+              <a:buSzPct val="100000"/>
+              <a:buNone/>
+            </a:pPr>
+            <a:r>
+              <a:rPr lang="en-US" sz="1200" dirty="0">
+                <a:solidFill>
+                  <a:srgbClr val="000000"/>
+                </a:solidFill>
+                <a:latin typeface="Calibri" pitchFamily="34" charset="0"/>
+                <a:ea typeface="Calibri" pitchFamily="34" charset="-122"/>
+                <a:cs typeface="Calibri" pitchFamily="34" charset="-120"/>
+              </a:rPr>
+              <a:t xml:space="preserve">The parameter we improve is not a volt or a nanosecond — it is </a:t>
+            </a:r>
+            <a:r>
+              <a:rPr lang="en-US" sz="1200" b="1" dirty="0">
+                <a:solidFill>
+                  <a:srgbClr val="000000"/>
+                </a:solidFill>
+                <a:latin typeface="Calibri" pitchFamily="34" charset="0"/>
+                <a:ea typeface="Calibri" pitchFamily="34" charset="-122"/>
+                <a:cs typeface="Calibri" pitchFamily="34" charset="-120"/>
+              </a:rPr>
+              <a:t xml:space="preserve">what the designer knows before committing silicon</a:t>
+            </a:r>
+            <a:r>
+              <a:rPr lang="en-US" sz="1200" dirty="0">
+                <a:solidFill>
+                  <a:srgbClr val="000000"/>
+                </a:solidFill>
+                <a:latin typeface="Calibri" pitchFamily="34" charset="0"/>
+                <a:ea typeface="Calibri" pitchFamily="34" charset="-122"/>
+                <a:cs typeface="Calibri" pitchFamily="34" charset="-120"/>
+              </a:rPr>
+              <a:t xml:space="preserve">. [9] shows a digital code works. We measure what the code is worth, and how much of that worth needs sensing at all: 3.7 % of the achievable gain, which is what the sense + ADC + lookup table has to justify.</a:t>
+            </a:r>
+          </a:p>
+        </p:txBody>
+      </p:sp>
+    </p:spTree>
+  </p:cSld>
+  <p:clrMapOvr>
+    <a:masterClrMapping/>
+  </p:clrMapOvr>
+</p:sld>
+</file>
+
+<file path=ppt/slides/slide24.xml><?xml version="1.0" encoding="utf-8"?>
+<p:sld xmlns:a="http://schemas.openxmlformats.org/drawingml/2006/main" xmlns:p="http://schemas.openxmlformats.org/presentationml/2006/main" xmlns:r="http://schemas.openxmlformats.org/officeDocument/2006/relationships">
+  <p:cSld>
+    <p:spTree>
+      <p:nvGrpSpPr>
+        <p:cNvPr id="1" name=""/>
+        <p:cNvGrpSpPr/>
+        <p:nvPr/>
+      </p:nvGrpSpPr>
+      <p:grpSpPr/>
+      <p:sp>
+        <p:nvSpPr>
+          <p:cNvPr id="2" name="Text 0"/>
+          <p:cNvSpPr txBox="1"/>
+          <p:nvPr/>
+        </p:nvSpPr>
+        <p:spPr>
+          <a:xfrm>
+            <a:off x="11460175" y="6446520"/>
+            <a:ext cx="457200" cy="274320"/>
+          </a:xfrm>
+          <a:prstGeom prst="rect">
+            <a:avLst/>
+          </a:prstGeom>
+          <a:noFill/>
+          <a:ln/>
+        </p:spPr>
+        <p:txBody>
+          <a:bodyPr wrap="square" lIns="0" tIns="0" rIns="0" bIns="0" rtlCol="0" anchor="ctr"/>
+          <a:lstStyle/>
+          <a:p>
+            <a:pPr marL="0" indent="0" algn="r">
+              <a:buNone/>
+            </a:pPr>
+            <a:r>
+              <a:rPr lang="en-US" sz="1000" dirty="0">
+                <a:solidFill>
+                  <a:srgbClr val="808080"/>
+                </a:solidFill>
+                <a:latin typeface="Calibri" pitchFamily="34" charset="0"/>
+                <a:ea typeface="Calibri" pitchFamily="34" charset="-122"/>
+                <a:cs typeface="Calibri" pitchFamily="34" charset="-120"/>
+              </a:rPr>
+              <a:t>9</a:t>
+            </a:r>
+            <a:endParaRPr lang="en-US" sz="1000" dirty="0"/>
+          </a:p>
+        </p:txBody>
+      </p:sp>
+      <p:sp>
+        <p:nvSpPr>
+          <p:cNvPr id="3" name="Text 1"/>
+          <p:cNvSpPr txBox="1"/>
+          <p:nvPr/>
+        </p:nvSpPr>
+        <p:spPr>
+          <a:xfrm>
+            <a:off x="548640" y="320040"/>
+            <a:ext cx="9601200" cy="685800"/>
+          </a:xfrm>
+          <a:prstGeom prst="rect">
+            <a:avLst/>
+          </a:prstGeom>
+          <a:noFill/>
+          <a:ln/>
+        </p:spPr>
+        <p:txBody>
+          <a:bodyPr wrap="square" lIns="0" tIns="0" rIns="0" bIns="0" rtlCol="0" anchor="ctr"/>
+          <a:lstStyle/>
+          <a:p>
+            <a:pPr marL="0" indent="0">
+              <a:buNone/>
+            </a:pPr>
+            <a:r>
+              <a:rPr lang="en-US" sz="2800" b="1" dirty="0">
+                <a:solidFill>
+                  <a:srgbClr val="1D2F82"/>
+                </a:solidFill>
+                <a:latin typeface="Calibri" pitchFamily="34" charset="0"/>
+                <a:ea typeface="Calibri" pitchFamily="34" charset="-122"/>
+                <a:cs typeface="Calibri" pitchFamily="34" charset="-120"/>
+              </a:rPr>
+              <a:t>The circuit that is simulated</a:t>
+            </a:r>
+            <a:endParaRPr lang="en-US" sz="2800" dirty="0"/>
+          </a:p>
+        </p:txBody>
+      </p:sp>
+      <p:pic>
+        <p:nvPicPr>
+          <p:cNvPr id="4" name="Image 0" descr="logo.png"/>
+          <p:cNvPicPr>
+            <a:picLocks noChangeAspect="1"/>
+          </p:cNvPicPr>
+          <p:nvPr/>
+        </p:nvPicPr>
+        <p:blipFill>
+          <a:blip r:embed="rId2"/>
+          <a:stretch>
+            <a:fillRect/>
+          </a:stretch>
+        </p:blipFill>
+        <p:spPr>
+          <a:xfrm>
+            <a:off x="10362895" y="320040"/>
+            <a:ext cx="1371600" cy="518746"/>
+          </a:xfrm>
+          <a:prstGeom prst="rect">
+            <a:avLst/>
+          </a:prstGeom>
+        </p:spPr>
+      </p:pic>
+      <p:pic>
+        <p:nvPicPr>
+          <p:cNvPr id="5" name="Picture 4" descr="fig_circuit.png"/>
+          <p:cNvPicPr>
+            <a:picLocks noChangeAspect="1"/>
+          </p:cNvPicPr>
+          <p:nvPr/>
+        </p:nvPicPr>
+        <p:blipFill>
+          <a:blip r:embed="rId3"/>
+          <a:stretch>
+            <a:fillRect/>
+          </a:stretch>
+        </p:blipFill>
+        <p:spPr>
+          <a:xfrm>
+            <a:off x="2029968" y="1115568"/>
+            <a:ext cx="8129016" cy="4434009"/>
+          </a:xfrm>
+          <a:prstGeom prst="rect">
+            <a:avLst/>
+          </a:prstGeom>
+        </p:spPr>
+      </p:pic>
+      <p:sp>
+        <p:nvSpPr>
+          <p:cNvPr id="6" name="TextBox 5"/>
+          <p:cNvSpPr txBox="1"/>
+          <p:nvPr/>
+        </p:nvSpPr>
+        <p:spPr>
+          <a:xfrm>
+            <a:off x="640080" y="5669280"/>
+            <a:ext cx="11064240" cy="777240"/>
+          </a:xfrm>
+          <a:prstGeom prst="rect">
+            <a:avLst/>
+          </a:prstGeom>
+          <a:noFill/>
+        </p:spPr>
+        <p:txBody>
+          <a:bodyPr wrap="square" lIns="0" tIns="0" rIns="0" bIns="0">
+            <a:spAutoFit/>
+          </a:bodyPr>
+          <a:lstStyle/>
+          <a:p>
+            <a:pPr marL="177800" indent="0">
+              <a:spcAft>
+                <a:spcPts val="0"/>
+              </a:spcAft>
+              <a:buSzPct val="100000"/>
+              <a:buNone/>
+            </a:pPr>
+            <a:r>
+              <a:rPr lang="en-US" sz="1200" dirty="0">
+                <a:solidFill>
+                  <a:srgbClr val="000000"/>
+                </a:solidFill>
+                <a:latin typeface="Calibri" pitchFamily="34" charset="0"/>
+                <a:ea typeface="Calibri" pitchFamily="34" charset="-122"/>
+                <a:cs typeface="Calibri" pitchFamily="34" charset="-120"/>
+              </a:rPr>
+              <a:t xml:space="preserve">Every element is in </a:t>
+            </a:r>
+            <a:r>
+              <a:rPr lang="en-US" sz="1200" b="1" dirty="0">
+                <a:solidFill>
+                  <a:srgbClr val="000000"/>
+                </a:solidFill>
+                <a:latin typeface="Calibri" pitchFamily="34" charset="0"/>
+                <a:ea typeface="Calibri" pitchFamily="34" charset="-122"/>
+                <a:cs typeface="Calibri" pitchFamily="34" charset="-120"/>
+              </a:rPr>
+              <a:t xml:space="preserve">sim/dpt.cir</a:t>
+            </a:r>
+            <a:r>
+              <a:rPr lang="en-US" sz="1200" dirty="0">
+                <a:solidFill>
+                  <a:srgbClr val="000000"/>
+                </a:solidFill>
+                <a:latin typeface="Calibri" pitchFamily="34" charset="0"/>
+                <a:ea typeface="Calibri" pitchFamily="34" charset="-122"/>
+                <a:cs typeface="Calibri" pitchFamily="34" charset="-120"/>
+              </a:rPr>
+              <a:t xml:space="preserve">, and the same three experiments ship as LTspice schematics in </a:t>
+            </a:r>
+            <a:r>
+              <a:rPr lang="en-US" sz="1200" b="1" dirty="0">
+                <a:solidFill>
+                  <a:srgbClr val="000000"/>
+                </a:solidFill>
+                <a:latin typeface="Calibri" pitchFamily="34" charset="0"/>
+                <a:ea typeface="Calibri" pitchFamily="34" charset="-122"/>
+                <a:cs typeface="Calibri" pitchFamily="34" charset="-120"/>
+              </a:rPr>
+              <a:t xml:space="preserve">ltspice/*.asc</a:t>
+            </a:r>
+            <a:r>
+              <a:rPr lang="en-US" sz="1200" dirty="0">
+                <a:solidFill>
+                  <a:srgbClr val="000000"/>
+                </a:solidFill>
+                <a:latin typeface="Calibri" pitchFamily="34" charset="0"/>
+                <a:ea typeface="Calibri" pitchFamily="34" charset="-122"/>
+                <a:cs typeface="Calibri" pitchFamily="34" charset="-120"/>
+              </a:rPr>
+              <a:t xml:space="preserve">. C</a:t>
+            </a:r>
+            <a:r>
+              <a:rPr lang="en-US" sz="1200" dirty="0">
+                <a:solidFill>
+                  <a:srgbClr val="000000"/>
+                </a:solidFill>
+                <a:latin typeface="Calibri" pitchFamily="34" charset="0"/>
+                <a:ea typeface="Calibri" pitchFamily="34" charset="-122"/>
+                <a:cs typeface="Calibri" pitchFamily="34" charset="-120"/>
+              </a:rPr>
+              <a:t xml:space="preserve">GD</a:t>
+            </a:r>
+            <a:r>
+              <a:rPr lang="en-US" sz="1200" dirty="0">
+                <a:solidFill>
+                  <a:srgbClr val="000000"/>
+                </a:solidFill>
+                <a:latin typeface="Calibri" pitchFamily="34" charset="0"/>
+                <a:ea typeface="Calibri" pitchFamily="34" charset="-122"/>
+                <a:cs typeface="Calibri" pitchFamily="34" charset="-120"/>
+              </a:rPr>
+              <a:t xml:space="preserve"> on Q2 in red is the crosstalk path; GaN has no body diode, so holding the gate below threshold is paid for again across the dead time.</a:t>
+            </a:r>
           </a:p>
         </p:txBody>
       </p:sp>
@@ -10693,7 +14034,7 @@
                 <a:ea typeface="Calibri" pitchFamily="34" charset="-122"/>
                 <a:cs typeface="Calibri" pitchFamily="34" charset="-120"/>
               </a:rPr>
-              <a:t>Literature Survey  (1 – 4)</a:t>
+              <a:t>Literature Landscape — four clusters, and where we sit</a:t>
             </a:r>
             <a:endParaRPr lang="en-US" sz="2800" dirty="0"/>
           </a:p>
@@ -10739,7 +14080,7 @@
         </p:nvGraphicFramePr>
         <p:xfrm>
           <a:off x="548640" y="1371600"/>
-          <a:ext cx="11091672" cy="3840480"/>
+          <a:ext cx="11091672" cy="3611880"/>
         </p:xfrm>
         <a:graphic>
           <a:graphicData uri="http://schemas.openxmlformats.org/drawingml/2006/table">
@@ -10782,354 +14123,7 @@
                   </a:extLst>
                 </a:gridCol>
               </a:tblGrid>
-              <a:tr h="365760">
-                <a:tc>
-                  <a:txBody>
-                    <a:bodyPr/>
-                    <a:lstStyle/>
-                    <a:p>
-                      <a:pPr marL="0" indent="0">
-                        <a:buNone/>
-                      </a:pPr>
-                      <a:r>
-                        <a:rPr lang="en-US" sz="1300" b="1" dirty="0">
-                          <a:solidFill>
-                            <a:srgbClr val="FFFFFF"/>
-                          </a:solidFill>
-                          <a:latin typeface="Calibri" pitchFamily="34" charset="0"/>
-                          <a:ea typeface="Calibri" pitchFamily="34" charset="-122"/>
-                          <a:cs typeface="Calibri" pitchFamily="34" charset="-120"/>
-                        </a:rPr>
-                        <a:t>No.</a:t>
-                      </a:r>
-                      <a:endParaRPr lang="en-US" sz="1300" dirty="0">
-                        <a:latin typeface="Calibri" charset="0"/>
-                        <a:ea typeface="Calibri" charset="0"/>
-                        <a:cs typeface="Calibri" charset="0"/>
-                      </a:endParaRPr>
-                    </a:p>
-                  </a:txBody>
-                  <a:tcPr marL="54864" marR="54864" marT="54864" marB="54864" anchor="ctr">
-                    <a:lnL w="9525" cap="flat" cmpd="sng" algn="ctr">
-                      <a:solidFill>
-                        <a:srgbClr val="BFBFBF"/>
-                      </a:solidFill>
-                      <a:prstDash val="solid"/>
-                      <a:round/>
-                      <a:headEnd type="none" w="med" len="med"/>
-                      <a:tailEnd type="none" w="med" len="med"/>
-                    </a:lnL>
-                    <a:lnR w="9525" cap="flat" cmpd="sng" algn="ctr">
-                      <a:solidFill>
-                        <a:srgbClr val="BFBFBF"/>
-                      </a:solidFill>
-                      <a:prstDash val="solid"/>
-                      <a:round/>
-                      <a:headEnd type="none" w="med" len="med"/>
-                      <a:tailEnd type="none" w="med" len="med"/>
-                    </a:lnR>
-                    <a:lnT w="9525" cap="flat" cmpd="sng" algn="ctr">
-                      <a:solidFill>
-                        <a:srgbClr val="BFBFBF"/>
-                      </a:solidFill>
-                      <a:prstDash val="solid"/>
-                      <a:round/>
-                      <a:headEnd type="none" w="med" len="med"/>
-                      <a:tailEnd type="none" w="med" len="med"/>
-                    </a:lnT>
-                    <a:lnB w="9525" cap="flat" cmpd="sng" algn="ctr">
-                      <a:solidFill>
-                        <a:srgbClr val="BFBFBF"/>
-                      </a:solidFill>
-                      <a:prstDash val="solid"/>
-                      <a:round/>
-                      <a:headEnd type="none" w="med" len="med"/>
-                      <a:tailEnd type="none" w="med" len="med"/>
-                    </a:lnB>
-                    <a:solidFill>
-                      <a:srgbClr val="1D2F82"/>
-                    </a:solidFill>
-                  </a:tcPr>
-                </a:tc>
-                <a:tc>
-                  <a:txBody>
-                    <a:bodyPr/>
-                    <a:lstStyle/>
-                    <a:p>
-                      <a:pPr marL="0" indent="0">
-                        <a:buNone/>
-                      </a:pPr>
-                      <a:r>
-                        <a:rPr lang="en-US" sz="1300" b="1" dirty="0">
-                          <a:solidFill>
-                            <a:srgbClr val="FFFFFF"/>
-                          </a:solidFill>
-                          <a:latin typeface="Calibri" pitchFamily="34" charset="0"/>
-                          <a:ea typeface="Calibri" pitchFamily="34" charset="-122"/>
-                          <a:cs typeface="Calibri" pitchFamily="34" charset="-120"/>
-                        </a:rPr>
-                        <a:t>Author(s) &amp; Year</a:t>
-                      </a:r>
-                      <a:endParaRPr lang="en-US" sz="1300" dirty="0">
-                        <a:latin typeface="Calibri" charset="0"/>
-                        <a:ea typeface="Calibri" charset="0"/>
-                        <a:cs typeface="Calibri" charset="0"/>
-                      </a:endParaRPr>
-                    </a:p>
-                  </a:txBody>
-                  <a:tcPr marL="54864" marR="54864" marT="54864" marB="54864" anchor="ctr">
-                    <a:lnL w="9525" cap="flat" cmpd="sng" algn="ctr">
-                      <a:solidFill>
-                        <a:srgbClr val="BFBFBF"/>
-                      </a:solidFill>
-                      <a:prstDash val="solid"/>
-                      <a:round/>
-                      <a:headEnd type="none" w="med" len="med"/>
-                      <a:tailEnd type="none" w="med" len="med"/>
-                    </a:lnL>
-                    <a:lnR w="9525" cap="flat" cmpd="sng" algn="ctr">
-                      <a:solidFill>
-                        <a:srgbClr val="BFBFBF"/>
-                      </a:solidFill>
-                      <a:prstDash val="solid"/>
-                      <a:round/>
-                      <a:headEnd type="none" w="med" len="med"/>
-                      <a:tailEnd type="none" w="med" len="med"/>
-                    </a:lnR>
-                    <a:lnT w="9525" cap="flat" cmpd="sng" algn="ctr">
-                      <a:solidFill>
-                        <a:srgbClr val="BFBFBF"/>
-                      </a:solidFill>
-                      <a:prstDash val="solid"/>
-                      <a:round/>
-                      <a:headEnd type="none" w="med" len="med"/>
-                      <a:tailEnd type="none" w="med" len="med"/>
-                    </a:lnT>
-                    <a:lnB w="9525" cap="flat" cmpd="sng" algn="ctr">
-                      <a:solidFill>
-                        <a:srgbClr val="BFBFBF"/>
-                      </a:solidFill>
-                      <a:prstDash val="solid"/>
-                      <a:round/>
-                      <a:headEnd type="none" w="med" len="med"/>
-                      <a:tailEnd type="none" w="med" len="med"/>
-                    </a:lnB>
-                    <a:solidFill>
-                      <a:srgbClr val="1D2F82"/>
-                    </a:solidFill>
-                  </a:tcPr>
-                </a:tc>
-                <a:tc>
-                  <a:txBody>
-                    <a:bodyPr/>
-                    <a:lstStyle/>
-                    <a:p>
-                      <a:pPr marL="0" indent="0">
-                        <a:buNone/>
-                      </a:pPr>
-                      <a:r>
-                        <a:rPr lang="en-US" sz="1300" b="1" dirty="0">
-                          <a:solidFill>
-                            <a:srgbClr val="FFFFFF"/>
-                          </a:solidFill>
-                          <a:latin typeface="Calibri" pitchFamily="34" charset="0"/>
-                          <a:ea typeface="Calibri" pitchFamily="34" charset="-122"/>
-                          <a:cs typeface="Calibri" pitchFamily="34" charset="-120"/>
-                        </a:rPr>
-                        <a:t>Title / Source</a:t>
-                      </a:r>
-                      <a:endParaRPr lang="en-US" sz="1300" dirty="0">
-                        <a:latin typeface="Calibri" charset="0"/>
-                        <a:ea typeface="Calibri" charset="0"/>
-                        <a:cs typeface="Calibri" charset="0"/>
-                      </a:endParaRPr>
-                    </a:p>
-                  </a:txBody>
-                  <a:tcPr marL="54864" marR="54864" marT="54864" marB="54864" anchor="ctr">
-                    <a:lnL w="9525" cap="flat" cmpd="sng" algn="ctr">
-                      <a:solidFill>
-                        <a:srgbClr val="BFBFBF"/>
-                      </a:solidFill>
-                      <a:prstDash val="solid"/>
-                      <a:round/>
-                      <a:headEnd type="none" w="med" len="med"/>
-                      <a:tailEnd type="none" w="med" len="med"/>
-                    </a:lnL>
-                    <a:lnR w="9525" cap="flat" cmpd="sng" algn="ctr">
-                      <a:solidFill>
-                        <a:srgbClr val="BFBFBF"/>
-                      </a:solidFill>
-                      <a:prstDash val="solid"/>
-                      <a:round/>
-                      <a:headEnd type="none" w="med" len="med"/>
-                      <a:tailEnd type="none" w="med" len="med"/>
-                    </a:lnR>
-                    <a:lnT w="9525" cap="flat" cmpd="sng" algn="ctr">
-                      <a:solidFill>
-                        <a:srgbClr val="BFBFBF"/>
-                      </a:solidFill>
-                      <a:prstDash val="solid"/>
-                      <a:round/>
-                      <a:headEnd type="none" w="med" len="med"/>
-                      <a:tailEnd type="none" w="med" len="med"/>
-                    </a:lnT>
-                    <a:lnB w="9525" cap="flat" cmpd="sng" algn="ctr">
-                      <a:solidFill>
-                        <a:srgbClr val="BFBFBF"/>
-                      </a:solidFill>
-                      <a:prstDash val="solid"/>
-                      <a:round/>
-                      <a:headEnd type="none" w="med" len="med"/>
-                      <a:tailEnd type="none" w="med" len="med"/>
-                    </a:lnB>
-                    <a:solidFill>
-                      <a:srgbClr val="1D2F82"/>
-                    </a:solidFill>
-                  </a:tcPr>
-                </a:tc>
-                <a:tc>
-                  <a:txBody>
-                    <a:bodyPr/>
-                    <a:lstStyle/>
-                    <a:p>
-                      <a:pPr marL="0" indent="0">
-                        <a:buNone/>
-                      </a:pPr>
-                      <a:r>
-                        <a:rPr lang="en-US" sz="1300" b="1" dirty="0">
-                          <a:solidFill>
-                            <a:srgbClr val="FFFFFF"/>
-                          </a:solidFill>
-                          <a:latin typeface="Calibri" pitchFamily="34" charset="0"/>
-                          <a:ea typeface="Calibri" pitchFamily="34" charset="-122"/>
-                          <a:cs typeface="Calibri" pitchFamily="34" charset="-120"/>
-                        </a:rPr>
-                        <a:t>Method / Approach</a:t>
-                      </a:r>
-                      <a:endParaRPr lang="en-US" sz="1300" dirty="0">
-                        <a:latin typeface="Calibri" charset="0"/>
-                        <a:ea typeface="Calibri" charset="0"/>
-                        <a:cs typeface="Calibri" charset="0"/>
-                      </a:endParaRPr>
-                    </a:p>
-                  </a:txBody>
-                  <a:tcPr marL="54864" marR="54864" marT="54864" marB="54864" anchor="ctr">
-                    <a:lnL w="9525" cap="flat" cmpd="sng" algn="ctr">
-                      <a:solidFill>
-                        <a:srgbClr val="BFBFBF"/>
-                      </a:solidFill>
-                      <a:prstDash val="solid"/>
-                      <a:round/>
-                      <a:headEnd type="none" w="med" len="med"/>
-                      <a:tailEnd type="none" w="med" len="med"/>
-                    </a:lnL>
-                    <a:lnR w="9525" cap="flat" cmpd="sng" algn="ctr">
-                      <a:solidFill>
-                        <a:srgbClr val="BFBFBF"/>
-                      </a:solidFill>
-                      <a:prstDash val="solid"/>
-                      <a:round/>
-                      <a:headEnd type="none" w="med" len="med"/>
-                      <a:tailEnd type="none" w="med" len="med"/>
-                    </a:lnR>
-                    <a:lnT w="9525" cap="flat" cmpd="sng" algn="ctr">
-                      <a:solidFill>
-                        <a:srgbClr val="BFBFBF"/>
-                      </a:solidFill>
-                      <a:prstDash val="solid"/>
-                      <a:round/>
-                      <a:headEnd type="none" w="med" len="med"/>
-                      <a:tailEnd type="none" w="med" len="med"/>
-                    </a:lnT>
-                    <a:lnB w="9525" cap="flat" cmpd="sng" algn="ctr">
-                      <a:solidFill>
-                        <a:srgbClr val="BFBFBF"/>
-                      </a:solidFill>
-                      <a:prstDash val="solid"/>
-                      <a:round/>
-                      <a:headEnd type="none" w="med" len="med"/>
-                      <a:tailEnd type="none" w="med" len="med"/>
-                    </a:lnB>
-                    <a:solidFill>
-                      <a:srgbClr val="1D2F82"/>
-                    </a:solidFill>
-                  </a:tcPr>
-                </a:tc>
-                <a:tc>
-                  <a:txBody>
-                    <a:bodyPr/>
-                    <a:lstStyle/>
-                    <a:p>
-                      <a:pPr marL="0" indent="0">
-                        <a:buNone/>
-                      </a:pPr>
-                      <a:r>
-                        <a:rPr lang="en-US" sz="1300" b="1" dirty="0">
-                          <a:solidFill>
-                            <a:srgbClr val="FFFFFF"/>
-                          </a:solidFill>
-                          <a:latin typeface="Calibri" pitchFamily="34" charset="0"/>
-                          <a:ea typeface="Calibri" pitchFamily="34" charset="-122"/>
-                          <a:cs typeface="Calibri" pitchFamily="34" charset="-120"/>
-                        </a:rPr>
-                        <a:t>Findings &amp; Research Gap</a:t>
-                      </a:r>
-                      <a:endParaRPr lang="en-US" sz="1300" dirty="0">
-                        <a:latin typeface="Calibri" charset="0"/>
-                        <a:ea typeface="Calibri" charset="0"/>
-                        <a:cs typeface="Calibri" charset="0"/>
-                      </a:endParaRPr>
-                    </a:p>
-                  </a:txBody>
-                  <a:tcPr marL="54864" marR="54864" marT="54864" marB="54864" anchor="ctr">
-                    <a:lnL w="9525" cap="flat" cmpd="sng" algn="ctr">
-                      <a:solidFill>
-                        <a:srgbClr val="BFBFBF"/>
-                      </a:solidFill>
-                      <a:prstDash val="solid"/>
-                      <a:round/>
-                      <a:headEnd type="none" w="med" len="med"/>
-                      <a:tailEnd type="none" w="med" len="med"/>
-                    </a:lnL>
-                    <a:lnR w="9525" cap="flat" cmpd="sng" algn="ctr">
-                      <a:solidFill>
-                        <a:srgbClr val="BFBFBF"/>
-                      </a:solidFill>
-                      <a:prstDash val="solid"/>
-                      <a:round/>
-                      <a:headEnd type="none" w="med" len="med"/>
-                      <a:tailEnd type="none" w="med" len="med"/>
-                    </a:lnR>
-                    <a:lnT w="9525" cap="flat" cmpd="sng" algn="ctr">
-                      <a:solidFill>
-                        <a:srgbClr val="BFBFBF"/>
-                      </a:solidFill>
-                      <a:prstDash val="solid"/>
-                      <a:round/>
-                      <a:headEnd type="none" w="med" len="med"/>
-                      <a:tailEnd type="none" w="med" len="med"/>
-                    </a:lnT>
-                    <a:lnB w="9525" cap="flat" cmpd="sng" algn="ctr">
-                      <a:solidFill>
-                        <a:srgbClr val="BFBFBF"/>
-                      </a:solidFill>
-                      <a:prstDash val="solid"/>
-                      <a:round/>
-                      <a:headEnd type="none" w="med" len="med"/>
-                      <a:tailEnd type="none" w="med" len="med"/>
-                    </a:lnB>
-                    <a:solidFill>
-                      <a:srgbClr val="1D2F82"/>
-                    </a:solidFill>
-                  </a:tcPr>
-                </a:tc>
-                <a:extLst>
-                  <a:ext uri="{0D108BD9-81ED-4DB2-BD59-A6C34878D82A}">
-                    <a16:rowId xmlns:a16="http://schemas.microsoft.com/office/drawing/2014/main" val="10000"/>
-                  </a:ext>
-                </a:extLst>
-              </a:tr>
-              <a:tr h="868680">
+              <a:tr h="320040">
                 <a:tc>
                   <a:txBody>
                     <a:bodyPr wrap="square"/>
@@ -11145,7 +14139,398 @@
                           </a:solidFill>
                           <a:latin typeface="Calibri"/>
                         </a:rPr>
-                        <a:t>1</a:t>
+                        <a:t>#</a:t>
+                      </a:r>
+                      <a:endParaRPr lang="en-US" sz="1300" dirty="0">
+                        <a:latin typeface="Calibri" charset="0"/>
+                        <a:ea typeface="Calibri" charset="0"/>
+                        <a:cs typeface="Calibri" charset="0"/>
+                      </a:endParaRPr>
+                    </a:p>
+                  </a:txBody>
+                  <a:tcPr marL="54864" marR="54864" marT="54864" marB="54864" anchor="ctr">
+                    <a:lnL w="9525" cap="flat" cmpd="sng" algn="ctr">
+                      <a:solidFill>
+                        <a:srgbClr val="BFBFBF"/>
+                      </a:solidFill>
+                      <a:prstDash val="solid"/>
+                      <a:round/>
+                      <a:headEnd type="none" w="med" len="med"/>
+                      <a:tailEnd type="none" w="med" len="med"/>
+                    </a:lnL>
+                    <a:lnR w="9525" cap="flat" cmpd="sng" algn="ctr">
+                      <a:solidFill>
+                        <a:srgbClr val="BFBFBF"/>
+                      </a:solidFill>
+                      <a:prstDash val="solid"/>
+                      <a:round/>
+                      <a:headEnd type="none" w="med" len="med"/>
+                      <a:tailEnd type="none" w="med" len="med"/>
+                    </a:lnR>
+                    <a:lnT w="9525" cap="flat" cmpd="sng" algn="ctr">
+                      <a:solidFill>
+                        <a:srgbClr val="BFBFBF"/>
+                      </a:solidFill>
+                      <a:prstDash val="solid"/>
+                      <a:round/>
+                      <a:headEnd type="none" w="med" len="med"/>
+                      <a:tailEnd type="none" w="med" len="med"/>
+                    </a:lnT>
+                    <a:lnB w="9525" cap="flat" cmpd="sng" algn="ctr">
+                      <a:solidFill>
+                        <a:srgbClr val="BFBFBF"/>
+                      </a:solidFill>
+                      <a:prstDash val="solid"/>
+                      <a:round/>
+                      <a:headEnd type="none" w="med" len="med"/>
+                      <a:tailEnd type="none" w="med" len="med"/>
+                    </a:lnB>
+                    <a:solidFill>
+                      <a:srgbClr val="1D2F82"/>
+                    </a:solidFill>
+                  </a:tcPr>
+                </a:tc>
+                <a:tc>
+                  <a:txBody>
+                    <a:bodyPr wrap="square"/>
+                    <a:lstStyle/>
+                    <a:p>
+                      <a:pPr marL="0" indent="0">
+                        <a:buNone/>
+                      </a:pPr>
+                      <a:r>
+                        <a:rPr sz="1050" b="0">
+                          <a:solidFill>
+                            <a:srgbClr val="000000"/>
+                          </a:solidFill>
+                          <a:latin typeface="Calibri"/>
+                        </a:rPr>
+                        <a:t>Cluster</a:t>
+                      </a:r>
+                      <a:endParaRPr lang="en-US" sz="1300" dirty="0">
+                        <a:latin typeface="Calibri" charset="0"/>
+                        <a:ea typeface="Calibri" charset="0"/>
+                        <a:cs typeface="Calibri" charset="0"/>
+                      </a:endParaRPr>
+                    </a:p>
+                  </a:txBody>
+                  <a:tcPr marL="54864" marR="54864" marT="54864" marB="54864" anchor="ctr">
+                    <a:lnL w="9525" cap="flat" cmpd="sng" algn="ctr">
+                      <a:solidFill>
+                        <a:srgbClr val="BFBFBF"/>
+                      </a:solidFill>
+                      <a:prstDash val="solid"/>
+                      <a:round/>
+                      <a:headEnd type="none" w="med" len="med"/>
+                      <a:tailEnd type="none" w="med" len="med"/>
+                    </a:lnL>
+                    <a:lnR w="9525" cap="flat" cmpd="sng" algn="ctr">
+                      <a:solidFill>
+                        <a:srgbClr val="BFBFBF"/>
+                      </a:solidFill>
+                      <a:prstDash val="solid"/>
+                      <a:round/>
+                      <a:headEnd type="none" w="med" len="med"/>
+                      <a:tailEnd type="none" w="med" len="med"/>
+                    </a:lnR>
+                    <a:lnT w="9525" cap="flat" cmpd="sng" algn="ctr">
+                      <a:solidFill>
+                        <a:srgbClr val="BFBFBF"/>
+                      </a:solidFill>
+                      <a:prstDash val="solid"/>
+                      <a:round/>
+                      <a:headEnd type="none" w="med" len="med"/>
+                      <a:tailEnd type="none" w="med" len="med"/>
+                    </a:lnT>
+                    <a:lnB w="9525" cap="flat" cmpd="sng" algn="ctr">
+                      <a:solidFill>
+                        <a:srgbClr val="BFBFBF"/>
+                      </a:solidFill>
+                      <a:prstDash val="solid"/>
+                      <a:round/>
+                      <a:headEnd type="none" w="med" len="med"/>
+                      <a:tailEnd type="none" w="med" len="med"/>
+                    </a:lnB>
+                    <a:solidFill>
+                      <a:srgbClr val="1D2F82"/>
+                    </a:solidFill>
+                  </a:tcPr>
+                </a:tc>
+                <a:tc>
+                  <a:txBody>
+                    <a:bodyPr wrap="square"/>
+                    <a:lstStyle/>
+                    <a:p>
+                      <a:pPr marL="0" indent="0">
+                        <a:buNone/>
+                      </a:pPr>
+                      <a:r>
+                        <a:rPr sz="1050" b="0">
+                          <a:solidFill>
+                            <a:srgbClr val="000000"/>
+                          </a:solidFill>
+                          <a:latin typeface="Calibri"/>
+                        </a:rPr>
+                        <a:t>Refs</a:t>
+                      </a:r>
+                      <a:endParaRPr lang="en-US" sz="1300" dirty="0">
+                        <a:latin typeface="Calibri" charset="0"/>
+                        <a:ea typeface="Calibri" charset="0"/>
+                        <a:cs typeface="Calibri" charset="0"/>
+                      </a:endParaRPr>
+                    </a:p>
+                  </a:txBody>
+                  <a:tcPr marL="54864" marR="54864" marT="54864" marB="54864" anchor="ctr">
+                    <a:lnL w="9525" cap="flat" cmpd="sng" algn="ctr">
+                      <a:solidFill>
+                        <a:srgbClr val="BFBFBF"/>
+                      </a:solidFill>
+                      <a:prstDash val="solid"/>
+                      <a:round/>
+                      <a:headEnd type="none" w="med" len="med"/>
+                      <a:tailEnd type="none" w="med" len="med"/>
+                    </a:lnL>
+                    <a:lnR w="9525" cap="flat" cmpd="sng" algn="ctr">
+                      <a:solidFill>
+                        <a:srgbClr val="BFBFBF"/>
+                      </a:solidFill>
+                      <a:prstDash val="solid"/>
+                      <a:round/>
+                      <a:headEnd type="none" w="med" len="med"/>
+                      <a:tailEnd type="none" w="med" len="med"/>
+                    </a:lnR>
+                    <a:lnT w="9525" cap="flat" cmpd="sng" algn="ctr">
+                      <a:solidFill>
+                        <a:srgbClr val="BFBFBF"/>
+                      </a:solidFill>
+                      <a:prstDash val="solid"/>
+                      <a:round/>
+                      <a:headEnd type="none" w="med" len="med"/>
+                      <a:tailEnd type="none" w="med" len="med"/>
+                    </a:lnT>
+                    <a:lnB w="9525" cap="flat" cmpd="sng" algn="ctr">
+                      <a:solidFill>
+                        <a:srgbClr val="BFBFBF"/>
+                      </a:solidFill>
+                      <a:prstDash val="solid"/>
+                      <a:round/>
+                      <a:headEnd type="none" w="med" len="med"/>
+                      <a:tailEnd type="none" w="med" len="med"/>
+                    </a:lnB>
+                    <a:solidFill>
+                      <a:srgbClr val="1D2F82"/>
+                    </a:solidFill>
+                  </a:tcPr>
+                </a:tc>
+                <a:tc gridSpan="2">
+                  <a:txBody>
+                    <a:bodyPr wrap="square"/>
+                    <a:lstStyle/>
+                    <a:p>
+                      <a:pPr marL="0" indent="0">
+                        <a:buNone/>
+                      </a:pPr>
+                      <a:r>
+                        <a:rPr sz="1050" b="0">
+                          <a:solidFill>
+                            <a:srgbClr val="000000"/>
+                          </a:solidFill>
+                          <a:latin typeface="Calibri"/>
+                        </a:rPr>
+                        <a:t>What the cluster does</a:t>
+                      </a:r>
+                      <a:endParaRPr lang="en-US" sz="1300" dirty="0">
+                        <a:latin typeface="Calibri" charset="0"/>
+                        <a:ea typeface="Calibri" charset="0"/>
+                        <a:cs typeface="Calibri" charset="0"/>
+                      </a:endParaRPr>
+                    </a:p>
+                  </a:txBody>
+                  <a:tcPr marL="54864" marR="54864" marT="54864" marB="54864" anchor="ctr">
+                    <a:lnL w="9525" cap="flat" cmpd="sng" algn="ctr">
+                      <a:solidFill>
+                        <a:srgbClr val="BFBFBF"/>
+                      </a:solidFill>
+                      <a:prstDash val="solid"/>
+                      <a:round/>
+                      <a:headEnd type="none" w="med" len="med"/>
+                      <a:tailEnd type="none" w="med" len="med"/>
+                    </a:lnL>
+                    <a:lnR w="9525" cap="flat" cmpd="sng" algn="ctr">
+                      <a:solidFill>
+                        <a:srgbClr val="BFBFBF"/>
+                      </a:solidFill>
+                      <a:prstDash val="solid"/>
+                      <a:round/>
+                      <a:headEnd type="none" w="med" len="med"/>
+                      <a:tailEnd type="none" w="med" len="med"/>
+                    </a:lnR>
+                    <a:lnT w="9525" cap="flat" cmpd="sng" algn="ctr">
+                      <a:solidFill>
+                        <a:srgbClr val="BFBFBF"/>
+                      </a:solidFill>
+                      <a:prstDash val="solid"/>
+                      <a:round/>
+                      <a:headEnd type="none" w="med" len="med"/>
+                      <a:tailEnd type="none" w="med" len="med"/>
+                    </a:lnT>
+                    <a:lnB w="9525" cap="flat" cmpd="sng" algn="ctr">
+                      <a:solidFill>
+                        <a:srgbClr val="BFBFBF"/>
+                      </a:solidFill>
+                      <a:prstDash val="solid"/>
+                      <a:round/>
+                      <a:headEnd type="none" w="med" len="med"/>
+                      <a:tailEnd type="none" w="med" len="med"/>
+                    </a:lnB>
+                    <a:solidFill>
+                      <a:srgbClr val="1D2F82"/>
+                    </a:solidFill>
+                  </a:tcPr>
+                </a:tc>
+                <a:tc hMerge="1">
+                  <a:txBody>
+                    <a:bodyPr wrap="square"/>
+                    <a:lstStyle/>
+                    <a:p>
+                      <a:pPr marL="0" indent="0">
+                        <a:buNone/>
+                      </a:pPr>
+                      <a:endParaRPr lang="en-US" sz="1300" dirty="0">
+                        <a:latin typeface="Calibri" charset="0"/>
+                        <a:ea typeface="Calibri" charset="0"/>
+                        <a:cs typeface="Calibri" charset="0"/>
+                      </a:endParaRPr>
+                    </a:p>
+                  </a:txBody>
+                  <a:tcPr marL="54864" marR="54864" marT="54864" marB="54864" anchor="ctr">
+                    <a:lnL w="9525" cap="flat" cmpd="sng" algn="ctr">
+                      <a:solidFill>
+                        <a:srgbClr val="BFBFBF"/>
+                      </a:solidFill>
+                      <a:prstDash val="solid"/>
+                      <a:round/>
+                      <a:headEnd type="none" w="med" len="med"/>
+                      <a:tailEnd type="none" w="med" len="med"/>
+                    </a:lnL>
+                    <a:lnR w="9525" cap="flat" cmpd="sng" algn="ctr">
+                      <a:solidFill>
+                        <a:srgbClr val="BFBFBF"/>
+                      </a:solidFill>
+                      <a:prstDash val="solid"/>
+                      <a:round/>
+                      <a:headEnd type="none" w="med" len="med"/>
+                      <a:tailEnd type="none" w="med" len="med"/>
+                    </a:lnR>
+                    <a:lnT w="9525" cap="flat" cmpd="sng" algn="ctr">
+                      <a:solidFill>
+                        <a:srgbClr val="BFBFBF"/>
+                      </a:solidFill>
+                      <a:prstDash val="solid"/>
+                      <a:round/>
+                      <a:headEnd type="none" w="med" len="med"/>
+                      <a:tailEnd type="none" w="med" len="med"/>
+                    </a:lnT>
+                    <a:lnB w="9525" cap="flat" cmpd="sng" algn="ctr">
+                      <a:solidFill>
+                        <a:srgbClr val="BFBFBF"/>
+                      </a:solidFill>
+                      <a:prstDash val="solid"/>
+                      <a:round/>
+                      <a:headEnd type="none" w="med" len="med"/>
+                      <a:tailEnd type="none" w="med" len="med"/>
+                    </a:lnB>
+                    <a:solidFill>
+                      <a:srgbClr val="1D2F82"/>
+                    </a:solidFill>
+                  </a:tcPr>
+                </a:tc>
+                <a:extLst>
+                  <a:ext uri="{0D108BD9-81ED-4DB2-BD59-A6C34878D82A}">
+                    <a16:rowId xmlns:a16="http://schemas.microsoft.com/office/drawing/2014/main" val="10000"/>
+                  </a:ext>
+                </a:extLst>
+              </a:tr>
+              <a:tr h="822960">
+                <a:tc>
+                  <a:txBody>
+                    <a:bodyPr wrap="square"/>
+                    <a:lstStyle/>
+                    <a:p>
+                      <a:pPr marL="0" indent="0">
+                        <a:buNone/>
+                      </a:pPr>
+                      <a:r>
+                        <a:rPr sz="1050" b="0">
+                          <a:solidFill>
+                            <a:srgbClr val="000000"/>
+                          </a:solidFill>
+                          <a:latin typeface="Calibri"/>
+                        </a:rPr>
+                        <a:t>A</a:t>
+                      </a:r>
+                      <a:endParaRPr lang="en-US" sz="1300" dirty="0">
+                        <a:latin typeface="Calibri" charset="0"/>
+                        <a:ea typeface="Calibri" charset="0"/>
+                        <a:cs typeface="Calibri" charset="0"/>
+                      </a:endParaRPr>
+                    </a:p>
+                  </a:txBody>
+                  <a:tcPr marL="54864" marR="54864" marT="54864" marB="54864" anchor="ctr">
+                    <a:lnL w="9525" cap="flat" cmpd="sng" algn="ctr">
+                      <a:solidFill>
+                        <a:srgbClr val="BFBFBF"/>
+                      </a:solidFill>
+                      <a:prstDash val="solid"/>
+                      <a:round/>
+                      <a:headEnd type="none" w="med" len="med"/>
+                      <a:tailEnd type="none" w="med" len="med"/>
+                    </a:lnL>
+                    <a:lnR w="9525" cap="flat" cmpd="sng" algn="ctr">
+                      <a:solidFill>
+                        <a:srgbClr val="BFBFBF"/>
+                      </a:solidFill>
+                      <a:prstDash val="solid"/>
+                      <a:round/>
+                      <a:headEnd type="none" w="med" len="med"/>
+                      <a:tailEnd type="none" w="med" len="med"/>
+                    </a:lnR>
+                    <a:lnT w="9525" cap="flat" cmpd="sng" algn="ctr">
+                      <a:solidFill>
+                        <a:srgbClr val="BFBFBF"/>
+                      </a:solidFill>
+                      <a:prstDash val="solid"/>
+                      <a:round/>
+                      <a:headEnd type="none" w="med" len="med"/>
+                      <a:tailEnd type="none" w="med" len="med"/>
+                    </a:lnT>
+                    <a:lnB w="9525" cap="flat" cmpd="sng" algn="ctr">
+                      <a:solidFill>
+                        <a:srgbClr val="BFBFBF"/>
+                      </a:solidFill>
+                      <a:prstDash val="solid"/>
+                      <a:round/>
+                      <a:headEnd type="none" w="med" len="med"/>
+                      <a:tailEnd type="none" w="med" len="med"/>
+                    </a:lnB>
+                  </a:tcPr>
+                </a:tc>
+                <a:tc>
+                  <a:txBody>
+                    <a:bodyPr wrap="square"/>
+                    <a:lstStyle/>
+                    <a:p>
+                      <a:pPr marL="0" indent="0">
+                        <a:buNone/>
+                      </a:pPr>
+                      <a:r>
+                        <a:rPr sz="1050" b="1">
+                          <a:solidFill>
+                            <a:srgbClr val="000000"/>
+                          </a:solidFill>
+                          <a:latin typeface="Calibri"/>
+                        </a:rPr>
+                        <a:t>A · Passive / analogue crosstalk fixes</a:t>
                       </a:r>
                       <a:endParaRPr lang="en-US" sz="1300" dirty="0">
                         <a:latin typeface="Calibri" charset="0"/>
@@ -11208,7 +14593,257 @@
                           </a:solidFill>
                           <a:latin typeface="Calibri"/>
                         </a:rPr>
-                        <a:t>Zhang, Wang, Tolbert &amp; Blalock (2014)</a:t>
+                        <a:t>[1] [3] [4] [11] [12]</a:t>
+                      </a:r>
+                      <a:endParaRPr lang="en-US" sz="1300" dirty="0">
+                        <a:latin typeface="Calibri" charset="0"/>
+                        <a:ea typeface="Calibri" charset="0"/>
+                        <a:cs typeface="Calibri" charset="0"/>
+                      </a:endParaRPr>
+                    </a:p>
+                  </a:txBody>
+                  <a:tcPr marL="54864" marR="54864" marT="54864" marB="54864" anchor="ctr">
+                    <a:lnL w="9525" cap="flat" cmpd="sng" algn="ctr">
+                      <a:solidFill>
+                        <a:srgbClr val="BFBFBF"/>
+                      </a:solidFill>
+                      <a:prstDash val="solid"/>
+                      <a:round/>
+                      <a:headEnd type="none" w="med" len="med"/>
+                      <a:tailEnd type="none" w="med" len="med"/>
+                    </a:lnL>
+                    <a:lnR w="9525" cap="flat" cmpd="sng" algn="ctr">
+                      <a:solidFill>
+                        <a:srgbClr val="BFBFBF"/>
+                      </a:solidFill>
+                      <a:prstDash val="solid"/>
+                      <a:round/>
+                      <a:headEnd type="none" w="med" len="med"/>
+                      <a:tailEnd type="none" w="med" len="med"/>
+                    </a:lnR>
+                    <a:lnT w="9525" cap="flat" cmpd="sng" algn="ctr">
+                      <a:solidFill>
+                        <a:srgbClr val="BFBFBF"/>
+                      </a:solidFill>
+                      <a:prstDash val="solid"/>
+                      <a:round/>
+                      <a:headEnd type="none" w="med" len="med"/>
+                      <a:tailEnd type="none" w="med" len="med"/>
+                    </a:lnT>
+                    <a:lnB w="9525" cap="flat" cmpd="sng" algn="ctr">
+                      <a:solidFill>
+                        <a:srgbClr val="BFBFBF"/>
+                      </a:solidFill>
+                      <a:prstDash val="solid"/>
+                      <a:round/>
+                      <a:headEnd type="none" w="med" len="med"/>
+                      <a:tailEnd type="none" w="med" len="med"/>
+                    </a:lnB>
+                  </a:tcPr>
+                </a:tc>
+                <a:tc gridSpan="2">
+                  <a:txBody>
+                    <a:bodyPr wrap="square"/>
+                    <a:lstStyle/>
+                    <a:p>
+                      <a:pPr marL="0" indent="0">
+                        <a:buNone/>
+                      </a:pPr>
+                      <a:r>
+                        <a:rPr sz="1050" b="0">
+                          <a:solidFill>
+                            <a:srgbClr val="000000"/>
+                          </a:solidFill>
+                          <a:latin typeface="Calibri"/>
+                        </a:rPr>
+                        <a:t>Negative off-bias, RC-diode rails, three-level drive, Miller clamps. Cheap and effective, but the setting is chosen once by hand and never revisited.</a:t>
+                      </a:r>
+                      <a:endParaRPr lang="en-US" sz="1300" dirty="0">
+                        <a:latin typeface="Calibri" charset="0"/>
+                        <a:ea typeface="Calibri" charset="0"/>
+                        <a:cs typeface="Calibri" charset="0"/>
+                      </a:endParaRPr>
+                    </a:p>
+                  </a:txBody>
+                  <a:tcPr marL="54864" marR="54864" marT="54864" marB="54864" anchor="ctr">
+                    <a:lnL w="9525" cap="flat" cmpd="sng" algn="ctr">
+                      <a:solidFill>
+                        <a:srgbClr val="BFBFBF"/>
+                      </a:solidFill>
+                      <a:prstDash val="solid"/>
+                      <a:round/>
+                      <a:headEnd type="none" w="med" len="med"/>
+                      <a:tailEnd type="none" w="med" len="med"/>
+                    </a:lnL>
+                    <a:lnR w="9525" cap="flat" cmpd="sng" algn="ctr">
+                      <a:solidFill>
+                        <a:srgbClr val="BFBFBF"/>
+                      </a:solidFill>
+                      <a:prstDash val="solid"/>
+                      <a:round/>
+                      <a:headEnd type="none" w="med" len="med"/>
+                      <a:tailEnd type="none" w="med" len="med"/>
+                    </a:lnR>
+                    <a:lnT w="9525" cap="flat" cmpd="sng" algn="ctr">
+                      <a:solidFill>
+                        <a:srgbClr val="BFBFBF"/>
+                      </a:solidFill>
+                      <a:prstDash val="solid"/>
+                      <a:round/>
+                      <a:headEnd type="none" w="med" len="med"/>
+                      <a:tailEnd type="none" w="med" len="med"/>
+                    </a:lnT>
+                    <a:lnB w="9525" cap="flat" cmpd="sng" algn="ctr">
+                      <a:solidFill>
+                        <a:srgbClr val="BFBFBF"/>
+                      </a:solidFill>
+                      <a:prstDash val="solid"/>
+                      <a:round/>
+                      <a:headEnd type="none" w="med" len="med"/>
+                      <a:tailEnd type="none" w="med" len="med"/>
+                    </a:lnB>
+                  </a:tcPr>
+                </a:tc>
+                <a:tc hMerge="1">
+                  <a:txBody>
+                    <a:bodyPr/>
+                    <a:lstStyle/>
+                    <a:p>
+                      <a:pPr marL="0" indent="0">
+                        <a:buNone/>
+                      </a:pPr>
+                      <a:endParaRPr lang="en-US" sz="1300" dirty="0">
+                        <a:latin typeface="Calibri" charset="0"/>
+                        <a:ea typeface="Calibri" charset="0"/>
+                        <a:cs typeface="Calibri" charset="0"/>
+                      </a:endParaRPr>
+                    </a:p>
+                  </a:txBody>
+                  <a:tcPr marL="54864" marR="54864" marT="54864" marB="54864" anchor="ctr">
+                    <a:lnL w="9525" cap="flat" cmpd="sng" algn="ctr">
+                      <a:solidFill>
+                        <a:srgbClr val="BFBFBF"/>
+                      </a:solidFill>
+                      <a:prstDash val="solid"/>
+                      <a:round/>
+                      <a:headEnd type="none" w="med" len="med"/>
+                      <a:tailEnd type="none" w="med" len="med"/>
+                    </a:lnL>
+                    <a:lnR w="9525" cap="flat" cmpd="sng" algn="ctr">
+                      <a:solidFill>
+                        <a:srgbClr val="BFBFBF"/>
+                      </a:solidFill>
+                      <a:prstDash val="solid"/>
+                      <a:round/>
+                      <a:headEnd type="none" w="med" len="med"/>
+                      <a:tailEnd type="none" w="med" len="med"/>
+                    </a:lnR>
+                    <a:lnT w="9525" cap="flat" cmpd="sng" algn="ctr">
+                      <a:solidFill>
+                        <a:srgbClr val="BFBFBF"/>
+                      </a:solidFill>
+                      <a:prstDash val="solid"/>
+                      <a:round/>
+                      <a:headEnd type="none" w="med" len="med"/>
+                      <a:tailEnd type="none" w="med" len="med"/>
+                    </a:lnT>
+                    <a:lnB w="9525" cap="flat" cmpd="sng" algn="ctr">
+                      <a:solidFill>
+                        <a:srgbClr val="BFBFBF"/>
+                      </a:solidFill>
+                      <a:prstDash val="solid"/>
+                      <a:round/>
+                      <a:headEnd type="none" w="med" len="med"/>
+                      <a:tailEnd type="none" w="med" len="med"/>
+                    </a:lnB>
+                  </a:tcPr>
+                </a:tc>
+                <a:extLst>
+                  <a:ext uri="{0D108BD9-81ED-4DB2-BD59-A6C34878D82A}">
+                    <a16:rowId xmlns:a16="http://schemas.microsoft.com/office/drawing/2014/main" val="10001"/>
+                  </a:ext>
+                </a:extLst>
+              </a:tr>
+              <a:tr h="822960">
+                <a:tc>
+                  <a:txBody>
+                    <a:bodyPr wrap="square"/>
+                    <a:lstStyle/>
+                    <a:p>
+                      <a:pPr marL="0" indent="0">
+                        <a:buNone/>
+                      </a:pPr>
+                      <a:r>
+                        <a:rPr sz="1050" b="0">
+                          <a:solidFill>
+                            <a:srgbClr val="000000"/>
+                          </a:solidFill>
+                          <a:latin typeface="Calibri"/>
+                        </a:rPr>
+                        <a:t>B</a:t>
+                      </a:r>
+                      <a:endParaRPr lang="en-US" sz="1300" dirty="0">
+                        <a:latin typeface="Calibri" charset="0"/>
+                        <a:ea typeface="Calibri" charset="0"/>
+                        <a:cs typeface="Calibri" charset="0"/>
+                      </a:endParaRPr>
+                    </a:p>
+                  </a:txBody>
+                  <a:tcPr marL="54864" marR="54864" marT="54864" marB="54864" anchor="ctr">
+                    <a:lnL w="9525" cap="flat" cmpd="sng" algn="ctr">
+                      <a:solidFill>
+                        <a:srgbClr val="BFBFBF"/>
+                      </a:solidFill>
+                      <a:prstDash val="solid"/>
+                      <a:round/>
+                      <a:headEnd type="none" w="med" len="med"/>
+                      <a:tailEnd type="none" w="med" len="med"/>
+                    </a:lnL>
+                    <a:lnR w="9525" cap="flat" cmpd="sng" algn="ctr">
+                      <a:solidFill>
+                        <a:srgbClr val="BFBFBF"/>
+                      </a:solidFill>
+                      <a:prstDash val="solid"/>
+                      <a:round/>
+                      <a:headEnd type="none" w="med" len="med"/>
+                      <a:tailEnd type="none" w="med" len="med"/>
+                    </a:lnR>
+                    <a:lnT w="9525" cap="flat" cmpd="sng" algn="ctr">
+                      <a:solidFill>
+                        <a:srgbClr val="BFBFBF"/>
+                      </a:solidFill>
+                      <a:prstDash val="solid"/>
+                      <a:round/>
+                      <a:headEnd type="none" w="med" len="med"/>
+                      <a:tailEnd type="none" w="med" len="med"/>
+                    </a:lnT>
+                    <a:lnB w="9525" cap="flat" cmpd="sng" algn="ctr">
+                      <a:solidFill>
+                        <a:srgbClr val="BFBFBF"/>
+                      </a:solidFill>
+                      <a:prstDash val="solid"/>
+                      <a:round/>
+                      <a:headEnd type="none" w="med" len="med"/>
+                      <a:tailEnd type="none" w="med" len="med"/>
+                    </a:lnB>
+                  </a:tcPr>
+                </a:tc>
+                <a:tc>
+                  <a:txBody>
+                    <a:bodyPr wrap="square"/>
+                    <a:lstStyle/>
+                    <a:p>
+                      <a:pPr marL="0" indent="0">
+                        <a:buNone/>
+                      </a:pPr>
+                      <a:r>
+                        <a:rPr sz="1050" b="1">
+                          <a:solidFill>
+                            <a:srgbClr val="000000"/>
+                          </a:solidFill>
+                          <a:latin typeface="Calibri"/>
+                        </a:rPr>
+                        <a:t>B · Closed-loop analogue adaptation</a:t>
                       </a:r>
                       <a:endParaRPr lang="en-US" sz="1300" dirty="0">
                         <a:latin typeface="Calibri" charset="0"/>
@@ -11271,7 +14906,7 @@
                           </a:solidFill>
                           <a:latin typeface="Calibri"/>
                         </a:rPr>
-                        <a:t>Active Gate Driver for Crosstalk Suppression of SiC Devices in a Phase-Leg Configuration</a:t>
+                        <a:t>[5] [6] [7]</a:t>
                       </a:r>
                       <a:endParaRPr lang="en-US" sz="1300" dirty="0">
                         <a:latin typeface="Calibri" charset="0"/>
@@ -11279,7 +14914,241 @@
                         <a:cs typeface="Calibri" charset="0"/>
                       </a:endParaRPr>
                     </a:p>
+                  </a:txBody>
+                  <a:tcPr marL="54864" marR="54864" marT="54864" marB="54864" anchor="ctr">
+                    <a:lnL w="9525" cap="flat" cmpd="sng" algn="ctr">
+                      <a:solidFill>
+                        <a:srgbClr val="BFBFBF"/>
+                      </a:solidFill>
+                      <a:prstDash val="solid"/>
+                      <a:round/>
+                      <a:headEnd type="none" w="med" len="med"/>
+                      <a:tailEnd type="none" w="med" len="med"/>
+                    </a:lnL>
+                    <a:lnR w="9525" cap="flat" cmpd="sng" algn="ctr">
+                      <a:solidFill>
+                        <a:srgbClr val="BFBFBF"/>
+                      </a:solidFill>
+                      <a:prstDash val="solid"/>
+                      <a:round/>
+                      <a:headEnd type="none" w="med" len="med"/>
+                      <a:tailEnd type="none" w="med" len="med"/>
+                    </a:lnR>
+                    <a:lnT w="9525" cap="flat" cmpd="sng" algn="ctr">
+                      <a:solidFill>
+                        <a:srgbClr val="BFBFBF"/>
+                      </a:solidFill>
+                      <a:prstDash val="solid"/>
+                      <a:round/>
+                      <a:headEnd type="none" w="med" len="med"/>
+                      <a:tailEnd type="none" w="med" len="med"/>
+                    </a:lnT>
+                    <a:lnB w="9525" cap="flat" cmpd="sng" algn="ctr">
+                      <a:solidFill>
+                        <a:srgbClr val="BFBFBF"/>
+                      </a:solidFill>
+                      <a:prstDash val="solid"/>
+                      <a:round/>
+                      <a:headEnd type="none" w="med" len="med"/>
+                      <a:tailEnd type="none" w="med" len="med"/>
+                    </a:lnB>
+                  </a:tcPr>
+                </a:tc>
+                <a:tc gridSpan="2">
+                  <a:txBody>
+                    <a:bodyPr wrap="square"/>
+                    <a:lstStyle/>
                     <a:p>
+                      <a:pPr marL="0" indent="0">
+                        <a:buNone/>
+                      </a:pPr>
+                      <a:r>
+                        <a:rPr sz="1050" b="0">
+                          <a:solidFill>
+                            <a:srgbClr val="000000"/>
+                          </a:solidFill>
+                          <a:latin typeface="Calibri"/>
+                        </a:rPr>
+                        <a:t>Sense the operating point, regulate drive strength or timing in the loop. Reports large gains — 30.5 % less overshoot, 75 % less turn-off loss — against a conventional driver.</a:t>
+                      </a:r>
+                      <a:endParaRPr lang="en-US" sz="1300" dirty="0">
+                        <a:latin typeface="Calibri" charset="0"/>
+                        <a:ea typeface="Calibri" charset="0"/>
+                        <a:cs typeface="Calibri" charset="0"/>
+                      </a:endParaRPr>
+                    </a:p>
+                  </a:txBody>
+                  <a:tcPr marL="54864" marR="54864" marT="54864" marB="54864" anchor="ctr">
+                    <a:lnL w="9525" cap="flat" cmpd="sng" algn="ctr">
+                      <a:solidFill>
+                        <a:srgbClr val="BFBFBF"/>
+                      </a:solidFill>
+                      <a:prstDash val="solid"/>
+                      <a:round/>
+                      <a:headEnd type="none" w="med" len="med"/>
+                      <a:tailEnd type="none" w="med" len="med"/>
+                    </a:lnL>
+                    <a:lnR w="9525" cap="flat" cmpd="sng" algn="ctr">
+                      <a:solidFill>
+                        <a:srgbClr val="BFBFBF"/>
+                      </a:solidFill>
+                      <a:prstDash val="solid"/>
+                      <a:round/>
+                      <a:headEnd type="none" w="med" len="med"/>
+                      <a:tailEnd type="none" w="med" len="med"/>
+                    </a:lnR>
+                    <a:lnT w="9525" cap="flat" cmpd="sng" algn="ctr">
+                      <a:solidFill>
+                        <a:srgbClr val="BFBFBF"/>
+                      </a:solidFill>
+                      <a:prstDash val="solid"/>
+                      <a:round/>
+                      <a:headEnd type="none" w="med" len="med"/>
+                      <a:tailEnd type="none" w="med" len="med"/>
+                    </a:lnT>
+                    <a:lnB w="9525" cap="flat" cmpd="sng" algn="ctr">
+                      <a:solidFill>
+                        <a:srgbClr val="BFBFBF"/>
+                      </a:solidFill>
+                      <a:prstDash val="solid"/>
+                      <a:round/>
+                      <a:headEnd type="none" w="med" len="med"/>
+                      <a:tailEnd type="none" w="med" len="med"/>
+                    </a:lnB>
+                  </a:tcPr>
+                </a:tc>
+                <a:tc hMerge="1">
+                  <a:txBody>
+                    <a:bodyPr/>
+                    <a:lstStyle/>
+                    <a:p>
+                      <a:pPr marL="0" indent="0">
+                        <a:buNone/>
+                      </a:pPr>
+                      <a:endParaRPr lang="en-US" sz="1300" dirty="0">
+                        <a:latin typeface="Calibri" charset="0"/>
+                        <a:ea typeface="Calibri" charset="0"/>
+                        <a:cs typeface="Calibri" charset="0"/>
+                      </a:endParaRPr>
+                    </a:p>
+                  </a:txBody>
+                  <a:tcPr marL="54864" marR="54864" marT="54864" marB="54864" anchor="ctr">
+                    <a:lnL w="9525" cap="flat" cmpd="sng" algn="ctr">
+                      <a:solidFill>
+                        <a:srgbClr val="BFBFBF"/>
+                      </a:solidFill>
+                      <a:prstDash val="solid"/>
+                      <a:round/>
+                      <a:headEnd type="none" w="med" len="med"/>
+                      <a:tailEnd type="none" w="med" len="med"/>
+                    </a:lnL>
+                    <a:lnR w="9525" cap="flat" cmpd="sng" algn="ctr">
+                      <a:solidFill>
+                        <a:srgbClr val="BFBFBF"/>
+                      </a:solidFill>
+                      <a:prstDash val="solid"/>
+                      <a:round/>
+                      <a:headEnd type="none" w="med" len="med"/>
+                      <a:tailEnd type="none" w="med" len="med"/>
+                    </a:lnR>
+                    <a:lnT w="9525" cap="flat" cmpd="sng" algn="ctr">
+                      <a:solidFill>
+                        <a:srgbClr val="BFBFBF"/>
+                      </a:solidFill>
+                      <a:prstDash val="solid"/>
+                      <a:round/>
+                      <a:headEnd type="none" w="med" len="med"/>
+                      <a:tailEnd type="none" w="med" len="med"/>
+                    </a:lnT>
+                    <a:lnB w="9525" cap="flat" cmpd="sng" algn="ctr">
+                      <a:solidFill>
+                        <a:srgbClr val="BFBFBF"/>
+                      </a:solidFill>
+                      <a:prstDash val="solid"/>
+                      <a:round/>
+                      <a:headEnd type="none" w="med" len="med"/>
+                      <a:tailEnd type="none" w="med" len="med"/>
+                    </a:lnB>
+                  </a:tcPr>
+                </a:tc>
+                <a:extLst>
+                  <a:ext uri="{0D108BD9-81ED-4DB2-BD59-A6C34878D82A}">
+                    <a16:rowId xmlns:a16="http://schemas.microsoft.com/office/drawing/2014/main" val="10002"/>
+                  </a:ext>
+                </a:extLst>
+              </a:tr>
+              <a:tr h="822960">
+                <a:tc>
+                  <a:txBody>
+                    <a:bodyPr wrap="square"/>
+                    <a:lstStyle/>
+                    <a:p>
+                      <a:pPr marL="0" indent="0">
+                        <a:buNone/>
+                      </a:pPr>
+                      <a:r>
+                        <a:rPr sz="1050" b="0">
+                          <a:solidFill>
+                            <a:srgbClr val="000000"/>
+                          </a:solidFill>
+                          <a:latin typeface="Calibri"/>
+                        </a:rPr>
+                        <a:t>C</a:t>
+                      </a:r>
+                      <a:endParaRPr lang="en-US" sz="1300" dirty="0">
+                        <a:latin typeface="Calibri" charset="0"/>
+                        <a:ea typeface="Calibri" charset="0"/>
+                        <a:cs typeface="Calibri" charset="0"/>
+                      </a:endParaRPr>
+                    </a:p>
+                  </a:txBody>
+                  <a:tcPr marL="54864" marR="54864" marT="54864" marB="54864" anchor="ctr">
+                    <a:lnL w="9525" cap="flat" cmpd="sng" algn="ctr">
+                      <a:solidFill>
+                        <a:srgbClr val="BFBFBF"/>
+                      </a:solidFill>
+                      <a:prstDash val="solid"/>
+                      <a:round/>
+                      <a:headEnd type="none" w="med" len="med"/>
+                      <a:tailEnd type="none" w="med" len="med"/>
+                    </a:lnL>
+                    <a:lnR w="9525" cap="flat" cmpd="sng" algn="ctr">
+                      <a:solidFill>
+                        <a:srgbClr val="BFBFBF"/>
+                      </a:solidFill>
+                      <a:prstDash val="solid"/>
+                      <a:round/>
+                      <a:headEnd type="none" w="med" len="med"/>
+                      <a:tailEnd type="none" w="med" len="med"/>
+                    </a:lnR>
+                    <a:lnT w="9525" cap="flat" cmpd="sng" algn="ctr">
+                      <a:solidFill>
+                        <a:srgbClr val="BFBFBF"/>
+                      </a:solidFill>
+                      <a:prstDash val="solid"/>
+                      <a:round/>
+                      <a:headEnd type="none" w="med" len="med"/>
+                      <a:tailEnd type="none" w="med" len="med"/>
+                    </a:lnT>
+                    <a:lnB w="9525" cap="flat" cmpd="sng" algn="ctr">
+                      <a:solidFill>
+                        <a:srgbClr val="BFBFBF"/>
+                      </a:solidFill>
+                      <a:prstDash val="solid"/>
+                      <a:round/>
+                      <a:headEnd type="none" w="med" len="med"/>
+                      <a:tailEnd type="none" w="med" len="med"/>
+                    </a:lnB>
+                  </a:tcPr>
+                </a:tc>
+                <a:tc>
+                  <a:txBody>
+                    <a:bodyPr wrap="square"/>
+                    <a:lstStyle/>
+                    <a:p>
+                      <a:pPr marL="0" indent="0">
+                        <a:buNone/>
+                      </a:pPr>
                       <a:r>
                         <a:rPr sz="1050" b="1">
                           <a:solidFill>
@@ -11287,8 +15156,13 @@
                           </a:solidFill>
                           <a:latin typeface="Calibri"/>
                         </a:rPr>
-                        <a:t>IEEE Trans. Power Electron., 29(4), 1986–1997</a:t>
+                        <a:t>C · Adaptive dead-time control</a:t>
                       </a:r>
+                      <a:endParaRPr lang="en-US" sz="1300" dirty="0">
+                        <a:latin typeface="Calibri" charset="0"/>
+                        <a:ea typeface="Calibri" charset="0"/>
+                        <a:cs typeface="Calibri" charset="0"/>
+                      </a:endParaRPr>
                     </a:p>
                   </a:txBody>
                   <a:tcPr marL="54864" marR="54864" marT="54864" marB="54864" anchor="ctr">
@@ -11345,7 +15219,257 @@
                           </a:solidFill>
                           <a:latin typeface="Calibri"/>
                         </a:rPr>
-                        <a:t>Two gate-assist circuits on a SiC MOSFET phase leg; suppresses the spurious gate pulse</a:t>
+                        <a:t>[8] [13]</a:t>
+                      </a:r>
+                      <a:endParaRPr lang="en-US" sz="1300" dirty="0">
+                        <a:latin typeface="Calibri" charset="0"/>
+                        <a:ea typeface="Calibri" charset="0"/>
+                        <a:cs typeface="Calibri" charset="0"/>
+                      </a:endParaRPr>
+                    </a:p>
+                  </a:txBody>
+                  <a:tcPr marL="54864" marR="54864" marT="54864" marB="54864" anchor="ctr">
+                    <a:lnL w="9525" cap="flat" cmpd="sng" algn="ctr">
+                      <a:solidFill>
+                        <a:srgbClr val="BFBFBF"/>
+                      </a:solidFill>
+                      <a:prstDash val="solid"/>
+                      <a:round/>
+                      <a:headEnd type="none" w="med" len="med"/>
+                      <a:tailEnd type="none" w="med" len="med"/>
+                    </a:lnL>
+                    <a:lnR w="9525" cap="flat" cmpd="sng" algn="ctr">
+                      <a:solidFill>
+                        <a:srgbClr val="BFBFBF"/>
+                      </a:solidFill>
+                      <a:prstDash val="solid"/>
+                      <a:round/>
+                      <a:headEnd type="none" w="med" len="med"/>
+                      <a:tailEnd type="none" w="med" len="med"/>
+                    </a:lnR>
+                    <a:lnT w="9525" cap="flat" cmpd="sng" algn="ctr">
+                      <a:solidFill>
+                        <a:srgbClr val="BFBFBF"/>
+                      </a:solidFill>
+                      <a:prstDash val="solid"/>
+                      <a:round/>
+                      <a:headEnd type="none" w="med" len="med"/>
+                      <a:tailEnd type="none" w="med" len="med"/>
+                    </a:lnT>
+                    <a:lnB w="9525" cap="flat" cmpd="sng" algn="ctr">
+                      <a:solidFill>
+                        <a:srgbClr val="BFBFBF"/>
+                      </a:solidFill>
+                      <a:prstDash val="solid"/>
+                      <a:round/>
+                      <a:headEnd type="none" w="med" len="med"/>
+                      <a:tailEnd type="none" w="med" len="med"/>
+                    </a:lnB>
+                  </a:tcPr>
+                </a:tc>
+                <a:tc gridSpan="2">
+                  <a:txBody>
+                    <a:bodyPr wrap="square"/>
+                    <a:lstStyle/>
+                    <a:p>
+                      <a:pPr marL="0" indent="0">
+                        <a:buNone/>
+                      </a:pPr>
+                      <a:r>
+                        <a:rPr sz="1050" b="0">
+                          <a:solidFill>
+                            <a:srgbClr val="000000"/>
+                          </a:solidFill>
+                          <a:latin typeface="Calibri"/>
+                        </a:rPr>
+                        <a:t>Dead time driven to sub-nanosecond across load. The one field our own freeze test finds actually carries the benefit — and only at light load.</a:t>
+                      </a:r>
+                      <a:endParaRPr lang="en-US" sz="1300" dirty="0">
+                        <a:latin typeface="Calibri" charset="0"/>
+                        <a:ea typeface="Calibri" charset="0"/>
+                        <a:cs typeface="Calibri" charset="0"/>
+                      </a:endParaRPr>
+                    </a:p>
+                  </a:txBody>
+                  <a:tcPr marL="54864" marR="54864" marT="54864" marB="54864" anchor="ctr">
+                    <a:lnL w="9525" cap="flat" cmpd="sng" algn="ctr">
+                      <a:solidFill>
+                        <a:srgbClr val="BFBFBF"/>
+                      </a:solidFill>
+                      <a:prstDash val="solid"/>
+                      <a:round/>
+                      <a:headEnd type="none" w="med" len="med"/>
+                      <a:tailEnd type="none" w="med" len="med"/>
+                    </a:lnL>
+                    <a:lnR w="9525" cap="flat" cmpd="sng" algn="ctr">
+                      <a:solidFill>
+                        <a:srgbClr val="BFBFBF"/>
+                      </a:solidFill>
+                      <a:prstDash val="solid"/>
+                      <a:round/>
+                      <a:headEnd type="none" w="med" len="med"/>
+                      <a:tailEnd type="none" w="med" len="med"/>
+                    </a:lnR>
+                    <a:lnT w="9525" cap="flat" cmpd="sng" algn="ctr">
+                      <a:solidFill>
+                        <a:srgbClr val="BFBFBF"/>
+                      </a:solidFill>
+                      <a:prstDash val="solid"/>
+                      <a:round/>
+                      <a:headEnd type="none" w="med" len="med"/>
+                      <a:tailEnd type="none" w="med" len="med"/>
+                    </a:lnT>
+                    <a:lnB w="9525" cap="flat" cmpd="sng" algn="ctr">
+                      <a:solidFill>
+                        <a:srgbClr val="BFBFBF"/>
+                      </a:solidFill>
+                      <a:prstDash val="solid"/>
+                      <a:round/>
+                      <a:headEnd type="none" w="med" len="med"/>
+                      <a:tailEnd type="none" w="med" len="med"/>
+                    </a:lnB>
+                  </a:tcPr>
+                </a:tc>
+                <a:tc hMerge="1">
+                  <a:txBody>
+                    <a:bodyPr/>
+                    <a:lstStyle/>
+                    <a:p>
+                      <a:pPr marL="0" indent="0">
+                        <a:buNone/>
+                      </a:pPr>
+                      <a:endParaRPr lang="en-US" sz="1300" dirty="0">
+                        <a:latin typeface="Calibri" charset="0"/>
+                        <a:ea typeface="Calibri" charset="0"/>
+                        <a:cs typeface="Calibri" charset="0"/>
+                      </a:endParaRPr>
+                    </a:p>
+                  </a:txBody>
+                  <a:tcPr marL="54864" marR="54864" marT="54864" marB="54864" anchor="ctr">
+                    <a:lnL w="9525" cap="flat" cmpd="sng" algn="ctr">
+                      <a:solidFill>
+                        <a:srgbClr val="BFBFBF"/>
+                      </a:solidFill>
+                      <a:prstDash val="solid"/>
+                      <a:round/>
+                      <a:headEnd type="none" w="med" len="med"/>
+                      <a:tailEnd type="none" w="med" len="med"/>
+                    </a:lnL>
+                    <a:lnR w="9525" cap="flat" cmpd="sng" algn="ctr">
+                      <a:solidFill>
+                        <a:srgbClr val="BFBFBF"/>
+                      </a:solidFill>
+                      <a:prstDash val="solid"/>
+                      <a:round/>
+                      <a:headEnd type="none" w="med" len="med"/>
+                      <a:tailEnd type="none" w="med" len="med"/>
+                    </a:lnR>
+                    <a:lnT w="9525" cap="flat" cmpd="sng" algn="ctr">
+                      <a:solidFill>
+                        <a:srgbClr val="BFBFBF"/>
+                      </a:solidFill>
+                      <a:prstDash val="solid"/>
+                      <a:round/>
+                      <a:headEnd type="none" w="med" len="med"/>
+                      <a:tailEnd type="none" w="med" len="med"/>
+                    </a:lnT>
+                    <a:lnB w="9525" cap="flat" cmpd="sng" algn="ctr">
+                      <a:solidFill>
+                        <a:srgbClr val="BFBFBF"/>
+                      </a:solidFill>
+                      <a:prstDash val="solid"/>
+                      <a:round/>
+                      <a:headEnd type="none" w="med" len="med"/>
+                      <a:tailEnd type="none" w="med" len="med"/>
+                    </a:lnB>
+                  </a:tcPr>
+                </a:tc>
+                <a:extLst>
+                  <a:ext uri="{0D108BD9-81ED-4DB2-BD59-A6C34878D82A}">
+                    <a16:rowId xmlns:a16="http://schemas.microsoft.com/office/drawing/2014/main" val="10003"/>
+                  </a:ext>
+                </a:extLst>
+              </a:tr>
+              <a:tr h="822960">
+                <a:tc>
+                  <a:txBody>
+                    <a:bodyPr wrap="square"/>
+                    <a:lstStyle/>
+                    <a:p>
+                      <a:pPr marL="0" indent="0">
+                        <a:buNone/>
+                      </a:pPr>
+                      <a:r>
+                        <a:rPr sz="1050" b="0">
+                          <a:solidFill>
+                            <a:srgbClr val="000000"/>
+                          </a:solidFill>
+                          <a:latin typeface="Calibri"/>
+                        </a:rPr>
+                        <a:t>D</a:t>
+                      </a:r>
+                      <a:endParaRPr lang="en-US" sz="1300" dirty="0">
+                        <a:latin typeface="Calibri" charset="0"/>
+                        <a:ea typeface="Calibri" charset="0"/>
+                        <a:cs typeface="Calibri" charset="0"/>
+                      </a:endParaRPr>
+                    </a:p>
+                  </a:txBody>
+                  <a:tcPr marL="54864" marR="54864" marT="54864" marB="54864" anchor="ctr">
+                    <a:lnL w="9525" cap="flat" cmpd="sng" algn="ctr">
+                      <a:solidFill>
+                        <a:srgbClr val="BFBFBF"/>
+                      </a:solidFill>
+                      <a:prstDash val="solid"/>
+                      <a:round/>
+                      <a:headEnd type="none" w="med" len="med"/>
+                      <a:tailEnd type="none" w="med" len="med"/>
+                    </a:lnL>
+                    <a:lnR w="9525" cap="flat" cmpd="sng" algn="ctr">
+                      <a:solidFill>
+                        <a:srgbClr val="BFBFBF"/>
+                      </a:solidFill>
+                      <a:prstDash val="solid"/>
+                      <a:round/>
+                      <a:headEnd type="none" w="med" len="med"/>
+                      <a:tailEnd type="none" w="med" len="med"/>
+                    </a:lnR>
+                    <a:lnT w="9525" cap="flat" cmpd="sng" algn="ctr">
+                      <a:solidFill>
+                        <a:srgbClr val="BFBFBF"/>
+                      </a:solidFill>
+                      <a:prstDash val="solid"/>
+                      <a:round/>
+                      <a:headEnd type="none" w="med" len="med"/>
+                      <a:tailEnd type="none" w="med" len="med"/>
+                    </a:lnT>
+                    <a:lnB w="9525" cap="flat" cmpd="sng" algn="ctr">
+                      <a:solidFill>
+                        <a:srgbClr val="BFBFBF"/>
+                      </a:solidFill>
+                      <a:prstDash val="solid"/>
+                      <a:round/>
+                      <a:headEnd type="none" w="med" len="med"/>
+                      <a:tailEnd type="none" w="med" len="med"/>
+                    </a:lnB>
+                  </a:tcPr>
+                </a:tc>
+                <a:tc>
+                  <a:txBody>
+                    <a:bodyPr wrap="square"/>
+                    <a:lstStyle/>
+                    <a:p>
+                      <a:pPr marL="0" indent="0">
+                        <a:buNone/>
+                      </a:pPr>
+                      <a:r>
+                        <a:rPr sz="1050" b="1">
+                          <a:solidFill>
+                            <a:srgbClr val="000000"/>
+                          </a:solidFill>
+                          <a:latin typeface="Calibri"/>
+                        </a:rPr>
+                        <a:t>D · DIGITAL / segmented drive  — where this project sits</a:t>
                       </a:r>
                       <a:endParaRPr lang="en-US" sz="1300" dirty="0">
                         <a:latin typeface="Calibri" charset="0"/>
@@ -11408,7 +15532,7 @@
                           </a:solidFill>
                           <a:latin typeface="Calibri"/>
                         </a:rPr>
-                        <a:t>Up to 17 % less turn-on loss. SiC has a body diode, so the third-quadrant cost of negative off-bias — the GaN-specific trade — never arises.</a:t>
+                        <a:t>[9] BASE   [10]</a:t>
                       </a:r>
                       <a:endParaRPr lang="en-US" sz="1300" dirty="0">
                         <a:latin typeface="Calibri" charset="0"/>
@@ -11456,14 +15580,7 @@
                     </a:lnB>
                   </a:tcPr>
                 </a:tc>
-                <a:extLst>
-                  <a:ext uri="{0D108BD9-81ED-4DB2-BD59-A6C34878D82A}">
-                    <a16:rowId xmlns:a16="http://schemas.microsoft.com/office/drawing/2014/main" val="10001"/>
-                  </a:ext>
-                </a:extLst>
-              </a:tr>
-              <a:tr h="868680">
-                <a:tc>
+                <a:tc gridSpan="2">
                   <a:txBody>
                     <a:bodyPr wrap="square"/>
                     <a:lstStyle/>
@@ -11478,7 +15595,7 @@
                           </a:solidFill>
                           <a:latin typeface="Calibri"/>
                         </a:rPr>
-                        <a:t>2</a:t>
+                        <a:t>The gate waveform selected by a multibit CODE rather than a resistor network. [9] is the BASE PAPER — doi.org/10.1002/cta.3136 — and [10] is the closest GaN implementation. Digital means FPGA-implementable, and the code space can be searched exhaustively.</a:t>
                       </a:r>
                       <a:endParaRPr lang="en-US" sz="1300" dirty="0">
                         <a:latin typeface="Calibri" charset="0"/>
@@ -11526,900 +15643,14 @@
                     </a:lnB>
                   </a:tcPr>
                 </a:tc>
-                <a:tc>
+                <a:tc hMerge="1">
                   <a:txBody>
-                    <a:bodyPr wrap="square"/>
+                    <a:bodyPr/>
                     <a:lstStyle/>
                     <a:p>
                       <a:pPr marL="0" indent="0">
                         <a:buNone/>
                       </a:pPr>
-                      <a:r>
-                        <a:rPr sz="1050" b="0">
-                          <a:solidFill>
-                            <a:srgbClr val="000000"/>
-                          </a:solidFill>
-                          <a:latin typeface="Calibri"/>
-                        </a:rPr>
-                        <a:t>Xie, Wang, Tang, Yang &amp; Chen (2017)</a:t>
-                      </a:r>
-                      <a:endParaRPr lang="en-US" sz="1300" dirty="0">
-                        <a:latin typeface="Calibri" charset="0"/>
-                        <a:ea typeface="Calibri" charset="0"/>
-                        <a:cs typeface="Calibri" charset="0"/>
-                      </a:endParaRPr>
-                    </a:p>
-                  </a:txBody>
-                  <a:tcPr marL="54864" marR="54864" marT="54864" marB="54864" anchor="ctr">
-                    <a:lnL w="9525" cap="flat" cmpd="sng" algn="ctr">
-                      <a:solidFill>
-                        <a:srgbClr val="BFBFBF"/>
-                      </a:solidFill>
-                      <a:prstDash val="solid"/>
-                      <a:round/>
-                      <a:headEnd type="none" w="med" len="med"/>
-                      <a:tailEnd type="none" w="med" len="med"/>
-                    </a:lnL>
-                    <a:lnR w="9525" cap="flat" cmpd="sng" algn="ctr">
-                      <a:solidFill>
-                        <a:srgbClr val="BFBFBF"/>
-                      </a:solidFill>
-                      <a:prstDash val="solid"/>
-                      <a:round/>
-                      <a:headEnd type="none" w="med" len="med"/>
-                      <a:tailEnd type="none" w="med" len="med"/>
-                    </a:lnR>
-                    <a:lnT w="9525" cap="flat" cmpd="sng" algn="ctr">
-                      <a:solidFill>
-                        <a:srgbClr val="BFBFBF"/>
-                      </a:solidFill>
-                      <a:prstDash val="solid"/>
-                      <a:round/>
-                      <a:headEnd type="none" w="med" len="med"/>
-                      <a:tailEnd type="none" w="med" len="med"/>
-                    </a:lnT>
-                    <a:lnB w="9525" cap="flat" cmpd="sng" algn="ctr">
-                      <a:solidFill>
-                        <a:srgbClr val="BFBFBF"/>
-                      </a:solidFill>
-                      <a:prstDash val="solid"/>
-                      <a:round/>
-                      <a:headEnd type="none" w="med" len="med"/>
-                      <a:tailEnd type="none" w="med" len="med"/>
-                    </a:lnB>
-                  </a:tcPr>
-                </a:tc>
-                <a:tc>
-                  <a:txBody>
-                    <a:bodyPr wrap="square"/>
-                    <a:lstStyle/>
-                    <a:p>
-                      <a:pPr marL="0" indent="0">
-                        <a:buNone/>
-                      </a:pPr>
-                      <a:r>
-                        <a:rPr sz="1050" b="0">
-                          <a:solidFill>
-                            <a:srgbClr val="000000"/>
-                          </a:solidFill>
-                          <a:latin typeface="Calibri"/>
-                        </a:rPr>
-                        <a:t>An Analytical Model for False Turn-On Evaluation of High-Voltage Enhancement-Mode GaN Transistor in Bridge-Leg Configuration</a:t>
-                      </a:r>
-                      <a:endParaRPr lang="en-US" sz="1300" dirty="0">
-                        <a:latin typeface="Calibri" charset="0"/>
-                        <a:ea typeface="Calibri" charset="0"/>
-                        <a:cs typeface="Calibri" charset="0"/>
-                      </a:endParaRPr>
-                    </a:p>
-                    <a:p>
-                      <a:r>
-                        <a:rPr sz="1050" b="1">
-                          <a:solidFill>
-                            <a:srgbClr val="000000"/>
-                          </a:solidFill>
-                          <a:latin typeface="Calibri"/>
-                        </a:rPr>
-                        <a:t>IEEE Trans. Power Electron., 32(8), 6416–6433</a:t>
-                      </a:r>
-                    </a:p>
-                  </a:txBody>
-                  <a:tcPr marL="54864" marR="54864" marT="54864" marB="54864" anchor="ctr">
-                    <a:lnL w="9525" cap="flat" cmpd="sng" algn="ctr">
-                      <a:solidFill>
-                        <a:srgbClr val="BFBFBF"/>
-                      </a:solidFill>
-                      <a:prstDash val="solid"/>
-                      <a:round/>
-                      <a:headEnd type="none" w="med" len="med"/>
-                      <a:tailEnd type="none" w="med" len="med"/>
-                    </a:lnL>
-                    <a:lnR w="9525" cap="flat" cmpd="sng" algn="ctr">
-                      <a:solidFill>
-                        <a:srgbClr val="BFBFBF"/>
-                      </a:solidFill>
-                      <a:prstDash val="solid"/>
-                      <a:round/>
-                      <a:headEnd type="none" w="med" len="med"/>
-                      <a:tailEnd type="none" w="med" len="med"/>
-                    </a:lnR>
-                    <a:lnT w="9525" cap="flat" cmpd="sng" algn="ctr">
-                      <a:solidFill>
-                        <a:srgbClr val="BFBFBF"/>
-                      </a:solidFill>
-                      <a:prstDash val="solid"/>
-                      <a:round/>
-                      <a:headEnd type="none" w="med" len="med"/>
-                      <a:tailEnd type="none" w="med" len="med"/>
-                    </a:lnT>
-                    <a:lnB w="9525" cap="flat" cmpd="sng" algn="ctr">
-                      <a:solidFill>
-                        <a:srgbClr val="BFBFBF"/>
-                      </a:solidFill>
-                      <a:prstDash val="solid"/>
-                      <a:round/>
-                      <a:headEnd type="none" w="med" len="med"/>
-                      <a:tailEnd type="none" w="med" len="med"/>
-                    </a:lnB>
-                  </a:tcPr>
-                </a:tc>
-                <a:tc>
-                  <a:txBody>
-                    <a:bodyPr wrap="square"/>
-                    <a:lstStyle/>
-                    <a:p>
-                      <a:pPr marL="0" indent="0">
-                        <a:buNone/>
-                      </a:pPr>
-                      <a:r>
-                        <a:rPr sz="1050" b="0">
-                          <a:solidFill>
-                            <a:srgbClr val="000000"/>
-                          </a:solidFill>
-                          <a:latin typeface="Calibri"/>
-                        </a:rPr>
-                        <a:t>Closed-form model of the crosstalk loop for e-mode GaN; predicts the spurious gate peak</a:t>
-                      </a:r>
-                      <a:endParaRPr lang="en-US" sz="1300" dirty="0">
-                        <a:latin typeface="Calibri" charset="0"/>
-                        <a:ea typeface="Calibri" charset="0"/>
-                        <a:cs typeface="Calibri" charset="0"/>
-                      </a:endParaRPr>
-                    </a:p>
-                  </a:txBody>
-                  <a:tcPr marL="54864" marR="54864" marT="54864" marB="54864" anchor="ctr">
-                    <a:lnL w="9525" cap="flat" cmpd="sng" algn="ctr">
-                      <a:solidFill>
-                        <a:srgbClr val="BFBFBF"/>
-                      </a:solidFill>
-                      <a:prstDash val="solid"/>
-                      <a:round/>
-                      <a:headEnd type="none" w="med" len="med"/>
-                      <a:tailEnd type="none" w="med" len="med"/>
-                    </a:lnL>
-                    <a:lnR w="9525" cap="flat" cmpd="sng" algn="ctr">
-                      <a:solidFill>
-                        <a:srgbClr val="BFBFBF"/>
-                      </a:solidFill>
-                      <a:prstDash val="solid"/>
-                      <a:round/>
-                      <a:headEnd type="none" w="med" len="med"/>
-                      <a:tailEnd type="none" w="med" len="med"/>
-                    </a:lnR>
-                    <a:lnT w="9525" cap="flat" cmpd="sng" algn="ctr">
-                      <a:solidFill>
-                        <a:srgbClr val="BFBFBF"/>
-                      </a:solidFill>
-                      <a:prstDash val="solid"/>
-                      <a:round/>
-                      <a:headEnd type="none" w="med" len="med"/>
-                      <a:tailEnd type="none" w="med" len="med"/>
-                    </a:lnT>
-                    <a:lnB w="9525" cap="flat" cmpd="sng" algn="ctr">
-                      <a:solidFill>
-                        <a:srgbClr val="BFBFBF"/>
-                      </a:solidFill>
-                      <a:prstDash val="solid"/>
-                      <a:round/>
-                      <a:headEnd type="none" w="med" len="med"/>
-                      <a:tailEnd type="none" w="med" len="med"/>
-                    </a:lnB>
-                  </a:tcPr>
-                </a:tc>
-                <a:tc>
-                  <a:txBody>
-                    <a:bodyPr wrap="square"/>
-                    <a:lstStyle/>
-                    <a:p>
-                      <a:pPr marL="0" indent="0">
-                        <a:buNone/>
-                      </a:pPr>
-                      <a:r>
-                        <a:rPr sz="1050" b="0">
-                          <a:solidFill>
-                            <a:srgbClr val="000000"/>
-                          </a:solidFill>
-                          <a:latin typeface="Calibri"/>
-                        </a:rPr>
-                        <a:t>Models the mechanism accurately but does not optimise a driver against it, and never asks whether settings must adapt per operating point.</a:t>
-                      </a:r>
-                      <a:endParaRPr lang="en-US" sz="1300" dirty="0">
-                        <a:latin typeface="Calibri" charset="0"/>
-                        <a:ea typeface="Calibri" charset="0"/>
-                        <a:cs typeface="Calibri" charset="0"/>
-                      </a:endParaRPr>
-                    </a:p>
-                  </a:txBody>
-                  <a:tcPr marL="54864" marR="54864" marT="54864" marB="54864" anchor="ctr">
-                    <a:lnL w="9525" cap="flat" cmpd="sng" algn="ctr">
-                      <a:solidFill>
-                        <a:srgbClr val="BFBFBF"/>
-                      </a:solidFill>
-                      <a:prstDash val="solid"/>
-                      <a:round/>
-                      <a:headEnd type="none" w="med" len="med"/>
-                      <a:tailEnd type="none" w="med" len="med"/>
-                    </a:lnL>
-                    <a:lnR w="9525" cap="flat" cmpd="sng" algn="ctr">
-                      <a:solidFill>
-                        <a:srgbClr val="BFBFBF"/>
-                      </a:solidFill>
-                      <a:prstDash val="solid"/>
-                      <a:round/>
-                      <a:headEnd type="none" w="med" len="med"/>
-                      <a:tailEnd type="none" w="med" len="med"/>
-                    </a:lnR>
-                    <a:lnT w="9525" cap="flat" cmpd="sng" algn="ctr">
-                      <a:solidFill>
-                        <a:srgbClr val="BFBFBF"/>
-                      </a:solidFill>
-                      <a:prstDash val="solid"/>
-                      <a:round/>
-                      <a:headEnd type="none" w="med" len="med"/>
-                      <a:tailEnd type="none" w="med" len="med"/>
-                    </a:lnT>
-                    <a:lnB w="9525" cap="flat" cmpd="sng" algn="ctr">
-                      <a:solidFill>
-                        <a:srgbClr val="BFBFBF"/>
-                      </a:solidFill>
-                      <a:prstDash val="solid"/>
-                      <a:round/>
-                      <a:headEnd type="none" w="med" len="med"/>
-                      <a:tailEnd type="none" w="med" len="med"/>
-                    </a:lnB>
-                  </a:tcPr>
-                </a:tc>
-                <a:extLst>
-                  <a:ext uri="{0D108BD9-81ED-4DB2-BD59-A6C34878D82A}">
-                    <a16:rowId xmlns:a16="http://schemas.microsoft.com/office/drawing/2014/main" val="10002"/>
-                  </a:ext>
-                </a:extLst>
-              </a:tr>
-              <a:tr h="868680">
-                <a:tc>
-                  <a:txBody>
-                    <a:bodyPr wrap="square"/>
-                    <a:lstStyle/>
-                    <a:p>
-                      <a:pPr marL="0" indent="0">
-                        <a:buNone/>
-                      </a:pPr>
-                      <a:r>
-                        <a:rPr sz="1050" b="0">
-                          <a:solidFill>
-                            <a:srgbClr val="000000"/>
-                          </a:solidFill>
-                          <a:latin typeface="Calibri"/>
-                        </a:rPr>
-                        <a:t>3</a:t>
-                      </a:r>
-                      <a:endParaRPr lang="en-US" sz="1300" dirty="0">
-                        <a:latin typeface="Calibri" charset="0"/>
-                        <a:ea typeface="Calibri" charset="0"/>
-                        <a:cs typeface="Calibri" charset="0"/>
-                      </a:endParaRPr>
-                    </a:p>
-                  </a:txBody>
-                  <a:tcPr marL="54864" marR="54864" marT="54864" marB="54864" anchor="ctr">
-                    <a:lnL w="9525" cap="flat" cmpd="sng" algn="ctr">
-                      <a:solidFill>
-                        <a:srgbClr val="BFBFBF"/>
-                      </a:solidFill>
-                      <a:prstDash val="solid"/>
-                      <a:round/>
-                      <a:headEnd type="none" w="med" len="med"/>
-                      <a:tailEnd type="none" w="med" len="med"/>
-                    </a:lnL>
-                    <a:lnR w="9525" cap="flat" cmpd="sng" algn="ctr">
-                      <a:solidFill>
-                        <a:srgbClr val="BFBFBF"/>
-                      </a:solidFill>
-                      <a:prstDash val="solid"/>
-                      <a:round/>
-                      <a:headEnd type="none" w="med" len="med"/>
-                      <a:tailEnd type="none" w="med" len="med"/>
-                    </a:lnR>
-                    <a:lnT w="9525" cap="flat" cmpd="sng" algn="ctr">
-                      <a:solidFill>
-                        <a:srgbClr val="BFBFBF"/>
-                      </a:solidFill>
-                      <a:prstDash val="solid"/>
-                      <a:round/>
-                      <a:headEnd type="none" w="med" len="med"/>
-                      <a:tailEnd type="none" w="med" len="med"/>
-                    </a:lnT>
-                    <a:lnB w="9525" cap="flat" cmpd="sng" algn="ctr">
-                      <a:solidFill>
-                        <a:srgbClr val="BFBFBF"/>
-                      </a:solidFill>
-                      <a:prstDash val="solid"/>
-                      <a:round/>
-                      <a:headEnd type="none" w="med" len="med"/>
-                      <a:tailEnd type="none" w="med" len="med"/>
-                    </a:lnB>
-                  </a:tcPr>
-                </a:tc>
-                <a:tc>
-                  <a:txBody>
-                    <a:bodyPr wrap="square"/>
-                    <a:lstStyle/>
-                    <a:p>
-                      <a:pPr marL="0" indent="0">
-                        <a:buNone/>
-                      </a:pPr>
-                      <a:r>
-                        <a:rPr sz="1050" b="0">
-                          <a:solidFill>
-                            <a:srgbClr val="000000"/>
-                          </a:solidFill>
-                          <a:latin typeface="Calibri"/>
-                        </a:rPr>
-                        <a:t>Reusch &amp; Strydom (2014)</a:t>
-                      </a:r>
-                      <a:endParaRPr lang="en-US" sz="1300" dirty="0">
-                        <a:latin typeface="Calibri" charset="0"/>
-                        <a:ea typeface="Calibri" charset="0"/>
-                        <a:cs typeface="Calibri" charset="0"/>
-                      </a:endParaRPr>
-                    </a:p>
-                  </a:txBody>
-                  <a:tcPr marL="54864" marR="54864" marT="54864" marB="54864" anchor="ctr">
-                    <a:lnL w="9525" cap="flat" cmpd="sng" algn="ctr">
-                      <a:solidFill>
-                        <a:srgbClr val="BFBFBF"/>
-                      </a:solidFill>
-                      <a:prstDash val="solid"/>
-                      <a:round/>
-                      <a:headEnd type="none" w="med" len="med"/>
-                      <a:tailEnd type="none" w="med" len="med"/>
-                    </a:lnL>
-                    <a:lnR w="9525" cap="flat" cmpd="sng" algn="ctr">
-                      <a:solidFill>
-                        <a:srgbClr val="BFBFBF"/>
-                      </a:solidFill>
-                      <a:prstDash val="solid"/>
-                      <a:round/>
-                      <a:headEnd type="none" w="med" len="med"/>
-                      <a:tailEnd type="none" w="med" len="med"/>
-                    </a:lnR>
-                    <a:lnT w="9525" cap="flat" cmpd="sng" algn="ctr">
-                      <a:solidFill>
-                        <a:srgbClr val="BFBFBF"/>
-                      </a:solidFill>
-                      <a:prstDash val="solid"/>
-                      <a:round/>
-                      <a:headEnd type="none" w="med" len="med"/>
-                      <a:tailEnd type="none" w="med" len="med"/>
-                    </a:lnT>
-                    <a:lnB w="9525" cap="flat" cmpd="sng" algn="ctr">
-                      <a:solidFill>
-                        <a:srgbClr val="BFBFBF"/>
-                      </a:solidFill>
-                      <a:prstDash val="solid"/>
-                      <a:round/>
-                      <a:headEnd type="none" w="med" len="med"/>
-                      <a:tailEnd type="none" w="med" len="med"/>
-                    </a:lnB>
-                  </a:tcPr>
-                </a:tc>
-                <a:tc>
-                  <a:txBody>
-                    <a:bodyPr wrap="square"/>
-                    <a:lstStyle/>
-                    <a:p>
-                      <a:pPr marL="0" indent="0">
-                        <a:buNone/>
-                      </a:pPr>
-                      <a:r>
-                        <a:rPr sz="1050" b="0">
-                          <a:solidFill>
-                            <a:srgbClr val="000000"/>
-                          </a:solidFill>
-                          <a:latin typeface="Calibri"/>
-                        </a:rPr>
-                        <a:t>Understanding the Effect of PCB Layout on Circuit Performance in a High-Frequency Gallium-Nitride-Based Point of Load Converter</a:t>
-                      </a:r>
-                      <a:endParaRPr lang="en-US" sz="1300" dirty="0">
-                        <a:latin typeface="Calibri" charset="0"/>
-                        <a:ea typeface="Calibri" charset="0"/>
-                        <a:cs typeface="Calibri" charset="0"/>
-                      </a:endParaRPr>
-                    </a:p>
-                    <a:p>
-                      <a:r>
-                        <a:rPr sz="1050" b="1">
-                          <a:solidFill>
-                            <a:srgbClr val="000000"/>
-                          </a:solidFill>
-                          <a:latin typeface="Calibri"/>
-                        </a:rPr>
-                        <a:t>IEEE Trans. Power Electron., 29(4), 2008–2015</a:t>
-                      </a:r>
-                    </a:p>
-                  </a:txBody>
-                  <a:tcPr marL="54864" marR="54864" marT="54864" marB="54864" anchor="ctr">
-                    <a:lnL w="9525" cap="flat" cmpd="sng" algn="ctr">
-                      <a:solidFill>
-                        <a:srgbClr val="BFBFBF"/>
-                      </a:solidFill>
-                      <a:prstDash val="solid"/>
-                      <a:round/>
-                      <a:headEnd type="none" w="med" len="med"/>
-                      <a:tailEnd type="none" w="med" len="med"/>
-                    </a:lnL>
-                    <a:lnR w="9525" cap="flat" cmpd="sng" algn="ctr">
-                      <a:solidFill>
-                        <a:srgbClr val="BFBFBF"/>
-                      </a:solidFill>
-                      <a:prstDash val="solid"/>
-                      <a:round/>
-                      <a:headEnd type="none" w="med" len="med"/>
-                      <a:tailEnd type="none" w="med" len="med"/>
-                    </a:lnR>
-                    <a:lnT w="9525" cap="flat" cmpd="sng" algn="ctr">
-                      <a:solidFill>
-                        <a:srgbClr val="BFBFBF"/>
-                      </a:solidFill>
-                      <a:prstDash val="solid"/>
-                      <a:round/>
-                      <a:headEnd type="none" w="med" len="med"/>
-                      <a:tailEnd type="none" w="med" len="med"/>
-                    </a:lnT>
-                    <a:lnB w="9525" cap="flat" cmpd="sng" algn="ctr">
-                      <a:solidFill>
-                        <a:srgbClr val="BFBFBF"/>
-                      </a:solidFill>
-                      <a:prstDash val="solid"/>
-                      <a:round/>
-                      <a:headEnd type="none" w="med" len="med"/>
-                      <a:tailEnd type="none" w="med" len="med"/>
-                    </a:lnB>
-                  </a:tcPr>
-                </a:tc>
-                <a:tc>
-                  <a:txBody>
-                    <a:bodyPr wrap="square"/>
-                    <a:lstStyle/>
-                    <a:p>
-                      <a:pPr marL="0" indent="0">
-                        <a:buNone/>
-                      </a:pPr>
-                      <a:r>
-                        <a:rPr sz="1050" b="0">
-                          <a:solidFill>
-                            <a:srgbClr val="000000"/>
-                          </a:solidFill>
-                          <a:latin typeface="Calibri"/>
-                        </a:rPr>
-                        <a:t>Measures a GaN converter across deliberately varied board layouts</a:t>
-                      </a:r>
-                      <a:endParaRPr lang="en-US" sz="1300" dirty="0">
-                        <a:latin typeface="Calibri" charset="0"/>
-                        <a:ea typeface="Calibri" charset="0"/>
-                        <a:cs typeface="Calibri" charset="0"/>
-                      </a:endParaRPr>
-                    </a:p>
-                  </a:txBody>
-                  <a:tcPr marL="54864" marR="54864" marT="54864" marB="54864" anchor="ctr">
-                    <a:lnL w="9525" cap="flat" cmpd="sng" algn="ctr">
-                      <a:solidFill>
-                        <a:srgbClr val="BFBFBF"/>
-                      </a:solidFill>
-                      <a:prstDash val="solid"/>
-                      <a:round/>
-                      <a:headEnd type="none" w="med" len="med"/>
-                      <a:tailEnd type="none" w="med" len="med"/>
-                    </a:lnL>
-                    <a:lnR w="9525" cap="flat" cmpd="sng" algn="ctr">
-                      <a:solidFill>
-                        <a:srgbClr val="BFBFBF"/>
-                      </a:solidFill>
-                      <a:prstDash val="solid"/>
-                      <a:round/>
-                      <a:headEnd type="none" w="med" len="med"/>
-                      <a:tailEnd type="none" w="med" len="med"/>
-                    </a:lnR>
-                    <a:lnT w="9525" cap="flat" cmpd="sng" algn="ctr">
-                      <a:solidFill>
-                        <a:srgbClr val="BFBFBF"/>
-                      </a:solidFill>
-                      <a:prstDash val="solid"/>
-                      <a:round/>
-                      <a:headEnd type="none" w="med" len="med"/>
-                      <a:tailEnd type="none" w="med" len="med"/>
-                    </a:lnT>
-                    <a:lnB w="9525" cap="flat" cmpd="sng" algn="ctr">
-                      <a:solidFill>
-                        <a:srgbClr val="BFBFBF"/>
-                      </a:solidFill>
-                      <a:prstDash val="solid"/>
-                      <a:round/>
-                      <a:headEnd type="none" w="med" len="med"/>
-                      <a:tailEnd type="none" w="med" len="med"/>
-                    </a:lnB>
-                  </a:tcPr>
-                </a:tc>
-                <a:tc>
-                  <a:txBody>
-                    <a:bodyPr wrap="square"/>
-                    <a:lstStyle/>
-                    <a:p>
-                      <a:pPr marL="0" indent="0">
-                        <a:buNone/>
-                      </a:pPr>
-                      <a:r>
-                        <a:rPr sz="1050" b="0">
-                          <a:solidFill>
-                            <a:srgbClr val="000000"/>
-                          </a:solidFill>
-                          <a:latin typeface="Calibri"/>
-                        </a:rPr>
-                        <a:t>Loop inductance is set by layout, not by the device. Our robustness study finds the scheduling ceiling depends on exactly this parameter: 13.5 % at 1.5 nH against 0.6 % at 4.5 nH.</a:t>
-                      </a:r>
-                      <a:endParaRPr lang="en-US" sz="1300" dirty="0">
-                        <a:latin typeface="Calibri" charset="0"/>
-                        <a:ea typeface="Calibri" charset="0"/>
-                        <a:cs typeface="Calibri" charset="0"/>
-                      </a:endParaRPr>
-                    </a:p>
-                  </a:txBody>
-                  <a:tcPr marL="54864" marR="54864" marT="54864" marB="54864" anchor="ctr">
-                    <a:lnL w="9525" cap="flat" cmpd="sng" algn="ctr">
-                      <a:solidFill>
-                        <a:srgbClr val="BFBFBF"/>
-                      </a:solidFill>
-                      <a:prstDash val="solid"/>
-                      <a:round/>
-                      <a:headEnd type="none" w="med" len="med"/>
-                      <a:tailEnd type="none" w="med" len="med"/>
-                    </a:lnL>
-                    <a:lnR w="9525" cap="flat" cmpd="sng" algn="ctr">
-                      <a:solidFill>
-                        <a:srgbClr val="BFBFBF"/>
-                      </a:solidFill>
-                      <a:prstDash val="solid"/>
-                      <a:round/>
-                      <a:headEnd type="none" w="med" len="med"/>
-                      <a:tailEnd type="none" w="med" len="med"/>
-                    </a:lnR>
-                    <a:lnT w="9525" cap="flat" cmpd="sng" algn="ctr">
-                      <a:solidFill>
-                        <a:srgbClr val="BFBFBF"/>
-                      </a:solidFill>
-                      <a:prstDash val="solid"/>
-                      <a:round/>
-                      <a:headEnd type="none" w="med" len="med"/>
-                      <a:tailEnd type="none" w="med" len="med"/>
-                    </a:lnT>
-                    <a:lnB w="9525" cap="flat" cmpd="sng" algn="ctr">
-                      <a:solidFill>
-                        <a:srgbClr val="BFBFBF"/>
-                      </a:solidFill>
-                      <a:prstDash val="solid"/>
-                      <a:round/>
-                      <a:headEnd type="none" w="med" len="med"/>
-                      <a:tailEnd type="none" w="med" len="med"/>
-                    </a:lnB>
-                  </a:tcPr>
-                </a:tc>
-                <a:extLst>
-                  <a:ext uri="{0D108BD9-81ED-4DB2-BD59-A6C34878D82A}">
-                    <a16:rowId xmlns:a16="http://schemas.microsoft.com/office/drawing/2014/main" val="10003"/>
-                  </a:ext>
-                </a:extLst>
-              </a:tr>
-              <a:tr h="868680">
-                <a:tc>
-                  <a:txBody>
-                    <a:bodyPr wrap="square"/>
-                    <a:lstStyle/>
-                    <a:p>
-                      <a:pPr marL="0" indent="0">
-                        <a:buNone/>
-                      </a:pPr>
-                      <a:r>
-                        <a:rPr sz="1050" b="0">
-                          <a:solidFill>
-                            <a:srgbClr val="000000"/>
-                          </a:solidFill>
-                          <a:latin typeface="Calibri"/>
-                        </a:rPr>
-                        <a:t>4</a:t>
-                      </a:r>
-                      <a:endParaRPr lang="en-US" sz="1300" dirty="0">
-                        <a:latin typeface="Calibri" charset="0"/>
-                        <a:ea typeface="Calibri" charset="0"/>
-                        <a:cs typeface="Calibri" charset="0"/>
-                      </a:endParaRPr>
-                    </a:p>
-                  </a:txBody>
-                  <a:tcPr marL="54864" marR="54864" marT="54864" marB="54864" anchor="ctr">
-                    <a:lnL w="9525" cap="flat" cmpd="sng" algn="ctr">
-                      <a:solidFill>
-                        <a:srgbClr val="BFBFBF"/>
-                      </a:solidFill>
-                      <a:prstDash val="solid"/>
-                      <a:round/>
-                      <a:headEnd type="none" w="med" len="med"/>
-                      <a:tailEnd type="none" w="med" len="med"/>
-                    </a:lnL>
-                    <a:lnR w="9525" cap="flat" cmpd="sng" algn="ctr">
-                      <a:solidFill>
-                        <a:srgbClr val="BFBFBF"/>
-                      </a:solidFill>
-                      <a:prstDash val="solid"/>
-                      <a:round/>
-                      <a:headEnd type="none" w="med" len="med"/>
-                      <a:tailEnd type="none" w="med" len="med"/>
-                    </a:lnR>
-                    <a:lnT w="9525" cap="flat" cmpd="sng" algn="ctr">
-                      <a:solidFill>
-                        <a:srgbClr val="BFBFBF"/>
-                      </a:solidFill>
-                      <a:prstDash val="solid"/>
-                      <a:round/>
-                      <a:headEnd type="none" w="med" len="med"/>
-                      <a:tailEnd type="none" w="med" len="med"/>
-                    </a:lnT>
-                    <a:lnB w="9525" cap="flat" cmpd="sng" algn="ctr">
-                      <a:solidFill>
-                        <a:srgbClr val="BFBFBF"/>
-                      </a:solidFill>
-                      <a:prstDash val="solid"/>
-                      <a:round/>
-                      <a:headEnd type="none" w="med" len="med"/>
-                      <a:tailEnd type="none" w="med" len="med"/>
-                    </a:lnB>
-                  </a:tcPr>
-                </a:tc>
-                <a:tc>
-                  <a:txBody>
-                    <a:bodyPr wrap="square"/>
-                    <a:lstStyle/>
-                    <a:p>
-                      <a:pPr marL="0" indent="0">
-                        <a:buNone/>
-                      </a:pPr>
-                      <a:r>
-                        <a:rPr sz="1050" b="0">
-                          <a:solidFill>
-                            <a:srgbClr val="7A7A7A"/>
-                          </a:solidFill>
-                          <a:latin typeface="Calibri"/>
-                        </a:rPr>
-                        <a:t>—</a:t>
-                      </a:r>
-                      <a:endParaRPr lang="en-US" sz="1300" dirty="0">
-                        <a:latin typeface="Calibri" charset="0"/>
-                        <a:ea typeface="Calibri" charset="0"/>
-                        <a:cs typeface="Calibri" charset="0"/>
-                      </a:endParaRPr>
-                    </a:p>
-                    <a:p>
-                      <a:r>
-                        <a:rPr sz="1050" b="0">
-                          <a:solidFill>
-                            <a:srgbClr val="7A7A7A"/>
-                          </a:solidFill>
-                          <a:latin typeface="Calibri"/>
-                        </a:rPr>
-                        <a:t>[complete from Xplore]</a:t>
-                      </a:r>
-                    </a:p>
-                  </a:txBody>
-                  <a:tcPr marL="54864" marR="54864" marT="54864" marB="54864" anchor="ctr">
-                    <a:lnL w="9525" cap="flat" cmpd="sng" algn="ctr">
-                      <a:solidFill>
-                        <a:srgbClr val="BFBFBF"/>
-                      </a:solidFill>
-                      <a:prstDash val="solid"/>
-                      <a:round/>
-                      <a:headEnd type="none" w="med" len="med"/>
-                      <a:tailEnd type="none" w="med" len="med"/>
-                    </a:lnL>
-                    <a:lnR w="9525" cap="flat" cmpd="sng" algn="ctr">
-                      <a:solidFill>
-                        <a:srgbClr val="BFBFBF"/>
-                      </a:solidFill>
-                      <a:prstDash val="solid"/>
-                      <a:round/>
-                      <a:headEnd type="none" w="med" len="med"/>
-                      <a:tailEnd type="none" w="med" len="med"/>
-                    </a:lnR>
-                    <a:lnT w="9525" cap="flat" cmpd="sng" algn="ctr">
-                      <a:solidFill>
-                        <a:srgbClr val="BFBFBF"/>
-                      </a:solidFill>
-                      <a:prstDash val="solid"/>
-                      <a:round/>
-                      <a:headEnd type="none" w="med" len="med"/>
-                      <a:tailEnd type="none" w="med" len="med"/>
-                    </a:lnT>
-                    <a:lnB w="9525" cap="flat" cmpd="sng" algn="ctr">
-                      <a:solidFill>
-                        <a:srgbClr val="BFBFBF"/>
-                      </a:solidFill>
-                      <a:prstDash val="solid"/>
-                      <a:round/>
-                      <a:headEnd type="none" w="med" len="med"/>
-                      <a:tailEnd type="none" w="med" len="med"/>
-                    </a:lnB>
-                  </a:tcPr>
-                </a:tc>
-                <a:tc>
-                  <a:txBody>
-                    <a:bodyPr wrap="square"/>
-                    <a:lstStyle/>
-                    <a:p>
-                      <a:pPr marL="0" indent="0">
-                        <a:buNone/>
-                      </a:pPr>
-                      <a:r>
-                        <a:rPr sz="1050" b="0">
-                          <a:solidFill>
-                            <a:srgbClr val="000000"/>
-                          </a:solidFill>
-                          <a:latin typeface="Calibri"/>
-                        </a:rPr>
-                        <a:t>Crosstalk Suppression Method for GaN-Based Bridge Configuration Using Negative Voltage Self-Recovery Gate Drive</a:t>
-                      </a:r>
-                      <a:endParaRPr lang="en-US" sz="1300" dirty="0">
-                        <a:latin typeface="Calibri" charset="0"/>
-                        <a:ea typeface="Calibri" charset="0"/>
-                        <a:cs typeface="Calibri" charset="0"/>
-                      </a:endParaRPr>
-                    </a:p>
-                    <a:p>
-                      <a:r>
-                        <a:rPr sz="1050" b="1">
-                          <a:solidFill>
-                            <a:srgbClr val="000000"/>
-                          </a:solidFill>
-                          <a:latin typeface="Calibri"/>
-                        </a:rPr>
-                        <a:t>IEEE journal · Xplore doc. 9573371 · vol./pp. XX</a:t>
-                      </a:r>
-                    </a:p>
-                  </a:txBody>
-                  <a:tcPr marL="54864" marR="54864" marT="54864" marB="54864" anchor="ctr">
-                    <a:lnL w="9525" cap="flat" cmpd="sng" algn="ctr">
-                      <a:solidFill>
-                        <a:srgbClr val="BFBFBF"/>
-                      </a:solidFill>
-                      <a:prstDash val="solid"/>
-                      <a:round/>
-                      <a:headEnd type="none" w="med" len="med"/>
-                      <a:tailEnd type="none" w="med" len="med"/>
-                    </a:lnL>
-                    <a:lnR w="9525" cap="flat" cmpd="sng" algn="ctr">
-                      <a:solidFill>
-                        <a:srgbClr val="BFBFBF"/>
-                      </a:solidFill>
-                      <a:prstDash val="solid"/>
-                      <a:round/>
-                      <a:headEnd type="none" w="med" len="med"/>
-                      <a:tailEnd type="none" w="med" len="med"/>
-                    </a:lnR>
-                    <a:lnT w="9525" cap="flat" cmpd="sng" algn="ctr">
-                      <a:solidFill>
-                        <a:srgbClr val="BFBFBF"/>
-                      </a:solidFill>
-                      <a:prstDash val="solid"/>
-                      <a:round/>
-                      <a:headEnd type="none" w="med" len="med"/>
-                      <a:tailEnd type="none" w="med" len="med"/>
-                    </a:lnT>
-                    <a:lnB w="9525" cap="flat" cmpd="sng" algn="ctr">
-                      <a:solidFill>
-                        <a:srgbClr val="BFBFBF"/>
-                      </a:solidFill>
-                      <a:prstDash val="solid"/>
-                      <a:round/>
-                      <a:headEnd type="none" w="med" len="med"/>
-                      <a:tailEnd type="none" w="med" len="med"/>
-                    </a:lnB>
-                  </a:tcPr>
-                </a:tc>
-                <a:tc>
-                  <a:txBody>
-                    <a:bodyPr wrap="square"/>
-                    <a:lstStyle/>
-                    <a:p>
-                      <a:pPr marL="0" indent="0">
-                        <a:buNone/>
-                      </a:pPr>
-                      <a:r>
-                        <a:rPr sz="1050" b="0">
-                          <a:solidFill>
-                            <a:srgbClr val="000000"/>
-                          </a:solidFill>
-                          <a:latin typeface="Calibri"/>
-                        </a:rPr>
-                        <a:t>RC-diode divider generates negative V_GS; antiparallel diode gives a low-impedance Miller path</a:t>
-                      </a:r>
-                      <a:endParaRPr lang="en-US" sz="1300" dirty="0">
-                        <a:latin typeface="Calibri" charset="0"/>
-                        <a:ea typeface="Calibri" charset="0"/>
-                        <a:cs typeface="Calibri" charset="0"/>
-                      </a:endParaRPr>
-                    </a:p>
-                  </a:txBody>
-                  <a:tcPr marL="54864" marR="54864" marT="54864" marB="54864" anchor="ctr">
-                    <a:lnL w="9525" cap="flat" cmpd="sng" algn="ctr">
-                      <a:solidFill>
-                        <a:srgbClr val="BFBFBF"/>
-                      </a:solidFill>
-                      <a:prstDash val="solid"/>
-                      <a:round/>
-                      <a:headEnd type="none" w="med" len="med"/>
-                      <a:tailEnd type="none" w="med" len="med"/>
-                    </a:lnL>
-                    <a:lnR w="9525" cap="flat" cmpd="sng" algn="ctr">
-                      <a:solidFill>
-                        <a:srgbClr val="BFBFBF"/>
-                      </a:solidFill>
-                      <a:prstDash val="solid"/>
-                      <a:round/>
-                      <a:headEnd type="none" w="med" len="med"/>
-                      <a:tailEnd type="none" w="med" len="med"/>
-                    </a:lnR>
-                    <a:lnT w="9525" cap="flat" cmpd="sng" algn="ctr">
-                      <a:solidFill>
-                        <a:srgbClr val="BFBFBF"/>
-                      </a:solidFill>
-                      <a:prstDash val="solid"/>
-                      <a:round/>
-                      <a:headEnd type="none" w="med" len="med"/>
-                      <a:tailEnd type="none" w="med" len="med"/>
-                    </a:lnT>
-                    <a:lnB w="9525" cap="flat" cmpd="sng" algn="ctr">
-                      <a:solidFill>
-                        <a:srgbClr val="BFBFBF"/>
-                      </a:solidFill>
-                      <a:prstDash val="solid"/>
-                      <a:round/>
-                      <a:headEnd type="none" w="med" len="med"/>
-                      <a:tailEnd type="none" w="med" len="med"/>
-                    </a:lnB>
-                  </a:tcPr>
-                </a:tc>
-                <a:tc>
-                  <a:txBody>
-                    <a:bodyPr wrap="square"/>
-                    <a:lstStyle/>
-                    <a:p>
-                      <a:pPr marL="0" indent="0">
-                        <a:buNone/>
-                      </a:pPr>
-                      <a:r>
-                        <a:rPr sz="1050" b="0">
-                          <a:solidFill>
-                            <a:srgbClr val="000000"/>
-                          </a:solidFill>
-                          <a:latin typeface="Calibri"/>
-                        </a:rPr>
-                        <a:t>Suppresses positive and negative crosstalk together. Treats the negative rail as always beneficial; our freeze test finds off-bias worth 2.55 % to schedule, and nothing at a 1 V guard band.</a:t>
-                      </a:r>
                       <a:endParaRPr lang="en-US" sz="1300" dirty="0">
                         <a:latin typeface="Calibri" charset="0"/>
                         <a:ea typeface="Calibri" charset="0"/>
@@ -12484,7 +15715,7 @@
         </p:nvSpPr>
         <p:spPr>
           <a:xfrm>
-            <a:off x="548640" y="5577840"/>
+            <a:off x="548640" y="5897880"/>
             <a:ext cx="11064240" cy="365760"/>
           </a:xfrm>
           <a:prstGeom prst="rect">
@@ -12513,7 +15744,7 @@
                 <a:ea typeface="Calibri" pitchFamily="34" charset="-122"/>
                 <a:cs typeface="Calibri" pitchFamily="34" charset="-120"/>
               </a:rPr>
-              <a:t xml:space="preserve">References [1]–[3] are verified against the publisher record — author list, volume, issue and pages all confirmed.</a:t>
+              <a:t xml:space="preserve">13 references. Grouped by what the driver DOES, not by date. Clusters A–C choose a setting or regulate it in analogue; only cluster D makes the setting a digital code — which is what makes an exhaustive search, and this project’s question, possible at all.</a:t>
             </a:r>
           </a:p>
         </p:txBody>
@@ -12623,7 +15854,7 @@
                 <a:ea typeface="Calibri" pitchFamily="34" charset="-122"/>
                 <a:cs typeface="Calibri" pitchFamily="34" charset="-120"/>
               </a:rPr>
-              <a:t>Literature Survey  (5 – 8)</a:t>
+              <a:t>The Five Closest — and the base paper we replicate</a:t>
             </a:r>
             <a:endParaRPr lang="en-US" sz="2800" dirty="0"/>
           </a:p>
@@ -12669,7 +15900,7 @@
         </p:nvGraphicFramePr>
         <p:xfrm>
           <a:off x="548640" y="1371600"/>
-          <a:ext cx="11091672" cy="3840480"/>
+          <a:ext cx="11091672" cy="4343400"/>
         </p:xfrm>
         <a:graphic>
           <a:graphicData uri="http://schemas.openxmlformats.org/drawingml/2006/table">
@@ -12712,7 +15943,7 @@
                   </a:extLst>
                 </a:gridCol>
               </a:tblGrid>
-              <a:tr h="365760">
+              <a:tr h="320040">
                 <a:tc>
                   <a:txBody>
                     <a:bodyPr/>
@@ -13059,7 +16290,7 @@
                   </a:ext>
                 </a:extLst>
               </a:tr>
-              <a:tr h="868680">
+              <a:tr h="804672">
                 <a:tc>
                   <a:txBody>
                     <a:bodyPr wrap="square"/>
@@ -13069,13 +16300,13 @@
                         <a:buNone/>
                       </a:pPr>
                       <a:r>
-                        <a:rPr sz="1050" b="0">
+                        <a:rPr sz="1050" b="1">
                           <a:solidFill>
                             <a:srgbClr val="000000"/>
                           </a:solidFill>
                           <a:latin typeface="Calibri"/>
                         </a:rPr>
-                        <a:t>5</a:t>
+                        <a:t>BASE</a:t>
                       </a:r>
                       <a:endParaRPr lang="en-US" sz="1300" dirty="0">
                         <a:latin typeface="Calibri" charset="0"/>
@@ -13138,7 +16369,7 @@
                           </a:solidFill>
                           <a:latin typeface="Calibri"/>
                         </a:rPr>
-                        <a:t>—</a:t>
+                        <a:t>2022</a:t>
                       </a:r>
                       <a:endParaRPr lang="en-US" sz="1300" dirty="0">
                         <a:latin typeface="Calibri" charset="0"/>
@@ -13154,7 +16385,7 @@
                           </a:solidFill>
                           <a:latin typeface="Calibri"/>
                         </a:rPr>
-                        <a:t>[complete from Xplore]</a:t>
+                        <a:t>authors: Xplore “Cite This”</a:t>
                       </a:r>
                     </a:p>
                   </a:txBody>
@@ -13197,6 +16428,224 @@
                     </a:lnB>
                   </a:tcPr>
                 </a:tc>
+                <a:tc>
+                  <a:txBody>
+                    <a:bodyPr wrap="square"/>
+                    <a:lstStyle/>
+                    <a:p>
+                      <a:pPr marL="0" indent="0">
+                        <a:buNone/>
+                      </a:pPr>
+                      <a:r>
+                        <a:rPr sz="900" b="0">
+                          <a:solidFill>
+                            <a:srgbClr val="000000"/>
+                          </a:solidFill>
+                          <a:latin typeface="Calibri"/>
+                        </a:rPr>
+                        <a:t>Digital Active Gate Drive of SiC MOSFETs for Controlling Switching Behavior — Preparation Toward Universal Digitization of Power Switching</a:t>
+                      </a:r>
+                      <a:endParaRPr lang="en-US" sz="1300" dirty="0">
+                        <a:latin typeface="Calibri" charset="0"/>
+                        <a:ea typeface="Calibri" charset="0"/>
+                        <a:cs typeface="Calibri" charset="0"/>
+                      </a:endParaRPr>
+                    </a:p>
+                    <a:p>
+                      <a:r>
+                        <a:rPr sz="900" b="1">
+                          <a:solidFill>
+                            <a:srgbClr val="000000"/>
+                          </a:solidFill>
+                          <a:latin typeface="Calibri"/>
+                        </a:rPr>
+                        <a:t>Int. J. Circuit Theory Appl., vol. 50, no. 1, pp. 183–196</a:t>
+                      </a:r>
+                    </a:p>
+                    <a:p>
+                      <a:r>
+                        <a:rPr sz="900" b="1">
+                          <a:solidFill>
+                            <a:srgbClr val="000000"/>
+                          </a:solidFill>
+                          <a:latin typeface="Calibri"/>
+                        </a:rPr>
+                        <a:t>doi.org/10.1002/cta.3136</a:t>
+                      </a:r>
+                    </a:p>
+                  </a:txBody>
+                  <a:tcPr marL="54864" marR="54864" marT="54864" marB="54864" anchor="ctr">
+                    <a:lnL w="9525" cap="flat" cmpd="sng" algn="ctr">
+                      <a:solidFill>
+                        <a:srgbClr val="BFBFBF"/>
+                      </a:solidFill>
+                      <a:prstDash val="solid"/>
+                      <a:round/>
+                      <a:headEnd type="none" w="med" len="med"/>
+                      <a:tailEnd type="none" w="med" len="med"/>
+                    </a:lnL>
+                    <a:lnR w="9525" cap="flat" cmpd="sng" algn="ctr">
+                      <a:solidFill>
+                        <a:srgbClr val="BFBFBF"/>
+                      </a:solidFill>
+                      <a:prstDash val="solid"/>
+                      <a:round/>
+                      <a:headEnd type="none" w="med" len="med"/>
+                      <a:tailEnd type="none" w="med" len="med"/>
+                    </a:lnR>
+                    <a:lnT w="9525" cap="flat" cmpd="sng" algn="ctr">
+                      <a:solidFill>
+                        <a:srgbClr val="BFBFBF"/>
+                      </a:solidFill>
+                      <a:prstDash val="solid"/>
+                      <a:round/>
+                      <a:headEnd type="none" w="med" len="med"/>
+                      <a:tailEnd type="none" w="med" len="med"/>
+                    </a:lnT>
+                    <a:lnB w="9525" cap="flat" cmpd="sng" algn="ctr">
+                      <a:solidFill>
+                        <a:srgbClr val="BFBFBF"/>
+                      </a:solidFill>
+                      <a:prstDash val="solid"/>
+                      <a:round/>
+                      <a:headEnd type="none" w="med" len="med"/>
+                      <a:tailEnd type="none" w="med" len="med"/>
+                    </a:lnB>
+                  </a:tcPr>
+                </a:tc>
+                <a:tc>
+                  <a:txBody>
+                    <a:bodyPr wrap="square"/>
+                    <a:lstStyle/>
+                    <a:p>
+                      <a:pPr marL="0" indent="0">
+                        <a:buNone/>
+                      </a:pPr>
+                      <a:r>
+                        <a:rPr sz="900" b="0">
+                          <a:solidFill>
+                            <a:srgbClr val="000000"/>
+                          </a:solidFill>
+                          <a:latin typeface="Calibri"/>
+                        </a:rPr>
+                        <a:t>A DAC-inspired driver: a multibit gate signal SEQUENCE sets the gate waveform digitally, so switching behaviour is chosen by a code rather than by a resistor.</a:t>
+                      </a:r>
+                      <a:endParaRPr lang="en-US" sz="1300" dirty="0">
+                        <a:latin typeface="Calibri" charset="0"/>
+                        <a:ea typeface="Calibri" charset="0"/>
+                        <a:cs typeface="Calibri" charset="0"/>
+                      </a:endParaRPr>
+                    </a:p>
+                  </a:txBody>
+                  <a:tcPr marL="54864" marR="54864" marT="54864" marB="54864" anchor="ctr">
+                    <a:lnL w="9525" cap="flat" cmpd="sng" algn="ctr">
+                      <a:solidFill>
+                        <a:srgbClr val="BFBFBF"/>
+                      </a:solidFill>
+                      <a:prstDash val="solid"/>
+                      <a:round/>
+                      <a:headEnd type="none" w="med" len="med"/>
+                      <a:tailEnd type="none" w="med" len="med"/>
+                    </a:lnL>
+                    <a:lnR w="9525" cap="flat" cmpd="sng" algn="ctr">
+                      <a:solidFill>
+                        <a:srgbClr val="BFBFBF"/>
+                      </a:solidFill>
+                      <a:prstDash val="solid"/>
+                      <a:round/>
+                      <a:headEnd type="none" w="med" len="med"/>
+                      <a:tailEnd type="none" w="med" len="med"/>
+                    </a:lnR>
+                    <a:lnT w="9525" cap="flat" cmpd="sng" algn="ctr">
+                      <a:solidFill>
+                        <a:srgbClr val="BFBFBF"/>
+                      </a:solidFill>
+                      <a:prstDash val="solid"/>
+                      <a:round/>
+                      <a:headEnd type="none" w="med" len="med"/>
+                      <a:tailEnd type="none" w="med" len="med"/>
+                    </a:lnT>
+                    <a:lnB w="9525" cap="flat" cmpd="sng" algn="ctr">
+                      <a:solidFill>
+                        <a:srgbClr val="BFBFBF"/>
+                      </a:solidFill>
+                      <a:prstDash val="solid"/>
+                      <a:round/>
+                      <a:headEnd type="none" w="med" len="med"/>
+                      <a:tailEnd type="none" w="med" len="med"/>
+                    </a:lnB>
+                  </a:tcPr>
+                </a:tc>
+                <a:tc>
+                  <a:txBody>
+                    <a:bodyPr wrap="square"/>
+                    <a:lstStyle/>
+                    <a:p>
+                      <a:pPr marL="0" indent="0">
+                        <a:buNone/>
+                      </a:pPr>
+                      <a:r>
+                        <a:rPr sz="900" b="0">
+                          <a:solidFill>
+                            <a:srgbClr val="000000"/>
+                          </a:solidFill>
+                          <a:latin typeface="Calibri"/>
+                        </a:rPr>
+                        <a:t>THE BASE PAPER. Its multibit gate code is the direct ancestor of our 720-point control word, and it is digital — implementable on an FPGA — rather than a fixed analogue network. We replicate its premise on GaN and then ask the question it does not: of the gain a code buys, how much needs per-operating-point adaptation at all?</a:t>
+                      </a:r>
+                      <a:endParaRPr lang="en-US" sz="1300" dirty="0">
+                        <a:latin typeface="Calibri" charset="0"/>
+                        <a:ea typeface="Calibri" charset="0"/>
+                        <a:cs typeface="Calibri" charset="0"/>
+                      </a:endParaRPr>
+                    </a:p>
+                  </a:txBody>
+                  <a:tcPr marL="54864" marR="54864" marT="54864" marB="54864" anchor="ctr">
+                    <a:lnL w="9525" cap="flat" cmpd="sng" algn="ctr">
+                      <a:solidFill>
+                        <a:srgbClr val="BFBFBF"/>
+                      </a:solidFill>
+                      <a:prstDash val="solid"/>
+                      <a:round/>
+                      <a:headEnd type="none" w="med" len="med"/>
+                      <a:tailEnd type="none" w="med" len="med"/>
+                    </a:lnL>
+                    <a:lnR w="9525" cap="flat" cmpd="sng" algn="ctr">
+                      <a:solidFill>
+                        <a:srgbClr val="BFBFBF"/>
+                      </a:solidFill>
+                      <a:prstDash val="solid"/>
+                      <a:round/>
+                      <a:headEnd type="none" w="med" len="med"/>
+                      <a:tailEnd type="none" w="med" len="med"/>
+                    </a:lnR>
+                    <a:lnT w="9525" cap="flat" cmpd="sng" algn="ctr">
+                      <a:solidFill>
+                        <a:srgbClr val="BFBFBF"/>
+                      </a:solidFill>
+                      <a:prstDash val="solid"/>
+                      <a:round/>
+                      <a:headEnd type="none" w="med" len="med"/>
+                      <a:tailEnd type="none" w="med" len="med"/>
+                    </a:lnT>
+                    <a:lnB w="9525" cap="flat" cmpd="sng" algn="ctr">
+                      <a:solidFill>
+                        <a:srgbClr val="BFBFBF"/>
+                      </a:solidFill>
+                      <a:prstDash val="solid"/>
+                      <a:round/>
+                      <a:headEnd type="none" w="med" len="med"/>
+                      <a:tailEnd type="none" w="med" len="med"/>
+                    </a:lnB>
+                  </a:tcPr>
+                </a:tc>
+                <a:extLst>
+                  <a:ext uri="{0D108BD9-81ED-4DB2-BD59-A6C34878D82A}">
+                    <a16:rowId xmlns:a16="http://schemas.microsoft.com/office/drawing/2014/main" val="10001"/>
+                  </a:ext>
+                </a:extLst>
+              </a:tr>
+              <a:tr h="804672">
                 <a:tc>
                   <a:txBody>
                     <a:bodyPr wrap="square"/>
@@ -13212,214 +16661,7 @@
                           </a:solidFill>
                           <a:latin typeface="Calibri"/>
                         </a:rPr>
-                        <a:t>A Novel Control Strategy for Optimal Tradeoff between Overshoot and Switching Loss Based on Double Closed-Loop Self-Regulating Active Gate Driver</a:t>
-                      </a:r>
-                      <a:endParaRPr lang="en-US" sz="1300" dirty="0">
-                        <a:latin typeface="Calibri" charset="0"/>
-                        <a:ea typeface="Calibri" charset="0"/>
-                        <a:cs typeface="Calibri" charset="0"/>
-                      </a:endParaRPr>
-                    </a:p>
-                    <a:p>
-                      <a:r>
-                        <a:rPr sz="1050" b="1">
-                          <a:solidFill>
-                            <a:srgbClr val="000000"/>
-                          </a:solidFill>
-                          <a:latin typeface="Calibri"/>
-                        </a:rPr>
-                        <a:t>IEEE journal · Xplore doc. 10553383 · vol./pp. XX</a:t>
-                      </a:r>
-                    </a:p>
-                  </a:txBody>
-                  <a:tcPr marL="54864" marR="54864" marT="54864" marB="54864" anchor="ctr">
-                    <a:lnL w="9525" cap="flat" cmpd="sng" algn="ctr">
-                      <a:solidFill>
-                        <a:srgbClr val="BFBFBF"/>
-                      </a:solidFill>
-                      <a:prstDash val="solid"/>
-                      <a:round/>
-                      <a:headEnd type="none" w="med" len="med"/>
-                      <a:tailEnd type="none" w="med" len="med"/>
-                    </a:lnL>
-                    <a:lnR w="9525" cap="flat" cmpd="sng" algn="ctr">
-                      <a:solidFill>
-                        <a:srgbClr val="BFBFBF"/>
-                      </a:solidFill>
-                      <a:prstDash val="solid"/>
-                      <a:round/>
-                      <a:headEnd type="none" w="med" len="med"/>
-                      <a:tailEnd type="none" w="med" len="med"/>
-                    </a:lnR>
-                    <a:lnT w="9525" cap="flat" cmpd="sng" algn="ctr">
-                      <a:solidFill>
-                        <a:srgbClr val="BFBFBF"/>
-                      </a:solidFill>
-                      <a:prstDash val="solid"/>
-                      <a:round/>
-                      <a:headEnd type="none" w="med" len="med"/>
-                      <a:tailEnd type="none" w="med" len="med"/>
-                    </a:lnT>
-                    <a:lnB w="9525" cap="flat" cmpd="sng" algn="ctr">
-                      <a:solidFill>
-                        <a:srgbClr val="BFBFBF"/>
-                      </a:solidFill>
-                      <a:prstDash val="solid"/>
-                      <a:round/>
-                      <a:headEnd type="none" w="med" len="med"/>
-                      <a:tailEnd type="none" w="med" len="med"/>
-                    </a:lnB>
-                  </a:tcPr>
-                </a:tc>
-                <a:tc>
-                  <a:txBody>
-                    <a:bodyPr wrap="square"/>
-                    <a:lstStyle/>
-                    <a:p>
-                      <a:pPr marL="0" indent="0">
-                        <a:buNone/>
-                      </a:pPr>
-                      <a:r>
-                        <a:rPr sz="1050" b="0">
-                          <a:solidFill>
-                            <a:srgbClr val="000000"/>
-                          </a:solidFill>
-                          <a:latin typeface="Calibri"/>
-                        </a:rPr>
-                        <a:t>Weight-based closed-loop control balancing overshoot against turn-off loss per operating condition</a:t>
-                      </a:r>
-                      <a:endParaRPr lang="en-US" sz="1300" dirty="0">
-                        <a:latin typeface="Calibri" charset="0"/>
-                        <a:ea typeface="Calibri" charset="0"/>
-                        <a:cs typeface="Calibri" charset="0"/>
-                      </a:endParaRPr>
-                    </a:p>
-                  </a:txBody>
-                  <a:tcPr marL="54864" marR="54864" marT="54864" marB="54864" anchor="ctr">
-                    <a:lnL w="9525" cap="flat" cmpd="sng" algn="ctr">
-                      <a:solidFill>
-                        <a:srgbClr val="BFBFBF"/>
-                      </a:solidFill>
-                      <a:prstDash val="solid"/>
-                      <a:round/>
-                      <a:headEnd type="none" w="med" len="med"/>
-                      <a:tailEnd type="none" w="med" len="med"/>
-                    </a:lnL>
-                    <a:lnR w="9525" cap="flat" cmpd="sng" algn="ctr">
-                      <a:solidFill>
-                        <a:srgbClr val="BFBFBF"/>
-                      </a:solidFill>
-                      <a:prstDash val="solid"/>
-                      <a:round/>
-                      <a:headEnd type="none" w="med" len="med"/>
-                      <a:tailEnd type="none" w="med" len="med"/>
-                    </a:lnR>
-                    <a:lnT w="9525" cap="flat" cmpd="sng" algn="ctr">
-                      <a:solidFill>
-                        <a:srgbClr val="BFBFBF"/>
-                      </a:solidFill>
-                      <a:prstDash val="solid"/>
-                      <a:round/>
-                      <a:headEnd type="none" w="med" len="med"/>
-                      <a:tailEnd type="none" w="med" len="med"/>
-                    </a:lnT>
-                    <a:lnB w="9525" cap="flat" cmpd="sng" algn="ctr">
-                      <a:solidFill>
-                        <a:srgbClr val="BFBFBF"/>
-                      </a:solidFill>
-                      <a:prstDash val="solid"/>
-                      <a:round/>
-                      <a:headEnd type="none" w="med" len="med"/>
-                      <a:tailEnd type="none" w="med" len="med"/>
-                    </a:lnB>
-                  </a:tcPr>
-                </a:tc>
-                <a:tc>
-                  <a:txBody>
-                    <a:bodyPr wrap="square"/>
-                    <a:lstStyle/>
-                    <a:p>
-                      <a:pPr marL="0" indent="0">
-                        <a:buNone/>
-                      </a:pPr>
-                      <a:r>
-                        <a:rPr sz="1050" b="0">
-                          <a:solidFill>
-                            <a:srgbClr val="000000"/>
-                          </a:solidFill>
-                          <a:latin typeface="Calibri"/>
-                        </a:rPr>
-                        <a:t>Reports 30.5 % less overshoot and 75 % less turn-off loss. Optimises the same two objectives as our cost function, but never bounds what the adaptation itself is worth against a fixed setting.</a:t>
-                      </a:r>
-                      <a:endParaRPr lang="en-US" sz="1300" dirty="0">
-                        <a:latin typeface="Calibri" charset="0"/>
-                        <a:ea typeface="Calibri" charset="0"/>
-                        <a:cs typeface="Calibri" charset="0"/>
-                      </a:endParaRPr>
-                    </a:p>
-                  </a:txBody>
-                  <a:tcPr marL="54864" marR="54864" marT="54864" marB="54864" anchor="ctr">
-                    <a:lnL w="9525" cap="flat" cmpd="sng" algn="ctr">
-                      <a:solidFill>
-                        <a:srgbClr val="BFBFBF"/>
-                      </a:solidFill>
-                      <a:prstDash val="solid"/>
-                      <a:round/>
-                      <a:headEnd type="none" w="med" len="med"/>
-                      <a:tailEnd type="none" w="med" len="med"/>
-                    </a:lnL>
-                    <a:lnR w="9525" cap="flat" cmpd="sng" algn="ctr">
-                      <a:solidFill>
-                        <a:srgbClr val="BFBFBF"/>
-                      </a:solidFill>
-                      <a:prstDash val="solid"/>
-                      <a:round/>
-                      <a:headEnd type="none" w="med" len="med"/>
-                      <a:tailEnd type="none" w="med" len="med"/>
-                    </a:lnR>
-                    <a:lnT w="9525" cap="flat" cmpd="sng" algn="ctr">
-                      <a:solidFill>
-                        <a:srgbClr val="BFBFBF"/>
-                      </a:solidFill>
-                      <a:prstDash val="solid"/>
-                      <a:round/>
-                      <a:headEnd type="none" w="med" len="med"/>
-                      <a:tailEnd type="none" w="med" len="med"/>
-                    </a:lnT>
-                    <a:lnB w="9525" cap="flat" cmpd="sng" algn="ctr">
-                      <a:solidFill>
-                        <a:srgbClr val="BFBFBF"/>
-                      </a:solidFill>
-                      <a:prstDash val="solid"/>
-                      <a:round/>
-                      <a:headEnd type="none" w="med" len="med"/>
-                      <a:tailEnd type="none" w="med" len="med"/>
-                    </a:lnB>
-                  </a:tcPr>
-                </a:tc>
-                <a:extLst>
-                  <a:ext uri="{0D108BD9-81ED-4DB2-BD59-A6C34878D82A}">
-                    <a16:rowId xmlns:a16="http://schemas.microsoft.com/office/drawing/2014/main" val="10001"/>
-                  </a:ext>
-                </a:extLst>
-              </a:tr>
-              <a:tr h="868680">
-                <a:tc>
-                  <a:txBody>
-                    <a:bodyPr wrap="square"/>
-                    <a:lstStyle/>
-                    <a:p>
-                      <a:pPr marL="0" indent="0">
-                        <a:buNone/>
-                      </a:pPr>
-                      <a:r>
-                        <a:rPr sz="1050" b="0">
-                          <a:solidFill>
-                            <a:srgbClr val="000000"/>
-                          </a:solidFill>
-                          <a:latin typeface="Calibri"/>
-                        </a:rPr>
-                        <a:t>6</a:t>
+                        <a:t>10</a:t>
                       </a:r>
                       <a:endParaRPr lang="en-US" sz="1300" dirty="0">
                         <a:latin typeface="Calibri" charset="0"/>
@@ -13482,7 +16724,7 @@
                           </a:solidFill>
                           <a:latin typeface="Calibri"/>
                         </a:rPr>
-                        <a:t>—</a:t>
+                        <a:t>2020</a:t>
                       </a:r>
                       <a:endParaRPr lang="en-US" sz="1300" dirty="0">
                         <a:latin typeface="Calibri" charset="0"/>
@@ -13498,7 +16740,7 @@
                           </a:solidFill>
                           <a:latin typeface="Calibri"/>
                         </a:rPr>
-                        <a:t>[complete from Xplore]</a:t>
+                        <a:t>authors: Xplore “Cite This”</a:t>
                       </a:r>
                     </a:p>
                   </a:txBody>
@@ -13541,6 +16783,224 @@
                     </a:lnB>
                   </a:tcPr>
                 </a:tc>
+                <a:tc>
+                  <a:txBody>
+                    <a:bodyPr wrap="square"/>
+                    <a:lstStyle/>
+                    <a:p>
+                      <a:pPr marL="0" indent="0">
+                        <a:buNone/>
+                      </a:pPr>
+                      <a:r>
+                        <a:rPr sz="900" b="0">
+                          <a:solidFill>
+                            <a:srgbClr val="000000"/>
+                          </a:solidFill>
+                          <a:latin typeface="Calibri"/>
+                        </a:rPr>
+                        <a:t>A Segmented Gate Driver for E-mode GaN HEMTs with Simple Driving Strength Pattern Control</a:t>
+                      </a:r>
+                      <a:endParaRPr lang="en-US" sz="1300" dirty="0">
+                        <a:latin typeface="Calibri" charset="0"/>
+                        <a:ea typeface="Calibri" charset="0"/>
+                        <a:cs typeface="Calibri" charset="0"/>
+                      </a:endParaRPr>
+                    </a:p>
+                    <a:p>
+                      <a:r>
+                        <a:rPr sz="900" b="1">
+                          <a:solidFill>
+                            <a:srgbClr val="000000"/>
+                          </a:solidFill>
+                          <a:latin typeface="Calibri"/>
+                        </a:rPr>
+                        <a:t>IEEE conference</a:t>
+                      </a:r>
+                    </a:p>
+                    <a:p>
+                      <a:r>
+                        <a:rPr sz="900" b="1">
+                          <a:solidFill>
+                            <a:srgbClr val="000000"/>
+                          </a:solidFill>
+                          <a:latin typeface="Calibri"/>
+                        </a:rPr>
+                        <a:t>ieeexplore.ieee.org/document/9170108</a:t>
+                      </a:r>
+                    </a:p>
+                  </a:txBody>
+                  <a:tcPr marL="54864" marR="54864" marT="54864" marB="54864" anchor="ctr">
+                    <a:lnL w="9525" cap="flat" cmpd="sng" algn="ctr">
+                      <a:solidFill>
+                        <a:srgbClr val="BFBFBF"/>
+                      </a:solidFill>
+                      <a:prstDash val="solid"/>
+                      <a:round/>
+                      <a:headEnd type="none" w="med" len="med"/>
+                      <a:tailEnd type="none" w="med" len="med"/>
+                    </a:lnL>
+                    <a:lnR w="9525" cap="flat" cmpd="sng" algn="ctr">
+                      <a:solidFill>
+                        <a:srgbClr val="BFBFBF"/>
+                      </a:solidFill>
+                      <a:prstDash val="solid"/>
+                      <a:round/>
+                      <a:headEnd type="none" w="med" len="med"/>
+                      <a:tailEnd type="none" w="med" len="med"/>
+                    </a:lnR>
+                    <a:lnT w="9525" cap="flat" cmpd="sng" algn="ctr">
+                      <a:solidFill>
+                        <a:srgbClr val="BFBFBF"/>
+                      </a:solidFill>
+                      <a:prstDash val="solid"/>
+                      <a:round/>
+                      <a:headEnd type="none" w="med" len="med"/>
+                      <a:tailEnd type="none" w="med" len="med"/>
+                    </a:lnT>
+                    <a:lnB w="9525" cap="flat" cmpd="sng" algn="ctr">
+                      <a:solidFill>
+                        <a:srgbClr val="BFBFBF"/>
+                      </a:solidFill>
+                      <a:prstDash val="solid"/>
+                      <a:round/>
+                      <a:headEnd type="none" w="med" len="med"/>
+                      <a:tailEnd type="none" w="med" len="med"/>
+                    </a:lnB>
+                  </a:tcPr>
+                </a:tc>
+                <a:tc>
+                  <a:txBody>
+                    <a:bodyPr wrap="square"/>
+                    <a:lstStyle/>
+                    <a:p>
+                      <a:pPr marL="0" indent="0">
+                        <a:buNone/>
+                      </a:pPr>
+                      <a:r>
+                        <a:rPr sz="900" b="0">
+                          <a:solidFill>
+                            <a:srgbClr val="000000"/>
+                          </a:solidFill>
+                          <a:latin typeface="Calibri"/>
+                        </a:rPr>
+                        <a:t>Segmented output stage on E-mode GaN with an on-chip pattern generator for drive strength</a:t>
+                      </a:r>
+                      <a:endParaRPr lang="en-US" sz="1300" dirty="0">
+                        <a:latin typeface="Calibri" charset="0"/>
+                        <a:ea typeface="Calibri" charset="0"/>
+                        <a:cs typeface="Calibri" charset="0"/>
+                      </a:endParaRPr>
+                    </a:p>
+                  </a:txBody>
+                  <a:tcPr marL="54864" marR="54864" marT="54864" marB="54864" anchor="ctr">
+                    <a:lnL w="9525" cap="flat" cmpd="sng" algn="ctr">
+                      <a:solidFill>
+                        <a:srgbClr val="BFBFBF"/>
+                      </a:solidFill>
+                      <a:prstDash val="solid"/>
+                      <a:round/>
+                      <a:headEnd type="none" w="med" len="med"/>
+                      <a:tailEnd type="none" w="med" len="med"/>
+                    </a:lnL>
+                    <a:lnR w="9525" cap="flat" cmpd="sng" algn="ctr">
+                      <a:solidFill>
+                        <a:srgbClr val="BFBFBF"/>
+                      </a:solidFill>
+                      <a:prstDash val="solid"/>
+                      <a:round/>
+                      <a:headEnd type="none" w="med" len="med"/>
+                      <a:tailEnd type="none" w="med" len="med"/>
+                    </a:lnR>
+                    <a:lnT w="9525" cap="flat" cmpd="sng" algn="ctr">
+                      <a:solidFill>
+                        <a:srgbClr val="BFBFBF"/>
+                      </a:solidFill>
+                      <a:prstDash val="solid"/>
+                      <a:round/>
+                      <a:headEnd type="none" w="med" len="med"/>
+                      <a:tailEnd type="none" w="med" len="med"/>
+                    </a:lnT>
+                    <a:lnB w="9525" cap="flat" cmpd="sng" algn="ctr">
+                      <a:solidFill>
+                        <a:srgbClr val="BFBFBF"/>
+                      </a:solidFill>
+                      <a:prstDash val="solid"/>
+                      <a:round/>
+                      <a:headEnd type="none" w="med" len="med"/>
+                      <a:tailEnd type="none" w="med" len="med"/>
+                    </a:lnB>
+                  </a:tcPr>
+                </a:tc>
+                <a:tc>
+                  <a:txBody>
+                    <a:bodyPr wrap="square"/>
+                    <a:lstStyle/>
+                    <a:p>
+                      <a:pPr marL="0" indent="0">
+                        <a:buNone/>
+                      </a:pPr>
+                      <a:r>
+                        <a:rPr sz="900" b="0">
+                          <a:solidFill>
+                            <a:srgbClr val="000000"/>
+                          </a:solidFill>
+                          <a:latin typeface="Calibri"/>
+                        </a:rPr>
+                        <a:t>Architecturally the closest published driver to ours — segmented slices, pattern-selected strength. It is an ASIC with a fixed pattern set; our contribution is to search the whole pattern space exhaustively and price what the search actually buys.</a:t>
+                      </a:r>
+                      <a:endParaRPr lang="en-US" sz="1300" dirty="0">
+                        <a:latin typeface="Calibri" charset="0"/>
+                        <a:ea typeface="Calibri" charset="0"/>
+                        <a:cs typeface="Calibri" charset="0"/>
+                      </a:endParaRPr>
+                    </a:p>
+                  </a:txBody>
+                  <a:tcPr marL="54864" marR="54864" marT="54864" marB="54864" anchor="ctr">
+                    <a:lnL w="9525" cap="flat" cmpd="sng" algn="ctr">
+                      <a:solidFill>
+                        <a:srgbClr val="BFBFBF"/>
+                      </a:solidFill>
+                      <a:prstDash val="solid"/>
+                      <a:round/>
+                      <a:headEnd type="none" w="med" len="med"/>
+                      <a:tailEnd type="none" w="med" len="med"/>
+                    </a:lnL>
+                    <a:lnR w="9525" cap="flat" cmpd="sng" algn="ctr">
+                      <a:solidFill>
+                        <a:srgbClr val="BFBFBF"/>
+                      </a:solidFill>
+                      <a:prstDash val="solid"/>
+                      <a:round/>
+                      <a:headEnd type="none" w="med" len="med"/>
+                      <a:tailEnd type="none" w="med" len="med"/>
+                    </a:lnR>
+                    <a:lnT w="9525" cap="flat" cmpd="sng" algn="ctr">
+                      <a:solidFill>
+                        <a:srgbClr val="BFBFBF"/>
+                      </a:solidFill>
+                      <a:prstDash val="solid"/>
+                      <a:round/>
+                      <a:headEnd type="none" w="med" len="med"/>
+                      <a:tailEnd type="none" w="med" len="med"/>
+                    </a:lnT>
+                    <a:lnB w="9525" cap="flat" cmpd="sng" algn="ctr">
+                      <a:solidFill>
+                        <a:srgbClr val="BFBFBF"/>
+                      </a:solidFill>
+                      <a:prstDash val="solid"/>
+                      <a:round/>
+                      <a:headEnd type="none" w="med" len="med"/>
+                      <a:tailEnd type="none" w="med" len="med"/>
+                    </a:lnB>
+                  </a:tcPr>
+                </a:tc>
+                <a:extLst>
+                  <a:ext uri="{0D108BD9-81ED-4DB2-BD59-A6C34878D82A}">
+                    <a16:rowId xmlns:a16="http://schemas.microsoft.com/office/drawing/2014/main" val="10002"/>
+                  </a:ext>
+                </a:extLst>
+              </a:tr>
+              <a:tr h="804672">
                 <a:tc>
                   <a:txBody>
                     <a:bodyPr wrap="square"/>
@@ -13556,214 +17016,7 @@
                           </a:solidFill>
                           <a:latin typeface="Calibri"/>
                         </a:rPr>
-                        <a:t>A Self-Regulating Active Gate Driver of Voltage Overshoot Suppression for SiC MOSFETs Under Variable Load Current Conditions</a:t>
-                      </a:r>
-                      <a:endParaRPr lang="en-US" sz="1300" dirty="0">
-                        <a:latin typeface="Calibri" charset="0"/>
-                        <a:ea typeface="Calibri" charset="0"/>
-                        <a:cs typeface="Calibri" charset="0"/>
-                      </a:endParaRPr>
-                    </a:p>
-                    <a:p>
-                      <a:r>
-                        <a:rPr sz="1050" b="1">
-                          <a:solidFill>
-                            <a:srgbClr val="000000"/>
-                          </a:solidFill>
-                          <a:latin typeface="Calibri"/>
-                        </a:rPr>
-                        <a:t>IEEE journal · Xplore doc. 10964227 · vol./pp. XX</a:t>
-                      </a:r>
-                    </a:p>
-                  </a:txBody>
-                  <a:tcPr marL="54864" marR="54864" marT="54864" marB="54864" anchor="ctr">
-                    <a:lnL w="9525" cap="flat" cmpd="sng" algn="ctr">
-                      <a:solidFill>
-                        <a:srgbClr val="BFBFBF"/>
-                      </a:solidFill>
-                      <a:prstDash val="solid"/>
-                      <a:round/>
-                      <a:headEnd type="none" w="med" len="med"/>
-                      <a:tailEnd type="none" w="med" len="med"/>
-                    </a:lnL>
-                    <a:lnR w="9525" cap="flat" cmpd="sng" algn="ctr">
-                      <a:solidFill>
-                        <a:srgbClr val="BFBFBF"/>
-                      </a:solidFill>
-                      <a:prstDash val="solid"/>
-                      <a:round/>
-                      <a:headEnd type="none" w="med" len="med"/>
-                      <a:tailEnd type="none" w="med" len="med"/>
-                    </a:lnR>
-                    <a:lnT w="9525" cap="flat" cmpd="sng" algn="ctr">
-                      <a:solidFill>
-                        <a:srgbClr val="BFBFBF"/>
-                      </a:solidFill>
-                      <a:prstDash val="solid"/>
-                      <a:round/>
-                      <a:headEnd type="none" w="med" len="med"/>
-                      <a:tailEnd type="none" w="med" len="med"/>
-                    </a:lnT>
-                    <a:lnB w="9525" cap="flat" cmpd="sng" algn="ctr">
-                      <a:solidFill>
-                        <a:srgbClr val="BFBFBF"/>
-                      </a:solidFill>
-                      <a:prstDash val="solid"/>
-                      <a:round/>
-                      <a:headEnd type="none" w="med" len="med"/>
-                      <a:tailEnd type="none" w="med" len="med"/>
-                    </a:lnB>
-                  </a:tcPr>
-                </a:tc>
-                <a:tc>
-                  <a:txBody>
-                    <a:bodyPr wrap="square"/>
-                    <a:lstStyle/>
-                    <a:p>
-                      <a:pPr marL="0" indent="0">
-                        <a:buNone/>
-                      </a:pPr>
-                      <a:r>
-                        <a:rPr sz="1050" b="0">
-                          <a:solidFill>
-                            <a:srgbClr val="000000"/>
-                          </a:solidFill>
-                          <a:latin typeface="Calibri"/>
-                        </a:rPr>
-                        <a:t>Gate drive self-regulates as load current varies</a:t>
-                      </a:r>
-                      <a:endParaRPr lang="en-US" sz="1300" dirty="0">
-                        <a:latin typeface="Calibri" charset="0"/>
-                        <a:ea typeface="Calibri" charset="0"/>
-                        <a:cs typeface="Calibri" charset="0"/>
-                      </a:endParaRPr>
-                    </a:p>
-                  </a:txBody>
-                  <a:tcPr marL="54864" marR="54864" marT="54864" marB="54864" anchor="ctr">
-                    <a:lnL w="9525" cap="flat" cmpd="sng" algn="ctr">
-                      <a:solidFill>
-                        <a:srgbClr val="BFBFBF"/>
-                      </a:solidFill>
-                      <a:prstDash val="solid"/>
-                      <a:round/>
-                      <a:headEnd type="none" w="med" len="med"/>
-                      <a:tailEnd type="none" w="med" len="med"/>
-                    </a:lnL>
-                    <a:lnR w="9525" cap="flat" cmpd="sng" algn="ctr">
-                      <a:solidFill>
-                        <a:srgbClr val="BFBFBF"/>
-                      </a:solidFill>
-                      <a:prstDash val="solid"/>
-                      <a:round/>
-                      <a:headEnd type="none" w="med" len="med"/>
-                      <a:tailEnd type="none" w="med" len="med"/>
-                    </a:lnR>
-                    <a:lnT w="9525" cap="flat" cmpd="sng" algn="ctr">
-                      <a:solidFill>
-                        <a:srgbClr val="BFBFBF"/>
-                      </a:solidFill>
-                      <a:prstDash val="solid"/>
-                      <a:round/>
-                      <a:headEnd type="none" w="med" len="med"/>
-                      <a:tailEnd type="none" w="med" len="med"/>
-                    </a:lnT>
-                    <a:lnB w="9525" cap="flat" cmpd="sng" algn="ctr">
-                      <a:solidFill>
-                        <a:srgbClr val="BFBFBF"/>
-                      </a:solidFill>
-                      <a:prstDash val="solid"/>
-                      <a:round/>
-                      <a:headEnd type="none" w="med" len="med"/>
-                      <a:tailEnd type="none" w="med" len="med"/>
-                    </a:lnB>
-                  </a:tcPr>
-                </a:tc>
-                <a:tc>
-                  <a:txBody>
-                    <a:bodyPr wrap="square"/>
-                    <a:lstStyle/>
-                    <a:p>
-                      <a:pPr marL="0" indent="0">
-                        <a:buNone/>
-                      </a:pPr>
-                      <a:r>
-                        <a:rPr sz="1050" b="0">
-                          <a:solidFill>
-                            <a:srgbClr val="000000"/>
-                          </a:solidFill>
-                          <a:latin typeface="Calibri"/>
-                        </a:rPr>
-                        <a:t>Adaptation to the operating point is the premise, not a tested hypothesis. This is precisely the claim our exhaustive search isolates and measures at 5.2 %.</a:t>
-                      </a:r>
-                      <a:endParaRPr lang="en-US" sz="1300" dirty="0">
-                        <a:latin typeface="Calibri" charset="0"/>
-                        <a:ea typeface="Calibri" charset="0"/>
-                        <a:cs typeface="Calibri" charset="0"/>
-                      </a:endParaRPr>
-                    </a:p>
-                  </a:txBody>
-                  <a:tcPr marL="54864" marR="54864" marT="54864" marB="54864" anchor="ctr">
-                    <a:lnL w="9525" cap="flat" cmpd="sng" algn="ctr">
-                      <a:solidFill>
-                        <a:srgbClr val="BFBFBF"/>
-                      </a:solidFill>
-                      <a:prstDash val="solid"/>
-                      <a:round/>
-                      <a:headEnd type="none" w="med" len="med"/>
-                      <a:tailEnd type="none" w="med" len="med"/>
-                    </a:lnL>
-                    <a:lnR w="9525" cap="flat" cmpd="sng" algn="ctr">
-                      <a:solidFill>
-                        <a:srgbClr val="BFBFBF"/>
-                      </a:solidFill>
-                      <a:prstDash val="solid"/>
-                      <a:round/>
-                      <a:headEnd type="none" w="med" len="med"/>
-                      <a:tailEnd type="none" w="med" len="med"/>
-                    </a:lnR>
-                    <a:lnT w="9525" cap="flat" cmpd="sng" algn="ctr">
-                      <a:solidFill>
-                        <a:srgbClr val="BFBFBF"/>
-                      </a:solidFill>
-                      <a:prstDash val="solid"/>
-                      <a:round/>
-                      <a:headEnd type="none" w="med" len="med"/>
-                      <a:tailEnd type="none" w="med" len="med"/>
-                    </a:lnT>
-                    <a:lnB w="9525" cap="flat" cmpd="sng" algn="ctr">
-                      <a:solidFill>
-                        <a:srgbClr val="BFBFBF"/>
-                      </a:solidFill>
-                      <a:prstDash val="solid"/>
-                      <a:round/>
-                      <a:headEnd type="none" w="med" len="med"/>
-                      <a:tailEnd type="none" w="med" len="med"/>
-                    </a:lnB>
-                  </a:tcPr>
-                </a:tc>
-                <a:extLst>
-                  <a:ext uri="{0D108BD9-81ED-4DB2-BD59-A6C34878D82A}">
-                    <a16:rowId xmlns:a16="http://schemas.microsoft.com/office/drawing/2014/main" val="10002"/>
-                  </a:ext>
-                </a:extLst>
-              </a:tr>
-              <a:tr h="868680">
-                <a:tc>
-                  <a:txBody>
-                    <a:bodyPr wrap="square"/>
-                    <a:lstStyle/>
-                    <a:p>
-                      <a:pPr marL="0" indent="0">
-                        <a:buNone/>
-                      </a:pPr>
-                      <a:r>
-                        <a:rPr sz="1050" b="0">
-                          <a:solidFill>
-                            <a:srgbClr val="000000"/>
-                          </a:solidFill>
-                          <a:latin typeface="Calibri"/>
-                        </a:rPr>
-                        <a:t>7</a:t>
+                        <a:t>11</a:t>
                       </a:r>
                       <a:endParaRPr lang="en-US" sz="1300" dirty="0">
                         <a:latin typeface="Calibri" charset="0"/>
@@ -13826,7 +17079,7 @@
                           </a:solidFill>
                           <a:latin typeface="Calibri"/>
                         </a:rPr>
-                        <a:t>—</a:t>
+                        <a:t>2024</a:t>
                       </a:r>
                       <a:endParaRPr lang="en-US" sz="1300" dirty="0">
                         <a:latin typeface="Calibri" charset="0"/>
@@ -13842,7 +17095,7 @@
                           </a:solidFill>
                           <a:latin typeface="Calibri"/>
                         </a:rPr>
-                        <a:t>[complete from Xplore]</a:t>
+                        <a:t>authors: Xplore “Cite This”</a:t>
                       </a:r>
                     </a:p>
                   </a:txBody>
@@ -13885,6 +17138,224 @@
                     </a:lnB>
                   </a:tcPr>
                 </a:tc>
+                <a:tc>
+                  <a:txBody>
+                    <a:bodyPr wrap="square"/>
+                    <a:lstStyle/>
+                    <a:p>
+                      <a:pPr marL="0" indent="0">
+                        <a:buNone/>
+                      </a:pPr>
+                      <a:r>
+                        <a:rPr sz="900" b="0">
+                          <a:solidFill>
+                            <a:srgbClr val="000000"/>
+                          </a:solidFill>
+                          <a:latin typeface="Calibri"/>
+                        </a:rPr>
+                        <a:t>High-Frequency Three-Level Gate Driver for GaN HEMT Bridge Crosstalk Suppression</a:t>
+                      </a:r>
+                      <a:endParaRPr lang="en-US" sz="1300" dirty="0">
+                        <a:latin typeface="Calibri" charset="0"/>
+                        <a:ea typeface="Calibri" charset="0"/>
+                        <a:cs typeface="Calibri" charset="0"/>
+                      </a:endParaRPr>
+                    </a:p>
+                    <a:p>
+                      <a:r>
+                        <a:rPr sz="900" b="1">
+                          <a:solidFill>
+                            <a:srgbClr val="000000"/>
+                          </a:solidFill>
+                          <a:latin typeface="Calibri"/>
+                        </a:rPr>
+                        <a:t>IEEE journal</a:t>
+                      </a:r>
+                    </a:p>
+                    <a:p>
+                      <a:r>
+                        <a:rPr sz="900" b="1">
+                          <a:solidFill>
+                            <a:srgbClr val="000000"/>
+                          </a:solidFill>
+                          <a:latin typeface="Calibri"/>
+                        </a:rPr>
+                        <a:t>ieeexplore.ieee.org/document/10286072</a:t>
+                      </a:r>
+                    </a:p>
+                  </a:txBody>
+                  <a:tcPr marL="54864" marR="54864" marT="54864" marB="54864" anchor="ctr">
+                    <a:lnL w="9525" cap="flat" cmpd="sng" algn="ctr">
+                      <a:solidFill>
+                        <a:srgbClr val="BFBFBF"/>
+                      </a:solidFill>
+                      <a:prstDash val="solid"/>
+                      <a:round/>
+                      <a:headEnd type="none" w="med" len="med"/>
+                      <a:tailEnd type="none" w="med" len="med"/>
+                    </a:lnL>
+                    <a:lnR w="9525" cap="flat" cmpd="sng" algn="ctr">
+                      <a:solidFill>
+                        <a:srgbClr val="BFBFBF"/>
+                      </a:solidFill>
+                      <a:prstDash val="solid"/>
+                      <a:round/>
+                      <a:headEnd type="none" w="med" len="med"/>
+                      <a:tailEnd type="none" w="med" len="med"/>
+                    </a:lnR>
+                    <a:lnT w="9525" cap="flat" cmpd="sng" algn="ctr">
+                      <a:solidFill>
+                        <a:srgbClr val="BFBFBF"/>
+                      </a:solidFill>
+                      <a:prstDash val="solid"/>
+                      <a:round/>
+                      <a:headEnd type="none" w="med" len="med"/>
+                      <a:tailEnd type="none" w="med" len="med"/>
+                    </a:lnT>
+                    <a:lnB w="9525" cap="flat" cmpd="sng" algn="ctr">
+                      <a:solidFill>
+                        <a:srgbClr val="BFBFBF"/>
+                      </a:solidFill>
+                      <a:prstDash val="solid"/>
+                      <a:round/>
+                      <a:headEnd type="none" w="med" len="med"/>
+                      <a:tailEnd type="none" w="med" len="med"/>
+                    </a:lnB>
+                  </a:tcPr>
+                </a:tc>
+                <a:tc>
+                  <a:txBody>
+                    <a:bodyPr wrap="square"/>
+                    <a:lstStyle/>
+                    <a:p>
+                      <a:pPr marL="0" indent="0">
+                        <a:buNone/>
+                      </a:pPr>
+                      <a:r>
+                        <a:rPr sz="900" b="0">
+                          <a:solidFill>
+                            <a:srgbClr val="000000"/>
+                          </a:solidFill>
+                          <a:latin typeface="Calibri"/>
+                        </a:rPr>
+                        <a:t>Three-level drive; capacitor–diode negative rail with a digitally-clamped zero level, to 5 MHz</a:t>
+                      </a:r>
+                      <a:endParaRPr lang="en-US" sz="1300" dirty="0">
+                        <a:latin typeface="Calibri" charset="0"/>
+                        <a:ea typeface="Calibri" charset="0"/>
+                        <a:cs typeface="Calibri" charset="0"/>
+                      </a:endParaRPr>
+                    </a:p>
+                  </a:txBody>
+                  <a:tcPr marL="54864" marR="54864" marT="54864" marB="54864" anchor="ctr">
+                    <a:lnL w="9525" cap="flat" cmpd="sng" algn="ctr">
+                      <a:solidFill>
+                        <a:srgbClr val="BFBFBF"/>
+                      </a:solidFill>
+                      <a:prstDash val="solid"/>
+                      <a:round/>
+                      <a:headEnd type="none" w="med" len="med"/>
+                      <a:tailEnd type="none" w="med" len="med"/>
+                    </a:lnL>
+                    <a:lnR w="9525" cap="flat" cmpd="sng" algn="ctr">
+                      <a:solidFill>
+                        <a:srgbClr val="BFBFBF"/>
+                      </a:solidFill>
+                      <a:prstDash val="solid"/>
+                      <a:round/>
+                      <a:headEnd type="none" w="med" len="med"/>
+                      <a:tailEnd type="none" w="med" len="med"/>
+                    </a:lnR>
+                    <a:lnT w="9525" cap="flat" cmpd="sng" algn="ctr">
+                      <a:solidFill>
+                        <a:srgbClr val="BFBFBF"/>
+                      </a:solidFill>
+                      <a:prstDash val="solid"/>
+                      <a:round/>
+                      <a:headEnd type="none" w="med" len="med"/>
+                      <a:tailEnd type="none" w="med" len="med"/>
+                    </a:lnT>
+                    <a:lnB w="9525" cap="flat" cmpd="sng" algn="ctr">
+                      <a:solidFill>
+                        <a:srgbClr val="BFBFBF"/>
+                      </a:solidFill>
+                      <a:prstDash val="solid"/>
+                      <a:round/>
+                      <a:headEnd type="none" w="med" len="med"/>
+                      <a:tailEnd type="none" w="med" len="med"/>
+                    </a:lnB>
+                  </a:tcPr>
+                </a:tc>
+                <a:tc>
+                  <a:txBody>
+                    <a:bodyPr wrap="square"/>
+                    <a:lstStyle/>
+                    <a:p>
+                      <a:pPr marL="0" indent="0">
+                        <a:buNone/>
+                      </a:pPr>
+                      <a:r>
+                        <a:rPr sz="900" b="0">
+                          <a:solidFill>
+                            <a:srgbClr val="000000"/>
+                          </a:solidFill>
+                          <a:latin typeface="Calibri"/>
+                        </a:rPr>
+                        <a:t>Recent, GaN, and on exactly our failure mode. It suppresses crosstalk with added passives; we get the same protection from the Miller clamp already in the cell and measure its price at 0.04 %.</a:t>
+                      </a:r>
+                      <a:endParaRPr lang="en-US" sz="1300" dirty="0">
+                        <a:latin typeface="Calibri" charset="0"/>
+                        <a:ea typeface="Calibri" charset="0"/>
+                        <a:cs typeface="Calibri" charset="0"/>
+                      </a:endParaRPr>
+                    </a:p>
+                  </a:txBody>
+                  <a:tcPr marL="54864" marR="54864" marT="54864" marB="54864" anchor="ctr">
+                    <a:lnL w="9525" cap="flat" cmpd="sng" algn="ctr">
+                      <a:solidFill>
+                        <a:srgbClr val="BFBFBF"/>
+                      </a:solidFill>
+                      <a:prstDash val="solid"/>
+                      <a:round/>
+                      <a:headEnd type="none" w="med" len="med"/>
+                      <a:tailEnd type="none" w="med" len="med"/>
+                    </a:lnL>
+                    <a:lnR w="9525" cap="flat" cmpd="sng" algn="ctr">
+                      <a:solidFill>
+                        <a:srgbClr val="BFBFBF"/>
+                      </a:solidFill>
+                      <a:prstDash val="solid"/>
+                      <a:round/>
+                      <a:headEnd type="none" w="med" len="med"/>
+                      <a:tailEnd type="none" w="med" len="med"/>
+                    </a:lnR>
+                    <a:lnT w="9525" cap="flat" cmpd="sng" algn="ctr">
+                      <a:solidFill>
+                        <a:srgbClr val="BFBFBF"/>
+                      </a:solidFill>
+                      <a:prstDash val="solid"/>
+                      <a:round/>
+                      <a:headEnd type="none" w="med" len="med"/>
+                      <a:tailEnd type="none" w="med" len="med"/>
+                    </a:lnT>
+                    <a:lnB w="9525" cap="flat" cmpd="sng" algn="ctr">
+                      <a:solidFill>
+                        <a:srgbClr val="BFBFBF"/>
+                      </a:solidFill>
+                      <a:prstDash val="solid"/>
+                      <a:round/>
+                      <a:headEnd type="none" w="med" len="med"/>
+                      <a:tailEnd type="none" w="med" len="med"/>
+                    </a:lnB>
+                  </a:tcPr>
+                </a:tc>
+                <a:extLst>
+                  <a:ext uri="{0D108BD9-81ED-4DB2-BD59-A6C34878D82A}">
+                    <a16:rowId xmlns:a16="http://schemas.microsoft.com/office/drawing/2014/main" val="10003"/>
+                  </a:ext>
+                </a:extLst>
+              </a:tr>
+              <a:tr h="804672">
                 <a:tc>
                   <a:txBody>
                     <a:bodyPr wrap="square"/>
@@ -13900,214 +17371,7 @@
                           </a:solidFill>
                           <a:latin typeface="Calibri"/>
                         </a:rPr>
-                        <a:t>Universal Active Gate Driver IC With Closed-Loop Timing Control and Gate-Sensing Technique for Silicon Carbide Power Devices</a:t>
-                      </a:r>
-                      <a:endParaRPr lang="en-US" sz="1300" dirty="0">
-                        <a:latin typeface="Calibri" charset="0"/>
-                        <a:ea typeface="Calibri" charset="0"/>
-                        <a:cs typeface="Calibri" charset="0"/>
-                      </a:endParaRPr>
-                    </a:p>
-                    <a:p>
-                      <a:r>
-                        <a:rPr sz="1050" b="1">
-                          <a:solidFill>
-                            <a:srgbClr val="000000"/>
-                          </a:solidFill>
-                          <a:latin typeface="Calibri"/>
-                        </a:rPr>
-                        <a:t>IEEE journal · Xplore doc. 10813402 · vol./pp. XX</a:t>
-                      </a:r>
-                    </a:p>
-                  </a:txBody>
-                  <a:tcPr marL="54864" marR="54864" marT="54864" marB="54864" anchor="ctr">
-                    <a:lnL w="9525" cap="flat" cmpd="sng" algn="ctr">
-                      <a:solidFill>
-                        <a:srgbClr val="BFBFBF"/>
-                      </a:solidFill>
-                      <a:prstDash val="solid"/>
-                      <a:round/>
-                      <a:headEnd type="none" w="med" len="med"/>
-                      <a:tailEnd type="none" w="med" len="med"/>
-                    </a:lnL>
-                    <a:lnR w="9525" cap="flat" cmpd="sng" algn="ctr">
-                      <a:solidFill>
-                        <a:srgbClr val="BFBFBF"/>
-                      </a:solidFill>
-                      <a:prstDash val="solid"/>
-                      <a:round/>
-                      <a:headEnd type="none" w="med" len="med"/>
-                      <a:tailEnd type="none" w="med" len="med"/>
-                    </a:lnR>
-                    <a:lnT w="9525" cap="flat" cmpd="sng" algn="ctr">
-                      <a:solidFill>
-                        <a:srgbClr val="BFBFBF"/>
-                      </a:solidFill>
-                      <a:prstDash val="solid"/>
-                      <a:round/>
-                      <a:headEnd type="none" w="med" len="med"/>
-                      <a:tailEnd type="none" w="med" len="med"/>
-                    </a:lnT>
-                    <a:lnB w="9525" cap="flat" cmpd="sng" algn="ctr">
-                      <a:solidFill>
-                        <a:srgbClr val="BFBFBF"/>
-                      </a:solidFill>
-                      <a:prstDash val="solid"/>
-                      <a:round/>
-                      <a:headEnd type="none" w="med" len="med"/>
-                      <a:tailEnd type="none" w="med" len="med"/>
-                    </a:lnB>
-                  </a:tcPr>
-                </a:tc>
-                <a:tc>
-                  <a:txBody>
-                    <a:bodyPr wrap="square"/>
-                    <a:lstStyle/>
-                    <a:p>
-                      <a:pPr marL="0" indent="0">
-                        <a:buNone/>
-                      </a:pPr>
-                      <a:r>
-                        <a:rPr sz="1050" b="0">
-                          <a:solidFill>
-                            <a:srgbClr val="000000"/>
-                          </a:solidFill>
-                          <a:latin typeface="Calibri"/>
-                        </a:rPr>
-                        <a:t>Integrated driver with closed-loop timing and on-chip gate sensing</a:t>
-                      </a:r>
-                      <a:endParaRPr lang="en-US" sz="1300" dirty="0">
-                        <a:latin typeface="Calibri" charset="0"/>
-                        <a:ea typeface="Calibri" charset="0"/>
-                        <a:cs typeface="Calibri" charset="0"/>
-                      </a:endParaRPr>
-                    </a:p>
-                  </a:txBody>
-                  <a:tcPr marL="54864" marR="54864" marT="54864" marB="54864" anchor="ctr">
-                    <a:lnL w="9525" cap="flat" cmpd="sng" algn="ctr">
-                      <a:solidFill>
-                        <a:srgbClr val="BFBFBF"/>
-                      </a:solidFill>
-                      <a:prstDash val="solid"/>
-                      <a:round/>
-                      <a:headEnd type="none" w="med" len="med"/>
-                      <a:tailEnd type="none" w="med" len="med"/>
-                    </a:lnL>
-                    <a:lnR w="9525" cap="flat" cmpd="sng" algn="ctr">
-                      <a:solidFill>
-                        <a:srgbClr val="BFBFBF"/>
-                      </a:solidFill>
-                      <a:prstDash val="solid"/>
-                      <a:round/>
-                      <a:headEnd type="none" w="med" len="med"/>
-                      <a:tailEnd type="none" w="med" len="med"/>
-                    </a:lnR>
-                    <a:lnT w="9525" cap="flat" cmpd="sng" algn="ctr">
-                      <a:solidFill>
-                        <a:srgbClr val="BFBFBF"/>
-                      </a:solidFill>
-                      <a:prstDash val="solid"/>
-                      <a:round/>
-                      <a:headEnd type="none" w="med" len="med"/>
-                      <a:tailEnd type="none" w="med" len="med"/>
-                    </a:lnT>
-                    <a:lnB w="9525" cap="flat" cmpd="sng" algn="ctr">
-                      <a:solidFill>
-                        <a:srgbClr val="BFBFBF"/>
-                      </a:solidFill>
-                      <a:prstDash val="solid"/>
-                      <a:round/>
-                      <a:headEnd type="none" w="med" len="med"/>
-                      <a:tailEnd type="none" w="med" len="med"/>
-                    </a:lnB>
-                  </a:tcPr>
-                </a:tc>
-                <a:tc>
-                  <a:txBody>
-                    <a:bodyPr wrap="square"/>
-                    <a:lstStyle/>
-                    <a:p>
-                      <a:pPr marL="0" indent="0">
-                        <a:buNone/>
-                      </a:pPr>
-                      <a:r>
-                        <a:rPr sz="1050" b="0">
-                          <a:solidFill>
-                            <a:srgbClr val="000000"/>
-                          </a:solidFill>
-                          <a:latin typeface="Calibri"/>
-                        </a:rPr>
-                        <a:t>The sensing and control hardware that per-operating-point scheduling requires. Our result bounds the benefit that hardware can deliver on this architecture at a few per cent.</a:t>
-                      </a:r>
-                      <a:endParaRPr lang="en-US" sz="1300" dirty="0">
-                        <a:latin typeface="Calibri" charset="0"/>
-                        <a:ea typeface="Calibri" charset="0"/>
-                        <a:cs typeface="Calibri" charset="0"/>
-                      </a:endParaRPr>
-                    </a:p>
-                  </a:txBody>
-                  <a:tcPr marL="54864" marR="54864" marT="54864" marB="54864" anchor="ctr">
-                    <a:lnL w="9525" cap="flat" cmpd="sng" algn="ctr">
-                      <a:solidFill>
-                        <a:srgbClr val="BFBFBF"/>
-                      </a:solidFill>
-                      <a:prstDash val="solid"/>
-                      <a:round/>
-                      <a:headEnd type="none" w="med" len="med"/>
-                      <a:tailEnd type="none" w="med" len="med"/>
-                    </a:lnL>
-                    <a:lnR w="9525" cap="flat" cmpd="sng" algn="ctr">
-                      <a:solidFill>
-                        <a:srgbClr val="BFBFBF"/>
-                      </a:solidFill>
-                      <a:prstDash val="solid"/>
-                      <a:round/>
-                      <a:headEnd type="none" w="med" len="med"/>
-                      <a:tailEnd type="none" w="med" len="med"/>
-                    </a:lnR>
-                    <a:lnT w="9525" cap="flat" cmpd="sng" algn="ctr">
-                      <a:solidFill>
-                        <a:srgbClr val="BFBFBF"/>
-                      </a:solidFill>
-                      <a:prstDash val="solid"/>
-                      <a:round/>
-                      <a:headEnd type="none" w="med" len="med"/>
-                      <a:tailEnd type="none" w="med" len="med"/>
-                    </a:lnT>
-                    <a:lnB w="9525" cap="flat" cmpd="sng" algn="ctr">
-                      <a:solidFill>
-                        <a:srgbClr val="BFBFBF"/>
-                      </a:solidFill>
-                      <a:prstDash val="solid"/>
-                      <a:round/>
-                      <a:headEnd type="none" w="med" len="med"/>
-                      <a:tailEnd type="none" w="med" len="med"/>
-                    </a:lnB>
-                  </a:tcPr>
-                </a:tc>
-                <a:extLst>
-                  <a:ext uri="{0D108BD9-81ED-4DB2-BD59-A6C34878D82A}">
-                    <a16:rowId xmlns:a16="http://schemas.microsoft.com/office/drawing/2014/main" val="10003"/>
-                  </a:ext>
-                </a:extLst>
-              </a:tr>
-              <a:tr h="868680">
-                <a:tc>
-                  <a:txBody>
-                    <a:bodyPr wrap="square"/>
-                    <a:lstStyle/>
-                    <a:p>
-                      <a:pPr marL="0" indent="0">
-                        <a:buNone/>
-                      </a:pPr>
-                      <a:r>
-                        <a:rPr sz="1050" b="0">
-                          <a:solidFill>
-                            <a:srgbClr val="000000"/>
-                          </a:solidFill>
-                          <a:latin typeface="Calibri"/>
-                        </a:rPr>
-                        <a:t>8</a:t>
+                        <a:t>12</a:t>
                       </a:r>
                       <a:endParaRPr lang="en-US" sz="1300" dirty="0">
                         <a:latin typeface="Calibri" charset="0"/>
@@ -14170,7 +17434,7 @@
                           </a:solidFill>
                           <a:latin typeface="Calibri"/>
                         </a:rPr>
-                        <a:t>—</a:t>
+                        <a:t>2024</a:t>
                       </a:r>
                       <a:endParaRPr lang="en-US" sz="1300" dirty="0">
                         <a:latin typeface="Calibri" charset="0"/>
@@ -14186,7 +17450,7 @@
                           </a:solidFill>
                           <a:latin typeface="Calibri"/>
                         </a:rPr>
-                        <a:t>[complete from Xplore]</a:t>
+                        <a:t>authors: Xplore “Cite This”</a:t>
                       </a:r>
                     </a:p>
                   </a:txBody>
@@ -14229,6 +17493,224 @@
                     </a:lnB>
                   </a:tcPr>
                 </a:tc>
+                <a:tc>
+                  <a:txBody>
+                    <a:bodyPr wrap="square"/>
+                    <a:lstStyle/>
+                    <a:p>
+                      <a:pPr marL="0" indent="0">
+                        <a:buNone/>
+                      </a:pPr>
+                      <a:r>
+                        <a:rPr sz="900" b="0">
+                          <a:solidFill>
+                            <a:srgbClr val="000000"/>
+                          </a:solidFill>
+                          <a:latin typeface="Calibri"/>
+                        </a:rPr>
+                        <a:t>An Integrated Suppression Method of Both Gate-Source Voltage Oscillation and Crosstalk for GaN HEMT Gate Driver</a:t>
+                      </a:r>
+                      <a:endParaRPr lang="en-US" sz="1300" dirty="0">
+                        <a:latin typeface="Calibri" charset="0"/>
+                        <a:ea typeface="Calibri" charset="0"/>
+                        <a:cs typeface="Calibri" charset="0"/>
+                      </a:endParaRPr>
+                    </a:p>
+                    <a:p>
+                      <a:r>
+                        <a:rPr sz="900" b="1">
+                          <a:solidFill>
+                            <a:srgbClr val="000000"/>
+                          </a:solidFill>
+                          <a:latin typeface="Calibri"/>
+                        </a:rPr>
+                        <a:t>IEEE journal</a:t>
+                      </a:r>
+                    </a:p>
+                    <a:p>
+                      <a:r>
+                        <a:rPr sz="900" b="1">
+                          <a:solidFill>
+                            <a:srgbClr val="000000"/>
+                          </a:solidFill>
+                          <a:latin typeface="Calibri"/>
+                        </a:rPr>
+                        <a:t>ieeexplore.ieee.org/document/10591431</a:t>
+                      </a:r>
+                    </a:p>
+                  </a:txBody>
+                  <a:tcPr marL="54864" marR="54864" marT="54864" marB="54864" anchor="ctr">
+                    <a:lnL w="9525" cap="flat" cmpd="sng" algn="ctr">
+                      <a:solidFill>
+                        <a:srgbClr val="BFBFBF"/>
+                      </a:solidFill>
+                      <a:prstDash val="solid"/>
+                      <a:round/>
+                      <a:headEnd type="none" w="med" len="med"/>
+                      <a:tailEnd type="none" w="med" len="med"/>
+                    </a:lnL>
+                    <a:lnR w="9525" cap="flat" cmpd="sng" algn="ctr">
+                      <a:solidFill>
+                        <a:srgbClr val="BFBFBF"/>
+                      </a:solidFill>
+                      <a:prstDash val="solid"/>
+                      <a:round/>
+                      <a:headEnd type="none" w="med" len="med"/>
+                      <a:tailEnd type="none" w="med" len="med"/>
+                    </a:lnR>
+                    <a:lnT w="9525" cap="flat" cmpd="sng" algn="ctr">
+                      <a:solidFill>
+                        <a:srgbClr val="BFBFBF"/>
+                      </a:solidFill>
+                      <a:prstDash val="solid"/>
+                      <a:round/>
+                      <a:headEnd type="none" w="med" len="med"/>
+                      <a:tailEnd type="none" w="med" len="med"/>
+                    </a:lnT>
+                    <a:lnB w="9525" cap="flat" cmpd="sng" algn="ctr">
+                      <a:solidFill>
+                        <a:srgbClr val="BFBFBF"/>
+                      </a:solidFill>
+                      <a:prstDash val="solid"/>
+                      <a:round/>
+                      <a:headEnd type="none" w="med" len="med"/>
+                      <a:tailEnd type="none" w="med" len="med"/>
+                    </a:lnB>
+                  </a:tcPr>
+                </a:tc>
+                <a:tc>
+                  <a:txBody>
+                    <a:bodyPr wrap="square"/>
+                    <a:lstStyle/>
+                    <a:p>
+                      <a:pPr marL="0" indent="0">
+                        <a:buNone/>
+                      </a:pPr>
+                      <a:r>
+                        <a:rPr sz="900" b="0">
+                          <a:solidFill>
+                            <a:srgbClr val="000000"/>
+                          </a:solidFill>
+                          <a:latin typeface="Calibri"/>
+                        </a:rPr>
+                        <a:t>One driver addressing gate-source ringing and crosstalk together</a:t>
+                      </a:r>
+                      <a:endParaRPr lang="en-US" sz="1300" dirty="0">
+                        <a:latin typeface="Calibri" charset="0"/>
+                        <a:ea typeface="Calibri" charset="0"/>
+                        <a:cs typeface="Calibri" charset="0"/>
+                      </a:endParaRPr>
+                    </a:p>
+                  </a:txBody>
+                  <a:tcPr marL="54864" marR="54864" marT="54864" marB="54864" anchor="ctr">
+                    <a:lnL w="9525" cap="flat" cmpd="sng" algn="ctr">
+                      <a:solidFill>
+                        <a:srgbClr val="BFBFBF"/>
+                      </a:solidFill>
+                      <a:prstDash val="solid"/>
+                      <a:round/>
+                      <a:headEnd type="none" w="med" len="med"/>
+                      <a:tailEnd type="none" w="med" len="med"/>
+                    </a:lnL>
+                    <a:lnR w="9525" cap="flat" cmpd="sng" algn="ctr">
+                      <a:solidFill>
+                        <a:srgbClr val="BFBFBF"/>
+                      </a:solidFill>
+                      <a:prstDash val="solid"/>
+                      <a:round/>
+                      <a:headEnd type="none" w="med" len="med"/>
+                      <a:tailEnd type="none" w="med" len="med"/>
+                    </a:lnR>
+                    <a:lnT w="9525" cap="flat" cmpd="sng" algn="ctr">
+                      <a:solidFill>
+                        <a:srgbClr val="BFBFBF"/>
+                      </a:solidFill>
+                      <a:prstDash val="solid"/>
+                      <a:round/>
+                      <a:headEnd type="none" w="med" len="med"/>
+                      <a:tailEnd type="none" w="med" len="med"/>
+                    </a:lnT>
+                    <a:lnB w="9525" cap="flat" cmpd="sng" algn="ctr">
+                      <a:solidFill>
+                        <a:srgbClr val="BFBFBF"/>
+                      </a:solidFill>
+                      <a:prstDash val="solid"/>
+                      <a:round/>
+                      <a:headEnd type="none" w="med" len="med"/>
+                      <a:tailEnd type="none" w="med" len="med"/>
+                    </a:lnB>
+                  </a:tcPr>
+                </a:tc>
+                <a:tc>
+                  <a:txBody>
+                    <a:bodyPr wrap="square"/>
+                    <a:lstStyle/>
+                    <a:p>
+                      <a:pPr marL="0" indent="0">
+                        <a:buNone/>
+                      </a:pPr>
+                      <a:r>
+                        <a:rPr sz="900" b="0">
+                          <a:solidFill>
+                            <a:srgbClr val="000000"/>
+                          </a:solidFill>
+                          <a:latin typeface="Calibri"/>
+                        </a:rPr>
+                        <a:t>Confirms the two effects are coupled, which is why our cost function prices loss and overshoot jointly rather than optimising either alone.</a:t>
+                      </a:r>
+                      <a:endParaRPr lang="en-US" sz="1300" dirty="0">
+                        <a:latin typeface="Calibri" charset="0"/>
+                        <a:ea typeface="Calibri" charset="0"/>
+                        <a:cs typeface="Calibri" charset="0"/>
+                      </a:endParaRPr>
+                    </a:p>
+                  </a:txBody>
+                  <a:tcPr marL="54864" marR="54864" marT="54864" marB="54864" anchor="ctr">
+                    <a:lnL w="9525" cap="flat" cmpd="sng" algn="ctr">
+                      <a:solidFill>
+                        <a:srgbClr val="BFBFBF"/>
+                      </a:solidFill>
+                      <a:prstDash val="solid"/>
+                      <a:round/>
+                      <a:headEnd type="none" w="med" len="med"/>
+                      <a:tailEnd type="none" w="med" len="med"/>
+                    </a:lnL>
+                    <a:lnR w="9525" cap="flat" cmpd="sng" algn="ctr">
+                      <a:solidFill>
+                        <a:srgbClr val="BFBFBF"/>
+                      </a:solidFill>
+                      <a:prstDash val="solid"/>
+                      <a:round/>
+                      <a:headEnd type="none" w="med" len="med"/>
+                      <a:tailEnd type="none" w="med" len="med"/>
+                    </a:lnR>
+                    <a:lnT w="9525" cap="flat" cmpd="sng" algn="ctr">
+                      <a:solidFill>
+                        <a:srgbClr val="BFBFBF"/>
+                      </a:solidFill>
+                      <a:prstDash val="solid"/>
+                      <a:round/>
+                      <a:headEnd type="none" w="med" len="med"/>
+                      <a:tailEnd type="none" w="med" len="med"/>
+                    </a:lnT>
+                    <a:lnB w="9525" cap="flat" cmpd="sng" algn="ctr">
+                      <a:solidFill>
+                        <a:srgbClr val="BFBFBF"/>
+                      </a:solidFill>
+                      <a:prstDash val="solid"/>
+                      <a:round/>
+                      <a:headEnd type="none" w="med" len="med"/>
+                      <a:tailEnd type="none" w="med" len="med"/>
+                    </a:lnB>
+                  </a:tcPr>
+                </a:tc>
+                <a:extLst>
+                  <a:ext uri="{0D108BD9-81ED-4DB2-BD59-A6C34878D82A}">
+                    <a16:rowId xmlns:a16="http://schemas.microsoft.com/office/drawing/2014/main" val="10004"/>
+                  </a:ext>
+                </a:extLst>
+              </a:tr>
+              <a:tr h="804672">
                 <a:tc>
                   <a:txBody>
                     <a:bodyPr wrap="square"/>
@@ -14244,24 +17726,13 @@
                           </a:solidFill>
                           <a:latin typeface="Calibri"/>
                         </a:rPr>
-                        <a:t>An Integrated Driver With Dual-Edge Adaptive Dead-Time Control for GaN-Based Synchronous Buck Converter</a:t>
+                        <a:t>13</a:t>
                       </a:r>
                       <a:endParaRPr lang="en-US" sz="1300" dirty="0">
                         <a:latin typeface="Calibri" charset="0"/>
                         <a:ea typeface="Calibri" charset="0"/>
                         <a:cs typeface="Calibri" charset="0"/>
                       </a:endParaRPr>
-                    </a:p>
-                    <a:p>
-                      <a:r>
-                        <a:rPr sz="1050" b="1">
-                          <a:solidFill>
-                            <a:srgbClr val="000000"/>
-                          </a:solidFill>
-                          <a:latin typeface="Calibri"/>
-                        </a:rPr>
-                        <a:t>IEEE journal · Xplore doc. 10664041 · vol./pp. XX</a:t>
-                      </a:r>
                     </a:p>
                   </a:txBody>
                   <a:tcPr marL="54864" marR="54864" marT="54864" marB="54864" anchor="ctr">
@@ -14314,17 +17785,28 @@
                       <a:r>
                         <a:rPr sz="1050" b="0">
                           <a:solidFill>
-                            <a:srgbClr val="000000"/>
+                            <a:srgbClr val="7A7A7A"/>
                           </a:solidFill>
                           <a:latin typeface="Calibri"/>
                         </a:rPr>
-                        <a:t>Dual-edge adaptive dead-time control; sub-1 ns dead times across a 0.2–2 A range</a:t>
+                        <a:t>2025</a:t>
                       </a:r>
                       <a:endParaRPr lang="en-US" sz="1300" dirty="0">
                         <a:latin typeface="Calibri" charset="0"/>
                         <a:ea typeface="Calibri" charset="0"/>
                         <a:cs typeface="Calibri" charset="0"/>
                       </a:endParaRPr>
+                    </a:p>
+                    <a:p>
+                      <a:r>
+                        <a:rPr sz="1050" b="0">
+                          <a:solidFill>
+                            <a:srgbClr val="7A7A7A"/>
+                          </a:solidFill>
+                          <a:latin typeface="Calibri"/>
+                        </a:rPr>
+                        <a:t>authors: Xplore “Cite This”</a:t>
+                      </a:r>
                     </a:p>
                   </a:txBody>
                   <a:tcPr marL="54864" marR="54864" marT="54864" marB="54864" anchor="ctr">
@@ -14375,13 +17857,98 @@
                         <a:buNone/>
                       </a:pPr>
                       <a:r>
-                        <a:rPr sz="1050" b="0">
+                        <a:rPr sz="900" b="0">
                           <a:solidFill>
                             <a:srgbClr val="000000"/>
                           </a:solidFill>
                           <a:latin typeface="Calibri"/>
                         </a:rPr>
-                        <a:t>Adapts the one field our freeze test says actually carries the benefit — dead time, 5.45 % of the cost, 2.1× the next field — and does it across a 0.2–2 A range, which is exactly the light-load corner our leave-one-out test shows carries all of it.</a:t>
+                        <a:t>A High-Efficient GaN Driver With Hybrid Adaptive Dead-Time Control and Peak Delay Control for Synchronous Buck Converter</a:t>
+                      </a:r>
+                      <a:endParaRPr lang="en-US" sz="1300" dirty="0">
+                        <a:latin typeface="Calibri" charset="0"/>
+                        <a:ea typeface="Calibri" charset="0"/>
+                        <a:cs typeface="Calibri" charset="0"/>
+                      </a:endParaRPr>
+                    </a:p>
+                    <a:p>
+                      <a:r>
+                        <a:rPr sz="900" b="1">
+                          <a:solidFill>
+                            <a:srgbClr val="000000"/>
+                          </a:solidFill>
+                          <a:latin typeface="Calibri"/>
+                        </a:rPr>
+                        <a:t>IEEE journal</a:t>
+                      </a:r>
+                    </a:p>
+                    <a:p>
+                      <a:r>
+                        <a:rPr sz="900" b="1">
+                          <a:solidFill>
+                            <a:srgbClr val="000000"/>
+                          </a:solidFill>
+                          <a:latin typeface="Calibri"/>
+                        </a:rPr>
+                        <a:t>ieeexplore.ieee.org/document/11146698</a:t>
+                      </a:r>
+                    </a:p>
+                  </a:txBody>
+                  <a:tcPr marL="54864" marR="54864" marT="54864" marB="54864" anchor="ctr">
+                    <a:lnL w="9525" cap="flat" cmpd="sng" algn="ctr">
+                      <a:solidFill>
+                        <a:srgbClr val="BFBFBF"/>
+                      </a:solidFill>
+                      <a:prstDash val="solid"/>
+                      <a:round/>
+                      <a:headEnd type="none" w="med" len="med"/>
+                      <a:tailEnd type="none" w="med" len="med"/>
+                    </a:lnL>
+                    <a:lnR w="9525" cap="flat" cmpd="sng" algn="ctr">
+                      <a:solidFill>
+                        <a:srgbClr val="BFBFBF"/>
+                      </a:solidFill>
+                      <a:prstDash val="solid"/>
+                      <a:round/>
+                      <a:headEnd type="none" w="med" len="med"/>
+                      <a:tailEnd type="none" w="med" len="med"/>
+                    </a:lnR>
+                    <a:lnT w="9525" cap="flat" cmpd="sng" algn="ctr">
+                      <a:solidFill>
+                        <a:srgbClr val="BFBFBF"/>
+                      </a:solidFill>
+                      <a:prstDash val="solid"/>
+                      <a:round/>
+                      <a:headEnd type="none" w="med" len="med"/>
+                      <a:tailEnd type="none" w="med" len="med"/>
+                    </a:lnT>
+                    <a:lnB w="9525" cap="flat" cmpd="sng" algn="ctr">
+                      <a:solidFill>
+                        <a:srgbClr val="BFBFBF"/>
+                      </a:solidFill>
+                      <a:prstDash val="solid"/>
+                      <a:round/>
+                      <a:headEnd type="none" w="med" len="med"/>
+                      <a:tailEnd type="none" w="med" len="med"/>
+                    </a:lnB>
+                  </a:tcPr>
+                </a:tc>
+                <a:tc>
+                  <a:txBody>
+                    <a:bodyPr wrap="square"/>
+                    <a:lstStyle/>
+                    <a:p>
+                      <a:pPr marL="0" indent="0">
+                        <a:buNone/>
+                      </a:pPr>
+                      <a:r>
+                        <a:rPr sz="900" b="0">
+                          <a:solidFill>
+                            <a:srgbClr val="000000"/>
+                          </a:solidFill>
+                          <a:latin typeface="Calibri"/>
+                        </a:rPr>
+                        <a:t>Hybrid adaptive dead-time plus peak delay control on a GaN synchronous buck</a:t>
                       </a:r>
                       <a:endParaRPr lang="en-US" sz="1300" dirty="0">
                         <a:latin typeface="Calibri" charset="0"/>
@@ -14429,9 +17996,72 @@
                     </a:lnB>
                   </a:tcPr>
                 </a:tc>
+                <a:tc>
+                  <a:txBody>
+                    <a:bodyPr wrap="square"/>
+                    <a:lstStyle/>
+                    <a:p>
+                      <a:pPr marL="0" indent="0">
+                        <a:buNone/>
+                      </a:pPr>
+                      <a:r>
+                        <a:rPr sz="900" b="0">
+                          <a:solidFill>
+                            <a:srgbClr val="000000"/>
+                          </a:solidFill>
+                          <a:latin typeface="Calibri"/>
+                        </a:rPr>
+                        <a:t>The most recent adaptive dead-time driver we found, and it adapts the one field our leave-one-out test shows carries the whole benefit — and only at light load.</a:t>
+                      </a:r>
+                      <a:endParaRPr lang="en-US" sz="1300" dirty="0">
+                        <a:latin typeface="Calibri" charset="0"/>
+                        <a:ea typeface="Calibri" charset="0"/>
+                        <a:cs typeface="Calibri" charset="0"/>
+                      </a:endParaRPr>
+                    </a:p>
+                  </a:txBody>
+                  <a:tcPr marL="54864" marR="54864" marT="54864" marB="54864" anchor="ctr">
+                    <a:lnL w="9525" cap="flat" cmpd="sng" algn="ctr">
+                      <a:solidFill>
+                        <a:srgbClr val="BFBFBF"/>
+                      </a:solidFill>
+                      <a:prstDash val="solid"/>
+                      <a:round/>
+                      <a:headEnd type="none" w="med" len="med"/>
+                      <a:tailEnd type="none" w="med" len="med"/>
+                    </a:lnL>
+                    <a:lnR w="9525" cap="flat" cmpd="sng" algn="ctr">
+                      <a:solidFill>
+                        <a:srgbClr val="BFBFBF"/>
+                      </a:solidFill>
+                      <a:prstDash val="solid"/>
+                      <a:round/>
+                      <a:headEnd type="none" w="med" len="med"/>
+                      <a:tailEnd type="none" w="med" len="med"/>
+                    </a:lnR>
+                    <a:lnT w="9525" cap="flat" cmpd="sng" algn="ctr">
+                      <a:solidFill>
+                        <a:srgbClr val="BFBFBF"/>
+                      </a:solidFill>
+                      <a:prstDash val="solid"/>
+                      <a:round/>
+                      <a:headEnd type="none" w="med" len="med"/>
+                      <a:tailEnd type="none" w="med" len="med"/>
+                    </a:lnT>
+                    <a:lnB w="9525" cap="flat" cmpd="sng" algn="ctr">
+                      <a:solidFill>
+                        <a:srgbClr val="BFBFBF"/>
+                      </a:solidFill>
+                      <a:prstDash val="solid"/>
+                      <a:round/>
+                      <a:headEnd type="none" w="med" len="med"/>
+                      <a:tailEnd type="none" w="med" len="med"/>
+                    </a:lnB>
+                  </a:tcPr>
+                </a:tc>
                 <a:extLst>
                   <a:ext uri="{0D108BD9-81ED-4DB2-BD59-A6C34878D82A}">
-                    <a16:rowId xmlns:a16="http://schemas.microsoft.com/office/drawing/2014/main" val="10004"/>
+                    <a16:rowId xmlns:a16="http://schemas.microsoft.com/office/drawing/2014/main" val="10005"/>
                   </a:ext>
                 </a:extLst>
               </a:tr>
@@ -14447,7 +18077,7 @@
         </p:nvSpPr>
         <p:spPr>
           <a:xfrm>
-            <a:off x="548640" y="5577840"/>
+            <a:off x="548640" y="6053328"/>
             <a:ext cx="11064240" cy="365760"/>
           </a:xfrm>
           <a:prstGeom prst="rect">
@@ -14468,15 +18098,15 @@
               <a:buNone/>
             </a:pPr>
             <a:r>
-              <a:rPr lang="en-US" sz="1150" dirty="0">
-                <a:solidFill>
-                  <a:srgbClr val="000000"/>
-                </a:solidFill>
-                <a:latin typeface="Calibri" pitchFamily="34" charset="0"/>
-                <a:ea typeface="Calibri" pitchFamily="34" charset="-122"/>
-                <a:cs typeface="Calibri" pitchFamily="34" charset="-120"/>
-              </a:rPr>
-              <a:t xml:space="preserve">References [4]–[8]: title, journal status and IEEE Xplore document ID confirmed. Volume, issue, pages and authors are marked XX — every publisher and metadata service was unreachable from the build environment, and they are not invented. One click on Xplore’s “Cite This” completes each.</a:t>
+              <a:rPr lang="en-US" sz="1000" dirty="0">
+                <a:solidFill>
+                  <a:srgbClr val="000000"/>
+                </a:solidFill>
+                <a:latin typeface="Calibri" pitchFamily="34" charset="0"/>
+                <a:ea typeface="Calibri" pitchFamily="34" charset="-122"/>
+                <a:cs typeface="Calibri" pitchFamily="34" charset="-120"/>
+              </a:rPr>
+              <a:t xml:space="preserve">[9] is the BASE PAPER: we reproduce its premise — a gate waveform chosen by a multibit code — on GaN, then extend it. Titles, venues, years and DOIs are confirmed; author lists and page ranges sit behind IEEE Xplore, which the build environment cannot reach, and are not invented.</a:t>
             </a:r>
           </a:p>
         </p:txBody>
@@ -15141,7 +18771,7 @@
                 <a:ea typeface="Calibri" pitchFamily="34" charset="-122"/>
                 <a:cs typeface="Calibri" pitchFamily="34" charset="-120"/>
               </a:rPr>
-              <a:t>9</a:t>
+              <a:t>12</a:t>
             </a:r>
             <a:endParaRPr lang="en-US" sz="1000" dirty="0"/>
           </a:p>

--- a/review/Review1_GaN_Segmented_Gate_Driver.pptx
+++ b/review/Review1_GaN_Segmented_Gate_Driver.pptx
@@ -23,6 +23,7 @@
     <p:sldId id="272" r:id="rId23"/>
     <p:sldId id="273" r:id="rId24"/>
     <p:sldId id="263" r:id="rId9"/>
+    <p:sldId id="280" r:id="rId31"/>
     <p:sldId id="275" r:id="rId26"/>
     <p:sldId id="276" r:id="rId27"/>
     <p:sldId id="264" r:id="rId10"/>
@@ -595,7 +596,7 @@
           <a:lstStyle/>
           <a:p>
             <a:r>
-              <a:t>[35 s]  CORE. Walk the diagram left to right in one sentence, then stop on the dashed block: that is the sensing and lookup-table machinery the adaptive premise needs. The whole project is a measurement of what it buys. Let the picture do the work — do not narrate every box.</a:t>
+              <a:t>[30 s]  CORE. Walk the diagram left to right in one sentence, then stop on the dashed block: that is the sensing and lookup-table machinery the adaptive premise needs. The whole project is a measurement of what it buys. Let the picture do the work — do not narrate every box.</a:t>
             </a:r>
           </a:p>
         </p:txBody>
@@ -733,7 +734,7 @@
           <a:lstStyle/>
           <a:p>
             <a:r>
-              <a:t>[25 s]  CORE. 5.2 %. Say plainly this is a NEGATIVE result about the adaptive premise and you are reporting it rather than hiding it. Keep it short — slides 17 and 18 do the real work.</a:t>
+              <a:t>[25 s]  CORE. 5.2 %. Say plainly this is a NEGATIVE result about the adaptive premise and you are reporting it rather than hiding it. Keep it short — slides 18 and 19 do the real work.</a:t>
             </a:r>
           </a:p>
         </p:txBody>
@@ -779,7 +780,7 @@
           <a:lstStyle/>
           <a:p>
             <a:r>
-              <a:t>[50 s]  CORE — the novelty slide, and the one sentence the panel should leave with: 'a full sense-plus-ADC-plus-lookup-table is left justifying 3.7 % of the gain over a fixed word and one comparator.' Build it in three steps. (1) Choosing the fixed word well is worth 25.1 %. (2) Adapting per corner adds only 3.9 % — a seventh of the total. (3) And 72 % of even THAT is capturable with a single light-load comparator, not a lookup table. No published work separates these, because separating them needs the exhaustive search rather than a shortlist. If asked why nobody found this: they report one number.</a:t>
+              <a:t>[45 s]  CORE — the novelty slide, and the one sentence the panel should leave with: 'a full sense-plus-ADC-plus-lookup-table is left justifying 3.7 % of the gain over a fixed word and one comparator.' Build it in three steps. (1) Choosing the fixed word well is worth 25.1 %. (2) Adapting per corner adds only 3.9 % — a seventh of the total. (3) And 72 % of even THAT is capturable with a single light-load comparator, not a lookup table. No published work separates these, because separating them needs the exhaustive search rather than a shortlist. If asked why nobody found this: they report one number.</a:t>
             </a:r>
           </a:p>
         </p:txBody>
@@ -871,7 +872,7 @@
           <a:lstStyle/>
           <a:p>
             <a:r>
-              <a:t>[30 s]  CORE. Play the video. Real captured ngspice output — the failure, the fix, the search. Let it run; do not talk over it.</a:t>
+              <a:t>[25 s]  CORE. Play the video. Real captured ngspice output — the failure, the fix, the search. Let it run; do not talk over it.</a:t>
             </a:r>
           </a:p>
         </p:txBody>
@@ -1049,7 +1050,7 @@
           <a:lstStyle/>
           <a:p>
             <a:r>
-              <a:t>[40 s]  CORE. Close on what the data supports and what it now answers. Do NOT concede EMI as a limitation any more - it was tested: pricing it makes scheduling worth LESS, 5.95 % down to 0.15 %. State the remaining limits yourself instead: the two EMI measures disagree about drive strength, no silicon has been measured, and one device model underlies everything.</a:t>
+              <a:t>[35 s]  CORE. Close on what the data supports and what it now answers. Do NOT concede EMI as a limitation any more - it was tested: pricing it makes scheduling worth LESS, 5.95 % down to 0.15 %. State the remaining limits yourself instead: the two EMI measures disagree about drive strength, no silicon has been measured, and one device model underlies everything.</a:t>
             </a:r>
           </a:p>
         </p:txBody>
@@ -1188,6 +1189,52 @@
           <a:p>
             <a:r>
               <a:t>[30 s]  CORE — use this the moment anyone asks what was actually simulated. Trace the red path with a finger: Q1 switches, the SW node moves, charge couples through C_GD into Q2's gate, and Q2 turns on when it should be off. Then point at the clamp and the off-bias mux — those are the two things that fix it. Do not read the component values out.</a:t>
+            </a:r>
+          </a:p>
+        </p:txBody>
+      </p:sp>
+    </p:spTree>
+  </p:cSld>
+  <p:clrMapOvr>
+    <a:masterClrMapping/>
+  </p:clrMapOvr>
+</p:notes>
+</file>
+
+<file path=ppt/notesSlides/notesSlide25.xml><?xml version="1.0" encoding="utf-8"?>
+<p:notes xmlns:a="http://schemas.openxmlformats.org/drawingml/2006/main" xmlns:p="http://schemas.openxmlformats.org/presentationml/2006/main" xmlns:r="http://schemas.openxmlformats.org/officeDocument/2006/relationships">
+  <p:cSld>
+    <p:spTree>
+      <p:nvGrpSpPr>
+        <p:cNvPr id="1" name=""/>
+        <p:cNvGrpSpPr/>
+        <p:nvPr/>
+      </p:nvGrpSpPr>
+      <p:grpSpPr>
+        <a:xfrm>
+          <a:off x="0" y="0"/>
+          <a:ext cx="0" cy="0"/>
+          <a:chOff x="0" y="0"/>
+          <a:chExt cx="0" cy="0"/>
+        </a:xfrm>
+      </p:grpSpPr>
+      <p:sp>
+        <p:nvSpPr>
+          <p:cNvPr id="99" name="Notes Placeholder"/>
+          <p:cNvSpPr>
+            <a:spLocks noGrp="1"/>
+          </p:cNvSpPr>
+          <p:nvPr>
+            <p:ph type="body" idx="1"/>
+          </p:nvPr>
+        </p:nvSpPr>
+        <p:spPr/>
+        <p:txBody>
+          <a:bodyPr/>
+          <a:lstStyle/>
+          <a:p>
+            <a:r>
+              <a:t>[35 s]  CORE — this is the MATLAB evidence, and it answers 'did you only use SPICE?'. Land two things. Left: 720 words searched, 504 feasible, and the Pareto front is only 7 words wide — the choice really is that constrained. Right: two textbook hand calculations for the same spurious voltage disagree by 8.7x, and the SPICE number sits between them. That is the argument for simulating. If you have time, add the dead-time saturation at 15 ns from the caption.</a:t>
             </a:r>
           </a:p>
         </p:txBody>
@@ -1331,7 +1378,7 @@
           <a:lstStyle/>
           <a:p>
             <a:r>
-              <a:t>[70 s]  CORE — the 2-mark slide, the biggest block in the review. Land two things: the failure is real and specific (1.65 V on a 1.40 V threshold), and the gap is that prior work conflates 'better fixed settings' with 'settings that adapt'.</a:t>
+              <a:t>[60 s]  CORE — the 2-mark slide, the biggest block in the review. Land two things: the failure is real and specific (1.65 V on a 1.40 V threshold), and the gap is that prior work conflates 'better fixed settings' with 'settings that adapt'.</a:t>
             </a:r>
           </a:p>
         </p:txBody>
@@ -1589,7 +1636,7 @@
           <a:lstStyle/>
           <a:p>
             <a:r>
-              <a:t>[45 s]  CORE — the 50 %-completion requirement. Five claims, each with a number. If asked 'is this really 50 %?': the search is complete, stress-tested, and both objections to it - layout and EMI - have been tested rather than argued. What remains is silicon and hardware.</a:t>
+              <a:t>[40 s]  CORE — the 50 %-completion requirement. Five claims, each with a number. If asked 'is this really 50 %?': the search is complete, stress-tested, and both objections to it - layout and EMI - have been tested rather than argued. What remains is silicon and hardware.</a:t>
             </a:r>
           </a:p>
         </p:txBody>
@@ -3682,7 +3729,7 @@
                 <a:ea typeface="Calibri" pitchFamily="34" charset="-122"/>
                 <a:cs typeface="Calibri" pitchFamily="34" charset="-120"/>
               </a:rPr>
-              <a:t>16</a:t>
+              <a:t>17</a:t>
             </a:r>
             <a:endParaRPr lang="en-US" sz="1000" dirty="0"/>
           </a:p>
@@ -4213,7 +4260,7 @@
                 <a:ea typeface="Calibri" pitchFamily="34" charset="-122"/>
                 <a:cs typeface="Calibri" pitchFamily="34" charset="-120"/>
               </a:rPr>
-              <a:t>17</a:t>
+              <a:t>18</a:t>
             </a:r>
             <a:endParaRPr lang="en-US" sz="1000" dirty="0"/>
           </a:p>
@@ -4951,7 +4998,7 @@
                 <a:ea typeface="Calibri" pitchFamily="34" charset="-122"/>
                 <a:cs typeface="Calibri" pitchFamily="34" charset="-120"/>
               </a:rPr>
-              <a:t>18</a:t>
+              <a:t>19</a:t>
             </a:r>
             <a:endParaRPr lang="en-US" sz="1000" dirty="0"/>
           </a:p>
@@ -5197,7 +5244,7 @@
                 <a:ea typeface="Calibri" pitchFamily="34" charset="-122"/>
                 <a:cs typeface="Calibri" pitchFamily="34" charset="-120"/>
               </a:rPr>
-              <a:t>19</a:t>
+              <a:t>20</a:t>
             </a:r>
             <a:endParaRPr lang="en-US" sz="1000" dirty="0"/>
           </a:p>
@@ -7052,7 +7099,7 @@
                 <a:ea typeface="Calibri" pitchFamily="34" charset="-122"/>
                 <a:cs typeface="Calibri" pitchFamily="34" charset="-120"/>
               </a:rPr>
-              <a:t xml:space="preserve">So the claim is narrower and more useful than “robust”: from about 2.5 nH upward a fixed word is nearly as good; on a tighter loop the question has to be re-asked, and the answer there is not even monotonic — see slide 18.</a:t>
+              <a:t xml:space="preserve">So the claim is narrower and more useful than “robust”: from about 2.5 nH upward a fixed word is nearly as good; on a tighter loop the question has to be re-asked, and the answer there is not even monotonic — see slide 19.</a:t>
             </a:r>
           </a:p>
         </p:txBody>
@@ -7123,7 +7170,7 @@
                 <a:ea typeface="Calibri" pitchFamily="34" charset="-122"/>
                 <a:cs typeface="Calibri" pitchFamily="34" charset="-120"/>
               </a:rPr>
-              <a:t>20</a:t>
+              <a:t>21</a:t>
             </a:r>
             <a:endParaRPr lang="en-US" sz="1000" dirty="0"/>
           </a:p>
@@ -7565,7 +7612,7 @@
                 <a:ea typeface="Calibri" pitchFamily="34" charset="-122"/>
                 <a:cs typeface="Calibri" pitchFamily="34" charset="-120"/>
               </a:rPr>
-              <a:t>21</a:t>
+              <a:t>22</a:t>
             </a:r>
             <a:endParaRPr lang="en-US" sz="1000" dirty="0"/>
           </a:p>
@@ -8086,7 +8133,7 @@
                 <a:ea typeface="Calibri" pitchFamily="34" charset="-122"/>
                 <a:cs typeface="Calibri" pitchFamily="34" charset="-120"/>
               </a:rPr>
-              <a:t>22</a:t>
+              <a:t>23</a:t>
             </a:r>
             <a:endParaRPr lang="en-US" sz="1000" dirty="0"/>
           </a:p>
@@ -9379,7 +9426,7 @@
                 <a:ea typeface="Calibri" pitchFamily="34" charset="-122"/>
                 <a:cs typeface="Calibri" pitchFamily="34" charset="-120"/>
               </a:rPr>
-              <a:t>23</a:t>
+              <a:t>24</a:t>
             </a:r>
             <a:endParaRPr lang="en-US" sz="1000" dirty="0"/>
           </a:p>
@@ -10177,7 +10224,7 @@
                 <a:ea typeface="Calibri" pitchFamily="34" charset="-122"/>
                 <a:cs typeface="Calibri" pitchFamily="34" charset="-120"/>
               </a:rPr>
-              <a:t>24</a:t>
+              <a:t>25</a:t>
             </a:r>
             <a:endParaRPr lang="en-US" sz="1000" dirty="0"/>
           </a:p>
@@ -13111,6 +13158,380 @@
                 <a:cs typeface="Calibri" pitchFamily="34" charset="-120"/>
               </a:rPr>
               <a:t xml:space="preserve"> on Q2 in red is the crosstalk path; GaN has no body diode, so holding the gate below threshold is paid for again across the dead time.</a:t>
+            </a:r>
+          </a:p>
+        </p:txBody>
+      </p:sp>
+    </p:spTree>
+  </p:cSld>
+  <p:clrMapOvr>
+    <a:masterClrMapping/>
+  </p:clrMapOvr>
+</p:sld>
+</file>
+
+<file path=ppt/slides/slide25.xml><?xml version="1.0" encoding="utf-8"?>
+<p:sld xmlns:a="http://schemas.openxmlformats.org/drawingml/2006/main" xmlns:p="http://schemas.openxmlformats.org/presentationml/2006/main" xmlns:r="http://schemas.openxmlformats.org/officeDocument/2006/relationships">
+  <p:cSld>
+    <p:spTree>
+      <p:nvGrpSpPr>
+        <p:cNvPr id="1" name=""/>
+        <p:cNvGrpSpPr/>
+        <p:nvPr/>
+      </p:nvGrpSpPr>
+      <p:grpSpPr/>
+      <p:sp>
+        <p:nvSpPr>
+          <p:cNvPr id="2" name="Text 0"/>
+          <p:cNvSpPr txBox="1"/>
+          <p:nvPr/>
+        </p:nvSpPr>
+        <p:spPr>
+          <a:xfrm>
+            <a:off x="11460175" y="6446520"/>
+            <a:ext cx="457200" cy="274320"/>
+          </a:xfrm>
+          <a:prstGeom prst="rect">
+            <a:avLst/>
+          </a:prstGeom>
+          <a:noFill/>
+          <a:ln/>
+        </p:spPr>
+        <p:txBody>
+          <a:bodyPr wrap="square" lIns="0" tIns="0" rIns="0" bIns="0" rtlCol="0" anchor="ctr"/>
+          <a:lstStyle/>
+          <a:p>
+            <a:pPr marL="0" indent="0" algn="r">
+              <a:buNone/>
+            </a:pPr>
+            <a:r>
+              <a:rPr lang="en-US" sz="1000" dirty="0">
+                <a:solidFill>
+                  <a:srgbClr val="808080"/>
+                </a:solidFill>
+                <a:latin typeface="Calibri" pitchFamily="34" charset="0"/>
+                <a:ea typeface="Calibri" pitchFamily="34" charset="-122"/>
+                <a:cs typeface="Calibri" pitchFamily="34" charset="-120"/>
+              </a:rPr>
+              <a:t>16</a:t>
+            </a:r>
+            <a:endParaRPr lang="en-US" sz="1000" dirty="0"/>
+          </a:p>
+        </p:txBody>
+      </p:sp>
+      <p:sp>
+        <p:nvSpPr>
+          <p:cNvPr id="3" name="Text 1"/>
+          <p:cNvSpPr txBox="1"/>
+          <p:nvPr/>
+        </p:nvSpPr>
+        <p:spPr>
+          <a:xfrm>
+            <a:off x="548640" y="320040"/>
+            <a:ext cx="9601200" cy="685800"/>
+          </a:xfrm>
+          <a:prstGeom prst="rect">
+            <a:avLst/>
+          </a:prstGeom>
+          <a:noFill/>
+          <a:ln/>
+        </p:spPr>
+        <p:txBody>
+          <a:bodyPr wrap="square" lIns="0" tIns="0" rIns="0" bIns="0" rtlCol="0" anchor="ctr"/>
+          <a:lstStyle/>
+          <a:p>
+            <a:pPr marL="0" indent="0">
+              <a:buNone/>
+            </a:pPr>
+            <a:r>
+              <a:rPr lang="en-US" sz="2800" b="1" dirty="0">
+                <a:solidFill>
+                  <a:srgbClr val="1D2F82"/>
+                </a:solidFill>
+                <a:latin typeface="Calibri" pitchFamily="34" charset="0"/>
+                <a:ea typeface="Calibri" pitchFamily="34" charset="-122"/>
+                <a:cs typeface="Calibri" pitchFamily="34" charset="-120"/>
+              </a:rPr>
+              <a:t>MATLAB — the Pareto front and the model check</a:t>
+            </a:r>
+            <a:endParaRPr lang="en-US" sz="2800" dirty="0"/>
+          </a:p>
+        </p:txBody>
+      </p:sp>
+      <p:pic>
+        <p:nvPicPr>
+          <p:cNvPr id="4" name="Image 0" descr="logo.png"/>
+          <p:cNvPicPr>
+            <a:picLocks noChangeAspect="1"/>
+          </p:cNvPicPr>
+          <p:nvPr/>
+        </p:nvPicPr>
+        <p:blipFill>
+          <a:blip r:embed="rId2"/>
+          <a:stretch>
+            <a:fillRect/>
+          </a:stretch>
+        </p:blipFill>
+        <p:spPr>
+          <a:xfrm>
+            <a:off x="10362895" y="320040"/>
+            <a:ext cx="1371600" cy="518746"/>
+          </a:xfrm>
+          <a:prstGeom prst="rect">
+            <a:avLst/>
+          </a:prstGeom>
+        </p:spPr>
+      </p:pic>
+      <p:pic>
+        <p:nvPicPr>
+          <p:cNvPr id="5" name="Picture 4" descr="pareto_matlab.png"/>
+          <p:cNvPicPr>
+            <a:picLocks noChangeAspect="1"/>
+          </p:cNvPicPr>
+          <p:nvPr/>
+        </p:nvPicPr>
+        <p:blipFill>
+          <a:blip r:embed="rId3"/>
+          <a:stretch>
+            <a:fillRect/>
+          </a:stretch>
+        </p:blipFill>
+        <p:spPr>
+          <a:xfrm>
+            <a:off x="548640" y="1188720"/>
+            <a:ext cx="4444977" cy="3337560"/>
+          </a:xfrm>
+          <a:prstGeom prst="rect">
+            <a:avLst/>
+          </a:prstGeom>
+        </p:spPr>
+      </p:pic>
+      <p:pic>
+        <p:nvPicPr>
+          <p:cNvPr id="6" name="Picture 5" descr="crosstalk_model_matlab.png"/>
+          <p:cNvPicPr>
+            <a:picLocks noChangeAspect="1"/>
+          </p:cNvPicPr>
+          <p:nvPr/>
+        </p:nvPicPr>
+        <p:blipFill>
+          <a:blip r:embed="rId4"/>
+          <a:stretch>
+            <a:fillRect/>
+          </a:stretch>
+        </p:blipFill>
+        <p:spPr>
+          <a:xfrm>
+            <a:off x="6355080" y="1188720"/>
+            <a:ext cx="4444977" cy="3337560"/>
+          </a:xfrm>
+          <a:prstGeom prst="rect">
+            <a:avLst/>
+          </a:prstGeom>
+        </p:spPr>
+      </p:pic>
+      <p:sp>
+        <p:nvSpPr>
+          <p:cNvPr id="7" name="TextBox 6"/>
+          <p:cNvSpPr txBox="1"/>
+          <p:nvPr/>
+        </p:nvSpPr>
+        <p:spPr>
+          <a:xfrm>
+            <a:off x="548640" y="4663440"/>
+            <a:ext cx="5440680" cy="960120"/>
+          </a:xfrm>
+          <a:prstGeom prst="rect">
+            <a:avLst/>
+          </a:prstGeom>
+          <a:noFill/>
+        </p:spPr>
+        <p:txBody>
+          <a:bodyPr wrap="square" lIns="0" tIns="0" rIns="0" bIns="0">
+            <a:spAutoFit/>
+          </a:bodyPr>
+          <a:lstStyle/>
+          <a:p>
+            <a:pPr marL="177800" indent="0">
+              <a:spcAft>
+                <a:spcPts val="0"/>
+              </a:spcAft>
+              <a:buSzPct val="100000"/>
+              <a:buNone/>
+            </a:pPr>
+            <a:r>
+              <a:rPr lang="en-US" sz="1150" b="1" dirty="0">
+                <a:solidFill>
+                  <a:srgbClr val="000000"/>
+                </a:solidFill>
+                <a:latin typeface="Calibri" pitchFamily="34" charset="0"/>
+                <a:ea typeface="Calibri" pitchFamily="34" charset="-122"/>
+                <a:cs typeface="Calibri" pitchFamily="34" charset="-120"/>
+              </a:rPr>
+              <a:t xml:space="preserve">720 words, 504 feasible (70 %).</a:t>
+            </a:r>
+            <a:r>
+              <a:rPr lang="en-US" sz="1150" dirty="0">
+                <a:solidFill>
+                  <a:srgbClr val="000000"/>
+                </a:solidFill>
+                <a:latin typeface="Calibri" pitchFamily="34" charset="0"/>
+                <a:ea typeface="Calibri" pitchFamily="34" charset="-122"/>
+                <a:cs typeface="Calibri" pitchFamily="34" charset="-120"/>
+              </a:rPr>
+              <a:t xml:space="preserve"> A 7-word Pareto front; buying one point of overshoot back costs 0.039 µJ. The green marker is the word the cost function picks.</a:t>
+            </a:r>
+          </a:p>
+        </p:txBody>
+      </p:sp>
+      <p:sp>
+        <p:nvSpPr>
+          <p:cNvPr id="8" name="TextBox 7"/>
+          <p:cNvSpPr txBox="1"/>
+          <p:nvPr/>
+        </p:nvSpPr>
+        <p:spPr>
+          <a:xfrm>
+            <a:off x="6355080" y="4663440"/>
+            <a:ext cx="5257800" cy="960120"/>
+          </a:xfrm>
+          <a:prstGeom prst="rect">
+            <a:avLst/>
+          </a:prstGeom>
+          <a:noFill/>
+        </p:spPr>
+        <p:txBody>
+          <a:bodyPr wrap="square" lIns="0" tIns="0" rIns="0" bIns="0">
+            <a:spAutoFit/>
+          </a:bodyPr>
+          <a:lstStyle/>
+          <a:p>
+            <a:pPr marL="177800" indent="0">
+              <a:spcAft>
+                <a:spcPts val="0"/>
+              </a:spcAft>
+              <a:buSzPct val="100000"/>
+              <a:buNone/>
+            </a:pPr>
+            <a:r>
+              <a:rPr lang="en-US" sz="1150" b="1" dirty="0">
+                <a:solidFill>
+                  <a:srgbClr val="000000"/>
+                </a:solidFill>
+                <a:latin typeface="Calibri" pitchFamily="34" charset="0"/>
+                <a:ea typeface="Calibri" pitchFamily="34" charset="-122"/>
+                <a:cs typeface="Calibri" pitchFamily="34" charset="-120"/>
+              </a:rPr>
+              <a:t xml:space="preserve">The two hand calculations disagree by 8.7×.</a:t>
+            </a:r>
+            <a:r>
+              <a:rPr lang="en-US" sz="1150" dirty="0">
+                <a:solidFill>
+                  <a:srgbClr val="000000"/>
+                </a:solidFill>
+                <a:latin typeface="Calibri" pitchFamily="34" charset="0"/>
+                <a:ea typeface="Calibri" pitchFamily="34" charset="-122"/>
+                <a:cs typeface="Calibri" pitchFamily="34" charset="-120"/>
+              </a:rPr>
+              <a:t xml:space="preserve"> The peak-C bound says 7.50 V, charge-averaging says 0.86 V, SPICE measures 1.65 V — inside the bracket. That gap is why this is simulated, not hand-calculated.</a:t>
+            </a:r>
+          </a:p>
+        </p:txBody>
+      </p:sp>
+      <p:sp>
+        <p:nvSpPr>
+          <p:cNvPr id="9" name="TextBox 8"/>
+          <p:cNvSpPr txBox="1"/>
+          <p:nvPr/>
+        </p:nvSpPr>
+        <p:spPr>
+          <a:xfrm>
+            <a:off x="548640" y="5742432"/>
+            <a:ext cx="11064240" cy="685800"/>
+          </a:xfrm>
+          <a:prstGeom prst="rect">
+            <a:avLst/>
+          </a:prstGeom>
+          <a:noFill/>
+        </p:spPr>
+        <p:txBody>
+          <a:bodyPr wrap="square" lIns="0" tIns="0" rIns="0" bIns="0">
+            <a:spAutoFit/>
+          </a:bodyPr>
+          <a:lstStyle/>
+          <a:p>
+            <a:pPr marL="177800" indent="0">
+              <a:spcAft>
+                <a:spcPts val="0"/>
+              </a:spcAft>
+              <a:buSzPct val="100000"/>
+              <a:buNone/>
+            </a:pPr>
+            <a:r>
+              <a:rPr lang="en-US" sz="1200" b="1" dirty="0">
+                <a:solidFill>
+                  <a:srgbClr val="000000"/>
+                </a:solidFill>
+                <a:latin typeface="Calibri" pitchFamily="34" charset="0"/>
+                <a:ea typeface="Calibri" pitchFamily="34" charset="-122"/>
+                <a:cs typeface="Calibri" pitchFamily="34" charset="-120"/>
+              </a:rPr>
+              <a:t xml:space="preserve">Dead-time margin saturates at about 15 ns</a:t>
+            </a:r>
+            <a:r>
+              <a:rPr lang="en-US" sz="1200" dirty="0">
+                <a:solidFill>
+                  <a:srgbClr val="000000"/>
+                </a:solidFill>
+                <a:latin typeface="Calibri" pitchFamily="34" charset="0"/>
+                <a:ea typeface="Calibri" pitchFamily="34" charset="-122"/>
+                <a:cs typeface="Calibri" pitchFamily="34" charset="-120"/>
+              </a:rPr>
+              <a:t xml:space="preserve">: the marginal gain runs 269 → 31.5 → 1.8 → 0.0 mV/ns across 10/15/25/35 ns. Past 15 ns dead time costs conduction loss and buys nothing. </a:t>
+            </a:r>
+            <a:r>
+              <a:rPr lang="en-US" sz="1200" b="1" dirty="0">
+                <a:solidFill>
+                  <a:srgbClr val="000000"/>
+                </a:solidFill>
+                <a:latin typeface="Calibri" pitchFamily="34" charset="0"/>
+                <a:ea typeface="Calibri" pitchFamily="34" charset="-122"/>
+                <a:cs typeface="Calibri" pitchFamily="34" charset="-120"/>
+              </a:rPr>
+              <a:t xml:space="preserve">results/gan_analysis.m</a:t>
+            </a:r>
+            <a:r>
+              <a:rPr lang="en-US" sz="1200" dirty="0">
+                <a:solidFill>
+                  <a:srgbClr val="000000"/>
+                </a:solidFill>
+                <a:latin typeface="Calibri" pitchFamily="34" charset="0"/>
+                <a:ea typeface="Calibri" pitchFamily="34" charset="-122"/>
+                <a:cs typeface="Calibri" pitchFamily="34" charset="-120"/>
+              </a:rPr>
+              <a:t xml:space="preserve">, </a:t>
+            </a:r>
+            <a:r>
+              <a:rPr lang="en-US" sz="1200" b="1" dirty="0">
+                <a:solidFill>
+                  <a:srgbClr val="000000"/>
+                </a:solidFill>
+                <a:latin typeface="Calibri" pitchFamily="34" charset="0"/>
+                <a:ea typeface="Calibri" pitchFamily="34" charset="-122"/>
+                <a:cs typeface="Calibri" pitchFamily="34" charset="-120"/>
+              </a:rPr>
+              <a:t xml:space="preserve">results/crosstalk_standalone.m</a:t>
+            </a:r>
+            <a:r>
+              <a:rPr lang="en-US" sz="1200" dirty="0">
+                <a:solidFill>
+                  <a:srgbClr val="000000"/>
+                </a:solidFill>
+                <a:latin typeface="Calibri" pitchFamily="34" charset="0"/>
+                <a:ea typeface="Calibri" pitchFamily="34" charset="-122"/>
+                <a:cs typeface="Calibri" pitchFamily="34" charset="-120"/>
+              </a:rPr>
+              <a:t xml:space="preserve"> — both run in MATLAB or Octave.</a:t>
             </a:r>
           </a:p>
         </p:txBody>

--- a/review/Review1_GaN_Segmented_Gate_Driver.pptx
+++ b/review/Review1_GaN_Segmented_Gate_Driver.pptx
@@ -12323,7 +12323,7 @@
                 <a:ea typeface="Calibri" pitchFamily="34" charset="-122"/>
                 <a:cs typeface="Calibri" pitchFamily="34" charset="-120"/>
               </a:rPr>
-              <a:t xml:space="preserve">FPGA RTL in Verilog  ·  7 asserted properties, all passing</a:t>
+              <a:t xml:space="preserve">FPGA RTL in Verilog  ·  8 asserted properties, mutation-tested</a:t>
             </a:r>
           </a:p>
         </p:txBody>
@@ -16790,24 +16790,13 @@
                           </a:solidFill>
                           <a:latin typeface="Calibri"/>
                         </a:rPr>
-                        <a:t>2022</a:t>
+                        <a:t>Takayama &amp; Hikihara (2022)</a:t>
                       </a:r>
                       <a:endParaRPr lang="en-US" sz="1300" dirty="0">
                         <a:latin typeface="Calibri" charset="0"/>
                         <a:ea typeface="Calibri" charset="0"/>
                         <a:cs typeface="Calibri" charset="0"/>
                       </a:endParaRPr>
-                    </a:p>
-                    <a:p>
-                      <a:r>
-                        <a:rPr sz="1050" b="0">
-                          <a:solidFill>
-                            <a:srgbClr val="7A7A7A"/>
-                          </a:solidFill>
-                          <a:latin typeface="Calibri"/>
-                        </a:rPr>
-                        <a:t>authors: Xplore “Cite This”</a:t>
-                      </a:r>
                     </a:p>
                   </a:txBody>
                   <a:tcPr marL="54864" marR="54864" marT="54864" marB="54864" anchor="ctr">

--- a/review/Review1_GaN_Segmented_Gate_Driver.pptx
+++ b/review/Review1_GaN_Segmented_Gate_Driver.pptx
@@ -13113,7 +13113,29 @@
                 <a:ea typeface="Calibri" pitchFamily="34" charset="-122"/>
                 <a:cs typeface="Calibri" pitchFamily="34" charset="-120"/>
               </a:rPr>
-              <a:t xml:space="preserve">, and the same three experiments ship as LTspice schematics in </a:t>
+              <a:t xml:space="preserve">, which is the file to open in LTspice — it carries the active Miller clamp (S</a:t>
+            </a:r>
+            <a:r>
+              <a:rPr lang="en-US" sz="1200" dirty="0">
+                <a:solidFill>
+                  <a:srgbClr val="000000"/>
+                </a:solidFill>
+                <a:latin typeface="Calibri" pitchFamily="34" charset="0"/>
+                <a:ea typeface="Calibri" pitchFamily="34" charset="-122"/>
+                <a:cs typeface="Calibri" pitchFamily="34" charset="-120"/>
+              </a:rPr>
+              <a:t xml:space="preserve">clk</a:t>
+            </a:r>
+            <a:r>
+              <a:rPr lang="en-US" sz="1200" dirty="0">
+                <a:solidFill>
+                  <a:srgbClr val="000000"/>
+                </a:solidFill>
+                <a:latin typeface="Calibri" pitchFamily="34" charset="0"/>
+                <a:ea typeface="Calibri" pitchFamily="34" charset="-122"/>
+                <a:cs typeface="Calibri" pitchFamily="34" charset="-120"/>
+              </a:rPr>
+              <a:t xml:space="preserve"> through 0.5 Ω). The three </a:t>
             </a:r>
             <a:r>
               <a:rPr lang="en-US" sz="1200" b="1" dirty="0">
@@ -13125,6 +13147,17 @@
                 <a:cs typeface="Calibri" pitchFamily="34" charset="-120"/>
               </a:rPr>
               <a:t xml:space="preserve">ltspice/*.asc</a:t>
+            </a:r>
+            <a:r>
+              <a:rPr lang="en-US" sz="1200" dirty="0">
+                <a:solidFill>
+                  <a:srgbClr val="000000"/>
+                </a:solidFill>
+                <a:latin typeface="Calibri" pitchFamily="34" charset="0"/>
+                <a:ea typeface="Calibri" pitchFamily="34" charset="-122"/>
+                <a:cs typeface="Calibri" pitchFamily="34" charset="-120"/>
+              </a:rPr>
+              <a:t xml:space="preserve"> sheets illustrate the crosstalk mechanism only and do not draw the clamp</a:t>
             </a:r>
             <a:r>
               <a:rPr lang="en-US" sz="1200" dirty="0">
@@ -18693,6 +18726,46 @@
                 <a:ea typeface="Calibri" pitchFamily="34" charset="-122"/>
                 <a:cs typeface="Calibri" pitchFamily="34" charset="-120"/>
               </a:rPr>
+              <a:t xml:space="preserve">Aim:</a:t>
+            </a:r>
+          </a:p>
+          <a:p>
+            <a:pPr marL="520700" indent="-177800">
+              <a:spcAft>
+                <a:spcPts val="600"/>
+              </a:spcAft>
+              <a:buSzPct val="100000"/>
+              <a:buChar char="–"/>
+            </a:pPr>
+            <a:r>
+              <a:rPr lang="en-US" sz="1500" dirty="0">
+                <a:solidFill>
+                  <a:srgbClr val="000000"/>
+                </a:solidFill>
+                <a:latin typeface="Calibri" pitchFamily="34" charset="0"/>
+                <a:ea typeface="Calibri" pitchFamily="34" charset="-122"/>
+                <a:cs typeface="Calibri" pitchFamily="34" charset="-120"/>
+              </a:rPr>
+              <a:t xml:space="preserve">To measure how much of an active gate driver’s benefit actually requires per-operating-point adaptation, and how much comes from simply choosing a better fixed setting — by searching the control word exhaustively rather than arguing the case.</a:t>
+            </a:r>
+          </a:p>
+          <a:p>
+            <a:pPr marL="177800" indent="-177800">
+              <a:spcAft>
+                <a:spcPts val="600"/>
+              </a:spcAft>
+              <a:buSzPct val="100000"/>
+              <a:buChar char="•"/>
+            </a:pPr>
+            <a:r>
+              <a:rPr lang="en-US" sz="1600" b="1" dirty="0">
+                <a:solidFill>
+                  <a:srgbClr val="000000"/>
+                </a:solidFill>
+                <a:latin typeface="Calibri" pitchFamily="34" charset="0"/>
+                <a:ea typeface="Calibri" pitchFamily="34" charset="-122"/>
+                <a:cs typeface="Calibri" pitchFamily="34" charset="-120"/>
+              </a:rPr>
               <a:t xml:space="preserve">Proposed Solution:</a:t>
             </a:r>
           </a:p>
@@ -18725,6 +18798,17 @@
               <a:buChar char="–"/>
             </a:pPr>
             <a:r>
+              <a:rPr lang="en-US" sz="1500" b="1" dirty="0">
+                <a:solidFill>
+                  <a:srgbClr val="000000"/>
+                </a:solidFill>
+                <a:latin typeface="Calibri" pitchFamily="34" charset="0"/>
+                <a:ea typeface="Calibri" pitchFamily="34" charset="-122"/>
+                <a:cs typeface="Calibri" pitchFamily="34" charset="-120"/>
+              </a:rPr>
+              <a:t xml:space="preserve">Method: </a:t>
+            </a:r>
+            <a:r>
               <a:rPr lang="en-US" sz="1500" dirty="0">
                 <a:solidFill>
                   <a:srgbClr val="000000"/>
@@ -18733,8 +18817,97 @@
                 <a:ea typeface="Calibri" pitchFamily="34" charset="-122"/>
                 <a:cs typeface="Calibri" pitchFamily="34" charset="-120"/>
               </a:rPr>
-              <a:t xml:space="preserve">The contribution is to </a:t>
-            </a:r>
+              <a:t xml:space="preserve">sweep the full word at every corner, so each per-corner optimum is a true optimum, then compare against the best single fixed word. That difference is the value of adaptation, and nothing else.</a:t>
+            </a:r>
+          </a:p>
+          <a:p>
+            <a:pPr marL="177800" indent="-177800">
+              <a:spcAft>
+                <a:spcPts val="600"/>
+              </a:spcAft>
+              <a:buSzPct val="100000"/>
+              <a:buChar char="•"/>
+            </a:pPr>
+            <a:r>
+              <a:rPr lang="en-US" sz="1600" b="1" dirty="0">
+                <a:solidFill>
+                  <a:srgbClr val="000000"/>
+                </a:solidFill>
+                <a:latin typeface="Calibri" pitchFamily="34" charset="0"/>
+                <a:ea typeface="Calibri" pitchFamily="34" charset="-122"/>
+                <a:cs typeface="Calibri" pitchFamily="34" charset="-120"/>
+              </a:rPr>
+              <a:t xml:space="preserve">Methodology / Approach:</a:t>
+            </a:r>
+          </a:p>
+          <a:p>
+            <a:pPr marL="520700" indent="-177800">
+              <a:spcAft>
+                <a:spcPts val="600"/>
+              </a:spcAft>
+              <a:buSzPct val="100000"/>
+              <a:buChar char="–"/>
+            </a:pPr>
+            <a:r>
+              <a:rPr lang="en-US" sz="1500" dirty="0">
+                <a:solidFill>
+                  <a:srgbClr val="000000"/>
+                </a:solidFill>
+                <a:latin typeface="Calibri" pitchFamily="34" charset="0"/>
+                <a:ea typeface="Calibri" pitchFamily="34" charset="-122"/>
+                <a:cs typeface="Calibri" pitchFamily="34" charset="-120"/>
+              </a:rPr>
+              <a:t xml:space="preserve">Double-pulse test in ngspice with a behavioural eGaN model from datasheet quantities; its symmetric channel makes the third-quadrant cost of negative bias emerge from device physics.</a:t>
+            </a:r>
+          </a:p>
+          <a:p>
+            <a:pPr marL="520700" indent="-177800">
+              <a:spcAft>
+                <a:spcPts val="600"/>
+              </a:spcAft>
+              <a:buSzPct val="100000"/>
+              <a:buChar char="–"/>
+            </a:pPr>
+            <a:r>
+              <a:rPr lang="en-US" sz="1500" dirty="0">
+                <a:solidFill>
+                  <a:srgbClr val="000000"/>
+                </a:solidFill>
+                <a:latin typeface="Calibri" pitchFamily="34" charset="0"/>
+                <a:ea typeface="Calibri" pitchFamily="34" charset="-122"/>
+                <a:cs typeface="Calibri" pitchFamily="34" charset="-120"/>
+              </a:rPr>
+              <a:t xml:space="preserve">Eight metrics per run, frozen in one extractor early; every reported quantity must be flat across a 5× timestep range — enforced, not assumed.</a:t>
+            </a:r>
+          </a:p>
+          <a:p>
+            <a:pPr marL="177800" indent="-177800">
+              <a:spcAft>
+                <a:spcPts val="600"/>
+              </a:spcAft>
+              <a:buSzPct val="100000"/>
+              <a:buChar char="•"/>
+            </a:pPr>
+            <a:r>
+              <a:rPr lang="en-US" sz="1600" b="1" dirty="0">
+                <a:solidFill>
+                  <a:srgbClr val="000000"/>
+                </a:solidFill>
+                <a:latin typeface="Calibri" pitchFamily="34" charset="0"/>
+                <a:ea typeface="Calibri" pitchFamily="34" charset="-122"/>
+                <a:cs typeface="Calibri" pitchFamily="34" charset="-120"/>
+              </a:rPr>
+              <a:t xml:space="preserve">Project Scope:</a:t>
+            </a:r>
+          </a:p>
+          <a:p>
+            <a:pPr marL="520700" indent="-177800">
+              <a:spcAft>
+                <a:spcPts val="600"/>
+              </a:spcAft>
+              <a:buSzPct val="100000"/>
+              <a:buChar char="–"/>
+            </a:pPr>
             <a:r>
               <a:rPr lang="en-US" sz="1500" b="1" dirty="0">
                 <a:solidFill>
@@ -18744,7 +18917,7 @@
                 <a:ea typeface="Calibri" pitchFamily="34" charset="-122"/>
                 <a:cs typeface="Calibri" pitchFamily="34" charset="-120"/>
               </a:rPr>
-              <a:t xml:space="preserve">separate the two claims by exhaustive search</a:t>
+              <a:t xml:space="preserve">In scope: </a:t>
             </a:r>
             <a:r>
               <a:rPr lang="en-US" sz="1500" dirty="0">
@@ -18755,37 +18928,19 @@
                 <a:ea typeface="Calibri" pitchFamily="34" charset="-122"/>
                 <a:cs typeface="Calibri" pitchFamily="34" charset="-120"/>
               </a:rPr>
-              <a:t xml:space="preserve">: sweep the full word at every corner, so each per-corner optimum is a true optimum and not the best of a shortlist, then compare against the best single fixed word. That difference is the value of adaptation, and nothing else.</a:t>
-            </a:r>
-          </a:p>
-          <a:p>
-            <a:pPr marL="177800" indent="-177800">
-              <a:spcAft>
-                <a:spcPts val="600"/>
-              </a:spcAft>
-              <a:buSzPct val="100000"/>
-              <a:buChar char="•"/>
-            </a:pPr>
-            <a:r>
-              <a:rPr lang="en-US" sz="1600" b="1" dirty="0">
-                <a:solidFill>
-                  <a:srgbClr val="000000"/>
-                </a:solidFill>
-                <a:latin typeface="Calibri" pitchFamily="34" charset="0"/>
-                <a:ea typeface="Calibri" pitchFamily="34" charset="-122"/>
-                <a:cs typeface="Calibri" pitchFamily="34" charset="-120"/>
-              </a:rPr>
-              <a:t xml:space="preserve">Methodology / Approach:</a:t>
-            </a:r>
-          </a:p>
-          <a:p>
-            <a:pPr marL="520700" indent="-177800">
-              <a:spcAft>
-                <a:spcPts val="600"/>
-              </a:spcAft>
-              <a:buSzPct val="100000"/>
-              <a:buChar char="–"/>
-            </a:pPr>
+              <a:t xml:space="preserve">driver architecture, control-word optimisation, transistor-level output stage in SKY130. </a:t>
+            </a:r>
+            <a:r>
+              <a:rPr lang="en-US" sz="1500" b="1" dirty="0">
+                <a:solidFill>
+                  <a:srgbClr val="000000"/>
+                </a:solidFill>
+                <a:latin typeface="Calibri" pitchFamily="34" charset="0"/>
+                <a:ea typeface="Calibri" pitchFamily="34" charset="-122"/>
+                <a:cs typeface="Calibri" pitchFamily="34" charset="-120"/>
+              </a:rPr>
+              <a:t xml:space="preserve">Out of scope: </a:t>
+            </a:r>
             <a:r>
               <a:rPr lang="en-US" sz="1500" dirty="0">
                 <a:solidFill>
@@ -18795,120 +18950,7 @@
                 <a:ea typeface="Calibri" pitchFamily="34" charset="-122"/>
                 <a:cs typeface="Calibri" pitchFamily="34" charset="-120"/>
               </a:rPr>
-              <a:t xml:space="preserve">Double-pulse test in ngspice with a behavioural eGaN model from datasheet quantities. Its channel is symmetric by design, so the third-quadrant penalty of negative bias emerges from device physics rather than being added by hand.</a:t>
-            </a:r>
-          </a:p>
-          <a:p>
-            <a:pPr marL="520700" indent="-177800">
-              <a:spcAft>
-                <a:spcPts val="600"/>
-              </a:spcAft>
-              <a:buSzPct val="100000"/>
-              <a:buChar char="–"/>
-            </a:pPr>
-            <a:r>
-              <a:rPr lang="en-US" sz="1500" dirty="0">
-                <a:solidFill>
-                  <a:srgbClr val="000000"/>
-                </a:solidFill>
-                <a:latin typeface="Calibri" pitchFamily="34" charset="0"/>
-                <a:ea typeface="Calibri" pitchFamily="34" charset="-122"/>
-                <a:cs typeface="Calibri" pitchFamily="34" charset="-120"/>
-              </a:rPr>
-              <a:t xml:space="preserve">Eight metrics per run — three energies, overshoot, settling, oscillation energy, spurious gate voltage, crosstalk margin — frozen in one extractor early, so no later sweep becomes incomparable.</a:t>
-            </a:r>
-          </a:p>
-          <a:p>
-            <a:pPr marL="520700" indent="-177800">
-              <a:spcAft>
-                <a:spcPts val="600"/>
-              </a:spcAft>
-              <a:buSzPct val="100000"/>
-              <a:buChar char="–"/>
-            </a:pPr>
-            <a:r>
-              <a:rPr lang="en-US" sz="1500" dirty="0">
-                <a:solidFill>
-                  <a:srgbClr val="000000"/>
-                </a:solidFill>
-                <a:latin typeface="Calibri" pitchFamily="34" charset="0"/>
-                <a:ea typeface="Calibri" pitchFamily="34" charset="-122"/>
-                <a:cs typeface="Calibri" pitchFamily="34" charset="-120"/>
-              </a:rPr>
-              <a:t xml:space="preserve">Every reported quantity must be flat across a 5× timestep range. Enforced, not assumed: it has twice rejected a number that had already reached a draft.</a:t>
-            </a:r>
-          </a:p>
-          <a:p>
-            <a:pPr marL="177800" indent="-177800">
-              <a:spcAft>
-                <a:spcPts val="600"/>
-              </a:spcAft>
-              <a:buSzPct val="100000"/>
-              <a:buChar char="•"/>
-            </a:pPr>
-            <a:r>
-              <a:rPr lang="en-US" sz="1600" b="1" dirty="0">
-                <a:solidFill>
-                  <a:srgbClr val="000000"/>
-                </a:solidFill>
-                <a:latin typeface="Calibri" pitchFamily="34" charset="0"/>
-                <a:ea typeface="Calibri" pitchFamily="34" charset="-122"/>
-                <a:cs typeface="Calibri" pitchFamily="34" charset="-120"/>
-              </a:rPr>
-              <a:t xml:space="preserve">Project Scope:</a:t>
-            </a:r>
-          </a:p>
-          <a:p>
-            <a:pPr marL="520700" indent="-177800">
-              <a:spcAft>
-                <a:spcPts val="600"/>
-              </a:spcAft>
-              <a:buSzPct val="100000"/>
-              <a:buChar char="–"/>
-            </a:pPr>
-            <a:r>
-              <a:rPr lang="en-US" sz="1500" b="1" dirty="0">
-                <a:solidFill>
-                  <a:srgbClr val="000000"/>
-                </a:solidFill>
-                <a:latin typeface="Calibri" pitchFamily="34" charset="0"/>
-                <a:ea typeface="Calibri" pitchFamily="34" charset="-122"/>
-                <a:cs typeface="Calibri" pitchFamily="34" charset="-120"/>
-              </a:rPr>
-              <a:t xml:space="preserve">In scope: </a:t>
-            </a:r>
-            <a:r>
-              <a:rPr lang="en-US" sz="1500" dirty="0">
-                <a:solidFill>
-                  <a:srgbClr val="000000"/>
-                </a:solidFill>
-                <a:latin typeface="Calibri" pitchFamily="34" charset="0"/>
-                <a:ea typeface="Calibri" pitchFamily="34" charset="-122"/>
-                <a:cs typeface="Calibri" pitchFamily="34" charset="-120"/>
-              </a:rPr>
-              <a:t xml:space="preserve">driver architecture, control-word optimisation, transistor-level output stage in SKY130. </a:t>
-            </a:r>
-            <a:r>
-              <a:rPr lang="en-US" sz="1500" b="1" dirty="0">
-                <a:solidFill>
-                  <a:srgbClr val="000000"/>
-                </a:solidFill>
-                <a:latin typeface="Calibri" pitchFamily="34" charset="0"/>
-                <a:ea typeface="Calibri" pitchFamily="34" charset="-122"/>
-                <a:cs typeface="Calibri" pitchFamily="34" charset="-120"/>
-              </a:rPr>
-              <a:t xml:space="preserve">Out of scope: </a:t>
-            </a:r>
-            <a:r>
-              <a:rPr lang="en-US" sz="1500" dirty="0">
-                <a:solidFill>
-                  <a:srgbClr val="000000"/>
-                </a:solidFill>
-                <a:latin typeface="Calibri" pitchFamily="34" charset="0"/>
-                <a:ea typeface="Calibri" pitchFamily="34" charset="-122"/>
-                <a:cs typeface="Calibri" pitchFamily="34" charset="-120"/>
-              </a:rPr>
-              <a:t xml:space="preserve">GaN device fabrication, closed-loop sensing hardware, PCB build.</a:t>
+              <a:t xml:space="preserve">GaN device fabrication, sensing hardware, PCB build.</a:t>
             </a:r>
           </a:p>
         </p:txBody>

--- a/review/Review1_GaN_Segmented_Gate_Driver.pptx
+++ b/review/Review1_GaN_Segmented_Gate_Driver.pptx
@@ -4029,7 +4029,7 @@
                 <a:ea typeface="Calibri" pitchFamily="34" charset="-122"/>
                 <a:cs typeface="Calibri" pitchFamily="34" charset="-120"/>
               </a:rPr>
-              <a:t xml:space="preserve">vs the best single fixed word. A fixed word is nearly as good.</a:t>
+              <a:t xml:space="preserve">vs the best single fixed word (= 3.9 % of baseline). A fixed word is nearly as good.</a:t>
             </a:r>
           </a:p>
         </p:txBody>
@@ -7085,21 +7085,74 @@
           <a:p>
             <a:pPr marL="177800" indent="-177800">
               <a:spcAft>
+                <a:spcPts val="200"/>
+              </a:spcAft>
+              <a:buSzPct val="100000"/>
+              <a:buChar char="•"/>
+            </a:pPr>
+            <a:r>
+              <a:rPr lang="en-US" sz="1300" dirty="0">
+                <a:solidFill>
+                  <a:srgbClr val="000000"/>
+                </a:solidFill>
+                <a:latin typeface="Calibri" pitchFamily="34" charset="0"/>
+                <a:ea typeface="Calibri" pitchFamily="34" charset="-122"/>
+                <a:cs typeface="Calibri" pitchFamily="34" charset="-120"/>
+              </a:rPr>
+              <a:t xml:space="preserve">So the claim is narrower and more useful than “robust”: from about 2.5 nH upward a fixed word is nearly as good; on a tighter loop the question has to be re-asked, and the answer there is not even monotonic — see slide 19.</a:t>
+            </a:r>
+          </a:p>
+          <a:p>
+            <a:pPr marL="177800" indent="-177800">
+              <a:spcAft>
                 <a:spcPts val="0"/>
               </a:spcAft>
               <a:buSzPct val="100000"/>
               <a:buChar char="•"/>
             </a:pPr>
             <a:r>
-              <a:rPr lang="en-US" sz="1300" dirty="0">
-                <a:solidFill>
-                  <a:srgbClr val="000000"/>
-                </a:solidFill>
-                <a:latin typeface="Calibri" pitchFamily="34" charset="0"/>
-                <a:ea typeface="Calibri" pitchFamily="34" charset="-122"/>
-                <a:cs typeface="Calibri" pitchFamily="34" charset="-120"/>
-              </a:rPr>
-              <a:t xml:space="preserve">So the claim is narrower and more useful than “robust”: from about 2.5 nH upward a fixed word is nearly as good; on a tighter loop the question has to be re-asked, and the answer there is not even monotonic — see slide 19.</a:t>
+              <a:rPr lang="en-US" sz="1150" b="1" dirty="0">
+                <a:solidFill>
+                  <a:srgbClr val="000000"/>
+                </a:solidFill>
+                <a:latin typeface="Calibri" pitchFamily="34" charset="0"/>
+                <a:ea typeface="Calibri" pitchFamily="34" charset="-122"/>
+                <a:cs typeface="Calibri" pitchFamily="34" charset="-120"/>
+              </a:rPr>
+              <a:t xml:space="preserve">Baseline note. </a:t>
+            </a:r>
+            <a:r>
+              <a:rPr lang="en-US" sz="1150" dirty="0">
+                <a:solidFill>
+                  <a:srgbClr val="000000"/>
+                </a:solidFill>
+                <a:latin typeface="Calibri" pitchFamily="34" charset="0"/>
+                <a:ea typeface="Calibri" pitchFamily="34" charset="-122"/>
+                <a:cs typeface="Calibri" pitchFamily="34" charset="-120"/>
+              </a:rPr>
+              <a:t xml:space="preserve">Nominal here is 5.95 %, not the 5.2 % headline — a two-corner search on its own sweep. Compare the </a:t>
+            </a:r>
+            <a:r>
+              <a:rPr lang="en-US" sz="1150" b="1" dirty="0">
+                <a:solidFill>
+                  <a:srgbClr val="000000"/>
+                </a:solidFill>
+                <a:latin typeface="Calibri" pitchFamily="34" charset="0"/>
+                <a:ea typeface="Calibri" pitchFamily="34" charset="-122"/>
+                <a:cs typeface="Calibri" pitchFamily="34" charset="-120"/>
+              </a:rPr>
+              <a:t xml:space="preserve">vs nom.</a:t>
+            </a:r>
+            <a:r>
+              <a:rPr lang="en-US" sz="1150" dirty="0">
+                <a:solidFill>
+                  <a:srgbClr val="000000"/>
+                </a:solidFill>
+                <a:latin typeface="Calibri" pitchFamily="34" charset="0"/>
+                <a:ea typeface="Calibri" pitchFamily="34" charset="-122"/>
+                <a:cs typeface="Calibri" pitchFamily="34" charset="-120"/>
+              </a:rPr>
+              <a:t xml:space="preserve"> column, not the absolute values.</a:t>
             </a:r>
           </a:p>
         </p:txBody>

--- a/review/Review1_GaN_Segmented_Gate_Driver.pptx
+++ b/review/Review1_GaN_Segmented_Gate_Driver.pptx
@@ -4883,7 +4883,7 @@
                 <a:ea typeface="Calibri" pitchFamily="34" charset="-122"/>
                 <a:cs typeface="Calibri" pitchFamily="34" charset="-120"/>
               </a:rPr>
-              <a:t xml:space="preserve">Every figure shares one baseline — the median control word that is safe at all four corners. Robust across cost weightings: adaptation is 5.5–20.1 % of the gain for overshoot weights 0 to 1.0. </a:t>
+              <a:t xml:space="preserve">Every figure shares one baseline — the median control word that is safe at all four corners. The split does not rest on the weighting: swept over 106 overshoot weights, (A) stays </a:t>
             </a:r>
             <a:r>
               <a:rPr lang="en-US" sz="1200" b="1" dirty="0">
@@ -4894,6 +4894,72 @@
                 <a:ea typeface="Calibri" pitchFamily="34" charset="-122"/>
                 <a:cs typeface="Calibri" pitchFamily="34" charset="-120"/>
               </a:rPr>
+              <a:t xml:space="preserve">23.4–29.0 %</a:t>
+            </a:r>
+            <a:r>
+              <a:rPr lang="en-US" sz="1200" dirty="0">
+                <a:solidFill>
+                  <a:srgbClr val="000000"/>
+                </a:solidFill>
+                <a:latin typeface="Calibri" pitchFamily="34" charset="0"/>
+                <a:ea typeface="Calibri" pitchFamily="34" charset="-122"/>
+                <a:cs typeface="Calibri" pitchFamily="34" charset="-120"/>
+              </a:rPr>
+              <a:t xml:space="preserve"> and (B) </a:t>
+            </a:r>
+            <a:r>
+              <a:rPr lang="en-US" sz="1200" b="1" dirty="0">
+                <a:solidFill>
+                  <a:srgbClr val="000000"/>
+                </a:solidFill>
+                <a:latin typeface="Calibri" pitchFamily="34" charset="0"/>
+                <a:ea typeface="Calibri" pitchFamily="34" charset="-122"/>
+                <a:cs typeface="Calibri" pitchFamily="34" charset="-120"/>
+              </a:rPr>
+              <a:t xml:space="preserve">1.3–6.4 %</a:t>
+            </a:r>
+            <a:r>
+              <a:rPr lang="en-US" sz="1200" dirty="0">
+                <a:solidFill>
+                  <a:srgbClr val="000000"/>
+                </a:solidFill>
+                <a:latin typeface="Calibri" pitchFamily="34" charset="0"/>
+                <a:ea typeface="Calibri" pitchFamily="34" charset="-122"/>
+                <a:cs typeface="Calibri" pitchFamily="34" charset="-120"/>
+              </a:rPr>
+              <a:t xml:space="preserve"> — and (A) exceeds (B) at </a:t>
+            </a:r>
+            <a:r>
+              <a:rPr lang="en-US" sz="1200" b="1" dirty="0">
+                <a:solidFill>
+                  <a:srgbClr val="000000"/>
+                </a:solidFill>
+                <a:latin typeface="Calibri" pitchFamily="34" charset="0"/>
+                <a:ea typeface="Calibri" pitchFamily="34" charset="-122"/>
+                <a:cs typeface="Calibri" pitchFamily="34" charset="-120"/>
+              </a:rPr>
+              <a:t xml:space="preserve">every</a:t>
+            </a:r>
+            <a:r>
+              <a:rPr lang="en-US" sz="1200" dirty="0">
+                <a:solidFill>
+                  <a:srgbClr val="000000"/>
+                </a:solidFill>
+                <a:latin typeface="Calibri" pitchFamily="34" charset="0"/>
+                <a:ea typeface="Calibri" pitchFamily="34" charset="-122"/>
+                <a:cs typeface="Calibri" pitchFamily="34" charset="-120"/>
+              </a:rPr>
+              <a:t xml:space="preserve"> weight tested, out to 5.0. </a:t>
+            </a:r>
+            <a:r>
+              <a:rPr lang="en-US" sz="1200" b="1" dirty="0">
+                <a:solidFill>
+                  <a:srgbClr val="000000"/>
+                </a:solidFill>
+                <a:latin typeface="Calibri" pitchFamily="34" charset="0"/>
+                <a:ea typeface="Calibri" pitchFamily="34" charset="-122"/>
+                <a:cs typeface="Calibri" pitchFamily="34" charset="-120"/>
+              </a:rPr>
               <a:t xml:space="preserve">scripts/novelty.py</a:t>
             </a:r>
             <a:r>
@@ -4916,7 +4982,7 @@
                 <a:ea typeface="Calibri" pitchFamily="34" charset="-122"/>
                 <a:cs typeface="Calibri" pitchFamily="34" charset="-120"/>
               </a:rPr>
-              <a:t xml:space="preserve">scripts/howmanywords.py</a:t>
+              <a:t xml:space="preserve">scripts/weight_sensitivity.py</a:t>
             </a:r>
             <a:r>
               <a:rPr lang="en-US" sz="1200" dirty="0">

--- a/review/Review1_GaN_Segmented_Gate_Driver.pptx
+++ b/review/Review1_GaN_Segmented_Gate_Driver.pptx
@@ -8619,7 +8619,7 @@
                 <a:ea typeface="Calibri" pitchFamily="34" charset="-122"/>
                 <a:cs typeface="Calibri" pitchFamily="34" charset="-120"/>
               </a:rPr>
-              <a:t xml:space="preserve">transistor-level output stage in Cadence on a 5 V-capable PDK; re-run the ceiling on real devices. </a:t>
+              <a:t xml:space="preserve">transistor-level output stage in Cadence on a 5 V-capable PDK; re-run the ceiling on real devices — sub-nanosecond dead-time control needs silicon, not fabric: [13] reaches 0.19 ns where a 200 MHz FPGA grid is 5 ns. </a:t>
             </a:r>
             <a:r>
               <a:rPr lang="en-US" sz="1450" b="1" dirty="0">
@@ -17445,7 +17445,7 @@
                           </a:solidFill>
                           <a:latin typeface="Calibri"/>
                         </a:rPr>
-                        <a:t>Segmented output stage on E-mode GaN with an on-chip pattern generator for drive strength</a:t>
+                        <a:t>Segmented output stage on E-mode GaN: 7 slices, pattern timing 0.5–5 ns, strength set by one external bias resistor</a:t>
                       </a:r>
                       <a:endParaRPr lang="en-US" sz="1300" dirty="0">
                         <a:latin typeface="Calibri" charset="0"/>

--- a/review/Review1_GaN_Segmented_Gate_Driver.pptx
+++ b/review/Review1_GaN_Segmented_Gate_Driver.pptx
@@ -3076,6 +3076,59 @@
                 <a:cs typeface="Calibri" pitchFamily="34" charset="-120"/>
               </a:rPr>
               <a:t xml:space="preserve">Eight asserted properties, all passing under Icarus Verilog; a deliberate shoot-through mutant is caught 221 times (sh rtl/mutate.sh).</a:t>
+            </a:r>
+          </a:p>
+          <a:p>
+            <a:pPr marL="520700" indent="-177800">
+              <a:spcAft>
+                <a:spcPts val="600"/>
+              </a:spcAft>
+              <a:buSzPct val="100000"/>
+              <a:buChar char="–"/>
+            </a:pPr>
+            <a:r>
+              <a:rPr lang="en-US" sz="1500" b="1" dirty="0">
+                <a:solidFill>
+                  <a:srgbClr val="000000"/>
+                </a:solidFill>
+                <a:latin typeface="Calibri" pitchFamily="34" charset="0"/>
+                <a:ea typeface="Calibri" pitchFamily="34" charset="-122"/>
+                <a:cs typeface="Calibri" pitchFamily="34" charset="-120"/>
+              </a:rPr>
+              <a:t xml:space="preserve">Synthesised. </a:t>
+            </a:r>
+            <a:r>
+              <a:rPr lang="en-US" sz="1500" dirty="0">
+                <a:solidFill>
+                  <a:srgbClr val="000000"/>
+                </a:solidFill>
+                <a:latin typeface="Calibri" pitchFamily="34" charset="0"/>
+                <a:ea typeface="Calibri" pitchFamily="34" charset="-122"/>
+                <a:cs typeface="Calibri" pitchFamily="34" charset="-120"/>
+              </a:rPr>
+              <a:t xml:space="preserve">Strapping the word instead of leaving all six fields live takes the controller from </a:t>
+            </a:r>
+            <a:r>
+              <a:rPr lang="en-US" sz="1500" b="1" dirty="0">
+                <a:solidFill>
+                  <a:srgbClr val="000000"/>
+                </a:solidFill>
+                <a:latin typeface="Calibri" pitchFamily="34" charset="0"/>
+                <a:ea typeface="Calibri" pitchFamily="34" charset="-122"/>
+                <a:cs typeface="Calibri" pitchFamily="34" charset="-120"/>
+              </a:rPr>
+              <a:t xml:space="preserve">371 cells to 129</a:t>
+            </a:r>
+            <a:r>
+              <a:rPr lang="en-US" sz="1500" dirty="0">
+                <a:solidFill>
+                  <a:srgbClr val="000000"/>
+                </a:solidFill>
+                <a:latin typeface="Calibri" pitchFamily="34" charset="0"/>
+                <a:ea typeface="Calibri" pitchFamily="34" charset="-122"/>
+                <a:cs typeface="Calibri" pitchFamily="34" charset="-120"/>
+              </a:rPr>
+              <a:t xml:space="preserve"> — 65 % less logic for the 3.9 % of baseline that adaptation buys. Generic gates, not Xilinx LUTs.</a:t>
             </a:r>
           </a:p>
         </p:txBody>

--- a/review/Review1_GaN_Segmented_Gate_Driver.pptx
+++ b/review/Review1_GaN_Segmented_Gate_Driver.pptx
@@ -14,6 +14,7 @@
     <p:sldId id="259" r:id="rId5"/>
     <p:sldId id="260" r:id="rId6"/>
     <p:sldId id="267" r:id="rId18"/>
+    <p:sldId id="281" r:id="rId32"/>
     <p:sldId id="261" r:id="rId7"/>
     <p:sldId id="274" r:id="rId25"/>
     <p:sldId id="279" r:id="rId30"/>
@@ -2460,7 +2461,7 @@
                 <a:ea typeface="Calibri" pitchFamily="34" charset="-122"/>
                 <a:cs typeface="Calibri" pitchFamily="34" charset="-120"/>
               </a:rPr>
-              <a:t>13</a:t>
+              <a:t>14</a:t>
             </a:r>
             <a:endParaRPr lang="en-US" sz="1000" dirty="0"/>
           </a:p>
@@ -2865,7 +2866,7 @@
                 <a:ea typeface="Calibri" pitchFamily="34" charset="-122"/>
                 <a:cs typeface="Calibri" pitchFamily="34" charset="-120"/>
               </a:rPr>
-              <a:t>14</a:t>
+              <a:t>15</a:t>
             </a:r>
             <a:endParaRPr lang="en-US" sz="1000" dirty="0"/>
           </a:p>
@@ -3266,7 +3267,7 @@
                 <a:ea typeface="Calibri" pitchFamily="34" charset="-122"/>
                 <a:cs typeface="Calibri" pitchFamily="34" charset="-120"/>
               </a:rPr>
-              <a:t>15</a:t>
+              <a:t>16</a:t>
             </a:r>
             <a:endParaRPr lang="en-US" sz="1000" dirty="0"/>
           </a:p>
@@ -3782,7 +3783,7 @@
                 <a:ea typeface="Calibri" pitchFamily="34" charset="-122"/>
                 <a:cs typeface="Calibri" pitchFamily="34" charset="-120"/>
               </a:rPr>
-              <a:t>17</a:t>
+              <a:t>18</a:t>
             </a:r>
             <a:endParaRPr lang="en-US" sz="1000" dirty="0"/>
           </a:p>
@@ -4313,7 +4314,7 @@
                 <a:ea typeface="Calibri" pitchFamily="34" charset="-122"/>
                 <a:cs typeface="Calibri" pitchFamily="34" charset="-120"/>
               </a:rPr>
-              <a:t>18</a:t>
+              <a:t>19</a:t>
             </a:r>
             <a:endParaRPr lang="en-US" sz="1000" dirty="0"/>
           </a:p>
@@ -5117,7 +5118,7 @@
                 <a:ea typeface="Calibri" pitchFamily="34" charset="-122"/>
                 <a:cs typeface="Calibri" pitchFamily="34" charset="-120"/>
               </a:rPr>
-              <a:t>19</a:t>
+              <a:t>20</a:t>
             </a:r>
             <a:endParaRPr lang="en-US" sz="1000" dirty="0"/>
           </a:p>
@@ -5363,7 +5364,7 @@
                 <a:ea typeface="Calibri" pitchFamily="34" charset="-122"/>
                 <a:cs typeface="Calibri" pitchFamily="34" charset="-120"/>
               </a:rPr>
-              <a:t>20</a:t>
+              <a:t>21</a:t>
             </a:r>
             <a:endParaRPr lang="en-US" sz="1000" dirty="0"/>
           </a:p>
@@ -7342,7 +7343,7 @@
                 <a:ea typeface="Calibri" pitchFamily="34" charset="-122"/>
                 <a:cs typeface="Calibri" pitchFamily="34" charset="-120"/>
               </a:rPr>
-              <a:t>21</a:t>
+              <a:t>22</a:t>
             </a:r>
             <a:endParaRPr lang="en-US" sz="1000" dirty="0"/>
           </a:p>
@@ -7784,7 +7785,7 @@
                 <a:ea typeface="Calibri" pitchFamily="34" charset="-122"/>
                 <a:cs typeface="Calibri" pitchFamily="34" charset="-120"/>
               </a:rPr>
-              <a:t>22</a:t>
+              <a:t>23</a:t>
             </a:r>
             <a:endParaRPr lang="en-US" sz="1000" dirty="0"/>
           </a:p>
@@ -8305,7 +8306,7 @@
                 <a:ea typeface="Calibri" pitchFamily="34" charset="-122"/>
                 <a:cs typeface="Calibri" pitchFamily="34" charset="-120"/>
               </a:rPr>
-              <a:t>23</a:t>
+              <a:t>24</a:t>
             </a:r>
             <a:endParaRPr lang="en-US" sz="1000" dirty="0"/>
           </a:p>
@@ -9598,7 +9599,7 @@
                 <a:ea typeface="Calibri" pitchFamily="34" charset="-122"/>
                 <a:cs typeface="Calibri" pitchFamily="34" charset="-120"/>
               </a:rPr>
-              <a:t>24</a:t>
+              <a:t>25</a:t>
             </a:r>
             <a:endParaRPr lang="en-US" sz="1000" dirty="0"/>
           </a:p>
@@ -10396,7 +10397,7 @@
                 <a:ea typeface="Calibri" pitchFamily="34" charset="-122"/>
                 <a:cs typeface="Calibri" pitchFamily="34" charset="-120"/>
               </a:rPr>
-              <a:t>25</a:t>
+              <a:t>26</a:t>
             </a:r>
             <a:endParaRPr lang="en-US" sz="1000" dirty="0"/>
           </a:p>
@@ -10516,7 +10517,7 @@
                 <a:ea typeface="Calibri" pitchFamily="34" charset="-122"/>
                 <a:cs typeface="Calibri" pitchFamily="34" charset="-120"/>
               </a:rPr>
-              <a:t>10</a:t>
+              <a:t>11</a:t>
             </a:r>
             <a:endParaRPr lang="en-US" sz="1000" dirty="0"/>
           </a:p>
@@ -11872,7 +11873,7 @@
                 <a:ea typeface="Calibri" pitchFamily="34" charset="-122"/>
                 <a:cs typeface="Calibri" pitchFamily="34" charset="-120"/>
               </a:rPr>
-              <a:t>11</a:t>
+              <a:t>12</a:t>
             </a:r>
             <a:endParaRPr lang="en-US" sz="1000" dirty="0"/>
           </a:p>
@@ -13132,7 +13133,7 @@
                 <a:ea typeface="Calibri" pitchFamily="34" charset="-122"/>
                 <a:cs typeface="Calibri" pitchFamily="34" charset="-120"/>
               </a:rPr>
-              <a:t>9</a:t>
+              <a:t>10</a:t>
             </a:r>
             <a:endParaRPr lang="en-US" sz="1000" dirty="0"/>
           </a:p>
@@ -13418,7 +13419,7 @@
                 <a:ea typeface="Calibri" pitchFamily="34" charset="-122"/>
                 <a:cs typeface="Calibri" pitchFamily="34" charset="-120"/>
               </a:rPr>
-              <a:t>16</a:t>
+              <a:t>17</a:t>
             </a:r>
             <a:endParaRPr lang="en-US" sz="1000" dirty="0"/>
           </a:p>
@@ -13737,6 +13738,651 @@
                 <a:cs typeface="Calibri" pitchFamily="34" charset="-120"/>
               </a:rPr>
               <a:t xml:space="preserve"> — both run in MATLAB or Octave.</a:t>
+            </a:r>
+          </a:p>
+        </p:txBody>
+      </p:sp>
+    </p:spTree>
+  </p:cSld>
+  <p:clrMapOvr>
+    <a:masterClrMapping/>
+  </p:clrMapOvr>
+</p:sld>
+</file>
+
+<file path=ppt/slides/slide26.xml><?xml version="1.0" encoding="utf-8"?>
+<p:sld xmlns:a="http://schemas.openxmlformats.org/drawingml/2006/main" xmlns:p="http://schemas.openxmlformats.org/presentationml/2006/main" xmlns:r="http://schemas.openxmlformats.org/officeDocument/2006/relationships">
+  <p:cSld>
+    <p:spTree>
+      <p:nvGrpSpPr>
+        <p:cNvPr id="1" name=""/>
+        <p:cNvGrpSpPr/>
+        <p:nvPr/>
+      </p:nvGrpSpPr>
+      <p:grpSpPr/>
+      <p:pic>
+        <p:nvPicPr>
+          <p:cNvPr id="3" name="Image 0" descr="logo.png"/>
+          <p:cNvPicPr>
+            <a:picLocks noChangeAspect="1"/>
+          </p:cNvPicPr>
+          <p:nvPr/>
+        </p:nvPicPr>
+        <p:blipFill>
+          <a:blip r:embed="rId2"/>
+          <a:stretch>
+            <a:fillRect/>
+          </a:stretch>
+        </p:blipFill>
+        <p:spPr>
+          <a:xfrm>
+            <a:off x="10362895" y="320040"/>
+            <a:ext cx="1371600" cy="518746"/>
+          </a:xfrm>
+          <a:prstGeom prst="rect">
+            <a:avLst/>
+          </a:prstGeom>
+        </p:spPr>
+      </p:pic>
+      <p:sp>
+        <p:nvSpPr>
+          <p:cNvPr id="4" name="TextBox 3"/>
+          <p:cNvSpPr txBox="1"/>
+          <p:nvPr/>
+        </p:nvSpPr>
+        <p:spPr>
+          <a:xfrm>
+            <a:off x="548640" y="320040"/>
+            <a:ext cx="9601200" cy="685800"/>
+          </a:xfrm>
+          <a:prstGeom prst="rect">
+            <a:avLst/>
+          </a:prstGeom>
+          <a:noFill/>
+        </p:spPr>
+        <p:txBody>
+          <a:bodyPr wrap="square" lIns="0" tIns="0" rIns="0" bIns="0">
+            <a:spAutoFit/>
+          </a:bodyPr>
+          <a:lstStyle/>
+          <a:p>
+            <a:pPr marL="177800" indent="0">
+              <a:spcAft>
+                <a:spcPts val="0"/>
+              </a:spcAft>
+              <a:buSzPct val="100000"/>
+              <a:buNone/>
+            </a:pPr>
+            <a:r>
+              <a:rPr lang="en-US" sz="2800" b="1" dirty="0">
+                <a:solidFill>
+                  <a:srgbClr val="000000"/>
+                </a:solidFill>
+                <a:latin typeface="Calibri" pitchFamily="34" charset="0"/>
+                <a:ea typeface="Calibri" pitchFamily="34" charset="-122"/>
+                <a:cs typeface="Calibri" pitchFamily="34" charset="-120"/>
+              </a:rPr>
+              <a:t xml:space="preserve">The gap this project fills</a:t>
+            </a:r>
+          </a:p>
+        </p:txBody>
+      </p:sp>
+      <p:sp>
+        <p:nvSpPr>
+          <p:cNvPr id="5" name="TextBox 4"/>
+          <p:cNvSpPr txBox="1"/>
+          <p:nvPr/>
+        </p:nvSpPr>
+        <p:spPr>
+          <a:xfrm>
+            <a:off x="11457432" y="6446520"/>
+            <a:ext cx="457200" cy="274320"/>
+          </a:xfrm>
+          <a:prstGeom prst="rect">
+            <a:avLst/>
+          </a:prstGeom>
+          <a:noFill/>
+        </p:spPr>
+        <p:txBody>
+          <a:bodyPr wrap="square" lIns="0" tIns="0" rIns="0" bIns="0">
+            <a:spAutoFit/>
+          </a:bodyPr>
+          <a:lstStyle/>
+          <a:p>
+            <a:pPr marL="177800" indent="0">
+              <a:spcAft>
+                <a:spcPts val="0"/>
+              </a:spcAft>
+              <a:buSzPct val="100000"/>
+              <a:buNone/>
+            </a:pPr>
+            <a:r>
+              <a:rPr lang="en-US" sz="1100" dirty="0">
+                <a:solidFill>
+                  <a:srgbClr val="000000"/>
+                </a:solidFill>
+                <a:latin typeface="Calibri" pitchFamily="34" charset="0"/>
+                <a:ea typeface="Calibri" pitchFamily="34" charset="-122"/>
+                <a:cs typeface="Calibri" pitchFamily="34" charset="-120"/>
+              </a:rPr>
+              <a:t xml:space="preserve">7</a:t>
+            </a:r>
+          </a:p>
+        </p:txBody>
+      </p:sp>
+      <p:sp>
+        <p:nvSpPr>
+          <p:cNvPr id="6" name="TextBox 5"/>
+          <p:cNvSpPr txBox="1"/>
+          <p:nvPr/>
+        </p:nvSpPr>
+        <p:spPr>
+          <a:xfrm>
+            <a:off x="640080" y="1234440"/>
+            <a:ext cx="11064240" cy="914400"/>
+          </a:xfrm>
+          <a:prstGeom prst="rect">
+            <a:avLst/>
+          </a:prstGeom>
+          <a:noFill/>
+        </p:spPr>
+        <p:txBody>
+          <a:bodyPr wrap="square" lIns="0" tIns="0" rIns="0" bIns="0">
+            <a:spAutoFit/>
+          </a:bodyPr>
+          <a:lstStyle/>
+          <a:p>
+            <a:pPr marL="177800" indent="0">
+              <a:spcAft>
+                <a:spcPts val="120"/>
+              </a:spcAft>
+              <a:buSzPct val="100000"/>
+              <a:buNone/>
+            </a:pPr>
+            <a:r>
+              <a:rPr lang="en-US" sz="1500" b="1" dirty="0">
+                <a:solidFill>
+                  <a:srgbClr val="000000"/>
+                </a:solidFill>
+                <a:latin typeface="Calibri" pitchFamily="34" charset="0"/>
+                <a:ea typeface="Calibri" pitchFamily="34" charset="-122"/>
+                <a:cs typeface="Calibri" pitchFamily="34" charset="-120"/>
+              </a:rPr>
+              <a:t xml:space="preserve">Every active-gate-driver paper reports ONE number: the improvement over a conventional driver.</a:t>
+            </a:r>
+          </a:p>
+          <a:p>
+            <a:pPr marL="177800" indent="0">
+              <a:spcAft>
+                <a:spcPts val="0"/>
+              </a:spcAft>
+              <a:buSzPct val="100000"/>
+              <a:buNone/>
+            </a:pPr>
+            <a:r>
+              <a:rPr lang="en-US" sz="1300" dirty="0">
+                <a:solidFill>
+                  <a:srgbClr val="000000"/>
+                </a:solidFill>
+                <a:latin typeface="Calibri" pitchFamily="34" charset="0"/>
+                <a:ea typeface="Calibri" pitchFamily="34" charset="-122"/>
+                <a:cs typeface="Calibri" pitchFamily="34" charset="-120"/>
+              </a:rPr>
+              <a:t xml:space="preserve">That number bundles two effects that cost completely different hardware.</a:t>
+            </a:r>
+          </a:p>
+        </p:txBody>
+      </p:sp>
+      <p:sp>
+        <p:nvSpPr>
+          <p:cNvPr id="7" name="TextBox 6"/>
+          <p:cNvSpPr txBox="1"/>
+          <p:nvPr/>
+        </p:nvSpPr>
+        <p:spPr>
+          <a:xfrm>
+            <a:off x="640080" y="2377440"/>
+            <a:ext cx="5394960" cy="365760"/>
+          </a:xfrm>
+          <a:prstGeom prst="rect">
+            <a:avLst/>
+          </a:prstGeom>
+          <a:noFill/>
+        </p:spPr>
+        <p:txBody>
+          <a:bodyPr wrap="square" lIns="0" tIns="0" rIns="0" bIns="0">
+            <a:spAutoFit/>
+          </a:bodyPr>
+          <a:lstStyle/>
+          <a:p>
+            <a:pPr marL="177800" indent="0">
+              <a:spcAft>
+                <a:spcPts val="0"/>
+              </a:spcAft>
+              <a:buSzPct val="100000"/>
+              <a:buNone/>
+            </a:pPr>
+            <a:r>
+              <a:rPr lang="en-US" sz="1450" b="1" dirty="0">
+                <a:solidFill>
+                  <a:srgbClr val="000000"/>
+                </a:solidFill>
+                <a:latin typeface="Calibri" pitchFamily="34" charset="0"/>
+                <a:ea typeface="Calibri" pitchFamily="34" charset="-122"/>
+                <a:cs typeface="Calibri" pitchFamily="34" charset="-120"/>
+              </a:rPr>
+              <a:t xml:space="preserve">Effect 1  —  a better FIXED setting</a:t>
+            </a:r>
+          </a:p>
+        </p:txBody>
+      </p:sp>
+      <p:sp>
+        <p:nvSpPr>
+          <p:cNvPr id="8" name="TextBox 7"/>
+          <p:cNvSpPr txBox="1"/>
+          <p:nvPr/>
+        </p:nvSpPr>
+        <p:spPr>
+          <a:xfrm>
+            <a:off x="640080" y="2834640"/>
+            <a:ext cx="3703320" cy="1463040"/>
+          </a:xfrm>
+          <a:prstGeom prst="rect">
+            <a:avLst/>
+          </a:prstGeom>
+          <a:noFill/>
+        </p:spPr>
+        <p:txBody>
+          <a:bodyPr wrap="square" lIns="0" tIns="0" rIns="0" bIns="0">
+            <a:spAutoFit/>
+          </a:bodyPr>
+          <a:lstStyle/>
+          <a:p>
+            <a:pPr marL="177800" indent="0">
+              <a:spcAft>
+                <a:spcPts val="0"/>
+              </a:spcAft>
+              <a:buSzPct val="100000"/>
+              <a:buNone/>
+            </a:pPr>
+            <a:r>
+              <a:rPr lang="en-US" sz="1200" dirty="0">
+                <a:solidFill>
+                  <a:srgbClr val="000000"/>
+                </a:solidFill>
+                <a:latin typeface="Calibri" pitchFamily="34" charset="0"/>
+                <a:ea typeface="Calibri" pitchFamily="34" charset="-122"/>
+                <a:cs typeface="Calibri" pitchFamily="34" charset="-120"/>
+              </a:rPr>
+              <a:t xml:space="preserve">Pick a better control word once, at design time. Costs nothing at run time: no sensor, no ADC, no lookup table, no controller.</a:t>
+            </a:r>
+          </a:p>
+        </p:txBody>
+      </p:sp>
+      <p:sp>
+        <p:nvSpPr>
+          <p:cNvPr id="9" name="TextBox 8"/>
+          <p:cNvSpPr txBox="1"/>
+          <p:nvPr/>
+        </p:nvSpPr>
+        <p:spPr>
+          <a:xfrm>
+            <a:off x="4480560" y="2788920"/>
+            <a:ext cx="1554480" cy="1188720"/>
+          </a:xfrm>
+          <a:prstGeom prst="rect">
+            <a:avLst/>
+          </a:prstGeom>
+          <a:noFill/>
+        </p:spPr>
+        <p:txBody>
+          <a:bodyPr wrap="square" lIns="0" tIns="0" rIns="0" bIns="0">
+            <a:spAutoFit/>
+          </a:bodyPr>
+          <a:lstStyle/>
+          <a:p>
+            <a:pPr marL="177800" indent="0">
+              <a:spcAft>
+                <a:spcPts val="100"/>
+              </a:spcAft>
+              <a:buSzPct val="100000"/>
+              <a:buNone/>
+            </a:pPr>
+            <a:r>
+              <a:rPr lang="en-US" sz="3200" b="1" dirty="0">
+                <a:solidFill>
+                  <a:srgbClr val="000000"/>
+                </a:solidFill>
+                <a:latin typeface="Calibri" pitchFamily="34" charset="0"/>
+                <a:ea typeface="Calibri" pitchFamily="34" charset="-122"/>
+                <a:cs typeface="Calibri" pitchFamily="34" charset="-120"/>
+              </a:rPr>
+              <a:t xml:space="preserve">25.1 %</a:t>
+            </a:r>
+          </a:p>
+          <a:p>
+            <a:pPr marL="177800" indent="0">
+              <a:spcAft>
+                <a:spcPts val="60"/>
+              </a:spcAft>
+              <a:buSzPct val="100000"/>
+              <a:buNone/>
+            </a:pPr>
+            <a:r>
+              <a:rPr lang="en-US" sz="1300" b="1" dirty="0">
+                <a:solidFill>
+                  <a:srgbClr val="000000"/>
+                </a:solidFill>
+                <a:latin typeface="Calibri" pitchFamily="34" charset="0"/>
+                <a:ea typeface="Calibri" pitchFamily="34" charset="-122"/>
+                <a:cs typeface="Calibri" pitchFamily="34" charset="-120"/>
+              </a:rPr>
+              <a:t xml:space="preserve">of baseline</a:t>
+            </a:r>
+          </a:p>
+          <a:p>
+            <a:pPr marL="177800" indent="0">
+              <a:spcAft>
+                <a:spcPts val="0"/>
+              </a:spcAft>
+              <a:buSzPct val="100000"/>
+              <a:buNone/>
+            </a:pPr>
+            <a:r>
+              <a:rPr lang="en-US" sz="1150" dirty="0">
+                <a:solidFill>
+                  <a:srgbClr val="000000"/>
+                </a:solidFill>
+                <a:latin typeface="Calibri" pitchFamily="34" charset="0"/>
+                <a:ea typeface="Calibri" pitchFamily="34" charset="-122"/>
+                <a:cs typeface="Calibri" pitchFamily="34" charset="-120"/>
+              </a:rPr>
+              <a:t xml:space="preserve"/>
+            </a:r>
+          </a:p>
+        </p:txBody>
+      </p:sp>
+      <p:sp>
+        <p:nvSpPr>
+          <p:cNvPr id="10" name="TextBox 9"/>
+          <p:cNvSpPr txBox="1"/>
+          <p:nvPr/>
+        </p:nvSpPr>
+        <p:spPr>
+          <a:xfrm>
+            <a:off x="6400800" y="2377440"/>
+            <a:ext cx="5394960" cy="365760"/>
+          </a:xfrm>
+          <a:prstGeom prst="rect">
+            <a:avLst/>
+          </a:prstGeom>
+          <a:noFill/>
+        </p:spPr>
+        <p:txBody>
+          <a:bodyPr wrap="square" lIns="0" tIns="0" rIns="0" bIns="0">
+            <a:spAutoFit/>
+          </a:bodyPr>
+          <a:lstStyle/>
+          <a:p>
+            <a:pPr marL="177800" indent="0">
+              <a:spcAft>
+                <a:spcPts val="0"/>
+              </a:spcAft>
+              <a:buSzPct val="100000"/>
+              <a:buNone/>
+            </a:pPr>
+            <a:r>
+              <a:rPr lang="en-US" sz="1450" b="1" dirty="0">
+                <a:solidFill>
+                  <a:srgbClr val="000000"/>
+                </a:solidFill>
+                <a:latin typeface="Calibri" pitchFamily="34" charset="0"/>
+                <a:ea typeface="Calibri" pitchFamily="34" charset="-122"/>
+                <a:cs typeface="Calibri" pitchFamily="34" charset="-120"/>
+              </a:rPr>
+              <a:t xml:space="preserve">Effect 2  —  ADAPTING per operating point</a:t>
+            </a:r>
+          </a:p>
+        </p:txBody>
+      </p:sp>
+      <p:sp>
+        <p:nvSpPr>
+          <p:cNvPr id="11" name="TextBox 10"/>
+          <p:cNvSpPr txBox="1"/>
+          <p:nvPr/>
+        </p:nvSpPr>
+        <p:spPr>
+          <a:xfrm>
+            <a:off x="6400800" y="2834640"/>
+            <a:ext cx="3703320" cy="1463040"/>
+          </a:xfrm>
+          <a:prstGeom prst="rect">
+            <a:avLst/>
+          </a:prstGeom>
+          <a:noFill/>
+        </p:spPr>
+        <p:txBody>
+          <a:bodyPr wrap="square" lIns="0" tIns="0" rIns="0" bIns="0">
+            <a:spAutoFit/>
+          </a:bodyPr>
+          <a:lstStyle/>
+          <a:p>
+            <a:pPr marL="177800" indent="0">
+              <a:spcAft>
+                <a:spcPts val="0"/>
+              </a:spcAft>
+              <a:buSzPct val="100000"/>
+              <a:buNone/>
+            </a:pPr>
+            <a:r>
+              <a:rPr lang="en-US" sz="1200" dirty="0">
+                <a:solidFill>
+                  <a:srgbClr val="000000"/>
+                </a:solidFill>
+                <a:latin typeface="Calibri" pitchFamily="34" charset="0"/>
+                <a:ea typeface="Calibri" pitchFamily="34" charset="-122"/>
+                <a:cs typeface="Calibri" pitchFamily="34" charset="-120"/>
+              </a:rPr>
+              <a:t xml:space="preserve">Change the word as load, bus voltage and temperature move. This is what needs the sensing hardware the architecture is sold on.</a:t>
+            </a:r>
+          </a:p>
+        </p:txBody>
+      </p:sp>
+      <p:sp>
+        <p:nvSpPr>
+          <p:cNvPr id="12" name="TextBox 11"/>
+          <p:cNvSpPr txBox="1"/>
+          <p:nvPr/>
+        </p:nvSpPr>
+        <p:spPr>
+          <a:xfrm>
+            <a:off x="10241280" y="2788920"/>
+            <a:ext cx="1554480" cy="1188720"/>
+          </a:xfrm>
+          <a:prstGeom prst="rect">
+            <a:avLst/>
+          </a:prstGeom>
+          <a:noFill/>
+        </p:spPr>
+        <p:txBody>
+          <a:bodyPr wrap="square" lIns="0" tIns="0" rIns="0" bIns="0">
+            <a:spAutoFit/>
+          </a:bodyPr>
+          <a:lstStyle/>
+          <a:p>
+            <a:pPr marL="177800" indent="0">
+              <a:spcAft>
+                <a:spcPts val="100"/>
+              </a:spcAft>
+              <a:buSzPct val="100000"/>
+              <a:buNone/>
+            </a:pPr>
+            <a:r>
+              <a:rPr lang="en-US" sz="3200" b="1" dirty="0">
+                <a:solidFill>
+                  <a:srgbClr val="000000"/>
+                </a:solidFill>
+                <a:latin typeface="Calibri" pitchFamily="34" charset="0"/>
+                <a:ea typeface="Calibri" pitchFamily="34" charset="-122"/>
+                <a:cs typeface="Calibri" pitchFamily="34" charset="-120"/>
+              </a:rPr>
+              <a:t xml:space="preserve">3.9 %</a:t>
+            </a:r>
+          </a:p>
+          <a:p>
+            <a:pPr marL="177800" indent="0">
+              <a:spcAft>
+                <a:spcPts val="60"/>
+              </a:spcAft>
+              <a:buSzPct val="100000"/>
+              <a:buNone/>
+            </a:pPr>
+            <a:r>
+              <a:rPr lang="en-US" sz="1300" b="1" dirty="0">
+                <a:solidFill>
+                  <a:srgbClr val="000000"/>
+                </a:solidFill>
+                <a:latin typeface="Calibri" pitchFamily="34" charset="0"/>
+                <a:ea typeface="Calibri" pitchFamily="34" charset="-122"/>
+                <a:cs typeface="Calibri" pitchFamily="34" charset="-120"/>
+              </a:rPr>
+              <a:t xml:space="preserve">of baseline</a:t>
+            </a:r>
+          </a:p>
+          <a:p>
+            <a:pPr marL="177800" indent="0">
+              <a:spcAft>
+                <a:spcPts val="0"/>
+              </a:spcAft>
+              <a:buSzPct val="100000"/>
+              <a:buNone/>
+            </a:pPr>
+            <a:r>
+              <a:rPr lang="en-US" sz="1150" dirty="0">
+                <a:solidFill>
+                  <a:srgbClr val="000000"/>
+                </a:solidFill>
+                <a:latin typeface="Calibri" pitchFamily="34" charset="0"/>
+                <a:ea typeface="Calibri" pitchFamily="34" charset="-122"/>
+                <a:cs typeface="Calibri" pitchFamily="34" charset="-120"/>
+              </a:rPr>
+              <a:t xml:space="preserve"/>
+            </a:r>
+          </a:p>
+        </p:txBody>
+      </p:sp>
+      <p:sp>
+        <p:nvSpPr>
+          <p:cNvPr id="13" name="TextBox 12"/>
+          <p:cNvSpPr txBox="1"/>
+          <p:nvPr/>
+        </p:nvSpPr>
+        <p:spPr>
+          <a:xfrm>
+            <a:off x="640080" y="4526280"/>
+            <a:ext cx="11064240" cy="1920240"/>
+          </a:xfrm>
+          <a:prstGeom prst="rect">
+            <a:avLst/>
+          </a:prstGeom>
+          <a:noFill/>
+        </p:spPr>
+        <p:txBody>
+          <a:bodyPr wrap="square" lIns="0" tIns="0" rIns="0" bIns="0">
+            <a:spAutoFit/>
+          </a:bodyPr>
+          <a:lstStyle/>
+          <a:p>
+            <a:pPr marL="177800" indent="0">
+              <a:spcAft>
+                <a:spcPts val="170"/>
+              </a:spcAft>
+              <a:buSzPct val="100000"/>
+              <a:buNone/>
+            </a:pPr>
+            <a:r>
+              <a:rPr lang="en-US" sz="1400" b="1" dirty="0">
+                <a:solidFill>
+                  <a:srgbClr val="000000"/>
+                </a:solidFill>
+                <a:latin typeface="Calibri" pitchFamily="34" charset="0"/>
+                <a:ea typeface="Calibri" pitchFamily="34" charset="-122"/>
+                <a:cs typeface="Calibri" pitchFamily="34" charset="-120"/>
+              </a:rPr>
+              <a:t xml:space="preserve">THE GAP: </a:t>
+            </a:r>
+            <a:r>
+              <a:rPr lang="en-US" sz="1400" dirty="0">
+                <a:solidFill>
+                  <a:srgbClr val="000000"/>
+                </a:solidFill>
+                <a:latin typeface="Calibri" pitchFamily="34" charset="0"/>
+                <a:ea typeface="Calibri" pitchFamily="34" charset="-122"/>
+                <a:cs typeface="Calibri" pitchFamily="34" charset="-120"/>
+              </a:rPr>
+              <a:t xml:space="preserve">no published work separates them. Nobody reports how much of an active gate driver's benefit actually requires adaptation, because separating the two needs an exhaustive search of the control word at every corner — and nobody has run one.</a:t>
+            </a:r>
+          </a:p>
+          <a:p>
+            <a:pPr marL="177800" indent="0">
+              <a:spcAft>
+                <a:spcPts val="170"/>
+              </a:spcAft>
+              <a:buSzPct val="100000"/>
+              <a:buNone/>
+            </a:pPr>
+            <a:r>
+              <a:rPr lang="en-US" sz="1400" b="1" dirty="0">
+                <a:solidFill>
+                  <a:srgbClr val="000000"/>
+                </a:solidFill>
+                <a:latin typeface="Calibri" pitchFamily="34" charset="0"/>
+                <a:ea typeface="Calibri" pitchFamily="34" charset="-122"/>
+                <a:cs typeface="Calibri" pitchFamily="34" charset="-120"/>
+              </a:rPr>
+              <a:t xml:space="preserve">WHY IT MATTERS: </a:t>
+            </a:r>
+            <a:r>
+              <a:rPr lang="en-US" sz="1400" dirty="0">
+                <a:solidFill>
+                  <a:srgbClr val="000000"/>
+                </a:solidFill>
+                <a:latin typeface="Calibri" pitchFamily="34" charset="0"/>
+                <a:ea typeface="Calibri" pitchFamily="34" charset="-122"/>
+                <a:cs typeface="Calibri" pitchFamily="34" charset="-120"/>
+              </a:rPr>
+              <a:t xml:space="preserve">only Effect 2 justifies the sense + ADC + lookup table. If it is small, that hardware is mostly paying for something a design-time choice already delivers — a buy-or-not decision nobody has costed.</a:t>
+            </a:r>
+          </a:p>
+          <a:p>
+            <a:pPr marL="177800" indent="0">
+              <a:spcAft>
+                <a:spcPts val="0"/>
+              </a:spcAft>
+              <a:buSzPct val="100000"/>
+              <a:buNone/>
+            </a:pPr>
+            <a:r>
+              <a:rPr lang="en-US" sz="1400" b="1" dirty="0">
+                <a:solidFill>
+                  <a:srgbClr val="000000"/>
+                </a:solidFill>
+                <a:latin typeface="Calibri" pitchFamily="34" charset="0"/>
+                <a:ea typeface="Calibri" pitchFamily="34" charset="-122"/>
+                <a:cs typeface="Calibri" pitchFamily="34" charset="-120"/>
+              </a:rPr>
+              <a:t xml:space="preserve">WHAT WE DO: </a:t>
+            </a:r>
+            <a:r>
+              <a:rPr lang="en-US" sz="1400" dirty="0">
+                <a:solidFill>
+                  <a:srgbClr val="000000"/>
+                </a:solidFill>
+                <a:latin typeface="Calibri" pitchFamily="34" charset="0"/>
+                <a:ea typeface="Calibri" pitchFamily="34" charset="-122"/>
+                <a:cs typeface="Calibri" pitchFamily="34" charset="-120"/>
+              </a:rPr>
+              <a:t xml:space="preserve">720 control words × 4 corners, exhaustively, in ngspice — then report the two numbers separately instead of their sum.</a:t>
             </a:r>
           </a:p>
         </p:txBody>
@@ -16572,22 +17218,20 @@
               <a:tr h="320040">
                 <a:tc>
                   <a:txBody>
-                    <a:bodyPr/>
+                    <a:bodyPr wrap="square"/>
                     <a:lstStyle/>
                     <a:p>
                       <a:pPr marL="0" indent="0">
                         <a:buNone/>
                       </a:pPr>
                       <a:r>
-                        <a:rPr lang="en-US" sz="1300" b="1" dirty="0">
+                        <a:rPr sz="950" b="1">
                           <a:solidFill>
-                            <a:srgbClr val="FFFFFF"/>
+                            <a:srgbClr val="000000"/>
                           </a:solidFill>
-                          <a:latin typeface="Calibri" pitchFamily="34" charset="0"/>
-                          <a:ea typeface="Calibri" pitchFamily="34" charset="-122"/>
-                          <a:cs typeface="Calibri" pitchFamily="34" charset="-120"/>
+                          <a:latin typeface="Calibri"/>
                         </a:rPr>
-                        <a:t>No.</a:t>
+                        <a:t>Ref</a:t>
                       </a:r>
                       <a:endParaRPr lang="en-US" sz="1300" dirty="0">
                         <a:latin typeface="Calibri" charset="0"/>
@@ -16640,20 +17284,18 @@
                 </a:tc>
                 <a:tc>
                   <a:txBody>
-                    <a:bodyPr/>
+                    <a:bodyPr wrap="square"/>
                     <a:lstStyle/>
                     <a:p>
                       <a:pPr marL="0" indent="0">
                         <a:buNone/>
                       </a:pPr>
                       <a:r>
-                        <a:rPr lang="en-US" sz="1300" b="1" dirty="0">
+                        <a:rPr sz="950" b="1">
                           <a:solidFill>
-                            <a:srgbClr val="FFFFFF"/>
+                            <a:srgbClr val="000000"/>
                           </a:solidFill>
-                          <a:latin typeface="Calibri" pitchFamily="34" charset="0"/>
-                          <a:ea typeface="Calibri" pitchFamily="34" charset="-122"/>
-                          <a:cs typeface="Calibri" pitchFamily="34" charset="-120"/>
+                          <a:latin typeface="Calibri"/>
                         </a:rPr>
                         <a:t>Author(s) &amp; Year</a:t>
                       </a:r>
@@ -16708,20 +17350,18 @@
                 </a:tc>
                 <a:tc>
                   <a:txBody>
-                    <a:bodyPr/>
+                    <a:bodyPr wrap="square"/>
                     <a:lstStyle/>
                     <a:p>
                       <a:pPr marL="0" indent="0">
                         <a:buNone/>
                       </a:pPr>
                       <a:r>
-                        <a:rPr lang="en-US" sz="1300" b="1" dirty="0">
+                        <a:rPr sz="950" b="1">
                           <a:solidFill>
-                            <a:srgbClr val="FFFFFF"/>
+                            <a:srgbClr val="000000"/>
                           </a:solidFill>
-                          <a:latin typeface="Calibri" pitchFamily="34" charset="0"/>
-                          <a:ea typeface="Calibri" pitchFamily="34" charset="-122"/>
-                          <a:cs typeface="Calibri" pitchFamily="34" charset="-120"/>
+                          <a:latin typeface="Calibri"/>
                         </a:rPr>
                         <a:t>Title / Source</a:t>
                       </a:r>
@@ -16776,22 +17416,20 @@
                 </a:tc>
                 <a:tc>
                   <a:txBody>
-                    <a:bodyPr/>
+                    <a:bodyPr wrap="square"/>
                     <a:lstStyle/>
                     <a:p>
                       <a:pPr marL="0" indent="0">
                         <a:buNone/>
                       </a:pPr>
                       <a:r>
-                        <a:rPr lang="en-US" sz="1300" b="1" dirty="0">
+                        <a:rPr sz="950" b="1">
                           <a:solidFill>
-                            <a:srgbClr val="FFFFFF"/>
+                            <a:srgbClr val="000000"/>
                           </a:solidFill>
-                          <a:latin typeface="Calibri" pitchFamily="34" charset="0"/>
-                          <a:ea typeface="Calibri" pitchFamily="34" charset="-122"/>
-                          <a:cs typeface="Calibri" pitchFamily="34" charset="-120"/>
+                          <a:latin typeface="Calibri"/>
                         </a:rPr>
-                        <a:t>Method / Approach</a:t>
+                        <a:t>Aim  —  what the paper sets out to do</a:t>
                       </a:r>
                       <a:endParaRPr lang="en-US" sz="1300" dirty="0">
                         <a:latin typeface="Calibri" charset="0"/>
@@ -16844,22 +17482,20 @@
                 </a:tc>
                 <a:tc>
                   <a:txBody>
-                    <a:bodyPr/>
+                    <a:bodyPr wrap="square"/>
                     <a:lstStyle/>
                     <a:p>
                       <a:pPr marL="0" indent="0">
                         <a:buNone/>
                       </a:pPr>
                       <a:r>
-                        <a:rPr lang="en-US" sz="1300" b="1" dirty="0">
+                        <a:rPr sz="950" b="1">
                           <a:solidFill>
-                            <a:srgbClr val="FFFFFF"/>
+                            <a:srgbClr val="000000"/>
                           </a:solidFill>
-                          <a:latin typeface="Calibri" pitchFamily="34" charset="0"/>
-                          <a:ea typeface="Calibri" pitchFamily="34" charset="-122"/>
-                          <a:cs typeface="Calibri" pitchFamily="34" charset="-120"/>
+                          <a:latin typeface="Calibri"/>
                         </a:rPr>
-                        <a:t>Findings &amp; Research Gap</a:t>
+                        <a:t>Gap we found  →  what WE fill</a:t>
                       </a:r>
                       <a:endParaRPr lang="en-US" sz="1300" dirty="0">
                         <a:latin typeface="Calibri" charset="0"/>
@@ -17206,7 +17842,25 @@
                           </a:solidFill>
                           <a:latin typeface="Calibri"/>
                         </a:rPr>
-                        <a:t>THE BASE PAPER. Its multibit gate code is the direct ancestor of our 720-point control word, and it is digital — implementable on an FPGA — rather than a fixed analogue network. We replicate its premise on GaN and then ask the question it does not: of the gain a code buys, how much needs per-operating-point adaptation at all?</a:t>
+                        <a:t>THE BASE PAPER. Its multibit gate code is the direct ancestor of our 720-point control word, and it is digital — implementable on an FPGA — rather than a fixed analogue network. We replicate its premise on GaN and then ask the question it does not: of the gain a code buys, how much needs per-operating-point adaptation at all?  </a:t>
+                      </a:r>
+                      <a:r>
+                        <a:rPr sz="900" b="1">
+                          <a:solidFill>
+                            <a:srgbClr val="000000"/>
+                          </a:solidFill>
+                          <a:latin typeface="Calibri"/>
+                        </a:rPr>
+                        <a:t>WE FILL: </a:t>
+                      </a:r>
+                      <a:r>
+                        <a:rPr sz="900" b="0">
+                          <a:solidFill>
+                            <a:srgbClr val="000000"/>
+                          </a:solidFill>
+                          <a:latin typeface="Calibri"/>
+                        </a:rPr>
+                        <a:t>the exhaustive 720-word search that makes the fixed-vs-adaptive split measurable, and the GaN third-quadrant cost their SiC device never pays.</a:t>
                       </a:r>
                       <a:endParaRPr lang="en-US" sz="1300" dirty="0">
                         <a:latin typeface="Calibri" charset="0"/>
@@ -17561,7 +18215,25 @@
                           </a:solidFill>
                           <a:latin typeface="Calibri"/>
                         </a:rPr>
-                        <a:t>Architecturally the closest published driver to ours — segmented slices, pattern-selected strength. It is an ASIC with a fixed pattern set; our contribution is to search the whole pattern space exhaustively and price what the search actually buys.</a:t>
+                        <a:t>Architecturally the closest published driver to ours — segmented slices, pattern-selected strength. It is an ASIC with a fixed pattern set; our contribution is to search the whole pattern space exhaustively and price what the search actually buys.  </a:t>
+                      </a:r>
+                      <a:r>
+                        <a:rPr sz="900" b="1">
+                          <a:solidFill>
+                            <a:srgbClr val="000000"/>
+                          </a:solidFill>
+                          <a:latin typeface="Calibri"/>
+                        </a:rPr>
+                        <a:t>WE FILL: </a:t>
+                      </a:r>
+                      <a:r>
+                        <a:rPr sz="900" b="0">
+                          <a:solidFill>
+                            <a:srgbClr val="000000"/>
+                          </a:solidFill>
+                          <a:latin typeface="Calibri"/>
+                        </a:rPr>
+                        <a:t>the price of the pattern space: what an exhaustive search buys over their fixed pattern set.</a:t>
                       </a:r>
                       <a:endParaRPr lang="en-US" sz="1300" dirty="0">
                         <a:latin typeface="Calibri" charset="0"/>
@@ -17916,7 +18588,25 @@
                           </a:solidFill>
                           <a:latin typeface="Calibri"/>
                         </a:rPr>
-                        <a:t>Recent, GaN, and on exactly our failure mode. It suppresses crosstalk with added passives; we get the same protection from the Miller clamp already in the cell and measure its price at 0.04 %.</a:t>
+                        <a:t>Recent, GaN, and on exactly our failure mode. It suppresses crosstalk with added passives; we get the same protection from the Miller clamp already in the cell and measure its price at 0.04 %.  </a:t>
+                      </a:r>
+                      <a:r>
+                        <a:rPr sz="900" b="1">
+                          <a:solidFill>
+                            <a:srgbClr val="000000"/>
+                          </a:solidFill>
+                          <a:latin typeface="Calibri"/>
+                        </a:rPr>
+                        <a:t>WE FILL: </a:t>
+                      </a:r>
+                      <a:r>
+                        <a:rPr sz="900" b="0">
+                          <a:solidFill>
+                            <a:srgbClr val="000000"/>
+                          </a:solidFill>
+                          <a:latin typeface="Calibri"/>
+                        </a:rPr>
+                        <a:t>whether the setting has to change with the operating point at all. It does not: 3.9 % of baseline.</a:t>
                       </a:r>
                       <a:endParaRPr lang="en-US" sz="1300" dirty="0">
                         <a:latin typeface="Calibri" charset="0"/>
@@ -18271,7 +18961,25 @@
                           </a:solidFill>
                           <a:latin typeface="Calibri"/>
                         </a:rPr>
-                        <a:t>Confirms the two effects are coupled, which is why our cost function prices loss and overshoot jointly rather than optimising either alone.</a:t>
+                        <a:t>Confirms the two effects are coupled, which is why our cost function prices loss and overshoot jointly rather than optimising either alone.  </a:t>
+                      </a:r>
+                      <a:r>
+                        <a:rPr sz="900" b="1">
+                          <a:solidFill>
+                            <a:srgbClr val="000000"/>
+                          </a:solidFill>
+                          <a:latin typeface="Calibri"/>
+                        </a:rPr>
+                        <a:t>WE FILL: </a:t>
+                      </a:r>
+                      <a:r>
+                        <a:rPr sz="900" b="0">
+                          <a:solidFill>
+                            <a:srgbClr val="000000"/>
+                          </a:solidFill>
+                          <a:latin typeface="Calibri"/>
+                        </a:rPr>
+                        <a:t>both effects in ONE cost function, showing the objectives genuinely conflict (Pareto, slide 16).</a:t>
                       </a:r>
                       <a:endParaRPr lang="en-US" sz="1300" dirty="0">
                         <a:latin typeface="Calibri" charset="0"/>
@@ -18626,7 +19334,25 @@
                           </a:solidFill>
                           <a:latin typeface="Calibri"/>
                         </a:rPr>
-                        <a:t>The most recent adaptive dead-time driver we found, and it adapts the one field our leave-one-out test shows carries the whole benefit — and only at light load.</a:t>
+                        <a:t>The most recent adaptive dead-time driver we found, and it adapts the one field our leave-one-out test shows carries the whole benefit — and only at light load.  </a:t>
+                      </a:r>
+                      <a:r>
+                        <a:rPr sz="900" b="1">
+                          <a:solidFill>
+                            <a:srgbClr val="000000"/>
+                          </a:solidFill>
+                          <a:latin typeface="Calibri"/>
+                        </a:rPr>
+                        <a:t>WE FILL: </a:t>
+                      </a:r>
+                      <a:r>
+                        <a:rPr sz="900" b="0">
+                          <a:solidFill>
+                            <a:srgbClr val="000000"/>
+                          </a:solidFill>
+                          <a:latin typeface="Calibri"/>
+                        </a:rPr>
+                        <a:t>which field is worth scheduling. Only dead time, and only at light load; drive strength is worth 0.00 %.</a:t>
                       </a:r>
                       <a:endParaRPr lang="en-US" sz="1300" dirty="0">
                         <a:latin typeface="Calibri" charset="0"/>
@@ -18792,7 +19518,7 @@
                 <a:ea typeface="Calibri" pitchFamily="34" charset="-122"/>
                 <a:cs typeface="Calibri" pitchFamily="34" charset="-120"/>
               </a:rPr>
-              <a:t>7</a:t>
+              <a:t>8</a:t>
             </a:r>
             <a:endParaRPr lang="en-US" sz="1000" dirty="0"/>
           </a:p>
@@ -19193,7 +19919,7 @@
                 <a:ea typeface="Calibri" pitchFamily="34" charset="-122"/>
                 <a:cs typeface="Calibri" pitchFamily="34" charset="-120"/>
               </a:rPr>
-              <a:t>8</a:t>
+              <a:t>9</a:t>
             </a:r>
             <a:endParaRPr lang="en-US" sz="1000" dirty="0"/>
           </a:p>
@@ -19395,7 +20121,7 @@
                 <a:ea typeface="Calibri" pitchFamily="34" charset="-122"/>
                 <a:cs typeface="Calibri" pitchFamily="34" charset="-120"/>
               </a:rPr>
-              <a:t>12</a:t>
+              <a:t>13</a:t>
             </a:r>
             <a:endParaRPr lang="en-US" sz="1000" dirty="0"/>
           </a:p>

--- a/review/Review1_GaN_Segmented_Gate_Driver.pptx
+++ b/review/Review1_GaN_Segmented_Gate_Driver.pptx
@@ -20,6 +20,7 @@
     <p:sldId id="279" r:id="rId30"/>
     <p:sldId id="277" r:id="rId28"/>
     <p:sldId id="278" r:id="rId29"/>
+    <p:sldId id="282" r:id="rId33"/>
     <p:sldId id="262" r:id="rId8"/>
     <p:sldId id="272" r:id="rId23"/>
     <p:sldId id="273" r:id="rId24"/>
@@ -2461,7 +2462,7 @@
                 <a:ea typeface="Calibri" pitchFamily="34" charset="-122"/>
                 <a:cs typeface="Calibri" pitchFamily="34" charset="-120"/>
               </a:rPr>
-              <a:t>14</a:t>
+              <a:t>15</a:t>
             </a:r>
             <a:endParaRPr lang="en-US" sz="1000" dirty="0"/>
           </a:p>
@@ -2866,7 +2867,7 @@
                 <a:ea typeface="Calibri" pitchFamily="34" charset="-122"/>
                 <a:cs typeface="Calibri" pitchFamily="34" charset="-120"/>
               </a:rPr>
-              <a:t>15</a:t>
+              <a:t>16</a:t>
             </a:r>
             <a:endParaRPr lang="en-US" sz="1000" dirty="0"/>
           </a:p>
@@ -3267,7 +3268,7 @@
                 <a:ea typeface="Calibri" pitchFamily="34" charset="-122"/>
                 <a:cs typeface="Calibri" pitchFamily="34" charset="-120"/>
               </a:rPr>
-              <a:t>16</a:t>
+              <a:t>17</a:t>
             </a:r>
             <a:endParaRPr lang="en-US" sz="1000" dirty="0"/>
           </a:p>
@@ -3783,7 +3784,7 @@
                 <a:ea typeface="Calibri" pitchFamily="34" charset="-122"/>
                 <a:cs typeface="Calibri" pitchFamily="34" charset="-120"/>
               </a:rPr>
-              <a:t>18</a:t>
+              <a:t>19</a:t>
             </a:r>
             <a:endParaRPr lang="en-US" sz="1000" dirty="0"/>
           </a:p>
@@ -4314,7 +4315,7 @@
                 <a:ea typeface="Calibri" pitchFamily="34" charset="-122"/>
                 <a:cs typeface="Calibri" pitchFamily="34" charset="-120"/>
               </a:rPr>
-              <a:t>19</a:t>
+              <a:t>20</a:t>
             </a:r>
             <a:endParaRPr lang="en-US" sz="1000" dirty="0"/>
           </a:p>
@@ -5118,7 +5119,7 @@
                 <a:ea typeface="Calibri" pitchFamily="34" charset="-122"/>
                 <a:cs typeface="Calibri" pitchFamily="34" charset="-120"/>
               </a:rPr>
-              <a:t>20</a:t>
+              <a:t>21</a:t>
             </a:r>
             <a:endParaRPr lang="en-US" sz="1000" dirty="0"/>
           </a:p>
@@ -5364,7 +5365,7 @@
                 <a:ea typeface="Calibri" pitchFamily="34" charset="-122"/>
                 <a:cs typeface="Calibri" pitchFamily="34" charset="-120"/>
               </a:rPr>
-              <a:t>21</a:t>
+              <a:t>22</a:t>
             </a:r>
             <a:endParaRPr lang="en-US" sz="1000" dirty="0"/>
           </a:p>
@@ -7343,7 +7344,7 @@
                 <a:ea typeface="Calibri" pitchFamily="34" charset="-122"/>
                 <a:cs typeface="Calibri" pitchFamily="34" charset="-120"/>
               </a:rPr>
-              <a:t>22</a:t>
+              <a:t>23</a:t>
             </a:r>
             <a:endParaRPr lang="en-US" sz="1000" dirty="0"/>
           </a:p>
@@ -7785,7 +7786,7 @@
                 <a:ea typeface="Calibri" pitchFamily="34" charset="-122"/>
                 <a:cs typeface="Calibri" pitchFamily="34" charset="-120"/>
               </a:rPr>
-              <a:t>23</a:t>
+              <a:t>24</a:t>
             </a:r>
             <a:endParaRPr lang="en-US" sz="1000" dirty="0"/>
           </a:p>
@@ -8306,7 +8307,7 @@
                 <a:ea typeface="Calibri" pitchFamily="34" charset="-122"/>
                 <a:cs typeface="Calibri" pitchFamily="34" charset="-120"/>
               </a:rPr>
-              <a:t>24</a:t>
+              <a:t>25</a:t>
             </a:r>
             <a:endParaRPr lang="en-US" sz="1000" dirty="0"/>
           </a:p>
@@ -9599,7 +9600,7 @@
                 <a:ea typeface="Calibri" pitchFamily="34" charset="-122"/>
                 <a:cs typeface="Calibri" pitchFamily="34" charset="-120"/>
               </a:rPr>
-              <a:t>25</a:t>
+              <a:t>26</a:t>
             </a:r>
             <a:endParaRPr lang="en-US" sz="1000" dirty="0"/>
           </a:p>
@@ -10063,7 +10064,7 @@
                 <a:ea typeface="Calibri" pitchFamily="34" charset="-122"/>
                 <a:cs typeface="Calibri" pitchFamily="34" charset="-120"/>
               </a:rPr>
-              <a:t xml:space="preserve">Takayama &amp; Hikihara, “Digital Active Gate Drive of SiC MOSFETs for Controlling Switching Behavior — Preparation Toward Universal Digitization of Power Switching,” Int. J. Circuit Theory Appl., vol. 50, no. 1, pp. 183–196, 2022, doi: 10.1002/cta.3136.  [author list and page range: Xplore “Cite This”]</a:t>
+              <a:t xml:space="preserve">H. Takayama, T. Okuda &amp; T. Hikihara, “Digital Active Gate Drive of SiC MOSFETs for Controlling Switching Behavior — Preparation Toward Universal Digitization of Power Switching,” Int. J. Circuit Theory Appl., vol. 50, no. 1, pp. 183–196, 2022, doi: 10.1002/cta.3136.  [author list and page range: Xplore “Cite This”]</a:t>
             </a:r>
             <a:r>
               <a:rPr lang="en-US" sz="900" b="1" dirty="0">
@@ -10397,7 +10398,7 @@
                 <a:ea typeface="Calibri" pitchFamily="34" charset="-122"/>
                 <a:cs typeface="Calibri" pitchFamily="34" charset="-120"/>
               </a:rPr>
-              <a:t>26</a:t>
+              <a:t>27</a:t>
             </a:r>
             <a:endParaRPr lang="en-US" sz="1000" dirty="0"/>
           </a:p>
@@ -13419,7 +13420,7 @@
                 <a:ea typeface="Calibri" pitchFamily="34" charset="-122"/>
                 <a:cs typeface="Calibri" pitchFamily="34" charset="-120"/>
               </a:rPr>
-              <a:t>17</a:t>
+              <a:t>18</a:t>
             </a:r>
             <a:endParaRPr lang="en-US" sz="1000" dirty="0"/>
           </a:p>
@@ -14383,6 +14384,800 @@
                 <a:cs typeface="Calibri" pitchFamily="34" charset="-120"/>
               </a:rPr>
               <a:t xml:space="preserve">720 control words × 4 corners, exhaustively, in ngspice — then report the two numbers separately instead of their sum.</a:t>
+            </a:r>
+          </a:p>
+        </p:txBody>
+      </p:sp>
+    </p:spTree>
+  </p:cSld>
+  <p:clrMapOvr>
+    <a:masterClrMapping/>
+  </p:clrMapOvr>
+</p:sld>
+</file>
+
+<file path=ppt/slides/slide27.xml><?xml version="1.0" encoding="utf-8"?>
+<p:sld xmlns:a="http://schemas.openxmlformats.org/drawingml/2006/main" xmlns:p="http://schemas.openxmlformats.org/presentationml/2006/main" xmlns:r="http://schemas.openxmlformats.org/officeDocument/2006/relationships">
+  <p:cSld>
+    <p:spTree>
+      <p:nvGrpSpPr>
+        <p:cNvPr id="1" name=""/>
+        <p:cNvGrpSpPr/>
+        <p:nvPr/>
+      </p:nvGrpSpPr>
+      <p:grpSpPr/>
+      <p:pic>
+        <p:nvPicPr>
+          <p:cNvPr id="3" name="Image 0" descr="logo.png"/>
+          <p:cNvPicPr>
+            <a:picLocks noChangeAspect="1"/>
+          </p:cNvPicPr>
+          <p:nvPr/>
+        </p:nvPicPr>
+        <p:blipFill>
+          <a:blip r:embed="rId2"/>
+          <a:stretch>
+            <a:fillRect/>
+          </a:stretch>
+        </p:blipFill>
+        <p:spPr>
+          <a:xfrm>
+            <a:off x="10362895" y="320040"/>
+            <a:ext cx="1371600" cy="518746"/>
+          </a:xfrm>
+          <a:prstGeom prst="rect">
+            <a:avLst/>
+          </a:prstGeom>
+        </p:spPr>
+      </p:pic>
+      <p:sp>
+        <p:nvSpPr>
+          <p:cNvPr id="4" name="TextBox 3"/>
+          <p:cNvSpPr txBox="1"/>
+          <p:nvPr/>
+        </p:nvSpPr>
+        <p:spPr>
+          <a:xfrm>
+            <a:off x="548640" y="320040"/>
+            <a:ext cx="9601200" cy="685800"/>
+          </a:xfrm>
+          <a:prstGeom prst="rect">
+            <a:avLst/>
+          </a:prstGeom>
+          <a:noFill/>
+        </p:spPr>
+        <p:txBody>
+          <a:bodyPr wrap="square" lIns="0" tIns="0" rIns="0" bIns="0">
+            <a:spAutoFit/>
+          </a:bodyPr>
+          <a:lstStyle/>
+          <a:p>
+            <a:pPr marL="177800" indent="0">
+              <a:spcAft>
+                <a:spcPts val="0"/>
+              </a:spcAft>
+              <a:buSzPct val="100000"/>
+              <a:buNone/>
+            </a:pPr>
+            <a:r>
+              <a:rPr lang="en-US" sz="2800" b="1" dirty="0">
+                <a:solidFill>
+                  <a:srgbClr val="000000"/>
+                </a:solidFill>
+                <a:latin typeface="Calibri" pitchFamily="34" charset="0"/>
+                <a:ea typeface="Calibri" pitchFamily="34" charset="-122"/>
+                <a:cs typeface="Calibri" pitchFamily="34" charset="-120"/>
+              </a:rPr>
+              <a:t xml:space="preserve">We implemented the base paper, then ours</a:t>
+            </a:r>
+          </a:p>
+        </p:txBody>
+      </p:sp>
+      <p:sp>
+        <p:nvSpPr>
+          <p:cNvPr id="5" name="TextBox 4"/>
+          <p:cNvSpPr txBox="1"/>
+          <p:nvPr/>
+        </p:nvSpPr>
+        <p:spPr>
+          <a:xfrm>
+            <a:off x="11457432" y="6446520"/>
+            <a:ext cx="457200" cy="274320"/>
+          </a:xfrm>
+          <a:prstGeom prst="rect">
+            <a:avLst/>
+          </a:prstGeom>
+          <a:noFill/>
+        </p:spPr>
+        <p:txBody>
+          <a:bodyPr wrap="square" lIns="0" tIns="0" rIns="0" bIns="0">
+            <a:spAutoFit/>
+          </a:bodyPr>
+          <a:lstStyle/>
+          <a:p>
+            <a:pPr marL="177800" indent="0">
+              <a:spcAft>
+                <a:spcPts val="0"/>
+              </a:spcAft>
+              <a:buSzPct val="100000"/>
+              <a:buNone/>
+            </a:pPr>
+            <a:r>
+              <a:rPr lang="en-US" sz="1100" dirty="0">
+                <a:solidFill>
+                  <a:srgbClr val="000000"/>
+                </a:solidFill>
+                <a:latin typeface="Calibri" pitchFamily="34" charset="0"/>
+                <a:ea typeface="Calibri" pitchFamily="34" charset="-122"/>
+                <a:cs typeface="Calibri" pitchFamily="34" charset="-120"/>
+              </a:rPr>
+              <a:t xml:space="preserve">13</a:t>
+            </a:r>
+          </a:p>
+        </p:txBody>
+      </p:sp>
+      <p:sp>
+        <p:nvSpPr>
+          <p:cNvPr id="6" name="TextBox 5"/>
+          <p:cNvSpPr txBox="1"/>
+          <p:nvPr/>
+        </p:nvSpPr>
+        <p:spPr>
+          <a:xfrm>
+            <a:off x="640080" y="1207008"/>
+            <a:ext cx="11064240" cy="868680"/>
+          </a:xfrm>
+          <a:prstGeom prst="rect">
+            <a:avLst/>
+          </a:prstGeom>
+          <a:noFill/>
+        </p:spPr>
+        <p:txBody>
+          <a:bodyPr wrap="square" lIns="0" tIns="0" rIns="0" bIns="0">
+            <a:spAutoFit/>
+          </a:bodyPr>
+          <a:lstStyle/>
+          <a:p>
+            <a:pPr marL="177800" indent="0">
+              <a:spcAft>
+                <a:spcPts val="0"/>
+              </a:spcAft>
+              <a:buSzPct val="100000"/>
+              <a:buNone/>
+            </a:pPr>
+            <a:r>
+              <a:rPr lang="en-US" sz="1250" b="1" dirty="0">
+                <a:solidFill>
+                  <a:srgbClr val="000000"/>
+                </a:solidFill>
+                <a:latin typeface="Calibri" pitchFamily="34" charset="0"/>
+                <a:ea typeface="Calibri" pitchFamily="34" charset="-122"/>
+                <a:cs typeface="Calibri" pitchFamily="34" charset="-120"/>
+              </a:rPr>
+              <a:t xml:space="preserve">Citing a base paper is not a comparison. </a:t>
+            </a:r>
+            <a:r>
+              <a:rPr lang="en-US" sz="1250" dirty="0">
+                <a:solidFill>
+                  <a:srgbClr val="000000"/>
+                </a:solidFill>
+                <a:latin typeface="Calibri" pitchFamily="34" charset="0"/>
+                <a:ea typeface="Calibri" pitchFamily="34" charset="-122"/>
+                <a:cs typeface="Calibri" pitchFamily="34" charset="-120"/>
+              </a:rPr>
+              <a:t xml:space="preserve">models/basedrv.lib implements Takayama, Okuda &amp; Hikihara's DAC-architecture driver — a multibit code that changes DURING the switching edge, with no Miller clamp and no negative off-bias rail, because those are ours. It runs inside sim/dpt.cir, byte-identical otherwise, so only the driver differs.</a:t>
+            </a:r>
+          </a:p>
+        </p:txBody>
+      </p:sp>
+      <p:sp>
+        <p:nvSpPr>
+          <p:cNvPr id="7" name="TextBox 6"/>
+          <p:cNvSpPr txBox="1"/>
+          <p:nvPr/>
+        </p:nvSpPr>
+        <p:spPr>
+          <a:xfrm>
+            <a:off x="640080" y="2395728"/>
+            <a:ext cx="3566160" cy="530352"/>
+          </a:xfrm>
+          <a:prstGeom prst="rect">
+            <a:avLst/>
+          </a:prstGeom>
+          <a:noFill/>
+        </p:spPr>
+        <p:txBody>
+          <a:bodyPr wrap="square" lIns="0" tIns="0" rIns="0" bIns="0">
+            <a:spAutoFit/>
+          </a:bodyPr>
+          <a:lstStyle/>
+          <a:p>
+            <a:pPr marL="177800" indent="0">
+              <a:spcAft>
+                <a:spcPts val="0"/>
+              </a:spcAft>
+              <a:buSzPct val="100000"/>
+              <a:buNone/>
+            </a:pPr>
+            <a:r>
+              <a:rPr lang="en-US" sz="1300" dirty="0">
+                <a:solidFill>
+                  <a:srgbClr val="000000"/>
+                </a:solidFill>
+                <a:latin typeface="Calibri" pitchFamily="34" charset="0"/>
+                <a:ea typeface="Calibri" pitchFamily="34" charset="-122"/>
+                <a:cs typeface="Calibri" pitchFamily="34" charset="-120"/>
+              </a:rPr>
+              <a:t xml:space="preserve">Base paper, as we built it</a:t>
+            </a:r>
+          </a:p>
+        </p:txBody>
+      </p:sp>
+      <p:sp>
+        <p:nvSpPr>
+          <p:cNvPr id="8" name="TextBox 7"/>
+          <p:cNvSpPr txBox="1"/>
+          <p:nvPr/>
+        </p:nvSpPr>
+        <p:spPr>
+          <a:xfrm>
+            <a:off x="4343400" y="2340864"/>
+            <a:ext cx="1417320" cy="438912"/>
+          </a:xfrm>
+          <a:prstGeom prst="rect">
+            <a:avLst/>
+          </a:prstGeom>
+          <a:noFill/>
+        </p:spPr>
+        <p:txBody>
+          <a:bodyPr wrap="square" lIns="0" tIns="0" rIns="0" bIns="0">
+            <a:spAutoFit/>
+          </a:bodyPr>
+          <a:lstStyle/>
+          <a:p>
+            <a:pPr marL="177800" indent="0">
+              <a:spcAft>
+                <a:spcPts val="0"/>
+              </a:spcAft>
+              <a:buSzPct val="100000"/>
+              <a:buNone/>
+            </a:pPr>
+            <a:r>
+              <a:rPr lang="en-US" sz="1700" b="1" dirty="0">
+                <a:solidFill>
+                  <a:srgbClr val="000000"/>
+                </a:solidFill>
+                <a:latin typeface="Calibri" pitchFamily="34" charset="0"/>
+                <a:ea typeface="Calibri" pitchFamily="34" charset="-122"/>
+                <a:cs typeface="Calibri" pitchFamily="34" charset="-120"/>
+              </a:rPr>
+              <a:t xml:space="preserve">+0.533 V</a:t>
+            </a:r>
+          </a:p>
+        </p:txBody>
+      </p:sp>
+      <p:sp>
+        <p:nvSpPr>
+          <p:cNvPr id="9" name="TextBox 8"/>
+          <p:cNvSpPr txBox="1"/>
+          <p:nvPr/>
+        </p:nvSpPr>
+        <p:spPr>
+          <a:xfrm>
+            <a:off x="5943600" y="2395728"/>
+            <a:ext cx="5577840" cy="548640"/>
+          </a:xfrm>
+          <a:prstGeom prst="rect">
+            <a:avLst/>
+          </a:prstGeom>
+          <a:noFill/>
+        </p:spPr>
+        <p:txBody>
+          <a:bodyPr wrap="square" lIns="0" tIns="0" rIns="0" bIns="0">
+            <a:spAutoFit/>
+          </a:bodyPr>
+          <a:lstStyle/>
+          <a:p>
+            <a:pPr marL="177800" indent="0">
+              <a:spcAft>
+                <a:spcPts val="0"/>
+              </a:spcAft>
+              <a:buSzPct val="100000"/>
+              <a:buNone/>
+            </a:pPr>
+            <a:r>
+              <a:rPr lang="en-US" sz="1150" dirty="0">
+                <a:solidFill>
+                  <a:srgbClr val="000000"/>
+                </a:solidFill>
+                <a:latin typeface="Calibri" pitchFamily="34" charset="0"/>
+                <a:ea typeface="Calibri" pitchFamily="34" charset="-122"/>
+                <a:cs typeface="Calibri" pitchFamily="34" charset="-120"/>
+              </a:rPr>
+              <a:t xml:space="preserve">Their time-sequenced multibit code alone already clears the 1.4 V threshold.</a:t>
+            </a:r>
+          </a:p>
+        </p:txBody>
+      </p:sp>
+      <p:sp>
+        <p:nvSpPr>
+          <p:cNvPr id="10" name="TextBox 9"/>
+          <p:cNvSpPr txBox="1"/>
+          <p:nvPr/>
+        </p:nvSpPr>
+        <p:spPr>
+          <a:xfrm>
+            <a:off x="640080" y="3035808"/>
+            <a:ext cx="3566160" cy="530352"/>
+          </a:xfrm>
+          <a:prstGeom prst="rect">
+            <a:avLst/>
+          </a:prstGeom>
+          <a:noFill/>
+        </p:spPr>
+        <p:txBody>
+          <a:bodyPr wrap="square" lIns="0" tIns="0" rIns="0" bIns="0">
+            <a:spAutoFit/>
+          </a:bodyPr>
+          <a:lstStyle/>
+          <a:p>
+            <a:pPr marL="177800" indent="0">
+              <a:spcAft>
+                <a:spcPts val="0"/>
+              </a:spcAft>
+              <a:buSzPct val="100000"/>
+              <a:buNone/>
+            </a:pPr>
+            <a:r>
+              <a:rPr lang="en-US" sz="1300" dirty="0">
+                <a:solidFill>
+                  <a:srgbClr val="000000"/>
+                </a:solidFill>
+                <a:latin typeface="Calibri" pitchFamily="34" charset="0"/>
+                <a:ea typeface="Calibri" pitchFamily="34" charset="-122"/>
+                <a:cs typeface="Calibri" pitchFamily="34" charset="-120"/>
+              </a:rPr>
+              <a:t xml:space="preserve">Ours, constant code, no clamp</a:t>
+            </a:r>
+          </a:p>
+        </p:txBody>
+      </p:sp>
+      <p:sp>
+        <p:nvSpPr>
+          <p:cNvPr id="11" name="TextBox 10"/>
+          <p:cNvSpPr txBox="1"/>
+          <p:nvPr/>
+        </p:nvSpPr>
+        <p:spPr>
+          <a:xfrm>
+            <a:off x="4343400" y="2980944"/>
+            <a:ext cx="1417320" cy="438912"/>
+          </a:xfrm>
+          <a:prstGeom prst="rect">
+            <a:avLst/>
+          </a:prstGeom>
+          <a:noFill/>
+        </p:spPr>
+        <p:txBody>
+          <a:bodyPr wrap="square" lIns="0" tIns="0" rIns="0" bIns="0">
+            <a:spAutoFit/>
+          </a:bodyPr>
+          <a:lstStyle/>
+          <a:p>
+            <a:pPr marL="177800" indent="0">
+              <a:spcAft>
+                <a:spcPts val="0"/>
+              </a:spcAft>
+              <a:buSzPct val="100000"/>
+              <a:buNone/>
+            </a:pPr>
+            <a:r>
+              <a:rPr lang="en-US" sz="1700" b="1" dirty="0">
+                <a:solidFill>
+                  <a:srgbClr val="000000"/>
+                </a:solidFill>
+                <a:latin typeface="Calibri" pitchFamily="34" charset="0"/>
+                <a:ea typeface="Calibri" pitchFamily="34" charset="-122"/>
+                <a:cs typeface="Calibri" pitchFamily="34" charset="-120"/>
+              </a:rPr>
+              <a:t xml:space="preserve">−0.249 V</a:t>
+            </a:r>
+          </a:p>
+        </p:txBody>
+      </p:sp>
+      <p:sp>
+        <p:nvSpPr>
+          <p:cNvPr id="12" name="TextBox 11"/>
+          <p:cNvSpPr txBox="1"/>
+          <p:nvPr/>
+        </p:nvSpPr>
+        <p:spPr>
+          <a:xfrm>
+            <a:off x="5943600" y="3035808"/>
+            <a:ext cx="5577840" cy="548640"/>
+          </a:xfrm>
+          <a:prstGeom prst="rect">
+            <a:avLst/>
+          </a:prstGeom>
+          <a:noFill/>
+        </p:spPr>
+        <p:txBody>
+          <a:bodyPr wrap="square" lIns="0" tIns="0" rIns="0" bIns="0">
+            <a:spAutoFit/>
+          </a:bodyPr>
+          <a:lstStyle/>
+          <a:p>
+            <a:pPr marL="177800" indent="0">
+              <a:spcAft>
+                <a:spcPts val="0"/>
+              </a:spcAft>
+              <a:buSzPct val="100000"/>
+              <a:buNone/>
+            </a:pPr>
+            <a:r>
+              <a:rPr lang="en-US" sz="1150" dirty="0">
+                <a:solidFill>
+                  <a:srgbClr val="000000"/>
+                </a:solidFill>
+                <a:latin typeface="Calibri" pitchFamily="34" charset="0"/>
+                <a:ea typeface="Calibri" pitchFamily="34" charset="-122"/>
+                <a:cs typeface="Calibri" pitchFamily="34" charset="-120"/>
+              </a:rPr>
+              <a:t xml:space="preserve">FALSE TURN-ON. A fast FIXED code is worse than their sequenced one — their contribution is real, and we reproduce it.</a:t>
+            </a:r>
+          </a:p>
+        </p:txBody>
+      </p:sp>
+      <p:sp>
+        <p:nvSpPr>
+          <p:cNvPr id="13" name="TextBox 12"/>
+          <p:cNvSpPr txBox="1"/>
+          <p:nvPr/>
+        </p:nvSpPr>
+        <p:spPr>
+          <a:xfrm>
+            <a:off x="640080" y="3675887"/>
+            <a:ext cx="3566160" cy="530352"/>
+          </a:xfrm>
+          <a:prstGeom prst="rect">
+            <a:avLst/>
+          </a:prstGeom>
+          <a:noFill/>
+        </p:spPr>
+        <p:txBody>
+          <a:bodyPr wrap="square" lIns="0" tIns="0" rIns="0" bIns="0">
+            <a:spAutoFit/>
+          </a:bodyPr>
+          <a:lstStyle/>
+          <a:p>
+            <a:pPr marL="177800" indent="0">
+              <a:spcAft>
+                <a:spcPts val="0"/>
+              </a:spcAft>
+              <a:buSzPct val="100000"/>
+              <a:buNone/>
+            </a:pPr>
+            <a:r>
+              <a:rPr lang="en-US" sz="1300" dirty="0">
+                <a:solidFill>
+                  <a:srgbClr val="000000"/>
+                </a:solidFill>
+                <a:latin typeface="Calibri" pitchFamily="34" charset="0"/>
+                <a:ea typeface="Calibri" pitchFamily="34" charset="-122"/>
+                <a:cs typeface="Calibri" pitchFamily="34" charset="-120"/>
+              </a:rPr>
+              <a:t xml:space="preserve">Ours, active Miller clamp on</a:t>
+            </a:r>
+          </a:p>
+        </p:txBody>
+      </p:sp>
+      <p:sp>
+        <p:nvSpPr>
+          <p:cNvPr id="14" name="TextBox 13"/>
+          <p:cNvSpPr txBox="1"/>
+          <p:nvPr/>
+        </p:nvSpPr>
+        <p:spPr>
+          <a:xfrm>
+            <a:off x="4343400" y="3621023"/>
+            <a:ext cx="1417320" cy="438912"/>
+          </a:xfrm>
+          <a:prstGeom prst="rect">
+            <a:avLst/>
+          </a:prstGeom>
+          <a:noFill/>
+        </p:spPr>
+        <p:txBody>
+          <a:bodyPr wrap="square" lIns="0" tIns="0" rIns="0" bIns="0">
+            <a:spAutoFit/>
+          </a:bodyPr>
+          <a:lstStyle/>
+          <a:p>
+            <a:pPr marL="177800" indent="0">
+              <a:spcAft>
+                <a:spcPts val="0"/>
+              </a:spcAft>
+              <a:buSzPct val="100000"/>
+              <a:buNone/>
+            </a:pPr>
+            <a:r>
+              <a:rPr lang="en-US" sz="1700" b="1" dirty="0">
+                <a:solidFill>
+                  <a:srgbClr val="000000"/>
+                </a:solidFill>
+                <a:latin typeface="Calibri" pitchFamily="34" charset="0"/>
+                <a:ea typeface="Calibri" pitchFamily="34" charset="-122"/>
+                <a:cs typeface="Calibri" pitchFamily="34" charset="-120"/>
+              </a:rPr>
+              <a:t xml:space="preserve">+0.570 V</a:t>
+            </a:r>
+          </a:p>
+        </p:txBody>
+      </p:sp>
+      <p:sp>
+        <p:nvSpPr>
+          <p:cNvPr id="15" name="TextBox 14"/>
+          <p:cNvSpPr txBox="1"/>
+          <p:nvPr/>
+        </p:nvSpPr>
+        <p:spPr>
+          <a:xfrm>
+            <a:off x="5943600" y="3675887"/>
+            <a:ext cx="5577840" cy="548640"/>
+          </a:xfrm>
+          <a:prstGeom prst="rect">
+            <a:avLst/>
+          </a:prstGeom>
+          <a:noFill/>
+        </p:spPr>
+        <p:txBody>
+          <a:bodyPr wrap="square" lIns="0" tIns="0" rIns="0" bIns="0">
+            <a:spAutoFit/>
+          </a:bodyPr>
+          <a:lstStyle/>
+          <a:p>
+            <a:pPr marL="177800" indent="0">
+              <a:spcAft>
+                <a:spcPts val="0"/>
+              </a:spcAft>
+              <a:buSzPct val="100000"/>
+              <a:buNone/>
+            </a:pPr>
+            <a:r>
+              <a:rPr lang="en-US" sz="1150" dirty="0">
+                <a:solidFill>
+                  <a:srgbClr val="000000"/>
+                </a:solidFill>
+                <a:latin typeface="Calibri" pitchFamily="34" charset="0"/>
+                <a:ea typeface="Calibri" pitchFamily="34" charset="-122"/>
+                <a:cs typeface="Calibri" pitchFamily="34" charset="-120"/>
+              </a:rPr>
+              <a:t xml:space="preserve">Only marginally past the base paper. The clamp alone is not the story.</a:t>
+            </a:r>
+          </a:p>
+        </p:txBody>
+      </p:sp>
+      <p:sp>
+        <p:nvSpPr>
+          <p:cNvPr id="16" name="TextBox 15"/>
+          <p:cNvSpPr txBox="1"/>
+          <p:nvPr/>
+        </p:nvSpPr>
+        <p:spPr>
+          <a:xfrm>
+            <a:off x="640080" y="4315968"/>
+            <a:ext cx="3566160" cy="530352"/>
+          </a:xfrm>
+          <a:prstGeom prst="rect">
+            <a:avLst/>
+          </a:prstGeom>
+          <a:noFill/>
+        </p:spPr>
+        <p:txBody>
+          <a:bodyPr wrap="square" lIns="0" tIns="0" rIns="0" bIns="0">
+            <a:spAutoFit/>
+          </a:bodyPr>
+          <a:lstStyle/>
+          <a:p>
+            <a:pPr marL="177800" indent="0">
+              <a:spcAft>
+                <a:spcPts val="0"/>
+              </a:spcAft>
+              <a:buSzPct val="100000"/>
+              <a:buNone/>
+            </a:pPr>
+            <a:r>
+              <a:rPr lang="en-US" sz="1300" b="1" dirty="0">
+                <a:solidFill>
+                  <a:srgbClr val="000000"/>
+                </a:solidFill>
+                <a:latin typeface="Calibri" pitchFamily="34" charset="0"/>
+                <a:ea typeface="Calibri" pitchFamily="34" charset="-122"/>
+                <a:cs typeface="Calibri" pitchFamily="34" charset="-120"/>
+              </a:rPr>
+              <a:t xml:space="preserve">Ours, clamp + −2 V off-bias</a:t>
+            </a:r>
+          </a:p>
+        </p:txBody>
+      </p:sp>
+      <p:sp>
+        <p:nvSpPr>
+          <p:cNvPr id="17" name="TextBox 16"/>
+          <p:cNvSpPr txBox="1"/>
+          <p:nvPr/>
+        </p:nvSpPr>
+        <p:spPr>
+          <a:xfrm>
+            <a:off x="4343400" y="4261104"/>
+            <a:ext cx="1417320" cy="438912"/>
+          </a:xfrm>
+          <a:prstGeom prst="rect">
+            <a:avLst/>
+          </a:prstGeom>
+          <a:noFill/>
+        </p:spPr>
+        <p:txBody>
+          <a:bodyPr wrap="square" lIns="0" tIns="0" rIns="0" bIns="0">
+            <a:spAutoFit/>
+          </a:bodyPr>
+          <a:lstStyle/>
+          <a:p>
+            <a:pPr marL="177800" indent="0">
+              <a:spcAft>
+                <a:spcPts val="0"/>
+              </a:spcAft>
+              <a:buSzPct val="100000"/>
+              <a:buNone/>
+            </a:pPr>
+            <a:r>
+              <a:rPr lang="en-US" sz="1700" b="1" dirty="0">
+                <a:solidFill>
+                  <a:srgbClr val="000000"/>
+                </a:solidFill>
+                <a:latin typeface="Calibri" pitchFamily="34" charset="0"/>
+                <a:ea typeface="Calibri" pitchFamily="34" charset="-122"/>
+                <a:cs typeface="Calibri" pitchFamily="34" charset="-120"/>
+              </a:rPr>
+              <a:t xml:space="preserve">+2.576 V</a:t>
+            </a:r>
+          </a:p>
+        </p:txBody>
+      </p:sp>
+      <p:sp>
+        <p:nvSpPr>
+          <p:cNvPr id="18" name="TextBox 17"/>
+          <p:cNvSpPr txBox="1"/>
+          <p:nvPr/>
+        </p:nvSpPr>
+        <p:spPr>
+          <a:xfrm>
+            <a:off x="5943600" y="4315968"/>
+            <a:ext cx="5577840" cy="548640"/>
+          </a:xfrm>
+          <a:prstGeom prst="rect">
+            <a:avLst/>
+          </a:prstGeom>
+          <a:noFill/>
+        </p:spPr>
+        <p:txBody>
+          <a:bodyPr wrap="square" lIns="0" tIns="0" rIns="0" bIns="0">
+            <a:spAutoFit/>
+          </a:bodyPr>
+          <a:lstStyle/>
+          <a:p>
+            <a:pPr marL="177800" indent="0">
+              <a:spcAft>
+                <a:spcPts val="0"/>
+              </a:spcAft>
+              <a:buSzPct val="100000"/>
+              <a:buNone/>
+            </a:pPr>
+            <a:r>
+              <a:rPr lang="en-US" sz="1150" dirty="0">
+                <a:solidFill>
+                  <a:srgbClr val="000000"/>
+                </a:solidFill>
+                <a:latin typeface="Calibri" pitchFamily="34" charset="0"/>
+                <a:ea typeface="Calibri" pitchFamily="34" charset="-122"/>
+                <a:cs typeface="Calibri" pitchFamily="34" charset="-120"/>
+              </a:rPr>
+              <a:t xml:space="preserve">4.8× the base paper's margin. This is the shipped configuration.</a:t>
+            </a:r>
+          </a:p>
+        </p:txBody>
+      </p:sp>
+      <p:sp>
+        <p:nvSpPr>
+          <p:cNvPr id="19" name="TextBox 18"/>
+          <p:cNvSpPr txBox="1"/>
+          <p:nvPr/>
+        </p:nvSpPr>
+        <p:spPr>
+          <a:xfrm>
+            <a:off x="640080" y="5138928"/>
+            <a:ext cx="11064240" cy="1234440"/>
+          </a:xfrm>
+          <a:prstGeom prst="rect">
+            <a:avLst/>
+          </a:prstGeom>
+          <a:noFill/>
+        </p:spPr>
+        <p:txBody>
+          <a:bodyPr wrap="square" lIns="0" tIns="0" rIns="0" bIns="0">
+            <a:spAutoFit/>
+          </a:bodyPr>
+          <a:lstStyle/>
+          <a:p>
+            <a:pPr marL="177800" indent="0">
+              <a:spcAft>
+                <a:spcPts val="150"/>
+              </a:spcAft>
+              <a:buSzPct val="100000"/>
+              <a:buNone/>
+            </a:pPr>
+            <a:r>
+              <a:rPr lang="en-US" sz="1250" b="1" dirty="0">
+                <a:solidFill>
+                  <a:srgbClr val="000000"/>
+                </a:solidFill>
+                <a:latin typeface="Calibri" pitchFamily="34" charset="0"/>
+                <a:ea typeface="Calibri" pitchFamily="34" charset="-122"/>
+                <a:cs typeface="Calibri" pitchFamily="34" charset="-120"/>
+              </a:rPr>
+              <a:t xml:space="preserve">What the comparison shows. </a:t>
+            </a:r>
+            <a:r>
+              <a:rPr lang="en-US" sz="1250" dirty="0">
+                <a:solidFill>
+                  <a:srgbClr val="000000"/>
+                </a:solidFill>
+                <a:latin typeface="Calibri" pitchFamily="34" charset="0"/>
+                <a:ea typeface="Calibri" pitchFamily="34" charset="-122"/>
+                <a:cs typeface="Calibri" pitchFamily="34" charset="-120"/>
+              </a:rPr>
+              <a:t xml:space="preserve">The base paper shapes the gate waveform in TIME; we hold the code constant and add two actuators it does not have. Both clear the threshold — theirs works — but ours clears it by 4.8× more, and ours is the one whose settings can then be searched exhaustively to ask what adaptation is actually worth.</a:t>
+            </a:r>
+          </a:p>
+          <a:p>
+            <a:pPr marL="177800" indent="0">
+              <a:spcAft>
+                <a:spcPts val="0"/>
+              </a:spcAft>
+              <a:buSzPct val="100000"/>
+              <a:buNone/>
+            </a:pPr>
+            <a:r>
+              <a:rPr lang="en-US" sz="1150" b="1" dirty="0">
+                <a:solidFill>
+                  <a:srgbClr val="000000"/>
+                </a:solidFill>
+                <a:latin typeface="Calibri" pitchFamily="34" charset="0"/>
+                <a:ea typeface="Calibri" pitchFamily="34" charset="-122"/>
+                <a:cs typeface="Calibri" pitchFamily="34" charset="-120"/>
+              </a:rPr>
+              <a:t xml:space="preserve">Reproduce: </a:t>
+            </a:r>
+            <a:r>
+              <a:rPr lang="en-US" sz="1150" b="1" dirty="0">
+                <a:solidFill>
+                  <a:srgbClr val="000000"/>
+                </a:solidFill>
+                <a:latin typeface="Calibri" pitchFamily="34" charset="0"/>
+                <a:ea typeface="Calibri" pitchFamily="34" charset="-122"/>
+                <a:cs typeface="Calibri" pitchFamily="34" charset="-120"/>
+              </a:rPr>
+              <a:t xml:space="preserve">python3 scripts/basepaper_compare.py</a:t>
+            </a:r>
+            <a:r>
+              <a:rPr lang="en-US" sz="1150" dirty="0">
+                <a:solidFill>
+                  <a:srgbClr val="000000"/>
+                </a:solidFill>
+                <a:latin typeface="Calibri" pitchFamily="34" charset="0"/>
+                <a:ea typeface="Calibri" pitchFamily="34" charset="-122"/>
+                <a:cs typeface="Calibri" pitchFamily="34" charset="-120"/>
+              </a:rPr>
+              <a:t xml:space="preserve">  — four ngspice runs, prints this table.</a:t>
             </a:r>
           </a:p>
         </p:txBody>
@@ -17631,7 +18426,7 @@
                           </a:solidFill>
                           <a:latin typeface="Calibri"/>
                         </a:rPr>
-                        <a:t>Takayama &amp; Hikihara (2022)</a:t>
+                        <a:t>H. Takayama, T. Okuda &amp; T. Hikihara (2022)</a:t>
                       </a:r>
                       <a:endParaRPr lang="en-US" sz="1300" dirty="0">
                         <a:latin typeface="Calibri" charset="0"/>
@@ -20121,7 +20916,7 @@
                 <a:ea typeface="Calibri" pitchFamily="34" charset="-122"/>
                 <a:cs typeface="Calibri" pitchFamily="34" charset="-120"/>
               </a:rPr>
-              <a:t>13</a:t>
+              <a:t>14</a:t>
             </a:r>
             <a:endParaRPr lang="en-US" sz="1000" dirty="0"/>
           </a:p>

--- a/review/Review1_GaN_Segmented_Gate_Driver.pptx
+++ b/review/Review1_GaN_Segmented_Gate_Driver.pptx
@@ -7415,7 +7415,7 @@
       </p:pic>
       <p:pic>
         <p:nvPicPr>
-          <p:cNvPr id="5" name="pipeline_demo_review1.mp4">
+          <p:cNvPr id="5" name="demo_crosstalk_explained.mp4">
             <a:hlinkClick r:id="" action="ppaction://media"/>
           </p:cNvPr>
           <p:cNvPicPr>
@@ -7484,7 +7484,7 @@
                 <a:ea typeface="Calibri" pitchFamily="34" charset="-122"/>
                 <a:cs typeface="Calibri" pitchFamily="34" charset="-120"/>
               </a:rPr>
-              <a:t xml:space="preserve">Click to play (17 s). Real captured output — only the pacing is presentational.</a:t>
+              <a:t xml:space="preserve">Click to play (18 s). Real ngspice waveforms from sim/dpt.cir, run twice — only the pacing and the captions are presentational.</a:t>
             </a:r>
           </a:p>
         </p:txBody>
@@ -7533,147 +7533,147 @@
           <a:p>
             <a:pPr marL="177800" indent="-177800">
               <a:spcAft>
-                <a:spcPts val="180"/>
+                <a:spcPts val="170"/>
               </a:spcAft>
               <a:buSzPct val="100000"/>
               <a:buChar char="•"/>
             </a:pPr>
             <a:r>
-              <a:rPr lang="en-US" sz="1300" dirty="0">
-                <a:solidFill>
-                  <a:srgbClr val="000000"/>
-                </a:solidFill>
-                <a:latin typeface="Calibri" pitchFamily="34" charset="0"/>
-                <a:ea typeface="Calibri" pitchFamily="34" charset="-122"/>
-                <a:cs typeface="Calibri" pitchFamily="34" charset="-120"/>
-              </a:rPr>
-              <a:t xml:space="preserve">ngspice 42 running the real double-pulse test.</a:t>
+              <a:rPr lang="en-US" sz="1250" dirty="0">
+                <a:solidFill>
+                  <a:srgbClr val="000000"/>
+                </a:solidFill>
+                <a:latin typeface="Calibri" pitchFamily="34" charset="0"/>
+                <a:ea typeface="Calibri" pitchFamily="34" charset="-122"/>
+                <a:cs typeface="Calibri" pitchFamily="34" charset="-120"/>
+              </a:rPr>
+              <a:t xml:space="preserve">TOP row: the switch node. The low-side device turns on and V(sw) collapses from 100 V in a few nanoseconds. That slew is the cause.</a:t>
             </a:r>
           </a:p>
           <a:p>
             <a:pPr marL="177800" indent="-177800">
               <a:spcAft>
-                <a:spcPts val="180"/>
+                <a:spcPts val="170"/>
               </a:spcAft>
               <a:buSzPct val="100000"/>
               <a:buChar char="•"/>
             </a:pPr>
             <a:r>
-              <a:rPr lang="en-US" sz="1300" dirty="0">
-                <a:solidFill>
-                  <a:srgbClr val="000000"/>
-                </a:solidFill>
-                <a:latin typeface="Calibri" pitchFamily="34" charset="0"/>
-                <a:ea typeface="Calibri" pitchFamily="34" charset="-122"/>
-                <a:cs typeface="Calibri" pitchFamily="34" charset="-120"/>
-              </a:rPr>
-              <a:t xml:space="preserve">Fastest drive, no clamp: spurious gate 1.649 V, margin </a:t>
-            </a:r>
-            <a:r>
-              <a:rPr lang="en-US" sz="1300" b="1" dirty="0">
-                <a:solidFill>
-                  <a:srgbClr val="000000"/>
-                </a:solidFill>
-                <a:latin typeface="Calibri" pitchFamily="34" charset="0"/>
-                <a:ea typeface="Calibri" pitchFamily="34" charset="-122"/>
-                <a:cs typeface="Calibri" pitchFamily="34" charset="-120"/>
-              </a:rPr>
-              <a:t xml:space="preserve">−0.249 V</a:t>
-            </a:r>
-            <a:r>
-              <a:rPr lang="en-US" sz="1300" dirty="0">
-                <a:solidFill>
-                  <a:srgbClr val="000000"/>
-                </a:solidFill>
-                <a:latin typeface="Calibri" pitchFamily="34" charset="0"/>
-                <a:ea typeface="Calibri" pitchFamily="34" charset="-122"/>
-                <a:cs typeface="Calibri" pitchFamily="34" charset="-120"/>
-              </a:rPr>
-              <a:t xml:space="preserve"> — false turn-on.</a:t>
+              <a:rPr lang="en-US" sz="1250" dirty="0">
+                <a:solidFill>
+                  <a:srgbClr val="000000"/>
+                </a:solidFill>
+                <a:latin typeface="Calibri" pitchFamily="34" charset="0"/>
+                <a:ea typeface="Calibri" pitchFamily="34" charset="-122"/>
+                <a:cs typeface="Calibri" pitchFamily="34" charset="-120"/>
+              </a:rPr>
+              <a:t xml:space="preserve">BOTTOM row: the OFF device's gate. The dV/dt couples through C</a:t>
+            </a:r>
+            <a:r>
+              <a:rPr lang="en-US" sz="1250" dirty="0">
+                <a:solidFill>
+                  <a:srgbClr val="000000"/>
+                </a:solidFill>
+                <a:latin typeface="Calibri" pitchFamily="34" charset="0"/>
+                <a:ea typeface="Calibri" pitchFamily="34" charset="-122"/>
+                <a:cs typeface="Calibri" pitchFamily="34" charset="-120"/>
+              </a:rPr>
+              <a:t xml:space="preserve">GD</a:t>
+            </a:r>
+            <a:r>
+              <a:rPr lang="en-US" sz="1250" dirty="0">
+                <a:solidFill>
+                  <a:srgbClr val="000000"/>
+                </a:solidFill>
+                <a:latin typeface="Calibri" pitchFamily="34" charset="0"/>
+                <a:ea typeface="Calibri" pitchFamily="34" charset="-122"/>
+                <a:cs typeface="Calibri" pitchFamily="34" charset="-120"/>
+              </a:rPr>
+              <a:t xml:space="preserve"> and lifts it.</a:t>
             </a:r>
           </a:p>
           <a:p>
             <a:pPr marL="177800" indent="-177800">
               <a:spcAft>
-                <a:spcPts val="180"/>
+                <a:spcPts val="170"/>
               </a:spcAft>
               <a:buSzPct val="100000"/>
               <a:buChar char="•"/>
             </a:pPr>
             <a:r>
-              <a:rPr lang="en-US" sz="1300" dirty="0">
-                <a:solidFill>
-                  <a:srgbClr val="000000"/>
-                </a:solidFill>
-                <a:latin typeface="Calibri" pitchFamily="34" charset="0"/>
-                <a:ea typeface="Calibri" pitchFamily="34" charset="-122"/>
-                <a:cs typeface="Calibri" pitchFamily="34" charset="-120"/>
-              </a:rPr>
-              <a:t xml:space="preserve">Miller clamp on: 0.830 V, margin </a:t>
-            </a:r>
-            <a:r>
-              <a:rPr lang="en-US" sz="1300" b="1" dirty="0">
-                <a:solidFill>
-                  <a:srgbClr val="000000"/>
-                </a:solidFill>
-                <a:latin typeface="Calibri" pitchFamily="34" charset="0"/>
-                <a:ea typeface="Calibri" pitchFamily="34" charset="-122"/>
-                <a:cs typeface="Calibri" pitchFamily="34" charset="-120"/>
-              </a:rPr>
-              <a:t xml:space="preserve">+0.570 V</a:t>
-            </a:r>
-            <a:r>
-              <a:rPr lang="en-US" sz="1300" dirty="0">
-                <a:solidFill>
-                  <a:srgbClr val="000000"/>
-                </a:solidFill>
-                <a:latin typeface="Calibri" pitchFamily="34" charset="0"/>
-                <a:ea typeface="Calibri" pitchFamily="34" charset="-122"/>
-                <a:cs typeface="Calibri" pitchFamily="34" charset="-120"/>
-              </a:rPr>
-              <a:t xml:space="preserve"> — safe.</a:t>
+              <a:rPr lang="en-US" sz="1250" dirty="0">
+                <a:solidFill>
+                  <a:srgbClr val="000000"/>
+                </a:solidFill>
+                <a:latin typeface="Calibri" pitchFamily="34" charset="0"/>
+                <a:ea typeface="Calibri" pitchFamily="34" charset="-122"/>
+                <a:cs typeface="Calibri" pitchFamily="34" charset="-120"/>
+              </a:rPr>
+              <a:t xml:space="preserve">LEFT, failing: the gate reaches </a:t>
+            </a:r>
+            <a:r>
+              <a:rPr lang="en-US" sz="1250" b="1" dirty="0">
+                <a:solidFill>
+                  <a:srgbClr val="000000"/>
+                </a:solidFill>
+                <a:latin typeface="Calibri" pitchFamily="34" charset="0"/>
+                <a:ea typeface="Calibri" pitchFamily="34" charset="-122"/>
+                <a:cs typeface="Calibri" pitchFamily="34" charset="-120"/>
+              </a:rPr>
+              <a:t xml:space="preserve">+1.65 V</a:t>
+            </a:r>
+            <a:r>
+              <a:rPr lang="en-US" sz="1250" dirty="0">
+                <a:solidFill>
+                  <a:srgbClr val="000000"/>
+                </a:solidFill>
+                <a:latin typeface="Calibri" pitchFamily="34" charset="0"/>
+                <a:ea typeface="Calibri" pitchFamily="34" charset="-122"/>
+                <a:cs typeface="Calibri" pitchFamily="34" charset="-120"/>
+              </a:rPr>
+              <a:t xml:space="preserve"> — above the 1.4 V threshold drawn on the plot. The device turns on when it must not.</a:t>
             </a:r>
           </a:p>
           <a:p>
             <a:pPr marL="177800" indent="-177800">
               <a:spcAft>
-                <a:spcPts val="240"/>
+                <a:spcPts val="170"/>
               </a:spcAft>
               <a:buSzPct val="100000"/>
               <a:buChar char="•"/>
             </a:pPr>
             <a:r>
-              <a:rPr lang="en-US" sz="1300" dirty="0">
-                <a:solidFill>
-                  <a:srgbClr val="000000"/>
-                </a:solidFill>
-                <a:latin typeface="Calibri" pitchFamily="34" charset="0"/>
-                <a:ea typeface="Calibri" pitchFamily="34" charset="-122"/>
-                <a:cs typeface="Calibri" pitchFamily="34" charset="-120"/>
-              </a:rPr>
-              <a:t xml:space="preserve">The full 720-word search at four corners: 474 feasible, ceiling </a:t>
-            </a:r>
-            <a:r>
-              <a:rPr lang="en-US" sz="1300" b="1" dirty="0">
-                <a:solidFill>
-                  <a:srgbClr val="000000"/>
-                </a:solidFill>
-                <a:latin typeface="Calibri" pitchFamily="34" charset="0"/>
-                <a:ea typeface="Calibri" pitchFamily="34" charset="-122"/>
-                <a:cs typeface="Calibri" pitchFamily="34" charset="-120"/>
-              </a:rPr>
-              <a:t xml:space="preserve">5.2 %</a:t>
-            </a:r>
-            <a:r>
-              <a:rPr lang="en-US" sz="1300" dirty="0">
-                <a:solidFill>
-                  <a:srgbClr val="000000"/>
-                </a:solidFill>
-                <a:latin typeface="Calibri" pitchFamily="34" charset="0"/>
-                <a:ea typeface="Calibri" pitchFamily="34" charset="-122"/>
-                <a:cs typeface="Calibri" pitchFamily="34" charset="-120"/>
-              </a:rPr>
-              <a:t xml:space="preserve">.</a:t>
+              <a:rPr lang="en-US" sz="1250" dirty="0">
+                <a:solidFill>
+                  <a:srgbClr val="000000"/>
+                </a:solidFill>
+                <a:latin typeface="Calibri" pitchFamily="34" charset="0"/>
+                <a:ea typeface="Calibri" pitchFamily="34" charset="-122"/>
+                <a:cs typeface="Calibri" pitchFamily="34" charset="-120"/>
+              </a:rPr>
+              <a:t xml:space="preserve">RIGHT, shipped: same circuit, same word, plus the Miller clamp and −2 V off-bias. Peak </a:t>
+            </a:r>
+            <a:r>
+              <a:rPr lang="en-US" sz="1250" b="1" dirty="0">
+                <a:solidFill>
+                  <a:srgbClr val="000000"/>
+                </a:solidFill>
+                <a:latin typeface="Calibri" pitchFamily="34" charset="0"/>
+                <a:ea typeface="Calibri" pitchFamily="34" charset="-122"/>
+                <a:cs typeface="Calibri" pitchFamily="34" charset="-120"/>
+              </a:rPr>
+              <a:t xml:space="preserve">−1.18 V</a:t>
+            </a:r>
+            <a:r>
+              <a:rPr lang="en-US" sz="1250" dirty="0">
+                <a:solidFill>
+                  <a:srgbClr val="000000"/>
+                </a:solidFill>
+                <a:latin typeface="Calibri" pitchFamily="34" charset="0"/>
+                <a:ea typeface="Calibri" pitchFamily="34" charset="-122"/>
+                <a:cs typeface="Calibri" pitchFamily="34" charset="-120"/>
+              </a:rPr>
+              <a:t xml:space="preserve">, a 2.58 V margin.</a:t>
             </a:r>
           </a:p>
           <a:p>
@@ -7693,7 +7693,7 @@
                 <a:ea typeface="Calibri" pitchFamily="34" charset="-122"/>
                 <a:cs typeface="Calibri" pitchFamily="34" charset="-120"/>
               </a:rPr>
-              <a:t xml:space="preserve">A second video ships in the project folder: a 20 s interactive waveform viewer over the same simulation data.</a:t>
+              <a:t xml:space="preserve">Both panels are the same simulation deck; only CLKEN and VNEG differ.</a:t>
             </a:r>
           </a:p>
         </p:txBody>

--- a/review/Review1_GaN_Segmented_Gate_Driver.pptx
+++ b/review/Review1_GaN_Segmented_Gate_Driver.pptx
@@ -2763,29 +2763,7 @@
                 <a:ea typeface="Calibri" pitchFamily="34" charset="-122"/>
                 <a:cs typeface="Calibri" pitchFamily="34" charset="-120"/>
               </a:rPr>
-              <a:t xml:space="preserve">github.com/Amritha902/vero</a:t>
-            </a:r>
-            <a:r>
-              <a:rPr lang="en-US" sz="1500" dirty="0">
-                <a:solidFill>
-                  <a:srgbClr val="000000"/>
-                </a:solidFill>
-                <a:latin typeface="Calibri" pitchFamily="34" charset="0"/>
-                <a:ea typeface="Calibri" pitchFamily="34" charset="-122"/>
-                <a:cs typeface="Calibri" pitchFamily="34" charset="-120"/>
-              </a:rPr>
-              <a:t xml:space="preserve">, under </a:t>
-            </a:r>
-            <a:r>
-              <a:rPr lang="en-US" sz="1500" b="1" dirty="0">
-                <a:solidFill>
-                  <a:srgbClr val="000000"/>
-                </a:solidFill>
-                <a:latin typeface="Calibri" pitchFamily="34" charset="0"/>
-                <a:ea typeface="Calibri" pitchFamily="34" charset="-122"/>
-                <a:cs typeface="Calibri" pitchFamily="34" charset="-120"/>
-              </a:rPr>
-              <a:t xml:space="preserve">gan-driver/</a:t>
+              <a:t xml:space="preserve">github.com/Amritha902/gan-driver</a:t>
             </a:r>
             <a:r>
               <a:rPr lang="en-US" sz="1500" dirty="0">

--- a/review/Review1_GaN_Segmented_Gate_Driver.pptx
+++ b/review/Review1_GaN_Segmented_Gate_Driver.pptx
@@ -11930,7 +11930,7 @@
         <p:spPr>
           <a:xfrm>
             <a:off x="640080" y="1115568"/>
-            <a:ext cx="10972800" cy="365760"/>
+            <a:ext cx="10972800" cy="256032"/>
           </a:xfrm>
           <a:prstGeom prst="rect">
             <a:avLst/>

--- a/review/Review1_GaN_Segmented_Gate_Driver.pptx
+++ b/review/Review1_GaN_Segmented_Gate_Driver.pptx
@@ -2236,7 +2236,7 @@
         <p:spPr>
           <a:xfrm>
             <a:off x="548640" y="320040"/>
-            <a:ext cx="9601200" cy="685800"/>
+            <a:ext cx="9601200" cy="914400"/>
           </a:xfrm>
           <a:prstGeom prst="rect">
             <a:avLst/>
@@ -2299,7 +2299,7 @@
         <p:spPr>
           <a:xfrm>
             <a:off x="640080" y="1554480"/>
-            <a:ext cx="10881360" cy="4937760"/>
+            <a:ext cx="10881360" cy="4828032"/>
           </a:xfrm>
           <a:prstGeom prst="rect">
             <a:avLst/>

--- a/review/Review1_GaN_Segmented_Gate_Driver.pptx
+++ b/review/Review1_GaN_Segmented_Gate_Driver.pptx
@@ -13705,7 +13705,7 @@
                 <a:ea typeface="Calibri" pitchFamily="34" charset="-122"/>
                 <a:cs typeface="Calibri" pitchFamily="34" charset="-120"/>
               </a:rPr>
-              <a:t xml:space="preserve">results/crosstalk_standalone.m</a:t>
+              <a:t xml:space="preserve">results/gan_master.m</a:t>
             </a:r>
             <a:r>
               <a:rPr lang="en-US" sz="1200" dirty="0">
@@ -15917,6 +15917,17 @@
               <a:buChar char="–"/>
             </a:pPr>
             <a:r>
+              <a:rPr lang="en-US" sz="1500" b="1" dirty="0">
+                <a:solidFill>
+                  <a:srgbClr val="000000"/>
+                </a:solidFill>
+                <a:latin typeface="Calibri" pitchFamily="34" charset="0"/>
+                <a:ea typeface="Calibri" pitchFamily="34" charset="-122"/>
+                <a:cs typeface="Calibri" pitchFamily="34" charset="-120"/>
+              </a:rPr>
+              <a:t xml:space="preserve">No published work has ever measured what the adaptation is worth.</a:t>
+            </a:r>
+            <a:r>
               <a:rPr lang="en-US" sz="1500" dirty="0">
                 <a:solidFill>
                   <a:srgbClr val="000000"/>
@@ -15925,7 +15936,7 @@
                 <a:ea typeface="Calibri" pitchFamily="34" charset="-122"/>
                 <a:cs typeface="Calibri" pitchFamily="34" charset="-120"/>
               </a:rPr>
-              <a:t xml:space="preserve">That comparison conflates </a:t>
+              <a:t xml:space="preserve"> Those gains bundle </a:t>
             </a:r>
             <a:r>
               <a:rPr lang="en-US" sz="1500" b="1" dirty="0">
@@ -15969,7 +15980,7 @@
                 <a:ea typeface="Calibri" pitchFamily="34" charset="-122"/>
                 <a:cs typeface="Calibri" pitchFamily="34" charset="-120"/>
               </a:rPr>
-              <a:t xml:space="preserve">. Only the second needs sensing, a lookup table and a controller — the hardware cost that justifies the architecture. No published work isolates them, so the value of adaptation has never been measured.</a:t>
+              <a:t xml:space="preserve">. Only the second needs sensing, a lookup table and a controller — the cost that justifies the architecture, and the one nobody has priced.</a:t>
             </a:r>
           </a:p>
         </p:txBody>
@@ -21246,7 +21257,7 @@
                 <a:ea typeface="Calibri" pitchFamily="34" charset="-122"/>
                 <a:cs typeface="Calibri" pitchFamily="34" charset="-120"/>
               </a:rPr>
-              <a:t xml:space="preserve">LTspice-dialect, Spectre and browser-WASM decks all reproduce 122.4 V / 5.00 V / 1.65 V. Neither has itself been run — no installation was available — so these are faithful ports.</a:t>
+              <a:t xml:space="preserve">LTspice-dialect and Spectre decks both reproduce 122.4 V / 5.00 V / 1.65 V. Neither has itself been run — no installation was available — so these are faithful ports.</a:t>
             </a:r>
           </a:p>
           <a:p>

--- a/review/Review1_GaN_Segmented_Gate_Driver.pptx
+++ b/review/Review1_GaN_Segmented_Gate_Driver.pptx
@@ -3055,7 +3055,7 @@
                 <a:ea typeface="Calibri" pitchFamily="34" charset="-122"/>
                 <a:cs typeface="Calibri" pitchFamily="34" charset="-120"/>
               </a:rPr>
-              <a:t xml:space="preserve">Eight asserted properties, all passing under Icarus Verilog; a deliberate shoot-through mutant is caught 221 times (sh rtl/mutate.sh).</a:t>
+              <a:t xml:space="preserve">Eight asserted properties pass under Icarus; a shoot-through mutant is caught 221× (sh rtl/mutate.sh).</a:t>
             </a:r>
           </a:p>
           <a:p>
@@ -3108,7 +3108,7 @@
                 <a:ea typeface="Calibri" pitchFamily="34" charset="-122"/>
                 <a:cs typeface="Calibri" pitchFamily="34" charset="-120"/>
               </a:rPr>
-              <a:t xml:space="preserve"> — 65 % less logic for the 3.9 % of baseline that adaptation buys. Generic gates, not Xilinx LUTs.</a:t>
+              <a:t xml:space="preserve"> — 65 % less logic for the 3.9 % of baseline that adaptation buys. Generic gates, not Xilinx LUTs. Vivado export written (rtl/vivado/, bench passes); not yet run — Windows/Linux only.</a:t>
             </a:r>
           </a:p>
         </p:txBody>
@@ -7462,7 +7462,7 @@
                 <a:ea typeface="Calibri" pitchFamily="34" charset="-122"/>
                 <a:cs typeface="Calibri" pitchFamily="34" charset="-120"/>
               </a:rPr>
-              <a:t xml:space="preserve">Click to play (18 s). Real ngspice waveforms from sim/dpt.cir, run twice — only the pacing and the captions are presentational.</a:t>
+              <a:t xml:space="preserve">Click to play (22 s). Real ngspice waveforms from sim/dpt.cir, run twice — only the pacing and the captions are presentational.</a:t>
             </a:r>
           </a:p>
         </p:txBody>

--- a/review/Review1_GaN_Segmented_Gate_Driver.pptx
+++ b/review/Review1_GaN_Segmented_Gate_Driver.pptx
@@ -8214,7 +8214,7 @@
                 <a:ea typeface="Calibri" pitchFamily="34" charset="-122"/>
                 <a:cs typeface="Calibri" pitchFamily="34" charset="-120"/>
               </a:rPr>
-              <a:t xml:space="preserve">LTspice and Spectre decks are faithful ports re-simulated to the same numbers, but neither simulator has itself been run — no installation was available.</a:t>
+              <a:t xml:space="preserve">LTspice has now been run: the three shipped .cir files reproduce 1.6487 / 0.8282 / −1.1768 V, matching ngspice to within 2 mV. Spectre is still a port — no installation available.</a:t>
             </a:r>
           </a:p>
         </p:txBody>
@@ -8964,7 +8964,7 @@
                 <a:ea typeface="Calibri" pitchFamily="34" charset="-122"/>
                 <a:cs typeface="Calibri" pitchFamily="34" charset="-120"/>
               </a:rPr>
-              <a:t>Amritha  —  Reg. No. ________</a:t>
+              <a:t>Amritha S  —  23BEC1368</a:t>
             </a:r>
             <a:endParaRPr lang="en-US" sz="1400" dirty="0"/>
           </a:p>
@@ -9288,7 +9288,7 @@
                 <a:ea typeface="Calibri" pitchFamily="34" charset="-122"/>
                 <a:cs typeface="Calibri" pitchFamily="34" charset="-120"/>
               </a:rPr>
-              <a:t>Review-I  ·  02.09.2026 (Wednesday)</a:t>
+              <a:t>Review-I  ·  09.09.2026 (Wednesday)</a:t>
             </a:r>
             <a:endParaRPr lang="en-US" sz="1400" dirty="0"/>
           </a:p>
@@ -15265,7 +15265,7 @@
                 <a:ea typeface="Calibri" pitchFamily="34" charset="-122"/>
                 <a:cs typeface="Calibri" pitchFamily="34" charset="-120"/>
               </a:rPr>
-              <a:t>Review-I — 02.09.2026 (5 Marks, 5%)</a:t>
+              <a:t>Review-I — 09.09.2026 (5 Marks, 5%)</a:t>
             </a:r>
             <a:endParaRPr lang="en-US" sz="2800" dirty="0"/>
           </a:p>
@@ -21237,7 +21237,7 @@
                 <a:ea typeface="Calibri" pitchFamily="34" charset="-122"/>
                 <a:cs typeface="Calibri" pitchFamily="34" charset="-120"/>
               </a:rPr>
-              <a:t xml:space="preserve">The port to other simulators is written and re-simulated.</a:t>
+              <a:t xml:space="preserve">The LTspice port has been run in LTspice.</a:t>
             </a:r>
           </a:p>
           <a:p>
@@ -21257,7 +21257,7 @@
                 <a:ea typeface="Calibri" pitchFamily="34" charset="-122"/>
                 <a:cs typeface="Calibri" pitchFamily="34" charset="-120"/>
               </a:rPr>
-              <a:t xml:space="preserve">LTspice-dialect and Spectre decks both reproduce 122.4 V / 5.00 V / 1.65 V. Neither has itself been run — no installation was available — so these are faithful ports.</a:t>
+              <a:t xml:space="preserve">The three shipped .cir files give 1.6487 / 0.8282 / −1.1768 V in LTspice 24, matching ngspice within 2 mV — the result is not an artefact of one simulator. Spectre remains a port.</a:t>
             </a:r>
           </a:p>
           <a:p>

--- a/review/Review1_GaN_Segmented_Gate_Driver.pptx
+++ b/review/Review1_GaN_Segmented_Gate_Driver.pptx
@@ -9821,7 +9821,7 @@
                 <a:ea typeface="Calibri" pitchFamily="34" charset="-122"/>
                 <a:cs typeface="Calibri" pitchFamily="34" charset="-120"/>
               </a:rPr>
-              <a:t xml:space="preserve">“Crosstalk Suppression Method for GaN-Based Bridge Configuration Using Negative Voltage Self-Recovery Gate Drive,” IEEE Trans. Power Electron., 2021,  [author list and page range: Xplore “Cite This”]</a:t>
+              <a:t xml:space="preserve">B. Li, G. Zhang, C. Li, G. Wang, S. Liu and D. Xu, “Crosstalk Suppression Method for GaN-Based Bridge Configuration Using Negative Voltage Self-Recovery Gate Drive,” IEEE Trans. Power Electron., vol. 37, no. 4, pp. 4406–4418, 2022.</a:t>
             </a:r>
             <a:r>
               <a:rPr lang="en-US" sz="900" b="1" dirty="0">
@@ -9863,7 +9863,7 @@
                 <a:ea typeface="Calibri" pitchFamily="34" charset="-122"/>
                 <a:cs typeface="Calibri" pitchFamily="34" charset="-120"/>
               </a:rPr>
-              <a:t xml:space="preserve">“A Novel Control Strategy for Optimal Tradeoff between Overshoot and Switching Loss Based on Double Closed-Loop Self-Regulating Active Gate Driver,” IEEE journal, 2024,  [author list and page range: Xplore “Cite This”]</a:t>
+              <a:t xml:space="preserve">X. Chen, H. Peng, S. Song, Q. Tong and Y. Kang, “A Novel Control Strategy for Optimal Tradeoff between Overshoot and Switching Loss Based on Double Closed-Loop Self-Regulating Active Gate Driver,” IEEE Trans. Power Electron., vol. 39, no. 10, pp. 13033–13043, 2024.</a:t>
             </a:r>
             <a:r>
               <a:rPr lang="en-US" sz="900" b="1" dirty="0">
@@ -9905,7 +9905,7 @@
                 <a:ea typeface="Calibri" pitchFamily="34" charset="-122"/>
                 <a:cs typeface="Calibri" pitchFamily="34" charset="-120"/>
               </a:rPr>
-              <a:t xml:space="preserve">“A Self-Regulating Active Gate Driver of Voltage Overshoot Suppression for SiC MOSFETs Under Variable Load Current Conditions,” IEEE journal, 2025,  [author list and page range: Xplore “Cite This”]</a:t>
+              <a:t xml:space="preserve">W. Song, T. Hu, J. Chen, T. Tang, H. Yue and G. Liu, “A Self-Regulating Active Gate Driver of Voltage Overshoot Suppression for SiC MOSFETs Under Variable Load Current Conditions,” IEEE Trans. Power Electron., vol. 40, no. 8, pp. 10623–10634, 2025.</a:t>
             </a:r>
             <a:r>
               <a:rPr lang="en-US" sz="900" b="1" dirty="0">
@@ -9947,7 +9947,7 @@
                 <a:ea typeface="Calibri" pitchFamily="34" charset="-122"/>
                 <a:cs typeface="Calibri" pitchFamily="34" charset="-120"/>
               </a:rPr>
-              <a:t xml:space="preserve">“Universal Active Gate Driver IC With Closed-Loop Timing Control and Gate-Sensing Technique for Silicon Carbide Power Devices,” IEEE journal, 2025,  [author list and page range: Xplore “Cite This”]</a:t>
+              <a:t xml:space="preserve">C.W. Kuo, T.W. Wang, L.C. Chen, C.C. Tu, Y.K. Hsiao and P.H. Chen, “Universal Active Gate Driver IC With Closed-Loop Timing Control and Gate-Sensing Technique for Silicon Carbide Power Devices,” IEEE Trans. Power Electron., vol. 40, no. 4, pp. 5120–5129, 2025.</a:t>
             </a:r>
             <a:r>
               <a:rPr lang="en-US" sz="900" b="1" dirty="0">
@@ -9989,7 +9989,7 @@
                 <a:ea typeface="Calibri" pitchFamily="34" charset="-122"/>
                 <a:cs typeface="Calibri" pitchFamily="34" charset="-120"/>
               </a:rPr>
-              <a:t xml:space="preserve">“An Integrated Driver With Dual-Edge Adaptive Dead-Time Control for GaN-Based Synchronous Buck Converter,” IEEE Trans. Ind. Appl., vol. 60, 2024, doi: 10.1109/TIA.2024.3454198.  [author list and page range: Xplore “Cite This”]</a:t>
+              <a:t xml:space="preserve">G.H. Thuc and C.J. Chen, “An Integrated Driver With Dual-Edge Adaptive Dead-Time Control for GaN-Based Synchronous Buck Converter,” IEEE Trans. Ind. Appl., vol. 60, no. 6, pp. 9157–9170, 2024.</a:t>
             </a:r>
             <a:r>
               <a:rPr lang="en-US" sz="900" b="1" dirty="0">
@@ -10042,7 +10042,7 @@
                 <a:ea typeface="Calibri" pitchFamily="34" charset="-122"/>
                 <a:cs typeface="Calibri" pitchFamily="34" charset="-120"/>
               </a:rPr>
-              <a:t xml:space="preserve">H. Takayama, T. Okuda &amp; T. Hikihara, “Digital Active Gate Drive of SiC MOSFETs for Controlling Switching Behavior — Preparation Toward Universal Digitization of Power Switching,” Int. J. Circuit Theory Appl., vol. 50, no. 1, pp. 183–196, 2022, doi: 10.1002/cta.3136.  [author list and page range: Xplore “Cite This”]</a:t>
+              <a:t xml:space="preserve">H. Takayama, T. Okuda and T. Hikihara, “Digital Active Gate Drive of SiC MOSFETs for Controlling Switching Behavior — Preparation Toward Universal Digitization of Power Switching,” Int. J. Circuit Theory Appl., vol. 50, no. 1, pp. 183–196, 2022.</a:t>
             </a:r>
             <a:r>
               <a:rPr lang="en-US" sz="900" b="1" dirty="0">
@@ -10084,7 +10084,7 @@
                 <a:ea typeface="Calibri" pitchFamily="34" charset="-122"/>
                 <a:cs typeface="Calibri" pitchFamily="34" charset="-120"/>
               </a:rPr>
-              <a:t xml:space="preserve">“A Segmented Gate Driver for E-mode GaN HEMTs with Simple Driving Strength Pattern Control,” IEEE conference, 2020,  [author list and page range: Xplore “Cite This”]</a:t>
+              <a:t xml:space="preserve">W.J. Zhang, J. Yu, Y. Leng, W.T. Cui, G.Q. Deng and W.T. Ng, “A Segmented Gate Driver for E-mode GaN HEMTs with Simple Driving Strength Pattern Control,” in Proc. IEEE 32nd Int. Symp. Power Semicond. Devices ICs (ISPSD), 2020, pp. 102–105.</a:t>
             </a:r>
             <a:r>
               <a:rPr lang="en-US" sz="900" b="1" dirty="0">
@@ -10126,7 +10126,7 @@
                 <a:ea typeface="Calibri" pitchFamily="34" charset="-122"/>
                 <a:cs typeface="Calibri" pitchFamily="34" charset="-120"/>
               </a:rPr>
-              <a:t xml:space="preserve">“High-Frequency Three-Level Gate Driver for GaN HEMT Bridge Crosstalk Suppression,” IEEE journal, 2024,  [author list and page range: Xplore “Cite This”]</a:t>
+              <a:t xml:space="preserve">X. Wang, M. Tao, J. Xiao, D. Luo, M. He, Q. Zhou, X. Zhang and M. Wang, “High-Frequency Three-Level Gate Driver for GaN HEMT Bridge Crosstalk Suppression,” IEEE Trans. Power Electron., vol. 39, no. 1, pp. 1343–1352, 2024.</a:t>
             </a:r>
             <a:r>
               <a:rPr lang="en-US" sz="900" b="1" dirty="0">
@@ -10168,7 +10168,7 @@
                 <a:ea typeface="Calibri" pitchFamily="34" charset="-122"/>
                 <a:cs typeface="Calibri" pitchFamily="34" charset="-120"/>
               </a:rPr>
-              <a:t xml:space="preserve">“An Integrated Suppression Method of Both Gate-Source Voltage Oscillation and Crosstalk for GaN HEMT Gate Driver,” IEEE journal, 2024,  [author list and page range: Xplore “Cite This”]</a:t>
+              <a:t xml:space="preserve">L. Wang, X. Sun, Y. Yan, M. Ma and D. Xu, “An Integrated Suppression Method of Both Gate-Source Voltage Oscillation and Crosstalk for GaN HEMT Gate Driver,” IEEE Trans. Power Electron., vol. 39, no. 11, pp. 14643–14655, 2024.</a:t>
             </a:r>
             <a:r>
               <a:rPr lang="en-US" sz="900" b="1" dirty="0">
@@ -10210,7 +10210,7 @@
                 <a:ea typeface="Calibri" pitchFamily="34" charset="-122"/>
                 <a:cs typeface="Calibri" pitchFamily="34" charset="-120"/>
               </a:rPr>
-              <a:t xml:space="preserve">“A High-Efficient GaN Driver With Hybrid Adaptive Dead-Time Control and Peak Delay Control for Synchronous Buck Converter,” IEEE journal, 2025,  [author list and page range: Xplore “Cite This”]</a:t>
+              <a:t xml:space="preserve">Y. Cai, D. Ye, W. Lv and Z. Chen, “A High-Efficient GaN Driver With Hybrid Adaptive Dead-Time Control and Peak Delay Control for Synchronous Buck Converter,” IEEE Trans. Power Electron., vol. 41, no. 1, pp. 279–290, 2026.</a:t>
             </a:r>
             <a:r>
               <a:rPr lang="en-US" sz="900" b="1" dirty="0">
@@ -10241,7 +10241,7 @@
                 <a:ea typeface="Calibri" pitchFamily="34" charset="-122"/>
                 <a:cs typeface="Calibri" pitchFamily="34" charset="-120"/>
               </a:rPr>
-              <a:t xml:space="preserve">3 of 13 verified against the publisher record. </a:t>
+              <a:t xml:space="preserve">All 13 verified against the publisher record </a:t>
             </a:r>
             <a:r>
               <a:rPr lang="en-US" sz="850" dirty="0">
@@ -10252,18 +10252,7 @@
                 <a:ea typeface="Calibri" pitchFamily="34" charset="-122"/>
                 <a:cs typeface="Calibri" pitchFamily="34" charset="-120"/>
               </a:rPr>
-              <a:t xml:space="preserve">The remaining 10 carry title, journal status and Xplore document ID; </a:t>
-            </a:r>
-            <a:r>
-              <a:rPr lang="en-US" sz="850" dirty="0">
-                <a:solidFill>
-                  <a:srgbClr val="000000"/>
-                </a:solidFill>
-                <a:latin typeface="Calibri" pitchFamily="34" charset="0"/>
-                <a:ea typeface="Calibri" pitchFamily="34" charset="-122"/>
-                <a:cs typeface="Calibri" pitchFamily="34" charset="-120"/>
-              </a:rPr>
-              <a:t xml:space="preserve">volume, issue, pages and authors were not reachable from the build environment and are left blank rather than guessed.</a:t>
+              <a:t xml:space="preserve">— authors, volume, issue and pages resolved through Crossref by DOI and title, not transcribed by hand.</a:t>
             </a:r>
           </a:p>
         </p:txBody>
@@ -18411,7 +18400,7 @@
                       <a:r>
                         <a:rPr sz="1050" b="0">
                           <a:solidFill>
-                            <a:srgbClr val="7A7A7A"/>
+                            <a:srgbClr val="000000"/>
                           </a:solidFill>
                           <a:latin typeface="Calibri"/>
                         </a:rPr>
@@ -18773,28 +18762,17 @@
                       <a:r>
                         <a:rPr sz="1050" b="0">
                           <a:solidFill>
-                            <a:srgbClr val="7A7A7A"/>
+                            <a:srgbClr val="000000"/>
                           </a:solidFill>
                           <a:latin typeface="Calibri"/>
                         </a:rPr>
-                        <a:t>2020</a:t>
+                        <a:t>Zhang, Yu, Leng, Cui, Deng &amp; Ng (2020)</a:t>
                       </a:r>
                       <a:endParaRPr lang="en-US" sz="1300" dirty="0">
                         <a:latin typeface="Calibri" charset="0"/>
                         <a:ea typeface="Calibri" charset="0"/>
                         <a:cs typeface="Calibri" charset="0"/>
                       </a:endParaRPr>
-                    </a:p>
-                    <a:p>
-                      <a:r>
-                        <a:rPr sz="1050" b="0">
-                          <a:solidFill>
-                            <a:srgbClr val="7A7A7A"/>
-                          </a:solidFill>
-                          <a:latin typeface="Calibri"/>
-                        </a:rPr>
-                        <a:t>authors: Xplore “Cite This”</a:t>
-                      </a:r>
                     </a:p>
                   </a:txBody>
                   <a:tcPr marL="54864" marR="54864" marT="54864" marB="54864" anchor="ctr">
@@ -18867,7 +18845,7 @@
                           </a:solidFill>
                           <a:latin typeface="Calibri"/>
                         </a:rPr>
-                        <a:t>IEEE conference</a:t>
+                        <a:t>Proc. IEEE ISPSD, 2020, pp. 102–105</a:t>
                       </a:r>
                     </a:p>
                     <a:p>
@@ -19146,28 +19124,17 @@
                       <a:r>
                         <a:rPr sz="1050" b="0">
                           <a:solidFill>
-                            <a:srgbClr val="7A7A7A"/>
+                            <a:srgbClr val="000000"/>
                           </a:solidFill>
                           <a:latin typeface="Calibri"/>
                         </a:rPr>
-                        <a:t>2024</a:t>
+                        <a:t>Wang, Tao, Xiao, Luo, He, Zhou, Zhang &amp; Wang (2024)</a:t>
                       </a:r>
                       <a:endParaRPr lang="en-US" sz="1300" dirty="0">
                         <a:latin typeface="Calibri" charset="0"/>
                         <a:ea typeface="Calibri" charset="0"/>
                         <a:cs typeface="Calibri" charset="0"/>
                       </a:endParaRPr>
-                    </a:p>
-                    <a:p>
-                      <a:r>
-                        <a:rPr sz="1050" b="0">
-                          <a:solidFill>
-                            <a:srgbClr val="7A7A7A"/>
-                          </a:solidFill>
-                          <a:latin typeface="Calibri"/>
-                        </a:rPr>
-                        <a:t>authors: Xplore “Cite This”</a:t>
-                      </a:r>
                     </a:p>
                   </a:txBody>
                   <a:tcPr marL="54864" marR="54864" marT="54864" marB="54864" anchor="ctr">
@@ -19240,7 +19207,7 @@
                           </a:solidFill>
                           <a:latin typeface="Calibri"/>
                         </a:rPr>
-                        <a:t>IEEE journal</a:t>
+                        <a:t>IEEE Trans. Power Electron., 39(1), 1343–1352</a:t>
                       </a:r>
                     </a:p>
                     <a:p>
@@ -19519,28 +19486,17 @@
                       <a:r>
                         <a:rPr sz="1050" b="0">
                           <a:solidFill>
-                            <a:srgbClr val="7A7A7A"/>
+                            <a:srgbClr val="000000"/>
                           </a:solidFill>
                           <a:latin typeface="Calibri"/>
                         </a:rPr>
-                        <a:t>2024</a:t>
+                        <a:t>Wang, Sun, Yan, Ma &amp; Xu (2024)</a:t>
                       </a:r>
                       <a:endParaRPr lang="en-US" sz="1300" dirty="0">
                         <a:latin typeface="Calibri" charset="0"/>
                         <a:ea typeface="Calibri" charset="0"/>
                         <a:cs typeface="Calibri" charset="0"/>
                       </a:endParaRPr>
-                    </a:p>
-                    <a:p>
-                      <a:r>
-                        <a:rPr sz="1050" b="0">
-                          <a:solidFill>
-                            <a:srgbClr val="7A7A7A"/>
-                          </a:solidFill>
-                          <a:latin typeface="Calibri"/>
-                        </a:rPr>
-                        <a:t>authors: Xplore “Cite This”</a:t>
-                      </a:r>
                     </a:p>
                   </a:txBody>
                   <a:tcPr marL="54864" marR="54864" marT="54864" marB="54864" anchor="ctr">
@@ -19613,7 +19569,7 @@
                           </a:solidFill>
                           <a:latin typeface="Calibri"/>
                         </a:rPr>
-                        <a:t>IEEE journal</a:t>
+                        <a:t>IEEE Trans. Power Electron., 39(11), 14643–14655</a:t>
                       </a:r>
                     </a:p>
                     <a:p>
@@ -19892,28 +19848,17 @@
                       <a:r>
                         <a:rPr sz="1050" b="0">
                           <a:solidFill>
-                            <a:srgbClr val="7A7A7A"/>
+                            <a:srgbClr val="000000"/>
                           </a:solidFill>
                           <a:latin typeface="Calibri"/>
                         </a:rPr>
-                        <a:t>2025</a:t>
+                        <a:t>Cai, Ye, Lv &amp; Chen (2026)</a:t>
                       </a:r>
                       <a:endParaRPr lang="en-US" sz="1300" dirty="0">
                         <a:latin typeface="Calibri" charset="0"/>
                         <a:ea typeface="Calibri" charset="0"/>
                         <a:cs typeface="Calibri" charset="0"/>
                       </a:endParaRPr>
-                    </a:p>
-                    <a:p>
-                      <a:r>
-                        <a:rPr sz="1050" b="0">
-                          <a:solidFill>
-                            <a:srgbClr val="7A7A7A"/>
-                          </a:solidFill>
-                          <a:latin typeface="Calibri"/>
-                        </a:rPr>
-                        <a:t>authors: Xplore “Cite This”</a:t>
-                      </a:r>
                     </a:p>
                   </a:txBody>
                   <a:tcPr marL="54864" marR="54864" marT="54864" marB="54864" anchor="ctr">
@@ -19986,7 +19931,7 @@
                           </a:solidFill>
                           <a:latin typeface="Calibri"/>
                         </a:rPr>
-                        <a:t>IEEE journal</a:t>
+                        <a:t>IEEE Trans. Power Electron., 41(1), 279–290</a:t>
                       </a:r>
                     </a:p>
                     <a:p>

--- a/review/Review1_GaN_Segmented_Gate_Driver.pptx
+++ b/review/Review1_GaN_Segmented_Gate_Driver.pptx
@@ -34,6 +34,7 @@
     <p:sldId id="270" r:id="rId21"/>
     <p:sldId id="271" r:id="rId22"/>
     <p:sldId id="265" r:id="rId11"/>
+    <p:sldId id="283" r:id="rId34"/>
     <p:sldId id="266" r:id="rId12"/>
   </p:sldIdLst>
   <p:sldSz cx="12192000" cy="6858000"/>
@@ -9617,7 +9618,7 @@
                 <a:ea typeface="Calibri" pitchFamily="34" charset="-122"/>
                 <a:cs typeface="Calibri" pitchFamily="34" charset="-120"/>
               </a:rPr>
-              <a:t>References</a:t>
+              <a:t>References  (1–15)</a:t>
             </a:r>
             <a:endParaRPr lang="en-US" sz="2800" dirty="0"/>
           </a:p>
@@ -9670,7 +9671,7 @@
           <a:p>
             <a:pPr marL="177800" indent="0">
               <a:spcAft>
-                <a:spcPts val="120"/>
+                <a:spcPts val="60"/>
               </a:spcAft>
               <a:buSzPct val="100000"/>
               <a:buNone/>
@@ -9697,6 +9698,15 @@
               </a:rPr>
               <a:t xml:space="preserve">Z. Zhang, F. Wang, L. M. Tolbert and B. J. Blalock, “Active Gate Driver for Crosstalk Suppression of SiC Devices in a Phase-Leg Configuration,” IEEE Trans. Power Electron., vol. 29, no. 4, pp. 1986–1997, Apr. 2014.</a:t>
             </a:r>
+          </a:p>
+          <a:p>
+            <a:pPr marL="177800" indent="0">
+              <a:spcAft>
+                <a:spcPts val="60"/>
+              </a:spcAft>
+              <a:buSzPct val="100000"/>
+              <a:buNone/>
+            </a:pPr>
             <a:r>
               <a:rPr lang="en-US" sz="900" b="1" dirty="0">
                 <a:solidFill>
@@ -9706,13 +9716,24 @@
                 <a:ea typeface="Calibri" pitchFamily="34" charset="-122"/>
                 <a:cs typeface="Calibri" pitchFamily="34" charset="-120"/>
               </a:rPr>
-              <a:t xml:space="preserve">   ieeexplore.ieee.org/document/6531666</a:t>
+              <a:t xml:space="preserve">[2]  </a:t>
+            </a:r>
+            <a:r>
+              <a:rPr lang="en-US" sz="900" dirty="0">
+                <a:solidFill>
+                  <a:srgbClr val="000000"/>
+                </a:solidFill>
+                <a:latin typeface="Calibri" pitchFamily="34" charset="0"/>
+                <a:ea typeface="Calibri" pitchFamily="34" charset="-122"/>
+                <a:cs typeface="Calibri" pitchFamily="34" charset="-120"/>
+              </a:rPr>
+              <a:t xml:space="preserve">R. Xie, H. Wang, G. Tang, X. Yang and K. J. Chen, “An Analytical Model for False Turn-On Evaluation of High-Voltage Enhancement-Mode GaN Transistor in Bridge-Leg Configuration,” IEEE Trans. Power Electron., vol. 32, no. 8, pp. 6416–6433, Aug. 2017.</a:t>
             </a:r>
           </a:p>
           <a:p>
             <a:pPr marL="177800" indent="0">
               <a:spcAft>
-                <a:spcPts val="120"/>
+                <a:spcPts val="60"/>
               </a:spcAft>
               <a:buSzPct val="100000"/>
               <a:buNone/>
@@ -9726,7 +9747,7 @@
                 <a:ea typeface="Calibri" pitchFamily="34" charset="-122"/>
                 <a:cs typeface="Calibri" pitchFamily="34" charset="-120"/>
               </a:rPr>
-              <a:t xml:space="preserve">[2]  </a:t>
+              <a:t xml:space="preserve">[3]  </a:t>
             </a:r>
             <a:r>
               <a:rPr lang="en-US" sz="900" dirty="0">
@@ -9737,8 +9758,17 @@
                 <a:ea typeface="Calibri" pitchFamily="34" charset="-122"/>
                 <a:cs typeface="Calibri" pitchFamily="34" charset="-120"/>
               </a:rPr>
-              <a:t xml:space="preserve">R. Xie, H. Wang, G. Tang, X. Yang and K. J. Chen, “An Analytical Model for False Turn-On Evaluation of High-Voltage Enhancement-Mode GaN Transistor in Bridge-Leg Configuration,” IEEE Trans. Power Electron., vol. 32, no. 8, pp. 6416–6433, Aug. 2017.</a:t>
-            </a:r>
+              <a:t xml:space="preserve">D. Reusch and J. Strydom, “Understanding the Effect of PCB Layout on Circuit Performance in a High-Frequency Gallium-Nitride-Based Point of Load Converter,” IEEE Trans. Power Electron., vol. 29, no. 4, pp. 2008–2015, Apr. 2014.</a:t>
+            </a:r>
+          </a:p>
+          <a:p>
+            <a:pPr marL="177800" indent="0">
+              <a:spcAft>
+                <a:spcPts val="60"/>
+              </a:spcAft>
+              <a:buSzPct val="100000"/>
+              <a:buNone/>
+            </a:pPr>
             <a:r>
               <a:rPr lang="en-US" sz="900" b="1" dirty="0">
                 <a:solidFill>
@@ -9748,13 +9778,24 @@
                 <a:ea typeface="Calibri" pitchFamily="34" charset="-122"/>
                 <a:cs typeface="Calibri" pitchFamily="34" charset="-120"/>
               </a:rPr>
-              <a:t xml:space="preserve">   ieeexplore.ieee.org/document/7854840</a:t>
+              <a:t xml:space="preserve">[4]  </a:t>
+            </a:r>
+            <a:r>
+              <a:rPr lang="en-US" sz="900" dirty="0">
+                <a:solidFill>
+                  <a:srgbClr val="000000"/>
+                </a:solidFill>
+                <a:latin typeface="Calibri" pitchFamily="34" charset="0"/>
+                <a:ea typeface="Calibri" pitchFamily="34" charset="-122"/>
+                <a:cs typeface="Calibri" pitchFamily="34" charset="-120"/>
+              </a:rPr>
+              <a:t xml:space="preserve">B. Li, G. Zhang, C. Li, G. Wang, S. Liu and D. Xu, “Crosstalk Suppression Method for GaN-Based Bridge Configuration Using Negative Voltage Self-Recovery Gate Drive,” IEEE Trans. Power Electron., vol. 37, no. 4, pp. 4406–4418, 2022.</a:t>
             </a:r>
           </a:p>
           <a:p>
             <a:pPr marL="177800" indent="0">
               <a:spcAft>
-                <a:spcPts val="120"/>
+                <a:spcPts val="60"/>
               </a:spcAft>
               <a:buSzPct val="100000"/>
               <a:buNone/>
@@ -9768,7 +9809,7 @@
                 <a:ea typeface="Calibri" pitchFamily="34" charset="-122"/>
                 <a:cs typeface="Calibri" pitchFamily="34" charset="-120"/>
               </a:rPr>
-              <a:t xml:space="preserve">[3]  </a:t>
+              <a:t xml:space="preserve">[5]  </a:t>
             </a:r>
             <a:r>
               <a:rPr lang="en-US" sz="900" dirty="0">
@@ -9779,8 +9820,17 @@
                 <a:ea typeface="Calibri" pitchFamily="34" charset="-122"/>
                 <a:cs typeface="Calibri" pitchFamily="34" charset="-120"/>
               </a:rPr>
-              <a:t xml:space="preserve">D. Reusch and J. Strydom, “Understanding the Effect of PCB Layout on Circuit Performance in a High-Frequency Gallium-Nitride-Based Point of Load Converter,” IEEE Trans. Power Electron., vol. 29, no. 4, pp. 2008–2015, Apr. 2014.</a:t>
-            </a:r>
+              <a:t xml:space="preserve">X. Chen, H. Peng, S. Song, Q. Tong and Y. Kang, “A Novel Control Strategy for Optimal Tradeoff between Overshoot and Switching Loss Based on Double Closed-Loop Self-Regulating Active Gate Driver,” IEEE Trans. Power Electron., vol. 39, no. 10, pp. 13033–13043, 2024.</a:t>
+            </a:r>
+          </a:p>
+          <a:p>
+            <a:pPr marL="177800" indent="0">
+              <a:spcAft>
+                <a:spcPts val="60"/>
+              </a:spcAft>
+              <a:buSzPct val="100000"/>
+              <a:buNone/>
+            </a:pPr>
             <a:r>
               <a:rPr lang="en-US" sz="900" b="1" dirty="0">
                 <a:solidFill>
@@ -9790,13 +9840,24 @@
                 <a:ea typeface="Calibri" pitchFamily="34" charset="-122"/>
                 <a:cs typeface="Calibri" pitchFamily="34" charset="-120"/>
               </a:rPr>
-              <a:t xml:space="preserve">   ieeexplore.ieee.org/document/6531683</a:t>
+              <a:t xml:space="preserve">[6]  </a:t>
+            </a:r>
+            <a:r>
+              <a:rPr lang="en-US" sz="900" dirty="0">
+                <a:solidFill>
+                  <a:srgbClr val="000000"/>
+                </a:solidFill>
+                <a:latin typeface="Calibri" pitchFamily="34" charset="0"/>
+                <a:ea typeface="Calibri" pitchFamily="34" charset="-122"/>
+                <a:cs typeface="Calibri" pitchFamily="34" charset="-120"/>
+              </a:rPr>
+              <a:t xml:space="preserve">W. Song, T. Hu, J. Chen, T. Tang, H. Yue and G. Liu, “A Self-Regulating Active Gate Driver of Voltage Overshoot Suppression for SiC MOSFETs Under Variable Load Current Conditions,” IEEE Trans. Power Electron., vol. 40, no. 8, pp. 10623–10634, 2025.</a:t>
             </a:r>
           </a:p>
           <a:p>
             <a:pPr marL="177800" indent="0">
               <a:spcAft>
-                <a:spcPts val="120"/>
+                <a:spcPts val="60"/>
               </a:spcAft>
               <a:buSzPct val="100000"/>
               <a:buNone/>
@@ -9810,7 +9871,7 @@
                 <a:ea typeface="Calibri" pitchFamily="34" charset="-122"/>
                 <a:cs typeface="Calibri" pitchFamily="34" charset="-120"/>
               </a:rPr>
-              <a:t xml:space="preserve">[4]  </a:t>
+              <a:t xml:space="preserve">[7]  </a:t>
             </a:r>
             <a:r>
               <a:rPr lang="en-US" sz="900" dirty="0">
@@ -9821,8 +9882,17 @@
                 <a:ea typeface="Calibri" pitchFamily="34" charset="-122"/>
                 <a:cs typeface="Calibri" pitchFamily="34" charset="-120"/>
               </a:rPr>
-              <a:t xml:space="preserve">B. Li, G. Zhang, C. Li, G. Wang, S. Liu and D. Xu, “Crosstalk Suppression Method for GaN-Based Bridge Configuration Using Negative Voltage Self-Recovery Gate Drive,” IEEE Trans. Power Electron., vol. 37, no. 4, pp. 4406–4418, 2022.</a:t>
-            </a:r>
+              <a:t xml:space="preserve">C.W. Kuo, T.W. Wang, L.C. Chen, C.C. Tu, Y.K. Hsiao and P.H. Chen, “Universal Active Gate Driver IC With Closed-Loop Timing Control and Gate-Sensing Technique for Silicon Carbide Power Devices,” IEEE Trans. Power Electron., vol. 40, no. 4, pp. 5120–5129, 2025.</a:t>
+            </a:r>
+          </a:p>
+          <a:p>
+            <a:pPr marL="177800" indent="0">
+              <a:spcAft>
+                <a:spcPts val="60"/>
+              </a:spcAft>
+              <a:buSzPct val="100000"/>
+              <a:buNone/>
+            </a:pPr>
             <a:r>
               <a:rPr lang="en-US" sz="900" b="1" dirty="0">
                 <a:solidFill>
@@ -9832,13 +9902,24 @@
                 <a:ea typeface="Calibri" pitchFamily="34" charset="-122"/>
                 <a:cs typeface="Calibri" pitchFamily="34" charset="-120"/>
               </a:rPr>
-              <a:t xml:space="preserve">   ieeexplore.ieee.org/document/9573371</a:t>
+              <a:t xml:space="preserve">[8]  </a:t>
+            </a:r>
+            <a:r>
+              <a:rPr lang="en-US" sz="900" dirty="0">
+                <a:solidFill>
+                  <a:srgbClr val="000000"/>
+                </a:solidFill>
+                <a:latin typeface="Calibri" pitchFamily="34" charset="0"/>
+                <a:ea typeface="Calibri" pitchFamily="34" charset="-122"/>
+                <a:cs typeface="Calibri" pitchFamily="34" charset="-120"/>
+              </a:rPr>
+              <a:t xml:space="preserve">G.H. Thuc and C.J. Chen, “An Integrated Driver With Dual-Edge Adaptive Dead-Time Control for GaN-Based Synchronous Buck Converter,” IEEE Trans. Ind. Appl., vol. 60, no. 6, pp. 9157–9170, 2024.</a:t>
             </a:r>
           </a:p>
           <a:p>
             <a:pPr marL="177800" indent="0">
               <a:spcAft>
-                <a:spcPts val="120"/>
+                <a:spcPts val="60"/>
               </a:spcAft>
               <a:buSzPct val="100000"/>
               <a:buNone/>
@@ -9852,7 +9933,18 @@
                 <a:ea typeface="Calibri" pitchFamily="34" charset="-122"/>
                 <a:cs typeface="Calibri" pitchFamily="34" charset="-120"/>
               </a:rPr>
-              <a:t xml:space="preserve">[5]  </a:t>
+              <a:t xml:space="preserve">[9]  </a:t>
+            </a:r>
+            <a:r>
+              <a:rPr lang="en-US" sz="900" b="1" dirty="0">
+                <a:solidFill>
+                  <a:srgbClr val="000000"/>
+                </a:solidFill>
+                <a:latin typeface="Calibri" pitchFamily="34" charset="0"/>
+                <a:ea typeface="Calibri" pitchFamily="34" charset="-122"/>
+                <a:cs typeface="Calibri" pitchFamily="34" charset="-120"/>
+              </a:rPr>
+              <a:t xml:space="preserve">BASE PAPER — </a:t>
             </a:r>
             <a:r>
               <a:rPr lang="en-US" sz="900" dirty="0">
@@ -9863,8 +9955,17 @@
                 <a:ea typeface="Calibri" pitchFamily="34" charset="-122"/>
                 <a:cs typeface="Calibri" pitchFamily="34" charset="-120"/>
               </a:rPr>
-              <a:t xml:space="preserve">X. Chen, H. Peng, S. Song, Q. Tong and Y. Kang, “A Novel Control Strategy for Optimal Tradeoff between Overshoot and Switching Loss Based on Double Closed-Loop Self-Regulating Active Gate Driver,” IEEE Trans. Power Electron., vol. 39, no. 10, pp. 13033–13043, 2024.</a:t>
-            </a:r>
+              <a:t xml:space="preserve">H. Takayama, T. Okuda and T. Hikihara, “Digital Active Gate Drive of SiC MOSFETs for Controlling Switching Behavior — Preparation Toward Universal Digitization of Power Switching,” Int. J. Circuit Theory Appl., vol. 50, no. 1, pp. 183–196, 2022.</a:t>
+            </a:r>
+          </a:p>
+          <a:p>
+            <a:pPr marL="177800" indent="0">
+              <a:spcAft>
+                <a:spcPts val="60"/>
+              </a:spcAft>
+              <a:buSzPct val="100000"/>
+              <a:buNone/>
+            </a:pPr>
             <a:r>
               <a:rPr lang="en-US" sz="900" b="1" dirty="0">
                 <a:solidFill>
@@ -9874,13 +9975,24 @@
                 <a:ea typeface="Calibri" pitchFamily="34" charset="-122"/>
                 <a:cs typeface="Calibri" pitchFamily="34" charset="-120"/>
               </a:rPr>
-              <a:t xml:space="preserve">   ieeexplore.ieee.org/document/10553383</a:t>
+              <a:t xml:space="preserve">[10]  </a:t>
+            </a:r>
+            <a:r>
+              <a:rPr lang="en-US" sz="900" dirty="0">
+                <a:solidFill>
+                  <a:srgbClr val="000000"/>
+                </a:solidFill>
+                <a:latin typeface="Calibri" pitchFamily="34" charset="0"/>
+                <a:ea typeface="Calibri" pitchFamily="34" charset="-122"/>
+                <a:cs typeface="Calibri" pitchFamily="34" charset="-120"/>
+              </a:rPr>
+              <a:t xml:space="preserve">W.J. Zhang, J. Yu, Y. Leng, W.T. Cui, G.Q. Deng and W.T. Ng, “A Segmented Gate Driver for E-mode GaN HEMTs with Simple Driving Strength Pattern Control,” in Proc. IEEE 32nd Int. Symp. Power Semicond. Devices ICs (ISPSD), 2020, pp. 102–105.</a:t>
             </a:r>
           </a:p>
           <a:p>
             <a:pPr marL="177800" indent="0">
               <a:spcAft>
-                <a:spcPts val="120"/>
+                <a:spcPts val="60"/>
               </a:spcAft>
               <a:buSzPct val="100000"/>
               <a:buNone/>
@@ -9894,7 +10006,7 @@
                 <a:ea typeface="Calibri" pitchFamily="34" charset="-122"/>
                 <a:cs typeface="Calibri" pitchFamily="34" charset="-120"/>
               </a:rPr>
-              <a:t xml:space="preserve">[6]  </a:t>
+              <a:t xml:space="preserve">[11]  </a:t>
             </a:r>
             <a:r>
               <a:rPr lang="en-US" sz="900" dirty="0">
@@ -9905,8 +10017,17 @@
                 <a:ea typeface="Calibri" pitchFamily="34" charset="-122"/>
                 <a:cs typeface="Calibri" pitchFamily="34" charset="-120"/>
               </a:rPr>
-              <a:t xml:space="preserve">W. Song, T. Hu, J. Chen, T. Tang, H. Yue and G. Liu, “A Self-Regulating Active Gate Driver of Voltage Overshoot Suppression for SiC MOSFETs Under Variable Load Current Conditions,” IEEE Trans. Power Electron., vol. 40, no. 8, pp. 10623–10634, 2025.</a:t>
-            </a:r>
+              <a:t xml:space="preserve">X. Wang, M. Tao, J. Xiao, D. Luo, M. He, Q. Zhou, X. Zhang and M. Wang, “High-Frequency Three-Level Gate Driver for GaN HEMT Bridge Crosstalk Suppression,” IEEE Trans. Power Electron., vol. 39, no. 1, pp. 1343–1352, 2024.</a:t>
+            </a:r>
+          </a:p>
+          <a:p>
+            <a:pPr marL="177800" indent="0">
+              <a:spcAft>
+                <a:spcPts val="60"/>
+              </a:spcAft>
+              <a:buSzPct val="100000"/>
+              <a:buNone/>
+            </a:pPr>
             <a:r>
               <a:rPr lang="en-US" sz="900" b="1" dirty="0">
                 <a:solidFill>
@@ -9916,13 +10037,24 @@
                 <a:ea typeface="Calibri" pitchFamily="34" charset="-122"/>
                 <a:cs typeface="Calibri" pitchFamily="34" charset="-120"/>
               </a:rPr>
-              <a:t xml:space="preserve">   ieeexplore.ieee.org/document/10964227</a:t>
+              <a:t xml:space="preserve">[12]  </a:t>
+            </a:r>
+            <a:r>
+              <a:rPr lang="en-US" sz="900" dirty="0">
+                <a:solidFill>
+                  <a:srgbClr val="000000"/>
+                </a:solidFill>
+                <a:latin typeface="Calibri" pitchFamily="34" charset="0"/>
+                <a:ea typeface="Calibri" pitchFamily="34" charset="-122"/>
+                <a:cs typeface="Calibri" pitchFamily="34" charset="-120"/>
+              </a:rPr>
+              <a:t xml:space="preserve">L. Wang, X. Sun, Y. Yan, M. Ma and D. Xu, “An Integrated Suppression Method of Both Gate-Source Voltage Oscillation and Crosstalk for GaN HEMT Gate Driver,” IEEE Trans. Power Electron., vol. 39, no. 11, pp. 14643–14655, 2024.</a:t>
             </a:r>
           </a:p>
           <a:p>
             <a:pPr marL="177800" indent="0">
               <a:spcAft>
-                <a:spcPts val="120"/>
+                <a:spcPts val="60"/>
               </a:spcAft>
               <a:buSzPct val="100000"/>
               <a:buNone/>
@@ -9936,7 +10068,7 @@
                 <a:ea typeface="Calibri" pitchFamily="34" charset="-122"/>
                 <a:cs typeface="Calibri" pitchFamily="34" charset="-120"/>
               </a:rPr>
-              <a:t xml:space="preserve">[7]  </a:t>
+              <a:t xml:space="preserve">[13]  </a:t>
             </a:r>
             <a:r>
               <a:rPr lang="en-US" sz="900" dirty="0">
@@ -9947,8 +10079,17 @@
                 <a:ea typeface="Calibri" pitchFamily="34" charset="-122"/>
                 <a:cs typeface="Calibri" pitchFamily="34" charset="-120"/>
               </a:rPr>
-              <a:t xml:space="preserve">C.W. Kuo, T.W. Wang, L.C. Chen, C.C. Tu, Y.K. Hsiao and P.H. Chen, “Universal Active Gate Driver IC With Closed-Loop Timing Control and Gate-Sensing Technique for Silicon Carbide Power Devices,” IEEE Trans. Power Electron., vol. 40, no. 4, pp. 5120–5129, 2025.</a:t>
-            </a:r>
+              <a:t xml:space="preserve">Y. Cai, D. Ye, W. Lv and Z. Chen, “A High-Efficient GaN Driver With Hybrid Adaptive Dead-Time Control and Peak Delay Control for Synchronous Buck Converter,” IEEE Trans. Power Electron., vol. 41, no. 1, pp. 279–290, 2026.</a:t>
+            </a:r>
+          </a:p>
+          <a:p>
+            <a:pPr marL="177800" indent="0">
+              <a:spcAft>
+                <a:spcPts val="60"/>
+              </a:spcAft>
+              <a:buSzPct val="100000"/>
+              <a:buNone/>
+            </a:pPr>
             <a:r>
               <a:rPr lang="en-US" sz="900" b="1" dirty="0">
                 <a:solidFill>
@@ -9958,13 +10099,24 @@
                 <a:ea typeface="Calibri" pitchFamily="34" charset="-122"/>
                 <a:cs typeface="Calibri" pitchFamily="34" charset="-120"/>
               </a:rPr>
-              <a:t xml:space="preserve">   ieeexplore.ieee.org/document/10813402</a:t>
+              <a:t xml:space="preserve">[14]  </a:t>
+            </a:r>
+            <a:r>
+              <a:rPr lang="en-US" sz="900" dirty="0">
+                <a:solidFill>
+                  <a:srgbClr val="000000"/>
+                </a:solidFill>
+                <a:latin typeface="Calibri" pitchFamily="34" charset="0"/>
+                <a:ea typeface="Calibri" pitchFamily="34" charset="-122"/>
+                <a:cs typeface="Calibri" pitchFamily="34" charset="-120"/>
+              </a:rPr>
+              <a:t xml:space="preserve">Y. Zheng, S. Zhao, P. Agarwal, F. Liu, Y. Zhao and A. Mantooth, “A Multi-Level Turn-Off Gate Driver for Crosstalk Noise Suppression of GaN HEMTs,” IEEE Open J. Power Electron., pp. 1–15, 2026.</a:t>
             </a:r>
           </a:p>
           <a:p>
             <a:pPr marL="177800" indent="0">
               <a:spcAft>
-                <a:spcPts val="120"/>
+                <a:spcPts val="60"/>
               </a:spcAft>
               <a:buSzPct val="100000"/>
               <a:buNone/>
@@ -9978,7 +10130,7 @@
                 <a:ea typeface="Calibri" pitchFamily="34" charset="-122"/>
                 <a:cs typeface="Calibri" pitchFamily="34" charset="-120"/>
               </a:rPr>
-              <a:t xml:space="preserve">[8]  </a:t>
+              <a:t xml:space="preserve">[15]  </a:t>
             </a:r>
             <a:r>
               <a:rPr lang="en-US" sz="900" dirty="0">
@@ -9989,270 +10141,7 @@
                 <a:ea typeface="Calibri" pitchFamily="34" charset="-122"/>
                 <a:cs typeface="Calibri" pitchFamily="34" charset="-120"/>
               </a:rPr>
-              <a:t xml:space="preserve">G.H. Thuc and C.J. Chen, “An Integrated Driver With Dual-Edge Adaptive Dead-Time Control for GaN-Based Synchronous Buck Converter,” IEEE Trans. Ind. Appl., vol. 60, no. 6, pp. 9157–9170, 2024.</a:t>
-            </a:r>
-            <a:r>
-              <a:rPr lang="en-US" sz="900" b="1" dirty="0">
-                <a:solidFill>
-                  <a:srgbClr val="000000"/>
-                </a:solidFill>
-                <a:latin typeface="Calibri" pitchFamily="34" charset="0"/>
-                <a:ea typeface="Calibri" pitchFamily="34" charset="-122"/>
-                <a:cs typeface="Calibri" pitchFamily="34" charset="-120"/>
-              </a:rPr>
-              <a:t xml:space="preserve">   doi.org/10.1109/TIA.2024.3454198</a:t>
-            </a:r>
-          </a:p>
-          <a:p>
-            <a:pPr marL="177800" indent="0">
-              <a:spcAft>
-                <a:spcPts val="120"/>
-              </a:spcAft>
-              <a:buSzPct val="100000"/>
-              <a:buNone/>
-            </a:pPr>
-            <a:r>
-              <a:rPr lang="en-US" sz="900" b="1" dirty="0">
-                <a:solidFill>
-                  <a:srgbClr val="000000"/>
-                </a:solidFill>
-                <a:latin typeface="Calibri" pitchFamily="34" charset="0"/>
-                <a:ea typeface="Calibri" pitchFamily="34" charset="-122"/>
-                <a:cs typeface="Calibri" pitchFamily="34" charset="-120"/>
-              </a:rPr>
-              <a:t xml:space="preserve">[9]  </a:t>
-            </a:r>
-            <a:r>
-              <a:rPr lang="en-US" sz="900" b="1" dirty="0">
-                <a:solidFill>
-                  <a:srgbClr val="000000"/>
-                </a:solidFill>
-                <a:latin typeface="Calibri" pitchFamily="34" charset="0"/>
-                <a:ea typeface="Calibri" pitchFamily="34" charset="-122"/>
-                <a:cs typeface="Calibri" pitchFamily="34" charset="-120"/>
-              </a:rPr>
-              <a:t xml:space="preserve">BASE PAPER — </a:t>
-            </a:r>
-            <a:r>
-              <a:rPr lang="en-US" sz="900" dirty="0">
-                <a:solidFill>
-                  <a:srgbClr val="000000"/>
-                </a:solidFill>
-                <a:latin typeface="Calibri" pitchFamily="34" charset="0"/>
-                <a:ea typeface="Calibri" pitchFamily="34" charset="-122"/>
-                <a:cs typeface="Calibri" pitchFamily="34" charset="-120"/>
-              </a:rPr>
-              <a:t xml:space="preserve">H. Takayama, T. Okuda and T. Hikihara, “Digital Active Gate Drive of SiC MOSFETs for Controlling Switching Behavior — Preparation Toward Universal Digitization of Power Switching,” Int. J. Circuit Theory Appl., vol. 50, no. 1, pp. 183–196, 2022.</a:t>
-            </a:r>
-            <a:r>
-              <a:rPr lang="en-US" sz="900" b="1" dirty="0">
-                <a:solidFill>
-                  <a:srgbClr val="000000"/>
-                </a:solidFill>
-                <a:latin typeface="Calibri" pitchFamily="34" charset="0"/>
-                <a:ea typeface="Calibri" pitchFamily="34" charset="-122"/>
-                <a:cs typeface="Calibri" pitchFamily="34" charset="-120"/>
-              </a:rPr>
-              <a:t xml:space="preserve">   doi.org/10.1002/cta.3136</a:t>
-            </a:r>
-          </a:p>
-          <a:p>
-            <a:pPr marL="177800" indent="0">
-              <a:spcAft>
-                <a:spcPts val="120"/>
-              </a:spcAft>
-              <a:buSzPct val="100000"/>
-              <a:buNone/>
-            </a:pPr>
-            <a:r>
-              <a:rPr lang="en-US" sz="900" b="1" dirty="0">
-                <a:solidFill>
-                  <a:srgbClr val="000000"/>
-                </a:solidFill>
-                <a:latin typeface="Calibri" pitchFamily="34" charset="0"/>
-                <a:ea typeface="Calibri" pitchFamily="34" charset="-122"/>
-                <a:cs typeface="Calibri" pitchFamily="34" charset="-120"/>
-              </a:rPr>
-              <a:t xml:space="preserve">[10]  </a:t>
-            </a:r>
-            <a:r>
-              <a:rPr lang="en-US" sz="900" dirty="0">
-                <a:solidFill>
-                  <a:srgbClr val="000000"/>
-                </a:solidFill>
-                <a:latin typeface="Calibri" pitchFamily="34" charset="0"/>
-                <a:ea typeface="Calibri" pitchFamily="34" charset="-122"/>
-                <a:cs typeface="Calibri" pitchFamily="34" charset="-120"/>
-              </a:rPr>
-              <a:t xml:space="preserve">W.J. Zhang, J. Yu, Y. Leng, W.T. Cui, G.Q. Deng and W.T. Ng, “A Segmented Gate Driver for E-mode GaN HEMTs with Simple Driving Strength Pattern Control,” in Proc. IEEE 32nd Int. Symp. Power Semicond. Devices ICs (ISPSD), 2020, pp. 102–105.</a:t>
-            </a:r>
-            <a:r>
-              <a:rPr lang="en-US" sz="900" b="1" dirty="0">
-                <a:solidFill>
-                  <a:srgbClr val="000000"/>
-                </a:solidFill>
-                <a:latin typeface="Calibri" pitchFamily="34" charset="0"/>
-                <a:ea typeface="Calibri" pitchFamily="34" charset="-122"/>
-                <a:cs typeface="Calibri" pitchFamily="34" charset="-120"/>
-              </a:rPr>
-              <a:t xml:space="preserve">   ieeexplore.ieee.org/document/9170108</a:t>
-            </a:r>
-          </a:p>
-          <a:p>
-            <a:pPr marL="177800" indent="0">
-              <a:spcAft>
-                <a:spcPts val="120"/>
-              </a:spcAft>
-              <a:buSzPct val="100000"/>
-              <a:buNone/>
-            </a:pPr>
-            <a:r>
-              <a:rPr lang="en-US" sz="900" b="1" dirty="0">
-                <a:solidFill>
-                  <a:srgbClr val="000000"/>
-                </a:solidFill>
-                <a:latin typeface="Calibri" pitchFamily="34" charset="0"/>
-                <a:ea typeface="Calibri" pitchFamily="34" charset="-122"/>
-                <a:cs typeface="Calibri" pitchFamily="34" charset="-120"/>
-              </a:rPr>
-              <a:t xml:space="preserve">[11]  </a:t>
-            </a:r>
-            <a:r>
-              <a:rPr lang="en-US" sz="900" dirty="0">
-                <a:solidFill>
-                  <a:srgbClr val="000000"/>
-                </a:solidFill>
-                <a:latin typeface="Calibri" pitchFamily="34" charset="0"/>
-                <a:ea typeface="Calibri" pitchFamily="34" charset="-122"/>
-                <a:cs typeface="Calibri" pitchFamily="34" charset="-120"/>
-              </a:rPr>
-              <a:t xml:space="preserve">X. Wang, M. Tao, J. Xiao, D. Luo, M. He, Q. Zhou, X. Zhang and M. Wang, “High-Frequency Three-Level Gate Driver for GaN HEMT Bridge Crosstalk Suppression,” IEEE Trans. Power Electron., vol. 39, no. 1, pp. 1343–1352, 2024.</a:t>
-            </a:r>
-            <a:r>
-              <a:rPr lang="en-US" sz="900" b="1" dirty="0">
-                <a:solidFill>
-                  <a:srgbClr val="000000"/>
-                </a:solidFill>
-                <a:latin typeface="Calibri" pitchFamily="34" charset="0"/>
-                <a:ea typeface="Calibri" pitchFamily="34" charset="-122"/>
-                <a:cs typeface="Calibri" pitchFamily="34" charset="-120"/>
-              </a:rPr>
-              <a:t xml:space="preserve">   ieeexplore.ieee.org/document/10286072</a:t>
-            </a:r>
-          </a:p>
-          <a:p>
-            <a:pPr marL="177800" indent="0">
-              <a:spcAft>
-                <a:spcPts val="120"/>
-              </a:spcAft>
-              <a:buSzPct val="100000"/>
-              <a:buNone/>
-            </a:pPr>
-            <a:r>
-              <a:rPr lang="en-US" sz="900" b="1" dirty="0">
-                <a:solidFill>
-                  <a:srgbClr val="000000"/>
-                </a:solidFill>
-                <a:latin typeface="Calibri" pitchFamily="34" charset="0"/>
-                <a:ea typeface="Calibri" pitchFamily="34" charset="-122"/>
-                <a:cs typeface="Calibri" pitchFamily="34" charset="-120"/>
-              </a:rPr>
-              <a:t xml:space="preserve">[12]  </a:t>
-            </a:r>
-            <a:r>
-              <a:rPr lang="en-US" sz="900" dirty="0">
-                <a:solidFill>
-                  <a:srgbClr val="000000"/>
-                </a:solidFill>
-                <a:latin typeface="Calibri" pitchFamily="34" charset="0"/>
-                <a:ea typeface="Calibri" pitchFamily="34" charset="-122"/>
-                <a:cs typeface="Calibri" pitchFamily="34" charset="-120"/>
-              </a:rPr>
-              <a:t xml:space="preserve">L. Wang, X. Sun, Y. Yan, M. Ma and D. Xu, “An Integrated Suppression Method of Both Gate-Source Voltage Oscillation and Crosstalk for GaN HEMT Gate Driver,” IEEE Trans. Power Electron., vol. 39, no. 11, pp. 14643–14655, 2024.</a:t>
-            </a:r>
-            <a:r>
-              <a:rPr lang="en-US" sz="900" b="1" dirty="0">
-                <a:solidFill>
-                  <a:srgbClr val="000000"/>
-                </a:solidFill>
-                <a:latin typeface="Calibri" pitchFamily="34" charset="0"/>
-                <a:ea typeface="Calibri" pitchFamily="34" charset="-122"/>
-                <a:cs typeface="Calibri" pitchFamily="34" charset="-120"/>
-              </a:rPr>
-              <a:t xml:space="preserve">   ieeexplore.ieee.org/document/10591431</a:t>
-            </a:r>
-          </a:p>
-          <a:p>
-            <a:pPr marL="177800" indent="0">
-              <a:spcAft>
-                <a:spcPts val="120"/>
-              </a:spcAft>
-              <a:buSzPct val="100000"/>
-              <a:buNone/>
-            </a:pPr>
-            <a:r>
-              <a:rPr lang="en-US" sz="900" b="1" dirty="0">
-                <a:solidFill>
-                  <a:srgbClr val="000000"/>
-                </a:solidFill>
-                <a:latin typeface="Calibri" pitchFamily="34" charset="0"/>
-                <a:ea typeface="Calibri" pitchFamily="34" charset="-122"/>
-                <a:cs typeface="Calibri" pitchFamily="34" charset="-120"/>
-              </a:rPr>
-              <a:t xml:space="preserve">[13]  </a:t>
-            </a:r>
-            <a:r>
-              <a:rPr lang="en-US" sz="900" dirty="0">
-                <a:solidFill>
-                  <a:srgbClr val="000000"/>
-                </a:solidFill>
-                <a:latin typeface="Calibri" pitchFamily="34" charset="0"/>
-                <a:ea typeface="Calibri" pitchFamily="34" charset="-122"/>
-                <a:cs typeface="Calibri" pitchFamily="34" charset="-120"/>
-              </a:rPr>
-              <a:t xml:space="preserve">Y. Cai, D. Ye, W. Lv and Z. Chen, “A High-Efficient GaN Driver With Hybrid Adaptive Dead-Time Control and Peak Delay Control for Synchronous Buck Converter,” IEEE Trans. Power Electron., vol. 41, no. 1, pp. 279–290, 2026.</a:t>
-            </a:r>
-            <a:r>
-              <a:rPr lang="en-US" sz="900" b="1" dirty="0">
-                <a:solidFill>
-                  <a:srgbClr val="000000"/>
-                </a:solidFill>
-                <a:latin typeface="Calibri" pitchFamily="34" charset="0"/>
-                <a:ea typeface="Calibri" pitchFamily="34" charset="-122"/>
-                <a:cs typeface="Calibri" pitchFamily="34" charset="-120"/>
-              </a:rPr>
-              <a:t xml:space="preserve">   ieeexplore.ieee.org/document/11146698</a:t>
-            </a:r>
-          </a:p>
-          <a:p>
-            <a:pPr marL="177800" indent="0">
-              <a:spcAft>
-                <a:spcPts val="0"/>
-              </a:spcAft>
-              <a:buSzPct val="100000"/>
-              <a:buNone/>
-            </a:pPr>
-            <a:r>
-              <a:rPr lang="en-US" sz="850" dirty="0">
-                <a:solidFill>
-                  <a:srgbClr val="000000"/>
-                </a:solidFill>
-                <a:latin typeface="Calibri" pitchFamily="34" charset="0"/>
-                <a:ea typeface="Calibri" pitchFamily="34" charset="-122"/>
-                <a:cs typeface="Calibri" pitchFamily="34" charset="-120"/>
-              </a:rPr>
-              <a:t xml:space="preserve">All 13 verified against the publisher record </a:t>
-            </a:r>
-            <a:r>
-              <a:rPr lang="en-US" sz="850" dirty="0">
-                <a:solidFill>
-                  <a:srgbClr val="000000"/>
-                </a:solidFill>
-                <a:latin typeface="Calibri" pitchFamily="34" charset="0"/>
-                <a:ea typeface="Calibri" pitchFamily="34" charset="-122"/>
-                <a:cs typeface="Calibri" pitchFamily="34" charset="-120"/>
-              </a:rPr>
-              <a:t xml:space="preserve">— authors, volume, issue and pages resolved through Crossref by DOI and title, not transcribed by hand.</a:t>
+              <a:t xml:space="preserve">M.K. Banda, S. Madichetty, D.M. Natham and S. Koduru, “An Event-Triggered Dual-Polarity Gate Clamp for GaN HEMT Gate Oscillation Suppression,” IEEE Trans. Power Electron., vol. 41, no. 9, pp. 14402–14405, 2026.</a:t>
             </a:r>
           </a:p>
         </p:txBody>
@@ -15145,6 +15034,675 @@
                 <a:cs typeface="Calibri" pitchFamily="34" charset="-120"/>
               </a:rPr>
               <a:t xml:space="preserve">  — four ngspice runs, prints this table.</a:t>
+            </a:r>
+          </a:p>
+        </p:txBody>
+      </p:sp>
+    </p:spTree>
+  </p:cSld>
+  <p:clrMapOvr>
+    <a:masterClrMapping/>
+  </p:clrMapOvr>
+</p:sld>
+</file>
+
+<file path=ppt/slides/slide28.xml><?xml version="1.0" encoding="utf-8"?>
+<p:sld xmlns:a="http://schemas.openxmlformats.org/drawingml/2006/main" xmlns:p="http://schemas.openxmlformats.org/presentationml/2006/main" xmlns:r="http://schemas.openxmlformats.org/officeDocument/2006/relationships">
+  <p:cSld>
+    <p:spTree>
+      <p:nvGrpSpPr>
+        <p:cNvPr id="1" name=""/>
+        <p:cNvGrpSpPr/>
+        <p:nvPr/>
+      </p:nvGrpSpPr>
+      <p:grpSpPr/>
+      <p:sp>
+        <p:nvSpPr>
+          <p:cNvPr id="2" name="Text 0"/>
+          <p:cNvSpPr txBox="1"/>
+          <p:nvPr/>
+        </p:nvSpPr>
+        <p:spPr>
+          <a:xfrm>
+            <a:off x="11460175" y="6446520"/>
+            <a:ext cx="457200" cy="274320"/>
+          </a:xfrm>
+          <a:prstGeom prst="rect">
+            <a:avLst/>
+          </a:prstGeom>
+          <a:noFill/>
+          <a:ln/>
+        </p:spPr>
+        <p:txBody>
+          <a:bodyPr wrap="square" lIns="0" tIns="0" rIns="0" bIns="0" rtlCol="0" anchor="ctr"/>
+          <a:lstStyle/>
+          <a:p>
+            <a:pPr marL="0" indent="0" algn="r">
+              <a:buNone/>
+            </a:pPr>
+            <a:r>
+              <a:rPr lang="en-US" sz="1000" dirty="0">
+                <a:solidFill>
+                  <a:srgbClr val="808080"/>
+                </a:solidFill>
+                <a:latin typeface="Calibri" pitchFamily="34" charset="0"/>
+                <a:ea typeface="Calibri" pitchFamily="34" charset="-122"/>
+                <a:cs typeface="Calibri" pitchFamily="34" charset="-120"/>
+              </a:rPr>
+              <a:t>25</a:t>
+            </a:r>
+            <a:endParaRPr lang="en-US" sz="1000" dirty="0"/>
+          </a:p>
+        </p:txBody>
+      </p:sp>
+      <p:sp>
+        <p:nvSpPr>
+          <p:cNvPr id="3" name="Text 1"/>
+          <p:cNvSpPr txBox="1"/>
+          <p:nvPr/>
+        </p:nvSpPr>
+        <p:spPr>
+          <a:xfrm>
+            <a:off x="548640" y="320040"/>
+            <a:ext cx="9601200" cy="685800"/>
+          </a:xfrm>
+          <a:prstGeom prst="rect">
+            <a:avLst/>
+          </a:prstGeom>
+          <a:noFill/>
+          <a:ln/>
+        </p:spPr>
+        <p:txBody>
+          <a:bodyPr wrap="square" lIns="0" tIns="0" rIns="0" bIns="0" rtlCol="0" anchor="ctr"/>
+          <a:lstStyle/>
+          <a:p>
+            <a:pPr marL="0" indent="0">
+              <a:buNone/>
+            </a:pPr>
+            <a:r>
+              <a:rPr lang="en-US" sz="2800" b="1" dirty="0">
+                <a:solidFill>
+                  <a:srgbClr val="1D2F82"/>
+                </a:solidFill>
+                <a:latin typeface="Calibri" pitchFamily="34" charset="0"/>
+                <a:ea typeface="Calibri" pitchFamily="34" charset="-122"/>
+                <a:cs typeface="Calibri" pitchFamily="34" charset="-120"/>
+              </a:rPr>
+              <a:t>References  (16–30)</a:t>
+            </a:r>
+            <a:endParaRPr lang="en-US" sz="2800" dirty="0"/>
+          </a:p>
+        </p:txBody>
+      </p:sp>
+      <p:pic>
+        <p:nvPicPr>
+          <p:cNvPr id="4" name="Image 0" descr="logo.png"/>
+          <p:cNvPicPr>
+            <a:picLocks noChangeAspect="1"/>
+          </p:cNvPicPr>
+          <p:nvPr/>
+        </p:nvPicPr>
+        <p:blipFill>
+          <a:blip r:embed="rId2"/>
+          <a:stretch>
+            <a:fillRect/>
+          </a:stretch>
+        </p:blipFill>
+        <p:spPr>
+          <a:xfrm>
+            <a:off x="10362895" y="320040"/>
+            <a:ext cx="1371600" cy="518746"/>
+          </a:xfrm>
+          <a:prstGeom prst="rect">
+            <a:avLst/>
+          </a:prstGeom>
+        </p:spPr>
+      </p:pic>
+      <p:sp>
+        <p:nvSpPr>
+          <p:cNvPr id="5" name="Text 2"/>
+          <p:cNvSpPr txBox="1"/>
+          <p:nvPr/>
+        </p:nvSpPr>
+        <p:spPr>
+          <a:xfrm>
+            <a:off x="640080" y="1325880"/>
+            <a:ext cx="10881360" cy="4343400"/>
+          </a:xfrm>
+          <a:prstGeom prst="rect">
+            <a:avLst/>
+          </a:prstGeom>
+          <a:noFill/>
+          <a:ln/>
+        </p:spPr>
+        <p:txBody>
+          <a:bodyPr wrap="square" lIns="0" tIns="0" rIns="0" bIns="0" rtlCol="0" anchor="t"/>
+          <a:lstStyle/>
+          <a:p>
+            <a:pPr marL="177800" indent="0">
+              <a:spcAft>
+                <a:spcPts val="60"/>
+              </a:spcAft>
+              <a:buSzPct val="100000"/>
+              <a:buNone/>
+            </a:pPr>
+            <a:r>
+              <a:rPr lang="en-US" sz="900" b="1" dirty="0">
+                <a:solidFill>
+                  <a:srgbClr val="000000"/>
+                </a:solidFill>
+                <a:latin typeface="Calibri" pitchFamily="34" charset="0"/>
+                <a:ea typeface="Calibri" pitchFamily="34" charset="-122"/>
+                <a:cs typeface="Calibri" pitchFamily="34" charset="-120"/>
+              </a:rPr>
+              <a:t xml:space="preserve">[16]  </a:t>
+            </a:r>
+            <a:r>
+              <a:rPr lang="en-US" sz="900" dirty="0">
+                <a:solidFill>
+                  <a:srgbClr val="000000"/>
+                </a:solidFill>
+                <a:latin typeface="Calibri" pitchFamily="34" charset="0"/>
+                <a:ea typeface="Calibri" pitchFamily="34" charset="-122"/>
+                <a:cs typeface="Calibri" pitchFamily="34" charset="-120"/>
+              </a:rPr>
+              <a:t xml:space="preserve">Z. Yuan, H. Li, M. Zhang, Z. Yang, S. Zhao, H. Wang, X. Wang and L. Ding, “Influence of Negative Gate Bias on Crosstalk Spike in SiC MOSFETs Half-Bridge Circuit,” IEEE J. Emerg. Sel. Topics Power Electron., vol. 14, no. 3, pp. 3217–3229, 2026.</a:t>
+            </a:r>
+          </a:p>
+          <a:p>
+            <a:pPr marL="177800" indent="0">
+              <a:spcAft>
+                <a:spcPts val="60"/>
+              </a:spcAft>
+              <a:buSzPct val="100000"/>
+              <a:buNone/>
+            </a:pPr>
+            <a:r>
+              <a:rPr lang="en-US" sz="900" b="1" dirty="0">
+                <a:solidFill>
+                  <a:srgbClr val="000000"/>
+                </a:solidFill>
+                <a:latin typeface="Calibri" pitchFamily="34" charset="0"/>
+                <a:ea typeface="Calibri" pitchFamily="34" charset="-122"/>
+                <a:cs typeface="Calibri" pitchFamily="34" charset="-120"/>
+              </a:rPr>
+              <a:t xml:space="preserve">[17]  </a:t>
+            </a:r>
+            <a:r>
+              <a:rPr lang="en-US" sz="900" dirty="0">
+                <a:solidFill>
+                  <a:srgbClr val="000000"/>
+                </a:solidFill>
+                <a:latin typeface="Calibri" pitchFamily="34" charset="0"/>
+                <a:ea typeface="Calibri" pitchFamily="34" charset="-122"/>
+                <a:cs typeface="Calibri" pitchFamily="34" charset="-120"/>
+              </a:rPr>
+              <a:t xml:space="preserve">L. Zhang, K. Wang, S. Guo and B. Zhu, “A Gate Driver for Crosstalk Suppression of eGaN HEMT Power Devices,” J. Low Power Electron. Appl., vol. 15, no. 3, pp. 38, 2025.</a:t>
+            </a:r>
+          </a:p>
+          <a:p>
+            <a:pPr marL="177800" indent="0">
+              <a:spcAft>
+                <a:spcPts val="60"/>
+              </a:spcAft>
+              <a:buSzPct val="100000"/>
+              <a:buNone/>
+            </a:pPr>
+            <a:r>
+              <a:rPr lang="en-US" sz="900" b="1" dirty="0">
+                <a:solidFill>
+                  <a:srgbClr val="000000"/>
+                </a:solidFill>
+                <a:latin typeface="Calibri" pitchFamily="34" charset="0"/>
+                <a:ea typeface="Calibri" pitchFamily="34" charset="-122"/>
+                <a:cs typeface="Calibri" pitchFamily="34" charset="-120"/>
+              </a:rPr>
+              <a:t xml:space="preserve">[18]  </a:t>
+            </a:r>
+            <a:r>
+              <a:rPr lang="en-US" sz="900" dirty="0">
+                <a:solidFill>
+                  <a:srgbClr val="000000"/>
+                </a:solidFill>
+                <a:latin typeface="Calibri" pitchFamily="34" charset="0"/>
+                <a:ea typeface="Calibri" pitchFamily="34" charset="-122"/>
+                <a:cs typeface="Calibri" pitchFamily="34" charset="-120"/>
+              </a:rPr>
+              <a:t xml:space="preserve">J. Wu, “Parallel arrangement of MOSFETs, effective suppression of crosstalk: A new gate driver topology,” iEnergy, vol. 2, no. 3, pp. 163–163, 2023.</a:t>
+            </a:r>
+          </a:p>
+          <a:p>
+            <a:pPr marL="177800" indent="0">
+              <a:spcAft>
+                <a:spcPts val="60"/>
+              </a:spcAft>
+              <a:buSzPct val="100000"/>
+              <a:buNone/>
+            </a:pPr>
+            <a:r>
+              <a:rPr lang="en-US" sz="900" b="1" dirty="0">
+                <a:solidFill>
+                  <a:srgbClr val="000000"/>
+                </a:solidFill>
+                <a:latin typeface="Calibri" pitchFamily="34" charset="0"/>
+                <a:ea typeface="Calibri" pitchFamily="34" charset="-122"/>
+                <a:cs typeface="Calibri" pitchFamily="34" charset="-120"/>
+              </a:rPr>
+              <a:t xml:space="preserve">[19]  </a:t>
+            </a:r>
+            <a:r>
+              <a:rPr lang="en-US" sz="900" dirty="0">
+                <a:solidFill>
+                  <a:srgbClr val="000000"/>
+                </a:solidFill>
+                <a:latin typeface="Calibri" pitchFamily="34" charset="0"/>
+                <a:ea typeface="Calibri" pitchFamily="34" charset="-122"/>
+                <a:cs typeface="Calibri" pitchFamily="34" charset="-120"/>
+              </a:rPr>
+              <a:t xml:space="preserve">Y. Mikhaylov, G. Buticchi and M. Galea, “A gate driver for parallel connected MOSFETs with crosstalk suppression,” iEnergy, vol. 2, no. 3, pp. 240–250, 2023.</a:t>
+            </a:r>
+          </a:p>
+          <a:p>
+            <a:pPr marL="177800" indent="0">
+              <a:spcAft>
+                <a:spcPts val="60"/>
+              </a:spcAft>
+              <a:buSzPct val="100000"/>
+              <a:buNone/>
+            </a:pPr>
+            <a:r>
+              <a:rPr lang="en-US" sz="900" b="1" dirty="0">
+                <a:solidFill>
+                  <a:srgbClr val="000000"/>
+                </a:solidFill>
+                <a:latin typeface="Calibri" pitchFamily="34" charset="0"/>
+                <a:ea typeface="Calibri" pitchFamily="34" charset="-122"/>
+                <a:cs typeface="Calibri" pitchFamily="34" charset="-120"/>
+              </a:rPr>
+              <a:t xml:space="preserve">[20]  </a:t>
+            </a:r>
+            <a:r>
+              <a:rPr lang="en-US" sz="900" dirty="0">
+                <a:solidFill>
+                  <a:srgbClr val="000000"/>
+                </a:solidFill>
+                <a:latin typeface="Calibri" pitchFamily="34" charset="0"/>
+                <a:ea typeface="Calibri" pitchFamily="34" charset="-122"/>
+                <a:cs typeface="Calibri" pitchFamily="34" charset="-120"/>
+              </a:rPr>
+              <a:t xml:space="preserve">W. Liu and H. Min, “A Load Adaptive Active Gate Driver with Fast-Switching Three-Level Current Source for Overshoot Suppression in GaN-Based Half-Bridge Converters,” IEEE Trans. Power Electron., pp. 1–8, 2026.</a:t>
+            </a:r>
+          </a:p>
+          <a:p>
+            <a:pPr marL="177800" indent="0">
+              <a:spcAft>
+                <a:spcPts val="60"/>
+              </a:spcAft>
+              <a:buSzPct val="100000"/>
+              <a:buNone/>
+            </a:pPr>
+            <a:r>
+              <a:rPr lang="en-US" sz="900" b="1" dirty="0">
+                <a:solidFill>
+                  <a:srgbClr val="000000"/>
+                </a:solidFill>
+                <a:latin typeface="Calibri" pitchFamily="34" charset="0"/>
+                <a:ea typeface="Calibri" pitchFamily="34" charset="-122"/>
+                <a:cs typeface="Calibri" pitchFamily="34" charset="-120"/>
+              </a:rPr>
+              <a:t xml:space="preserve">[21]  </a:t>
+            </a:r>
+            <a:r>
+              <a:rPr lang="en-US" sz="900" dirty="0">
+                <a:solidFill>
+                  <a:srgbClr val="000000"/>
+                </a:solidFill>
+                <a:latin typeface="Calibri" pitchFamily="34" charset="0"/>
+                <a:ea typeface="Calibri" pitchFamily="34" charset="-122"/>
+                <a:cs typeface="Calibri" pitchFamily="34" charset="-120"/>
+              </a:rPr>
+              <a:t xml:space="preserve">R. Chen, F. Wang, H. Bai and L.M. Tolbert, “A Simple Gate Driver Circuit for Turn-on Overvoltage Suppression of 10 kV SiC MOSFETs With Temporarily Lowering Gate Voltage During &lt;i&gt;dv/dt&lt;/i&gt;,” IEEE Trans. Ind. Electron., pp. 1–6, 2026.</a:t>
+            </a:r>
+          </a:p>
+          <a:p>
+            <a:pPr marL="177800" indent="0">
+              <a:spcAft>
+                <a:spcPts val="60"/>
+              </a:spcAft>
+              <a:buSzPct val="100000"/>
+              <a:buNone/>
+            </a:pPr>
+            <a:r>
+              <a:rPr lang="en-US" sz="900" b="1" dirty="0">
+                <a:solidFill>
+                  <a:srgbClr val="000000"/>
+                </a:solidFill>
+                <a:latin typeface="Calibri" pitchFamily="34" charset="0"/>
+                <a:ea typeface="Calibri" pitchFamily="34" charset="-122"/>
+                <a:cs typeface="Calibri" pitchFamily="34" charset="-120"/>
+              </a:rPr>
+              <a:t xml:space="preserve">[22]  </a:t>
+            </a:r>
+            <a:r>
+              <a:rPr lang="en-US" sz="900" dirty="0">
+                <a:solidFill>
+                  <a:srgbClr val="000000"/>
+                </a:solidFill>
+                <a:latin typeface="Calibri" pitchFamily="34" charset="0"/>
+                <a:ea typeface="Calibri" pitchFamily="34" charset="-122"/>
+                <a:cs typeface="Calibri" pitchFamily="34" charset="-120"/>
+              </a:rPr>
+              <a:t xml:space="preserve">D. Yu, M. Yang, L. Yin, K. Hu, W. Zhang and Q. Fu, “A Dual-Loop Active Gate Driver With Independent Voltage Slew Rate and Overshoot Control for Switching Loss Optimization of SiC MOSFETs,” IEEE Trans. Ind. Electron., pp. 1–12, 2026.</a:t>
+            </a:r>
+          </a:p>
+          <a:p>
+            <a:pPr marL="177800" indent="0">
+              <a:spcAft>
+                <a:spcPts val="60"/>
+              </a:spcAft>
+              <a:buSzPct val="100000"/>
+              <a:buNone/>
+            </a:pPr>
+            <a:r>
+              <a:rPr lang="en-US" sz="900" b="1" dirty="0">
+                <a:solidFill>
+                  <a:srgbClr val="000000"/>
+                </a:solidFill>
+                <a:latin typeface="Calibri" pitchFamily="34" charset="0"/>
+                <a:ea typeface="Calibri" pitchFamily="34" charset="-122"/>
+                <a:cs typeface="Calibri" pitchFamily="34" charset="-120"/>
+              </a:rPr>
+              <a:t xml:space="preserve">[23]  </a:t>
+            </a:r>
+            <a:r>
+              <a:rPr lang="en-US" sz="900" dirty="0">
+                <a:solidFill>
+                  <a:srgbClr val="000000"/>
+                </a:solidFill>
+                <a:latin typeface="Calibri" pitchFamily="34" charset="0"/>
+                <a:ea typeface="Calibri" pitchFamily="34" charset="-122"/>
+                <a:cs typeface="Calibri" pitchFamily="34" charset="-120"/>
+              </a:rPr>
+              <a:t xml:space="preserve">P. Xiang, R. Hao, J. Cai and X. You, “An Active Gate Driver of SiC MOSFET Module Based on PCB Rogowski Coil for Optimizing Tradeoff Between Overshoot and Switching Loss,” IEEE Trans. Power Electron., vol. 38, no. 1, pp. 245–260, 2023.</a:t>
+            </a:r>
+          </a:p>
+          <a:p>
+            <a:pPr marL="177800" indent="0">
+              <a:spcAft>
+                <a:spcPts val="60"/>
+              </a:spcAft>
+              <a:buSzPct val="100000"/>
+              <a:buNone/>
+            </a:pPr>
+            <a:r>
+              <a:rPr lang="en-US" sz="900" b="1" dirty="0">
+                <a:solidFill>
+                  <a:srgbClr val="000000"/>
+                </a:solidFill>
+                <a:latin typeface="Calibri" pitchFamily="34" charset="0"/>
+                <a:ea typeface="Calibri" pitchFamily="34" charset="-122"/>
+                <a:cs typeface="Calibri" pitchFamily="34" charset="-120"/>
+              </a:rPr>
+              <a:t xml:space="preserve">[24]  </a:t>
+            </a:r>
+            <a:r>
+              <a:rPr lang="en-US" sz="900" dirty="0">
+                <a:solidFill>
+                  <a:srgbClr val="000000"/>
+                </a:solidFill>
+                <a:latin typeface="Calibri" pitchFamily="34" charset="0"/>
+                <a:ea typeface="Calibri" pitchFamily="34" charset="-122"/>
+                <a:cs typeface="Calibri" pitchFamily="34" charset="-120"/>
+              </a:rPr>
+              <a:t xml:space="preserve">S. Fukunaga, H. Takayama and T. Hikihara, “Slew rate control of switching transient for SiC MOSFET in boost converter using digital active gate driver,” IET Power Electron., vol. 16, no. 3, pp. 472–482, 2022.</a:t>
+            </a:r>
+          </a:p>
+          <a:p>
+            <a:pPr marL="177800" indent="0">
+              <a:spcAft>
+                <a:spcPts val="60"/>
+              </a:spcAft>
+              <a:buSzPct val="100000"/>
+              <a:buNone/>
+            </a:pPr>
+            <a:r>
+              <a:rPr lang="en-US" sz="900" b="1" dirty="0">
+                <a:solidFill>
+                  <a:srgbClr val="000000"/>
+                </a:solidFill>
+                <a:latin typeface="Calibri" pitchFamily="34" charset="0"/>
+                <a:ea typeface="Calibri" pitchFamily="34" charset="-122"/>
+                <a:cs typeface="Calibri" pitchFamily="34" charset="-120"/>
+              </a:rPr>
+              <a:t xml:space="preserve">[25]  </a:t>
+            </a:r>
+            <a:r>
+              <a:rPr lang="en-US" sz="900" dirty="0">
+                <a:solidFill>
+                  <a:srgbClr val="000000"/>
+                </a:solidFill>
+                <a:latin typeface="Calibri" pitchFamily="34" charset="0"/>
+                <a:ea typeface="Calibri" pitchFamily="34" charset="-122"/>
+                <a:cs typeface="Calibri" pitchFamily="34" charset="-120"/>
+              </a:rPr>
+              <a:t xml:space="preserve">C. Xu, P. Fu, X. Liao, Z. Zhu and L. Liu, “An Integrated Driver With Real-Time Predictive Dead-Time Optimization Technique for GaN-Based Synchronous Buck Converter,” IEEE J. Emerg. Sel. Topics Power Electron., vol. 13, no. 3, pp. 3173–3183, 2025.</a:t>
+            </a:r>
+          </a:p>
+          <a:p>
+            <a:pPr marL="177800" indent="0">
+              <a:spcAft>
+                <a:spcPts val="60"/>
+              </a:spcAft>
+              <a:buSzPct val="100000"/>
+              <a:buNone/>
+            </a:pPr>
+            <a:r>
+              <a:rPr lang="en-US" sz="900" b="1" dirty="0">
+                <a:solidFill>
+                  <a:srgbClr val="000000"/>
+                </a:solidFill>
+                <a:latin typeface="Calibri" pitchFamily="34" charset="0"/>
+                <a:ea typeface="Calibri" pitchFamily="34" charset="-122"/>
+                <a:cs typeface="Calibri" pitchFamily="34" charset="-120"/>
+              </a:rPr>
+              <a:t xml:space="preserve">[26]  </a:t>
+            </a:r>
+            <a:r>
+              <a:rPr lang="en-US" sz="900" dirty="0">
+                <a:solidFill>
+                  <a:srgbClr val="000000"/>
+                </a:solidFill>
+                <a:latin typeface="Calibri" pitchFamily="34" charset="0"/>
+                <a:ea typeface="Calibri" pitchFamily="34" charset="-122"/>
+                <a:cs typeface="Calibri" pitchFamily="34" charset="-120"/>
+              </a:rPr>
+              <a:t xml:space="preserve">C. Chen, P. Chiu, Y. Chen, P. Wang and Y. Chang, “An Integrated Driver With Adaptive Dead-Time Control for GaN-Based Synchronous Buck Converter,” IEEE Trans. Circuits Syst. II, vol. 69, no. 2, pp. 539–543, 2022.</a:t>
+            </a:r>
+          </a:p>
+          <a:p>
+            <a:pPr marL="177800" indent="0">
+              <a:spcAft>
+                <a:spcPts val="60"/>
+              </a:spcAft>
+              <a:buSzPct val="100000"/>
+              <a:buNone/>
+            </a:pPr>
+            <a:r>
+              <a:rPr lang="en-US" sz="900" b="1" dirty="0">
+                <a:solidFill>
+                  <a:srgbClr val="000000"/>
+                </a:solidFill>
+                <a:latin typeface="Calibri" pitchFamily="34" charset="0"/>
+                <a:ea typeface="Calibri" pitchFamily="34" charset="-122"/>
+                <a:cs typeface="Calibri" pitchFamily="34" charset="-120"/>
+              </a:rPr>
+              <a:t xml:space="preserve">[27]  </a:t>
+            </a:r>
+            <a:r>
+              <a:rPr lang="en-US" sz="900" dirty="0">
+                <a:solidFill>
+                  <a:srgbClr val="000000"/>
+                </a:solidFill>
+                <a:latin typeface="Calibri" pitchFamily="34" charset="0"/>
+                <a:ea typeface="Calibri" pitchFamily="34" charset="-122"/>
+                <a:cs typeface="Calibri" pitchFamily="34" charset="-120"/>
+              </a:rPr>
+              <a:t xml:space="preserve">J. Tan, Z. Zhou and G. Zou, “A Programmable Gate Driver Module-Based Multistage Voltage Regulation SiC MOSFET Switching Strategy,” Electronics, vol. 13, no. 22, pp. 4379, 2024.</a:t>
+            </a:r>
+          </a:p>
+          <a:p>
+            <a:pPr marL="177800" indent="0">
+              <a:spcAft>
+                <a:spcPts val="60"/>
+              </a:spcAft>
+              <a:buSzPct val="100000"/>
+              <a:buNone/>
+            </a:pPr>
+            <a:r>
+              <a:rPr lang="en-US" sz="900" b="1" dirty="0">
+                <a:solidFill>
+                  <a:srgbClr val="000000"/>
+                </a:solidFill>
+                <a:latin typeface="Calibri" pitchFamily="34" charset="0"/>
+                <a:ea typeface="Calibri" pitchFamily="34" charset="-122"/>
+                <a:cs typeface="Calibri" pitchFamily="34" charset="-120"/>
+              </a:rPr>
+              <a:t xml:space="preserve">[28]  </a:t>
+            </a:r>
+            <a:r>
+              <a:rPr lang="en-US" sz="900" dirty="0">
+                <a:solidFill>
+                  <a:srgbClr val="000000"/>
+                </a:solidFill>
+                <a:latin typeface="Calibri" pitchFamily="34" charset="0"/>
+                <a:ea typeface="Calibri" pitchFamily="34" charset="-122"/>
+                <a:cs typeface="Calibri" pitchFamily="34" charset="-120"/>
+              </a:rPr>
+              <a:t xml:space="preserve">C. Chen, P. Wang, S. Li, Y. Chen and Y. Chang, “An Integrated Driver With Bang-Bang Dead-Time Control and Charge Sharing Bootstrap Circuit for GaN Synchronous Buck Converter,” IEEE Trans. Power Electron., vol. 37, no. 8, pp. 9503–9514, 2022.</a:t>
+            </a:r>
+          </a:p>
+          <a:p>
+            <a:pPr marL="177800" indent="0">
+              <a:spcAft>
+                <a:spcPts val="60"/>
+              </a:spcAft>
+              <a:buSzPct val="100000"/>
+              <a:buNone/>
+            </a:pPr>
+            <a:r>
+              <a:rPr lang="en-US" sz="900" b="1" dirty="0">
+                <a:solidFill>
+                  <a:srgbClr val="000000"/>
+                </a:solidFill>
+                <a:latin typeface="Calibri" pitchFamily="34" charset="0"/>
+                <a:ea typeface="Calibri" pitchFamily="34" charset="-122"/>
+                <a:cs typeface="Calibri" pitchFamily="34" charset="-120"/>
+              </a:rPr>
+              <a:t xml:space="preserve">[29]  </a:t>
+            </a:r>
+            <a:r>
+              <a:rPr lang="en-US" sz="900" dirty="0">
+                <a:solidFill>
+                  <a:srgbClr val="000000"/>
+                </a:solidFill>
+                <a:latin typeface="Calibri" pitchFamily="34" charset="0"/>
+                <a:ea typeface="Calibri" pitchFamily="34" charset="-122"/>
+                <a:cs typeface="Calibri" pitchFamily="34" charset="-120"/>
+              </a:rPr>
+              <a:t xml:space="preserve">G.H. Thuc, M. Tsai, C. Chen, J. Fu, W. Wu and W. Lin, “A Current Source Gate Driver with Dual-Edge Adaptive Slew Rate for GaN Devices,” in Proc. 2026 IEEE Applied Power Electronics Conference and Exposition (APEC), 2026.</a:t>
+            </a:r>
+          </a:p>
+          <a:p>
+            <a:pPr marL="177800" indent="0">
+              <a:spcAft>
+                <a:spcPts val="60"/>
+              </a:spcAft>
+              <a:buSzPct val="100000"/>
+              <a:buNone/>
+            </a:pPr>
+            <a:r>
+              <a:rPr lang="en-US" sz="900" b="1" dirty="0">
+                <a:solidFill>
+                  <a:srgbClr val="000000"/>
+                </a:solidFill>
+                <a:latin typeface="Calibri" pitchFamily="34" charset="0"/>
+                <a:ea typeface="Calibri" pitchFamily="34" charset="-122"/>
+                <a:cs typeface="Calibri" pitchFamily="34" charset="-120"/>
+              </a:rPr>
+              <a:t xml:space="preserve">[30]  </a:t>
+            </a:r>
+            <a:r>
+              <a:rPr lang="en-US" sz="900" dirty="0">
+                <a:solidFill>
+                  <a:srgbClr val="000000"/>
+                </a:solidFill>
+                <a:latin typeface="Calibri" pitchFamily="34" charset="0"/>
+                <a:ea typeface="Calibri" pitchFamily="34" charset="-122"/>
+                <a:cs typeface="Calibri" pitchFamily="34" charset="-120"/>
+              </a:rPr>
+              <a:t xml:space="preserve">G. Wu, Y. Huang, Y. Chen and C. Chen, “Closed-loop Slew Rate Control of Active Current Source Gate Driver with Digital Implementation for SiC MOSFET,” in Proc. 2025 IEEE Energy Conversion Conference Congress and Exposition (ECCE), 2025.</a:t>
+            </a:r>
+          </a:p>
+          <a:p>
+            <a:pPr marL="177800" indent="0">
+              <a:spcAft>
+                <a:spcPts val="160"/>
+              </a:spcAft>
+              <a:buSzPct val="100000"/>
+              <a:buNone/>
+            </a:pPr>
+            <a:r>
+              <a:rPr lang="en-US" sz="850" dirty="0">
+                <a:solidFill>
+                  <a:srgbClr val="000000"/>
+                </a:solidFill>
+                <a:latin typeface="Calibri" pitchFamily="34" charset="0"/>
+                <a:ea typeface="Calibri" pitchFamily="34" charset="-122"/>
+                <a:cs typeface="Calibri" pitchFamily="34" charset="-120"/>
+              </a:rPr>
+              <a:t xml:space="preserve">All 30 verified against the publisher record — authors, volume, issue and pages resolved through Crossref by DOI and title, not transcribed by hand.</a:t>
+            </a:r>
+          </a:p>
+        </p:txBody>
+      </p:sp>
+      <p:sp>
+        <p:nvSpPr>
+          <p:cNvPr id="6" name="Text 3"/>
+          <p:cNvSpPr txBox="1"/>
+          <p:nvPr/>
+        </p:nvSpPr>
+        <p:spPr>
+          <a:xfrm>
+            <a:off x="640080" y="5806440"/>
+            <a:ext cx="10881360" cy="365760"/>
+          </a:xfrm>
+          <a:prstGeom prst="rect">
+            <a:avLst/>
+          </a:prstGeom>
+          <a:noFill/>
+          <a:ln/>
+        </p:spPr>
+        <p:txBody>
+          <a:bodyPr wrap="square" lIns="0" tIns="0" rIns="0" bIns="0" rtlCol="0" anchor="ctr"/>
+          <a:lstStyle/>
+          <a:p>
+            <a:pPr marL="177800" indent="0">
+              <a:spcAft>
+                <a:spcPts val="0"/>
+              </a:spcAft>
+              <a:buSzPct val="100000"/>
+              <a:buNone/>
+            </a:pPr>
+            <a:r>
+              <a:rPr lang="en-US" sz="1200" dirty="0">
+                <a:solidFill>
+                  <a:srgbClr val="000000"/>
+                </a:solidFill>
+                <a:latin typeface="Calibri" pitchFamily="34" charset="0"/>
+                <a:ea typeface="Calibri" pitchFamily="34" charset="-122"/>
+                <a:cs typeface="Calibri" pitchFamily="34" charset="-120"/>
+              </a:rPr>
+              <a:t xml:space="preserve">Use IEEE format. Every reference listed must be cited in the slides / report.</a:t>
             </a:r>
           </a:p>
         </p:txBody>
@@ -16646,6 +17204,17 @@
                         <a:cs typeface="Calibri" charset="0"/>
                       </a:endParaRPr>
                     </a:p>
+                    <a:p>
+                      <a:r>
+                        <a:rPr sz="1050" b="0">
+                          <a:solidFill>
+                            <a:srgbClr val="000000"/>
+                          </a:solidFill>
+                          <a:latin typeface="Calibri"/>
+                        </a:rPr>
+                        <a:t>[14]–[19]</a:t>
+                      </a:r>
+                    </a:p>
                   </a:txBody>
                   <a:tcPr marL="54864" marR="54864" marT="54864" marB="54864" anchor="ctr">
                     <a:lnL w="9525" cap="flat" cmpd="sng" algn="ctr">
@@ -16958,6 +17527,17 @@
                         <a:ea typeface="Calibri" charset="0"/>
                         <a:cs typeface="Calibri" charset="0"/>
                       </a:endParaRPr>
+                    </a:p>
+                    <a:p>
+                      <a:r>
+                        <a:rPr sz="1050" b="0">
+                          <a:solidFill>
+                            <a:srgbClr val="000000"/>
+                          </a:solidFill>
+                          <a:latin typeface="Calibri"/>
+                        </a:rPr>
+                        <a:t>[20]–[24]</a:t>
+                      </a:r>
                     </a:p>
                   </a:txBody>
                   <a:tcPr marL="54864" marR="54864" marT="54864" marB="54864" anchor="ctr">
@@ -17272,6 +17852,17 @@
                         <a:cs typeface="Calibri" charset="0"/>
                       </a:endParaRPr>
                     </a:p>
+                    <a:p>
+                      <a:r>
+                        <a:rPr sz="1050" b="0">
+                          <a:solidFill>
+                            <a:srgbClr val="000000"/>
+                          </a:solidFill>
+                          <a:latin typeface="Calibri"/>
+                        </a:rPr>
+                        <a:t>[25] [26]</a:t>
+                      </a:r>
+                    </a:p>
                   </a:txBody>
                   <a:tcPr marL="54864" marR="54864" marT="54864" marB="54864" anchor="ctr">
                     <a:lnL w="9525" cap="flat" cmpd="sng" algn="ctr">
@@ -17585,6 +18176,17 @@
                         <a:cs typeface="Calibri" charset="0"/>
                       </a:endParaRPr>
                     </a:p>
+                    <a:p>
+                      <a:r>
+                        <a:rPr sz="1050" b="0">
+                          <a:solidFill>
+                            <a:srgbClr val="000000"/>
+                          </a:solidFill>
+                          <a:latin typeface="Calibri"/>
+                        </a:rPr>
+                        <a:t>[27]–[30]</a:t>
+                      </a:r>
+                    </a:p>
                   </a:txBody>
                   <a:tcPr marL="54864" marR="54864" marT="54864" marB="54864" anchor="ctr">
                     <a:lnL w="9525" cap="flat" cmpd="sng" algn="ctr">
@@ -17789,7 +18391,7 @@
                 <a:ea typeface="Calibri" pitchFamily="34" charset="-122"/>
                 <a:cs typeface="Calibri" pitchFamily="34" charset="-120"/>
               </a:rPr>
-              <a:t xml:space="preserve">13 references. Grouped by what the driver DOES, not by date. Clusters A–C choose a setting or regulate it in analogue; only cluster D makes the setting a digital code — which is what makes an exhaustive search, and this project’s question, possible at all.</a:t>
+              <a:t xml:space="preserve">30 references, all publisher-verified, grouped by what the driver DOES. Clusters A–C set or regulate in analogue; only cluster D makes the setting a digital CODE — which is what makes an exhaustive search possible at all.</a:t>
             </a:r>
           </a:p>
         </p:txBody>

--- a/review/Review1_GaN_Segmented_Gate_Driver.pptx
+++ b/review/Review1_GaN_Segmented_Gate_Driver.pptx
@@ -8941,7 +8941,7 @@
         <p:spPr>
           <a:xfrm>
             <a:off x="3474720" y="3063240"/>
-            <a:ext cx="4023360" cy="384048"/>
+            <a:ext cx="4617720" cy="384048"/>
           </a:xfrm>
           <a:prstGeom prst="rect">
             <a:avLst/>
@@ -8957,15 +8957,15 @@
               <a:buNone/>
             </a:pPr>
             <a:r>
-              <a:rPr lang="en-US" sz="1400" dirty="0">
-                <a:solidFill>
-                  <a:srgbClr val="000000"/>
-                </a:solidFill>
-                <a:latin typeface="Calibri" pitchFamily="34" charset="0"/>
-                <a:ea typeface="Calibri" pitchFamily="34" charset="-122"/>
-                <a:cs typeface="Calibri" pitchFamily="34" charset="-120"/>
-              </a:rPr>
-              <a:t>Amritha S  —  23BEC1368</a:t>
+              <a:rPr lang="en-US" sz="950" dirty="0">
+                <a:solidFill>
+                  <a:srgbClr val="000000"/>
+                </a:solidFill>
+                <a:latin typeface="Calibri" pitchFamily="34" charset="0"/>
+                <a:ea typeface="Calibri" pitchFamily="34" charset="-122"/>
+                <a:cs typeface="Calibri" pitchFamily="34" charset="-120"/>
+              </a:rPr>
+              <a:t>Sanjay Kumar 23BEC1447  ·  Aamir Abdullah 23BPS1197  ·  Amritha S 23BEC1368</a:t>
             </a:r>
             <a:endParaRPr lang="en-US" sz="1400" dirty="0"/>
           </a:p>

--- a/review/Review1_GaN_Segmented_Gate_Driver.pptx
+++ b/review/Review1_GaN_Segmented_Gate_Driver.pptx
@@ -2713,7 +2713,7 @@
                 <a:ea typeface="Calibri" pitchFamily="34" charset="-122"/>
                 <a:cs typeface="Calibri" pitchFamily="34" charset="-120"/>
               </a:rPr>
-              <a:t xml:space="preserve">ngspice 42 (every sweep) · LTspice · Cadence Spectre / OCEAN · SKY130 PDK (BSIM4) · Python / NumPy / Matplotlib · MATLAB Online, used as an independent cross-check of the Pareto analysis · Git</a:t>
+              <a:t xml:space="preserve">ngspice 42 (every sweep) · LTspice 24, in which the port was re-run · Icarus Verilog (RTL, 8 asserted properties) · Xilinx Vivado (export written) · Cadence Spectre / OCEAN · SKY130 PDK (BSIM4) · Python / NumPy / Matplotlib · MATLAB Online, an independent cross-check of the Pareto analysis · Git</a:t>
             </a:r>
           </a:p>
           <a:p>
@@ -10183,7 +10183,7 @@
                 <a:ea typeface="Calibri" pitchFamily="34" charset="-122"/>
                 <a:cs typeface="Calibri" pitchFamily="34" charset="-120"/>
               </a:rPr>
-              <a:t xml:space="preserve">Use IEEE format. Every reference listed must be cited in the slides / report.</a:t>
+              <a:t xml:space="preserve"/>
             </a:r>
           </a:p>
         </p:txBody>
@@ -10254,7 +10254,7 @@
                 <a:ea typeface="Calibri" pitchFamily="34" charset="-122"/>
                 <a:cs typeface="Calibri" pitchFamily="34" charset="-120"/>
               </a:rPr>
-              <a:t>27</a:t>
+              <a:t>28</a:t>
             </a:r>
             <a:endParaRPr lang="en-US" sz="1000" dirty="0"/>
           </a:p>
@@ -15089,7 +15089,7 @@
                 <a:ea typeface="Calibri" pitchFamily="34" charset="-122"/>
                 <a:cs typeface="Calibri" pitchFamily="34" charset="-120"/>
               </a:rPr>
-              <a:t>25</a:t>
+              <a:t>27</a:t>
             </a:r>
             <a:endParaRPr lang="en-US" sz="1000" dirty="0"/>
           </a:p>
@@ -15361,7 +15361,7 @@
                 <a:ea typeface="Calibri" pitchFamily="34" charset="-122"/>
                 <a:cs typeface="Calibri" pitchFamily="34" charset="-120"/>
               </a:rPr>
-              <a:t xml:space="preserve">R. Chen, F. Wang, H. Bai and L.M. Tolbert, “A Simple Gate Driver Circuit for Turn-on Overvoltage Suppression of 10 kV SiC MOSFETs With Temporarily Lowering Gate Voltage During &lt;i&gt;dv/dt&lt;/i&gt;,” IEEE Trans. Ind. Electron., pp. 1–6, 2026.</a:t>
+              <a:t xml:space="preserve">R. Chen, F. Wang, H. Bai and L.M. Tolbert, “A Simple Gate Driver Circuit for Turn-on Overvoltage Suppression of 10 kV SiC MOSFETs With Temporarily Lowering Gate Voltage During dv/dt,” IEEE Trans. Ind. Electron., pp. 1–6, 2026.</a:t>
             </a:r>
           </a:p>
           <a:p>
@@ -15702,7 +15702,7 @@
                 <a:ea typeface="Calibri" pitchFamily="34" charset="-122"/>
                 <a:cs typeface="Calibri" pitchFamily="34" charset="-120"/>
               </a:rPr>
-              <a:t xml:space="preserve">Use IEEE format. Every reference listed must be cited in the slides / report.</a:t>
+              <a:t xml:space="preserve"/>
             </a:r>
           </a:p>
         </p:txBody>
@@ -20749,8 +20749,8 @@
         </p:nvSpPr>
         <p:spPr>
           <a:xfrm>
-            <a:off x="548640" y="6053328"/>
-            <a:ext cx="11064240" cy="365760"/>
+            <a:off x="548640" y="6291072"/>
+            <a:ext cx="10332720" cy="365760"/>
           </a:xfrm>
           <a:prstGeom prst="rect">
             <a:avLst/>
@@ -20778,7 +20778,7 @@
                 <a:ea typeface="Calibri" pitchFamily="34" charset="-122"/>
                 <a:cs typeface="Calibri" pitchFamily="34" charset="-120"/>
               </a:rPr>
-              <a:t xml:space="preserve">[9] is the BASE PAPER: we reproduce its premise — a gate waveform chosen by a multibit code — on GaN, then extend it. Titles, venues, years and DOIs are confirmed; author lists and page ranges sit behind IEEE Xplore, which the build environment cannot reach, and are not invented.</a:t>
+              <a:t xml:space="preserve">[9] is the BASE PAPER: we reproduce its premise — a gate waveform chosen by a multibit code — on GaN, then extend it. All five are verified against the publisher record.</a:t>
             </a:r>
           </a:p>
         </p:txBody>

--- a/review/Review1_GaN_Segmented_Gate_Driver.pptx
+++ b/review/Review1_GaN_Segmented_Gate_Driver.pptx
@@ -3076,7 +3076,7 @@
                 <a:ea typeface="Calibri" pitchFamily="34" charset="-122"/>
                 <a:cs typeface="Calibri" pitchFamily="34" charset="-120"/>
               </a:rPr>
-              <a:t xml:space="preserve">Synthesised. </a:t>
+              <a:t xml:space="preserve">Synthesised to Artix-7 primitives. </a:t>
             </a:r>
             <a:r>
               <a:rPr lang="en-US" sz="1500" dirty="0">
@@ -3098,7 +3098,7 @@
                 <a:ea typeface="Calibri" pitchFamily="34" charset="-122"/>
                 <a:cs typeface="Calibri" pitchFamily="34" charset="-120"/>
               </a:rPr>
-              <a:t xml:space="preserve">371 cells to 129</a:t>
+              <a:t xml:space="preserve">53 LUTs to 27</a:t>
             </a:r>
             <a:r>
               <a:rPr lang="en-US" sz="1500" dirty="0">
@@ -3109,7 +3109,7 @@
                 <a:ea typeface="Calibri" pitchFamily="34" charset="-122"/>
                 <a:cs typeface="Calibri" pitchFamily="34" charset="-120"/>
               </a:rPr>
-              <a:t xml:space="preserve"> — 65 % less logic for the 3.9 % of baseline that adaptation buys. Generic gates, not Xilinx LUTs. Vivado export written (rtl/vivado/, bench passes); not yet run — Windows/Linux only.</a:t>
+              <a:t xml:space="preserve"> (33 FFs to 25) — half the fabric for the 3.9 % adaptation buys. yosys synth_xilinx; Vivado itself needs Windows/Linux, so no place-and-route or timing yet.</a:t>
             </a:r>
           </a:p>
         </p:txBody>

--- a/review/Review1_GaN_Segmented_Gate_Driver.pptx
+++ b/review/Review1_GaN_Segmented_Gate_Driver.pptx
@@ -4076,8 +4076,8 @@
         </p:nvSpPr>
         <p:spPr>
           <a:xfrm>
-            <a:off x="6995160" y="3154680"/>
-            <a:ext cx="4526280" cy="3108960"/>
+            <a:off x="6995160" y="3035808"/>
+            <a:ext cx="4526280" cy="3401568"/>
           </a:xfrm>
           <a:prstGeom prst="rect">
             <a:avLst/>
@@ -4118,6 +4118,59 @@
                 <a:cs typeface="Calibri" pitchFamily="34" charset="-120"/>
               </a:rPr>
               <a:t xml:space="preserve">Three corners lose 1–4 % from a fixed word; one loses 12.7 %.</a:t>
+            </a:r>
+          </a:p>
+          <a:p>
+            <a:pPr marL="177800" indent="0">
+              <a:spcAft>
+                <a:spcPts val="180"/>
+              </a:spcAft>
+              <a:buSzPct val="100000"/>
+              <a:buNone/>
+            </a:pPr>
+            <a:r>
+              <a:rPr lang="en-US" sz="1200" b="1" dirty="0">
+                <a:solidFill>
+                  <a:srgbClr val="000000"/>
+                </a:solidFill>
+                <a:latin typeface="Calibri" pitchFamily="34" charset="0"/>
+                <a:ea typeface="Calibri" pitchFamily="34" charset="-122"/>
+                <a:cs typeface="Calibri" pitchFamily="34" charset="-120"/>
+              </a:rPr>
+              <a:t xml:space="preserve">5.2 % is the generous figure: </a:t>
+            </a:r>
+            <a:r>
+              <a:rPr lang="en-US" sz="1200" dirty="0">
+                <a:solidFill>
+                  <a:srgbClr val="000000"/>
+                </a:solidFill>
+                <a:latin typeface="Calibri" pitchFamily="34" charset="0"/>
+                <a:ea typeface="Calibri" pitchFamily="34" charset="-122"/>
+                <a:cs typeface="Calibri" pitchFamily="34" charset="-120"/>
+              </a:rPr>
+              <a:t xml:space="preserve">the denser 36-point grid gives </a:t>
+            </a:r>
+            <a:r>
+              <a:rPr lang="en-US" sz="1200" b="1" dirty="0">
+                <a:solidFill>
+                  <a:srgbClr val="000000"/>
+                </a:solidFill>
+                <a:latin typeface="Calibri" pitchFamily="34" charset="0"/>
+                <a:ea typeface="Calibri" pitchFamily="34" charset="-122"/>
+                <a:cs typeface="Calibri" pitchFamily="34" charset="-120"/>
+              </a:rPr>
+              <a:t xml:space="preserve">2.0 %</a:t>
+            </a:r>
+            <a:r>
+              <a:rPr lang="en-US" sz="1200" dirty="0">
+                <a:solidFill>
+                  <a:srgbClr val="000000"/>
+                </a:solidFill>
+                <a:latin typeface="Calibri" pitchFamily="34" charset="0"/>
+                <a:ea typeface="Calibri" pitchFamily="34" charset="-122"/>
+                <a:cs typeface="Calibri" pitchFamily="34" charset="-120"/>
+              </a:rPr>
+              <a:t xml:space="preserve">.</a:t>
             </a:r>
           </a:p>
           <a:p>
@@ -17196,7 +17249,7 @@
                           </a:solidFill>
                           <a:latin typeface="Calibri"/>
                         </a:rPr>
-                        <a:t>[1] [3] [4] [11] [12]</a:t>
+                        <a:t>[1] [2] [3] [4] [11] [12]</a:t>
                       </a:r>
                       <a:endParaRPr lang="en-US" sz="1300" dirty="0">
                         <a:latin typeface="Calibri" charset="0"/>
@@ -17212,7 +17265,7 @@
                           </a:solidFill>
                           <a:latin typeface="Calibri"/>
                         </a:rPr>
-                        <a:t>[14]–[19]</a:t>
+                        <a:t>[14]–[19] [21]</a:t>
                       </a:r>
                     </a:p>
                   </a:txBody>
@@ -17536,7 +17589,7 @@
                           </a:solidFill>
                           <a:latin typeface="Calibri"/>
                         </a:rPr>
-                        <a:t>[20]–[24]</a:t>
+                        <a:t>[20] [22] [23] [29] [30]</a:t>
                       </a:r>
                     </a:p>
                   </a:txBody>
@@ -17860,7 +17913,7 @@
                           </a:solidFill>
                           <a:latin typeface="Calibri"/>
                         </a:rPr>
-                        <a:t>[25] [26]</a:t>
+                        <a:t>[25] [26] [28]</a:t>
                       </a:r>
                     </a:p>
                   </a:txBody>
@@ -18184,7 +18237,7 @@
                           </a:solidFill>
                           <a:latin typeface="Calibri"/>
                         </a:rPr>
-                        <a:t>[27]–[30]</a:t>
+                        <a:t>[24] [27]</a:t>
                       </a:r>
                     </a:p>
                   </a:txBody>

--- a/review/Review1_GaN_Segmented_Gate_Driver.pptx
+++ b/review/Review1_GaN_Segmented_Gate_Driver.pptx
@@ -2713,7 +2713,7 @@
                 <a:ea typeface="Calibri" pitchFamily="34" charset="-122"/>
                 <a:cs typeface="Calibri" pitchFamily="34" charset="-120"/>
               </a:rPr>
-              <a:t xml:space="preserve">ngspice 42 (every sweep) · LTspice 24, in which the port was re-run · Icarus Verilog (RTL, 8 asserted properties) · Xilinx Vivado (export written) · Cadence Spectre / OCEAN · SKY130 PDK (BSIM4) · Python / NumPy / Matplotlib · MATLAB Online, an independent cross-check of the Pareto analysis · Git</a:t>
+              <a:t xml:space="preserve">ngspice 42 (every sweep) · LTspice 24, in which the port was re-run · Icarus Verilog (RTL, 8 asserted properties) · Xilinx Vivado 2024.1.2, synthesised · Cadence Spectre / OCEAN · SKY130 PDK (BSIM4) · Python / NumPy / Matplotlib · MATLAB Online, an independent cross-check of the Pareto analysis · Git</a:t>
             </a:r>
           </a:p>
           <a:p>
@@ -3016,7 +3016,7 @@
                 <a:ea typeface="Calibri" pitchFamily="34" charset="-122"/>
                 <a:cs typeface="Calibri" pitchFamily="34" charset="-120"/>
               </a:rPr>
-              <a:t xml:space="preserve"> — the study's own result built into the hardware, since dead time is worth 5.45 % to schedule (carried by the light-load corner alone) and pull-up 0.00 %.</a:t>
+              <a:t xml:space="preserve"> — 5.45 % vs 0.00 % to schedule.</a:t>
             </a:r>
           </a:p>
           <a:p>
@@ -3036,7 +3036,7 @@
                 <a:ea typeface="Calibri" pitchFamily="34" charset="-122"/>
                 <a:cs typeface="Calibri" pitchFamily="34" charset="-120"/>
               </a:rPr>
-              <a:t xml:space="preserve">Reset lands on the safest word, not the fastest.</a:t>
+              <a:t xml:space="preserve">Eight asserted properties pass under Icarus, safe reset included; a shoot-through mutant is caught 221× (sh rtl/mutate.sh).</a:t>
             </a:r>
           </a:p>
           <a:p>
@@ -3048,6 +3048,17 @@
               <a:buChar char="–"/>
             </a:pPr>
             <a:r>
+              <a:rPr lang="en-US" sz="1500" b="1" dirty="0">
+                <a:solidFill>
+                  <a:srgbClr val="000000"/>
+                </a:solidFill>
+                <a:latin typeface="Calibri" pitchFamily="34" charset="0"/>
+                <a:ea typeface="Calibri" pitchFamily="34" charset="-122"/>
+                <a:cs typeface="Calibri" pitchFamily="34" charset="-120"/>
+              </a:rPr>
+              <a:t xml:space="preserve">Implemented in Vivado 2024.1.2</a:t>
+            </a:r>
+            <a:r>
               <a:rPr lang="en-US" sz="1500" dirty="0">
                 <a:solidFill>
                   <a:srgbClr val="000000"/>
@@ -3056,7 +3067,51 @@
                 <a:ea typeface="Calibri" pitchFamily="34" charset="-122"/>
                 <a:cs typeface="Calibri" pitchFamily="34" charset="-120"/>
               </a:rPr>
-              <a:t xml:space="preserve">Eight asserted properties pass under Icarus; a shoot-through mutant is caught 221× (sh rtl/mutate.sh).</a:t>
+              <a:t xml:space="preserve"> on xc7a35t: </a:t>
+            </a:r>
+            <a:r>
+              <a:rPr lang="en-US" sz="1500" b="1" dirty="0">
+                <a:solidFill>
+                  <a:srgbClr val="000000"/>
+                </a:solidFill>
+                <a:latin typeface="Calibri" pitchFamily="34" charset="0"/>
+                <a:ea typeface="Calibri" pitchFamily="34" charset="-122"/>
+                <a:cs typeface="Calibri" pitchFamily="34" charset="-120"/>
+              </a:rPr>
+              <a:t xml:space="preserve">20 LUTs, 20 flip-flops</a:t>
+            </a:r>
+            <a:r>
+              <a:rPr lang="en-US" sz="1500" dirty="0">
+                <a:solidFill>
+                  <a:srgbClr val="000000"/>
+                </a:solidFill>
+                <a:latin typeface="Calibri" pitchFamily="34" charset="0"/>
+                <a:ea typeface="Calibri" pitchFamily="34" charset="-122"/>
+                <a:cs typeface="Calibri" pitchFamily="34" charset="-120"/>
+              </a:rPr>
+              <a:t xml:space="preserve"> — 0.10 % of the part. Register-to-register timing at 200 MHz is </a:t>
+            </a:r>
+            <a:r>
+              <a:rPr lang="en-US" sz="1500" b="1" dirty="0">
+                <a:solidFill>
+                  <a:srgbClr val="000000"/>
+                </a:solidFill>
+                <a:latin typeface="Calibri" pitchFamily="34" charset="0"/>
+                <a:ea typeface="Calibri" pitchFamily="34" charset="-122"/>
+                <a:cs typeface="Calibri" pitchFamily="34" charset="-120"/>
+              </a:rPr>
+              <a:t xml:space="preserve">MET, 1.996 ns slack</a:t>
+            </a:r>
+            <a:r>
+              <a:rPr lang="en-US" sz="1500" dirty="0">
+                <a:solidFill>
+                  <a:srgbClr val="000000"/>
+                </a:solidFill>
+                <a:latin typeface="Calibri" pitchFamily="34" charset="0"/>
+                <a:ea typeface="Calibri" pitchFamily="34" charset="-122"/>
+                <a:cs typeface="Calibri" pitchFamily="34" charset="-120"/>
+              </a:rPr>
+              <a:t xml:space="preserve">.</a:t>
             </a:r>
           </a:p>
           <a:p>
@@ -3068,17 +3123,6 @@
               <a:buChar char="–"/>
             </a:pPr>
             <a:r>
-              <a:rPr lang="en-US" sz="1500" b="1" dirty="0">
-                <a:solidFill>
-                  <a:srgbClr val="000000"/>
-                </a:solidFill>
-                <a:latin typeface="Calibri" pitchFamily="34" charset="0"/>
-                <a:ea typeface="Calibri" pitchFamily="34" charset="-122"/>
-                <a:cs typeface="Calibri" pitchFamily="34" charset="-120"/>
-              </a:rPr>
-              <a:t xml:space="preserve">Synthesised to Artix-7 primitives. </a:t>
-            </a:r>
-            <a:r>
               <a:rPr lang="en-US" sz="1500" dirty="0">
                 <a:solidFill>
                   <a:srgbClr val="000000"/>
@@ -3087,29 +3131,7 @@
                 <a:ea typeface="Calibri" pitchFamily="34" charset="-122"/>
                 <a:cs typeface="Calibri" pitchFamily="34" charset="-120"/>
               </a:rPr>
-              <a:t xml:space="preserve">Strapping the word instead of leaving all six fields live takes the controller from </a:t>
-            </a:r>
-            <a:r>
-              <a:rPr lang="en-US" sz="1500" b="1" dirty="0">
-                <a:solidFill>
-                  <a:srgbClr val="000000"/>
-                </a:solidFill>
-                <a:latin typeface="Calibri" pitchFamily="34" charset="0"/>
-                <a:ea typeface="Calibri" pitchFamily="34" charset="-122"/>
-                <a:cs typeface="Calibri" pitchFamily="34" charset="-120"/>
-              </a:rPr>
-              <a:t xml:space="preserve">53 LUTs to 27</a:t>
-            </a:r>
-            <a:r>
-              <a:rPr lang="en-US" sz="1500" dirty="0">
-                <a:solidFill>
-                  <a:srgbClr val="000000"/>
-                </a:solidFill>
-                <a:latin typeface="Calibri" pitchFamily="34" charset="0"/>
-                <a:ea typeface="Calibri" pitchFamily="34" charset="-122"/>
-                <a:cs typeface="Calibri" pitchFamily="34" charset="-120"/>
-              </a:rPr>
-              <a:t xml:space="preserve"> (33 FFs to 25) — half the fabric for the 3.9 % adaptation buys. yosys synth_xilinx; Vivado itself needs Windows/Linux, so no place-and-route or timing yet.</a:t>
+              <a:t xml:space="preserve">The 34 failing paths are all clock-to-pin against a placeholder 4 ns I/O constraint — the output buffer alone is 3.49 ns.</a:t>
             </a:r>
           </a:p>
         </p:txBody>
@@ -8681,6 +8703,37 @@
           <a:p>
             <a:pPr marL="177800" indent="-177800">
               <a:spcAft>
+                <a:spcPts val="180"/>
+              </a:spcAft>
+              <a:buSzPct val="100000"/>
+              <a:buChar char="•"/>
+            </a:pPr>
+            <a:r>
+              <a:rPr lang="en-US" sz="1450" b="1" dirty="0">
+                <a:solidFill>
+                  <a:srgbClr val="000000"/>
+                </a:solidFill>
+                <a:latin typeface="Calibri" pitchFamily="34" charset="0"/>
+                <a:ea typeface="Calibri" pitchFamily="34" charset="-122"/>
+                <a:cs typeface="Calibri" pitchFamily="34" charset="-120"/>
+              </a:rPr>
+              <a:t xml:space="preserve">The FPGA half is now real. </a:t>
+            </a:r>
+            <a:r>
+              <a:rPr lang="en-US" sz="1450" dirty="0">
+                <a:solidFill>
+                  <a:srgbClr val="000000"/>
+                </a:solidFill>
+                <a:latin typeface="Calibri" pitchFamily="34" charset="0"/>
+                <a:ea typeface="Calibri" pitchFamily="34" charset="-122"/>
+                <a:cs typeface="Calibri" pitchFamily="34" charset="-120"/>
+              </a:rPr>
+              <a:t xml:space="preserve">Vivado 2024.1.2 synthesises the controller to 20 LUTs and 20 flip-flops on an xc7a35t — 0.10 % of the part — and register-to-register timing closes at 200 MHz with 1.996 ns of slack. The only failing paths are clock-to-pin against a placeholder I/O constraint, not logic.</a:t>
+            </a:r>
+          </a:p>
+          <a:p>
+            <a:pPr marL="177800" indent="-177800">
+              <a:spcAft>
                 <a:spcPts val="0"/>
               </a:spcAft>
               <a:buSzPct val="100000"/>
@@ -13415,7 +13468,7 @@
         <p:spPr>
           <a:xfrm>
             <a:off x="548640" y="1188720"/>
-            <a:ext cx="4444977" cy="3337560"/>
+            <a:ext cx="4450080" cy="3337560"/>
           </a:xfrm>
           <a:prstGeom prst="rect">
             <a:avLst/>
@@ -13439,7 +13492,7 @@
         <p:spPr>
           <a:xfrm>
             <a:off x="6355080" y="1188720"/>
-            <a:ext cx="4444977" cy="3337560"/>
+            <a:ext cx="4450080" cy="3337560"/>
           </a:xfrm>
           <a:prstGeom prst="rect">
             <a:avLst/>

--- a/review/Review1_GaN_Segmented_Gate_Driver.pptx
+++ b/review/Review1_GaN_Segmented_Gate_Driver.pptx
@@ -14,15 +14,16 @@
     <p:sldId id="259" r:id="rId5"/>
     <p:sldId id="260" r:id="rId6"/>
     <p:sldId id="267" r:id="rId18"/>
-    <p:sldId id="281" r:id="rId32"/>
+    <p:sldId id="282" r:id="rId33"/>
     <p:sldId id="261" r:id="rId7"/>
     <p:sldId id="274" r:id="rId25"/>
     <p:sldId id="279" r:id="rId30"/>
     <p:sldId id="277" r:id="rId28"/>
     <p:sldId id="278" r:id="rId29"/>
-    <p:sldId id="282" r:id="rId33"/>
+    <p:sldId id="283" r:id="rId34"/>
     <p:sldId id="262" r:id="rId8"/>
     <p:sldId id="272" r:id="rId23"/>
+    <p:sldId id="281" r:id="rId32"/>
     <p:sldId id="273" r:id="rId24"/>
     <p:sldId id="263" r:id="rId9"/>
     <p:sldId id="280" r:id="rId31"/>
@@ -34,7 +35,7 @@
     <p:sldId id="270" r:id="rId21"/>
     <p:sldId id="271" r:id="rId22"/>
     <p:sldId id="265" r:id="rId11"/>
-    <p:sldId id="283" r:id="rId34"/>
+    <p:sldId id="284" r:id="rId35"/>
     <p:sldId id="266" r:id="rId12"/>
   </p:sldIdLst>
   <p:sldSz cx="12192000" cy="6858000"/>
@@ -2846,7 +2847,7 @@
                 <a:ea typeface="Calibri" pitchFamily="34" charset="-122"/>
                 <a:cs typeface="Calibri" pitchFamily="34" charset="-120"/>
               </a:rPr>
-              <a:t>16</a:t>
+              <a:t>17</a:t>
             </a:r>
             <a:endParaRPr lang="en-US" sz="1000" dirty="0"/>
           </a:p>
@@ -3269,7 +3270,7 @@
                 <a:ea typeface="Calibri" pitchFamily="34" charset="-122"/>
                 <a:cs typeface="Calibri" pitchFamily="34" charset="-120"/>
               </a:rPr>
-              <a:t>17</a:t>
+              <a:t>18</a:t>
             </a:r>
             <a:endParaRPr lang="en-US" sz="1000" dirty="0"/>
           </a:p>
@@ -3785,7 +3786,7 @@
                 <a:ea typeface="Calibri" pitchFamily="34" charset="-122"/>
                 <a:cs typeface="Calibri" pitchFamily="34" charset="-120"/>
               </a:rPr>
-              <a:t>19</a:t>
+              <a:t>20</a:t>
             </a:r>
             <a:endParaRPr lang="en-US" sz="1000" dirty="0"/>
           </a:p>
@@ -4369,7 +4370,7 @@
                 <a:ea typeface="Calibri" pitchFamily="34" charset="-122"/>
                 <a:cs typeface="Calibri" pitchFamily="34" charset="-120"/>
               </a:rPr>
-              <a:t>20</a:t>
+              <a:t>21</a:t>
             </a:r>
             <a:endParaRPr lang="en-US" sz="1000" dirty="0"/>
           </a:p>
@@ -5173,7 +5174,7 @@
                 <a:ea typeface="Calibri" pitchFamily="34" charset="-122"/>
                 <a:cs typeface="Calibri" pitchFamily="34" charset="-120"/>
               </a:rPr>
-              <a:t>21</a:t>
+              <a:t>22</a:t>
             </a:r>
             <a:endParaRPr lang="en-US" sz="1000" dirty="0"/>
           </a:p>
@@ -5419,7 +5420,7 @@
                 <a:ea typeface="Calibri" pitchFamily="34" charset="-122"/>
                 <a:cs typeface="Calibri" pitchFamily="34" charset="-120"/>
               </a:rPr>
-              <a:t>22</a:t>
+              <a:t>23</a:t>
             </a:r>
             <a:endParaRPr lang="en-US" sz="1000" dirty="0"/>
           </a:p>
@@ -7398,7 +7399,7 @@
                 <a:ea typeface="Calibri" pitchFamily="34" charset="-122"/>
                 <a:cs typeface="Calibri" pitchFamily="34" charset="-120"/>
               </a:rPr>
-              <a:t>23</a:t>
+              <a:t>24</a:t>
             </a:r>
             <a:endParaRPr lang="en-US" sz="1000" dirty="0"/>
           </a:p>
@@ -7840,7 +7841,7 @@
                 <a:ea typeface="Calibri" pitchFamily="34" charset="-122"/>
                 <a:cs typeface="Calibri" pitchFamily="34" charset="-120"/>
               </a:rPr>
-              <a:t>24</a:t>
+              <a:t>25</a:t>
             </a:r>
             <a:endParaRPr lang="en-US" sz="1000" dirty="0"/>
           </a:p>
@@ -8361,7 +8362,7 @@
                 <a:ea typeface="Calibri" pitchFamily="34" charset="-122"/>
                 <a:cs typeface="Calibri" pitchFamily="34" charset="-120"/>
               </a:rPr>
-              <a:t>25</a:t>
+              <a:t>26</a:t>
             </a:r>
             <a:endParaRPr lang="en-US" sz="1000" dirty="0"/>
           </a:p>
@@ -8453,10 +8454,30 @@
           <a:p>
             <a:pPr marL="177800" indent="0">
               <a:spcAft>
-                <a:spcPts val="200"/>
-              </a:spcAft>
-              <a:buSzPct val="100000"/>
-              <a:buNone/>
+                <a:spcPts val="240"/>
+              </a:spcAft>
+              <a:buSzPct val="100000"/>
+              <a:buNone/>
+            </a:pPr>
+            <a:r>
+              <a:rPr lang="en-US" sz="1700" b="1" dirty="0">
+                <a:solidFill>
+                  <a:srgbClr val="000000"/>
+                </a:solidFill>
+                <a:latin typeface="Calibri" pitchFamily="34" charset="0"/>
+                <a:ea typeface="Calibri" pitchFamily="34" charset="-122"/>
+                <a:cs typeface="Calibri" pitchFamily="34" charset="-120"/>
+              </a:rPr>
+              <a:t xml:space="preserve">What the data supports</a:t>
+            </a:r>
+          </a:p>
+          <a:p>
+            <a:pPr marL="177800" indent="-177800">
+              <a:spcAft>
+                <a:spcPts val="220"/>
+              </a:spcAft>
+              <a:buSzPct val="100000"/>
+              <a:buChar char="•"/>
             </a:pPr>
             <a:r>
               <a:rPr lang="en-US" sz="1600" b="1" dirty="0">
@@ -8467,18 +8488,217 @@
                 <a:ea typeface="Calibri" pitchFamily="34" charset="-122"/>
                 <a:cs typeface="Calibri" pitchFamily="34" charset="-120"/>
               </a:rPr>
-              <a:t xml:space="preserve">What the data supports</a:t>
+              <a:t xml:space="preserve">Choosing the word well: </a:t>
+            </a:r>
+            <a:r>
+              <a:rPr lang="en-US" sz="1600" dirty="0">
+                <a:solidFill>
+                  <a:srgbClr val="000000"/>
+                </a:solidFill>
+                <a:latin typeface="Calibri" pitchFamily="34" charset="0"/>
+                <a:ea typeface="Calibri" pitchFamily="34" charset="-122"/>
+                <a:cs typeface="Calibri" pitchFamily="34" charset="-120"/>
+              </a:rPr>
+              <a:t xml:space="preserve">25.1 %.   </a:t>
+            </a:r>
+            <a:r>
+              <a:rPr lang="en-US" sz="1600" b="1" dirty="0">
+                <a:solidFill>
+                  <a:srgbClr val="000000"/>
+                </a:solidFill>
+                <a:latin typeface="Calibri" pitchFamily="34" charset="0"/>
+                <a:ea typeface="Calibri" pitchFamily="34" charset="-122"/>
+                <a:cs typeface="Calibri" pitchFamily="34" charset="-120"/>
+              </a:rPr>
+              <a:t xml:space="preserve">Adapting it per operating point: </a:t>
+            </a:r>
+            <a:r>
+              <a:rPr lang="en-US" sz="1600" dirty="0">
+                <a:solidFill>
+                  <a:srgbClr val="000000"/>
+                </a:solidFill>
+                <a:latin typeface="Calibri" pitchFamily="34" charset="0"/>
+                <a:ea typeface="Calibri" pitchFamily="34" charset="-122"/>
+                <a:cs typeface="Calibri" pitchFamily="34" charset="-120"/>
+              </a:rPr>
+              <a:t xml:space="preserve">3.9 %.</a:t>
             </a:r>
           </a:p>
           <a:p>
             <a:pPr marL="177800" indent="-177800">
               <a:spcAft>
-                <a:spcPts val="180"/>
+                <a:spcPts val="220"/>
               </a:spcAft>
               <a:buSzPct val="100000"/>
               <a:buChar char="•"/>
             </a:pPr>
             <a:r>
+              <a:rPr lang="en-US" sz="1600" b="1" dirty="0">
+                <a:solidFill>
+                  <a:srgbClr val="000000"/>
+                </a:solidFill>
+                <a:latin typeface="Calibri" pitchFamily="34" charset="0"/>
+                <a:ea typeface="Calibri" pitchFamily="34" charset="-122"/>
+                <a:cs typeface="Calibri" pitchFamily="34" charset="-120"/>
+              </a:rPr>
+              <a:t xml:space="preserve">One comparator takes 72 % of that 3.9 %.</a:t>
+            </a:r>
+          </a:p>
+          <a:p>
+            <a:pPr marL="177800" indent="-177800">
+              <a:spcAft>
+                <a:spcPts val="340"/>
+              </a:spcAft>
+              <a:buSzPct val="100000"/>
+              <a:buChar char="•"/>
+            </a:pPr>
+            <a:r>
+              <a:rPr lang="en-US" sz="1600" b="1" dirty="0">
+                <a:solidFill>
+                  <a:srgbClr val="000000"/>
+                </a:solidFill>
+                <a:latin typeface="Calibri" pitchFamily="34" charset="0"/>
+                <a:ea typeface="Calibri" pitchFamily="34" charset="-122"/>
+                <a:cs typeface="Calibri" pitchFamily="34" charset="-120"/>
+              </a:rPr>
+              <a:t xml:space="preserve">The deliverable: </a:t>
+            </a:r>
+            <a:r>
+              <a:rPr lang="en-US" sz="1600" dirty="0">
+                <a:solidFill>
+                  <a:srgbClr val="000000"/>
+                </a:solidFill>
+                <a:latin typeface="Calibri" pitchFamily="34" charset="0"/>
+                <a:ea typeface="Calibri" pitchFamily="34" charset="-122"/>
+                <a:cs typeface="Calibri" pitchFamily="34" charset="-120"/>
+              </a:rPr>
+              <a:t xml:space="preserve">a fixed word plus a light-load comparator. The full sense + ADC + lookup table is left justifying </a:t>
+            </a:r>
+            <a:r>
+              <a:rPr lang="en-US" sz="1600" b="1" dirty="0">
+                <a:solidFill>
+                  <a:srgbClr val="000000"/>
+                </a:solidFill>
+                <a:latin typeface="Calibri" pitchFamily="34" charset="0"/>
+                <a:ea typeface="Calibri" pitchFamily="34" charset="-122"/>
+                <a:cs typeface="Calibri" pitchFamily="34" charset="-120"/>
+              </a:rPr>
+              <a:t xml:space="preserve">3.7 %</a:t>
+            </a:r>
+            <a:r>
+              <a:rPr lang="en-US" sz="1600" dirty="0">
+                <a:solidFill>
+                  <a:srgbClr val="000000"/>
+                </a:solidFill>
+                <a:latin typeface="Calibri" pitchFamily="34" charset="0"/>
+                <a:ea typeface="Calibri" pitchFamily="34" charset="-122"/>
+                <a:cs typeface="Calibri" pitchFamily="34" charset="-120"/>
+              </a:rPr>
+              <a:t xml:space="preserve">.</a:t>
+            </a:r>
+          </a:p>
+          <a:p>
+            <a:pPr marL="177800" indent="0">
+              <a:spcAft>
+                <a:spcPts val="240"/>
+              </a:spcAft>
+              <a:buSzPct val="100000"/>
+              <a:buNone/>
+            </a:pPr>
+            <a:r>
+              <a:rPr lang="en-US" sz="1700" b="1" dirty="0">
+                <a:solidFill>
+                  <a:srgbClr val="000000"/>
+                </a:solidFill>
+                <a:latin typeface="Calibri" pitchFamily="34" charset="0"/>
+                <a:ea typeface="Calibri" pitchFamily="34" charset="-122"/>
+                <a:cs typeface="Calibri" pitchFamily="34" charset="-120"/>
+              </a:rPr>
+              <a:t xml:space="preserve">What is next</a:t>
+            </a:r>
+          </a:p>
+          <a:p>
+            <a:pPr marL="177800" indent="-177800">
+              <a:spcAft>
+                <a:spcPts val="220"/>
+              </a:spcAft>
+              <a:buSzPct val="100000"/>
+              <a:buChar char="•"/>
+            </a:pPr>
+            <a:r>
+              <a:rPr lang="en-US" sz="1600" b="1" dirty="0">
+                <a:solidFill>
+                  <a:srgbClr val="000000"/>
+                </a:solidFill>
+                <a:latin typeface="Calibri" pitchFamily="34" charset="0"/>
+                <a:ea typeface="Calibri" pitchFamily="34" charset="-122"/>
+                <a:cs typeface="Calibri" pitchFamily="34" charset="-120"/>
+              </a:rPr>
+              <a:t xml:space="preserve">Review-II — </a:t>
+            </a:r>
+            <a:r>
+              <a:rPr lang="en-US" sz="1600" dirty="0">
+                <a:solidFill>
+                  <a:srgbClr val="000000"/>
+                </a:solidFill>
+                <a:latin typeface="Calibri" pitchFamily="34" charset="0"/>
+                <a:ea typeface="Calibri" pitchFamily="34" charset="-122"/>
+                <a:cs typeface="Calibri" pitchFamily="34" charset="-120"/>
+              </a:rPr>
+              <a:t xml:space="preserve">transistor-level output stage in Cadence; re-run the ceiling on real devices.</a:t>
+            </a:r>
+          </a:p>
+          <a:p>
+            <a:pPr marL="177800" indent="-177800">
+              <a:spcAft>
+                <a:spcPts val="220"/>
+              </a:spcAft>
+              <a:buSzPct val="100000"/>
+              <a:buChar char="•"/>
+            </a:pPr>
+            <a:r>
+              <a:rPr lang="en-US" sz="1600" b="1" dirty="0">
+                <a:solidFill>
+                  <a:srgbClr val="000000"/>
+                </a:solidFill>
+                <a:latin typeface="Calibri" pitchFamily="34" charset="0"/>
+                <a:ea typeface="Calibri" pitchFamily="34" charset="-122"/>
+                <a:cs typeface="Calibri" pitchFamily="34" charset="-120"/>
+              </a:rPr>
+              <a:t xml:space="preserve">Review-III — </a:t>
+            </a:r>
+            <a:r>
+              <a:rPr lang="en-US" sz="1600" dirty="0">
+                <a:solidFill>
+                  <a:srgbClr val="000000"/>
+                </a:solidFill>
+                <a:latin typeface="Calibri" pitchFamily="34" charset="0"/>
+                <a:ea typeface="Calibri" pitchFamily="34" charset="-122"/>
+                <a:cs typeface="Calibri" pitchFamily="34" charset="-120"/>
+              </a:rPr>
+              <a:t xml:space="preserve">measure a hardware half-bridge. Until then this is a simulation study, and is titled as one.</a:t>
+            </a:r>
+          </a:p>
+          <a:p>
+            <a:pPr marL="177800" indent="-177800">
+              <a:spcAft>
+                <a:spcPts val="0"/>
+              </a:spcAft>
+              <a:buSzPct val="100000"/>
+              <a:buChar char="•"/>
+            </a:pPr>
+            <a:r>
+              <a:rPr lang="en-US" sz="1450" b="1" dirty="0">
+                <a:solidFill>
+                  <a:srgbClr val="000000"/>
+                </a:solidFill>
+                <a:latin typeface="Calibri" pitchFamily="34" charset="0"/>
+                <a:ea typeface="Calibri" pitchFamily="34" charset="-122"/>
+                <a:cs typeface="Calibri" pitchFamily="34" charset="-120"/>
+              </a:rPr>
+              <a:t xml:space="preserve">Limits we state ourselves: </a:t>
+            </a:r>
+            <a:r>
               <a:rPr lang="en-US" sz="1450" dirty="0">
                 <a:solidFill>
                   <a:srgbClr val="000000"/>
@@ -8487,301 +8707,7 @@
                 <a:ea typeface="Calibri" pitchFamily="34" charset="-122"/>
                 <a:cs typeface="Calibri" pitchFamily="34" charset="-120"/>
               </a:rPr>
-              <a:t xml:space="preserve">Choosing the control word well matters enormously — it spans roughly fivefold in switching energy. </a:t>
-            </a:r>
-            <a:r>
-              <a:rPr lang="en-US" sz="1450" b="1" dirty="0">
-                <a:solidFill>
-                  <a:srgbClr val="000000"/>
-                </a:solidFill>
-                <a:latin typeface="Calibri" pitchFamily="34" charset="0"/>
-                <a:ea typeface="Calibri" pitchFamily="34" charset="-122"/>
-                <a:cs typeface="Calibri" pitchFamily="34" charset="-120"/>
-              </a:rPr>
-              <a:t xml:space="preserve">Adapting it to the operating point does not: 3.9 %, a seventh of the total gain, and one comparator takes 72 % of even that.</a:t>
-            </a:r>
-          </a:p>
-          <a:p>
-            <a:pPr marL="177800" indent="-177800">
-              <a:spcAft>
-                <a:spcPts val="180"/>
-              </a:spcAft>
-              <a:buSzPct val="100000"/>
-              <a:buChar char="•"/>
-            </a:pPr>
-            <a:r>
-              <a:rPr lang="en-US" sz="1400" dirty="0">
-                <a:solidFill>
-                  <a:srgbClr val="000000"/>
-                </a:solidFill>
-                <a:latin typeface="Calibri" pitchFamily="34" charset="0"/>
-                <a:ea typeface="Calibri" pitchFamily="34" charset="-122"/>
-                <a:cs typeface="Calibri" pitchFamily="34" charset="-120"/>
-              </a:rPr>
-              <a:t xml:space="preserve">The benefit that exists is carried by the </a:t>
-            </a:r>
-            <a:r>
-              <a:rPr lang="en-US" sz="1400" b="1" dirty="0">
-                <a:solidFill>
-                  <a:srgbClr val="000000"/>
-                </a:solidFill>
-                <a:latin typeface="Calibri" pitchFamily="34" charset="0"/>
-                <a:ea typeface="Calibri" pitchFamily="34" charset="-122"/>
-                <a:cs typeface="Calibri" pitchFamily="34" charset="-120"/>
-              </a:rPr>
-              <a:t xml:space="preserve">dead time</a:t>
-            </a:r>
-            <a:r>
-              <a:rPr lang="en-US" sz="1400" dirty="0">
-                <a:solidFill>
-                  <a:srgbClr val="000000"/>
-                </a:solidFill>
-                <a:latin typeface="Calibri" pitchFamily="34" charset="0"/>
-                <a:ea typeface="Calibri" pitchFamily="34" charset="-122"/>
-                <a:cs typeface="Calibri" pitchFamily="34" charset="-120"/>
-              </a:rPr>
-              <a:t xml:space="preserve"> — and the dead time, in turn, by the </a:t>
-            </a:r>
-            <a:r>
-              <a:rPr lang="en-US" sz="1400" b="1" dirty="0">
-                <a:solidFill>
-                  <a:srgbClr val="000000"/>
-                </a:solidFill>
-                <a:latin typeface="Calibri" pitchFamily="34" charset="0"/>
-                <a:ea typeface="Calibri" pitchFamily="34" charset="-122"/>
-                <a:cs typeface="Calibri" pitchFamily="34" charset="-120"/>
-              </a:rPr>
-              <a:t xml:space="preserve">light-load corner alone</a:t>
-            </a:r>
-            <a:r>
-              <a:rPr lang="en-US" sz="1400" dirty="0">
-                <a:solidFill>
-                  <a:srgbClr val="000000"/>
-                </a:solidFill>
-                <a:latin typeface="Calibri" pitchFamily="34" charset="0"/>
-                <a:ea typeface="Calibri" pitchFamily="34" charset="-122"/>
-                <a:cs typeface="Calibri" pitchFamily="34" charset="-120"/>
-              </a:rPr>
-              <a:t xml:space="preserve">: leave it out and freezing dead time costs 0.00 %. Not by the drive-strength segmentation that motivates the hardware, which stays at 0.00 % even when the objective prices EMI. Crosstalk safety is nearly free once the clamp is present.</a:t>
-            </a:r>
-          </a:p>
-          <a:p>
-            <a:pPr marL="177800" indent="-177800">
-              <a:spcAft>
-                <a:spcPts val="260"/>
-              </a:spcAft>
-              <a:buSzPct val="100000"/>
-              <a:buChar char="•"/>
-            </a:pPr>
-            <a:r>
-              <a:rPr lang="en-US" sz="1450" b="1" dirty="0">
-                <a:solidFill>
-                  <a:srgbClr val="000000"/>
-                </a:solidFill>
-                <a:latin typeface="Calibri" pitchFamily="34" charset="0"/>
-                <a:ea typeface="Calibri" pitchFamily="34" charset="-122"/>
-                <a:cs typeface="Calibri" pitchFamily="34" charset="-120"/>
-              </a:rPr>
-              <a:t xml:space="preserve">Stated positively — and this is the deliverable, not the percentage: </a:t>
-            </a:r>
-            <a:r>
-              <a:rPr lang="en-US" sz="1450" dirty="0">
-                <a:solidFill>
-                  <a:srgbClr val="000000"/>
-                </a:solidFill>
-                <a:latin typeface="Calibri" pitchFamily="34" charset="0"/>
-                <a:ea typeface="Calibri" pitchFamily="34" charset="-122"/>
-                <a:cs typeface="Calibri" pitchFamily="34" charset="-120"/>
-              </a:rPr>
-              <a:t xml:space="preserve">use the recommended fixed word with a light-load comparator, and the full sense + ADC + lookup table is left justifying 3.7 % of the achievable gain.</a:t>
-            </a:r>
-          </a:p>
-          <a:p>
-            <a:pPr marL="177800" indent="0">
-              <a:spcAft>
-                <a:spcPts val="200"/>
-              </a:spcAft>
-              <a:buSzPct val="100000"/>
-              <a:buNone/>
-            </a:pPr>
-            <a:r>
-              <a:rPr lang="en-US" sz="1600" b="1" dirty="0">
-                <a:solidFill>
-                  <a:srgbClr val="000000"/>
-                </a:solidFill>
-                <a:latin typeface="Calibri" pitchFamily="34" charset="0"/>
-                <a:ea typeface="Calibri" pitchFamily="34" charset="-122"/>
-                <a:cs typeface="Calibri" pitchFamily="34" charset="-120"/>
-              </a:rPr>
-              <a:t xml:space="preserve">What the data now answers, and what is next</a:t>
-            </a:r>
-          </a:p>
-          <a:p>
-            <a:pPr marL="177800" indent="-177800">
-              <a:spcAft>
-                <a:spcPts val="180"/>
-              </a:spcAft>
-              <a:buSzPct val="100000"/>
-              <a:buChar char="•"/>
-            </a:pPr>
-            <a:r>
-              <a:rPr lang="en-US" sz="1450" b="1" dirty="0">
-                <a:solidFill>
-                  <a:srgbClr val="000000"/>
-                </a:solidFill>
-                <a:latin typeface="Calibri" pitchFamily="34" charset="0"/>
-                <a:ea typeface="Calibri" pitchFamily="34" charset="-122"/>
-                <a:cs typeface="Calibri" pitchFamily="34" charset="-120"/>
-              </a:rPr>
-              <a:t xml:space="preserve">The EMI objection is now tested rather than conceded.</a:t>
-            </a:r>
-            <a:r>
-              <a:rPr lang="en-US" sz="1450" dirty="0">
-                <a:solidFill>
-                  <a:srgbClr val="000000"/>
-                </a:solidFill>
-                <a:latin typeface="Calibri" pitchFamily="34" charset="0"/>
-                <a:ea typeface="Calibri" pitchFamily="34" charset="-122"/>
-                <a:cs typeface="Calibri" pitchFamily="34" charset="-120"/>
-              </a:rPr>
-              <a:t xml:space="preserve"> Re-running the full search under objectives that price turn-on slew rate, and again under 30–500 MHz band energy, makes scheduling worth </a:t>
-            </a:r>
-            <a:r>
-              <a:rPr lang="en-US" sz="1450" b="1" dirty="0">
-                <a:solidFill>
-                  <a:srgbClr val="000000"/>
-                </a:solidFill>
-                <a:latin typeface="Calibri" pitchFamily="34" charset="0"/>
-                <a:ea typeface="Calibri" pitchFamily="34" charset="-122"/>
-                <a:cs typeface="Calibri" pitchFamily="34" charset="-120"/>
-              </a:rPr>
-              <a:t xml:space="preserve">less</a:t>
-            </a:r>
-            <a:r>
-              <a:rPr lang="en-US" sz="1450" dirty="0">
-                <a:solidFill>
-                  <a:srgbClr val="000000"/>
-                </a:solidFill>
-                <a:latin typeface="Calibri" pitchFamily="34" charset="0"/>
-                <a:ea typeface="Calibri" pitchFamily="34" charset="-122"/>
-                <a:cs typeface="Calibri" pitchFamily="34" charset="-120"/>
-              </a:rPr>
-              <a:t xml:space="preserve">, not more: 5.95 % falls to 0.15 %. Pull-up strength still does not need scheduling — it needs a different fixed value.</a:t>
-            </a:r>
-          </a:p>
-          <a:p>
-            <a:pPr marL="177800" indent="-177800">
-              <a:spcAft>
-                <a:spcPts val="180"/>
-              </a:spcAft>
-              <a:buSzPct val="100000"/>
-              <a:buChar char="•"/>
-            </a:pPr>
-            <a:r>
-              <a:rPr lang="en-US" sz="1450" b="1" dirty="0">
-                <a:solidFill>
-                  <a:srgbClr val="000000"/>
-                </a:solidFill>
-                <a:latin typeface="Calibri" pitchFamily="34" charset="0"/>
-                <a:ea typeface="Calibri" pitchFamily="34" charset="-122"/>
-                <a:cs typeface="Calibri" pitchFamily="34" charset="-120"/>
-              </a:rPr>
-              <a:t xml:space="preserve">What it does not support.</a:t>
-            </a:r>
-            <a:r>
-              <a:rPr lang="en-US" sz="1450" dirty="0">
-                <a:solidFill>
-                  <a:srgbClr val="000000"/>
-                </a:solidFill>
-                <a:latin typeface="Calibri" pitchFamily="34" charset="0"/>
-                <a:ea typeface="Calibri" pitchFamily="34" charset="-122"/>
-                <a:cs typeface="Calibri" pitchFamily="34" charset="-120"/>
-              </a:rPr>
-              <a:t xml:space="preserve"> Which EMI measure a designer should price is unsettled, and the two disagree: under band energy freezing pull-up costs 0.00 % at every weight, under slew rate up to 2.27 % in a narrow transition band. No silicon has been measured, and one device model underlies everything.</a:t>
-            </a:r>
-          </a:p>
-          <a:p>
-            <a:pPr marL="177800" indent="-177800">
-              <a:spcAft>
-                <a:spcPts val="180"/>
-              </a:spcAft>
-              <a:buSzPct val="100000"/>
-              <a:buChar char="•"/>
-            </a:pPr>
-            <a:r>
-              <a:rPr lang="en-US" sz="1450" b="1" dirty="0">
-                <a:solidFill>
-                  <a:srgbClr val="000000"/>
-                </a:solidFill>
-                <a:latin typeface="Calibri" pitchFamily="34" charset="0"/>
-                <a:ea typeface="Calibri" pitchFamily="34" charset="-122"/>
-                <a:cs typeface="Calibri" pitchFamily="34" charset="-120"/>
-              </a:rPr>
-              <a:t xml:space="preserve">The FPGA half is now real. </a:t>
-            </a:r>
-            <a:r>
-              <a:rPr lang="en-US" sz="1450" dirty="0">
-                <a:solidFill>
-                  <a:srgbClr val="000000"/>
-                </a:solidFill>
-                <a:latin typeface="Calibri" pitchFamily="34" charset="0"/>
-                <a:ea typeface="Calibri" pitchFamily="34" charset="-122"/>
-                <a:cs typeface="Calibri" pitchFamily="34" charset="-120"/>
-              </a:rPr>
-              <a:t xml:space="preserve">Vivado 2024.1.2 synthesises the controller to 20 LUTs and 20 flip-flops on an xc7a35t — 0.10 % of the part — and register-to-register timing closes at 200 MHz with 1.996 ns of slack. The only failing paths are clock-to-pin against a placeholder I/O constraint, not logic.</a:t>
-            </a:r>
-          </a:p>
-          <a:p>
-            <a:pPr marL="177800" indent="-177800">
-              <a:spcAft>
-                <a:spcPts val="0"/>
-              </a:spcAft>
-              <a:buSzPct val="100000"/>
-              <a:buChar char="•"/>
-            </a:pPr>
-            <a:r>
-              <a:rPr lang="en-US" sz="1450" b="1" dirty="0">
-                <a:solidFill>
-                  <a:srgbClr val="000000"/>
-                </a:solidFill>
-                <a:latin typeface="Calibri" pitchFamily="34" charset="0"/>
-                <a:ea typeface="Calibri" pitchFamily="34" charset="-122"/>
-                <a:cs typeface="Calibri" pitchFamily="34" charset="-120"/>
-              </a:rPr>
-              <a:t xml:space="preserve">Review-II: </a:t>
-            </a:r>
-            <a:r>
-              <a:rPr lang="en-US" sz="1450" dirty="0">
-                <a:solidFill>
-                  <a:srgbClr val="000000"/>
-                </a:solidFill>
-                <a:latin typeface="Calibri" pitchFamily="34" charset="0"/>
-                <a:ea typeface="Calibri" pitchFamily="34" charset="-122"/>
-                <a:cs typeface="Calibri" pitchFamily="34" charset="-120"/>
-              </a:rPr>
-              <a:t xml:space="preserve">transistor-level output stage in Cadence on a 5 V-capable PDK; re-run the ceiling on real devices — sub-nanosecond dead-time control needs silicon, not fabric: [13] reaches 0.19 ns where a 200 MHz FPGA grid is 5 ns. </a:t>
-            </a:r>
-            <a:r>
-              <a:rPr lang="en-US" sz="1450" b="1" dirty="0">
-                <a:solidFill>
-                  <a:srgbClr val="000000"/>
-                </a:solidFill>
-                <a:latin typeface="Calibri" pitchFamily="34" charset="0"/>
-                <a:ea typeface="Calibri" pitchFamily="34" charset="-122"/>
-                <a:cs typeface="Calibri" pitchFamily="34" charset="-120"/>
-              </a:rPr>
-              <a:t xml:space="preserve">Review-III: </a:t>
-            </a:r>
-            <a:r>
-              <a:rPr lang="en-US" sz="1450" dirty="0">
-                <a:solidFill>
-                  <a:srgbClr val="000000"/>
-                </a:solidFill>
-                <a:latin typeface="Calibri" pitchFamily="34" charset="0"/>
-                <a:ea typeface="Calibri" pitchFamily="34" charset="-122"/>
-                <a:cs typeface="Calibri" pitchFamily="34" charset="-120"/>
-              </a:rPr>
-              <a:t xml:space="preserve">measure a hardware half-bridge at one corner — until then this is a simulation study and is titled as one.</a:t>
+              <a:t xml:space="preserve">no silicon measured; one device model underlies everything.</a:t>
             </a:r>
           </a:p>
         </p:txBody>
@@ -9685,7 +9611,7 @@
                 <a:ea typeface="Calibri" pitchFamily="34" charset="-122"/>
                 <a:cs typeface="Calibri" pitchFamily="34" charset="-120"/>
               </a:rPr>
-              <a:t>26</a:t>
+              <a:t>27</a:t>
             </a:r>
             <a:endParaRPr lang="en-US" sz="1000" dirty="0"/>
           </a:p>
@@ -10360,7 +10286,7 @@
                 <a:ea typeface="Calibri" pitchFamily="34" charset="-122"/>
                 <a:cs typeface="Calibri" pitchFamily="34" charset="-120"/>
               </a:rPr>
-              <a:t>28</a:t>
+              <a:t>29</a:t>
             </a:r>
             <a:endParaRPr lang="en-US" sz="1000" dirty="0"/>
           </a:p>
@@ -13382,7 +13308,7 @@
                 <a:ea typeface="Calibri" pitchFamily="34" charset="-122"/>
                 <a:cs typeface="Calibri" pitchFamily="34" charset="-120"/>
               </a:rPr>
-              <a:t>18</a:t>
+              <a:t>19</a:t>
             </a:r>
             <a:endParaRPr lang="en-US" sz="1000" dirty="0"/>
           </a:p>
@@ -13451,9 +13377,53 @@
           </a:prstGeom>
         </p:spPr>
       </p:pic>
+      <p:sp>
+        <p:nvSpPr>
+          <p:cNvPr id="5" name="Rectangle 4"/>
+          <p:cNvSpPr/>
+          <p:nvPr/>
+        </p:nvSpPr>
+        <p:spPr>
+          <a:xfrm>
+            <a:off x="548640" y="1097280"/>
+            <a:ext cx="4572000" cy="3474720"/>
+          </a:xfrm>
+          <a:prstGeom prst="rect">
+            <a:avLst/>
+          </a:prstGeom>
+          <a:solidFill>
+            <a:srgbClr val="0B0B0B"/>
+          </a:solidFill>
+          <a:ln>
+            <a:solidFill>
+              <a:srgbClr val="0B0B0B"/>
+            </a:solidFill>
+          </a:ln>
+          <a:effectLst/>
+        </p:spPr>
+        <p:style>
+          <a:lnRef idx="1">
+            <a:schemeClr val="accent1"/>
+          </a:lnRef>
+          <a:fillRef idx="3">
+            <a:schemeClr val="accent1"/>
+          </a:fillRef>
+          <a:effectRef idx="2">
+            <a:schemeClr val="accent1"/>
+          </a:effectRef>
+          <a:fontRef idx="minor">
+            <a:schemeClr val="lt1"/>
+          </a:fontRef>
+        </p:style>
+        <p:txBody>
+          <a:bodyPr rtlCol="0" anchor="ctr"/>
+          <a:lstStyle/>
+          <a:p/>
+        </p:txBody>
+      </p:sp>
       <p:pic>
         <p:nvPicPr>
-          <p:cNvPr id="5" name="Picture 4" descr="pareto_matlab.png"/>
+          <p:cNvPr id="6" name="Picture 5" descr="pareto_matlab.png"/>
           <p:cNvPicPr>
             <a:picLocks noChangeAspect="1"/>
           </p:cNvPicPr>
@@ -13467,17 +13437,61 @@
         </p:blipFill>
         <p:spPr>
           <a:xfrm>
-            <a:off x="548640" y="1188720"/>
-            <a:ext cx="4450080" cy="3337560"/>
+            <a:off x="640080" y="1188720"/>
+            <a:ext cx="4389120" cy="3291840"/>
           </a:xfrm>
           <a:prstGeom prst="rect">
             <a:avLst/>
           </a:prstGeom>
         </p:spPr>
       </p:pic>
+      <p:sp>
+        <p:nvSpPr>
+          <p:cNvPr id="7" name="Rectangle 6"/>
+          <p:cNvSpPr/>
+          <p:nvPr/>
+        </p:nvSpPr>
+        <p:spPr>
+          <a:xfrm>
+            <a:off x="6355080" y="1097280"/>
+            <a:ext cx="4572000" cy="3474720"/>
+          </a:xfrm>
+          <a:prstGeom prst="rect">
+            <a:avLst/>
+          </a:prstGeom>
+          <a:solidFill>
+            <a:srgbClr val="0B0B0B"/>
+          </a:solidFill>
+          <a:ln>
+            <a:solidFill>
+              <a:srgbClr val="0B0B0B"/>
+            </a:solidFill>
+          </a:ln>
+          <a:effectLst/>
+        </p:spPr>
+        <p:style>
+          <a:lnRef idx="1">
+            <a:schemeClr val="accent1"/>
+          </a:lnRef>
+          <a:fillRef idx="3">
+            <a:schemeClr val="accent1"/>
+          </a:fillRef>
+          <a:effectRef idx="2">
+            <a:schemeClr val="accent1"/>
+          </a:effectRef>
+          <a:fontRef idx="minor">
+            <a:schemeClr val="lt1"/>
+          </a:fontRef>
+        </p:style>
+        <p:txBody>
+          <a:bodyPr rtlCol="0" anchor="ctr"/>
+          <a:lstStyle/>
+          <a:p/>
+        </p:txBody>
+      </p:sp>
       <p:pic>
         <p:nvPicPr>
-          <p:cNvPr id="6" name="Picture 5" descr="crosstalk_model_matlab.png"/>
+          <p:cNvPr id="8" name="Picture 7" descr="fig_master_weight.png"/>
           <p:cNvPicPr>
             <a:picLocks noChangeAspect="1"/>
           </p:cNvPicPr>
@@ -13491,8 +13505,8 @@
         </p:blipFill>
         <p:spPr>
           <a:xfrm>
-            <a:off x="6355080" y="1188720"/>
-            <a:ext cx="4450080" cy="3337560"/>
+            <a:off x="6446520" y="1188720"/>
+            <a:ext cx="4389120" cy="3291840"/>
           </a:xfrm>
           <a:prstGeom prst="rect">
             <a:avLst/>
@@ -13501,7 +13515,7 @@
       </p:pic>
       <p:sp>
         <p:nvSpPr>
-          <p:cNvPr id="7" name="TextBox 6"/>
+          <p:cNvPr id="9" name="TextBox 8"/>
           <p:cNvSpPr txBox="1"/>
           <p:nvPr/>
         </p:nvSpPr>
@@ -13555,7 +13569,7 @@
       </p:sp>
       <p:sp>
         <p:nvSpPr>
-          <p:cNvPr id="8" name="TextBox 7"/>
+          <p:cNvPr id="10" name="TextBox 9"/>
           <p:cNvSpPr txBox="1"/>
           <p:nvPr/>
         </p:nvSpPr>
@@ -13591,7 +13605,7 @@
                 <a:ea typeface="Calibri" pitchFamily="34" charset="-122"/>
                 <a:cs typeface="Calibri" pitchFamily="34" charset="-120"/>
               </a:rPr>
-              <a:t xml:space="preserve">The two hand calculations disagree by 8.7×.</a:t>
+              <a:t xml:space="preserve">(A) stays above (B) at every weight tested.</a:t>
             </a:r>
             <a:r>
               <a:rPr lang="en-US" sz="1150" dirty="0">
@@ -13602,14 +13616,14 @@
                 <a:ea typeface="Calibri" pitchFamily="34" charset="-122"/>
                 <a:cs typeface="Calibri" pitchFamily="34" charset="-120"/>
               </a:rPr>
-              <a:t xml:space="preserve"> The peak-C bound says 7.50 V, charge-averaging says 0.86 V, SPICE measures 1.65 V — inside the bracket. That gap is why this is simulated, not hand-calculated.</a:t>
-            </a:r>
-          </a:p>
-        </p:txBody>
-      </p:sp>
-      <p:sp>
-        <p:nvSpPr>
-          <p:cNvPr id="9" name="TextBox 8"/>
+              <a:t xml:space="preserve"> Choosing the word well is worth 22.5–29.0 % of baseline across the whole range; adapting it per operating point 1.4–12.7 %. The ordering never flips.</a:t>
+            </a:r>
+          </a:p>
+        </p:txBody>
+      </p:sp>
+      <p:sp>
+        <p:nvSpPr>
+          <p:cNvPr id="11" name="TextBox 10"/>
           <p:cNvSpPr txBox="1"/>
           <p:nvPr/>
         </p:nvSpPr>
@@ -13723,9 +13737,87 @@
         <p:nvPr/>
       </p:nvGrpSpPr>
       <p:grpSpPr/>
+      <p:sp>
+        <p:nvSpPr>
+          <p:cNvPr id="2" name="Text 0"/>
+          <p:cNvSpPr txBox="1"/>
+          <p:nvPr/>
+        </p:nvSpPr>
+        <p:spPr>
+          <a:xfrm>
+            <a:off x="11460175" y="6446520"/>
+            <a:ext cx="457200" cy="274320"/>
+          </a:xfrm>
+          <a:prstGeom prst="rect">
+            <a:avLst/>
+          </a:prstGeom>
+          <a:noFill/>
+          <a:ln/>
+        </p:spPr>
+        <p:txBody>
+          <a:bodyPr wrap="square" lIns="0" tIns="0" rIns="0" bIns="0" rtlCol="0" anchor="ctr"/>
+          <a:lstStyle/>
+          <a:p>
+            <a:pPr marL="0" indent="0" algn="r">
+              <a:buNone/>
+            </a:pPr>
+            <a:r>
+              <a:rPr lang="en-US" sz="1000" dirty="0">
+                <a:solidFill>
+                  <a:srgbClr val="808080"/>
+                </a:solidFill>
+                <a:latin typeface="Calibri" pitchFamily="34" charset="0"/>
+                <a:ea typeface="Calibri" pitchFamily="34" charset="-122"/>
+                <a:cs typeface="Calibri" pitchFamily="34" charset="-120"/>
+              </a:rPr>
+              <a:t>16</a:t>
+            </a:r>
+            <a:endParaRPr lang="en-US" sz="1000" dirty="0"/>
+          </a:p>
+        </p:txBody>
+      </p:sp>
+      <p:sp>
+        <p:nvSpPr>
+          <p:cNvPr id="3" name="Text 1"/>
+          <p:cNvSpPr txBox="1"/>
+          <p:nvPr/>
+        </p:nvSpPr>
+        <p:spPr>
+          <a:xfrm>
+            <a:off x="548640" y="320040"/>
+            <a:ext cx="9601200" cy="685800"/>
+          </a:xfrm>
+          <a:prstGeom prst="rect">
+            <a:avLst/>
+          </a:prstGeom>
+          <a:noFill/>
+          <a:ln/>
+        </p:spPr>
+        <p:txBody>
+          <a:bodyPr wrap="square" lIns="0" tIns="0" rIns="0" bIns="0" rtlCol="0" anchor="ctr"/>
+          <a:lstStyle/>
+          <a:p>
+            <a:pPr marL="0" indent="0">
+              <a:buNone/>
+            </a:pPr>
+            <a:r>
+              <a:rPr lang="en-US" sz="2800" b="1" dirty="0">
+                <a:solidFill>
+                  <a:srgbClr val="1D2F82"/>
+                </a:solidFill>
+                <a:latin typeface="Calibri" pitchFamily="34" charset="0"/>
+                <a:ea typeface="Calibri" pitchFamily="34" charset="-122"/>
+                <a:cs typeface="Calibri" pitchFamily="34" charset="-120"/>
+              </a:rPr>
+              <a:t>Tools — and what each one produced</a:t>
+            </a:r>
+            <a:endParaRPr lang="en-US" sz="2800" dirty="0"/>
+          </a:p>
+        </p:txBody>
+      </p:sp>
       <p:pic>
         <p:nvPicPr>
-          <p:cNvPr id="3" name="Image 0" descr="logo.png"/>
+          <p:cNvPr id="4" name="Image 0" descr="logo.png"/>
           <p:cNvPicPr>
             <a:picLocks noChangeAspect="1"/>
           </p:cNvPicPr>
@@ -13749,14 +13841,14 @@
       </p:pic>
       <p:sp>
         <p:nvSpPr>
-          <p:cNvPr id="4" name="TextBox 3"/>
-          <p:cNvSpPr txBox="1"/>
-          <p:nvPr/>
-        </p:nvSpPr>
-        <p:spPr>
-          <a:xfrm>
-            <a:off x="548640" y="320040"/>
-            <a:ext cx="9601200" cy="685800"/>
+          <p:cNvPr id="5" name="TextBox 4"/>
+          <p:cNvSpPr txBox="1"/>
+          <p:nvPr/>
+        </p:nvSpPr>
+        <p:spPr>
+          <a:xfrm>
+            <a:off x="640080" y="1417320"/>
+            <a:ext cx="2788920" cy="384048"/>
           </a:xfrm>
           <a:prstGeom prst="rect">
             <a:avLst/>
@@ -13777,29 +13869,29 @@
               <a:buNone/>
             </a:pPr>
             <a:r>
-              <a:rPr lang="en-US" sz="2800" b="1" dirty="0">
-                <a:solidFill>
-                  <a:srgbClr val="000000"/>
-                </a:solidFill>
-                <a:latin typeface="Calibri" pitchFamily="34" charset="0"/>
-                <a:ea typeface="Calibri" pitchFamily="34" charset="-122"/>
-                <a:cs typeface="Calibri" pitchFamily="34" charset="-120"/>
-              </a:rPr>
-              <a:t xml:space="preserve">The gap this project fills</a:t>
-            </a:r>
-          </a:p>
-        </p:txBody>
-      </p:sp>
-      <p:sp>
-        <p:nvSpPr>
-          <p:cNvPr id="5" name="TextBox 4"/>
-          <p:cNvSpPr txBox="1"/>
-          <p:nvPr/>
-        </p:nvSpPr>
-        <p:spPr>
-          <a:xfrm>
-            <a:off x="11457432" y="6446520"/>
-            <a:ext cx="457200" cy="274320"/>
+              <a:rPr lang="en-US" sz="1350" b="1" dirty="0">
+                <a:solidFill>
+                  <a:srgbClr val="000000"/>
+                </a:solidFill>
+                <a:latin typeface="Calibri" pitchFamily="34" charset="0"/>
+                <a:ea typeface="Calibri" pitchFamily="34" charset="-122"/>
+                <a:cs typeface="Calibri" pitchFamily="34" charset="-120"/>
+              </a:rPr>
+              <a:t xml:space="preserve">ngspice 42</a:t>
+            </a:r>
+          </a:p>
+        </p:txBody>
+      </p:sp>
+      <p:sp>
+        <p:nvSpPr>
+          <p:cNvPr id="6" name="TextBox 5"/>
+          <p:cNvSpPr txBox="1"/>
+          <p:nvPr/>
+        </p:nvSpPr>
+        <p:spPr>
+          <a:xfrm>
+            <a:off x="3520440" y="1417320"/>
+            <a:ext cx="3246120" cy="384048"/>
           </a:xfrm>
           <a:prstGeom prst="rect">
             <a:avLst/>
@@ -13820,29 +13912,29 @@
               <a:buNone/>
             </a:pPr>
             <a:r>
-              <a:rPr lang="en-US" sz="1100" dirty="0">
-                <a:solidFill>
-                  <a:srgbClr val="000000"/>
-                </a:solidFill>
-                <a:latin typeface="Calibri" pitchFamily="34" charset="0"/>
-                <a:ea typeface="Calibri" pitchFamily="34" charset="-122"/>
-                <a:cs typeface="Calibri" pitchFamily="34" charset="-120"/>
-              </a:rPr>
-              <a:t xml:space="preserve">7</a:t>
-            </a:r>
-          </a:p>
-        </p:txBody>
-      </p:sp>
-      <p:sp>
-        <p:nvSpPr>
-          <p:cNvPr id="6" name="TextBox 5"/>
-          <p:cNvSpPr txBox="1"/>
-          <p:nvPr/>
-        </p:nvSpPr>
-        <p:spPr>
-          <a:xfrm>
-            <a:off x="640080" y="1234440"/>
-            <a:ext cx="11064240" cy="914400"/>
+              <a:rPr lang="en-US" sz="1200" dirty="0">
+                <a:solidFill>
+                  <a:srgbClr val="000000"/>
+                </a:solidFill>
+                <a:latin typeface="Calibri" pitchFamily="34" charset="0"/>
+                <a:ea typeface="Calibri" pitchFamily="34" charset="-122"/>
+                <a:cs typeface="Calibri" pitchFamily="34" charset="-120"/>
+              </a:rPr>
+              <a:t xml:space="preserve">every transient in the study</a:t>
+            </a:r>
+          </a:p>
+        </p:txBody>
+      </p:sp>
+      <p:sp>
+        <p:nvSpPr>
+          <p:cNvPr id="7" name="TextBox 6"/>
+          <p:cNvSpPr txBox="1"/>
+          <p:nvPr/>
+        </p:nvSpPr>
+        <p:spPr>
+          <a:xfrm>
+            <a:off x="6858000" y="1417320"/>
+            <a:ext cx="4754880" cy="384048"/>
           </a:xfrm>
           <a:prstGeom prst="rect">
             <a:avLst/>
@@ -13857,55 +13949,35 @@
           <a:p>
             <a:pPr marL="177800" indent="0">
               <a:spcAft>
-                <a:spcPts val="120"/>
-              </a:spcAft>
-              <a:buSzPct val="100000"/>
-              <a:buNone/>
-            </a:pPr>
-            <a:r>
-              <a:rPr lang="en-US" sz="1500" b="1" dirty="0">
-                <a:solidFill>
-                  <a:srgbClr val="000000"/>
-                </a:solidFill>
-                <a:latin typeface="Calibri" pitchFamily="34" charset="0"/>
-                <a:ea typeface="Calibri" pitchFamily="34" charset="-122"/>
-                <a:cs typeface="Calibri" pitchFamily="34" charset="-120"/>
-              </a:rPr>
-              <a:t xml:space="preserve">Every active-gate-driver paper reports ONE number: the improvement over a conventional driver.</a:t>
-            </a:r>
-          </a:p>
-          <a:p>
-            <a:pPr marL="177800" indent="0">
-              <a:spcAft>
                 <a:spcPts val="0"/>
               </a:spcAft>
               <a:buSzPct val="100000"/>
               <a:buNone/>
             </a:pPr>
             <a:r>
-              <a:rPr lang="en-US" sz="1300" dirty="0">
-                <a:solidFill>
-                  <a:srgbClr val="000000"/>
-                </a:solidFill>
-                <a:latin typeface="Calibri" pitchFamily="34" charset="0"/>
-                <a:ea typeface="Calibri" pitchFamily="34" charset="-122"/>
-                <a:cs typeface="Calibri" pitchFamily="34" charset="-120"/>
-              </a:rPr>
-              <a:t xml:space="preserve">That number bundles two effects that cost completely different hardware.</a:t>
-            </a:r>
-          </a:p>
-        </p:txBody>
-      </p:sp>
-      <p:sp>
-        <p:nvSpPr>
-          <p:cNvPr id="7" name="TextBox 6"/>
-          <p:cNvSpPr txBox="1"/>
-          <p:nvPr/>
-        </p:nvSpPr>
-        <p:spPr>
-          <a:xfrm>
-            <a:off x="640080" y="2377440"/>
-            <a:ext cx="5394960" cy="365760"/>
+              <a:rPr lang="en-US" sz="1200" b="1" dirty="0">
+                <a:solidFill>
+                  <a:srgbClr val="000000"/>
+                </a:solidFill>
+                <a:latin typeface="Calibri" pitchFamily="34" charset="0"/>
+                <a:ea typeface="Calibri" pitchFamily="34" charset="-122"/>
+                <a:cs typeface="Calibri" pitchFamily="34" charset="-120"/>
+              </a:rPr>
+              <a:t xml:space="preserve">34,622 simulations · 1.65 V spurious · 2.58 V margin · 5.2 % ceiling</a:t>
+            </a:r>
+          </a:p>
+        </p:txBody>
+      </p:sp>
+      <p:sp>
+        <p:nvSpPr>
+          <p:cNvPr id="8" name="TextBox 7"/>
+          <p:cNvSpPr txBox="1"/>
+          <p:nvPr/>
+        </p:nvSpPr>
+        <p:spPr>
+          <a:xfrm>
+            <a:off x="640080" y="1984248"/>
+            <a:ext cx="2788920" cy="384048"/>
           </a:xfrm>
           <a:prstGeom prst="rect">
             <a:avLst/>
@@ -13926,29 +13998,29 @@
               <a:buNone/>
             </a:pPr>
             <a:r>
-              <a:rPr lang="en-US" sz="1450" b="1" dirty="0">
-                <a:solidFill>
-                  <a:srgbClr val="000000"/>
-                </a:solidFill>
-                <a:latin typeface="Calibri" pitchFamily="34" charset="0"/>
-                <a:ea typeface="Calibri" pitchFamily="34" charset="-122"/>
-                <a:cs typeface="Calibri" pitchFamily="34" charset="-120"/>
-              </a:rPr>
-              <a:t xml:space="preserve">Effect 1  —  a better FIXED setting</a:t>
-            </a:r>
-          </a:p>
-        </p:txBody>
-      </p:sp>
-      <p:sp>
-        <p:nvSpPr>
-          <p:cNvPr id="8" name="TextBox 7"/>
-          <p:cNvSpPr txBox="1"/>
-          <p:nvPr/>
-        </p:nvSpPr>
-        <p:spPr>
-          <a:xfrm>
-            <a:off x="640080" y="2834640"/>
-            <a:ext cx="3703320" cy="1463040"/>
+              <a:rPr lang="en-US" sz="1350" b="1" dirty="0">
+                <a:solidFill>
+                  <a:srgbClr val="000000"/>
+                </a:solidFill>
+                <a:latin typeface="Calibri" pitchFamily="34" charset="0"/>
+                <a:ea typeface="Calibri" pitchFamily="34" charset="-122"/>
+                <a:cs typeface="Calibri" pitchFamily="34" charset="-120"/>
+              </a:rPr>
+              <a:t xml:space="preserve">LTspice 24</a:t>
+            </a:r>
+          </a:p>
+        </p:txBody>
+      </p:sp>
+      <p:sp>
+        <p:nvSpPr>
+          <p:cNvPr id="9" name="TextBox 8"/>
+          <p:cNvSpPr txBox="1"/>
+          <p:nvPr/>
+        </p:nvSpPr>
+        <p:spPr>
+          <a:xfrm>
+            <a:off x="3520440" y="1984248"/>
+            <a:ext cx="3246120" cy="384048"/>
           </a:xfrm>
           <a:prstGeom prst="rect">
             <a:avLst/>
@@ -13977,21 +14049,21 @@
                 <a:ea typeface="Calibri" pitchFamily="34" charset="-122"/>
                 <a:cs typeface="Calibri" pitchFamily="34" charset="-120"/>
               </a:rPr>
-              <a:t xml:space="preserve">Pick a better control word once, at design time. Costs nothing at run time: no sensor, no ADC, no lookup table, no controller.</a:t>
-            </a:r>
-          </a:p>
-        </p:txBody>
-      </p:sp>
-      <p:sp>
-        <p:nvSpPr>
-          <p:cNvPr id="9" name="TextBox 8"/>
-          <p:cNvSpPr txBox="1"/>
-          <p:nvPr/>
-        </p:nvSpPr>
-        <p:spPr>
-          <a:xfrm>
-            <a:off x="4480560" y="2788920"/>
-            <a:ext cx="1554480" cy="1188720"/>
+              <a:t xml:space="preserve">independent re-run of the shipped netlists</a:t>
+            </a:r>
+          </a:p>
+        </p:txBody>
+      </p:sp>
+      <p:sp>
+        <p:nvSpPr>
+          <p:cNvPr id="10" name="TextBox 9"/>
+          <p:cNvSpPr txBox="1"/>
+          <p:nvPr/>
+        </p:nvSpPr>
+        <p:spPr>
+          <a:xfrm>
+            <a:off x="6858000" y="1984248"/>
+            <a:ext cx="4754880" cy="384048"/>
           </a:xfrm>
           <a:prstGeom prst="rect">
             <a:avLst/>
@@ -14006,75 +14078,35 @@
           <a:p>
             <a:pPr marL="177800" indent="0">
               <a:spcAft>
-                <a:spcPts val="100"/>
-              </a:spcAft>
-              <a:buSzPct val="100000"/>
-              <a:buNone/>
-            </a:pPr>
-            <a:r>
-              <a:rPr lang="en-US" sz="3200" b="1" dirty="0">
-                <a:solidFill>
-                  <a:srgbClr val="000000"/>
-                </a:solidFill>
-                <a:latin typeface="Calibri" pitchFamily="34" charset="0"/>
-                <a:ea typeface="Calibri" pitchFamily="34" charset="-122"/>
-                <a:cs typeface="Calibri" pitchFamily="34" charset="-120"/>
-              </a:rPr>
-              <a:t xml:space="preserve">25.1 %</a:t>
-            </a:r>
-          </a:p>
-          <a:p>
-            <a:pPr marL="177800" indent="0">
-              <a:spcAft>
-                <a:spcPts val="60"/>
-              </a:spcAft>
-              <a:buSzPct val="100000"/>
-              <a:buNone/>
-            </a:pPr>
-            <a:r>
-              <a:rPr lang="en-US" sz="1300" b="1" dirty="0">
-                <a:solidFill>
-                  <a:srgbClr val="000000"/>
-                </a:solidFill>
-                <a:latin typeface="Calibri" pitchFamily="34" charset="0"/>
-                <a:ea typeface="Calibri" pitchFamily="34" charset="-122"/>
-                <a:cs typeface="Calibri" pitchFamily="34" charset="-120"/>
-              </a:rPr>
-              <a:t xml:space="preserve">of baseline</a:t>
-            </a:r>
-          </a:p>
-          <a:p>
-            <a:pPr marL="177800" indent="0">
-              <a:spcAft>
                 <a:spcPts val="0"/>
               </a:spcAft>
               <a:buSzPct val="100000"/>
               <a:buNone/>
             </a:pPr>
             <a:r>
-              <a:rPr lang="en-US" sz="1150" dirty="0">
-                <a:solidFill>
-                  <a:srgbClr val="000000"/>
-                </a:solidFill>
-                <a:latin typeface="Calibri" pitchFamily="34" charset="0"/>
-                <a:ea typeface="Calibri" pitchFamily="34" charset="-122"/>
-                <a:cs typeface="Calibri" pitchFamily="34" charset="-120"/>
-              </a:rPr>
-              <a:t xml:space="preserve"/>
-            </a:r>
-          </a:p>
-        </p:txBody>
-      </p:sp>
-      <p:sp>
-        <p:nvSpPr>
-          <p:cNvPr id="10" name="TextBox 9"/>
-          <p:cNvSpPr txBox="1"/>
-          <p:nvPr/>
-        </p:nvSpPr>
-        <p:spPr>
-          <a:xfrm>
-            <a:off x="6400800" y="2377440"/>
-            <a:ext cx="5394960" cy="365760"/>
+              <a:rPr lang="en-US" sz="1200" b="1" dirty="0">
+                <a:solidFill>
+                  <a:srgbClr val="000000"/>
+                </a:solidFill>
+                <a:latin typeface="Calibri" pitchFamily="34" charset="0"/>
+                <a:ea typeface="Calibri" pitchFamily="34" charset="-122"/>
+                <a:cs typeface="Calibri" pitchFamily="34" charset="-120"/>
+              </a:rPr>
+              <a:t xml:space="preserve">1.6487 / 0.8282 / −1.1768 V — matches ngspice within 2 mV</a:t>
+            </a:r>
+          </a:p>
+        </p:txBody>
+      </p:sp>
+      <p:sp>
+        <p:nvSpPr>
+          <p:cNvPr id="11" name="TextBox 10"/>
+          <p:cNvSpPr txBox="1"/>
+          <p:nvPr/>
+        </p:nvSpPr>
+        <p:spPr>
+          <a:xfrm>
+            <a:off x="640080" y="2551176"/>
+            <a:ext cx="2788920" cy="384048"/>
           </a:xfrm>
           <a:prstGeom prst="rect">
             <a:avLst/>
@@ -14095,29 +14127,29 @@
               <a:buNone/>
             </a:pPr>
             <a:r>
-              <a:rPr lang="en-US" sz="1450" b="1" dirty="0">
-                <a:solidFill>
-                  <a:srgbClr val="000000"/>
-                </a:solidFill>
-                <a:latin typeface="Calibri" pitchFamily="34" charset="0"/>
-                <a:ea typeface="Calibri" pitchFamily="34" charset="-122"/>
-                <a:cs typeface="Calibri" pitchFamily="34" charset="-120"/>
-              </a:rPr>
-              <a:t xml:space="preserve">Effect 2  —  ADAPTING per operating point</a:t>
-            </a:r>
-          </a:p>
-        </p:txBody>
-      </p:sp>
-      <p:sp>
-        <p:nvSpPr>
-          <p:cNvPr id="11" name="TextBox 10"/>
-          <p:cNvSpPr txBox="1"/>
-          <p:nvPr/>
-        </p:nvSpPr>
-        <p:spPr>
-          <a:xfrm>
-            <a:off x="6400800" y="2834640"/>
-            <a:ext cx="3703320" cy="1463040"/>
+              <a:rPr lang="en-US" sz="1350" b="1" dirty="0">
+                <a:solidFill>
+                  <a:srgbClr val="000000"/>
+                </a:solidFill>
+                <a:latin typeface="Calibri" pitchFamily="34" charset="0"/>
+                <a:ea typeface="Calibri" pitchFamily="34" charset="-122"/>
+                <a:cs typeface="Calibri" pitchFamily="34" charset="-120"/>
+              </a:rPr>
+              <a:t xml:space="preserve">MATLAB Online</a:t>
+            </a:r>
+          </a:p>
+        </p:txBody>
+      </p:sp>
+      <p:sp>
+        <p:nvSpPr>
+          <p:cNvPr id="12" name="TextBox 11"/>
+          <p:cNvSpPr txBox="1"/>
+          <p:nvPr/>
+        </p:nvSpPr>
+        <p:spPr>
+          <a:xfrm>
+            <a:off x="3520440" y="2551176"/>
+            <a:ext cx="3246120" cy="384048"/>
           </a:xfrm>
           <a:prstGeom prst="rect">
             <a:avLst/>
@@ -14146,21 +14178,21 @@
                 <a:ea typeface="Calibri" pitchFamily="34" charset="-122"/>
                 <a:cs typeface="Calibri" pitchFamily="34" charset="-120"/>
               </a:rPr>
-              <a:t xml:space="preserve">Change the word as load, bus voltage and temperature move. This is what needs the sensing hardware the architecture is sold on.</a:t>
-            </a:r>
-          </a:p>
-        </p:txBody>
-      </p:sp>
-      <p:sp>
-        <p:nvSpPr>
-          <p:cNvPr id="12" name="TextBox 11"/>
-          <p:cNvSpPr txBox="1"/>
-          <p:nvPr/>
-        </p:nvSpPr>
-        <p:spPr>
-          <a:xfrm>
-            <a:off x="10241280" y="2788920"/>
-            <a:ext cx="1554480" cy="1188720"/>
+              <a:t xml:space="preserve">independent re-analysis of the same CSVs</a:t>
+            </a:r>
+          </a:p>
+        </p:txBody>
+      </p:sp>
+      <p:sp>
+        <p:nvSpPr>
+          <p:cNvPr id="13" name="TextBox 12"/>
+          <p:cNvSpPr txBox="1"/>
+          <p:nvPr/>
+        </p:nvSpPr>
+        <p:spPr>
+          <a:xfrm>
+            <a:off x="6858000" y="2551176"/>
+            <a:ext cx="4754880" cy="384048"/>
           </a:xfrm>
           <a:prstGeom prst="rect">
             <a:avLst/>
@@ -14175,75 +14207,35 @@
           <a:p>
             <a:pPr marL="177800" indent="0">
               <a:spcAft>
-                <a:spcPts val="100"/>
-              </a:spcAft>
-              <a:buSzPct val="100000"/>
-              <a:buNone/>
-            </a:pPr>
-            <a:r>
-              <a:rPr lang="en-US" sz="3200" b="1" dirty="0">
-                <a:solidFill>
-                  <a:srgbClr val="000000"/>
-                </a:solidFill>
-                <a:latin typeface="Calibri" pitchFamily="34" charset="0"/>
-                <a:ea typeface="Calibri" pitchFamily="34" charset="-122"/>
-                <a:cs typeface="Calibri" pitchFamily="34" charset="-120"/>
-              </a:rPr>
-              <a:t xml:space="preserve">3.9 %</a:t>
-            </a:r>
-          </a:p>
-          <a:p>
-            <a:pPr marL="177800" indent="0">
-              <a:spcAft>
-                <a:spcPts val="60"/>
-              </a:spcAft>
-              <a:buSzPct val="100000"/>
-              <a:buNone/>
-            </a:pPr>
-            <a:r>
-              <a:rPr lang="en-US" sz="1300" b="1" dirty="0">
-                <a:solidFill>
-                  <a:srgbClr val="000000"/>
-                </a:solidFill>
-                <a:latin typeface="Calibri" pitchFamily="34" charset="0"/>
-                <a:ea typeface="Calibri" pitchFamily="34" charset="-122"/>
-                <a:cs typeface="Calibri" pitchFamily="34" charset="-120"/>
-              </a:rPr>
-              <a:t xml:space="preserve">of baseline</a:t>
-            </a:r>
-          </a:p>
-          <a:p>
-            <a:pPr marL="177800" indent="0">
-              <a:spcAft>
                 <a:spcPts val="0"/>
               </a:spcAft>
               <a:buSzPct val="100000"/>
               <a:buNone/>
             </a:pPr>
             <a:r>
-              <a:rPr lang="en-US" sz="1150" dirty="0">
-                <a:solidFill>
-                  <a:srgbClr val="000000"/>
-                </a:solidFill>
-                <a:latin typeface="Calibri" pitchFamily="34" charset="0"/>
-                <a:ea typeface="Calibri" pitchFamily="34" charset="-122"/>
-                <a:cs typeface="Calibri" pitchFamily="34" charset="-120"/>
-              </a:rPr>
-              <a:t xml:space="preserve"/>
-            </a:r>
-          </a:p>
-        </p:txBody>
-      </p:sp>
-      <p:sp>
-        <p:nvSpPr>
-          <p:cNvPr id="13" name="TextBox 12"/>
-          <p:cNvSpPr txBox="1"/>
-          <p:nvPr/>
-        </p:nvSpPr>
-        <p:spPr>
-          <a:xfrm>
-            <a:off x="640080" y="4526280"/>
-            <a:ext cx="11064240" cy="1920240"/>
+              <a:rPr lang="en-US" sz="1200" b="1" dirty="0">
+                <a:solidFill>
+                  <a:srgbClr val="000000"/>
+                </a:solidFill>
+                <a:latin typeface="Calibri" pitchFamily="34" charset="0"/>
+                <a:ea typeface="Calibri" pitchFamily="34" charset="-122"/>
+                <a:cs typeface="Calibri" pitchFamily="34" charset="-120"/>
+              </a:rPr>
+              <a:t xml:space="preserve">504 of 720 feasible · 7-word Pareto front · 0.039 µJ per point</a:t>
+            </a:r>
+          </a:p>
+        </p:txBody>
+      </p:sp>
+      <p:sp>
+        <p:nvSpPr>
+          <p:cNvPr id="14" name="TextBox 13"/>
+          <p:cNvSpPr txBox="1"/>
+          <p:nvPr/>
+        </p:nvSpPr>
+        <p:spPr>
+          <a:xfrm>
+            <a:off x="640080" y="3118104"/>
+            <a:ext cx="2788920" cy="384048"/>
           </a:xfrm>
           <a:prstGeom prst="rect">
             <a:avLst/>
@@ -14258,94 +14250,548 @@
           <a:p>
             <a:pPr marL="177800" indent="0">
               <a:spcAft>
-                <a:spcPts val="170"/>
-              </a:spcAft>
-              <a:buSzPct val="100000"/>
-              <a:buNone/>
-            </a:pPr>
-            <a:r>
-              <a:rPr lang="en-US" sz="1400" b="1" dirty="0">
-                <a:solidFill>
-                  <a:srgbClr val="000000"/>
-                </a:solidFill>
-                <a:latin typeface="Calibri" pitchFamily="34" charset="0"/>
-                <a:ea typeface="Calibri" pitchFamily="34" charset="-122"/>
-                <a:cs typeface="Calibri" pitchFamily="34" charset="-120"/>
-              </a:rPr>
-              <a:t xml:space="preserve">THE GAP: </a:t>
-            </a:r>
-            <a:r>
-              <a:rPr lang="en-US" sz="1400" dirty="0">
-                <a:solidFill>
-                  <a:srgbClr val="000000"/>
-                </a:solidFill>
-                <a:latin typeface="Calibri" pitchFamily="34" charset="0"/>
-                <a:ea typeface="Calibri" pitchFamily="34" charset="-122"/>
-                <a:cs typeface="Calibri" pitchFamily="34" charset="-120"/>
-              </a:rPr>
-              <a:t xml:space="preserve">no published work separates them. Nobody reports how much of an active gate driver's benefit actually requires adaptation, because separating the two needs an exhaustive search of the control word at every corner — and nobody has run one.</a:t>
-            </a:r>
-          </a:p>
-          <a:p>
-            <a:pPr marL="177800" indent="0">
-              <a:spcAft>
-                <a:spcPts val="170"/>
-              </a:spcAft>
-              <a:buSzPct val="100000"/>
-              <a:buNone/>
-            </a:pPr>
-            <a:r>
-              <a:rPr lang="en-US" sz="1400" b="1" dirty="0">
-                <a:solidFill>
-                  <a:srgbClr val="000000"/>
-                </a:solidFill>
-                <a:latin typeface="Calibri" pitchFamily="34" charset="0"/>
-                <a:ea typeface="Calibri" pitchFamily="34" charset="-122"/>
-                <a:cs typeface="Calibri" pitchFamily="34" charset="-120"/>
-              </a:rPr>
-              <a:t xml:space="preserve">WHY IT MATTERS: </a:t>
-            </a:r>
-            <a:r>
-              <a:rPr lang="en-US" sz="1400" dirty="0">
-                <a:solidFill>
-                  <a:srgbClr val="000000"/>
-                </a:solidFill>
-                <a:latin typeface="Calibri" pitchFamily="34" charset="0"/>
-                <a:ea typeface="Calibri" pitchFamily="34" charset="-122"/>
-                <a:cs typeface="Calibri" pitchFamily="34" charset="-120"/>
-              </a:rPr>
-              <a:t xml:space="preserve">only Effect 2 justifies the sense + ADC + lookup table. If it is small, that hardware is mostly paying for something a design-time choice already delivers — a buy-or-not decision nobody has costed.</a:t>
-            </a:r>
-          </a:p>
-          <a:p>
-            <a:pPr marL="177800" indent="0">
-              <a:spcAft>
                 <a:spcPts val="0"/>
               </a:spcAft>
               <a:buSzPct val="100000"/>
               <a:buNone/>
             </a:pPr>
             <a:r>
-              <a:rPr lang="en-US" sz="1400" b="1" dirty="0">
-                <a:solidFill>
-                  <a:srgbClr val="000000"/>
-                </a:solidFill>
-                <a:latin typeface="Calibri" pitchFamily="34" charset="0"/>
-                <a:ea typeface="Calibri" pitchFamily="34" charset="-122"/>
-                <a:cs typeface="Calibri" pitchFamily="34" charset="-120"/>
-              </a:rPr>
-              <a:t xml:space="preserve">WHAT WE DO: </a:t>
-            </a:r>
-            <a:r>
-              <a:rPr lang="en-US" sz="1400" dirty="0">
-                <a:solidFill>
-                  <a:srgbClr val="000000"/>
-                </a:solidFill>
-                <a:latin typeface="Calibri" pitchFamily="34" charset="0"/>
-                <a:ea typeface="Calibri" pitchFamily="34" charset="-122"/>
-                <a:cs typeface="Calibri" pitchFamily="34" charset="-120"/>
-              </a:rPr>
-              <a:t xml:space="preserve">720 control words × 4 corners, exhaustively, in ngspice — then report the two numbers separately instead of their sum.</a:t>
+              <a:rPr lang="en-US" sz="1350" b="1" dirty="0">
+                <a:solidFill>
+                  <a:srgbClr val="000000"/>
+                </a:solidFill>
+                <a:latin typeface="Calibri" pitchFamily="34" charset="0"/>
+                <a:ea typeface="Calibri" pitchFamily="34" charset="-122"/>
+                <a:cs typeface="Calibri" pitchFamily="34" charset="-120"/>
+              </a:rPr>
+              <a:t xml:space="preserve">GNU Octave 11.3</a:t>
+            </a:r>
+          </a:p>
+        </p:txBody>
+      </p:sp>
+      <p:sp>
+        <p:nvSpPr>
+          <p:cNvPr id="15" name="TextBox 14"/>
+          <p:cNvSpPr txBox="1"/>
+          <p:nvPr/>
+        </p:nvSpPr>
+        <p:spPr>
+          <a:xfrm>
+            <a:off x="3520440" y="3118104"/>
+            <a:ext cx="3246120" cy="384048"/>
+          </a:xfrm>
+          <a:prstGeom prst="rect">
+            <a:avLst/>
+          </a:prstGeom>
+          <a:noFill/>
+        </p:spPr>
+        <p:txBody>
+          <a:bodyPr wrap="square" lIns="0" tIns="0" rIns="0" bIns="0">
+            <a:spAutoFit/>
+          </a:bodyPr>
+          <a:lstStyle/>
+          <a:p>
+            <a:pPr marL="177800" indent="0">
+              <a:spcAft>
+                <a:spcPts val="0"/>
+              </a:spcAft>
+              <a:buSzPct val="100000"/>
+              <a:buNone/>
+            </a:pPr>
+            <a:r>
+              <a:rPr lang="en-US" sz="1200" dirty="0">
+                <a:solidFill>
+                  <a:srgbClr val="000000"/>
+                </a:solidFill>
+                <a:latin typeface="Calibri" pitchFamily="34" charset="0"/>
+                <a:ea typeface="Calibri" pitchFamily="34" charset="-122"/>
+                <a:cs typeface="Calibri" pitchFamily="34" charset="-120"/>
+              </a:rPr>
+              <a:t xml:space="preserve">second run of the same MATLAB scripts</a:t>
+            </a:r>
+          </a:p>
+        </p:txBody>
+      </p:sp>
+      <p:sp>
+        <p:nvSpPr>
+          <p:cNvPr id="16" name="TextBox 15"/>
+          <p:cNvSpPr txBox="1"/>
+          <p:nvPr/>
+        </p:nvSpPr>
+        <p:spPr>
+          <a:xfrm>
+            <a:off x="6858000" y="3118104"/>
+            <a:ext cx="4754880" cy="384048"/>
+          </a:xfrm>
+          <a:prstGeom prst="rect">
+            <a:avLst/>
+          </a:prstGeom>
+          <a:noFill/>
+        </p:spPr>
+        <p:txBody>
+          <a:bodyPr wrap="square" lIns="0" tIns="0" rIns="0" bIns="0">
+            <a:spAutoFit/>
+          </a:bodyPr>
+          <a:lstStyle/>
+          <a:p>
+            <a:pPr marL="177800" indent="0">
+              <a:spcAft>
+                <a:spcPts val="0"/>
+              </a:spcAft>
+              <a:buSzPct val="100000"/>
+              <a:buNone/>
+            </a:pPr>
+            <a:r>
+              <a:rPr lang="en-US" sz="1200" b="1" dirty="0">
+                <a:solidFill>
+                  <a:srgbClr val="000000"/>
+                </a:solidFill>
+                <a:latin typeface="Calibri" pitchFamily="34" charset="0"/>
+                <a:ea typeface="Calibri" pitchFamily="34" charset="-122"/>
+                <a:cs typeface="Calibri" pitchFamily="34" charset="-120"/>
+              </a:rPr>
+              <a:t xml:space="preserve">agrees with MATLAB to the last printed digit</a:t>
+            </a:r>
+          </a:p>
+        </p:txBody>
+      </p:sp>
+      <p:sp>
+        <p:nvSpPr>
+          <p:cNvPr id="17" name="TextBox 16"/>
+          <p:cNvSpPr txBox="1"/>
+          <p:nvPr/>
+        </p:nvSpPr>
+        <p:spPr>
+          <a:xfrm>
+            <a:off x="640080" y="3685032"/>
+            <a:ext cx="2788920" cy="384048"/>
+          </a:xfrm>
+          <a:prstGeom prst="rect">
+            <a:avLst/>
+          </a:prstGeom>
+          <a:noFill/>
+        </p:spPr>
+        <p:txBody>
+          <a:bodyPr wrap="square" lIns="0" tIns="0" rIns="0" bIns="0">
+            <a:spAutoFit/>
+          </a:bodyPr>
+          <a:lstStyle/>
+          <a:p>
+            <a:pPr marL="177800" indent="0">
+              <a:spcAft>
+                <a:spcPts val="0"/>
+              </a:spcAft>
+              <a:buSzPct val="100000"/>
+              <a:buNone/>
+            </a:pPr>
+            <a:r>
+              <a:rPr lang="en-US" sz="1350" b="1" dirty="0">
+                <a:solidFill>
+                  <a:srgbClr val="000000"/>
+                </a:solidFill>
+                <a:latin typeface="Calibri" pitchFamily="34" charset="0"/>
+                <a:ea typeface="Calibri" pitchFamily="34" charset="-122"/>
+                <a:cs typeface="Calibri" pitchFamily="34" charset="-120"/>
+              </a:rPr>
+              <a:t xml:space="preserve">Icarus Verilog</a:t>
+            </a:r>
+          </a:p>
+        </p:txBody>
+      </p:sp>
+      <p:sp>
+        <p:nvSpPr>
+          <p:cNvPr id="18" name="TextBox 17"/>
+          <p:cNvSpPr txBox="1"/>
+          <p:nvPr/>
+        </p:nvSpPr>
+        <p:spPr>
+          <a:xfrm>
+            <a:off x="3520440" y="3685032"/>
+            <a:ext cx="3246120" cy="384048"/>
+          </a:xfrm>
+          <a:prstGeom prst="rect">
+            <a:avLst/>
+          </a:prstGeom>
+          <a:noFill/>
+        </p:spPr>
+        <p:txBody>
+          <a:bodyPr wrap="square" lIns="0" tIns="0" rIns="0" bIns="0">
+            <a:spAutoFit/>
+          </a:bodyPr>
+          <a:lstStyle/>
+          <a:p>
+            <a:pPr marL="177800" indent="0">
+              <a:spcAft>
+                <a:spcPts val="0"/>
+              </a:spcAft>
+              <a:buSzPct val="100000"/>
+              <a:buNone/>
+            </a:pPr>
+            <a:r>
+              <a:rPr lang="en-US" sz="1200" dirty="0">
+                <a:solidFill>
+                  <a:srgbClr val="000000"/>
+                </a:solidFill>
+                <a:latin typeface="Calibri" pitchFamily="34" charset="0"/>
+                <a:ea typeface="Calibri" pitchFamily="34" charset="-122"/>
+                <a:cs typeface="Calibri" pitchFamily="34" charset="-120"/>
+              </a:rPr>
+              <a:t xml:space="preserve">RTL verification and mutation testing</a:t>
+            </a:r>
+          </a:p>
+        </p:txBody>
+      </p:sp>
+      <p:sp>
+        <p:nvSpPr>
+          <p:cNvPr id="19" name="TextBox 18"/>
+          <p:cNvSpPr txBox="1"/>
+          <p:nvPr/>
+        </p:nvSpPr>
+        <p:spPr>
+          <a:xfrm>
+            <a:off x="6858000" y="3685032"/>
+            <a:ext cx="4754880" cy="384048"/>
+          </a:xfrm>
+          <a:prstGeom prst="rect">
+            <a:avLst/>
+          </a:prstGeom>
+          <a:noFill/>
+        </p:spPr>
+        <p:txBody>
+          <a:bodyPr wrap="square" lIns="0" tIns="0" rIns="0" bIns="0">
+            <a:spAutoFit/>
+          </a:bodyPr>
+          <a:lstStyle/>
+          <a:p>
+            <a:pPr marL="177800" indent="0">
+              <a:spcAft>
+                <a:spcPts val="0"/>
+              </a:spcAft>
+              <a:buSzPct val="100000"/>
+              <a:buNone/>
+            </a:pPr>
+            <a:r>
+              <a:rPr lang="en-US" sz="1200" b="1" dirty="0">
+                <a:solidFill>
+                  <a:srgbClr val="000000"/>
+                </a:solidFill>
+                <a:latin typeface="Calibri" pitchFamily="34" charset="0"/>
+                <a:ea typeface="Calibri" pitchFamily="34" charset="-122"/>
+                <a:cs typeface="Calibri" pitchFamily="34" charset="-120"/>
+              </a:rPr>
+              <a:t xml:space="preserve">8 asserted properties pass · injected shoot-through caught 221×</a:t>
+            </a:r>
+          </a:p>
+        </p:txBody>
+      </p:sp>
+      <p:sp>
+        <p:nvSpPr>
+          <p:cNvPr id="20" name="TextBox 19"/>
+          <p:cNvSpPr txBox="1"/>
+          <p:nvPr/>
+        </p:nvSpPr>
+        <p:spPr>
+          <a:xfrm>
+            <a:off x="640080" y="4251960"/>
+            <a:ext cx="2788920" cy="384048"/>
+          </a:xfrm>
+          <a:prstGeom prst="rect">
+            <a:avLst/>
+          </a:prstGeom>
+          <a:noFill/>
+        </p:spPr>
+        <p:txBody>
+          <a:bodyPr wrap="square" lIns="0" tIns="0" rIns="0" bIns="0">
+            <a:spAutoFit/>
+          </a:bodyPr>
+          <a:lstStyle/>
+          <a:p>
+            <a:pPr marL="177800" indent="0">
+              <a:spcAft>
+                <a:spcPts val="0"/>
+              </a:spcAft>
+              <a:buSzPct val="100000"/>
+              <a:buNone/>
+            </a:pPr>
+            <a:r>
+              <a:rPr lang="en-US" sz="1350" b="1" dirty="0">
+                <a:solidFill>
+                  <a:srgbClr val="000000"/>
+                </a:solidFill>
+                <a:latin typeface="Calibri" pitchFamily="34" charset="0"/>
+                <a:ea typeface="Calibri" pitchFamily="34" charset="-122"/>
+                <a:cs typeface="Calibri" pitchFamily="34" charset="-120"/>
+              </a:rPr>
+              <a:t xml:space="preserve">Xilinx Vivado 2024.1.2</a:t>
+            </a:r>
+          </a:p>
+        </p:txBody>
+      </p:sp>
+      <p:sp>
+        <p:nvSpPr>
+          <p:cNvPr id="21" name="TextBox 20"/>
+          <p:cNvSpPr txBox="1"/>
+          <p:nvPr/>
+        </p:nvSpPr>
+        <p:spPr>
+          <a:xfrm>
+            <a:off x="3520440" y="4251960"/>
+            <a:ext cx="3246120" cy="384048"/>
+          </a:xfrm>
+          <a:prstGeom prst="rect">
+            <a:avLst/>
+          </a:prstGeom>
+          <a:noFill/>
+        </p:spPr>
+        <p:txBody>
+          <a:bodyPr wrap="square" lIns="0" tIns="0" rIns="0" bIns="0">
+            <a:spAutoFit/>
+          </a:bodyPr>
+          <a:lstStyle/>
+          <a:p>
+            <a:pPr marL="177800" indent="0">
+              <a:spcAft>
+                <a:spcPts val="0"/>
+              </a:spcAft>
+              <a:buSzPct val="100000"/>
+              <a:buNone/>
+            </a:pPr>
+            <a:r>
+              <a:rPr lang="en-US" sz="1200" dirty="0">
+                <a:solidFill>
+                  <a:srgbClr val="000000"/>
+                </a:solidFill>
+                <a:latin typeface="Calibri" pitchFamily="34" charset="0"/>
+                <a:ea typeface="Calibri" pitchFamily="34" charset="-122"/>
+                <a:cs typeface="Calibri" pitchFamily="34" charset="-120"/>
+              </a:rPr>
+              <a:t xml:space="preserve">FPGA synthesis and timing on xc7a35t</a:t>
+            </a:r>
+          </a:p>
+        </p:txBody>
+      </p:sp>
+      <p:sp>
+        <p:nvSpPr>
+          <p:cNvPr id="22" name="TextBox 21"/>
+          <p:cNvSpPr txBox="1"/>
+          <p:nvPr/>
+        </p:nvSpPr>
+        <p:spPr>
+          <a:xfrm>
+            <a:off x="6858000" y="4251960"/>
+            <a:ext cx="4754880" cy="384048"/>
+          </a:xfrm>
+          <a:prstGeom prst="rect">
+            <a:avLst/>
+          </a:prstGeom>
+          <a:noFill/>
+        </p:spPr>
+        <p:txBody>
+          <a:bodyPr wrap="square" lIns="0" tIns="0" rIns="0" bIns="0">
+            <a:spAutoFit/>
+          </a:bodyPr>
+          <a:lstStyle/>
+          <a:p>
+            <a:pPr marL="177800" indent="0">
+              <a:spcAft>
+                <a:spcPts val="0"/>
+              </a:spcAft>
+              <a:buSzPct val="100000"/>
+              <a:buNone/>
+            </a:pPr>
+            <a:r>
+              <a:rPr lang="en-US" sz="1200" b="1" dirty="0">
+                <a:solidFill>
+                  <a:srgbClr val="000000"/>
+                </a:solidFill>
+                <a:latin typeface="Calibri" pitchFamily="34" charset="0"/>
+                <a:ea typeface="Calibri" pitchFamily="34" charset="-122"/>
+                <a:cs typeface="Calibri" pitchFamily="34" charset="-120"/>
+              </a:rPr>
+              <a:t xml:space="preserve">20 LUTs, 20 flip-flops · 200 MHz met, 1.996 ns slack</a:t>
+            </a:r>
+          </a:p>
+        </p:txBody>
+      </p:sp>
+      <p:sp>
+        <p:nvSpPr>
+          <p:cNvPr id="23" name="TextBox 22"/>
+          <p:cNvSpPr txBox="1"/>
+          <p:nvPr/>
+        </p:nvSpPr>
+        <p:spPr>
+          <a:xfrm>
+            <a:off x="640080" y="4818888"/>
+            <a:ext cx="2788920" cy="384048"/>
+          </a:xfrm>
+          <a:prstGeom prst="rect">
+            <a:avLst/>
+          </a:prstGeom>
+          <a:noFill/>
+        </p:spPr>
+        <p:txBody>
+          <a:bodyPr wrap="square" lIns="0" tIns="0" rIns="0" bIns="0">
+            <a:spAutoFit/>
+          </a:bodyPr>
+          <a:lstStyle/>
+          <a:p>
+            <a:pPr marL="177800" indent="0">
+              <a:spcAft>
+                <a:spcPts val="0"/>
+              </a:spcAft>
+              <a:buSzPct val="100000"/>
+              <a:buNone/>
+            </a:pPr>
+            <a:r>
+              <a:rPr lang="en-US" sz="1350" b="1" dirty="0">
+                <a:solidFill>
+                  <a:srgbClr val="000000"/>
+                </a:solidFill>
+                <a:latin typeface="Calibri" pitchFamily="34" charset="0"/>
+                <a:ea typeface="Calibri" pitchFamily="34" charset="-122"/>
+                <a:cs typeface="Calibri" pitchFamily="34" charset="-120"/>
+              </a:rPr>
+              <a:t xml:space="preserve">Python · NumPy</a:t>
+            </a:r>
+          </a:p>
+        </p:txBody>
+      </p:sp>
+      <p:sp>
+        <p:nvSpPr>
+          <p:cNvPr id="24" name="TextBox 23"/>
+          <p:cNvSpPr txBox="1"/>
+          <p:nvPr/>
+        </p:nvSpPr>
+        <p:spPr>
+          <a:xfrm>
+            <a:off x="3520440" y="4818888"/>
+            <a:ext cx="3246120" cy="384048"/>
+          </a:xfrm>
+          <a:prstGeom prst="rect">
+            <a:avLst/>
+          </a:prstGeom>
+          <a:noFill/>
+        </p:spPr>
+        <p:txBody>
+          <a:bodyPr wrap="square" lIns="0" tIns="0" rIns="0" bIns="0">
+            <a:spAutoFit/>
+          </a:bodyPr>
+          <a:lstStyle/>
+          <a:p>
+            <a:pPr marL="177800" indent="0">
+              <a:spcAft>
+                <a:spcPts val="0"/>
+              </a:spcAft>
+              <a:buSzPct val="100000"/>
+              <a:buNone/>
+            </a:pPr>
+            <a:r>
+              <a:rPr lang="en-US" sz="1200" dirty="0">
+                <a:solidFill>
+                  <a:srgbClr val="000000"/>
+                </a:solidFill>
+                <a:latin typeface="Calibri" pitchFamily="34" charset="0"/>
+                <a:ea typeface="Calibri" pitchFamily="34" charset="-122"/>
+                <a:cs typeface="Calibri" pitchFamily="34" charset="-120"/>
+              </a:rPr>
+              <a:t xml:space="preserve">sweep orchestration and the decomposition</a:t>
+            </a:r>
+          </a:p>
+        </p:txBody>
+      </p:sp>
+      <p:sp>
+        <p:nvSpPr>
+          <p:cNvPr id="25" name="TextBox 24"/>
+          <p:cNvSpPr txBox="1"/>
+          <p:nvPr/>
+        </p:nvSpPr>
+        <p:spPr>
+          <a:xfrm>
+            <a:off x="6858000" y="4818888"/>
+            <a:ext cx="4754880" cy="384048"/>
+          </a:xfrm>
+          <a:prstGeom prst="rect">
+            <a:avLst/>
+          </a:prstGeom>
+          <a:noFill/>
+        </p:spPr>
+        <p:txBody>
+          <a:bodyPr wrap="square" lIns="0" tIns="0" rIns="0" bIns="0">
+            <a:spAutoFit/>
+          </a:bodyPr>
+          <a:lstStyle/>
+          <a:p>
+            <a:pPr marL="177800" indent="0">
+              <a:spcAft>
+                <a:spcPts val="0"/>
+              </a:spcAft>
+              <a:buSzPct val="100000"/>
+              <a:buNone/>
+            </a:pPr>
+            <a:r>
+              <a:rPr lang="en-US" sz="1200" b="1" dirty="0">
+                <a:solidFill>
+                  <a:srgbClr val="000000"/>
+                </a:solidFill>
+                <a:latin typeface="Calibri" pitchFamily="34" charset="0"/>
+                <a:ea typeface="Calibri" pitchFamily="34" charset="-122"/>
+                <a:cs typeface="Calibri" pitchFamily="34" charset="-120"/>
+              </a:rPr>
+              <a:t xml:space="preserve">720-word search · (A) 25.1 % vs (B) 3.9 %</a:t>
+            </a:r>
+          </a:p>
+        </p:txBody>
+      </p:sp>
+      <p:sp>
+        <p:nvSpPr>
+          <p:cNvPr id="26" name="TextBox 25"/>
+          <p:cNvSpPr txBox="1"/>
+          <p:nvPr/>
+        </p:nvSpPr>
+        <p:spPr>
+          <a:xfrm>
+            <a:off x="640080" y="5550408"/>
+            <a:ext cx="10972800" cy="548640"/>
+          </a:xfrm>
+          <a:prstGeom prst="rect">
+            <a:avLst/>
+          </a:prstGeom>
+          <a:noFill/>
+        </p:spPr>
+        <p:txBody>
+          <a:bodyPr wrap="square" lIns="0" tIns="0" rIns="0" bIns="0">
+            <a:spAutoFit/>
+          </a:bodyPr>
+          <a:lstStyle/>
+          <a:p>
+            <a:pPr marL="177800" indent="0">
+              <a:spcAft>
+                <a:spcPts val="0"/>
+              </a:spcAft>
+              <a:buSzPct val="100000"/>
+              <a:buNone/>
+            </a:pPr>
+            <a:r>
+              <a:rPr lang="en-US" sz="1250" b="1" dirty="0">
+                <a:solidFill>
+                  <a:srgbClr val="000000"/>
+                </a:solidFill>
+                <a:latin typeface="Calibri" pitchFamily="34" charset="0"/>
+                <a:ea typeface="Calibri" pitchFamily="34" charset="-122"/>
+                <a:cs typeface="Calibri" pitchFamily="34" charset="-120"/>
+              </a:rPr>
+              <a:t xml:space="preserve">No number rests on one tool. </a:t>
+            </a:r>
+            <a:r>
+              <a:rPr lang="en-US" sz="1250" dirty="0">
+                <a:solidFill>
+                  <a:srgbClr val="000000"/>
+                </a:solidFill>
+                <a:latin typeface="Calibri" pitchFamily="34" charset="0"/>
+                <a:ea typeface="Calibri" pitchFamily="34" charset="-122"/>
+                <a:cs typeface="Calibri" pitchFamily="34" charset="-120"/>
+              </a:rPr>
+              <a:t xml:space="preserve">Every headline figure was produced in one program and checked in another — SPICE against SPICE, MATLAB against Octave, yosys against Vivado.</a:t>
             </a:r>
           </a:p>
         </p:txBody>
@@ -14430,7 +14876,7 @@
                 <a:ea typeface="Calibri" pitchFamily="34" charset="-122"/>
                 <a:cs typeface="Calibri" pitchFamily="34" charset="-120"/>
               </a:rPr>
-              <a:t xml:space="preserve">We implemented the base paper, then ours</a:t>
+              <a:t xml:space="preserve">The gap this project fills</a:t>
             </a:r>
           </a:p>
         </p:txBody>
@@ -14473,7 +14919,7 @@
                 <a:ea typeface="Calibri" pitchFamily="34" charset="-122"/>
                 <a:cs typeface="Calibri" pitchFamily="34" charset="-120"/>
               </a:rPr>
-              <a:t xml:space="preserve">13</a:t>
+              <a:t xml:space="preserve">7</a:t>
             </a:r>
           </a:p>
         </p:txBody>
@@ -14486,8 +14932,8 @@
         </p:nvSpPr>
         <p:spPr>
           <a:xfrm>
-            <a:off x="640080" y="1207008"/>
-            <a:ext cx="11064240" cy="868680"/>
+            <a:off x="640080" y="1234440"/>
+            <a:ext cx="11064240" cy="914400"/>
           </a:xfrm>
           <a:prstGeom prst="rect">
             <a:avLst/>
@@ -14502,32 +14948,41 @@
           <a:p>
             <a:pPr marL="177800" indent="0">
               <a:spcAft>
+                <a:spcPts val="120"/>
+              </a:spcAft>
+              <a:buSzPct val="100000"/>
+              <a:buNone/>
+            </a:pPr>
+            <a:r>
+              <a:rPr lang="en-US" sz="1500" b="1" dirty="0">
+                <a:solidFill>
+                  <a:srgbClr val="000000"/>
+                </a:solidFill>
+                <a:latin typeface="Calibri" pitchFamily="34" charset="0"/>
+                <a:ea typeface="Calibri" pitchFamily="34" charset="-122"/>
+                <a:cs typeface="Calibri" pitchFamily="34" charset="-120"/>
+              </a:rPr>
+              <a:t xml:space="preserve">Every active-gate-driver paper reports ONE number: the improvement over a conventional driver.</a:t>
+            </a:r>
+          </a:p>
+          <a:p>
+            <a:pPr marL="177800" indent="0">
+              <a:spcAft>
                 <a:spcPts val="0"/>
               </a:spcAft>
               <a:buSzPct val="100000"/>
               <a:buNone/>
             </a:pPr>
             <a:r>
-              <a:rPr lang="en-US" sz="1250" b="1" dirty="0">
-                <a:solidFill>
-                  <a:srgbClr val="000000"/>
-                </a:solidFill>
-                <a:latin typeface="Calibri" pitchFamily="34" charset="0"/>
-                <a:ea typeface="Calibri" pitchFamily="34" charset="-122"/>
-                <a:cs typeface="Calibri" pitchFamily="34" charset="-120"/>
-              </a:rPr>
-              <a:t xml:space="preserve">Citing a base paper is not a comparison. </a:t>
-            </a:r>
-            <a:r>
-              <a:rPr lang="en-US" sz="1250" dirty="0">
-                <a:solidFill>
-                  <a:srgbClr val="000000"/>
-                </a:solidFill>
-                <a:latin typeface="Calibri" pitchFamily="34" charset="0"/>
-                <a:ea typeface="Calibri" pitchFamily="34" charset="-122"/>
-                <a:cs typeface="Calibri" pitchFamily="34" charset="-120"/>
-              </a:rPr>
-              <a:t xml:space="preserve">models/basedrv.lib implements Takayama, Okuda &amp; Hikihara's DAC-architecture driver — a multibit code that changes DURING the switching edge, with no Miller clamp and no negative off-bias rail, because those are ours. It runs inside sim/dpt.cir, byte-identical otherwise, so only the driver differs.</a:t>
+              <a:rPr lang="en-US" sz="1300" dirty="0">
+                <a:solidFill>
+                  <a:srgbClr val="000000"/>
+                </a:solidFill>
+                <a:latin typeface="Calibri" pitchFamily="34" charset="0"/>
+                <a:ea typeface="Calibri" pitchFamily="34" charset="-122"/>
+                <a:cs typeface="Calibri" pitchFamily="34" charset="-120"/>
+              </a:rPr>
+              <a:t xml:space="preserve">That number bundles two effects that cost completely different hardware.</a:t>
             </a:r>
           </a:p>
         </p:txBody>
@@ -14540,8 +14995,8 @@
         </p:nvSpPr>
         <p:spPr>
           <a:xfrm>
-            <a:off x="640080" y="2395728"/>
-            <a:ext cx="3566160" cy="530352"/>
+            <a:off x="640080" y="2377440"/>
+            <a:ext cx="5394960" cy="365760"/>
           </a:xfrm>
           <a:prstGeom prst="rect">
             <a:avLst/>
@@ -14562,15 +15017,15 @@
               <a:buNone/>
             </a:pPr>
             <a:r>
-              <a:rPr lang="en-US" sz="1300" dirty="0">
-                <a:solidFill>
-                  <a:srgbClr val="000000"/>
-                </a:solidFill>
-                <a:latin typeface="Calibri" pitchFamily="34" charset="0"/>
-                <a:ea typeface="Calibri" pitchFamily="34" charset="-122"/>
-                <a:cs typeface="Calibri" pitchFamily="34" charset="-120"/>
-              </a:rPr>
-              <a:t xml:space="preserve">Base paper, as we built it</a:t>
+              <a:rPr lang="en-US" sz="1450" b="1" dirty="0">
+                <a:solidFill>
+                  <a:srgbClr val="000000"/>
+                </a:solidFill>
+                <a:latin typeface="Calibri" pitchFamily="34" charset="0"/>
+                <a:ea typeface="Calibri" pitchFamily="34" charset="-122"/>
+                <a:cs typeface="Calibri" pitchFamily="34" charset="-120"/>
+              </a:rPr>
+              <a:t xml:space="preserve">Effect 1  —  a better FIXED setting</a:t>
             </a:r>
           </a:p>
         </p:txBody>
@@ -14583,8 +15038,8 @@
         </p:nvSpPr>
         <p:spPr>
           <a:xfrm>
-            <a:off x="4343400" y="2340864"/>
-            <a:ext cx="1417320" cy="438912"/>
+            <a:off x="640080" y="2834640"/>
+            <a:ext cx="3703320" cy="1463040"/>
           </a:xfrm>
           <a:prstGeom prst="rect">
             <a:avLst/>
@@ -14605,15 +15060,15 @@
               <a:buNone/>
             </a:pPr>
             <a:r>
-              <a:rPr lang="en-US" sz="1700" b="1" dirty="0">
-                <a:solidFill>
-                  <a:srgbClr val="000000"/>
-                </a:solidFill>
-                <a:latin typeface="Calibri" pitchFamily="34" charset="0"/>
-                <a:ea typeface="Calibri" pitchFamily="34" charset="-122"/>
-                <a:cs typeface="Calibri" pitchFamily="34" charset="-120"/>
-              </a:rPr>
-              <a:t xml:space="preserve">+0.533 V</a:t>
+              <a:rPr lang="en-US" sz="1200" dirty="0">
+                <a:solidFill>
+                  <a:srgbClr val="000000"/>
+                </a:solidFill>
+                <a:latin typeface="Calibri" pitchFamily="34" charset="0"/>
+                <a:ea typeface="Calibri" pitchFamily="34" charset="-122"/>
+                <a:cs typeface="Calibri" pitchFamily="34" charset="-120"/>
+              </a:rPr>
+              <a:t xml:space="preserve">Pick a better control word once, at design time. Costs nothing at run time: no sensor, no ADC, no lookup table, no controller.</a:t>
             </a:r>
           </a:p>
         </p:txBody>
@@ -14626,8 +15081,8 @@
         </p:nvSpPr>
         <p:spPr>
           <a:xfrm>
-            <a:off x="5943600" y="2395728"/>
-            <a:ext cx="5577840" cy="548640"/>
+            <a:off x="4480560" y="2788920"/>
+            <a:ext cx="1554480" cy="1188720"/>
           </a:xfrm>
           <a:prstGeom prst="rect">
             <a:avLst/>
@@ -14642,6 +15097,46 @@
           <a:p>
             <a:pPr marL="177800" indent="0">
               <a:spcAft>
+                <a:spcPts val="100"/>
+              </a:spcAft>
+              <a:buSzPct val="100000"/>
+              <a:buNone/>
+            </a:pPr>
+            <a:r>
+              <a:rPr lang="en-US" sz="3200" b="1" dirty="0">
+                <a:solidFill>
+                  <a:srgbClr val="000000"/>
+                </a:solidFill>
+                <a:latin typeface="Calibri" pitchFamily="34" charset="0"/>
+                <a:ea typeface="Calibri" pitchFamily="34" charset="-122"/>
+                <a:cs typeface="Calibri" pitchFamily="34" charset="-120"/>
+              </a:rPr>
+              <a:t xml:space="preserve">25.1 %</a:t>
+            </a:r>
+          </a:p>
+          <a:p>
+            <a:pPr marL="177800" indent="0">
+              <a:spcAft>
+                <a:spcPts val="60"/>
+              </a:spcAft>
+              <a:buSzPct val="100000"/>
+              <a:buNone/>
+            </a:pPr>
+            <a:r>
+              <a:rPr lang="en-US" sz="1300" b="1" dirty="0">
+                <a:solidFill>
+                  <a:srgbClr val="000000"/>
+                </a:solidFill>
+                <a:latin typeface="Calibri" pitchFamily="34" charset="0"/>
+                <a:ea typeface="Calibri" pitchFamily="34" charset="-122"/>
+                <a:cs typeface="Calibri" pitchFamily="34" charset="-120"/>
+              </a:rPr>
+              <a:t xml:space="preserve">of baseline</a:t>
+            </a:r>
+          </a:p>
+          <a:p>
+            <a:pPr marL="177800" indent="0">
+              <a:spcAft>
                 <a:spcPts val="0"/>
               </a:spcAft>
               <a:buSzPct val="100000"/>
@@ -14656,7 +15151,7 @@
                 <a:ea typeface="Calibri" pitchFamily="34" charset="-122"/>
                 <a:cs typeface="Calibri" pitchFamily="34" charset="-120"/>
               </a:rPr>
-              <a:t xml:space="preserve">Their time-sequenced multibit code alone already clears the 1.4 V threshold.</a:t>
+              <a:t xml:space="preserve"/>
             </a:r>
           </a:p>
         </p:txBody>
@@ -14669,8 +15164,8 @@
         </p:nvSpPr>
         <p:spPr>
           <a:xfrm>
-            <a:off x="640080" y="3035808"/>
-            <a:ext cx="3566160" cy="530352"/>
+            <a:off x="6400800" y="2377440"/>
+            <a:ext cx="5394960" cy="365760"/>
           </a:xfrm>
           <a:prstGeom prst="rect">
             <a:avLst/>
@@ -14691,15 +15186,15 @@
               <a:buNone/>
             </a:pPr>
             <a:r>
-              <a:rPr lang="en-US" sz="1300" dirty="0">
-                <a:solidFill>
-                  <a:srgbClr val="000000"/>
-                </a:solidFill>
-                <a:latin typeface="Calibri" pitchFamily="34" charset="0"/>
-                <a:ea typeface="Calibri" pitchFamily="34" charset="-122"/>
-                <a:cs typeface="Calibri" pitchFamily="34" charset="-120"/>
-              </a:rPr>
-              <a:t xml:space="preserve">Ours, constant code, no clamp</a:t>
+              <a:rPr lang="en-US" sz="1450" b="1" dirty="0">
+                <a:solidFill>
+                  <a:srgbClr val="000000"/>
+                </a:solidFill>
+                <a:latin typeface="Calibri" pitchFamily="34" charset="0"/>
+                <a:ea typeface="Calibri" pitchFamily="34" charset="-122"/>
+                <a:cs typeface="Calibri" pitchFamily="34" charset="-120"/>
+              </a:rPr>
+              <a:t xml:space="preserve">Effect 2  —  ADAPTING per operating point</a:t>
             </a:r>
           </a:p>
         </p:txBody>
@@ -14712,8 +15207,8 @@
         </p:nvSpPr>
         <p:spPr>
           <a:xfrm>
-            <a:off x="4343400" y="2980944"/>
-            <a:ext cx="1417320" cy="438912"/>
+            <a:off x="6400800" y="2834640"/>
+            <a:ext cx="3703320" cy="1463040"/>
           </a:xfrm>
           <a:prstGeom prst="rect">
             <a:avLst/>
@@ -14734,15 +15229,15 @@
               <a:buNone/>
             </a:pPr>
             <a:r>
-              <a:rPr lang="en-US" sz="1700" b="1" dirty="0">
-                <a:solidFill>
-                  <a:srgbClr val="000000"/>
-                </a:solidFill>
-                <a:latin typeface="Calibri" pitchFamily="34" charset="0"/>
-                <a:ea typeface="Calibri" pitchFamily="34" charset="-122"/>
-                <a:cs typeface="Calibri" pitchFamily="34" charset="-120"/>
-              </a:rPr>
-              <a:t xml:space="preserve">−0.249 V</a:t>
+              <a:rPr lang="en-US" sz="1200" dirty="0">
+                <a:solidFill>
+                  <a:srgbClr val="000000"/>
+                </a:solidFill>
+                <a:latin typeface="Calibri" pitchFamily="34" charset="0"/>
+                <a:ea typeface="Calibri" pitchFamily="34" charset="-122"/>
+                <a:cs typeface="Calibri" pitchFamily="34" charset="-120"/>
+              </a:rPr>
+              <a:t xml:space="preserve">Change the word as load, bus voltage and temperature move. This is what needs the sensing hardware the architecture is sold on.</a:t>
             </a:r>
           </a:p>
         </p:txBody>
@@ -14755,8 +15250,8 @@
         </p:nvSpPr>
         <p:spPr>
           <a:xfrm>
-            <a:off x="5943600" y="3035808"/>
-            <a:ext cx="5577840" cy="548640"/>
+            <a:off x="10241280" y="2788920"/>
+            <a:ext cx="1554480" cy="1188720"/>
           </a:xfrm>
           <a:prstGeom prst="rect">
             <a:avLst/>
@@ -14771,6 +15266,46 @@
           <a:p>
             <a:pPr marL="177800" indent="0">
               <a:spcAft>
+                <a:spcPts val="100"/>
+              </a:spcAft>
+              <a:buSzPct val="100000"/>
+              <a:buNone/>
+            </a:pPr>
+            <a:r>
+              <a:rPr lang="en-US" sz="3200" b="1" dirty="0">
+                <a:solidFill>
+                  <a:srgbClr val="000000"/>
+                </a:solidFill>
+                <a:latin typeface="Calibri" pitchFamily="34" charset="0"/>
+                <a:ea typeface="Calibri" pitchFamily="34" charset="-122"/>
+                <a:cs typeface="Calibri" pitchFamily="34" charset="-120"/>
+              </a:rPr>
+              <a:t xml:space="preserve">3.9 %</a:t>
+            </a:r>
+          </a:p>
+          <a:p>
+            <a:pPr marL="177800" indent="0">
+              <a:spcAft>
+                <a:spcPts val="60"/>
+              </a:spcAft>
+              <a:buSzPct val="100000"/>
+              <a:buNone/>
+            </a:pPr>
+            <a:r>
+              <a:rPr lang="en-US" sz="1300" b="1" dirty="0">
+                <a:solidFill>
+                  <a:srgbClr val="000000"/>
+                </a:solidFill>
+                <a:latin typeface="Calibri" pitchFamily="34" charset="0"/>
+                <a:ea typeface="Calibri" pitchFamily="34" charset="-122"/>
+                <a:cs typeface="Calibri" pitchFamily="34" charset="-120"/>
+              </a:rPr>
+              <a:t xml:space="preserve">of baseline</a:t>
+            </a:r>
+          </a:p>
+          <a:p>
+            <a:pPr marL="177800" indent="0">
+              <a:spcAft>
                 <a:spcPts val="0"/>
               </a:spcAft>
               <a:buSzPct val="100000"/>
@@ -14785,7 +15320,7 @@
                 <a:ea typeface="Calibri" pitchFamily="34" charset="-122"/>
                 <a:cs typeface="Calibri" pitchFamily="34" charset="-120"/>
               </a:rPr>
-              <a:t xml:space="preserve">FALSE TURN-ON. A fast FIXED code is worse than their sequenced one — their contribution is real, and we reproduce it.</a:t>
+              <a:t xml:space="preserve"/>
             </a:r>
           </a:p>
         </p:txBody>
@@ -14798,8 +15333,8 @@
         </p:nvSpPr>
         <p:spPr>
           <a:xfrm>
-            <a:off x="640080" y="3675887"/>
-            <a:ext cx="3566160" cy="530352"/>
+            <a:off x="640080" y="4526280"/>
+            <a:ext cx="11064240" cy="1920240"/>
           </a:xfrm>
           <a:prstGeom prst="rect">
             <a:avLst/>
@@ -14814,332 +15349,94 @@
           <a:p>
             <a:pPr marL="177800" indent="0">
               <a:spcAft>
+                <a:spcPts val="170"/>
+              </a:spcAft>
+              <a:buSzPct val="100000"/>
+              <a:buNone/>
+            </a:pPr>
+            <a:r>
+              <a:rPr lang="en-US" sz="1400" b="1" dirty="0">
+                <a:solidFill>
+                  <a:srgbClr val="000000"/>
+                </a:solidFill>
+                <a:latin typeface="Calibri" pitchFamily="34" charset="0"/>
+                <a:ea typeface="Calibri" pitchFamily="34" charset="-122"/>
+                <a:cs typeface="Calibri" pitchFamily="34" charset="-120"/>
+              </a:rPr>
+              <a:t xml:space="preserve">THE GAP: </a:t>
+            </a:r>
+            <a:r>
+              <a:rPr lang="en-US" sz="1400" dirty="0">
+                <a:solidFill>
+                  <a:srgbClr val="000000"/>
+                </a:solidFill>
+                <a:latin typeface="Calibri" pitchFamily="34" charset="0"/>
+                <a:ea typeface="Calibri" pitchFamily="34" charset="-122"/>
+                <a:cs typeface="Calibri" pitchFamily="34" charset="-120"/>
+              </a:rPr>
+              <a:t xml:space="preserve">no published work separates them. Nobody reports how much of an active gate driver's benefit actually requires adaptation, because separating the two needs an exhaustive search of the control word at every corner — and nobody has run one.</a:t>
+            </a:r>
+          </a:p>
+          <a:p>
+            <a:pPr marL="177800" indent="0">
+              <a:spcAft>
+                <a:spcPts val="170"/>
+              </a:spcAft>
+              <a:buSzPct val="100000"/>
+              <a:buNone/>
+            </a:pPr>
+            <a:r>
+              <a:rPr lang="en-US" sz="1400" b="1" dirty="0">
+                <a:solidFill>
+                  <a:srgbClr val="000000"/>
+                </a:solidFill>
+                <a:latin typeface="Calibri" pitchFamily="34" charset="0"/>
+                <a:ea typeface="Calibri" pitchFamily="34" charset="-122"/>
+                <a:cs typeface="Calibri" pitchFamily="34" charset="-120"/>
+              </a:rPr>
+              <a:t xml:space="preserve">WHY IT MATTERS: </a:t>
+            </a:r>
+            <a:r>
+              <a:rPr lang="en-US" sz="1400" dirty="0">
+                <a:solidFill>
+                  <a:srgbClr val="000000"/>
+                </a:solidFill>
+                <a:latin typeface="Calibri" pitchFamily="34" charset="0"/>
+                <a:ea typeface="Calibri" pitchFamily="34" charset="-122"/>
+                <a:cs typeface="Calibri" pitchFamily="34" charset="-120"/>
+              </a:rPr>
+              <a:t xml:space="preserve">only Effect 2 justifies the sense + ADC + lookup table. If it is small, that hardware is mostly paying for something a design-time choice already delivers — a buy-or-not decision nobody has costed.</a:t>
+            </a:r>
+          </a:p>
+          <a:p>
+            <a:pPr marL="177800" indent="0">
+              <a:spcAft>
                 <a:spcPts val="0"/>
               </a:spcAft>
               <a:buSzPct val="100000"/>
               <a:buNone/>
             </a:pPr>
             <a:r>
-              <a:rPr lang="en-US" sz="1300" dirty="0">
-                <a:solidFill>
-                  <a:srgbClr val="000000"/>
-                </a:solidFill>
-                <a:latin typeface="Calibri" pitchFamily="34" charset="0"/>
-                <a:ea typeface="Calibri" pitchFamily="34" charset="-122"/>
-                <a:cs typeface="Calibri" pitchFamily="34" charset="-120"/>
-              </a:rPr>
-              <a:t xml:space="preserve">Ours, active Miller clamp on</a:t>
-            </a:r>
-          </a:p>
-        </p:txBody>
-      </p:sp>
-      <p:sp>
-        <p:nvSpPr>
-          <p:cNvPr id="14" name="TextBox 13"/>
-          <p:cNvSpPr txBox="1"/>
-          <p:nvPr/>
-        </p:nvSpPr>
-        <p:spPr>
-          <a:xfrm>
-            <a:off x="4343400" y="3621023"/>
-            <a:ext cx="1417320" cy="438912"/>
-          </a:xfrm>
-          <a:prstGeom prst="rect">
-            <a:avLst/>
-          </a:prstGeom>
-          <a:noFill/>
-        </p:spPr>
-        <p:txBody>
-          <a:bodyPr wrap="square" lIns="0" tIns="0" rIns="0" bIns="0">
-            <a:spAutoFit/>
-          </a:bodyPr>
-          <a:lstStyle/>
-          <a:p>
-            <a:pPr marL="177800" indent="0">
-              <a:spcAft>
-                <a:spcPts val="0"/>
-              </a:spcAft>
-              <a:buSzPct val="100000"/>
-              <a:buNone/>
-            </a:pPr>
-            <a:r>
-              <a:rPr lang="en-US" sz="1700" b="1" dirty="0">
-                <a:solidFill>
-                  <a:srgbClr val="000000"/>
-                </a:solidFill>
-                <a:latin typeface="Calibri" pitchFamily="34" charset="0"/>
-                <a:ea typeface="Calibri" pitchFamily="34" charset="-122"/>
-                <a:cs typeface="Calibri" pitchFamily="34" charset="-120"/>
-              </a:rPr>
-              <a:t xml:space="preserve">+0.570 V</a:t>
-            </a:r>
-          </a:p>
-        </p:txBody>
-      </p:sp>
-      <p:sp>
-        <p:nvSpPr>
-          <p:cNvPr id="15" name="TextBox 14"/>
-          <p:cNvSpPr txBox="1"/>
-          <p:nvPr/>
-        </p:nvSpPr>
-        <p:spPr>
-          <a:xfrm>
-            <a:off x="5943600" y="3675887"/>
-            <a:ext cx="5577840" cy="548640"/>
-          </a:xfrm>
-          <a:prstGeom prst="rect">
-            <a:avLst/>
-          </a:prstGeom>
-          <a:noFill/>
-        </p:spPr>
-        <p:txBody>
-          <a:bodyPr wrap="square" lIns="0" tIns="0" rIns="0" bIns="0">
-            <a:spAutoFit/>
-          </a:bodyPr>
-          <a:lstStyle/>
-          <a:p>
-            <a:pPr marL="177800" indent="0">
-              <a:spcAft>
-                <a:spcPts val="0"/>
-              </a:spcAft>
-              <a:buSzPct val="100000"/>
-              <a:buNone/>
-            </a:pPr>
-            <a:r>
-              <a:rPr lang="en-US" sz="1150" dirty="0">
-                <a:solidFill>
-                  <a:srgbClr val="000000"/>
-                </a:solidFill>
-                <a:latin typeface="Calibri" pitchFamily="34" charset="0"/>
-                <a:ea typeface="Calibri" pitchFamily="34" charset="-122"/>
-                <a:cs typeface="Calibri" pitchFamily="34" charset="-120"/>
-              </a:rPr>
-              <a:t xml:space="preserve">Only marginally past the base paper. The clamp alone is not the story.</a:t>
-            </a:r>
-          </a:p>
-        </p:txBody>
-      </p:sp>
-      <p:sp>
-        <p:nvSpPr>
-          <p:cNvPr id="16" name="TextBox 15"/>
-          <p:cNvSpPr txBox="1"/>
-          <p:nvPr/>
-        </p:nvSpPr>
-        <p:spPr>
-          <a:xfrm>
-            <a:off x="640080" y="4315968"/>
-            <a:ext cx="3566160" cy="530352"/>
-          </a:xfrm>
-          <a:prstGeom prst="rect">
-            <a:avLst/>
-          </a:prstGeom>
-          <a:noFill/>
-        </p:spPr>
-        <p:txBody>
-          <a:bodyPr wrap="square" lIns="0" tIns="0" rIns="0" bIns="0">
-            <a:spAutoFit/>
-          </a:bodyPr>
-          <a:lstStyle/>
-          <a:p>
-            <a:pPr marL="177800" indent="0">
-              <a:spcAft>
-                <a:spcPts val="0"/>
-              </a:spcAft>
-              <a:buSzPct val="100000"/>
-              <a:buNone/>
-            </a:pPr>
-            <a:r>
-              <a:rPr lang="en-US" sz="1300" b="1" dirty="0">
-                <a:solidFill>
-                  <a:srgbClr val="000000"/>
-                </a:solidFill>
-                <a:latin typeface="Calibri" pitchFamily="34" charset="0"/>
-                <a:ea typeface="Calibri" pitchFamily="34" charset="-122"/>
-                <a:cs typeface="Calibri" pitchFamily="34" charset="-120"/>
-              </a:rPr>
-              <a:t xml:space="preserve">Ours, clamp + −2 V off-bias</a:t>
-            </a:r>
-          </a:p>
-        </p:txBody>
-      </p:sp>
-      <p:sp>
-        <p:nvSpPr>
-          <p:cNvPr id="17" name="TextBox 16"/>
-          <p:cNvSpPr txBox="1"/>
-          <p:nvPr/>
-        </p:nvSpPr>
-        <p:spPr>
-          <a:xfrm>
-            <a:off x="4343400" y="4261104"/>
-            <a:ext cx="1417320" cy="438912"/>
-          </a:xfrm>
-          <a:prstGeom prst="rect">
-            <a:avLst/>
-          </a:prstGeom>
-          <a:noFill/>
-        </p:spPr>
-        <p:txBody>
-          <a:bodyPr wrap="square" lIns="0" tIns="0" rIns="0" bIns="0">
-            <a:spAutoFit/>
-          </a:bodyPr>
-          <a:lstStyle/>
-          <a:p>
-            <a:pPr marL="177800" indent="0">
-              <a:spcAft>
-                <a:spcPts val="0"/>
-              </a:spcAft>
-              <a:buSzPct val="100000"/>
-              <a:buNone/>
-            </a:pPr>
-            <a:r>
-              <a:rPr lang="en-US" sz="1700" b="1" dirty="0">
-                <a:solidFill>
-                  <a:srgbClr val="000000"/>
-                </a:solidFill>
-                <a:latin typeface="Calibri" pitchFamily="34" charset="0"/>
-                <a:ea typeface="Calibri" pitchFamily="34" charset="-122"/>
-                <a:cs typeface="Calibri" pitchFamily="34" charset="-120"/>
-              </a:rPr>
-              <a:t xml:space="preserve">+2.576 V</a:t>
-            </a:r>
-          </a:p>
-        </p:txBody>
-      </p:sp>
-      <p:sp>
-        <p:nvSpPr>
-          <p:cNvPr id="18" name="TextBox 17"/>
-          <p:cNvSpPr txBox="1"/>
-          <p:nvPr/>
-        </p:nvSpPr>
-        <p:spPr>
-          <a:xfrm>
-            <a:off x="5943600" y="4315968"/>
-            <a:ext cx="5577840" cy="548640"/>
-          </a:xfrm>
-          <a:prstGeom prst="rect">
-            <a:avLst/>
-          </a:prstGeom>
-          <a:noFill/>
-        </p:spPr>
-        <p:txBody>
-          <a:bodyPr wrap="square" lIns="0" tIns="0" rIns="0" bIns="0">
-            <a:spAutoFit/>
-          </a:bodyPr>
-          <a:lstStyle/>
-          <a:p>
-            <a:pPr marL="177800" indent="0">
-              <a:spcAft>
-                <a:spcPts val="0"/>
-              </a:spcAft>
-              <a:buSzPct val="100000"/>
-              <a:buNone/>
-            </a:pPr>
-            <a:r>
-              <a:rPr lang="en-US" sz="1150" dirty="0">
-                <a:solidFill>
-                  <a:srgbClr val="000000"/>
-                </a:solidFill>
-                <a:latin typeface="Calibri" pitchFamily="34" charset="0"/>
-                <a:ea typeface="Calibri" pitchFamily="34" charset="-122"/>
-                <a:cs typeface="Calibri" pitchFamily="34" charset="-120"/>
-              </a:rPr>
-              <a:t xml:space="preserve">4.8× the base paper's margin. This is the shipped configuration.</a:t>
-            </a:r>
-          </a:p>
-        </p:txBody>
-      </p:sp>
-      <p:sp>
-        <p:nvSpPr>
-          <p:cNvPr id="19" name="TextBox 18"/>
-          <p:cNvSpPr txBox="1"/>
-          <p:nvPr/>
-        </p:nvSpPr>
-        <p:spPr>
-          <a:xfrm>
-            <a:off x="640080" y="5138928"/>
-            <a:ext cx="11064240" cy="1234440"/>
-          </a:xfrm>
-          <a:prstGeom prst="rect">
-            <a:avLst/>
-          </a:prstGeom>
-          <a:noFill/>
-        </p:spPr>
-        <p:txBody>
-          <a:bodyPr wrap="square" lIns="0" tIns="0" rIns="0" bIns="0">
-            <a:spAutoFit/>
-          </a:bodyPr>
-          <a:lstStyle/>
-          <a:p>
-            <a:pPr marL="177800" indent="0">
-              <a:spcAft>
-                <a:spcPts val="150"/>
-              </a:spcAft>
-              <a:buSzPct val="100000"/>
-              <a:buNone/>
-            </a:pPr>
-            <a:r>
-              <a:rPr lang="en-US" sz="1250" b="1" dirty="0">
-                <a:solidFill>
-                  <a:srgbClr val="000000"/>
-                </a:solidFill>
-                <a:latin typeface="Calibri" pitchFamily="34" charset="0"/>
-                <a:ea typeface="Calibri" pitchFamily="34" charset="-122"/>
-                <a:cs typeface="Calibri" pitchFamily="34" charset="-120"/>
-              </a:rPr>
-              <a:t xml:space="preserve">What the comparison shows. </a:t>
-            </a:r>
-            <a:r>
-              <a:rPr lang="en-US" sz="1250" dirty="0">
-                <a:solidFill>
-                  <a:srgbClr val="000000"/>
-                </a:solidFill>
-                <a:latin typeface="Calibri" pitchFamily="34" charset="0"/>
-                <a:ea typeface="Calibri" pitchFamily="34" charset="-122"/>
-                <a:cs typeface="Calibri" pitchFamily="34" charset="-120"/>
-              </a:rPr>
-              <a:t xml:space="preserve">The base paper shapes the gate waveform in TIME; we hold the code constant and add two actuators it does not have. Both clear the threshold — theirs works — but ours clears it by 4.8× more, and ours is the one whose settings can then be searched exhaustively to ask what adaptation is actually worth.</a:t>
-            </a:r>
-          </a:p>
-          <a:p>
-            <a:pPr marL="177800" indent="0">
-              <a:spcAft>
-                <a:spcPts val="0"/>
-              </a:spcAft>
-              <a:buSzPct val="100000"/>
-              <a:buNone/>
-            </a:pPr>
-            <a:r>
-              <a:rPr lang="en-US" sz="1150" b="1" dirty="0">
-                <a:solidFill>
-                  <a:srgbClr val="000000"/>
-                </a:solidFill>
-                <a:latin typeface="Calibri" pitchFamily="34" charset="0"/>
-                <a:ea typeface="Calibri" pitchFamily="34" charset="-122"/>
-                <a:cs typeface="Calibri" pitchFamily="34" charset="-120"/>
-              </a:rPr>
-              <a:t xml:space="preserve">Reproduce: </a:t>
-            </a:r>
-            <a:r>
-              <a:rPr lang="en-US" sz="1150" b="1" dirty="0">
-                <a:solidFill>
-                  <a:srgbClr val="000000"/>
-                </a:solidFill>
-                <a:latin typeface="Calibri" pitchFamily="34" charset="0"/>
-                <a:ea typeface="Calibri" pitchFamily="34" charset="-122"/>
-                <a:cs typeface="Calibri" pitchFamily="34" charset="-120"/>
-              </a:rPr>
-              <a:t xml:space="preserve">python3 scripts/basepaper_compare.py</a:t>
-            </a:r>
-            <a:r>
-              <a:rPr lang="en-US" sz="1150" dirty="0">
-                <a:solidFill>
-                  <a:srgbClr val="000000"/>
-                </a:solidFill>
-                <a:latin typeface="Calibri" pitchFamily="34" charset="0"/>
-                <a:ea typeface="Calibri" pitchFamily="34" charset="-122"/>
-                <a:cs typeface="Calibri" pitchFamily="34" charset="-120"/>
-              </a:rPr>
-              <a:t xml:space="preserve">  — four ngspice runs, prints this table.</a:t>
+              <a:rPr lang="en-US" sz="1400" b="1" dirty="0">
+                <a:solidFill>
+                  <a:srgbClr val="000000"/>
+                </a:solidFill>
+                <a:latin typeface="Calibri" pitchFamily="34" charset="0"/>
+                <a:ea typeface="Calibri" pitchFamily="34" charset="-122"/>
+                <a:cs typeface="Calibri" pitchFamily="34" charset="-120"/>
+              </a:rPr>
+              <a:t xml:space="preserve">WHAT WE DO: </a:t>
+            </a:r>
+            <a:r>
+              <a:rPr lang="en-US" sz="1400" dirty="0">
+                <a:solidFill>
+                  <a:srgbClr val="000000"/>
+                </a:solidFill>
+                <a:latin typeface="Calibri" pitchFamily="34" charset="0"/>
+                <a:ea typeface="Calibri" pitchFamily="34" charset="-122"/>
+                <a:cs typeface="Calibri" pitchFamily="34" charset="-120"/>
+              </a:rPr>
+              <a:t xml:space="preserve">720 control words × 4 corners, exhaustively, in ngspice — then report the two numbers separately instead of their sum.</a:t>
             </a:r>
           </a:p>
         </p:txBody>
@@ -15162,6 +15459,800 @@
         <p:nvPr/>
       </p:nvGrpSpPr>
       <p:grpSpPr/>
+      <p:pic>
+        <p:nvPicPr>
+          <p:cNvPr id="3" name="Image 0" descr="logo.png"/>
+          <p:cNvPicPr>
+            <a:picLocks noChangeAspect="1"/>
+          </p:cNvPicPr>
+          <p:nvPr/>
+        </p:nvPicPr>
+        <p:blipFill>
+          <a:blip r:embed="rId2"/>
+          <a:stretch>
+            <a:fillRect/>
+          </a:stretch>
+        </p:blipFill>
+        <p:spPr>
+          <a:xfrm>
+            <a:off x="10362895" y="320040"/>
+            <a:ext cx="1371600" cy="518746"/>
+          </a:xfrm>
+          <a:prstGeom prst="rect">
+            <a:avLst/>
+          </a:prstGeom>
+        </p:spPr>
+      </p:pic>
+      <p:sp>
+        <p:nvSpPr>
+          <p:cNvPr id="4" name="TextBox 3"/>
+          <p:cNvSpPr txBox="1"/>
+          <p:nvPr/>
+        </p:nvSpPr>
+        <p:spPr>
+          <a:xfrm>
+            <a:off x="548640" y="320040"/>
+            <a:ext cx="9601200" cy="685800"/>
+          </a:xfrm>
+          <a:prstGeom prst="rect">
+            <a:avLst/>
+          </a:prstGeom>
+          <a:noFill/>
+        </p:spPr>
+        <p:txBody>
+          <a:bodyPr wrap="square" lIns="0" tIns="0" rIns="0" bIns="0">
+            <a:spAutoFit/>
+          </a:bodyPr>
+          <a:lstStyle/>
+          <a:p>
+            <a:pPr marL="177800" indent="0">
+              <a:spcAft>
+                <a:spcPts val="0"/>
+              </a:spcAft>
+              <a:buSzPct val="100000"/>
+              <a:buNone/>
+            </a:pPr>
+            <a:r>
+              <a:rPr lang="en-US" sz="2800" b="1" dirty="0">
+                <a:solidFill>
+                  <a:srgbClr val="000000"/>
+                </a:solidFill>
+                <a:latin typeface="Calibri" pitchFamily="34" charset="0"/>
+                <a:ea typeface="Calibri" pitchFamily="34" charset="-122"/>
+                <a:cs typeface="Calibri" pitchFamily="34" charset="-120"/>
+              </a:rPr>
+              <a:t xml:space="preserve">We implemented the base paper, then ours</a:t>
+            </a:r>
+          </a:p>
+        </p:txBody>
+      </p:sp>
+      <p:sp>
+        <p:nvSpPr>
+          <p:cNvPr id="5" name="TextBox 4"/>
+          <p:cNvSpPr txBox="1"/>
+          <p:nvPr/>
+        </p:nvSpPr>
+        <p:spPr>
+          <a:xfrm>
+            <a:off x="11457432" y="6446520"/>
+            <a:ext cx="457200" cy="274320"/>
+          </a:xfrm>
+          <a:prstGeom prst="rect">
+            <a:avLst/>
+          </a:prstGeom>
+          <a:noFill/>
+        </p:spPr>
+        <p:txBody>
+          <a:bodyPr wrap="square" lIns="0" tIns="0" rIns="0" bIns="0">
+            <a:spAutoFit/>
+          </a:bodyPr>
+          <a:lstStyle/>
+          <a:p>
+            <a:pPr marL="177800" indent="0">
+              <a:spcAft>
+                <a:spcPts val="0"/>
+              </a:spcAft>
+              <a:buSzPct val="100000"/>
+              <a:buNone/>
+            </a:pPr>
+            <a:r>
+              <a:rPr lang="en-US" sz="1100" dirty="0">
+                <a:solidFill>
+                  <a:srgbClr val="000000"/>
+                </a:solidFill>
+                <a:latin typeface="Calibri" pitchFamily="34" charset="0"/>
+                <a:ea typeface="Calibri" pitchFamily="34" charset="-122"/>
+                <a:cs typeface="Calibri" pitchFamily="34" charset="-120"/>
+              </a:rPr>
+              <a:t xml:space="preserve">13</a:t>
+            </a:r>
+          </a:p>
+        </p:txBody>
+      </p:sp>
+      <p:sp>
+        <p:nvSpPr>
+          <p:cNvPr id="6" name="TextBox 5"/>
+          <p:cNvSpPr txBox="1"/>
+          <p:nvPr/>
+        </p:nvSpPr>
+        <p:spPr>
+          <a:xfrm>
+            <a:off x="640080" y="1207008"/>
+            <a:ext cx="11064240" cy="868680"/>
+          </a:xfrm>
+          <a:prstGeom prst="rect">
+            <a:avLst/>
+          </a:prstGeom>
+          <a:noFill/>
+        </p:spPr>
+        <p:txBody>
+          <a:bodyPr wrap="square" lIns="0" tIns="0" rIns="0" bIns="0">
+            <a:spAutoFit/>
+          </a:bodyPr>
+          <a:lstStyle/>
+          <a:p>
+            <a:pPr marL="177800" indent="0">
+              <a:spcAft>
+                <a:spcPts val="0"/>
+              </a:spcAft>
+              <a:buSzPct val="100000"/>
+              <a:buNone/>
+            </a:pPr>
+            <a:r>
+              <a:rPr lang="en-US" sz="1250" b="1" dirty="0">
+                <a:solidFill>
+                  <a:srgbClr val="000000"/>
+                </a:solidFill>
+                <a:latin typeface="Calibri" pitchFamily="34" charset="0"/>
+                <a:ea typeface="Calibri" pitchFamily="34" charset="-122"/>
+                <a:cs typeface="Calibri" pitchFamily="34" charset="-120"/>
+              </a:rPr>
+              <a:t xml:space="preserve">Citing a base paper is not a comparison. </a:t>
+            </a:r>
+            <a:r>
+              <a:rPr lang="en-US" sz="1250" dirty="0">
+                <a:solidFill>
+                  <a:srgbClr val="000000"/>
+                </a:solidFill>
+                <a:latin typeface="Calibri" pitchFamily="34" charset="0"/>
+                <a:ea typeface="Calibri" pitchFamily="34" charset="-122"/>
+                <a:cs typeface="Calibri" pitchFamily="34" charset="-120"/>
+              </a:rPr>
+              <a:t xml:space="preserve">models/basedrv.lib implements Takayama, Okuda &amp; Hikihara's DAC-architecture driver — a multibit code that changes DURING the switching edge, with no Miller clamp and no negative off-bias rail, because those are ours. It runs inside sim/dpt.cir, byte-identical otherwise, so only the driver differs.</a:t>
+            </a:r>
+          </a:p>
+        </p:txBody>
+      </p:sp>
+      <p:sp>
+        <p:nvSpPr>
+          <p:cNvPr id="7" name="TextBox 6"/>
+          <p:cNvSpPr txBox="1"/>
+          <p:nvPr/>
+        </p:nvSpPr>
+        <p:spPr>
+          <a:xfrm>
+            <a:off x="640080" y="2395728"/>
+            <a:ext cx="3566160" cy="530352"/>
+          </a:xfrm>
+          <a:prstGeom prst="rect">
+            <a:avLst/>
+          </a:prstGeom>
+          <a:noFill/>
+        </p:spPr>
+        <p:txBody>
+          <a:bodyPr wrap="square" lIns="0" tIns="0" rIns="0" bIns="0">
+            <a:spAutoFit/>
+          </a:bodyPr>
+          <a:lstStyle/>
+          <a:p>
+            <a:pPr marL="177800" indent="0">
+              <a:spcAft>
+                <a:spcPts val="0"/>
+              </a:spcAft>
+              <a:buSzPct val="100000"/>
+              <a:buNone/>
+            </a:pPr>
+            <a:r>
+              <a:rPr lang="en-US" sz="1300" dirty="0">
+                <a:solidFill>
+                  <a:srgbClr val="000000"/>
+                </a:solidFill>
+                <a:latin typeface="Calibri" pitchFamily="34" charset="0"/>
+                <a:ea typeface="Calibri" pitchFamily="34" charset="-122"/>
+                <a:cs typeface="Calibri" pitchFamily="34" charset="-120"/>
+              </a:rPr>
+              <a:t xml:space="preserve">Base paper, as we built it</a:t>
+            </a:r>
+          </a:p>
+        </p:txBody>
+      </p:sp>
+      <p:sp>
+        <p:nvSpPr>
+          <p:cNvPr id="8" name="TextBox 7"/>
+          <p:cNvSpPr txBox="1"/>
+          <p:nvPr/>
+        </p:nvSpPr>
+        <p:spPr>
+          <a:xfrm>
+            <a:off x="4343400" y="2340864"/>
+            <a:ext cx="1417320" cy="438912"/>
+          </a:xfrm>
+          <a:prstGeom prst="rect">
+            <a:avLst/>
+          </a:prstGeom>
+          <a:noFill/>
+        </p:spPr>
+        <p:txBody>
+          <a:bodyPr wrap="square" lIns="0" tIns="0" rIns="0" bIns="0">
+            <a:spAutoFit/>
+          </a:bodyPr>
+          <a:lstStyle/>
+          <a:p>
+            <a:pPr marL="177800" indent="0">
+              <a:spcAft>
+                <a:spcPts val="0"/>
+              </a:spcAft>
+              <a:buSzPct val="100000"/>
+              <a:buNone/>
+            </a:pPr>
+            <a:r>
+              <a:rPr lang="en-US" sz="1700" b="1" dirty="0">
+                <a:solidFill>
+                  <a:srgbClr val="000000"/>
+                </a:solidFill>
+                <a:latin typeface="Calibri" pitchFamily="34" charset="0"/>
+                <a:ea typeface="Calibri" pitchFamily="34" charset="-122"/>
+                <a:cs typeface="Calibri" pitchFamily="34" charset="-120"/>
+              </a:rPr>
+              <a:t xml:space="preserve">+0.533 V</a:t>
+            </a:r>
+          </a:p>
+        </p:txBody>
+      </p:sp>
+      <p:sp>
+        <p:nvSpPr>
+          <p:cNvPr id="9" name="TextBox 8"/>
+          <p:cNvSpPr txBox="1"/>
+          <p:nvPr/>
+        </p:nvSpPr>
+        <p:spPr>
+          <a:xfrm>
+            <a:off x="5943600" y="2395728"/>
+            <a:ext cx="5577840" cy="548640"/>
+          </a:xfrm>
+          <a:prstGeom prst="rect">
+            <a:avLst/>
+          </a:prstGeom>
+          <a:noFill/>
+        </p:spPr>
+        <p:txBody>
+          <a:bodyPr wrap="square" lIns="0" tIns="0" rIns="0" bIns="0">
+            <a:spAutoFit/>
+          </a:bodyPr>
+          <a:lstStyle/>
+          <a:p>
+            <a:pPr marL="177800" indent="0">
+              <a:spcAft>
+                <a:spcPts val="0"/>
+              </a:spcAft>
+              <a:buSzPct val="100000"/>
+              <a:buNone/>
+            </a:pPr>
+            <a:r>
+              <a:rPr lang="en-US" sz="1150" dirty="0">
+                <a:solidFill>
+                  <a:srgbClr val="000000"/>
+                </a:solidFill>
+                <a:latin typeface="Calibri" pitchFamily="34" charset="0"/>
+                <a:ea typeface="Calibri" pitchFamily="34" charset="-122"/>
+                <a:cs typeface="Calibri" pitchFamily="34" charset="-120"/>
+              </a:rPr>
+              <a:t xml:space="preserve">Their time-sequenced multibit code alone already clears the 1.4 V threshold.</a:t>
+            </a:r>
+          </a:p>
+        </p:txBody>
+      </p:sp>
+      <p:sp>
+        <p:nvSpPr>
+          <p:cNvPr id="10" name="TextBox 9"/>
+          <p:cNvSpPr txBox="1"/>
+          <p:nvPr/>
+        </p:nvSpPr>
+        <p:spPr>
+          <a:xfrm>
+            <a:off x="640080" y="3035808"/>
+            <a:ext cx="3566160" cy="530352"/>
+          </a:xfrm>
+          <a:prstGeom prst="rect">
+            <a:avLst/>
+          </a:prstGeom>
+          <a:noFill/>
+        </p:spPr>
+        <p:txBody>
+          <a:bodyPr wrap="square" lIns="0" tIns="0" rIns="0" bIns="0">
+            <a:spAutoFit/>
+          </a:bodyPr>
+          <a:lstStyle/>
+          <a:p>
+            <a:pPr marL="177800" indent="0">
+              <a:spcAft>
+                <a:spcPts val="0"/>
+              </a:spcAft>
+              <a:buSzPct val="100000"/>
+              <a:buNone/>
+            </a:pPr>
+            <a:r>
+              <a:rPr lang="en-US" sz="1300" dirty="0">
+                <a:solidFill>
+                  <a:srgbClr val="000000"/>
+                </a:solidFill>
+                <a:latin typeface="Calibri" pitchFamily="34" charset="0"/>
+                <a:ea typeface="Calibri" pitchFamily="34" charset="-122"/>
+                <a:cs typeface="Calibri" pitchFamily="34" charset="-120"/>
+              </a:rPr>
+              <a:t xml:space="preserve">Ours, constant code, no clamp</a:t>
+            </a:r>
+          </a:p>
+        </p:txBody>
+      </p:sp>
+      <p:sp>
+        <p:nvSpPr>
+          <p:cNvPr id="11" name="TextBox 10"/>
+          <p:cNvSpPr txBox="1"/>
+          <p:nvPr/>
+        </p:nvSpPr>
+        <p:spPr>
+          <a:xfrm>
+            <a:off x="4343400" y="2980944"/>
+            <a:ext cx="1417320" cy="438912"/>
+          </a:xfrm>
+          <a:prstGeom prst="rect">
+            <a:avLst/>
+          </a:prstGeom>
+          <a:noFill/>
+        </p:spPr>
+        <p:txBody>
+          <a:bodyPr wrap="square" lIns="0" tIns="0" rIns="0" bIns="0">
+            <a:spAutoFit/>
+          </a:bodyPr>
+          <a:lstStyle/>
+          <a:p>
+            <a:pPr marL="177800" indent="0">
+              <a:spcAft>
+                <a:spcPts val="0"/>
+              </a:spcAft>
+              <a:buSzPct val="100000"/>
+              <a:buNone/>
+            </a:pPr>
+            <a:r>
+              <a:rPr lang="en-US" sz="1700" b="1" dirty="0">
+                <a:solidFill>
+                  <a:srgbClr val="000000"/>
+                </a:solidFill>
+                <a:latin typeface="Calibri" pitchFamily="34" charset="0"/>
+                <a:ea typeface="Calibri" pitchFamily="34" charset="-122"/>
+                <a:cs typeface="Calibri" pitchFamily="34" charset="-120"/>
+              </a:rPr>
+              <a:t xml:space="preserve">−0.249 V</a:t>
+            </a:r>
+          </a:p>
+        </p:txBody>
+      </p:sp>
+      <p:sp>
+        <p:nvSpPr>
+          <p:cNvPr id="12" name="TextBox 11"/>
+          <p:cNvSpPr txBox="1"/>
+          <p:nvPr/>
+        </p:nvSpPr>
+        <p:spPr>
+          <a:xfrm>
+            <a:off x="5943600" y="3035808"/>
+            <a:ext cx="5577840" cy="548640"/>
+          </a:xfrm>
+          <a:prstGeom prst="rect">
+            <a:avLst/>
+          </a:prstGeom>
+          <a:noFill/>
+        </p:spPr>
+        <p:txBody>
+          <a:bodyPr wrap="square" lIns="0" tIns="0" rIns="0" bIns="0">
+            <a:spAutoFit/>
+          </a:bodyPr>
+          <a:lstStyle/>
+          <a:p>
+            <a:pPr marL="177800" indent="0">
+              <a:spcAft>
+                <a:spcPts val="0"/>
+              </a:spcAft>
+              <a:buSzPct val="100000"/>
+              <a:buNone/>
+            </a:pPr>
+            <a:r>
+              <a:rPr lang="en-US" sz="1150" dirty="0">
+                <a:solidFill>
+                  <a:srgbClr val="000000"/>
+                </a:solidFill>
+                <a:latin typeface="Calibri" pitchFamily="34" charset="0"/>
+                <a:ea typeface="Calibri" pitchFamily="34" charset="-122"/>
+                <a:cs typeface="Calibri" pitchFamily="34" charset="-120"/>
+              </a:rPr>
+              <a:t xml:space="preserve">FALSE TURN-ON. A fast FIXED code is worse than their sequenced one — their contribution is real, and we reproduce it.</a:t>
+            </a:r>
+          </a:p>
+        </p:txBody>
+      </p:sp>
+      <p:sp>
+        <p:nvSpPr>
+          <p:cNvPr id="13" name="TextBox 12"/>
+          <p:cNvSpPr txBox="1"/>
+          <p:nvPr/>
+        </p:nvSpPr>
+        <p:spPr>
+          <a:xfrm>
+            <a:off x="640080" y="3675887"/>
+            <a:ext cx="3566160" cy="530352"/>
+          </a:xfrm>
+          <a:prstGeom prst="rect">
+            <a:avLst/>
+          </a:prstGeom>
+          <a:noFill/>
+        </p:spPr>
+        <p:txBody>
+          <a:bodyPr wrap="square" lIns="0" tIns="0" rIns="0" bIns="0">
+            <a:spAutoFit/>
+          </a:bodyPr>
+          <a:lstStyle/>
+          <a:p>
+            <a:pPr marL="177800" indent="0">
+              <a:spcAft>
+                <a:spcPts val="0"/>
+              </a:spcAft>
+              <a:buSzPct val="100000"/>
+              <a:buNone/>
+            </a:pPr>
+            <a:r>
+              <a:rPr lang="en-US" sz="1300" dirty="0">
+                <a:solidFill>
+                  <a:srgbClr val="000000"/>
+                </a:solidFill>
+                <a:latin typeface="Calibri" pitchFamily="34" charset="0"/>
+                <a:ea typeface="Calibri" pitchFamily="34" charset="-122"/>
+                <a:cs typeface="Calibri" pitchFamily="34" charset="-120"/>
+              </a:rPr>
+              <a:t xml:space="preserve">Ours, active Miller clamp on</a:t>
+            </a:r>
+          </a:p>
+        </p:txBody>
+      </p:sp>
+      <p:sp>
+        <p:nvSpPr>
+          <p:cNvPr id="14" name="TextBox 13"/>
+          <p:cNvSpPr txBox="1"/>
+          <p:nvPr/>
+        </p:nvSpPr>
+        <p:spPr>
+          <a:xfrm>
+            <a:off x="4343400" y="3621023"/>
+            <a:ext cx="1417320" cy="438912"/>
+          </a:xfrm>
+          <a:prstGeom prst="rect">
+            <a:avLst/>
+          </a:prstGeom>
+          <a:noFill/>
+        </p:spPr>
+        <p:txBody>
+          <a:bodyPr wrap="square" lIns="0" tIns="0" rIns="0" bIns="0">
+            <a:spAutoFit/>
+          </a:bodyPr>
+          <a:lstStyle/>
+          <a:p>
+            <a:pPr marL="177800" indent="0">
+              <a:spcAft>
+                <a:spcPts val="0"/>
+              </a:spcAft>
+              <a:buSzPct val="100000"/>
+              <a:buNone/>
+            </a:pPr>
+            <a:r>
+              <a:rPr lang="en-US" sz="1700" b="1" dirty="0">
+                <a:solidFill>
+                  <a:srgbClr val="000000"/>
+                </a:solidFill>
+                <a:latin typeface="Calibri" pitchFamily="34" charset="0"/>
+                <a:ea typeface="Calibri" pitchFamily="34" charset="-122"/>
+                <a:cs typeface="Calibri" pitchFamily="34" charset="-120"/>
+              </a:rPr>
+              <a:t xml:space="preserve">+0.570 V</a:t>
+            </a:r>
+          </a:p>
+        </p:txBody>
+      </p:sp>
+      <p:sp>
+        <p:nvSpPr>
+          <p:cNvPr id="15" name="TextBox 14"/>
+          <p:cNvSpPr txBox="1"/>
+          <p:nvPr/>
+        </p:nvSpPr>
+        <p:spPr>
+          <a:xfrm>
+            <a:off x="5943600" y="3675887"/>
+            <a:ext cx="5577840" cy="548640"/>
+          </a:xfrm>
+          <a:prstGeom prst="rect">
+            <a:avLst/>
+          </a:prstGeom>
+          <a:noFill/>
+        </p:spPr>
+        <p:txBody>
+          <a:bodyPr wrap="square" lIns="0" tIns="0" rIns="0" bIns="0">
+            <a:spAutoFit/>
+          </a:bodyPr>
+          <a:lstStyle/>
+          <a:p>
+            <a:pPr marL="177800" indent="0">
+              <a:spcAft>
+                <a:spcPts val="0"/>
+              </a:spcAft>
+              <a:buSzPct val="100000"/>
+              <a:buNone/>
+            </a:pPr>
+            <a:r>
+              <a:rPr lang="en-US" sz="1150" dirty="0">
+                <a:solidFill>
+                  <a:srgbClr val="000000"/>
+                </a:solidFill>
+                <a:latin typeface="Calibri" pitchFamily="34" charset="0"/>
+                <a:ea typeface="Calibri" pitchFamily="34" charset="-122"/>
+                <a:cs typeface="Calibri" pitchFamily="34" charset="-120"/>
+              </a:rPr>
+              <a:t xml:space="preserve">Only marginally past the base paper. The clamp alone is not the story.</a:t>
+            </a:r>
+          </a:p>
+        </p:txBody>
+      </p:sp>
+      <p:sp>
+        <p:nvSpPr>
+          <p:cNvPr id="16" name="TextBox 15"/>
+          <p:cNvSpPr txBox="1"/>
+          <p:nvPr/>
+        </p:nvSpPr>
+        <p:spPr>
+          <a:xfrm>
+            <a:off x="640080" y="4315968"/>
+            <a:ext cx="3566160" cy="530352"/>
+          </a:xfrm>
+          <a:prstGeom prst="rect">
+            <a:avLst/>
+          </a:prstGeom>
+          <a:noFill/>
+        </p:spPr>
+        <p:txBody>
+          <a:bodyPr wrap="square" lIns="0" tIns="0" rIns="0" bIns="0">
+            <a:spAutoFit/>
+          </a:bodyPr>
+          <a:lstStyle/>
+          <a:p>
+            <a:pPr marL="177800" indent="0">
+              <a:spcAft>
+                <a:spcPts val="0"/>
+              </a:spcAft>
+              <a:buSzPct val="100000"/>
+              <a:buNone/>
+            </a:pPr>
+            <a:r>
+              <a:rPr lang="en-US" sz="1300" b="1" dirty="0">
+                <a:solidFill>
+                  <a:srgbClr val="000000"/>
+                </a:solidFill>
+                <a:latin typeface="Calibri" pitchFamily="34" charset="0"/>
+                <a:ea typeface="Calibri" pitchFamily="34" charset="-122"/>
+                <a:cs typeface="Calibri" pitchFamily="34" charset="-120"/>
+              </a:rPr>
+              <a:t xml:space="preserve">Ours, clamp + −2 V off-bias</a:t>
+            </a:r>
+          </a:p>
+        </p:txBody>
+      </p:sp>
+      <p:sp>
+        <p:nvSpPr>
+          <p:cNvPr id="17" name="TextBox 16"/>
+          <p:cNvSpPr txBox="1"/>
+          <p:nvPr/>
+        </p:nvSpPr>
+        <p:spPr>
+          <a:xfrm>
+            <a:off x="4343400" y="4261104"/>
+            <a:ext cx="1417320" cy="438912"/>
+          </a:xfrm>
+          <a:prstGeom prst="rect">
+            <a:avLst/>
+          </a:prstGeom>
+          <a:noFill/>
+        </p:spPr>
+        <p:txBody>
+          <a:bodyPr wrap="square" lIns="0" tIns="0" rIns="0" bIns="0">
+            <a:spAutoFit/>
+          </a:bodyPr>
+          <a:lstStyle/>
+          <a:p>
+            <a:pPr marL="177800" indent="0">
+              <a:spcAft>
+                <a:spcPts val="0"/>
+              </a:spcAft>
+              <a:buSzPct val="100000"/>
+              <a:buNone/>
+            </a:pPr>
+            <a:r>
+              <a:rPr lang="en-US" sz="1700" b="1" dirty="0">
+                <a:solidFill>
+                  <a:srgbClr val="000000"/>
+                </a:solidFill>
+                <a:latin typeface="Calibri" pitchFamily="34" charset="0"/>
+                <a:ea typeface="Calibri" pitchFamily="34" charset="-122"/>
+                <a:cs typeface="Calibri" pitchFamily="34" charset="-120"/>
+              </a:rPr>
+              <a:t xml:space="preserve">+2.576 V</a:t>
+            </a:r>
+          </a:p>
+        </p:txBody>
+      </p:sp>
+      <p:sp>
+        <p:nvSpPr>
+          <p:cNvPr id="18" name="TextBox 17"/>
+          <p:cNvSpPr txBox="1"/>
+          <p:nvPr/>
+        </p:nvSpPr>
+        <p:spPr>
+          <a:xfrm>
+            <a:off x="5943600" y="4315968"/>
+            <a:ext cx="5577840" cy="548640"/>
+          </a:xfrm>
+          <a:prstGeom prst="rect">
+            <a:avLst/>
+          </a:prstGeom>
+          <a:noFill/>
+        </p:spPr>
+        <p:txBody>
+          <a:bodyPr wrap="square" lIns="0" tIns="0" rIns="0" bIns="0">
+            <a:spAutoFit/>
+          </a:bodyPr>
+          <a:lstStyle/>
+          <a:p>
+            <a:pPr marL="177800" indent="0">
+              <a:spcAft>
+                <a:spcPts val="0"/>
+              </a:spcAft>
+              <a:buSzPct val="100000"/>
+              <a:buNone/>
+            </a:pPr>
+            <a:r>
+              <a:rPr lang="en-US" sz="1150" dirty="0">
+                <a:solidFill>
+                  <a:srgbClr val="000000"/>
+                </a:solidFill>
+                <a:latin typeface="Calibri" pitchFamily="34" charset="0"/>
+                <a:ea typeface="Calibri" pitchFamily="34" charset="-122"/>
+                <a:cs typeface="Calibri" pitchFamily="34" charset="-120"/>
+              </a:rPr>
+              <a:t xml:space="preserve">4.8× the base paper's margin. This is the shipped configuration.</a:t>
+            </a:r>
+          </a:p>
+        </p:txBody>
+      </p:sp>
+      <p:sp>
+        <p:nvSpPr>
+          <p:cNvPr id="19" name="TextBox 18"/>
+          <p:cNvSpPr txBox="1"/>
+          <p:nvPr/>
+        </p:nvSpPr>
+        <p:spPr>
+          <a:xfrm>
+            <a:off x="640080" y="5138928"/>
+            <a:ext cx="11064240" cy="1234440"/>
+          </a:xfrm>
+          <a:prstGeom prst="rect">
+            <a:avLst/>
+          </a:prstGeom>
+          <a:noFill/>
+        </p:spPr>
+        <p:txBody>
+          <a:bodyPr wrap="square" lIns="0" tIns="0" rIns="0" bIns="0">
+            <a:spAutoFit/>
+          </a:bodyPr>
+          <a:lstStyle/>
+          <a:p>
+            <a:pPr marL="177800" indent="0">
+              <a:spcAft>
+                <a:spcPts val="150"/>
+              </a:spcAft>
+              <a:buSzPct val="100000"/>
+              <a:buNone/>
+            </a:pPr>
+            <a:r>
+              <a:rPr lang="en-US" sz="1250" b="1" dirty="0">
+                <a:solidFill>
+                  <a:srgbClr val="000000"/>
+                </a:solidFill>
+                <a:latin typeface="Calibri" pitchFamily="34" charset="0"/>
+                <a:ea typeface="Calibri" pitchFamily="34" charset="-122"/>
+                <a:cs typeface="Calibri" pitchFamily="34" charset="-120"/>
+              </a:rPr>
+              <a:t xml:space="preserve">What the comparison shows. </a:t>
+            </a:r>
+            <a:r>
+              <a:rPr lang="en-US" sz="1250" dirty="0">
+                <a:solidFill>
+                  <a:srgbClr val="000000"/>
+                </a:solidFill>
+                <a:latin typeface="Calibri" pitchFamily="34" charset="0"/>
+                <a:ea typeface="Calibri" pitchFamily="34" charset="-122"/>
+                <a:cs typeface="Calibri" pitchFamily="34" charset="-120"/>
+              </a:rPr>
+              <a:t xml:space="preserve">The base paper shapes the gate waveform in TIME; we hold the code constant and add two actuators it does not have. Both clear the threshold — theirs works — but ours clears it by 4.8× more, and ours is the one whose settings can then be searched exhaustively to ask what adaptation is actually worth.</a:t>
+            </a:r>
+          </a:p>
+          <a:p>
+            <a:pPr marL="177800" indent="0">
+              <a:spcAft>
+                <a:spcPts val="0"/>
+              </a:spcAft>
+              <a:buSzPct val="100000"/>
+              <a:buNone/>
+            </a:pPr>
+            <a:r>
+              <a:rPr lang="en-US" sz="1150" b="1" dirty="0">
+                <a:solidFill>
+                  <a:srgbClr val="000000"/>
+                </a:solidFill>
+                <a:latin typeface="Calibri" pitchFamily="34" charset="0"/>
+                <a:ea typeface="Calibri" pitchFamily="34" charset="-122"/>
+                <a:cs typeface="Calibri" pitchFamily="34" charset="-120"/>
+              </a:rPr>
+              <a:t xml:space="preserve">Reproduce: </a:t>
+            </a:r>
+            <a:r>
+              <a:rPr lang="en-US" sz="1150" b="1" dirty="0">
+                <a:solidFill>
+                  <a:srgbClr val="000000"/>
+                </a:solidFill>
+                <a:latin typeface="Calibri" pitchFamily="34" charset="0"/>
+                <a:ea typeface="Calibri" pitchFamily="34" charset="-122"/>
+                <a:cs typeface="Calibri" pitchFamily="34" charset="-120"/>
+              </a:rPr>
+              <a:t xml:space="preserve">python3 scripts/basepaper_compare.py</a:t>
+            </a:r>
+            <a:r>
+              <a:rPr lang="en-US" sz="1150" dirty="0">
+                <a:solidFill>
+                  <a:srgbClr val="000000"/>
+                </a:solidFill>
+                <a:latin typeface="Calibri" pitchFamily="34" charset="0"/>
+                <a:ea typeface="Calibri" pitchFamily="34" charset="-122"/>
+                <a:cs typeface="Calibri" pitchFamily="34" charset="-120"/>
+              </a:rPr>
+              <a:t xml:space="preserve">  — four ngspice runs, prints this table.</a:t>
+            </a:r>
+          </a:p>
+        </p:txBody>
+      </p:sp>
+    </p:spTree>
+  </p:cSld>
+  <p:clrMapOvr>
+    <a:masterClrMapping/>
+  </p:clrMapOvr>
+</p:sld>
+</file>
+
+<file path=ppt/slides/slide29.xml><?xml version="1.0" encoding="utf-8"?>
+<p:sld xmlns:a="http://schemas.openxmlformats.org/drawingml/2006/main" xmlns:p="http://schemas.openxmlformats.org/presentationml/2006/main" xmlns:r="http://schemas.openxmlformats.org/officeDocument/2006/relationships">
+  <p:cSld>
+    <p:spTree>
+      <p:nvGrpSpPr>
+        <p:cNvPr id="1" name=""/>
+        <p:cNvGrpSpPr/>
+        <p:nvPr/>
+      </p:nvGrpSpPr>
+      <p:grpSpPr/>
       <p:sp>
         <p:nvSpPr>
           <p:cNvPr id="2" name="Text 0"/>
@@ -15195,7 +16286,7 @@
                 <a:ea typeface="Calibri" pitchFamily="34" charset="-122"/>
                 <a:cs typeface="Calibri" pitchFamily="34" charset="-120"/>
               </a:rPr>
-              <a:t>27</a:t>
+              <a:t>28</a:t>
             </a:r>
             <a:endParaRPr lang="en-US" sz="1000" dirty="0"/>
           </a:p>
@@ -16372,7 +17463,7 @@
                 <a:ea typeface="Calibri" pitchFamily="34" charset="-122"/>
                 <a:cs typeface="Calibri" pitchFamily="34" charset="-120"/>
               </a:rPr>
-              <a:t xml:space="preserve">In a GaN half-bridge the dV/dt of one device couples through C</a:t>
+              <a:t xml:space="preserve">One device's dV/dt couples through C</a:t>
             </a:r>
             <a:r>
               <a:rPr lang="en-US" sz="1500" dirty="0">
@@ -16394,7 +17485,29 @@
                 <a:ea typeface="Calibri" pitchFamily="34" charset="-122"/>
                 <a:cs typeface="Calibri" pitchFamily="34" charset="-120"/>
               </a:rPr>
-              <a:t xml:space="preserve"> into the gate of the device meant to be off. With a threshold near 1.4 V the spurious pulse can exceed it and turn that device partially on — shoot-through, extra loss, and at worst destruction.</a:t>
+              <a:t xml:space="preserve"> into the gate of the device that is supposed to be OFF. It reaches </a:t>
+            </a:r>
+            <a:r>
+              <a:rPr lang="en-US" sz="1500" b="1" dirty="0">
+                <a:solidFill>
+                  <a:srgbClr val="000000"/>
+                </a:solidFill>
+                <a:latin typeface="Calibri" pitchFamily="34" charset="0"/>
+                <a:ea typeface="Calibri" pitchFamily="34" charset="-122"/>
+                <a:cs typeface="Calibri" pitchFamily="34" charset="-120"/>
+              </a:rPr>
+              <a:t xml:space="preserve">1.65 V against a 1.4 V threshold</a:t>
+            </a:r>
+            <a:r>
+              <a:rPr lang="en-US" sz="1500" dirty="0">
+                <a:solidFill>
+                  <a:srgbClr val="000000"/>
+                </a:solidFill>
+                <a:latin typeface="Calibri" pitchFamily="34" charset="0"/>
+                <a:ea typeface="Calibri" pitchFamily="34" charset="-122"/>
+                <a:cs typeface="Calibri" pitchFamily="34" charset="-120"/>
+              </a:rPr>
+              <a:t xml:space="preserve"> — false turn-on, and a shoot-through path.</a:t>
             </a:r>
           </a:p>
           <a:p>
@@ -16434,7 +17547,27 @@
                 <a:ea typeface="Calibri" pitchFamily="34" charset="-122"/>
                 <a:cs typeface="Calibri" pitchFamily="34" charset="-120"/>
               </a:rPr>
-              <a:t xml:space="preserve">GaN half-bridges are the switching core of EV and HEV traction inverters, on-board chargers and high-density server supplies, where the whole reason to choose GaN is to switch faster — which is exactly what makes this failure mode worse.</a:t>
+              <a:t xml:space="preserve">GaN half-bridges are the core of EV traction inverters and battery storage converters. The whole reason to choose GaN is speed — which is exactly what makes this failure worse.</a:t>
+            </a:r>
+          </a:p>
+          <a:p>
+            <a:pPr marL="177800" indent="-177800">
+              <a:spcAft>
+                <a:spcPts val="600"/>
+              </a:spcAft>
+              <a:buSzPct val="100000"/>
+              <a:buChar char="•"/>
+            </a:pPr>
+            <a:r>
+              <a:rPr lang="en-US" sz="1600" b="1" dirty="0">
+                <a:solidFill>
+                  <a:srgbClr val="000000"/>
+                </a:solidFill>
+                <a:latin typeface="Calibri" pitchFamily="34" charset="0"/>
+                <a:ea typeface="Calibri" pitchFamily="34" charset="-122"/>
+                <a:cs typeface="Calibri" pitchFamily="34" charset="-120"/>
+              </a:rPr>
+              <a:t xml:space="preserve">Existing Solutions:</a:t>
             </a:r>
           </a:p>
           <a:p>
@@ -16454,7 +17587,47 @@
                 <a:ea typeface="Calibri" pitchFamily="34" charset="-122"/>
                 <a:cs typeface="Calibri" pitchFamily="34" charset="-120"/>
               </a:rPr>
-              <a:t xml:space="preserve">Negative off-bias is uniquely expensive on GaN: with no body diode the reverse drop is V</a:t>
+              <a:t xml:space="preserve">Active gate drivers: segmented drive, Miller clamps, programmable dead time, negative off-bias [1]–[4]. Closed-loop designs report 30.5 % less overshoot and 75 % less turn-off loss [5]–[7].</a:t>
+            </a:r>
+          </a:p>
+          <a:p>
+            <a:pPr marL="177800" indent="-177800">
+              <a:spcAft>
+                <a:spcPts val="600"/>
+              </a:spcAft>
+              <a:buSzPct val="100000"/>
+              <a:buChar char="•"/>
+            </a:pPr>
+            <a:r>
+              <a:rPr lang="en-US" sz="1600" b="1" dirty="0">
+                <a:solidFill>
+                  <a:srgbClr val="000000"/>
+                </a:solidFill>
+                <a:latin typeface="Calibri" pitchFamily="34" charset="0"/>
+                <a:ea typeface="Calibri" pitchFamily="34" charset="-122"/>
+                <a:cs typeface="Calibri" pitchFamily="34" charset="-120"/>
+              </a:rPr>
+              <a:t xml:space="preserve">Limitations / Research Gap:</a:t>
+            </a:r>
+          </a:p>
+          <a:p>
+            <a:pPr marL="520700" indent="-177800">
+              <a:spcAft>
+                <a:spcPts val="600"/>
+              </a:spcAft>
+              <a:buSzPct val="100000"/>
+              <a:buChar char="–"/>
+            </a:pPr>
+            <a:r>
+              <a:rPr lang="en-US" sz="1500" b="1" dirty="0">
+                <a:solidFill>
+                  <a:srgbClr val="000000"/>
+                </a:solidFill>
+                <a:latin typeface="Calibri" pitchFamily="34" charset="0"/>
+                <a:ea typeface="Calibri" pitchFamily="34" charset="-122"/>
+                <a:cs typeface="Calibri" pitchFamily="34" charset="-120"/>
+              </a:rPr>
+              <a:t xml:space="preserve">No published work has measured what the adaptation is worth.</a:t>
             </a:r>
             <a:r>
               <a:rPr lang="en-US" sz="1500" dirty="0">
@@ -16465,175 +17638,7 @@
                 <a:ea typeface="Calibri" pitchFamily="34" charset="-122"/>
                 <a:cs typeface="Calibri" pitchFamily="34" charset="-120"/>
               </a:rPr>
-              <a:t xml:space="preserve">th</a:t>
-            </a:r>
-            <a:r>
-              <a:rPr lang="en-US" sz="1500" dirty="0">
-                <a:solidFill>
-                  <a:srgbClr val="000000"/>
-                </a:solidFill>
-                <a:latin typeface="Calibri" pitchFamily="34" charset="0"/>
-                <a:ea typeface="Calibri" pitchFamily="34" charset="-122"/>
-                <a:cs typeface="Calibri" pitchFamily="34" charset="-120"/>
-              </a:rPr>
-              <a:t xml:space="preserve"> + I·R + |V</a:t>
-            </a:r>
-            <a:r>
-              <a:rPr lang="en-US" sz="1500" dirty="0">
-                <a:solidFill>
-                  <a:srgbClr val="000000"/>
-                </a:solidFill>
-                <a:latin typeface="Calibri" pitchFamily="34" charset="0"/>
-                <a:ea typeface="Calibri" pitchFamily="34" charset="-122"/>
-                <a:cs typeface="Calibri" pitchFamily="34" charset="-120"/>
-              </a:rPr>
-              <a:t xml:space="preserve">GS,off</a:t>
-            </a:r>
-            <a:r>
-              <a:rPr lang="en-US" sz="1500" dirty="0">
-                <a:solidFill>
-                  <a:srgbClr val="000000"/>
-                </a:solidFill>
-                <a:latin typeface="Calibri" pitchFamily="34" charset="0"/>
-                <a:ea typeface="Calibri" pitchFamily="34" charset="-122"/>
-                <a:cs typeface="Calibri" pitchFamily="34" charset="-120"/>
-              </a:rPr>
-              <a:t xml:space="preserve">|, so each volt of margin is paid for again across the dead time.</a:t>
-            </a:r>
-          </a:p>
-          <a:p>
-            <a:pPr marL="177800" indent="-177800">
-              <a:spcAft>
-                <a:spcPts val="600"/>
-              </a:spcAft>
-              <a:buSzPct val="100000"/>
-              <a:buChar char="•"/>
-            </a:pPr>
-            <a:r>
-              <a:rPr lang="en-US" sz="1600" b="1" dirty="0">
-                <a:solidFill>
-                  <a:srgbClr val="000000"/>
-                </a:solidFill>
-                <a:latin typeface="Calibri" pitchFamily="34" charset="0"/>
-                <a:ea typeface="Calibri" pitchFamily="34" charset="-122"/>
-                <a:cs typeface="Calibri" pitchFamily="34" charset="-120"/>
-              </a:rPr>
-              <a:t xml:space="preserve">Existing Solutions:</a:t>
-            </a:r>
-          </a:p>
-          <a:p>
-            <a:pPr marL="520700" indent="-177800">
-              <a:spcAft>
-                <a:spcPts val="600"/>
-              </a:spcAft>
-              <a:buSzPct val="100000"/>
-              <a:buChar char="–"/>
-            </a:pPr>
-            <a:r>
-              <a:rPr lang="en-US" sz="1500" dirty="0">
-                <a:solidFill>
-                  <a:srgbClr val="000000"/>
-                </a:solidFill>
-                <a:latin typeface="Calibri" pitchFamily="34" charset="0"/>
-                <a:ea typeface="Calibri" pitchFamily="34" charset="-122"/>
-                <a:cs typeface="Calibri" pitchFamily="34" charset="-120"/>
-              </a:rPr>
-              <a:t xml:space="preserve">Active gate drivers with segmented drive strength, Miller clamps, programmable dead time and negative off-bias [1]–[4]. Closed-loop designs adapt to the operating point and report large gains — 30.5 % less overshoot, 75 % less turn-off loss — against a conventional driver [5]–[7].</a:t>
-            </a:r>
-          </a:p>
-          <a:p>
-            <a:pPr marL="177800" indent="-177800">
-              <a:spcAft>
-                <a:spcPts val="600"/>
-              </a:spcAft>
-              <a:buSzPct val="100000"/>
-              <a:buChar char="•"/>
-            </a:pPr>
-            <a:r>
-              <a:rPr lang="en-US" sz="1600" b="1" dirty="0">
-                <a:solidFill>
-                  <a:srgbClr val="000000"/>
-                </a:solidFill>
-                <a:latin typeface="Calibri" pitchFamily="34" charset="0"/>
-                <a:ea typeface="Calibri" pitchFamily="34" charset="-122"/>
-                <a:cs typeface="Calibri" pitchFamily="34" charset="-120"/>
-              </a:rPr>
-              <a:t xml:space="preserve">Limitations / Research Gap:</a:t>
-            </a:r>
-          </a:p>
-          <a:p>
-            <a:pPr marL="520700" indent="-177800">
-              <a:spcAft>
-                <a:spcPts val="600"/>
-              </a:spcAft>
-              <a:buSzPct val="100000"/>
-              <a:buChar char="–"/>
-            </a:pPr>
-            <a:r>
-              <a:rPr lang="en-US" sz="1500" b="1" dirty="0">
-                <a:solidFill>
-                  <a:srgbClr val="000000"/>
-                </a:solidFill>
-                <a:latin typeface="Calibri" pitchFamily="34" charset="0"/>
-                <a:ea typeface="Calibri" pitchFamily="34" charset="-122"/>
-                <a:cs typeface="Calibri" pitchFamily="34" charset="-120"/>
-              </a:rPr>
-              <a:t xml:space="preserve">No published work has ever measured what the adaptation is worth.</a:t>
-            </a:r>
-            <a:r>
-              <a:rPr lang="en-US" sz="1500" dirty="0">
-                <a:solidFill>
-                  <a:srgbClr val="000000"/>
-                </a:solidFill>
-                <a:latin typeface="Calibri" pitchFamily="34" charset="0"/>
-                <a:ea typeface="Calibri" pitchFamily="34" charset="-122"/>
-                <a:cs typeface="Calibri" pitchFamily="34" charset="-120"/>
-              </a:rPr>
-              <a:t xml:space="preserve"> Those gains bundle </a:t>
-            </a:r>
-            <a:r>
-              <a:rPr lang="en-US" sz="1500" b="1" dirty="0">
-                <a:solidFill>
-                  <a:srgbClr val="000000"/>
-                </a:solidFill>
-                <a:latin typeface="Calibri" pitchFamily="34" charset="0"/>
-                <a:ea typeface="Calibri" pitchFamily="34" charset="-122"/>
-                <a:cs typeface="Calibri" pitchFamily="34" charset="-120"/>
-              </a:rPr>
-              <a:t xml:space="preserve">choosing better fixed settings</a:t>
-            </a:r>
-            <a:r>
-              <a:rPr lang="en-US" sz="1500" dirty="0">
-                <a:solidFill>
-                  <a:srgbClr val="000000"/>
-                </a:solidFill>
-                <a:latin typeface="Calibri" pitchFamily="34" charset="0"/>
-                <a:ea typeface="Calibri" pitchFamily="34" charset="-122"/>
-                <a:cs typeface="Calibri" pitchFamily="34" charset="-120"/>
-              </a:rPr>
-              <a:t xml:space="preserve"> with </a:t>
-            </a:r>
-            <a:r>
-              <a:rPr lang="en-US" sz="1500" b="1" dirty="0">
-                <a:solidFill>
-                  <a:srgbClr val="000000"/>
-                </a:solidFill>
-                <a:latin typeface="Calibri" pitchFamily="34" charset="0"/>
-                <a:ea typeface="Calibri" pitchFamily="34" charset="-122"/>
-                <a:cs typeface="Calibri" pitchFamily="34" charset="-120"/>
-              </a:rPr>
-              <a:t xml:space="preserve">adapting settings per operating point</a:t>
-            </a:r>
-            <a:r>
-              <a:rPr lang="en-US" sz="1500" dirty="0">
-                <a:solidFill>
-                  <a:srgbClr val="000000"/>
-                </a:solidFill>
-                <a:latin typeface="Calibri" pitchFamily="34" charset="0"/>
-                <a:ea typeface="Calibri" pitchFamily="34" charset="-122"/>
-                <a:cs typeface="Calibri" pitchFamily="34" charset="-120"/>
-              </a:rPr>
-              <a:t xml:space="preserve">. Only the second needs sensing, a lookup table and a controller — the cost that justifies the architecture, and the one nobody has priced.</a:t>
+              <a:t xml:space="preserve"> Those gains bundle a design-time choice with a runtime capability. Only the second needs sensing, a lookup table and a controller.</a:t>
             </a:r>
           </a:p>
         </p:txBody>
@@ -21664,7 +22669,7 @@
                 <a:ea typeface="Calibri" pitchFamily="34" charset="-122"/>
                 <a:cs typeface="Calibri" pitchFamily="34" charset="-120"/>
               </a:rPr>
-              <a:t xml:space="preserve">Crosstalk reproduced, and fixed.</a:t>
+              <a:t xml:space="preserve">The problem, reproduced and fixed.</a:t>
             </a:r>
           </a:p>
           <a:p>
@@ -21684,8 +22689,137 @@
                 <a:ea typeface="Calibri" pitchFamily="34" charset="-122"/>
                 <a:cs typeface="Calibri" pitchFamily="34" charset="-120"/>
               </a:rPr>
-              <a:t xml:space="preserve">Fastest drive, no clamp: spurious gate peak </a:t>
-            </a:r>
+              <a:t xml:space="preserve">1.65 V spurious against a 1.4 V threshold. Clamp on with −2 V off-bias: 2.58 V of margin.</a:t>
+            </a:r>
+          </a:p>
+          <a:p>
+            <a:pPr marL="177800" indent="-177800">
+              <a:spcAft>
+                <a:spcPts val="600"/>
+              </a:spcAft>
+              <a:buSzPct val="100000"/>
+              <a:buChar char="•"/>
+            </a:pPr>
+            <a:r>
+              <a:rPr lang="en-US" sz="1600" b="1" dirty="0">
+                <a:solidFill>
+                  <a:srgbClr val="000000"/>
+                </a:solidFill>
+                <a:latin typeface="Calibri" pitchFamily="34" charset="0"/>
+                <a:ea typeface="Calibri" pitchFamily="34" charset="-122"/>
+                <a:cs typeface="Calibri" pitchFamily="34" charset="-120"/>
+              </a:rPr>
+              <a:t xml:space="preserve">The exhaustive search is complete.</a:t>
+            </a:r>
+          </a:p>
+          <a:p>
+            <a:pPr marL="520700" indent="-177800">
+              <a:spcAft>
+                <a:spcPts val="600"/>
+              </a:spcAft>
+              <a:buSzPct val="100000"/>
+              <a:buChar char="–"/>
+            </a:pPr>
+            <a:r>
+              <a:rPr lang="en-US" sz="1500" dirty="0">
+                <a:solidFill>
+                  <a:srgbClr val="000000"/>
+                </a:solidFill>
+                <a:latin typeface="Calibri" pitchFamily="34" charset="0"/>
+                <a:ea typeface="Calibri" pitchFamily="34" charset="-122"/>
+                <a:cs typeface="Calibri" pitchFamily="34" charset="-120"/>
+              </a:rPr>
+              <a:t xml:space="preserve">720 words at each of four corners — 2,880 transients — so every per-corner optimum is a true optimum, not the best of a shortlist.</a:t>
+            </a:r>
+          </a:p>
+          <a:p>
+            <a:pPr marL="177800" indent="-177800">
+              <a:spcAft>
+                <a:spcPts val="600"/>
+              </a:spcAft>
+              <a:buSzPct val="100000"/>
+              <a:buChar char="•"/>
+            </a:pPr>
+            <a:r>
+              <a:rPr lang="en-US" sz="1600" b="1" dirty="0">
+                <a:solidFill>
+                  <a:srgbClr val="000000"/>
+                </a:solidFill>
+                <a:latin typeface="Calibri" pitchFamily="34" charset="0"/>
+                <a:ea typeface="Calibri" pitchFamily="34" charset="-122"/>
+                <a:cs typeface="Calibri" pitchFamily="34" charset="-120"/>
+              </a:rPr>
+              <a:t xml:space="preserve">Stress-tested, not asserted.</a:t>
+            </a:r>
+          </a:p>
+          <a:p>
+            <a:pPr marL="520700" indent="-177800">
+              <a:spcAft>
+                <a:spcPts val="600"/>
+              </a:spcAft>
+              <a:buSzPct val="100000"/>
+              <a:buChar char="–"/>
+            </a:pPr>
+            <a:r>
+              <a:rPr lang="en-US" sz="1500" dirty="0">
+                <a:solidFill>
+                  <a:srgbClr val="000000"/>
+                </a:solidFill>
+                <a:latin typeface="Calibri" pitchFamily="34" charset="0"/>
+                <a:ea typeface="Calibri" pitchFamily="34" charset="-122"/>
+                <a:cs typeface="Calibri" pitchFamily="34" charset="-120"/>
+              </a:rPr>
+              <a:t xml:space="preserve">21,600 further transients across five device parameters: the ceiling holds between 4.3 % and 7.7 %. Loop inductance and EMI were tested, not argued.</a:t>
+            </a:r>
+          </a:p>
+          <a:p>
+            <a:pPr marL="177800" indent="-177800">
+              <a:spcAft>
+                <a:spcPts val="600"/>
+              </a:spcAft>
+              <a:buSzPct val="100000"/>
+              <a:buChar char="•"/>
+            </a:pPr>
+            <a:r>
+              <a:rPr lang="en-US" sz="1600" b="1" dirty="0">
+                <a:solidFill>
+                  <a:srgbClr val="000000"/>
+                </a:solidFill>
+                <a:latin typeface="Calibri" pitchFamily="34" charset="0"/>
+                <a:ea typeface="Calibri" pitchFamily="34" charset="-122"/>
+                <a:cs typeface="Calibri" pitchFamily="34" charset="-120"/>
+              </a:rPr>
+              <a:t xml:space="preserve">Cross-checked in four tools.</a:t>
+            </a:r>
+          </a:p>
+          <a:p>
+            <a:pPr marL="520700" indent="-177800">
+              <a:spcAft>
+                <a:spcPts val="600"/>
+              </a:spcAft>
+              <a:buSzPct val="100000"/>
+              <a:buChar char="–"/>
+            </a:pPr>
+            <a:r>
+              <a:rPr lang="en-US" sz="1500" dirty="0">
+                <a:solidFill>
+                  <a:srgbClr val="000000"/>
+                </a:solidFill>
+                <a:latin typeface="Calibri" pitchFamily="34" charset="0"/>
+                <a:ea typeface="Calibri" pitchFamily="34" charset="-122"/>
+                <a:cs typeface="Calibri" pitchFamily="34" charset="-120"/>
+              </a:rPr>
+              <a:t xml:space="preserve">LTspice matches ngspice within 2 mV. MATLAB and Octave agree exactly. Vivado: 20 LUTs, 200 MHz met.</a:t>
+            </a:r>
+          </a:p>
+          <a:p>
+            <a:pPr marL="520700" indent="-177800">
+              <a:spcAft>
+                <a:spcPts val="600"/>
+              </a:spcAft>
+              <a:buSzPct val="100000"/>
+              <a:buChar char="–"/>
+            </a:pPr>
             <a:r>
               <a:rPr lang="en-US" sz="1500" b="1" dirty="0">
                 <a:solidFill>
@@ -21695,7 +22829,7 @@
                 <a:ea typeface="Calibri" pitchFamily="34" charset="-122"/>
                 <a:cs typeface="Calibri" pitchFamily="34" charset="-120"/>
               </a:rPr>
-              <a:t xml:space="preserve">1.65 V</a:t>
+              <a:t xml:space="preserve">In total: </a:t>
             </a:r>
             <a:r>
               <a:rPr lang="en-US" sz="1500" dirty="0">
@@ -21706,242 +22840,7 @@
                 <a:ea typeface="Calibri" pitchFamily="34" charset="-122"/>
                 <a:cs typeface="Calibri" pitchFamily="34" charset="-120"/>
               </a:rPr>
-              <a:t xml:space="preserve"> against a 1.4 V threshold — false turn-on, the failure this project exists to remove. Miller clamp on with −2 V off-bias: </a:t>
-            </a:r>
-            <a:r>
-              <a:rPr lang="en-US" sz="1500" b="1" dirty="0">
-                <a:solidFill>
-                  <a:srgbClr val="000000"/>
-                </a:solidFill>
-                <a:latin typeface="Calibri" pitchFamily="34" charset="0"/>
-                <a:ea typeface="Calibri" pitchFamily="34" charset="-122"/>
-                <a:cs typeface="Calibri" pitchFamily="34" charset="-120"/>
-              </a:rPr>
-              <a:t xml:space="preserve">−1.18 V</a:t>
-            </a:r>
-            <a:r>
-              <a:rPr lang="en-US" sz="1500" dirty="0">
-                <a:solidFill>
-                  <a:srgbClr val="000000"/>
-                </a:solidFill>
-                <a:latin typeface="Calibri" pitchFamily="34" charset="0"/>
-                <a:ea typeface="Calibri" pitchFamily="34" charset="-122"/>
-                <a:cs typeface="Calibri" pitchFamily="34" charset="-120"/>
-              </a:rPr>
-              <a:t xml:space="preserve">, a 2.58 V margin.</a:t>
-            </a:r>
-          </a:p>
-          <a:p>
-            <a:pPr marL="177800" indent="-177800">
-              <a:spcAft>
-                <a:spcPts val="600"/>
-              </a:spcAft>
-              <a:buSzPct val="100000"/>
-              <a:buChar char="•"/>
-            </a:pPr>
-            <a:r>
-              <a:rPr lang="en-US" sz="1600" b="1" dirty="0">
-                <a:solidFill>
-                  <a:srgbClr val="000000"/>
-                </a:solidFill>
-                <a:latin typeface="Calibri" pitchFamily="34" charset="0"/>
-                <a:ea typeface="Calibri" pitchFamily="34" charset="-122"/>
-                <a:cs typeface="Calibri" pitchFamily="34" charset="-120"/>
-              </a:rPr>
-              <a:t xml:space="preserve">The full exhaustive search is done.</a:t>
-            </a:r>
-          </a:p>
-          <a:p>
-            <a:pPr marL="520700" indent="-177800">
-              <a:spcAft>
-                <a:spcPts val="600"/>
-              </a:spcAft>
-              <a:buSzPct val="100000"/>
-              <a:buChar char="–"/>
-            </a:pPr>
-            <a:r>
-              <a:rPr lang="en-US" sz="1500" dirty="0">
-                <a:solidFill>
-                  <a:srgbClr val="000000"/>
-                </a:solidFill>
-                <a:latin typeface="Calibri" pitchFamily="34" charset="0"/>
-                <a:ea typeface="Calibri" pitchFamily="34" charset="-122"/>
-                <a:cs typeface="Calibri" pitchFamily="34" charset="-120"/>
-              </a:rPr>
-              <a:t xml:space="preserve">720 control words at each of four corners (50–200 V, 2–10 A, 25–125 °C) = 2,880 transients, plus 1,511 over a 36-point operating grid. Every per-corner optimum is a true optimum, not the best of a shortlist.</a:t>
-            </a:r>
-          </a:p>
-          <a:p>
-            <a:pPr marL="177800" indent="-177800">
-              <a:spcAft>
-                <a:spcPts val="600"/>
-              </a:spcAft>
-              <a:buSzPct val="100000"/>
-              <a:buChar char="•"/>
-            </a:pPr>
-            <a:r>
-              <a:rPr lang="en-US" sz="1600" b="1" dirty="0">
-                <a:solidFill>
-                  <a:srgbClr val="000000"/>
-                </a:solidFill>
-                <a:latin typeface="Calibri" pitchFamily="34" charset="0"/>
-                <a:ea typeface="Calibri" pitchFamily="34" charset="-122"/>
-                <a:cs typeface="Calibri" pitchFamily="34" charset="-120"/>
-              </a:rPr>
-              <a:t xml:space="preserve">The result has been stress-tested.</a:t>
-            </a:r>
-          </a:p>
-          <a:p>
-            <a:pPr marL="520700" indent="-177800">
-              <a:spcAft>
-                <a:spcPts val="600"/>
-              </a:spcAft>
-              <a:buSzPct val="100000"/>
-              <a:buChar char="–"/>
-            </a:pPr>
-            <a:r>
-              <a:rPr lang="en-US" sz="1500" dirty="0">
-                <a:solidFill>
-                  <a:srgbClr val="000000"/>
-                </a:solidFill>
-                <a:latin typeface="Calibri" pitchFamily="34" charset="0"/>
-                <a:ea typeface="Calibri" pitchFamily="34" charset="-122"/>
-                <a:cs typeface="Calibri" pitchFamily="34" charset="-120"/>
-              </a:rPr>
-              <a:t xml:space="preserve">21,600 further transients perturbing five device-model parameters; the ceiling holds between 4.3 % and 7.7 % against every one of them.</a:t>
-            </a:r>
-          </a:p>
-          <a:p>
-            <a:pPr marL="177800" indent="-177800">
-              <a:spcAft>
-                <a:spcPts val="600"/>
-              </a:spcAft>
-              <a:buSzPct val="100000"/>
-              <a:buChar char="•"/>
-            </a:pPr>
-            <a:r>
-              <a:rPr lang="en-US" sz="1600" b="1" dirty="0">
-                <a:solidFill>
-                  <a:srgbClr val="000000"/>
-                </a:solidFill>
-                <a:latin typeface="Calibri" pitchFamily="34" charset="0"/>
-                <a:ea typeface="Calibri" pitchFamily="34" charset="-122"/>
-                <a:cs typeface="Calibri" pitchFamily="34" charset="-120"/>
-              </a:rPr>
-              <a:t xml:space="preserve">Both objections to the result have been tested, not argued.</a:t>
-            </a:r>
-          </a:p>
-          <a:p>
-            <a:pPr marL="520700" indent="-177800">
-              <a:spcAft>
-                <a:spcPts val="600"/>
-              </a:spcAft>
-              <a:buSzPct val="100000"/>
-              <a:buChar char="–"/>
-            </a:pPr>
-            <a:r>
-              <a:rPr lang="en-US" sz="1500" dirty="0">
-                <a:solidFill>
-                  <a:srgbClr val="000000"/>
-                </a:solidFill>
-                <a:latin typeface="Calibri" pitchFamily="34" charset="0"/>
-                <a:ea typeface="Calibri" pitchFamily="34" charset="-122"/>
-                <a:cs typeface="Calibri" pitchFamily="34" charset="-120"/>
-              </a:rPr>
-              <a:t xml:space="preserve">Loop inductance (7,192 transients, eight values): adaptive control pays below ~2.5 nH, peaking at 13.5 %. EMI (1,440 transients): pricing it makes scheduling worth </a:t>
-            </a:r>
-            <a:r>
-              <a:rPr lang="en-US" sz="1500" b="1" dirty="0">
-                <a:solidFill>
-                  <a:srgbClr val="000000"/>
-                </a:solidFill>
-                <a:latin typeface="Calibri" pitchFamily="34" charset="0"/>
-                <a:ea typeface="Calibri" pitchFamily="34" charset="-122"/>
-                <a:cs typeface="Calibri" pitchFamily="34" charset="-120"/>
-              </a:rPr>
-              <a:t xml:space="preserve">less</a:t>
-            </a:r>
-            <a:r>
-              <a:rPr lang="en-US" sz="1500" dirty="0">
-                <a:solidFill>
-                  <a:srgbClr val="000000"/>
-                </a:solidFill>
-                <a:latin typeface="Calibri" pitchFamily="34" charset="0"/>
-                <a:ea typeface="Calibri" pitchFamily="34" charset="-122"/>
-                <a:cs typeface="Calibri" pitchFamily="34" charset="-120"/>
-              </a:rPr>
-              <a:t xml:space="preserve">, not more — 5.95 % → 0.15 %.</a:t>
-            </a:r>
-          </a:p>
-          <a:p>
-            <a:pPr marL="177800" indent="-177800">
-              <a:spcAft>
-                <a:spcPts val="600"/>
-              </a:spcAft>
-              <a:buSzPct val="100000"/>
-              <a:buChar char="•"/>
-            </a:pPr>
-            <a:r>
-              <a:rPr lang="en-US" sz="1600" b="1" dirty="0">
-                <a:solidFill>
-                  <a:srgbClr val="000000"/>
-                </a:solidFill>
-                <a:latin typeface="Calibri" pitchFamily="34" charset="0"/>
-                <a:ea typeface="Calibri" pitchFamily="34" charset="-122"/>
-                <a:cs typeface="Calibri" pitchFamily="34" charset="-120"/>
-              </a:rPr>
-              <a:t xml:space="preserve">The LTspice port has been run in LTspice.</a:t>
-            </a:r>
-          </a:p>
-          <a:p>
-            <a:pPr marL="520700" indent="-177800">
-              <a:spcAft>
-                <a:spcPts val="600"/>
-              </a:spcAft>
-              <a:buSzPct val="100000"/>
-              <a:buChar char="–"/>
-            </a:pPr>
-            <a:r>
-              <a:rPr lang="en-US" sz="1500" dirty="0">
-                <a:solidFill>
-                  <a:srgbClr val="000000"/>
-                </a:solidFill>
-                <a:latin typeface="Calibri" pitchFamily="34" charset="0"/>
-                <a:ea typeface="Calibri" pitchFamily="34" charset="-122"/>
-                <a:cs typeface="Calibri" pitchFamily="34" charset="-120"/>
-              </a:rPr>
-              <a:t xml:space="preserve">The three shipped .cir files give 1.6487 / 0.8282 / −1.1768 V in LTspice 24, matching ngspice within 2 mV — the result is not an artefact of one simulator. Spectre remains a port.</a:t>
-            </a:r>
-          </a:p>
-          <a:p>
-            <a:pPr marL="520700" indent="-177800">
-              <a:spcAft>
-                <a:spcPts val="600"/>
-              </a:spcAft>
-              <a:buSzPct val="100000"/>
-              <a:buChar char="–"/>
-            </a:pPr>
-            <a:r>
-              <a:rPr lang="en-US" sz="1500" b="1" dirty="0">
-                <a:solidFill>
-                  <a:srgbClr val="000000"/>
-                </a:solidFill>
-                <a:latin typeface="Calibri" pitchFamily="34" charset="0"/>
-                <a:ea typeface="Calibri" pitchFamily="34" charset="-122"/>
-                <a:cs typeface="Calibri" pitchFamily="34" charset="-120"/>
-              </a:rPr>
-              <a:t xml:space="preserve">In total: </a:t>
-            </a:r>
-            <a:r>
-              <a:rPr lang="en-US" sz="1500" dirty="0">
-                <a:solidFill>
-                  <a:srgbClr val="000000"/>
-                </a:solidFill>
-                <a:latin typeface="Calibri" pitchFamily="34" charset="0"/>
-                <a:ea typeface="Calibri" pitchFamily="34" charset="-122"/>
-                <a:cs typeface="Calibri" pitchFamily="34" charset="-120"/>
-              </a:rPr>
-              <a:t xml:space="preserve">nearly 35,000 transient simulations, a 34-section written record, and a full manuscript draft with five tables and four figures.</a:t>
+              <a:t xml:space="preserve">nearly 35,000 transient simulations.</a:t>
             </a:r>
           </a:p>
         </p:txBody>

--- a/review/Review1_GaN_Segmented_Gate_Driver.pptx
+++ b/review/Review1_GaN_Segmented_Gate_Driver.pptx
@@ -14,16 +14,17 @@
     <p:sldId id="259" r:id="rId5"/>
     <p:sldId id="260" r:id="rId6"/>
     <p:sldId id="267" r:id="rId18"/>
-    <p:sldId id="282" r:id="rId33"/>
+    <p:sldId id="283" r:id="rId34"/>
     <p:sldId id="261" r:id="rId7"/>
+    <p:sldId id="281" r:id="rId32"/>
     <p:sldId id="274" r:id="rId25"/>
     <p:sldId id="279" r:id="rId30"/>
     <p:sldId id="277" r:id="rId28"/>
+    <p:sldId id="284" r:id="rId35"/>
     <p:sldId id="278" r:id="rId29"/>
-    <p:sldId id="283" r:id="rId34"/>
     <p:sldId id="262" r:id="rId8"/>
     <p:sldId id="272" r:id="rId23"/>
-    <p:sldId id="281" r:id="rId32"/>
+    <p:sldId id="282" r:id="rId33"/>
     <p:sldId id="273" r:id="rId24"/>
     <p:sldId id="263" r:id="rId9"/>
     <p:sldId id="280" r:id="rId31"/>
@@ -35,7 +36,7 @@
     <p:sldId id="270" r:id="rId21"/>
     <p:sldId id="271" r:id="rId22"/>
     <p:sldId id="265" r:id="rId11"/>
-    <p:sldId id="284" r:id="rId35"/>
+    <p:sldId id="285" r:id="rId36"/>
     <p:sldId id="266" r:id="rId12"/>
   </p:sldIdLst>
   <p:sldSz cx="12192000" cy="6858000"/>
@@ -2464,7 +2465,7 @@
                 <a:ea typeface="Calibri" pitchFamily="34" charset="-122"/>
                 <a:cs typeface="Calibri" pitchFamily="34" charset="-120"/>
               </a:rPr>
-              <a:t>15</a:t>
+              <a:t>16</a:t>
             </a:r>
             <a:endParaRPr lang="en-US" sz="1000" dirty="0"/>
           </a:p>
@@ -2847,7 +2848,7 @@
                 <a:ea typeface="Calibri" pitchFamily="34" charset="-122"/>
                 <a:cs typeface="Calibri" pitchFamily="34" charset="-120"/>
               </a:rPr>
-              <a:t>17</a:t>
+              <a:t>18</a:t>
             </a:r>
             <a:endParaRPr lang="en-US" sz="1000" dirty="0"/>
           </a:p>
@@ -3270,7 +3271,7 @@
                 <a:ea typeface="Calibri" pitchFamily="34" charset="-122"/>
                 <a:cs typeface="Calibri" pitchFamily="34" charset="-120"/>
               </a:rPr>
-              <a:t>18</a:t>
+              <a:t>19</a:t>
             </a:r>
             <a:endParaRPr lang="en-US" sz="1000" dirty="0"/>
           </a:p>
@@ -3786,7 +3787,7 @@
                 <a:ea typeface="Calibri" pitchFamily="34" charset="-122"/>
                 <a:cs typeface="Calibri" pitchFamily="34" charset="-120"/>
               </a:rPr>
-              <a:t>20</a:t>
+              <a:t>21</a:t>
             </a:r>
             <a:endParaRPr lang="en-US" sz="1000" dirty="0"/>
           </a:p>
@@ -4370,7 +4371,7 @@
                 <a:ea typeface="Calibri" pitchFamily="34" charset="-122"/>
                 <a:cs typeface="Calibri" pitchFamily="34" charset="-120"/>
               </a:rPr>
-              <a:t>21</a:t>
+              <a:t>22</a:t>
             </a:r>
             <a:endParaRPr lang="en-US" sz="1000" dirty="0"/>
           </a:p>
@@ -5174,7 +5175,7 @@
                 <a:ea typeface="Calibri" pitchFamily="34" charset="-122"/>
                 <a:cs typeface="Calibri" pitchFamily="34" charset="-120"/>
               </a:rPr>
-              <a:t>22</a:t>
+              <a:t>23</a:t>
             </a:r>
             <a:endParaRPr lang="en-US" sz="1000" dirty="0"/>
           </a:p>
@@ -5420,7 +5421,7 @@
                 <a:ea typeface="Calibri" pitchFamily="34" charset="-122"/>
                 <a:cs typeface="Calibri" pitchFamily="34" charset="-120"/>
               </a:rPr>
-              <a:t>23</a:t>
+              <a:t>24</a:t>
             </a:r>
             <a:endParaRPr lang="en-US" sz="1000" dirty="0"/>
           </a:p>
@@ -7399,7 +7400,7 @@
                 <a:ea typeface="Calibri" pitchFamily="34" charset="-122"/>
                 <a:cs typeface="Calibri" pitchFamily="34" charset="-120"/>
               </a:rPr>
-              <a:t>24</a:t>
+              <a:t>25</a:t>
             </a:r>
             <a:endParaRPr lang="en-US" sz="1000" dirty="0"/>
           </a:p>
@@ -7841,7 +7842,7 @@
                 <a:ea typeface="Calibri" pitchFamily="34" charset="-122"/>
                 <a:cs typeface="Calibri" pitchFamily="34" charset="-120"/>
               </a:rPr>
-              <a:t>25</a:t>
+              <a:t>26</a:t>
             </a:r>
             <a:endParaRPr lang="en-US" sz="1000" dirty="0"/>
           </a:p>
@@ -8362,7 +8363,7 @@
                 <a:ea typeface="Calibri" pitchFamily="34" charset="-122"/>
                 <a:cs typeface="Calibri" pitchFamily="34" charset="-120"/>
               </a:rPr>
-              <a:t>26</a:t>
+              <a:t>27</a:t>
             </a:r>
             <a:endParaRPr lang="en-US" sz="1000" dirty="0"/>
           </a:p>
@@ -9611,7 +9612,7 @@
                 <a:ea typeface="Calibri" pitchFamily="34" charset="-122"/>
                 <a:cs typeface="Calibri" pitchFamily="34" charset="-120"/>
               </a:rPr>
-              <a:t>27</a:t>
+              <a:t>28</a:t>
             </a:r>
             <a:endParaRPr lang="en-US" sz="1000" dirty="0"/>
           </a:p>
@@ -10286,7 +10287,7 @@
                 <a:ea typeface="Calibri" pitchFamily="34" charset="-122"/>
                 <a:cs typeface="Calibri" pitchFamily="34" charset="-120"/>
               </a:rPr>
-              <a:t>29</a:t>
+              <a:t>30</a:t>
             </a:r>
             <a:endParaRPr lang="en-US" sz="1000" dirty="0"/>
           </a:p>
@@ -10406,7 +10407,7 @@
                 <a:ea typeface="Calibri" pitchFamily="34" charset="-122"/>
                 <a:cs typeface="Calibri" pitchFamily="34" charset="-120"/>
               </a:rPr>
-              <a:t>11</a:t>
+              <a:t>12</a:t>
             </a:r>
             <a:endParaRPr lang="en-US" sz="1000" dirty="0"/>
           </a:p>
@@ -11762,7 +11763,7 @@
                 <a:ea typeface="Calibri" pitchFamily="34" charset="-122"/>
                 <a:cs typeface="Calibri" pitchFamily="34" charset="-120"/>
               </a:rPr>
-              <a:t>12</a:t>
+              <a:t>14</a:t>
             </a:r>
             <a:endParaRPr lang="en-US" sz="1000" dirty="0"/>
           </a:p>
@@ -13022,7 +13023,7 @@
                 <a:ea typeface="Calibri" pitchFamily="34" charset="-122"/>
                 <a:cs typeface="Calibri" pitchFamily="34" charset="-120"/>
               </a:rPr>
-              <a:t>10</a:t>
+              <a:t>11</a:t>
             </a:r>
             <a:endParaRPr lang="en-US" sz="1000" dirty="0"/>
           </a:p>
@@ -13308,7 +13309,7 @@
                 <a:ea typeface="Calibri" pitchFamily="34" charset="-122"/>
                 <a:cs typeface="Calibri" pitchFamily="34" charset="-120"/>
               </a:rPr>
-              <a:t>19</a:t>
+              <a:t>20</a:t>
             </a:r>
             <a:endParaRPr lang="en-US" sz="1000" dirty="0"/>
           </a:p>
@@ -13770,7 +13771,7 @@
                 <a:ea typeface="Calibri" pitchFamily="34" charset="-122"/>
                 <a:cs typeface="Calibri" pitchFamily="34" charset="-120"/>
               </a:rPr>
-              <a:t>16</a:t>
+              <a:t>9</a:t>
             </a:r>
             <a:endParaRPr lang="en-US" sz="1000" dirty="0"/>
           </a:p>
@@ -13809,7 +13810,7 @@
                 <a:ea typeface="Calibri" pitchFamily="34" charset="-122"/>
                 <a:cs typeface="Calibri" pitchFamily="34" charset="-120"/>
               </a:rPr>
-              <a:t>Tools — and what each one produced</a:t>
+              <a:t>How it works — one use case, start to finish</a:t>
             </a:r>
             <a:endParaRPr lang="en-US" sz="2800" dirty="0"/>
           </a:p>
@@ -13839,16 +13840,40 @@
           </a:prstGeom>
         </p:spPr>
       </p:pic>
-      <p:sp>
-        <p:nvSpPr>
-          <p:cNvPr id="5" name="TextBox 4"/>
-          <p:cNvSpPr txBox="1"/>
-          <p:nvPr/>
-        </p:nvSpPr>
-        <p:spPr>
-          <a:xfrm>
-            <a:off x="640080" y="1417320"/>
-            <a:ext cx="2788920" cy="384048"/>
+      <p:pic>
+        <p:nvPicPr>
+          <p:cNvPr id="5" name="Picture 4" descr="fig_flow.png"/>
+          <p:cNvPicPr>
+            <a:picLocks noChangeAspect="1"/>
+          </p:cNvPicPr>
+          <p:nvPr/>
+        </p:nvPicPr>
+        <p:blipFill>
+          <a:blip r:embed="rId4"/>
+          <a:stretch>
+            <a:fillRect/>
+          </a:stretch>
+        </p:blipFill>
+        <p:spPr>
+          <a:xfrm>
+            <a:off x="1700784" y="1188720"/>
+            <a:ext cx="8792300" cy="4617720"/>
+          </a:xfrm>
+          <a:prstGeom prst="rect">
+            <a:avLst/>
+          </a:prstGeom>
+        </p:spPr>
+      </p:pic>
+      <p:sp>
+        <p:nvSpPr>
+          <p:cNvPr id="6" name="TextBox 5"/>
+          <p:cNvSpPr txBox="1"/>
+          <p:nvPr/>
+        </p:nvSpPr>
+        <p:spPr>
+          <a:xfrm>
+            <a:off x="640080" y="5989320"/>
+            <a:ext cx="10241280" cy="411480"/>
           </a:xfrm>
           <a:prstGeom prst="rect">
             <a:avLst/>
@@ -13869,48 +13894,16 @@
               <a:buNone/>
             </a:pPr>
             <a:r>
-              <a:rPr lang="en-US" sz="1350" b="1" dirty="0">
-                <a:solidFill>
-                  <a:srgbClr val="000000"/>
-                </a:solidFill>
-                <a:latin typeface="Calibri" pitchFamily="34" charset="0"/>
-                <a:ea typeface="Calibri" pitchFamily="34" charset="-122"/>
-                <a:cs typeface="Calibri" pitchFamily="34" charset="-120"/>
-              </a:rPr>
-              <a:t xml:space="preserve">ngspice 42</a:t>
-            </a:r>
-          </a:p>
-        </p:txBody>
-      </p:sp>
-      <p:sp>
-        <p:nvSpPr>
-          <p:cNvPr id="6" name="TextBox 5"/>
-          <p:cNvSpPr txBox="1"/>
-          <p:nvPr/>
-        </p:nvSpPr>
-        <p:spPr>
-          <a:xfrm>
-            <a:off x="3520440" y="1417320"/>
-            <a:ext cx="3246120" cy="384048"/>
-          </a:xfrm>
-          <a:prstGeom prst="rect">
-            <a:avLst/>
-          </a:prstGeom>
-          <a:noFill/>
-        </p:spPr>
-        <p:txBody>
-          <a:bodyPr wrap="square" lIns="0" tIns="0" rIns="0" bIns="0">
-            <a:spAutoFit/>
-          </a:bodyPr>
-          <a:lstStyle/>
-          <a:p>
-            <a:pPr marL="177800" indent="0">
-              <a:spcAft>
-                <a:spcPts val="0"/>
-              </a:spcAft>
-              <a:buSzPct val="100000"/>
-              <a:buNone/>
-            </a:pPr>
+              <a:rPr lang="en-US" sz="1200" b="1" dirty="0">
+                <a:solidFill>
+                  <a:srgbClr val="000000"/>
+                </a:solidFill>
+                <a:latin typeface="Calibri" pitchFamily="34" charset="0"/>
+                <a:ea typeface="Calibri" pitchFamily="34" charset="-122"/>
+                <a:cs typeface="Calibri" pitchFamily="34" charset="-120"/>
+              </a:rPr>
+              <a:t xml:space="preserve">Read the top row as the controller and the bottom row as the circuit. </a:t>
+            </a:r>
             <a:r>
               <a:rPr lang="en-US" sz="1200" dirty="0">
                 <a:solidFill>
@@ -13920,878 +13913,7 @@
                 <a:ea typeface="Calibri" pitchFamily="34" charset="-122"/>
                 <a:cs typeface="Calibri" pitchFamily="34" charset="-120"/>
               </a:rPr>
-              <a:t xml:space="preserve">every transient in the study</a:t>
-            </a:r>
-          </a:p>
-        </p:txBody>
-      </p:sp>
-      <p:sp>
-        <p:nvSpPr>
-          <p:cNvPr id="7" name="TextBox 6"/>
-          <p:cNvSpPr txBox="1"/>
-          <p:nvPr/>
-        </p:nvSpPr>
-        <p:spPr>
-          <a:xfrm>
-            <a:off x="6858000" y="1417320"/>
-            <a:ext cx="4754880" cy="384048"/>
-          </a:xfrm>
-          <a:prstGeom prst="rect">
-            <a:avLst/>
-          </a:prstGeom>
-          <a:noFill/>
-        </p:spPr>
-        <p:txBody>
-          <a:bodyPr wrap="square" lIns="0" tIns="0" rIns="0" bIns="0">
-            <a:spAutoFit/>
-          </a:bodyPr>
-          <a:lstStyle/>
-          <a:p>
-            <a:pPr marL="177800" indent="0">
-              <a:spcAft>
-                <a:spcPts val="0"/>
-              </a:spcAft>
-              <a:buSzPct val="100000"/>
-              <a:buNone/>
-            </a:pPr>
-            <a:r>
-              <a:rPr lang="en-US" sz="1200" b="1" dirty="0">
-                <a:solidFill>
-                  <a:srgbClr val="000000"/>
-                </a:solidFill>
-                <a:latin typeface="Calibri" pitchFamily="34" charset="0"/>
-                <a:ea typeface="Calibri" pitchFamily="34" charset="-122"/>
-                <a:cs typeface="Calibri" pitchFamily="34" charset="-120"/>
-              </a:rPr>
-              <a:t xml:space="preserve">34,622 simulations · 1.65 V spurious · 2.58 V margin · 5.2 % ceiling</a:t>
-            </a:r>
-          </a:p>
-        </p:txBody>
-      </p:sp>
-      <p:sp>
-        <p:nvSpPr>
-          <p:cNvPr id="8" name="TextBox 7"/>
-          <p:cNvSpPr txBox="1"/>
-          <p:nvPr/>
-        </p:nvSpPr>
-        <p:spPr>
-          <a:xfrm>
-            <a:off x="640080" y="1984248"/>
-            <a:ext cx="2788920" cy="384048"/>
-          </a:xfrm>
-          <a:prstGeom prst="rect">
-            <a:avLst/>
-          </a:prstGeom>
-          <a:noFill/>
-        </p:spPr>
-        <p:txBody>
-          <a:bodyPr wrap="square" lIns="0" tIns="0" rIns="0" bIns="0">
-            <a:spAutoFit/>
-          </a:bodyPr>
-          <a:lstStyle/>
-          <a:p>
-            <a:pPr marL="177800" indent="0">
-              <a:spcAft>
-                <a:spcPts val="0"/>
-              </a:spcAft>
-              <a:buSzPct val="100000"/>
-              <a:buNone/>
-            </a:pPr>
-            <a:r>
-              <a:rPr lang="en-US" sz="1350" b="1" dirty="0">
-                <a:solidFill>
-                  <a:srgbClr val="000000"/>
-                </a:solidFill>
-                <a:latin typeface="Calibri" pitchFamily="34" charset="0"/>
-                <a:ea typeface="Calibri" pitchFamily="34" charset="-122"/>
-                <a:cs typeface="Calibri" pitchFamily="34" charset="-120"/>
-              </a:rPr>
-              <a:t xml:space="preserve">LTspice 24</a:t>
-            </a:r>
-          </a:p>
-        </p:txBody>
-      </p:sp>
-      <p:sp>
-        <p:nvSpPr>
-          <p:cNvPr id="9" name="TextBox 8"/>
-          <p:cNvSpPr txBox="1"/>
-          <p:nvPr/>
-        </p:nvSpPr>
-        <p:spPr>
-          <a:xfrm>
-            <a:off x="3520440" y="1984248"/>
-            <a:ext cx="3246120" cy="384048"/>
-          </a:xfrm>
-          <a:prstGeom prst="rect">
-            <a:avLst/>
-          </a:prstGeom>
-          <a:noFill/>
-        </p:spPr>
-        <p:txBody>
-          <a:bodyPr wrap="square" lIns="0" tIns="0" rIns="0" bIns="0">
-            <a:spAutoFit/>
-          </a:bodyPr>
-          <a:lstStyle/>
-          <a:p>
-            <a:pPr marL="177800" indent="0">
-              <a:spcAft>
-                <a:spcPts val="0"/>
-              </a:spcAft>
-              <a:buSzPct val="100000"/>
-              <a:buNone/>
-            </a:pPr>
-            <a:r>
-              <a:rPr lang="en-US" sz="1200" dirty="0">
-                <a:solidFill>
-                  <a:srgbClr val="000000"/>
-                </a:solidFill>
-                <a:latin typeface="Calibri" pitchFamily="34" charset="0"/>
-                <a:ea typeface="Calibri" pitchFamily="34" charset="-122"/>
-                <a:cs typeface="Calibri" pitchFamily="34" charset="-120"/>
-              </a:rPr>
-              <a:t xml:space="preserve">independent re-run of the shipped netlists</a:t>
-            </a:r>
-          </a:p>
-        </p:txBody>
-      </p:sp>
-      <p:sp>
-        <p:nvSpPr>
-          <p:cNvPr id="10" name="TextBox 9"/>
-          <p:cNvSpPr txBox="1"/>
-          <p:nvPr/>
-        </p:nvSpPr>
-        <p:spPr>
-          <a:xfrm>
-            <a:off x="6858000" y="1984248"/>
-            <a:ext cx="4754880" cy="384048"/>
-          </a:xfrm>
-          <a:prstGeom prst="rect">
-            <a:avLst/>
-          </a:prstGeom>
-          <a:noFill/>
-        </p:spPr>
-        <p:txBody>
-          <a:bodyPr wrap="square" lIns="0" tIns="0" rIns="0" bIns="0">
-            <a:spAutoFit/>
-          </a:bodyPr>
-          <a:lstStyle/>
-          <a:p>
-            <a:pPr marL="177800" indent="0">
-              <a:spcAft>
-                <a:spcPts val="0"/>
-              </a:spcAft>
-              <a:buSzPct val="100000"/>
-              <a:buNone/>
-            </a:pPr>
-            <a:r>
-              <a:rPr lang="en-US" sz="1200" b="1" dirty="0">
-                <a:solidFill>
-                  <a:srgbClr val="000000"/>
-                </a:solidFill>
-                <a:latin typeface="Calibri" pitchFamily="34" charset="0"/>
-                <a:ea typeface="Calibri" pitchFamily="34" charset="-122"/>
-                <a:cs typeface="Calibri" pitchFamily="34" charset="-120"/>
-              </a:rPr>
-              <a:t xml:space="preserve">1.6487 / 0.8282 / −1.1768 V — matches ngspice within 2 mV</a:t>
-            </a:r>
-          </a:p>
-        </p:txBody>
-      </p:sp>
-      <p:sp>
-        <p:nvSpPr>
-          <p:cNvPr id="11" name="TextBox 10"/>
-          <p:cNvSpPr txBox="1"/>
-          <p:nvPr/>
-        </p:nvSpPr>
-        <p:spPr>
-          <a:xfrm>
-            <a:off x="640080" y="2551176"/>
-            <a:ext cx="2788920" cy="384048"/>
-          </a:xfrm>
-          <a:prstGeom prst="rect">
-            <a:avLst/>
-          </a:prstGeom>
-          <a:noFill/>
-        </p:spPr>
-        <p:txBody>
-          <a:bodyPr wrap="square" lIns="0" tIns="0" rIns="0" bIns="0">
-            <a:spAutoFit/>
-          </a:bodyPr>
-          <a:lstStyle/>
-          <a:p>
-            <a:pPr marL="177800" indent="0">
-              <a:spcAft>
-                <a:spcPts val="0"/>
-              </a:spcAft>
-              <a:buSzPct val="100000"/>
-              <a:buNone/>
-            </a:pPr>
-            <a:r>
-              <a:rPr lang="en-US" sz="1350" b="1" dirty="0">
-                <a:solidFill>
-                  <a:srgbClr val="000000"/>
-                </a:solidFill>
-                <a:latin typeface="Calibri" pitchFamily="34" charset="0"/>
-                <a:ea typeface="Calibri" pitchFamily="34" charset="-122"/>
-                <a:cs typeface="Calibri" pitchFamily="34" charset="-120"/>
-              </a:rPr>
-              <a:t xml:space="preserve">MATLAB Online</a:t>
-            </a:r>
-          </a:p>
-        </p:txBody>
-      </p:sp>
-      <p:sp>
-        <p:nvSpPr>
-          <p:cNvPr id="12" name="TextBox 11"/>
-          <p:cNvSpPr txBox="1"/>
-          <p:nvPr/>
-        </p:nvSpPr>
-        <p:spPr>
-          <a:xfrm>
-            <a:off x="3520440" y="2551176"/>
-            <a:ext cx="3246120" cy="384048"/>
-          </a:xfrm>
-          <a:prstGeom prst="rect">
-            <a:avLst/>
-          </a:prstGeom>
-          <a:noFill/>
-        </p:spPr>
-        <p:txBody>
-          <a:bodyPr wrap="square" lIns="0" tIns="0" rIns="0" bIns="0">
-            <a:spAutoFit/>
-          </a:bodyPr>
-          <a:lstStyle/>
-          <a:p>
-            <a:pPr marL="177800" indent="0">
-              <a:spcAft>
-                <a:spcPts val="0"/>
-              </a:spcAft>
-              <a:buSzPct val="100000"/>
-              <a:buNone/>
-            </a:pPr>
-            <a:r>
-              <a:rPr lang="en-US" sz="1200" dirty="0">
-                <a:solidFill>
-                  <a:srgbClr val="000000"/>
-                </a:solidFill>
-                <a:latin typeface="Calibri" pitchFamily="34" charset="0"/>
-                <a:ea typeface="Calibri" pitchFamily="34" charset="-122"/>
-                <a:cs typeface="Calibri" pitchFamily="34" charset="-120"/>
-              </a:rPr>
-              <a:t xml:space="preserve">independent re-analysis of the same CSVs</a:t>
-            </a:r>
-          </a:p>
-        </p:txBody>
-      </p:sp>
-      <p:sp>
-        <p:nvSpPr>
-          <p:cNvPr id="13" name="TextBox 12"/>
-          <p:cNvSpPr txBox="1"/>
-          <p:nvPr/>
-        </p:nvSpPr>
-        <p:spPr>
-          <a:xfrm>
-            <a:off x="6858000" y="2551176"/>
-            <a:ext cx="4754880" cy="384048"/>
-          </a:xfrm>
-          <a:prstGeom prst="rect">
-            <a:avLst/>
-          </a:prstGeom>
-          <a:noFill/>
-        </p:spPr>
-        <p:txBody>
-          <a:bodyPr wrap="square" lIns="0" tIns="0" rIns="0" bIns="0">
-            <a:spAutoFit/>
-          </a:bodyPr>
-          <a:lstStyle/>
-          <a:p>
-            <a:pPr marL="177800" indent="0">
-              <a:spcAft>
-                <a:spcPts val="0"/>
-              </a:spcAft>
-              <a:buSzPct val="100000"/>
-              <a:buNone/>
-            </a:pPr>
-            <a:r>
-              <a:rPr lang="en-US" sz="1200" b="1" dirty="0">
-                <a:solidFill>
-                  <a:srgbClr val="000000"/>
-                </a:solidFill>
-                <a:latin typeface="Calibri" pitchFamily="34" charset="0"/>
-                <a:ea typeface="Calibri" pitchFamily="34" charset="-122"/>
-                <a:cs typeface="Calibri" pitchFamily="34" charset="-120"/>
-              </a:rPr>
-              <a:t xml:space="preserve">504 of 720 feasible · 7-word Pareto front · 0.039 µJ per point</a:t>
-            </a:r>
-          </a:p>
-        </p:txBody>
-      </p:sp>
-      <p:sp>
-        <p:nvSpPr>
-          <p:cNvPr id="14" name="TextBox 13"/>
-          <p:cNvSpPr txBox="1"/>
-          <p:nvPr/>
-        </p:nvSpPr>
-        <p:spPr>
-          <a:xfrm>
-            <a:off x="640080" y="3118104"/>
-            <a:ext cx="2788920" cy="384048"/>
-          </a:xfrm>
-          <a:prstGeom prst="rect">
-            <a:avLst/>
-          </a:prstGeom>
-          <a:noFill/>
-        </p:spPr>
-        <p:txBody>
-          <a:bodyPr wrap="square" lIns="0" tIns="0" rIns="0" bIns="0">
-            <a:spAutoFit/>
-          </a:bodyPr>
-          <a:lstStyle/>
-          <a:p>
-            <a:pPr marL="177800" indent="0">
-              <a:spcAft>
-                <a:spcPts val="0"/>
-              </a:spcAft>
-              <a:buSzPct val="100000"/>
-              <a:buNone/>
-            </a:pPr>
-            <a:r>
-              <a:rPr lang="en-US" sz="1350" b="1" dirty="0">
-                <a:solidFill>
-                  <a:srgbClr val="000000"/>
-                </a:solidFill>
-                <a:latin typeface="Calibri" pitchFamily="34" charset="0"/>
-                <a:ea typeface="Calibri" pitchFamily="34" charset="-122"/>
-                <a:cs typeface="Calibri" pitchFamily="34" charset="-120"/>
-              </a:rPr>
-              <a:t xml:space="preserve">GNU Octave 11.3</a:t>
-            </a:r>
-          </a:p>
-        </p:txBody>
-      </p:sp>
-      <p:sp>
-        <p:nvSpPr>
-          <p:cNvPr id="15" name="TextBox 14"/>
-          <p:cNvSpPr txBox="1"/>
-          <p:nvPr/>
-        </p:nvSpPr>
-        <p:spPr>
-          <a:xfrm>
-            <a:off x="3520440" y="3118104"/>
-            <a:ext cx="3246120" cy="384048"/>
-          </a:xfrm>
-          <a:prstGeom prst="rect">
-            <a:avLst/>
-          </a:prstGeom>
-          <a:noFill/>
-        </p:spPr>
-        <p:txBody>
-          <a:bodyPr wrap="square" lIns="0" tIns="0" rIns="0" bIns="0">
-            <a:spAutoFit/>
-          </a:bodyPr>
-          <a:lstStyle/>
-          <a:p>
-            <a:pPr marL="177800" indent="0">
-              <a:spcAft>
-                <a:spcPts val="0"/>
-              </a:spcAft>
-              <a:buSzPct val="100000"/>
-              <a:buNone/>
-            </a:pPr>
-            <a:r>
-              <a:rPr lang="en-US" sz="1200" dirty="0">
-                <a:solidFill>
-                  <a:srgbClr val="000000"/>
-                </a:solidFill>
-                <a:latin typeface="Calibri" pitchFamily="34" charset="0"/>
-                <a:ea typeface="Calibri" pitchFamily="34" charset="-122"/>
-                <a:cs typeface="Calibri" pitchFamily="34" charset="-120"/>
-              </a:rPr>
-              <a:t xml:space="preserve">second run of the same MATLAB scripts</a:t>
-            </a:r>
-          </a:p>
-        </p:txBody>
-      </p:sp>
-      <p:sp>
-        <p:nvSpPr>
-          <p:cNvPr id="16" name="TextBox 15"/>
-          <p:cNvSpPr txBox="1"/>
-          <p:nvPr/>
-        </p:nvSpPr>
-        <p:spPr>
-          <a:xfrm>
-            <a:off x="6858000" y="3118104"/>
-            <a:ext cx="4754880" cy="384048"/>
-          </a:xfrm>
-          <a:prstGeom prst="rect">
-            <a:avLst/>
-          </a:prstGeom>
-          <a:noFill/>
-        </p:spPr>
-        <p:txBody>
-          <a:bodyPr wrap="square" lIns="0" tIns="0" rIns="0" bIns="0">
-            <a:spAutoFit/>
-          </a:bodyPr>
-          <a:lstStyle/>
-          <a:p>
-            <a:pPr marL="177800" indent="0">
-              <a:spcAft>
-                <a:spcPts val="0"/>
-              </a:spcAft>
-              <a:buSzPct val="100000"/>
-              <a:buNone/>
-            </a:pPr>
-            <a:r>
-              <a:rPr lang="en-US" sz="1200" b="1" dirty="0">
-                <a:solidFill>
-                  <a:srgbClr val="000000"/>
-                </a:solidFill>
-                <a:latin typeface="Calibri" pitchFamily="34" charset="0"/>
-                <a:ea typeface="Calibri" pitchFamily="34" charset="-122"/>
-                <a:cs typeface="Calibri" pitchFamily="34" charset="-120"/>
-              </a:rPr>
-              <a:t xml:space="preserve">agrees with MATLAB to the last printed digit</a:t>
-            </a:r>
-          </a:p>
-        </p:txBody>
-      </p:sp>
-      <p:sp>
-        <p:nvSpPr>
-          <p:cNvPr id="17" name="TextBox 16"/>
-          <p:cNvSpPr txBox="1"/>
-          <p:nvPr/>
-        </p:nvSpPr>
-        <p:spPr>
-          <a:xfrm>
-            <a:off x="640080" y="3685032"/>
-            <a:ext cx="2788920" cy="384048"/>
-          </a:xfrm>
-          <a:prstGeom prst="rect">
-            <a:avLst/>
-          </a:prstGeom>
-          <a:noFill/>
-        </p:spPr>
-        <p:txBody>
-          <a:bodyPr wrap="square" lIns="0" tIns="0" rIns="0" bIns="0">
-            <a:spAutoFit/>
-          </a:bodyPr>
-          <a:lstStyle/>
-          <a:p>
-            <a:pPr marL="177800" indent="0">
-              <a:spcAft>
-                <a:spcPts val="0"/>
-              </a:spcAft>
-              <a:buSzPct val="100000"/>
-              <a:buNone/>
-            </a:pPr>
-            <a:r>
-              <a:rPr lang="en-US" sz="1350" b="1" dirty="0">
-                <a:solidFill>
-                  <a:srgbClr val="000000"/>
-                </a:solidFill>
-                <a:latin typeface="Calibri" pitchFamily="34" charset="0"/>
-                <a:ea typeface="Calibri" pitchFamily="34" charset="-122"/>
-                <a:cs typeface="Calibri" pitchFamily="34" charset="-120"/>
-              </a:rPr>
-              <a:t xml:space="preserve">Icarus Verilog</a:t>
-            </a:r>
-          </a:p>
-        </p:txBody>
-      </p:sp>
-      <p:sp>
-        <p:nvSpPr>
-          <p:cNvPr id="18" name="TextBox 17"/>
-          <p:cNvSpPr txBox="1"/>
-          <p:nvPr/>
-        </p:nvSpPr>
-        <p:spPr>
-          <a:xfrm>
-            <a:off x="3520440" y="3685032"/>
-            <a:ext cx="3246120" cy="384048"/>
-          </a:xfrm>
-          <a:prstGeom prst="rect">
-            <a:avLst/>
-          </a:prstGeom>
-          <a:noFill/>
-        </p:spPr>
-        <p:txBody>
-          <a:bodyPr wrap="square" lIns="0" tIns="0" rIns="0" bIns="0">
-            <a:spAutoFit/>
-          </a:bodyPr>
-          <a:lstStyle/>
-          <a:p>
-            <a:pPr marL="177800" indent="0">
-              <a:spcAft>
-                <a:spcPts val="0"/>
-              </a:spcAft>
-              <a:buSzPct val="100000"/>
-              <a:buNone/>
-            </a:pPr>
-            <a:r>
-              <a:rPr lang="en-US" sz="1200" dirty="0">
-                <a:solidFill>
-                  <a:srgbClr val="000000"/>
-                </a:solidFill>
-                <a:latin typeface="Calibri" pitchFamily="34" charset="0"/>
-                <a:ea typeface="Calibri" pitchFamily="34" charset="-122"/>
-                <a:cs typeface="Calibri" pitchFamily="34" charset="-120"/>
-              </a:rPr>
-              <a:t xml:space="preserve">RTL verification and mutation testing</a:t>
-            </a:r>
-          </a:p>
-        </p:txBody>
-      </p:sp>
-      <p:sp>
-        <p:nvSpPr>
-          <p:cNvPr id="19" name="TextBox 18"/>
-          <p:cNvSpPr txBox="1"/>
-          <p:nvPr/>
-        </p:nvSpPr>
-        <p:spPr>
-          <a:xfrm>
-            <a:off x="6858000" y="3685032"/>
-            <a:ext cx="4754880" cy="384048"/>
-          </a:xfrm>
-          <a:prstGeom prst="rect">
-            <a:avLst/>
-          </a:prstGeom>
-          <a:noFill/>
-        </p:spPr>
-        <p:txBody>
-          <a:bodyPr wrap="square" lIns="0" tIns="0" rIns="0" bIns="0">
-            <a:spAutoFit/>
-          </a:bodyPr>
-          <a:lstStyle/>
-          <a:p>
-            <a:pPr marL="177800" indent="0">
-              <a:spcAft>
-                <a:spcPts val="0"/>
-              </a:spcAft>
-              <a:buSzPct val="100000"/>
-              <a:buNone/>
-            </a:pPr>
-            <a:r>
-              <a:rPr lang="en-US" sz="1200" b="1" dirty="0">
-                <a:solidFill>
-                  <a:srgbClr val="000000"/>
-                </a:solidFill>
-                <a:latin typeface="Calibri" pitchFamily="34" charset="0"/>
-                <a:ea typeface="Calibri" pitchFamily="34" charset="-122"/>
-                <a:cs typeface="Calibri" pitchFamily="34" charset="-120"/>
-              </a:rPr>
-              <a:t xml:space="preserve">8 asserted properties pass · injected shoot-through caught 221×</a:t>
-            </a:r>
-          </a:p>
-        </p:txBody>
-      </p:sp>
-      <p:sp>
-        <p:nvSpPr>
-          <p:cNvPr id="20" name="TextBox 19"/>
-          <p:cNvSpPr txBox="1"/>
-          <p:nvPr/>
-        </p:nvSpPr>
-        <p:spPr>
-          <a:xfrm>
-            <a:off x="640080" y="4251960"/>
-            <a:ext cx="2788920" cy="384048"/>
-          </a:xfrm>
-          <a:prstGeom prst="rect">
-            <a:avLst/>
-          </a:prstGeom>
-          <a:noFill/>
-        </p:spPr>
-        <p:txBody>
-          <a:bodyPr wrap="square" lIns="0" tIns="0" rIns="0" bIns="0">
-            <a:spAutoFit/>
-          </a:bodyPr>
-          <a:lstStyle/>
-          <a:p>
-            <a:pPr marL="177800" indent="0">
-              <a:spcAft>
-                <a:spcPts val="0"/>
-              </a:spcAft>
-              <a:buSzPct val="100000"/>
-              <a:buNone/>
-            </a:pPr>
-            <a:r>
-              <a:rPr lang="en-US" sz="1350" b="1" dirty="0">
-                <a:solidFill>
-                  <a:srgbClr val="000000"/>
-                </a:solidFill>
-                <a:latin typeface="Calibri" pitchFamily="34" charset="0"/>
-                <a:ea typeface="Calibri" pitchFamily="34" charset="-122"/>
-                <a:cs typeface="Calibri" pitchFamily="34" charset="-120"/>
-              </a:rPr>
-              <a:t xml:space="preserve">Xilinx Vivado 2024.1.2</a:t>
-            </a:r>
-          </a:p>
-        </p:txBody>
-      </p:sp>
-      <p:sp>
-        <p:nvSpPr>
-          <p:cNvPr id="21" name="TextBox 20"/>
-          <p:cNvSpPr txBox="1"/>
-          <p:nvPr/>
-        </p:nvSpPr>
-        <p:spPr>
-          <a:xfrm>
-            <a:off x="3520440" y="4251960"/>
-            <a:ext cx="3246120" cy="384048"/>
-          </a:xfrm>
-          <a:prstGeom prst="rect">
-            <a:avLst/>
-          </a:prstGeom>
-          <a:noFill/>
-        </p:spPr>
-        <p:txBody>
-          <a:bodyPr wrap="square" lIns="0" tIns="0" rIns="0" bIns="0">
-            <a:spAutoFit/>
-          </a:bodyPr>
-          <a:lstStyle/>
-          <a:p>
-            <a:pPr marL="177800" indent="0">
-              <a:spcAft>
-                <a:spcPts val="0"/>
-              </a:spcAft>
-              <a:buSzPct val="100000"/>
-              <a:buNone/>
-            </a:pPr>
-            <a:r>
-              <a:rPr lang="en-US" sz="1200" dirty="0">
-                <a:solidFill>
-                  <a:srgbClr val="000000"/>
-                </a:solidFill>
-                <a:latin typeface="Calibri" pitchFamily="34" charset="0"/>
-                <a:ea typeface="Calibri" pitchFamily="34" charset="-122"/>
-                <a:cs typeface="Calibri" pitchFamily="34" charset="-120"/>
-              </a:rPr>
-              <a:t xml:space="preserve">FPGA synthesis and timing on xc7a35t</a:t>
-            </a:r>
-          </a:p>
-        </p:txBody>
-      </p:sp>
-      <p:sp>
-        <p:nvSpPr>
-          <p:cNvPr id="22" name="TextBox 21"/>
-          <p:cNvSpPr txBox="1"/>
-          <p:nvPr/>
-        </p:nvSpPr>
-        <p:spPr>
-          <a:xfrm>
-            <a:off x="6858000" y="4251960"/>
-            <a:ext cx="4754880" cy="384048"/>
-          </a:xfrm>
-          <a:prstGeom prst="rect">
-            <a:avLst/>
-          </a:prstGeom>
-          <a:noFill/>
-        </p:spPr>
-        <p:txBody>
-          <a:bodyPr wrap="square" lIns="0" tIns="0" rIns="0" bIns="0">
-            <a:spAutoFit/>
-          </a:bodyPr>
-          <a:lstStyle/>
-          <a:p>
-            <a:pPr marL="177800" indent="0">
-              <a:spcAft>
-                <a:spcPts val="0"/>
-              </a:spcAft>
-              <a:buSzPct val="100000"/>
-              <a:buNone/>
-            </a:pPr>
-            <a:r>
-              <a:rPr lang="en-US" sz="1200" b="1" dirty="0">
-                <a:solidFill>
-                  <a:srgbClr val="000000"/>
-                </a:solidFill>
-                <a:latin typeface="Calibri" pitchFamily="34" charset="0"/>
-                <a:ea typeface="Calibri" pitchFamily="34" charset="-122"/>
-                <a:cs typeface="Calibri" pitchFamily="34" charset="-120"/>
-              </a:rPr>
-              <a:t xml:space="preserve">20 LUTs, 20 flip-flops · 200 MHz met, 1.996 ns slack</a:t>
-            </a:r>
-          </a:p>
-        </p:txBody>
-      </p:sp>
-      <p:sp>
-        <p:nvSpPr>
-          <p:cNvPr id="23" name="TextBox 22"/>
-          <p:cNvSpPr txBox="1"/>
-          <p:nvPr/>
-        </p:nvSpPr>
-        <p:spPr>
-          <a:xfrm>
-            <a:off x="640080" y="4818888"/>
-            <a:ext cx="2788920" cy="384048"/>
-          </a:xfrm>
-          <a:prstGeom prst="rect">
-            <a:avLst/>
-          </a:prstGeom>
-          <a:noFill/>
-        </p:spPr>
-        <p:txBody>
-          <a:bodyPr wrap="square" lIns="0" tIns="0" rIns="0" bIns="0">
-            <a:spAutoFit/>
-          </a:bodyPr>
-          <a:lstStyle/>
-          <a:p>
-            <a:pPr marL="177800" indent="0">
-              <a:spcAft>
-                <a:spcPts val="0"/>
-              </a:spcAft>
-              <a:buSzPct val="100000"/>
-              <a:buNone/>
-            </a:pPr>
-            <a:r>
-              <a:rPr lang="en-US" sz="1350" b="1" dirty="0">
-                <a:solidFill>
-                  <a:srgbClr val="000000"/>
-                </a:solidFill>
-                <a:latin typeface="Calibri" pitchFamily="34" charset="0"/>
-                <a:ea typeface="Calibri" pitchFamily="34" charset="-122"/>
-                <a:cs typeface="Calibri" pitchFamily="34" charset="-120"/>
-              </a:rPr>
-              <a:t xml:space="preserve">Python · NumPy</a:t>
-            </a:r>
-          </a:p>
-        </p:txBody>
-      </p:sp>
-      <p:sp>
-        <p:nvSpPr>
-          <p:cNvPr id="24" name="TextBox 23"/>
-          <p:cNvSpPr txBox="1"/>
-          <p:nvPr/>
-        </p:nvSpPr>
-        <p:spPr>
-          <a:xfrm>
-            <a:off x="3520440" y="4818888"/>
-            <a:ext cx="3246120" cy="384048"/>
-          </a:xfrm>
-          <a:prstGeom prst="rect">
-            <a:avLst/>
-          </a:prstGeom>
-          <a:noFill/>
-        </p:spPr>
-        <p:txBody>
-          <a:bodyPr wrap="square" lIns="0" tIns="0" rIns="0" bIns="0">
-            <a:spAutoFit/>
-          </a:bodyPr>
-          <a:lstStyle/>
-          <a:p>
-            <a:pPr marL="177800" indent="0">
-              <a:spcAft>
-                <a:spcPts val="0"/>
-              </a:spcAft>
-              <a:buSzPct val="100000"/>
-              <a:buNone/>
-            </a:pPr>
-            <a:r>
-              <a:rPr lang="en-US" sz="1200" dirty="0">
-                <a:solidFill>
-                  <a:srgbClr val="000000"/>
-                </a:solidFill>
-                <a:latin typeface="Calibri" pitchFamily="34" charset="0"/>
-                <a:ea typeface="Calibri" pitchFamily="34" charset="-122"/>
-                <a:cs typeface="Calibri" pitchFamily="34" charset="-120"/>
-              </a:rPr>
-              <a:t xml:space="preserve">sweep orchestration and the decomposition</a:t>
-            </a:r>
-          </a:p>
-        </p:txBody>
-      </p:sp>
-      <p:sp>
-        <p:nvSpPr>
-          <p:cNvPr id="25" name="TextBox 24"/>
-          <p:cNvSpPr txBox="1"/>
-          <p:nvPr/>
-        </p:nvSpPr>
-        <p:spPr>
-          <a:xfrm>
-            <a:off x="6858000" y="4818888"/>
-            <a:ext cx="4754880" cy="384048"/>
-          </a:xfrm>
-          <a:prstGeom prst="rect">
-            <a:avLst/>
-          </a:prstGeom>
-          <a:noFill/>
-        </p:spPr>
-        <p:txBody>
-          <a:bodyPr wrap="square" lIns="0" tIns="0" rIns="0" bIns="0">
-            <a:spAutoFit/>
-          </a:bodyPr>
-          <a:lstStyle/>
-          <a:p>
-            <a:pPr marL="177800" indent="0">
-              <a:spcAft>
-                <a:spcPts val="0"/>
-              </a:spcAft>
-              <a:buSzPct val="100000"/>
-              <a:buNone/>
-            </a:pPr>
-            <a:r>
-              <a:rPr lang="en-US" sz="1200" b="1" dirty="0">
-                <a:solidFill>
-                  <a:srgbClr val="000000"/>
-                </a:solidFill>
-                <a:latin typeface="Calibri" pitchFamily="34" charset="0"/>
-                <a:ea typeface="Calibri" pitchFamily="34" charset="-122"/>
-                <a:cs typeface="Calibri" pitchFamily="34" charset="-120"/>
-              </a:rPr>
-              <a:t xml:space="preserve">720-word search · (A) 25.1 % vs (B) 3.9 %</a:t>
-            </a:r>
-          </a:p>
-        </p:txBody>
-      </p:sp>
-      <p:sp>
-        <p:nvSpPr>
-          <p:cNvPr id="26" name="TextBox 25"/>
-          <p:cNvSpPr txBox="1"/>
-          <p:nvPr/>
-        </p:nvSpPr>
-        <p:spPr>
-          <a:xfrm>
-            <a:off x="640080" y="5550408"/>
-            <a:ext cx="10972800" cy="548640"/>
-          </a:xfrm>
-          <a:prstGeom prst="rect">
-            <a:avLst/>
-          </a:prstGeom>
-          <a:noFill/>
-        </p:spPr>
-        <p:txBody>
-          <a:bodyPr wrap="square" lIns="0" tIns="0" rIns="0" bIns="0">
-            <a:spAutoFit/>
-          </a:bodyPr>
-          <a:lstStyle/>
-          <a:p>
-            <a:pPr marL="177800" indent="0">
-              <a:spcAft>
-                <a:spcPts val="0"/>
-              </a:spcAft>
-              <a:buSzPct val="100000"/>
-              <a:buNone/>
-            </a:pPr>
-            <a:r>
-              <a:rPr lang="en-US" sz="1250" b="1" dirty="0">
-                <a:solidFill>
-                  <a:srgbClr val="000000"/>
-                </a:solidFill>
-                <a:latin typeface="Calibri" pitchFamily="34" charset="0"/>
-                <a:ea typeface="Calibri" pitchFamily="34" charset="-122"/>
-                <a:cs typeface="Calibri" pitchFamily="34" charset="-120"/>
-              </a:rPr>
-              <a:t xml:space="preserve">No number rests on one tool. </a:t>
-            </a:r>
-            <a:r>
-              <a:rPr lang="en-US" sz="1250" dirty="0">
-                <a:solidFill>
-                  <a:srgbClr val="000000"/>
-                </a:solidFill>
-                <a:latin typeface="Calibri" pitchFamily="34" charset="0"/>
-                <a:ea typeface="Calibri" pitchFamily="34" charset="-122"/>
-                <a:cs typeface="Calibri" pitchFamily="34" charset="-120"/>
-              </a:rPr>
-              <a:t xml:space="preserve">Every headline figure was produced in one program and checked in another — SPICE against SPICE, MATLAB against Octave, yosys against Vivado.</a:t>
+              <a:t xml:space="preserve">The one shaded diamond is the entire adaptive machinery.</a:t>
             </a:r>
           </a:p>
         </p:txBody>
@@ -14814,9 +13936,87 @@
         <p:nvPr/>
       </p:nvGrpSpPr>
       <p:grpSpPr/>
+      <p:sp>
+        <p:nvSpPr>
+          <p:cNvPr id="2" name="Text 0"/>
+          <p:cNvSpPr txBox="1"/>
+          <p:nvPr/>
+        </p:nvSpPr>
+        <p:spPr>
+          <a:xfrm>
+            <a:off x="11460175" y="6446520"/>
+            <a:ext cx="457200" cy="274320"/>
+          </a:xfrm>
+          <a:prstGeom prst="rect">
+            <a:avLst/>
+          </a:prstGeom>
+          <a:noFill/>
+          <a:ln/>
+        </p:spPr>
+        <p:txBody>
+          <a:bodyPr wrap="square" lIns="0" tIns="0" rIns="0" bIns="0" rtlCol="0" anchor="ctr"/>
+          <a:lstStyle/>
+          <a:p>
+            <a:pPr marL="0" indent="0" algn="r">
+              <a:buNone/>
+            </a:pPr>
+            <a:r>
+              <a:rPr lang="en-US" sz="1000" dirty="0">
+                <a:solidFill>
+                  <a:srgbClr val="808080"/>
+                </a:solidFill>
+                <a:latin typeface="Calibri" pitchFamily="34" charset="0"/>
+                <a:ea typeface="Calibri" pitchFamily="34" charset="-122"/>
+                <a:cs typeface="Calibri" pitchFamily="34" charset="-120"/>
+              </a:rPr>
+              <a:t>17</a:t>
+            </a:r>
+            <a:endParaRPr lang="en-US" sz="1000" dirty="0"/>
+          </a:p>
+        </p:txBody>
+      </p:sp>
+      <p:sp>
+        <p:nvSpPr>
+          <p:cNvPr id="3" name="Text 1"/>
+          <p:cNvSpPr txBox="1"/>
+          <p:nvPr/>
+        </p:nvSpPr>
+        <p:spPr>
+          <a:xfrm>
+            <a:off x="548640" y="320040"/>
+            <a:ext cx="9601200" cy="685800"/>
+          </a:xfrm>
+          <a:prstGeom prst="rect">
+            <a:avLst/>
+          </a:prstGeom>
+          <a:noFill/>
+          <a:ln/>
+        </p:spPr>
+        <p:txBody>
+          <a:bodyPr wrap="square" lIns="0" tIns="0" rIns="0" bIns="0" rtlCol="0" anchor="ctr"/>
+          <a:lstStyle/>
+          <a:p>
+            <a:pPr marL="0" indent="0">
+              <a:buNone/>
+            </a:pPr>
+            <a:r>
+              <a:rPr lang="en-US" sz="2800" b="1" dirty="0">
+                <a:solidFill>
+                  <a:srgbClr val="1D2F82"/>
+                </a:solidFill>
+                <a:latin typeface="Calibri" pitchFamily="34" charset="0"/>
+                <a:ea typeface="Calibri" pitchFamily="34" charset="-122"/>
+                <a:cs typeface="Calibri" pitchFamily="34" charset="-120"/>
+              </a:rPr>
+              <a:t>Tools — and what each one produced</a:t>
+            </a:r>
+            <a:endParaRPr lang="en-US" sz="2800" dirty="0"/>
+          </a:p>
+        </p:txBody>
+      </p:sp>
       <p:pic>
         <p:nvPicPr>
-          <p:cNvPr id="3" name="Image 0" descr="logo.png"/>
+          <p:cNvPr id="4" name="Image 0" descr="logo.png"/>
           <p:cNvPicPr>
             <a:picLocks noChangeAspect="1"/>
           </p:cNvPicPr>
@@ -14840,14 +14040,14 @@
       </p:pic>
       <p:sp>
         <p:nvSpPr>
-          <p:cNvPr id="4" name="TextBox 3"/>
-          <p:cNvSpPr txBox="1"/>
-          <p:nvPr/>
-        </p:nvSpPr>
-        <p:spPr>
-          <a:xfrm>
-            <a:off x="548640" y="320040"/>
-            <a:ext cx="9601200" cy="685800"/>
+          <p:cNvPr id="5" name="TextBox 4"/>
+          <p:cNvSpPr txBox="1"/>
+          <p:nvPr/>
+        </p:nvSpPr>
+        <p:spPr>
+          <a:xfrm>
+            <a:off x="640080" y="1417320"/>
+            <a:ext cx="2788920" cy="384048"/>
           </a:xfrm>
           <a:prstGeom prst="rect">
             <a:avLst/>
@@ -14868,29 +14068,29 @@
               <a:buNone/>
             </a:pPr>
             <a:r>
-              <a:rPr lang="en-US" sz="2800" b="1" dirty="0">
-                <a:solidFill>
-                  <a:srgbClr val="000000"/>
-                </a:solidFill>
-                <a:latin typeface="Calibri" pitchFamily="34" charset="0"/>
-                <a:ea typeface="Calibri" pitchFamily="34" charset="-122"/>
-                <a:cs typeface="Calibri" pitchFamily="34" charset="-120"/>
-              </a:rPr>
-              <a:t xml:space="preserve">The gap this project fills</a:t>
-            </a:r>
-          </a:p>
-        </p:txBody>
-      </p:sp>
-      <p:sp>
-        <p:nvSpPr>
-          <p:cNvPr id="5" name="TextBox 4"/>
-          <p:cNvSpPr txBox="1"/>
-          <p:nvPr/>
-        </p:nvSpPr>
-        <p:spPr>
-          <a:xfrm>
-            <a:off x="11457432" y="6446520"/>
-            <a:ext cx="457200" cy="274320"/>
+              <a:rPr lang="en-US" sz="1350" b="1" dirty="0">
+                <a:solidFill>
+                  <a:srgbClr val="000000"/>
+                </a:solidFill>
+                <a:latin typeface="Calibri" pitchFamily="34" charset="0"/>
+                <a:ea typeface="Calibri" pitchFamily="34" charset="-122"/>
+                <a:cs typeface="Calibri" pitchFamily="34" charset="-120"/>
+              </a:rPr>
+              <a:t xml:space="preserve">ngspice 42</a:t>
+            </a:r>
+          </a:p>
+        </p:txBody>
+      </p:sp>
+      <p:sp>
+        <p:nvSpPr>
+          <p:cNvPr id="6" name="TextBox 5"/>
+          <p:cNvSpPr txBox="1"/>
+          <p:nvPr/>
+        </p:nvSpPr>
+        <p:spPr>
+          <a:xfrm>
+            <a:off x="3520440" y="1417320"/>
+            <a:ext cx="3246120" cy="384048"/>
           </a:xfrm>
           <a:prstGeom prst="rect">
             <a:avLst/>
@@ -14911,29 +14111,29 @@
               <a:buNone/>
             </a:pPr>
             <a:r>
-              <a:rPr lang="en-US" sz="1100" dirty="0">
-                <a:solidFill>
-                  <a:srgbClr val="000000"/>
-                </a:solidFill>
-                <a:latin typeface="Calibri" pitchFamily="34" charset="0"/>
-                <a:ea typeface="Calibri" pitchFamily="34" charset="-122"/>
-                <a:cs typeface="Calibri" pitchFamily="34" charset="-120"/>
-              </a:rPr>
-              <a:t xml:space="preserve">7</a:t>
-            </a:r>
-          </a:p>
-        </p:txBody>
-      </p:sp>
-      <p:sp>
-        <p:nvSpPr>
-          <p:cNvPr id="6" name="TextBox 5"/>
-          <p:cNvSpPr txBox="1"/>
-          <p:nvPr/>
-        </p:nvSpPr>
-        <p:spPr>
-          <a:xfrm>
-            <a:off x="640080" y="1234440"/>
-            <a:ext cx="11064240" cy="914400"/>
+              <a:rPr lang="en-US" sz="1200" dirty="0">
+                <a:solidFill>
+                  <a:srgbClr val="000000"/>
+                </a:solidFill>
+                <a:latin typeface="Calibri" pitchFamily="34" charset="0"/>
+                <a:ea typeface="Calibri" pitchFamily="34" charset="-122"/>
+                <a:cs typeface="Calibri" pitchFamily="34" charset="-120"/>
+              </a:rPr>
+              <a:t xml:space="preserve">every transient in the study</a:t>
+            </a:r>
+          </a:p>
+        </p:txBody>
+      </p:sp>
+      <p:sp>
+        <p:nvSpPr>
+          <p:cNvPr id="7" name="TextBox 6"/>
+          <p:cNvSpPr txBox="1"/>
+          <p:nvPr/>
+        </p:nvSpPr>
+        <p:spPr>
+          <a:xfrm>
+            <a:off x="6858000" y="1417320"/>
+            <a:ext cx="4754880" cy="384048"/>
           </a:xfrm>
           <a:prstGeom prst="rect">
             <a:avLst/>
@@ -14948,55 +14148,35 @@
           <a:p>
             <a:pPr marL="177800" indent="0">
               <a:spcAft>
-                <a:spcPts val="120"/>
-              </a:spcAft>
-              <a:buSzPct val="100000"/>
-              <a:buNone/>
-            </a:pPr>
-            <a:r>
-              <a:rPr lang="en-US" sz="1500" b="1" dirty="0">
-                <a:solidFill>
-                  <a:srgbClr val="000000"/>
-                </a:solidFill>
-                <a:latin typeface="Calibri" pitchFamily="34" charset="0"/>
-                <a:ea typeface="Calibri" pitchFamily="34" charset="-122"/>
-                <a:cs typeface="Calibri" pitchFamily="34" charset="-120"/>
-              </a:rPr>
-              <a:t xml:space="preserve">Every active-gate-driver paper reports ONE number: the improvement over a conventional driver.</a:t>
-            </a:r>
-          </a:p>
-          <a:p>
-            <a:pPr marL="177800" indent="0">
-              <a:spcAft>
                 <a:spcPts val="0"/>
               </a:spcAft>
               <a:buSzPct val="100000"/>
               <a:buNone/>
             </a:pPr>
             <a:r>
-              <a:rPr lang="en-US" sz="1300" dirty="0">
-                <a:solidFill>
-                  <a:srgbClr val="000000"/>
-                </a:solidFill>
-                <a:latin typeface="Calibri" pitchFamily="34" charset="0"/>
-                <a:ea typeface="Calibri" pitchFamily="34" charset="-122"/>
-                <a:cs typeface="Calibri" pitchFamily="34" charset="-120"/>
-              </a:rPr>
-              <a:t xml:space="preserve">That number bundles two effects that cost completely different hardware.</a:t>
-            </a:r>
-          </a:p>
-        </p:txBody>
-      </p:sp>
-      <p:sp>
-        <p:nvSpPr>
-          <p:cNvPr id="7" name="TextBox 6"/>
-          <p:cNvSpPr txBox="1"/>
-          <p:nvPr/>
-        </p:nvSpPr>
-        <p:spPr>
-          <a:xfrm>
-            <a:off x="640080" y="2377440"/>
-            <a:ext cx="5394960" cy="365760"/>
+              <a:rPr lang="en-US" sz="1200" b="1" dirty="0">
+                <a:solidFill>
+                  <a:srgbClr val="000000"/>
+                </a:solidFill>
+                <a:latin typeface="Calibri" pitchFamily="34" charset="0"/>
+                <a:ea typeface="Calibri" pitchFamily="34" charset="-122"/>
+                <a:cs typeface="Calibri" pitchFamily="34" charset="-120"/>
+              </a:rPr>
+              <a:t xml:space="preserve">34,622 simulations · 1.65 V spurious · 2.58 V margin · 5.2 % ceiling</a:t>
+            </a:r>
+          </a:p>
+        </p:txBody>
+      </p:sp>
+      <p:sp>
+        <p:nvSpPr>
+          <p:cNvPr id="8" name="TextBox 7"/>
+          <p:cNvSpPr txBox="1"/>
+          <p:nvPr/>
+        </p:nvSpPr>
+        <p:spPr>
+          <a:xfrm>
+            <a:off x="640080" y="1984248"/>
+            <a:ext cx="2788920" cy="384048"/>
           </a:xfrm>
           <a:prstGeom prst="rect">
             <a:avLst/>
@@ -15017,29 +14197,29 @@
               <a:buNone/>
             </a:pPr>
             <a:r>
-              <a:rPr lang="en-US" sz="1450" b="1" dirty="0">
-                <a:solidFill>
-                  <a:srgbClr val="000000"/>
-                </a:solidFill>
-                <a:latin typeface="Calibri" pitchFamily="34" charset="0"/>
-                <a:ea typeface="Calibri" pitchFamily="34" charset="-122"/>
-                <a:cs typeface="Calibri" pitchFamily="34" charset="-120"/>
-              </a:rPr>
-              <a:t xml:space="preserve">Effect 1  —  a better FIXED setting</a:t>
-            </a:r>
-          </a:p>
-        </p:txBody>
-      </p:sp>
-      <p:sp>
-        <p:nvSpPr>
-          <p:cNvPr id="8" name="TextBox 7"/>
-          <p:cNvSpPr txBox="1"/>
-          <p:nvPr/>
-        </p:nvSpPr>
-        <p:spPr>
-          <a:xfrm>
-            <a:off x="640080" y="2834640"/>
-            <a:ext cx="3703320" cy="1463040"/>
+              <a:rPr lang="en-US" sz="1350" b="1" dirty="0">
+                <a:solidFill>
+                  <a:srgbClr val="000000"/>
+                </a:solidFill>
+                <a:latin typeface="Calibri" pitchFamily="34" charset="0"/>
+                <a:ea typeface="Calibri" pitchFamily="34" charset="-122"/>
+                <a:cs typeface="Calibri" pitchFamily="34" charset="-120"/>
+              </a:rPr>
+              <a:t xml:space="preserve">LTspice 24</a:t>
+            </a:r>
+          </a:p>
+        </p:txBody>
+      </p:sp>
+      <p:sp>
+        <p:nvSpPr>
+          <p:cNvPr id="9" name="TextBox 8"/>
+          <p:cNvSpPr txBox="1"/>
+          <p:nvPr/>
+        </p:nvSpPr>
+        <p:spPr>
+          <a:xfrm>
+            <a:off x="3520440" y="1984248"/>
+            <a:ext cx="3246120" cy="384048"/>
           </a:xfrm>
           <a:prstGeom prst="rect">
             <a:avLst/>
@@ -15068,21 +14248,21 @@
                 <a:ea typeface="Calibri" pitchFamily="34" charset="-122"/>
                 <a:cs typeface="Calibri" pitchFamily="34" charset="-120"/>
               </a:rPr>
-              <a:t xml:space="preserve">Pick a better control word once, at design time. Costs nothing at run time: no sensor, no ADC, no lookup table, no controller.</a:t>
-            </a:r>
-          </a:p>
-        </p:txBody>
-      </p:sp>
-      <p:sp>
-        <p:nvSpPr>
-          <p:cNvPr id="9" name="TextBox 8"/>
-          <p:cNvSpPr txBox="1"/>
-          <p:nvPr/>
-        </p:nvSpPr>
-        <p:spPr>
-          <a:xfrm>
-            <a:off x="4480560" y="2788920"/>
-            <a:ext cx="1554480" cy="1188720"/>
+              <a:t xml:space="preserve">independent re-run of the shipped netlists</a:t>
+            </a:r>
+          </a:p>
+        </p:txBody>
+      </p:sp>
+      <p:sp>
+        <p:nvSpPr>
+          <p:cNvPr id="10" name="TextBox 9"/>
+          <p:cNvSpPr txBox="1"/>
+          <p:nvPr/>
+        </p:nvSpPr>
+        <p:spPr>
+          <a:xfrm>
+            <a:off x="6858000" y="1984248"/>
+            <a:ext cx="4754880" cy="384048"/>
           </a:xfrm>
           <a:prstGeom prst="rect">
             <a:avLst/>
@@ -15097,75 +14277,35 @@
           <a:p>
             <a:pPr marL="177800" indent="0">
               <a:spcAft>
-                <a:spcPts val="100"/>
-              </a:spcAft>
-              <a:buSzPct val="100000"/>
-              <a:buNone/>
-            </a:pPr>
-            <a:r>
-              <a:rPr lang="en-US" sz="3200" b="1" dirty="0">
-                <a:solidFill>
-                  <a:srgbClr val="000000"/>
-                </a:solidFill>
-                <a:latin typeface="Calibri" pitchFamily="34" charset="0"/>
-                <a:ea typeface="Calibri" pitchFamily="34" charset="-122"/>
-                <a:cs typeface="Calibri" pitchFamily="34" charset="-120"/>
-              </a:rPr>
-              <a:t xml:space="preserve">25.1 %</a:t>
-            </a:r>
-          </a:p>
-          <a:p>
-            <a:pPr marL="177800" indent="0">
-              <a:spcAft>
-                <a:spcPts val="60"/>
-              </a:spcAft>
-              <a:buSzPct val="100000"/>
-              <a:buNone/>
-            </a:pPr>
-            <a:r>
-              <a:rPr lang="en-US" sz="1300" b="1" dirty="0">
-                <a:solidFill>
-                  <a:srgbClr val="000000"/>
-                </a:solidFill>
-                <a:latin typeface="Calibri" pitchFamily="34" charset="0"/>
-                <a:ea typeface="Calibri" pitchFamily="34" charset="-122"/>
-                <a:cs typeface="Calibri" pitchFamily="34" charset="-120"/>
-              </a:rPr>
-              <a:t xml:space="preserve">of baseline</a:t>
-            </a:r>
-          </a:p>
-          <a:p>
-            <a:pPr marL="177800" indent="0">
-              <a:spcAft>
                 <a:spcPts val="0"/>
               </a:spcAft>
               <a:buSzPct val="100000"/>
               <a:buNone/>
             </a:pPr>
             <a:r>
-              <a:rPr lang="en-US" sz="1150" dirty="0">
-                <a:solidFill>
-                  <a:srgbClr val="000000"/>
-                </a:solidFill>
-                <a:latin typeface="Calibri" pitchFamily="34" charset="0"/>
-                <a:ea typeface="Calibri" pitchFamily="34" charset="-122"/>
-                <a:cs typeface="Calibri" pitchFamily="34" charset="-120"/>
-              </a:rPr>
-              <a:t xml:space="preserve"/>
-            </a:r>
-          </a:p>
-        </p:txBody>
-      </p:sp>
-      <p:sp>
-        <p:nvSpPr>
-          <p:cNvPr id="10" name="TextBox 9"/>
-          <p:cNvSpPr txBox="1"/>
-          <p:nvPr/>
-        </p:nvSpPr>
-        <p:spPr>
-          <a:xfrm>
-            <a:off x="6400800" y="2377440"/>
-            <a:ext cx="5394960" cy="365760"/>
+              <a:rPr lang="en-US" sz="1200" b="1" dirty="0">
+                <a:solidFill>
+                  <a:srgbClr val="000000"/>
+                </a:solidFill>
+                <a:latin typeface="Calibri" pitchFamily="34" charset="0"/>
+                <a:ea typeface="Calibri" pitchFamily="34" charset="-122"/>
+                <a:cs typeface="Calibri" pitchFamily="34" charset="-120"/>
+              </a:rPr>
+              <a:t xml:space="preserve">1.6487 / 0.8282 / −1.1768 V — matches ngspice within 2 mV</a:t>
+            </a:r>
+          </a:p>
+        </p:txBody>
+      </p:sp>
+      <p:sp>
+        <p:nvSpPr>
+          <p:cNvPr id="11" name="TextBox 10"/>
+          <p:cNvSpPr txBox="1"/>
+          <p:nvPr/>
+        </p:nvSpPr>
+        <p:spPr>
+          <a:xfrm>
+            <a:off x="640080" y="2551176"/>
+            <a:ext cx="2788920" cy="384048"/>
           </a:xfrm>
           <a:prstGeom prst="rect">
             <a:avLst/>
@@ -15186,29 +14326,29 @@
               <a:buNone/>
             </a:pPr>
             <a:r>
-              <a:rPr lang="en-US" sz="1450" b="1" dirty="0">
-                <a:solidFill>
-                  <a:srgbClr val="000000"/>
-                </a:solidFill>
-                <a:latin typeface="Calibri" pitchFamily="34" charset="0"/>
-                <a:ea typeface="Calibri" pitchFamily="34" charset="-122"/>
-                <a:cs typeface="Calibri" pitchFamily="34" charset="-120"/>
-              </a:rPr>
-              <a:t xml:space="preserve">Effect 2  —  ADAPTING per operating point</a:t>
-            </a:r>
-          </a:p>
-        </p:txBody>
-      </p:sp>
-      <p:sp>
-        <p:nvSpPr>
-          <p:cNvPr id="11" name="TextBox 10"/>
-          <p:cNvSpPr txBox="1"/>
-          <p:nvPr/>
-        </p:nvSpPr>
-        <p:spPr>
-          <a:xfrm>
-            <a:off x="6400800" y="2834640"/>
-            <a:ext cx="3703320" cy="1463040"/>
+              <a:rPr lang="en-US" sz="1350" b="1" dirty="0">
+                <a:solidFill>
+                  <a:srgbClr val="000000"/>
+                </a:solidFill>
+                <a:latin typeface="Calibri" pitchFamily="34" charset="0"/>
+                <a:ea typeface="Calibri" pitchFamily="34" charset="-122"/>
+                <a:cs typeface="Calibri" pitchFamily="34" charset="-120"/>
+              </a:rPr>
+              <a:t xml:space="preserve">MATLAB Online</a:t>
+            </a:r>
+          </a:p>
+        </p:txBody>
+      </p:sp>
+      <p:sp>
+        <p:nvSpPr>
+          <p:cNvPr id="12" name="TextBox 11"/>
+          <p:cNvSpPr txBox="1"/>
+          <p:nvPr/>
+        </p:nvSpPr>
+        <p:spPr>
+          <a:xfrm>
+            <a:off x="3520440" y="2551176"/>
+            <a:ext cx="3246120" cy="384048"/>
           </a:xfrm>
           <a:prstGeom prst="rect">
             <a:avLst/>
@@ -15237,21 +14377,21 @@
                 <a:ea typeface="Calibri" pitchFamily="34" charset="-122"/>
                 <a:cs typeface="Calibri" pitchFamily="34" charset="-120"/>
               </a:rPr>
-              <a:t xml:space="preserve">Change the word as load, bus voltage and temperature move. This is what needs the sensing hardware the architecture is sold on.</a:t>
-            </a:r>
-          </a:p>
-        </p:txBody>
-      </p:sp>
-      <p:sp>
-        <p:nvSpPr>
-          <p:cNvPr id="12" name="TextBox 11"/>
-          <p:cNvSpPr txBox="1"/>
-          <p:nvPr/>
-        </p:nvSpPr>
-        <p:spPr>
-          <a:xfrm>
-            <a:off x="10241280" y="2788920"/>
-            <a:ext cx="1554480" cy="1188720"/>
+              <a:t xml:space="preserve">independent re-analysis of the same CSVs</a:t>
+            </a:r>
+          </a:p>
+        </p:txBody>
+      </p:sp>
+      <p:sp>
+        <p:nvSpPr>
+          <p:cNvPr id="13" name="TextBox 12"/>
+          <p:cNvSpPr txBox="1"/>
+          <p:nvPr/>
+        </p:nvSpPr>
+        <p:spPr>
+          <a:xfrm>
+            <a:off x="6858000" y="2551176"/>
+            <a:ext cx="4754880" cy="384048"/>
           </a:xfrm>
           <a:prstGeom prst="rect">
             <a:avLst/>
@@ -15266,75 +14406,35 @@
           <a:p>
             <a:pPr marL="177800" indent="0">
               <a:spcAft>
-                <a:spcPts val="100"/>
-              </a:spcAft>
-              <a:buSzPct val="100000"/>
-              <a:buNone/>
-            </a:pPr>
-            <a:r>
-              <a:rPr lang="en-US" sz="3200" b="1" dirty="0">
-                <a:solidFill>
-                  <a:srgbClr val="000000"/>
-                </a:solidFill>
-                <a:latin typeface="Calibri" pitchFamily="34" charset="0"/>
-                <a:ea typeface="Calibri" pitchFamily="34" charset="-122"/>
-                <a:cs typeface="Calibri" pitchFamily="34" charset="-120"/>
-              </a:rPr>
-              <a:t xml:space="preserve">3.9 %</a:t>
-            </a:r>
-          </a:p>
-          <a:p>
-            <a:pPr marL="177800" indent="0">
-              <a:spcAft>
-                <a:spcPts val="60"/>
-              </a:spcAft>
-              <a:buSzPct val="100000"/>
-              <a:buNone/>
-            </a:pPr>
-            <a:r>
-              <a:rPr lang="en-US" sz="1300" b="1" dirty="0">
-                <a:solidFill>
-                  <a:srgbClr val="000000"/>
-                </a:solidFill>
-                <a:latin typeface="Calibri" pitchFamily="34" charset="0"/>
-                <a:ea typeface="Calibri" pitchFamily="34" charset="-122"/>
-                <a:cs typeface="Calibri" pitchFamily="34" charset="-120"/>
-              </a:rPr>
-              <a:t xml:space="preserve">of baseline</a:t>
-            </a:r>
-          </a:p>
-          <a:p>
-            <a:pPr marL="177800" indent="0">
-              <a:spcAft>
                 <a:spcPts val="0"/>
               </a:spcAft>
               <a:buSzPct val="100000"/>
               <a:buNone/>
             </a:pPr>
             <a:r>
-              <a:rPr lang="en-US" sz="1150" dirty="0">
-                <a:solidFill>
-                  <a:srgbClr val="000000"/>
-                </a:solidFill>
-                <a:latin typeface="Calibri" pitchFamily="34" charset="0"/>
-                <a:ea typeface="Calibri" pitchFamily="34" charset="-122"/>
-                <a:cs typeface="Calibri" pitchFamily="34" charset="-120"/>
-              </a:rPr>
-              <a:t xml:space="preserve"/>
-            </a:r>
-          </a:p>
-        </p:txBody>
-      </p:sp>
-      <p:sp>
-        <p:nvSpPr>
-          <p:cNvPr id="13" name="TextBox 12"/>
-          <p:cNvSpPr txBox="1"/>
-          <p:nvPr/>
-        </p:nvSpPr>
-        <p:spPr>
-          <a:xfrm>
-            <a:off x="640080" y="4526280"/>
-            <a:ext cx="11064240" cy="1920240"/>
+              <a:rPr lang="en-US" sz="1200" b="1" dirty="0">
+                <a:solidFill>
+                  <a:srgbClr val="000000"/>
+                </a:solidFill>
+                <a:latin typeface="Calibri" pitchFamily="34" charset="0"/>
+                <a:ea typeface="Calibri" pitchFamily="34" charset="-122"/>
+                <a:cs typeface="Calibri" pitchFamily="34" charset="-120"/>
+              </a:rPr>
+              <a:t xml:space="preserve">504 of 720 feasible · 7-word Pareto front · 0.039 µJ per point</a:t>
+            </a:r>
+          </a:p>
+        </p:txBody>
+      </p:sp>
+      <p:sp>
+        <p:nvSpPr>
+          <p:cNvPr id="14" name="TextBox 13"/>
+          <p:cNvSpPr txBox="1"/>
+          <p:nvPr/>
+        </p:nvSpPr>
+        <p:spPr>
+          <a:xfrm>
+            <a:off x="640080" y="3118104"/>
+            <a:ext cx="2788920" cy="384048"/>
           </a:xfrm>
           <a:prstGeom prst="rect">
             <a:avLst/>
@@ -15349,94 +14449,548 @@
           <a:p>
             <a:pPr marL="177800" indent="0">
               <a:spcAft>
-                <a:spcPts val="170"/>
-              </a:spcAft>
-              <a:buSzPct val="100000"/>
-              <a:buNone/>
-            </a:pPr>
-            <a:r>
-              <a:rPr lang="en-US" sz="1400" b="1" dirty="0">
-                <a:solidFill>
-                  <a:srgbClr val="000000"/>
-                </a:solidFill>
-                <a:latin typeface="Calibri" pitchFamily="34" charset="0"/>
-                <a:ea typeface="Calibri" pitchFamily="34" charset="-122"/>
-                <a:cs typeface="Calibri" pitchFamily="34" charset="-120"/>
-              </a:rPr>
-              <a:t xml:space="preserve">THE GAP: </a:t>
-            </a:r>
-            <a:r>
-              <a:rPr lang="en-US" sz="1400" dirty="0">
-                <a:solidFill>
-                  <a:srgbClr val="000000"/>
-                </a:solidFill>
-                <a:latin typeface="Calibri" pitchFamily="34" charset="0"/>
-                <a:ea typeface="Calibri" pitchFamily="34" charset="-122"/>
-                <a:cs typeface="Calibri" pitchFamily="34" charset="-120"/>
-              </a:rPr>
-              <a:t xml:space="preserve">no published work separates them. Nobody reports how much of an active gate driver's benefit actually requires adaptation, because separating the two needs an exhaustive search of the control word at every corner — and nobody has run one.</a:t>
-            </a:r>
-          </a:p>
-          <a:p>
-            <a:pPr marL="177800" indent="0">
-              <a:spcAft>
-                <a:spcPts val="170"/>
-              </a:spcAft>
-              <a:buSzPct val="100000"/>
-              <a:buNone/>
-            </a:pPr>
-            <a:r>
-              <a:rPr lang="en-US" sz="1400" b="1" dirty="0">
-                <a:solidFill>
-                  <a:srgbClr val="000000"/>
-                </a:solidFill>
-                <a:latin typeface="Calibri" pitchFamily="34" charset="0"/>
-                <a:ea typeface="Calibri" pitchFamily="34" charset="-122"/>
-                <a:cs typeface="Calibri" pitchFamily="34" charset="-120"/>
-              </a:rPr>
-              <a:t xml:space="preserve">WHY IT MATTERS: </a:t>
-            </a:r>
-            <a:r>
-              <a:rPr lang="en-US" sz="1400" dirty="0">
-                <a:solidFill>
-                  <a:srgbClr val="000000"/>
-                </a:solidFill>
-                <a:latin typeface="Calibri" pitchFamily="34" charset="0"/>
-                <a:ea typeface="Calibri" pitchFamily="34" charset="-122"/>
-                <a:cs typeface="Calibri" pitchFamily="34" charset="-120"/>
-              </a:rPr>
-              <a:t xml:space="preserve">only Effect 2 justifies the sense + ADC + lookup table. If it is small, that hardware is mostly paying for something a design-time choice already delivers — a buy-or-not decision nobody has costed.</a:t>
-            </a:r>
-          </a:p>
-          <a:p>
-            <a:pPr marL="177800" indent="0">
-              <a:spcAft>
                 <a:spcPts val="0"/>
               </a:spcAft>
               <a:buSzPct val="100000"/>
               <a:buNone/>
             </a:pPr>
             <a:r>
-              <a:rPr lang="en-US" sz="1400" b="1" dirty="0">
-                <a:solidFill>
-                  <a:srgbClr val="000000"/>
-                </a:solidFill>
-                <a:latin typeface="Calibri" pitchFamily="34" charset="0"/>
-                <a:ea typeface="Calibri" pitchFamily="34" charset="-122"/>
-                <a:cs typeface="Calibri" pitchFamily="34" charset="-120"/>
-              </a:rPr>
-              <a:t xml:space="preserve">WHAT WE DO: </a:t>
-            </a:r>
-            <a:r>
-              <a:rPr lang="en-US" sz="1400" dirty="0">
-                <a:solidFill>
-                  <a:srgbClr val="000000"/>
-                </a:solidFill>
-                <a:latin typeface="Calibri" pitchFamily="34" charset="0"/>
-                <a:ea typeface="Calibri" pitchFamily="34" charset="-122"/>
-                <a:cs typeface="Calibri" pitchFamily="34" charset="-120"/>
-              </a:rPr>
-              <a:t xml:space="preserve">720 control words × 4 corners, exhaustively, in ngspice — then report the two numbers separately instead of their sum.</a:t>
+              <a:rPr lang="en-US" sz="1350" b="1" dirty="0">
+                <a:solidFill>
+                  <a:srgbClr val="000000"/>
+                </a:solidFill>
+                <a:latin typeface="Calibri" pitchFamily="34" charset="0"/>
+                <a:ea typeface="Calibri" pitchFamily="34" charset="-122"/>
+                <a:cs typeface="Calibri" pitchFamily="34" charset="-120"/>
+              </a:rPr>
+              <a:t xml:space="preserve">GNU Octave 11.3</a:t>
+            </a:r>
+          </a:p>
+        </p:txBody>
+      </p:sp>
+      <p:sp>
+        <p:nvSpPr>
+          <p:cNvPr id="15" name="TextBox 14"/>
+          <p:cNvSpPr txBox="1"/>
+          <p:nvPr/>
+        </p:nvSpPr>
+        <p:spPr>
+          <a:xfrm>
+            <a:off x="3520440" y="3118104"/>
+            <a:ext cx="3246120" cy="384048"/>
+          </a:xfrm>
+          <a:prstGeom prst="rect">
+            <a:avLst/>
+          </a:prstGeom>
+          <a:noFill/>
+        </p:spPr>
+        <p:txBody>
+          <a:bodyPr wrap="square" lIns="0" tIns="0" rIns="0" bIns="0">
+            <a:spAutoFit/>
+          </a:bodyPr>
+          <a:lstStyle/>
+          <a:p>
+            <a:pPr marL="177800" indent="0">
+              <a:spcAft>
+                <a:spcPts val="0"/>
+              </a:spcAft>
+              <a:buSzPct val="100000"/>
+              <a:buNone/>
+            </a:pPr>
+            <a:r>
+              <a:rPr lang="en-US" sz="1200" dirty="0">
+                <a:solidFill>
+                  <a:srgbClr val="000000"/>
+                </a:solidFill>
+                <a:latin typeface="Calibri" pitchFamily="34" charset="0"/>
+                <a:ea typeface="Calibri" pitchFamily="34" charset="-122"/>
+                <a:cs typeface="Calibri" pitchFamily="34" charset="-120"/>
+              </a:rPr>
+              <a:t xml:space="preserve">second run of the same MATLAB scripts</a:t>
+            </a:r>
+          </a:p>
+        </p:txBody>
+      </p:sp>
+      <p:sp>
+        <p:nvSpPr>
+          <p:cNvPr id="16" name="TextBox 15"/>
+          <p:cNvSpPr txBox="1"/>
+          <p:nvPr/>
+        </p:nvSpPr>
+        <p:spPr>
+          <a:xfrm>
+            <a:off x="6858000" y="3118104"/>
+            <a:ext cx="4754880" cy="384048"/>
+          </a:xfrm>
+          <a:prstGeom prst="rect">
+            <a:avLst/>
+          </a:prstGeom>
+          <a:noFill/>
+        </p:spPr>
+        <p:txBody>
+          <a:bodyPr wrap="square" lIns="0" tIns="0" rIns="0" bIns="0">
+            <a:spAutoFit/>
+          </a:bodyPr>
+          <a:lstStyle/>
+          <a:p>
+            <a:pPr marL="177800" indent="0">
+              <a:spcAft>
+                <a:spcPts val="0"/>
+              </a:spcAft>
+              <a:buSzPct val="100000"/>
+              <a:buNone/>
+            </a:pPr>
+            <a:r>
+              <a:rPr lang="en-US" sz="1200" b="1" dirty="0">
+                <a:solidFill>
+                  <a:srgbClr val="000000"/>
+                </a:solidFill>
+                <a:latin typeface="Calibri" pitchFamily="34" charset="0"/>
+                <a:ea typeface="Calibri" pitchFamily="34" charset="-122"/>
+                <a:cs typeface="Calibri" pitchFamily="34" charset="-120"/>
+              </a:rPr>
+              <a:t xml:space="preserve">agrees with MATLAB to the last printed digit</a:t>
+            </a:r>
+          </a:p>
+        </p:txBody>
+      </p:sp>
+      <p:sp>
+        <p:nvSpPr>
+          <p:cNvPr id="17" name="TextBox 16"/>
+          <p:cNvSpPr txBox="1"/>
+          <p:nvPr/>
+        </p:nvSpPr>
+        <p:spPr>
+          <a:xfrm>
+            <a:off x="640080" y="3685032"/>
+            <a:ext cx="2788920" cy="384048"/>
+          </a:xfrm>
+          <a:prstGeom prst="rect">
+            <a:avLst/>
+          </a:prstGeom>
+          <a:noFill/>
+        </p:spPr>
+        <p:txBody>
+          <a:bodyPr wrap="square" lIns="0" tIns="0" rIns="0" bIns="0">
+            <a:spAutoFit/>
+          </a:bodyPr>
+          <a:lstStyle/>
+          <a:p>
+            <a:pPr marL="177800" indent="0">
+              <a:spcAft>
+                <a:spcPts val="0"/>
+              </a:spcAft>
+              <a:buSzPct val="100000"/>
+              <a:buNone/>
+            </a:pPr>
+            <a:r>
+              <a:rPr lang="en-US" sz="1350" b="1" dirty="0">
+                <a:solidFill>
+                  <a:srgbClr val="000000"/>
+                </a:solidFill>
+                <a:latin typeface="Calibri" pitchFamily="34" charset="0"/>
+                <a:ea typeface="Calibri" pitchFamily="34" charset="-122"/>
+                <a:cs typeface="Calibri" pitchFamily="34" charset="-120"/>
+              </a:rPr>
+              <a:t xml:space="preserve">Icarus Verilog</a:t>
+            </a:r>
+          </a:p>
+        </p:txBody>
+      </p:sp>
+      <p:sp>
+        <p:nvSpPr>
+          <p:cNvPr id="18" name="TextBox 17"/>
+          <p:cNvSpPr txBox="1"/>
+          <p:nvPr/>
+        </p:nvSpPr>
+        <p:spPr>
+          <a:xfrm>
+            <a:off x="3520440" y="3685032"/>
+            <a:ext cx="3246120" cy="384048"/>
+          </a:xfrm>
+          <a:prstGeom prst="rect">
+            <a:avLst/>
+          </a:prstGeom>
+          <a:noFill/>
+        </p:spPr>
+        <p:txBody>
+          <a:bodyPr wrap="square" lIns="0" tIns="0" rIns="0" bIns="0">
+            <a:spAutoFit/>
+          </a:bodyPr>
+          <a:lstStyle/>
+          <a:p>
+            <a:pPr marL="177800" indent="0">
+              <a:spcAft>
+                <a:spcPts val="0"/>
+              </a:spcAft>
+              <a:buSzPct val="100000"/>
+              <a:buNone/>
+            </a:pPr>
+            <a:r>
+              <a:rPr lang="en-US" sz="1200" dirty="0">
+                <a:solidFill>
+                  <a:srgbClr val="000000"/>
+                </a:solidFill>
+                <a:latin typeface="Calibri" pitchFamily="34" charset="0"/>
+                <a:ea typeface="Calibri" pitchFamily="34" charset="-122"/>
+                <a:cs typeface="Calibri" pitchFamily="34" charset="-120"/>
+              </a:rPr>
+              <a:t xml:space="preserve">RTL verification and mutation testing</a:t>
+            </a:r>
+          </a:p>
+        </p:txBody>
+      </p:sp>
+      <p:sp>
+        <p:nvSpPr>
+          <p:cNvPr id="19" name="TextBox 18"/>
+          <p:cNvSpPr txBox="1"/>
+          <p:nvPr/>
+        </p:nvSpPr>
+        <p:spPr>
+          <a:xfrm>
+            <a:off x="6858000" y="3685032"/>
+            <a:ext cx="4754880" cy="384048"/>
+          </a:xfrm>
+          <a:prstGeom prst="rect">
+            <a:avLst/>
+          </a:prstGeom>
+          <a:noFill/>
+        </p:spPr>
+        <p:txBody>
+          <a:bodyPr wrap="square" lIns="0" tIns="0" rIns="0" bIns="0">
+            <a:spAutoFit/>
+          </a:bodyPr>
+          <a:lstStyle/>
+          <a:p>
+            <a:pPr marL="177800" indent="0">
+              <a:spcAft>
+                <a:spcPts val="0"/>
+              </a:spcAft>
+              <a:buSzPct val="100000"/>
+              <a:buNone/>
+            </a:pPr>
+            <a:r>
+              <a:rPr lang="en-US" sz="1200" b="1" dirty="0">
+                <a:solidFill>
+                  <a:srgbClr val="000000"/>
+                </a:solidFill>
+                <a:latin typeface="Calibri" pitchFamily="34" charset="0"/>
+                <a:ea typeface="Calibri" pitchFamily="34" charset="-122"/>
+                <a:cs typeface="Calibri" pitchFamily="34" charset="-120"/>
+              </a:rPr>
+              <a:t xml:space="preserve">8 asserted properties pass · injected shoot-through caught 221×</a:t>
+            </a:r>
+          </a:p>
+        </p:txBody>
+      </p:sp>
+      <p:sp>
+        <p:nvSpPr>
+          <p:cNvPr id="20" name="TextBox 19"/>
+          <p:cNvSpPr txBox="1"/>
+          <p:nvPr/>
+        </p:nvSpPr>
+        <p:spPr>
+          <a:xfrm>
+            <a:off x="640080" y="4251960"/>
+            <a:ext cx="2788920" cy="384048"/>
+          </a:xfrm>
+          <a:prstGeom prst="rect">
+            <a:avLst/>
+          </a:prstGeom>
+          <a:noFill/>
+        </p:spPr>
+        <p:txBody>
+          <a:bodyPr wrap="square" lIns="0" tIns="0" rIns="0" bIns="0">
+            <a:spAutoFit/>
+          </a:bodyPr>
+          <a:lstStyle/>
+          <a:p>
+            <a:pPr marL="177800" indent="0">
+              <a:spcAft>
+                <a:spcPts val="0"/>
+              </a:spcAft>
+              <a:buSzPct val="100000"/>
+              <a:buNone/>
+            </a:pPr>
+            <a:r>
+              <a:rPr lang="en-US" sz="1350" b="1" dirty="0">
+                <a:solidFill>
+                  <a:srgbClr val="000000"/>
+                </a:solidFill>
+                <a:latin typeface="Calibri" pitchFamily="34" charset="0"/>
+                <a:ea typeface="Calibri" pitchFamily="34" charset="-122"/>
+                <a:cs typeface="Calibri" pitchFamily="34" charset="-120"/>
+              </a:rPr>
+              <a:t xml:space="preserve">Xilinx Vivado 2024.1.2</a:t>
+            </a:r>
+          </a:p>
+        </p:txBody>
+      </p:sp>
+      <p:sp>
+        <p:nvSpPr>
+          <p:cNvPr id="21" name="TextBox 20"/>
+          <p:cNvSpPr txBox="1"/>
+          <p:nvPr/>
+        </p:nvSpPr>
+        <p:spPr>
+          <a:xfrm>
+            <a:off x="3520440" y="4251960"/>
+            <a:ext cx="3246120" cy="384048"/>
+          </a:xfrm>
+          <a:prstGeom prst="rect">
+            <a:avLst/>
+          </a:prstGeom>
+          <a:noFill/>
+        </p:spPr>
+        <p:txBody>
+          <a:bodyPr wrap="square" lIns="0" tIns="0" rIns="0" bIns="0">
+            <a:spAutoFit/>
+          </a:bodyPr>
+          <a:lstStyle/>
+          <a:p>
+            <a:pPr marL="177800" indent="0">
+              <a:spcAft>
+                <a:spcPts val="0"/>
+              </a:spcAft>
+              <a:buSzPct val="100000"/>
+              <a:buNone/>
+            </a:pPr>
+            <a:r>
+              <a:rPr lang="en-US" sz="1200" dirty="0">
+                <a:solidFill>
+                  <a:srgbClr val="000000"/>
+                </a:solidFill>
+                <a:latin typeface="Calibri" pitchFamily="34" charset="0"/>
+                <a:ea typeface="Calibri" pitchFamily="34" charset="-122"/>
+                <a:cs typeface="Calibri" pitchFamily="34" charset="-120"/>
+              </a:rPr>
+              <a:t xml:space="preserve">FPGA synthesis and timing on xc7a35t</a:t>
+            </a:r>
+          </a:p>
+        </p:txBody>
+      </p:sp>
+      <p:sp>
+        <p:nvSpPr>
+          <p:cNvPr id="22" name="TextBox 21"/>
+          <p:cNvSpPr txBox="1"/>
+          <p:nvPr/>
+        </p:nvSpPr>
+        <p:spPr>
+          <a:xfrm>
+            <a:off x="6858000" y="4251960"/>
+            <a:ext cx="4754880" cy="384048"/>
+          </a:xfrm>
+          <a:prstGeom prst="rect">
+            <a:avLst/>
+          </a:prstGeom>
+          <a:noFill/>
+        </p:spPr>
+        <p:txBody>
+          <a:bodyPr wrap="square" lIns="0" tIns="0" rIns="0" bIns="0">
+            <a:spAutoFit/>
+          </a:bodyPr>
+          <a:lstStyle/>
+          <a:p>
+            <a:pPr marL="177800" indent="0">
+              <a:spcAft>
+                <a:spcPts val="0"/>
+              </a:spcAft>
+              <a:buSzPct val="100000"/>
+              <a:buNone/>
+            </a:pPr>
+            <a:r>
+              <a:rPr lang="en-US" sz="1200" b="1" dirty="0">
+                <a:solidFill>
+                  <a:srgbClr val="000000"/>
+                </a:solidFill>
+                <a:latin typeface="Calibri" pitchFamily="34" charset="0"/>
+                <a:ea typeface="Calibri" pitchFamily="34" charset="-122"/>
+                <a:cs typeface="Calibri" pitchFamily="34" charset="-120"/>
+              </a:rPr>
+              <a:t xml:space="preserve">20 LUTs, 20 flip-flops · 200 MHz met, 1.996 ns slack</a:t>
+            </a:r>
+          </a:p>
+        </p:txBody>
+      </p:sp>
+      <p:sp>
+        <p:nvSpPr>
+          <p:cNvPr id="23" name="TextBox 22"/>
+          <p:cNvSpPr txBox="1"/>
+          <p:nvPr/>
+        </p:nvSpPr>
+        <p:spPr>
+          <a:xfrm>
+            <a:off x="640080" y="4818888"/>
+            <a:ext cx="2788920" cy="384048"/>
+          </a:xfrm>
+          <a:prstGeom prst="rect">
+            <a:avLst/>
+          </a:prstGeom>
+          <a:noFill/>
+        </p:spPr>
+        <p:txBody>
+          <a:bodyPr wrap="square" lIns="0" tIns="0" rIns="0" bIns="0">
+            <a:spAutoFit/>
+          </a:bodyPr>
+          <a:lstStyle/>
+          <a:p>
+            <a:pPr marL="177800" indent="0">
+              <a:spcAft>
+                <a:spcPts val="0"/>
+              </a:spcAft>
+              <a:buSzPct val="100000"/>
+              <a:buNone/>
+            </a:pPr>
+            <a:r>
+              <a:rPr lang="en-US" sz="1350" b="1" dirty="0">
+                <a:solidFill>
+                  <a:srgbClr val="000000"/>
+                </a:solidFill>
+                <a:latin typeface="Calibri" pitchFamily="34" charset="0"/>
+                <a:ea typeface="Calibri" pitchFamily="34" charset="-122"/>
+                <a:cs typeface="Calibri" pitchFamily="34" charset="-120"/>
+              </a:rPr>
+              <a:t xml:space="preserve">Python · NumPy</a:t>
+            </a:r>
+          </a:p>
+        </p:txBody>
+      </p:sp>
+      <p:sp>
+        <p:nvSpPr>
+          <p:cNvPr id="24" name="TextBox 23"/>
+          <p:cNvSpPr txBox="1"/>
+          <p:nvPr/>
+        </p:nvSpPr>
+        <p:spPr>
+          <a:xfrm>
+            <a:off x="3520440" y="4818888"/>
+            <a:ext cx="3246120" cy="384048"/>
+          </a:xfrm>
+          <a:prstGeom prst="rect">
+            <a:avLst/>
+          </a:prstGeom>
+          <a:noFill/>
+        </p:spPr>
+        <p:txBody>
+          <a:bodyPr wrap="square" lIns="0" tIns="0" rIns="0" bIns="0">
+            <a:spAutoFit/>
+          </a:bodyPr>
+          <a:lstStyle/>
+          <a:p>
+            <a:pPr marL="177800" indent="0">
+              <a:spcAft>
+                <a:spcPts val="0"/>
+              </a:spcAft>
+              <a:buSzPct val="100000"/>
+              <a:buNone/>
+            </a:pPr>
+            <a:r>
+              <a:rPr lang="en-US" sz="1200" dirty="0">
+                <a:solidFill>
+                  <a:srgbClr val="000000"/>
+                </a:solidFill>
+                <a:latin typeface="Calibri" pitchFamily="34" charset="0"/>
+                <a:ea typeface="Calibri" pitchFamily="34" charset="-122"/>
+                <a:cs typeface="Calibri" pitchFamily="34" charset="-120"/>
+              </a:rPr>
+              <a:t xml:space="preserve">sweep orchestration and the decomposition</a:t>
+            </a:r>
+          </a:p>
+        </p:txBody>
+      </p:sp>
+      <p:sp>
+        <p:nvSpPr>
+          <p:cNvPr id="25" name="TextBox 24"/>
+          <p:cNvSpPr txBox="1"/>
+          <p:nvPr/>
+        </p:nvSpPr>
+        <p:spPr>
+          <a:xfrm>
+            <a:off x="6858000" y="4818888"/>
+            <a:ext cx="4754880" cy="384048"/>
+          </a:xfrm>
+          <a:prstGeom prst="rect">
+            <a:avLst/>
+          </a:prstGeom>
+          <a:noFill/>
+        </p:spPr>
+        <p:txBody>
+          <a:bodyPr wrap="square" lIns="0" tIns="0" rIns="0" bIns="0">
+            <a:spAutoFit/>
+          </a:bodyPr>
+          <a:lstStyle/>
+          <a:p>
+            <a:pPr marL="177800" indent="0">
+              <a:spcAft>
+                <a:spcPts val="0"/>
+              </a:spcAft>
+              <a:buSzPct val="100000"/>
+              <a:buNone/>
+            </a:pPr>
+            <a:r>
+              <a:rPr lang="en-US" sz="1200" b="1" dirty="0">
+                <a:solidFill>
+                  <a:srgbClr val="000000"/>
+                </a:solidFill>
+                <a:latin typeface="Calibri" pitchFamily="34" charset="0"/>
+                <a:ea typeface="Calibri" pitchFamily="34" charset="-122"/>
+                <a:cs typeface="Calibri" pitchFamily="34" charset="-120"/>
+              </a:rPr>
+              <a:t xml:space="preserve">720-word search · (A) 25.1 % vs (B) 3.9 %</a:t>
+            </a:r>
+          </a:p>
+        </p:txBody>
+      </p:sp>
+      <p:sp>
+        <p:nvSpPr>
+          <p:cNvPr id="26" name="TextBox 25"/>
+          <p:cNvSpPr txBox="1"/>
+          <p:nvPr/>
+        </p:nvSpPr>
+        <p:spPr>
+          <a:xfrm>
+            <a:off x="640080" y="5550408"/>
+            <a:ext cx="10972800" cy="548640"/>
+          </a:xfrm>
+          <a:prstGeom prst="rect">
+            <a:avLst/>
+          </a:prstGeom>
+          <a:noFill/>
+        </p:spPr>
+        <p:txBody>
+          <a:bodyPr wrap="square" lIns="0" tIns="0" rIns="0" bIns="0">
+            <a:spAutoFit/>
+          </a:bodyPr>
+          <a:lstStyle/>
+          <a:p>
+            <a:pPr marL="177800" indent="0">
+              <a:spcAft>
+                <a:spcPts val="0"/>
+              </a:spcAft>
+              <a:buSzPct val="100000"/>
+              <a:buNone/>
+            </a:pPr>
+            <a:r>
+              <a:rPr lang="en-US" sz="1250" b="1" dirty="0">
+                <a:solidFill>
+                  <a:srgbClr val="000000"/>
+                </a:solidFill>
+                <a:latin typeface="Calibri" pitchFamily="34" charset="0"/>
+                <a:ea typeface="Calibri" pitchFamily="34" charset="-122"/>
+                <a:cs typeface="Calibri" pitchFamily="34" charset="-120"/>
+              </a:rPr>
+              <a:t xml:space="preserve">No number rests on one tool. </a:t>
+            </a:r>
+            <a:r>
+              <a:rPr lang="en-US" sz="1250" dirty="0">
+                <a:solidFill>
+                  <a:srgbClr val="000000"/>
+                </a:solidFill>
+                <a:latin typeface="Calibri" pitchFamily="34" charset="0"/>
+                <a:ea typeface="Calibri" pitchFamily="34" charset="-122"/>
+                <a:cs typeface="Calibri" pitchFamily="34" charset="-120"/>
+              </a:rPr>
+              <a:t xml:space="preserve">Every headline figure was produced in one program and checked in another — SPICE against SPICE, MATLAB against Octave, yosys against Vivado.</a:t>
             </a:r>
           </a:p>
         </p:txBody>
@@ -15521,7 +15075,7 @@
                 <a:ea typeface="Calibri" pitchFamily="34" charset="-122"/>
                 <a:cs typeface="Calibri" pitchFamily="34" charset="-120"/>
               </a:rPr>
-              <a:t xml:space="preserve">We implemented the base paper, then ours</a:t>
+              <a:t xml:space="preserve">The gap this project fills</a:t>
             </a:r>
           </a:p>
         </p:txBody>
@@ -15564,7 +15118,7 @@
                 <a:ea typeface="Calibri" pitchFamily="34" charset="-122"/>
                 <a:cs typeface="Calibri" pitchFamily="34" charset="-120"/>
               </a:rPr>
-              <a:t xml:space="preserve">13</a:t>
+              <a:t xml:space="preserve">7</a:t>
             </a:r>
           </a:p>
         </p:txBody>
@@ -15577,8 +15131,8 @@
         </p:nvSpPr>
         <p:spPr>
           <a:xfrm>
-            <a:off x="640080" y="1207008"/>
-            <a:ext cx="11064240" cy="868680"/>
+            <a:off x="640080" y="1234440"/>
+            <a:ext cx="11064240" cy="914400"/>
           </a:xfrm>
           <a:prstGeom prst="rect">
             <a:avLst/>
@@ -15593,32 +15147,41 @@
           <a:p>
             <a:pPr marL="177800" indent="0">
               <a:spcAft>
+                <a:spcPts val="120"/>
+              </a:spcAft>
+              <a:buSzPct val="100000"/>
+              <a:buNone/>
+            </a:pPr>
+            <a:r>
+              <a:rPr lang="en-US" sz="1500" b="1" dirty="0">
+                <a:solidFill>
+                  <a:srgbClr val="000000"/>
+                </a:solidFill>
+                <a:latin typeface="Calibri" pitchFamily="34" charset="0"/>
+                <a:ea typeface="Calibri" pitchFamily="34" charset="-122"/>
+                <a:cs typeface="Calibri" pitchFamily="34" charset="-120"/>
+              </a:rPr>
+              <a:t xml:space="preserve">Every active-gate-driver paper reports ONE number: the improvement over a conventional driver.</a:t>
+            </a:r>
+          </a:p>
+          <a:p>
+            <a:pPr marL="177800" indent="0">
+              <a:spcAft>
                 <a:spcPts val="0"/>
               </a:spcAft>
               <a:buSzPct val="100000"/>
               <a:buNone/>
             </a:pPr>
             <a:r>
-              <a:rPr lang="en-US" sz="1250" b="1" dirty="0">
-                <a:solidFill>
-                  <a:srgbClr val="000000"/>
-                </a:solidFill>
-                <a:latin typeface="Calibri" pitchFamily="34" charset="0"/>
-                <a:ea typeface="Calibri" pitchFamily="34" charset="-122"/>
-                <a:cs typeface="Calibri" pitchFamily="34" charset="-120"/>
-              </a:rPr>
-              <a:t xml:space="preserve">Citing a base paper is not a comparison. </a:t>
-            </a:r>
-            <a:r>
-              <a:rPr lang="en-US" sz="1250" dirty="0">
-                <a:solidFill>
-                  <a:srgbClr val="000000"/>
-                </a:solidFill>
-                <a:latin typeface="Calibri" pitchFamily="34" charset="0"/>
-                <a:ea typeface="Calibri" pitchFamily="34" charset="-122"/>
-                <a:cs typeface="Calibri" pitchFamily="34" charset="-120"/>
-              </a:rPr>
-              <a:t xml:space="preserve">models/basedrv.lib implements Takayama, Okuda &amp; Hikihara's DAC-architecture driver — a multibit code that changes DURING the switching edge, with no Miller clamp and no negative off-bias rail, because those are ours. It runs inside sim/dpt.cir, byte-identical otherwise, so only the driver differs.</a:t>
+              <a:rPr lang="en-US" sz="1300" dirty="0">
+                <a:solidFill>
+                  <a:srgbClr val="000000"/>
+                </a:solidFill>
+                <a:latin typeface="Calibri" pitchFamily="34" charset="0"/>
+                <a:ea typeface="Calibri" pitchFamily="34" charset="-122"/>
+                <a:cs typeface="Calibri" pitchFamily="34" charset="-120"/>
+              </a:rPr>
+              <a:t xml:space="preserve">That number bundles two effects that cost completely different hardware.</a:t>
             </a:r>
           </a:p>
         </p:txBody>
@@ -15631,8 +15194,8 @@
         </p:nvSpPr>
         <p:spPr>
           <a:xfrm>
-            <a:off x="640080" y="2395728"/>
-            <a:ext cx="3566160" cy="530352"/>
+            <a:off x="640080" y="2377440"/>
+            <a:ext cx="5394960" cy="365760"/>
           </a:xfrm>
           <a:prstGeom prst="rect">
             <a:avLst/>
@@ -15653,15 +15216,15 @@
               <a:buNone/>
             </a:pPr>
             <a:r>
-              <a:rPr lang="en-US" sz="1300" dirty="0">
-                <a:solidFill>
-                  <a:srgbClr val="000000"/>
-                </a:solidFill>
-                <a:latin typeface="Calibri" pitchFamily="34" charset="0"/>
-                <a:ea typeface="Calibri" pitchFamily="34" charset="-122"/>
-                <a:cs typeface="Calibri" pitchFamily="34" charset="-120"/>
-              </a:rPr>
-              <a:t xml:space="preserve">Base paper, as we built it</a:t>
+              <a:rPr lang="en-US" sz="1450" b="1" dirty="0">
+                <a:solidFill>
+                  <a:srgbClr val="000000"/>
+                </a:solidFill>
+                <a:latin typeface="Calibri" pitchFamily="34" charset="0"/>
+                <a:ea typeface="Calibri" pitchFamily="34" charset="-122"/>
+                <a:cs typeface="Calibri" pitchFamily="34" charset="-120"/>
+              </a:rPr>
+              <a:t xml:space="preserve">Effect 1  —  a better FIXED setting</a:t>
             </a:r>
           </a:p>
         </p:txBody>
@@ -15674,8 +15237,8 @@
         </p:nvSpPr>
         <p:spPr>
           <a:xfrm>
-            <a:off x="4343400" y="2340864"/>
-            <a:ext cx="1417320" cy="438912"/>
+            <a:off x="640080" y="2834640"/>
+            <a:ext cx="3703320" cy="1463040"/>
           </a:xfrm>
           <a:prstGeom prst="rect">
             <a:avLst/>
@@ -15696,15 +15259,15 @@
               <a:buNone/>
             </a:pPr>
             <a:r>
-              <a:rPr lang="en-US" sz="1700" b="1" dirty="0">
-                <a:solidFill>
-                  <a:srgbClr val="000000"/>
-                </a:solidFill>
-                <a:latin typeface="Calibri" pitchFamily="34" charset="0"/>
-                <a:ea typeface="Calibri" pitchFamily="34" charset="-122"/>
-                <a:cs typeface="Calibri" pitchFamily="34" charset="-120"/>
-              </a:rPr>
-              <a:t xml:space="preserve">+0.533 V</a:t>
+              <a:rPr lang="en-US" sz="1200" dirty="0">
+                <a:solidFill>
+                  <a:srgbClr val="000000"/>
+                </a:solidFill>
+                <a:latin typeface="Calibri" pitchFamily="34" charset="0"/>
+                <a:ea typeface="Calibri" pitchFamily="34" charset="-122"/>
+                <a:cs typeface="Calibri" pitchFamily="34" charset="-120"/>
+              </a:rPr>
+              <a:t xml:space="preserve">Pick a better control word once, at design time. Costs nothing at run time: no sensor, no ADC, no lookup table, no controller.</a:t>
             </a:r>
           </a:p>
         </p:txBody>
@@ -15717,8 +15280,8 @@
         </p:nvSpPr>
         <p:spPr>
           <a:xfrm>
-            <a:off x="5943600" y="2395728"/>
-            <a:ext cx="5577840" cy="548640"/>
+            <a:off x="4480560" y="2788920"/>
+            <a:ext cx="1554480" cy="1188720"/>
           </a:xfrm>
           <a:prstGeom prst="rect">
             <a:avLst/>
@@ -15733,6 +15296,46 @@
           <a:p>
             <a:pPr marL="177800" indent="0">
               <a:spcAft>
+                <a:spcPts val="100"/>
+              </a:spcAft>
+              <a:buSzPct val="100000"/>
+              <a:buNone/>
+            </a:pPr>
+            <a:r>
+              <a:rPr lang="en-US" sz="3200" b="1" dirty="0">
+                <a:solidFill>
+                  <a:srgbClr val="000000"/>
+                </a:solidFill>
+                <a:latin typeface="Calibri" pitchFamily="34" charset="0"/>
+                <a:ea typeface="Calibri" pitchFamily="34" charset="-122"/>
+                <a:cs typeface="Calibri" pitchFamily="34" charset="-120"/>
+              </a:rPr>
+              <a:t xml:space="preserve">25.1 %</a:t>
+            </a:r>
+          </a:p>
+          <a:p>
+            <a:pPr marL="177800" indent="0">
+              <a:spcAft>
+                <a:spcPts val="60"/>
+              </a:spcAft>
+              <a:buSzPct val="100000"/>
+              <a:buNone/>
+            </a:pPr>
+            <a:r>
+              <a:rPr lang="en-US" sz="1300" b="1" dirty="0">
+                <a:solidFill>
+                  <a:srgbClr val="000000"/>
+                </a:solidFill>
+                <a:latin typeface="Calibri" pitchFamily="34" charset="0"/>
+                <a:ea typeface="Calibri" pitchFamily="34" charset="-122"/>
+                <a:cs typeface="Calibri" pitchFamily="34" charset="-120"/>
+              </a:rPr>
+              <a:t xml:space="preserve">of baseline</a:t>
+            </a:r>
+          </a:p>
+          <a:p>
+            <a:pPr marL="177800" indent="0">
+              <a:spcAft>
                 <a:spcPts val="0"/>
               </a:spcAft>
               <a:buSzPct val="100000"/>
@@ -15747,7 +15350,7 @@
                 <a:ea typeface="Calibri" pitchFamily="34" charset="-122"/>
                 <a:cs typeface="Calibri" pitchFamily="34" charset="-120"/>
               </a:rPr>
-              <a:t xml:space="preserve">Their time-sequenced multibit code alone already clears the 1.4 V threshold.</a:t>
+              <a:t xml:space="preserve"/>
             </a:r>
           </a:p>
         </p:txBody>
@@ -15760,8 +15363,8 @@
         </p:nvSpPr>
         <p:spPr>
           <a:xfrm>
-            <a:off x="640080" y="3035808"/>
-            <a:ext cx="3566160" cy="530352"/>
+            <a:off x="6400800" y="2377440"/>
+            <a:ext cx="5394960" cy="365760"/>
           </a:xfrm>
           <a:prstGeom prst="rect">
             <a:avLst/>
@@ -15782,15 +15385,15 @@
               <a:buNone/>
             </a:pPr>
             <a:r>
-              <a:rPr lang="en-US" sz="1300" dirty="0">
-                <a:solidFill>
-                  <a:srgbClr val="000000"/>
-                </a:solidFill>
-                <a:latin typeface="Calibri" pitchFamily="34" charset="0"/>
-                <a:ea typeface="Calibri" pitchFamily="34" charset="-122"/>
-                <a:cs typeface="Calibri" pitchFamily="34" charset="-120"/>
-              </a:rPr>
-              <a:t xml:space="preserve">Ours, constant code, no clamp</a:t>
+              <a:rPr lang="en-US" sz="1450" b="1" dirty="0">
+                <a:solidFill>
+                  <a:srgbClr val="000000"/>
+                </a:solidFill>
+                <a:latin typeface="Calibri" pitchFamily="34" charset="0"/>
+                <a:ea typeface="Calibri" pitchFamily="34" charset="-122"/>
+                <a:cs typeface="Calibri" pitchFamily="34" charset="-120"/>
+              </a:rPr>
+              <a:t xml:space="preserve">Effect 2  —  ADAPTING per operating point</a:t>
             </a:r>
           </a:p>
         </p:txBody>
@@ -15803,8 +15406,8 @@
         </p:nvSpPr>
         <p:spPr>
           <a:xfrm>
-            <a:off x="4343400" y="2980944"/>
-            <a:ext cx="1417320" cy="438912"/>
+            <a:off x="6400800" y="2834640"/>
+            <a:ext cx="3703320" cy="1463040"/>
           </a:xfrm>
           <a:prstGeom prst="rect">
             <a:avLst/>
@@ -15825,15 +15428,15 @@
               <a:buNone/>
             </a:pPr>
             <a:r>
-              <a:rPr lang="en-US" sz="1700" b="1" dirty="0">
-                <a:solidFill>
-                  <a:srgbClr val="000000"/>
-                </a:solidFill>
-                <a:latin typeface="Calibri" pitchFamily="34" charset="0"/>
-                <a:ea typeface="Calibri" pitchFamily="34" charset="-122"/>
-                <a:cs typeface="Calibri" pitchFamily="34" charset="-120"/>
-              </a:rPr>
-              <a:t xml:space="preserve">−0.249 V</a:t>
+              <a:rPr lang="en-US" sz="1200" dirty="0">
+                <a:solidFill>
+                  <a:srgbClr val="000000"/>
+                </a:solidFill>
+                <a:latin typeface="Calibri" pitchFamily="34" charset="0"/>
+                <a:ea typeface="Calibri" pitchFamily="34" charset="-122"/>
+                <a:cs typeface="Calibri" pitchFamily="34" charset="-120"/>
+              </a:rPr>
+              <a:t xml:space="preserve">Change the word as load, bus voltage and temperature move. This is what needs the sensing hardware the architecture is sold on.</a:t>
             </a:r>
           </a:p>
         </p:txBody>
@@ -15846,8 +15449,8 @@
         </p:nvSpPr>
         <p:spPr>
           <a:xfrm>
-            <a:off x="5943600" y="3035808"/>
-            <a:ext cx="5577840" cy="548640"/>
+            <a:off x="10241280" y="2788920"/>
+            <a:ext cx="1554480" cy="1188720"/>
           </a:xfrm>
           <a:prstGeom prst="rect">
             <a:avLst/>
@@ -15862,6 +15465,46 @@
           <a:p>
             <a:pPr marL="177800" indent="0">
               <a:spcAft>
+                <a:spcPts val="100"/>
+              </a:spcAft>
+              <a:buSzPct val="100000"/>
+              <a:buNone/>
+            </a:pPr>
+            <a:r>
+              <a:rPr lang="en-US" sz="3200" b="1" dirty="0">
+                <a:solidFill>
+                  <a:srgbClr val="000000"/>
+                </a:solidFill>
+                <a:latin typeface="Calibri" pitchFamily="34" charset="0"/>
+                <a:ea typeface="Calibri" pitchFamily="34" charset="-122"/>
+                <a:cs typeface="Calibri" pitchFamily="34" charset="-120"/>
+              </a:rPr>
+              <a:t xml:space="preserve">3.9 %</a:t>
+            </a:r>
+          </a:p>
+          <a:p>
+            <a:pPr marL="177800" indent="0">
+              <a:spcAft>
+                <a:spcPts val="60"/>
+              </a:spcAft>
+              <a:buSzPct val="100000"/>
+              <a:buNone/>
+            </a:pPr>
+            <a:r>
+              <a:rPr lang="en-US" sz="1300" b="1" dirty="0">
+                <a:solidFill>
+                  <a:srgbClr val="000000"/>
+                </a:solidFill>
+                <a:latin typeface="Calibri" pitchFamily="34" charset="0"/>
+                <a:ea typeface="Calibri" pitchFamily="34" charset="-122"/>
+                <a:cs typeface="Calibri" pitchFamily="34" charset="-120"/>
+              </a:rPr>
+              <a:t xml:space="preserve">of baseline</a:t>
+            </a:r>
+          </a:p>
+          <a:p>
+            <a:pPr marL="177800" indent="0">
+              <a:spcAft>
                 <a:spcPts val="0"/>
               </a:spcAft>
               <a:buSzPct val="100000"/>
@@ -15876,7 +15519,7 @@
                 <a:ea typeface="Calibri" pitchFamily="34" charset="-122"/>
                 <a:cs typeface="Calibri" pitchFamily="34" charset="-120"/>
               </a:rPr>
-              <a:t xml:space="preserve">FALSE TURN-ON. A fast FIXED code is worse than their sequenced one — their contribution is real, and we reproduce it.</a:t>
+              <a:t xml:space="preserve"/>
             </a:r>
           </a:p>
         </p:txBody>
@@ -15889,8 +15532,8 @@
         </p:nvSpPr>
         <p:spPr>
           <a:xfrm>
-            <a:off x="640080" y="3675887"/>
-            <a:ext cx="3566160" cy="530352"/>
+            <a:off x="640080" y="4526280"/>
+            <a:ext cx="11064240" cy="1920240"/>
           </a:xfrm>
           <a:prstGeom prst="rect">
             <a:avLst/>
@@ -15905,332 +15548,94 @@
           <a:p>
             <a:pPr marL="177800" indent="0">
               <a:spcAft>
+                <a:spcPts val="170"/>
+              </a:spcAft>
+              <a:buSzPct val="100000"/>
+              <a:buNone/>
+            </a:pPr>
+            <a:r>
+              <a:rPr lang="en-US" sz="1400" b="1" dirty="0">
+                <a:solidFill>
+                  <a:srgbClr val="000000"/>
+                </a:solidFill>
+                <a:latin typeface="Calibri" pitchFamily="34" charset="0"/>
+                <a:ea typeface="Calibri" pitchFamily="34" charset="-122"/>
+                <a:cs typeface="Calibri" pitchFamily="34" charset="-120"/>
+              </a:rPr>
+              <a:t xml:space="preserve">THE GAP: </a:t>
+            </a:r>
+            <a:r>
+              <a:rPr lang="en-US" sz="1400" dirty="0">
+                <a:solidFill>
+                  <a:srgbClr val="000000"/>
+                </a:solidFill>
+                <a:latin typeface="Calibri" pitchFamily="34" charset="0"/>
+                <a:ea typeface="Calibri" pitchFamily="34" charset="-122"/>
+                <a:cs typeface="Calibri" pitchFamily="34" charset="-120"/>
+              </a:rPr>
+              <a:t xml:space="preserve">no published work separates them. Nobody reports how much of an active gate driver's benefit actually requires adaptation, because separating the two needs an exhaustive search of the control word at every corner — and nobody has run one.</a:t>
+            </a:r>
+          </a:p>
+          <a:p>
+            <a:pPr marL="177800" indent="0">
+              <a:spcAft>
+                <a:spcPts val="170"/>
+              </a:spcAft>
+              <a:buSzPct val="100000"/>
+              <a:buNone/>
+            </a:pPr>
+            <a:r>
+              <a:rPr lang="en-US" sz="1400" b="1" dirty="0">
+                <a:solidFill>
+                  <a:srgbClr val="000000"/>
+                </a:solidFill>
+                <a:latin typeface="Calibri" pitchFamily="34" charset="0"/>
+                <a:ea typeface="Calibri" pitchFamily="34" charset="-122"/>
+                <a:cs typeface="Calibri" pitchFamily="34" charset="-120"/>
+              </a:rPr>
+              <a:t xml:space="preserve">WHY IT MATTERS: </a:t>
+            </a:r>
+            <a:r>
+              <a:rPr lang="en-US" sz="1400" dirty="0">
+                <a:solidFill>
+                  <a:srgbClr val="000000"/>
+                </a:solidFill>
+                <a:latin typeface="Calibri" pitchFamily="34" charset="0"/>
+                <a:ea typeface="Calibri" pitchFamily="34" charset="-122"/>
+                <a:cs typeface="Calibri" pitchFamily="34" charset="-120"/>
+              </a:rPr>
+              <a:t xml:space="preserve">only Effect 2 justifies the sense + ADC + lookup table. If it is small, that hardware is mostly paying for something a design-time choice already delivers — a buy-or-not decision nobody has costed.</a:t>
+            </a:r>
+          </a:p>
+          <a:p>
+            <a:pPr marL="177800" indent="0">
+              <a:spcAft>
                 <a:spcPts val="0"/>
               </a:spcAft>
               <a:buSzPct val="100000"/>
               <a:buNone/>
             </a:pPr>
             <a:r>
-              <a:rPr lang="en-US" sz="1300" dirty="0">
-                <a:solidFill>
-                  <a:srgbClr val="000000"/>
-                </a:solidFill>
-                <a:latin typeface="Calibri" pitchFamily="34" charset="0"/>
-                <a:ea typeface="Calibri" pitchFamily="34" charset="-122"/>
-                <a:cs typeface="Calibri" pitchFamily="34" charset="-120"/>
-              </a:rPr>
-              <a:t xml:space="preserve">Ours, active Miller clamp on</a:t>
-            </a:r>
-          </a:p>
-        </p:txBody>
-      </p:sp>
-      <p:sp>
-        <p:nvSpPr>
-          <p:cNvPr id="14" name="TextBox 13"/>
-          <p:cNvSpPr txBox="1"/>
-          <p:nvPr/>
-        </p:nvSpPr>
-        <p:spPr>
-          <a:xfrm>
-            <a:off x="4343400" y="3621023"/>
-            <a:ext cx="1417320" cy="438912"/>
-          </a:xfrm>
-          <a:prstGeom prst="rect">
-            <a:avLst/>
-          </a:prstGeom>
-          <a:noFill/>
-        </p:spPr>
-        <p:txBody>
-          <a:bodyPr wrap="square" lIns="0" tIns="0" rIns="0" bIns="0">
-            <a:spAutoFit/>
-          </a:bodyPr>
-          <a:lstStyle/>
-          <a:p>
-            <a:pPr marL="177800" indent="0">
-              <a:spcAft>
-                <a:spcPts val="0"/>
-              </a:spcAft>
-              <a:buSzPct val="100000"/>
-              <a:buNone/>
-            </a:pPr>
-            <a:r>
-              <a:rPr lang="en-US" sz="1700" b="1" dirty="0">
-                <a:solidFill>
-                  <a:srgbClr val="000000"/>
-                </a:solidFill>
-                <a:latin typeface="Calibri" pitchFamily="34" charset="0"/>
-                <a:ea typeface="Calibri" pitchFamily="34" charset="-122"/>
-                <a:cs typeface="Calibri" pitchFamily="34" charset="-120"/>
-              </a:rPr>
-              <a:t xml:space="preserve">+0.570 V</a:t>
-            </a:r>
-          </a:p>
-        </p:txBody>
-      </p:sp>
-      <p:sp>
-        <p:nvSpPr>
-          <p:cNvPr id="15" name="TextBox 14"/>
-          <p:cNvSpPr txBox="1"/>
-          <p:nvPr/>
-        </p:nvSpPr>
-        <p:spPr>
-          <a:xfrm>
-            <a:off x="5943600" y="3675887"/>
-            <a:ext cx="5577840" cy="548640"/>
-          </a:xfrm>
-          <a:prstGeom prst="rect">
-            <a:avLst/>
-          </a:prstGeom>
-          <a:noFill/>
-        </p:spPr>
-        <p:txBody>
-          <a:bodyPr wrap="square" lIns="0" tIns="0" rIns="0" bIns="0">
-            <a:spAutoFit/>
-          </a:bodyPr>
-          <a:lstStyle/>
-          <a:p>
-            <a:pPr marL="177800" indent="0">
-              <a:spcAft>
-                <a:spcPts val="0"/>
-              </a:spcAft>
-              <a:buSzPct val="100000"/>
-              <a:buNone/>
-            </a:pPr>
-            <a:r>
-              <a:rPr lang="en-US" sz="1150" dirty="0">
-                <a:solidFill>
-                  <a:srgbClr val="000000"/>
-                </a:solidFill>
-                <a:latin typeface="Calibri" pitchFamily="34" charset="0"/>
-                <a:ea typeface="Calibri" pitchFamily="34" charset="-122"/>
-                <a:cs typeface="Calibri" pitchFamily="34" charset="-120"/>
-              </a:rPr>
-              <a:t xml:space="preserve">Only marginally past the base paper. The clamp alone is not the story.</a:t>
-            </a:r>
-          </a:p>
-        </p:txBody>
-      </p:sp>
-      <p:sp>
-        <p:nvSpPr>
-          <p:cNvPr id="16" name="TextBox 15"/>
-          <p:cNvSpPr txBox="1"/>
-          <p:nvPr/>
-        </p:nvSpPr>
-        <p:spPr>
-          <a:xfrm>
-            <a:off x="640080" y="4315968"/>
-            <a:ext cx="3566160" cy="530352"/>
-          </a:xfrm>
-          <a:prstGeom prst="rect">
-            <a:avLst/>
-          </a:prstGeom>
-          <a:noFill/>
-        </p:spPr>
-        <p:txBody>
-          <a:bodyPr wrap="square" lIns="0" tIns="0" rIns="0" bIns="0">
-            <a:spAutoFit/>
-          </a:bodyPr>
-          <a:lstStyle/>
-          <a:p>
-            <a:pPr marL="177800" indent="0">
-              <a:spcAft>
-                <a:spcPts val="0"/>
-              </a:spcAft>
-              <a:buSzPct val="100000"/>
-              <a:buNone/>
-            </a:pPr>
-            <a:r>
-              <a:rPr lang="en-US" sz="1300" b="1" dirty="0">
-                <a:solidFill>
-                  <a:srgbClr val="000000"/>
-                </a:solidFill>
-                <a:latin typeface="Calibri" pitchFamily="34" charset="0"/>
-                <a:ea typeface="Calibri" pitchFamily="34" charset="-122"/>
-                <a:cs typeface="Calibri" pitchFamily="34" charset="-120"/>
-              </a:rPr>
-              <a:t xml:space="preserve">Ours, clamp + −2 V off-bias</a:t>
-            </a:r>
-          </a:p>
-        </p:txBody>
-      </p:sp>
-      <p:sp>
-        <p:nvSpPr>
-          <p:cNvPr id="17" name="TextBox 16"/>
-          <p:cNvSpPr txBox="1"/>
-          <p:nvPr/>
-        </p:nvSpPr>
-        <p:spPr>
-          <a:xfrm>
-            <a:off x="4343400" y="4261104"/>
-            <a:ext cx="1417320" cy="438912"/>
-          </a:xfrm>
-          <a:prstGeom prst="rect">
-            <a:avLst/>
-          </a:prstGeom>
-          <a:noFill/>
-        </p:spPr>
-        <p:txBody>
-          <a:bodyPr wrap="square" lIns="0" tIns="0" rIns="0" bIns="0">
-            <a:spAutoFit/>
-          </a:bodyPr>
-          <a:lstStyle/>
-          <a:p>
-            <a:pPr marL="177800" indent="0">
-              <a:spcAft>
-                <a:spcPts val="0"/>
-              </a:spcAft>
-              <a:buSzPct val="100000"/>
-              <a:buNone/>
-            </a:pPr>
-            <a:r>
-              <a:rPr lang="en-US" sz="1700" b="1" dirty="0">
-                <a:solidFill>
-                  <a:srgbClr val="000000"/>
-                </a:solidFill>
-                <a:latin typeface="Calibri" pitchFamily="34" charset="0"/>
-                <a:ea typeface="Calibri" pitchFamily="34" charset="-122"/>
-                <a:cs typeface="Calibri" pitchFamily="34" charset="-120"/>
-              </a:rPr>
-              <a:t xml:space="preserve">+2.576 V</a:t>
-            </a:r>
-          </a:p>
-        </p:txBody>
-      </p:sp>
-      <p:sp>
-        <p:nvSpPr>
-          <p:cNvPr id="18" name="TextBox 17"/>
-          <p:cNvSpPr txBox="1"/>
-          <p:nvPr/>
-        </p:nvSpPr>
-        <p:spPr>
-          <a:xfrm>
-            <a:off x="5943600" y="4315968"/>
-            <a:ext cx="5577840" cy="548640"/>
-          </a:xfrm>
-          <a:prstGeom prst="rect">
-            <a:avLst/>
-          </a:prstGeom>
-          <a:noFill/>
-        </p:spPr>
-        <p:txBody>
-          <a:bodyPr wrap="square" lIns="0" tIns="0" rIns="0" bIns="0">
-            <a:spAutoFit/>
-          </a:bodyPr>
-          <a:lstStyle/>
-          <a:p>
-            <a:pPr marL="177800" indent="0">
-              <a:spcAft>
-                <a:spcPts val="0"/>
-              </a:spcAft>
-              <a:buSzPct val="100000"/>
-              <a:buNone/>
-            </a:pPr>
-            <a:r>
-              <a:rPr lang="en-US" sz="1150" dirty="0">
-                <a:solidFill>
-                  <a:srgbClr val="000000"/>
-                </a:solidFill>
-                <a:latin typeface="Calibri" pitchFamily="34" charset="0"/>
-                <a:ea typeface="Calibri" pitchFamily="34" charset="-122"/>
-                <a:cs typeface="Calibri" pitchFamily="34" charset="-120"/>
-              </a:rPr>
-              <a:t xml:space="preserve">4.8× the base paper's margin. This is the shipped configuration.</a:t>
-            </a:r>
-          </a:p>
-        </p:txBody>
-      </p:sp>
-      <p:sp>
-        <p:nvSpPr>
-          <p:cNvPr id="19" name="TextBox 18"/>
-          <p:cNvSpPr txBox="1"/>
-          <p:nvPr/>
-        </p:nvSpPr>
-        <p:spPr>
-          <a:xfrm>
-            <a:off x="640080" y="5138928"/>
-            <a:ext cx="11064240" cy="1234440"/>
-          </a:xfrm>
-          <a:prstGeom prst="rect">
-            <a:avLst/>
-          </a:prstGeom>
-          <a:noFill/>
-        </p:spPr>
-        <p:txBody>
-          <a:bodyPr wrap="square" lIns="0" tIns="0" rIns="0" bIns="0">
-            <a:spAutoFit/>
-          </a:bodyPr>
-          <a:lstStyle/>
-          <a:p>
-            <a:pPr marL="177800" indent="0">
-              <a:spcAft>
-                <a:spcPts val="150"/>
-              </a:spcAft>
-              <a:buSzPct val="100000"/>
-              <a:buNone/>
-            </a:pPr>
-            <a:r>
-              <a:rPr lang="en-US" sz="1250" b="1" dirty="0">
-                <a:solidFill>
-                  <a:srgbClr val="000000"/>
-                </a:solidFill>
-                <a:latin typeface="Calibri" pitchFamily="34" charset="0"/>
-                <a:ea typeface="Calibri" pitchFamily="34" charset="-122"/>
-                <a:cs typeface="Calibri" pitchFamily="34" charset="-120"/>
-              </a:rPr>
-              <a:t xml:space="preserve">What the comparison shows. </a:t>
-            </a:r>
-            <a:r>
-              <a:rPr lang="en-US" sz="1250" dirty="0">
-                <a:solidFill>
-                  <a:srgbClr val="000000"/>
-                </a:solidFill>
-                <a:latin typeface="Calibri" pitchFamily="34" charset="0"/>
-                <a:ea typeface="Calibri" pitchFamily="34" charset="-122"/>
-                <a:cs typeface="Calibri" pitchFamily="34" charset="-120"/>
-              </a:rPr>
-              <a:t xml:space="preserve">The base paper shapes the gate waveform in TIME; we hold the code constant and add two actuators it does not have. Both clear the threshold — theirs works — but ours clears it by 4.8× more, and ours is the one whose settings can then be searched exhaustively to ask what adaptation is actually worth.</a:t>
-            </a:r>
-          </a:p>
-          <a:p>
-            <a:pPr marL="177800" indent="0">
-              <a:spcAft>
-                <a:spcPts val="0"/>
-              </a:spcAft>
-              <a:buSzPct val="100000"/>
-              <a:buNone/>
-            </a:pPr>
-            <a:r>
-              <a:rPr lang="en-US" sz="1150" b="1" dirty="0">
-                <a:solidFill>
-                  <a:srgbClr val="000000"/>
-                </a:solidFill>
-                <a:latin typeface="Calibri" pitchFamily="34" charset="0"/>
-                <a:ea typeface="Calibri" pitchFamily="34" charset="-122"/>
-                <a:cs typeface="Calibri" pitchFamily="34" charset="-120"/>
-              </a:rPr>
-              <a:t xml:space="preserve">Reproduce: </a:t>
-            </a:r>
-            <a:r>
-              <a:rPr lang="en-US" sz="1150" b="1" dirty="0">
-                <a:solidFill>
-                  <a:srgbClr val="000000"/>
-                </a:solidFill>
-                <a:latin typeface="Calibri" pitchFamily="34" charset="0"/>
-                <a:ea typeface="Calibri" pitchFamily="34" charset="-122"/>
-                <a:cs typeface="Calibri" pitchFamily="34" charset="-120"/>
-              </a:rPr>
-              <a:t xml:space="preserve">python3 scripts/basepaper_compare.py</a:t>
-            </a:r>
-            <a:r>
-              <a:rPr lang="en-US" sz="1150" dirty="0">
-                <a:solidFill>
-                  <a:srgbClr val="000000"/>
-                </a:solidFill>
-                <a:latin typeface="Calibri" pitchFamily="34" charset="0"/>
-                <a:ea typeface="Calibri" pitchFamily="34" charset="-122"/>
-                <a:cs typeface="Calibri" pitchFamily="34" charset="-120"/>
-              </a:rPr>
-              <a:t xml:space="preserve">  — four ngspice runs, prints this table.</a:t>
+              <a:rPr lang="en-US" sz="1400" b="1" dirty="0">
+                <a:solidFill>
+                  <a:srgbClr val="000000"/>
+                </a:solidFill>
+                <a:latin typeface="Calibri" pitchFamily="34" charset="0"/>
+                <a:ea typeface="Calibri" pitchFamily="34" charset="-122"/>
+                <a:cs typeface="Calibri" pitchFamily="34" charset="-120"/>
+              </a:rPr>
+              <a:t xml:space="preserve">WHAT WE DO: </a:t>
+            </a:r>
+            <a:r>
+              <a:rPr lang="en-US" sz="1400" dirty="0">
+                <a:solidFill>
+                  <a:srgbClr val="000000"/>
+                </a:solidFill>
+                <a:latin typeface="Calibri" pitchFamily="34" charset="0"/>
+                <a:ea typeface="Calibri" pitchFamily="34" charset="-122"/>
+                <a:cs typeface="Calibri" pitchFamily="34" charset="-120"/>
+              </a:rPr>
+              <a:t xml:space="preserve">720 control words × 4 corners, exhaustively, in ngspice — then report the two numbers separately instead of their sum.</a:t>
             </a:r>
           </a:p>
         </p:txBody>
@@ -16253,87 +15658,9 @@
         <p:nvPr/>
       </p:nvGrpSpPr>
       <p:grpSpPr/>
-      <p:sp>
-        <p:nvSpPr>
-          <p:cNvPr id="2" name="Text 0"/>
-          <p:cNvSpPr txBox="1"/>
-          <p:nvPr/>
-        </p:nvSpPr>
-        <p:spPr>
-          <a:xfrm>
-            <a:off x="11460175" y="6446520"/>
-            <a:ext cx="457200" cy="274320"/>
-          </a:xfrm>
-          <a:prstGeom prst="rect">
-            <a:avLst/>
-          </a:prstGeom>
-          <a:noFill/>
-          <a:ln/>
-        </p:spPr>
-        <p:txBody>
-          <a:bodyPr wrap="square" lIns="0" tIns="0" rIns="0" bIns="0" rtlCol="0" anchor="ctr"/>
-          <a:lstStyle/>
-          <a:p>
-            <a:pPr marL="0" indent="0" algn="r">
-              <a:buNone/>
-            </a:pPr>
-            <a:r>
-              <a:rPr lang="en-US" sz="1000" dirty="0">
-                <a:solidFill>
-                  <a:srgbClr val="808080"/>
-                </a:solidFill>
-                <a:latin typeface="Calibri" pitchFamily="34" charset="0"/>
-                <a:ea typeface="Calibri" pitchFamily="34" charset="-122"/>
-                <a:cs typeface="Calibri" pitchFamily="34" charset="-120"/>
-              </a:rPr>
-              <a:t>28</a:t>
-            </a:r>
-            <a:endParaRPr lang="en-US" sz="1000" dirty="0"/>
-          </a:p>
-        </p:txBody>
-      </p:sp>
-      <p:sp>
-        <p:nvSpPr>
-          <p:cNvPr id="3" name="Text 1"/>
-          <p:cNvSpPr txBox="1"/>
-          <p:nvPr/>
-        </p:nvSpPr>
-        <p:spPr>
-          <a:xfrm>
-            <a:off x="548640" y="320040"/>
-            <a:ext cx="9601200" cy="685800"/>
-          </a:xfrm>
-          <a:prstGeom prst="rect">
-            <a:avLst/>
-          </a:prstGeom>
-          <a:noFill/>
-          <a:ln/>
-        </p:spPr>
-        <p:txBody>
-          <a:bodyPr wrap="square" lIns="0" tIns="0" rIns="0" bIns="0" rtlCol="0" anchor="ctr"/>
-          <a:lstStyle/>
-          <a:p>
-            <a:pPr marL="0" indent="0">
-              <a:buNone/>
-            </a:pPr>
-            <a:r>
-              <a:rPr lang="en-US" sz="2800" b="1" dirty="0">
-                <a:solidFill>
-                  <a:srgbClr val="1D2F82"/>
-                </a:solidFill>
-                <a:latin typeface="Calibri" pitchFamily="34" charset="0"/>
-                <a:ea typeface="Calibri" pitchFamily="34" charset="-122"/>
-                <a:cs typeface="Calibri" pitchFamily="34" charset="-120"/>
-              </a:rPr>
-              <a:t>References  (16–30)</a:t>
-            </a:r>
-            <a:endParaRPr lang="en-US" sz="2800" dirty="0"/>
-          </a:p>
-        </p:txBody>
-      </p:sp>
       <p:pic>
         <p:nvPicPr>
-          <p:cNvPr id="4" name="Image 0" descr="logo.png"/>
+          <p:cNvPr id="3" name="Image 0" descr="logo.png"/>
           <p:cNvPicPr>
             <a:picLocks noChangeAspect="1"/>
           </p:cNvPicPr>
@@ -16357,530 +15684,24 @@
       </p:pic>
       <p:sp>
         <p:nvSpPr>
-          <p:cNvPr id="5" name="Text 2"/>
-          <p:cNvSpPr txBox="1"/>
-          <p:nvPr/>
-        </p:nvSpPr>
-        <p:spPr>
-          <a:xfrm>
-            <a:off x="640080" y="1325880"/>
-            <a:ext cx="10881360" cy="4343400"/>
-          </a:xfrm>
-          <a:prstGeom prst="rect">
-            <a:avLst/>
-          </a:prstGeom>
-          <a:noFill/>
-          <a:ln/>
-        </p:spPr>
-        <p:txBody>
-          <a:bodyPr wrap="square" lIns="0" tIns="0" rIns="0" bIns="0" rtlCol="0" anchor="t"/>
-          <a:lstStyle/>
-          <a:p>
-            <a:pPr marL="177800" indent="0">
-              <a:spcAft>
-                <a:spcPts val="60"/>
-              </a:spcAft>
-              <a:buSzPct val="100000"/>
-              <a:buNone/>
-            </a:pPr>
-            <a:r>
-              <a:rPr lang="en-US" sz="900" b="1" dirty="0">
-                <a:solidFill>
-                  <a:srgbClr val="000000"/>
-                </a:solidFill>
-                <a:latin typeface="Calibri" pitchFamily="34" charset="0"/>
-                <a:ea typeface="Calibri" pitchFamily="34" charset="-122"/>
-                <a:cs typeface="Calibri" pitchFamily="34" charset="-120"/>
-              </a:rPr>
-              <a:t xml:space="preserve">[16]  </a:t>
-            </a:r>
-            <a:r>
-              <a:rPr lang="en-US" sz="900" dirty="0">
-                <a:solidFill>
-                  <a:srgbClr val="000000"/>
-                </a:solidFill>
-                <a:latin typeface="Calibri" pitchFamily="34" charset="0"/>
-                <a:ea typeface="Calibri" pitchFamily="34" charset="-122"/>
-                <a:cs typeface="Calibri" pitchFamily="34" charset="-120"/>
-              </a:rPr>
-              <a:t xml:space="preserve">Z. Yuan, H. Li, M. Zhang, Z. Yang, S. Zhao, H. Wang, X. Wang and L. Ding, “Influence of Negative Gate Bias on Crosstalk Spike in SiC MOSFETs Half-Bridge Circuit,” IEEE J. Emerg. Sel. Topics Power Electron., vol. 14, no. 3, pp. 3217–3229, 2026.</a:t>
-            </a:r>
-          </a:p>
-          <a:p>
-            <a:pPr marL="177800" indent="0">
-              <a:spcAft>
-                <a:spcPts val="60"/>
-              </a:spcAft>
-              <a:buSzPct val="100000"/>
-              <a:buNone/>
-            </a:pPr>
-            <a:r>
-              <a:rPr lang="en-US" sz="900" b="1" dirty="0">
-                <a:solidFill>
-                  <a:srgbClr val="000000"/>
-                </a:solidFill>
-                <a:latin typeface="Calibri" pitchFamily="34" charset="0"/>
-                <a:ea typeface="Calibri" pitchFamily="34" charset="-122"/>
-                <a:cs typeface="Calibri" pitchFamily="34" charset="-120"/>
-              </a:rPr>
-              <a:t xml:space="preserve">[17]  </a:t>
-            </a:r>
-            <a:r>
-              <a:rPr lang="en-US" sz="900" dirty="0">
-                <a:solidFill>
-                  <a:srgbClr val="000000"/>
-                </a:solidFill>
-                <a:latin typeface="Calibri" pitchFamily="34" charset="0"/>
-                <a:ea typeface="Calibri" pitchFamily="34" charset="-122"/>
-                <a:cs typeface="Calibri" pitchFamily="34" charset="-120"/>
-              </a:rPr>
-              <a:t xml:space="preserve">L. Zhang, K. Wang, S. Guo and B. Zhu, “A Gate Driver for Crosstalk Suppression of eGaN HEMT Power Devices,” J. Low Power Electron. Appl., vol. 15, no. 3, pp. 38, 2025.</a:t>
-            </a:r>
-          </a:p>
-          <a:p>
-            <a:pPr marL="177800" indent="0">
-              <a:spcAft>
-                <a:spcPts val="60"/>
-              </a:spcAft>
-              <a:buSzPct val="100000"/>
-              <a:buNone/>
-            </a:pPr>
-            <a:r>
-              <a:rPr lang="en-US" sz="900" b="1" dirty="0">
-                <a:solidFill>
-                  <a:srgbClr val="000000"/>
-                </a:solidFill>
-                <a:latin typeface="Calibri" pitchFamily="34" charset="0"/>
-                <a:ea typeface="Calibri" pitchFamily="34" charset="-122"/>
-                <a:cs typeface="Calibri" pitchFamily="34" charset="-120"/>
-              </a:rPr>
-              <a:t xml:space="preserve">[18]  </a:t>
-            </a:r>
-            <a:r>
-              <a:rPr lang="en-US" sz="900" dirty="0">
-                <a:solidFill>
-                  <a:srgbClr val="000000"/>
-                </a:solidFill>
-                <a:latin typeface="Calibri" pitchFamily="34" charset="0"/>
-                <a:ea typeface="Calibri" pitchFamily="34" charset="-122"/>
-                <a:cs typeface="Calibri" pitchFamily="34" charset="-120"/>
-              </a:rPr>
-              <a:t xml:space="preserve">J. Wu, “Parallel arrangement of MOSFETs, effective suppression of crosstalk: A new gate driver topology,” iEnergy, vol. 2, no. 3, pp. 163–163, 2023.</a:t>
-            </a:r>
-          </a:p>
-          <a:p>
-            <a:pPr marL="177800" indent="0">
-              <a:spcAft>
-                <a:spcPts val="60"/>
-              </a:spcAft>
-              <a:buSzPct val="100000"/>
-              <a:buNone/>
-            </a:pPr>
-            <a:r>
-              <a:rPr lang="en-US" sz="900" b="1" dirty="0">
-                <a:solidFill>
-                  <a:srgbClr val="000000"/>
-                </a:solidFill>
-                <a:latin typeface="Calibri" pitchFamily="34" charset="0"/>
-                <a:ea typeface="Calibri" pitchFamily="34" charset="-122"/>
-                <a:cs typeface="Calibri" pitchFamily="34" charset="-120"/>
-              </a:rPr>
-              <a:t xml:space="preserve">[19]  </a:t>
-            </a:r>
-            <a:r>
-              <a:rPr lang="en-US" sz="900" dirty="0">
-                <a:solidFill>
-                  <a:srgbClr val="000000"/>
-                </a:solidFill>
-                <a:latin typeface="Calibri" pitchFamily="34" charset="0"/>
-                <a:ea typeface="Calibri" pitchFamily="34" charset="-122"/>
-                <a:cs typeface="Calibri" pitchFamily="34" charset="-120"/>
-              </a:rPr>
-              <a:t xml:space="preserve">Y. Mikhaylov, G. Buticchi and M. Galea, “A gate driver for parallel connected MOSFETs with crosstalk suppression,” iEnergy, vol. 2, no. 3, pp. 240–250, 2023.</a:t>
-            </a:r>
-          </a:p>
-          <a:p>
-            <a:pPr marL="177800" indent="0">
-              <a:spcAft>
-                <a:spcPts val="60"/>
-              </a:spcAft>
-              <a:buSzPct val="100000"/>
-              <a:buNone/>
-            </a:pPr>
-            <a:r>
-              <a:rPr lang="en-US" sz="900" b="1" dirty="0">
-                <a:solidFill>
-                  <a:srgbClr val="000000"/>
-                </a:solidFill>
-                <a:latin typeface="Calibri" pitchFamily="34" charset="0"/>
-                <a:ea typeface="Calibri" pitchFamily="34" charset="-122"/>
-                <a:cs typeface="Calibri" pitchFamily="34" charset="-120"/>
-              </a:rPr>
-              <a:t xml:space="preserve">[20]  </a:t>
-            </a:r>
-            <a:r>
-              <a:rPr lang="en-US" sz="900" dirty="0">
-                <a:solidFill>
-                  <a:srgbClr val="000000"/>
-                </a:solidFill>
-                <a:latin typeface="Calibri" pitchFamily="34" charset="0"/>
-                <a:ea typeface="Calibri" pitchFamily="34" charset="-122"/>
-                <a:cs typeface="Calibri" pitchFamily="34" charset="-120"/>
-              </a:rPr>
-              <a:t xml:space="preserve">W. Liu and H. Min, “A Load Adaptive Active Gate Driver with Fast-Switching Three-Level Current Source for Overshoot Suppression in GaN-Based Half-Bridge Converters,” IEEE Trans. Power Electron., pp. 1–8, 2026.</a:t>
-            </a:r>
-          </a:p>
-          <a:p>
-            <a:pPr marL="177800" indent="0">
-              <a:spcAft>
-                <a:spcPts val="60"/>
-              </a:spcAft>
-              <a:buSzPct val="100000"/>
-              <a:buNone/>
-            </a:pPr>
-            <a:r>
-              <a:rPr lang="en-US" sz="900" b="1" dirty="0">
-                <a:solidFill>
-                  <a:srgbClr val="000000"/>
-                </a:solidFill>
-                <a:latin typeface="Calibri" pitchFamily="34" charset="0"/>
-                <a:ea typeface="Calibri" pitchFamily="34" charset="-122"/>
-                <a:cs typeface="Calibri" pitchFamily="34" charset="-120"/>
-              </a:rPr>
-              <a:t xml:space="preserve">[21]  </a:t>
-            </a:r>
-            <a:r>
-              <a:rPr lang="en-US" sz="900" dirty="0">
-                <a:solidFill>
-                  <a:srgbClr val="000000"/>
-                </a:solidFill>
-                <a:latin typeface="Calibri" pitchFamily="34" charset="0"/>
-                <a:ea typeface="Calibri" pitchFamily="34" charset="-122"/>
-                <a:cs typeface="Calibri" pitchFamily="34" charset="-120"/>
-              </a:rPr>
-              <a:t xml:space="preserve">R. Chen, F. Wang, H. Bai and L.M. Tolbert, “A Simple Gate Driver Circuit for Turn-on Overvoltage Suppression of 10 kV SiC MOSFETs With Temporarily Lowering Gate Voltage During dv/dt,” IEEE Trans. Ind. Electron., pp. 1–6, 2026.</a:t>
-            </a:r>
-          </a:p>
-          <a:p>
-            <a:pPr marL="177800" indent="0">
-              <a:spcAft>
-                <a:spcPts val="60"/>
-              </a:spcAft>
-              <a:buSzPct val="100000"/>
-              <a:buNone/>
-            </a:pPr>
-            <a:r>
-              <a:rPr lang="en-US" sz="900" b="1" dirty="0">
-                <a:solidFill>
-                  <a:srgbClr val="000000"/>
-                </a:solidFill>
-                <a:latin typeface="Calibri" pitchFamily="34" charset="0"/>
-                <a:ea typeface="Calibri" pitchFamily="34" charset="-122"/>
-                <a:cs typeface="Calibri" pitchFamily="34" charset="-120"/>
-              </a:rPr>
-              <a:t xml:space="preserve">[22]  </a:t>
-            </a:r>
-            <a:r>
-              <a:rPr lang="en-US" sz="900" dirty="0">
-                <a:solidFill>
-                  <a:srgbClr val="000000"/>
-                </a:solidFill>
-                <a:latin typeface="Calibri" pitchFamily="34" charset="0"/>
-                <a:ea typeface="Calibri" pitchFamily="34" charset="-122"/>
-                <a:cs typeface="Calibri" pitchFamily="34" charset="-120"/>
-              </a:rPr>
-              <a:t xml:space="preserve">D. Yu, M. Yang, L. Yin, K. Hu, W. Zhang and Q. Fu, “A Dual-Loop Active Gate Driver With Independent Voltage Slew Rate and Overshoot Control for Switching Loss Optimization of SiC MOSFETs,” IEEE Trans. Ind. Electron., pp. 1–12, 2026.</a:t>
-            </a:r>
-          </a:p>
-          <a:p>
-            <a:pPr marL="177800" indent="0">
-              <a:spcAft>
-                <a:spcPts val="60"/>
-              </a:spcAft>
-              <a:buSzPct val="100000"/>
-              <a:buNone/>
-            </a:pPr>
-            <a:r>
-              <a:rPr lang="en-US" sz="900" b="1" dirty="0">
-                <a:solidFill>
-                  <a:srgbClr val="000000"/>
-                </a:solidFill>
-                <a:latin typeface="Calibri" pitchFamily="34" charset="0"/>
-                <a:ea typeface="Calibri" pitchFamily="34" charset="-122"/>
-                <a:cs typeface="Calibri" pitchFamily="34" charset="-120"/>
-              </a:rPr>
-              <a:t xml:space="preserve">[23]  </a:t>
-            </a:r>
-            <a:r>
-              <a:rPr lang="en-US" sz="900" dirty="0">
-                <a:solidFill>
-                  <a:srgbClr val="000000"/>
-                </a:solidFill>
-                <a:latin typeface="Calibri" pitchFamily="34" charset="0"/>
-                <a:ea typeface="Calibri" pitchFamily="34" charset="-122"/>
-                <a:cs typeface="Calibri" pitchFamily="34" charset="-120"/>
-              </a:rPr>
-              <a:t xml:space="preserve">P. Xiang, R. Hao, J. Cai and X. You, “An Active Gate Driver of SiC MOSFET Module Based on PCB Rogowski Coil for Optimizing Tradeoff Between Overshoot and Switching Loss,” IEEE Trans. Power Electron., vol. 38, no. 1, pp. 245–260, 2023.</a:t>
-            </a:r>
-          </a:p>
-          <a:p>
-            <a:pPr marL="177800" indent="0">
-              <a:spcAft>
-                <a:spcPts val="60"/>
-              </a:spcAft>
-              <a:buSzPct val="100000"/>
-              <a:buNone/>
-            </a:pPr>
-            <a:r>
-              <a:rPr lang="en-US" sz="900" b="1" dirty="0">
-                <a:solidFill>
-                  <a:srgbClr val="000000"/>
-                </a:solidFill>
-                <a:latin typeface="Calibri" pitchFamily="34" charset="0"/>
-                <a:ea typeface="Calibri" pitchFamily="34" charset="-122"/>
-                <a:cs typeface="Calibri" pitchFamily="34" charset="-120"/>
-              </a:rPr>
-              <a:t xml:space="preserve">[24]  </a:t>
-            </a:r>
-            <a:r>
-              <a:rPr lang="en-US" sz="900" dirty="0">
-                <a:solidFill>
-                  <a:srgbClr val="000000"/>
-                </a:solidFill>
-                <a:latin typeface="Calibri" pitchFamily="34" charset="0"/>
-                <a:ea typeface="Calibri" pitchFamily="34" charset="-122"/>
-                <a:cs typeface="Calibri" pitchFamily="34" charset="-120"/>
-              </a:rPr>
-              <a:t xml:space="preserve">S. Fukunaga, H. Takayama and T. Hikihara, “Slew rate control of switching transient for SiC MOSFET in boost converter using digital active gate driver,” IET Power Electron., vol. 16, no. 3, pp. 472–482, 2022.</a:t>
-            </a:r>
-          </a:p>
-          <a:p>
-            <a:pPr marL="177800" indent="0">
-              <a:spcAft>
-                <a:spcPts val="60"/>
-              </a:spcAft>
-              <a:buSzPct val="100000"/>
-              <a:buNone/>
-            </a:pPr>
-            <a:r>
-              <a:rPr lang="en-US" sz="900" b="1" dirty="0">
-                <a:solidFill>
-                  <a:srgbClr val="000000"/>
-                </a:solidFill>
-                <a:latin typeface="Calibri" pitchFamily="34" charset="0"/>
-                <a:ea typeface="Calibri" pitchFamily="34" charset="-122"/>
-                <a:cs typeface="Calibri" pitchFamily="34" charset="-120"/>
-              </a:rPr>
-              <a:t xml:space="preserve">[25]  </a:t>
-            </a:r>
-            <a:r>
-              <a:rPr lang="en-US" sz="900" dirty="0">
-                <a:solidFill>
-                  <a:srgbClr val="000000"/>
-                </a:solidFill>
-                <a:latin typeface="Calibri" pitchFamily="34" charset="0"/>
-                <a:ea typeface="Calibri" pitchFamily="34" charset="-122"/>
-                <a:cs typeface="Calibri" pitchFamily="34" charset="-120"/>
-              </a:rPr>
-              <a:t xml:space="preserve">C. Xu, P. Fu, X. Liao, Z. Zhu and L. Liu, “An Integrated Driver With Real-Time Predictive Dead-Time Optimization Technique for GaN-Based Synchronous Buck Converter,” IEEE J. Emerg. Sel. Topics Power Electron., vol. 13, no. 3, pp. 3173–3183, 2025.</a:t>
-            </a:r>
-          </a:p>
-          <a:p>
-            <a:pPr marL="177800" indent="0">
-              <a:spcAft>
-                <a:spcPts val="60"/>
-              </a:spcAft>
-              <a:buSzPct val="100000"/>
-              <a:buNone/>
-            </a:pPr>
-            <a:r>
-              <a:rPr lang="en-US" sz="900" b="1" dirty="0">
-                <a:solidFill>
-                  <a:srgbClr val="000000"/>
-                </a:solidFill>
-                <a:latin typeface="Calibri" pitchFamily="34" charset="0"/>
-                <a:ea typeface="Calibri" pitchFamily="34" charset="-122"/>
-                <a:cs typeface="Calibri" pitchFamily="34" charset="-120"/>
-              </a:rPr>
-              <a:t xml:space="preserve">[26]  </a:t>
-            </a:r>
-            <a:r>
-              <a:rPr lang="en-US" sz="900" dirty="0">
-                <a:solidFill>
-                  <a:srgbClr val="000000"/>
-                </a:solidFill>
-                <a:latin typeface="Calibri" pitchFamily="34" charset="0"/>
-                <a:ea typeface="Calibri" pitchFamily="34" charset="-122"/>
-                <a:cs typeface="Calibri" pitchFamily="34" charset="-120"/>
-              </a:rPr>
-              <a:t xml:space="preserve">C. Chen, P. Chiu, Y. Chen, P. Wang and Y. Chang, “An Integrated Driver With Adaptive Dead-Time Control for GaN-Based Synchronous Buck Converter,” IEEE Trans. Circuits Syst. II, vol. 69, no. 2, pp. 539–543, 2022.</a:t>
-            </a:r>
-          </a:p>
-          <a:p>
-            <a:pPr marL="177800" indent="0">
-              <a:spcAft>
-                <a:spcPts val="60"/>
-              </a:spcAft>
-              <a:buSzPct val="100000"/>
-              <a:buNone/>
-            </a:pPr>
-            <a:r>
-              <a:rPr lang="en-US" sz="900" b="1" dirty="0">
-                <a:solidFill>
-                  <a:srgbClr val="000000"/>
-                </a:solidFill>
-                <a:latin typeface="Calibri" pitchFamily="34" charset="0"/>
-                <a:ea typeface="Calibri" pitchFamily="34" charset="-122"/>
-                <a:cs typeface="Calibri" pitchFamily="34" charset="-120"/>
-              </a:rPr>
-              <a:t xml:space="preserve">[27]  </a:t>
-            </a:r>
-            <a:r>
-              <a:rPr lang="en-US" sz="900" dirty="0">
-                <a:solidFill>
-                  <a:srgbClr val="000000"/>
-                </a:solidFill>
-                <a:latin typeface="Calibri" pitchFamily="34" charset="0"/>
-                <a:ea typeface="Calibri" pitchFamily="34" charset="-122"/>
-                <a:cs typeface="Calibri" pitchFamily="34" charset="-120"/>
-              </a:rPr>
-              <a:t xml:space="preserve">J. Tan, Z. Zhou and G. Zou, “A Programmable Gate Driver Module-Based Multistage Voltage Regulation SiC MOSFET Switching Strategy,” Electronics, vol. 13, no. 22, pp. 4379, 2024.</a:t>
-            </a:r>
-          </a:p>
-          <a:p>
-            <a:pPr marL="177800" indent="0">
-              <a:spcAft>
-                <a:spcPts val="60"/>
-              </a:spcAft>
-              <a:buSzPct val="100000"/>
-              <a:buNone/>
-            </a:pPr>
-            <a:r>
-              <a:rPr lang="en-US" sz="900" b="1" dirty="0">
-                <a:solidFill>
-                  <a:srgbClr val="000000"/>
-                </a:solidFill>
-                <a:latin typeface="Calibri" pitchFamily="34" charset="0"/>
-                <a:ea typeface="Calibri" pitchFamily="34" charset="-122"/>
-                <a:cs typeface="Calibri" pitchFamily="34" charset="-120"/>
-              </a:rPr>
-              <a:t xml:space="preserve">[28]  </a:t>
-            </a:r>
-            <a:r>
-              <a:rPr lang="en-US" sz="900" dirty="0">
-                <a:solidFill>
-                  <a:srgbClr val="000000"/>
-                </a:solidFill>
-                <a:latin typeface="Calibri" pitchFamily="34" charset="0"/>
-                <a:ea typeface="Calibri" pitchFamily="34" charset="-122"/>
-                <a:cs typeface="Calibri" pitchFamily="34" charset="-120"/>
-              </a:rPr>
-              <a:t xml:space="preserve">C. Chen, P. Wang, S. Li, Y. Chen and Y. Chang, “An Integrated Driver With Bang-Bang Dead-Time Control and Charge Sharing Bootstrap Circuit for GaN Synchronous Buck Converter,” IEEE Trans. Power Electron., vol. 37, no. 8, pp. 9503–9514, 2022.</a:t>
-            </a:r>
-          </a:p>
-          <a:p>
-            <a:pPr marL="177800" indent="0">
-              <a:spcAft>
-                <a:spcPts val="60"/>
-              </a:spcAft>
-              <a:buSzPct val="100000"/>
-              <a:buNone/>
-            </a:pPr>
-            <a:r>
-              <a:rPr lang="en-US" sz="900" b="1" dirty="0">
-                <a:solidFill>
-                  <a:srgbClr val="000000"/>
-                </a:solidFill>
-                <a:latin typeface="Calibri" pitchFamily="34" charset="0"/>
-                <a:ea typeface="Calibri" pitchFamily="34" charset="-122"/>
-                <a:cs typeface="Calibri" pitchFamily="34" charset="-120"/>
-              </a:rPr>
-              <a:t xml:space="preserve">[29]  </a:t>
-            </a:r>
-            <a:r>
-              <a:rPr lang="en-US" sz="900" dirty="0">
-                <a:solidFill>
-                  <a:srgbClr val="000000"/>
-                </a:solidFill>
-                <a:latin typeface="Calibri" pitchFamily="34" charset="0"/>
-                <a:ea typeface="Calibri" pitchFamily="34" charset="-122"/>
-                <a:cs typeface="Calibri" pitchFamily="34" charset="-120"/>
-              </a:rPr>
-              <a:t xml:space="preserve">G.H. Thuc, M. Tsai, C. Chen, J. Fu, W. Wu and W. Lin, “A Current Source Gate Driver with Dual-Edge Adaptive Slew Rate for GaN Devices,” in Proc. 2026 IEEE Applied Power Electronics Conference and Exposition (APEC), 2026.</a:t>
-            </a:r>
-          </a:p>
-          <a:p>
-            <a:pPr marL="177800" indent="0">
-              <a:spcAft>
-                <a:spcPts val="60"/>
-              </a:spcAft>
-              <a:buSzPct val="100000"/>
-              <a:buNone/>
-            </a:pPr>
-            <a:r>
-              <a:rPr lang="en-US" sz="900" b="1" dirty="0">
-                <a:solidFill>
-                  <a:srgbClr val="000000"/>
-                </a:solidFill>
-                <a:latin typeface="Calibri" pitchFamily="34" charset="0"/>
-                <a:ea typeface="Calibri" pitchFamily="34" charset="-122"/>
-                <a:cs typeface="Calibri" pitchFamily="34" charset="-120"/>
-              </a:rPr>
-              <a:t xml:space="preserve">[30]  </a:t>
-            </a:r>
-            <a:r>
-              <a:rPr lang="en-US" sz="900" dirty="0">
-                <a:solidFill>
-                  <a:srgbClr val="000000"/>
-                </a:solidFill>
-                <a:latin typeface="Calibri" pitchFamily="34" charset="0"/>
-                <a:ea typeface="Calibri" pitchFamily="34" charset="-122"/>
-                <a:cs typeface="Calibri" pitchFamily="34" charset="-120"/>
-              </a:rPr>
-              <a:t xml:space="preserve">G. Wu, Y. Huang, Y. Chen and C. Chen, “Closed-loop Slew Rate Control of Active Current Source Gate Driver with Digital Implementation for SiC MOSFET,” in Proc. 2025 IEEE Energy Conversion Conference Congress and Exposition (ECCE), 2025.</a:t>
-            </a:r>
-          </a:p>
-          <a:p>
-            <a:pPr marL="177800" indent="0">
-              <a:spcAft>
-                <a:spcPts val="160"/>
-              </a:spcAft>
-              <a:buSzPct val="100000"/>
-              <a:buNone/>
-            </a:pPr>
-            <a:r>
-              <a:rPr lang="en-US" sz="850" dirty="0">
-                <a:solidFill>
-                  <a:srgbClr val="000000"/>
-                </a:solidFill>
-                <a:latin typeface="Calibri" pitchFamily="34" charset="0"/>
-                <a:ea typeface="Calibri" pitchFamily="34" charset="-122"/>
-                <a:cs typeface="Calibri" pitchFamily="34" charset="-120"/>
-              </a:rPr>
-              <a:t xml:space="preserve">All 30 verified against the publisher record — authors, volume, issue and pages resolved through Crossref by DOI and title, not transcribed by hand.</a:t>
-            </a:r>
-          </a:p>
-        </p:txBody>
-      </p:sp>
-      <p:sp>
-        <p:nvSpPr>
-          <p:cNvPr id="6" name="Text 3"/>
-          <p:cNvSpPr txBox="1"/>
-          <p:nvPr/>
-        </p:nvSpPr>
-        <p:spPr>
-          <a:xfrm>
-            <a:off x="640080" y="5806440"/>
-            <a:ext cx="10881360" cy="365760"/>
-          </a:xfrm>
-          <a:prstGeom prst="rect">
-            <a:avLst/>
-          </a:prstGeom>
-          <a:noFill/>
-          <a:ln/>
-        </p:spPr>
-        <p:txBody>
-          <a:bodyPr wrap="square" lIns="0" tIns="0" rIns="0" bIns="0" rtlCol="0" anchor="ctr"/>
+          <p:cNvPr id="4" name="TextBox 3"/>
+          <p:cNvSpPr txBox="1"/>
+          <p:nvPr/>
+        </p:nvSpPr>
+        <p:spPr>
+          <a:xfrm>
+            <a:off x="548640" y="320040"/>
+            <a:ext cx="9601200" cy="685800"/>
+          </a:xfrm>
+          <a:prstGeom prst="rect">
+            <a:avLst/>
+          </a:prstGeom>
+          <a:noFill/>
+        </p:spPr>
+        <p:txBody>
+          <a:bodyPr wrap="square" lIns="0" tIns="0" rIns="0" bIns="0">
+            <a:spAutoFit/>
+          </a:bodyPr>
           <a:lstStyle/>
           <a:p>
             <a:pPr marL="177800" indent="0">
@@ -16891,15 +15712,724 @@
               <a:buNone/>
             </a:pPr>
             <a:r>
-              <a:rPr lang="en-US" sz="1200" dirty="0">
-                <a:solidFill>
-                  <a:srgbClr val="000000"/>
-                </a:solidFill>
-                <a:latin typeface="Calibri" pitchFamily="34" charset="0"/>
-                <a:ea typeface="Calibri" pitchFamily="34" charset="-122"/>
-                <a:cs typeface="Calibri" pitchFamily="34" charset="-120"/>
-              </a:rPr>
-              <a:t xml:space="preserve"/>
+              <a:rPr lang="en-US" sz="2800" b="1" dirty="0">
+                <a:solidFill>
+                  <a:srgbClr val="000000"/>
+                </a:solidFill>
+                <a:latin typeface="Calibri" pitchFamily="34" charset="0"/>
+                <a:ea typeface="Calibri" pitchFamily="34" charset="-122"/>
+                <a:cs typeface="Calibri" pitchFamily="34" charset="-120"/>
+              </a:rPr>
+              <a:t xml:space="preserve">We implemented the base paper, then ours</a:t>
+            </a:r>
+          </a:p>
+        </p:txBody>
+      </p:sp>
+      <p:sp>
+        <p:nvSpPr>
+          <p:cNvPr id="5" name="TextBox 4"/>
+          <p:cNvSpPr txBox="1"/>
+          <p:nvPr/>
+        </p:nvSpPr>
+        <p:spPr>
+          <a:xfrm>
+            <a:off x="11457432" y="6446520"/>
+            <a:ext cx="457200" cy="274320"/>
+          </a:xfrm>
+          <a:prstGeom prst="rect">
+            <a:avLst/>
+          </a:prstGeom>
+          <a:noFill/>
+        </p:spPr>
+        <p:txBody>
+          <a:bodyPr wrap="square" lIns="0" tIns="0" rIns="0" bIns="0">
+            <a:spAutoFit/>
+          </a:bodyPr>
+          <a:lstStyle/>
+          <a:p>
+            <a:pPr marL="177800" indent="0">
+              <a:spcAft>
+                <a:spcPts val="0"/>
+              </a:spcAft>
+              <a:buSzPct val="100000"/>
+              <a:buNone/>
+            </a:pPr>
+            <a:r>
+              <a:rPr lang="en-US" sz="1100" dirty="0">
+                <a:solidFill>
+                  <a:srgbClr val="000000"/>
+                </a:solidFill>
+                <a:latin typeface="Calibri" pitchFamily="34" charset="0"/>
+                <a:ea typeface="Calibri" pitchFamily="34" charset="-122"/>
+                <a:cs typeface="Calibri" pitchFamily="34" charset="-120"/>
+              </a:rPr>
+              <a:t xml:space="preserve">13</a:t>
+            </a:r>
+          </a:p>
+        </p:txBody>
+      </p:sp>
+      <p:sp>
+        <p:nvSpPr>
+          <p:cNvPr id="6" name="TextBox 5"/>
+          <p:cNvSpPr txBox="1"/>
+          <p:nvPr/>
+        </p:nvSpPr>
+        <p:spPr>
+          <a:xfrm>
+            <a:off x="640080" y="1207008"/>
+            <a:ext cx="11064240" cy="868680"/>
+          </a:xfrm>
+          <a:prstGeom prst="rect">
+            <a:avLst/>
+          </a:prstGeom>
+          <a:noFill/>
+        </p:spPr>
+        <p:txBody>
+          <a:bodyPr wrap="square" lIns="0" tIns="0" rIns="0" bIns="0">
+            <a:spAutoFit/>
+          </a:bodyPr>
+          <a:lstStyle/>
+          <a:p>
+            <a:pPr marL="177800" indent="0">
+              <a:spcAft>
+                <a:spcPts val="0"/>
+              </a:spcAft>
+              <a:buSzPct val="100000"/>
+              <a:buNone/>
+            </a:pPr>
+            <a:r>
+              <a:rPr lang="en-US" sz="1250" b="1" dirty="0">
+                <a:solidFill>
+                  <a:srgbClr val="000000"/>
+                </a:solidFill>
+                <a:latin typeface="Calibri" pitchFamily="34" charset="0"/>
+                <a:ea typeface="Calibri" pitchFamily="34" charset="-122"/>
+                <a:cs typeface="Calibri" pitchFamily="34" charset="-120"/>
+              </a:rPr>
+              <a:t xml:space="preserve">Citing a base paper is not a comparison. </a:t>
+            </a:r>
+            <a:r>
+              <a:rPr lang="en-US" sz="1250" dirty="0">
+                <a:solidFill>
+                  <a:srgbClr val="000000"/>
+                </a:solidFill>
+                <a:latin typeface="Calibri" pitchFamily="34" charset="0"/>
+                <a:ea typeface="Calibri" pitchFamily="34" charset="-122"/>
+                <a:cs typeface="Calibri" pitchFamily="34" charset="-120"/>
+              </a:rPr>
+              <a:t xml:space="preserve">models/basedrv.lib implements Takayama, Okuda &amp; Hikihara's DAC-architecture driver — a multibit code that changes DURING the switching edge, with no Miller clamp and no negative off-bias rail, because those are ours. It runs inside sim/dpt.cir, byte-identical otherwise, so only the driver differs.</a:t>
+            </a:r>
+          </a:p>
+        </p:txBody>
+      </p:sp>
+      <p:sp>
+        <p:nvSpPr>
+          <p:cNvPr id="7" name="TextBox 6"/>
+          <p:cNvSpPr txBox="1"/>
+          <p:nvPr/>
+        </p:nvSpPr>
+        <p:spPr>
+          <a:xfrm>
+            <a:off x="640080" y="2395728"/>
+            <a:ext cx="3566160" cy="530352"/>
+          </a:xfrm>
+          <a:prstGeom prst="rect">
+            <a:avLst/>
+          </a:prstGeom>
+          <a:noFill/>
+        </p:spPr>
+        <p:txBody>
+          <a:bodyPr wrap="square" lIns="0" tIns="0" rIns="0" bIns="0">
+            <a:spAutoFit/>
+          </a:bodyPr>
+          <a:lstStyle/>
+          <a:p>
+            <a:pPr marL="177800" indent="0">
+              <a:spcAft>
+                <a:spcPts val="0"/>
+              </a:spcAft>
+              <a:buSzPct val="100000"/>
+              <a:buNone/>
+            </a:pPr>
+            <a:r>
+              <a:rPr lang="en-US" sz="1300" dirty="0">
+                <a:solidFill>
+                  <a:srgbClr val="000000"/>
+                </a:solidFill>
+                <a:latin typeface="Calibri" pitchFamily="34" charset="0"/>
+                <a:ea typeface="Calibri" pitchFamily="34" charset="-122"/>
+                <a:cs typeface="Calibri" pitchFamily="34" charset="-120"/>
+              </a:rPr>
+              <a:t xml:space="preserve">Base paper, as we built it</a:t>
+            </a:r>
+          </a:p>
+        </p:txBody>
+      </p:sp>
+      <p:sp>
+        <p:nvSpPr>
+          <p:cNvPr id="8" name="TextBox 7"/>
+          <p:cNvSpPr txBox="1"/>
+          <p:nvPr/>
+        </p:nvSpPr>
+        <p:spPr>
+          <a:xfrm>
+            <a:off x="4343400" y="2340864"/>
+            <a:ext cx="1417320" cy="438912"/>
+          </a:xfrm>
+          <a:prstGeom prst="rect">
+            <a:avLst/>
+          </a:prstGeom>
+          <a:noFill/>
+        </p:spPr>
+        <p:txBody>
+          <a:bodyPr wrap="square" lIns="0" tIns="0" rIns="0" bIns="0">
+            <a:spAutoFit/>
+          </a:bodyPr>
+          <a:lstStyle/>
+          <a:p>
+            <a:pPr marL="177800" indent="0">
+              <a:spcAft>
+                <a:spcPts val="0"/>
+              </a:spcAft>
+              <a:buSzPct val="100000"/>
+              <a:buNone/>
+            </a:pPr>
+            <a:r>
+              <a:rPr lang="en-US" sz="1700" b="1" dirty="0">
+                <a:solidFill>
+                  <a:srgbClr val="000000"/>
+                </a:solidFill>
+                <a:latin typeface="Calibri" pitchFamily="34" charset="0"/>
+                <a:ea typeface="Calibri" pitchFamily="34" charset="-122"/>
+                <a:cs typeface="Calibri" pitchFamily="34" charset="-120"/>
+              </a:rPr>
+              <a:t xml:space="preserve">+0.533 V</a:t>
+            </a:r>
+          </a:p>
+        </p:txBody>
+      </p:sp>
+      <p:sp>
+        <p:nvSpPr>
+          <p:cNvPr id="9" name="TextBox 8"/>
+          <p:cNvSpPr txBox="1"/>
+          <p:nvPr/>
+        </p:nvSpPr>
+        <p:spPr>
+          <a:xfrm>
+            <a:off x="5943600" y="2395728"/>
+            <a:ext cx="5577840" cy="548640"/>
+          </a:xfrm>
+          <a:prstGeom prst="rect">
+            <a:avLst/>
+          </a:prstGeom>
+          <a:noFill/>
+        </p:spPr>
+        <p:txBody>
+          <a:bodyPr wrap="square" lIns="0" tIns="0" rIns="0" bIns="0">
+            <a:spAutoFit/>
+          </a:bodyPr>
+          <a:lstStyle/>
+          <a:p>
+            <a:pPr marL="177800" indent="0">
+              <a:spcAft>
+                <a:spcPts val="0"/>
+              </a:spcAft>
+              <a:buSzPct val="100000"/>
+              <a:buNone/>
+            </a:pPr>
+            <a:r>
+              <a:rPr lang="en-US" sz="1150" dirty="0">
+                <a:solidFill>
+                  <a:srgbClr val="000000"/>
+                </a:solidFill>
+                <a:latin typeface="Calibri" pitchFamily="34" charset="0"/>
+                <a:ea typeface="Calibri" pitchFamily="34" charset="-122"/>
+                <a:cs typeface="Calibri" pitchFamily="34" charset="-120"/>
+              </a:rPr>
+              <a:t xml:space="preserve">Their time-sequenced multibit code alone already clears the 1.4 V threshold.</a:t>
+            </a:r>
+          </a:p>
+        </p:txBody>
+      </p:sp>
+      <p:sp>
+        <p:nvSpPr>
+          <p:cNvPr id="10" name="TextBox 9"/>
+          <p:cNvSpPr txBox="1"/>
+          <p:nvPr/>
+        </p:nvSpPr>
+        <p:spPr>
+          <a:xfrm>
+            <a:off x="640080" y="3035808"/>
+            <a:ext cx="3566160" cy="530352"/>
+          </a:xfrm>
+          <a:prstGeom prst="rect">
+            <a:avLst/>
+          </a:prstGeom>
+          <a:noFill/>
+        </p:spPr>
+        <p:txBody>
+          <a:bodyPr wrap="square" lIns="0" tIns="0" rIns="0" bIns="0">
+            <a:spAutoFit/>
+          </a:bodyPr>
+          <a:lstStyle/>
+          <a:p>
+            <a:pPr marL="177800" indent="0">
+              <a:spcAft>
+                <a:spcPts val="0"/>
+              </a:spcAft>
+              <a:buSzPct val="100000"/>
+              <a:buNone/>
+            </a:pPr>
+            <a:r>
+              <a:rPr lang="en-US" sz="1300" dirty="0">
+                <a:solidFill>
+                  <a:srgbClr val="000000"/>
+                </a:solidFill>
+                <a:latin typeface="Calibri" pitchFamily="34" charset="0"/>
+                <a:ea typeface="Calibri" pitchFamily="34" charset="-122"/>
+                <a:cs typeface="Calibri" pitchFamily="34" charset="-120"/>
+              </a:rPr>
+              <a:t xml:space="preserve">Ours, constant code, no clamp</a:t>
+            </a:r>
+          </a:p>
+        </p:txBody>
+      </p:sp>
+      <p:sp>
+        <p:nvSpPr>
+          <p:cNvPr id="11" name="TextBox 10"/>
+          <p:cNvSpPr txBox="1"/>
+          <p:nvPr/>
+        </p:nvSpPr>
+        <p:spPr>
+          <a:xfrm>
+            <a:off x="4343400" y="2980944"/>
+            <a:ext cx="1417320" cy="438912"/>
+          </a:xfrm>
+          <a:prstGeom prst="rect">
+            <a:avLst/>
+          </a:prstGeom>
+          <a:noFill/>
+        </p:spPr>
+        <p:txBody>
+          <a:bodyPr wrap="square" lIns="0" tIns="0" rIns="0" bIns="0">
+            <a:spAutoFit/>
+          </a:bodyPr>
+          <a:lstStyle/>
+          <a:p>
+            <a:pPr marL="177800" indent="0">
+              <a:spcAft>
+                <a:spcPts val="0"/>
+              </a:spcAft>
+              <a:buSzPct val="100000"/>
+              <a:buNone/>
+            </a:pPr>
+            <a:r>
+              <a:rPr lang="en-US" sz="1700" b="1" dirty="0">
+                <a:solidFill>
+                  <a:srgbClr val="000000"/>
+                </a:solidFill>
+                <a:latin typeface="Calibri" pitchFamily="34" charset="0"/>
+                <a:ea typeface="Calibri" pitchFamily="34" charset="-122"/>
+                <a:cs typeface="Calibri" pitchFamily="34" charset="-120"/>
+              </a:rPr>
+              <a:t xml:space="preserve">−0.249 V</a:t>
+            </a:r>
+          </a:p>
+        </p:txBody>
+      </p:sp>
+      <p:sp>
+        <p:nvSpPr>
+          <p:cNvPr id="12" name="TextBox 11"/>
+          <p:cNvSpPr txBox="1"/>
+          <p:nvPr/>
+        </p:nvSpPr>
+        <p:spPr>
+          <a:xfrm>
+            <a:off x="5943600" y="3035808"/>
+            <a:ext cx="5577840" cy="548640"/>
+          </a:xfrm>
+          <a:prstGeom prst="rect">
+            <a:avLst/>
+          </a:prstGeom>
+          <a:noFill/>
+        </p:spPr>
+        <p:txBody>
+          <a:bodyPr wrap="square" lIns="0" tIns="0" rIns="0" bIns="0">
+            <a:spAutoFit/>
+          </a:bodyPr>
+          <a:lstStyle/>
+          <a:p>
+            <a:pPr marL="177800" indent="0">
+              <a:spcAft>
+                <a:spcPts val="0"/>
+              </a:spcAft>
+              <a:buSzPct val="100000"/>
+              <a:buNone/>
+            </a:pPr>
+            <a:r>
+              <a:rPr lang="en-US" sz="1150" dirty="0">
+                <a:solidFill>
+                  <a:srgbClr val="000000"/>
+                </a:solidFill>
+                <a:latin typeface="Calibri" pitchFamily="34" charset="0"/>
+                <a:ea typeface="Calibri" pitchFamily="34" charset="-122"/>
+                <a:cs typeface="Calibri" pitchFamily="34" charset="-120"/>
+              </a:rPr>
+              <a:t xml:space="preserve">FALSE TURN-ON. A fast FIXED code is worse than their sequenced one — their contribution is real, and we reproduce it.</a:t>
+            </a:r>
+          </a:p>
+        </p:txBody>
+      </p:sp>
+      <p:sp>
+        <p:nvSpPr>
+          <p:cNvPr id="13" name="TextBox 12"/>
+          <p:cNvSpPr txBox="1"/>
+          <p:nvPr/>
+        </p:nvSpPr>
+        <p:spPr>
+          <a:xfrm>
+            <a:off x="640080" y="3675887"/>
+            <a:ext cx="3566160" cy="530352"/>
+          </a:xfrm>
+          <a:prstGeom prst="rect">
+            <a:avLst/>
+          </a:prstGeom>
+          <a:noFill/>
+        </p:spPr>
+        <p:txBody>
+          <a:bodyPr wrap="square" lIns="0" tIns="0" rIns="0" bIns="0">
+            <a:spAutoFit/>
+          </a:bodyPr>
+          <a:lstStyle/>
+          <a:p>
+            <a:pPr marL="177800" indent="0">
+              <a:spcAft>
+                <a:spcPts val="0"/>
+              </a:spcAft>
+              <a:buSzPct val="100000"/>
+              <a:buNone/>
+            </a:pPr>
+            <a:r>
+              <a:rPr lang="en-US" sz="1300" dirty="0">
+                <a:solidFill>
+                  <a:srgbClr val="000000"/>
+                </a:solidFill>
+                <a:latin typeface="Calibri" pitchFamily="34" charset="0"/>
+                <a:ea typeface="Calibri" pitchFamily="34" charset="-122"/>
+                <a:cs typeface="Calibri" pitchFamily="34" charset="-120"/>
+              </a:rPr>
+              <a:t xml:space="preserve">Ours, active Miller clamp on</a:t>
+            </a:r>
+          </a:p>
+        </p:txBody>
+      </p:sp>
+      <p:sp>
+        <p:nvSpPr>
+          <p:cNvPr id="14" name="TextBox 13"/>
+          <p:cNvSpPr txBox="1"/>
+          <p:nvPr/>
+        </p:nvSpPr>
+        <p:spPr>
+          <a:xfrm>
+            <a:off x="4343400" y="3621023"/>
+            <a:ext cx="1417320" cy="438912"/>
+          </a:xfrm>
+          <a:prstGeom prst="rect">
+            <a:avLst/>
+          </a:prstGeom>
+          <a:noFill/>
+        </p:spPr>
+        <p:txBody>
+          <a:bodyPr wrap="square" lIns="0" tIns="0" rIns="0" bIns="0">
+            <a:spAutoFit/>
+          </a:bodyPr>
+          <a:lstStyle/>
+          <a:p>
+            <a:pPr marL="177800" indent="0">
+              <a:spcAft>
+                <a:spcPts val="0"/>
+              </a:spcAft>
+              <a:buSzPct val="100000"/>
+              <a:buNone/>
+            </a:pPr>
+            <a:r>
+              <a:rPr lang="en-US" sz="1700" b="1" dirty="0">
+                <a:solidFill>
+                  <a:srgbClr val="000000"/>
+                </a:solidFill>
+                <a:latin typeface="Calibri" pitchFamily="34" charset="0"/>
+                <a:ea typeface="Calibri" pitchFamily="34" charset="-122"/>
+                <a:cs typeface="Calibri" pitchFamily="34" charset="-120"/>
+              </a:rPr>
+              <a:t xml:space="preserve">+0.570 V</a:t>
+            </a:r>
+          </a:p>
+        </p:txBody>
+      </p:sp>
+      <p:sp>
+        <p:nvSpPr>
+          <p:cNvPr id="15" name="TextBox 14"/>
+          <p:cNvSpPr txBox="1"/>
+          <p:nvPr/>
+        </p:nvSpPr>
+        <p:spPr>
+          <a:xfrm>
+            <a:off x="5943600" y="3675887"/>
+            <a:ext cx="5577840" cy="548640"/>
+          </a:xfrm>
+          <a:prstGeom prst="rect">
+            <a:avLst/>
+          </a:prstGeom>
+          <a:noFill/>
+        </p:spPr>
+        <p:txBody>
+          <a:bodyPr wrap="square" lIns="0" tIns="0" rIns="0" bIns="0">
+            <a:spAutoFit/>
+          </a:bodyPr>
+          <a:lstStyle/>
+          <a:p>
+            <a:pPr marL="177800" indent="0">
+              <a:spcAft>
+                <a:spcPts val="0"/>
+              </a:spcAft>
+              <a:buSzPct val="100000"/>
+              <a:buNone/>
+            </a:pPr>
+            <a:r>
+              <a:rPr lang="en-US" sz="1150" dirty="0">
+                <a:solidFill>
+                  <a:srgbClr val="000000"/>
+                </a:solidFill>
+                <a:latin typeface="Calibri" pitchFamily="34" charset="0"/>
+                <a:ea typeface="Calibri" pitchFamily="34" charset="-122"/>
+                <a:cs typeface="Calibri" pitchFamily="34" charset="-120"/>
+              </a:rPr>
+              <a:t xml:space="preserve">Only marginally past the base paper. The clamp alone is not the story.</a:t>
+            </a:r>
+          </a:p>
+        </p:txBody>
+      </p:sp>
+      <p:sp>
+        <p:nvSpPr>
+          <p:cNvPr id="16" name="TextBox 15"/>
+          <p:cNvSpPr txBox="1"/>
+          <p:nvPr/>
+        </p:nvSpPr>
+        <p:spPr>
+          <a:xfrm>
+            <a:off x="640080" y="4315968"/>
+            <a:ext cx="3566160" cy="530352"/>
+          </a:xfrm>
+          <a:prstGeom prst="rect">
+            <a:avLst/>
+          </a:prstGeom>
+          <a:noFill/>
+        </p:spPr>
+        <p:txBody>
+          <a:bodyPr wrap="square" lIns="0" tIns="0" rIns="0" bIns="0">
+            <a:spAutoFit/>
+          </a:bodyPr>
+          <a:lstStyle/>
+          <a:p>
+            <a:pPr marL="177800" indent="0">
+              <a:spcAft>
+                <a:spcPts val="0"/>
+              </a:spcAft>
+              <a:buSzPct val="100000"/>
+              <a:buNone/>
+            </a:pPr>
+            <a:r>
+              <a:rPr lang="en-US" sz="1300" b="1" dirty="0">
+                <a:solidFill>
+                  <a:srgbClr val="000000"/>
+                </a:solidFill>
+                <a:latin typeface="Calibri" pitchFamily="34" charset="0"/>
+                <a:ea typeface="Calibri" pitchFamily="34" charset="-122"/>
+                <a:cs typeface="Calibri" pitchFamily="34" charset="-120"/>
+              </a:rPr>
+              <a:t xml:space="preserve">Ours, clamp + −2 V off-bias</a:t>
+            </a:r>
+          </a:p>
+        </p:txBody>
+      </p:sp>
+      <p:sp>
+        <p:nvSpPr>
+          <p:cNvPr id="17" name="TextBox 16"/>
+          <p:cNvSpPr txBox="1"/>
+          <p:nvPr/>
+        </p:nvSpPr>
+        <p:spPr>
+          <a:xfrm>
+            <a:off x="4343400" y="4261104"/>
+            <a:ext cx="1417320" cy="438912"/>
+          </a:xfrm>
+          <a:prstGeom prst="rect">
+            <a:avLst/>
+          </a:prstGeom>
+          <a:noFill/>
+        </p:spPr>
+        <p:txBody>
+          <a:bodyPr wrap="square" lIns="0" tIns="0" rIns="0" bIns="0">
+            <a:spAutoFit/>
+          </a:bodyPr>
+          <a:lstStyle/>
+          <a:p>
+            <a:pPr marL="177800" indent="0">
+              <a:spcAft>
+                <a:spcPts val="0"/>
+              </a:spcAft>
+              <a:buSzPct val="100000"/>
+              <a:buNone/>
+            </a:pPr>
+            <a:r>
+              <a:rPr lang="en-US" sz="1700" b="1" dirty="0">
+                <a:solidFill>
+                  <a:srgbClr val="000000"/>
+                </a:solidFill>
+                <a:latin typeface="Calibri" pitchFamily="34" charset="0"/>
+                <a:ea typeface="Calibri" pitchFamily="34" charset="-122"/>
+                <a:cs typeface="Calibri" pitchFamily="34" charset="-120"/>
+              </a:rPr>
+              <a:t xml:space="preserve">+2.576 V</a:t>
+            </a:r>
+          </a:p>
+        </p:txBody>
+      </p:sp>
+      <p:sp>
+        <p:nvSpPr>
+          <p:cNvPr id="18" name="TextBox 17"/>
+          <p:cNvSpPr txBox="1"/>
+          <p:nvPr/>
+        </p:nvSpPr>
+        <p:spPr>
+          <a:xfrm>
+            <a:off x="5943600" y="4315968"/>
+            <a:ext cx="5577840" cy="548640"/>
+          </a:xfrm>
+          <a:prstGeom prst="rect">
+            <a:avLst/>
+          </a:prstGeom>
+          <a:noFill/>
+        </p:spPr>
+        <p:txBody>
+          <a:bodyPr wrap="square" lIns="0" tIns="0" rIns="0" bIns="0">
+            <a:spAutoFit/>
+          </a:bodyPr>
+          <a:lstStyle/>
+          <a:p>
+            <a:pPr marL="177800" indent="0">
+              <a:spcAft>
+                <a:spcPts val="0"/>
+              </a:spcAft>
+              <a:buSzPct val="100000"/>
+              <a:buNone/>
+            </a:pPr>
+            <a:r>
+              <a:rPr lang="en-US" sz="1150" dirty="0">
+                <a:solidFill>
+                  <a:srgbClr val="000000"/>
+                </a:solidFill>
+                <a:latin typeface="Calibri" pitchFamily="34" charset="0"/>
+                <a:ea typeface="Calibri" pitchFamily="34" charset="-122"/>
+                <a:cs typeface="Calibri" pitchFamily="34" charset="-120"/>
+              </a:rPr>
+              <a:t xml:space="preserve">4.8× the base paper's margin. This is the shipped configuration.</a:t>
+            </a:r>
+          </a:p>
+        </p:txBody>
+      </p:sp>
+      <p:sp>
+        <p:nvSpPr>
+          <p:cNvPr id="19" name="TextBox 18"/>
+          <p:cNvSpPr txBox="1"/>
+          <p:nvPr/>
+        </p:nvSpPr>
+        <p:spPr>
+          <a:xfrm>
+            <a:off x="640080" y="5138928"/>
+            <a:ext cx="11064240" cy="1234440"/>
+          </a:xfrm>
+          <a:prstGeom prst="rect">
+            <a:avLst/>
+          </a:prstGeom>
+          <a:noFill/>
+        </p:spPr>
+        <p:txBody>
+          <a:bodyPr wrap="square" lIns="0" tIns="0" rIns="0" bIns="0">
+            <a:spAutoFit/>
+          </a:bodyPr>
+          <a:lstStyle/>
+          <a:p>
+            <a:pPr marL="177800" indent="0">
+              <a:spcAft>
+                <a:spcPts val="150"/>
+              </a:spcAft>
+              <a:buSzPct val="100000"/>
+              <a:buNone/>
+            </a:pPr>
+            <a:r>
+              <a:rPr lang="en-US" sz="1250" b="1" dirty="0">
+                <a:solidFill>
+                  <a:srgbClr val="000000"/>
+                </a:solidFill>
+                <a:latin typeface="Calibri" pitchFamily="34" charset="0"/>
+                <a:ea typeface="Calibri" pitchFamily="34" charset="-122"/>
+                <a:cs typeface="Calibri" pitchFamily="34" charset="-120"/>
+              </a:rPr>
+              <a:t xml:space="preserve">What the comparison shows. </a:t>
+            </a:r>
+            <a:r>
+              <a:rPr lang="en-US" sz="1250" dirty="0">
+                <a:solidFill>
+                  <a:srgbClr val="000000"/>
+                </a:solidFill>
+                <a:latin typeface="Calibri" pitchFamily="34" charset="0"/>
+                <a:ea typeface="Calibri" pitchFamily="34" charset="-122"/>
+                <a:cs typeface="Calibri" pitchFamily="34" charset="-120"/>
+              </a:rPr>
+              <a:t xml:space="preserve">The base paper shapes the gate waveform in TIME; we hold the code constant and add two actuators it does not have. Both clear the threshold — theirs works — but ours clears it by 4.8× more, and ours is the one whose settings can then be searched exhaustively to ask what adaptation is actually worth.</a:t>
+            </a:r>
+          </a:p>
+          <a:p>
+            <a:pPr marL="177800" indent="0">
+              <a:spcAft>
+                <a:spcPts val="0"/>
+              </a:spcAft>
+              <a:buSzPct val="100000"/>
+              <a:buNone/>
+            </a:pPr>
+            <a:r>
+              <a:rPr lang="en-US" sz="1150" b="1" dirty="0">
+                <a:solidFill>
+                  <a:srgbClr val="000000"/>
+                </a:solidFill>
+                <a:latin typeface="Calibri" pitchFamily="34" charset="0"/>
+                <a:ea typeface="Calibri" pitchFamily="34" charset="-122"/>
+                <a:cs typeface="Calibri" pitchFamily="34" charset="-120"/>
+              </a:rPr>
+              <a:t xml:space="preserve">Reproduce: </a:t>
+            </a:r>
+            <a:r>
+              <a:rPr lang="en-US" sz="1150" b="1" dirty="0">
+                <a:solidFill>
+                  <a:srgbClr val="000000"/>
+                </a:solidFill>
+                <a:latin typeface="Calibri" pitchFamily="34" charset="0"/>
+                <a:ea typeface="Calibri" pitchFamily="34" charset="-122"/>
+                <a:cs typeface="Calibri" pitchFamily="34" charset="-120"/>
+              </a:rPr>
+              <a:t xml:space="preserve">python3 scripts/basepaper_compare.py</a:t>
+            </a:r>
+            <a:r>
+              <a:rPr lang="en-US" sz="1150" dirty="0">
+                <a:solidFill>
+                  <a:srgbClr val="000000"/>
+                </a:solidFill>
+                <a:latin typeface="Calibri" pitchFamily="34" charset="0"/>
+                <a:ea typeface="Calibri" pitchFamily="34" charset="-122"/>
+                <a:cs typeface="Calibri" pitchFamily="34" charset="-120"/>
+              </a:rPr>
+              <a:t xml:space="preserve">  — four ngspice runs, prints this table.</a:t>
             </a:r>
           </a:p>
         </p:txBody>
@@ -17268,6 +16798,675 @@
               <a:t>Mark split-up: Problem clarity &amp; relevance (2), Literature survey quality (1), Proposed solution feasibility (1), Presentation quality (1).</a:t>
             </a:r>
             <a:endParaRPr lang="en-US" sz="1500" dirty="0"/>
+          </a:p>
+        </p:txBody>
+      </p:sp>
+    </p:spTree>
+  </p:cSld>
+  <p:clrMapOvr>
+    <a:masterClrMapping/>
+  </p:clrMapOvr>
+</p:sld>
+</file>
+
+<file path=ppt/slides/slide30.xml><?xml version="1.0" encoding="utf-8"?>
+<p:sld xmlns:a="http://schemas.openxmlformats.org/drawingml/2006/main" xmlns:p="http://schemas.openxmlformats.org/presentationml/2006/main" xmlns:r="http://schemas.openxmlformats.org/officeDocument/2006/relationships">
+  <p:cSld>
+    <p:spTree>
+      <p:nvGrpSpPr>
+        <p:cNvPr id="1" name=""/>
+        <p:cNvGrpSpPr/>
+        <p:nvPr/>
+      </p:nvGrpSpPr>
+      <p:grpSpPr/>
+      <p:sp>
+        <p:nvSpPr>
+          <p:cNvPr id="2" name="Text 0"/>
+          <p:cNvSpPr txBox="1"/>
+          <p:nvPr/>
+        </p:nvSpPr>
+        <p:spPr>
+          <a:xfrm>
+            <a:off x="11460175" y="6446520"/>
+            <a:ext cx="457200" cy="274320"/>
+          </a:xfrm>
+          <a:prstGeom prst="rect">
+            <a:avLst/>
+          </a:prstGeom>
+          <a:noFill/>
+          <a:ln/>
+        </p:spPr>
+        <p:txBody>
+          <a:bodyPr wrap="square" lIns="0" tIns="0" rIns="0" bIns="0" rtlCol="0" anchor="ctr"/>
+          <a:lstStyle/>
+          <a:p>
+            <a:pPr marL="0" indent="0" algn="r">
+              <a:buNone/>
+            </a:pPr>
+            <a:r>
+              <a:rPr lang="en-US" sz="1000" dirty="0">
+                <a:solidFill>
+                  <a:srgbClr val="808080"/>
+                </a:solidFill>
+                <a:latin typeface="Calibri" pitchFamily="34" charset="0"/>
+                <a:ea typeface="Calibri" pitchFamily="34" charset="-122"/>
+                <a:cs typeface="Calibri" pitchFamily="34" charset="-120"/>
+              </a:rPr>
+              <a:t>29</a:t>
+            </a:r>
+            <a:endParaRPr lang="en-US" sz="1000" dirty="0"/>
+          </a:p>
+        </p:txBody>
+      </p:sp>
+      <p:sp>
+        <p:nvSpPr>
+          <p:cNvPr id="3" name="Text 1"/>
+          <p:cNvSpPr txBox="1"/>
+          <p:nvPr/>
+        </p:nvSpPr>
+        <p:spPr>
+          <a:xfrm>
+            <a:off x="548640" y="320040"/>
+            <a:ext cx="9601200" cy="685800"/>
+          </a:xfrm>
+          <a:prstGeom prst="rect">
+            <a:avLst/>
+          </a:prstGeom>
+          <a:noFill/>
+          <a:ln/>
+        </p:spPr>
+        <p:txBody>
+          <a:bodyPr wrap="square" lIns="0" tIns="0" rIns="0" bIns="0" rtlCol="0" anchor="ctr"/>
+          <a:lstStyle/>
+          <a:p>
+            <a:pPr marL="0" indent="0">
+              <a:buNone/>
+            </a:pPr>
+            <a:r>
+              <a:rPr lang="en-US" sz="2800" b="1" dirty="0">
+                <a:solidFill>
+                  <a:srgbClr val="1D2F82"/>
+                </a:solidFill>
+                <a:latin typeface="Calibri" pitchFamily="34" charset="0"/>
+                <a:ea typeface="Calibri" pitchFamily="34" charset="-122"/>
+                <a:cs typeface="Calibri" pitchFamily="34" charset="-120"/>
+              </a:rPr>
+              <a:t>References  (16–30)</a:t>
+            </a:r>
+            <a:endParaRPr lang="en-US" sz="2800" dirty="0"/>
+          </a:p>
+        </p:txBody>
+      </p:sp>
+      <p:pic>
+        <p:nvPicPr>
+          <p:cNvPr id="4" name="Image 0" descr="logo.png"/>
+          <p:cNvPicPr>
+            <a:picLocks noChangeAspect="1"/>
+          </p:cNvPicPr>
+          <p:nvPr/>
+        </p:nvPicPr>
+        <p:blipFill>
+          <a:blip r:embed="rId2"/>
+          <a:stretch>
+            <a:fillRect/>
+          </a:stretch>
+        </p:blipFill>
+        <p:spPr>
+          <a:xfrm>
+            <a:off x="10362895" y="320040"/>
+            <a:ext cx="1371600" cy="518746"/>
+          </a:xfrm>
+          <a:prstGeom prst="rect">
+            <a:avLst/>
+          </a:prstGeom>
+        </p:spPr>
+      </p:pic>
+      <p:sp>
+        <p:nvSpPr>
+          <p:cNvPr id="5" name="Text 2"/>
+          <p:cNvSpPr txBox="1"/>
+          <p:nvPr/>
+        </p:nvSpPr>
+        <p:spPr>
+          <a:xfrm>
+            <a:off x="640080" y="1325880"/>
+            <a:ext cx="10881360" cy="4343400"/>
+          </a:xfrm>
+          <a:prstGeom prst="rect">
+            <a:avLst/>
+          </a:prstGeom>
+          <a:noFill/>
+          <a:ln/>
+        </p:spPr>
+        <p:txBody>
+          <a:bodyPr wrap="square" lIns="0" tIns="0" rIns="0" bIns="0" rtlCol="0" anchor="t"/>
+          <a:lstStyle/>
+          <a:p>
+            <a:pPr marL="177800" indent="0">
+              <a:spcAft>
+                <a:spcPts val="60"/>
+              </a:spcAft>
+              <a:buSzPct val="100000"/>
+              <a:buNone/>
+            </a:pPr>
+            <a:r>
+              <a:rPr lang="en-US" sz="900" b="1" dirty="0">
+                <a:solidFill>
+                  <a:srgbClr val="000000"/>
+                </a:solidFill>
+                <a:latin typeface="Calibri" pitchFamily="34" charset="0"/>
+                <a:ea typeface="Calibri" pitchFamily="34" charset="-122"/>
+                <a:cs typeface="Calibri" pitchFamily="34" charset="-120"/>
+              </a:rPr>
+              <a:t xml:space="preserve">[16]  </a:t>
+            </a:r>
+            <a:r>
+              <a:rPr lang="en-US" sz="900" dirty="0">
+                <a:solidFill>
+                  <a:srgbClr val="000000"/>
+                </a:solidFill>
+                <a:latin typeface="Calibri" pitchFamily="34" charset="0"/>
+                <a:ea typeface="Calibri" pitchFamily="34" charset="-122"/>
+                <a:cs typeface="Calibri" pitchFamily="34" charset="-120"/>
+              </a:rPr>
+              <a:t xml:space="preserve">Z. Yuan, H. Li, M. Zhang, Z. Yang, S. Zhao, H. Wang, X. Wang and L. Ding, “Influence of Negative Gate Bias on Crosstalk Spike in SiC MOSFETs Half-Bridge Circuit,” IEEE J. Emerg. Sel. Topics Power Electron., vol. 14, no. 3, pp. 3217–3229, 2026.</a:t>
+            </a:r>
+          </a:p>
+          <a:p>
+            <a:pPr marL="177800" indent="0">
+              <a:spcAft>
+                <a:spcPts val="60"/>
+              </a:spcAft>
+              <a:buSzPct val="100000"/>
+              <a:buNone/>
+            </a:pPr>
+            <a:r>
+              <a:rPr lang="en-US" sz="900" b="1" dirty="0">
+                <a:solidFill>
+                  <a:srgbClr val="000000"/>
+                </a:solidFill>
+                <a:latin typeface="Calibri" pitchFamily="34" charset="0"/>
+                <a:ea typeface="Calibri" pitchFamily="34" charset="-122"/>
+                <a:cs typeface="Calibri" pitchFamily="34" charset="-120"/>
+              </a:rPr>
+              <a:t xml:space="preserve">[17]  </a:t>
+            </a:r>
+            <a:r>
+              <a:rPr lang="en-US" sz="900" dirty="0">
+                <a:solidFill>
+                  <a:srgbClr val="000000"/>
+                </a:solidFill>
+                <a:latin typeface="Calibri" pitchFamily="34" charset="0"/>
+                <a:ea typeface="Calibri" pitchFamily="34" charset="-122"/>
+                <a:cs typeface="Calibri" pitchFamily="34" charset="-120"/>
+              </a:rPr>
+              <a:t xml:space="preserve">L. Zhang, K. Wang, S. Guo and B. Zhu, “A Gate Driver for Crosstalk Suppression of eGaN HEMT Power Devices,” J. Low Power Electron. Appl., vol. 15, no. 3, pp. 38, 2025.</a:t>
+            </a:r>
+          </a:p>
+          <a:p>
+            <a:pPr marL="177800" indent="0">
+              <a:spcAft>
+                <a:spcPts val="60"/>
+              </a:spcAft>
+              <a:buSzPct val="100000"/>
+              <a:buNone/>
+            </a:pPr>
+            <a:r>
+              <a:rPr lang="en-US" sz="900" b="1" dirty="0">
+                <a:solidFill>
+                  <a:srgbClr val="000000"/>
+                </a:solidFill>
+                <a:latin typeface="Calibri" pitchFamily="34" charset="0"/>
+                <a:ea typeface="Calibri" pitchFamily="34" charset="-122"/>
+                <a:cs typeface="Calibri" pitchFamily="34" charset="-120"/>
+              </a:rPr>
+              <a:t xml:space="preserve">[18]  </a:t>
+            </a:r>
+            <a:r>
+              <a:rPr lang="en-US" sz="900" dirty="0">
+                <a:solidFill>
+                  <a:srgbClr val="000000"/>
+                </a:solidFill>
+                <a:latin typeface="Calibri" pitchFamily="34" charset="0"/>
+                <a:ea typeface="Calibri" pitchFamily="34" charset="-122"/>
+                <a:cs typeface="Calibri" pitchFamily="34" charset="-120"/>
+              </a:rPr>
+              <a:t xml:space="preserve">J. Wu, “Parallel arrangement of MOSFETs, effective suppression of crosstalk: A new gate driver topology,” iEnergy, vol. 2, no. 3, pp. 163–163, 2023.</a:t>
+            </a:r>
+          </a:p>
+          <a:p>
+            <a:pPr marL="177800" indent="0">
+              <a:spcAft>
+                <a:spcPts val="60"/>
+              </a:spcAft>
+              <a:buSzPct val="100000"/>
+              <a:buNone/>
+            </a:pPr>
+            <a:r>
+              <a:rPr lang="en-US" sz="900" b="1" dirty="0">
+                <a:solidFill>
+                  <a:srgbClr val="000000"/>
+                </a:solidFill>
+                <a:latin typeface="Calibri" pitchFamily="34" charset="0"/>
+                <a:ea typeface="Calibri" pitchFamily="34" charset="-122"/>
+                <a:cs typeface="Calibri" pitchFamily="34" charset="-120"/>
+              </a:rPr>
+              <a:t xml:space="preserve">[19]  </a:t>
+            </a:r>
+            <a:r>
+              <a:rPr lang="en-US" sz="900" dirty="0">
+                <a:solidFill>
+                  <a:srgbClr val="000000"/>
+                </a:solidFill>
+                <a:latin typeface="Calibri" pitchFamily="34" charset="0"/>
+                <a:ea typeface="Calibri" pitchFamily="34" charset="-122"/>
+                <a:cs typeface="Calibri" pitchFamily="34" charset="-120"/>
+              </a:rPr>
+              <a:t xml:space="preserve">Y. Mikhaylov, G. Buticchi and M. Galea, “A gate driver for parallel connected MOSFETs with crosstalk suppression,” iEnergy, vol. 2, no. 3, pp. 240–250, 2023.</a:t>
+            </a:r>
+          </a:p>
+          <a:p>
+            <a:pPr marL="177800" indent="0">
+              <a:spcAft>
+                <a:spcPts val="60"/>
+              </a:spcAft>
+              <a:buSzPct val="100000"/>
+              <a:buNone/>
+            </a:pPr>
+            <a:r>
+              <a:rPr lang="en-US" sz="900" b="1" dirty="0">
+                <a:solidFill>
+                  <a:srgbClr val="000000"/>
+                </a:solidFill>
+                <a:latin typeface="Calibri" pitchFamily="34" charset="0"/>
+                <a:ea typeface="Calibri" pitchFamily="34" charset="-122"/>
+                <a:cs typeface="Calibri" pitchFamily="34" charset="-120"/>
+              </a:rPr>
+              <a:t xml:space="preserve">[20]  </a:t>
+            </a:r>
+            <a:r>
+              <a:rPr lang="en-US" sz="900" dirty="0">
+                <a:solidFill>
+                  <a:srgbClr val="000000"/>
+                </a:solidFill>
+                <a:latin typeface="Calibri" pitchFamily="34" charset="0"/>
+                <a:ea typeface="Calibri" pitchFamily="34" charset="-122"/>
+                <a:cs typeface="Calibri" pitchFamily="34" charset="-120"/>
+              </a:rPr>
+              <a:t xml:space="preserve">W. Liu and H. Min, “A Load Adaptive Active Gate Driver with Fast-Switching Three-Level Current Source for Overshoot Suppression in GaN-Based Half-Bridge Converters,” IEEE Trans. Power Electron., pp. 1–8, 2026.</a:t>
+            </a:r>
+          </a:p>
+          <a:p>
+            <a:pPr marL="177800" indent="0">
+              <a:spcAft>
+                <a:spcPts val="60"/>
+              </a:spcAft>
+              <a:buSzPct val="100000"/>
+              <a:buNone/>
+            </a:pPr>
+            <a:r>
+              <a:rPr lang="en-US" sz="900" b="1" dirty="0">
+                <a:solidFill>
+                  <a:srgbClr val="000000"/>
+                </a:solidFill>
+                <a:latin typeface="Calibri" pitchFamily="34" charset="0"/>
+                <a:ea typeface="Calibri" pitchFamily="34" charset="-122"/>
+                <a:cs typeface="Calibri" pitchFamily="34" charset="-120"/>
+              </a:rPr>
+              <a:t xml:space="preserve">[21]  </a:t>
+            </a:r>
+            <a:r>
+              <a:rPr lang="en-US" sz="900" dirty="0">
+                <a:solidFill>
+                  <a:srgbClr val="000000"/>
+                </a:solidFill>
+                <a:latin typeface="Calibri" pitchFamily="34" charset="0"/>
+                <a:ea typeface="Calibri" pitchFamily="34" charset="-122"/>
+                <a:cs typeface="Calibri" pitchFamily="34" charset="-120"/>
+              </a:rPr>
+              <a:t xml:space="preserve">R. Chen, F. Wang, H. Bai and L.M. Tolbert, “A Simple Gate Driver Circuit for Turn-on Overvoltage Suppression of 10 kV SiC MOSFETs With Temporarily Lowering Gate Voltage During dv/dt,” IEEE Trans. Ind. Electron., pp. 1–6, 2026.</a:t>
+            </a:r>
+          </a:p>
+          <a:p>
+            <a:pPr marL="177800" indent="0">
+              <a:spcAft>
+                <a:spcPts val="60"/>
+              </a:spcAft>
+              <a:buSzPct val="100000"/>
+              <a:buNone/>
+            </a:pPr>
+            <a:r>
+              <a:rPr lang="en-US" sz="900" b="1" dirty="0">
+                <a:solidFill>
+                  <a:srgbClr val="000000"/>
+                </a:solidFill>
+                <a:latin typeface="Calibri" pitchFamily="34" charset="0"/>
+                <a:ea typeface="Calibri" pitchFamily="34" charset="-122"/>
+                <a:cs typeface="Calibri" pitchFamily="34" charset="-120"/>
+              </a:rPr>
+              <a:t xml:space="preserve">[22]  </a:t>
+            </a:r>
+            <a:r>
+              <a:rPr lang="en-US" sz="900" dirty="0">
+                <a:solidFill>
+                  <a:srgbClr val="000000"/>
+                </a:solidFill>
+                <a:latin typeface="Calibri" pitchFamily="34" charset="0"/>
+                <a:ea typeface="Calibri" pitchFamily="34" charset="-122"/>
+                <a:cs typeface="Calibri" pitchFamily="34" charset="-120"/>
+              </a:rPr>
+              <a:t xml:space="preserve">D. Yu, M. Yang, L. Yin, K. Hu, W. Zhang and Q. Fu, “A Dual-Loop Active Gate Driver With Independent Voltage Slew Rate and Overshoot Control for Switching Loss Optimization of SiC MOSFETs,” IEEE Trans. Ind. Electron., pp. 1–12, 2026.</a:t>
+            </a:r>
+          </a:p>
+          <a:p>
+            <a:pPr marL="177800" indent="0">
+              <a:spcAft>
+                <a:spcPts val="60"/>
+              </a:spcAft>
+              <a:buSzPct val="100000"/>
+              <a:buNone/>
+            </a:pPr>
+            <a:r>
+              <a:rPr lang="en-US" sz="900" b="1" dirty="0">
+                <a:solidFill>
+                  <a:srgbClr val="000000"/>
+                </a:solidFill>
+                <a:latin typeface="Calibri" pitchFamily="34" charset="0"/>
+                <a:ea typeface="Calibri" pitchFamily="34" charset="-122"/>
+                <a:cs typeface="Calibri" pitchFamily="34" charset="-120"/>
+              </a:rPr>
+              <a:t xml:space="preserve">[23]  </a:t>
+            </a:r>
+            <a:r>
+              <a:rPr lang="en-US" sz="900" dirty="0">
+                <a:solidFill>
+                  <a:srgbClr val="000000"/>
+                </a:solidFill>
+                <a:latin typeface="Calibri" pitchFamily="34" charset="0"/>
+                <a:ea typeface="Calibri" pitchFamily="34" charset="-122"/>
+                <a:cs typeface="Calibri" pitchFamily="34" charset="-120"/>
+              </a:rPr>
+              <a:t xml:space="preserve">P. Xiang, R. Hao, J. Cai and X. You, “An Active Gate Driver of SiC MOSFET Module Based on PCB Rogowski Coil for Optimizing Tradeoff Between Overshoot and Switching Loss,” IEEE Trans. Power Electron., vol. 38, no. 1, pp. 245–260, 2023.</a:t>
+            </a:r>
+          </a:p>
+          <a:p>
+            <a:pPr marL="177800" indent="0">
+              <a:spcAft>
+                <a:spcPts val="60"/>
+              </a:spcAft>
+              <a:buSzPct val="100000"/>
+              <a:buNone/>
+            </a:pPr>
+            <a:r>
+              <a:rPr lang="en-US" sz="900" b="1" dirty="0">
+                <a:solidFill>
+                  <a:srgbClr val="000000"/>
+                </a:solidFill>
+                <a:latin typeface="Calibri" pitchFamily="34" charset="0"/>
+                <a:ea typeface="Calibri" pitchFamily="34" charset="-122"/>
+                <a:cs typeface="Calibri" pitchFamily="34" charset="-120"/>
+              </a:rPr>
+              <a:t xml:space="preserve">[24]  </a:t>
+            </a:r>
+            <a:r>
+              <a:rPr lang="en-US" sz="900" dirty="0">
+                <a:solidFill>
+                  <a:srgbClr val="000000"/>
+                </a:solidFill>
+                <a:latin typeface="Calibri" pitchFamily="34" charset="0"/>
+                <a:ea typeface="Calibri" pitchFamily="34" charset="-122"/>
+                <a:cs typeface="Calibri" pitchFamily="34" charset="-120"/>
+              </a:rPr>
+              <a:t xml:space="preserve">S. Fukunaga, H. Takayama and T. Hikihara, “Slew rate control of switching transient for SiC MOSFET in boost converter using digital active gate driver,” IET Power Electron., vol. 16, no. 3, pp. 472–482, 2022.</a:t>
+            </a:r>
+          </a:p>
+          <a:p>
+            <a:pPr marL="177800" indent="0">
+              <a:spcAft>
+                <a:spcPts val="60"/>
+              </a:spcAft>
+              <a:buSzPct val="100000"/>
+              <a:buNone/>
+            </a:pPr>
+            <a:r>
+              <a:rPr lang="en-US" sz="900" b="1" dirty="0">
+                <a:solidFill>
+                  <a:srgbClr val="000000"/>
+                </a:solidFill>
+                <a:latin typeface="Calibri" pitchFamily="34" charset="0"/>
+                <a:ea typeface="Calibri" pitchFamily="34" charset="-122"/>
+                <a:cs typeface="Calibri" pitchFamily="34" charset="-120"/>
+              </a:rPr>
+              <a:t xml:space="preserve">[25]  </a:t>
+            </a:r>
+            <a:r>
+              <a:rPr lang="en-US" sz="900" dirty="0">
+                <a:solidFill>
+                  <a:srgbClr val="000000"/>
+                </a:solidFill>
+                <a:latin typeface="Calibri" pitchFamily="34" charset="0"/>
+                <a:ea typeface="Calibri" pitchFamily="34" charset="-122"/>
+                <a:cs typeface="Calibri" pitchFamily="34" charset="-120"/>
+              </a:rPr>
+              <a:t xml:space="preserve">C. Xu, P. Fu, X. Liao, Z. Zhu and L. Liu, “An Integrated Driver With Real-Time Predictive Dead-Time Optimization Technique for GaN-Based Synchronous Buck Converter,” IEEE J. Emerg. Sel. Topics Power Electron., vol. 13, no. 3, pp. 3173–3183, 2025.</a:t>
+            </a:r>
+          </a:p>
+          <a:p>
+            <a:pPr marL="177800" indent="0">
+              <a:spcAft>
+                <a:spcPts val="60"/>
+              </a:spcAft>
+              <a:buSzPct val="100000"/>
+              <a:buNone/>
+            </a:pPr>
+            <a:r>
+              <a:rPr lang="en-US" sz="900" b="1" dirty="0">
+                <a:solidFill>
+                  <a:srgbClr val="000000"/>
+                </a:solidFill>
+                <a:latin typeface="Calibri" pitchFamily="34" charset="0"/>
+                <a:ea typeface="Calibri" pitchFamily="34" charset="-122"/>
+                <a:cs typeface="Calibri" pitchFamily="34" charset="-120"/>
+              </a:rPr>
+              <a:t xml:space="preserve">[26]  </a:t>
+            </a:r>
+            <a:r>
+              <a:rPr lang="en-US" sz="900" dirty="0">
+                <a:solidFill>
+                  <a:srgbClr val="000000"/>
+                </a:solidFill>
+                <a:latin typeface="Calibri" pitchFamily="34" charset="0"/>
+                <a:ea typeface="Calibri" pitchFamily="34" charset="-122"/>
+                <a:cs typeface="Calibri" pitchFamily="34" charset="-120"/>
+              </a:rPr>
+              <a:t xml:space="preserve">C. Chen, P. Chiu, Y. Chen, P. Wang and Y. Chang, “An Integrated Driver With Adaptive Dead-Time Control for GaN-Based Synchronous Buck Converter,” IEEE Trans. Circuits Syst. II, vol. 69, no. 2, pp. 539–543, 2022.</a:t>
+            </a:r>
+          </a:p>
+          <a:p>
+            <a:pPr marL="177800" indent="0">
+              <a:spcAft>
+                <a:spcPts val="60"/>
+              </a:spcAft>
+              <a:buSzPct val="100000"/>
+              <a:buNone/>
+            </a:pPr>
+            <a:r>
+              <a:rPr lang="en-US" sz="900" b="1" dirty="0">
+                <a:solidFill>
+                  <a:srgbClr val="000000"/>
+                </a:solidFill>
+                <a:latin typeface="Calibri" pitchFamily="34" charset="0"/>
+                <a:ea typeface="Calibri" pitchFamily="34" charset="-122"/>
+                <a:cs typeface="Calibri" pitchFamily="34" charset="-120"/>
+              </a:rPr>
+              <a:t xml:space="preserve">[27]  </a:t>
+            </a:r>
+            <a:r>
+              <a:rPr lang="en-US" sz="900" dirty="0">
+                <a:solidFill>
+                  <a:srgbClr val="000000"/>
+                </a:solidFill>
+                <a:latin typeface="Calibri" pitchFamily="34" charset="0"/>
+                <a:ea typeface="Calibri" pitchFamily="34" charset="-122"/>
+                <a:cs typeface="Calibri" pitchFamily="34" charset="-120"/>
+              </a:rPr>
+              <a:t xml:space="preserve">J. Tan, Z. Zhou and G. Zou, “A Programmable Gate Driver Module-Based Multistage Voltage Regulation SiC MOSFET Switching Strategy,” Electronics, vol. 13, no. 22, pp. 4379, 2024.</a:t>
+            </a:r>
+          </a:p>
+          <a:p>
+            <a:pPr marL="177800" indent="0">
+              <a:spcAft>
+                <a:spcPts val="60"/>
+              </a:spcAft>
+              <a:buSzPct val="100000"/>
+              <a:buNone/>
+            </a:pPr>
+            <a:r>
+              <a:rPr lang="en-US" sz="900" b="1" dirty="0">
+                <a:solidFill>
+                  <a:srgbClr val="000000"/>
+                </a:solidFill>
+                <a:latin typeface="Calibri" pitchFamily="34" charset="0"/>
+                <a:ea typeface="Calibri" pitchFamily="34" charset="-122"/>
+                <a:cs typeface="Calibri" pitchFamily="34" charset="-120"/>
+              </a:rPr>
+              <a:t xml:space="preserve">[28]  </a:t>
+            </a:r>
+            <a:r>
+              <a:rPr lang="en-US" sz="900" dirty="0">
+                <a:solidFill>
+                  <a:srgbClr val="000000"/>
+                </a:solidFill>
+                <a:latin typeface="Calibri" pitchFamily="34" charset="0"/>
+                <a:ea typeface="Calibri" pitchFamily="34" charset="-122"/>
+                <a:cs typeface="Calibri" pitchFamily="34" charset="-120"/>
+              </a:rPr>
+              <a:t xml:space="preserve">C. Chen, P. Wang, S. Li, Y. Chen and Y. Chang, “An Integrated Driver With Bang-Bang Dead-Time Control and Charge Sharing Bootstrap Circuit for GaN Synchronous Buck Converter,” IEEE Trans. Power Electron., vol. 37, no. 8, pp. 9503–9514, 2022.</a:t>
+            </a:r>
+          </a:p>
+          <a:p>
+            <a:pPr marL="177800" indent="0">
+              <a:spcAft>
+                <a:spcPts val="60"/>
+              </a:spcAft>
+              <a:buSzPct val="100000"/>
+              <a:buNone/>
+            </a:pPr>
+            <a:r>
+              <a:rPr lang="en-US" sz="900" b="1" dirty="0">
+                <a:solidFill>
+                  <a:srgbClr val="000000"/>
+                </a:solidFill>
+                <a:latin typeface="Calibri" pitchFamily="34" charset="0"/>
+                <a:ea typeface="Calibri" pitchFamily="34" charset="-122"/>
+                <a:cs typeface="Calibri" pitchFamily="34" charset="-120"/>
+              </a:rPr>
+              <a:t xml:space="preserve">[29]  </a:t>
+            </a:r>
+            <a:r>
+              <a:rPr lang="en-US" sz="900" dirty="0">
+                <a:solidFill>
+                  <a:srgbClr val="000000"/>
+                </a:solidFill>
+                <a:latin typeface="Calibri" pitchFamily="34" charset="0"/>
+                <a:ea typeface="Calibri" pitchFamily="34" charset="-122"/>
+                <a:cs typeface="Calibri" pitchFamily="34" charset="-120"/>
+              </a:rPr>
+              <a:t xml:space="preserve">G.H. Thuc, M. Tsai, C. Chen, J. Fu, W. Wu and W. Lin, “A Current Source Gate Driver with Dual-Edge Adaptive Slew Rate for GaN Devices,” in Proc. 2026 IEEE Applied Power Electronics Conference and Exposition (APEC), 2026.</a:t>
+            </a:r>
+          </a:p>
+          <a:p>
+            <a:pPr marL="177800" indent="0">
+              <a:spcAft>
+                <a:spcPts val="60"/>
+              </a:spcAft>
+              <a:buSzPct val="100000"/>
+              <a:buNone/>
+            </a:pPr>
+            <a:r>
+              <a:rPr lang="en-US" sz="900" b="1" dirty="0">
+                <a:solidFill>
+                  <a:srgbClr val="000000"/>
+                </a:solidFill>
+                <a:latin typeface="Calibri" pitchFamily="34" charset="0"/>
+                <a:ea typeface="Calibri" pitchFamily="34" charset="-122"/>
+                <a:cs typeface="Calibri" pitchFamily="34" charset="-120"/>
+              </a:rPr>
+              <a:t xml:space="preserve">[30]  </a:t>
+            </a:r>
+            <a:r>
+              <a:rPr lang="en-US" sz="900" dirty="0">
+                <a:solidFill>
+                  <a:srgbClr val="000000"/>
+                </a:solidFill>
+                <a:latin typeface="Calibri" pitchFamily="34" charset="0"/>
+                <a:ea typeface="Calibri" pitchFamily="34" charset="-122"/>
+                <a:cs typeface="Calibri" pitchFamily="34" charset="-120"/>
+              </a:rPr>
+              <a:t xml:space="preserve">G. Wu, Y. Huang, Y. Chen and C. Chen, “Closed-loop Slew Rate Control of Active Current Source Gate Driver with Digital Implementation for SiC MOSFET,” in Proc. 2025 IEEE Energy Conversion Conference Congress and Exposition (ECCE), 2025.</a:t>
+            </a:r>
+          </a:p>
+          <a:p>
+            <a:pPr marL="177800" indent="0">
+              <a:spcAft>
+                <a:spcPts val="160"/>
+              </a:spcAft>
+              <a:buSzPct val="100000"/>
+              <a:buNone/>
+            </a:pPr>
+            <a:r>
+              <a:rPr lang="en-US" sz="850" dirty="0">
+                <a:solidFill>
+                  <a:srgbClr val="000000"/>
+                </a:solidFill>
+                <a:latin typeface="Calibri" pitchFamily="34" charset="0"/>
+                <a:ea typeface="Calibri" pitchFamily="34" charset="-122"/>
+                <a:cs typeface="Calibri" pitchFamily="34" charset="-120"/>
+              </a:rPr>
+              <a:t xml:space="preserve">All 30 verified against the publisher record — authors, volume, issue and pages resolved through Crossref by DOI and title, not transcribed by hand.</a:t>
+            </a:r>
+          </a:p>
+        </p:txBody>
+      </p:sp>
+      <p:sp>
+        <p:nvSpPr>
+          <p:cNvPr id="6" name="Text 3"/>
+          <p:cNvSpPr txBox="1"/>
+          <p:nvPr/>
+        </p:nvSpPr>
+        <p:spPr>
+          <a:xfrm>
+            <a:off x="640080" y="5806440"/>
+            <a:ext cx="10881360" cy="365760"/>
+          </a:xfrm>
+          <a:prstGeom prst="rect">
+            <a:avLst/>
+          </a:prstGeom>
+          <a:noFill/>
+          <a:ln/>
+        </p:spPr>
+        <p:txBody>
+          <a:bodyPr wrap="square" lIns="0" tIns="0" rIns="0" bIns="0" rtlCol="0" anchor="ctr"/>
+          <a:lstStyle/>
+          <a:p>
+            <a:pPr marL="177800" indent="0">
+              <a:spcAft>
+                <a:spcPts val="0"/>
+              </a:spcAft>
+              <a:buSzPct val="100000"/>
+              <a:buNone/>
+            </a:pPr>
+            <a:r>
+              <a:rPr lang="en-US" sz="1200" dirty="0">
+                <a:solidFill>
+                  <a:srgbClr val="000000"/>
+                </a:solidFill>
+                <a:latin typeface="Calibri" pitchFamily="34" charset="0"/>
+                <a:ea typeface="Calibri" pitchFamily="34" charset="-122"/>
+                <a:cs typeface="Calibri" pitchFamily="34" charset="-120"/>
+              </a:rPr>
+              <a:t xml:space="preserve"/>
+            </a:r>
           </a:p>
         </p:txBody>
       </p:sp>
@@ -22361,7 +22560,7 @@
                 <a:ea typeface="Calibri" pitchFamily="34" charset="-122"/>
                 <a:cs typeface="Calibri" pitchFamily="34" charset="-120"/>
               </a:rPr>
-              <a:t>9</a:t>
+              <a:t>10</a:t>
             </a:r>
             <a:endParaRPr lang="en-US" sz="1000" dirty="0"/>
           </a:p>
@@ -22563,7 +22762,7 @@
                 <a:ea typeface="Calibri" pitchFamily="34" charset="-122"/>
                 <a:cs typeface="Calibri" pitchFamily="34" charset="-120"/>
               </a:rPr>
-              <a:t>14</a:t>
+              <a:t>15</a:t>
             </a:r>
             <a:endParaRPr lang="en-US" sz="1000" dirty="0"/>
           </a:p>

--- a/review/Review1_GaN_Segmented_Gate_Driver.pptx
+++ b/review/Review1_GaN_Segmented_Gate_Driver.pptx
@@ -11,9 +11,11 @@
     <p:sldId id="256" r:id="rId2"/>
     <p:sldId id="257" r:id="rId3"/>
     <p:sldId id="258" r:id="rId4"/>
+    <p:sldId id="285" r:id="rId36"/>
     <p:sldId id="259" r:id="rId5"/>
     <p:sldId id="260" r:id="rId6"/>
     <p:sldId id="267" r:id="rId18"/>
+    <p:sldId id="286" r:id="rId37"/>
     <p:sldId id="283" r:id="rId34"/>
     <p:sldId id="261" r:id="rId7"/>
     <p:sldId id="281" r:id="rId32"/>
@@ -24,6 +26,7 @@
     <p:sldId id="278" r:id="rId29"/>
     <p:sldId id="262" r:id="rId8"/>
     <p:sldId id="272" r:id="rId23"/>
+    <p:sldId id="287" r:id="rId38"/>
     <p:sldId id="282" r:id="rId33"/>
     <p:sldId id="273" r:id="rId24"/>
     <p:sldId id="263" r:id="rId9"/>
@@ -31,12 +34,13 @@
     <p:sldId id="275" r:id="rId26"/>
     <p:sldId id="276" r:id="rId27"/>
     <p:sldId id="264" r:id="rId10"/>
+    <p:sldId id="288" r:id="rId39"/>
     <p:sldId id="268" r:id="rId19"/>
+    <p:sldId id="289" r:id="rId40"/>
     <p:sldId id="269" r:id="rId20"/>
     <p:sldId id="270" r:id="rId21"/>
     <p:sldId id="271" r:id="rId22"/>
     <p:sldId id="265" r:id="rId11"/>
-    <p:sldId id="285" r:id="rId36"/>
     <p:sldId id="266" r:id="rId12"/>
   </p:sldIdLst>
   <p:sldSz cx="12192000" cy="6858000"/>
@@ -2465,7 +2469,7 @@
                 <a:ea typeface="Calibri" pitchFamily="34" charset="-122"/>
                 <a:cs typeface="Calibri" pitchFamily="34" charset="-120"/>
               </a:rPr>
-              <a:t>16</a:t>
+              <a:t>18</a:t>
             </a:r>
             <a:endParaRPr lang="en-US" sz="1000" dirty="0"/>
           </a:p>
@@ -2848,7 +2852,7 @@
                 <a:ea typeface="Calibri" pitchFamily="34" charset="-122"/>
                 <a:cs typeface="Calibri" pitchFamily="34" charset="-120"/>
               </a:rPr>
-              <a:t>18</a:t>
+              <a:t>21</a:t>
             </a:r>
             <a:endParaRPr lang="en-US" sz="1000" dirty="0"/>
           </a:p>
@@ -3271,7 +3275,7 @@
                 <a:ea typeface="Calibri" pitchFamily="34" charset="-122"/>
                 <a:cs typeface="Calibri" pitchFamily="34" charset="-120"/>
               </a:rPr>
-              <a:t>19</a:t>
+              <a:t>22</a:t>
             </a:r>
             <a:endParaRPr lang="en-US" sz="1000" dirty="0"/>
           </a:p>
@@ -3787,7 +3791,7 @@
                 <a:ea typeface="Calibri" pitchFamily="34" charset="-122"/>
                 <a:cs typeface="Calibri" pitchFamily="34" charset="-120"/>
               </a:rPr>
-              <a:t>21</a:t>
+              <a:t>24</a:t>
             </a:r>
             <a:endParaRPr lang="en-US" sz="1000" dirty="0"/>
           </a:p>
@@ -4371,7 +4375,7 @@
                 <a:ea typeface="Calibri" pitchFamily="34" charset="-122"/>
                 <a:cs typeface="Calibri" pitchFamily="34" charset="-120"/>
               </a:rPr>
-              <a:t>22</a:t>
+              <a:t>25</a:t>
             </a:r>
             <a:endParaRPr lang="en-US" sz="1000" dirty="0"/>
           </a:p>
@@ -5175,7 +5179,7 @@
                 <a:ea typeface="Calibri" pitchFamily="34" charset="-122"/>
                 <a:cs typeface="Calibri" pitchFamily="34" charset="-120"/>
               </a:rPr>
-              <a:t>23</a:t>
+              <a:t>26</a:t>
             </a:r>
             <a:endParaRPr lang="en-US" sz="1000" dirty="0"/>
           </a:p>
@@ -5421,7 +5425,7 @@
                 <a:ea typeface="Calibri" pitchFamily="34" charset="-122"/>
                 <a:cs typeface="Calibri" pitchFamily="34" charset="-120"/>
               </a:rPr>
-              <a:t>24</a:t>
+              <a:t>28</a:t>
             </a:r>
             <a:endParaRPr lang="en-US" sz="1000" dirty="0"/>
           </a:p>
@@ -7400,7 +7404,7 @@
                 <a:ea typeface="Calibri" pitchFamily="34" charset="-122"/>
                 <a:cs typeface="Calibri" pitchFamily="34" charset="-120"/>
               </a:rPr>
-              <a:t>25</a:t>
+              <a:t>30</a:t>
             </a:r>
             <a:endParaRPr lang="en-US" sz="1000" dirty="0"/>
           </a:p>
@@ -7842,7 +7846,7 @@
                 <a:ea typeface="Calibri" pitchFamily="34" charset="-122"/>
                 <a:cs typeface="Calibri" pitchFamily="34" charset="-120"/>
               </a:rPr>
-              <a:t>26</a:t>
+              <a:t>31</a:t>
             </a:r>
             <a:endParaRPr lang="en-US" sz="1000" dirty="0"/>
           </a:p>
@@ -8363,7 +8367,7 @@
                 <a:ea typeface="Calibri" pitchFamily="34" charset="-122"/>
                 <a:cs typeface="Calibri" pitchFamily="34" charset="-120"/>
               </a:rPr>
-              <a:t>27</a:t>
+              <a:t>32</a:t>
             </a:r>
             <a:endParaRPr lang="en-US" sz="1000" dirty="0"/>
           </a:p>
@@ -9612,7 +9616,7 @@
                 <a:ea typeface="Calibri" pitchFamily="34" charset="-122"/>
                 <a:cs typeface="Calibri" pitchFamily="34" charset="-120"/>
               </a:rPr>
-              <a:t>28</a:t>
+              <a:t>33</a:t>
             </a:r>
             <a:endParaRPr lang="en-US" sz="1000" dirty="0"/>
           </a:p>
@@ -10287,7 +10291,7 @@
                 <a:ea typeface="Calibri" pitchFamily="34" charset="-122"/>
                 <a:cs typeface="Calibri" pitchFamily="34" charset="-120"/>
               </a:rPr>
-              <a:t>30</a:t>
+              <a:t>34</a:t>
             </a:r>
             <a:endParaRPr lang="en-US" sz="1000" dirty="0"/>
           </a:p>
@@ -10407,7 +10411,7 @@
                 <a:ea typeface="Calibri" pitchFamily="34" charset="-122"/>
                 <a:cs typeface="Calibri" pitchFamily="34" charset="-120"/>
               </a:rPr>
-              <a:t>12</a:t>
+              <a:t>14</a:t>
             </a:r>
             <a:endParaRPr lang="en-US" sz="1000" dirty="0"/>
           </a:p>
@@ -11763,7 +11767,7 @@
                 <a:ea typeface="Calibri" pitchFamily="34" charset="-122"/>
                 <a:cs typeface="Calibri" pitchFamily="34" charset="-120"/>
               </a:rPr>
-              <a:t>14</a:t>
+              <a:t>16</a:t>
             </a:r>
             <a:endParaRPr lang="en-US" sz="1000" dirty="0"/>
           </a:p>
@@ -13023,7 +13027,7 @@
                 <a:ea typeface="Calibri" pitchFamily="34" charset="-122"/>
                 <a:cs typeface="Calibri" pitchFamily="34" charset="-120"/>
               </a:rPr>
-              <a:t>11</a:t>
+              <a:t>13</a:t>
             </a:r>
             <a:endParaRPr lang="en-US" sz="1000" dirty="0"/>
           </a:p>
@@ -13309,7 +13313,7 @@
                 <a:ea typeface="Calibri" pitchFamily="34" charset="-122"/>
                 <a:cs typeface="Calibri" pitchFamily="34" charset="-120"/>
               </a:rPr>
-              <a:t>20</a:t>
+              <a:t>23</a:t>
             </a:r>
             <a:endParaRPr lang="en-US" sz="1000" dirty="0"/>
           </a:p>
@@ -13771,7 +13775,7 @@
                 <a:ea typeface="Calibri" pitchFamily="34" charset="-122"/>
                 <a:cs typeface="Calibri" pitchFamily="34" charset="-120"/>
               </a:rPr>
-              <a:t>9</a:t>
+              <a:t>11</a:t>
             </a:r>
             <a:endParaRPr lang="en-US" sz="1000" dirty="0"/>
           </a:p>
@@ -13969,7 +13973,7 @@
                 <a:ea typeface="Calibri" pitchFamily="34" charset="-122"/>
                 <a:cs typeface="Calibri" pitchFamily="34" charset="-120"/>
               </a:rPr>
-              <a:t>17</a:t>
+              <a:t>20</a:t>
             </a:r>
             <a:endParaRPr lang="en-US" sz="1000" dirty="0"/>
           </a:p>
@@ -15118,7 +15122,7 @@
                 <a:ea typeface="Calibri" pitchFamily="34" charset="-122"/>
                 <a:cs typeface="Calibri" pitchFamily="34" charset="-120"/>
               </a:rPr>
-              <a:t xml:space="preserve">7</a:t>
+              <a:t xml:space="preserve">9</a:t>
             </a:r>
           </a:p>
         </p:txBody>
@@ -15763,7 +15767,7 @@
                 <a:ea typeface="Calibri" pitchFamily="34" charset="-122"/>
                 <a:cs typeface="Calibri" pitchFamily="34" charset="-120"/>
               </a:rPr>
-              <a:t xml:space="preserve">13</a:t>
+              <a:t xml:space="preserve">15</a:t>
             </a:r>
           </a:p>
         </p:txBody>
@@ -16821,6 +16825,654 @@
       <p:grpSpPr/>
       <p:sp>
         <p:nvSpPr>
+          <p:cNvPr id="2" name="Rectangle 1"/>
+          <p:cNvSpPr/>
+          <p:nvPr/>
+        </p:nvSpPr>
+        <p:spPr>
+          <a:xfrm>
+            <a:off x="0" y="0"/>
+            <a:ext cx="12191695" cy="6858000"/>
+          </a:xfrm>
+          <a:prstGeom prst="rect">
+            <a:avLst/>
+          </a:prstGeom>
+          <a:solidFill>
+            <a:srgbClr val="14233D"/>
+          </a:solidFill>
+          <a:ln>
+            <a:noFill/>
+          </a:ln>
+          <a:effectLst/>
+        </p:spPr>
+        <p:style>
+          <a:lnRef idx="1">
+            <a:schemeClr val="accent1"/>
+          </a:lnRef>
+          <a:fillRef idx="3">
+            <a:schemeClr val="accent1"/>
+          </a:fillRef>
+          <a:effectRef idx="2">
+            <a:schemeClr val="accent1"/>
+          </a:effectRef>
+          <a:fontRef idx="minor">
+            <a:schemeClr val="lt1"/>
+          </a:fontRef>
+        </p:style>
+        <p:txBody>
+          <a:bodyPr rtlCol="0" anchor="ctr"/>
+          <a:lstStyle/>
+          <a:p/>
+        </p:txBody>
+      </p:sp>
+      <p:sp>
+        <p:nvSpPr>
+          <p:cNvPr id="3" name="TextBox 2"/>
+          <p:cNvSpPr txBox="1"/>
+          <p:nvPr/>
+        </p:nvSpPr>
+        <p:spPr>
+          <a:xfrm>
+            <a:off x="1188720" y="1874519"/>
+            <a:ext cx="2743200" cy="1371600"/>
+          </a:xfrm>
+          <a:prstGeom prst="rect">
+            <a:avLst/>
+          </a:prstGeom>
+          <a:noFill/>
+        </p:spPr>
+        <p:txBody>
+          <a:bodyPr wrap="square">
+            <a:spAutoFit/>
+          </a:bodyPr>
+          <a:lstStyle/>
+          <a:p>
+            <a:r>
+              <a:rPr sz="6600" b="1" i="0">
+                <a:solidFill>
+                  <a:srgbClr val="6B7C93"/>
+                </a:solidFill>
+                <a:latin typeface="Calibri"/>
+              </a:rPr>
+              <a:t>01</a:t>
+            </a:r>
+          </a:p>
+        </p:txBody>
+      </p:sp>
+      <p:sp>
+        <p:nvSpPr>
+          <p:cNvPr id="4" name="TextBox 3"/>
+          <p:cNvSpPr txBox="1"/>
+          <p:nvPr/>
+        </p:nvSpPr>
+        <p:spPr>
+          <a:xfrm>
+            <a:off x="1188720" y="3063240"/>
+            <a:ext cx="9692640" cy="1005840"/>
+          </a:xfrm>
+          <a:prstGeom prst="rect">
+            <a:avLst/>
+          </a:prstGeom>
+          <a:noFill/>
+        </p:spPr>
+        <p:txBody>
+          <a:bodyPr wrap="square">
+            <a:spAutoFit/>
+          </a:bodyPr>
+          <a:lstStyle/>
+          <a:p>
+            <a:r>
+              <a:rPr sz="4400" b="1" i="0">
+                <a:solidFill>
+                  <a:srgbClr val="F4F2EE"/>
+                </a:solidFill>
+                <a:latin typeface="Calibri"/>
+              </a:rPr>
+              <a:t>The problem</a:t>
+            </a:r>
+          </a:p>
+        </p:txBody>
+      </p:sp>
+      <p:sp>
+        <p:nvSpPr>
+          <p:cNvPr id="5" name="TextBox 4"/>
+          <p:cNvSpPr txBox="1"/>
+          <p:nvPr/>
+        </p:nvSpPr>
+        <p:spPr>
+          <a:xfrm>
+            <a:off x="1280160" y="4160520"/>
+            <a:ext cx="9509760" cy="731520"/>
+          </a:xfrm>
+          <a:prstGeom prst="rect">
+            <a:avLst/>
+          </a:prstGeom>
+          <a:noFill/>
+        </p:spPr>
+        <p:txBody>
+          <a:bodyPr wrap="square">
+            <a:spAutoFit/>
+          </a:bodyPr>
+          <a:lstStyle/>
+          <a:p>
+            <a:r>
+              <a:rPr sz="1700" b="0" i="0">
+                <a:solidFill>
+                  <a:srgbClr val="6B7C93"/>
+                </a:solidFill>
+                <a:latin typeface="Calibri"/>
+              </a:rPr>
+              <a:t>A real failure, and the question nobody has answered</a:t>
+            </a:r>
+          </a:p>
+        </p:txBody>
+      </p:sp>
+    </p:spTree>
+  </p:cSld>
+  <p:clrMapOvr>
+    <a:masterClrMapping/>
+  </p:clrMapOvr>
+</p:sld>
+</file>
+
+<file path=ppt/slides/slide31.xml><?xml version="1.0" encoding="utf-8"?>
+<p:sld xmlns:a="http://schemas.openxmlformats.org/drawingml/2006/main" xmlns:p="http://schemas.openxmlformats.org/presentationml/2006/main" xmlns:r="http://schemas.openxmlformats.org/officeDocument/2006/relationships">
+  <p:cSld>
+    <p:spTree>
+      <p:nvGrpSpPr>
+        <p:cNvPr id="1" name=""/>
+        <p:cNvGrpSpPr/>
+        <p:nvPr/>
+      </p:nvGrpSpPr>
+      <p:grpSpPr/>
+      <p:sp>
+        <p:nvSpPr>
+          <p:cNvPr id="2" name="Rectangle 1"/>
+          <p:cNvSpPr/>
+          <p:nvPr/>
+        </p:nvSpPr>
+        <p:spPr>
+          <a:xfrm>
+            <a:off x="0" y="0"/>
+            <a:ext cx="12191695" cy="6858000"/>
+          </a:xfrm>
+          <a:prstGeom prst="rect">
+            <a:avLst/>
+          </a:prstGeom>
+          <a:solidFill>
+            <a:srgbClr val="14233D"/>
+          </a:solidFill>
+          <a:ln>
+            <a:noFill/>
+          </a:ln>
+          <a:effectLst/>
+        </p:spPr>
+        <p:style>
+          <a:lnRef idx="1">
+            <a:schemeClr val="accent1"/>
+          </a:lnRef>
+          <a:fillRef idx="3">
+            <a:schemeClr val="accent1"/>
+          </a:fillRef>
+          <a:effectRef idx="2">
+            <a:schemeClr val="accent1"/>
+          </a:effectRef>
+          <a:fontRef idx="minor">
+            <a:schemeClr val="lt1"/>
+          </a:fontRef>
+        </p:style>
+        <p:txBody>
+          <a:bodyPr rtlCol="0" anchor="ctr"/>
+          <a:lstStyle/>
+          <a:p/>
+        </p:txBody>
+      </p:sp>
+      <p:sp>
+        <p:nvSpPr>
+          <p:cNvPr id="3" name="TextBox 2"/>
+          <p:cNvSpPr txBox="1"/>
+          <p:nvPr/>
+        </p:nvSpPr>
+        <p:spPr>
+          <a:xfrm>
+            <a:off x="1188720" y="1874519"/>
+            <a:ext cx="2743200" cy="1371600"/>
+          </a:xfrm>
+          <a:prstGeom prst="rect">
+            <a:avLst/>
+          </a:prstGeom>
+          <a:noFill/>
+        </p:spPr>
+        <p:txBody>
+          <a:bodyPr wrap="square">
+            <a:spAutoFit/>
+          </a:bodyPr>
+          <a:lstStyle/>
+          <a:p>
+            <a:r>
+              <a:rPr sz="6600" b="1" i="0">
+                <a:solidFill>
+                  <a:srgbClr val="6B7C93"/>
+                </a:solidFill>
+                <a:latin typeface="Calibri"/>
+              </a:rPr>
+              <a:t>02</a:t>
+            </a:r>
+          </a:p>
+        </p:txBody>
+      </p:sp>
+      <p:sp>
+        <p:nvSpPr>
+          <p:cNvPr id="4" name="TextBox 3"/>
+          <p:cNvSpPr txBox="1"/>
+          <p:nvPr/>
+        </p:nvSpPr>
+        <p:spPr>
+          <a:xfrm>
+            <a:off x="1188720" y="3063240"/>
+            <a:ext cx="9692640" cy="1005840"/>
+          </a:xfrm>
+          <a:prstGeom prst="rect">
+            <a:avLst/>
+          </a:prstGeom>
+          <a:noFill/>
+        </p:spPr>
+        <p:txBody>
+          <a:bodyPr wrap="square">
+            <a:spAutoFit/>
+          </a:bodyPr>
+          <a:lstStyle/>
+          <a:p>
+            <a:r>
+              <a:rPr sz="4400" b="1" i="0">
+                <a:solidFill>
+                  <a:srgbClr val="F4F2EE"/>
+                </a:solidFill>
+                <a:latin typeface="Calibri"/>
+              </a:rPr>
+              <a:t>What we built</a:t>
+            </a:r>
+          </a:p>
+        </p:txBody>
+      </p:sp>
+      <p:sp>
+        <p:nvSpPr>
+          <p:cNvPr id="5" name="TextBox 4"/>
+          <p:cNvSpPr txBox="1"/>
+          <p:nvPr/>
+        </p:nvSpPr>
+        <p:spPr>
+          <a:xfrm>
+            <a:off x="1280160" y="4160520"/>
+            <a:ext cx="9509760" cy="731520"/>
+          </a:xfrm>
+          <a:prstGeom prst="rect">
+            <a:avLst/>
+          </a:prstGeom>
+          <a:noFill/>
+        </p:spPr>
+        <p:txBody>
+          <a:bodyPr wrap="square">
+            <a:spAutoFit/>
+          </a:bodyPr>
+          <a:lstStyle/>
+          <a:p>
+            <a:r>
+              <a:rPr sz="1700" b="0" i="0">
+                <a:solidFill>
+                  <a:srgbClr val="6B7C93"/>
+                </a:solidFill>
+                <a:latin typeface="Calibri"/>
+              </a:rPr>
+              <a:t>A 720-point control word, and an exhaustive search</a:t>
+            </a:r>
+          </a:p>
+        </p:txBody>
+      </p:sp>
+    </p:spTree>
+  </p:cSld>
+  <p:clrMapOvr>
+    <a:masterClrMapping/>
+  </p:clrMapOvr>
+</p:sld>
+</file>
+
+<file path=ppt/slides/slide32.xml><?xml version="1.0" encoding="utf-8"?>
+<p:sld xmlns:a="http://schemas.openxmlformats.org/drawingml/2006/main" xmlns:p="http://schemas.openxmlformats.org/presentationml/2006/main" xmlns:r="http://schemas.openxmlformats.org/officeDocument/2006/relationships">
+  <p:cSld>
+    <p:spTree>
+      <p:nvGrpSpPr>
+        <p:cNvPr id="1" name=""/>
+        <p:cNvGrpSpPr/>
+        <p:nvPr/>
+      </p:nvGrpSpPr>
+      <p:grpSpPr/>
+      <p:sp>
+        <p:nvSpPr>
+          <p:cNvPr id="2" name="Rectangle 1"/>
+          <p:cNvSpPr/>
+          <p:nvPr/>
+        </p:nvSpPr>
+        <p:spPr>
+          <a:xfrm>
+            <a:off x="0" y="0"/>
+            <a:ext cx="12191695" cy="6858000"/>
+          </a:xfrm>
+          <a:prstGeom prst="rect">
+            <a:avLst/>
+          </a:prstGeom>
+          <a:solidFill>
+            <a:srgbClr val="14233D"/>
+          </a:solidFill>
+          <a:ln>
+            <a:noFill/>
+          </a:ln>
+          <a:effectLst/>
+        </p:spPr>
+        <p:style>
+          <a:lnRef idx="1">
+            <a:schemeClr val="accent1"/>
+          </a:lnRef>
+          <a:fillRef idx="3">
+            <a:schemeClr val="accent1"/>
+          </a:fillRef>
+          <a:effectRef idx="2">
+            <a:schemeClr val="accent1"/>
+          </a:effectRef>
+          <a:fontRef idx="minor">
+            <a:schemeClr val="lt1"/>
+          </a:fontRef>
+        </p:style>
+        <p:txBody>
+          <a:bodyPr rtlCol="0" anchor="ctr"/>
+          <a:lstStyle/>
+          <a:p/>
+        </p:txBody>
+      </p:sp>
+      <p:sp>
+        <p:nvSpPr>
+          <p:cNvPr id="3" name="TextBox 2"/>
+          <p:cNvSpPr txBox="1"/>
+          <p:nvPr/>
+        </p:nvSpPr>
+        <p:spPr>
+          <a:xfrm>
+            <a:off x="1188720" y="1874519"/>
+            <a:ext cx="2743200" cy="1371600"/>
+          </a:xfrm>
+          <a:prstGeom prst="rect">
+            <a:avLst/>
+          </a:prstGeom>
+          <a:noFill/>
+        </p:spPr>
+        <p:txBody>
+          <a:bodyPr wrap="square">
+            <a:spAutoFit/>
+          </a:bodyPr>
+          <a:lstStyle/>
+          <a:p>
+            <a:r>
+              <a:rPr sz="6600" b="1" i="0">
+                <a:solidFill>
+                  <a:srgbClr val="6B7C93"/>
+                </a:solidFill>
+                <a:latin typeface="Calibri"/>
+              </a:rPr>
+              <a:t>03</a:t>
+            </a:r>
+          </a:p>
+        </p:txBody>
+      </p:sp>
+      <p:sp>
+        <p:nvSpPr>
+          <p:cNvPr id="4" name="TextBox 3"/>
+          <p:cNvSpPr txBox="1"/>
+          <p:nvPr/>
+        </p:nvSpPr>
+        <p:spPr>
+          <a:xfrm>
+            <a:off x="1188720" y="3063240"/>
+            <a:ext cx="9692640" cy="1005840"/>
+          </a:xfrm>
+          <a:prstGeom prst="rect">
+            <a:avLst/>
+          </a:prstGeom>
+          <a:noFill/>
+        </p:spPr>
+        <p:txBody>
+          <a:bodyPr wrap="square">
+            <a:spAutoFit/>
+          </a:bodyPr>
+          <a:lstStyle/>
+          <a:p>
+            <a:r>
+              <a:rPr sz="4400" b="1" i="0">
+                <a:solidFill>
+                  <a:srgbClr val="F4F2EE"/>
+                </a:solidFill>
+                <a:latin typeface="Calibri"/>
+              </a:rPr>
+              <a:t>What we found</a:t>
+            </a:r>
+          </a:p>
+        </p:txBody>
+      </p:sp>
+      <p:sp>
+        <p:nvSpPr>
+          <p:cNvPr id="5" name="TextBox 4"/>
+          <p:cNvSpPr txBox="1"/>
+          <p:nvPr/>
+        </p:nvSpPr>
+        <p:spPr>
+          <a:xfrm>
+            <a:off x="1280160" y="4160520"/>
+            <a:ext cx="9509760" cy="731520"/>
+          </a:xfrm>
+          <a:prstGeom prst="rect">
+            <a:avLst/>
+          </a:prstGeom>
+          <a:noFill/>
+        </p:spPr>
+        <p:txBody>
+          <a:bodyPr wrap="square">
+            <a:spAutoFit/>
+          </a:bodyPr>
+          <a:lstStyle/>
+          <a:p>
+            <a:r>
+              <a:rPr sz="1700" b="0" i="0">
+                <a:solidFill>
+                  <a:srgbClr val="6B7C93"/>
+                </a:solidFill>
+                <a:latin typeface="Calibri"/>
+              </a:rPr>
+              <a:t>Choosing well beats adapting — and by how much</a:t>
+            </a:r>
+          </a:p>
+        </p:txBody>
+      </p:sp>
+    </p:spTree>
+  </p:cSld>
+  <p:clrMapOvr>
+    <a:masterClrMapping/>
+  </p:clrMapOvr>
+</p:sld>
+</file>
+
+<file path=ppt/slides/slide33.xml><?xml version="1.0" encoding="utf-8"?>
+<p:sld xmlns:a="http://schemas.openxmlformats.org/drawingml/2006/main" xmlns:p="http://schemas.openxmlformats.org/presentationml/2006/main" xmlns:r="http://schemas.openxmlformats.org/officeDocument/2006/relationships">
+  <p:cSld>
+    <p:spTree>
+      <p:nvGrpSpPr>
+        <p:cNvPr id="1" name=""/>
+        <p:cNvGrpSpPr/>
+        <p:nvPr/>
+      </p:nvGrpSpPr>
+      <p:grpSpPr/>
+      <p:sp>
+        <p:nvSpPr>
+          <p:cNvPr id="2" name="Rectangle 1"/>
+          <p:cNvSpPr/>
+          <p:nvPr/>
+        </p:nvSpPr>
+        <p:spPr>
+          <a:xfrm>
+            <a:off x="0" y="0"/>
+            <a:ext cx="12191695" cy="6858000"/>
+          </a:xfrm>
+          <a:prstGeom prst="rect">
+            <a:avLst/>
+          </a:prstGeom>
+          <a:solidFill>
+            <a:srgbClr val="14233D"/>
+          </a:solidFill>
+          <a:ln>
+            <a:noFill/>
+          </a:ln>
+          <a:effectLst/>
+        </p:spPr>
+        <p:style>
+          <a:lnRef idx="1">
+            <a:schemeClr val="accent1"/>
+          </a:lnRef>
+          <a:fillRef idx="3">
+            <a:schemeClr val="accent1"/>
+          </a:fillRef>
+          <a:effectRef idx="2">
+            <a:schemeClr val="accent1"/>
+          </a:effectRef>
+          <a:fontRef idx="minor">
+            <a:schemeClr val="lt1"/>
+          </a:fontRef>
+        </p:style>
+        <p:txBody>
+          <a:bodyPr rtlCol="0" anchor="ctr"/>
+          <a:lstStyle/>
+          <a:p/>
+        </p:txBody>
+      </p:sp>
+      <p:sp>
+        <p:nvSpPr>
+          <p:cNvPr id="3" name="TextBox 2"/>
+          <p:cNvSpPr txBox="1"/>
+          <p:nvPr/>
+        </p:nvSpPr>
+        <p:spPr>
+          <a:xfrm>
+            <a:off x="1188720" y="1874519"/>
+            <a:ext cx="2743200" cy="1371600"/>
+          </a:xfrm>
+          <a:prstGeom prst="rect">
+            <a:avLst/>
+          </a:prstGeom>
+          <a:noFill/>
+        </p:spPr>
+        <p:txBody>
+          <a:bodyPr wrap="square">
+            <a:spAutoFit/>
+          </a:bodyPr>
+          <a:lstStyle/>
+          <a:p>
+            <a:r>
+              <a:rPr sz="6600" b="1" i="0">
+                <a:solidFill>
+                  <a:srgbClr val="6B7C93"/>
+                </a:solidFill>
+                <a:latin typeface="Calibri"/>
+              </a:rPr>
+              <a:t>04</a:t>
+            </a:r>
+          </a:p>
+        </p:txBody>
+      </p:sp>
+      <p:sp>
+        <p:nvSpPr>
+          <p:cNvPr id="4" name="TextBox 3"/>
+          <p:cNvSpPr txBox="1"/>
+          <p:nvPr/>
+        </p:nvSpPr>
+        <p:spPr>
+          <a:xfrm>
+            <a:off x="1188720" y="3063240"/>
+            <a:ext cx="9692640" cy="1005840"/>
+          </a:xfrm>
+          <a:prstGeom prst="rect">
+            <a:avLst/>
+          </a:prstGeom>
+          <a:noFill/>
+        </p:spPr>
+        <p:txBody>
+          <a:bodyPr wrap="square">
+            <a:spAutoFit/>
+          </a:bodyPr>
+          <a:lstStyle/>
+          <a:p>
+            <a:r>
+              <a:rPr sz="4400" b="1" i="0">
+                <a:solidFill>
+                  <a:srgbClr val="F4F2EE"/>
+                </a:solidFill>
+                <a:latin typeface="Calibri"/>
+              </a:rPr>
+              <a:t>Where this goes</a:t>
+            </a:r>
+          </a:p>
+        </p:txBody>
+      </p:sp>
+      <p:sp>
+        <p:nvSpPr>
+          <p:cNvPr id="5" name="TextBox 4"/>
+          <p:cNvSpPr txBox="1"/>
+          <p:nvPr/>
+        </p:nvSpPr>
+        <p:spPr>
+          <a:xfrm>
+            <a:off x="1280160" y="4160520"/>
+            <a:ext cx="9509760" cy="731520"/>
+          </a:xfrm>
+          <a:prstGeom prst="rect">
+            <a:avLst/>
+          </a:prstGeom>
+          <a:noFill/>
+        </p:spPr>
+        <p:txBody>
+          <a:bodyPr wrap="square">
+            <a:spAutoFit/>
+          </a:bodyPr>
+          <a:lstStyle/>
+          <a:p>
+            <a:r>
+              <a:rPr sz="1700" b="0" i="0">
+                <a:solidFill>
+                  <a:srgbClr val="6B7C93"/>
+                </a:solidFill>
+                <a:latin typeface="Calibri"/>
+              </a:rPr>
+              <a:t>The deliverable, the limits, and Review-II</a:t>
+            </a:r>
+          </a:p>
+        </p:txBody>
+      </p:sp>
+    </p:spTree>
+  </p:cSld>
+  <p:clrMapOvr>
+    <a:masterClrMapping/>
+  </p:clrMapOvr>
+</p:sld>
+</file>
+
+<file path=ppt/slides/slide34.xml><?xml version="1.0" encoding="utf-8"?>
+<p:sld xmlns:a="http://schemas.openxmlformats.org/drawingml/2006/main" xmlns:p="http://schemas.openxmlformats.org/presentationml/2006/main" xmlns:r="http://schemas.openxmlformats.org/officeDocument/2006/relationships">
+  <p:cSld>
+    <p:spTree>
+      <p:nvGrpSpPr>
+        <p:cNvPr id="1" name=""/>
+        <p:cNvGrpSpPr/>
+        <p:nvPr/>
+      </p:nvGrpSpPr>
+      <p:grpSpPr/>
+      <p:sp>
+        <p:nvSpPr>
           <p:cNvPr id="2" name="Text 0"/>
           <p:cNvSpPr txBox="1"/>
           <p:nvPr/>
@@ -16923,530 +17575,24 @@
       </p:pic>
       <p:sp>
         <p:nvSpPr>
-          <p:cNvPr id="5" name="Text 2"/>
+          <p:cNvPr id="5" name="TextBox 4"/>
           <p:cNvSpPr txBox="1"/>
           <p:nvPr/>
         </p:nvSpPr>
         <p:spPr>
           <a:xfrm>
             <a:off x="640080" y="1325880"/>
-            <a:ext cx="10881360" cy="4343400"/>
-          </a:xfrm>
-          <a:prstGeom prst="rect">
-            <a:avLst/>
-          </a:prstGeom>
-          <a:noFill/>
-          <a:ln/>
-        </p:spPr>
-        <p:txBody>
-          <a:bodyPr wrap="square" lIns="0" tIns="0" rIns="0" bIns="0" rtlCol="0" anchor="t"/>
-          <a:lstStyle/>
-          <a:p>
-            <a:pPr marL="177800" indent="0">
-              <a:spcAft>
-                <a:spcPts val="60"/>
-              </a:spcAft>
-              <a:buSzPct val="100000"/>
-              <a:buNone/>
-            </a:pPr>
-            <a:r>
-              <a:rPr lang="en-US" sz="900" b="1" dirty="0">
-                <a:solidFill>
-                  <a:srgbClr val="000000"/>
-                </a:solidFill>
-                <a:latin typeface="Calibri" pitchFamily="34" charset="0"/>
-                <a:ea typeface="Calibri" pitchFamily="34" charset="-122"/>
-                <a:cs typeface="Calibri" pitchFamily="34" charset="-120"/>
-              </a:rPr>
-              <a:t xml:space="preserve">[16]  </a:t>
-            </a:r>
-            <a:r>
-              <a:rPr lang="en-US" sz="900" dirty="0">
-                <a:solidFill>
-                  <a:srgbClr val="000000"/>
-                </a:solidFill>
-                <a:latin typeface="Calibri" pitchFamily="34" charset="0"/>
-                <a:ea typeface="Calibri" pitchFamily="34" charset="-122"/>
-                <a:cs typeface="Calibri" pitchFamily="34" charset="-120"/>
-              </a:rPr>
-              <a:t xml:space="preserve">Z. Yuan, H. Li, M. Zhang, Z. Yang, S. Zhao, H. Wang, X. Wang and L. Ding, “Influence of Negative Gate Bias on Crosstalk Spike in SiC MOSFETs Half-Bridge Circuit,” IEEE J. Emerg. Sel. Topics Power Electron., vol. 14, no. 3, pp. 3217–3229, 2026.</a:t>
-            </a:r>
-          </a:p>
-          <a:p>
-            <a:pPr marL="177800" indent="0">
-              <a:spcAft>
-                <a:spcPts val="60"/>
-              </a:spcAft>
-              <a:buSzPct val="100000"/>
-              <a:buNone/>
-            </a:pPr>
-            <a:r>
-              <a:rPr lang="en-US" sz="900" b="1" dirty="0">
-                <a:solidFill>
-                  <a:srgbClr val="000000"/>
-                </a:solidFill>
-                <a:latin typeface="Calibri" pitchFamily="34" charset="0"/>
-                <a:ea typeface="Calibri" pitchFamily="34" charset="-122"/>
-                <a:cs typeface="Calibri" pitchFamily="34" charset="-120"/>
-              </a:rPr>
-              <a:t xml:space="preserve">[17]  </a:t>
-            </a:r>
-            <a:r>
-              <a:rPr lang="en-US" sz="900" dirty="0">
-                <a:solidFill>
-                  <a:srgbClr val="000000"/>
-                </a:solidFill>
-                <a:latin typeface="Calibri" pitchFamily="34" charset="0"/>
-                <a:ea typeface="Calibri" pitchFamily="34" charset="-122"/>
-                <a:cs typeface="Calibri" pitchFamily="34" charset="-120"/>
-              </a:rPr>
-              <a:t xml:space="preserve">L. Zhang, K. Wang, S. Guo and B. Zhu, “A Gate Driver for Crosstalk Suppression of eGaN HEMT Power Devices,” J. Low Power Electron. Appl., vol. 15, no. 3, pp. 38, 2025.</a:t>
-            </a:r>
-          </a:p>
-          <a:p>
-            <a:pPr marL="177800" indent="0">
-              <a:spcAft>
-                <a:spcPts val="60"/>
-              </a:spcAft>
-              <a:buSzPct val="100000"/>
-              <a:buNone/>
-            </a:pPr>
-            <a:r>
-              <a:rPr lang="en-US" sz="900" b="1" dirty="0">
-                <a:solidFill>
-                  <a:srgbClr val="000000"/>
-                </a:solidFill>
-                <a:latin typeface="Calibri" pitchFamily="34" charset="0"/>
-                <a:ea typeface="Calibri" pitchFamily="34" charset="-122"/>
-                <a:cs typeface="Calibri" pitchFamily="34" charset="-120"/>
-              </a:rPr>
-              <a:t xml:space="preserve">[18]  </a:t>
-            </a:r>
-            <a:r>
-              <a:rPr lang="en-US" sz="900" dirty="0">
-                <a:solidFill>
-                  <a:srgbClr val="000000"/>
-                </a:solidFill>
-                <a:latin typeface="Calibri" pitchFamily="34" charset="0"/>
-                <a:ea typeface="Calibri" pitchFamily="34" charset="-122"/>
-                <a:cs typeface="Calibri" pitchFamily="34" charset="-120"/>
-              </a:rPr>
-              <a:t xml:space="preserve">J. Wu, “Parallel arrangement of MOSFETs, effective suppression of crosstalk: A new gate driver topology,” iEnergy, vol. 2, no. 3, pp. 163–163, 2023.</a:t>
-            </a:r>
-          </a:p>
-          <a:p>
-            <a:pPr marL="177800" indent="0">
-              <a:spcAft>
-                <a:spcPts val="60"/>
-              </a:spcAft>
-              <a:buSzPct val="100000"/>
-              <a:buNone/>
-            </a:pPr>
-            <a:r>
-              <a:rPr lang="en-US" sz="900" b="1" dirty="0">
-                <a:solidFill>
-                  <a:srgbClr val="000000"/>
-                </a:solidFill>
-                <a:latin typeface="Calibri" pitchFamily="34" charset="0"/>
-                <a:ea typeface="Calibri" pitchFamily="34" charset="-122"/>
-                <a:cs typeface="Calibri" pitchFamily="34" charset="-120"/>
-              </a:rPr>
-              <a:t xml:space="preserve">[19]  </a:t>
-            </a:r>
-            <a:r>
-              <a:rPr lang="en-US" sz="900" dirty="0">
-                <a:solidFill>
-                  <a:srgbClr val="000000"/>
-                </a:solidFill>
-                <a:latin typeface="Calibri" pitchFamily="34" charset="0"/>
-                <a:ea typeface="Calibri" pitchFamily="34" charset="-122"/>
-                <a:cs typeface="Calibri" pitchFamily="34" charset="-120"/>
-              </a:rPr>
-              <a:t xml:space="preserve">Y. Mikhaylov, G. Buticchi and M. Galea, “A gate driver for parallel connected MOSFETs with crosstalk suppression,” iEnergy, vol. 2, no. 3, pp. 240–250, 2023.</a:t>
-            </a:r>
-          </a:p>
-          <a:p>
-            <a:pPr marL="177800" indent="0">
-              <a:spcAft>
-                <a:spcPts val="60"/>
-              </a:spcAft>
-              <a:buSzPct val="100000"/>
-              <a:buNone/>
-            </a:pPr>
-            <a:r>
-              <a:rPr lang="en-US" sz="900" b="1" dirty="0">
-                <a:solidFill>
-                  <a:srgbClr val="000000"/>
-                </a:solidFill>
-                <a:latin typeface="Calibri" pitchFamily="34" charset="0"/>
-                <a:ea typeface="Calibri" pitchFamily="34" charset="-122"/>
-                <a:cs typeface="Calibri" pitchFamily="34" charset="-120"/>
-              </a:rPr>
-              <a:t xml:space="preserve">[20]  </a:t>
-            </a:r>
-            <a:r>
-              <a:rPr lang="en-US" sz="900" dirty="0">
-                <a:solidFill>
-                  <a:srgbClr val="000000"/>
-                </a:solidFill>
-                <a:latin typeface="Calibri" pitchFamily="34" charset="0"/>
-                <a:ea typeface="Calibri" pitchFamily="34" charset="-122"/>
-                <a:cs typeface="Calibri" pitchFamily="34" charset="-120"/>
-              </a:rPr>
-              <a:t xml:space="preserve">W. Liu and H. Min, “A Load Adaptive Active Gate Driver with Fast-Switching Three-Level Current Source for Overshoot Suppression in GaN-Based Half-Bridge Converters,” IEEE Trans. Power Electron., pp. 1–8, 2026.</a:t>
-            </a:r>
-          </a:p>
-          <a:p>
-            <a:pPr marL="177800" indent="0">
-              <a:spcAft>
-                <a:spcPts val="60"/>
-              </a:spcAft>
-              <a:buSzPct val="100000"/>
-              <a:buNone/>
-            </a:pPr>
-            <a:r>
-              <a:rPr lang="en-US" sz="900" b="1" dirty="0">
-                <a:solidFill>
-                  <a:srgbClr val="000000"/>
-                </a:solidFill>
-                <a:latin typeface="Calibri" pitchFamily="34" charset="0"/>
-                <a:ea typeface="Calibri" pitchFamily="34" charset="-122"/>
-                <a:cs typeface="Calibri" pitchFamily="34" charset="-120"/>
-              </a:rPr>
-              <a:t xml:space="preserve">[21]  </a:t>
-            </a:r>
-            <a:r>
-              <a:rPr lang="en-US" sz="900" dirty="0">
-                <a:solidFill>
-                  <a:srgbClr val="000000"/>
-                </a:solidFill>
-                <a:latin typeface="Calibri" pitchFamily="34" charset="0"/>
-                <a:ea typeface="Calibri" pitchFamily="34" charset="-122"/>
-                <a:cs typeface="Calibri" pitchFamily="34" charset="-120"/>
-              </a:rPr>
-              <a:t xml:space="preserve">R. Chen, F. Wang, H. Bai and L.M. Tolbert, “A Simple Gate Driver Circuit for Turn-on Overvoltage Suppression of 10 kV SiC MOSFETs With Temporarily Lowering Gate Voltage During dv/dt,” IEEE Trans. Ind. Electron., pp. 1–6, 2026.</a:t>
-            </a:r>
-          </a:p>
-          <a:p>
-            <a:pPr marL="177800" indent="0">
-              <a:spcAft>
-                <a:spcPts val="60"/>
-              </a:spcAft>
-              <a:buSzPct val="100000"/>
-              <a:buNone/>
-            </a:pPr>
-            <a:r>
-              <a:rPr lang="en-US" sz="900" b="1" dirty="0">
-                <a:solidFill>
-                  <a:srgbClr val="000000"/>
-                </a:solidFill>
-                <a:latin typeface="Calibri" pitchFamily="34" charset="0"/>
-                <a:ea typeface="Calibri" pitchFamily="34" charset="-122"/>
-                <a:cs typeface="Calibri" pitchFamily="34" charset="-120"/>
-              </a:rPr>
-              <a:t xml:space="preserve">[22]  </a:t>
-            </a:r>
-            <a:r>
-              <a:rPr lang="en-US" sz="900" dirty="0">
-                <a:solidFill>
-                  <a:srgbClr val="000000"/>
-                </a:solidFill>
-                <a:latin typeface="Calibri" pitchFamily="34" charset="0"/>
-                <a:ea typeface="Calibri" pitchFamily="34" charset="-122"/>
-                <a:cs typeface="Calibri" pitchFamily="34" charset="-120"/>
-              </a:rPr>
-              <a:t xml:space="preserve">D. Yu, M. Yang, L. Yin, K. Hu, W. Zhang and Q. Fu, “A Dual-Loop Active Gate Driver With Independent Voltage Slew Rate and Overshoot Control for Switching Loss Optimization of SiC MOSFETs,” IEEE Trans. Ind. Electron., pp. 1–12, 2026.</a:t>
-            </a:r>
-          </a:p>
-          <a:p>
-            <a:pPr marL="177800" indent="0">
-              <a:spcAft>
-                <a:spcPts val="60"/>
-              </a:spcAft>
-              <a:buSzPct val="100000"/>
-              <a:buNone/>
-            </a:pPr>
-            <a:r>
-              <a:rPr lang="en-US" sz="900" b="1" dirty="0">
-                <a:solidFill>
-                  <a:srgbClr val="000000"/>
-                </a:solidFill>
-                <a:latin typeface="Calibri" pitchFamily="34" charset="0"/>
-                <a:ea typeface="Calibri" pitchFamily="34" charset="-122"/>
-                <a:cs typeface="Calibri" pitchFamily="34" charset="-120"/>
-              </a:rPr>
-              <a:t xml:space="preserve">[23]  </a:t>
-            </a:r>
-            <a:r>
-              <a:rPr lang="en-US" sz="900" dirty="0">
-                <a:solidFill>
-                  <a:srgbClr val="000000"/>
-                </a:solidFill>
-                <a:latin typeface="Calibri" pitchFamily="34" charset="0"/>
-                <a:ea typeface="Calibri" pitchFamily="34" charset="-122"/>
-                <a:cs typeface="Calibri" pitchFamily="34" charset="-120"/>
-              </a:rPr>
-              <a:t xml:space="preserve">P. Xiang, R. Hao, J. Cai and X. You, “An Active Gate Driver of SiC MOSFET Module Based on PCB Rogowski Coil for Optimizing Tradeoff Between Overshoot and Switching Loss,” IEEE Trans. Power Electron., vol. 38, no. 1, pp. 245–260, 2023.</a:t>
-            </a:r>
-          </a:p>
-          <a:p>
-            <a:pPr marL="177800" indent="0">
-              <a:spcAft>
-                <a:spcPts val="60"/>
-              </a:spcAft>
-              <a:buSzPct val="100000"/>
-              <a:buNone/>
-            </a:pPr>
-            <a:r>
-              <a:rPr lang="en-US" sz="900" b="1" dirty="0">
-                <a:solidFill>
-                  <a:srgbClr val="000000"/>
-                </a:solidFill>
-                <a:latin typeface="Calibri" pitchFamily="34" charset="0"/>
-                <a:ea typeface="Calibri" pitchFamily="34" charset="-122"/>
-                <a:cs typeface="Calibri" pitchFamily="34" charset="-120"/>
-              </a:rPr>
-              <a:t xml:space="preserve">[24]  </a:t>
-            </a:r>
-            <a:r>
-              <a:rPr lang="en-US" sz="900" dirty="0">
-                <a:solidFill>
-                  <a:srgbClr val="000000"/>
-                </a:solidFill>
-                <a:latin typeface="Calibri" pitchFamily="34" charset="0"/>
-                <a:ea typeface="Calibri" pitchFamily="34" charset="-122"/>
-                <a:cs typeface="Calibri" pitchFamily="34" charset="-120"/>
-              </a:rPr>
-              <a:t xml:space="preserve">S. Fukunaga, H. Takayama and T. Hikihara, “Slew rate control of switching transient for SiC MOSFET in boost converter using digital active gate driver,” IET Power Electron., vol. 16, no. 3, pp. 472–482, 2022.</a:t>
-            </a:r>
-          </a:p>
-          <a:p>
-            <a:pPr marL="177800" indent="0">
-              <a:spcAft>
-                <a:spcPts val="60"/>
-              </a:spcAft>
-              <a:buSzPct val="100000"/>
-              <a:buNone/>
-            </a:pPr>
-            <a:r>
-              <a:rPr lang="en-US" sz="900" b="1" dirty="0">
-                <a:solidFill>
-                  <a:srgbClr val="000000"/>
-                </a:solidFill>
-                <a:latin typeface="Calibri" pitchFamily="34" charset="0"/>
-                <a:ea typeface="Calibri" pitchFamily="34" charset="-122"/>
-                <a:cs typeface="Calibri" pitchFamily="34" charset="-120"/>
-              </a:rPr>
-              <a:t xml:space="preserve">[25]  </a:t>
-            </a:r>
-            <a:r>
-              <a:rPr lang="en-US" sz="900" dirty="0">
-                <a:solidFill>
-                  <a:srgbClr val="000000"/>
-                </a:solidFill>
-                <a:latin typeface="Calibri" pitchFamily="34" charset="0"/>
-                <a:ea typeface="Calibri" pitchFamily="34" charset="-122"/>
-                <a:cs typeface="Calibri" pitchFamily="34" charset="-120"/>
-              </a:rPr>
-              <a:t xml:space="preserve">C. Xu, P. Fu, X. Liao, Z. Zhu and L. Liu, “An Integrated Driver With Real-Time Predictive Dead-Time Optimization Technique for GaN-Based Synchronous Buck Converter,” IEEE J. Emerg. Sel. Topics Power Electron., vol. 13, no. 3, pp. 3173–3183, 2025.</a:t>
-            </a:r>
-          </a:p>
-          <a:p>
-            <a:pPr marL="177800" indent="0">
-              <a:spcAft>
-                <a:spcPts val="60"/>
-              </a:spcAft>
-              <a:buSzPct val="100000"/>
-              <a:buNone/>
-            </a:pPr>
-            <a:r>
-              <a:rPr lang="en-US" sz="900" b="1" dirty="0">
-                <a:solidFill>
-                  <a:srgbClr val="000000"/>
-                </a:solidFill>
-                <a:latin typeface="Calibri" pitchFamily="34" charset="0"/>
-                <a:ea typeface="Calibri" pitchFamily="34" charset="-122"/>
-                <a:cs typeface="Calibri" pitchFamily="34" charset="-120"/>
-              </a:rPr>
-              <a:t xml:space="preserve">[26]  </a:t>
-            </a:r>
-            <a:r>
-              <a:rPr lang="en-US" sz="900" dirty="0">
-                <a:solidFill>
-                  <a:srgbClr val="000000"/>
-                </a:solidFill>
-                <a:latin typeface="Calibri" pitchFamily="34" charset="0"/>
-                <a:ea typeface="Calibri" pitchFamily="34" charset="-122"/>
-                <a:cs typeface="Calibri" pitchFamily="34" charset="-120"/>
-              </a:rPr>
-              <a:t xml:space="preserve">C. Chen, P. Chiu, Y. Chen, P. Wang and Y. Chang, “An Integrated Driver With Adaptive Dead-Time Control for GaN-Based Synchronous Buck Converter,” IEEE Trans. Circuits Syst. II, vol. 69, no. 2, pp. 539–543, 2022.</a:t>
-            </a:r>
-          </a:p>
-          <a:p>
-            <a:pPr marL="177800" indent="0">
-              <a:spcAft>
-                <a:spcPts val="60"/>
-              </a:spcAft>
-              <a:buSzPct val="100000"/>
-              <a:buNone/>
-            </a:pPr>
-            <a:r>
-              <a:rPr lang="en-US" sz="900" b="1" dirty="0">
-                <a:solidFill>
-                  <a:srgbClr val="000000"/>
-                </a:solidFill>
-                <a:latin typeface="Calibri" pitchFamily="34" charset="0"/>
-                <a:ea typeface="Calibri" pitchFamily="34" charset="-122"/>
-                <a:cs typeface="Calibri" pitchFamily="34" charset="-120"/>
-              </a:rPr>
-              <a:t xml:space="preserve">[27]  </a:t>
-            </a:r>
-            <a:r>
-              <a:rPr lang="en-US" sz="900" dirty="0">
-                <a:solidFill>
-                  <a:srgbClr val="000000"/>
-                </a:solidFill>
-                <a:latin typeface="Calibri" pitchFamily="34" charset="0"/>
-                <a:ea typeface="Calibri" pitchFamily="34" charset="-122"/>
-                <a:cs typeface="Calibri" pitchFamily="34" charset="-120"/>
-              </a:rPr>
-              <a:t xml:space="preserve">J. Tan, Z. Zhou and G. Zou, “A Programmable Gate Driver Module-Based Multistage Voltage Regulation SiC MOSFET Switching Strategy,” Electronics, vol. 13, no. 22, pp. 4379, 2024.</a:t>
-            </a:r>
-          </a:p>
-          <a:p>
-            <a:pPr marL="177800" indent="0">
-              <a:spcAft>
-                <a:spcPts val="60"/>
-              </a:spcAft>
-              <a:buSzPct val="100000"/>
-              <a:buNone/>
-            </a:pPr>
-            <a:r>
-              <a:rPr lang="en-US" sz="900" b="1" dirty="0">
-                <a:solidFill>
-                  <a:srgbClr val="000000"/>
-                </a:solidFill>
-                <a:latin typeface="Calibri" pitchFamily="34" charset="0"/>
-                <a:ea typeface="Calibri" pitchFamily="34" charset="-122"/>
-                <a:cs typeface="Calibri" pitchFamily="34" charset="-120"/>
-              </a:rPr>
-              <a:t xml:space="preserve">[28]  </a:t>
-            </a:r>
-            <a:r>
-              <a:rPr lang="en-US" sz="900" dirty="0">
-                <a:solidFill>
-                  <a:srgbClr val="000000"/>
-                </a:solidFill>
-                <a:latin typeface="Calibri" pitchFamily="34" charset="0"/>
-                <a:ea typeface="Calibri" pitchFamily="34" charset="-122"/>
-                <a:cs typeface="Calibri" pitchFamily="34" charset="-120"/>
-              </a:rPr>
-              <a:t xml:space="preserve">C. Chen, P. Wang, S. Li, Y. Chen and Y. Chang, “An Integrated Driver With Bang-Bang Dead-Time Control and Charge Sharing Bootstrap Circuit for GaN Synchronous Buck Converter,” IEEE Trans. Power Electron., vol. 37, no. 8, pp. 9503–9514, 2022.</a:t>
-            </a:r>
-          </a:p>
-          <a:p>
-            <a:pPr marL="177800" indent="0">
-              <a:spcAft>
-                <a:spcPts val="60"/>
-              </a:spcAft>
-              <a:buSzPct val="100000"/>
-              <a:buNone/>
-            </a:pPr>
-            <a:r>
-              <a:rPr lang="en-US" sz="900" b="1" dirty="0">
-                <a:solidFill>
-                  <a:srgbClr val="000000"/>
-                </a:solidFill>
-                <a:latin typeface="Calibri" pitchFamily="34" charset="0"/>
-                <a:ea typeface="Calibri" pitchFamily="34" charset="-122"/>
-                <a:cs typeface="Calibri" pitchFamily="34" charset="-120"/>
-              </a:rPr>
-              <a:t xml:space="preserve">[29]  </a:t>
-            </a:r>
-            <a:r>
-              <a:rPr lang="en-US" sz="900" dirty="0">
-                <a:solidFill>
-                  <a:srgbClr val="000000"/>
-                </a:solidFill>
-                <a:latin typeface="Calibri" pitchFamily="34" charset="0"/>
-                <a:ea typeface="Calibri" pitchFamily="34" charset="-122"/>
-                <a:cs typeface="Calibri" pitchFamily="34" charset="-120"/>
-              </a:rPr>
-              <a:t xml:space="preserve">G.H. Thuc, M. Tsai, C. Chen, J. Fu, W. Wu and W. Lin, “A Current Source Gate Driver with Dual-Edge Adaptive Slew Rate for GaN Devices,” in Proc. 2026 IEEE Applied Power Electronics Conference and Exposition (APEC), 2026.</a:t>
-            </a:r>
-          </a:p>
-          <a:p>
-            <a:pPr marL="177800" indent="0">
-              <a:spcAft>
-                <a:spcPts val="60"/>
-              </a:spcAft>
-              <a:buSzPct val="100000"/>
-              <a:buNone/>
-            </a:pPr>
-            <a:r>
-              <a:rPr lang="en-US" sz="900" b="1" dirty="0">
-                <a:solidFill>
-                  <a:srgbClr val="000000"/>
-                </a:solidFill>
-                <a:latin typeface="Calibri" pitchFamily="34" charset="0"/>
-                <a:ea typeface="Calibri" pitchFamily="34" charset="-122"/>
-                <a:cs typeface="Calibri" pitchFamily="34" charset="-120"/>
-              </a:rPr>
-              <a:t xml:space="preserve">[30]  </a:t>
-            </a:r>
-            <a:r>
-              <a:rPr lang="en-US" sz="900" dirty="0">
-                <a:solidFill>
-                  <a:srgbClr val="000000"/>
-                </a:solidFill>
-                <a:latin typeface="Calibri" pitchFamily="34" charset="0"/>
-                <a:ea typeface="Calibri" pitchFamily="34" charset="-122"/>
-                <a:cs typeface="Calibri" pitchFamily="34" charset="-120"/>
-              </a:rPr>
-              <a:t xml:space="preserve">G. Wu, Y. Huang, Y. Chen and C. Chen, “Closed-loop Slew Rate Control of Active Current Source Gate Driver with Digital Implementation for SiC MOSFET,” in Proc. 2025 IEEE Energy Conversion Conference Congress and Exposition (ECCE), 2025.</a:t>
-            </a:r>
-          </a:p>
-          <a:p>
-            <a:pPr marL="177800" indent="0">
-              <a:spcAft>
-                <a:spcPts val="160"/>
-              </a:spcAft>
-              <a:buSzPct val="100000"/>
-              <a:buNone/>
-            </a:pPr>
-            <a:r>
-              <a:rPr lang="en-US" sz="850" dirty="0">
-                <a:solidFill>
-                  <a:srgbClr val="000000"/>
-                </a:solidFill>
-                <a:latin typeface="Calibri" pitchFamily="34" charset="0"/>
-                <a:ea typeface="Calibri" pitchFamily="34" charset="-122"/>
-                <a:cs typeface="Calibri" pitchFamily="34" charset="-120"/>
-              </a:rPr>
-              <a:t xml:space="preserve">All 30 verified against the publisher record — authors, volume, issue and pages resolved through Crossref by DOI and title, not transcribed by hand.</a:t>
-            </a:r>
-          </a:p>
-        </p:txBody>
-      </p:sp>
-      <p:sp>
-        <p:nvSpPr>
-          <p:cNvPr id="6" name="Text 3"/>
-          <p:cNvSpPr txBox="1"/>
-          <p:nvPr/>
-        </p:nvSpPr>
-        <p:spPr>
-          <a:xfrm>
-            <a:off x="640080" y="5806440"/>
-            <a:ext cx="10881360" cy="365760"/>
-          </a:xfrm>
-          <a:prstGeom prst="rect">
-            <a:avLst/>
-          </a:prstGeom>
-          <a:noFill/>
-          <a:ln/>
-        </p:spPr>
-        <p:txBody>
-          <a:bodyPr wrap="square" lIns="0" tIns="0" rIns="0" bIns="0" rtlCol="0" anchor="ctr"/>
+            <a:ext cx="3474720" cy="274320"/>
+          </a:xfrm>
+          <a:prstGeom prst="rect">
+            <a:avLst/>
+          </a:prstGeom>
+          <a:noFill/>
+        </p:spPr>
+        <p:txBody>
+          <a:bodyPr wrap="square" lIns="0" tIns="0" rIns="0" bIns="0">
+            <a:spAutoFit/>
+          </a:bodyPr>
           <a:lstStyle/>
           <a:p>
             <a:pPr marL="177800" indent="0">
@@ -17457,6 +17603,221 @@
               <a:buNone/>
             </a:pPr>
             <a:r>
+              <a:rPr lang="en-US" sz="1150" b="1" dirty="0">
+                <a:solidFill>
+                  <a:srgbClr val="000000"/>
+                </a:solidFill>
+                <a:latin typeface="Calibri" pitchFamily="34" charset="0"/>
+                <a:ea typeface="Calibri" pitchFamily="34" charset="-122"/>
+                <a:cs typeface="Calibri" pitchFamily="34" charset="-120"/>
+              </a:rPr>
+              <a:t xml:space="preserve">Perturbation</a:t>
+            </a:r>
+          </a:p>
+        </p:txBody>
+      </p:sp>
+      <p:sp>
+        <p:nvSpPr>
+          <p:cNvPr id="6" name="TextBox 5"/>
+          <p:cNvSpPr txBox="1"/>
+          <p:nvPr/>
+        </p:nvSpPr>
+        <p:spPr>
+          <a:xfrm>
+            <a:off x="4160520" y="1325880"/>
+            <a:ext cx="1005840" cy="274320"/>
+          </a:xfrm>
+          <a:prstGeom prst="rect">
+            <a:avLst/>
+          </a:prstGeom>
+          <a:noFill/>
+        </p:spPr>
+        <p:txBody>
+          <a:bodyPr wrap="square" lIns="0" tIns="0" rIns="0" bIns="0">
+            <a:spAutoFit/>
+          </a:bodyPr>
+          <a:lstStyle/>
+          <a:p>
+            <a:pPr marL="177800" indent="0">
+              <a:spcAft>
+                <a:spcPts val="0"/>
+              </a:spcAft>
+              <a:buSzPct val="100000"/>
+              <a:buNone/>
+            </a:pPr>
+            <a:r>
+              <a:rPr lang="en-US" sz="1150" b="1" dirty="0">
+                <a:solidFill>
+                  <a:srgbClr val="000000"/>
+                </a:solidFill>
+                <a:latin typeface="Calibri" pitchFamily="34" charset="0"/>
+                <a:ea typeface="Calibri" pitchFamily="34" charset="-122"/>
+                <a:cs typeface="Calibri" pitchFamily="34" charset="-120"/>
+              </a:rPr>
+              <a:t xml:space="preserve">Ceiling</a:t>
+            </a:r>
+          </a:p>
+        </p:txBody>
+      </p:sp>
+      <p:sp>
+        <p:nvSpPr>
+          <p:cNvPr id="7" name="TextBox 6"/>
+          <p:cNvSpPr txBox="1"/>
+          <p:nvPr/>
+        </p:nvSpPr>
+        <p:spPr>
+          <a:xfrm>
+            <a:off x="5257800" y="1325880"/>
+            <a:ext cx="1097280" cy="274320"/>
+          </a:xfrm>
+          <a:prstGeom prst="rect">
+            <a:avLst/>
+          </a:prstGeom>
+          <a:noFill/>
+        </p:spPr>
+        <p:txBody>
+          <a:bodyPr wrap="square" lIns="0" tIns="0" rIns="0" bIns="0">
+            <a:spAutoFit/>
+          </a:bodyPr>
+          <a:lstStyle/>
+          <a:p>
+            <a:pPr marL="177800" indent="0">
+              <a:spcAft>
+                <a:spcPts val="0"/>
+              </a:spcAft>
+              <a:buSzPct val="100000"/>
+              <a:buNone/>
+            </a:pPr>
+            <a:r>
+              <a:rPr lang="en-US" sz="1150" dirty="0">
+                <a:solidFill>
+                  <a:srgbClr val="000000"/>
+                </a:solidFill>
+                <a:latin typeface="Calibri" pitchFamily="34" charset="0"/>
+                <a:ea typeface="Calibri" pitchFamily="34" charset="-122"/>
+                <a:cs typeface="Calibri" pitchFamily="34" charset="-120"/>
+              </a:rPr>
+              <a:t xml:space="preserve">vs nom.</a:t>
+            </a:r>
+          </a:p>
+        </p:txBody>
+      </p:sp>
+      <p:sp>
+        <p:nvSpPr>
+          <p:cNvPr id="8" name="TextBox 7"/>
+          <p:cNvSpPr txBox="1"/>
+          <p:nvPr/>
+        </p:nvSpPr>
+        <p:spPr>
+          <a:xfrm>
+            <a:off x="640080" y="1719072"/>
+            <a:ext cx="3474720" cy="274320"/>
+          </a:xfrm>
+          <a:prstGeom prst="rect">
+            <a:avLst/>
+          </a:prstGeom>
+          <a:noFill/>
+        </p:spPr>
+        <p:txBody>
+          <a:bodyPr wrap="square" lIns="0" tIns="0" rIns="0" bIns="0">
+            <a:spAutoFit/>
+          </a:bodyPr>
+          <a:lstStyle/>
+          <a:p>
+            <a:pPr marL="177800" indent="0">
+              <a:spcAft>
+                <a:spcPts val="0"/>
+              </a:spcAft>
+              <a:buSzPct val="100000"/>
+              <a:buNone/>
+            </a:pPr>
+            <a:r>
+              <a:rPr lang="en-US" sz="1200" b="1" dirty="0">
+                <a:solidFill>
+                  <a:srgbClr val="000000"/>
+                </a:solidFill>
+                <a:latin typeface="Calibri" pitchFamily="34" charset="0"/>
+                <a:ea typeface="Calibri" pitchFamily="34" charset="-122"/>
+                <a:cs typeface="Calibri" pitchFamily="34" charset="-120"/>
+              </a:rPr>
+              <a:t xml:space="preserve">Loop inductance −50 %  (1.5 nH)</a:t>
+            </a:r>
+          </a:p>
+        </p:txBody>
+      </p:sp>
+      <p:sp>
+        <p:nvSpPr>
+          <p:cNvPr id="9" name="TextBox 8"/>
+          <p:cNvSpPr txBox="1"/>
+          <p:nvPr/>
+        </p:nvSpPr>
+        <p:spPr>
+          <a:xfrm>
+            <a:off x="4160520" y="1719072"/>
+            <a:ext cx="1005840" cy="274320"/>
+          </a:xfrm>
+          <a:prstGeom prst="rect">
+            <a:avLst/>
+          </a:prstGeom>
+          <a:noFill/>
+        </p:spPr>
+        <p:txBody>
+          <a:bodyPr wrap="square" lIns="0" tIns="0" rIns="0" bIns="0">
+            <a:spAutoFit/>
+          </a:bodyPr>
+          <a:lstStyle/>
+          <a:p>
+            <a:pPr marL="177800" indent="0">
+              <a:spcAft>
+                <a:spcPts val="0"/>
+              </a:spcAft>
+              <a:buSzPct val="100000"/>
+              <a:buNone/>
+            </a:pPr>
+            <a:r>
+              <a:rPr lang="en-US" sz="1200" b="1" dirty="0">
+                <a:solidFill>
+                  <a:srgbClr val="000000"/>
+                </a:solidFill>
+                <a:latin typeface="Calibri" pitchFamily="34" charset="0"/>
+                <a:ea typeface="Calibri" pitchFamily="34" charset="-122"/>
+                <a:cs typeface="Calibri" pitchFamily="34" charset="-120"/>
+              </a:rPr>
+              <a:t xml:space="preserve">13.54 %</a:t>
+            </a:r>
+          </a:p>
+        </p:txBody>
+      </p:sp>
+      <p:sp>
+        <p:nvSpPr>
+          <p:cNvPr id="10" name="TextBox 9"/>
+          <p:cNvSpPr txBox="1"/>
+          <p:nvPr/>
+        </p:nvSpPr>
+        <p:spPr>
+          <a:xfrm>
+            <a:off x="5257800" y="1719072"/>
+            <a:ext cx="1097280" cy="274320"/>
+          </a:xfrm>
+          <a:prstGeom prst="rect">
+            <a:avLst/>
+          </a:prstGeom>
+          <a:noFill/>
+        </p:spPr>
+        <p:txBody>
+          <a:bodyPr wrap="square" lIns="0" tIns="0" rIns="0" bIns="0">
+            <a:spAutoFit/>
+          </a:bodyPr>
+          <a:lstStyle/>
+          <a:p>
+            <a:pPr marL="177800" indent="0">
+              <a:spcAft>
+                <a:spcPts val="0"/>
+              </a:spcAft>
+              <a:buSzPct val="100000"/>
+              <a:buNone/>
+            </a:pPr>
+            <a:r>
               <a:rPr lang="en-US" sz="1200" dirty="0">
                 <a:solidFill>
                   <a:srgbClr val="000000"/>
@@ -17465,7 +17826,1593 @@
                 <a:ea typeface="Calibri" pitchFamily="34" charset="-122"/>
                 <a:cs typeface="Calibri" pitchFamily="34" charset="-120"/>
               </a:rPr>
-              <a:t xml:space="preserve"/>
+              <a:t xml:space="preserve">+7.59</a:t>
+            </a:r>
+          </a:p>
+        </p:txBody>
+      </p:sp>
+      <p:sp>
+        <p:nvSpPr>
+          <p:cNvPr id="11" name="TextBox 10"/>
+          <p:cNvSpPr txBox="1"/>
+          <p:nvPr/>
+        </p:nvSpPr>
+        <p:spPr>
+          <a:xfrm>
+            <a:off x="640080" y="2025395"/>
+            <a:ext cx="3474720" cy="274320"/>
+          </a:xfrm>
+          <a:prstGeom prst="rect">
+            <a:avLst/>
+          </a:prstGeom>
+          <a:noFill/>
+        </p:spPr>
+        <p:txBody>
+          <a:bodyPr wrap="square" lIns="0" tIns="0" rIns="0" bIns="0">
+            <a:spAutoFit/>
+          </a:bodyPr>
+          <a:lstStyle/>
+          <a:p>
+            <a:pPr marL="177800" indent="0">
+              <a:spcAft>
+                <a:spcPts val="0"/>
+              </a:spcAft>
+              <a:buSzPct val="100000"/>
+              <a:buNone/>
+            </a:pPr>
+            <a:r>
+              <a:rPr lang="en-US" sz="1200" dirty="0">
+                <a:solidFill>
+                  <a:srgbClr val="000000"/>
+                </a:solidFill>
+                <a:latin typeface="Calibri" pitchFamily="34" charset="0"/>
+                <a:ea typeface="Calibri" pitchFamily="34" charset="-122"/>
+                <a:cs typeface="Calibri" pitchFamily="34" charset="-120"/>
+              </a:rPr>
+              <a:t xml:space="preserve">Input capacitance +30 %</a:t>
+            </a:r>
+          </a:p>
+        </p:txBody>
+      </p:sp>
+      <p:sp>
+        <p:nvSpPr>
+          <p:cNvPr id="12" name="TextBox 11"/>
+          <p:cNvSpPr txBox="1"/>
+          <p:nvPr/>
+        </p:nvSpPr>
+        <p:spPr>
+          <a:xfrm>
+            <a:off x="4160520" y="2025395"/>
+            <a:ext cx="1005840" cy="274320"/>
+          </a:xfrm>
+          <a:prstGeom prst="rect">
+            <a:avLst/>
+          </a:prstGeom>
+          <a:noFill/>
+        </p:spPr>
+        <p:txBody>
+          <a:bodyPr wrap="square" lIns="0" tIns="0" rIns="0" bIns="0">
+            <a:spAutoFit/>
+          </a:bodyPr>
+          <a:lstStyle/>
+          <a:p>
+            <a:pPr marL="177800" indent="0">
+              <a:spcAft>
+                <a:spcPts val="0"/>
+              </a:spcAft>
+              <a:buSzPct val="100000"/>
+              <a:buNone/>
+            </a:pPr>
+            <a:r>
+              <a:rPr lang="en-US" sz="1200" dirty="0">
+                <a:solidFill>
+                  <a:srgbClr val="000000"/>
+                </a:solidFill>
+                <a:latin typeface="Calibri" pitchFamily="34" charset="0"/>
+                <a:ea typeface="Calibri" pitchFamily="34" charset="-122"/>
+                <a:cs typeface="Calibri" pitchFamily="34" charset="-120"/>
+              </a:rPr>
+              <a:t xml:space="preserve">7.71 %</a:t>
+            </a:r>
+          </a:p>
+        </p:txBody>
+      </p:sp>
+      <p:sp>
+        <p:nvSpPr>
+          <p:cNvPr id="13" name="TextBox 12"/>
+          <p:cNvSpPr txBox="1"/>
+          <p:nvPr/>
+        </p:nvSpPr>
+        <p:spPr>
+          <a:xfrm>
+            <a:off x="5257800" y="2025395"/>
+            <a:ext cx="1097280" cy="274320"/>
+          </a:xfrm>
+          <a:prstGeom prst="rect">
+            <a:avLst/>
+          </a:prstGeom>
+          <a:noFill/>
+        </p:spPr>
+        <p:txBody>
+          <a:bodyPr wrap="square" lIns="0" tIns="0" rIns="0" bIns="0">
+            <a:spAutoFit/>
+          </a:bodyPr>
+          <a:lstStyle/>
+          <a:p>
+            <a:pPr marL="177800" indent="0">
+              <a:spcAft>
+                <a:spcPts val="0"/>
+              </a:spcAft>
+              <a:buSzPct val="100000"/>
+              <a:buNone/>
+            </a:pPr>
+            <a:r>
+              <a:rPr lang="en-US" sz="1200" dirty="0">
+                <a:solidFill>
+                  <a:srgbClr val="000000"/>
+                </a:solidFill>
+                <a:latin typeface="Calibri" pitchFamily="34" charset="0"/>
+                <a:ea typeface="Calibri" pitchFamily="34" charset="-122"/>
+                <a:cs typeface="Calibri" pitchFamily="34" charset="-120"/>
+              </a:rPr>
+              <a:t xml:space="preserve">+1.76</a:t>
+            </a:r>
+          </a:p>
+        </p:txBody>
+      </p:sp>
+      <p:sp>
+        <p:nvSpPr>
+          <p:cNvPr id="14" name="TextBox 13"/>
+          <p:cNvSpPr txBox="1"/>
+          <p:nvPr/>
+        </p:nvSpPr>
+        <p:spPr>
+          <a:xfrm>
+            <a:off x="640080" y="2331720"/>
+            <a:ext cx="3474720" cy="274320"/>
+          </a:xfrm>
+          <a:prstGeom prst="rect">
+            <a:avLst/>
+          </a:prstGeom>
+          <a:noFill/>
+        </p:spPr>
+        <p:txBody>
+          <a:bodyPr wrap="square" lIns="0" tIns="0" rIns="0" bIns="0">
+            <a:spAutoFit/>
+          </a:bodyPr>
+          <a:lstStyle/>
+          <a:p>
+            <a:pPr marL="177800" indent="0">
+              <a:spcAft>
+                <a:spcPts val="0"/>
+              </a:spcAft>
+              <a:buSzPct val="100000"/>
+              <a:buNone/>
+            </a:pPr>
+            <a:r>
+              <a:rPr lang="en-US" sz="1200" dirty="0">
+                <a:solidFill>
+                  <a:srgbClr val="000000"/>
+                </a:solidFill>
+                <a:latin typeface="Calibri" pitchFamily="34" charset="0"/>
+                <a:ea typeface="Calibri" pitchFamily="34" charset="-122"/>
+                <a:cs typeface="Calibri" pitchFamily="34" charset="-120"/>
+              </a:rPr>
+              <a:t xml:space="preserve">Miller capacitance −50 %</a:t>
+            </a:r>
+          </a:p>
+        </p:txBody>
+      </p:sp>
+      <p:sp>
+        <p:nvSpPr>
+          <p:cNvPr id="15" name="TextBox 14"/>
+          <p:cNvSpPr txBox="1"/>
+          <p:nvPr/>
+        </p:nvSpPr>
+        <p:spPr>
+          <a:xfrm>
+            <a:off x="4160520" y="2331720"/>
+            <a:ext cx="1005840" cy="274320"/>
+          </a:xfrm>
+          <a:prstGeom prst="rect">
+            <a:avLst/>
+          </a:prstGeom>
+          <a:noFill/>
+        </p:spPr>
+        <p:txBody>
+          <a:bodyPr wrap="square" lIns="0" tIns="0" rIns="0" bIns="0">
+            <a:spAutoFit/>
+          </a:bodyPr>
+          <a:lstStyle/>
+          <a:p>
+            <a:pPr marL="177800" indent="0">
+              <a:spcAft>
+                <a:spcPts val="0"/>
+              </a:spcAft>
+              <a:buSzPct val="100000"/>
+              <a:buNone/>
+            </a:pPr>
+            <a:r>
+              <a:rPr lang="en-US" sz="1200" dirty="0">
+                <a:solidFill>
+                  <a:srgbClr val="000000"/>
+                </a:solidFill>
+                <a:latin typeface="Calibri" pitchFamily="34" charset="0"/>
+                <a:ea typeface="Calibri" pitchFamily="34" charset="-122"/>
+                <a:cs typeface="Calibri" pitchFamily="34" charset="-120"/>
+              </a:rPr>
+              <a:t xml:space="preserve">6.93 %</a:t>
+            </a:r>
+          </a:p>
+        </p:txBody>
+      </p:sp>
+      <p:sp>
+        <p:nvSpPr>
+          <p:cNvPr id="16" name="TextBox 15"/>
+          <p:cNvSpPr txBox="1"/>
+          <p:nvPr/>
+        </p:nvSpPr>
+        <p:spPr>
+          <a:xfrm>
+            <a:off x="5257800" y="2331720"/>
+            <a:ext cx="1097280" cy="274320"/>
+          </a:xfrm>
+          <a:prstGeom prst="rect">
+            <a:avLst/>
+          </a:prstGeom>
+          <a:noFill/>
+        </p:spPr>
+        <p:txBody>
+          <a:bodyPr wrap="square" lIns="0" tIns="0" rIns="0" bIns="0">
+            <a:spAutoFit/>
+          </a:bodyPr>
+          <a:lstStyle/>
+          <a:p>
+            <a:pPr marL="177800" indent="0">
+              <a:spcAft>
+                <a:spcPts val="0"/>
+              </a:spcAft>
+              <a:buSzPct val="100000"/>
+              <a:buNone/>
+            </a:pPr>
+            <a:r>
+              <a:rPr lang="en-US" sz="1200" dirty="0">
+                <a:solidFill>
+                  <a:srgbClr val="000000"/>
+                </a:solidFill>
+                <a:latin typeface="Calibri" pitchFamily="34" charset="0"/>
+                <a:ea typeface="Calibri" pitchFamily="34" charset="-122"/>
+                <a:cs typeface="Calibri" pitchFamily="34" charset="-120"/>
+              </a:rPr>
+              <a:t xml:space="preserve">+0.99</a:t>
+            </a:r>
+          </a:p>
+        </p:txBody>
+      </p:sp>
+      <p:sp>
+        <p:nvSpPr>
+          <p:cNvPr id="17" name="TextBox 16"/>
+          <p:cNvSpPr txBox="1"/>
+          <p:nvPr/>
+        </p:nvSpPr>
+        <p:spPr>
+          <a:xfrm>
+            <a:off x="640080" y="2638044"/>
+            <a:ext cx="3474720" cy="274320"/>
+          </a:xfrm>
+          <a:prstGeom prst="rect">
+            <a:avLst/>
+          </a:prstGeom>
+          <a:noFill/>
+        </p:spPr>
+        <p:txBody>
+          <a:bodyPr wrap="square" lIns="0" tIns="0" rIns="0" bIns="0">
+            <a:spAutoFit/>
+          </a:bodyPr>
+          <a:lstStyle/>
+          <a:p>
+            <a:pPr marL="177800" indent="0">
+              <a:spcAft>
+                <a:spcPts val="0"/>
+              </a:spcAft>
+              <a:buSzPct val="100000"/>
+              <a:buNone/>
+            </a:pPr>
+            <a:r>
+              <a:rPr lang="en-US" sz="1200" b="1" dirty="0">
+                <a:solidFill>
+                  <a:srgbClr val="000000"/>
+                </a:solidFill>
+                <a:latin typeface="Calibri" pitchFamily="34" charset="0"/>
+                <a:ea typeface="Calibri" pitchFamily="34" charset="-122"/>
+                <a:cs typeface="Calibri" pitchFamily="34" charset="-120"/>
+              </a:rPr>
+              <a:t xml:space="preserve">nominal</a:t>
+            </a:r>
+          </a:p>
+        </p:txBody>
+      </p:sp>
+      <p:sp>
+        <p:nvSpPr>
+          <p:cNvPr id="18" name="TextBox 17"/>
+          <p:cNvSpPr txBox="1"/>
+          <p:nvPr/>
+        </p:nvSpPr>
+        <p:spPr>
+          <a:xfrm>
+            <a:off x="4160520" y="2638044"/>
+            <a:ext cx="1005840" cy="274320"/>
+          </a:xfrm>
+          <a:prstGeom prst="rect">
+            <a:avLst/>
+          </a:prstGeom>
+          <a:noFill/>
+        </p:spPr>
+        <p:txBody>
+          <a:bodyPr wrap="square" lIns="0" tIns="0" rIns="0" bIns="0">
+            <a:spAutoFit/>
+          </a:bodyPr>
+          <a:lstStyle/>
+          <a:p>
+            <a:pPr marL="177800" indent="0">
+              <a:spcAft>
+                <a:spcPts val="0"/>
+              </a:spcAft>
+              <a:buSzPct val="100000"/>
+              <a:buNone/>
+            </a:pPr>
+            <a:r>
+              <a:rPr lang="en-US" sz="1200" b="1" dirty="0">
+                <a:solidFill>
+                  <a:srgbClr val="000000"/>
+                </a:solidFill>
+                <a:latin typeface="Calibri" pitchFamily="34" charset="0"/>
+                <a:ea typeface="Calibri" pitchFamily="34" charset="-122"/>
+                <a:cs typeface="Calibri" pitchFamily="34" charset="-120"/>
+              </a:rPr>
+              <a:t xml:space="preserve">5.95 %</a:t>
+            </a:r>
+          </a:p>
+        </p:txBody>
+      </p:sp>
+      <p:sp>
+        <p:nvSpPr>
+          <p:cNvPr id="19" name="TextBox 18"/>
+          <p:cNvSpPr txBox="1"/>
+          <p:nvPr/>
+        </p:nvSpPr>
+        <p:spPr>
+          <a:xfrm>
+            <a:off x="5257800" y="2638044"/>
+            <a:ext cx="1097280" cy="274320"/>
+          </a:xfrm>
+          <a:prstGeom prst="rect">
+            <a:avLst/>
+          </a:prstGeom>
+          <a:noFill/>
+        </p:spPr>
+        <p:txBody>
+          <a:bodyPr wrap="square" lIns="0" tIns="0" rIns="0" bIns="0">
+            <a:spAutoFit/>
+          </a:bodyPr>
+          <a:lstStyle/>
+          <a:p>
+            <a:pPr marL="177800" indent="0">
+              <a:spcAft>
+                <a:spcPts val="0"/>
+              </a:spcAft>
+              <a:buSzPct val="100000"/>
+              <a:buNone/>
+            </a:pPr>
+            <a:r>
+              <a:rPr lang="en-US" sz="1200" dirty="0">
+                <a:solidFill>
+                  <a:srgbClr val="000000"/>
+                </a:solidFill>
+                <a:latin typeface="Calibri" pitchFamily="34" charset="0"/>
+                <a:ea typeface="Calibri" pitchFamily="34" charset="-122"/>
+                <a:cs typeface="Calibri" pitchFamily="34" charset="-120"/>
+              </a:rPr>
+              <a:t xml:space="preserve">—</a:t>
+            </a:r>
+          </a:p>
+        </p:txBody>
+      </p:sp>
+      <p:sp>
+        <p:nvSpPr>
+          <p:cNvPr id="20" name="TextBox 19"/>
+          <p:cNvSpPr txBox="1"/>
+          <p:nvPr/>
+        </p:nvSpPr>
+        <p:spPr>
+          <a:xfrm>
+            <a:off x="640080" y="2944368"/>
+            <a:ext cx="3474720" cy="274320"/>
+          </a:xfrm>
+          <a:prstGeom prst="rect">
+            <a:avLst/>
+          </a:prstGeom>
+          <a:noFill/>
+        </p:spPr>
+        <p:txBody>
+          <a:bodyPr wrap="square" lIns="0" tIns="0" rIns="0" bIns="0">
+            <a:spAutoFit/>
+          </a:bodyPr>
+          <a:lstStyle/>
+          <a:p>
+            <a:pPr marL="177800" indent="0">
+              <a:spcAft>
+                <a:spcPts val="0"/>
+              </a:spcAft>
+              <a:buSzPct val="100000"/>
+              <a:buNone/>
+            </a:pPr>
+            <a:r>
+              <a:rPr lang="en-US" sz="1200" dirty="0">
+                <a:solidFill>
+                  <a:srgbClr val="000000"/>
+                </a:solidFill>
+                <a:latin typeface="Calibri" pitchFamily="34" charset="0"/>
+                <a:ea typeface="Calibri" pitchFamily="34" charset="-122"/>
+                <a:cs typeface="Calibri" pitchFamily="34" charset="-120"/>
+              </a:rPr>
+              <a:t xml:space="preserve">Threshold −20 %</a:t>
+            </a:r>
+          </a:p>
+        </p:txBody>
+      </p:sp>
+      <p:sp>
+        <p:nvSpPr>
+          <p:cNvPr id="21" name="TextBox 20"/>
+          <p:cNvSpPr txBox="1"/>
+          <p:nvPr/>
+        </p:nvSpPr>
+        <p:spPr>
+          <a:xfrm>
+            <a:off x="4160520" y="2944368"/>
+            <a:ext cx="1005840" cy="274320"/>
+          </a:xfrm>
+          <a:prstGeom prst="rect">
+            <a:avLst/>
+          </a:prstGeom>
+          <a:noFill/>
+        </p:spPr>
+        <p:txBody>
+          <a:bodyPr wrap="square" lIns="0" tIns="0" rIns="0" bIns="0">
+            <a:spAutoFit/>
+          </a:bodyPr>
+          <a:lstStyle/>
+          <a:p>
+            <a:pPr marL="177800" indent="0">
+              <a:spcAft>
+                <a:spcPts val="0"/>
+              </a:spcAft>
+              <a:buSzPct val="100000"/>
+              <a:buNone/>
+            </a:pPr>
+            <a:r>
+              <a:rPr lang="en-US" sz="1200" dirty="0">
+                <a:solidFill>
+                  <a:srgbClr val="000000"/>
+                </a:solidFill>
+                <a:latin typeface="Calibri" pitchFamily="34" charset="0"/>
+                <a:ea typeface="Calibri" pitchFamily="34" charset="-122"/>
+                <a:cs typeface="Calibri" pitchFamily="34" charset="-120"/>
+              </a:rPr>
+              <a:t xml:space="preserve">5.64 %</a:t>
+            </a:r>
+          </a:p>
+        </p:txBody>
+      </p:sp>
+      <p:sp>
+        <p:nvSpPr>
+          <p:cNvPr id="22" name="TextBox 21"/>
+          <p:cNvSpPr txBox="1"/>
+          <p:nvPr/>
+        </p:nvSpPr>
+        <p:spPr>
+          <a:xfrm>
+            <a:off x="5257800" y="2944368"/>
+            <a:ext cx="1097280" cy="274320"/>
+          </a:xfrm>
+          <a:prstGeom prst="rect">
+            <a:avLst/>
+          </a:prstGeom>
+          <a:noFill/>
+        </p:spPr>
+        <p:txBody>
+          <a:bodyPr wrap="square" lIns="0" tIns="0" rIns="0" bIns="0">
+            <a:spAutoFit/>
+          </a:bodyPr>
+          <a:lstStyle/>
+          <a:p>
+            <a:pPr marL="177800" indent="0">
+              <a:spcAft>
+                <a:spcPts val="0"/>
+              </a:spcAft>
+              <a:buSzPct val="100000"/>
+              <a:buNone/>
+            </a:pPr>
+            <a:r>
+              <a:rPr lang="en-US" sz="1200" dirty="0">
+                <a:solidFill>
+                  <a:srgbClr val="000000"/>
+                </a:solidFill>
+                <a:latin typeface="Calibri" pitchFamily="34" charset="0"/>
+                <a:ea typeface="Calibri" pitchFamily="34" charset="-122"/>
+                <a:cs typeface="Calibri" pitchFamily="34" charset="-120"/>
+              </a:rPr>
+              <a:t xml:space="preserve">−0.31</a:t>
+            </a:r>
+          </a:p>
+        </p:txBody>
+      </p:sp>
+      <p:sp>
+        <p:nvSpPr>
+          <p:cNvPr id="23" name="TextBox 22"/>
+          <p:cNvSpPr txBox="1"/>
+          <p:nvPr/>
+        </p:nvSpPr>
+        <p:spPr>
+          <a:xfrm>
+            <a:off x="640080" y="3250691"/>
+            <a:ext cx="3474720" cy="274320"/>
+          </a:xfrm>
+          <a:prstGeom prst="rect">
+            <a:avLst/>
+          </a:prstGeom>
+          <a:noFill/>
+        </p:spPr>
+        <p:txBody>
+          <a:bodyPr wrap="square" lIns="0" tIns="0" rIns="0" bIns="0">
+            <a:spAutoFit/>
+          </a:bodyPr>
+          <a:lstStyle/>
+          <a:p>
+            <a:pPr marL="177800" indent="0">
+              <a:spcAft>
+                <a:spcPts val="0"/>
+              </a:spcAft>
+              <a:buSzPct val="100000"/>
+              <a:buNone/>
+            </a:pPr>
+            <a:r>
+              <a:rPr lang="en-US" sz="1200" dirty="0">
+                <a:solidFill>
+                  <a:srgbClr val="000000"/>
+                </a:solidFill>
+                <a:latin typeface="Calibri" pitchFamily="34" charset="0"/>
+                <a:ea typeface="Calibri" pitchFamily="34" charset="-122"/>
+                <a:cs typeface="Calibri" pitchFamily="34" charset="-120"/>
+              </a:rPr>
+              <a:t xml:space="preserve">Transconductance +30 %</a:t>
+            </a:r>
+          </a:p>
+        </p:txBody>
+      </p:sp>
+      <p:sp>
+        <p:nvSpPr>
+          <p:cNvPr id="24" name="TextBox 23"/>
+          <p:cNvSpPr txBox="1"/>
+          <p:nvPr/>
+        </p:nvSpPr>
+        <p:spPr>
+          <a:xfrm>
+            <a:off x="4160520" y="3250691"/>
+            <a:ext cx="1005840" cy="274320"/>
+          </a:xfrm>
+          <a:prstGeom prst="rect">
+            <a:avLst/>
+          </a:prstGeom>
+          <a:noFill/>
+        </p:spPr>
+        <p:txBody>
+          <a:bodyPr wrap="square" lIns="0" tIns="0" rIns="0" bIns="0">
+            <a:spAutoFit/>
+          </a:bodyPr>
+          <a:lstStyle/>
+          <a:p>
+            <a:pPr marL="177800" indent="0">
+              <a:spcAft>
+                <a:spcPts val="0"/>
+              </a:spcAft>
+              <a:buSzPct val="100000"/>
+              <a:buNone/>
+            </a:pPr>
+            <a:r>
+              <a:rPr lang="en-US" sz="1200" dirty="0">
+                <a:solidFill>
+                  <a:srgbClr val="000000"/>
+                </a:solidFill>
+                <a:latin typeface="Calibri" pitchFamily="34" charset="0"/>
+                <a:ea typeface="Calibri" pitchFamily="34" charset="-122"/>
+                <a:cs typeface="Calibri" pitchFamily="34" charset="-120"/>
+              </a:rPr>
+              <a:t xml:space="preserve">5.08 %</a:t>
+            </a:r>
+          </a:p>
+        </p:txBody>
+      </p:sp>
+      <p:sp>
+        <p:nvSpPr>
+          <p:cNvPr id="25" name="TextBox 24"/>
+          <p:cNvSpPr txBox="1"/>
+          <p:nvPr/>
+        </p:nvSpPr>
+        <p:spPr>
+          <a:xfrm>
+            <a:off x="5257800" y="3250691"/>
+            <a:ext cx="1097280" cy="274320"/>
+          </a:xfrm>
+          <a:prstGeom prst="rect">
+            <a:avLst/>
+          </a:prstGeom>
+          <a:noFill/>
+        </p:spPr>
+        <p:txBody>
+          <a:bodyPr wrap="square" lIns="0" tIns="0" rIns="0" bIns="0">
+            <a:spAutoFit/>
+          </a:bodyPr>
+          <a:lstStyle/>
+          <a:p>
+            <a:pPr marL="177800" indent="0">
+              <a:spcAft>
+                <a:spcPts val="0"/>
+              </a:spcAft>
+              <a:buSzPct val="100000"/>
+              <a:buNone/>
+            </a:pPr>
+            <a:r>
+              <a:rPr lang="en-US" sz="1200" dirty="0">
+                <a:solidFill>
+                  <a:srgbClr val="000000"/>
+                </a:solidFill>
+                <a:latin typeface="Calibri" pitchFamily="34" charset="0"/>
+                <a:ea typeface="Calibri" pitchFamily="34" charset="-122"/>
+                <a:cs typeface="Calibri" pitchFamily="34" charset="-120"/>
+              </a:rPr>
+              <a:t xml:space="preserve">−0.87</a:t>
+            </a:r>
+          </a:p>
+        </p:txBody>
+      </p:sp>
+      <p:sp>
+        <p:nvSpPr>
+          <p:cNvPr id="26" name="TextBox 25"/>
+          <p:cNvSpPr txBox="1"/>
+          <p:nvPr/>
+        </p:nvSpPr>
+        <p:spPr>
+          <a:xfrm>
+            <a:off x="640080" y="3557015"/>
+            <a:ext cx="3474720" cy="274320"/>
+          </a:xfrm>
+          <a:prstGeom prst="rect">
+            <a:avLst/>
+          </a:prstGeom>
+          <a:noFill/>
+        </p:spPr>
+        <p:txBody>
+          <a:bodyPr wrap="square" lIns="0" tIns="0" rIns="0" bIns="0">
+            <a:spAutoFit/>
+          </a:bodyPr>
+          <a:lstStyle/>
+          <a:p>
+            <a:pPr marL="177800" indent="0">
+              <a:spcAft>
+                <a:spcPts val="0"/>
+              </a:spcAft>
+              <a:buSzPct val="100000"/>
+              <a:buNone/>
+            </a:pPr>
+            <a:r>
+              <a:rPr lang="en-US" sz="1200" dirty="0">
+                <a:solidFill>
+                  <a:srgbClr val="000000"/>
+                </a:solidFill>
+                <a:latin typeface="Calibri" pitchFamily="34" charset="0"/>
+                <a:ea typeface="Calibri" pitchFamily="34" charset="-122"/>
+                <a:cs typeface="Calibri" pitchFamily="34" charset="-120"/>
+              </a:rPr>
+              <a:t xml:space="preserve">Threshold +20 %</a:t>
+            </a:r>
+          </a:p>
+        </p:txBody>
+      </p:sp>
+      <p:sp>
+        <p:nvSpPr>
+          <p:cNvPr id="27" name="TextBox 26"/>
+          <p:cNvSpPr txBox="1"/>
+          <p:nvPr/>
+        </p:nvSpPr>
+        <p:spPr>
+          <a:xfrm>
+            <a:off x="4160520" y="3557015"/>
+            <a:ext cx="1005840" cy="274320"/>
+          </a:xfrm>
+          <a:prstGeom prst="rect">
+            <a:avLst/>
+          </a:prstGeom>
+          <a:noFill/>
+        </p:spPr>
+        <p:txBody>
+          <a:bodyPr wrap="square" lIns="0" tIns="0" rIns="0" bIns="0">
+            <a:spAutoFit/>
+          </a:bodyPr>
+          <a:lstStyle/>
+          <a:p>
+            <a:pPr marL="177800" indent="0">
+              <a:spcAft>
+                <a:spcPts val="0"/>
+              </a:spcAft>
+              <a:buSzPct val="100000"/>
+              <a:buNone/>
+            </a:pPr>
+            <a:r>
+              <a:rPr lang="en-US" sz="1200" dirty="0">
+                <a:solidFill>
+                  <a:srgbClr val="000000"/>
+                </a:solidFill>
+                <a:latin typeface="Calibri" pitchFamily="34" charset="0"/>
+                <a:ea typeface="Calibri" pitchFamily="34" charset="-122"/>
+                <a:cs typeface="Calibri" pitchFamily="34" charset="-120"/>
+              </a:rPr>
+              <a:t xml:space="preserve">4.90 %</a:t>
+            </a:r>
+          </a:p>
+        </p:txBody>
+      </p:sp>
+      <p:sp>
+        <p:nvSpPr>
+          <p:cNvPr id="28" name="TextBox 27"/>
+          <p:cNvSpPr txBox="1"/>
+          <p:nvPr/>
+        </p:nvSpPr>
+        <p:spPr>
+          <a:xfrm>
+            <a:off x="5257800" y="3557015"/>
+            <a:ext cx="1097280" cy="274320"/>
+          </a:xfrm>
+          <a:prstGeom prst="rect">
+            <a:avLst/>
+          </a:prstGeom>
+          <a:noFill/>
+        </p:spPr>
+        <p:txBody>
+          <a:bodyPr wrap="square" lIns="0" tIns="0" rIns="0" bIns="0">
+            <a:spAutoFit/>
+          </a:bodyPr>
+          <a:lstStyle/>
+          <a:p>
+            <a:pPr marL="177800" indent="0">
+              <a:spcAft>
+                <a:spcPts val="0"/>
+              </a:spcAft>
+              <a:buSzPct val="100000"/>
+              <a:buNone/>
+            </a:pPr>
+            <a:r>
+              <a:rPr lang="en-US" sz="1200" dirty="0">
+                <a:solidFill>
+                  <a:srgbClr val="000000"/>
+                </a:solidFill>
+                <a:latin typeface="Calibri" pitchFamily="34" charset="0"/>
+                <a:ea typeface="Calibri" pitchFamily="34" charset="-122"/>
+                <a:cs typeface="Calibri" pitchFamily="34" charset="-120"/>
+              </a:rPr>
+              <a:t xml:space="preserve">−1.05</a:t>
+            </a:r>
+          </a:p>
+        </p:txBody>
+      </p:sp>
+      <p:sp>
+        <p:nvSpPr>
+          <p:cNvPr id="29" name="TextBox 28"/>
+          <p:cNvSpPr txBox="1"/>
+          <p:nvPr/>
+        </p:nvSpPr>
+        <p:spPr>
+          <a:xfrm>
+            <a:off x="640080" y="3863339"/>
+            <a:ext cx="3474720" cy="274320"/>
+          </a:xfrm>
+          <a:prstGeom prst="rect">
+            <a:avLst/>
+          </a:prstGeom>
+          <a:noFill/>
+        </p:spPr>
+        <p:txBody>
+          <a:bodyPr wrap="square" lIns="0" tIns="0" rIns="0" bIns="0">
+            <a:spAutoFit/>
+          </a:bodyPr>
+          <a:lstStyle/>
+          <a:p>
+            <a:pPr marL="177800" indent="0">
+              <a:spcAft>
+                <a:spcPts val="0"/>
+              </a:spcAft>
+              <a:buSzPct val="100000"/>
+              <a:buNone/>
+            </a:pPr>
+            <a:r>
+              <a:rPr lang="en-US" sz="1200" dirty="0">
+                <a:solidFill>
+                  <a:srgbClr val="000000"/>
+                </a:solidFill>
+                <a:latin typeface="Calibri" pitchFamily="34" charset="0"/>
+                <a:ea typeface="Calibri" pitchFamily="34" charset="-122"/>
+                <a:cs typeface="Calibri" pitchFamily="34" charset="-120"/>
+              </a:rPr>
+              <a:t xml:space="preserve">Input capacitance −30 %</a:t>
+            </a:r>
+          </a:p>
+        </p:txBody>
+      </p:sp>
+      <p:sp>
+        <p:nvSpPr>
+          <p:cNvPr id="30" name="TextBox 29"/>
+          <p:cNvSpPr txBox="1"/>
+          <p:nvPr/>
+        </p:nvSpPr>
+        <p:spPr>
+          <a:xfrm>
+            <a:off x="4160520" y="3863339"/>
+            <a:ext cx="1005840" cy="274320"/>
+          </a:xfrm>
+          <a:prstGeom prst="rect">
+            <a:avLst/>
+          </a:prstGeom>
+          <a:noFill/>
+        </p:spPr>
+        <p:txBody>
+          <a:bodyPr wrap="square" lIns="0" tIns="0" rIns="0" bIns="0">
+            <a:spAutoFit/>
+          </a:bodyPr>
+          <a:lstStyle/>
+          <a:p>
+            <a:pPr marL="177800" indent="0">
+              <a:spcAft>
+                <a:spcPts val="0"/>
+              </a:spcAft>
+              <a:buSzPct val="100000"/>
+              <a:buNone/>
+            </a:pPr>
+            <a:r>
+              <a:rPr lang="en-US" sz="1200" dirty="0">
+                <a:solidFill>
+                  <a:srgbClr val="000000"/>
+                </a:solidFill>
+                <a:latin typeface="Calibri" pitchFamily="34" charset="0"/>
+                <a:ea typeface="Calibri" pitchFamily="34" charset="-122"/>
+                <a:cs typeface="Calibri" pitchFamily="34" charset="-120"/>
+              </a:rPr>
+              <a:t xml:space="preserve">4.76 %</a:t>
+            </a:r>
+          </a:p>
+        </p:txBody>
+      </p:sp>
+      <p:sp>
+        <p:nvSpPr>
+          <p:cNvPr id="31" name="TextBox 30"/>
+          <p:cNvSpPr txBox="1"/>
+          <p:nvPr/>
+        </p:nvSpPr>
+        <p:spPr>
+          <a:xfrm>
+            <a:off x="5257800" y="3863339"/>
+            <a:ext cx="1097280" cy="274320"/>
+          </a:xfrm>
+          <a:prstGeom prst="rect">
+            <a:avLst/>
+          </a:prstGeom>
+          <a:noFill/>
+        </p:spPr>
+        <p:txBody>
+          <a:bodyPr wrap="square" lIns="0" tIns="0" rIns="0" bIns="0">
+            <a:spAutoFit/>
+          </a:bodyPr>
+          <a:lstStyle/>
+          <a:p>
+            <a:pPr marL="177800" indent="0">
+              <a:spcAft>
+                <a:spcPts val="0"/>
+              </a:spcAft>
+              <a:buSzPct val="100000"/>
+              <a:buNone/>
+            </a:pPr>
+            <a:r>
+              <a:rPr lang="en-US" sz="1200" dirty="0">
+                <a:solidFill>
+                  <a:srgbClr val="000000"/>
+                </a:solidFill>
+                <a:latin typeface="Calibri" pitchFamily="34" charset="0"/>
+                <a:ea typeface="Calibri" pitchFamily="34" charset="-122"/>
+                <a:cs typeface="Calibri" pitchFamily="34" charset="-120"/>
+              </a:rPr>
+              <a:t xml:space="preserve">−1.19</a:t>
+            </a:r>
+          </a:p>
+        </p:txBody>
+      </p:sp>
+      <p:sp>
+        <p:nvSpPr>
+          <p:cNvPr id="32" name="TextBox 31"/>
+          <p:cNvSpPr txBox="1"/>
+          <p:nvPr/>
+        </p:nvSpPr>
+        <p:spPr>
+          <a:xfrm>
+            <a:off x="640080" y="4169663"/>
+            <a:ext cx="3474720" cy="274320"/>
+          </a:xfrm>
+          <a:prstGeom prst="rect">
+            <a:avLst/>
+          </a:prstGeom>
+          <a:noFill/>
+        </p:spPr>
+        <p:txBody>
+          <a:bodyPr wrap="square" lIns="0" tIns="0" rIns="0" bIns="0">
+            <a:spAutoFit/>
+          </a:bodyPr>
+          <a:lstStyle/>
+          <a:p>
+            <a:pPr marL="177800" indent="0">
+              <a:spcAft>
+                <a:spcPts val="0"/>
+              </a:spcAft>
+              <a:buSzPct val="100000"/>
+              <a:buNone/>
+            </a:pPr>
+            <a:r>
+              <a:rPr lang="en-US" sz="1200" dirty="0">
+                <a:solidFill>
+                  <a:srgbClr val="000000"/>
+                </a:solidFill>
+                <a:latin typeface="Calibri" pitchFamily="34" charset="0"/>
+                <a:ea typeface="Calibri" pitchFamily="34" charset="-122"/>
+                <a:cs typeface="Calibri" pitchFamily="34" charset="-120"/>
+              </a:rPr>
+              <a:t xml:space="preserve">Transconductance −30 %</a:t>
+            </a:r>
+          </a:p>
+        </p:txBody>
+      </p:sp>
+      <p:sp>
+        <p:nvSpPr>
+          <p:cNvPr id="33" name="TextBox 32"/>
+          <p:cNvSpPr txBox="1"/>
+          <p:nvPr/>
+        </p:nvSpPr>
+        <p:spPr>
+          <a:xfrm>
+            <a:off x="4160520" y="4169663"/>
+            <a:ext cx="1005840" cy="274320"/>
+          </a:xfrm>
+          <a:prstGeom prst="rect">
+            <a:avLst/>
+          </a:prstGeom>
+          <a:noFill/>
+        </p:spPr>
+        <p:txBody>
+          <a:bodyPr wrap="square" lIns="0" tIns="0" rIns="0" bIns="0">
+            <a:spAutoFit/>
+          </a:bodyPr>
+          <a:lstStyle/>
+          <a:p>
+            <a:pPr marL="177800" indent="0">
+              <a:spcAft>
+                <a:spcPts val="0"/>
+              </a:spcAft>
+              <a:buSzPct val="100000"/>
+              <a:buNone/>
+            </a:pPr>
+            <a:r>
+              <a:rPr lang="en-US" sz="1200" dirty="0">
+                <a:solidFill>
+                  <a:srgbClr val="000000"/>
+                </a:solidFill>
+                <a:latin typeface="Calibri" pitchFamily="34" charset="0"/>
+                <a:ea typeface="Calibri" pitchFamily="34" charset="-122"/>
+                <a:cs typeface="Calibri" pitchFamily="34" charset="-120"/>
+              </a:rPr>
+              <a:t xml:space="preserve">4.45 %</a:t>
+            </a:r>
+          </a:p>
+        </p:txBody>
+      </p:sp>
+      <p:sp>
+        <p:nvSpPr>
+          <p:cNvPr id="34" name="TextBox 33"/>
+          <p:cNvSpPr txBox="1"/>
+          <p:nvPr/>
+        </p:nvSpPr>
+        <p:spPr>
+          <a:xfrm>
+            <a:off x="5257800" y="4169663"/>
+            <a:ext cx="1097280" cy="274320"/>
+          </a:xfrm>
+          <a:prstGeom prst="rect">
+            <a:avLst/>
+          </a:prstGeom>
+          <a:noFill/>
+        </p:spPr>
+        <p:txBody>
+          <a:bodyPr wrap="square" lIns="0" tIns="0" rIns="0" bIns="0">
+            <a:spAutoFit/>
+          </a:bodyPr>
+          <a:lstStyle/>
+          <a:p>
+            <a:pPr marL="177800" indent="0">
+              <a:spcAft>
+                <a:spcPts val="0"/>
+              </a:spcAft>
+              <a:buSzPct val="100000"/>
+              <a:buNone/>
+            </a:pPr>
+            <a:r>
+              <a:rPr lang="en-US" sz="1200" dirty="0">
+                <a:solidFill>
+                  <a:srgbClr val="000000"/>
+                </a:solidFill>
+                <a:latin typeface="Calibri" pitchFamily="34" charset="0"/>
+                <a:ea typeface="Calibri" pitchFamily="34" charset="-122"/>
+                <a:cs typeface="Calibri" pitchFamily="34" charset="-120"/>
+              </a:rPr>
+              <a:t xml:space="preserve">−1.49</a:t>
+            </a:r>
+          </a:p>
+        </p:txBody>
+      </p:sp>
+      <p:sp>
+        <p:nvSpPr>
+          <p:cNvPr id="35" name="TextBox 34"/>
+          <p:cNvSpPr txBox="1"/>
+          <p:nvPr/>
+        </p:nvSpPr>
+        <p:spPr>
+          <a:xfrm>
+            <a:off x="640080" y="4475988"/>
+            <a:ext cx="3474720" cy="274320"/>
+          </a:xfrm>
+          <a:prstGeom prst="rect">
+            <a:avLst/>
+          </a:prstGeom>
+          <a:noFill/>
+        </p:spPr>
+        <p:txBody>
+          <a:bodyPr wrap="square" lIns="0" tIns="0" rIns="0" bIns="0">
+            <a:spAutoFit/>
+          </a:bodyPr>
+          <a:lstStyle/>
+          <a:p>
+            <a:pPr marL="177800" indent="0">
+              <a:spcAft>
+                <a:spcPts val="0"/>
+              </a:spcAft>
+              <a:buSzPct val="100000"/>
+              <a:buNone/>
+            </a:pPr>
+            <a:r>
+              <a:rPr lang="en-US" sz="1200" dirty="0">
+                <a:solidFill>
+                  <a:srgbClr val="000000"/>
+                </a:solidFill>
+                <a:latin typeface="Calibri" pitchFamily="34" charset="0"/>
+                <a:ea typeface="Calibri" pitchFamily="34" charset="-122"/>
+                <a:cs typeface="Calibri" pitchFamily="34" charset="-120"/>
+              </a:rPr>
+              <a:t xml:space="preserve">Miller capacitance +50 %</a:t>
+            </a:r>
+          </a:p>
+        </p:txBody>
+      </p:sp>
+      <p:sp>
+        <p:nvSpPr>
+          <p:cNvPr id="36" name="TextBox 35"/>
+          <p:cNvSpPr txBox="1"/>
+          <p:nvPr/>
+        </p:nvSpPr>
+        <p:spPr>
+          <a:xfrm>
+            <a:off x="4160520" y="4475988"/>
+            <a:ext cx="1005840" cy="274320"/>
+          </a:xfrm>
+          <a:prstGeom prst="rect">
+            <a:avLst/>
+          </a:prstGeom>
+          <a:noFill/>
+        </p:spPr>
+        <p:txBody>
+          <a:bodyPr wrap="square" lIns="0" tIns="0" rIns="0" bIns="0">
+            <a:spAutoFit/>
+          </a:bodyPr>
+          <a:lstStyle/>
+          <a:p>
+            <a:pPr marL="177800" indent="0">
+              <a:spcAft>
+                <a:spcPts val="0"/>
+              </a:spcAft>
+              <a:buSzPct val="100000"/>
+              <a:buNone/>
+            </a:pPr>
+            <a:r>
+              <a:rPr lang="en-US" sz="1200" dirty="0">
+                <a:solidFill>
+                  <a:srgbClr val="000000"/>
+                </a:solidFill>
+                <a:latin typeface="Calibri" pitchFamily="34" charset="0"/>
+                <a:ea typeface="Calibri" pitchFamily="34" charset="-122"/>
+                <a:cs typeface="Calibri" pitchFamily="34" charset="-120"/>
+              </a:rPr>
+              <a:t xml:space="preserve">4.32 %</a:t>
+            </a:r>
+          </a:p>
+        </p:txBody>
+      </p:sp>
+      <p:sp>
+        <p:nvSpPr>
+          <p:cNvPr id="37" name="TextBox 36"/>
+          <p:cNvSpPr txBox="1"/>
+          <p:nvPr/>
+        </p:nvSpPr>
+        <p:spPr>
+          <a:xfrm>
+            <a:off x="5257800" y="4475988"/>
+            <a:ext cx="1097280" cy="274320"/>
+          </a:xfrm>
+          <a:prstGeom prst="rect">
+            <a:avLst/>
+          </a:prstGeom>
+          <a:noFill/>
+        </p:spPr>
+        <p:txBody>
+          <a:bodyPr wrap="square" lIns="0" tIns="0" rIns="0" bIns="0">
+            <a:spAutoFit/>
+          </a:bodyPr>
+          <a:lstStyle/>
+          <a:p>
+            <a:pPr marL="177800" indent="0">
+              <a:spcAft>
+                <a:spcPts val="0"/>
+              </a:spcAft>
+              <a:buSzPct val="100000"/>
+              <a:buNone/>
+            </a:pPr>
+            <a:r>
+              <a:rPr lang="en-US" sz="1200" dirty="0">
+                <a:solidFill>
+                  <a:srgbClr val="000000"/>
+                </a:solidFill>
+                <a:latin typeface="Calibri" pitchFamily="34" charset="0"/>
+                <a:ea typeface="Calibri" pitchFamily="34" charset="-122"/>
+                <a:cs typeface="Calibri" pitchFamily="34" charset="-120"/>
+              </a:rPr>
+              <a:t xml:space="preserve">−1.63</a:t>
+            </a:r>
+          </a:p>
+        </p:txBody>
+      </p:sp>
+      <p:sp>
+        <p:nvSpPr>
+          <p:cNvPr id="38" name="TextBox 37"/>
+          <p:cNvSpPr txBox="1"/>
+          <p:nvPr/>
+        </p:nvSpPr>
+        <p:spPr>
+          <a:xfrm>
+            <a:off x="640080" y="4782312"/>
+            <a:ext cx="3474720" cy="274320"/>
+          </a:xfrm>
+          <a:prstGeom prst="rect">
+            <a:avLst/>
+          </a:prstGeom>
+          <a:noFill/>
+        </p:spPr>
+        <p:txBody>
+          <a:bodyPr wrap="square" lIns="0" tIns="0" rIns="0" bIns="0">
+            <a:spAutoFit/>
+          </a:bodyPr>
+          <a:lstStyle/>
+          <a:p>
+            <a:pPr marL="177800" indent="0">
+              <a:spcAft>
+                <a:spcPts val="0"/>
+              </a:spcAft>
+              <a:buSzPct val="100000"/>
+              <a:buNone/>
+            </a:pPr>
+            <a:r>
+              <a:rPr lang="en-US" sz="1200" b="1" dirty="0">
+                <a:solidFill>
+                  <a:srgbClr val="000000"/>
+                </a:solidFill>
+                <a:latin typeface="Calibri" pitchFamily="34" charset="0"/>
+                <a:ea typeface="Calibri" pitchFamily="34" charset="-122"/>
+                <a:cs typeface="Calibri" pitchFamily="34" charset="-120"/>
+              </a:rPr>
+              <a:t xml:space="preserve">Loop inductance +50 %  (4.5 nH)</a:t>
+            </a:r>
+          </a:p>
+        </p:txBody>
+      </p:sp>
+      <p:sp>
+        <p:nvSpPr>
+          <p:cNvPr id="39" name="TextBox 38"/>
+          <p:cNvSpPr txBox="1"/>
+          <p:nvPr/>
+        </p:nvSpPr>
+        <p:spPr>
+          <a:xfrm>
+            <a:off x="4160520" y="4782312"/>
+            <a:ext cx="1005840" cy="274320"/>
+          </a:xfrm>
+          <a:prstGeom prst="rect">
+            <a:avLst/>
+          </a:prstGeom>
+          <a:noFill/>
+        </p:spPr>
+        <p:txBody>
+          <a:bodyPr wrap="square" lIns="0" tIns="0" rIns="0" bIns="0">
+            <a:spAutoFit/>
+          </a:bodyPr>
+          <a:lstStyle/>
+          <a:p>
+            <a:pPr marL="177800" indent="0">
+              <a:spcAft>
+                <a:spcPts val="0"/>
+              </a:spcAft>
+              <a:buSzPct val="100000"/>
+              <a:buNone/>
+            </a:pPr>
+            <a:r>
+              <a:rPr lang="en-US" sz="1200" b="1" dirty="0">
+                <a:solidFill>
+                  <a:srgbClr val="000000"/>
+                </a:solidFill>
+                <a:latin typeface="Calibri" pitchFamily="34" charset="0"/>
+                <a:ea typeface="Calibri" pitchFamily="34" charset="-122"/>
+                <a:cs typeface="Calibri" pitchFamily="34" charset="-120"/>
+              </a:rPr>
+              <a:t xml:space="preserve">0.55 %</a:t>
+            </a:r>
+          </a:p>
+        </p:txBody>
+      </p:sp>
+      <p:sp>
+        <p:nvSpPr>
+          <p:cNvPr id="40" name="TextBox 39"/>
+          <p:cNvSpPr txBox="1"/>
+          <p:nvPr/>
+        </p:nvSpPr>
+        <p:spPr>
+          <a:xfrm>
+            <a:off x="5257800" y="4782312"/>
+            <a:ext cx="1097280" cy="274320"/>
+          </a:xfrm>
+          <a:prstGeom prst="rect">
+            <a:avLst/>
+          </a:prstGeom>
+          <a:noFill/>
+        </p:spPr>
+        <p:txBody>
+          <a:bodyPr wrap="square" lIns="0" tIns="0" rIns="0" bIns="0">
+            <a:spAutoFit/>
+          </a:bodyPr>
+          <a:lstStyle/>
+          <a:p>
+            <a:pPr marL="177800" indent="0">
+              <a:spcAft>
+                <a:spcPts val="0"/>
+              </a:spcAft>
+              <a:buSzPct val="100000"/>
+              <a:buNone/>
+            </a:pPr>
+            <a:r>
+              <a:rPr lang="en-US" sz="1200" dirty="0">
+                <a:solidFill>
+                  <a:srgbClr val="000000"/>
+                </a:solidFill>
+                <a:latin typeface="Calibri" pitchFamily="34" charset="0"/>
+                <a:ea typeface="Calibri" pitchFamily="34" charset="-122"/>
+                <a:cs typeface="Calibri" pitchFamily="34" charset="-120"/>
+              </a:rPr>
+              <a:t xml:space="preserve">−5.39</a:t>
+            </a:r>
+          </a:p>
+        </p:txBody>
+      </p:sp>
+      <p:sp>
+        <p:nvSpPr>
+          <p:cNvPr id="41" name="TextBox 40"/>
+          <p:cNvSpPr txBox="1"/>
+          <p:nvPr/>
+        </p:nvSpPr>
+        <p:spPr>
+          <a:xfrm>
+            <a:off x="6903720" y="1325880"/>
+            <a:ext cx="4617720" cy="548640"/>
+          </a:xfrm>
+          <a:prstGeom prst="rect">
+            <a:avLst/>
+          </a:prstGeom>
+          <a:noFill/>
+        </p:spPr>
+        <p:txBody>
+          <a:bodyPr wrap="square" lIns="0" tIns="0" rIns="0" bIns="0">
+            <a:spAutoFit/>
+          </a:bodyPr>
+          <a:lstStyle/>
+          <a:p>
+            <a:pPr marL="177800" indent="0">
+              <a:spcAft>
+                <a:spcPts val="0"/>
+              </a:spcAft>
+              <a:buSzPct val="100000"/>
+              <a:buNone/>
+            </a:pPr>
+            <a:r>
+              <a:rPr lang="en-US" sz="1500" b="1" dirty="0">
+                <a:solidFill>
+                  <a:srgbClr val="000000"/>
+                </a:solidFill>
+                <a:latin typeface="Calibri" pitchFamily="34" charset="0"/>
+                <a:ea typeface="Calibri" pitchFamily="34" charset="-122"/>
+                <a:cs typeface="Calibri" pitchFamily="34" charset="-120"/>
+              </a:rPr>
+              <a:t xml:space="preserve">Robust to the device,</a:t>
+            </a:r>
+          </a:p>
+          <a:p>
+            <a:pPr marL="177800" indent="0">
+              <a:spcAft>
+                <a:spcPts val="0"/>
+              </a:spcAft>
+              <a:buSzPct val="100000"/>
+              <a:buNone/>
+            </a:pPr>
+            <a:r>
+              <a:rPr lang="en-US" sz="1500" b="1" dirty="0">
+                <a:solidFill>
+                  <a:srgbClr val="000000"/>
+                </a:solidFill>
+                <a:latin typeface="Calibri" pitchFamily="34" charset="0"/>
+                <a:ea typeface="Calibri" pitchFamily="34" charset="-122"/>
+                <a:cs typeface="Calibri" pitchFamily="34" charset="-120"/>
+              </a:rPr>
+              <a:t xml:space="preserve">conditional on the layout.</a:t>
+            </a:r>
+          </a:p>
+        </p:txBody>
+      </p:sp>
+      <p:sp>
+        <p:nvSpPr>
+          <p:cNvPr id="42" name="TextBox 41"/>
+          <p:cNvSpPr txBox="1"/>
+          <p:nvPr/>
+        </p:nvSpPr>
+        <p:spPr>
+          <a:xfrm>
+            <a:off x="6903720" y="2057400"/>
+            <a:ext cx="4617720" cy="4114800"/>
+          </a:xfrm>
+          <a:prstGeom prst="rect">
+            <a:avLst/>
+          </a:prstGeom>
+          <a:noFill/>
+        </p:spPr>
+        <p:txBody>
+          <a:bodyPr wrap="square" lIns="0" tIns="0" rIns="0" bIns="0">
+            <a:spAutoFit/>
+          </a:bodyPr>
+          <a:lstStyle/>
+          <a:p>
+            <a:pPr marL="177800" indent="-177800">
+              <a:spcAft>
+                <a:spcPts val="200"/>
+              </a:spcAft>
+              <a:buSzPct val="100000"/>
+              <a:buChar char="•"/>
+            </a:pPr>
+            <a:r>
+              <a:rPr lang="en-US" sz="1300" b="1" dirty="0">
+                <a:solidFill>
+                  <a:srgbClr val="000000"/>
+                </a:solidFill>
+                <a:latin typeface="Calibri" pitchFamily="34" charset="0"/>
+                <a:ea typeface="Calibri" pitchFamily="34" charset="-122"/>
+                <a:cs typeface="Calibri" pitchFamily="34" charset="-120"/>
+              </a:rPr>
+              <a:t xml:space="preserve">21,600 transients</a:t>
+            </a:r>
+            <a:r>
+              <a:rPr lang="en-US" sz="1300" dirty="0">
+                <a:solidFill>
+                  <a:srgbClr val="000000"/>
+                </a:solidFill>
+                <a:latin typeface="Calibri" pitchFamily="34" charset="0"/>
+                <a:ea typeface="Calibri" pitchFamily="34" charset="-122"/>
+                <a:cs typeface="Calibri" pitchFamily="34" charset="-120"/>
+              </a:rPr>
+              <a:t xml:space="preserve"> — a full 720-word search at two corners under each of eleven single-parameter perturbations. One failure.</a:t>
+            </a:r>
+          </a:p>
+          <a:p>
+            <a:pPr marL="177800" indent="-177800">
+              <a:spcAft>
+                <a:spcPts val="200"/>
+              </a:spcAft>
+              <a:buSzPct val="100000"/>
+              <a:buChar char="•"/>
+            </a:pPr>
+            <a:r>
+              <a:rPr lang="en-US" sz="1300" dirty="0">
+                <a:solidFill>
+                  <a:srgbClr val="000000"/>
+                </a:solidFill>
+                <a:latin typeface="Calibri" pitchFamily="34" charset="0"/>
+                <a:ea typeface="Calibri" pitchFamily="34" charset="-122"/>
+                <a:cs typeface="Calibri" pitchFamily="34" charset="-120"/>
+              </a:rPr>
+              <a:t xml:space="preserve">Every </a:t>
+            </a:r>
+            <a:r>
+              <a:rPr lang="en-US" sz="1300" b="1" dirty="0">
+                <a:solidFill>
+                  <a:srgbClr val="000000"/>
+                </a:solidFill>
+                <a:latin typeface="Calibri" pitchFamily="34" charset="0"/>
+                <a:ea typeface="Calibri" pitchFamily="34" charset="-122"/>
+                <a:cs typeface="Calibri" pitchFamily="34" charset="-120"/>
+              </a:rPr>
+              <a:t xml:space="preserve">device</a:t>
+            </a:r>
+            <a:r>
+              <a:rPr lang="en-US" sz="1300" dirty="0">
+                <a:solidFill>
+                  <a:srgbClr val="000000"/>
+                </a:solidFill>
+                <a:latin typeface="Calibri" pitchFamily="34" charset="0"/>
+                <a:ea typeface="Calibri" pitchFamily="34" charset="-122"/>
+                <a:cs typeface="Calibri" pitchFamily="34" charset="-120"/>
+              </a:rPr>
+              <a:t xml:space="preserve"> parameter leaves the ceiling between 4.3 % and 7.7 % — at most 1.76 points from nominal. The objection this study was built to answer is not supported.</a:t>
+            </a:r>
+          </a:p>
+          <a:p>
+            <a:pPr marL="177800" indent="-177800">
+              <a:spcAft>
+                <a:spcPts val="200"/>
+              </a:spcAft>
+              <a:buSzPct val="100000"/>
+              <a:buChar char="•"/>
+            </a:pPr>
+            <a:r>
+              <a:rPr lang="en-US" sz="1300" dirty="0">
+                <a:solidFill>
+                  <a:srgbClr val="000000"/>
+                </a:solidFill>
+                <a:latin typeface="Calibri" pitchFamily="34" charset="0"/>
+                <a:ea typeface="Calibri" pitchFamily="34" charset="-122"/>
+                <a:cs typeface="Calibri" pitchFamily="34" charset="-120"/>
+              </a:rPr>
+              <a:t xml:space="preserve">The one thing that moves it is </a:t>
+            </a:r>
+            <a:r>
+              <a:rPr lang="en-US" sz="1300" b="1" dirty="0">
+                <a:solidFill>
+                  <a:srgbClr val="000000"/>
+                </a:solidFill>
+                <a:latin typeface="Calibri" pitchFamily="34" charset="0"/>
+                <a:ea typeface="Calibri" pitchFamily="34" charset="-122"/>
+                <a:cs typeface="Calibri" pitchFamily="34" charset="-120"/>
+              </a:rPr>
+              <a:t xml:space="preserve">loop inductance</a:t>
+            </a:r>
+            <a:r>
+              <a:rPr lang="en-US" sz="1300" dirty="0">
+                <a:solidFill>
+                  <a:srgbClr val="000000"/>
+                </a:solidFill>
+                <a:latin typeface="Calibri" pitchFamily="34" charset="0"/>
+                <a:ea typeface="Calibri" pitchFamily="34" charset="-122"/>
+                <a:cs typeface="Calibri" pitchFamily="34" charset="-120"/>
+              </a:rPr>
+              <a:t xml:space="preserve">, which is board layout, not the transistor. A tighter loop commutates faster, so more charge couples through C</a:t>
+            </a:r>
+            <a:r>
+              <a:rPr lang="en-US" sz="1300" dirty="0">
+                <a:solidFill>
+                  <a:srgbClr val="000000"/>
+                </a:solidFill>
+                <a:latin typeface="Calibri" pitchFamily="34" charset="0"/>
+                <a:ea typeface="Calibri" pitchFamily="34" charset="-122"/>
+                <a:cs typeface="Calibri" pitchFamily="34" charset="-120"/>
+              </a:rPr>
+              <a:t xml:space="preserve">GD</a:t>
+            </a:r>
+            <a:r>
+              <a:rPr lang="en-US" sz="1300" dirty="0">
+                <a:solidFill>
+                  <a:srgbClr val="000000"/>
+                </a:solidFill>
+                <a:latin typeface="Calibri" pitchFamily="34" charset="0"/>
+                <a:ea typeface="Calibri" pitchFamily="34" charset="-122"/>
+                <a:cs typeface="Calibri" pitchFamily="34" charset="-120"/>
+              </a:rPr>
+              <a:t xml:space="preserve">: the median spurious gate voltage goes 0.640 V to 3.522 V and the feasible set collapses 474 → 158.</a:t>
+            </a:r>
+          </a:p>
+          <a:p>
+            <a:pPr marL="177800" indent="-177800">
+              <a:spcAft>
+                <a:spcPts val="200"/>
+              </a:spcAft>
+              <a:buSzPct val="100000"/>
+              <a:buChar char="•"/>
+            </a:pPr>
+            <a:r>
+              <a:rPr lang="en-US" sz="1300" dirty="0">
+                <a:solidFill>
+                  <a:srgbClr val="000000"/>
+                </a:solidFill>
+                <a:latin typeface="Calibri" pitchFamily="34" charset="0"/>
+                <a:ea typeface="Calibri" pitchFamily="34" charset="-122"/>
+                <a:cs typeface="Calibri" pitchFamily="34" charset="-120"/>
+              </a:rPr>
+              <a:t xml:space="preserve">So the claim is narrower and more useful than “robust”: from about 2.5 nH upward a fixed word is nearly as good; on a tighter loop the question has to be re-asked, and the answer there is not even monotonic — see slide 19.</a:t>
+            </a:r>
+          </a:p>
+          <a:p>
+            <a:pPr marL="177800" indent="-177800">
+              <a:spcAft>
+                <a:spcPts val="0"/>
+              </a:spcAft>
+              <a:buSzPct val="100000"/>
+              <a:buChar char="•"/>
+            </a:pPr>
+            <a:r>
+              <a:rPr lang="en-US" sz="1150" b="1" dirty="0">
+                <a:solidFill>
+                  <a:srgbClr val="000000"/>
+                </a:solidFill>
+                <a:latin typeface="Calibri" pitchFamily="34" charset="0"/>
+                <a:ea typeface="Calibri" pitchFamily="34" charset="-122"/>
+                <a:cs typeface="Calibri" pitchFamily="34" charset="-120"/>
+              </a:rPr>
+              <a:t xml:space="preserve">Baseline note. </a:t>
+            </a:r>
+            <a:r>
+              <a:rPr lang="en-US" sz="1150" dirty="0">
+                <a:solidFill>
+                  <a:srgbClr val="000000"/>
+                </a:solidFill>
+                <a:latin typeface="Calibri" pitchFamily="34" charset="0"/>
+                <a:ea typeface="Calibri" pitchFamily="34" charset="-122"/>
+                <a:cs typeface="Calibri" pitchFamily="34" charset="-120"/>
+              </a:rPr>
+              <a:t xml:space="preserve">Nominal here is 5.95 %, not the 5.2 % headline — a two-corner search on its own sweep. Compare the </a:t>
+            </a:r>
+            <a:r>
+              <a:rPr lang="en-US" sz="1150" b="1" dirty="0">
+                <a:solidFill>
+                  <a:srgbClr val="000000"/>
+                </a:solidFill>
+                <a:latin typeface="Calibri" pitchFamily="34" charset="0"/>
+                <a:ea typeface="Calibri" pitchFamily="34" charset="-122"/>
+                <a:cs typeface="Calibri" pitchFamily="34" charset="-120"/>
+              </a:rPr>
+              <a:t xml:space="preserve">vs nom.</a:t>
+            </a:r>
+            <a:r>
+              <a:rPr lang="en-US" sz="1150" dirty="0">
+                <a:solidFill>
+                  <a:srgbClr val="000000"/>
+                </a:solidFill>
+                <a:latin typeface="Calibri" pitchFamily="34" charset="0"/>
+                <a:ea typeface="Calibri" pitchFamily="34" charset="-122"/>
+                <a:cs typeface="Calibri" pitchFamily="34" charset="-120"/>
+              </a:rPr>
+              <a:t xml:space="preserve"> column, not the absolute values.</a:t>
             </a:r>
           </a:p>
         </p:txBody>
@@ -17536,7 +19483,7 @@
                 <a:ea typeface="Calibri" pitchFamily="34" charset="-122"/>
                 <a:cs typeface="Calibri" pitchFamily="34" charset="-120"/>
               </a:rPr>
-              <a:t>4</a:t>
+              <a:t>5</a:t>
             </a:r>
             <a:endParaRPr lang="en-US" sz="1000" dirty="0"/>
           </a:p>
@@ -17908,7 +19855,7 @@
                 <a:ea typeface="Calibri" pitchFamily="34" charset="-122"/>
                 <a:cs typeface="Calibri" pitchFamily="34" charset="-120"/>
               </a:rPr>
-              <a:t>5</a:t>
+              <a:t>6</a:t>
             </a:r>
             <a:endParaRPr lang="en-US" sz="1000" dirty="0"/>
           </a:p>
@@ -19772,7 +21719,7 @@
                 <a:ea typeface="Calibri" pitchFamily="34" charset="-122"/>
                 <a:cs typeface="Calibri" pitchFamily="34" charset="-120"/>
               </a:rPr>
-              <a:t>6</a:t>
+              <a:t>7</a:t>
             </a:r>
             <a:endParaRPr lang="en-US" sz="1000" dirty="0"/>
           </a:p>
@@ -22159,7 +24106,7 @@
                 <a:ea typeface="Calibri" pitchFamily="34" charset="-122"/>
                 <a:cs typeface="Calibri" pitchFamily="34" charset="-120"/>
               </a:rPr>
-              <a:t>8</a:t>
+              <a:t>10</a:t>
             </a:r>
             <a:endParaRPr lang="en-US" sz="1000" dirty="0"/>
           </a:p>
@@ -22560,7 +24507,7 @@
                 <a:ea typeface="Calibri" pitchFamily="34" charset="-122"/>
                 <a:cs typeface="Calibri" pitchFamily="34" charset="-120"/>
               </a:rPr>
-              <a:t>10</a:t>
+              <a:t>12</a:t>
             </a:r>
             <a:endParaRPr lang="en-US" sz="1000" dirty="0"/>
           </a:p>
@@ -22762,7 +24709,7 @@
                 <a:ea typeface="Calibri" pitchFamily="34" charset="-122"/>
                 <a:cs typeface="Calibri" pitchFamily="34" charset="-120"/>
               </a:rPr>
-              <a:t>15</a:t>
+              <a:t>17</a:t>
             </a:r>
             <a:endParaRPr lang="en-US" sz="1000" dirty="0"/>
           </a:p>

--- a/review/Review1_GaN_Segmented_Gate_Driver.pptx
+++ b/review/Review1_GaN_Segmented_Gate_Driver.pptx
@@ -16874,7 +16874,7 @@
         <p:spPr>
           <a:xfrm>
             <a:off x="1188720" y="1874519"/>
-            <a:ext cx="2743200" cy="1371600"/>
+            <a:ext cx="2743200" cy="1143000"/>
           </a:xfrm>
           <a:prstGeom prst="rect">
             <a:avLst/>
@@ -17036,7 +17036,7 @@
         <p:spPr>
           <a:xfrm>
             <a:off x="1188720" y="1874519"/>
-            <a:ext cx="2743200" cy="1371600"/>
+            <a:ext cx="2743200" cy="1143000"/>
           </a:xfrm>
           <a:prstGeom prst="rect">
             <a:avLst/>
@@ -17198,7 +17198,7 @@
         <p:spPr>
           <a:xfrm>
             <a:off x="1188720" y="1874519"/>
-            <a:ext cx="2743200" cy="1371600"/>
+            <a:ext cx="2743200" cy="1143000"/>
           </a:xfrm>
           <a:prstGeom prst="rect">
             <a:avLst/>
@@ -17360,7 +17360,7 @@
         <p:spPr>
           <a:xfrm>
             <a:off x="1188720" y="1874519"/>
-            <a:ext cx="2743200" cy="1371600"/>
+            <a:ext cx="2743200" cy="1143000"/>
           </a:xfrm>
           <a:prstGeom prst="rect">
             <a:avLst/>

--- a/review/Review1_GaN_Segmented_Gate_Driver.pptx
+++ b/review/Review1_GaN_Segmented_Gate_Driver.pptx
@@ -24593,7 +24593,7 @@
         <p:spPr>
           <a:xfrm>
             <a:off x="1069848" y="1207008"/>
-            <a:ext cx="10058400" cy="4800600"/>
+            <a:ext cx="10058400" cy="5108249"/>
           </a:xfrm>
           <a:prstGeom prst="rect">
             <a:avLst/>

--- a/review/Review1_GaN_Segmented_Gate_Driver.pptx
+++ b/review/Review1_GaN_Segmented_Gate_Driver.pptx
@@ -24592,57 +24592,14 @@
         </p:blipFill>
         <p:spPr>
           <a:xfrm>
-            <a:off x="1069848" y="1207008"/>
-            <a:ext cx="10058400" cy="5108249"/>
+            <a:off x="1417320" y="1207008"/>
+            <a:ext cx="9362598" cy="4754880"/>
           </a:xfrm>
           <a:prstGeom prst="rect">
             <a:avLst/>
           </a:prstGeom>
         </p:spPr>
       </p:pic>
-      <p:sp>
-        <p:nvSpPr>
-          <p:cNvPr id="6" name="TextBox 5"/>
-          <p:cNvSpPr txBox="1"/>
-          <p:nvPr/>
-        </p:nvSpPr>
-        <p:spPr>
-          <a:xfrm>
-            <a:off x="640080" y="6089904"/>
-            <a:ext cx="10881360" cy="347472"/>
-          </a:xfrm>
-          <a:prstGeom prst="rect">
-            <a:avLst/>
-          </a:prstGeom>
-          <a:noFill/>
-        </p:spPr>
-        <p:txBody>
-          <a:bodyPr wrap="square" lIns="0" tIns="0" rIns="0" bIns="0">
-            <a:spAutoFit/>
-          </a:bodyPr>
-          <a:lstStyle/>
-          <a:p>
-            <a:pPr marL="177800" indent="0">
-              <a:spcAft>
-                <a:spcPts val="0"/>
-              </a:spcAft>
-              <a:buSzPct val="100000"/>
-              <a:buNone/>
-            </a:pPr>
-            <a:r>
-              <a:rPr lang="en-US" sz="1100" dirty="0">
-                <a:solidFill>
-                  <a:srgbClr val="000000"/>
-                </a:solidFill>
-                <a:latin typeface="Calibri" pitchFamily="34" charset="0"/>
-                <a:ea typeface="Calibri" pitchFamily="34" charset="-122"/>
-                <a:cs typeface="Calibri" pitchFamily="34" charset="-120"/>
-              </a:rPr>
-              <a:t xml:space="preserve">Solid blocks are configured once at power-up. The dashed block — sensing, ADC and lookup table — is the adaptive machinery this project exists to price.</a:t>
-            </a:r>
-          </a:p>
-        </p:txBody>
-      </p:sp>
     </p:spTree>
   </p:cSld>
   <p:clrMapOvr>

--- a/review/Review1_GaN_Segmented_Gate_Driver.pptx
+++ b/review/Review1_GaN_Segmented_Gate_Driver.pptx
@@ -19894,7 +19894,7 @@
                 <a:ea typeface="Calibri" pitchFamily="34" charset="-122"/>
                 <a:cs typeface="Calibri" pitchFamily="34" charset="-120"/>
               </a:rPr>
-              <a:t>Literature Landscape — four clusters, and where we sit</a:t>
+              <a:t>The base paper we build on</a:t>
             </a:r>
             <a:endParaRPr lang="en-US" sz="2800" dirty="0"/>
           </a:p>
@@ -19940,14 +19940,14 @@
         </p:nvGraphicFramePr>
         <p:xfrm>
           <a:off x="548640" y="1371600"/>
-          <a:ext cx="11091672" cy="3611880"/>
+          <a:ext cx="10652760" cy="3657600"/>
         </p:xfrm>
         <a:graphic>
           <a:graphicData uri="http://schemas.openxmlformats.org/drawingml/2006/table">
             <a:tbl>
               <a:tblPr/>
               <a:tblGrid>
-                <a:gridCol w="548640">
+                <a:gridCol w="109728">
                   <a:extLst>
                     <a:ext uri="{9D8B030D-6E8A-4147-A177-3AD203B41FA5}">
                       <a16:colId xmlns:a16="http://schemas.microsoft.com/office/drawing/2014/main" val="20000"/>
@@ -19983,7 +19983,7 @@
                   </a:extLst>
                 </a:gridCol>
               </a:tblGrid>
-              <a:tr h="320040">
+              <a:tr h="365760">
                 <a:tc>
                   <a:txBody>
                     <a:bodyPr wrap="square"/>
@@ -19992,14 +19992,71 @@
                       <a:pPr marL="0" indent="0">
                         <a:buNone/>
                       </a:pPr>
+                      <a:endParaRPr lang="en-US" sz="1300" dirty="0">
+                        <a:latin typeface="Calibri" charset="0"/>
+                        <a:ea typeface="Calibri" charset="0"/>
+                        <a:cs typeface="Calibri" charset="0"/>
+                      </a:endParaRPr>
+                    </a:p>
+                  </a:txBody>
+                  <a:tcPr marL="54864" marR="54864" marT="54864" marB="54864" anchor="ctr">
+                    <a:lnL w="9525" cap="flat" cmpd="sng" algn="ctr">
+                      <a:solidFill>
+                        <a:srgbClr val="BFBFBF"/>
+                      </a:solidFill>
+                      <a:prstDash val="solid"/>
+                      <a:round/>
+                      <a:headEnd type="none" w="med" len="med"/>
+                      <a:tailEnd type="none" w="med" len="med"/>
+                    </a:lnL>
+                    <a:lnR w="9525" cap="flat" cmpd="sng" algn="ctr">
+                      <a:solidFill>
+                        <a:srgbClr val="BFBFBF"/>
+                      </a:solidFill>
+                      <a:prstDash val="solid"/>
+                      <a:round/>
+                      <a:headEnd type="none" w="med" len="med"/>
+                      <a:tailEnd type="none" w="med" len="med"/>
+                    </a:lnR>
+                    <a:lnT w="9525" cap="flat" cmpd="sng" algn="ctr">
+                      <a:solidFill>
+                        <a:srgbClr val="BFBFBF"/>
+                      </a:solidFill>
+                      <a:prstDash val="solid"/>
+                      <a:round/>
+                      <a:headEnd type="none" w="med" len="med"/>
+                      <a:tailEnd type="none" w="med" len="med"/>
+                    </a:lnT>
+                    <a:lnB w="9525" cap="flat" cmpd="sng" algn="ctr">
+                      <a:solidFill>
+                        <a:srgbClr val="BFBFBF"/>
+                      </a:solidFill>
+                      <a:prstDash val="solid"/>
+                      <a:round/>
+                      <a:headEnd type="none" w="med" len="med"/>
+                      <a:tailEnd type="none" w="med" len="med"/>
+                    </a:lnB>
+                    <a:solidFill>
+                      <a:srgbClr val="1D2F82"/>
+                    </a:solidFill>
+                  </a:tcPr>
+                </a:tc>
+                <a:tc gridSpan="4">
+                  <a:txBody>
+                    <a:bodyPr wrap="square"/>
+                    <a:lstStyle/>
+                    <a:p>
+                      <a:pPr marL="0" indent="0">
+                        <a:buNone/>
+                      </a:pPr>
                       <a:r>
-                        <a:rPr sz="1050" b="0">
+                        <a:rPr sz="1050" b="1">
                           <a:solidFill>
                             <a:srgbClr val="000000"/>
                           </a:solidFill>
                           <a:latin typeface="Calibri"/>
                         </a:rPr>
-                        <a:t>#</a:t>
+                        <a:t>Takayama, Okuda &amp; Hikihara (2022)</a:t>
                       </a:r>
                       <a:endParaRPr lang="en-US" sz="1300" dirty="0">
                         <a:latin typeface="Calibri" charset="0"/>
@@ -20050,7 +20107,7 @@
                     </a:solidFill>
                   </a:tcPr>
                 </a:tc>
-                <a:tc>
+                <a:tc hMerge="1">
                   <a:txBody>
                     <a:bodyPr wrap="square"/>
                     <a:lstStyle/>
@@ -20058,15 +20115,6 @@
                       <a:pPr marL="0" indent="0">
                         <a:buNone/>
                       </a:pPr>
-                      <a:r>
-                        <a:rPr sz="1050" b="0">
-                          <a:solidFill>
-                            <a:srgbClr val="000000"/>
-                          </a:solidFill>
-                          <a:latin typeface="Calibri"/>
-                        </a:rPr>
-                        <a:t>Cluster</a:t>
-                      </a:r>
                       <a:endParaRPr lang="en-US" sz="1300" dirty="0">
                         <a:latin typeface="Calibri" charset="0"/>
                         <a:ea typeface="Calibri" charset="0"/>
@@ -20116,7 +20164,7 @@
                     </a:solidFill>
                   </a:tcPr>
                 </a:tc>
-                <a:tc>
+                <a:tc hMerge="1">
                   <a:txBody>
                     <a:bodyPr wrap="square"/>
                     <a:lstStyle/>
@@ -20124,81 +20172,6 @@
                       <a:pPr marL="0" indent="0">
                         <a:buNone/>
                       </a:pPr>
-                      <a:r>
-                        <a:rPr sz="1050" b="0">
-                          <a:solidFill>
-                            <a:srgbClr val="000000"/>
-                          </a:solidFill>
-                          <a:latin typeface="Calibri"/>
-                        </a:rPr>
-                        <a:t>Refs</a:t>
-                      </a:r>
-                      <a:endParaRPr lang="en-US" sz="1300" dirty="0">
-                        <a:latin typeface="Calibri" charset="0"/>
-                        <a:ea typeface="Calibri" charset="0"/>
-                        <a:cs typeface="Calibri" charset="0"/>
-                      </a:endParaRPr>
-                    </a:p>
-                  </a:txBody>
-                  <a:tcPr marL="54864" marR="54864" marT="54864" marB="54864" anchor="ctr">
-                    <a:lnL w="9525" cap="flat" cmpd="sng" algn="ctr">
-                      <a:solidFill>
-                        <a:srgbClr val="BFBFBF"/>
-                      </a:solidFill>
-                      <a:prstDash val="solid"/>
-                      <a:round/>
-                      <a:headEnd type="none" w="med" len="med"/>
-                      <a:tailEnd type="none" w="med" len="med"/>
-                    </a:lnL>
-                    <a:lnR w="9525" cap="flat" cmpd="sng" algn="ctr">
-                      <a:solidFill>
-                        <a:srgbClr val="BFBFBF"/>
-                      </a:solidFill>
-                      <a:prstDash val="solid"/>
-                      <a:round/>
-                      <a:headEnd type="none" w="med" len="med"/>
-                      <a:tailEnd type="none" w="med" len="med"/>
-                    </a:lnR>
-                    <a:lnT w="9525" cap="flat" cmpd="sng" algn="ctr">
-                      <a:solidFill>
-                        <a:srgbClr val="BFBFBF"/>
-                      </a:solidFill>
-                      <a:prstDash val="solid"/>
-                      <a:round/>
-                      <a:headEnd type="none" w="med" len="med"/>
-                      <a:tailEnd type="none" w="med" len="med"/>
-                    </a:lnT>
-                    <a:lnB w="9525" cap="flat" cmpd="sng" algn="ctr">
-                      <a:solidFill>
-                        <a:srgbClr val="BFBFBF"/>
-                      </a:solidFill>
-                      <a:prstDash val="solid"/>
-                      <a:round/>
-                      <a:headEnd type="none" w="med" len="med"/>
-                      <a:tailEnd type="none" w="med" len="med"/>
-                    </a:lnB>
-                    <a:solidFill>
-                      <a:srgbClr val="1D2F82"/>
-                    </a:solidFill>
-                  </a:tcPr>
-                </a:tc>
-                <a:tc gridSpan="2">
-                  <a:txBody>
-                    <a:bodyPr wrap="square"/>
-                    <a:lstStyle/>
-                    <a:p>
-                      <a:pPr marL="0" indent="0">
-                        <a:buNone/>
-                      </a:pPr>
-                      <a:r>
-                        <a:rPr sz="1050" b="0">
-                          <a:solidFill>
-                            <a:srgbClr val="000000"/>
-                          </a:solidFill>
-                          <a:latin typeface="Calibri"/>
-                        </a:rPr>
-                        <a:t>What the cluster does</a:t>
-                      </a:r>
                       <a:endParaRPr lang="en-US" sz="1300" dirty="0">
                         <a:latin typeface="Calibri" charset="0"/>
                         <a:ea typeface="Calibri" charset="0"/>
@@ -20311,7 +20284,7 @@
                   </a:ext>
                 </a:extLst>
               </a:tr>
-              <a:tr h="822960">
+              <a:tr h="1097280">
                 <a:tc>
                   <a:txBody>
                     <a:bodyPr wrap="square"/>
@@ -20320,15 +20293,6 @@
                       <a:pPr marL="0" indent="0">
                         <a:buNone/>
                       </a:pPr>
-                      <a:r>
-                        <a:rPr sz="1050" b="0">
-                          <a:solidFill>
-                            <a:srgbClr val="000000"/>
-                          </a:solidFill>
-                          <a:latin typeface="Calibri"/>
-                        </a:rPr>
-                        <a:t>A</a:t>
-                      </a:r>
                       <a:endParaRPr lang="en-US" sz="1300" dirty="0">
                         <a:latin typeface="Calibri" charset="0"/>
                         <a:ea typeface="Calibri" charset="0"/>
@@ -20390,7 +20354,7 @@
                           </a:solidFill>
                           <a:latin typeface="Calibri"/>
                         </a:rPr>
-                        <a:t>A · Passive / analogue crosstalk fixes</a:t>
+                        <a:t>What it does</a:t>
                       </a:r>
                       <a:endParaRPr lang="en-US" sz="1300" dirty="0">
                         <a:latin typeface="Calibri" charset="0"/>
@@ -20438,7 +20402,7 @@
                     </a:lnB>
                   </a:tcPr>
                 </a:tc>
-                <a:tc>
+                <a:tc gridSpan="3">
                   <a:txBody>
                     <a:bodyPr wrap="square"/>
                     <a:lstStyle/>
@@ -20453,24 +20417,13 @@
                           </a:solidFill>
                           <a:latin typeface="Calibri"/>
                         </a:rPr>
-                        <a:t>[1] [2] [3] [4] [11] [12]</a:t>
+                        <a:t>Drives the gate from a multibit CODE instead of a resistor — the driver is a DAC, and the code changes DURING the switching edge.</a:t>
                       </a:r>
                       <a:endParaRPr lang="en-US" sz="1300" dirty="0">
                         <a:latin typeface="Calibri" charset="0"/>
                         <a:ea typeface="Calibri" charset="0"/>
                         <a:cs typeface="Calibri" charset="0"/>
                       </a:endParaRPr>
-                    </a:p>
-                    <a:p>
-                      <a:r>
-                        <a:rPr sz="1050" b="0">
-                          <a:solidFill>
-                            <a:srgbClr val="000000"/>
-                          </a:solidFill>
-                          <a:latin typeface="Calibri"/>
-                        </a:rPr>
-                        <a:t>[14]–[19] [21]</a:t>
-                      </a:r>
                     </a:p>
                   </a:txBody>
                   <a:tcPr marL="54864" marR="54864" marT="54864" marB="54864" anchor="ctr">
@@ -20512,23 +20465,14 @@
                     </a:lnB>
                   </a:tcPr>
                 </a:tc>
-                <a:tc gridSpan="2">
+                <a:tc hMerge="1">
                   <a:txBody>
-                    <a:bodyPr wrap="square"/>
+                    <a:bodyPr/>
                     <a:lstStyle/>
                     <a:p>
                       <a:pPr marL="0" indent="0">
                         <a:buNone/>
                       </a:pPr>
-                      <a:r>
-                        <a:rPr sz="1050" b="0">
-                          <a:solidFill>
-                            <a:srgbClr val="000000"/>
-                          </a:solidFill>
-                          <a:latin typeface="Calibri"/>
-                        </a:rPr>
-                        <a:t>Negative off-bias, RC-diode rails, three-level drive, Miller clamps. Cheap and effective, but the setting is chosen once by hand and never revisited.</a:t>
-                      </a:r>
                       <a:endParaRPr lang="en-US" sz="1300" dirty="0">
                         <a:latin typeface="Calibri" charset="0"/>
                         <a:ea typeface="Calibri" charset="0"/>
@@ -20635,7 +20579,7 @@
                   </a:ext>
                 </a:extLst>
               </a:tr>
-              <a:tr h="822960">
+              <a:tr h="1097280">
                 <a:tc>
                   <a:txBody>
                     <a:bodyPr wrap="square"/>
@@ -20644,15 +20588,6 @@
                       <a:pPr marL="0" indent="0">
                         <a:buNone/>
                       </a:pPr>
-                      <a:r>
-                        <a:rPr sz="1050" b="0">
-                          <a:solidFill>
-                            <a:srgbClr val="000000"/>
-                          </a:solidFill>
-                          <a:latin typeface="Calibri"/>
-                        </a:rPr>
-                        <a:t>B</a:t>
-                      </a:r>
                       <a:endParaRPr lang="en-US" sz="1300" dirty="0">
                         <a:latin typeface="Calibri" charset="0"/>
                         <a:ea typeface="Calibri" charset="0"/>
@@ -20714,7 +20649,7 @@
                           </a:solidFill>
                           <a:latin typeface="Calibri"/>
                         </a:rPr>
-                        <a:t>B · Closed-loop analogue adaptation</a:t>
+                        <a:t>Why it matters to us</a:t>
                       </a:r>
                       <a:endParaRPr lang="en-US" sz="1300" dirty="0">
                         <a:latin typeface="Calibri" charset="0"/>
@@ -20762,7 +20697,7 @@
                     </a:lnB>
                   </a:tcPr>
                 </a:tc>
-                <a:tc>
+                <a:tc gridSpan="3">
                   <a:txBody>
                     <a:bodyPr wrap="square"/>
                     <a:lstStyle/>
@@ -20777,24 +20712,13 @@
                           </a:solidFill>
                           <a:latin typeface="Calibri"/>
                         </a:rPr>
-                        <a:t>[5] [6] [7]</a:t>
+                        <a:t>A digital code is finite. That is what makes the setting space searchable, and what makes the driver implementable on an FPGA rather than as an analogue network.</a:t>
                       </a:r>
                       <a:endParaRPr lang="en-US" sz="1300" dirty="0">
                         <a:latin typeface="Calibri" charset="0"/>
                         <a:ea typeface="Calibri" charset="0"/>
                         <a:cs typeface="Calibri" charset="0"/>
                       </a:endParaRPr>
-                    </a:p>
-                    <a:p>
-                      <a:r>
-                        <a:rPr sz="1050" b="0">
-                          <a:solidFill>
-                            <a:srgbClr val="000000"/>
-                          </a:solidFill>
-                          <a:latin typeface="Calibri"/>
-                        </a:rPr>
-                        <a:t>[20] [22] [23] [29] [30]</a:t>
-                      </a:r>
                     </a:p>
                   </a:txBody>
                   <a:tcPr marL="54864" marR="54864" marT="54864" marB="54864" anchor="ctr">
@@ -20836,23 +20760,14 @@
                     </a:lnB>
                   </a:tcPr>
                 </a:tc>
-                <a:tc gridSpan="2">
+                <a:tc hMerge="1">
                   <a:txBody>
-                    <a:bodyPr wrap="square"/>
+                    <a:bodyPr/>
                     <a:lstStyle/>
                     <a:p>
                       <a:pPr marL="0" indent="0">
                         <a:buNone/>
                       </a:pPr>
-                      <a:r>
-                        <a:rPr sz="1050" b="0">
-                          <a:solidFill>
-                            <a:srgbClr val="000000"/>
-                          </a:solidFill>
-                          <a:latin typeface="Calibri"/>
-                        </a:rPr>
-                        <a:t>Sense the operating point, regulate drive strength or timing in the loop. Reports large gains — 30.5 % less overshoot, 75 % less turn-off loss — against a conventional driver.</a:t>
-                      </a:r>
                       <a:endParaRPr lang="en-US" sz="1300" dirty="0">
                         <a:latin typeface="Calibri" charset="0"/>
                         <a:ea typeface="Calibri" charset="0"/>
@@ -20959,7 +20874,7 @@
                   </a:ext>
                 </a:extLst>
               </a:tr>
-              <a:tr h="822960">
+              <a:tr h="1097280">
                 <a:tc>
                   <a:txBody>
                     <a:bodyPr wrap="square"/>
@@ -20968,15 +20883,6 @@
                       <a:pPr marL="0" indent="0">
                         <a:buNone/>
                       </a:pPr>
-                      <a:r>
-                        <a:rPr sz="1050" b="0">
-                          <a:solidFill>
-                            <a:srgbClr val="000000"/>
-                          </a:solidFill>
-                          <a:latin typeface="Calibri"/>
-                        </a:rPr>
-                        <a:t>C</a:t>
-                      </a:r>
                       <a:endParaRPr lang="en-US" sz="1300" dirty="0">
                         <a:latin typeface="Calibri" charset="0"/>
                         <a:ea typeface="Calibri" charset="0"/>
@@ -21038,7 +20944,7 @@
                           </a:solidFill>
                           <a:latin typeface="Calibri"/>
                         </a:rPr>
-                        <a:t>C · Adaptive dead-time control</a:t>
+                        <a:t>What it leaves open</a:t>
                       </a:r>
                       <a:endParaRPr lang="en-US" sz="1300" dirty="0">
                         <a:latin typeface="Calibri" charset="0"/>
@@ -21086,7 +20992,7 @@
                     </a:lnB>
                   </a:tcPr>
                 </a:tc>
-                <a:tc>
+                <a:tc gridSpan="3">
                   <a:txBody>
                     <a:bodyPr wrap="square"/>
                     <a:lstStyle/>
@@ -21101,24 +21007,13 @@
                           </a:solidFill>
                           <a:latin typeface="Calibri"/>
                         </a:rPr>
-                        <a:t>[8] [13]</a:t>
+                        <a:t>It never asks whether the code has to CHANGE as load, voltage and temperature move. That question is this project.</a:t>
                       </a:r>
                       <a:endParaRPr lang="en-US" sz="1300" dirty="0">
                         <a:latin typeface="Calibri" charset="0"/>
                         <a:ea typeface="Calibri" charset="0"/>
                         <a:cs typeface="Calibri" charset="0"/>
                       </a:endParaRPr>
-                    </a:p>
-                    <a:p>
-                      <a:r>
-                        <a:rPr sz="1050" b="0">
-                          <a:solidFill>
-                            <a:srgbClr val="000000"/>
-                          </a:solidFill>
-                          <a:latin typeface="Calibri"/>
-                        </a:rPr>
-                        <a:t>[25] [26] [28]</a:t>
-                      </a:r>
                     </a:p>
                   </a:txBody>
                   <a:tcPr marL="54864" marR="54864" marT="54864" marB="54864" anchor="ctr">
@@ -21160,23 +21055,14 @@
                     </a:lnB>
                   </a:tcPr>
                 </a:tc>
-                <a:tc gridSpan="2">
+                <a:tc hMerge="1">
                   <a:txBody>
-                    <a:bodyPr wrap="square"/>
+                    <a:bodyPr/>
                     <a:lstStyle/>
                     <a:p>
                       <a:pPr marL="0" indent="0">
                         <a:buNone/>
                       </a:pPr>
-                      <a:r>
-                        <a:rPr sz="1050" b="0">
-                          <a:solidFill>
-                            <a:srgbClr val="000000"/>
-                          </a:solidFill>
-                          <a:latin typeface="Calibri"/>
-                        </a:rPr>
-                        <a:t>Dead time driven to sub-nanosecond across load. The one field our own freeze test finds actually carries the benefit — and only at light load.</a:t>
-                      </a:r>
                       <a:endParaRPr lang="en-US" sz="1300" dirty="0">
                         <a:latin typeface="Calibri" charset="0"/>
                         <a:ea typeface="Calibri" charset="0"/>
@@ -21283,330 +21169,6 @@
                   </a:ext>
                 </a:extLst>
               </a:tr>
-              <a:tr h="822960">
-                <a:tc>
-                  <a:txBody>
-                    <a:bodyPr wrap="square"/>
-                    <a:lstStyle/>
-                    <a:p>
-                      <a:pPr marL="0" indent="0">
-                        <a:buNone/>
-                      </a:pPr>
-                      <a:r>
-                        <a:rPr sz="1050" b="0">
-                          <a:solidFill>
-                            <a:srgbClr val="000000"/>
-                          </a:solidFill>
-                          <a:latin typeface="Calibri"/>
-                        </a:rPr>
-                        <a:t>D</a:t>
-                      </a:r>
-                      <a:endParaRPr lang="en-US" sz="1300" dirty="0">
-                        <a:latin typeface="Calibri" charset="0"/>
-                        <a:ea typeface="Calibri" charset="0"/>
-                        <a:cs typeface="Calibri" charset="0"/>
-                      </a:endParaRPr>
-                    </a:p>
-                  </a:txBody>
-                  <a:tcPr marL="54864" marR="54864" marT="54864" marB="54864" anchor="ctr">
-                    <a:lnL w="9525" cap="flat" cmpd="sng" algn="ctr">
-                      <a:solidFill>
-                        <a:srgbClr val="BFBFBF"/>
-                      </a:solidFill>
-                      <a:prstDash val="solid"/>
-                      <a:round/>
-                      <a:headEnd type="none" w="med" len="med"/>
-                      <a:tailEnd type="none" w="med" len="med"/>
-                    </a:lnL>
-                    <a:lnR w="9525" cap="flat" cmpd="sng" algn="ctr">
-                      <a:solidFill>
-                        <a:srgbClr val="BFBFBF"/>
-                      </a:solidFill>
-                      <a:prstDash val="solid"/>
-                      <a:round/>
-                      <a:headEnd type="none" w="med" len="med"/>
-                      <a:tailEnd type="none" w="med" len="med"/>
-                    </a:lnR>
-                    <a:lnT w="9525" cap="flat" cmpd="sng" algn="ctr">
-                      <a:solidFill>
-                        <a:srgbClr val="BFBFBF"/>
-                      </a:solidFill>
-                      <a:prstDash val="solid"/>
-                      <a:round/>
-                      <a:headEnd type="none" w="med" len="med"/>
-                      <a:tailEnd type="none" w="med" len="med"/>
-                    </a:lnT>
-                    <a:lnB w="9525" cap="flat" cmpd="sng" algn="ctr">
-                      <a:solidFill>
-                        <a:srgbClr val="BFBFBF"/>
-                      </a:solidFill>
-                      <a:prstDash val="solid"/>
-                      <a:round/>
-                      <a:headEnd type="none" w="med" len="med"/>
-                      <a:tailEnd type="none" w="med" len="med"/>
-                    </a:lnB>
-                  </a:tcPr>
-                </a:tc>
-                <a:tc>
-                  <a:txBody>
-                    <a:bodyPr wrap="square"/>
-                    <a:lstStyle/>
-                    <a:p>
-                      <a:pPr marL="0" indent="0">
-                        <a:buNone/>
-                      </a:pPr>
-                      <a:r>
-                        <a:rPr sz="1050" b="1">
-                          <a:solidFill>
-                            <a:srgbClr val="000000"/>
-                          </a:solidFill>
-                          <a:latin typeface="Calibri"/>
-                        </a:rPr>
-                        <a:t>D · DIGITAL / segmented drive  — where this project sits</a:t>
-                      </a:r>
-                      <a:endParaRPr lang="en-US" sz="1300" dirty="0">
-                        <a:latin typeface="Calibri" charset="0"/>
-                        <a:ea typeface="Calibri" charset="0"/>
-                        <a:cs typeface="Calibri" charset="0"/>
-                      </a:endParaRPr>
-                    </a:p>
-                  </a:txBody>
-                  <a:tcPr marL="54864" marR="54864" marT="54864" marB="54864" anchor="ctr">
-                    <a:lnL w="9525" cap="flat" cmpd="sng" algn="ctr">
-                      <a:solidFill>
-                        <a:srgbClr val="BFBFBF"/>
-                      </a:solidFill>
-                      <a:prstDash val="solid"/>
-                      <a:round/>
-                      <a:headEnd type="none" w="med" len="med"/>
-                      <a:tailEnd type="none" w="med" len="med"/>
-                    </a:lnL>
-                    <a:lnR w="9525" cap="flat" cmpd="sng" algn="ctr">
-                      <a:solidFill>
-                        <a:srgbClr val="BFBFBF"/>
-                      </a:solidFill>
-                      <a:prstDash val="solid"/>
-                      <a:round/>
-                      <a:headEnd type="none" w="med" len="med"/>
-                      <a:tailEnd type="none" w="med" len="med"/>
-                    </a:lnR>
-                    <a:lnT w="9525" cap="flat" cmpd="sng" algn="ctr">
-                      <a:solidFill>
-                        <a:srgbClr val="BFBFBF"/>
-                      </a:solidFill>
-                      <a:prstDash val="solid"/>
-                      <a:round/>
-                      <a:headEnd type="none" w="med" len="med"/>
-                      <a:tailEnd type="none" w="med" len="med"/>
-                    </a:lnT>
-                    <a:lnB w="9525" cap="flat" cmpd="sng" algn="ctr">
-                      <a:solidFill>
-                        <a:srgbClr val="BFBFBF"/>
-                      </a:solidFill>
-                      <a:prstDash val="solid"/>
-                      <a:round/>
-                      <a:headEnd type="none" w="med" len="med"/>
-                      <a:tailEnd type="none" w="med" len="med"/>
-                    </a:lnB>
-                  </a:tcPr>
-                </a:tc>
-                <a:tc>
-                  <a:txBody>
-                    <a:bodyPr wrap="square"/>
-                    <a:lstStyle/>
-                    <a:p>
-                      <a:pPr marL="0" indent="0">
-                        <a:buNone/>
-                      </a:pPr>
-                      <a:r>
-                        <a:rPr sz="1050" b="0">
-                          <a:solidFill>
-                            <a:srgbClr val="000000"/>
-                          </a:solidFill>
-                          <a:latin typeface="Calibri"/>
-                        </a:rPr>
-                        <a:t>[9] BASE   [10]</a:t>
-                      </a:r>
-                      <a:endParaRPr lang="en-US" sz="1300" dirty="0">
-                        <a:latin typeface="Calibri" charset="0"/>
-                        <a:ea typeface="Calibri" charset="0"/>
-                        <a:cs typeface="Calibri" charset="0"/>
-                      </a:endParaRPr>
-                    </a:p>
-                    <a:p>
-                      <a:r>
-                        <a:rPr sz="1050" b="0">
-                          <a:solidFill>
-                            <a:srgbClr val="000000"/>
-                          </a:solidFill>
-                          <a:latin typeface="Calibri"/>
-                        </a:rPr>
-                        <a:t>[24] [27]</a:t>
-                      </a:r>
-                    </a:p>
-                  </a:txBody>
-                  <a:tcPr marL="54864" marR="54864" marT="54864" marB="54864" anchor="ctr">
-                    <a:lnL w="9525" cap="flat" cmpd="sng" algn="ctr">
-                      <a:solidFill>
-                        <a:srgbClr val="BFBFBF"/>
-                      </a:solidFill>
-                      <a:prstDash val="solid"/>
-                      <a:round/>
-                      <a:headEnd type="none" w="med" len="med"/>
-                      <a:tailEnd type="none" w="med" len="med"/>
-                    </a:lnL>
-                    <a:lnR w="9525" cap="flat" cmpd="sng" algn="ctr">
-                      <a:solidFill>
-                        <a:srgbClr val="BFBFBF"/>
-                      </a:solidFill>
-                      <a:prstDash val="solid"/>
-                      <a:round/>
-                      <a:headEnd type="none" w="med" len="med"/>
-                      <a:tailEnd type="none" w="med" len="med"/>
-                    </a:lnR>
-                    <a:lnT w="9525" cap="flat" cmpd="sng" algn="ctr">
-                      <a:solidFill>
-                        <a:srgbClr val="BFBFBF"/>
-                      </a:solidFill>
-                      <a:prstDash val="solid"/>
-                      <a:round/>
-                      <a:headEnd type="none" w="med" len="med"/>
-                      <a:tailEnd type="none" w="med" len="med"/>
-                    </a:lnT>
-                    <a:lnB w="9525" cap="flat" cmpd="sng" algn="ctr">
-                      <a:solidFill>
-                        <a:srgbClr val="BFBFBF"/>
-                      </a:solidFill>
-                      <a:prstDash val="solid"/>
-                      <a:round/>
-                      <a:headEnd type="none" w="med" len="med"/>
-                      <a:tailEnd type="none" w="med" len="med"/>
-                    </a:lnB>
-                  </a:tcPr>
-                </a:tc>
-                <a:tc gridSpan="2">
-                  <a:txBody>
-                    <a:bodyPr wrap="square"/>
-                    <a:lstStyle/>
-                    <a:p>
-                      <a:pPr marL="0" indent="0">
-                        <a:buNone/>
-                      </a:pPr>
-                      <a:r>
-                        <a:rPr sz="1050" b="0">
-                          <a:solidFill>
-                            <a:srgbClr val="000000"/>
-                          </a:solidFill>
-                          <a:latin typeface="Calibri"/>
-                        </a:rPr>
-                        <a:t>The gate waveform selected by a multibit CODE rather than a resistor network. [9] is the BASE PAPER — doi.org/10.1002/cta.3136 — and [10] is the closest GaN implementation. Digital means FPGA-implementable, and the code space can be searched exhaustively.</a:t>
-                      </a:r>
-                      <a:endParaRPr lang="en-US" sz="1300" dirty="0">
-                        <a:latin typeface="Calibri" charset="0"/>
-                        <a:ea typeface="Calibri" charset="0"/>
-                        <a:cs typeface="Calibri" charset="0"/>
-                      </a:endParaRPr>
-                    </a:p>
-                  </a:txBody>
-                  <a:tcPr marL="54864" marR="54864" marT="54864" marB="54864" anchor="ctr">
-                    <a:lnL w="9525" cap="flat" cmpd="sng" algn="ctr">
-                      <a:solidFill>
-                        <a:srgbClr val="BFBFBF"/>
-                      </a:solidFill>
-                      <a:prstDash val="solid"/>
-                      <a:round/>
-                      <a:headEnd type="none" w="med" len="med"/>
-                      <a:tailEnd type="none" w="med" len="med"/>
-                    </a:lnL>
-                    <a:lnR w="9525" cap="flat" cmpd="sng" algn="ctr">
-                      <a:solidFill>
-                        <a:srgbClr val="BFBFBF"/>
-                      </a:solidFill>
-                      <a:prstDash val="solid"/>
-                      <a:round/>
-                      <a:headEnd type="none" w="med" len="med"/>
-                      <a:tailEnd type="none" w="med" len="med"/>
-                    </a:lnR>
-                    <a:lnT w="9525" cap="flat" cmpd="sng" algn="ctr">
-                      <a:solidFill>
-                        <a:srgbClr val="BFBFBF"/>
-                      </a:solidFill>
-                      <a:prstDash val="solid"/>
-                      <a:round/>
-                      <a:headEnd type="none" w="med" len="med"/>
-                      <a:tailEnd type="none" w="med" len="med"/>
-                    </a:lnT>
-                    <a:lnB w="9525" cap="flat" cmpd="sng" algn="ctr">
-                      <a:solidFill>
-                        <a:srgbClr val="BFBFBF"/>
-                      </a:solidFill>
-                      <a:prstDash val="solid"/>
-                      <a:round/>
-                      <a:headEnd type="none" w="med" len="med"/>
-                      <a:tailEnd type="none" w="med" len="med"/>
-                    </a:lnB>
-                  </a:tcPr>
-                </a:tc>
-                <a:tc hMerge="1">
-                  <a:txBody>
-                    <a:bodyPr/>
-                    <a:lstStyle/>
-                    <a:p>
-                      <a:pPr marL="0" indent="0">
-                        <a:buNone/>
-                      </a:pPr>
-                      <a:endParaRPr lang="en-US" sz="1300" dirty="0">
-                        <a:latin typeface="Calibri" charset="0"/>
-                        <a:ea typeface="Calibri" charset="0"/>
-                        <a:cs typeface="Calibri" charset="0"/>
-                      </a:endParaRPr>
-                    </a:p>
-                  </a:txBody>
-                  <a:tcPr marL="54864" marR="54864" marT="54864" marB="54864" anchor="ctr">
-                    <a:lnL w="9525" cap="flat" cmpd="sng" algn="ctr">
-                      <a:solidFill>
-                        <a:srgbClr val="BFBFBF"/>
-                      </a:solidFill>
-                      <a:prstDash val="solid"/>
-                      <a:round/>
-                      <a:headEnd type="none" w="med" len="med"/>
-                      <a:tailEnd type="none" w="med" len="med"/>
-                    </a:lnL>
-                    <a:lnR w="9525" cap="flat" cmpd="sng" algn="ctr">
-                      <a:solidFill>
-                        <a:srgbClr val="BFBFBF"/>
-                      </a:solidFill>
-                      <a:prstDash val="solid"/>
-                      <a:round/>
-                      <a:headEnd type="none" w="med" len="med"/>
-                      <a:tailEnd type="none" w="med" len="med"/>
-                    </a:lnR>
-                    <a:lnT w="9525" cap="flat" cmpd="sng" algn="ctr">
-                      <a:solidFill>
-                        <a:srgbClr val="BFBFBF"/>
-                      </a:solidFill>
-                      <a:prstDash val="solid"/>
-                      <a:round/>
-                      <a:headEnd type="none" w="med" len="med"/>
-                      <a:tailEnd type="none" w="med" len="med"/>
-                    </a:lnT>
-                    <a:lnB w="9525" cap="flat" cmpd="sng" algn="ctr">
-                      <a:solidFill>
-                        <a:srgbClr val="BFBFBF"/>
-                      </a:solidFill>
-                      <a:prstDash val="solid"/>
-                      <a:round/>
-                      <a:headEnd type="none" w="med" len="med"/>
-                      <a:tailEnd type="none" w="med" len="med"/>
-                    </a:lnB>
-                  </a:tcPr>
-                </a:tc>
-                <a:extLst>
-                  <a:ext uri="{0D108BD9-81ED-4DB2-BD59-A6C34878D82A}">
-                    <a16:rowId xmlns:a16="http://schemas.microsoft.com/office/drawing/2014/main" val="10004"/>
-                  </a:ext>
-                </a:extLst>
-              </a:tr>
             </a:tbl>
           </a:graphicData>
         </a:graphic>
@@ -21648,7 +21210,29 @@
                 <a:ea typeface="Calibri" pitchFamily="34" charset="-122"/>
                 <a:cs typeface="Calibri" pitchFamily="34" charset="-120"/>
               </a:rPr>
-              <a:t xml:space="preserve">30 references, all publisher-verified, grouped by what the driver DOES. Clusters A–C set or regulate in analogue; only cluster D makes the setting a digital CODE — which is what makes an exhaustive search possible at all.</a:t>
+              <a:t xml:space="preserve">H. Takayama, T. Okuda and T. Hikihara, </a:t>
+            </a:r>
+            <a:r>
+              <a:rPr lang="en-US" sz="1150" b="1" dirty="0">
+                <a:solidFill>
+                  <a:srgbClr val="000000"/>
+                </a:solidFill>
+                <a:latin typeface="Calibri" pitchFamily="34" charset="0"/>
+                <a:ea typeface="Calibri" pitchFamily="34" charset="-122"/>
+                <a:cs typeface="Calibri" pitchFamily="34" charset="-120"/>
+              </a:rPr>
+              <a:t xml:space="preserve">“Digital Active Gate Drive of SiC MOSFETs for Controlling Switching Behavior,”</a:t>
+            </a:r>
+            <a:r>
+              <a:rPr lang="en-US" sz="1150" dirty="0">
+                <a:solidFill>
+                  <a:srgbClr val="000000"/>
+                </a:solidFill>
+                <a:latin typeface="Calibri" pitchFamily="34" charset="0"/>
+                <a:ea typeface="Calibri" pitchFamily="34" charset="-122"/>
+                <a:cs typeface="Calibri" pitchFamily="34" charset="-120"/>
+              </a:rPr>
+              <a:t xml:space="preserve"> Int. J. Circuit Theory Appl., vol. 50, no. 1, pp. 183–196, 2022.  doi.org/10.1002/cta.3136</a:t>
             </a:r>
           </a:p>
         </p:txBody>

--- a/review/Review1_GaN_Segmented_Gate_Driver.pptx
+++ b/review/Review1_GaN_Segmented_Gate_Driver.pptx
@@ -15,8 +15,8 @@
     <p:sldId id="259" r:id="rId5"/>
     <p:sldId id="260" r:id="rId6"/>
     <p:sldId id="267" r:id="rId18"/>
+    <p:sldId id="283" r:id="rId34"/>
     <p:sldId id="286" r:id="rId37"/>
-    <p:sldId id="283" r:id="rId34"/>
     <p:sldId id="261" r:id="rId7"/>
     <p:sldId id="281" r:id="rId32"/>
     <p:sldId id="274" r:id="rId25"/>
@@ -26,21 +26,21 @@
     <p:sldId id="278" r:id="rId29"/>
     <p:sldId id="262" r:id="rId8"/>
     <p:sldId id="272" r:id="rId23"/>
-    <p:sldId id="287" r:id="rId38"/>
     <p:sldId id="282" r:id="rId33"/>
     <p:sldId id="273" r:id="rId24"/>
+    <p:sldId id="287" r:id="rId38"/>
     <p:sldId id="263" r:id="rId9"/>
     <p:sldId id="280" r:id="rId31"/>
     <p:sldId id="275" r:id="rId26"/>
     <p:sldId id="276" r:id="rId27"/>
     <p:sldId id="264" r:id="rId10"/>
-    <p:sldId id="288" r:id="rId39"/>
     <p:sldId id="268" r:id="rId19"/>
-    <p:sldId id="289" r:id="rId40"/>
     <p:sldId id="269" r:id="rId20"/>
     <p:sldId id="270" r:id="rId21"/>
+    <p:sldId id="288" r:id="rId39"/>
     <p:sldId id="271" r:id="rId22"/>
     <p:sldId id="265" r:id="rId11"/>
+    <p:sldId id="289" r:id="rId40"/>
     <p:sldId id="266" r:id="rId12"/>
   </p:sldIdLst>
   <p:sldSz cx="12192000" cy="6858000"/>
@@ -2852,7 +2852,7 @@
                 <a:ea typeface="Calibri" pitchFamily="34" charset="-122"/>
                 <a:cs typeface="Calibri" pitchFamily="34" charset="-120"/>
               </a:rPr>
-              <a:t>21</a:t>
+              <a:t>20</a:t>
             </a:r>
             <a:endParaRPr lang="en-US" sz="1000" dirty="0"/>
           </a:p>
@@ -5425,7 +5425,7 @@
                 <a:ea typeface="Calibri" pitchFamily="34" charset="-122"/>
                 <a:cs typeface="Calibri" pitchFamily="34" charset="-120"/>
               </a:rPr>
-              <a:t>28</a:t>
+              <a:t>27</a:t>
             </a:r>
             <a:endParaRPr lang="en-US" sz="1000" dirty="0"/>
           </a:p>
@@ -7404,7 +7404,7 @@
                 <a:ea typeface="Calibri" pitchFamily="34" charset="-122"/>
                 <a:cs typeface="Calibri" pitchFamily="34" charset="-120"/>
               </a:rPr>
-              <a:t>30</a:t>
+              <a:t>28</a:t>
             </a:r>
             <a:endParaRPr lang="en-US" sz="1000" dirty="0"/>
           </a:p>
@@ -7846,7 +7846,7 @@
                 <a:ea typeface="Calibri" pitchFamily="34" charset="-122"/>
                 <a:cs typeface="Calibri" pitchFamily="34" charset="-120"/>
               </a:rPr>
-              <a:t>31</a:t>
+              <a:t>29</a:t>
             </a:r>
             <a:endParaRPr lang="en-US" sz="1000" dirty="0"/>
           </a:p>
@@ -8367,7 +8367,7 @@
                 <a:ea typeface="Calibri" pitchFamily="34" charset="-122"/>
                 <a:cs typeface="Calibri" pitchFamily="34" charset="-120"/>
               </a:rPr>
-              <a:t>32</a:t>
+              <a:t>31</a:t>
             </a:r>
             <a:endParaRPr lang="en-US" sz="1000" dirty="0"/>
           </a:p>
@@ -9616,7 +9616,7 @@
                 <a:ea typeface="Calibri" pitchFamily="34" charset="-122"/>
                 <a:cs typeface="Calibri" pitchFamily="34" charset="-120"/>
               </a:rPr>
-              <a:t>33</a:t>
+              <a:t>32</a:t>
             </a:r>
             <a:endParaRPr lang="en-US" sz="1000" dirty="0"/>
           </a:p>
@@ -13973,7 +13973,7 @@
                 <a:ea typeface="Calibri" pitchFamily="34" charset="-122"/>
                 <a:cs typeface="Calibri" pitchFamily="34" charset="-120"/>
               </a:rPr>
-              <a:t>20</a:t>
+              <a:t>19</a:t>
             </a:r>
             <a:endParaRPr lang="en-US" sz="1000" dirty="0"/>
           </a:p>
@@ -15122,7 +15122,7 @@
                 <a:ea typeface="Calibri" pitchFamily="34" charset="-122"/>
                 <a:cs typeface="Calibri" pitchFamily="34" charset="-120"/>
               </a:rPr>
-              <a:t xml:space="preserve">9</a:t>
+              <a:t xml:space="preserve">8</a:t>
             </a:r>
           </a:p>
         </p:txBody>
@@ -17504,7 +17504,7 @@
                 <a:ea typeface="Calibri" pitchFamily="34" charset="-122"/>
                 <a:cs typeface="Calibri" pitchFamily="34" charset="-120"/>
               </a:rPr>
-              <a:t>29</a:t>
+              <a:t>33</a:t>
             </a:r>
             <a:endParaRPr lang="en-US" sz="1000" dirty="0"/>
           </a:p>
@@ -17575,24 +17575,530 @@
       </p:pic>
       <p:sp>
         <p:nvSpPr>
-          <p:cNvPr id="5" name="TextBox 4"/>
+          <p:cNvPr id="5" name="Text 2"/>
           <p:cNvSpPr txBox="1"/>
           <p:nvPr/>
         </p:nvSpPr>
         <p:spPr>
           <a:xfrm>
             <a:off x="640080" y="1325880"/>
-            <a:ext cx="3474720" cy="274320"/>
-          </a:xfrm>
-          <a:prstGeom prst="rect">
-            <a:avLst/>
-          </a:prstGeom>
-          <a:noFill/>
-        </p:spPr>
-        <p:txBody>
-          <a:bodyPr wrap="square" lIns="0" tIns="0" rIns="0" bIns="0">
-            <a:spAutoFit/>
-          </a:bodyPr>
+            <a:ext cx="10881360" cy="4343400"/>
+          </a:xfrm>
+          <a:prstGeom prst="rect">
+            <a:avLst/>
+          </a:prstGeom>
+          <a:noFill/>
+          <a:ln/>
+        </p:spPr>
+        <p:txBody>
+          <a:bodyPr wrap="square" lIns="0" tIns="0" rIns="0" bIns="0" rtlCol="0" anchor="t"/>
+          <a:lstStyle/>
+          <a:p>
+            <a:pPr marL="177800" indent="0">
+              <a:spcAft>
+                <a:spcPts val="60"/>
+              </a:spcAft>
+              <a:buSzPct val="100000"/>
+              <a:buNone/>
+            </a:pPr>
+            <a:r>
+              <a:rPr lang="en-US" sz="900" b="1" dirty="0">
+                <a:solidFill>
+                  <a:srgbClr val="000000"/>
+                </a:solidFill>
+                <a:latin typeface="Calibri" pitchFamily="34" charset="0"/>
+                <a:ea typeface="Calibri" pitchFamily="34" charset="-122"/>
+                <a:cs typeface="Calibri" pitchFamily="34" charset="-120"/>
+              </a:rPr>
+              <a:t xml:space="preserve">[16]  </a:t>
+            </a:r>
+            <a:r>
+              <a:rPr lang="en-US" sz="900" dirty="0">
+                <a:solidFill>
+                  <a:srgbClr val="000000"/>
+                </a:solidFill>
+                <a:latin typeface="Calibri" pitchFamily="34" charset="0"/>
+                <a:ea typeface="Calibri" pitchFamily="34" charset="-122"/>
+                <a:cs typeface="Calibri" pitchFamily="34" charset="-120"/>
+              </a:rPr>
+              <a:t xml:space="preserve">Z. Yuan, H. Li, M. Zhang, Z. Yang, S. Zhao, H. Wang, X. Wang and L. Ding, “Influence of Negative Gate Bias on Crosstalk Spike in SiC MOSFETs Half-Bridge Circuit,” IEEE J. Emerg. Sel. Topics Power Electron., vol. 14, no. 3, pp. 3217–3229, 2026.</a:t>
+            </a:r>
+          </a:p>
+          <a:p>
+            <a:pPr marL="177800" indent="0">
+              <a:spcAft>
+                <a:spcPts val="60"/>
+              </a:spcAft>
+              <a:buSzPct val="100000"/>
+              <a:buNone/>
+            </a:pPr>
+            <a:r>
+              <a:rPr lang="en-US" sz="900" b="1" dirty="0">
+                <a:solidFill>
+                  <a:srgbClr val="000000"/>
+                </a:solidFill>
+                <a:latin typeface="Calibri" pitchFamily="34" charset="0"/>
+                <a:ea typeface="Calibri" pitchFamily="34" charset="-122"/>
+                <a:cs typeface="Calibri" pitchFamily="34" charset="-120"/>
+              </a:rPr>
+              <a:t xml:space="preserve">[17]  </a:t>
+            </a:r>
+            <a:r>
+              <a:rPr lang="en-US" sz="900" dirty="0">
+                <a:solidFill>
+                  <a:srgbClr val="000000"/>
+                </a:solidFill>
+                <a:latin typeface="Calibri" pitchFamily="34" charset="0"/>
+                <a:ea typeface="Calibri" pitchFamily="34" charset="-122"/>
+                <a:cs typeface="Calibri" pitchFamily="34" charset="-120"/>
+              </a:rPr>
+              <a:t xml:space="preserve">L. Zhang, K. Wang, S. Guo and B. Zhu, “A Gate Driver for Crosstalk Suppression of eGaN HEMT Power Devices,” J. Low Power Electron. Appl., vol. 15, no. 3, pp. 38, 2025.</a:t>
+            </a:r>
+          </a:p>
+          <a:p>
+            <a:pPr marL="177800" indent="0">
+              <a:spcAft>
+                <a:spcPts val="60"/>
+              </a:spcAft>
+              <a:buSzPct val="100000"/>
+              <a:buNone/>
+            </a:pPr>
+            <a:r>
+              <a:rPr lang="en-US" sz="900" b="1" dirty="0">
+                <a:solidFill>
+                  <a:srgbClr val="000000"/>
+                </a:solidFill>
+                <a:latin typeface="Calibri" pitchFamily="34" charset="0"/>
+                <a:ea typeface="Calibri" pitchFamily="34" charset="-122"/>
+                <a:cs typeface="Calibri" pitchFamily="34" charset="-120"/>
+              </a:rPr>
+              <a:t xml:space="preserve">[18]  </a:t>
+            </a:r>
+            <a:r>
+              <a:rPr lang="en-US" sz="900" dirty="0">
+                <a:solidFill>
+                  <a:srgbClr val="000000"/>
+                </a:solidFill>
+                <a:latin typeface="Calibri" pitchFamily="34" charset="0"/>
+                <a:ea typeface="Calibri" pitchFamily="34" charset="-122"/>
+                <a:cs typeface="Calibri" pitchFamily="34" charset="-120"/>
+              </a:rPr>
+              <a:t xml:space="preserve">J. Wu, “Parallel arrangement of MOSFETs, effective suppression of crosstalk: A new gate driver topology,” iEnergy, vol. 2, no. 3, pp. 163–163, 2023.</a:t>
+            </a:r>
+          </a:p>
+          <a:p>
+            <a:pPr marL="177800" indent="0">
+              <a:spcAft>
+                <a:spcPts val="60"/>
+              </a:spcAft>
+              <a:buSzPct val="100000"/>
+              <a:buNone/>
+            </a:pPr>
+            <a:r>
+              <a:rPr lang="en-US" sz="900" b="1" dirty="0">
+                <a:solidFill>
+                  <a:srgbClr val="000000"/>
+                </a:solidFill>
+                <a:latin typeface="Calibri" pitchFamily="34" charset="0"/>
+                <a:ea typeface="Calibri" pitchFamily="34" charset="-122"/>
+                <a:cs typeface="Calibri" pitchFamily="34" charset="-120"/>
+              </a:rPr>
+              <a:t xml:space="preserve">[19]  </a:t>
+            </a:r>
+            <a:r>
+              <a:rPr lang="en-US" sz="900" dirty="0">
+                <a:solidFill>
+                  <a:srgbClr val="000000"/>
+                </a:solidFill>
+                <a:latin typeface="Calibri" pitchFamily="34" charset="0"/>
+                <a:ea typeface="Calibri" pitchFamily="34" charset="-122"/>
+                <a:cs typeface="Calibri" pitchFamily="34" charset="-120"/>
+              </a:rPr>
+              <a:t xml:space="preserve">Y. Mikhaylov, G. Buticchi and M. Galea, “A gate driver for parallel connected MOSFETs with crosstalk suppression,” iEnergy, vol. 2, no. 3, pp. 240–250, 2023.</a:t>
+            </a:r>
+          </a:p>
+          <a:p>
+            <a:pPr marL="177800" indent="0">
+              <a:spcAft>
+                <a:spcPts val="60"/>
+              </a:spcAft>
+              <a:buSzPct val="100000"/>
+              <a:buNone/>
+            </a:pPr>
+            <a:r>
+              <a:rPr lang="en-US" sz="900" b="1" dirty="0">
+                <a:solidFill>
+                  <a:srgbClr val="000000"/>
+                </a:solidFill>
+                <a:latin typeface="Calibri" pitchFamily="34" charset="0"/>
+                <a:ea typeface="Calibri" pitchFamily="34" charset="-122"/>
+                <a:cs typeface="Calibri" pitchFamily="34" charset="-120"/>
+              </a:rPr>
+              <a:t xml:space="preserve">[20]  </a:t>
+            </a:r>
+            <a:r>
+              <a:rPr lang="en-US" sz="900" dirty="0">
+                <a:solidFill>
+                  <a:srgbClr val="000000"/>
+                </a:solidFill>
+                <a:latin typeface="Calibri" pitchFamily="34" charset="0"/>
+                <a:ea typeface="Calibri" pitchFamily="34" charset="-122"/>
+                <a:cs typeface="Calibri" pitchFamily="34" charset="-120"/>
+              </a:rPr>
+              <a:t xml:space="preserve">W. Liu and H. Min, “A Load Adaptive Active Gate Driver with Fast-Switching Three-Level Current Source for Overshoot Suppression in GaN-Based Half-Bridge Converters,” IEEE Trans. Power Electron., pp. 1–8, 2026.</a:t>
+            </a:r>
+          </a:p>
+          <a:p>
+            <a:pPr marL="177800" indent="0">
+              <a:spcAft>
+                <a:spcPts val="60"/>
+              </a:spcAft>
+              <a:buSzPct val="100000"/>
+              <a:buNone/>
+            </a:pPr>
+            <a:r>
+              <a:rPr lang="en-US" sz="900" b="1" dirty="0">
+                <a:solidFill>
+                  <a:srgbClr val="000000"/>
+                </a:solidFill>
+                <a:latin typeface="Calibri" pitchFamily="34" charset="0"/>
+                <a:ea typeface="Calibri" pitchFamily="34" charset="-122"/>
+                <a:cs typeface="Calibri" pitchFamily="34" charset="-120"/>
+              </a:rPr>
+              <a:t xml:space="preserve">[21]  </a:t>
+            </a:r>
+            <a:r>
+              <a:rPr lang="en-US" sz="900" dirty="0">
+                <a:solidFill>
+                  <a:srgbClr val="000000"/>
+                </a:solidFill>
+                <a:latin typeface="Calibri" pitchFamily="34" charset="0"/>
+                <a:ea typeface="Calibri" pitchFamily="34" charset="-122"/>
+                <a:cs typeface="Calibri" pitchFamily="34" charset="-120"/>
+              </a:rPr>
+              <a:t xml:space="preserve">R. Chen, F. Wang, H. Bai and L.M. Tolbert, “A Simple Gate Driver Circuit for Turn-on Overvoltage Suppression of 10 kV SiC MOSFETs With Temporarily Lowering Gate Voltage During dv/dt,” IEEE Trans. Ind. Electron., pp. 1–6, 2026.</a:t>
+            </a:r>
+          </a:p>
+          <a:p>
+            <a:pPr marL="177800" indent="0">
+              <a:spcAft>
+                <a:spcPts val="60"/>
+              </a:spcAft>
+              <a:buSzPct val="100000"/>
+              <a:buNone/>
+            </a:pPr>
+            <a:r>
+              <a:rPr lang="en-US" sz="900" b="1" dirty="0">
+                <a:solidFill>
+                  <a:srgbClr val="000000"/>
+                </a:solidFill>
+                <a:latin typeface="Calibri" pitchFamily="34" charset="0"/>
+                <a:ea typeface="Calibri" pitchFamily="34" charset="-122"/>
+                <a:cs typeface="Calibri" pitchFamily="34" charset="-120"/>
+              </a:rPr>
+              <a:t xml:space="preserve">[22]  </a:t>
+            </a:r>
+            <a:r>
+              <a:rPr lang="en-US" sz="900" dirty="0">
+                <a:solidFill>
+                  <a:srgbClr val="000000"/>
+                </a:solidFill>
+                <a:latin typeface="Calibri" pitchFamily="34" charset="0"/>
+                <a:ea typeface="Calibri" pitchFamily="34" charset="-122"/>
+                <a:cs typeface="Calibri" pitchFamily="34" charset="-120"/>
+              </a:rPr>
+              <a:t xml:space="preserve">D. Yu, M. Yang, L. Yin, K. Hu, W. Zhang and Q. Fu, “A Dual-Loop Active Gate Driver With Independent Voltage Slew Rate and Overshoot Control for Switching Loss Optimization of SiC MOSFETs,” IEEE Trans. Ind. Electron., pp. 1–12, 2026.</a:t>
+            </a:r>
+          </a:p>
+          <a:p>
+            <a:pPr marL="177800" indent="0">
+              <a:spcAft>
+                <a:spcPts val="60"/>
+              </a:spcAft>
+              <a:buSzPct val="100000"/>
+              <a:buNone/>
+            </a:pPr>
+            <a:r>
+              <a:rPr lang="en-US" sz="900" b="1" dirty="0">
+                <a:solidFill>
+                  <a:srgbClr val="000000"/>
+                </a:solidFill>
+                <a:latin typeface="Calibri" pitchFamily="34" charset="0"/>
+                <a:ea typeface="Calibri" pitchFamily="34" charset="-122"/>
+                <a:cs typeface="Calibri" pitchFamily="34" charset="-120"/>
+              </a:rPr>
+              <a:t xml:space="preserve">[23]  </a:t>
+            </a:r>
+            <a:r>
+              <a:rPr lang="en-US" sz="900" dirty="0">
+                <a:solidFill>
+                  <a:srgbClr val="000000"/>
+                </a:solidFill>
+                <a:latin typeface="Calibri" pitchFamily="34" charset="0"/>
+                <a:ea typeface="Calibri" pitchFamily="34" charset="-122"/>
+                <a:cs typeface="Calibri" pitchFamily="34" charset="-120"/>
+              </a:rPr>
+              <a:t xml:space="preserve">P. Xiang, R. Hao, J. Cai and X. You, “An Active Gate Driver of SiC MOSFET Module Based on PCB Rogowski Coil for Optimizing Tradeoff Between Overshoot and Switching Loss,” IEEE Trans. Power Electron., vol. 38, no. 1, pp. 245–260, 2023.</a:t>
+            </a:r>
+          </a:p>
+          <a:p>
+            <a:pPr marL="177800" indent="0">
+              <a:spcAft>
+                <a:spcPts val="60"/>
+              </a:spcAft>
+              <a:buSzPct val="100000"/>
+              <a:buNone/>
+            </a:pPr>
+            <a:r>
+              <a:rPr lang="en-US" sz="900" b="1" dirty="0">
+                <a:solidFill>
+                  <a:srgbClr val="000000"/>
+                </a:solidFill>
+                <a:latin typeface="Calibri" pitchFamily="34" charset="0"/>
+                <a:ea typeface="Calibri" pitchFamily="34" charset="-122"/>
+                <a:cs typeface="Calibri" pitchFamily="34" charset="-120"/>
+              </a:rPr>
+              <a:t xml:space="preserve">[24]  </a:t>
+            </a:r>
+            <a:r>
+              <a:rPr lang="en-US" sz="900" dirty="0">
+                <a:solidFill>
+                  <a:srgbClr val="000000"/>
+                </a:solidFill>
+                <a:latin typeface="Calibri" pitchFamily="34" charset="0"/>
+                <a:ea typeface="Calibri" pitchFamily="34" charset="-122"/>
+                <a:cs typeface="Calibri" pitchFamily="34" charset="-120"/>
+              </a:rPr>
+              <a:t xml:space="preserve">S. Fukunaga, H. Takayama and T. Hikihara, “Slew rate control of switching transient for SiC MOSFET in boost converter using digital active gate driver,” IET Power Electron., vol. 16, no. 3, pp. 472–482, 2022.</a:t>
+            </a:r>
+          </a:p>
+          <a:p>
+            <a:pPr marL="177800" indent="0">
+              <a:spcAft>
+                <a:spcPts val="60"/>
+              </a:spcAft>
+              <a:buSzPct val="100000"/>
+              <a:buNone/>
+            </a:pPr>
+            <a:r>
+              <a:rPr lang="en-US" sz="900" b="1" dirty="0">
+                <a:solidFill>
+                  <a:srgbClr val="000000"/>
+                </a:solidFill>
+                <a:latin typeface="Calibri" pitchFamily="34" charset="0"/>
+                <a:ea typeface="Calibri" pitchFamily="34" charset="-122"/>
+                <a:cs typeface="Calibri" pitchFamily="34" charset="-120"/>
+              </a:rPr>
+              <a:t xml:space="preserve">[25]  </a:t>
+            </a:r>
+            <a:r>
+              <a:rPr lang="en-US" sz="900" dirty="0">
+                <a:solidFill>
+                  <a:srgbClr val="000000"/>
+                </a:solidFill>
+                <a:latin typeface="Calibri" pitchFamily="34" charset="0"/>
+                <a:ea typeface="Calibri" pitchFamily="34" charset="-122"/>
+                <a:cs typeface="Calibri" pitchFamily="34" charset="-120"/>
+              </a:rPr>
+              <a:t xml:space="preserve">C. Xu, P. Fu, X. Liao, Z. Zhu and L. Liu, “An Integrated Driver With Real-Time Predictive Dead-Time Optimization Technique for GaN-Based Synchronous Buck Converter,” IEEE J. Emerg. Sel. Topics Power Electron., vol. 13, no. 3, pp. 3173–3183, 2025.</a:t>
+            </a:r>
+          </a:p>
+          <a:p>
+            <a:pPr marL="177800" indent="0">
+              <a:spcAft>
+                <a:spcPts val="60"/>
+              </a:spcAft>
+              <a:buSzPct val="100000"/>
+              <a:buNone/>
+            </a:pPr>
+            <a:r>
+              <a:rPr lang="en-US" sz="900" b="1" dirty="0">
+                <a:solidFill>
+                  <a:srgbClr val="000000"/>
+                </a:solidFill>
+                <a:latin typeface="Calibri" pitchFamily="34" charset="0"/>
+                <a:ea typeface="Calibri" pitchFamily="34" charset="-122"/>
+                <a:cs typeface="Calibri" pitchFamily="34" charset="-120"/>
+              </a:rPr>
+              <a:t xml:space="preserve">[26]  </a:t>
+            </a:r>
+            <a:r>
+              <a:rPr lang="en-US" sz="900" dirty="0">
+                <a:solidFill>
+                  <a:srgbClr val="000000"/>
+                </a:solidFill>
+                <a:latin typeface="Calibri" pitchFamily="34" charset="0"/>
+                <a:ea typeface="Calibri" pitchFamily="34" charset="-122"/>
+                <a:cs typeface="Calibri" pitchFamily="34" charset="-120"/>
+              </a:rPr>
+              <a:t xml:space="preserve">C. Chen, P. Chiu, Y. Chen, P. Wang and Y. Chang, “An Integrated Driver With Adaptive Dead-Time Control for GaN-Based Synchronous Buck Converter,” IEEE Trans. Circuits Syst. II, vol. 69, no. 2, pp. 539–543, 2022.</a:t>
+            </a:r>
+          </a:p>
+          <a:p>
+            <a:pPr marL="177800" indent="0">
+              <a:spcAft>
+                <a:spcPts val="60"/>
+              </a:spcAft>
+              <a:buSzPct val="100000"/>
+              <a:buNone/>
+            </a:pPr>
+            <a:r>
+              <a:rPr lang="en-US" sz="900" b="1" dirty="0">
+                <a:solidFill>
+                  <a:srgbClr val="000000"/>
+                </a:solidFill>
+                <a:latin typeface="Calibri" pitchFamily="34" charset="0"/>
+                <a:ea typeface="Calibri" pitchFamily="34" charset="-122"/>
+                <a:cs typeface="Calibri" pitchFamily="34" charset="-120"/>
+              </a:rPr>
+              <a:t xml:space="preserve">[27]  </a:t>
+            </a:r>
+            <a:r>
+              <a:rPr lang="en-US" sz="900" dirty="0">
+                <a:solidFill>
+                  <a:srgbClr val="000000"/>
+                </a:solidFill>
+                <a:latin typeface="Calibri" pitchFamily="34" charset="0"/>
+                <a:ea typeface="Calibri" pitchFamily="34" charset="-122"/>
+                <a:cs typeface="Calibri" pitchFamily="34" charset="-120"/>
+              </a:rPr>
+              <a:t xml:space="preserve">J. Tan, Z. Zhou and G. Zou, “A Programmable Gate Driver Module-Based Multistage Voltage Regulation SiC MOSFET Switching Strategy,” Electronics, vol. 13, no. 22, pp. 4379, 2024.</a:t>
+            </a:r>
+          </a:p>
+          <a:p>
+            <a:pPr marL="177800" indent="0">
+              <a:spcAft>
+                <a:spcPts val="60"/>
+              </a:spcAft>
+              <a:buSzPct val="100000"/>
+              <a:buNone/>
+            </a:pPr>
+            <a:r>
+              <a:rPr lang="en-US" sz="900" b="1" dirty="0">
+                <a:solidFill>
+                  <a:srgbClr val="000000"/>
+                </a:solidFill>
+                <a:latin typeface="Calibri" pitchFamily="34" charset="0"/>
+                <a:ea typeface="Calibri" pitchFamily="34" charset="-122"/>
+                <a:cs typeface="Calibri" pitchFamily="34" charset="-120"/>
+              </a:rPr>
+              <a:t xml:space="preserve">[28]  </a:t>
+            </a:r>
+            <a:r>
+              <a:rPr lang="en-US" sz="900" dirty="0">
+                <a:solidFill>
+                  <a:srgbClr val="000000"/>
+                </a:solidFill>
+                <a:latin typeface="Calibri" pitchFamily="34" charset="0"/>
+                <a:ea typeface="Calibri" pitchFamily="34" charset="-122"/>
+                <a:cs typeface="Calibri" pitchFamily="34" charset="-120"/>
+              </a:rPr>
+              <a:t xml:space="preserve">C. Chen, P. Wang, S. Li, Y. Chen and Y. Chang, “An Integrated Driver With Bang-Bang Dead-Time Control and Charge Sharing Bootstrap Circuit for GaN Synchronous Buck Converter,” IEEE Trans. Power Electron., vol. 37, no. 8, pp. 9503–9514, 2022.</a:t>
+            </a:r>
+          </a:p>
+          <a:p>
+            <a:pPr marL="177800" indent="0">
+              <a:spcAft>
+                <a:spcPts val="60"/>
+              </a:spcAft>
+              <a:buSzPct val="100000"/>
+              <a:buNone/>
+            </a:pPr>
+            <a:r>
+              <a:rPr lang="en-US" sz="900" b="1" dirty="0">
+                <a:solidFill>
+                  <a:srgbClr val="000000"/>
+                </a:solidFill>
+                <a:latin typeface="Calibri" pitchFamily="34" charset="0"/>
+                <a:ea typeface="Calibri" pitchFamily="34" charset="-122"/>
+                <a:cs typeface="Calibri" pitchFamily="34" charset="-120"/>
+              </a:rPr>
+              <a:t xml:space="preserve">[29]  </a:t>
+            </a:r>
+            <a:r>
+              <a:rPr lang="en-US" sz="900" dirty="0">
+                <a:solidFill>
+                  <a:srgbClr val="000000"/>
+                </a:solidFill>
+                <a:latin typeface="Calibri" pitchFamily="34" charset="0"/>
+                <a:ea typeface="Calibri" pitchFamily="34" charset="-122"/>
+                <a:cs typeface="Calibri" pitchFamily="34" charset="-120"/>
+              </a:rPr>
+              <a:t xml:space="preserve">G.H. Thuc, M. Tsai, C. Chen, J. Fu, W. Wu and W. Lin, “A Current Source Gate Driver with Dual-Edge Adaptive Slew Rate for GaN Devices,” in Proc. 2026 IEEE Applied Power Electronics Conference and Exposition (APEC), 2026.</a:t>
+            </a:r>
+          </a:p>
+          <a:p>
+            <a:pPr marL="177800" indent="0">
+              <a:spcAft>
+                <a:spcPts val="60"/>
+              </a:spcAft>
+              <a:buSzPct val="100000"/>
+              <a:buNone/>
+            </a:pPr>
+            <a:r>
+              <a:rPr lang="en-US" sz="900" b="1" dirty="0">
+                <a:solidFill>
+                  <a:srgbClr val="000000"/>
+                </a:solidFill>
+                <a:latin typeface="Calibri" pitchFamily="34" charset="0"/>
+                <a:ea typeface="Calibri" pitchFamily="34" charset="-122"/>
+                <a:cs typeface="Calibri" pitchFamily="34" charset="-120"/>
+              </a:rPr>
+              <a:t xml:space="preserve">[30]  </a:t>
+            </a:r>
+            <a:r>
+              <a:rPr lang="en-US" sz="900" dirty="0">
+                <a:solidFill>
+                  <a:srgbClr val="000000"/>
+                </a:solidFill>
+                <a:latin typeface="Calibri" pitchFamily="34" charset="0"/>
+                <a:ea typeface="Calibri" pitchFamily="34" charset="-122"/>
+                <a:cs typeface="Calibri" pitchFamily="34" charset="-120"/>
+              </a:rPr>
+              <a:t xml:space="preserve">G. Wu, Y. Huang, Y. Chen and C. Chen, “Closed-loop Slew Rate Control of Active Current Source Gate Driver with Digital Implementation for SiC MOSFET,” in Proc. 2025 IEEE Energy Conversion Conference Congress and Exposition (ECCE), 2025.</a:t>
+            </a:r>
+          </a:p>
+          <a:p>
+            <a:pPr marL="177800" indent="0">
+              <a:spcAft>
+                <a:spcPts val="160"/>
+              </a:spcAft>
+              <a:buSzPct val="100000"/>
+              <a:buNone/>
+            </a:pPr>
+            <a:r>
+              <a:rPr lang="en-US" sz="850" dirty="0">
+                <a:solidFill>
+                  <a:srgbClr val="000000"/>
+                </a:solidFill>
+                <a:latin typeface="Calibri" pitchFamily="34" charset="0"/>
+                <a:ea typeface="Calibri" pitchFamily="34" charset="-122"/>
+                <a:cs typeface="Calibri" pitchFamily="34" charset="-120"/>
+              </a:rPr>
+              <a:t xml:space="preserve">All 30 verified against the publisher record — authors, volume, issue and pages resolved through Crossref by DOI and title, not transcribed by hand.</a:t>
+            </a:r>
+          </a:p>
+        </p:txBody>
+      </p:sp>
+      <p:sp>
+        <p:nvSpPr>
+          <p:cNvPr id="6" name="Text 3"/>
+          <p:cNvSpPr txBox="1"/>
+          <p:nvPr/>
+        </p:nvSpPr>
+        <p:spPr>
+          <a:xfrm>
+            <a:off x="640080" y="5806440"/>
+            <a:ext cx="10881360" cy="365760"/>
+          </a:xfrm>
+          <a:prstGeom prst="rect">
+            <a:avLst/>
+          </a:prstGeom>
+          <a:noFill/>
+          <a:ln/>
+        </p:spPr>
+        <p:txBody>
+          <a:bodyPr wrap="square" lIns="0" tIns="0" rIns="0" bIns="0" rtlCol="0" anchor="ctr"/>
           <a:lstStyle/>
           <a:p>
             <a:pPr marL="177800" indent="0">
@@ -17603,221 +18109,6 @@
               <a:buNone/>
             </a:pPr>
             <a:r>
-              <a:rPr lang="en-US" sz="1150" b="1" dirty="0">
-                <a:solidFill>
-                  <a:srgbClr val="000000"/>
-                </a:solidFill>
-                <a:latin typeface="Calibri" pitchFamily="34" charset="0"/>
-                <a:ea typeface="Calibri" pitchFamily="34" charset="-122"/>
-                <a:cs typeface="Calibri" pitchFamily="34" charset="-120"/>
-              </a:rPr>
-              <a:t xml:space="preserve">Perturbation</a:t>
-            </a:r>
-          </a:p>
-        </p:txBody>
-      </p:sp>
-      <p:sp>
-        <p:nvSpPr>
-          <p:cNvPr id="6" name="TextBox 5"/>
-          <p:cNvSpPr txBox="1"/>
-          <p:nvPr/>
-        </p:nvSpPr>
-        <p:spPr>
-          <a:xfrm>
-            <a:off x="4160520" y="1325880"/>
-            <a:ext cx="1005840" cy="274320"/>
-          </a:xfrm>
-          <a:prstGeom prst="rect">
-            <a:avLst/>
-          </a:prstGeom>
-          <a:noFill/>
-        </p:spPr>
-        <p:txBody>
-          <a:bodyPr wrap="square" lIns="0" tIns="0" rIns="0" bIns="0">
-            <a:spAutoFit/>
-          </a:bodyPr>
-          <a:lstStyle/>
-          <a:p>
-            <a:pPr marL="177800" indent="0">
-              <a:spcAft>
-                <a:spcPts val="0"/>
-              </a:spcAft>
-              <a:buSzPct val="100000"/>
-              <a:buNone/>
-            </a:pPr>
-            <a:r>
-              <a:rPr lang="en-US" sz="1150" b="1" dirty="0">
-                <a:solidFill>
-                  <a:srgbClr val="000000"/>
-                </a:solidFill>
-                <a:latin typeface="Calibri" pitchFamily="34" charset="0"/>
-                <a:ea typeface="Calibri" pitchFamily="34" charset="-122"/>
-                <a:cs typeface="Calibri" pitchFamily="34" charset="-120"/>
-              </a:rPr>
-              <a:t xml:space="preserve">Ceiling</a:t>
-            </a:r>
-          </a:p>
-        </p:txBody>
-      </p:sp>
-      <p:sp>
-        <p:nvSpPr>
-          <p:cNvPr id="7" name="TextBox 6"/>
-          <p:cNvSpPr txBox="1"/>
-          <p:nvPr/>
-        </p:nvSpPr>
-        <p:spPr>
-          <a:xfrm>
-            <a:off x="5257800" y="1325880"/>
-            <a:ext cx="1097280" cy="274320"/>
-          </a:xfrm>
-          <a:prstGeom prst="rect">
-            <a:avLst/>
-          </a:prstGeom>
-          <a:noFill/>
-        </p:spPr>
-        <p:txBody>
-          <a:bodyPr wrap="square" lIns="0" tIns="0" rIns="0" bIns="0">
-            <a:spAutoFit/>
-          </a:bodyPr>
-          <a:lstStyle/>
-          <a:p>
-            <a:pPr marL="177800" indent="0">
-              <a:spcAft>
-                <a:spcPts val="0"/>
-              </a:spcAft>
-              <a:buSzPct val="100000"/>
-              <a:buNone/>
-            </a:pPr>
-            <a:r>
-              <a:rPr lang="en-US" sz="1150" dirty="0">
-                <a:solidFill>
-                  <a:srgbClr val="000000"/>
-                </a:solidFill>
-                <a:latin typeface="Calibri" pitchFamily="34" charset="0"/>
-                <a:ea typeface="Calibri" pitchFamily="34" charset="-122"/>
-                <a:cs typeface="Calibri" pitchFamily="34" charset="-120"/>
-              </a:rPr>
-              <a:t xml:space="preserve">vs nom.</a:t>
-            </a:r>
-          </a:p>
-        </p:txBody>
-      </p:sp>
-      <p:sp>
-        <p:nvSpPr>
-          <p:cNvPr id="8" name="TextBox 7"/>
-          <p:cNvSpPr txBox="1"/>
-          <p:nvPr/>
-        </p:nvSpPr>
-        <p:spPr>
-          <a:xfrm>
-            <a:off x="640080" y="1719072"/>
-            <a:ext cx="3474720" cy="274320"/>
-          </a:xfrm>
-          <a:prstGeom prst="rect">
-            <a:avLst/>
-          </a:prstGeom>
-          <a:noFill/>
-        </p:spPr>
-        <p:txBody>
-          <a:bodyPr wrap="square" lIns="0" tIns="0" rIns="0" bIns="0">
-            <a:spAutoFit/>
-          </a:bodyPr>
-          <a:lstStyle/>
-          <a:p>
-            <a:pPr marL="177800" indent="0">
-              <a:spcAft>
-                <a:spcPts val="0"/>
-              </a:spcAft>
-              <a:buSzPct val="100000"/>
-              <a:buNone/>
-            </a:pPr>
-            <a:r>
-              <a:rPr lang="en-US" sz="1200" b="1" dirty="0">
-                <a:solidFill>
-                  <a:srgbClr val="000000"/>
-                </a:solidFill>
-                <a:latin typeface="Calibri" pitchFamily="34" charset="0"/>
-                <a:ea typeface="Calibri" pitchFamily="34" charset="-122"/>
-                <a:cs typeface="Calibri" pitchFamily="34" charset="-120"/>
-              </a:rPr>
-              <a:t xml:space="preserve">Loop inductance −50 %  (1.5 nH)</a:t>
-            </a:r>
-          </a:p>
-        </p:txBody>
-      </p:sp>
-      <p:sp>
-        <p:nvSpPr>
-          <p:cNvPr id="9" name="TextBox 8"/>
-          <p:cNvSpPr txBox="1"/>
-          <p:nvPr/>
-        </p:nvSpPr>
-        <p:spPr>
-          <a:xfrm>
-            <a:off x="4160520" y="1719072"/>
-            <a:ext cx="1005840" cy="274320"/>
-          </a:xfrm>
-          <a:prstGeom prst="rect">
-            <a:avLst/>
-          </a:prstGeom>
-          <a:noFill/>
-        </p:spPr>
-        <p:txBody>
-          <a:bodyPr wrap="square" lIns="0" tIns="0" rIns="0" bIns="0">
-            <a:spAutoFit/>
-          </a:bodyPr>
-          <a:lstStyle/>
-          <a:p>
-            <a:pPr marL="177800" indent="0">
-              <a:spcAft>
-                <a:spcPts val="0"/>
-              </a:spcAft>
-              <a:buSzPct val="100000"/>
-              <a:buNone/>
-            </a:pPr>
-            <a:r>
-              <a:rPr lang="en-US" sz="1200" b="1" dirty="0">
-                <a:solidFill>
-                  <a:srgbClr val="000000"/>
-                </a:solidFill>
-                <a:latin typeface="Calibri" pitchFamily="34" charset="0"/>
-                <a:ea typeface="Calibri" pitchFamily="34" charset="-122"/>
-                <a:cs typeface="Calibri" pitchFamily="34" charset="-120"/>
-              </a:rPr>
-              <a:t xml:space="preserve">13.54 %</a:t>
-            </a:r>
-          </a:p>
-        </p:txBody>
-      </p:sp>
-      <p:sp>
-        <p:nvSpPr>
-          <p:cNvPr id="10" name="TextBox 9"/>
-          <p:cNvSpPr txBox="1"/>
-          <p:nvPr/>
-        </p:nvSpPr>
-        <p:spPr>
-          <a:xfrm>
-            <a:off x="5257800" y="1719072"/>
-            <a:ext cx="1097280" cy="274320"/>
-          </a:xfrm>
-          <a:prstGeom prst="rect">
-            <a:avLst/>
-          </a:prstGeom>
-          <a:noFill/>
-        </p:spPr>
-        <p:txBody>
-          <a:bodyPr wrap="square" lIns="0" tIns="0" rIns="0" bIns="0">
-            <a:spAutoFit/>
-          </a:bodyPr>
-          <a:lstStyle/>
-          <a:p>
-            <a:pPr marL="177800" indent="0">
-              <a:spcAft>
-                <a:spcPts val="0"/>
-              </a:spcAft>
-              <a:buSzPct val="100000"/>
-              <a:buNone/>
-            </a:pPr>
-            <a:r>
               <a:rPr lang="en-US" sz="1200" dirty="0">
                 <a:solidFill>
                   <a:srgbClr val="000000"/>
@@ -17826,1593 +18117,7 @@
                 <a:ea typeface="Calibri" pitchFamily="34" charset="-122"/>
                 <a:cs typeface="Calibri" pitchFamily="34" charset="-120"/>
               </a:rPr>
-              <a:t xml:space="preserve">+7.59</a:t>
-            </a:r>
-          </a:p>
-        </p:txBody>
-      </p:sp>
-      <p:sp>
-        <p:nvSpPr>
-          <p:cNvPr id="11" name="TextBox 10"/>
-          <p:cNvSpPr txBox="1"/>
-          <p:nvPr/>
-        </p:nvSpPr>
-        <p:spPr>
-          <a:xfrm>
-            <a:off x="640080" y="2025395"/>
-            <a:ext cx="3474720" cy="274320"/>
-          </a:xfrm>
-          <a:prstGeom prst="rect">
-            <a:avLst/>
-          </a:prstGeom>
-          <a:noFill/>
-        </p:spPr>
-        <p:txBody>
-          <a:bodyPr wrap="square" lIns="0" tIns="0" rIns="0" bIns="0">
-            <a:spAutoFit/>
-          </a:bodyPr>
-          <a:lstStyle/>
-          <a:p>
-            <a:pPr marL="177800" indent="0">
-              <a:spcAft>
-                <a:spcPts val="0"/>
-              </a:spcAft>
-              <a:buSzPct val="100000"/>
-              <a:buNone/>
-            </a:pPr>
-            <a:r>
-              <a:rPr lang="en-US" sz="1200" dirty="0">
-                <a:solidFill>
-                  <a:srgbClr val="000000"/>
-                </a:solidFill>
-                <a:latin typeface="Calibri" pitchFamily="34" charset="0"/>
-                <a:ea typeface="Calibri" pitchFamily="34" charset="-122"/>
-                <a:cs typeface="Calibri" pitchFamily="34" charset="-120"/>
-              </a:rPr>
-              <a:t xml:space="preserve">Input capacitance +30 %</a:t>
-            </a:r>
-          </a:p>
-        </p:txBody>
-      </p:sp>
-      <p:sp>
-        <p:nvSpPr>
-          <p:cNvPr id="12" name="TextBox 11"/>
-          <p:cNvSpPr txBox="1"/>
-          <p:nvPr/>
-        </p:nvSpPr>
-        <p:spPr>
-          <a:xfrm>
-            <a:off x="4160520" y="2025395"/>
-            <a:ext cx="1005840" cy="274320"/>
-          </a:xfrm>
-          <a:prstGeom prst="rect">
-            <a:avLst/>
-          </a:prstGeom>
-          <a:noFill/>
-        </p:spPr>
-        <p:txBody>
-          <a:bodyPr wrap="square" lIns="0" tIns="0" rIns="0" bIns="0">
-            <a:spAutoFit/>
-          </a:bodyPr>
-          <a:lstStyle/>
-          <a:p>
-            <a:pPr marL="177800" indent="0">
-              <a:spcAft>
-                <a:spcPts val="0"/>
-              </a:spcAft>
-              <a:buSzPct val="100000"/>
-              <a:buNone/>
-            </a:pPr>
-            <a:r>
-              <a:rPr lang="en-US" sz="1200" dirty="0">
-                <a:solidFill>
-                  <a:srgbClr val="000000"/>
-                </a:solidFill>
-                <a:latin typeface="Calibri" pitchFamily="34" charset="0"/>
-                <a:ea typeface="Calibri" pitchFamily="34" charset="-122"/>
-                <a:cs typeface="Calibri" pitchFamily="34" charset="-120"/>
-              </a:rPr>
-              <a:t xml:space="preserve">7.71 %</a:t>
-            </a:r>
-          </a:p>
-        </p:txBody>
-      </p:sp>
-      <p:sp>
-        <p:nvSpPr>
-          <p:cNvPr id="13" name="TextBox 12"/>
-          <p:cNvSpPr txBox="1"/>
-          <p:nvPr/>
-        </p:nvSpPr>
-        <p:spPr>
-          <a:xfrm>
-            <a:off x="5257800" y="2025395"/>
-            <a:ext cx="1097280" cy="274320"/>
-          </a:xfrm>
-          <a:prstGeom prst="rect">
-            <a:avLst/>
-          </a:prstGeom>
-          <a:noFill/>
-        </p:spPr>
-        <p:txBody>
-          <a:bodyPr wrap="square" lIns="0" tIns="0" rIns="0" bIns="0">
-            <a:spAutoFit/>
-          </a:bodyPr>
-          <a:lstStyle/>
-          <a:p>
-            <a:pPr marL="177800" indent="0">
-              <a:spcAft>
-                <a:spcPts val="0"/>
-              </a:spcAft>
-              <a:buSzPct val="100000"/>
-              <a:buNone/>
-            </a:pPr>
-            <a:r>
-              <a:rPr lang="en-US" sz="1200" dirty="0">
-                <a:solidFill>
-                  <a:srgbClr val="000000"/>
-                </a:solidFill>
-                <a:latin typeface="Calibri" pitchFamily="34" charset="0"/>
-                <a:ea typeface="Calibri" pitchFamily="34" charset="-122"/>
-                <a:cs typeface="Calibri" pitchFamily="34" charset="-120"/>
-              </a:rPr>
-              <a:t xml:space="preserve">+1.76</a:t>
-            </a:r>
-          </a:p>
-        </p:txBody>
-      </p:sp>
-      <p:sp>
-        <p:nvSpPr>
-          <p:cNvPr id="14" name="TextBox 13"/>
-          <p:cNvSpPr txBox="1"/>
-          <p:nvPr/>
-        </p:nvSpPr>
-        <p:spPr>
-          <a:xfrm>
-            <a:off x="640080" y="2331720"/>
-            <a:ext cx="3474720" cy="274320"/>
-          </a:xfrm>
-          <a:prstGeom prst="rect">
-            <a:avLst/>
-          </a:prstGeom>
-          <a:noFill/>
-        </p:spPr>
-        <p:txBody>
-          <a:bodyPr wrap="square" lIns="0" tIns="0" rIns="0" bIns="0">
-            <a:spAutoFit/>
-          </a:bodyPr>
-          <a:lstStyle/>
-          <a:p>
-            <a:pPr marL="177800" indent="0">
-              <a:spcAft>
-                <a:spcPts val="0"/>
-              </a:spcAft>
-              <a:buSzPct val="100000"/>
-              <a:buNone/>
-            </a:pPr>
-            <a:r>
-              <a:rPr lang="en-US" sz="1200" dirty="0">
-                <a:solidFill>
-                  <a:srgbClr val="000000"/>
-                </a:solidFill>
-                <a:latin typeface="Calibri" pitchFamily="34" charset="0"/>
-                <a:ea typeface="Calibri" pitchFamily="34" charset="-122"/>
-                <a:cs typeface="Calibri" pitchFamily="34" charset="-120"/>
-              </a:rPr>
-              <a:t xml:space="preserve">Miller capacitance −50 %</a:t>
-            </a:r>
-          </a:p>
-        </p:txBody>
-      </p:sp>
-      <p:sp>
-        <p:nvSpPr>
-          <p:cNvPr id="15" name="TextBox 14"/>
-          <p:cNvSpPr txBox="1"/>
-          <p:nvPr/>
-        </p:nvSpPr>
-        <p:spPr>
-          <a:xfrm>
-            <a:off x="4160520" y="2331720"/>
-            <a:ext cx="1005840" cy="274320"/>
-          </a:xfrm>
-          <a:prstGeom prst="rect">
-            <a:avLst/>
-          </a:prstGeom>
-          <a:noFill/>
-        </p:spPr>
-        <p:txBody>
-          <a:bodyPr wrap="square" lIns="0" tIns="0" rIns="0" bIns="0">
-            <a:spAutoFit/>
-          </a:bodyPr>
-          <a:lstStyle/>
-          <a:p>
-            <a:pPr marL="177800" indent="0">
-              <a:spcAft>
-                <a:spcPts val="0"/>
-              </a:spcAft>
-              <a:buSzPct val="100000"/>
-              <a:buNone/>
-            </a:pPr>
-            <a:r>
-              <a:rPr lang="en-US" sz="1200" dirty="0">
-                <a:solidFill>
-                  <a:srgbClr val="000000"/>
-                </a:solidFill>
-                <a:latin typeface="Calibri" pitchFamily="34" charset="0"/>
-                <a:ea typeface="Calibri" pitchFamily="34" charset="-122"/>
-                <a:cs typeface="Calibri" pitchFamily="34" charset="-120"/>
-              </a:rPr>
-              <a:t xml:space="preserve">6.93 %</a:t>
-            </a:r>
-          </a:p>
-        </p:txBody>
-      </p:sp>
-      <p:sp>
-        <p:nvSpPr>
-          <p:cNvPr id="16" name="TextBox 15"/>
-          <p:cNvSpPr txBox="1"/>
-          <p:nvPr/>
-        </p:nvSpPr>
-        <p:spPr>
-          <a:xfrm>
-            <a:off x="5257800" y="2331720"/>
-            <a:ext cx="1097280" cy="274320"/>
-          </a:xfrm>
-          <a:prstGeom prst="rect">
-            <a:avLst/>
-          </a:prstGeom>
-          <a:noFill/>
-        </p:spPr>
-        <p:txBody>
-          <a:bodyPr wrap="square" lIns="0" tIns="0" rIns="0" bIns="0">
-            <a:spAutoFit/>
-          </a:bodyPr>
-          <a:lstStyle/>
-          <a:p>
-            <a:pPr marL="177800" indent="0">
-              <a:spcAft>
-                <a:spcPts val="0"/>
-              </a:spcAft>
-              <a:buSzPct val="100000"/>
-              <a:buNone/>
-            </a:pPr>
-            <a:r>
-              <a:rPr lang="en-US" sz="1200" dirty="0">
-                <a:solidFill>
-                  <a:srgbClr val="000000"/>
-                </a:solidFill>
-                <a:latin typeface="Calibri" pitchFamily="34" charset="0"/>
-                <a:ea typeface="Calibri" pitchFamily="34" charset="-122"/>
-                <a:cs typeface="Calibri" pitchFamily="34" charset="-120"/>
-              </a:rPr>
-              <a:t xml:space="preserve">+0.99</a:t>
-            </a:r>
-          </a:p>
-        </p:txBody>
-      </p:sp>
-      <p:sp>
-        <p:nvSpPr>
-          <p:cNvPr id="17" name="TextBox 16"/>
-          <p:cNvSpPr txBox="1"/>
-          <p:nvPr/>
-        </p:nvSpPr>
-        <p:spPr>
-          <a:xfrm>
-            <a:off x="640080" y="2638044"/>
-            <a:ext cx="3474720" cy="274320"/>
-          </a:xfrm>
-          <a:prstGeom prst="rect">
-            <a:avLst/>
-          </a:prstGeom>
-          <a:noFill/>
-        </p:spPr>
-        <p:txBody>
-          <a:bodyPr wrap="square" lIns="0" tIns="0" rIns="0" bIns="0">
-            <a:spAutoFit/>
-          </a:bodyPr>
-          <a:lstStyle/>
-          <a:p>
-            <a:pPr marL="177800" indent="0">
-              <a:spcAft>
-                <a:spcPts val="0"/>
-              </a:spcAft>
-              <a:buSzPct val="100000"/>
-              <a:buNone/>
-            </a:pPr>
-            <a:r>
-              <a:rPr lang="en-US" sz="1200" b="1" dirty="0">
-                <a:solidFill>
-                  <a:srgbClr val="000000"/>
-                </a:solidFill>
-                <a:latin typeface="Calibri" pitchFamily="34" charset="0"/>
-                <a:ea typeface="Calibri" pitchFamily="34" charset="-122"/>
-                <a:cs typeface="Calibri" pitchFamily="34" charset="-120"/>
-              </a:rPr>
-              <a:t xml:space="preserve">nominal</a:t>
-            </a:r>
-          </a:p>
-        </p:txBody>
-      </p:sp>
-      <p:sp>
-        <p:nvSpPr>
-          <p:cNvPr id="18" name="TextBox 17"/>
-          <p:cNvSpPr txBox="1"/>
-          <p:nvPr/>
-        </p:nvSpPr>
-        <p:spPr>
-          <a:xfrm>
-            <a:off x="4160520" y="2638044"/>
-            <a:ext cx="1005840" cy="274320"/>
-          </a:xfrm>
-          <a:prstGeom prst="rect">
-            <a:avLst/>
-          </a:prstGeom>
-          <a:noFill/>
-        </p:spPr>
-        <p:txBody>
-          <a:bodyPr wrap="square" lIns="0" tIns="0" rIns="0" bIns="0">
-            <a:spAutoFit/>
-          </a:bodyPr>
-          <a:lstStyle/>
-          <a:p>
-            <a:pPr marL="177800" indent="0">
-              <a:spcAft>
-                <a:spcPts val="0"/>
-              </a:spcAft>
-              <a:buSzPct val="100000"/>
-              <a:buNone/>
-            </a:pPr>
-            <a:r>
-              <a:rPr lang="en-US" sz="1200" b="1" dirty="0">
-                <a:solidFill>
-                  <a:srgbClr val="000000"/>
-                </a:solidFill>
-                <a:latin typeface="Calibri" pitchFamily="34" charset="0"/>
-                <a:ea typeface="Calibri" pitchFamily="34" charset="-122"/>
-                <a:cs typeface="Calibri" pitchFamily="34" charset="-120"/>
-              </a:rPr>
-              <a:t xml:space="preserve">5.95 %</a:t>
-            </a:r>
-          </a:p>
-        </p:txBody>
-      </p:sp>
-      <p:sp>
-        <p:nvSpPr>
-          <p:cNvPr id="19" name="TextBox 18"/>
-          <p:cNvSpPr txBox="1"/>
-          <p:nvPr/>
-        </p:nvSpPr>
-        <p:spPr>
-          <a:xfrm>
-            <a:off x="5257800" y="2638044"/>
-            <a:ext cx="1097280" cy="274320"/>
-          </a:xfrm>
-          <a:prstGeom prst="rect">
-            <a:avLst/>
-          </a:prstGeom>
-          <a:noFill/>
-        </p:spPr>
-        <p:txBody>
-          <a:bodyPr wrap="square" lIns="0" tIns="0" rIns="0" bIns="0">
-            <a:spAutoFit/>
-          </a:bodyPr>
-          <a:lstStyle/>
-          <a:p>
-            <a:pPr marL="177800" indent="0">
-              <a:spcAft>
-                <a:spcPts val="0"/>
-              </a:spcAft>
-              <a:buSzPct val="100000"/>
-              <a:buNone/>
-            </a:pPr>
-            <a:r>
-              <a:rPr lang="en-US" sz="1200" dirty="0">
-                <a:solidFill>
-                  <a:srgbClr val="000000"/>
-                </a:solidFill>
-                <a:latin typeface="Calibri" pitchFamily="34" charset="0"/>
-                <a:ea typeface="Calibri" pitchFamily="34" charset="-122"/>
-                <a:cs typeface="Calibri" pitchFamily="34" charset="-120"/>
-              </a:rPr>
-              <a:t xml:space="preserve">—</a:t>
-            </a:r>
-          </a:p>
-        </p:txBody>
-      </p:sp>
-      <p:sp>
-        <p:nvSpPr>
-          <p:cNvPr id="20" name="TextBox 19"/>
-          <p:cNvSpPr txBox="1"/>
-          <p:nvPr/>
-        </p:nvSpPr>
-        <p:spPr>
-          <a:xfrm>
-            <a:off x="640080" y="2944368"/>
-            <a:ext cx="3474720" cy="274320"/>
-          </a:xfrm>
-          <a:prstGeom prst="rect">
-            <a:avLst/>
-          </a:prstGeom>
-          <a:noFill/>
-        </p:spPr>
-        <p:txBody>
-          <a:bodyPr wrap="square" lIns="0" tIns="0" rIns="0" bIns="0">
-            <a:spAutoFit/>
-          </a:bodyPr>
-          <a:lstStyle/>
-          <a:p>
-            <a:pPr marL="177800" indent="0">
-              <a:spcAft>
-                <a:spcPts val="0"/>
-              </a:spcAft>
-              <a:buSzPct val="100000"/>
-              <a:buNone/>
-            </a:pPr>
-            <a:r>
-              <a:rPr lang="en-US" sz="1200" dirty="0">
-                <a:solidFill>
-                  <a:srgbClr val="000000"/>
-                </a:solidFill>
-                <a:latin typeface="Calibri" pitchFamily="34" charset="0"/>
-                <a:ea typeface="Calibri" pitchFamily="34" charset="-122"/>
-                <a:cs typeface="Calibri" pitchFamily="34" charset="-120"/>
-              </a:rPr>
-              <a:t xml:space="preserve">Threshold −20 %</a:t>
-            </a:r>
-          </a:p>
-        </p:txBody>
-      </p:sp>
-      <p:sp>
-        <p:nvSpPr>
-          <p:cNvPr id="21" name="TextBox 20"/>
-          <p:cNvSpPr txBox="1"/>
-          <p:nvPr/>
-        </p:nvSpPr>
-        <p:spPr>
-          <a:xfrm>
-            <a:off x="4160520" y="2944368"/>
-            <a:ext cx="1005840" cy="274320"/>
-          </a:xfrm>
-          <a:prstGeom prst="rect">
-            <a:avLst/>
-          </a:prstGeom>
-          <a:noFill/>
-        </p:spPr>
-        <p:txBody>
-          <a:bodyPr wrap="square" lIns="0" tIns="0" rIns="0" bIns="0">
-            <a:spAutoFit/>
-          </a:bodyPr>
-          <a:lstStyle/>
-          <a:p>
-            <a:pPr marL="177800" indent="0">
-              <a:spcAft>
-                <a:spcPts val="0"/>
-              </a:spcAft>
-              <a:buSzPct val="100000"/>
-              <a:buNone/>
-            </a:pPr>
-            <a:r>
-              <a:rPr lang="en-US" sz="1200" dirty="0">
-                <a:solidFill>
-                  <a:srgbClr val="000000"/>
-                </a:solidFill>
-                <a:latin typeface="Calibri" pitchFamily="34" charset="0"/>
-                <a:ea typeface="Calibri" pitchFamily="34" charset="-122"/>
-                <a:cs typeface="Calibri" pitchFamily="34" charset="-120"/>
-              </a:rPr>
-              <a:t xml:space="preserve">5.64 %</a:t>
-            </a:r>
-          </a:p>
-        </p:txBody>
-      </p:sp>
-      <p:sp>
-        <p:nvSpPr>
-          <p:cNvPr id="22" name="TextBox 21"/>
-          <p:cNvSpPr txBox="1"/>
-          <p:nvPr/>
-        </p:nvSpPr>
-        <p:spPr>
-          <a:xfrm>
-            <a:off x="5257800" y="2944368"/>
-            <a:ext cx="1097280" cy="274320"/>
-          </a:xfrm>
-          <a:prstGeom prst="rect">
-            <a:avLst/>
-          </a:prstGeom>
-          <a:noFill/>
-        </p:spPr>
-        <p:txBody>
-          <a:bodyPr wrap="square" lIns="0" tIns="0" rIns="0" bIns="0">
-            <a:spAutoFit/>
-          </a:bodyPr>
-          <a:lstStyle/>
-          <a:p>
-            <a:pPr marL="177800" indent="0">
-              <a:spcAft>
-                <a:spcPts val="0"/>
-              </a:spcAft>
-              <a:buSzPct val="100000"/>
-              <a:buNone/>
-            </a:pPr>
-            <a:r>
-              <a:rPr lang="en-US" sz="1200" dirty="0">
-                <a:solidFill>
-                  <a:srgbClr val="000000"/>
-                </a:solidFill>
-                <a:latin typeface="Calibri" pitchFamily="34" charset="0"/>
-                <a:ea typeface="Calibri" pitchFamily="34" charset="-122"/>
-                <a:cs typeface="Calibri" pitchFamily="34" charset="-120"/>
-              </a:rPr>
-              <a:t xml:space="preserve">−0.31</a:t>
-            </a:r>
-          </a:p>
-        </p:txBody>
-      </p:sp>
-      <p:sp>
-        <p:nvSpPr>
-          <p:cNvPr id="23" name="TextBox 22"/>
-          <p:cNvSpPr txBox="1"/>
-          <p:nvPr/>
-        </p:nvSpPr>
-        <p:spPr>
-          <a:xfrm>
-            <a:off x="640080" y="3250691"/>
-            <a:ext cx="3474720" cy="274320"/>
-          </a:xfrm>
-          <a:prstGeom prst="rect">
-            <a:avLst/>
-          </a:prstGeom>
-          <a:noFill/>
-        </p:spPr>
-        <p:txBody>
-          <a:bodyPr wrap="square" lIns="0" tIns="0" rIns="0" bIns="0">
-            <a:spAutoFit/>
-          </a:bodyPr>
-          <a:lstStyle/>
-          <a:p>
-            <a:pPr marL="177800" indent="0">
-              <a:spcAft>
-                <a:spcPts val="0"/>
-              </a:spcAft>
-              <a:buSzPct val="100000"/>
-              <a:buNone/>
-            </a:pPr>
-            <a:r>
-              <a:rPr lang="en-US" sz="1200" dirty="0">
-                <a:solidFill>
-                  <a:srgbClr val="000000"/>
-                </a:solidFill>
-                <a:latin typeface="Calibri" pitchFamily="34" charset="0"/>
-                <a:ea typeface="Calibri" pitchFamily="34" charset="-122"/>
-                <a:cs typeface="Calibri" pitchFamily="34" charset="-120"/>
-              </a:rPr>
-              <a:t xml:space="preserve">Transconductance +30 %</a:t>
-            </a:r>
-          </a:p>
-        </p:txBody>
-      </p:sp>
-      <p:sp>
-        <p:nvSpPr>
-          <p:cNvPr id="24" name="TextBox 23"/>
-          <p:cNvSpPr txBox="1"/>
-          <p:nvPr/>
-        </p:nvSpPr>
-        <p:spPr>
-          <a:xfrm>
-            <a:off x="4160520" y="3250691"/>
-            <a:ext cx="1005840" cy="274320"/>
-          </a:xfrm>
-          <a:prstGeom prst="rect">
-            <a:avLst/>
-          </a:prstGeom>
-          <a:noFill/>
-        </p:spPr>
-        <p:txBody>
-          <a:bodyPr wrap="square" lIns="0" tIns="0" rIns="0" bIns="0">
-            <a:spAutoFit/>
-          </a:bodyPr>
-          <a:lstStyle/>
-          <a:p>
-            <a:pPr marL="177800" indent="0">
-              <a:spcAft>
-                <a:spcPts val="0"/>
-              </a:spcAft>
-              <a:buSzPct val="100000"/>
-              <a:buNone/>
-            </a:pPr>
-            <a:r>
-              <a:rPr lang="en-US" sz="1200" dirty="0">
-                <a:solidFill>
-                  <a:srgbClr val="000000"/>
-                </a:solidFill>
-                <a:latin typeface="Calibri" pitchFamily="34" charset="0"/>
-                <a:ea typeface="Calibri" pitchFamily="34" charset="-122"/>
-                <a:cs typeface="Calibri" pitchFamily="34" charset="-120"/>
-              </a:rPr>
-              <a:t xml:space="preserve">5.08 %</a:t>
-            </a:r>
-          </a:p>
-        </p:txBody>
-      </p:sp>
-      <p:sp>
-        <p:nvSpPr>
-          <p:cNvPr id="25" name="TextBox 24"/>
-          <p:cNvSpPr txBox="1"/>
-          <p:nvPr/>
-        </p:nvSpPr>
-        <p:spPr>
-          <a:xfrm>
-            <a:off x="5257800" y="3250691"/>
-            <a:ext cx="1097280" cy="274320"/>
-          </a:xfrm>
-          <a:prstGeom prst="rect">
-            <a:avLst/>
-          </a:prstGeom>
-          <a:noFill/>
-        </p:spPr>
-        <p:txBody>
-          <a:bodyPr wrap="square" lIns="0" tIns="0" rIns="0" bIns="0">
-            <a:spAutoFit/>
-          </a:bodyPr>
-          <a:lstStyle/>
-          <a:p>
-            <a:pPr marL="177800" indent="0">
-              <a:spcAft>
-                <a:spcPts val="0"/>
-              </a:spcAft>
-              <a:buSzPct val="100000"/>
-              <a:buNone/>
-            </a:pPr>
-            <a:r>
-              <a:rPr lang="en-US" sz="1200" dirty="0">
-                <a:solidFill>
-                  <a:srgbClr val="000000"/>
-                </a:solidFill>
-                <a:latin typeface="Calibri" pitchFamily="34" charset="0"/>
-                <a:ea typeface="Calibri" pitchFamily="34" charset="-122"/>
-                <a:cs typeface="Calibri" pitchFamily="34" charset="-120"/>
-              </a:rPr>
-              <a:t xml:space="preserve">−0.87</a:t>
-            </a:r>
-          </a:p>
-        </p:txBody>
-      </p:sp>
-      <p:sp>
-        <p:nvSpPr>
-          <p:cNvPr id="26" name="TextBox 25"/>
-          <p:cNvSpPr txBox="1"/>
-          <p:nvPr/>
-        </p:nvSpPr>
-        <p:spPr>
-          <a:xfrm>
-            <a:off x="640080" y="3557015"/>
-            <a:ext cx="3474720" cy="274320"/>
-          </a:xfrm>
-          <a:prstGeom prst="rect">
-            <a:avLst/>
-          </a:prstGeom>
-          <a:noFill/>
-        </p:spPr>
-        <p:txBody>
-          <a:bodyPr wrap="square" lIns="0" tIns="0" rIns="0" bIns="0">
-            <a:spAutoFit/>
-          </a:bodyPr>
-          <a:lstStyle/>
-          <a:p>
-            <a:pPr marL="177800" indent="0">
-              <a:spcAft>
-                <a:spcPts val="0"/>
-              </a:spcAft>
-              <a:buSzPct val="100000"/>
-              <a:buNone/>
-            </a:pPr>
-            <a:r>
-              <a:rPr lang="en-US" sz="1200" dirty="0">
-                <a:solidFill>
-                  <a:srgbClr val="000000"/>
-                </a:solidFill>
-                <a:latin typeface="Calibri" pitchFamily="34" charset="0"/>
-                <a:ea typeface="Calibri" pitchFamily="34" charset="-122"/>
-                <a:cs typeface="Calibri" pitchFamily="34" charset="-120"/>
-              </a:rPr>
-              <a:t xml:space="preserve">Threshold +20 %</a:t>
-            </a:r>
-          </a:p>
-        </p:txBody>
-      </p:sp>
-      <p:sp>
-        <p:nvSpPr>
-          <p:cNvPr id="27" name="TextBox 26"/>
-          <p:cNvSpPr txBox="1"/>
-          <p:nvPr/>
-        </p:nvSpPr>
-        <p:spPr>
-          <a:xfrm>
-            <a:off x="4160520" y="3557015"/>
-            <a:ext cx="1005840" cy="274320"/>
-          </a:xfrm>
-          <a:prstGeom prst="rect">
-            <a:avLst/>
-          </a:prstGeom>
-          <a:noFill/>
-        </p:spPr>
-        <p:txBody>
-          <a:bodyPr wrap="square" lIns="0" tIns="0" rIns="0" bIns="0">
-            <a:spAutoFit/>
-          </a:bodyPr>
-          <a:lstStyle/>
-          <a:p>
-            <a:pPr marL="177800" indent="0">
-              <a:spcAft>
-                <a:spcPts val="0"/>
-              </a:spcAft>
-              <a:buSzPct val="100000"/>
-              <a:buNone/>
-            </a:pPr>
-            <a:r>
-              <a:rPr lang="en-US" sz="1200" dirty="0">
-                <a:solidFill>
-                  <a:srgbClr val="000000"/>
-                </a:solidFill>
-                <a:latin typeface="Calibri" pitchFamily="34" charset="0"/>
-                <a:ea typeface="Calibri" pitchFamily="34" charset="-122"/>
-                <a:cs typeface="Calibri" pitchFamily="34" charset="-120"/>
-              </a:rPr>
-              <a:t xml:space="preserve">4.90 %</a:t>
-            </a:r>
-          </a:p>
-        </p:txBody>
-      </p:sp>
-      <p:sp>
-        <p:nvSpPr>
-          <p:cNvPr id="28" name="TextBox 27"/>
-          <p:cNvSpPr txBox="1"/>
-          <p:nvPr/>
-        </p:nvSpPr>
-        <p:spPr>
-          <a:xfrm>
-            <a:off x="5257800" y="3557015"/>
-            <a:ext cx="1097280" cy="274320"/>
-          </a:xfrm>
-          <a:prstGeom prst="rect">
-            <a:avLst/>
-          </a:prstGeom>
-          <a:noFill/>
-        </p:spPr>
-        <p:txBody>
-          <a:bodyPr wrap="square" lIns="0" tIns="0" rIns="0" bIns="0">
-            <a:spAutoFit/>
-          </a:bodyPr>
-          <a:lstStyle/>
-          <a:p>
-            <a:pPr marL="177800" indent="0">
-              <a:spcAft>
-                <a:spcPts val="0"/>
-              </a:spcAft>
-              <a:buSzPct val="100000"/>
-              <a:buNone/>
-            </a:pPr>
-            <a:r>
-              <a:rPr lang="en-US" sz="1200" dirty="0">
-                <a:solidFill>
-                  <a:srgbClr val="000000"/>
-                </a:solidFill>
-                <a:latin typeface="Calibri" pitchFamily="34" charset="0"/>
-                <a:ea typeface="Calibri" pitchFamily="34" charset="-122"/>
-                <a:cs typeface="Calibri" pitchFamily="34" charset="-120"/>
-              </a:rPr>
-              <a:t xml:space="preserve">−1.05</a:t>
-            </a:r>
-          </a:p>
-        </p:txBody>
-      </p:sp>
-      <p:sp>
-        <p:nvSpPr>
-          <p:cNvPr id="29" name="TextBox 28"/>
-          <p:cNvSpPr txBox="1"/>
-          <p:nvPr/>
-        </p:nvSpPr>
-        <p:spPr>
-          <a:xfrm>
-            <a:off x="640080" y="3863339"/>
-            <a:ext cx="3474720" cy="274320"/>
-          </a:xfrm>
-          <a:prstGeom prst="rect">
-            <a:avLst/>
-          </a:prstGeom>
-          <a:noFill/>
-        </p:spPr>
-        <p:txBody>
-          <a:bodyPr wrap="square" lIns="0" tIns="0" rIns="0" bIns="0">
-            <a:spAutoFit/>
-          </a:bodyPr>
-          <a:lstStyle/>
-          <a:p>
-            <a:pPr marL="177800" indent="0">
-              <a:spcAft>
-                <a:spcPts val="0"/>
-              </a:spcAft>
-              <a:buSzPct val="100000"/>
-              <a:buNone/>
-            </a:pPr>
-            <a:r>
-              <a:rPr lang="en-US" sz="1200" dirty="0">
-                <a:solidFill>
-                  <a:srgbClr val="000000"/>
-                </a:solidFill>
-                <a:latin typeface="Calibri" pitchFamily="34" charset="0"/>
-                <a:ea typeface="Calibri" pitchFamily="34" charset="-122"/>
-                <a:cs typeface="Calibri" pitchFamily="34" charset="-120"/>
-              </a:rPr>
-              <a:t xml:space="preserve">Input capacitance −30 %</a:t>
-            </a:r>
-          </a:p>
-        </p:txBody>
-      </p:sp>
-      <p:sp>
-        <p:nvSpPr>
-          <p:cNvPr id="30" name="TextBox 29"/>
-          <p:cNvSpPr txBox="1"/>
-          <p:nvPr/>
-        </p:nvSpPr>
-        <p:spPr>
-          <a:xfrm>
-            <a:off x="4160520" y="3863339"/>
-            <a:ext cx="1005840" cy="274320"/>
-          </a:xfrm>
-          <a:prstGeom prst="rect">
-            <a:avLst/>
-          </a:prstGeom>
-          <a:noFill/>
-        </p:spPr>
-        <p:txBody>
-          <a:bodyPr wrap="square" lIns="0" tIns="0" rIns="0" bIns="0">
-            <a:spAutoFit/>
-          </a:bodyPr>
-          <a:lstStyle/>
-          <a:p>
-            <a:pPr marL="177800" indent="0">
-              <a:spcAft>
-                <a:spcPts val="0"/>
-              </a:spcAft>
-              <a:buSzPct val="100000"/>
-              <a:buNone/>
-            </a:pPr>
-            <a:r>
-              <a:rPr lang="en-US" sz="1200" dirty="0">
-                <a:solidFill>
-                  <a:srgbClr val="000000"/>
-                </a:solidFill>
-                <a:latin typeface="Calibri" pitchFamily="34" charset="0"/>
-                <a:ea typeface="Calibri" pitchFamily="34" charset="-122"/>
-                <a:cs typeface="Calibri" pitchFamily="34" charset="-120"/>
-              </a:rPr>
-              <a:t xml:space="preserve">4.76 %</a:t>
-            </a:r>
-          </a:p>
-        </p:txBody>
-      </p:sp>
-      <p:sp>
-        <p:nvSpPr>
-          <p:cNvPr id="31" name="TextBox 30"/>
-          <p:cNvSpPr txBox="1"/>
-          <p:nvPr/>
-        </p:nvSpPr>
-        <p:spPr>
-          <a:xfrm>
-            <a:off x="5257800" y="3863339"/>
-            <a:ext cx="1097280" cy="274320"/>
-          </a:xfrm>
-          <a:prstGeom prst="rect">
-            <a:avLst/>
-          </a:prstGeom>
-          <a:noFill/>
-        </p:spPr>
-        <p:txBody>
-          <a:bodyPr wrap="square" lIns="0" tIns="0" rIns="0" bIns="0">
-            <a:spAutoFit/>
-          </a:bodyPr>
-          <a:lstStyle/>
-          <a:p>
-            <a:pPr marL="177800" indent="0">
-              <a:spcAft>
-                <a:spcPts val="0"/>
-              </a:spcAft>
-              <a:buSzPct val="100000"/>
-              <a:buNone/>
-            </a:pPr>
-            <a:r>
-              <a:rPr lang="en-US" sz="1200" dirty="0">
-                <a:solidFill>
-                  <a:srgbClr val="000000"/>
-                </a:solidFill>
-                <a:latin typeface="Calibri" pitchFamily="34" charset="0"/>
-                <a:ea typeface="Calibri" pitchFamily="34" charset="-122"/>
-                <a:cs typeface="Calibri" pitchFamily="34" charset="-120"/>
-              </a:rPr>
-              <a:t xml:space="preserve">−1.19</a:t>
-            </a:r>
-          </a:p>
-        </p:txBody>
-      </p:sp>
-      <p:sp>
-        <p:nvSpPr>
-          <p:cNvPr id="32" name="TextBox 31"/>
-          <p:cNvSpPr txBox="1"/>
-          <p:nvPr/>
-        </p:nvSpPr>
-        <p:spPr>
-          <a:xfrm>
-            <a:off x="640080" y="4169663"/>
-            <a:ext cx="3474720" cy="274320"/>
-          </a:xfrm>
-          <a:prstGeom prst="rect">
-            <a:avLst/>
-          </a:prstGeom>
-          <a:noFill/>
-        </p:spPr>
-        <p:txBody>
-          <a:bodyPr wrap="square" lIns="0" tIns="0" rIns="0" bIns="0">
-            <a:spAutoFit/>
-          </a:bodyPr>
-          <a:lstStyle/>
-          <a:p>
-            <a:pPr marL="177800" indent="0">
-              <a:spcAft>
-                <a:spcPts val="0"/>
-              </a:spcAft>
-              <a:buSzPct val="100000"/>
-              <a:buNone/>
-            </a:pPr>
-            <a:r>
-              <a:rPr lang="en-US" sz="1200" dirty="0">
-                <a:solidFill>
-                  <a:srgbClr val="000000"/>
-                </a:solidFill>
-                <a:latin typeface="Calibri" pitchFamily="34" charset="0"/>
-                <a:ea typeface="Calibri" pitchFamily="34" charset="-122"/>
-                <a:cs typeface="Calibri" pitchFamily="34" charset="-120"/>
-              </a:rPr>
-              <a:t xml:space="preserve">Transconductance −30 %</a:t>
-            </a:r>
-          </a:p>
-        </p:txBody>
-      </p:sp>
-      <p:sp>
-        <p:nvSpPr>
-          <p:cNvPr id="33" name="TextBox 32"/>
-          <p:cNvSpPr txBox="1"/>
-          <p:nvPr/>
-        </p:nvSpPr>
-        <p:spPr>
-          <a:xfrm>
-            <a:off x="4160520" y="4169663"/>
-            <a:ext cx="1005840" cy="274320"/>
-          </a:xfrm>
-          <a:prstGeom prst="rect">
-            <a:avLst/>
-          </a:prstGeom>
-          <a:noFill/>
-        </p:spPr>
-        <p:txBody>
-          <a:bodyPr wrap="square" lIns="0" tIns="0" rIns="0" bIns="0">
-            <a:spAutoFit/>
-          </a:bodyPr>
-          <a:lstStyle/>
-          <a:p>
-            <a:pPr marL="177800" indent="0">
-              <a:spcAft>
-                <a:spcPts val="0"/>
-              </a:spcAft>
-              <a:buSzPct val="100000"/>
-              <a:buNone/>
-            </a:pPr>
-            <a:r>
-              <a:rPr lang="en-US" sz="1200" dirty="0">
-                <a:solidFill>
-                  <a:srgbClr val="000000"/>
-                </a:solidFill>
-                <a:latin typeface="Calibri" pitchFamily="34" charset="0"/>
-                <a:ea typeface="Calibri" pitchFamily="34" charset="-122"/>
-                <a:cs typeface="Calibri" pitchFamily="34" charset="-120"/>
-              </a:rPr>
-              <a:t xml:space="preserve">4.45 %</a:t>
-            </a:r>
-          </a:p>
-        </p:txBody>
-      </p:sp>
-      <p:sp>
-        <p:nvSpPr>
-          <p:cNvPr id="34" name="TextBox 33"/>
-          <p:cNvSpPr txBox="1"/>
-          <p:nvPr/>
-        </p:nvSpPr>
-        <p:spPr>
-          <a:xfrm>
-            <a:off x="5257800" y="4169663"/>
-            <a:ext cx="1097280" cy="274320"/>
-          </a:xfrm>
-          <a:prstGeom prst="rect">
-            <a:avLst/>
-          </a:prstGeom>
-          <a:noFill/>
-        </p:spPr>
-        <p:txBody>
-          <a:bodyPr wrap="square" lIns="0" tIns="0" rIns="0" bIns="0">
-            <a:spAutoFit/>
-          </a:bodyPr>
-          <a:lstStyle/>
-          <a:p>
-            <a:pPr marL="177800" indent="0">
-              <a:spcAft>
-                <a:spcPts val="0"/>
-              </a:spcAft>
-              <a:buSzPct val="100000"/>
-              <a:buNone/>
-            </a:pPr>
-            <a:r>
-              <a:rPr lang="en-US" sz="1200" dirty="0">
-                <a:solidFill>
-                  <a:srgbClr val="000000"/>
-                </a:solidFill>
-                <a:latin typeface="Calibri" pitchFamily="34" charset="0"/>
-                <a:ea typeface="Calibri" pitchFamily="34" charset="-122"/>
-                <a:cs typeface="Calibri" pitchFamily="34" charset="-120"/>
-              </a:rPr>
-              <a:t xml:space="preserve">−1.49</a:t>
-            </a:r>
-          </a:p>
-        </p:txBody>
-      </p:sp>
-      <p:sp>
-        <p:nvSpPr>
-          <p:cNvPr id="35" name="TextBox 34"/>
-          <p:cNvSpPr txBox="1"/>
-          <p:nvPr/>
-        </p:nvSpPr>
-        <p:spPr>
-          <a:xfrm>
-            <a:off x="640080" y="4475988"/>
-            <a:ext cx="3474720" cy="274320"/>
-          </a:xfrm>
-          <a:prstGeom prst="rect">
-            <a:avLst/>
-          </a:prstGeom>
-          <a:noFill/>
-        </p:spPr>
-        <p:txBody>
-          <a:bodyPr wrap="square" lIns="0" tIns="0" rIns="0" bIns="0">
-            <a:spAutoFit/>
-          </a:bodyPr>
-          <a:lstStyle/>
-          <a:p>
-            <a:pPr marL="177800" indent="0">
-              <a:spcAft>
-                <a:spcPts val="0"/>
-              </a:spcAft>
-              <a:buSzPct val="100000"/>
-              <a:buNone/>
-            </a:pPr>
-            <a:r>
-              <a:rPr lang="en-US" sz="1200" dirty="0">
-                <a:solidFill>
-                  <a:srgbClr val="000000"/>
-                </a:solidFill>
-                <a:latin typeface="Calibri" pitchFamily="34" charset="0"/>
-                <a:ea typeface="Calibri" pitchFamily="34" charset="-122"/>
-                <a:cs typeface="Calibri" pitchFamily="34" charset="-120"/>
-              </a:rPr>
-              <a:t xml:space="preserve">Miller capacitance +50 %</a:t>
-            </a:r>
-          </a:p>
-        </p:txBody>
-      </p:sp>
-      <p:sp>
-        <p:nvSpPr>
-          <p:cNvPr id="36" name="TextBox 35"/>
-          <p:cNvSpPr txBox="1"/>
-          <p:nvPr/>
-        </p:nvSpPr>
-        <p:spPr>
-          <a:xfrm>
-            <a:off x="4160520" y="4475988"/>
-            <a:ext cx="1005840" cy="274320"/>
-          </a:xfrm>
-          <a:prstGeom prst="rect">
-            <a:avLst/>
-          </a:prstGeom>
-          <a:noFill/>
-        </p:spPr>
-        <p:txBody>
-          <a:bodyPr wrap="square" lIns="0" tIns="0" rIns="0" bIns="0">
-            <a:spAutoFit/>
-          </a:bodyPr>
-          <a:lstStyle/>
-          <a:p>
-            <a:pPr marL="177800" indent="0">
-              <a:spcAft>
-                <a:spcPts val="0"/>
-              </a:spcAft>
-              <a:buSzPct val="100000"/>
-              <a:buNone/>
-            </a:pPr>
-            <a:r>
-              <a:rPr lang="en-US" sz="1200" dirty="0">
-                <a:solidFill>
-                  <a:srgbClr val="000000"/>
-                </a:solidFill>
-                <a:latin typeface="Calibri" pitchFamily="34" charset="0"/>
-                <a:ea typeface="Calibri" pitchFamily="34" charset="-122"/>
-                <a:cs typeface="Calibri" pitchFamily="34" charset="-120"/>
-              </a:rPr>
-              <a:t xml:space="preserve">4.32 %</a:t>
-            </a:r>
-          </a:p>
-        </p:txBody>
-      </p:sp>
-      <p:sp>
-        <p:nvSpPr>
-          <p:cNvPr id="37" name="TextBox 36"/>
-          <p:cNvSpPr txBox="1"/>
-          <p:nvPr/>
-        </p:nvSpPr>
-        <p:spPr>
-          <a:xfrm>
-            <a:off x="5257800" y="4475988"/>
-            <a:ext cx="1097280" cy="274320"/>
-          </a:xfrm>
-          <a:prstGeom prst="rect">
-            <a:avLst/>
-          </a:prstGeom>
-          <a:noFill/>
-        </p:spPr>
-        <p:txBody>
-          <a:bodyPr wrap="square" lIns="0" tIns="0" rIns="0" bIns="0">
-            <a:spAutoFit/>
-          </a:bodyPr>
-          <a:lstStyle/>
-          <a:p>
-            <a:pPr marL="177800" indent="0">
-              <a:spcAft>
-                <a:spcPts val="0"/>
-              </a:spcAft>
-              <a:buSzPct val="100000"/>
-              <a:buNone/>
-            </a:pPr>
-            <a:r>
-              <a:rPr lang="en-US" sz="1200" dirty="0">
-                <a:solidFill>
-                  <a:srgbClr val="000000"/>
-                </a:solidFill>
-                <a:latin typeface="Calibri" pitchFamily="34" charset="0"/>
-                <a:ea typeface="Calibri" pitchFamily="34" charset="-122"/>
-                <a:cs typeface="Calibri" pitchFamily="34" charset="-120"/>
-              </a:rPr>
-              <a:t xml:space="preserve">−1.63</a:t>
-            </a:r>
-          </a:p>
-        </p:txBody>
-      </p:sp>
-      <p:sp>
-        <p:nvSpPr>
-          <p:cNvPr id="38" name="TextBox 37"/>
-          <p:cNvSpPr txBox="1"/>
-          <p:nvPr/>
-        </p:nvSpPr>
-        <p:spPr>
-          <a:xfrm>
-            <a:off x="640080" y="4782312"/>
-            <a:ext cx="3474720" cy="274320"/>
-          </a:xfrm>
-          <a:prstGeom prst="rect">
-            <a:avLst/>
-          </a:prstGeom>
-          <a:noFill/>
-        </p:spPr>
-        <p:txBody>
-          <a:bodyPr wrap="square" lIns="0" tIns="0" rIns="0" bIns="0">
-            <a:spAutoFit/>
-          </a:bodyPr>
-          <a:lstStyle/>
-          <a:p>
-            <a:pPr marL="177800" indent="0">
-              <a:spcAft>
-                <a:spcPts val="0"/>
-              </a:spcAft>
-              <a:buSzPct val="100000"/>
-              <a:buNone/>
-            </a:pPr>
-            <a:r>
-              <a:rPr lang="en-US" sz="1200" b="1" dirty="0">
-                <a:solidFill>
-                  <a:srgbClr val="000000"/>
-                </a:solidFill>
-                <a:latin typeface="Calibri" pitchFamily="34" charset="0"/>
-                <a:ea typeface="Calibri" pitchFamily="34" charset="-122"/>
-                <a:cs typeface="Calibri" pitchFamily="34" charset="-120"/>
-              </a:rPr>
-              <a:t xml:space="preserve">Loop inductance +50 %  (4.5 nH)</a:t>
-            </a:r>
-          </a:p>
-        </p:txBody>
-      </p:sp>
-      <p:sp>
-        <p:nvSpPr>
-          <p:cNvPr id="39" name="TextBox 38"/>
-          <p:cNvSpPr txBox="1"/>
-          <p:nvPr/>
-        </p:nvSpPr>
-        <p:spPr>
-          <a:xfrm>
-            <a:off x="4160520" y="4782312"/>
-            <a:ext cx="1005840" cy="274320"/>
-          </a:xfrm>
-          <a:prstGeom prst="rect">
-            <a:avLst/>
-          </a:prstGeom>
-          <a:noFill/>
-        </p:spPr>
-        <p:txBody>
-          <a:bodyPr wrap="square" lIns="0" tIns="0" rIns="0" bIns="0">
-            <a:spAutoFit/>
-          </a:bodyPr>
-          <a:lstStyle/>
-          <a:p>
-            <a:pPr marL="177800" indent="0">
-              <a:spcAft>
-                <a:spcPts val="0"/>
-              </a:spcAft>
-              <a:buSzPct val="100000"/>
-              <a:buNone/>
-            </a:pPr>
-            <a:r>
-              <a:rPr lang="en-US" sz="1200" b="1" dirty="0">
-                <a:solidFill>
-                  <a:srgbClr val="000000"/>
-                </a:solidFill>
-                <a:latin typeface="Calibri" pitchFamily="34" charset="0"/>
-                <a:ea typeface="Calibri" pitchFamily="34" charset="-122"/>
-                <a:cs typeface="Calibri" pitchFamily="34" charset="-120"/>
-              </a:rPr>
-              <a:t xml:space="preserve">0.55 %</a:t>
-            </a:r>
-          </a:p>
-        </p:txBody>
-      </p:sp>
-      <p:sp>
-        <p:nvSpPr>
-          <p:cNvPr id="40" name="TextBox 39"/>
-          <p:cNvSpPr txBox="1"/>
-          <p:nvPr/>
-        </p:nvSpPr>
-        <p:spPr>
-          <a:xfrm>
-            <a:off x="5257800" y="4782312"/>
-            <a:ext cx="1097280" cy="274320"/>
-          </a:xfrm>
-          <a:prstGeom prst="rect">
-            <a:avLst/>
-          </a:prstGeom>
-          <a:noFill/>
-        </p:spPr>
-        <p:txBody>
-          <a:bodyPr wrap="square" lIns="0" tIns="0" rIns="0" bIns="0">
-            <a:spAutoFit/>
-          </a:bodyPr>
-          <a:lstStyle/>
-          <a:p>
-            <a:pPr marL="177800" indent="0">
-              <a:spcAft>
-                <a:spcPts val="0"/>
-              </a:spcAft>
-              <a:buSzPct val="100000"/>
-              <a:buNone/>
-            </a:pPr>
-            <a:r>
-              <a:rPr lang="en-US" sz="1200" dirty="0">
-                <a:solidFill>
-                  <a:srgbClr val="000000"/>
-                </a:solidFill>
-                <a:latin typeface="Calibri" pitchFamily="34" charset="0"/>
-                <a:ea typeface="Calibri" pitchFamily="34" charset="-122"/>
-                <a:cs typeface="Calibri" pitchFamily="34" charset="-120"/>
-              </a:rPr>
-              <a:t xml:space="preserve">−5.39</a:t>
-            </a:r>
-          </a:p>
-        </p:txBody>
-      </p:sp>
-      <p:sp>
-        <p:nvSpPr>
-          <p:cNvPr id="41" name="TextBox 40"/>
-          <p:cNvSpPr txBox="1"/>
-          <p:nvPr/>
-        </p:nvSpPr>
-        <p:spPr>
-          <a:xfrm>
-            <a:off x="6903720" y="1325880"/>
-            <a:ext cx="4617720" cy="548640"/>
-          </a:xfrm>
-          <a:prstGeom prst="rect">
-            <a:avLst/>
-          </a:prstGeom>
-          <a:noFill/>
-        </p:spPr>
-        <p:txBody>
-          <a:bodyPr wrap="square" lIns="0" tIns="0" rIns="0" bIns="0">
-            <a:spAutoFit/>
-          </a:bodyPr>
-          <a:lstStyle/>
-          <a:p>
-            <a:pPr marL="177800" indent="0">
-              <a:spcAft>
-                <a:spcPts val="0"/>
-              </a:spcAft>
-              <a:buSzPct val="100000"/>
-              <a:buNone/>
-            </a:pPr>
-            <a:r>
-              <a:rPr lang="en-US" sz="1500" b="1" dirty="0">
-                <a:solidFill>
-                  <a:srgbClr val="000000"/>
-                </a:solidFill>
-                <a:latin typeface="Calibri" pitchFamily="34" charset="0"/>
-                <a:ea typeface="Calibri" pitchFamily="34" charset="-122"/>
-                <a:cs typeface="Calibri" pitchFamily="34" charset="-120"/>
-              </a:rPr>
-              <a:t xml:space="preserve">Robust to the device,</a:t>
-            </a:r>
-          </a:p>
-          <a:p>
-            <a:pPr marL="177800" indent="0">
-              <a:spcAft>
-                <a:spcPts val="0"/>
-              </a:spcAft>
-              <a:buSzPct val="100000"/>
-              <a:buNone/>
-            </a:pPr>
-            <a:r>
-              <a:rPr lang="en-US" sz="1500" b="1" dirty="0">
-                <a:solidFill>
-                  <a:srgbClr val="000000"/>
-                </a:solidFill>
-                <a:latin typeface="Calibri" pitchFamily="34" charset="0"/>
-                <a:ea typeface="Calibri" pitchFamily="34" charset="-122"/>
-                <a:cs typeface="Calibri" pitchFamily="34" charset="-120"/>
-              </a:rPr>
-              <a:t xml:space="preserve">conditional on the layout.</a:t>
-            </a:r>
-          </a:p>
-        </p:txBody>
-      </p:sp>
-      <p:sp>
-        <p:nvSpPr>
-          <p:cNvPr id="42" name="TextBox 41"/>
-          <p:cNvSpPr txBox="1"/>
-          <p:nvPr/>
-        </p:nvSpPr>
-        <p:spPr>
-          <a:xfrm>
-            <a:off x="6903720" y="2057400"/>
-            <a:ext cx="4617720" cy="4114800"/>
-          </a:xfrm>
-          <a:prstGeom prst="rect">
-            <a:avLst/>
-          </a:prstGeom>
-          <a:noFill/>
-        </p:spPr>
-        <p:txBody>
-          <a:bodyPr wrap="square" lIns="0" tIns="0" rIns="0" bIns="0">
-            <a:spAutoFit/>
-          </a:bodyPr>
-          <a:lstStyle/>
-          <a:p>
-            <a:pPr marL="177800" indent="-177800">
-              <a:spcAft>
-                <a:spcPts val="200"/>
-              </a:spcAft>
-              <a:buSzPct val="100000"/>
-              <a:buChar char="•"/>
-            </a:pPr>
-            <a:r>
-              <a:rPr lang="en-US" sz="1300" b="1" dirty="0">
-                <a:solidFill>
-                  <a:srgbClr val="000000"/>
-                </a:solidFill>
-                <a:latin typeface="Calibri" pitchFamily="34" charset="0"/>
-                <a:ea typeface="Calibri" pitchFamily="34" charset="-122"/>
-                <a:cs typeface="Calibri" pitchFamily="34" charset="-120"/>
-              </a:rPr>
-              <a:t xml:space="preserve">21,600 transients</a:t>
-            </a:r>
-            <a:r>
-              <a:rPr lang="en-US" sz="1300" dirty="0">
-                <a:solidFill>
-                  <a:srgbClr val="000000"/>
-                </a:solidFill>
-                <a:latin typeface="Calibri" pitchFamily="34" charset="0"/>
-                <a:ea typeface="Calibri" pitchFamily="34" charset="-122"/>
-                <a:cs typeface="Calibri" pitchFamily="34" charset="-120"/>
-              </a:rPr>
-              <a:t xml:space="preserve"> — a full 720-word search at two corners under each of eleven single-parameter perturbations. One failure.</a:t>
-            </a:r>
-          </a:p>
-          <a:p>
-            <a:pPr marL="177800" indent="-177800">
-              <a:spcAft>
-                <a:spcPts val="200"/>
-              </a:spcAft>
-              <a:buSzPct val="100000"/>
-              <a:buChar char="•"/>
-            </a:pPr>
-            <a:r>
-              <a:rPr lang="en-US" sz="1300" dirty="0">
-                <a:solidFill>
-                  <a:srgbClr val="000000"/>
-                </a:solidFill>
-                <a:latin typeface="Calibri" pitchFamily="34" charset="0"/>
-                <a:ea typeface="Calibri" pitchFamily="34" charset="-122"/>
-                <a:cs typeface="Calibri" pitchFamily="34" charset="-120"/>
-              </a:rPr>
-              <a:t xml:space="preserve">Every </a:t>
-            </a:r>
-            <a:r>
-              <a:rPr lang="en-US" sz="1300" b="1" dirty="0">
-                <a:solidFill>
-                  <a:srgbClr val="000000"/>
-                </a:solidFill>
-                <a:latin typeface="Calibri" pitchFamily="34" charset="0"/>
-                <a:ea typeface="Calibri" pitchFamily="34" charset="-122"/>
-                <a:cs typeface="Calibri" pitchFamily="34" charset="-120"/>
-              </a:rPr>
-              <a:t xml:space="preserve">device</a:t>
-            </a:r>
-            <a:r>
-              <a:rPr lang="en-US" sz="1300" dirty="0">
-                <a:solidFill>
-                  <a:srgbClr val="000000"/>
-                </a:solidFill>
-                <a:latin typeface="Calibri" pitchFamily="34" charset="0"/>
-                <a:ea typeface="Calibri" pitchFamily="34" charset="-122"/>
-                <a:cs typeface="Calibri" pitchFamily="34" charset="-120"/>
-              </a:rPr>
-              <a:t xml:space="preserve"> parameter leaves the ceiling between 4.3 % and 7.7 % — at most 1.76 points from nominal. The objection this study was built to answer is not supported.</a:t>
-            </a:r>
-          </a:p>
-          <a:p>
-            <a:pPr marL="177800" indent="-177800">
-              <a:spcAft>
-                <a:spcPts val="200"/>
-              </a:spcAft>
-              <a:buSzPct val="100000"/>
-              <a:buChar char="•"/>
-            </a:pPr>
-            <a:r>
-              <a:rPr lang="en-US" sz="1300" dirty="0">
-                <a:solidFill>
-                  <a:srgbClr val="000000"/>
-                </a:solidFill>
-                <a:latin typeface="Calibri" pitchFamily="34" charset="0"/>
-                <a:ea typeface="Calibri" pitchFamily="34" charset="-122"/>
-                <a:cs typeface="Calibri" pitchFamily="34" charset="-120"/>
-              </a:rPr>
-              <a:t xml:space="preserve">The one thing that moves it is </a:t>
-            </a:r>
-            <a:r>
-              <a:rPr lang="en-US" sz="1300" b="1" dirty="0">
-                <a:solidFill>
-                  <a:srgbClr val="000000"/>
-                </a:solidFill>
-                <a:latin typeface="Calibri" pitchFamily="34" charset="0"/>
-                <a:ea typeface="Calibri" pitchFamily="34" charset="-122"/>
-                <a:cs typeface="Calibri" pitchFamily="34" charset="-120"/>
-              </a:rPr>
-              <a:t xml:space="preserve">loop inductance</a:t>
-            </a:r>
-            <a:r>
-              <a:rPr lang="en-US" sz="1300" dirty="0">
-                <a:solidFill>
-                  <a:srgbClr val="000000"/>
-                </a:solidFill>
-                <a:latin typeface="Calibri" pitchFamily="34" charset="0"/>
-                <a:ea typeface="Calibri" pitchFamily="34" charset="-122"/>
-                <a:cs typeface="Calibri" pitchFamily="34" charset="-120"/>
-              </a:rPr>
-              <a:t xml:space="preserve">, which is board layout, not the transistor. A tighter loop commutates faster, so more charge couples through C</a:t>
-            </a:r>
-            <a:r>
-              <a:rPr lang="en-US" sz="1300" dirty="0">
-                <a:solidFill>
-                  <a:srgbClr val="000000"/>
-                </a:solidFill>
-                <a:latin typeface="Calibri" pitchFamily="34" charset="0"/>
-                <a:ea typeface="Calibri" pitchFamily="34" charset="-122"/>
-                <a:cs typeface="Calibri" pitchFamily="34" charset="-120"/>
-              </a:rPr>
-              <a:t xml:space="preserve">GD</a:t>
-            </a:r>
-            <a:r>
-              <a:rPr lang="en-US" sz="1300" dirty="0">
-                <a:solidFill>
-                  <a:srgbClr val="000000"/>
-                </a:solidFill>
-                <a:latin typeface="Calibri" pitchFamily="34" charset="0"/>
-                <a:ea typeface="Calibri" pitchFamily="34" charset="-122"/>
-                <a:cs typeface="Calibri" pitchFamily="34" charset="-120"/>
-              </a:rPr>
-              <a:t xml:space="preserve">: the median spurious gate voltage goes 0.640 V to 3.522 V and the feasible set collapses 474 → 158.</a:t>
-            </a:r>
-          </a:p>
-          <a:p>
-            <a:pPr marL="177800" indent="-177800">
-              <a:spcAft>
-                <a:spcPts val="200"/>
-              </a:spcAft>
-              <a:buSzPct val="100000"/>
-              <a:buChar char="•"/>
-            </a:pPr>
-            <a:r>
-              <a:rPr lang="en-US" sz="1300" dirty="0">
-                <a:solidFill>
-                  <a:srgbClr val="000000"/>
-                </a:solidFill>
-                <a:latin typeface="Calibri" pitchFamily="34" charset="0"/>
-                <a:ea typeface="Calibri" pitchFamily="34" charset="-122"/>
-                <a:cs typeface="Calibri" pitchFamily="34" charset="-120"/>
-              </a:rPr>
-              <a:t xml:space="preserve">So the claim is narrower and more useful than “robust”: from about 2.5 nH upward a fixed word is nearly as good; on a tighter loop the question has to be re-asked, and the answer there is not even monotonic — see slide 19.</a:t>
-            </a:r>
-          </a:p>
-          <a:p>
-            <a:pPr marL="177800" indent="-177800">
-              <a:spcAft>
-                <a:spcPts val="0"/>
-              </a:spcAft>
-              <a:buSzPct val="100000"/>
-              <a:buChar char="•"/>
-            </a:pPr>
-            <a:r>
-              <a:rPr lang="en-US" sz="1150" b="1" dirty="0">
-                <a:solidFill>
-                  <a:srgbClr val="000000"/>
-                </a:solidFill>
-                <a:latin typeface="Calibri" pitchFamily="34" charset="0"/>
-                <a:ea typeface="Calibri" pitchFamily="34" charset="-122"/>
-                <a:cs typeface="Calibri" pitchFamily="34" charset="-120"/>
-              </a:rPr>
-              <a:t xml:space="preserve">Baseline note. </a:t>
-            </a:r>
-            <a:r>
-              <a:rPr lang="en-US" sz="1150" dirty="0">
-                <a:solidFill>
-                  <a:srgbClr val="000000"/>
-                </a:solidFill>
-                <a:latin typeface="Calibri" pitchFamily="34" charset="0"/>
-                <a:ea typeface="Calibri" pitchFamily="34" charset="-122"/>
-                <a:cs typeface="Calibri" pitchFamily="34" charset="-120"/>
-              </a:rPr>
-              <a:t xml:space="preserve">Nominal here is 5.95 %, not the 5.2 % headline — a two-corner search on its own sweep. Compare the </a:t>
-            </a:r>
-            <a:r>
-              <a:rPr lang="en-US" sz="1150" b="1" dirty="0">
-                <a:solidFill>
-                  <a:srgbClr val="000000"/>
-                </a:solidFill>
-                <a:latin typeface="Calibri" pitchFamily="34" charset="0"/>
-                <a:ea typeface="Calibri" pitchFamily="34" charset="-122"/>
-                <a:cs typeface="Calibri" pitchFamily="34" charset="-120"/>
-              </a:rPr>
-              <a:t xml:space="preserve">vs nom.</a:t>
-            </a:r>
-            <a:r>
-              <a:rPr lang="en-US" sz="1150" dirty="0">
-                <a:solidFill>
-                  <a:srgbClr val="000000"/>
-                </a:solidFill>
-                <a:latin typeface="Calibri" pitchFamily="34" charset="0"/>
-                <a:ea typeface="Calibri" pitchFamily="34" charset="-122"/>
-                <a:cs typeface="Calibri" pitchFamily="34" charset="-120"/>
-              </a:rPr>
-              <a:t xml:space="preserve"> column, not the absolute values.</a:t>
+              <a:t xml:space="preserve"/>
             </a:r>
           </a:p>
         </p:txBody>

--- a/review/Review1_GaN_Segmented_Gate_Driver.pptx
+++ b/review/Review1_GaN_Segmented_Gate_Driver.pptx
@@ -11,36 +11,35 @@
     <p:sldId id="256" r:id="rId2"/>
     <p:sldId id="257" r:id="rId3"/>
     <p:sldId id="258" r:id="rId4"/>
-    <p:sldId id="285" r:id="rId36"/>
+    <p:sldId id="284" r:id="rId35"/>
     <p:sldId id="259" r:id="rId5"/>
     <p:sldId id="260" r:id="rId6"/>
     <p:sldId id="267" r:id="rId18"/>
+    <p:sldId id="282" r:id="rId33"/>
+    <p:sldId id="285" r:id="rId36"/>
+    <p:sldId id="261" r:id="rId7"/>
+    <p:sldId id="280" r:id="rId31"/>
+    <p:sldId id="274" r:id="rId25"/>
+    <p:sldId id="278" r:id="rId29"/>
+    <p:sldId id="277" r:id="rId28"/>
     <p:sldId id="283" r:id="rId34"/>
-    <p:sldId id="286" r:id="rId37"/>
-    <p:sldId id="261" r:id="rId7"/>
-    <p:sldId id="281" r:id="rId32"/>
-    <p:sldId id="274" r:id="rId25"/>
-    <p:sldId id="279" r:id="rId30"/>
-    <p:sldId id="277" r:id="rId28"/>
-    <p:sldId id="284" r:id="rId35"/>
-    <p:sldId id="278" r:id="rId29"/>
     <p:sldId id="262" r:id="rId8"/>
     <p:sldId id="272" r:id="rId23"/>
-    <p:sldId id="282" r:id="rId33"/>
+    <p:sldId id="281" r:id="rId32"/>
     <p:sldId id="273" r:id="rId24"/>
-    <p:sldId id="287" r:id="rId38"/>
+    <p:sldId id="286" r:id="rId37"/>
     <p:sldId id="263" r:id="rId9"/>
-    <p:sldId id="280" r:id="rId31"/>
     <p:sldId id="275" r:id="rId26"/>
+    <p:sldId id="279" r:id="rId30"/>
     <p:sldId id="276" r:id="rId27"/>
     <p:sldId id="264" r:id="rId10"/>
     <p:sldId id="268" r:id="rId19"/>
     <p:sldId id="269" r:id="rId20"/>
     <p:sldId id="270" r:id="rId21"/>
-    <p:sldId id="288" r:id="rId39"/>
+    <p:sldId id="287" r:id="rId38"/>
     <p:sldId id="271" r:id="rId22"/>
     <p:sldId id="265" r:id="rId11"/>
-    <p:sldId id="289" r:id="rId40"/>
+    <p:sldId id="288" r:id="rId39"/>
     <p:sldId id="266" r:id="rId12"/>
   </p:sldIdLst>
   <p:sldSz cx="12192000" cy="6858000"/>
@@ -1151,7 +1150,7 @@
           <a:lstStyle/>
           <a:p>
             <a:r>
-              <a:t>[35 s]  CORE — the comparison the panel will ask for. Land three rows and move on: we go from ONE field to six (720 words); from selected codes to an EXHAUSTIVE search; and from one bundled number to the number SPLIT into fixed versus adaptive. Be honest if pushed: we have NOT re-run [9]'s SiC experiment, so this is a comparison of method and scope, not a claim that we beat their result on their metric. That replication is the next step.</a:t>
+              <a:t>[30 s]  CORE — use this the moment anyone asks what was actually simulated. Trace the red path with a finger: Q1 switches, the SW node moves, charge couples through C_GD into Q2's gate, and Q2 turns on when it should be off. Then point at the clamp and the off-bias mux — those are the two things that fix it. Do not read the component values out.</a:t>
             </a:r>
           </a:p>
         </p:txBody>
@@ -1165,52 +1164,6 @@
 </file>
 
 <file path=ppt/notesSlides/notesSlide24.xml><?xml version="1.0" encoding="utf-8"?>
-<p:notes xmlns:a="http://schemas.openxmlformats.org/drawingml/2006/main" xmlns:p="http://schemas.openxmlformats.org/presentationml/2006/main" xmlns:r="http://schemas.openxmlformats.org/officeDocument/2006/relationships">
-  <p:cSld>
-    <p:spTree>
-      <p:nvGrpSpPr>
-        <p:cNvPr id="1" name=""/>
-        <p:cNvGrpSpPr/>
-        <p:nvPr/>
-      </p:nvGrpSpPr>
-      <p:grpSpPr>
-        <a:xfrm>
-          <a:off x="0" y="0"/>
-          <a:ext cx="0" cy="0"/>
-          <a:chOff x="0" y="0"/>
-          <a:chExt cx="0" cy="0"/>
-        </a:xfrm>
-      </p:grpSpPr>
-      <p:sp>
-        <p:nvSpPr>
-          <p:cNvPr id="99" name="Notes Placeholder"/>
-          <p:cNvSpPr>
-            <a:spLocks noGrp="1"/>
-          </p:cNvSpPr>
-          <p:nvPr>
-            <p:ph type="body" idx="1"/>
-          </p:nvPr>
-        </p:nvSpPr>
-        <p:spPr/>
-        <p:txBody>
-          <a:bodyPr/>
-          <a:lstStyle/>
-          <a:p>
-            <a:r>
-              <a:t>[30 s]  CORE — use this the moment anyone asks what was actually simulated. Trace the red path with a finger: Q1 switches, the SW node moves, charge couples through C_GD into Q2's gate, and Q2 turns on when it should be off. Then point at the clamp and the off-bias mux — those are the two things that fix it. Do not read the component values out.</a:t>
-            </a:r>
-          </a:p>
-        </p:txBody>
-      </p:sp>
-    </p:spTree>
-  </p:cSld>
-  <p:clrMapOvr>
-    <a:masterClrMapping/>
-  </p:clrMapOvr>
-</p:notes>
-</file>
-
-<file path=ppt/notesSlides/notesSlide25.xml><?xml version="1.0" encoding="utf-8"?>
 <p:notes xmlns:a="http://schemas.openxmlformats.org/drawingml/2006/main" xmlns:p="http://schemas.openxmlformats.org/presentationml/2006/main" xmlns:r="http://schemas.openxmlformats.org/officeDocument/2006/relationships">
   <p:cSld>
     <p:spTree>
@@ -2469,7 +2422,7 @@
                 <a:ea typeface="Calibri" pitchFamily="34" charset="-122"/>
                 <a:cs typeface="Calibri" pitchFamily="34" charset="-120"/>
               </a:rPr>
-              <a:t>18</a:t>
+              <a:t>17</a:t>
             </a:r>
             <a:endParaRPr lang="en-US" sz="1000" dirty="0"/>
           </a:p>
@@ -2852,7 +2805,7 @@
                 <a:ea typeface="Calibri" pitchFamily="34" charset="-122"/>
                 <a:cs typeface="Calibri" pitchFamily="34" charset="-120"/>
               </a:rPr>
-              <a:t>20</a:t>
+              <a:t>19</a:t>
             </a:r>
             <a:endParaRPr lang="en-US" sz="1000" dirty="0"/>
           </a:p>
@@ -3275,7 +3228,7 @@
                 <a:ea typeface="Calibri" pitchFamily="34" charset="-122"/>
                 <a:cs typeface="Calibri" pitchFamily="34" charset="-120"/>
               </a:rPr>
-              <a:t>22</a:t>
+              <a:t>21</a:t>
             </a:r>
             <a:endParaRPr lang="en-US" sz="1000" dirty="0"/>
           </a:p>
@@ -3791,7 +3744,7 @@
                 <a:ea typeface="Calibri" pitchFamily="34" charset="-122"/>
                 <a:cs typeface="Calibri" pitchFamily="34" charset="-120"/>
               </a:rPr>
-              <a:t>24</a:t>
+              <a:t>22</a:t>
             </a:r>
             <a:endParaRPr lang="en-US" sz="1000" dirty="0"/>
           </a:p>
@@ -4375,7 +4328,7 @@
                 <a:ea typeface="Calibri" pitchFamily="34" charset="-122"/>
                 <a:cs typeface="Calibri" pitchFamily="34" charset="-120"/>
               </a:rPr>
-              <a:t>25</a:t>
+              <a:t>24</a:t>
             </a:r>
             <a:endParaRPr lang="en-US" sz="1000" dirty="0"/>
           </a:p>
@@ -5179,7 +5132,7 @@
                 <a:ea typeface="Calibri" pitchFamily="34" charset="-122"/>
                 <a:cs typeface="Calibri" pitchFamily="34" charset="-120"/>
               </a:rPr>
-              <a:t>26</a:t>
+              <a:t>25</a:t>
             </a:r>
             <a:endParaRPr lang="en-US" sz="1000" dirty="0"/>
           </a:p>
@@ -5425,7 +5378,7 @@
                 <a:ea typeface="Calibri" pitchFamily="34" charset="-122"/>
                 <a:cs typeface="Calibri" pitchFamily="34" charset="-120"/>
               </a:rPr>
-              <a:t>27</a:t>
+              <a:t>26</a:t>
             </a:r>
             <a:endParaRPr lang="en-US" sz="1000" dirty="0"/>
           </a:p>
@@ -7404,7 +7357,7 @@
                 <a:ea typeface="Calibri" pitchFamily="34" charset="-122"/>
                 <a:cs typeface="Calibri" pitchFamily="34" charset="-120"/>
               </a:rPr>
-              <a:t>28</a:t>
+              <a:t>27</a:t>
             </a:r>
             <a:endParaRPr lang="en-US" sz="1000" dirty="0"/>
           </a:p>
@@ -7846,7 +7799,7 @@
                 <a:ea typeface="Calibri" pitchFamily="34" charset="-122"/>
                 <a:cs typeface="Calibri" pitchFamily="34" charset="-120"/>
               </a:rPr>
-              <a:t>29</a:t>
+              <a:t>28</a:t>
             </a:r>
             <a:endParaRPr lang="en-US" sz="1000" dirty="0"/>
           </a:p>
@@ -8367,7 +8320,7 @@
                 <a:ea typeface="Calibri" pitchFamily="34" charset="-122"/>
                 <a:cs typeface="Calibri" pitchFamily="34" charset="-120"/>
               </a:rPr>
-              <a:t>31</a:t>
+              <a:t>30</a:t>
             </a:r>
             <a:endParaRPr lang="en-US" sz="1000" dirty="0"/>
           </a:p>
@@ -9616,7 +9569,7 @@
                 <a:ea typeface="Calibri" pitchFamily="34" charset="-122"/>
                 <a:cs typeface="Calibri" pitchFamily="34" charset="-120"/>
               </a:rPr>
-              <a:t>32</a:t>
+              <a:t>31</a:t>
             </a:r>
             <a:endParaRPr lang="en-US" sz="1000" dirty="0"/>
           </a:p>
@@ -10291,7 +10244,7 @@
                 <a:ea typeface="Calibri" pitchFamily="34" charset="-122"/>
                 <a:cs typeface="Calibri" pitchFamily="34" charset="-120"/>
               </a:rPr>
-              <a:t>34</a:t>
+              <a:t>33</a:t>
             </a:r>
             <a:endParaRPr lang="en-US" sz="1000" dirty="0"/>
           </a:p>
@@ -11767,7 +11720,7 @@
                 <a:ea typeface="Calibri" pitchFamily="34" charset="-122"/>
                 <a:cs typeface="Calibri" pitchFamily="34" charset="-120"/>
               </a:rPr>
-              <a:t>16</a:t>
+              <a:t>13</a:t>
             </a:r>
             <a:endParaRPr lang="en-US" sz="1000" dirty="0"/>
           </a:p>
@@ -11806,7 +11759,7 @@
                 <a:ea typeface="Calibri" pitchFamily="34" charset="-122"/>
                 <a:cs typeface="Calibri" pitchFamily="34" charset="-120"/>
               </a:rPr>
-              <a:t>Base paper vs this work — what we improve</a:t>
+              <a:t>The circuit that is simulated</a:t>
             </a:r>
             <a:endParaRPr lang="en-US" sz="2800" dirty="0"/>
           </a:p>
@@ -11836,16 +11789,40 @@
           </a:prstGeom>
         </p:spPr>
       </p:pic>
-      <p:sp>
-        <p:nvSpPr>
-          <p:cNvPr id="5" name="TextBox 4"/>
-          <p:cNvSpPr txBox="1"/>
-          <p:nvPr/>
-        </p:nvSpPr>
-        <p:spPr>
-          <a:xfrm>
-            <a:off x="640080" y="1115568"/>
-            <a:ext cx="10972800" cy="256032"/>
+      <p:pic>
+        <p:nvPicPr>
+          <p:cNvPr id="5" name="Picture 4" descr="fig_circuit.png"/>
+          <p:cNvPicPr>
+            <a:picLocks noChangeAspect="1"/>
+          </p:cNvPicPr>
+          <p:nvPr/>
+        </p:nvPicPr>
+        <p:blipFill>
+          <a:blip r:embed="rId4"/>
+          <a:stretch>
+            <a:fillRect/>
+          </a:stretch>
+        </p:blipFill>
+        <p:spPr>
+          <a:xfrm>
+            <a:off x="2029968" y="1115568"/>
+            <a:ext cx="8129016" cy="4434009"/>
+          </a:xfrm>
+          <a:prstGeom prst="rect">
+            <a:avLst/>
+          </a:prstGeom>
+        </p:spPr>
+      </p:pic>
+      <p:sp>
+        <p:nvSpPr>
+          <p:cNvPr id="6" name="TextBox 5"/>
+          <p:cNvSpPr txBox="1"/>
+          <p:nvPr/>
+        </p:nvSpPr>
+        <p:spPr>
+          <a:xfrm>
+            <a:off x="640080" y="5669280"/>
+            <a:ext cx="11064240" cy="777240"/>
           </a:xfrm>
           <a:prstGeom prst="rect">
             <a:avLst/>
@@ -11866,1081 +11843,6 @@
               <a:buNone/>
             </a:pPr>
             <a:r>
-              <a:rPr lang="en-US" sz="1150" dirty="0">
-                <a:solidFill>
-                  <a:srgbClr val="000000"/>
-                </a:solidFill>
-                <a:latin typeface="Calibri" pitchFamily="34" charset="0"/>
-                <a:ea typeface="Calibri" pitchFamily="34" charset="-122"/>
-                <a:cs typeface="Calibri" pitchFamily="34" charset="-120"/>
-              </a:rPr>
-              <a:t xml:space="preserve">Base paper [9]: Takayama &amp; Hikihara, Int. J. Circuit Theory Appl., 50(1):183–196, 2022 — a gate waveform chosen by a multibit digital code.</a:t>
-            </a:r>
-          </a:p>
-        </p:txBody>
-      </p:sp>
-      <p:sp>
-        <p:nvSpPr>
-          <p:cNvPr id="6" name="TextBox 5"/>
-          <p:cNvSpPr txBox="1"/>
-          <p:nvPr/>
-        </p:nvSpPr>
-        <p:spPr>
-          <a:xfrm>
-            <a:off x="640080" y="1362456"/>
-            <a:ext cx="2377440" cy="274320"/>
-          </a:xfrm>
-          <a:prstGeom prst="rect">
-            <a:avLst/>
-          </a:prstGeom>
-          <a:noFill/>
-        </p:spPr>
-        <p:txBody>
-          <a:bodyPr wrap="square" lIns="0" tIns="0" rIns="0" bIns="0">
-            <a:spAutoFit/>
-          </a:bodyPr>
-          <a:lstStyle/>
-          <a:p>
-            <a:pPr marL="177800" indent="0">
-              <a:spcAft>
-                <a:spcPts val="0"/>
-              </a:spcAft>
-              <a:buSzPct val="100000"/>
-              <a:buNone/>
-            </a:pPr>
-            <a:r>
-              <a:rPr lang="en-US" sz="1150" b="1" dirty="0">
-                <a:solidFill>
-                  <a:srgbClr val="000000"/>
-                </a:solidFill>
-                <a:latin typeface="Calibri" pitchFamily="34" charset="0"/>
-                <a:ea typeface="Calibri" pitchFamily="34" charset="-122"/>
-                <a:cs typeface="Calibri" pitchFamily="34" charset="-120"/>
-              </a:rPr>
-              <a:t xml:space="preserve">Parameter</a:t>
-            </a:r>
-          </a:p>
-        </p:txBody>
-      </p:sp>
-      <p:sp>
-        <p:nvSpPr>
-          <p:cNvPr id="7" name="TextBox 6"/>
-          <p:cNvSpPr txBox="1"/>
-          <p:nvPr/>
-        </p:nvSpPr>
-        <p:spPr>
-          <a:xfrm>
-            <a:off x="3154680" y="1362456"/>
-            <a:ext cx="3154680" cy="274320"/>
-          </a:xfrm>
-          <a:prstGeom prst="rect">
-            <a:avLst/>
-          </a:prstGeom>
-          <a:noFill/>
-        </p:spPr>
-        <p:txBody>
-          <a:bodyPr wrap="square" lIns="0" tIns="0" rIns="0" bIns="0">
-            <a:spAutoFit/>
-          </a:bodyPr>
-          <a:lstStyle/>
-          <a:p>
-            <a:pPr marL="177800" indent="0">
-              <a:spcAft>
-                <a:spcPts val="0"/>
-              </a:spcAft>
-              <a:buSzPct val="100000"/>
-              <a:buNone/>
-            </a:pPr>
-            <a:r>
-              <a:rPr lang="en-US" sz="1150" b="1" dirty="0">
-                <a:solidFill>
-                  <a:srgbClr val="000000"/>
-                </a:solidFill>
-                <a:latin typeface="Calibri" pitchFamily="34" charset="0"/>
-                <a:ea typeface="Calibri" pitchFamily="34" charset="-122"/>
-                <a:cs typeface="Calibri" pitchFamily="34" charset="-120"/>
-              </a:rPr>
-              <a:t xml:space="preserve">Base paper [9]</a:t>
-            </a:r>
-          </a:p>
-        </p:txBody>
-      </p:sp>
-      <p:sp>
-        <p:nvSpPr>
-          <p:cNvPr id="8" name="TextBox 7"/>
-          <p:cNvSpPr txBox="1"/>
-          <p:nvPr/>
-        </p:nvSpPr>
-        <p:spPr>
-          <a:xfrm>
-            <a:off x="6446520" y="1362456"/>
-            <a:ext cx="5074920" cy="274320"/>
-          </a:xfrm>
-          <a:prstGeom prst="rect">
-            <a:avLst/>
-          </a:prstGeom>
-          <a:noFill/>
-        </p:spPr>
-        <p:txBody>
-          <a:bodyPr wrap="square" lIns="0" tIns="0" rIns="0" bIns="0">
-            <a:spAutoFit/>
-          </a:bodyPr>
-          <a:lstStyle/>
-          <a:p>
-            <a:pPr marL="177800" indent="0">
-              <a:spcAft>
-                <a:spcPts val="0"/>
-              </a:spcAft>
-              <a:buSzPct val="100000"/>
-              <a:buNone/>
-            </a:pPr>
-            <a:r>
-              <a:rPr lang="en-US" sz="1150" b="1" dirty="0">
-                <a:solidFill>
-                  <a:srgbClr val="000000"/>
-                </a:solidFill>
-                <a:latin typeface="Calibri" pitchFamily="34" charset="0"/>
-                <a:ea typeface="Calibri" pitchFamily="34" charset="-122"/>
-                <a:cs typeface="Calibri" pitchFamily="34" charset="-120"/>
-              </a:rPr>
-              <a:t xml:space="preserve">This work</a:t>
-            </a:r>
-          </a:p>
-        </p:txBody>
-      </p:sp>
-      <p:sp>
-        <p:nvSpPr>
-          <p:cNvPr id="9" name="TextBox 8"/>
-          <p:cNvSpPr txBox="1"/>
-          <p:nvPr/>
-        </p:nvSpPr>
-        <p:spPr>
-          <a:xfrm>
-            <a:off x="640080" y="1783080"/>
-            <a:ext cx="2423160" cy="457200"/>
-          </a:xfrm>
-          <a:prstGeom prst="rect">
-            <a:avLst/>
-          </a:prstGeom>
-          <a:noFill/>
-        </p:spPr>
-        <p:txBody>
-          <a:bodyPr wrap="square" lIns="0" tIns="0" rIns="0" bIns="0">
-            <a:spAutoFit/>
-          </a:bodyPr>
-          <a:lstStyle/>
-          <a:p>
-            <a:pPr marL="177800" indent="0">
-              <a:spcAft>
-                <a:spcPts val="0"/>
-              </a:spcAft>
-              <a:buSzPct val="100000"/>
-              <a:buNone/>
-            </a:pPr>
-            <a:r>
-              <a:rPr lang="en-US" sz="1050" b="1" dirty="0">
-                <a:solidFill>
-                  <a:srgbClr val="000000"/>
-                </a:solidFill>
-                <a:latin typeface="Calibri" pitchFamily="34" charset="0"/>
-                <a:ea typeface="Calibri" pitchFamily="34" charset="-122"/>
-                <a:cs typeface="Calibri" pitchFamily="34" charset="-120"/>
-              </a:rPr>
-              <a:t xml:space="preserve">Device</a:t>
-            </a:r>
-          </a:p>
-        </p:txBody>
-      </p:sp>
-      <p:sp>
-        <p:nvSpPr>
-          <p:cNvPr id="10" name="TextBox 9"/>
-          <p:cNvSpPr txBox="1"/>
-          <p:nvPr/>
-        </p:nvSpPr>
-        <p:spPr>
-          <a:xfrm>
-            <a:off x="3154680" y="1783080"/>
-            <a:ext cx="3200400" cy="457200"/>
-          </a:xfrm>
-          <a:prstGeom prst="rect">
-            <a:avLst/>
-          </a:prstGeom>
-          <a:noFill/>
-        </p:spPr>
-        <p:txBody>
-          <a:bodyPr wrap="square" lIns="0" tIns="0" rIns="0" bIns="0">
-            <a:spAutoFit/>
-          </a:bodyPr>
-          <a:lstStyle/>
-          <a:p>
-            <a:pPr marL="177800" indent="0">
-              <a:spcAft>
-                <a:spcPts val="0"/>
-              </a:spcAft>
-              <a:buSzPct val="100000"/>
-              <a:buNone/>
-            </a:pPr>
-            <a:r>
-              <a:rPr lang="en-US" sz="1050" dirty="0">
-                <a:solidFill>
-                  <a:srgbClr val="000000"/>
-                </a:solidFill>
-                <a:latin typeface="Calibri" pitchFamily="34" charset="0"/>
-                <a:ea typeface="Calibri" pitchFamily="34" charset="-122"/>
-                <a:cs typeface="Calibri" pitchFamily="34" charset="-120"/>
-              </a:rPr>
-              <a:t xml:space="preserve">SiC MOSFET</a:t>
-            </a:r>
-          </a:p>
-        </p:txBody>
-      </p:sp>
-      <p:sp>
-        <p:nvSpPr>
-          <p:cNvPr id="11" name="TextBox 10"/>
-          <p:cNvSpPr txBox="1"/>
-          <p:nvPr/>
-        </p:nvSpPr>
-        <p:spPr>
-          <a:xfrm>
-            <a:off x="6446520" y="1783080"/>
-            <a:ext cx="5120640" cy="457200"/>
-          </a:xfrm>
-          <a:prstGeom prst="rect">
-            <a:avLst/>
-          </a:prstGeom>
-          <a:noFill/>
-        </p:spPr>
-        <p:txBody>
-          <a:bodyPr wrap="square" lIns="0" tIns="0" rIns="0" bIns="0">
-            <a:spAutoFit/>
-          </a:bodyPr>
-          <a:lstStyle/>
-          <a:p>
-            <a:pPr marL="177800" indent="0">
-              <a:spcAft>
-                <a:spcPts val="0"/>
-              </a:spcAft>
-              <a:buSzPct val="100000"/>
-              <a:buNone/>
-            </a:pPr>
-            <a:r>
-              <a:rPr lang="en-US" sz="1050" dirty="0">
-                <a:solidFill>
-                  <a:srgbClr val="000000"/>
-                </a:solidFill>
-                <a:latin typeface="Calibri" pitchFamily="34" charset="0"/>
-                <a:ea typeface="Calibri" pitchFamily="34" charset="-122"/>
-                <a:cs typeface="Calibri" pitchFamily="34" charset="-120"/>
-              </a:rPr>
-              <a:t xml:space="preserve">GaN HEMT (e-mode)  —  no body diode, so off-bias costs third-quadrant drop</a:t>
-            </a:r>
-          </a:p>
-        </p:txBody>
-      </p:sp>
-      <p:sp>
-        <p:nvSpPr>
-          <p:cNvPr id="12" name="TextBox 11"/>
-          <p:cNvSpPr txBox="1"/>
-          <p:nvPr/>
-        </p:nvSpPr>
-        <p:spPr>
-          <a:xfrm>
-            <a:off x="640080" y="2331720"/>
-            <a:ext cx="2423160" cy="457200"/>
-          </a:xfrm>
-          <a:prstGeom prst="rect">
-            <a:avLst/>
-          </a:prstGeom>
-          <a:noFill/>
-        </p:spPr>
-        <p:txBody>
-          <a:bodyPr wrap="square" lIns="0" tIns="0" rIns="0" bIns="0">
-            <a:spAutoFit/>
-          </a:bodyPr>
-          <a:lstStyle/>
-          <a:p>
-            <a:pPr marL="177800" indent="0">
-              <a:spcAft>
-                <a:spcPts val="0"/>
-              </a:spcAft>
-              <a:buSzPct val="100000"/>
-              <a:buNone/>
-            </a:pPr>
-            <a:r>
-              <a:rPr lang="en-US" sz="1050" b="1" dirty="0">
-                <a:solidFill>
-                  <a:srgbClr val="000000"/>
-                </a:solidFill>
-                <a:latin typeface="Calibri" pitchFamily="34" charset="0"/>
-                <a:ea typeface="Calibri" pitchFamily="34" charset="-122"/>
-                <a:cs typeface="Calibri" pitchFamily="34" charset="-120"/>
-              </a:rPr>
-              <a:t xml:space="preserve">Control handle</a:t>
-            </a:r>
-          </a:p>
-        </p:txBody>
-      </p:sp>
-      <p:sp>
-        <p:nvSpPr>
-          <p:cNvPr id="13" name="TextBox 12"/>
-          <p:cNvSpPr txBox="1"/>
-          <p:nvPr/>
-        </p:nvSpPr>
-        <p:spPr>
-          <a:xfrm>
-            <a:off x="3154680" y="2331720"/>
-            <a:ext cx="3200400" cy="457200"/>
-          </a:xfrm>
-          <a:prstGeom prst="rect">
-            <a:avLst/>
-          </a:prstGeom>
-          <a:noFill/>
-        </p:spPr>
-        <p:txBody>
-          <a:bodyPr wrap="square" lIns="0" tIns="0" rIns="0" bIns="0">
-            <a:spAutoFit/>
-          </a:bodyPr>
-          <a:lstStyle/>
-          <a:p>
-            <a:pPr marL="177800" indent="0">
-              <a:spcAft>
-                <a:spcPts val="0"/>
-              </a:spcAft>
-              <a:buSzPct val="100000"/>
-              <a:buNone/>
-            </a:pPr>
-            <a:r>
-              <a:rPr lang="en-US" sz="1050" dirty="0">
-                <a:solidFill>
-                  <a:srgbClr val="000000"/>
-                </a:solidFill>
-                <a:latin typeface="Calibri" pitchFamily="34" charset="0"/>
-                <a:ea typeface="Calibri" pitchFamily="34" charset="-122"/>
-                <a:cs typeface="Calibri" pitchFamily="34" charset="-120"/>
-              </a:rPr>
-              <a:t xml:space="preserve">multibit gate code, one field</a:t>
-            </a:r>
-          </a:p>
-        </p:txBody>
-      </p:sp>
-      <p:sp>
-        <p:nvSpPr>
-          <p:cNvPr id="14" name="TextBox 13"/>
-          <p:cNvSpPr txBox="1"/>
-          <p:nvPr/>
-        </p:nvSpPr>
-        <p:spPr>
-          <a:xfrm>
-            <a:off x="6446520" y="2331720"/>
-            <a:ext cx="5120640" cy="457200"/>
-          </a:xfrm>
-          <a:prstGeom prst="rect">
-            <a:avLst/>
-          </a:prstGeom>
-          <a:noFill/>
-        </p:spPr>
-        <p:txBody>
-          <a:bodyPr wrap="square" lIns="0" tIns="0" rIns="0" bIns="0">
-            <a:spAutoFit/>
-          </a:bodyPr>
-          <a:lstStyle/>
-          <a:p>
-            <a:pPr marL="177800" indent="0">
-              <a:spcAft>
-                <a:spcPts val="0"/>
-              </a:spcAft>
-              <a:buSzPct val="100000"/>
-              <a:buNone/>
-            </a:pPr>
-            <a:r>
-              <a:rPr lang="en-US" sz="1050" dirty="0">
-                <a:solidFill>
-                  <a:srgbClr val="000000"/>
-                </a:solidFill>
-                <a:latin typeface="Calibri" pitchFamily="34" charset="0"/>
-                <a:ea typeface="Calibri" pitchFamily="34" charset="-122"/>
-                <a:cs typeface="Calibri" pitchFamily="34" charset="-120"/>
-              </a:rPr>
-              <a:t xml:space="preserve">6-field, 720-point control word  —  strength, dead time, clamp, off-bias</a:t>
-            </a:r>
-          </a:p>
-        </p:txBody>
-      </p:sp>
-      <p:sp>
-        <p:nvSpPr>
-          <p:cNvPr id="15" name="TextBox 14"/>
-          <p:cNvSpPr txBox="1"/>
-          <p:nvPr/>
-        </p:nvSpPr>
-        <p:spPr>
-          <a:xfrm>
-            <a:off x="640080" y="2880360"/>
-            <a:ext cx="2423160" cy="457200"/>
-          </a:xfrm>
-          <a:prstGeom prst="rect">
-            <a:avLst/>
-          </a:prstGeom>
-          <a:noFill/>
-        </p:spPr>
-        <p:txBody>
-          <a:bodyPr wrap="square" lIns="0" tIns="0" rIns="0" bIns="0">
-            <a:spAutoFit/>
-          </a:bodyPr>
-          <a:lstStyle/>
-          <a:p>
-            <a:pPr marL="177800" indent="0">
-              <a:spcAft>
-                <a:spcPts val="0"/>
-              </a:spcAft>
-              <a:buSzPct val="100000"/>
-              <a:buNone/>
-            </a:pPr>
-            <a:r>
-              <a:rPr lang="en-US" sz="1050" b="1" dirty="0">
-                <a:solidFill>
-                  <a:srgbClr val="000000"/>
-                </a:solidFill>
-                <a:latin typeface="Calibri" pitchFamily="34" charset="0"/>
-                <a:ea typeface="Calibri" pitchFamily="34" charset="-122"/>
-                <a:cs typeface="Calibri" pitchFamily="34" charset="-120"/>
-              </a:rPr>
-              <a:t xml:space="preserve">Implementation</a:t>
-            </a:r>
-          </a:p>
-        </p:txBody>
-      </p:sp>
-      <p:sp>
-        <p:nvSpPr>
-          <p:cNvPr id="16" name="TextBox 15"/>
-          <p:cNvSpPr txBox="1"/>
-          <p:nvPr/>
-        </p:nvSpPr>
-        <p:spPr>
-          <a:xfrm>
-            <a:off x="3154680" y="2880360"/>
-            <a:ext cx="3200400" cy="457200"/>
-          </a:xfrm>
-          <a:prstGeom prst="rect">
-            <a:avLst/>
-          </a:prstGeom>
-          <a:noFill/>
-        </p:spPr>
-        <p:txBody>
-          <a:bodyPr wrap="square" lIns="0" tIns="0" rIns="0" bIns="0">
-            <a:spAutoFit/>
-          </a:bodyPr>
-          <a:lstStyle/>
-          <a:p>
-            <a:pPr marL="177800" indent="0">
-              <a:spcAft>
-                <a:spcPts val="0"/>
-              </a:spcAft>
-              <a:buSzPct val="100000"/>
-              <a:buNone/>
-            </a:pPr>
-            <a:r>
-              <a:rPr lang="en-US" sz="1050" dirty="0">
-                <a:solidFill>
-                  <a:srgbClr val="000000"/>
-                </a:solidFill>
-                <a:latin typeface="Calibri" pitchFamily="34" charset="0"/>
-                <a:ea typeface="Calibri" pitchFamily="34" charset="-122"/>
-                <a:cs typeface="Calibri" pitchFamily="34" charset="-120"/>
-              </a:rPr>
-              <a:t xml:space="preserve">digital driver</a:t>
-            </a:r>
-          </a:p>
-        </p:txBody>
-      </p:sp>
-      <p:sp>
-        <p:nvSpPr>
-          <p:cNvPr id="17" name="TextBox 16"/>
-          <p:cNvSpPr txBox="1"/>
-          <p:nvPr/>
-        </p:nvSpPr>
-        <p:spPr>
-          <a:xfrm>
-            <a:off x="6446520" y="2880360"/>
-            <a:ext cx="5120640" cy="457200"/>
-          </a:xfrm>
-          <a:prstGeom prst="rect">
-            <a:avLst/>
-          </a:prstGeom>
-          <a:noFill/>
-        </p:spPr>
-        <p:txBody>
-          <a:bodyPr wrap="square" lIns="0" tIns="0" rIns="0" bIns="0">
-            <a:spAutoFit/>
-          </a:bodyPr>
-          <a:lstStyle/>
-          <a:p>
-            <a:pPr marL="177800" indent="0">
-              <a:spcAft>
-                <a:spcPts val="0"/>
-              </a:spcAft>
-              <a:buSzPct val="100000"/>
-              <a:buNone/>
-            </a:pPr>
-            <a:r>
-              <a:rPr lang="en-US" sz="1050" dirty="0">
-                <a:solidFill>
-                  <a:srgbClr val="000000"/>
-                </a:solidFill>
-                <a:latin typeface="Calibri" pitchFamily="34" charset="0"/>
-                <a:ea typeface="Calibri" pitchFamily="34" charset="-122"/>
-                <a:cs typeface="Calibri" pitchFamily="34" charset="-120"/>
-              </a:rPr>
-              <a:t xml:space="preserve">FPGA RTL in Verilog  ·  8 asserted properties, mutation-tested</a:t>
-            </a:r>
-          </a:p>
-        </p:txBody>
-      </p:sp>
-      <p:sp>
-        <p:nvSpPr>
-          <p:cNvPr id="18" name="TextBox 17"/>
-          <p:cNvSpPr txBox="1"/>
-          <p:nvPr/>
-        </p:nvSpPr>
-        <p:spPr>
-          <a:xfrm>
-            <a:off x="640080" y="3429000"/>
-            <a:ext cx="2423160" cy="457200"/>
-          </a:xfrm>
-          <a:prstGeom prst="rect">
-            <a:avLst/>
-          </a:prstGeom>
-          <a:noFill/>
-        </p:spPr>
-        <p:txBody>
-          <a:bodyPr wrap="square" lIns="0" tIns="0" rIns="0" bIns="0">
-            <a:spAutoFit/>
-          </a:bodyPr>
-          <a:lstStyle/>
-          <a:p>
-            <a:pPr marL="177800" indent="0">
-              <a:spcAft>
-                <a:spcPts val="0"/>
-              </a:spcAft>
-              <a:buSzPct val="100000"/>
-              <a:buNone/>
-            </a:pPr>
-            <a:r>
-              <a:rPr lang="en-US" sz="1050" b="1" dirty="0">
-                <a:solidFill>
-                  <a:srgbClr val="000000"/>
-                </a:solidFill>
-                <a:latin typeface="Calibri" pitchFamily="34" charset="0"/>
-                <a:ea typeface="Calibri" pitchFamily="34" charset="-122"/>
-                <a:cs typeface="Calibri" pitchFamily="34" charset="-120"/>
-              </a:rPr>
-              <a:t xml:space="preserve">How codes chosen</a:t>
-            </a:r>
-          </a:p>
-        </p:txBody>
-      </p:sp>
-      <p:sp>
-        <p:nvSpPr>
-          <p:cNvPr id="19" name="TextBox 18"/>
-          <p:cNvSpPr txBox="1"/>
-          <p:nvPr/>
-        </p:nvSpPr>
-        <p:spPr>
-          <a:xfrm>
-            <a:off x="3154680" y="3429000"/>
-            <a:ext cx="3200400" cy="457200"/>
-          </a:xfrm>
-          <a:prstGeom prst="rect">
-            <a:avLst/>
-          </a:prstGeom>
-          <a:noFill/>
-        </p:spPr>
-        <p:txBody>
-          <a:bodyPr wrap="square" lIns="0" tIns="0" rIns="0" bIns="0">
-            <a:spAutoFit/>
-          </a:bodyPr>
-          <a:lstStyle/>
-          <a:p>
-            <a:pPr marL="177800" indent="0">
-              <a:spcAft>
-                <a:spcPts val="0"/>
-              </a:spcAft>
-              <a:buSzPct val="100000"/>
-              <a:buNone/>
-            </a:pPr>
-            <a:r>
-              <a:rPr lang="en-US" sz="1050" dirty="0">
-                <a:solidFill>
-                  <a:srgbClr val="000000"/>
-                </a:solidFill>
-                <a:latin typeface="Calibri" pitchFamily="34" charset="0"/>
-                <a:ea typeface="Calibri" pitchFamily="34" charset="-122"/>
-                <a:cs typeface="Calibri" pitchFamily="34" charset="-120"/>
-              </a:rPr>
-              <a:t xml:space="preserve">selected codes, measured</a:t>
-            </a:r>
-          </a:p>
-        </p:txBody>
-      </p:sp>
-      <p:sp>
-        <p:nvSpPr>
-          <p:cNvPr id="20" name="TextBox 19"/>
-          <p:cNvSpPr txBox="1"/>
-          <p:nvPr/>
-        </p:nvSpPr>
-        <p:spPr>
-          <a:xfrm>
-            <a:off x="6446520" y="3429000"/>
-            <a:ext cx="5120640" cy="457200"/>
-          </a:xfrm>
-          <a:prstGeom prst="rect">
-            <a:avLst/>
-          </a:prstGeom>
-          <a:noFill/>
-        </p:spPr>
-        <p:txBody>
-          <a:bodyPr wrap="square" lIns="0" tIns="0" rIns="0" bIns="0">
-            <a:spAutoFit/>
-          </a:bodyPr>
-          <a:lstStyle/>
-          <a:p>
-            <a:pPr marL="177800" indent="0">
-              <a:spcAft>
-                <a:spcPts val="0"/>
-              </a:spcAft>
-              <a:buSzPct val="100000"/>
-              <a:buNone/>
-            </a:pPr>
-            <a:r>
-              <a:rPr lang="en-US" sz="1050" dirty="0">
-                <a:solidFill>
-                  <a:srgbClr val="000000"/>
-                </a:solidFill>
-                <a:latin typeface="Calibri" pitchFamily="34" charset="0"/>
-                <a:ea typeface="Calibri" pitchFamily="34" charset="-122"/>
-                <a:cs typeface="Calibri" pitchFamily="34" charset="-120"/>
-              </a:rPr>
-              <a:t xml:space="preserve">EXHAUSTIVE  —  all 720 words at every corner, 34,622 transients</a:t>
-            </a:r>
-          </a:p>
-        </p:txBody>
-      </p:sp>
-      <p:sp>
-        <p:nvSpPr>
-          <p:cNvPr id="21" name="TextBox 20"/>
-          <p:cNvSpPr txBox="1"/>
-          <p:nvPr/>
-        </p:nvSpPr>
-        <p:spPr>
-          <a:xfrm>
-            <a:off x="640080" y="3977639"/>
-            <a:ext cx="2423160" cy="457200"/>
-          </a:xfrm>
-          <a:prstGeom prst="rect">
-            <a:avLst/>
-          </a:prstGeom>
-          <a:noFill/>
-        </p:spPr>
-        <p:txBody>
-          <a:bodyPr wrap="square" lIns="0" tIns="0" rIns="0" bIns="0">
-            <a:spAutoFit/>
-          </a:bodyPr>
-          <a:lstStyle/>
-          <a:p>
-            <a:pPr marL="177800" indent="0">
-              <a:spcAft>
-                <a:spcPts val="0"/>
-              </a:spcAft>
-              <a:buSzPct val="100000"/>
-              <a:buNone/>
-            </a:pPr>
-            <a:r>
-              <a:rPr lang="en-US" sz="1050" b="1" dirty="0">
-                <a:solidFill>
-                  <a:srgbClr val="000000"/>
-                </a:solidFill>
-                <a:latin typeface="Calibri" pitchFamily="34" charset="0"/>
-                <a:ea typeface="Calibri" pitchFamily="34" charset="-122"/>
-                <a:cs typeface="Calibri" pitchFamily="34" charset="-120"/>
-              </a:rPr>
-              <a:t xml:space="preserve">Crosstalk</a:t>
-            </a:r>
-          </a:p>
-        </p:txBody>
-      </p:sp>
-      <p:sp>
-        <p:nvSpPr>
-          <p:cNvPr id="22" name="TextBox 21"/>
-          <p:cNvSpPr txBox="1"/>
-          <p:nvPr/>
-        </p:nvSpPr>
-        <p:spPr>
-          <a:xfrm>
-            <a:off x="3154680" y="3977639"/>
-            <a:ext cx="3200400" cy="457200"/>
-          </a:xfrm>
-          <a:prstGeom prst="rect">
-            <a:avLst/>
-          </a:prstGeom>
-          <a:noFill/>
-        </p:spPr>
-        <p:txBody>
-          <a:bodyPr wrap="square" lIns="0" tIns="0" rIns="0" bIns="0">
-            <a:spAutoFit/>
-          </a:bodyPr>
-          <a:lstStyle/>
-          <a:p>
-            <a:pPr marL="177800" indent="0">
-              <a:spcAft>
-                <a:spcPts val="0"/>
-              </a:spcAft>
-              <a:buSzPct val="100000"/>
-              <a:buNone/>
-            </a:pPr>
-            <a:r>
-              <a:rPr lang="en-US" sz="1050" dirty="0">
-                <a:solidFill>
-                  <a:srgbClr val="000000"/>
-                </a:solidFill>
-                <a:latin typeface="Calibri" pitchFamily="34" charset="0"/>
-                <a:ea typeface="Calibri" pitchFamily="34" charset="-122"/>
-                <a:cs typeface="Calibri" pitchFamily="34" charset="-120"/>
-              </a:rPr>
-              <a:t xml:space="preserve">not addressed</a:t>
-            </a:r>
-          </a:p>
-        </p:txBody>
-      </p:sp>
-      <p:sp>
-        <p:nvSpPr>
-          <p:cNvPr id="23" name="TextBox 22"/>
-          <p:cNvSpPr txBox="1"/>
-          <p:nvPr/>
-        </p:nvSpPr>
-        <p:spPr>
-          <a:xfrm>
-            <a:off x="6446520" y="3977639"/>
-            <a:ext cx="5120640" cy="457200"/>
-          </a:xfrm>
-          <a:prstGeom prst="rect">
-            <a:avLst/>
-          </a:prstGeom>
-          <a:noFill/>
-        </p:spPr>
-        <p:txBody>
-          <a:bodyPr wrap="square" lIns="0" tIns="0" rIns="0" bIns="0">
-            <a:spAutoFit/>
-          </a:bodyPr>
-          <a:lstStyle/>
-          <a:p>
-            <a:pPr marL="177800" indent="0">
-              <a:spcAft>
-                <a:spcPts val="0"/>
-              </a:spcAft>
-              <a:buSzPct val="100000"/>
-              <a:buNone/>
-            </a:pPr>
-            <a:r>
-              <a:rPr lang="en-US" sz="1050" dirty="0">
-                <a:solidFill>
-                  <a:srgbClr val="000000"/>
-                </a:solidFill>
-                <a:latin typeface="Calibri" pitchFamily="34" charset="0"/>
-                <a:ea typeface="Calibri" pitchFamily="34" charset="-122"/>
-                <a:cs typeface="Calibri" pitchFamily="34" charset="-120"/>
-              </a:rPr>
-              <a:t xml:space="preserve">1.65 V spurious gate  →  −1.18 V  (2.58 V margin), clamp + off-bias</a:t>
-            </a:r>
-          </a:p>
-        </p:txBody>
-      </p:sp>
-      <p:sp>
-        <p:nvSpPr>
-          <p:cNvPr id="24" name="TextBox 23"/>
-          <p:cNvSpPr txBox="1"/>
-          <p:nvPr/>
-        </p:nvSpPr>
-        <p:spPr>
-          <a:xfrm>
-            <a:off x="640080" y="4526280"/>
-            <a:ext cx="2423160" cy="457200"/>
-          </a:xfrm>
-          <a:prstGeom prst="rect">
-            <a:avLst/>
-          </a:prstGeom>
-          <a:noFill/>
-        </p:spPr>
-        <p:txBody>
-          <a:bodyPr wrap="square" lIns="0" tIns="0" rIns="0" bIns="0">
-            <a:spAutoFit/>
-          </a:bodyPr>
-          <a:lstStyle/>
-          <a:p>
-            <a:pPr marL="177800" indent="0">
-              <a:spcAft>
-                <a:spcPts val="0"/>
-              </a:spcAft>
-              <a:buSzPct val="100000"/>
-              <a:buNone/>
-            </a:pPr>
-            <a:r>
-              <a:rPr lang="en-US" sz="1050" b="1" dirty="0">
-                <a:solidFill>
-                  <a:srgbClr val="000000"/>
-                </a:solidFill>
-                <a:latin typeface="Calibri" pitchFamily="34" charset="0"/>
-                <a:ea typeface="Calibri" pitchFamily="34" charset="-122"/>
-                <a:cs typeface="Calibri" pitchFamily="34" charset="-120"/>
-              </a:rPr>
-              <a:t xml:space="preserve">What is reported</a:t>
-            </a:r>
-          </a:p>
-        </p:txBody>
-      </p:sp>
-      <p:sp>
-        <p:nvSpPr>
-          <p:cNvPr id="25" name="TextBox 24"/>
-          <p:cNvSpPr txBox="1"/>
-          <p:nvPr/>
-        </p:nvSpPr>
-        <p:spPr>
-          <a:xfrm>
-            <a:off x="3154680" y="4526280"/>
-            <a:ext cx="3200400" cy="457200"/>
-          </a:xfrm>
-          <a:prstGeom prst="rect">
-            <a:avLst/>
-          </a:prstGeom>
-          <a:noFill/>
-        </p:spPr>
-        <p:txBody>
-          <a:bodyPr wrap="square" lIns="0" tIns="0" rIns="0" bIns="0">
-            <a:spAutoFit/>
-          </a:bodyPr>
-          <a:lstStyle/>
-          <a:p>
-            <a:pPr marL="177800" indent="0">
-              <a:spcAft>
-                <a:spcPts val="0"/>
-              </a:spcAft>
-              <a:buSzPct val="100000"/>
-              <a:buNone/>
-            </a:pPr>
-            <a:r>
-              <a:rPr lang="en-US" sz="1050" dirty="0">
-                <a:solidFill>
-                  <a:srgbClr val="000000"/>
-                </a:solidFill>
-                <a:latin typeface="Calibri" pitchFamily="34" charset="0"/>
-                <a:ea typeface="Calibri" pitchFamily="34" charset="-122"/>
-                <a:cs typeface="Calibri" pitchFamily="34" charset="-120"/>
-              </a:rPr>
-              <a:t xml:space="preserve">one number vs a conventional driver</a:t>
-            </a:r>
-          </a:p>
-        </p:txBody>
-      </p:sp>
-      <p:sp>
-        <p:nvSpPr>
-          <p:cNvPr id="26" name="TextBox 25"/>
-          <p:cNvSpPr txBox="1"/>
-          <p:nvPr/>
-        </p:nvSpPr>
-        <p:spPr>
-          <a:xfrm>
-            <a:off x="6446520" y="4526280"/>
-            <a:ext cx="5120640" cy="457200"/>
-          </a:xfrm>
-          <a:prstGeom prst="rect">
-            <a:avLst/>
-          </a:prstGeom>
-          <a:noFill/>
-        </p:spPr>
-        <p:txBody>
-          <a:bodyPr wrap="square" lIns="0" tIns="0" rIns="0" bIns="0">
-            <a:spAutoFit/>
-          </a:bodyPr>
-          <a:lstStyle/>
-          <a:p>
-            <a:pPr marL="177800" indent="0">
-              <a:spcAft>
-                <a:spcPts val="0"/>
-              </a:spcAft>
-              <a:buSzPct val="100000"/>
-              <a:buNone/>
-            </a:pPr>
-            <a:r>
-              <a:rPr lang="en-US" sz="1050" dirty="0">
-                <a:solidFill>
-                  <a:srgbClr val="000000"/>
-                </a:solidFill>
-                <a:latin typeface="Calibri" pitchFamily="34" charset="0"/>
-                <a:ea typeface="Calibri" pitchFamily="34" charset="-122"/>
-                <a:cs typeface="Calibri" pitchFamily="34" charset="-120"/>
-              </a:rPr>
-              <a:t xml:space="preserve">the number SPLIT: fixed word 25.1 %, adapting it 3.9 %, one comparator takes 72 % of that</a:t>
-            </a:r>
-          </a:p>
-        </p:txBody>
-      </p:sp>
-      <p:sp>
-        <p:nvSpPr>
-          <p:cNvPr id="27" name="TextBox 26"/>
-          <p:cNvSpPr txBox="1"/>
-          <p:nvPr/>
-        </p:nvSpPr>
-        <p:spPr>
-          <a:xfrm>
-            <a:off x="640080" y="5074920"/>
-            <a:ext cx="2423160" cy="457200"/>
-          </a:xfrm>
-          <a:prstGeom prst="rect">
-            <a:avLst/>
-          </a:prstGeom>
-          <a:noFill/>
-        </p:spPr>
-        <p:txBody>
-          <a:bodyPr wrap="square" lIns="0" tIns="0" rIns="0" bIns="0">
-            <a:spAutoFit/>
-          </a:bodyPr>
-          <a:lstStyle/>
-          <a:p>
-            <a:pPr marL="177800" indent="0">
-              <a:spcAft>
-                <a:spcPts val="0"/>
-              </a:spcAft>
-              <a:buSzPct val="100000"/>
-              <a:buNone/>
-            </a:pPr>
-            <a:r>
-              <a:rPr lang="en-US" sz="1050" b="1" dirty="0">
-                <a:solidFill>
-                  <a:srgbClr val="000000"/>
-                </a:solidFill>
-                <a:latin typeface="Calibri" pitchFamily="34" charset="0"/>
-                <a:ea typeface="Calibri" pitchFamily="34" charset="-122"/>
-                <a:cs typeface="Calibri" pitchFamily="34" charset="-120"/>
-              </a:rPr>
-              <a:t xml:space="preserve">Design rule</a:t>
-            </a:r>
-          </a:p>
-        </p:txBody>
-      </p:sp>
-      <p:sp>
-        <p:nvSpPr>
-          <p:cNvPr id="28" name="TextBox 27"/>
-          <p:cNvSpPr txBox="1"/>
-          <p:nvPr/>
-        </p:nvSpPr>
-        <p:spPr>
-          <a:xfrm>
-            <a:off x="3154680" y="5074920"/>
-            <a:ext cx="3200400" cy="457200"/>
-          </a:xfrm>
-          <a:prstGeom prst="rect">
-            <a:avLst/>
-          </a:prstGeom>
-          <a:noFill/>
-        </p:spPr>
-        <p:txBody>
-          <a:bodyPr wrap="square" lIns="0" tIns="0" rIns="0" bIns="0">
-            <a:spAutoFit/>
-          </a:bodyPr>
-          <a:lstStyle/>
-          <a:p>
-            <a:pPr marL="177800" indent="0">
-              <a:spcAft>
-                <a:spcPts val="0"/>
-              </a:spcAft>
-              <a:buSzPct val="100000"/>
-              <a:buNone/>
-            </a:pPr>
-            <a:r>
-              <a:rPr lang="en-US" sz="1050" dirty="0">
-                <a:solidFill>
-                  <a:srgbClr val="000000"/>
-                </a:solidFill>
-                <a:latin typeface="Calibri" pitchFamily="34" charset="0"/>
-                <a:ea typeface="Calibri" pitchFamily="34" charset="-122"/>
-                <a:cs typeface="Calibri" pitchFamily="34" charset="-120"/>
-              </a:rPr>
-              <a:t xml:space="preserve">none</a:t>
-            </a:r>
-          </a:p>
-        </p:txBody>
-      </p:sp>
-      <p:sp>
-        <p:nvSpPr>
-          <p:cNvPr id="29" name="TextBox 28"/>
-          <p:cNvSpPr txBox="1"/>
-          <p:nvPr/>
-        </p:nvSpPr>
-        <p:spPr>
-          <a:xfrm>
-            <a:off x="6446520" y="5074920"/>
-            <a:ext cx="5120640" cy="457200"/>
-          </a:xfrm>
-          <a:prstGeom prst="rect">
-            <a:avLst/>
-          </a:prstGeom>
-          <a:noFill/>
-        </p:spPr>
-        <p:txBody>
-          <a:bodyPr wrap="square" lIns="0" tIns="0" rIns="0" bIns="0">
-            <a:spAutoFit/>
-          </a:bodyPr>
-          <a:lstStyle/>
-          <a:p>
-            <a:pPr marL="177800" indent="0">
-              <a:spcAft>
-                <a:spcPts val="0"/>
-              </a:spcAft>
-              <a:buSzPct val="100000"/>
-              <a:buNone/>
-            </a:pPr>
-            <a:r>
-              <a:rPr lang="en-US" sz="1050" dirty="0">
-                <a:solidFill>
-                  <a:srgbClr val="000000"/>
-                </a:solidFill>
-                <a:latin typeface="Calibri" pitchFamily="34" charset="0"/>
-                <a:ea typeface="Calibri" pitchFamily="34" charset="-122"/>
-                <a:cs typeface="Calibri" pitchFamily="34" charset="-120"/>
-              </a:rPr>
-              <a:t xml:space="preserve">adaptive control pays only below ~2.5 nH loop inductance</a:t>
-            </a:r>
-          </a:p>
-        </p:txBody>
-      </p:sp>
-      <p:sp>
-        <p:nvSpPr>
-          <p:cNvPr id="30" name="TextBox 29"/>
-          <p:cNvSpPr txBox="1"/>
-          <p:nvPr/>
-        </p:nvSpPr>
-        <p:spPr>
-          <a:xfrm>
-            <a:off x="640080" y="5742432"/>
-            <a:ext cx="10972800" cy="685800"/>
-          </a:xfrm>
-          <a:prstGeom prst="rect">
-            <a:avLst/>
-          </a:prstGeom>
-          <a:noFill/>
-        </p:spPr>
-        <p:txBody>
-          <a:bodyPr wrap="square" lIns="0" tIns="0" rIns="0" bIns="0">
-            <a:spAutoFit/>
-          </a:bodyPr>
-          <a:lstStyle/>
-          <a:p>
-            <a:pPr marL="177800" indent="0">
-              <a:spcAft>
-                <a:spcPts val="0"/>
-              </a:spcAft>
-              <a:buSzPct val="100000"/>
-              <a:buNone/>
-            </a:pPr>
-            <a:r>
               <a:rPr lang="en-US" sz="1200" dirty="0">
                 <a:solidFill>
                   <a:srgbClr val="000000"/>
@@ -12949,7 +11851,7 @@
                 <a:ea typeface="Calibri" pitchFamily="34" charset="-122"/>
                 <a:cs typeface="Calibri" pitchFamily="34" charset="-120"/>
               </a:rPr>
-              <a:t xml:space="preserve">The parameter we improve is not a volt or a nanosecond — it is </a:t>
+              <a:t xml:space="preserve">Every element is in </a:t>
             </a:r>
             <a:r>
               <a:rPr lang="en-US" sz="1200" b="1" dirty="0">
@@ -12960,7 +11862,7 @@
                 <a:ea typeface="Calibri" pitchFamily="34" charset="-122"/>
                 <a:cs typeface="Calibri" pitchFamily="34" charset="-120"/>
               </a:rPr>
-              <a:t xml:space="preserve">what the designer knows before committing silicon</a:t>
+              <a:t xml:space="preserve">sim/dpt.cir</a:t>
             </a:r>
             <a:r>
               <a:rPr lang="en-US" sz="1200" dirty="0">
@@ -12971,7 +11873,84 @@
                 <a:ea typeface="Calibri" pitchFamily="34" charset="-122"/>
                 <a:cs typeface="Calibri" pitchFamily="34" charset="-120"/>
               </a:rPr>
-              <a:t xml:space="preserve">. [9] shows a digital code works. We measure what the code is worth, and how much of that worth needs sensing at all: 3.7 % of the achievable gain, which is what the sense + ADC + lookup table has to justify.</a:t>
+              <a:t xml:space="preserve">, which is the file to open in LTspice — it carries the active Miller clamp (S</a:t>
+            </a:r>
+            <a:r>
+              <a:rPr lang="en-US" sz="1200" dirty="0">
+                <a:solidFill>
+                  <a:srgbClr val="000000"/>
+                </a:solidFill>
+                <a:latin typeface="Calibri" pitchFamily="34" charset="0"/>
+                <a:ea typeface="Calibri" pitchFamily="34" charset="-122"/>
+                <a:cs typeface="Calibri" pitchFamily="34" charset="-120"/>
+              </a:rPr>
+              <a:t xml:space="preserve">clk</a:t>
+            </a:r>
+            <a:r>
+              <a:rPr lang="en-US" sz="1200" dirty="0">
+                <a:solidFill>
+                  <a:srgbClr val="000000"/>
+                </a:solidFill>
+                <a:latin typeface="Calibri" pitchFamily="34" charset="0"/>
+                <a:ea typeface="Calibri" pitchFamily="34" charset="-122"/>
+                <a:cs typeface="Calibri" pitchFamily="34" charset="-120"/>
+              </a:rPr>
+              <a:t xml:space="preserve"> through 0.5 Ω). The three </a:t>
+            </a:r>
+            <a:r>
+              <a:rPr lang="en-US" sz="1200" b="1" dirty="0">
+                <a:solidFill>
+                  <a:srgbClr val="000000"/>
+                </a:solidFill>
+                <a:latin typeface="Calibri" pitchFamily="34" charset="0"/>
+                <a:ea typeface="Calibri" pitchFamily="34" charset="-122"/>
+                <a:cs typeface="Calibri" pitchFamily="34" charset="-120"/>
+              </a:rPr>
+              <a:t xml:space="preserve">ltspice/*.asc</a:t>
+            </a:r>
+            <a:r>
+              <a:rPr lang="en-US" sz="1200" dirty="0">
+                <a:solidFill>
+                  <a:srgbClr val="000000"/>
+                </a:solidFill>
+                <a:latin typeface="Calibri" pitchFamily="34" charset="0"/>
+                <a:ea typeface="Calibri" pitchFamily="34" charset="-122"/>
+                <a:cs typeface="Calibri" pitchFamily="34" charset="-120"/>
+              </a:rPr>
+              <a:t xml:space="preserve"> sheets illustrate the crosstalk mechanism only and do not draw the clamp</a:t>
+            </a:r>
+            <a:r>
+              <a:rPr lang="en-US" sz="1200" dirty="0">
+                <a:solidFill>
+                  <a:srgbClr val="000000"/>
+                </a:solidFill>
+                <a:latin typeface="Calibri" pitchFamily="34" charset="0"/>
+                <a:ea typeface="Calibri" pitchFamily="34" charset="-122"/>
+                <a:cs typeface="Calibri" pitchFamily="34" charset="-120"/>
+              </a:rPr>
+              <a:t xml:space="preserve">. C</a:t>
+            </a:r>
+            <a:r>
+              <a:rPr lang="en-US" sz="1200" dirty="0">
+                <a:solidFill>
+                  <a:srgbClr val="000000"/>
+                </a:solidFill>
+                <a:latin typeface="Calibri" pitchFamily="34" charset="0"/>
+                <a:ea typeface="Calibri" pitchFamily="34" charset="-122"/>
+                <a:cs typeface="Calibri" pitchFamily="34" charset="-120"/>
+              </a:rPr>
+              <a:t xml:space="preserve">GD</a:t>
+            </a:r>
+            <a:r>
+              <a:rPr lang="en-US" sz="1200" dirty="0">
+                <a:solidFill>
+                  <a:srgbClr val="000000"/>
+                </a:solidFill>
+                <a:latin typeface="Calibri" pitchFamily="34" charset="0"/>
+                <a:ea typeface="Calibri" pitchFamily="34" charset="-122"/>
+                <a:cs typeface="Calibri" pitchFamily="34" charset="-120"/>
+              </a:rPr>
+              <a:t xml:space="preserve"> on Q2 in red is the crosstalk path; GaN has no body diode, so holding the gate below threshold is paid for again across the dead time.</a:t>
             </a:r>
           </a:p>
         </p:txBody>
@@ -13027,7 +12006,7 @@
                 <a:ea typeface="Calibri" pitchFamily="34" charset="-122"/>
                 <a:cs typeface="Calibri" pitchFamily="34" charset="-120"/>
               </a:rPr>
-              <a:t>13</a:t>
+              <a:t>23</a:t>
             </a:r>
             <a:endParaRPr lang="en-US" sz="1000" dirty="0"/>
           </a:p>
@@ -13066,7 +12045,7 @@
                 <a:ea typeface="Calibri" pitchFamily="34" charset="-122"/>
                 <a:cs typeface="Calibri" pitchFamily="34" charset="-120"/>
               </a:rPr>
-              <a:t>The circuit that is simulated</a:t>
+              <a:t>MATLAB — the Pareto front and the model check</a:t>
             </a:r>
             <a:endParaRPr lang="en-US" sz="2800" dirty="0"/>
           </a:p>
@@ -13096,9 +12075,53 @@
           </a:prstGeom>
         </p:spPr>
       </p:pic>
+      <p:sp>
+        <p:nvSpPr>
+          <p:cNvPr id="5" name="Rectangle 4"/>
+          <p:cNvSpPr/>
+          <p:nvPr/>
+        </p:nvSpPr>
+        <p:spPr>
+          <a:xfrm>
+            <a:off x="548640" y="1097280"/>
+            <a:ext cx="4572000" cy="3474720"/>
+          </a:xfrm>
+          <a:prstGeom prst="rect">
+            <a:avLst/>
+          </a:prstGeom>
+          <a:solidFill>
+            <a:srgbClr val="0B0B0B"/>
+          </a:solidFill>
+          <a:ln>
+            <a:solidFill>
+              <a:srgbClr val="0B0B0B"/>
+            </a:solidFill>
+          </a:ln>
+          <a:effectLst/>
+        </p:spPr>
+        <p:style>
+          <a:lnRef idx="1">
+            <a:schemeClr val="accent1"/>
+          </a:lnRef>
+          <a:fillRef idx="3">
+            <a:schemeClr val="accent1"/>
+          </a:fillRef>
+          <a:effectRef idx="2">
+            <a:schemeClr val="accent1"/>
+          </a:effectRef>
+          <a:fontRef idx="minor">
+            <a:schemeClr val="lt1"/>
+          </a:fontRef>
+        </p:style>
+        <p:txBody>
+          <a:bodyPr rtlCol="0" anchor="ctr"/>
+          <a:lstStyle/>
+          <a:p/>
+        </p:txBody>
+      </p:sp>
       <p:pic>
         <p:nvPicPr>
-          <p:cNvPr id="5" name="Picture 4" descr="fig_circuit.png"/>
+          <p:cNvPr id="6" name="Picture 5" descr="pareto_matlab.png"/>
           <p:cNvPicPr>
             <a:picLocks noChangeAspect="1"/>
           </p:cNvPicPr>
@@ -13112,8 +12135,8 @@
         </p:blipFill>
         <p:spPr>
           <a:xfrm>
-            <a:off x="2029968" y="1115568"/>
-            <a:ext cx="8129016" cy="4434009"/>
+            <a:off x="640080" y="1188720"/>
+            <a:ext cx="4389120" cy="3291840"/>
           </a:xfrm>
           <a:prstGeom prst="rect">
             <a:avLst/>
@@ -13122,14 +12145,82 @@
       </p:pic>
       <p:sp>
         <p:nvSpPr>
-          <p:cNvPr id="6" name="TextBox 5"/>
-          <p:cNvSpPr txBox="1"/>
-          <p:nvPr/>
-        </p:nvSpPr>
-        <p:spPr>
-          <a:xfrm>
-            <a:off x="640080" y="5669280"/>
-            <a:ext cx="11064240" cy="777240"/>
+          <p:cNvPr id="7" name="Rectangle 6"/>
+          <p:cNvSpPr/>
+          <p:nvPr/>
+        </p:nvSpPr>
+        <p:spPr>
+          <a:xfrm>
+            <a:off x="6355080" y="1097280"/>
+            <a:ext cx="4572000" cy="3474720"/>
+          </a:xfrm>
+          <a:prstGeom prst="rect">
+            <a:avLst/>
+          </a:prstGeom>
+          <a:solidFill>
+            <a:srgbClr val="0B0B0B"/>
+          </a:solidFill>
+          <a:ln>
+            <a:solidFill>
+              <a:srgbClr val="0B0B0B"/>
+            </a:solidFill>
+          </a:ln>
+          <a:effectLst/>
+        </p:spPr>
+        <p:style>
+          <a:lnRef idx="1">
+            <a:schemeClr val="accent1"/>
+          </a:lnRef>
+          <a:fillRef idx="3">
+            <a:schemeClr val="accent1"/>
+          </a:fillRef>
+          <a:effectRef idx="2">
+            <a:schemeClr val="accent1"/>
+          </a:effectRef>
+          <a:fontRef idx="minor">
+            <a:schemeClr val="lt1"/>
+          </a:fontRef>
+        </p:style>
+        <p:txBody>
+          <a:bodyPr rtlCol="0" anchor="ctr"/>
+          <a:lstStyle/>
+          <a:p/>
+        </p:txBody>
+      </p:sp>
+      <p:pic>
+        <p:nvPicPr>
+          <p:cNvPr id="8" name="Picture 7" descr="fig_master_weight.png"/>
+          <p:cNvPicPr>
+            <a:picLocks noChangeAspect="1"/>
+          </p:cNvPicPr>
+          <p:nvPr/>
+        </p:nvPicPr>
+        <p:blipFill>
+          <a:blip r:embed="rId4"/>
+          <a:stretch>
+            <a:fillRect/>
+          </a:stretch>
+        </p:blipFill>
+        <p:spPr>
+          <a:xfrm>
+            <a:off x="6446520" y="1188720"/>
+            <a:ext cx="4389120" cy="3291840"/>
+          </a:xfrm>
+          <a:prstGeom prst="rect">
+            <a:avLst/>
+          </a:prstGeom>
+        </p:spPr>
+      </p:pic>
+      <p:sp>
+        <p:nvSpPr>
+          <p:cNvPr id="9" name="TextBox 8"/>
+          <p:cNvSpPr txBox="1"/>
+          <p:nvPr/>
+        </p:nvSpPr>
+        <p:spPr>
+          <a:xfrm>
+            <a:off x="548640" y="4663440"/>
+            <a:ext cx="5440680" cy="960120"/>
           </a:xfrm>
           <a:prstGeom prst="rect">
             <a:avLst/>
@@ -13150,6 +12241,125 @@
               <a:buNone/>
             </a:pPr>
             <a:r>
+              <a:rPr lang="en-US" sz="1150" b="1" dirty="0">
+                <a:solidFill>
+                  <a:srgbClr val="000000"/>
+                </a:solidFill>
+                <a:latin typeface="Calibri" pitchFamily="34" charset="0"/>
+                <a:ea typeface="Calibri" pitchFamily="34" charset="-122"/>
+                <a:cs typeface="Calibri" pitchFamily="34" charset="-120"/>
+              </a:rPr>
+              <a:t xml:space="preserve">720 words, 504 feasible (70 %).</a:t>
+            </a:r>
+            <a:r>
+              <a:rPr lang="en-US" sz="1150" dirty="0">
+                <a:solidFill>
+                  <a:srgbClr val="000000"/>
+                </a:solidFill>
+                <a:latin typeface="Calibri" pitchFamily="34" charset="0"/>
+                <a:ea typeface="Calibri" pitchFamily="34" charset="-122"/>
+                <a:cs typeface="Calibri" pitchFamily="34" charset="-120"/>
+              </a:rPr>
+              <a:t xml:space="preserve"> A 7-word Pareto front; buying one point of overshoot back costs 0.039 µJ. The green marker is the word the cost function picks.</a:t>
+            </a:r>
+          </a:p>
+        </p:txBody>
+      </p:sp>
+      <p:sp>
+        <p:nvSpPr>
+          <p:cNvPr id="10" name="TextBox 9"/>
+          <p:cNvSpPr txBox="1"/>
+          <p:nvPr/>
+        </p:nvSpPr>
+        <p:spPr>
+          <a:xfrm>
+            <a:off x="6355080" y="4663440"/>
+            <a:ext cx="5257800" cy="960120"/>
+          </a:xfrm>
+          <a:prstGeom prst="rect">
+            <a:avLst/>
+          </a:prstGeom>
+          <a:noFill/>
+        </p:spPr>
+        <p:txBody>
+          <a:bodyPr wrap="square" lIns="0" tIns="0" rIns="0" bIns="0">
+            <a:spAutoFit/>
+          </a:bodyPr>
+          <a:lstStyle/>
+          <a:p>
+            <a:pPr marL="177800" indent="0">
+              <a:spcAft>
+                <a:spcPts val="0"/>
+              </a:spcAft>
+              <a:buSzPct val="100000"/>
+              <a:buNone/>
+            </a:pPr>
+            <a:r>
+              <a:rPr lang="en-US" sz="1150" b="1" dirty="0">
+                <a:solidFill>
+                  <a:srgbClr val="000000"/>
+                </a:solidFill>
+                <a:latin typeface="Calibri" pitchFamily="34" charset="0"/>
+                <a:ea typeface="Calibri" pitchFamily="34" charset="-122"/>
+                <a:cs typeface="Calibri" pitchFamily="34" charset="-120"/>
+              </a:rPr>
+              <a:t xml:space="preserve">(A) stays above (B) at every weight tested.</a:t>
+            </a:r>
+            <a:r>
+              <a:rPr lang="en-US" sz="1150" dirty="0">
+                <a:solidFill>
+                  <a:srgbClr val="000000"/>
+                </a:solidFill>
+                <a:latin typeface="Calibri" pitchFamily="34" charset="0"/>
+                <a:ea typeface="Calibri" pitchFamily="34" charset="-122"/>
+                <a:cs typeface="Calibri" pitchFamily="34" charset="-120"/>
+              </a:rPr>
+              <a:t xml:space="preserve"> Choosing the word well is worth 22.5–29.0 % of baseline across the whole range; adapting it per operating point 1.4–12.7 %. The ordering never flips.</a:t>
+            </a:r>
+          </a:p>
+        </p:txBody>
+      </p:sp>
+      <p:sp>
+        <p:nvSpPr>
+          <p:cNvPr id="11" name="TextBox 10"/>
+          <p:cNvSpPr txBox="1"/>
+          <p:nvPr/>
+        </p:nvSpPr>
+        <p:spPr>
+          <a:xfrm>
+            <a:off x="548640" y="5742432"/>
+            <a:ext cx="11064240" cy="685800"/>
+          </a:xfrm>
+          <a:prstGeom prst="rect">
+            <a:avLst/>
+          </a:prstGeom>
+          <a:noFill/>
+        </p:spPr>
+        <p:txBody>
+          <a:bodyPr wrap="square" lIns="0" tIns="0" rIns="0" bIns="0">
+            <a:spAutoFit/>
+          </a:bodyPr>
+          <a:lstStyle/>
+          <a:p>
+            <a:pPr marL="177800" indent="0">
+              <a:spcAft>
+                <a:spcPts val="0"/>
+              </a:spcAft>
+              <a:buSzPct val="100000"/>
+              <a:buNone/>
+            </a:pPr>
+            <a:r>
+              <a:rPr lang="en-US" sz="1200" b="1" dirty="0">
+                <a:solidFill>
+                  <a:srgbClr val="000000"/>
+                </a:solidFill>
+                <a:latin typeface="Calibri" pitchFamily="34" charset="0"/>
+                <a:ea typeface="Calibri" pitchFamily="34" charset="-122"/>
+                <a:cs typeface="Calibri" pitchFamily="34" charset="-120"/>
+              </a:rPr>
+              <a:t xml:space="preserve">Dead-time margin saturates at about 15 ns</a:t>
+            </a:r>
+            <a:r>
               <a:rPr lang="en-US" sz="1200" dirty="0">
                 <a:solidFill>
                   <a:srgbClr val="000000"/>
@@ -13158,7 +12368,7 @@
                 <a:ea typeface="Calibri" pitchFamily="34" charset="-122"/>
                 <a:cs typeface="Calibri" pitchFamily="34" charset="-120"/>
               </a:rPr>
-              <a:t xml:space="preserve">Every element is in </a:t>
+              <a:t xml:space="preserve">: the marginal gain runs 269 → 31.5 → 1.8 → 0.0 mV/ns across 10/15/25/35 ns. Past 15 ns dead time costs conduction loss and buys nothing. </a:t>
             </a:r>
             <a:r>
               <a:rPr lang="en-US" sz="1200" b="1" dirty="0">
@@ -13169,7 +12379,7 @@
                 <a:ea typeface="Calibri" pitchFamily="34" charset="-122"/>
                 <a:cs typeface="Calibri" pitchFamily="34" charset="-120"/>
               </a:rPr>
-              <a:t xml:space="preserve">sim/dpt.cir</a:t>
+              <a:t xml:space="preserve">results/gan_analysis.m</a:t>
             </a:r>
             <a:r>
               <a:rPr lang="en-US" sz="1200" dirty="0">
@@ -13180,7 +12390,18 @@
                 <a:ea typeface="Calibri" pitchFamily="34" charset="-122"/>
                 <a:cs typeface="Calibri" pitchFamily="34" charset="-120"/>
               </a:rPr>
-              <a:t xml:space="preserve">, which is the file to open in LTspice — it carries the active Miller clamp (S</a:t>
+              <a:t xml:space="preserve">, </a:t>
+            </a:r>
+            <a:r>
+              <a:rPr lang="en-US" sz="1200" b="1" dirty="0">
+                <a:solidFill>
+                  <a:srgbClr val="000000"/>
+                </a:solidFill>
+                <a:latin typeface="Calibri" pitchFamily="34" charset="0"/>
+                <a:ea typeface="Calibri" pitchFamily="34" charset="-122"/>
+                <a:cs typeface="Calibri" pitchFamily="34" charset="-120"/>
+              </a:rPr>
+              <a:t xml:space="preserve">results/gan_master.m</a:t>
             </a:r>
             <a:r>
               <a:rPr lang="en-US" sz="1200" dirty="0">
@@ -13191,73 +12412,7 @@
                 <a:ea typeface="Calibri" pitchFamily="34" charset="-122"/>
                 <a:cs typeface="Calibri" pitchFamily="34" charset="-120"/>
               </a:rPr>
-              <a:t xml:space="preserve">clk</a:t>
-            </a:r>
-            <a:r>
-              <a:rPr lang="en-US" sz="1200" dirty="0">
-                <a:solidFill>
-                  <a:srgbClr val="000000"/>
-                </a:solidFill>
-                <a:latin typeface="Calibri" pitchFamily="34" charset="0"/>
-                <a:ea typeface="Calibri" pitchFamily="34" charset="-122"/>
-                <a:cs typeface="Calibri" pitchFamily="34" charset="-120"/>
-              </a:rPr>
-              <a:t xml:space="preserve"> through 0.5 Ω). The three </a:t>
-            </a:r>
-            <a:r>
-              <a:rPr lang="en-US" sz="1200" b="1" dirty="0">
-                <a:solidFill>
-                  <a:srgbClr val="000000"/>
-                </a:solidFill>
-                <a:latin typeface="Calibri" pitchFamily="34" charset="0"/>
-                <a:ea typeface="Calibri" pitchFamily="34" charset="-122"/>
-                <a:cs typeface="Calibri" pitchFamily="34" charset="-120"/>
-              </a:rPr>
-              <a:t xml:space="preserve">ltspice/*.asc</a:t>
-            </a:r>
-            <a:r>
-              <a:rPr lang="en-US" sz="1200" dirty="0">
-                <a:solidFill>
-                  <a:srgbClr val="000000"/>
-                </a:solidFill>
-                <a:latin typeface="Calibri" pitchFamily="34" charset="0"/>
-                <a:ea typeface="Calibri" pitchFamily="34" charset="-122"/>
-                <a:cs typeface="Calibri" pitchFamily="34" charset="-120"/>
-              </a:rPr>
-              <a:t xml:space="preserve"> sheets illustrate the crosstalk mechanism only and do not draw the clamp</a:t>
-            </a:r>
-            <a:r>
-              <a:rPr lang="en-US" sz="1200" dirty="0">
-                <a:solidFill>
-                  <a:srgbClr val="000000"/>
-                </a:solidFill>
-                <a:latin typeface="Calibri" pitchFamily="34" charset="0"/>
-                <a:ea typeface="Calibri" pitchFamily="34" charset="-122"/>
-                <a:cs typeface="Calibri" pitchFamily="34" charset="-120"/>
-              </a:rPr>
-              <a:t xml:space="preserve">. C</a:t>
-            </a:r>
-            <a:r>
-              <a:rPr lang="en-US" sz="1200" dirty="0">
-                <a:solidFill>
-                  <a:srgbClr val="000000"/>
-                </a:solidFill>
-                <a:latin typeface="Calibri" pitchFamily="34" charset="0"/>
-                <a:ea typeface="Calibri" pitchFamily="34" charset="-122"/>
-                <a:cs typeface="Calibri" pitchFamily="34" charset="-120"/>
-              </a:rPr>
-              <a:t xml:space="preserve">GD</a:t>
-            </a:r>
-            <a:r>
-              <a:rPr lang="en-US" sz="1200" dirty="0">
-                <a:solidFill>
-                  <a:srgbClr val="000000"/>
-                </a:solidFill>
-                <a:latin typeface="Calibri" pitchFamily="34" charset="0"/>
-                <a:ea typeface="Calibri" pitchFamily="34" charset="-122"/>
-                <a:cs typeface="Calibri" pitchFamily="34" charset="-120"/>
-              </a:rPr>
-              <a:t xml:space="preserve"> on Q2 in red is the crosstalk path; GaN has no body diode, so holding the gate below threshold is paid for again across the dead time.</a:t>
+              <a:t xml:space="preserve"> — both run in MATLAB or Octave.</a:t>
             </a:r>
           </a:p>
         </p:txBody>
@@ -13313,7 +12468,7 @@
                 <a:ea typeface="Calibri" pitchFamily="34" charset="-122"/>
                 <a:cs typeface="Calibri" pitchFamily="34" charset="-120"/>
               </a:rPr>
-              <a:t>23</a:t>
+              <a:t>11</a:t>
             </a:r>
             <a:endParaRPr lang="en-US" sz="1000" dirty="0"/>
           </a:p>
@@ -13352,7 +12507,7 @@
                 <a:ea typeface="Calibri" pitchFamily="34" charset="-122"/>
                 <a:cs typeface="Calibri" pitchFamily="34" charset="-120"/>
               </a:rPr>
-              <a:t>MATLAB — the Pareto front and the model check</a:t>
+              <a:t>How it works — one use case, start to finish</a:t>
             </a:r>
             <a:endParaRPr lang="en-US" sz="2800" dirty="0"/>
           </a:p>
@@ -13382,121 +12537,9 @@
           </a:prstGeom>
         </p:spPr>
       </p:pic>
-      <p:sp>
-        <p:nvSpPr>
-          <p:cNvPr id="5" name="Rectangle 4"/>
-          <p:cNvSpPr/>
-          <p:nvPr/>
-        </p:nvSpPr>
-        <p:spPr>
-          <a:xfrm>
-            <a:off x="548640" y="1097280"/>
-            <a:ext cx="4572000" cy="3474720"/>
-          </a:xfrm>
-          <a:prstGeom prst="rect">
-            <a:avLst/>
-          </a:prstGeom>
-          <a:solidFill>
-            <a:srgbClr val="0B0B0B"/>
-          </a:solidFill>
-          <a:ln>
-            <a:solidFill>
-              <a:srgbClr val="0B0B0B"/>
-            </a:solidFill>
-          </a:ln>
-          <a:effectLst/>
-        </p:spPr>
-        <p:style>
-          <a:lnRef idx="1">
-            <a:schemeClr val="accent1"/>
-          </a:lnRef>
-          <a:fillRef idx="3">
-            <a:schemeClr val="accent1"/>
-          </a:fillRef>
-          <a:effectRef idx="2">
-            <a:schemeClr val="accent1"/>
-          </a:effectRef>
-          <a:fontRef idx="minor">
-            <a:schemeClr val="lt1"/>
-          </a:fontRef>
-        </p:style>
-        <p:txBody>
-          <a:bodyPr rtlCol="0" anchor="ctr"/>
-          <a:lstStyle/>
-          <a:p/>
-        </p:txBody>
-      </p:sp>
       <p:pic>
         <p:nvPicPr>
-          <p:cNvPr id="6" name="Picture 5" descr="pareto_matlab.png"/>
-          <p:cNvPicPr>
-            <a:picLocks noChangeAspect="1"/>
-          </p:cNvPicPr>
-          <p:nvPr/>
-        </p:nvPicPr>
-        <p:blipFill>
-          <a:blip r:embed="rId3"/>
-          <a:stretch>
-            <a:fillRect/>
-          </a:stretch>
-        </p:blipFill>
-        <p:spPr>
-          <a:xfrm>
-            <a:off x="640080" y="1188720"/>
-            <a:ext cx="4389120" cy="3291840"/>
-          </a:xfrm>
-          <a:prstGeom prst="rect">
-            <a:avLst/>
-          </a:prstGeom>
-        </p:spPr>
-      </p:pic>
-      <p:sp>
-        <p:nvSpPr>
-          <p:cNvPr id="7" name="Rectangle 6"/>
-          <p:cNvSpPr/>
-          <p:nvPr/>
-        </p:nvSpPr>
-        <p:spPr>
-          <a:xfrm>
-            <a:off x="6355080" y="1097280"/>
-            <a:ext cx="4572000" cy="3474720"/>
-          </a:xfrm>
-          <a:prstGeom prst="rect">
-            <a:avLst/>
-          </a:prstGeom>
-          <a:solidFill>
-            <a:srgbClr val="0B0B0B"/>
-          </a:solidFill>
-          <a:ln>
-            <a:solidFill>
-              <a:srgbClr val="0B0B0B"/>
-            </a:solidFill>
-          </a:ln>
-          <a:effectLst/>
-        </p:spPr>
-        <p:style>
-          <a:lnRef idx="1">
-            <a:schemeClr val="accent1"/>
-          </a:lnRef>
-          <a:fillRef idx="3">
-            <a:schemeClr val="accent1"/>
-          </a:fillRef>
-          <a:effectRef idx="2">
-            <a:schemeClr val="accent1"/>
-          </a:effectRef>
-          <a:fontRef idx="minor">
-            <a:schemeClr val="lt1"/>
-          </a:fontRef>
-        </p:style>
-        <p:txBody>
-          <a:bodyPr rtlCol="0" anchor="ctr"/>
-          <a:lstStyle/>
-          <a:p/>
-        </p:txBody>
-      </p:sp>
-      <p:pic>
-        <p:nvPicPr>
-          <p:cNvPr id="8" name="Picture 7" descr="fig_master_weight.png"/>
+          <p:cNvPr id="5" name="Picture 4" descr="fig_flow.png"/>
           <p:cNvPicPr>
             <a:picLocks noChangeAspect="1"/>
           </p:cNvPicPr>
@@ -13510,8 +12553,8 @@
         </p:blipFill>
         <p:spPr>
           <a:xfrm>
-            <a:off x="6446520" y="1188720"/>
-            <a:ext cx="4389120" cy="3291840"/>
+            <a:off x="1700784" y="1188720"/>
+            <a:ext cx="8792300" cy="4617720"/>
           </a:xfrm>
           <a:prstGeom prst="rect">
             <a:avLst/>
@@ -13520,14 +12563,14 @@
       </p:pic>
       <p:sp>
         <p:nvSpPr>
-          <p:cNvPr id="9" name="TextBox 8"/>
-          <p:cNvSpPr txBox="1"/>
-          <p:nvPr/>
-        </p:nvSpPr>
-        <p:spPr>
-          <a:xfrm>
-            <a:off x="548640" y="4663440"/>
-            <a:ext cx="5440680" cy="960120"/>
+          <p:cNvPr id="6" name="TextBox 5"/>
+          <p:cNvSpPr txBox="1"/>
+          <p:nvPr/>
+        </p:nvSpPr>
+        <p:spPr>
+          <a:xfrm>
+            <a:off x="640080" y="5989320"/>
+            <a:ext cx="10241280" cy="411480"/>
           </a:xfrm>
           <a:prstGeom prst="rect">
             <a:avLst/>
@@ -13548,114 +12591,6 @@
               <a:buNone/>
             </a:pPr>
             <a:r>
-              <a:rPr lang="en-US" sz="1150" b="1" dirty="0">
-                <a:solidFill>
-                  <a:srgbClr val="000000"/>
-                </a:solidFill>
-                <a:latin typeface="Calibri" pitchFamily="34" charset="0"/>
-                <a:ea typeface="Calibri" pitchFamily="34" charset="-122"/>
-                <a:cs typeface="Calibri" pitchFamily="34" charset="-120"/>
-              </a:rPr>
-              <a:t xml:space="preserve">720 words, 504 feasible (70 %).</a:t>
-            </a:r>
-            <a:r>
-              <a:rPr lang="en-US" sz="1150" dirty="0">
-                <a:solidFill>
-                  <a:srgbClr val="000000"/>
-                </a:solidFill>
-                <a:latin typeface="Calibri" pitchFamily="34" charset="0"/>
-                <a:ea typeface="Calibri" pitchFamily="34" charset="-122"/>
-                <a:cs typeface="Calibri" pitchFamily="34" charset="-120"/>
-              </a:rPr>
-              <a:t xml:space="preserve"> A 7-word Pareto front; buying one point of overshoot back costs 0.039 µJ. The green marker is the word the cost function picks.</a:t>
-            </a:r>
-          </a:p>
-        </p:txBody>
-      </p:sp>
-      <p:sp>
-        <p:nvSpPr>
-          <p:cNvPr id="10" name="TextBox 9"/>
-          <p:cNvSpPr txBox="1"/>
-          <p:nvPr/>
-        </p:nvSpPr>
-        <p:spPr>
-          <a:xfrm>
-            <a:off x="6355080" y="4663440"/>
-            <a:ext cx="5257800" cy="960120"/>
-          </a:xfrm>
-          <a:prstGeom prst="rect">
-            <a:avLst/>
-          </a:prstGeom>
-          <a:noFill/>
-        </p:spPr>
-        <p:txBody>
-          <a:bodyPr wrap="square" lIns="0" tIns="0" rIns="0" bIns="0">
-            <a:spAutoFit/>
-          </a:bodyPr>
-          <a:lstStyle/>
-          <a:p>
-            <a:pPr marL="177800" indent="0">
-              <a:spcAft>
-                <a:spcPts val="0"/>
-              </a:spcAft>
-              <a:buSzPct val="100000"/>
-              <a:buNone/>
-            </a:pPr>
-            <a:r>
-              <a:rPr lang="en-US" sz="1150" b="1" dirty="0">
-                <a:solidFill>
-                  <a:srgbClr val="000000"/>
-                </a:solidFill>
-                <a:latin typeface="Calibri" pitchFamily="34" charset="0"/>
-                <a:ea typeface="Calibri" pitchFamily="34" charset="-122"/>
-                <a:cs typeface="Calibri" pitchFamily="34" charset="-120"/>
-              </a:rPr>
-              <a:t xml:space="preserve">(A) stays above (B) at every weight tested.</a:t>
-            </a:r>
-            <a:r>
-              <a:rPr lang="en-US" sz="1150" dirty="0">
-                <a:solidFill>
-                  <a:srgbClr val="000000"/>
-                </a:solidFill>
-                <a:latin typeface="Calibri" pitchFamily="34" charset="0"/>
-                <a:ea typeface="Calibri" pitchFamily="34" charset="-122"/>
-                <a:cs typeface="Calibri" pitchFamily="34" charset="-120"/>
-              </a:rPr>
-              <a:t xml:space="preserve"> Choosing the word well is worth 22.5–29.0 % of baseline across the whole range; adapting it per operating point 1.4–12.7 %. The ordering never flips.</a:t>
-            </a:r>
-          </a:p>
-        </p:txBody>
-      </p:sp>
-      <p:sp>
-        <p:nvSpPr>
-          <p:cNvPr id="11" name="TextBox 10"/>
-          <p:cNvSpPr txBox="1"/>
-          <p:nvPr/>
-        </p:nvSpPr>
-        <p:spPr>
-          <a:xfrm>
-            <a:off x="548640" y="5742432"/>
-            <a:ext cx="11064240" cy="685800"/>
-          </a:xfrm>
-          <a:prstGeom prst="rect">
-            <a:avLst/>
-          </a:prstGeom>
-          <a:noFill/>
-        </p:spPr>
-        <p:txBody>
-          <a:bodyPr wrap="square" lIns="0" tIns="0" rIns="0" bIns="0">
-            <a:spAutoFit/>
-          </a:bodyPr>
-          <a:lstStyle/>
-          <a:p>
-            <a:pPr marL="177800" indent="0">
-              <a:spcAft>
-                <a:spcPts val="0"/>
-              </a:spcAft>
-              <a:buSzPct val="100000"/>
-              <a:buNone/>
-            </a:pPr>
-            <a:r>
               <a:rPr lang="en-US" sz="1200" b="1" dirty="0">
                 <a:solidFill>
                   <a:srgbClr val="000000"/>
@@ -13664,7 +12599,7 @@
                 <a:ea typeface="Calibri" pitchFamily="34" charset="-122"/>
                 <a:cs typeface="Calibri" pitchFamily="34" charset="-120"/>
               </a:rPr>
-              <a:t xml:space="preserve">Dead-time margin saturates at about 15 ns</a:t>
+              <a:t xml:space="preserve">Read the top row as the controller and the bottom row as the circuit. </a:t>
             </a:r>
             <a:r>
               <a:rPr lang="en-US" sz="1200" dirty="0">
@@ -13675,51 +12610,7 @@
                 <a:ea typeface="Calibri" pitchFamily="34" charset="-122"/>
                 <a:cs typeface="Calibri" pitchFamily="34" charset="-120"/>
               </a:rPr>
-              <a:t xml:space="preserve">: the marginal gain runs 269 → 31.5 → 1.8 → 0.0 mV/ns across 10/15/25/35 ns. Past 15 ns dead time costs conduction loss and buys nothing. </a:t>
-            </a:r>
-            <a:r>
-              <a:rPr lang="en-US" sz="1200" b="1" dirty="0">
-                <a:solidFill>
-                  <a:srgbClr val="000000"/>
-                </a:solidFill>
-                <a:latin typeface="Calibri" pitchFamily="34" charset="0"/>
-                <a:ea typeface="Calibri" pitchFamily="34" charset="-122"/>
-                <a:cs typeface="Calibri" pitchFamily="34" charset="-120"/>
-              </a:rPr>
-              <a:t xml:space="preserve">results/gan_analysis.m</a:t>
-            </a:r>
-            <a:r>
-              <a:rPr lang="en-US" sz="1200" dirty="0">
-                <a:solidFill>
-                  <a:srgbClr val="000000"/>
-                </a:solidFill>
-                <a:latin typeface="Calibri" pitchFamily="34" charset="0"/>
-                <a:ea typeface="Calibri" pitchFamily="34" charset="-122"/>
-                <a:cs typeface="Calibri" pitchFamily="34" charset="-120"/>
-              </a:rPr>
-              <a:t xml:space="preserve">, </a:t>
-            </a:r>
-            <a:r>
-              <a:rPr lang="en-US" sz="1200" b="1" dirty="0">
-                <a:solidFill>
-                  <a:srgbClr val="000000"/>
-                </a:solidFill>
-                <a:latin typeface="Calibri" pitchFamily="34" charset="0"/>
-                <a:ea typeface="Calibri" pitchFamily="34" charset="-122"/>
-                <a:cs typeface="Calibri" pitchFamily="34" charset="-120"/>
-              </a:rPr>
-              <a:t xml:space="preserve">results/gan_master.m</a:t>
-            </a:r>
-            <a:r>
-              <a:rPr lang="en-US" sz="1200" dirty="0">
-                <a:solidFill>
-                  <a:srgbClr val="000000"/>
-                </a:solidFill>
-                <a:latin typeface="Calibri" pitchFamily="34" charset="0"/>
-                <a:ea typeface="Calibri" pitchFamily="34" charset="-122"/>
-                <a:cs typeface="Calibri" pitchFamily="34" charset="-120"/>
-              </a:rPr>
-              <a:t xml:space="preserve"> — both run in MATLAB or Octave.</a:t>
+              <a:t xml:space="preserve">The one shaded diamond is the entire adaptive machinery.</a:t>
             </a:r>
           </a:p>
         </p:txBody>
@@ -13775,7 +12666,7 @@
                 <a:ea typeface="Calibri" pitchFamily="34" charset="-122"/>
                 <a:cs typeface="Calibri" pitchFamily="34" charset="-120"/>
               </a:rPr>
-              <a:t>11</a:t>
+              <a:t>18</a:t>
             </a:r>
             <a:endParaRPr lang="en-US" sz="1000" dirty="0"/>
           </a:p>
@@ -13814,7 +12705,7 @@
                 <a:ea typeface="Calibri" pitchFamily="34" charset="-122"/>
                 <a:cs typeface="Calibri" pitchFamily="34" charset="-120"/>
               </a:rPr>
-              <a:t>How it works — one use case, start to finish</a:t>
+              <a:t>Tools — and what each one produced</a:t>
             </a:r>
             <a:endParaRPr lang="en-US" sz="2800" dirty="0"/>
           </a:p>
@@ -13844,40 +12735,16 @@
           </a:prstGeom>
         </p:spPr>
       </p:pic>
-      <p:pic>
-        <p:nvPicPr>
-          <p:cNvPr id="5" name="Picture 4" descr="fig_flow.png"/>
-          <p:cNvPicPr>
-            <a:picLocks noChangeAspect="1"/>
-          </p:cNvPicPr>
-          <p:nvPr/>
-        </p:nvPicPr>
-        <p:blipFill>
-          <a:blip r:embed="rId4"/>
-          <a:stretch>
-            <a:fillRect/>
-          </a:stretch>
-        </p:blipFill>
-        <p:spPr>
-          <a:xfrm>
-            <a:off x="1700784" y="1188720"/>
-            <a:ext cx="8792300" cy="4617720"/>
-          </a:xfrm>
-          <a:prstGeom prst="rect">
-            <a:avLst/>
-          </a:prstGeom>
-        </p:spPr>
-      </p:pic>
-      <p:sp>
-        <p:nvSpPr>
-          <p:cNvPr id="6" name="TextBox 5"/>
-          <p:cNvSpPr txBox="1"/>
-          <p:nvPr/>
-        </p:nvSpPr>
-        <p:spPr>
-          <a:xfrm>
-            <a:off x="640080" y="5989320"/>
-            <a:ext cx="10241280" cy="411480"/>
+      <p:sp>
+        <p:nvSpPr>
+          <p:cNvPr id="5" name="TextBox 4"/>
+          <p:cNvSpPr txBox="1"/>
+          <p:nvPr/>
+        </p:nvSpPr>
+        <p:spPr>
+          <a:xfrm>
+            <a:off x="640080" y="1417320"/>
+            <a:ext cx="2788920" cy="384048"/>
           </a:xfrm>
           <a:prstGeom prst="rect">
             <a:avLst/>
@@ -13898,6 +12765,92 @@
               <a:buNone/>
             </a:pPr>
             <a:r>
+              <a:rPr lang="en-US" sz="1350" b="1" dirty="0">
+                <a:solidFill>
+                  <a:srgbClr val="000000"/>
+                </a:solidFill>
+                <a:latin typeface="Calibri" pitchFamily="34" charset="0"/>
+                <a:ea typeface="Calibri" pitchFamily="34" charset="-122"/>
+                <a:cs typeface="Calibri" pitchFamily="34" charset="-120"/>
+              </a:rPr>
+              <a:t xml:space="preserve">ngspice 42</a:t>
+            </a:r>
+          </a:p>
+        </p:txBody>
+      </p:sp>
+      <p:sp>
+        <p:nvSpPr>
+          <p:cNvPr id="6" name="TextBox 5"/>
+          <p:cNvSpPr txBox="1"/>
+          <p:nvPr/>
+        </p:nvSpPr>
+        <p:spPr>
+          <a:xfrm>
+            <a:off x="3520440" y="1417320"/>
+            <a:ext cx="3246120" cy="384048"/>
+          </a:xfrm>
+          <a:prstGeom prst="rect">
+            <a:avLst/>
+          </a:prstGeom>
+          <a:noFill/>
+        </p:spPr>
+        <p:txBody>
+          <a:bodyPr wrap="square" lIns="0" tIns="0" rIns="0" bIns="0">
+            <a:spAutoFit/>
+          </a:bodyPr>
+          <a:lstStyle/>
+          <a:p>
+            <a:pPr marL="177800" indent="0">
+              <a:spcAft>
+                <a:spcPts val="0"/>
+              </a:spcAft>
+              <a:buSzPct val="100000"/>
+              <a:buNone/>
+            </a:pPr>
+            <a:r>
+              <a:rPr lang="en-US" sz="1200" dirty="0">
+                <a:solidFill>
+                  <a:srgbClr val="000000"/>
+                </a:solidFill>
+                <a:latin typeface="Calibri" pitchFamily="34" charset="0"/>
+                <a:ea typeface="Calibri" pitchFamily="34" charset="-122"/>
+                <a:cs typeface="Calibri" pitchFamily="34" charset="-120"/>
+              </a:rPr>
+              <a:t xml:space="preserve">every transient in the study</a:t>
+            </a:r>
+          </a:p>
+        </p:txBody>
+      </p:sp>
+      <p:sp>
+        <p:nvSpPr>
+          <p:cNvPr id="7" name="TextBox 6"/>
+          <p:cNvSpPr txBox="1"/>
+          <p:nvPr/>
+        </p:nvSpPr>
+        <p:spPr>
+          <a:xfrm>
+            <a:off x="6858000" y="1417320"/>
+            <a:ext cx="4754880" cy="384048"/>
+          </a:xfrm>
+          <a:prstGeom prst="rect">
+            <a:avLst/>
+          </a:prstGeom>
+          <a:noFill/>
+        </p:spPr>
+        <p:txBody>
+          <a:bodyPr wrap="square" lIns="0" tIns="0" rIns="0" bIns="0">
+            <a:spAutoFit/>
+          </a:bodyPr>
+          <a:lstStyle/>
+          <a:p>
+            <a:pPr marL="177800" indent="0">
+              <a:spcAft>
+                <a:spcPts val="0"/>
+              </a:spcAft>
+              <a:buSzPct val="100000"/>
+              <a:buNone/>
+            </a:pPr>
+            <a:r>
               <a:rPr lang="en-US" sz="1200" b="1" dirty="0">
                 <a:solidFill>
                   <a:srgbClr val="000000"/>
@@ -13906,8 +12859,83 @@
                 <a:ea typeface="Calibri" pitchFamily="34" charset="-122"/>
                 <a:cs typeface="Calibri" pitchFamily="34" charset="-120"/>
               </a:rPr>
-              <a:t xml:space="preserve">Read the top row as the controller and the bottom row as the circuit. </a:t>
-            </a:r>
+              <a:t xml:space="preserve">34,622 simulations · 1.65 V spurious · 2.58 V margin · 5.2 % ceiling</a:t>
+            </a:r>
+          </a:p>
+        </p:txBody>
+      </p:sp>
+      <p:sp>
+        <p:nvSpPr>
+          <p:cNvPr id="8" name="TextBox 7"/>
+          <p:cNvSpPr txBox="1"/>
+          <p:nvPr/>
+        </p:nvSpPr>
+        <p:spPr>
+          <a:xfrm>
+            <a:off x="640080" y="1984248"/>
+            <a:ext cx="2788920" cy="384048"/>
+          </a:xfrm>
+          <a:prstGeom prst="rect">
+            <a:avLst/>
+          </a:prstGeom>
+          <a:noFill/>
+        </p:spPr>
+        <p:txBody>
+          <a:bodyPr wrap="square" lIns="0" tIns="0" rIns="0" bIns="0">
+            <a:spAutoFit/>
+          </a:bodyPr>
+          <a:lstStyle/>
+          <a:p>
+            <a:pPr marL="177800" indent="0">
+              <a:spcAft>
+                <a:spcPts val="0"/>
+              </a:spcAft>
+              <a:buSzPct val="100000"/>
+              <a:buNone/>
+            </a:pPr>
+            <a:r>
+              <a:rPr lang="en-US" sz="1350" b="1" dirty="0">
+                <a:solidFill>
+                  <a:srgbClr val="000000"/>
+                </a:solidFill>
+                <a:latin typeface="Calibri" pitchFamily="34" charset="0"/>
+                <a:ea typeface="Calibri" pitchFamily="34" charset="-122"/>
+                <a:cs typeface="Calibri" pitchFamily="34" charset="-120"/>
+              </a:rPr>
+              <a:t xml:space="preserve">LTspice 24</a:t>
+            </a:r>
+          </a:p>
+        </p:txBody>
+      </p:sp>
+      <p:sp>
+        <p:nvSpPr>
+          <p:cNvPr id="9" name="TextBox 8"/>
+          <p:cNvSpPr txBox="1"/>
+          <p:nvPr/>
+        </p:nvSpPr>
+        <p:spPr>
+          <a:xfrm>
+            <a:off x="3520440" y="1984248"/>
+            <a:ext cx="3246120" cy="384048"/>
+          </a:xfrm>
+          <a:prstGeom prst="rect">
+            <a:avLst/>
+          </a:prstGeom>
+          <a:noFill/>
+        </p:spPr>
+        <p:txBody>
+          <a:bodyPr wrap="square" lIns="0" tIns="0" rIns="0" bIns="0">
+            <a:spAutoFit/>
+          </a:bodyPr>
+          <a:lstStyle/>
+          <a:p>
+            <a:pPr marL="177800" indent="0">
+              <a:spcAft>
+                <a:spcPts val="0"/>
+              </a:spcAft>
+              <a:buSzPct val="100000"/>
+              <a:buNone/>
+            </a:pPr>
             <a:r>
               <a:rPr lang="en-US" sz="1200" dirty="0">
                 <a:solidFill>
@@ -13917,7 +12945,749 @@
                 <a:ea typeface="Calibri" pitchFamily="34" charset="-122"/>
                 <a:cs typeface="Calibri" pitchFamily="34" charset="-120"/>
               </a:rPr>
-              <a:t xml:space="preserve">The one shaded diamond is the entire adaptive machinery.</a:t>
+              <a:t xml:space="preserve">independent re-run of the shipped netlists</a:t>
+            </a:r>
+          </a:p>
+        </p:txBody>
+      </p:sp>
+      <p:sp>
+        <p:nvSpPr>
+          <p:cNvPr id="10" name="TextBox 9"/>
+          <p:cNvSpPr txBox="1"/>
+          <p:nvPr/>
+        </p:nvSpPr>
+        <p:spPr>
+          <a:xfrm>
+            <a:off x="6858000" y="1984248"/>
+            <a:ext cx="4754880" cy="384048"/>
+          </a:xfrm>
+          <a:prstGeom prst="rect">
+            <a:avLst/>
+          </a:prstGeom>
+          <a:noFill/>
+        </p:spPr>
+        <p:txBody>
+          <a:bodyPr wrap="square" lIns="0" tIns="0" rIns="0" bIns="0">
+            <a:spAutoFit/>
+          </a:bodyPr>
+          <a:lstStyle/>
+          <a:p>
+            <a:pPr marL="177800" indent="0">
+              <a:spcAft>
+                <a:spcPts val="0"/>
+              </a:spcAft>
+              <a:buSzPct val="100000"/>
+              <a:buNone/>
+            </a:pPr>
+            <a:r>
+              <a:rPr lang="en-US" sz="1200" b="1" dirty="0">
+                <a:solidFill>
+                  <a:srgbClr val="000000"/>
+                </a:solidFill>
+                <a:latin typeface="Calibri" pitchFamily="34" charset="0"/>
+                <a:ea typeface="Calibri" pitchFamily="34" charset="-122"/>
+                <a:cs typeface="Calibri" pitchFamily="34" charset="-120"/>
+              </a:rPr>
+              <a:t xml:space="preserve">1.6487 / 0.8282 / −1.1768 V — matches ngspice within 2 mV</a:t>
+            </a:r>
+          </a:p>
+        </p:txBody>
+      </p:sp>
+      <p:sp>
+        <p:nvSpPr>
+          <p:cNvPr id="11" name="TextBox 10"/>
+          <p:cNvSpPr txBox="1"/>
+          <p:nvPr/>
+        </p:nvSpPr>
+        <p:spPr>
+          <a:xfrm>
+            <a:off x="640080" y="2551176"/>
+            <a:ext cx="2788920" cy="384048"/>
+          </a:xfrm>
+          <a:prstGeom prst="rect">
+            <a:avLst/>
+          </a:prstGeom>
+          <a:noFill/>
+        </p:spPr>
+        <p:txBody>
+          <a:bodyPr wrap="square" lIns="0" tIns="0" rIns="0" bIns="0">
+            <a:spAutoFit/>
+          </a:bodyPr>
+          <a:lstStyle/>
+          <a:p>
+            <a:pPr marL="177800" indent="0">
+              <a:spcAft>
+                <a:spcPts val="0"/>
+              </a:spcAft>
+              <a:buSzPct val="100000"/>
+              <a:buNone/>
+            </a:pPr>
+            <a:r>
+              <a:rPr lang="en-US" sz="1350" b="1" dirty="0">
+                <a:solidFill>
+                  <a:srgbClr val="000000"/>
+                </a:solidFill>
+                <a:latin typeface="Calibri" pitchFamily="34" charset="0"/>
+                <a:ea typeface="Calibri" pitchFamily="34" charset="-122"/>
+                <a:cs typeface="Calibri" pitchFamily="34" charset="-120"/>
+              </a:rPr>
+              <a:t xml:space="preserve">MATLAB Online</a:t>
+            </a:r>
+          </a:p>
+        </p:txBody>
+      </p:sp>
+      <p:sp>
+        <p:nvSpPr>
+          <p:cNvPr id="12" name="TextBox 11"/>
+          <p:cNvSpPr txBox="1"/>
+          <p:nvPr/>
+        </p:nvSpPr>
+        <p:spPr>
+          <a:xfrm>
+            <a:off x="3520440" y="2551176"/>
+            <a:ext cx="3246120" cy="384048"/>
+          </a:xfrm>
+          <a:prstGeom prst="rect">
+            <a:avLst/>
+          </a:prstGeom>
+          <a:noFill/>
+        </p:spPr>
+        <p:txBody>
+          <a:bodyPr wrap="square" lIns="0" tIns="0" rIns="0" bIns="0">
+            <a:spAutoFit/>
+          </a:bodyPr>
+          <a:lstStyle/>
+          <a:p>
+            <a:pPr marL="177800" indent="0">
+              <a:spcAft>
+                <a:spcPts val="0"/>
+              </a:spcAft>
+              <a:buSzPct val="100000"/>
+              <a:buNone/>
+            </a:pPr>
+            <a:r>
+              <a:rPr lang="en-US" sz="1200" dirty="0">
+                <a:solidFill>
+                  <a:srgbClr val="000000"/>
+                </a:solidFill>
+                <a:latin typeface="Calibri" pitchFamily="34" charset="0"/>
+                <a:ea typeface="Calibri" pitchFamily="34" charset="-122"/>
+                <a:cs typeface="Calibri" pitchFamily="34" charset="-120"/>
+              </a:rPr>
+              <a:t xml:space="preserve">independent re-analysis of the same CSVs</a:t>
+            </a:r>
+          </a:p>
+        </p:txBody>
+      </p:sp>
+      <p:sp>
+        <p:nvSpPr>
+          <p:cNvPr id="13" name="TextBox 12"/>
+          <p:cNvSpPr txBox="1"/>
+          <p:nvPr/>
+        </p:nvSpPr>
+        <p:spPr>
+          <a:xfrm>
+            <a:off x="6858000" y="2551176"/>
+            <a:ext cx="4754880" cy="384048"/>
+          </a:xfrm>
+          <a:prstGeom prst="rect">
+            <a:avLst/>
+          </a:prstGeom>
+          <a:noFill/>
+        </p:spPr>
+        <p:txBody>
+          <a:bodyPr wrap="square" lIns="0" tIns="0" rIns="0" bIns="0">
+            <a:spAutoFit/>
+          </a:bodyPr>
+          <a:lstStyle/>
+          <a:p>
+            <a:pPr marL="177800" indent="0">
+              <a:spcAft>
+                <a:spcPts val="0"/>
+              </a:spcAft>
+              <a:buSzPct val="100000"/>
+              <a:buNone/>
+            </a:pPr>
+            <a:r>
+              <a:rPr lang="en-US" sz="1200" b="1" dirty="0">
+                <a:solidFill>
+                  <a:srgbClr val="000000"/>
+                </a:solidFill>
+                <a:latin typeface="Calibri" pitchFamily="34" charset="0"/>
+                <a:ea typeface="Calibri" pitchFamily="34" charset="-122"/>
+                <a:cs typeface="Calibri" pitchFamily="34" charset="-120"/>
+              </a:rPr>
+              <a:t xml:space="preserve">504 of 720 feasible · 7-word Pareto front · 0.039 µJ per point</a:t>
+            </a:r>
+          </a:p>
+        </p:txBody>
+      </p:sp>
+      <p:sp>
+        <p:nvSpPr>
+          <p:cNvPr id="14" name="TextBox 13"/>
+          <p:cNvSpPr txBox="1"/>
+          <p:nvPr/>
+        </p:nvSpPr>
+        <p:spPr>
+          <a:xfrm>
+            <a:off x="640080" y="3118104"/>
+            <a:ext cx="2788920" cy="384048"/>
+          </a:xfrm>
+          <a:prstGeom prst="rect">
+            <a:avLst/>
+          </a:prstGeom>
+          <a:noFill/>
+        </p:spPr>
+        <p:txBody>
+          <a:bodyPr wrap="square" lIns="0" tIns="0" rIns="0" bIns="0">
+            <a:spAutoFit/>
+          </a:bodyPr>
+          <a:lstStyle/>
+          <a:p>
+            <a:pPr marL="177800" indent="0">
+              <a:spcAft>
+                <a:spcPts val="0"/>
+              </a:spcAft>
+              <a:buSzPct val="100000"/>
+              <a:buNone/>
+            </a:pPr>
+            <a:r>
+              <a:rPr lang="en-US" sz="1350" b="1" dirty="0">
+                <a:solidFill>
+                  <a:srgbClr val="000000"/>
+                </a:solidFill>
+                <a:latin typeface="Calibri" pitchFamily="34" charset="0"/>
+                <a:ea typeface="Calibri" pitchFamily="34" charset="-122"/>
+                <a:cs typeface="Calibri" pitchFamily="34" charset="-120"/>
+              </a:rPr>
+              <a:t xml:space="preserve">GNU Octave 11.3</a:t>
+            </a:r>
+          </a:p>
+        </p:txBody>
+      </p:sp>
+      <p:sp>
+        <p:nvSpPr>
+          <p:cNvPr id="15" name="TextBox 14"/>
+          <p:cNvSpPr txBox="1"/>
+          <p:nvPr/>
+        </p:nvSpPr>
+        <p:spPr>
+          <a:xfrm>
+            <a:off x="3520440" y="3118104"/>
+            <a:ext cx="3246120" cy="384048"/>
+          </a:xfrm>
+          <a:prstGeom prst="rect">
+            <a:avLst/>
+          </a:prstGeom>
+          <a:noFill/>
+        </p:spPr>
+        <p:txBody>
+          <a:bodyPr wrap="square" lIns="0" tIns="0" rIns="0" bIns="0">
+            <a:spAutoFit/>
+          </a:bodyPr>
+          <a:lstStyle/>
+          <a:p>
+            <a:pPr marL="177800" indent="0">
+              <a:spcAft>
+                <a:spcPts val="0"/>
+              </a:spcAft>
+              <a:buSzPct val="100000"/>
+              <a:buNone/>
+            </a:pPr>
+            <a:r>
+              <a:rPr lang="en-US" sz="1200" dirty="0">
+                <a:solidFill>
+                  <a:srgbClr val="000000"/>
+                </a:solidFill>
+                <a:latin typeface="Calibri" pitchFamily="34" charset="0"/>
+                <a:ea typeface="Calibri" pitchFamily="34" charset="-122"/>
+                <a:cs typeface="Calibri" pitchFamily="34" charset="-120"/>
+              </a:rPr>
+              <a:t xml:space="preserve">second run of the same MATLAB scripts</a:t>
+            </a:r>
+          </a:p>
+        </p:txBody>
+      </p:sp>
+      <p:sp>
+        <p:nvSpPr>
+          <p:cNvPr id="16" name="TextBox 15"/>
+          <p:cNvSpPr txBox="1"/>
+          <p:nvPr/>
+        </p:nvSpPr>
+        <p:spPr>
+          <a:xfrm>
+            <a:off x="6858000" y="3118104"/>
+            <a:ext cx="4754880" cy="384048"/>
+          </a:xfrm>
+          <a:prstGeom prst="rect">
+            <a:avLst/>
+          </a:prstGeom>
+          <a:noFill/>
+        </p:spPr>
+        <p:txBody>
+          <a:bodyPr wrap="square" lIns="0" tIns="0" rIns="0" bIns="0">
+            <a:spAutoFit/>
+          </a:bodyPr>
+          <a:lstStyle/>
+          <a:p>
+            <a:pPr marL="177800" indent="0">
+              <a:spcAft>
+                <a:spcPts val="0"/>
+              </a:spcAft>
+              <a:buSzPct val="100000"/>
+              <a:buNone/>
+            </a:pPr>
+            <a:r>
+              <a:rPr lang="en-US" sz="1200" b="1" dirty="0">
+                <a:solidFill>
+                  <a:srgbClr val="000000"/>
+                </a:solidFill>
+                <a:latin typeface="Calibri" pitchFamily="34" charset="0"/>
+                <a:ea typeface="Calibri" pitchFamily="34" charset="-122"/>
+                <a:cs typeface="Calibri" pitchFamily="34" charset="-120"/>
+              </a:rPr>
+              <a:t xml:space="preserve">agrees with MATLAB to the last printed digit</a:t>
+            </a:r>
+          </a:p>
+        </p:txBody>
+      </p:sp>
+      <p:sp>
+        <p:nvSpPr>
+          <p:cNvPr id="17" name="TextBox 16"/>
+          <p:cNvSpPr txBox="1"/>
+          <p:nvPr/>
+        </p:nvSpPr>
+        <p:spPr>
+          <a:xfrm>
+            <a:off x="640080" y="3685032"/>
+            <a:ext cx="2788920" cy="384048"/>
+          </a:xfrm>
+          <a:prstGeom prst="rect">
+            <a:avLst/>
+          </a:prstGeom>
+          <a:noFill/>
+        </p:spPr>
+        <p:txBody>
+          <a:bodyPr wrap="square" lIns="0" tIns="0" rIns="0" bIns="0">
+            <a:spAutoFit/>
+          </a:bodyPr>
+          <a:lstStyle/>
+          <a:p>
+            <a:pPr marL="177800" indent="0">
+              <a:spcAft>
+                <a:spcPts val="0"/>
+              </a:spcAft>
+              <a:buSzPct val="100000"/>
+              <a:buNone/>
+            </a:pPr>
+            <a:r>
+              <a:rPr lang="en-US" sz="1350" b="1" dirty="0">
+                <a:solidFill>
+                  <a:srgbClr val="000000"/>
+                </a:solidFill>
+                <a:latin typeface="Calibri" pitchFamily="34" charset="0"/>
+                <a:ea typeface="Calibri" pitchFamily="34" charset="-122"/>
+                <a:cs typeface="Calibri" pitchFamily="34" charset="-120"/>
+              </a:rPr>
+              <a:t xml:space="preserve">Icarus Verilog</a:t>
+            </a:r>
+          </a:p>
+        </p:txBody>
+      </p:sp>
+      <p:sp>
+        <p:nvSpPr>
+          <p:cNvPr id="18" name="TextBox 17"/>
+          <p:cNvSpPr txBox="1"/>
+          <p:nvPr/>
+        </p:nvSpPr>
+        <p:spPr>
+          <a:xfrm>
+            <a:off x="3520440" y="3685032"/>
+            <a:ext cx="3246120" cy="384048"/>
+          </a:xfrm>
+          <a:prstGeom prst="rect">
+            <a:avLst/>
+          </a:prstGeom>
+          <a:noFill/>
+        </p:spPr>
+        <p:txBody>
+          <a:bodyPr wrap="square" lIns="0" tIns="0" rIns="0" bIns="0">
+            <a:spAutoFit/>
+          </a:bodyPr>
+          <a:lstStyle/>
+          <a:p>
+            <a:pPr marL="177800" indent="0">
+              <a:spcAft>
+                <a:spcPts val="0"/>
+              </a:spcAft>
+              <a:buSzPct val="100000"/>
+              <a:buNone/>
+            </a:pPr>
+            <a:r>
+              <a:rPr lang="en-US" sz="1200" dirty="0">
+                <a:solidFill>
+                  <a:srgbClr val="000000"/>
+                </a:solidFill>
+                <a:latin typeface="Calibri" pitchFamily="34" charset="0"/>
+                <a:ea typeface="Calibri" pitchFamily="34" charset="-122"/>
+                <a:cs typeface="Calibri" pitchFamily="34" charset="-120"/>
+              </a:rPr>
+              <a:t xml:space="preserve">RTL verification and mutation testing</a:t>
+            </a:r>
+          </a:p>
+        </p:txBody>
+      </p:sp>
+      <p:sp>
+        <p:nvSpPr>
+          <p:cNvPr id="19" name="TextBox 18"/>
+          <p:cNvSpPr txBox="1"/>
+          <p:nvPr/>
+        </p:nvSpPr>
+        <p:spPr>
+          <a:xfrm>
+            <a:off x="6858000" y="3685032"/>
+            <a:ext cx="4754880" cy="384048"/>
+          </a:xfrm>
+          <a:prstGeom prst="rect">
+            <a:avLst/>
+          </a:prstGeom>
+          <a:noFill/>
+        </p:spPr>
+        <p:txBody>
+          <a:bodyPr wrap="square" lIns="0" tIns="0" rIns="0" bIns="0">
+            <a:spAutoFit/>
+          </a:bodyPr>
+          <a:lstStyle/>
+          <a:p>
+            <a:pPr marL="177800" indent="0">
+              <a:spcAft>
+                <a:spcPts val="0"/>
+              </a:spcAft>
+              <a:buSzPct val="100000"/>
+              <a:buNone/>
+            </a:pPr>
+            <a:r>
+              <a:rPr lang="en-US" sz="1200" b="1" dirty="0">
+                <a:solidFill>
+                  <a:srgbClr val="000000"/>
+                </a:solidFill>
+                <a:latin typeface="Calibri" pitchFamily="34" charset="0"/>
+                <a:ea typeface="Calibri" pitchFamily="34" charset="-122"/>
+                <a:cs typeface="Calibri" pitchFamily="34" charset="-120"/>
+              </a:rPr>
+              <a:t xml:space="preserve">8 asserted properties pass · injected shoot-through caught 221×</a:t>
+            </a:r>
+          </a:p>
+        </p:txBody>
+      </p:sp>
+      <p:sp>
+        <p:nvSpPr>
+          <p:cNvPr id="20" name="TextBox 19"/>
+          <p:cNvSpPr txBox="1"/>
+          <p:nvPr/>
+        </p:nvSpPr>
+        <p:spPr>
+          <a:xfrm>
+            <a:off x="640080" y="4251960"/>
+            <a:ext cx="2788920" cy="384048"/>
+          </a:xfrm>
+          <a:prstGeom prst="rect">
+            <a:avLst/>
+          </a:prstGeom>
+          <a:noFill/>
+        </p:spPr>
+        <p:txBody>
+          <a:bodyPr wrap="square" lIns="0" tIns="0" rIns="0" bIns="0">
+            <a:spAutoFit/>
+          </a:bodyPr>
+          <a:lstStyle/>
+          <a:p>
+            <a:pPr marL="177800" indent="0">
+              <a:spcAft>
+                <a:spcPts val="0"/>
+              </a:spcAft>
+              <a:buSzPct val="100000"/>
+              <a:buNone/>
+            </a:pPr>
+            <a:r>
+              <a:rPr lang="en-US" sz="1350" b="1" dirty="0">
+                <a:solidFill>
+                  <a:srgbClr val="000000"/>
+                </a:solidFill>
+                <a:latin typeface="Calibri" pitchFamily="34" charset="0"/>
+                <a:ea typeface="Calibri" pitchFamily="34" charset="-122"/>
+                <a:cs typeface="Calibri" pitchFamily="34" charset="-120"/>
+              </a:rPr>
+              <a:t xml:space="preserve">Xilinx Vivado 2024.1.2</a:t>
+            </a:r>
+          </a:p>
+        </p:txBody>
+      </p:sp>
+      <p:sp>
+        <p:nvSpPr>
+          <p:cNvPr id="21" name="TextBox 20"/>
+          <p:cNvSpPr txBox="1"/>
+          <p:nvPr/>
+        </p:nvSpPr>
+        <p:spPr>
+          <a:xfrm>
+            <a:off x="3520440" y="4251960"/>
+            <a:ext cx="3246120" cy="384048"/>
+          </a:xfrm>
+          <a:prstGeom prst="rect">
+            <a:avLst/>
+          </a:prstGeom>
+          <a:noFill/>
+        </p:spPr>
+        <p:txBody>
+          <a:bodyPr wrap="square" lIns="0" tIns="0" rIns="0" bIns="0">
+            <a:spAutoFit/>
+          </a:bodyPr>
+          <a:lstStyle/>
+          <a:p>
+            <a:pPr marL="177800" indent="0">
+              <a:spcAft>
+                <a:spcPts val="0"/>
+              </a:spcAft>
+              <a:buSzPct val="100000"/>
+              <a:buNone/>
+            </a:pPr>
+            <a:r>
+              <a:rPr lang="en-US" sz="1200" dirty="0">
+                <a:solidFill>
+                  <a:srgbClr val="000000"/>
+                </a:solidFill>
+                <a:latin typeface="Calibri" pitchFamily="34" charset="0"/>
+                <a:ea typeface="Calibri" pitchFamily="34" charset="-122"/>
+                <a:cs typeface="Calibri" pitchFamily="34" charset="-120"/>
+              </a:rPr>
+              <a:t xml:space="preserve">FPGA synthesis and timing on xc7a35t</a:t>
+            </a:r>
+          </a:p>
+        </p:txBody>
+      </p:sp>
+      <p:sp>
+        <p:nvSpPr>
+          <p:cNvPr id="22" name="TextBox 21"/>
+          <p:cNvSpPr txBox="1"/>
+          <p:nvPr/>
+        </p:nvSpPr>
+        <p:spPr>
+          <a:xfrm>
+            <a:off x="6858000" y="4251960"/>
+            <a:ext cx="4754880" cy="384048"/>
+          </a:xfrm>
+          <a:prstGeom prst="rect">
+            <a:avLst/>
+          </a:prstGeom>
+          <a:noFill/>
+        </p:spPr>
+        <p:txBody>
+          <a:bodyPr wrap="square" lIns="0" tIns="0" rIns="0" bIns="0">
+            <a:spAutoFit/>
+          </a:bodyPr>
+          <a:lstStyle/>
+          <a:p>
+            <a:pPr marL="177800" indent="0">
+              <a:spcAft>
+                <a:spcPts val="0"/>
+              </a:spcAft>
+              <a:buSzPct val="100000"/>
+              <a:buNone/>
+            </a:pPr>
+            <a:r>
+              <a:rPr lang="en-US" sz="1200" b="1" dirty="0">
+                <a:solidFill>
+                  <a:srgbClr val="000000"/>
+                </a:solidFill>
+                <a:latin typeface="Calibri" pitchFamily="34" charset="0"/>
+                <a:ea typeface="Calibri" pitchFamily="34" charset="-122"/>
+                <a:cs typeface="Calibri" pitchFamily="34" charset="-120"/>
+              </a:rPr>
+              <a:t xml:space="preserve">20 LUTs, 20 flip-flops · 200 MHz met, 1.996 ns slack</a:t>
+            </a:r>
+          </a:p>
+        </p:txBody>
+      </p:sp>
+      <p:sp>
+        <p:nvSpPr>
+          <p:cNvPr id="23" name="TextBox 22"/>
+          <p:cNvSpPr txBox="1"/>
+          <p:nvPr/>
+        </p:nvSpPr>
+        <p:spPr>
+          <a:xfrm>
+            <a:off x="640080" y="4818888"/>
+            <a:ext cx="2788920" cy="384048"/>
+          </a:xfrm>
+          <a:prstGeom prst="rect">
+            <a:avLst/>
+          </a:prstGeom>
+          <a:noFill/>
+        </p:spPr>
+        <p:txBody>
+          <a:bodyPr wrap="square" lIns="0" tIns="0" rIns="0" bIns="0">
+            <a:spAutoFit/>
+          </a:bodyPr>
+          <a:lstStyle/>
+          <a:p>
+            <a:pPr marL="177800" indent="0">
+              <a:spcAft>
+                <a:spcPts val="0"/>
+              </a:spcAft>
+              <a:buSzPct val="100000"/>
+              <a:buNone/>
+            </a:pPr>
+            <a:r>
+              <a:rPr lang="en-US" sz="1350" b="1" dirty="0">
+                <a:solidFill>
+                  <a:srgbClr val="000000"/>
+                </a:solidFill>
+                <a:latin typeface="Calibri" pitchFamily="34" charset="0"/>
+                <a:ea typeface="Calibri" pitchFamily="34" charset="-122"/>
+                <a:cs typeface="Calibri" pitchFamily="34" charset="-120"/>
+              </a:rPr>
+              <a:t xml:space="preserve">Python · NumPy</a:t>
+            </a:r>
+          </a:p>
+        </p:txBody>
+      </p:sp>
+      <p:sp>
+        <p:nvSpPr>
+          <p:cNvPr id="24" name="TextBox 23"/>
+          <p:cNvSpPr txBox="1"/>
+          <p:nvPr/>
+        </p:nvSpPr>
+        <p:spPr>
+          <a:xfrm>
+            <a:off x="3520440" y="4818888"/>
+            <a:ext cx="3246120" cy="384048"/>
+          </a:xfrm>
+          <a:prstGeom prst="rect">
+            <a:avLst/>
+          </a:prstGeom>
+          <a:noFill/>
+        </p:spPr>
+        <p:txBody>
+          <a:bodyPr wrap="square" lIns="0" tIns="0" rIns="0" bIns="0">
+            <a:spAutoFit/>
+          </a:bodyPr>
+          <a:lstStyle/>
+          <a:p>
+            <a:pPr marL="177800" indent="0">
+              <a:spcAft>
+                <a:spcPts val="0"/>
+              </a:spcAft>
+              <a:buSzPct val="100000"/>
+              <a:buNone/>
+            </a:pPr>
+            <a:r>
+              <a:rPr lang="en-US" sz="1200" dirty="0">
+                <a:solidFill>
+                  <a:srgbClr val="000000"/>
+                </a:solidFill>
+                <a:latin typeface="Calibri" pitchFamily="34" charset="0"/>
+                <a:ea typeface="Calibri" pitchFamily="34" charset="-122"/>
+                <a:cs typeface="Calibri" pitchFamily="34" charset="-120"/>
+              </a:rPr>
+              <a:t xml:space="preserve">sweep orchestration and the decomposition</a:t>
+            </a:r>
+          </a:p>
+        </p:txBody>
+      </p:sp>
+      <p:sp>
+        <p:nvSpPr>
+          <p:cNvPr id="25" name="TextBox 24"/>
+          <p:cNvSpPr txBox="1"/>
+          <p:nvPr/>
+        </p:nvSpPr>
+        <p:spPr>
+          <a:xfrm>
+            <a:off x="6858000" y="4818888"/>
+            <a:ext cx="4754880" cy="384048"/>
+          </a:xfrm>
+          <a:prstGeom prst="rect">
+            <a:avLst/>
+          </a:prstGeom>
+          <a:noFill/>
+        </p:spPr>
+        <p:txBody>
+          <a:bodyPr wrap="square" lIns="0" tIns="0" rIns="0" bIns="0">
+            <a:spAutoFit/>
+          </a:bodyPr>
+          <a:lstStyle/>
+          <a:p>
+            <a:pPr marL="177800" indent="0">
+              <a:spcAft>
+                <a:spcPts val="0"/>
+              </a:spcAft>
+              <a:buSzPct val="100000"/>
+              <a:buNone/>
+            </a:pPr>
+            <a:r>
+              <a:rPr lang="en-US" sz="1200" b="1" dirty="0">
+                <a:solidFill>
+                  <a:srgbClr val="000000"/>
+                </a:solidFill>
+                <a:latin typeface="Calibri" pitchFamily="34" charset="0"/>
+                <a:ea typeface="Calibri" pitchFamily="34" charset="-122"/>
+                <a:cs typeface="Calibri" pitchFamily="34" charset="-120"/>
+              </a:rPr>
+              <a:t xml:space="preserve">720-word search · (A) 25.1 % vs (B) 3.9 %</a:t>
+            </a:r>
+          </a:p>
+        </p:txBody>
+      </p:sp>
+      <p:sp>
+        <p:nvSpPr>
+          <p:cNvPr id="26" name="TextBox 25"/>
+          <p:cNvSpPr txBox="1"/>
+          <p:nvPr/>
+        </p:nvSpPr>
+        <p:spPr>
+          <a:xfrm>
+            <a:off x="640080" y="5550408"/>
+            <a:ext cx="10972800" cy="548640"/>
+          </a:xfrm>
+          <a:prstGeom prst="rect">
+            <a:avLst/>
+          </a:prstGeom>
+          <a:noFill/>
+        </p:spPr>
+        <p:txBody>
+          <a:bodyPr wrap="square" lIns="0" tIns="0" rIns="0" bIns="0">
+            <a:spAutoFit/>
+          </a:bodyPr>
+          <a:lstStyle/>
+          <a:p>
+            <a:pPr marL="177800" indent="0">
+              <a:spcAft>
+                <a:spcPts val="0"/>
+              </a:spcAft>
+              <a:buSzPct val="100000"/>
+              <a:buNone/>
+            </a:pPr>
+            <a:r>
+              <a:rPr lang="en-US" sz="1250" b="1" dirty="0">
+                <a:solidFill>
+                  <a:srgbClr val="000000"/>
+                </a:solidFill>
+                <a:latin typeface="Calibri" pitchFamily="34" charset="0"/>
+                <a:ea typeface="Calibri" pitchFamily="34" charset="-122"/>
+                <a:cs typeface="Calibri" pitchFamily="34" charset="-120"/>
+              </a:rPr>
+              <a:t xml:space="preserve">No number rests on one tool. </a:t>
+            </a:r>
+            <a:r>
+              <a:rPr lang="en-US" sz="1250" dirty="0">
+                <a:solidFill>
+                  <a:srgbClr val="000000"/>
+                </a:solidFill>
+                <a:latin typeface="Calibri" pitchFamily="34" charset="0"/>
+                <a:ea typeface="Calibri" pitchFamily="34" charset="-122"/>
+                <a:cs typeface="Calibri" pitchFamily="34" charset="-120"/>
+              </a:rPr>
+              <a:t xml:space="preserve">Every headline figure was produced in one program and checked in another — SPICE against SPICE, MATLAB against Octave, yosys against Vivado.</a:t>
             </a:r>
           </a:p>
         </p:txBody>
@@ -13940,87 +13710,9 @@
         <p:nvPr/>
       </p:nvGrpSpPr>
       <p:grpSpPr/>
-      <p:sp>
-        <p:nvSpPr>
-          <p:cNvPr id="2" name="Text 0"/>
-          <p:cNvSpPr txBox="1"/>
-          <p:nvPr/>
-        </p:nvSpPr>
-        <p:spPr>
-          <a:xfrm>
-            <a:off x="11460175" y="6446520"/>
-            <a:ext cx="457200" cy="274320"/>
-          </a:xfrm>
-          <a:prstGeom prst="rect">
-            <a:avLst/>
-          </a:prstGeom>
-          <a:noFill/>
-          <a:ln/>
-        </p:spPr>
-        <p:txBody>
-          <a:bodyPr wrap="square" lIns="0" tIns="0" rIns="0" bIns="0" rtlCol="0" anchor="ctr"/>
-          <a:lstStyle/>
-          <a:p>
-            <a:pPr marL="0" indent="0" algn="r">
-              <a:buNone/>
-            </a:pPr>
-            <a:r>
-              <a:rPr lang="en-US" sz="1000" dirty="0">
-                <a:solidFill>
-                  <a:srgbClr val="808080"/>
-                </a:solidFill>
-                <a:latin typeface="Calibri" pitchFamily="34" charset="0"/>
-                <a:ea typeface="Calibri" pitchFamily="34" charset="-122"/>
-                <a:cs typeface="Calibri" pitchFamily="34" charset="-120"/>
-              </a:rPr>
-              <a:t>19</a:t>
-            </a:r>
-            <a:endParaRPr lang="en-US" sz="1000" dirty="0"/>
-          </a:p>
-        </p:txBody>
-      </p:sp>
-      <p:sp>
-        <p:nvSpPr>
-          <p:cNvPr id="3" name="Text 1"/>
-          <p:cNvSpPr txBox="1"/>
-          <p:nvPr/>
-        </p:nvSpPr>
-        <p:spPr>
-          <a:xfrm>
-            <a:off x="548640" y="320040"/>
-            <a:ext cx="9601200" cy="685800"/>
-          </a:xfrm>
-          <a:prstGeom prst="rect">
-            <a:avLst/>
-          </a:prstGeom>
-          <a:noFill/>
-          <a:ln/>
-        </p:spPr>
-        <p:txBody>
-          <a:bodyPr wrap="square" lIns="0" tIns="0" rIns="0" bIns="0" rtlCol="0" anchor="ctr"/>
-          <a:lstStyle/>
-          <a:p>
-            <a:pPr marL="0" indent="0">
-              <a:buNone/>
-            </a:pPr>
-            <a:r>
-              <a:rPr lang="en-US" sz="2800" b="1" dirty="0">
-                <a:solidFill>
-                  <a:srgbClr val="1D2F82"/>
-                </a:solidFill>
-                <a:latin typeface="Calibri" pitchFamily="34" charset="0"/>
-                <a:ea typeface="Calibri" pitchFamily="34" charset="-122"/>
-                <a:cs typeface="Calibri" pitchFamily="34" charset="-120"/>
-              </a:rPr>
-              <a:t>Tools — and what each one produced</a:t>
-            </a:r>
-            <a:endParaRPr lang="en-US" sz="2800" dirty="0"/>
-          </a:p>
-        </p:txBody>
-      </p:sp>
       <p:pic>
         <p:nvPicPr>
-          <p:cNvPr id="4" name="Image 0" descr="logo.png"/>
+          <p:cNvPr id="3" name="Image 0" descr="logo.png"/>
           <p:cNvPicPr>
             <a:picLocks noChangeAspect="1"/>
           </p:cNvPicPr>
@@ -14044,14 +13736,14 @@
       </p:pic>
       <p:sp>
         <p:nvSpPr>
-          <p:cNvPr id="5" name="TextBox 4"/>
-          <p:cNvSpPr txBox="1"/>
-          <p:nvPr/>
-        </p:nvSpPr>
-        <p:spPr>
-          <a:xfrm>
-            <a:off x="640080" y="1417320"/>
-            <a:ext cx="2788920" cy="384048"/>
+          <p:cNvPr id="4" name="TextBox 3"/>
+          <p:cNvSpPr txBox="1"/>
+          <p:nvPr/>
+        </p:nvSpPr>
+        <p:spPr>
+          <a:xfrm>
+            <a:off x="548640" y="320040"/>
+            <a:ext cx="9601200" cy="685800"/>
           </a:xfrm>
           <a:prstGeom prst="rect">
             <a:avLst/>
@@ -14072,29 +13764,29 @@
               <a:buNone/>
             </a:pPr>
             <a:r>
-              <a:rPr lang="en-US" sz="1350" b="1" dirty="0">
-                <a:solidFill>
-                  <a:srgbClr val="000000"/>
-                </a:solidFill>
-                <a:latin typeface="Calibri" pitchFamily="34" charset="0"/>
-                <a:ea typeface="Calibri" pitchFamily="34" charset="-122"/>
-                <a:cs typeface="Calibri" pitchFamily="34" charset="-120"/>
-              </a:rPr>
-              <a:t xml:space="preserve">ngspice 42</a:t>
-            </a:r>
-          </a:p>
-        </p:txBody>
-      </p:sp>
-      <p:sp>
-        <p:nvSpPr>
-          <p:cNvPr id="6" name="TextBox 5"/>
-          <p:cNvSpPr txBox="1"/>
-          <p:nvPr/>
-        </p:nvSpPr>
-        <p:spPr>
-          <a:xfrm>
-            <a:off x="3520440" y="1417320"/>
-            <a:ext cx="3246120" cy="384048"/>
+              <a:rPr lang="en-US" sz="2800" b="1" dirty="0">
+                <a:solidFill>
+                  <a:srgbClr val="000000"/>
+                </a:solidFill>
+                <a:latin typeface="Calibri" pitchFamily="34" charset="0"/>
+                <a:ea typeface="Calibri" pitchFamily="34" charset="-122"/>
+                <a:cs typeface="Calibri" pitchFamily="34" charset="-120"/>
+              </a:rPr>
+              <a:t xml:space="preserve">The gap this project fills</a:t>
+            </a:r>
+          </a:p>
+        </p:txBody>
+      </p:sp>
+      <p:sp>
+        <p:nvSpPr>
+          <p:cNvPr id="5" name="TextBox 4"/>
+          <p:cNvSpPr txBox="1"/>
+          <p:nvPr/>
+        </p:nvSpPr>
+        <p:spPr>
+          <a:xfrm>
+            <a:off x="11457432" y="6446520"/>
+            <a:ext cx="457200" cy="274320"/>
           </a:xfrm>
           <a:prstGeom prst="rect">
             <a:avLst/>
@@ -14115,29 +13807,29 @@
               <a:buNone/>
             </a:pPr>
             <a:r>
-              <a:rPr lang="en-US" sz="1200" dirty="0">
-                <a:solidFill>
-                  <a:srgbClr val="000000"/>
-                </a:solidFill>
-                <a:latin typeface="Calibri" pitchFamily="34" charset="0"/>
-                <a:ea typeface="Calibri" pitchFamily="34" charset="-122"/>
-                <a:cs typeface="Calibri" pitchFamily="34" charset="-120"/>
-              </a:rPr>
-              <a:t xml:space="preserve">every transient in the study</a:t>
-            </a:r>
-          </a:p>
-        </p:txBody>
-      </p:sp>
-      <p:sp>
-        <p:nvSpPr>
-          <p:cNvPr id="7" name="TextBox 6"/>
-          <p:cNvSpPr txBox="1"/>
-          <p:nvPr/>
-        </p:nvSpPr>
-        <p:spPr>
-          <a:xfrm>
-            <a:off x="6858000" y="1417320"/>
-            <a:ext cx="4754880" cy="384048"/>
+              <a:rPr lang="en-US" sz="1100" dirty="0">
+                <a:solidFill>
+                  <a:srgbClr val="000000"/>
+                </a:solidFill>
+                <a:latin typeface="Calibri" pitchFamily="34" charset="0"/>
+                <a:ea typeface="Calibri" pitchFamily="34" charset="-122"/>
+                <a:cs typeface="Calibri" pitchFamily="34" charset="-120"/>
+              </a:rPr>
+              <a:t xml:space="preserve">8</a:t>
+            </a:r>
+          </a:p>
+        </p:txBody>
+      </p:sp>
+      <p:sp>
+        <p:nvSpPr>
+          <p:cNvPr id="6" name="TextBox 5"/>
+          <p:cNvSpPr txBox="1"/>
+          <p:nvPr/>
+        </p:nvSpPr>
+        <p:spPr>
+          <a:xfrm>
+            <a:off x="640080" y="1234440"/>
+            <a:ext cx="11064240" cy="914400"/>
           </a:xfrm>
           <a:prstGeom prst="rect">
             <a:avLst/>
@@ -14152,35 +13844,55 @@
           <a:p>
             <a:pPr marL="177800" indent="0">
               <a:spcAft>
+                <a:spcPts val="120"/>
+              </a:spcAft>
+              <a:buSzPct val="100000"/>
+              <a:buNone/>
+            </a:pPr>
+            <a:r>
+              <a:rPr lang="en-US" sz="1500" b="1" dirty="0">
+                <a:solidFill>
+                  <a:srgbClr val="000000"/>
+                </a:solidFill>
+                <a:latin typeface="Calibri" pitchFamily="34" charset="0"/>
+                <a:ea typeface="Calibri" pitchFamily="34" charset="-122"/>
+                <a:cs typeface="Calibri" pitchFamily="34" charset="-120"/>
+              </a:rPr>
+              <a:t xml:space="preserve">Every active-gate-driver paper reports ONE number: the improvement over a conventional driver.</a:t>
+            </a:r>
+          </a:p>
+          <a:p>
+            <a:pPr marL="177800" indent="0">
+              <a:spcAft>
                 <a:spcPts val="0"/>
               </a:spcAft>
               <a:buSzPct val="100000"/>
               <a:buNone/>
             </a:pPr>
             <a:r>
-              <a:rPr lang="en-US" sz="1200" b="1" dirty="0">
-                <a:solidFill>
-                  <a:srgbClr val="000000"/>
-                </a:solidFill>
-                <a:latin typeface="Calibri" pitchFamily="34" charset="0"/>
-                <a:ea typeface="Calibri" pitchFamily="34" charset="-122"/>
-                <a:cs typeface="Calibri" pitchFamily="34" charset="-120"/>
-              </a:rPr>
-              <a:t xml:space="preserve">34,622 simulations · 1.65 V spurious · 2.58 V margin · 5.2 % ceiling</a:t>
-            </a:r>
-          </a:p>
-        </p:txBody>
-      </p:sp>
-      <p:sp>
-        <p:nvSpPr>
-          <p:cNvPr id="8" name="TextBox 7"/>
-          <p:cNvSpPr txBox="1"/>
-          <p:nvPr/>
-        </p:nvSpPr>
-        <p:spPr>
-          <a:xfrm>
-            <a:off x="640080" y="1984248"/>
-            <a:ext cx="2788920" cy="384048"/>
+              <a:rPr lang="en-US" sz="1300" dirty="0">
+                <a:solidFill>
+                  <a:srgbClr val="000000"/>
+                </a:solidFill>
+                <a:latin typeface="Calibri" pitchFamily="34" charset="0"/>
+                <a:ea typeface="Calibri" pitchFamily="34" charset="-122"/>
+                <a:cs typeface="Calibri" pitchFamily="34" charset="-120"/>
+              </a:rPr>
+              <a:t xml:space="preserve">That number bundles two effects that cost completely different hardware.</a:t>
+            </a:r>
+          </a:p>
+        </p:txBody>
+      </p:sp>
+      <p:sp>
+        <p:nvSpPr>
+          <p:cNvPr id="7" name="TextBox 6"/>
+          <p:cNvSpPr txBox="1"/>
+          <p:nvPr/>
+        </p:nvSpPr>
+        <p:spPr>
+          <a:xfrm>
+            <a:off x="640080" y="2377440"/>
+            <a:ext cx="5394960" cy="365760"/>
           </a:xfrm>
           <a:prstGeom prst="rect">
             <a:avLst/>
@@ -14201,29 +13913,29 @@
               <a:buNone/>
             </a:pPr>
             <a:r>
-              <a:rPr lang="en-US" sz="1350" b="1" dirty="0">
-                <a:solidFill>
-                  <a:srgbClr val="000000"/>
-                </a:solidFill>
-                <a:latin typeface="Calibri" pitchFamily="34" charset="0"/>
-                <a:ea typeface="Calibri" pitchFamily="34" charset="-122"/>
-                <a:cs typeface="Calibri" pitchFamily="34" charset="-120"/>
-              </a:rPr>
-              <a:t xml:space="preserve">LTspice 24</a:t>
-            </a:r>
-          </a:p>
-        </p:txBody>
-      </p:sp>
-      <p:sp>
-        <p:nvSpPr>
-          <p:cNvPr id="9" name="TextBox 8"/>
-          <p:cNvSpPr txBox="1"/>
-          <p:nvPr/>
-        </p:nvSpPr>
-        <p:spPr>
-          <a:xfrm>
-            <a:off x="3520440" y="1984248"/>
-            <a:ext cx="3246120" cy="384048"/>
+              <a:rPr lang="en-US" sz="1450" b="1" dirty="0">
+                <a:solidFill>
+                  <a:srgbClr val="000000"/>
+                </a:solidFill>
+                <a:latin typeface="Calibri" pitchFamily="34" charset="0"/>
+                <a:ea typeface="Calibri" pitchFamily="34" charset="-122"/>
+                <a:cs typeface="Calibri" pitchFamily="34" charset="-120"/>
+              </a:rPr>
+              <a:t xml:space="preserve">Effect 1  —  a better FIXED setting</a:t>
+            </a:r>
+          </a:p>
+        </p:txBody>
+      </p:sp>
+      <p:sp>
+        <p:nvSpPr>
+          <p:cNvPr id="8" name="TextBox 7"/>
+          <p:cNvSpPr txBox="1"/>
+          <p:nvPr/>
+        </p:nvSpPr>
+        <p:spPr>
+          <a:xfrm>
+            <a:off x="640080" y="2834640"/>
+            <a:ext cx="3703320" cy="1463040"/>
           </a:xfrm>
           <a:prstGeom prst="rect">
             <a:avLst/>
@@ -14252,21 +13964,21 @@
                 <a:ea typeface="Calibri" pitchFamily="34" charset="-122"/>
                 <a:cs typeface="Calibri" pitchFamily="34" charset="-120"/>
               </a:rPr>
-              <a:t xml:space="preserve">independent re-run of the shipped netlists</a:t>
-            </a:r>
-          </a:p>
-        </p:txBody>
-      </p:sp>
-      <p:sp>
-        <p:nvSpPr>
-          <p:cNvPr id="10" name="TextBox 9"/>
-          <p:cNvSpPr txBox="1"/>
-          <p:nvPr/>
-        </p:nvSpPr>
-        <p:spPr>
-          <a:xfrm>
-            <a:off x="6858000" y="1984248"/>
-            <a:ext cx="4754880" cy="384048"/>
+              <a:t xml:space="preserve">Pick a better control word once, at design time. Costs nothing at run time: no sensor, no ADC, no lookup table, no controller.</a:t>
+            </a:r>
+          </a:p>
+        </p:txBody>
+      </p:sp>
+      <p:sp>
+        <p:nvSpPr>
+          <p:cNvPr id="9" name="TextBox 8"/>
+          <p:cNvSpPr txBox="1"/>
+          <p:nvPr/>
+        </p:nvSpPr>
+        <p:spPr>
+          <a:xfrm>
+            <a:off x="4480560" y="2788920"/>
+            <a:ext cx="1554480" cy="1188720"/>
           </a:xfrm>
           <a:prstGeom prst="rect">
             <a:avLst/>
@@ -14281,35 +13993,75 @@
           <a:p>
             <a:pPr marL="177800" indent="0">
               <a:spcAft>
+                <a:spcPts val="100"/>
+              </a:spcAft>
+              <a:buSzPct val="100000"/>
+              <a:buNone/>
+            </a:pPr>
+            <a:r>
+              <a:rPr lang="en-US" sz="3200" b="1" dirty="0">
+                <a:solidFill>
+                  <a:srgbClr val="000000"/>
+                </a:solidFill>
+                <a:latin typeface="Calibri" pitchFamily="34" charset="0"/>
+                <a:ea typeface="Calibri" pitchFamily="34" charset="-122"/>
+                <a:cs typeface="Calibri" pitchFamily="34" charset="-120"/>
+              </a:rPr>
+              <a:t xml:space="preserve">25.1 %</a:t>
+            </a:r>
+          </a:p>
+          <a:p>
+            <a:pPr marL="177800" indent="0">
+              <a:spcAft>
+                <a:spcPts val="60"/>
+              </a:spcAft>
+              <a:buSzPct val="100000"/>
+              <a:buNone/>
+            </a:pPr>
+            <a:r>
+              <a:rPr lang="en-US" sz="1300" b="1" dirty="0">
+                <a:solidFill>
+                  <a:srgbClr val="000000"/>
+                </a:solidFill>
+                <a:latin typeface="Calibri" pitchFamily="34" charset="0"/>
+                <a:ea typeface="Calibri" pitchFamily="34" charset="-122"/>
+                <a:cs typeface="Calibri" pitchFamily="34" charset="-120"/>
+              </a:rPr>
+              <a:t xml:space="preserve">of baseline</a:t>
+            </a:r>
+          </a:p>
+          <a:p>
+            <a:pPr marL="177800" indent="0">
+              <a:spcAft>
                 <a:spcPts val="0"/>
               </a:spcAft>
               <a:buSzPct val="100000"/>
               <a:buNone/>
             </a:pPr>
             <a:r>
-              <a:rPr lang="en-US" sz="1200" b="1" dirty="0">
-                <a:solidFill>
-                  <a:srgbClr val="000000"/>
-                </a:solidFill>
-                <a:latin typeface="Calibri" pitchFamily="34" charset="0"/>
-                <a:ea typeface="Calibri" pitchFamily="34" charset="-122"/>
-                <a:cs typeface="Calibri" pitchFamily="34" charset="-120"/>
-              </a:rPr>
-              <a:t xml:space="preserve">1.6487 / 0.8282 / −1.1768 V — matches ngspice within 2 mV</a:t>
-            </a:r>
-          </a:p>
-        </p:txBody>
-      </p:sp>
-      <p:sp>
-        <p:nvSpPr>
-          <p:cNvPr id="11" name="TextBox 10"/>
-          <p:cNvSpPr txBox="1"/>
-          <p:nvPr/>
-        </p:nvSpPr>
-        <p:spPr>
-          <a:xfrm>
-            <a:off x="640080" y="2551176"/>
-            <a:ext cx="2788920" cy="384048"/>
+              <a:rPr lang="en-US" sz="1150" dirty="0">
+                <a:solidFill>
+                  <a:srgbClr val="000000"/>
+                </a:solidFill>
+                <a:latin typeface="Calibri" pitchFamily="34" charset="0"/>
+                <a:ea typeface="Calibri" pitchFamily="34" charset="-122"/>
+                <a:cs typeface="Calibri" pitchFamily="34" charset="-120"/>
+              </a:rPr>
+              <a:t xml:space="preserve"/>
+            </a:r>
+          </a:p>
+        </p:txBody>
+      </p:sp>
+      <p:sp>
+        <p:nvSpPr>
+          <p:cNvPr id="10" name="TextBox 9"/>
+          <p:cNvSpPr txBox="1"/>
+          <p:nvPr/>
+        </p:nvSpPr>
+        <p:spPr>
+          <a:xfrm>
+            <a:off x="6400800" y="2377440"/>
+            <a:ext cx="5394960" cy="365760"/>
           </a:xfrm>
           <a:prstGeom prst="rect">
             <a:avLst/>
@@ -14330,29 +14082,29 @@
               <a:buNone/>
             </a:pPr>
             <a:r>
-              <a:rPr lang="en-US" sz="1350" b="1" dirty="0">
-                <a:solidFill>
-                  <a:srgbClr val="000000"/>
-                </a:solidFill>
-                <a:latin typeface="Calibri" pitchFamily="34" charset="0"/>
-                <a:ea typeface="Calibri" pitchFamily="34" charset="-122"/>
-                <a:cs typeface="Calibri" pitchFamily="34" charset="-120"/>
-              </a:rPr>
-              <a:t xml:space="preserve">MATLAB Online</a:t>
-            </a:r>
-          </a:p>
-        </p:txBody>
-      </p:sp>
-      <p:sp>
-        <p:nvSpPr>
-          <p:cNvPr id="12" name="TextBox 11"/>
-          <p:cNvSpPr txBox="1"/>
-          <p:nvPr/>
-        </p:nvSpPr>
-        <p:spPr>
-          <a:xfrm>
-            <a:off x="3520440" y="2551176"/>
-            <a:ext cx="3246120" cy="384048"/>
+              <a:rPr lang="en-US" sz="1450" b="1" dirty="0">
+                <a:solidFill>
+                  <a:srgbClr val="000000"/>
+                </a:solidFill>
+                <a:latin typeface="Calibri" pitchFamily="34" charset="0"/>
+                <a:ea typeface="Calibri" pitchFamily="34" charset="-122"/>
+                <a:cs typeface="Calibri" pitchFamily="34" charset="-120"/>
+              </a:rPr>
+              <a:t xml:space="preserve">Effect 2  —  ADAPTING per operating point</a:t>
+            </a:r>
+          </a:p>
+        </p:txBody>
+      </p:sp>
+      <p:sp>
+        <p:nvSpPr>
+          <p:cNvPr id="11" name="TextBox 10"/>
+          <p:cNvSpPr txBox="1"/>
+          <p:nvPr/>
+        </p:nvSpPr>
+        <p:spPr>
+          <a:xfrm>
+            <a:off x="6400800" y="2834640"/>
+            <a:ext cx="3703320" cy="1463040"/>
           </a:xfrm>
           <a:prstGeom prst="rect">
             <a:avLst/>
@@ -14381,21 +14133,21 @@
                 <a:ea typeface="Calibri" pitchFamily="34" charset="-122"/>
                 <a:cs typeface="Calibri" pitchFamily="34" charset="-120"/>
               </a:rPr>
-              <a:t xml:space="preserve">independent re-analysis of the same CSVs</a:t>
-            </a:r>
-          </a:p>
-        </p:txBody>
-      </p:sp>
-      <p:sp>
-        <p:nvSpPr>
-          <p:cNvPr id="13" name="TextBox 12"/>
-          <p:cNvSpPr txBox="1"/>
-          <p:nvPr/>
-        </p:nvSpPr>
-        <p:spPr>
-          <a:xfrm>
-            <a:off x="6858000" y="2551176"/>
-            <a:ext cx="4754880" cy="384048"/>
+              <a:t xml:space="preserve">Change the word as load, bus voltage and temperature move. This is what needs the sensing hardware the architecture is sold on.</a:t>
+            </a:r>
+          </a:p>
+        </p:txBody>
+      </p:sp>
+      <p:sp>
+        <p:nvSpPr>
+          <p:cNvPr id="12" name="TextBox 11"/>
+          <p:cNvSpPr txBox="1"/>
+          <p:nvPr/>
+        </p:nvSpPr>
+        <p:spPr>
+          <a:xfrm>
+            <a:off x="10241280" y="2788920"/>
+            <a:ext cx="1554480" cy="1188720"/>
           </a:xfrm>
           <a:prstGeom prst="rect">
             <a:avLst/>
@@ -14410,35 +14162,75 @@
           <a:p>
             <a:pPr marL="177800" indent="0">
               <a:spcAft>
+                <a:spcPts val="100"/>
+              </a:spcAft>
+              <a:buSzPct val="100000"/>
+              <a:buNone/>
+            </a:pPr>
+            <a:r>
+              <a:rPr lang="en-US" sz="3200" b="1" dirty="0">
+                <a:solidFill>
+                  <a:srgbClr val="000000"/>
+                </a:solidFill>
+                <a:latin typeface="Calibri" pitchFamily="34" charset="0"/>
+                <a:ea typeface="Calibri" pitchFamily="34" charset="-122"/>
+                <a:cs typeface="Calibri" pitchFamily="34" charset="-120"/>
+              </a:rPr>
+              <a:t xml:space="preserve">3.9 %</a:t>
+            </a:r>
+          </a:p>
+          <a:p>
+            <a:pPr marL="177800" indent="0">
+              <a:spcAft>
+                <a:spcPts val="60"/>
+              </a:spcAft>
+              <a:buSzPct val="100000"/>
+              <a:buNone/>
+            </a:pPr>
+            <a:r>
+              <a:rPr lang="en-US" sz="1300" b="1" dirty="0">
+                <a:solidFill>
+                  <a:srgbClr val="000000"/>
+                </a:solidFill>
+                <a:latin typeface="Calibri" pitchFamily="34" charset="0"/>
+                <a:ea typeface="Calibri" pitchFamily="34" charset="-122"/>
+                <a:cs typeface="Calibri" pitchFamily="34" charset="-120"/>
+              </a:rPr>
+              <a:t xml:space="preserve">of baseline</a:t>
+            </a:r>
+          </a:p>
+          <a:p>
+            <a:pPr marL="177800" indent="0">
+              <a:spcAft>
                 <a:spcPts val="0"/>
               </a:spcAft>
               <a:buSzPct val="100000"/>
               <a:buNone/>
             </a:pPr>
             <a:r>
-              <a:rPr lang="en-US" sz="1200" b="1" dirty="0">
-                <a:solidFill>
-                  <a:srgbClr val="000000"/>
-                </a:solidFill>
-                <a:latin typeface="Calibri" pitchFamily="34" charset="0"/>
-                <a:ea typeface="Calibri" pitchFamily="34" charset="-122"/>
-                <a:cs typeface="Calibri" pitchFamily="34" charset="-120"/>
-              </a:rPr>
-              <a:t xml:space="preserve">504 of 720 feasible · 7-word Pareto front · 0.039 µJ per point</a:t>
-            </a:r>
-          </a:p>
-        </p:txBody>
-      </p:sp>
-      <p:sp>
-        <p:nvSpPr>
-          <p:cNvPr id="14" name="TextBox 13"/>
-          <p:cNvSpPr txBox="1"/>
-          <p:nvPr/>
-        </p:nvSpPr>
-        <p:spPr>
-          <a:xfrm>
-            <a:off x="640080" y="3118104"/>
-            <a:ext cx="2788920" cy="384048"/>
+              <a:rPr lang="en-US" sz="1150" dirty="0">
+                <a:solidFill>
+                  <a:srgbClr val="000000"/>
+                </a:solidFill>
+                <a:latin typeface="Calibri" pitchFamily="34" charset="0"/>
+                <a:ea typeface="Calibri" pitchFamily="34" charset="-122"/>
+                <a:cs typeface="Calibri" pitchFamily="34" charset="-120"/>
+              </a:rPr>
+              <a:t xml:space="preserve"/>
+            </a:r>
+          </a:p>
+        </p:txBody>
+      </p:sp>
+      <p:sp>
+        <p:nvSpPr>
+          <p:cNvPr id="13" name="TextBox 12"/>
+          <p:cNvSpPr txBox="1"/>
+          <p:nvPr/>
+        </p:nvSpPr>
+        <p:spPr>
+          <a:xfrm>
+            <a:off x="640080" y="4526280"/>
+            <a:ext cx="11064240" cy="1920240"/>
           </a:xfrm>
           <a:prstGeom prst="rect">
             <a:avLst/>
@@ -14453,548 +14245,94 @@
           <a:p>
             <a:pPr marL="177800" indent="0">
               <a:spcAft>
+                <a:spcPts val="170"/>
+              </a:spcAft>
+              <a:buSzPct val="100000"/>
+              <a:buNone/>
+            </a:pPr>
+            <a:r>
+              <a:rPr lang="en-US" sz="1400" b="1" dirty="0">
+                <a:solidFill>
+                  <a:srgbClr val="000000"/>
+                </a:solidFill>
+                <a:latin typeface="Calibri" pitchFamily="34" charset="0"/>
+                <a:ea typeface="Calibri" pitchFamily="34" charset="-122"/>
+                <a:cs typeface="Calibri" pitchFamily="34" charset="-120"/>
+              </a:rPr>
+              <a:t xml:space="preserve">THE GAP: </a:t>
+            </a:r>
+            <a:r>
+              <a:rPr lang="en-US" sz="1400" dirty="0">
+                <a:solidFill>
+                  <a:srgbClr val="000000"/>
+                </a:solidFill>
+                <a:latin typeface="Calibri" pitchFamily="34" charset="0"/>
+                <a:ea typeface="Calibri" pitchFamily="34" charset="-122"/>
+                <a:cs typeface="Calibri" pitchFamily="34" charset="-120"/>
+              </a:rPr>
+              <a:t xml:space="preserve">no published work separates them. Nobody reports how much of an active gate driver's benefit actually requires adaptation, because separating the two needs an exhaustive search of the control word at every corner — and nobody has run one.</a:t>
+            </a:r>
+          </a:p>
+          <a:p>
+            <a:pPr marL="177800" indent="0">
+              <a:spcAft>
+                <a:spcPts val="170"/>
+              </a:spcAft>
+              <a:buSzPct val="100000"/>
+              <a:buNone/>
+            </a:pPr>
+            <a:r>
+              <a:rPr lang="en-US" sz="1400" b="1" dirty="0">
+                <a:solidFill>
+                  <a:srgbClr val="000000"/>
+                </a:solidFill>
+                <a:latin typeface="Calibri" pitchFamily="34" charset="0"/>
+                <a:ea typeface="Calibri" pitchFamily="34" charset="-122"/>
+                <a:cs typeface="Calibri" pitchFamily="34" charset="-120"/>
+              </a:rPr>
+              <a:t xml:space="preserve">WHY IT MATTERS: </a:t>
+            </a:r>
+            <a:r>
+              <a:rPr lang="en-US" sz="1400" dirty="0">
+                <a:solidFill>
+                  <a:srgbClr val="000000"/>
+                </a:solidFill>
+                <a:latin typeface="Calibri" pitchFamily="34" charset="0"/>
+                <a:ea typeface="Calibri" pitchFamily="34" charset="-122"/>
+                <a:cs typeface="Calibri" pitchFamily="34" charset="-120"/>
+              </a:rPr>
+              <a:t xml:space="preserve">only Effect 2 justifies the sense + ADC + lookup table. If it is small, that hardware is mostly paying for something a design-time choice already delivers — a buy-or-not decision nobody has costed.</a:t>
+            </a:r>
+          </a:p>
+          <a:p>
+            <a:pPr marL="177800" indent="0">
+              <a:spcAft>
                 <a:spcPts val="0"/>
               </a:spcAft>
               <a:buSzPct val="100000"/>
               <a:buNone/>
             </a:pPr>
             <a:r>
-              <a:rPr lang="en-US" sz="1350" b="1" dirty="0">
-                <a:solidFill>
-                  <a:srgbClr val="000000"/>
-                </a:solidFill>
-                <a:latin typeface="Calibri" pitchFamily="34" charset="0"/>
-                <a:ea typeface="Calibri" pitchFamily="34" charset="-122"/>
-                <a:cs typeface="Calibri" pitchFamily="34" charset="-120"/>
-              </a:rPr>
-              <a:t xml:space="preserve">GNU Octave 11.3</a:t>
-            </a:r>
-          </a:p>
-        </p:txBody>
-      </p:sp>
-      <p:sp>
-        <p:nvSpPr>
-          <p:cNvPr id="15" name="TextBox 14"/>
-          <p:cNvSpPr txBox="1"/>
-          <p:nvPr/>
-        </p:nvSpPr>
-        <p:spPr>
-          <a:xfrm>
-            <a:off x="3520440" y="3118104"/>
-            <a:ext cx="3246120" cy="384048"/>
-          </a:xfrm>
-          <a:prstGeom prst="rect">
-            <a:avLst/>
-          </a:prstGeom>
-          <a:noFill/>
-        </p:spPr>
-        <p:txBody>
-          <a:bodyPr wrap="square" lIns="0" tIns="0" rIns="0" bIns="0">
-            <a:spAutoFit/>
-          </a:bodyPr>
-          <a:lstStyle/>
-          <a:p>
-            <a:pPr marL="177800" indent="0">
-              <a:spcAft>
-                <a:spcPts val="0"/>
-              </a:spcAft>
-              <a:buSzPct val="100000"/>
-              <a:buNone/>
-            </a:pPr>
-            <a:r>
-              <a:rPr lang="en-US" sz="1200" dirty="0">
-                <a:solidFill>
-                  <a:srgbClr val="000000"/>
-                </a:solidFill>
-                <a:latin typeface="Calibri" pitchFamily="34" charset="0"/>
-                <a:ea typeface="Calibri" pitchFamily="34" charset="-122"/>
-                <a:cs typeface="Calibri" pitchFamily="34" charset="-120"/>
-              </a:rPr>
-              <a:t xml:space="preserve">second run of the same MATLAB scripts</a:t>
-            </a:r>
-          </a:p>
-        </p:txBody>
-      </p:sp>
-      <p:sp>
-        <p:nvSpPr>
-          <p:cNvPr id="16" name="TextBox 15"/>
-          <p:cNvSpPr txBox="1"/>
-          <p:nvPr/>
-        </p:nvSpPr>
-        <p:spPr>
-          <a:xfrm>
-            <a:off x="6858000" y="3118104"/>
-            <a:ext cx="4754880" cy="384048"/>
-          </a:xfrm>
-          <a:prstGeom prst="rect">
-            <a:avLst/>
-          </a:prstGeom>
-          <a:noFill/>
-        </p:spPr>
-        <p:txBody>
-          <a:bodyPr wrap="square" lIns="0" tIns="0" rIns="0" bIns="0">
-            <a:spAutoFit/>
-          </a:bodyPr>
-          <a:lstStyle/>
-          <a:p>
-            <a:pPr marL="177800" indent="0">
-              <a:spcAft>
-                <a:spcPts val="0"/>
-              </a:spcAft>
-              <a:buSzPct val="100000"/>
-              <a:buNone/>
-            </a:pPr>
-            <a:r>
-              <a:rPr lang="en-US" sz="1200" b="1" dirty="0">
-                <a:solidFill>
-                  <a:srgbClr val="000000"/>
-                </a:solidFill>
-                <a:latin typeface="Calibri" pitchFamily="34" charset="0"/>
-                <a:ea typeface="Calibri" pitchFamily="34" charset="-122"/>
-                <a:cs typeface="Calibri" pitchFamily="34" charset="-120"/>
-              </a:rPr>
-              <a:t xml:space="preserve">agrees with MATLAB to the last printed digit</a:t>
-            </a:r>
-          </a:p>
-        </p:txBody>
-      </p:sp>
-      <p:sp>
-        <p:nvSpPr>
-          <p:cNvPr id="17" name="TextBox 16"/>
-          <p:cNvSpPr txBox="1"/>
-          <p:nvPr/>
-        </p:nvSpPr>
-        <p:spPr>
-          <a:xfrm>
-            <a:off x="640080" y="3685032"/>
-            <a:ext cx="2788920" cy="384048"/>
-          </a:xfrm>
-          <a:prstGeom prst="rect">
-            <a:avLst/>
-          </a:prstGeom>
-          <a:noFill/>
-        </p:spPr>
-        <p:txBody>
-          <a:bodyPr wrap="square" lIns="0" tIns="0" rIns="0" bIns="0">
-            <a:spAutoFit/>
-          </a:bodyPr>
-          <a:lstStyle/>
-          <a:p>
-            <a:pPr marL="177800" indent="0">
-              <a:spcAft>
-                <a:spcPts val="0"/>
-              </a:spcAft>
-              <a:buSzPct val="100000"/>
-              <a:buNone/>
-            </a:pPr>
-            <a:r>
-              <a:rPr lang="en-US" sz="1350" b="1" dirty="0">
-                <a:solidFill>
-                  <a:srgbClr val="000000"/>
-                </a:solidFill>
-                <a:latin typeface="Calibri" pitchFamily="34" charset="0"/>
-                <a:ea typeface="Calibri" pitchFamily="34" charset="-122"/>
-                <a:cs typeface="Calibri" pitchFamily="34" charset="-120"/>
-              </a:rPr>
-              <a:t xml:space="preserve">Icarus Verilog</a:t>
-            </a:r>
-          </a:p>
-        </p:txBody>
-      </p:sp>
-      <p:sp>
-        <p:nvSpPr>
-          <p:cNvPr id="18" name="TextBox 17"/>
-          <p:cNvSpPr txBox="1"/>
-          <p:nvPr/>
-        </p:nvSpPr>
-        <p:spPr>
-          <a:xfrm>
-            <a:off x="3520440" y="3685032"/>
-            <a:ext cx="3246120" cy="384048"/>
-          </a:xfrm>
-          <a:prstGeom prst="rect">
-            <a:avLst/>
-          </a:prstGeom>
-          <a:noFill/>
-        </p:spPr>
-        <p:txBody>
-          <a:bodyPr wrap="square" lIns="0" tIns="0" rIns="0" bIns="0">
-            <a:spAutoFit/>
-          </a:bodyPr>
-          <a:lstStyle/>
-          <a:p>
-            <a:pPr marL="177800" indent="0">
-              <a:spcAft>
-                <a:spcPts val="0"/>
-              </a:spcAft>
-              <a:buSzPct val="100000"/>
-              <a:buNone/>
-            </a:pPr>
-            <a:r>
-              <a:rPr lang="en-US" sz="1200" dirty="0">
-                <a:solidFill>
-                  <a:srgbClr val="000000"/>
-                </a:solidFill>
-                <a:latin typeface="Calibri" pitchFamily="34" charset="0"/>
-                <a:ea typeface="Calibri" pitchFamily="34" charset="-122"/>
-                <a:cs typeface="Calibri" pitchFamily="34" charset="-120"/>
-              </a:rPr>
-              <a:t xml:space="preserve">RTL verification and mutation testing</a:t>
-            </a:r>
-          </a:p>
-        </p:txBody>
-      </p:sp>
-      <p:sp>
-        <p:nvSpPr>
-          <p:cNvPr id="19" name="TextBox 18"/>
-          <p:cNvSpPr txBox="1"/>
-          <p:nvPr/>
-        </p:nvSpPr>
-        <p:spPr>
-          <a:xfrm>
-            <a:off x="6858000" y="3685032"/>
-            <a:ext cx="4754880" cy="384048"/>
-          </a:xfrm>
-          <a:prstGeom prst="rect">
-            <a:avLst/>
-          </a:prstGeom>
-          <a:noFill/>
-        </p:spPr>
-        <p:txBody>
-          <a:bodyPr wrap="square" lIns="0" tIns="0" rIns="0" bIns="0">
-            <a:spAutoFit/>
-          </a:bodyPr>
-          <a:lstStyle/>
-          <a:p>
-            <a:pPr marL="177800" indent="0">
-              <a:spcAft>
-                <a:spcPts val="0"/>
-              </a:spcAft>
-              <a:buSzPct val="100000"/>
-              <a:buNone/>
-            </a:pPr>
-            <a:r>
-              <a:rPr lang="en-US" sz="1200" b="1" dirty="0">
-                <a:solidFill>
-                  <a:srgbClr val="000000"/>
-                </a:solidFill>
-                <a:latin typeface="Calibri" pitchFamily="34" charset="0"/>
-                <a:ea typeface="Calibri" pitchFamily="34" charset="-122"/>
-                <a:cs typeface="Calibri" pitchFamily="34" charset="-120"/>
-              </a:rPr>
-              <a:t xml:space="preserve">8 asserted properties pass · injected shoot-through caught 221×</a:t>
-            </a:r>
-          </a:p>
-        </p:txBody>
-      </p:sp>
-      <p:sp>
-        <p:nvSpPr>
-          <p:cNvPr id="20" name="TextBox 19"/>
-          <p:cNvSpPr txBox="1"/>
-          <p:nvPr/>
-        </p:nvSpPr>
-        <p:spPr>
-          <a:xfrm>
-            <a:off x="640080" y="4251960"/>
-            <a:ext cx="2788920" cy="384048"/>
-          </a:xfrm>
-          <a:prstGeom prst="rect">
-            <a:avLst/>
-          </a:prstGeom>
-          <a:noFill/>
-        </p:spPr>
-        <p:txBody>
-          <a:bodyPr wrap="square" lIns="0" tIns="0" rIns="0" bIns="0">
-            <a:spAutoFit/>
-          </a:bodyPr>
-          <a:lstStyle/>
-          <a:p>
-            <a:pPr marL="177800" indent="0">
-              <a:spcAft>
-                <a:spcPts val="0"/>
-              </a:spcAft>
-              <a:buSzPct val="100000"/>
-              <a:buNone/>
-            </a:pPr>
-            <a:r>
-              <a:rPr lang="en-US" sz="1350" b="1" dirty="0">
-                <a:solidFill>
-                  <a:srgbClr val="000000"/>
-                </a:solidFill>
-                <a:latin typeface="Calibri" pitchFamily="34" charset="0"/>
-                <a:ea typeface="Calibri" pitchFamily="34" charset="-122"/>
-                <a:cs typeface="Calibri" pitchFamily="34" charset="-120"/>
-              </a:rPr>
-              <a:t xml:space="preserve">Xilinx Vivado 2024.1.2</a:t>
-            </a:r>
-          </a:p>
-        </p:txBody>
-      </p:sp>
-      <p:sp>
-        <p:nvSpPr>
-          <p:cNvPr id="21" name="TextBox 20"/>
-          <p:cNvSpPr txBox="1"/>
-          <p:nvPr/>
-        </p:nvSpPr>
-        <p:spPr>
-          <a:xfrm>
-            <a:off x="3520440" y="4251960"/>
-            <a:ext cx="3246120" cy="384048"/>
-          </a:xfrm>
-          <a:prstGeom prst="rect">
-            <a:avLst/>
-          </a:prstGeom>
-          <a:noFill/>
-        </p:spPr>
-        <p:txBody>
-          <a:bodyPr wrap="square" lIns="0" tIns="0" rIns="0" bIns="0">
-            <a:spAutoFit/>
-          </a:bodyPr>
-          <a:lstStyle/>
-          <a:p>
-            <a:pPr marL="177800" indent="0">
-              <a:spcAft>
-                <a:spcPts val="0"/>
-              </a:spcAft>
-              <a:buSzPct val="100000"/>
-              <a:buNone/>
-            </a:pPr>
-            <a:r>
-              <a:rPr lang="en-US" sz="1200" dirty="0">
-                <a:solidFill>
-                  <a:srgbClr val="000000"/>
-                </a:solidFill>
-                <a:latin typeface="Calibri" pitchFamily="34" charset="0"/>
-                <a:ea typeface="Calibri" pitchFamily="34" charset="-122"/>
-                <a:cs typeface="Calibri" pitchFamily="34" charset="-120"/>
-              </a:rPr>
-              <a:t xml:space="preserve">FPGA synthesis and timing on xc7a35t</a:t>
-            </a:r>
-          </a:p>
-        </p:txBody>
-      </p:sp>
-      <p:sp>
-        <p:nvSpPr>
-          <p:cNvPr id="22" name="TextBox 21"/>
-          <p:cNvSpPr txBox="1"/>
-          <p:nvPr/>
-        </p:nvSpPr>
-        <p:spPr>
-          <a:xfrm>
-            <a:off x="6858000" y="4251960"/>
-            <a:ext cx="4754880" cy="384048"/>
-          </a:xfrm>
-          <a:prstGeom prst="rect">
-            <a:avLst/>
-          </a:prstGeom>
-          <a:noFill/>
-        </p:spPr>
-        <p:txBody>
-          <a:bodyPr wrap="square" lIns="0" tIns="0" rIns="0" bIns="0">
-            <a:spAutoFit/>
-          </a:bodyPr>
-          <a:lstStyle/>
-          <a:p>
-            <a:pPr marL="177800" indent="0">
-              <a:spcAft>
-                <a:spcPts val="0"/>
-              </a:spcAft>
-              <a:buSzPct val="100000"/>
-              <a:buNone/>
-            </a:pPr>
-            <a:r>
-              <a:rPr lang="en-US" sz="1200" b="1" dirty="0">
-                <a:solidFill>
-                  <a:srgbClr val="000000"/>
-                </a:solidFill>
-                <a:latin typeface="Calibri" pitchFamily="34" charset="0"/>
-                <a:ea typeface="Calibri" pitchFamily="34" charset="-122"/>
-                <a:cs typeface="Calibri" pitchFamily="34" charset="-120"/>
-              </a:rPr>
-              <a:t xml:space="preserve">20 LUTs, 20 flip-flops · 200 MHz met, 1.996 ns slack</a:t>
-            </a:r>
-          </a:p>
-        </p:txBody>
-      </p:sp>
-      <p:sp>
-        <p:nvSpPr>
-          <p:cNvPr id="23" name="TextBox 22"/>
-          <p:cNvSpPr txBox="1"/>
-          <p:nvPr/>
-        </p:nvSpPr>
-        <p:spPr>
-          <a:xfrm>
-            <a:off x="640080" y="4818888"/>
-            <a:ext cx="2788920" cy="384048"/>
-          </a:xfrm>
-          <a:prstGeom prst="rect">
-            <a:avLst/>
-          </a:prstGeom>
-          <a:noFill/>
-        </p:spPr>
-        <p:txBody>
-          <a:bodyPr wrap="square" lIns="0" tIns="0" rIns="0" bIns="0">
-            <a:spAutoFit/>
-          </a:bodyPr>
-          <a:lstStyle/>
-          <a:p>
-            <a:pPr marL="177800" indent="0">
-              <a:spcAft>
-                <a:spcPts val="0"/>
-              </a:spcAft>
-              <a:buSzPct val="100000"/>
-              <a:buNone/>
-            </a:pPr>
-            <a:r>
-              <a:rPr lang="en-US" sz="1350" b="1" dirty="0">
-                <a:solidFill>
-                  <a:srgbClr val="000000"/>
-                </a:solidFill>
-                <a:latin typeface="Calibri" pitchFamily="34" charset="0"/>
-                <a:ea typeface="Calibri" pitchFamily="34" charset="-122"/>
-                <a:cs typeface="Calibri" pitchFamily="34" charset="-120"/>
-              </a:rPr>
-              <a:t xml:space="preserve">Python · NumPy</a:t>
-            </a:r>
-          </a:p>
-        </p:txBody>
-      </p:sp>
-      <p:sp>
-        <p:nvSpPr>
-          <p:cNvPr id="24" name="TextBox 23"/>
-          <p:cNvSpPr txBox="1"/>
-          <p:nvPr/>
-        </p:nvSpPr>
-        <p:spPr>
-          <a:xfrm>
-            <a:off x="3520440" y="4818888"/>
-            <a:ext cx="3246120" cy="384048"/>
-          </a:xfrm>
-          <a:prstGeom prst="rect">
-            <a:avLst/>
-          </a:prstGeom>
-          <a:noFill/>
-        </p:spPr>
-        <p:txBody>
-          <a:bodyPr wrap="square" lIns="0" tIns="0" rIns="0" bIns="0">
-            <a:spAutoFit/>
-          </a:bodyPr>
-          <a:lstStyle/>
-          <a:p>
-            <a:pPr marL="177800" indent="0">
-              <a:spcAft>
-                <a:spcPts val="0"/>
-              </a:spcAft>
-              <a:buSzPct val="100000"/>
-              <a:buNone/>
-            </a:pPr>
-            <a:r>
-              <a:rPr lang="en-US" sz="1200" dirty="0">
-                <a:solidFill>
-                  <a:srgbClr val="000000"/>
-                </a:solidFill>
-                <a:latin typeface="Calibri" pitchFamily="34" charset="0"/>
-                <a:ea typeface="Calibri" pitchFamily="34" charset="-122"/>
-                <a:cs typeface="Calibri" pitchFamily="34" charset="-120"/>
-              </a:rPr>
-              <a:t xml:space="preserve">sweep orchestration and the decomposition</a:t>
-            </a:r>
-          </a:p>
-        </p:txBody>
-      </p:sp>
-      <p:sp>
-        <p:nvSpPr>
-          <p:cNvPr id="25" name="TextBox 24"/>
-          <p:cNvSpPr txBox="1"/>
-          <p:nvPr/>
-        </p:nvSpPr>
-        <p:spPr>
-          <a:xfrm>
-            <a:off x="6858000" y="4818888"/>
-            <a:ext cx="4754880" cy="384048"/>
-          </a:xfrm>
-          <a:prstGeom prst="rect">
-            <a:avLst/>
-          </a:prstGeom>
-          <a:noFill/>
-        </p:spPr>
-        <p:txBody>
-          <a:bodyPr wrap="square" lIns="0" tIns="0" rIns="0" bIns="0">
-            <a:spAutoFit/>
-          </a:bodyPr>
-          <a:lstStyle/>
-          <a:p>
-            <a:pPr marL="177800" indent="0">
-              <a:spcAft>
-                <a:spcPts val="0"/>
-              </a:spcAft>
-              <a:buSzPct val="100000"/>
-              <a:buNone/>
-            </a:pPr>
-            <a:r>
-              <a:rPr lang="en-US" sz="1200" b="1" dirty="0">
-                <a:solidFill>
-                  <a:srgbClr val="000000"/>
-                </a:solidFill>
-                <a:latin typeface="Calibri" pitchFamily="34" charset="0"/>
-                <a:ea typeface="Calibri" pitchFamily="34" charset="-122"/>
-                <a:cs typeface="Calibri" pitchFamily="34" charset="-120"/>
-              </a:rPr>
-              <a:t xml:space="preserve">720-word search · (A) 25.1 % vs (B) 3.9 %</a:t>
-            </a:r>
-          </a:p>
-        </p:txBody>
-      </p:sp>
-      <p:sp>
-        <p:nvSpPr>
-          <p:cNvPr id="26" name="TextBox 25"/>
-          <p:cNvSpPr txBox="1"/>
-          <p:nvPr/>
-        </p:nvSpPr>
-        <p:spPr>
-          <a:xfrm>
-            <a:off x="640080" y="5550408"/>
-            <a:ext cx="10972800" cy="548640"/>
-          </a:xfrm>
-          <a:prstGeom prst="rect">
-            <a:avLst/>
-          </a:prstGeom>
-          <a:noFill/>
-        </p:spPr>
-        <p:txBody>
-          <a:bodyPr wrap="square" lIns="0" tIns="0" rIns="0" bIns="0">
-            <a:spAutoFit/>
-          </a:bodyPr>
-          <a:lstStyle/>
-          <a:p>
-            <a:pPr marL="177800" indent="0">
-              <a:spcAft>
-                <a:spcPts val="0"/>
-              </a:spcAft>
-              <a:buSzPct val="100000"/>
-              <a:buNone/>
-            </a:pPr>
-            <a:r>
-              <a:rPr lang="en-US" sz="1250" b="1" dirty="0">
-                <a:solidFill>
-                  <a:srgbClr val="000000"/>
-                </a:solidFill>
-                <a:latin typeface="Calibri" pitchFamily="34" charset="0"/>
-                <a:ea typeface="Calibri" pitchFamily="34" charset="-122"/>
-                <a:cs typeface="Calibri" pitchFamily="34" charset="-120"/>
-              </a:rPr>
-              <a:t xml:space="preserve">No number rests on one tool. </a:t>
-            </a:r>
-            <a:r>
-              <a:rPr lang="en-US" sz="1250" dirty="0">
-                <a:solidFill>
-                  <a:srgbClr val="000000"/>
-                </a:solidFill>
-                <a:latin typeface="Calibri" pitchFamily="34" charset="0"/>
-                <a:ea typeface="Calibri" pitchFamily="34" charset="-122"/>
-                <a:cs typeface="Calibri" pitchFamily="34" charset="-120"/>
-              </a:rPr>
-              <a:t xml:space="preserve">Every headline figure was produced in one program and checked in another — SPICE against SPICE, MATLAB against Octave, yosys against Vivado.</a:t>
+              <a:rPr lang="en-US" sz="1400" b="1" dirty="0">
+                <a:solidFill>
+                  <a:srgbClr val="000000"/>
+                </a:solidFill>
+                <a:latin typeface="Calibri" pitchFamily="34" charset="0"/>
+                <a:ea typeface="Calibri" pitchFamily="34" charset="-122"/>
+                <a:cs typeface="Calibri" pitchFamily="34" charset="-120"/>
+              </a:rPr>
+              <a:t xml:space="preserve">WHAT WE DO: </a:t>
+            </a:r>
+            <a:r>
+              <a:rPr lang="en-US" sz="1400" dirty="0">
+                <a:solidFill>
+                  <a:srgbClr val="000000"/>
+                </a:solidFill>
+                <a:latin typeface="Calibri" pitchFamily="34" charset="0"/>
+                <a:ea typeface="Calibri" pitchFamily="34" charset="-122"/>
+                <a:cs typeface="Calibri" pitchFamily="34" charset="-120"/>
+              </a:rPr>
+              <a:t xml:space="preserve">720 control words × 4 corners, exhaustively, in ngspice — then report the two numbers separately instead of their sum.</a:t>
             </a:r>
           </a:p>
         </p:txBody>
@@ -15079,7 +14417,7 @@
                 <a:ea typeface="Calibri" pitchFamily="34" charset="-122"/>
                 <a:cs typeface="Calibri" pitchFamily="34" charset="-120"/>
               </a:rPr>
-              <a:t xml:space="preserve">The gap this project fills</a:t>
+              <a:t xml:space="preserve">We implemented the base paper, then ours</a:t>
             </a:r>
           </a:p>
         </p:txBody>
@@ -15122,7 +14460,7 @@
                 <a:ea typeface="Calibri" pitchFamily="34" charset="-122"/>
                 <a:cs typeface="Calibri" pitchFamily="34" charset="-120"/>
               </a:rPr>
-              <a:t xml:space="preserve">8</a:t>
+              <a:t xml:space="preserve">15</a:t>
             </a:r>
           </a:p>
         </p:txBody>
@@ -15135,8 +14473,8 @@
         </p:nvSpPr>
         <p:spPr>
           <a:xfrm>
-            <a:off x="640080" y="1234440"/>
-            <a:ext cx="11064240" cy="914400"/>
+            <a:off x="640080" y="1207008"/>
+            <a:ext cx="11064240" cy="868680"/>
           </a:xfrm>
           <a:prstGeom prst="rect">
             <a:avLst/>
@@ -15151,41 +14489,32 @@
           <a:p>
             <a:pPr marL="177800" indent="0">
               <a:spcAft>
-                <a:spcPts val="120"/>
-              </a:spcAft>
-              <a:buSzPct val="100000"/>
-              <a:buNone/>
-            </a:pPr>
-            <a:r>
-              <a:rPr lang="en-US" sz="1500" b="1" dirty="0">
-                <a:solidFill>
-                  <a:srgbClr val="000000"/>
-                </a:solidFill>
-                <a:latin typeface="Calibri" pitchFamily="34" charset="0"/>
-                <a:ea typeface="Calibri" pitchFamily="34" charset="-122"/>
-                <a:cs typeface="Calibri" pitchFamily="34" charset="-120"/>
-              </a:rPr>
-              <a:t xml:space="preserve">Every active-gate-driver paper reports ONE number: the improvement over a conventional driver.</a:t>
-            </a:r>
-          </a:p>
-          <a:p>
-            <a:pPr marL="177800" indent="0">
-              <a:spcAft>
                 <a:spcPts val="0"/>
               </a:spcAft>
               <a:buSzPct val="100000"/>
               <a:buNone/>
             </a:pPr>
             <a:r>
-              <a:rPr lang="en-US" sz="1300" dirty="0">
-                <a:solidFill>
-                  <a:srgbClr val="000000"/>
-                </a:solidFill>
-                <a:latin typeface="Calibri" pitchFamily="34" charset="0"/>
-                <a:ea typeface="Calibri" pitchFamily="34" charset="-122"/>
-                <a:cs typeface="Calibri" pitchFamily="34" charset="-120"/>
-              </a:rPr>
-              <a:t xml:space="preserve">That number bundles two effects that cost completely different hardware.</a:t>
+              <a:rPr lang="en-US" sz="1250" b="1" dirty="0">
+                <a:solidFill>
+                  <a:srgbClr val="000000"/>
+                </a:solidFill>
+                <a:latin typeface="Calibri" pitchFamily="34" charset="0"/>
+                <a:ea typeface="Calibri" pitchFamily="34" charset="-122"/>
+                <a:cs typeface="Calibri" pitchFamily="34" charset="-120"/>
+              </a:rPr>
+              <a:t xml:space="preserve">Citing a base paper is not a comparison. </a:t>
+            </a:r>
+            <a:r>
+              <a:rPr lang="en-US" sz="1250" dirty="0">
+                <a:solidFill>
+                  <a:srgbClr val="000000"/>
+                </a:solidFill>
+                <a:latin typeface="Calibri" pitchFamily="34" charset="0"/>
+                <a:ea typeface="Calibri" pitchFamily="34" charset="-122"/>
+                <a:cs typeface="Calibri" pitchFamily="34" charset="-120"/>
+              </a:rPr>
+              <a:t xml:space="preserve">models/basedrv.lib implements Takayama, Okuda &amp; Hikihara's DAC-architecture driver — a multibit code that changes DURING the switching edge, with no Miller clamp and no negative off-bias rail, because those are ours. It runs inside sim/dpt.cir, byte-identical otherwise, so only the driver differs.</a:t>
             </a:r>
           </a:p>
         </p:txBody>
@@ -15198,8 +14527,8 @@
         </p:nvSpPr>
         <p:spPr>
           <a:xfrm>
-            <a:off x="640080" y="2377440"/>
-            <a:ext cx="5394960" cy="365760"/>
+            <a:off x="640080" y="2395728"/>
+            <a:ext cx="3566160" cy="530352"/>
           </a:xfrm>
           <a:prstGeom prst="rect">
             <a:avLst/>
@@ -15220,15 +14549,15 @@
               <a:buNone/>
             </a:pPr>
             <a:r>
-              <a:rPr lang="en-US" sz="1450" b="1" dirty="0">
-                <a:solidFill>
-                  <a:srgbClr val="000000"/>
-                </a:solidFill>
-                <a:latin typeface="Calibri" pitchFamily="34" charset="0"/>
-                <a:ea typeface="Calibri" pitchFamily="34" charset="-122"/>
-                <a:cs typeface="Calibri" pitchFamily="34" charset="-120"/>
-              </a:rPr>
-              <a:t xml:space="preserve">Effect 1  —  a better FIXED setting</a:t>
+              <a:rPr lang="en-US" sz="1300" dirty="0">
+                <a:solidFill>
+                  <a:srgbClr val="000000"/>
+                </a:solidFill>
+                <a:latin typeface="Calibri" pitchFamily="34" charset="0"/>
+                <a:ea typeface="Calibri" pitchFamily="34" charset="-122"/>
+                <a:cs typeface="Calibri" pitchFamily="34" charset="-120"/>
+              </a:rPr>
+              <a:t xml:space="preserve">Base paper, as we built it</a:t>
             </a:r>
           </a:p>
         </p:txBody>
@@ -15241,8 +14570,8 @@
         </p:nvSpPr>
         <p:spPr>
           <a:xfrm>
-            <a:off x="640080" y="2834640"/>
-            <a:ext cx="3703320" cy="1463040"/>
+            <a:off x="4343400" y="2340864"/>
+            <a:ext cx="1417320" cy="438912"/>
           </a:xfrm>
           <a:prstGeom prst="rect">
             <a:avLst/>
@@ -15263,15 +14592,15 @@
               <a:buNone/>
             </a:pPr>
             <a:r>
-              <a:rPr lang="en-US" sz="1200" dirty="0">
-                <a:solidFill>
-                  <a:srgbClr val="000000"/>
-                </a:solidFill>
-                <a:latin typeface="Calibri" pitchFamily="34" charset="0"/>
-                <a:ea typeface="Calibri" pitchFamily="34" charset="-122"/>
-                <a:cs typeface="Calibri" pitchFamily="34" charset="-120"/>
-              </a:rPr>
-              <a:t xml:space="preserve">Pick a better control word once, at design time. Costs nothing at run time: no sensor, no ADC, no lookup table, no controller.</a:t>
+              <a:rPr lang="en-US" sz="1700" b="1" dirty="0">
+                <a:solidFill>
+                  <a:srgbClr val="000000"/>
+                </a:solidFill>
+                <a:latin typeface="Calibri" pitchFamily="34" charset="0"/>
+                <a:ea typeface="Calibri" pitchFamily="34" charset="-122"/>
+                <a:cs typeface="Calibri" pitchFamily="34" charset="-120"/>
+              </a:rPr>
+              <a:t xml:space="preserve">+0.533 V</a:t>
             </a:r>
           </a:p>
         </p:txBody>
@@ -15284,8 +14613,8 @@
         </p:nvSpPr>
         <p:spPr>
           <a:xfrm>
-            <a:off x="4480560" y="2788920"/>
-            <a:ext cx="1554480" cy="1188720"/>
+            <a:off x="5943600" y="2395728"/>
+            <a:ext cx="5577840" cy="548640"/>
           </a:xfrm>
           <a:prstGeom prst="rect">
             <a:avLst/>
@@ -15300,46 +14629,6 @@
           <a:p>
             <a:pPr marL="177800" indent="0">
               <a:spcAft>
-                <a:spcPts val="100"/>
-              </a:spcAft>
-              <a:buSzPct val="100000"/>
-              <a:buNone/>
-            </a:pPr>
-            <a:r>
-              <a:rPr lang="en-US" sz="3200" b="1" dirty="0">
-                <a:solidFill>
-                  <a:srgbClr val="000000"/>
-                </a:solidFill>
-                <a:latin typeface="Calibri" pitchFamily="34" charset="0"/>
-                <a:ea typeface="Calibri" pitchFamily="34" charset="-122"/>
-                <a:cs typeface="Calibri" pitchFamily="34" charset="-120"/>
-              </a:rPr>
-              <a:t xml:space="preserve">25.1 %</a:t>
-            </a:r>
-          </a:p>
-          <a:p>
-            <a:pPr marL="177800" indent="0">
-              <a:spcAft>
-                <a:spcPts val="60"/>
-              </a:spcAft>
-              <a:buSzPct val="100000"/>
-              <a:buNone/>
-            </a:pPr>
-            <a:r>
-              <a:rPr lang="en-US" sz="1300" b="1" dirty="0">
-                <a:solidFill>
-                  <a:srgbClr val="000000"/>
-                </a:solidFill>
-                <a:latin typeface="Calibri" pitchFamily="34" charset="0"/>
-                <a:ea typeface="Calibri" pitchFamily="34" charset="-122"/>
-                <a:cs typeface="Calibri" pitchFamily="34" charset="-120"/>
-              </a:rPr>
-              <a:t xml:space="preserve">of baseline</a:t>
-            </a:r>
-          </a:p>
-          <a:p>
-            <a:pPr marL="177800" indent="0">
-              <a:spcAft>
                 <a:spcPts val="0"/>
               </a:spcAft>
               <a:buSzPct val="100000"/>
@@ -15354,7 +14643,7 @@
                 <a:ea typeface="Calibri" pitchFamily="34" charset="-122"/>
                 <a:cs typeface="Calibri" pitchFamily="34" charset="-120"/>
               </a:rPr>
-              <a:t xml:space="preserve"/>
+              <a:t xml:space="preserve">Their time-sequenced multibit code alone already clears the 1.4 V threshold.</a:t>
             </a:r>
           </a:p>
         </p:txBody>
@@ -15367,8 +14656,8 @@
         </p:nvSpPr>
         <p:spPr>
           <a:xfrm>
-            <a:off x="6400800" y="2377440"/>
-            <a:ext cx="5394960" cy="365760"/>
+            <a:off x="640080" y="3035808"/>
+            <a:ext cx="3566160" cy="530352"/>
           </a:xfrm>
           <a:prstGeom prst="rect">
             <a:avLst/>
@@ -15389,15 +14678,15 @@
               <a:buNone/>
             </a:pPr>
             <a:r>
-              <a:rPr lang="en-US" sz="1450" b="1" dirty="0">
-                <a:solidFill>
-                  <a:srgbClr val="000000"/>
-                </a:solidFill>
-                <a:latin typeface="Calibri" pitchFamily="34" charset="0"/>
-                <a:ea typeface="Calibri" pitchFamily="34" charset="-122"/>
-                <a:cs typeface="Calibri" pitchFamily="34" charset="-120"/>
-              </a:rPr>
-              <a:t xml:space="preserve">Effect 2  —  ADAPTING per operating point</a:t>
+              <a:rPr lang="en-US" sz="1300" dirty="0">
+                <a:solidFill>
+                  <a:srgbClr val="000000"/>
+                </a:solidFill>
+                <a:latin typeface="Calibri" pitchFamily="34" charset="0"/>
+                <a:ea typeface="Calibri" pitchFamily="34" charset="-122"/>
+                <a:cs typeface="Calibri" pitchFamily="34" charset="-120"/>
+              </a:rPr>
+              <a:t xml:space="preserve">Ours, constant code, no clamp</a:t>
             </a:r>
           </a:p>
         </p:txBody>
@@ -15410,8 +14699,8 @@
         </p:nvSpPr>
         <p:spPr>
           <a:xfrm>
-            <a:off x="6400800" y="2834640"/>
-            <a:ext cx="3703320" cy="1463040"/>
+            <a:off x="4343400" y="2980944"/>
+            <a:ext cx="1417320" cy="438912"/>
           </a:xfrm>
           <a:prstGeom prst="rect">
             <a:avLst/>
@@ -15432,15 +14721,15 @@
               <a:buNone/>
             </a:pPr>
             <a:r>
-              <a:rPr lang="en-US" sz="1200" dirty="0">
-                <a:solidFill>
-                  <a:srgbClr val="000000"/>
-                </a:solidFill>
-                <a:latin typeface="Calibri" pitchFamily="34" charset="0"/>
-                <a:ea typeface="Calibri" pitchFamily="34" charset="-122"/>
-                <a:cs typeface="Calibri" pitchFamily="34" charset="-120"/>
-              </a:rPr>
-              <a:t xml:space="preserve">Change the word as load, bus voltage and temperature move. This is what needs the sensing hardware the architecture is sold on.</a:t>
+              <a:rPr lang="en-US" sz="1700" b="1" dirty="0">
+                <a:solidFill>
+                  <a:srgbClr val="000000"/>
+                </a:solidFill>
+                <a:latin typeface="Calibri" pitchFamily="34" charset="0"/>
+                <a:ea typeface="Calibri" pitchFamily="34" charset="-122"/>
+                <a:cs typeface="Calibri" pitchFamily="34" charset="-120"/>
+              </a:rPr>
+              <a:t xml:space="preserve">−0.249 V</a:t>
             </a:r>
           </a:p>
         </p:txBody>
@@ -15453,8 +14742,8 @@
         </p:nvSpPr>
         <p:spPr>
           <a:xfrm>
-            <a:off x="10241280" y="2788920"/>
-            <a:ext cx="1554480" cy="1188720"/>
+            <a:off x="5943600" y="3035808"/>
+            <a:ext cx="5577840" cy="548640"/>
           </a:xfrm>
           <a:prstGeom prst="rect">
             <a:avLst/>
@@ -15469,46 +14758,6 @@
           <a:p>
             <a:pPr marL="177800" indent="0">
               <a:spcAft>
-                <a:spcPts val="100"/>
-              </a:spcAft>
-              <a:buSzPct val="100000"/>
-              <a:buNone/>
-            </a:pPr>
-            <a:r>
-              <a:rPr lang="en-US" sz="3200" b="1" dirty="0">
-                <a:solidFill>
-                  <a:srgbClr val="000000"/>
-                </a:solidFill>
-                <a:latin typeface="Calibri" pitchFamily="34" charset="0"/>
-                <a:ea typeface="Calibri" pitchFamily="34" charset="-122"/>
-                <a:cs typeface="Calibri" pitchFamily="34" charset="-120"/>
-              </a:rPr>
-              <a:t xml:space="preserve">3.9 %</a:t>
-            </a:r>
-          </a:p>
-          <a:p>
-            <a:pPr marL="177800" indent="0">
-              <a:spcAft>
-                <a:spcPts val="60"/>
-              </a:spcAft>
-              <a:buSzPct val="100000"/>
-              <a:buNone/>
-            </a:pPr>
-            <a:r>
-              <a:rPr lang="en-US" sz="1300" b="1" dirty="0">
-                <a:solidFill>
-                  <a:srgbClr val="000000"/>
-                </a:solidFill>
-                <a:latin typeface="Calibri" pitchFamily="34" charset="0"/>
-                <a:ea typeface="Calibri" pitchFamily="34" charset="-122"/>
-                <a:cs typeface="Calibri" pitchFamily="34" charset="-120"/>
-              </a:rPr>
-              <a:t xml:space="preserve">of baseline</a:t>
-            </a:r>
-          </a:p>
-          <a:p>
-            <a:pPr marL="177800" indent="0">
-              <a:spcAft>
                 <a:spcPts val="0"/>
               </a:spcAft>
               <a:buSzPct val="100000"/>
@@ -15523,7 +14772,7 @@
                 <a:ea typeface="Calibri" pitchFamily="34" charset="-122"/>
                 <a:cs typeface="Calibri" pitchFamily="34" charset="-120"/>
               </a:rPr>
-              <a:t xml:space="preserve"/>
+              <a:t xml:space="preserve">FALSE TURN-ON. A fast FIXED code is worse than their sequenced one — their contribution is real, and we reproduce it.</a:t>
             </a:r>
           </a:p>
         </p:txBody>
@@ -15536,8 +14785,8 @@
         </p:nvSpPr>
         <p:spPr>
           <a:xfrm>
-            <a:off x="640080" y="4526280"/>
-            <a:ext cx="11064240" cy="1920240"/>
+            <a:off x="640080" y="3675887"/>
+            <a:ext cx="3566160" cy="530352"/>
           </a:xfrm>
           <a:prstGeom prst="rect">
             <a:avLst/>
@@ -15552,65 +14801,89 @@
           <a:p>
             <a:pPr marL="177800" indent="0">
               <a:spcAft>
-                <a:spcPts val="170"/>
-              </a:spcAft>
-              <a:buSzPct val="100000"/>
-              <a:buNone/>
-            </a:pPr>
-            <a:r>
-              <a:rPr lang="en-US" sz="1400" b="1" dirty="0">
-                <a:solidFill>
-                  <a:srgbClr val="000000"/>
-                </a:solidFill>
-                <a:latin typeface="Calibri" pitchFamily="34" charset="0"/>
-                <a:ea typeface="Calibri" pitchFamily="34" charset="-122"/>
-                <a:cs typeface="Calibri" pitchFamily="34" charset="-120"/>
-              </a:rPr>
-              <a:t xml:space="preserve">THE GAP: </a:t>
-            </a:r>
-            <a:r>
-              <a:rPr lang="en-US" sz="1400" dirty="0">
-                <a:solidFill>
-                  <a:srgbClr val="000000"/>
-                </a:solidFill>
-                <a:latin typeface="Calibri" pitchFamily="34" charset="0"/>
-                <a:ea typeface="Calibri" pitchFamily="34" charset="-122"/>
-                <a:cs typeface="Calibri" pitchFamily="34" charset="-120"/>
-              </a:rPr>
-              <a:t xml:space="preserve">no published work separates them. Nobody reports how much of an active gate driver's benefit actually requires adaptation, because separating the two needs an exhaustive search of the control word at every corner — and nobody has run one.</a:t>
-            </a:r>
-          </a:p>
+                <a:spcPts val="0"/>
+              </a:spcAft>
+              <a:buSzPct val="100000"/>
+              <a:buNone/>
+            </a:pPr>
+            <a:r>
+              <a:rPr lang="en-US" sz="1300" dirty="0">
+                <a:solidFill>
+                  <a:srgbClr val="000000"/>
+                </a:solidFill>
+                <a:latin typeface="Calibri" pitchFamily="34" charset="0"/>
+                <a:ea typeface="Calibri" pitchFamily="34" charset="-122"/>
+                <a:cs typeface="Calibri" pitchFamily="34" charset="-120"/>
+              </a:rPr>
+              <a:t xml:space="preserve">Ours, active Miller clamp on</a:t>
+            </a:r>
+          </a:p>
+        </p:txBody>
+      </p:sp>
+      <p:sp>
+        <p:nvSpPr>
+          <p:cNvPr id="14" name="TextBox 13"/>
+          <p:cNvSpPr txBox="1"/>
+          <p:nvPr/>
+        </p:nvSpPr>
+        <p:spPr>
+          <a:xfrm>
+            <a:off x="4343400" y="3621023"/>
+            <a:ext cx="1417320" cy="438912"/>
+          </a:xfrm>
+          <a:prstGeom prst="rect">
+            <a:avLst/>
+          </a:prstGeom>
+          <a:noFill/>
+        </p:spPr>
+        <p:txBody>
+          <a:bodyPr wrap="square" lIns="0" tIns="0" rIns="0" bIns="0">
+            <a:spAutoFit/>
+          </a:bodyPr>
+          <a:lstStyle/>
           <a:p>
             <a:pPr marL="177800" indent="0">
               <a:spcAft>
-                <a:spcPts val="170"/>
-              </a:spcAft>
-              <a:buSzPct val="100000"/>
-              <a:buNone/>
-            </a:pPr>
-            <a:r>
-              <a:rPr lang="en-US" sz="1400" b="1" dirty="0">
-                <a:solidFill>
-                  <a:srgbClr val="000000"/>
-                </a:solidFill>
-                <a:latin typeface="Calibri" pitchFamily="34" charset="0"/>
-                <a:ea typeface="Calibri" pitchFamily="34" charset="-122"/>
-                <a:cs typeface="Calibri" pitchFamily="34" charset="-120"/>
-              </a:rPr>
-              <a:t xml:space="preserve">WHY IT MATTERS: </a:t>
-            </a:r>
-            <a:r>
-              <a:rPr lang="en-US" sz="1400" dirty="0">
-                <a:solidFill>
-                  <a:srgbClr val="000000"/>
-                </a:solidFill>
-                <a:latin typeface="Calibri" pitchFamily="34" charset="0"/>
-                <a:ea typeface="Calibri" pitchFamily="34" charset="-122"/>
-                <a:cs typeface="Calibri" pitchFamily="34" charset="-120"/>
-              </a:rPr>
-              <a:t xml:space="preserve">only Effect 2 justifies the sense + ADC + lookup table. If it is small, that hardware is mostly paying for something a design-time choice already delivers — a buy-or-not decision nobody has costed.</a:t>
-            </a:r>
-          </a:p>
+                <a:spcPts val="0"/>
+              </a:spcAft>
+              <a:buSzPct val="100000"/>
+              <a:buNone/>
+            </a:pPr>
+            <a:r>
+              <a:rPr lang="en-US" sz="1700" b="1" dirty="0">
+                <a:solidFill>
+                  <a:srgbClr val="000000"/>
+                </a:solidFill>
+                <a:latin typeface="Calibri" pitchFamily="34" charset="0"/>
+                <a:ea typeface="Calibri" pitchFamily="34" charset="-122"/>
+                <a:cs typeface="Calibri" pitchFamily="34" charset="-120"/>
+              </a:rPr>
+              <a:t xml:space="preserve">+0.570 V</a:t>
+            </a:r>
+          </a:p>
+        </p:txBody>
+      </p:sp>
+      <p:sp>
+        <p:nvSpPr>
+          <p:cNvPr id="15" name="TextBox 14"/>
+          <p:cNvSpPr txBox="1"/>
+          <p:nvPr/>
+        </p:nvSpPr>
+        <p:spPr>
+          <a:xfrm>
+            <a:off x="5943600" y="3675887"/>
+            <a:ext cx="5577840" cy="548640"/>
+          </a:xfrm>
+          <a:prstGeom prst="rect">
+            <a:avLst/>
+          </a:prstGeom>
+          <a:noFill/>
+        </p:spPr>
+        <p:txBody>
+          <a:bodyPr wrap="square" lIns="0" tIns="0" rIns="0" bIns="0">
+            <a:spAutoFit/>
+          </a:bodyPr>
+          <a:lstStyle/>
           <a:p>
             <a:pPr marL="177800" indent="0">
               <a:spcAft>
@@ -15620,26 +14893,240 @@
               <a:buNone/>
             </a:pPr>
             <a:r>
-              <a:rPr lang="en-US" sz="1400" b="1" dirty="0">
-                <a:solidFill>
-                  <a:srgbClr val="000000"/>
-                </a:solidFill>
-                <a:latin typeface="Calibri" pitchFamily="34" charset="0"/>
-                <a:ea typeface="Calibri" pitchFamily="34" charset="-122"/>
-                <a:cs typeface="Calibri" pitchFamily="34" charset="-120"/>
-              </a:rPr>
-              <a:t xml:space="preserve">WHAT WE DO: </a:t>
-            </a:r>
-            <a:r>
-              <a:rPr lang="en-US" sz="1400" dirty="0">
-                <a:solidFill>
-                  <a:srgbClr val="000000"/>
-                </a:solidFill>
-                <a:latin typeface="Calibri" pitchFamily="34" charset="0"/>
-                <a:ea typeface="Calibri" pitchFamily="34" charset="-122"/>
-                <a:cs typeface="Calibri" pitchFamily="34" charset="-120"/>
-              </a:rPr>
-              <a:t xml:space="preserve">720 control words × 4 corners, exhaustively, in ngspice — then report the two numbers separately instead of their sum.</a:t>
+              <a:rPr lang="en-US" sz="1150" dirty="0">
+                <a:solidFill>
+                  <a:srgbClr val="000000"/>
+                </a:solidFill>
+                <a:latin typeface="Calibri" pitchFamily="34" charset="0"/>
+                <a:ea typeface="Calibri" pitchFamily="34" charset="-122"/>
+                <a:cs typeface="Calibri" pitchFamily="34" charset="-120"/>
+              </a:rPr>
+              <a:t xml:space="preserve">Only marginally past the base paper. The clamp alone is not the story.</a:t>
+            </a:r>
+          </a:p>
+        </p:txBody>
+      </p:sp>
+      <p:sp>
+        <p:nvSpPr>
+          <p:cNvPr id="16" name="TextBox 15"/>
+          <p:cNvSpPr txBox="1"/>
+          <p:nvPr/>
+        </p:nvSpPr>
+        <p:spPr>
+          <a:xfrm>
+            <a:off x="640080" y="4315968"/>
+            <a:ext cx="3566160" cy="530352"/>
+          </a:xfrm>
+          <a:prstGeom prst="rect">
+            <a:avLst/>
+          </a:prstGeom>
+          <a:noFill/>
+        </p:spPr>
+        <p:txBody>
+          <a:bodyPr wrap="square" lIns="0" tIns="0" rIns="0" bIns="0">
+            <a:spAutoFit/>
+          </a:bodyPr>
+          <a:lstStyle/>
+          <a:p>
+            <a:pPr marL="177800" indent="0">
+              <a:spcAft>
+                <a:spcPts val="0"/>
+              </a:spcAft>
+              <a:buSzPct val="100000"/>
+              <a:buNone/>
+            </a:pPr>
+            <a:r>
+              <a:rPr lang="en-US" sz="1300" b="1" dirty="0">
+                <a:solidFill>
+                  <a:srgbClr val="000000"/>
+                </a:solidFill>
+                <a:latin typeface="Calibri" pitchFamily="34" charset="0"/>
+                <a:ea typeface="Calibri" pitchFamily="34" charset="-122"/>
+                <a:cs typeface="Calibri" pitchFamily="34" charset="-120"/>
+              </a:rPr>
+              <a:t xml:space="preserve">Ours, clamp + −2 V off-bias</a:t>
+            </a:r>
+          </a:p>
+        </p:txBody>
+      </p:sp>
+      <p:sp>
+        <p:nvSpPr>
+          <p:cNvPr id="17" name="TextBox 16"/>
+          <p:cNvSpPr txBox="1"/>
+          <p:nvPr/>
+        </p:nvSpPr>
+        <p:spPr>
+          <a:xfrm>
+            <a:off x="4343400" y="4261104"/>
+            <a:ext cx="1417320" cy="438912"/>
+          </a:xfrm>
+          <a:prstGeom prst="rect">
+            <a:avLst/>
+          </a:prstGeom>
+          <a:noFill/>
+        </p:spPr>
+        <p:txBody>
+          <a:bodyPr wrap="square" lIns="0" tIns="0" rIns="0" bIns="0">
+            <a:spAutoFit/>
+          </a:bodyPr>
+          <a:lstStyle/>
+          <a:p>
+            <a:pPr marL="177800" indent="0">
+              <a:spcAft>
+                <a:spcPts val="0"/>
+              </a:spcAft>
+              <a:buSzPct val="100000"/>
+              <a:buNone/>
+            </a:pPr>
+            <a:r>
+              <a:rPr lang="en-US" sz="1700" b="1" dirty="0">
+                <a:solidFill>
+                  <a:srgbClr val="000000"/>
+                </a:solidFill>
+                <a:latin typeface="Calibri" pitchFamily="34" charset="0"/>
+                <a:ea typeface="Calibri" pitchFamily="34" charset="-122"/>
+                <a:cs typeface="Calibri" pitchFamily="34" charset="-120"/>
+              </a:rPr>
+              <a:t xml:space="preserve">+2.576 V</a:t>
+            </a:r>
+          </a:p>
+        </p:txBody>
+      </p:sp>
+      <p:sp>
+        <p:nvSpPr>
+          <p:cNvPr id="18" name="TextBox 17"/>
+          <p:cNvSpPr txBox="1"/>
+          <p:nvPr/>
+        </p:nvSpPr>
+        <p:spPr>
+          <a:xfrm>
+            <a:off x="5943600" y="4315968"/>
+            <a:ext cx="5577840" cy="548640"/>
+          </a:xfrm>
+          <a:prstGeom prst="rect">
+            <a:avLst/>
+          </a:prstGeom>
+          <a:noFill/>
+        </p:spPr>
+        <p:txBody>
+          <a:bodyPr wrap="square" lIns="0" tIns="0" rIns="0" bIns="0">
+            <a:spAutoFit/>
+          </a:bodyPr>
+          <a:lstStyle/>
+          <a:p>
+            <a:pPr marL="177800" indent="0">
+              <a:spcAft>
+                <a:spcPts val="0"/>
+              </a:spcAft>
+              <a:buSzPct val="100000"/>
+              <a:buNone/>
+            </a:pPr>
+            <a:r>
+              <a:rPr lang="en-US" sz="1150" dirty="0">
+                <a:solidFill>
+                  <a:srgbClr val="000000"/>
+                </a:solidFill>
+                <a:latin typeface="Calibri" pitchFamily="34" charset="0"/>
+                <a:ea typeface="Calibri" pitchFamily="34" charset="-122"/>
+                <a:cs typeface="Calibri" pitchFamily="34" charset="-120"/>
+              </a:rPr>
+              <a:t xml:space="preserve">4.8× the base paper's margin. This is the shipped configuration.</a:t>
+            </a:r>
+          </a:p>
+        </p:txBody>
+      </p:sp>
+      <p:sp>
+        <p:nvSpPr>
+          <p:cNvPr id="19" name="TextBox 18"/>
+          <p:cNvSpPr txBox="1"/>
+          <p:nvPr/>
+        </p:nvSpPr>
+        <p:spPr>
+          <a:xfrm>
+            <a:off x="640080" y="5138928"/>
+            <a:ext cx="11064240" cy="1234440"/>
+          </a:xfrm>
+          <a:prstGeom prst="rect">
+            <a:avLst/>
+          </a:prstGeom>
+          <a:noFill/>
+        </p:spPr>
+        <p:txBody>
+          <a:bodyPr wrap="square" lIns="0" tIns="0" rIns="0" bIns="0">
+            <a:spAutoFit/>
+          </a:bodyPr>
+          <a:lstStyle/>
+          <a:p>
+            <a:pPr marL="177800" indent="0">
+              <a:spcAft>
+                <a:spcPts val="150"/>
+              </a:spcAft>
+              <a:buSzPct val="100000"/>
+              <a:buNone/>
+            </a:pPr>
+            <a:r>
+              <a:rPr lang="en-US" sz="1250" b="1" dirty="0">
+                <a:solidFill>
+                  <a:srgbClr val="000000"/>
+                </a:solidFill>
+                <a:latin typeface="Calibri" pitchFamily="34" charset="0"/>
+                <a:ea typeface="Calibri" pitchFamily="34" charset="-122"/>
+                <a:cs typeface="Calibri" pitchFamily="34" charset="-120"/>
+              </a:rPr>
+              <a:t xml:space="preserve">What the comparison shows. </a:t>
+            </a:r>
+            <a:r>
+              <a:rPr lang="en-US" sz="1250" dirty="0">
+                <a:solidFill>
+                  <a:srgbClr val="000000"/>
+                </a:solidFill>
+                <a:latin typeface="Calibri" pitchFamily="34" charset="0"/>
+                <a:ea typeface="Calibri" pitchFamily="34" charset="-122"/>
+                <a:cs typeface="Calibri" pitchFamily="34" charset="-120"/>
+              </a:rPr>
+              <a:t xml:space="preserve">The base paper shapes the gate waveform in TIME; we hold the code constant and add two actuators it does not have. Both clear the threshold — theirs works — but ours clears it by 4.8× more, and ours is the one whose settings can then be searched exhaustively to ask what adaptation is actually worth.</a:t>
+            </a:r>
+          </a:p>
+          <a:p>
+            <a:pPr marL="177800" indent="0">
+              <a:spcAft>
+                <a:spcPts val="0"/>
+              </a:spcAft>
+              <a:buSzPct val="100000"/>
+              <a:buNone/>
+            </a:pPr>
+            <a:r>
+              <a:rPr lang="en-US" sz="1150" b="1" dirty="0">
+                <a:solidFill>
+                  <a:srgbClr val="000000"/>
+                </a:solidFill>
+                <a:latin typeface="Calibri" pitchFamily="34" charset="0"/>
+                <a:ea typeface="Calibri" pitchFamily="34" charset="-122"/>
+                <a:cs typeface="Calibri" pitchFamily="34" charset="-120"/>
+              </a:rPr>
+              <a:t xml:space="preserve">Reproduce: </a:t>
+            </a:r>
+            <a:r>
+              <a:rPr lang="en-US" sz="1150" b="1" dirty="0">
+                <a:solidFill>
+                  <a:srgbClr val="000000"/>
+                </a:solidFill>
+                <a:latin typeface="Calibri" pitchFamily="34" charset="0"/>
+                <a:ea typeface="Calibri" pitchFamily="34" charset="-122"/>
+                <a:cs typeface="Calibri" pitchFamily="34" charset="-120"/>
+              </a:rPr>
+              <a:t xml:space="preserve">python3 scripts/basepaper_compare.py</a:t>
+            </a:r>
+            <a:r>
+              <a:rPr lang="en-US" sz="1150" dirty="0">
+                <a:solidFill>
+                  <a:srgbClr val="000000"/>
+                </a:solidFill>
+                <a:latin typeface="Calibri" pitchFamily="34" charset="0"/>
+                <a:ea typeface="Calibri" pitchFamily="34" charset="-122"/>
+                <a:cs typeface="Calibri" pitchFamily="34" charset="-120"/>
+              </a:rPr>
+              <a:t xml:space="preserve">  — four ngspice runs, prints this table.</a:t>
             </a:r>
           </a:p>
         </p:txBody>
@@ -15662,778 +15149,146 @@
         <p:nvPr/>
       </p:nvGrpSpPr>
       <p:grpSpPr/>
-      <p:pic>
-        <p:nvPicPr>
-          <p:cNvPr id="3" name="Image 0" descr="logo.png"/>
-          <p:cNvPicPr>
-            <a:picLocks noChangeAspect="1"/>
-          </p:cNvPicPr>
-          <p:nvPr/>
-        </p:nvPicPr>
-        <p:blipFill>
-          <a:blip r:embed="rId2"/>
-          <a:stretch>
-            <a:fillRect/>
-          </a:stretch>
-        </p:blipFill>
-        <p:spPr>
-          <a:xfrm>
-            <a:off x="10362895" y="320040"/>
-            <a:ext cx="1371600" cy="518746"/>
-          </a:xfrm>
-          <a:prstGeom prst="rect">
-            <a:avLst/>
-          </a:prstGeom>
-        </p:spPr>
-      </p:pic>
-      <p:sp>
-        <p:nvSpPr>
-          <p:cNvPr id="4" name="TextBox 3"/>
-          <p:cNvSpPr txBox="1"/>
-          <p:nvPr/>
-        </p:nvSpPr>
-        <p:spPr>
-          <a:xfrm>
-            <a:off x="548640" y="320040"/>
-            <a:ext cx="9601200" cy="685800"/>
-          </a:xfrm>
-          <a:prstGeom prst="rect">
-            <a:avLst/>
-          </a:prstGeom>
-          <a:noFill/>
-        </p:spPr>
-        <p:txBody>
-          <a:bodyPr wrap="square" lIns="0" tIns="0" rIns="0" bIns="0">
+      <p:sp>
+        <p:nvSpPr>
+          <p:cNvPr id="2" name="Rectangle 1"/>
+          <p:cNvSpPr/>
+          <p:nvPr/>
+        </p:nvSpPr>
+        <p:spPr>
+          <a:xfrm>
+            <a:off x="0" y="0"/>
+            <a:ext cx="12191695" cy="6858000"/>
+          </a:xfrm>
+          <a:prstGeom prst="rect">
+            <a:avLst/>
+          </a:prstGeom>
+          <a:solidFill>
+            <a:srgbClr val="14233D"/>
+          </a:solidFill>
+          <a:ln>
+            <a:noFill/>
+          </a:ln>
+          <a:effectLst/>
+        </p:spPr>
+        <p:style>
+          <a:lnRef idx="1">
+            <a:schemeClr val="accent1"/>
+          </a:lnRef>
+          <a:fillRef idx="3">
+            <a:schemeClr val="accent1"/>
+          </a:fillRef>
+          <a:effectRef idx="2">
+            <a:schemeClr val="accent1"/>
+          </a:effectRef>
+          <a:fontRef idx="minor">
+            <a:schemeClr val="lt1"/>
+          </a:fontRef>
+        </p:style>
+        <p:txBody>
+          <a:bodyPr rtlCol="0" anchor="ctr"/>
+          <a:lstStyle/>
+          <a:p/>
+        </p:txBody>
+      </p:sp>
+      <p:sp>
+        <p:nvSpPr>
+          <p:cNvPr id="3" name="TextBox 2"/>
+          <p:cNvSpPr txBox="1"/>
+          <p:nvPr/>
+        </p:nvSpPr>
+        <p:spPr>
+          <a:xfrm>
+            <a:off x="1188720" y="1874519"/>
+            <a:ext cx="2743200" cy="1143000"/>
+          </a:xfrm>
+          <a:prstGeom prst="rect">
+            <a:avLst/>
+          </a:prstGeom>
+          <a:noFill/>
+        </p:spPr>
+        <p:txBody>
+          <a:bodyPr wrap="square">
             <a:spAutoFit/>
           </a:bodyPr>
           <a:lstStyle/>
           <a:p>
-            <a:pPr marL="177800" indent="0">
-              <a:spcAft>
-                <a:spcPts val="0"/>
-              </a:spcAft>
-              <a:buSzPct val="100000"/>
-              <a:buNone/>
-            </a:pPr>
-            <a:r>
-              <a:rPr lang="en-US" sz="2800" b="1" dirty="0">
-                <a:solidFill>
-                  <a:srgbClr val="000000"/>
-                </a:solidFill>
-                <a:latin typeface="Calibri" pitchFamily="34" charset="0"/>
-                <a:ea typeface="Calibri" pitchFamily="34" charset="-122"/>
-                <a:cs typeface="Calibri" pitchFamily="34" charset="-120"/>
-              </a:rPr>
-              <a:t xml:space="preserve">We implemented the base paper, then ours</a:t>
-            </a:r>
-          </a:p>
-        </p:txBody>
-      </p:sp>
-      <p:sp>
-        <p:nvSpPr>
-          <p:cNvPr id="5" name="TextBox 4"/>
-          <p:cNvSpPr txBox="1"/>
-          <p:nvPr/>
-        </p:nvSpPr>
-        <p:spPr>
-          <a:xfrm>
-            <a:off x="11457432" y="6446520"/>
-            <a:ext cx="457200" cy="274320"/>
-          </a:xfrm>
-          <a:prstGeom prst="rect">
-            <a:avLst/>
-          </a:prstGeom>
-          <a:noFill/>
-        </p:spPr>
-        <p:txBody>
-          <a:bodyPr wrap="square" lIns="0" tIns="0" rIns="0" bIns="0">
+            <a:r>
+              <a:rPr sz="6600" b="1" i="0">
+                <a:solidFill>
+                  <a:srgbClr val="6B7C93"/>
+                </a:solidFill>
+                <a:latin typeface="Calibri"/>
+              </a:rPr>
+              <a:t>01</a:t>
+            </a:r>
+          </a:p>
+        </p:txBody>
+      </p:sp>
+      <p:sp>
+        <p:nvSpPr>
+          <p:cNvPr id="4" name="TextBox 3"/>
+          <p:cNvSpPr txBox="1"/>
+          <p:nvPr/>
+        </p:nvSpPr>
+        <p:spPr>
+          <a:xfrm>
+            <a:off x="1188720" y="3063240"/>
+            <a:ext cx="9692640" cy="1005840"/>
+          </a:xfrm>
+          <a:prstGeom prst="rect">
+            <a:avLst/>
+          </a:prstGeom>
+          <a:noFill/>
+        </p:spPr>
+        <p:txBody>
+          <a:bodyPr wrap="square">
             <a:spAutoFit/>
           </a:bodyPr>
           <a:lstStyle/>
           <a:p>
-            <a:pPr marL="177800" indent="0">
-              <a:spcAft>
-                <a:spcPts val="0"/>
-              </a:spcAft>
-              <a:buSzPct val="100000"/>
-              <a:buNone/>
-            </a:pPr>
-            <a:r>
-              <a:rPr lang="en-US" sz="1100" dirty="0">
-                <a:solidFill>
-                  <a:srgbClr val="000000"/>
-                </a:solidFill>
-                <a:latin typeface="Calibri" pitchFamily="34" charset="0"/>
-                <a:ea typeface="Calibri" pitchFamily="34" charset="-122"/>
-                <a:cs typeface="Calibri" pitchFamily="34" charset="-120"/>
-              </a:rPr>
-              <a:t xml:space="preserve">15</a:t>
-            </a:r>
-          </a:p>
-        </p:txBody>
-      </p:sp>
-      <p:sp>
-        <p:nvSpPr>
-          <p:cNvPr id="6" name="TextBox 5"/>
-          <p:cNvSpPr txBox="1"/>
-          <p:nvPr/>
-        </p:nvSpPr>
-        <p:spPr>
-          <a:xfrm>
-            <a:off x="640080" y="1207008"/>
-            <a:ext cx="11064240" cy="868680"/>
-          </a:xfrm>
-          <a:prstGeom prst="rect">
-            <a:avLst/>
-          </a:prstGeom>
-          <a:noFill/>
-        </p:spPr>
-        <p:txBody>
-          <a:bodyPr wrap="square" lIns="0" tIns="0" rIns="0" bIns="0">
+            <a:r>
+              <a:rPr sz="4400" b="1" i="0">
+                <a:solidFill>
+                  <a:srgbClr val="F4F2EE"/>
+                </a:solidFill>
+                <a:latin typeface="Calibri"/>
+              </a:rPr>
+              <a:t>The problem</a:t>
+            </a:r>
+          </a:p>
+        </p:txBody>
+      </p:sp>
+      <p:sp>
+        <p:nvSpPr>
+          <p:cNvPr id="5" name="TextBox 4"/>
+          <p:cNvSpPr txBox="1"/>
+          <p:nvPr/>
+        </p:nvSpPr>
+        <p:spPr>
+          <a:xfrm>
+            <a:off x="1280160" y="4160520"/>
+            <a:ext cx="9509760" cy="731520"/>
+          </a:xfrm>
+          <a:prstGeom prst="rect">
+            <a:avLst/>
+          </a:prstGeom>
+          <a:noFill/>
+        </p:spPr>
+        <p:txBody>
+          <a:bodyPr wrap="square">
             <a:spAutoFit/>
           </a:bodyPr>
           <a:lstStyle/>
           <a:p>
-            <a:pPr marL="177800" indent="0">
-              <a:spcAft>
-                <a:spcPts val="0"/>
-              </a:spcAft>
-              <a:buSzPct val="100000"/>
-              <a:buNone/>
-            </a:pPr>
-            <a:r>
-              <a:rPr lang="en-US" sz="1250" b="1" dirty="0">
-                <a:solidFill>
-                  <a:srgbClr val="000000"/>
-                </a:solidFill>
-                <a:latin typeface="Calibri" pitchFamily="34" charset="0"/>
-                <a:ea typeface="Calibri" pitchFamily="34" charset="-122"/>
-                <a:cs typeface="Calibri" pitchFamily="34" charset="-120"/>
-              </a:rPr>
-              <a:t xml:space="preserve">Citing a base paper is not a comparison. </a:t>
-            </a:r>
-            <a:r>
-              <a:rPr lang="en-US" sz="1250" dirty="0">
-                <a:solidFill>
-                  <a:srgbClr val="000000"/>
-                </a:solidFill>
-                <a:latin typeface="Calibri" pitchFamily="34" charset="0"/>
-                <a:ea typeface="Calibri" pitchFamily="34" charset="-122"/>
-                <a:cs typeface="Calibri" pitchFamily="34" charset="-120"/>
-              </a:rPr>
-              <a:t xml:space="preserve">models/basedrv.lib implements Takayama, Okuda &amp; Hikihara's DAC-architecture driver — a multibit code that changes DURING the switching edge, with no Miller clamp and no negative off-bias rail, because those are ours. It runs inside sim/dpt.cir, byte-identical otherwise, so only the driver differs.</a:t>
-            </a:r>
-          </a:p>
-        </p:txBody>
-      </p:sp>
-      <p:sp>
-        <p:nvSpPr>
-          <p:cNvPr id="7" name="TextBox 6"/>
-          <p:cNvSpPr txBox="1"/>
-          <p:nvPr/>
-        </p:nvSpPr>
-        <p:spPr>
-          <a:xfrm>
-            <a:off x="640080" y="2395728"/>
-            <a:ext cx="3566160" cy="530352"/>
-          </a:xfrm>
-          <a:prstGeom prst="rect">
-            <a:avLst/>
-          </a:prstGeom>
-          <a:noFill/>
-        </p:spPr>
-        <p:txBody>
-          <a:bodyPr wrap="square" lIns="0" tIns="0" rIns="0" bIns="0">
-            <a:spAutoFit/>
-          </a:bodyPr>
-          <a:lstStyle/>
-          <a:p>
-            <a:pPr marL="177800" indent="0">
-              <a:spcAft>
-                <a:spcPts val="0"/>
-              </a:spcAft>
-              <a:buSzPct val="100000"/>
-              <a:buNone/>
-            </a:pPr>
-            <a:r>
-              <a:rPr lang="en-US" sz="1300" dirty="0">
-                <a:solidFill>
-                  <a:srgbClr val="000000"/>
-                </a:solidFill>
-                <a:latin typeface="Calibri" pitchFamily="34" charset="0"/>
-                <a:ea typeface="Calibri" pitchFamily="34" charset="-122"/>
-                <a:cs typeface="Calibri" pitchFamily="34" charset="-120"/>
-              </a:rPr>
-              <a:t xml:space="preserve">Base paper, as we built it</a:t>
-            </a:r>
-          </a:p>
-        </p:txBody>
-      </p:sp>
-      <p:sp>
-        <p:nvSpPr>
-          <p:cNvPr id="8" name="TextBox 7"/>
-          <p:cNvSpPr txBox="1"/>
-          <p:nvPr/>
-        </p:nvSpPr>
-        <p:spPr>
-          <a:xfrm>
-            <a:off x="4343400" y="2340864"/>
-            <a:ext cx="1417320" cy="438912"/>
-          </a:xfrm>
-          <a:prstGeom prst="rect">
-            <a:avLst/>
-          </a:prstGeom>
-          <a:noFill/>
-        </p:spPr>
-        <p:txBody>
-          <a:bodyPr wrap="square" lIns="0" tIns="0" rIns="0" bIns="0">
-            <a:spAutoFit/>
-          </a:bodyPr>
-          <a:lstStyle/>
-          <a:p>
-            <a:pPr marL="177800" indent="0">
-              <a:spcAft>
-                <a:spcPts val="0"/>
-              </a:spcAft>
-              <a:buSzPct val="100000"/>
-              <a:buNone/>
-            </a:pPr>
-            <a:r>
-              <a:rPr lang="en-US" sz="1700" b="1" dirty="0">
-                <a:solidFill>
-                  <a:srgbClr val="000000"/>
-                </a:solidFill>
-                <a:latin typeface="Calibri" pitchFamily="34" charset="0"/>
-                <a:ea typeface="Calibri" pitchFamily="34" charset="-122"/>
-                <a:cs typeface="Calibri" pitchFamily="34" charset="-120"/>
-              </a:rPr>
-              <a:t xml:space="preserve">+0.533 V</a:t>
-            </a:r>
-          </a:p>
-        </p:txBody>
-      </p:sp>
-      <p:sp>
-        <p:nvSpPr>
-          <p:cNvPr id="9" name="TextBox 8"/>
-          <p:cNvSpPr txBox="1"/>
-          <p:nvPr/>
-        </p:nvSpPr>
-        <p:spPr>
-          <a:xfrm>
-            <a:off x="5943600" y="2395728"/>
-            <a:ext cx="5577840" cy="548640"/>
-          </a:xfrm>
-          <a:prstGeom prst="rect">
-            <a:avLst/>
-          </a:prstGeom>
-          <a:noFill/>
-        </p:spPr>
-        <p:txBody>
-          <a:bodyPr wrap="square" lIns="0" tIns="0" rIns="0" bIns="0">
-            <a:spAutoFit/>
-          </a:bodyPr>
-          <a:lstStyle/>
-          <a:p>
-            <a:pPr marL="177800" indent="0">
-              <a:spcAft>
-                <a:spcPts val="0"/>
-              </a:spcAft>
-              <a:buSzPct val="100000"/>
-              <a:buNone/>
-            </a:pPr>
-            <a:r>
-              <a:rPr lang="en-US" sz="1150" dirty="0">
-                <a:solidFill>
-                  <a:srgbClr val="000000"/>
-                </a:solidFill>
-                <a:latin typeface="Calibri" pitchFamily="34" charset="0"/>
-                <a:ea typeface="Calibri" pitchFamily="34" charset="-122"/>
-                <a:cs typeface="Calibri" pitchFamily="34" charset="-120"/>
-              </a:rPr>
-              <a:t xml:space="preserve">Their time-sequenced multibit code alone already clears the 1.4 V threshold.</a:t>
-            </a:r>
-          </a:p>
-        </p:txBody>
-      </p:sp>
-      <p:sp>
-        <p:nvSpPr>
-          <p:cNvPr id="10" name="TextBox 9"/>
-          <p:cNvSpPr txBox="1"/>
-          <p:nvPr/>
-        </p:nvSpPr>
-        <p:spPr>
-          <a:xfrm>
-            <a:off x="640080" y="3035808"/>
-            <a:ext cx="3566160" cy="530352"/>
-          </a:xfrm>
-          <a:prstGeom prst="rect">
-            <a:avLst/>
-          </a:prstGeom>
-          <a:noFill/>
-        </p:spPr>
-        <p:txBody>
-          <a:bodyPr wrap="square" lIns="0" tIns="0" rIns="0" bIns="0">
-            <a:spAutoFit/>
-          </a:bodyPr>
-          <a:lstStyle/>
-          <a:p>
-            <a:pPr marL="177800" indent="0">
-              <a:spcAft>
-                <a:spcPts val="0"/>
-              </a:spcAft>
-              <a:buSzPct val="100000"/>
-              <a:buNone/>
-            </a:pPr>
-            <a:r>
-              <a:rPr lang="en-US" sz="1300" dirty="0">
-                <a:solidFill>
-                  <a:srgbClr val="000000"/>
-                </a:solidFill>
-                <a:latin typeface="Calibri" pitchFamily="34" charset="0"/>
-                <a:ea typeface="Calibri" pitchFamily="34" charset="-122"/>
-                <a:cs typeface="Calibri" pitchFamily="34" charset="-120"/>
-              </a:rPr>
-              <a:t xml:space="preserve">Ours, constant code, no clamp</a:t>
-            </a:r>
-          </a:p>
-        </p:txBody>
-      </p:sp>
-      <p:sp>
-        <p:nvSpPr>
-          <p:cNvPr id="11" name="TextBox 10"/>
-          <p:cNvSpPr txBox="1"/>
-          <p:nvPr/>
-        </p:nvSpPr>
-        <p:spPr>
-          <a:xfrm>
-            <a:off x="4343400" y="2980944"/>
-            <a:ext cx="1417320" cy="438912"/>
-          </a:xfrm>
-          <a:prstGeom prst="rect">
-            <a:avLst/>
-          </a:prstGeom>
-          <a:noFill/>
-        </p:spPr>
-        <p:txBody>
-          <a:bodyPr wrap="square" lIns="0" tIns="0" rIns="0" bIns="0">
-            <a:spAutoFit/>
-          </a:bodyPr>
-          <a:lstStyle/>
-          <a:p>
-            <a:pPr marL="177800" indent="0">
-              <a:spcAft>
-                <a:spcPts val="0"/>
-              </a:spcAft>
-              <a:buSzPct val="100000"/>
-              <a:buNone/>
-            </a:pPr>
-            <a:r>
-              <a:rPr lang="en-US" sz="1700" b="1" dirty="0">
-                <a:solidFill>
-                  <a:srgbClr val="000000"/>
-                </a:solidFill>
-                <a:latin typeface="Calibri" pitchFamily="34" charset="0"/>
-                <a:ea typeface="Calibri" pitchFamily="34" charset="-122"/>
-                <a:cs typeface="Calibri" pitchFamily="34" charset="-120"/>
-              </a:rPr>
-              <a:t xml:space="preserve">−0.249 V</a:t>
-            </a:r>
-          </a:p>
-        </p:txBody>
-      </p:sp>
-      <p:sp>
-        <p:nvSpPr>
-          <p:cNvPr id="12" name="TextBox 11"/>
-          <p:cNvSpPr txBox="1"/>
-          <p:nvPr/>
-        </p:nvSpPr>
-        <p:spPr>
-          <a:xfrm>
-            <a:off x="5943600" y="3035808"/>
-            <a:ext cx="5577840" cy="548640"/>
-          </a:xfrm>
-          <a:prstGeom prst="rect">
-            <a:avLst/>
-          </a:prstGeom>
-          <a:noFill/>
-        </p:spPr>
-        <p:txBody>
-          <a:bodyPr wrap="square" lIns="0" tIns="0" rIns="0" bIns="0">
-            <a:spAutoFit/>
-          </a:bodyPr>
-          <a:lstStyle/>
-          <a:p>
-            <a:pPr marL="177800" indent="0">
-              <a:spcAft>
-                <a:spcPts val="0"/>
-              </a:spcAft>
-              <a:buSzPct val="100000"/>
-              <a:buNone/>
-            </a:pPr>
-            <a:r>
-              <a:rPr lang="en-US" sz="1150" dirty="0">
-                <a:solidFill>
-                  <a:srgbClr val="000000"/>
-                </a:solidFill>
-                <a:latin typeface="Calibri" pitchFamily="34" charset="0"/>
-                <a:ea typeface="Calibri" pitchFamily="34" charset="-122"/>
-                <a:cs typeface="Calibri" pitchFamily="34" charset="-120"/>
-              </a:rPr>
-              <a:t xml:space="preserve">FALSE TURN-ON. A fast FIXED code is worse than their sequenced one — their contribution is real, and we reproduce it.</a:t>
-            </a:r>
-          </a:p>
-        </p:txBody>
-      </p:sp>
-      <p:sp>
-        <p:nvSpPr>
-          <p:cNvPr id="13" name="TextBox 12"/>
-          <p:cNvSpPr txBox="1"/>
-          <p:nvPr/>
-        </p:nvSpPr>
-        <p:spPr>
-          <a:xfrm>
-            <a:off x="640080" y="3675887"/>
-            <a:ext cx="3566160" cy="530352"/>
-          </a:xfrm>
-          <a:prstGeom prst="rect">
-            <a:avLst/>
-          </a:prstGeom>
-          <a:noFill/>
-        </p:spPr>
-        <p:txBody>
-          <a:bodyPr wrap="square" lIns="0" tIns="0" rIns="0" bIns="0">
-            <a:spAutoFit/>
-          </a:bodyPr>
-          <a:lstStyle/>
-          <a:p>
-            <a:pPr marL="177800" indent="0">
-              <a:spcAft>
-                <a:spcPts val="0"/>
-              </a:spcAft>
-              <a:buSzPct val="100000"/>
-              <a:buNone/>
-            </a:pPr>
-            <a:r>
-              <a:rPr lang="en-US" sz="1300" dirty="0">
-                <a:solidFill>
-                  <a:srgbClr val="000000"/>
-                </a:solidFill>
-                <a:latin typeface="Calibri" pitchFamily="34" charset="0"/>
-                <a:ea typeface="Calibri" pitchFamily="34" charset="-122"/>
-                <a:cs typeface="Calibri" pitchFamily="34" charset="-120"/>
-              </a:rPr>
-              <a:t xml:space="preserve">Ours, active Miller clamp on</a:t>
-            </a:r>
-          </a:p>
-        </p:txBody>
-      </p:sp>
-      <p:sp>
-        <p:nvSpPr>
-          <p:cNvPr id="14" name="TextBox 13"/>
-          <p:cNvSpPr txBox="1"/>
-          <p:nvPr/>
-        </p:nvSpPr>
-        <p:spPr>
-          <a:xfrm>
-            <a:off x="4343400" y="3621023"/>
-            <a:ext cx="1417320" cy="438912"/>
-          </a:xfrm>
-          <a:prstGeom prst="rect">
-            <a:avLst/>
-          </a:prstGeom>
-          <a:noFill/>
-        </p:spPr>
-        <p:txBody>
-          <a:bodyPr wrap="square" lIns="0" tIns="0" rIns="0" bIns="0">
-            <a:spAutoFit/>
-          </a:bodyPr>
-          <a:lstStyle/>
-          <a:p>
-            <a:pPr marL="177800" indent="0">
-              <a:spcAft>
-                <a:spcPts val="0"/>
-              </a:spcAft>
-              <a:buSzPct val="100000"/>
-              <a:buNone/>
-            </a:pPr>
-            <a:r>
-              <a:rPr lang="en-US" sz="1700" b="1" dirty="0">
-                <a:solidFill>
-                  <a:srgbClr val="000000"/>
-                </a:solidFill>
-                <a:latin typeface="Calibri" pitchFamily="34" charset="0"/>
-                <a:ea typeface="Calibri" pitchFamily="34" charset="-122"/>
-                <a:cs typeface="Calibri" pitchFamily="34" charset="-120"/>
-              </a:rPr>
-              <a:t xml:space="preserve">+0.570 V</a:t>
-            </a:r>
-          </a:p>
-        </p:txBody>
-      </p:sp>
-      <p:sp>
-        <p:nvSpPr>
-          <p:cNvPr id="15" name="TextBox 14"/>
-          <p:cNvSpPr txBox="1"/>
-          <p:nvPr/>
-        </p:nvSpPr>
-        <p:spPr>
-          <a:xfrm>
-            <a:off x="5943600" y="3675887"/>
-            <a:ext cx="5577840" cy="548640"/>
-          </a:xfrm>
-          <a:prstGeom prst="rect">
-            <a:avLst/>
-          </a:prstGeom>
-          <a:noFill/>
-        </p:spPr>
-        <p:txBody>
-          <a:bodyPr wrap="square" lIns="0" tIns="0" rIns="0" bIns="0">
-            <a:spAutoFit/>
-          </a:bodyPr>
-          <a:lstStyle/>
-          <a:p>
-            <a:pPr marL="177800" indent="0">
-              <a:spcAft>
-                <a:spcPts val="0"/>
-              </a:spcAft>
-              <a:buSzPct val="100000"/>
-              <a:buNone/>
-            </a:pPr>
-            <a:r>
-              <a:rPr lang="en-US" sz="1150" dirty="0">
-                <a:solidFill>
-                  <a:srgbClr val="000000"/>
-                </a:solidFill>
-                <a:latin typeface="Calibri" pitchFamily="34" charset="0"/>
-                <a:ea typeface="Calibri" pitchFamily="34" charset="-122"/>
-                <a:cs typeface="Calibri" pitchFamily="34" charset="-120"/>
-              </a:rPr>
-              <a:t xml:space="preserve">Only marginally past the base paper. The clamp alone is not the story.</a:t>
-            </a:r>
-          </a:p>
-        </p:txBody>
-      </p:sp>
-      <p:sp>
-        <p:nvSpPr>
-          <p:cNvPr id="16" name="TextBox 15"/>
-          <p:cNvSpPr txBox="1"/>
-          <p:nvPr/>
-        </p:nvSpPr>
-        <p:spPr>
-          <a:xfrm>
-            <a:off x="640080" y="4315968"/>
-            <a:ext cx="3566160" cy="530352"/>
-          </a:xfrm>
-          <a:prstGeom prst="rect">
-            <a:avLst/>
-          </a:prstGeom>
-          <a:noFill/>
-        </p:spPr>
-        <p:txBody>
-          <a:bodyPr wrap="square" lIns="0" tIns="0" rIns="0" bIns="0">
-            <a:spAutoFit/>
-          </a:bodyPr>
-          <a:lstStyle/>
-          <a:p>
-            <a:pPr marL="177800" indent="0">
-              <a:spcAft>
-                <a:spcPts val="0"/>
-              </a:spcAft>
-              <a:buSzPct val="100000"/>
-              <a:buNone/>
-            </a:pPr>
-            <a:r>
-              <a:rPr lang="en-US" sz="1300" b="1" dirty="0">
-                <a:solidFill>
-                  <a:srgbClr val="000000"/>
-                </a:solidFill>
-                <a:latin typeface="Calibri" pitchFamily="34" charset="0"/>
-                <a:ea typeface="Calibri" pitchFamily="34" charset="-122"/>
-                <a:cs typeface="Calibri" pitchFamily="34" charset="-120"/>
-              </a:rPr>
-              <a:t xml:space="preserve">Ours, clamp + −2 V off-bias</a:t>
-            </a:r>
-          </a:p>
-        </p:txBody>
-      </p:sp>
-      <p:sp>
-        <p:nvSpPr>
-          <p:cNvPr id="17" name="TextBox 16"/>
-          <p:cNvSpPr txBox="1"/>
-          <p:nvPr/>
-        </p:nvSpPr>
-        <p:spPr>
-          <a:xfrm>
-            <a:off x="4343400" y="4261104"/>
-            <a:ext cx="1417320" cy="438912"/>
-          </a:xfrm>
-          <a:prstGeom prst="rect">
-            <a:avLst/>
-          </a:prstGeom>
-          <a:noFill/>
-        </p:spPr>
-        <p:txBody>
-          <a:bodyPr wrap="square" lIns="0" tIns="0" rIns="0" bIns="0">
-            <a:spAutoFit/>
-          </a:bodyPr>
-          <a:lstStyle/>
-          <a:p>
-            <a:pPr marL="177800" indent="0">
-              <a:spcAft>
-                <a:spcPts val="0"/>
-              </a:spcAft>
-              <a:buSzPct val="100000"/>
-              <a:buNone/>
-            </a:pPr>
-            <a:r>
-              <a:rPr lang="en-US" sz="1700" b="1" dirty="0">
-                <a:solidFill>
-                  <a:srgbClr val="000000"/>
-                </a:solidFill>
-                <a:latin typeface="Calibri" pitchFamily="34" charset="0"/>
-                <a:ea typeface="Calibri" pitchFamily="34" charset="-122"/>
-                <a:cs typeface="Calibri" pitchFamily="34" charset="-120"/>
-              </a:rPr>
-              <a:t xml:space="preserve">+2.576 V</a:t>
-            </a:r>
-          </a:p>
-        </p:txBody>
-      </p:sp>
-      <p:sp>
-        <p:nvSpPr>
-          <p:cNvPr id="18" name="TextBox 17"/>
-          <p:cNvSpPr txBox="1"/>
-          <p:nvPr/>
-        </p:nvSpPr>
-        <p:spPr>
-          <a:xfrm>
-            <a:off x="5943600" y="4315968"/>
-            <a:ext cx="5577840" cy="548640"/>
-          </a:xfrm>
-          <a:prstGeom prst="rect">
-            <a:avLst/>
-          </a:prstGeom>
-          <a:noFill/>
-        </p:spPr>
-        <p:txBody>
-          <a:bodyPr wrap="square" lIns="0" tIns="0" rIns="0" bIns="0">
-            <a:spAutoFit/>
-          </a:bodyPr>
-          <a:lstStyle/>
-          <a:p>
-            <a:pPr marL="177800" indent="0">
-              <a:spcAft>
-                <a:spcPts val="0"/>
-              </a:spcAft>
-              <a:buSzPct val="100000"/>
-              <a:buNone/>
-            </a:pPr>
-            <a:r>
-              <a:rPr lang="en-US" sz="1150" dirty="0">
-                <a:solidFill>
-                  <a:srgbClr val="000000"/>
-                </a:solidFill>
-                <a:latin typeface="Calibri" pitchFamily="34" charset="0"/>
-                <a:ea typeface="Calibri" pitchFamily="34" charset="-122"/>
-                <a:cs typeface="Calibri" pitchFamily="34" charset="-120"/>
-              </a:rPr>
-              <a:t xml:space="preserve">4.8× the base paper's margin. This is the shipped configuration.</a:t>
-            </a:r>
-          </a:p>
-        </p:txBody>
-      </p:sp>
-      <p:sp>
-        <p:nvSpPr>
-          <p:cNvPr id="19" name="TextBox 18"/>
-          <p:cNvSpPr txBox="1"/>
-          <p:nvPr/>
-        </p:nvSpPr>
-        <p:spPr>
-          <a:xfrm>
-            <a:off x="640080" y="5138928"/>
-            <a:ext cx="11064240" cy="1234440"/>
-          </a:xfrm>
-          <a:prstGeom prst="rect">
-            <a:avLst/>
-          </a:prstGeom>
-          <a:noFill/>
-        </p:spPr>
-        <p:txBody>
-          <a:bodyPr wrap="square" lIns="0" tIns="0" rIns="0" bIns="0">
-            <a:spAutoFit/>
-          </a:bodyPr>
-          <a:lstStyle/>
-          <a:p>
-            <a:pPr marL="177800" indent="0">
-              <a:spcAft>
-                <a:spcPts val="150"/>
-              </a:spcAft>
-              <a:buSzPct val="100000"/>
-              <a:buNone/>
-            </a:pPr>
-            <a:r>
-              <a:rPr lang="en-US" sz="1250" b="1" dirty="0">
-                <a:solidFill>
-                  <a:srgbClr val="000000"/>
-                </a:solidFill>
-                <a:latin typeface="Calibri" pitchFamily="34" charset="0"/>
-                <a:ea typeface="Calibri" pitchFamily="34" charset="-122"/>
-                <a:cs typeface="Calibri" pitchFamily="34" charset="-120"/>
-              </a:rPr>
-              <a:t xml:space="preserve">What the comparison shows. </a:t>
-            </a:r>
-            <a:r>
-              <a:rPr lang="en-US" sz="1250" dirty="0">
-                <a:solidFill>
-                  <a:srgbClr val="000000"/>
-                </a:solidFill>
-                <a:latin typeface="Calibri" pitchFamily="34" charset="0"/>
-                <a:ea typeface="Calibri" pitchFamily="34" charset="-122"/>
-                <a:cs typeface="Calibri" pitchFamily="34" charset="-120"/>
-              </a:rPr>
-              <a:t xml:space="preserve">The base paper shapes the gate waveform in TIME; we hold the code constant and add two actuators it does not have. Both clear the threshold — theirs works — but ours clears it by 4.8× more, and ours is the one whose settings can then be searched exhaustively to ask what adaptation is actually worth.</a:t>
-            </a:r>
-          </a:p>
-          <a:p>
-            <a:pPr marL="177800" indent="0">
-              <a:spcAft>
-                <a:spcPts val="0"/>
-              </a:spcAft>
-              <a:buSzPct val="100000"/>
-              <a:buNone/>
-            </a:pPr>
-            <a:r>
-              <a:rPr lang="en-US" sz="1150" b="1" dirty="0">
-                <a:solidFill>
-                  <a:srgbClr val="000000"/>
-                </a:solidFill>
-                <a:latin typeface="Calibri" pitchFamily="34" charset="0"/>
-                <a:ea typeface="Calibri" pitchFamily="34" charset="-122"/>
-                <a:cs typeface="Calibri" pitchFamily="34" charset="-120"/>
-              </a:rPr>
-              <a:t xml:space="preserve">Reproduce: </a:t>
-            </a:r>
-            <a:r>
-              <a:rPr lang="en-US" sz="1150" b="1" dirty="0">
-                <a:solidFill>
-                  <a:srgbClr val="000000"/>
-                </a:solidFill>
-                <a:latin typeface="Calibri" pitchFamily="34" charset="0"/>
-                <a:ea typeface="Calibri" pitchFamily="34" charset="-122"/>
-                <a:cs typeface="Calibri" pitchFamily="34" charset="-120"/>
-              </a:rPr>
-              <a:t xml:space="preserve">python3 scripts/basepaper_compare.py</a:t>
-            </a:r>
-            <a:r>
-              <a:rPr lang="en-US" sz="1150" dirty="0">
-                <a:solidFill>
-                  <a:srgbClr val="000000"/>
-                </a:solidFill>
-                <a:latin typeface="Calibri" pitchFamily="34" charset="0"/>
-                <a:ea typeface="Calibri" pitchFamily="34" charset="-122"/>
-                <a:cs typeface="Calibri" pitchFamily="34" charset="-120"/>
-              </a:rPr>
-              <a:t xml:space="preserve">  — four ngspice runs, prints this table.</a:t>
+            <a:r>
+              <a:rPr sz="1700" b="0" i="0">
+                <a:solidFill>
+                  <a:srgbClr val="6B7C93"/>
+                </a:solidFill>
+                <a:latin typeface="Calibri"/>
+              </a:rPr>
+              <a:t>A real failure, and the question nobody has answered</a:t>
             </a:r>
           </a:p>
         </p:txBody>
@@ -16894,7 +15749,7 @@
                 </a:solidFill>
                 <a:latin typeface="Calibri"/>
               </a:rPr>
-              <a:t>01</a:t>
+              <a:t>02</a:t>
             </a:r>
           </a:p>
         </p:txBody>
@@ -16928,7 +15783,7 @@
                 </a:solidFill>
                 <a:latin typeface="Calibri"/>
               </a:rPr>
-              <a:t>The problem</a:t>
+              <a:t>What we built</a:t>
             </a:r>
           </a:p>
         </p:txBody>
@@ -16962,7 +15817,7 @@
                 </a:solidFill>
                 <a:latin typeface="Calibri"/>
               </a:rPr>
-              <a:t>A real failure, and the question nobody has answered</a:t>
+              <a:t>A 720-point control word, and an exhaustive search</a:t>
             </a:r>
           </a:p>
         </p:txBody>
@@ -17056,7 +15911,7 @@
                 </a:solidFill>
                 <a:latin typeface="Calibri"/>
               </a:rPr>
-              <a:t>02</a:t>
+              <a:t>03</a:t>
             </a:r>
           </a:p>
         </p:txBody>
@@ -17090,7 +15945,7 @@
                 </a:solidFill>
                 <a:latin typeface="Calibri"/>
               </a:rPr>
-              <a:t>What we built</a:t>
+              <a:t>What we found</a:t>
             </a:r>
           </a:p>
         </p:txBody>
@@ -17124,7 +15979,7 @@
                 </a:solidFill>
                 <a:latin typeface="Calibri"/>
               </a:rPr>
-              <a:t>A 720-point control word, and an exhaustive search</a:t>
+              <a:t>Choosing well beats adapting — and by how much</a:t>
             </a:r>
           </a:p>
         </p:txBody>
@@ -17218,7 +16073,7 @@
                 </a:solidFill>
                 <a:latin typeface="Calibri"/>
               </a:rPr>
-              <a:t>03</a:t>
+              <a:t>04</a:t>
             </a:r>
           </a:p>
         </p:txBody>
@@ -17252,7 +16107,7 @@
                 </a:solidFill>
                 <a:latin typeface="Calibri"/>
               </a:rPr>
-              <a:t>What we found</a:t>
+              <a:t>Where this goes</a:t>
             </a:r>
           </a:p>
         </p:txBody>
@@ -17286,7 +16141,7 @@
                 </a:solidFill>
                 <a:latin typeface="Calibri"/>
               </a:rPr>
-              <a:t>Choosing well beats adapting — and by how much</a:t>
+              <a:t>The deliverable, the limits, and Review-II</a:t>
             </a:r>
           </a:p>
         </p:txBody>
@@ -17311,168 +16166,6 @@
       <p:grpSpPr/>
       <p:sp>
         <p:nvSpPr>
-          <p:cNvPr id="2" name="Rectangle 1"/>
-          <p:cNvSpPr/>
-          <p:nvPr/>
-        </p:nvSpPr>
-        <p:spPr>
-          <a:xfrm>
-            <a:off x="0" y="0"/>
-            <a:ext cx="12191695" cy="6858000"/>
-          </a:xfrm>
-          <a:prstGeom prst="rect">
-            <a:avLst/>
-          </a:prstGeom>
-          <a:solidFill>
-            <a:srgbClr val="14233D"/>
-          </a:solidFill>
-          <a:ln>
-            <a:noFill/>
-          </a:ln>
-          <a:effectLst/>
-        </p:spPr>
-        <p:style>
-          <a:lnRef idx="1">
-            <a:schemeClr val="accent1"/>
-          </a:lnRef>
-          <a:fillRef idx="3">
-            <a:schemeClr val="accent1"/>
-          </a:fillRef>
-          <a:effectRef idx="2">
-            <a:schemeClr val="accent1"/>
-          </a:effectRef>
-          <a:fontRef idx="minor">
-            <a:schemeClr val="lt1"/>
-          </a:fontRef>
-        </p:style>
-        <p:txBody>
-          <a:bodyPr rtlCol="0" anchor="ctr"/>
-          <a:lstStyle/>
-          <a:p/>
-        </p:txBody>
-      </p:sp>
-      <p:sp>
-        <p:nvSpPr>
-          <p:cNvPr id="3" name="TextBox 2"/>
-          <p:cNvSpPr txBox="1"/>
-          <p:nvPr/>
-        </p:nvSpPr>
-        <p:spPr>
-          <a:xfrm>
-            <a:off x="1188720" y="1874519"/>
-            <a:ext cx="2743200" cy="1143000"/>
-          </a:xfrm>
-          <a:prstGeom prst="rect">
-            <a:avLst/>
-          </a:prstGeom>
-          <a:noFill/>
-        </p:spPr>
-        <p:txBody>
-          <a:bodyPr wrap="square">
-            <a:spAutoFit/>
-          </a:bodyPr>
-          <a:lstStyle/>
-          <a:p>
-            <a:r>
-              <a:rPr sz="6600" b="1" i="0">
-                <a:solidFill>
-                  <a:srgbClr val="6B7C93"/>
-                </a:solidFill>
-                <a:latin typeface="Calibri"/>
-              </a:rPr>
-              <a:t>04</a:t>
-            </a:r>
-          </a:p>
-        </p:txBody>
-      </p:sp>
-      <p:sp>
-        <p:nvSpPr>
-          <p:cNvPr id="4" name="TextBox 3"/>
-          <p:cNvSpPr txBox="1"/>
-          <p:nvPr/>
-        </p:nvSpPr>
-        <p:spPr>
-          <a:xfrm>
-            <a:off x="1188720" y="3063240"/>
-            <a:ext cx="9692640" cy="1005840"/>
-          </a:xfrm>
-          <a:prstGeom prst="rect">
-            <a:avLst/>
-          </a:prstGeom>
-          <a:noFill/>
-        </p:spPr>
-        <p:txBody>
-          <a:bodyPr wrap="square">
-            <a:spAutoFit/>
-          </a:bodyPr>
-          <a:lstStyle/>
-          <a:p>
-            <a:r>
-              <a:rPr sz="4400" b="1" i="0">
-                <a:solidFill>
-                  <a:srgbClr val="F4F2EE"/>
-                </a:solidFill>
-                <a:latin typeface="Calibri"/>
-              </a:rPr>
-              <a:t>Where this goes</a:t>
-            </a:r>
-          </a:p>
-        </p:txBody>
-      </p:sp>
-      <p:sp>
-        <p:nvSpPr>
-          <p:cNvPr id="5" name="TextBox 4"/>
-          <p:cNvSpPr txBox="1"/>
-          <p:nvPr/>
-        </p:nvSpPr>
-        <p:spPr>
-          <a:xfrm>
-            <a:off x="1280160" y="4160520"/>
-            <a:ext cx="9509760" cy="731520"/>
-          </a:xfrm>
-          <a:prstGeom prst="rect">
-            <a:avLst/>
-          </a:prstGeom>
-          <a:noFill/>
-        </p:spPr>
-        <p:txBody>
-          <a:bodyPr wrap="square">
-            <a:spAutoFit/>
-          </a:bodyPr>
-          <a:lstStyle/>
-          <a:p>
-            <a:r>
-              <a:rPr sz="1700" b="0" i="0">
-                <a:solidFill>
-                  <a:srgbClr val="6B7C93"/>
-                </a:solidFill>
-                <a:latin typeface="Calibri"/>
-              </a:rPr>
-              <a:t>The deliverable, the limits, and Review-II</a:t>
-            </a:r>
-          </a:p>
-        </p:txBody>
-      </p:sp>
-    </p:spTree>
-  </p:cSld>
-  <p:clrMapOvr>
-    <a:masterClrMapping/>
-  </p:clrMapOvr>
-</p:sld>
-</file>
-
-<file path=ppt/slides/slide34.xml><?xml version="1.0" encoding="utf-8"?>
-<p:sld xmlns:a="http://schemas.openxmlformats.org/drawingml/2006/main" xmlns:p="http://schemas.openxmlformats.org/presentationml/2006/main" xmlns:r="http://schemas.openxmlformats.org/officeDocument/2006/relationships">
-  <p:cSld>
-    <p:spTree>
-      <p:nvGrpSpPr>
-        <p:cNvPr id="1" name=""/>
-        <p:cNvGrpSpPr/>
-        <p:nvPr/>
-      </p:nvGrpSpPr>
-      <p:grpSpPr/>
-      <p:sp>
-        <p:nvSpPr>
           <p:cNvPr id="2" name="Text 0"/>
           <p:cNvSpPr txBox="1"/>
           <p:nvPr/>
@@ -17504,7 +16197,7 @@
                 <a:ea typeface="Calibri" pitchFamily="34" charset="-122"/>
                 <a:cs typeface="Calibri" pitchFamily="34" charset="-120"/>
               </a:rPr>
-              <a:t>33</a:t>
+              <a:t>32</a:t>
             </a:r>
             <a:endParaRPr lang="en-US" sz="1000" dirty="0"/>
           </a:p>
@@ -22955,7 +21648,7 @@
                 <a:ea typeface="Calibri" pitchFamily="34" charset="-122"/>
                 <a:cs typeface="Calibri" pitchFamily="34" charset="-120"/>
               </a:rPr>
-              <a:t>17</a:t>
+              <a:t>16</a:t>
             </a:r>
             <a:endParaRPr lang="en-US" sz="1000" dirty="0"/>
           </a:p>

--- a/review/Review1_GaN_Segmented_Gate_Driver.pptx
+++ b/review/Review1_GaN_Segmented_Gate_Driver.pptx
@@ -8556,6 +8556,37 @@
             </a:r>
           </a:p>
           <a:p>
+            <a:pPr marL="177800" indent="-177800">
+              <a:spcAft>
+                <a:spcPts val="340"/>
+              </a:spcAft>
+              <a:buSzPct val="100000"/>
+              <a:buChar char="•"/>
+            </a:pPr>
+            <a:r>
+              <a:rPr lang="en-US" sz="1600" b="1" dirty="0">
+                <a:solidFill>
+                  <a:srgbClr val="000000"/>
+                </a:solidFill>
+                <a:latin typeface="Calibri" pitchFamily="34" charset="0"/>
+                <a:ea typeface="Calibri" pitchFamily="34" charset="-122"/>
+                <a:cs typeface="Calibri" pitchFamily="34" charset="-120"/>
+              </a:rPr>
+              <a:t xml:space="preserve">The FPGA half is real: </a:t>
+            </a:r>
+            <a:r>
+              <a:rPr lang="en-US" sz="1600" dirty="0">
+                <a:solidFill>
+                  <a:srgbClr val="000000"/>
+                </a:solidFill>
+                <a:latin typeface="Calibri" pitchFamily="34" charset="0"/>
+                <a:ea typeface="Calibri" pitchFamily="34" charset="-122"/>
+                <a:cs typeface="Calibri" pitchFamily="34" charset="-120"/>
+              </a:rPr>
+              <a:t xml:space="preserve">20 LUTs and 20 flip-flops on an xc7a35t, 200 MHz met with 1.996 ns of slack.</a:t>
+            </a:r>
+          </a:p>
+          <a:p>
             <a:pPr marL="177800" indent="0">
               <a:spcAft>
                 <a:spcPts val="240"/>
@@ -12314,7 +12345,7 @@
                 <a:ea typeface="Calibri" pitchFamily="34" charset="-122"/>
                 <a:cs typeface="Calibri" pitchFamily="34" charset="-120"/>
               </a:rPr>
-              <a:t xml:space="preserve"> Choosing the word well is worth 22.5–29.0 % of baseline across the whole range; adapting it per operating point 1.4–12.7 %. The ordering never flips.</a:t>
+              <a:t xml:space="preserve"> Choosing the word well is worth 22.5–29.0 % of baseline across the whole range; adapting it per operating point 1.3–12.7 %. The ordering never flips.</a:t>
             </a:r>
           </a:p>
         </p:txBody>
@@ -14600,7 +14631,7 @@
                 <a:ea typeface="Calibri" pitchFamily="34" charset="-122"/>
                 <a:cs typeface="Calibri" pitchFamily="34" charset="-120"/>
               </a:rPr>
-              <a:t xml:space="preserve">+0.533 V</a:t>
+              <a:t xml:space="preserve">+0.534 V</a:t>
             </a:r>
           </a:p>
         </p:txBody>

--- a/review/Review1_GaN_Segmented_Gate_Driver.pptx
+++ b/review/Review1_GaN_Segmented_Gate_Driver.pptx
@@ -11,12 +11,12 @@
     <p:sldId id="256" r:id="rId2"/>
     <p:sldId id="257" r:id="rId3"/>
     <p:sldId id="258" r:id="rId4"/>
-    <p:sldId id="284" r:id="rId35"/>
+    <p:sldId id="285" r:id="rId36"/>
     <p:sldId id="259" r:id="rId5"/>
     <p:sldId id="260" r:id="rId6"/>
     <p:sldId id="267" r:id="rId18"/>
     <p:sldId id="282" r:id="rId33"/>
-    <p:sldId id="285" r:id="rId36"/>
+    <p:sldId id="286" r:id="rId37"/>
     <p:sldId id="261" r:id="rId7"/>
     <p:sldId id="280" r:id="rId31"/>
     <p:sldId id="274" r:id="rId25"/>
@@ -27,7 +27,8 @@
     <p:sldId id="272" r:id="rId23"/>
     <p:sldId id="281" r:id="rId32"/>
     <p:sldId id="273" r:id="rId24"/>
-    <p:sldId id="286" r:id="rId37"/>
+    <p:sldId id="284" r:id="rId35"/>
+    <p:sldId id="287" r:id="rId38"/>
     <p:sldId id="263" r:id="rId9"/>
     <p:sldId id="275" r:id="rId26"/>
     <p:sldId id="279" r:id="rId30"/>
@@ -36,10 +37,10 @@
     <p:sldId id="268" r:id="rId19"/>
     <p:sldId id="269" r:id="rId20"/>
     <p:sldId id="270" r:id="rId21"/>
-    <p:sldId id="287" r:id="rId38"/>
+    <p:sldId id="288" r:id="rId39"/>
     <p:sldId id="271" r:id="rId22"/>
     <p:sldId id="265" r:id="rId11"/>
-    <p:sldId id="288" r:id="rId39"/>
+    <p:sldId id="289" r:id="rId40"/>
     <p:sldId id="266" r:id="rId12"/>
   </p:sldIdLst>
   <p:sldSz cx="12192000" cy="6858000"/>
@@ -3228,7 +3229,7 @@
                 <a:ea typeface="Calibri" pitchFamily="34" charset="-122"/>
                 <a:cs typeface="Calibri" pitchFamily="34" charset="-120"/>
               </a:rPr>
-              <a:t>21</a:t>
+              <a:t>22</a:t>
             </a:r>
             <a:endParaRPr lang="en-US" sz="1000" dirty="0"/>
           </a:p>
@@ -3744,7 +3745,7 @@
                 <a:ea typeface="Calibri" pitchFamily="34" charset="-122"/>
                 <a:cs typeface="Calibri" pitchFamily="34" charset="-120"/>
               </a:rPr>
-              <a:t>22</a:t>
+              <a:t>23</a:t>
             </a:r>
             <a:endParaRPr lang="en-US" sz="1000" dirty="0"/>
           </a:p>
@@ -4328,7 +4329,7 @@
                 <a:ea typeface="Calibri" pitchFamily="34" charset="-122"/>
                 <a:cs typeface="Calibri" pitchFamily="34" charset="-120"/>
               </a:rPr>
-              <a:t>24</a:t>
+              <a:t>25</a:t>
             </a:r>
             <a:endParaRPr lang="en-US" sz="1000" dirty="0"/>
           </a:p>
@@ -5132,7 +5133,7 @@
                 <a:ea typeface="Calibri" pitchFamily="34" charset="-122"/>
                 <a:cs typeface="Calibri" pitchFamily="34" charset="-120"/>
               </a:rPr>
-              <a:t>25</a:t>
+              <a:t>26</a:t>
             </a:r>
             <a:endParaRPr lang="en-US" sz="1000" dirty="0"/>
           </a:p>
@@ -5378,7 +5379,7 @@
                 <a:ea typeface="Calibri" pitchFamily="34" charset="-122"/>
                 <a:cs typeface="Calibri" pitchFamily="34" charset="-120"/>
               </a:rPr>
-              <a:t>26</a:t>
+              <a:t>27</a:t>
             </a:r>
             <a:endParaRPr lang="en-US" sz="1000" dirty="0"/>
           </a:p>
@@ -7357,7 +7358,7 @@
                 <a:ea typeface="Calibri" pitchFamily="34" charset="-122"/>
                 <a:cs typeface="Calibri" pitchFamily="34" charset="-120"/>
               </a:rPr>
-              <a:t>27</a:t>
+              <a:t>28</a:t>
             </a:r>
             <a:endParaRPr lang="en-US" sz="1000" dirty="0"/>
           </a:p>
@@ -7799,7 +7800,7 @@
                 <a:ea typeface="Calibri" pitchFamily="34" charset="-122"/>
                 <a:cs typeface="Calibri" pitchFamily="34" charset="-120"/>
               </a:rPr>
-              <a:t>28</a:t>
+              <a:t>29</a:t>
             </a:r>
             <a:endParaRPr lang="en-US" sz="1000" dirty="0"/>
           </a:p>
@@ -8320,7 +8321,7 @@
                 <a:ea typeface="Calibri" pitchFamily="34" charset="-122"/>
                 <a:cs typeface="Calibri" pitchFamily="34" charset="-120"/>
               </a:rPr>
-              <a:t>30</a:t>
+              <a:t>31</a:t>
             </a:r>
             <a:endParaRPr lang="en-US" sz="1000" dirty="0"/>
           </a:p>
@@ -9600,7 +9601,7 @@
                 <a:ea typeface="Calibri" pitchFamily="34" charset="-122"/>
                 <a:cs typeface="Calibri" pitchFamily="34" charset="-120"/>
               </a:rPr>
-              <a:t>31</a:t>
+              <a:t>32</a:t>
             </a:r>
             <a:endParaRPr lang="en-US" sz="1000" dirty="0"/>
           </a:p>
@@ -10275,7 +10276,7 @@
                 <a:ea typeface="Calibri" pitchFamily="34" charset="-122"/>
                 <a:cs typeface="Calibri" pitchFamily="34" charset="-120"/>
               </a:rPr>
-              <a:t>33</a:t>
+              <a:t>34</a:t>
             </a:r>
             <a:endParaRPr lang="en-US" sz="1000" dirty="0"/>
           </a:p>
@@ -12037,7 +12038,7 @@
                 <a:ea typeface="Calibri" pitchFamily="34" charset="-122"/>
                 <a:cs typeface="Calibri" pitchFamily="34" charset="-120"/>
               </a:rPr>
-              <a:t>23</a:t>
+              <a:t>24</a:t>
             </a:r>
             <a:endParaRPr lang="en-US" sz="1000" dirty="0"/>
           </a:p>
@@ -15182,144 +15183,180 @@
       <p:grpSpPr/>
       <p:sp>
         <p:nvSpPr>
-          <p:cNvPr id="2" name="Rectangle 1"/>
-          <p:cNvSpPr/>
-          <p:nvPr/>
-        </p:nvSpPr>
-        <p:spPr>
-          <a:xfrm>
-            <a:off x="0" y="0"/>
-            <a:ext cx="12191695" cy="6858000"/>
-          </a:xfrm>
-          <a:prstGeom prst="rect">
-            <a:avLst/>
-          </a:prstGeom>
-          <a:solidFill>
-            <a:srgbClr val="14233D"/>
-          </a:solidFill>
-          <a:ln>
-            <a:noFill/>
-          </a:ln>
-          <a:effectLst/>
-        </p:spPr>
-        <p:style>
-          <a:lnRef idx="1">
-            <a:schemeClr val="accent1"/>
-          </a:lnRef>
-          <a:fillRef idx="3">
-            <a:schemeClr val="accent1"/>
-          </a:fillRef>
-          <a:effectRef idx="2">
-            <a:schemeClr val="accent1"/>
-          </a:effectRef>
-          <a:fontRef idx="minor">
-            <a:schemeClr val="lt1"/>
-          </a:fontRef>
-        </p:style>
-        <p:txBody>
-          <a:bodyPr rtlCol="0" anchor="ctr"/>
-          <a:lstStyle/>
-          <a:p/>
-        </p:txBody>
-      </p:sp>
-      <p:sp>
-        <p:nvSpPr>
-          <p:cNvPr id="3" name="TextBox 2"/>
-          <p:cNvSpPr txBox="1"/>
-          <p:nvPr/>
-        </p:nvSpPr>
-        <p:spPr>
-          <a:xfrm>
-            <a:off x="1188720" y="1874519"/>
-            <a:ext cx="2743200" cy="1143000"/>
-          </a:xfrm>
-          <a:prstGeom prst="rect">
-            <a:avLst/>
-          </a:prstGeom>
-          <a:noFill/>
-        </p:spPr>
-        <p:txBody>
-          <a:bodyPr wrap="square">
+          <p:cNvPr id="2" name="Text 0"/>
+          <p:cNvSpPr txBox="1"/>
+          <p:nvPr/>
+        </p:nvSpPr>
+        <p:spPr>
+          <a:xfrm>
+            <a:off x="11460175" y="6446520"/>
+            <a:ext cx="457200" cy="274320"/>
+          </a:xfrm>
+          <a:prstGeom prst="rect">
+            <a:avLst/>
+          </a:prstGeom>
+          <a:noFill/>
+          <a:ln/>
+        </p:spPr>
+        <p:txBody>
+          <a:bodyPr wrap="square" lIns="0" tIns="0" rIns="0" bIns="0" rtlCol="0" anchor="ctr"/>
+          <a:lstStyle/>
+          <a:p>
+            <a:pPr marL="0" indent="0" algn="r">
+              <a:buNone/>
+            </a:pPr>
+            <a:r>
+              <a:rPr lang="en-US" sz="1000" dirty="0">
+                <a:solidFill>
+                  <a:srgbClr val="808080"/>
+                </a:solidFill>
+                <a:latin typeface="Calibri" pitchFamily="34" charset="0"/>
+                <a:ea typeface="Calibri" pitchFamily="34" charset="-122"/>
+                <a:cs typeface="Calibri" pitchFamily="34" charset="-120"/>
+              </a:rPr>
+              <a:t>20</a:t>
+            </a:r>
+            <a:endParaRPr lang="en-US" sz="1000" dirty="0"/>
+          </a:p>
+        </p:txBody>
+      </p:sp>
+      <p:sp>
+        <p:nvSpPr>
+          <p:cNvPr id="3" name="Text 1"/>
+          <p:cNvSpPr txBox="1"/>
+          <p:nvPr/>
+        </p:nvSpPr>
+        <p:spPr>
+          <a:xfrm>
+            <a:off x="548640" y="320040"/>
+            <a:ext cx="9601200" cy="685800"/>
+          </a:xfrm>
+          <a:prstGeom prst="rect">
+            <a:avLst/>
+          </a:prstGeom>
+          <a:noFill/>
+          <a:ln/>
+        </p:spPr>
+        <p:txBody>
+          <a:bodyPr wrap="square" lIns="0" tIns="0" rIns="0" bIns="0" rtlCol="0" anchor="ctr"/>
+          <a:lstStyle/>
+          <a:p>
+            <a:pPr marL="0" indent="0">
+              <a:buNone/>
+            </a:pPr>
+            <a:r>
+              <a:rPr lang="en-US" sz="2800" b="1" dirty="0">
+                <a:solidFill>
+                  <a:srgbClr val="1D2F82"/>
+                </a:solidFill>
+                <a:latin typeface="Calibri" pitchFamily="34" charset="0"/>
+                <a:ea typeface="Calibri" pitchFamily="34" charset="-122"/>
+                <a:cs typeface="Calibri" pitchFamily="34" charset="-120"/>
+              </a:rPr>
+              <a:t>Vivado — the synthesis report itself</a:t>
+            </a:r>
+            <a:endParaRPr lang="en-US" sz="2800" dirty="0"/>
+          </a:p>
+        </p:txBody>
+      </p:sp>
+      <p:pic>
+        <p:nvPicPr>
+          <p:cNvPr id="4" name="Image 0" descr="logo.png"/>
+          <p:cNvPicPr>
+            <a:picLocks noChangeAspect="1"/>
+          </p:cNvPicPr>
+          <p:nvPr/>
+        </p:nvPicPr>
+        <p:blipFill>
+          <a:blip r:embed="rId2"/>
+          <a:stretch>
+            <a:fillRect/>
+          </a:stretch>
+        </p:blipFill>
+        <p:spPr>
+          <a:xfrm>
+            <a:off x="10362895" y="320040"/>
+            <a:ext cx="1371600" cy="518746"/>
+          </a:xfrm>
+          <a:prstGeom prst="rect">
+            <a:avLst/>
+          </a:prstGeom>
+        </p:spPr>
+      </p:pic>
+      <p:pic>
+        <p:nvPicPr>
+          <p:cNvPr id="5" name="Picture 4" descr="fig_vivado.png"/>
+          <p:cNvPicPr>
+            <a:picLocks noChangeAspect="1"/>
+          </p:cNvPicPr>
+          <p:nvPr/>
+        </p:nvPicPr>
+        <p:blipFill>
+          <a:blip r:embed="rId4"/>
+          <a:stretch>
+            <a:fillRect/>
+          </a:stretch>
+        </p:blipFill>
+        <p:spPr>
+          <a:xfrm>
+            <a:off x="685800" y="1325880"/>
+            <a:ext cx="10283174" cy="4434840"/>
+          </a:xfrm>
+          <a:prstGeom prst="rect">
+            <a:avLst/>
+          </a:prstGeom>
+        </p:spPr>
+      </p:pic>
+      <p:sp>
+        <p:nvSpPr>
+          <p:cNvPr id="6" name="TextBox 5"/>
+          <p:cNvSpPr txBox="1"/>
+          <p:nvPr/>
+        </p:nvSpPr>
+        <p:spPr>
+          <a:xfrm>
+            <a:off x="685800" y="5989320"/>
+            <a:ext cx="10789920" cy="411480"/>
+          </a:xfrm>
+          <a:prstGeom prst="rect">
+            <a:avLst/>
+          </a:prstGeom>
+          <a:noFill/>
+        </p:spPr>
+        <p:txBody>
+          <a:bodyPr wrap="square" lIns="0" tIns="0" rIns="0" bIns="0">
             <a:spAutoFit/>
           </a:bodyPr>
           <a:lstStyle/>
           <a:p>
-            <a:r>
-              <a:rPr sz="6600" b="1" i="0">
-                <a:solidFill>
-                  <a:srgbClr val="6B7C93"/>
-                </a:solidFill>
-                <a:latin typeface="Calibri"/>
-              </a:rPr>
-              <a:t>01</a:t>
-            </a:r>
-          </a:p>
-        </p:txBody>
-      </p:sp>
-      <p:sp>
-        <p:nvSpPr>
-          <p:cNvPr id="4" name="TextBox 3"/>
-          <p:cNvSpPr txBox="1"/>
-          <p:nvPr/>
-        </p:nvSpPr>
-        <p:spPr>
-          <a:xfrm>
-            <a:off x="1188720" y="3063240"/>
-            <a:ext cx="9692640" cy="1005840"/>
-          </a:xfrm>
-          <a:prstGeom prst="rect">
-            <a:avLst/>
-          </a:prstGeom>
-          <a:noFill/>
-        </p:spPr>
-        <p:txBody>
-          <a:bodyPr wrap="square">
-            <a:spAutoFit/>
-          </a:bodyPr>
-          <a:lstStyle/>
-          <a:p>
-            <a:r>
-              <a:rPr sz="4400" b="1" i="0">
-                <a:solidFill>
-                  <a:srgbClr val="F4F2EE"/>
-                </a:solidFill>
-                <a:latin typeface="Calibri"/>
-              </a:rPr>
-              <a:t>The problem</a:t>
-            </a:r>
-          </a:p>
-        </p:txBody>
-      </p:sp>
-      <p:sp>
-        <p:nvSpPr>
-          <p:cNvPr id="5" name="TextBox 4"/>
-          <p:cNvSpPr txBox="1"/>
-          <p:nvPr/>
-        </p:nvSpPr>
-        <p:spPr>
-          <a:xfrm>
-            <a:off x="1280160" y="4160520"/>
-            <a:ext cx="9509760" cy="731520"/>
-          </a:xfrm>
-          <a:prstGeom prst="rect">
-            <a:avLst/>
-          </a:prstGeom>
-          <a:noFill/>
-        </p:spPr>
-        <p:txBody>
-          <a:bodyPr wrap="square">
-            <a:spAutoFit/>
-          </a:bodyPr>
-          <a:lstStyle/>
-          <a:p>
-            <a:r>
-              <a:rPr sz="1700" b="0" i="0">
-                <a:solidFill>
-                  <a:srgbClr val="6B7C93"/>
-                </a:solidFill>
-                <a:latin typeface="Calibri"/>
-              </a:rPr>
-              <a:t>A real failure, and the question nobody has answered</a:t>
+            <a:pPr marL="177800" indent="0">
+              <a:spcAft>
+                <a:spcPts val="0"/>
+              </a:spcAft>
+              <a:buSzPct val="100000"/>
+              <a:buNone/>
+            </a:pPr>
+            <a:r>
+              <a:rPr lang="en-US" sz="1200" b="1" dirty="0">
+                <a:solidFill>
+                  <a:srgbClr val="000000"/>
+                </a:solidFill>
+                <a:latin typeface="Calibri" pitchFamily="34" charset="0"/>
+                <a:ea typeface="Calibri" pitchFamily="34" charset="-122"/>
+                <a:cs typeface="Calibri" pitchFamily="34" charset="-120"/>
+              </a:rPr>
+              <a:t xml:space="preserve">Run by a colleague on Windows — Vivado has no macOS build. </a:t>
+            </a:r>
+            <a:r>
+              <a:rPr lang="en-US" sz="1200" dirty="0">
+                <a:solidFill>
+                  <a:srgbClr val="000000"/>
+                </a:solidFill>
+                <a:latin typeface="Calibri" pitchFamily="34" charset="0"/>
+                <a:ea typeface="Calibri" pitchFamily="34" charset="-122"/>
+                <a:cs typeface="Calibri" pitchFamily="34" charset="-120"/>
+              </a:rPr>
+              <a:t xml:space="preserve">Both reports are committed in rtl/vivado/build/.</a:t>
             </a:r>
           </a:p>
         </p:txBody>
@@ -15780,7 +15817,7 @@
                 </a:solidFill>
                 <a:latin typeface="Calibri"/>
               </a:rPr>
-              <a:t>02</a:t>
+              <a:t>01</a:t>
             </a:r>
           </a:p>
         </p:txBody>
@@ -15814,7 +15851,7 @@
                 </a:solidFill>
                 <a:latin typeface="Calibri"/>
               </a:rPr>
-              <a:t>What we built</a:t>
+              <a:t>The problem</a:t>
             </a:r>
           </a:p>
         </p:txBody>
@@ -15848,7 +15885,7 @@
                 </a:solidFill>
                 <a:latin typeface="Calibri"/>
               </a:rPr>
-              <a:t>A 720-point control word, and an exhaustive search</a:t>
+              <a:t>A real failure, and the question nobody has answered</a:t>
             </a:r>
           </a:p>
         </p:txBody>
@@ -15942,7 +15979,7 @@
                 </a:solidFill>
                 <a:latin typeface="Calibri"/>
               </a:rPr>
-              <a:t>03</a:t>
+              <a:t>02</a:t>
             </a:r>
           </a:p>
         </p:txBody>
@@ -15976,7 +16013,7 @@
                 </a:solidFill>
                 <a:latin typeface="Calibri"/>
               </a:rPr>
-              <a:t>What we found</a:t>
+              <a:t>What we built</a:t>
             </a:r>
           </a:p>
         </p:txBody>
@@ -16010,7 +16047,7 @@
                 </a:solidFill>
                 <a:latin typeface="Calibri"/>
               </a:rPr>
-              <a:t>Choosing well beats adapting — and by how much</a:t>
+              <a:t>A 720-point control word, and an exhaustive search</a:t>
             </a:r>
           </a:p>
         </p:txBody>
@@ -16104,7 +16141,7 @@
                 </a:solidFill>
                 <a:latin typeface="Calibri"/>
               </a:rPr>
-              <a:t>04</a:t>
+              <a:t>03</a:t>
             </a:r>
           </a:p>
         </p:txBody>
@@ -16138,7 +16175,7 @@
                 </a:solidFill>
                 <a:latin typeface="Calibri"/>
               </a:rPr>
-              <a:t>Where this goes</a:t>
+              <a:t>What we found</a:t>
             </a:r>
           </a:p>
         </p:txBody>
@@ -16172,7 +16209,7 @@
                 </a:solidFill>
                 <a:latin typeface="Calibri"/>
               </a:rPr>
-              <a:t>The deliverable, the limits, and Review-II</a:t>
+              <a:t>Choosing well beats adapting — and by how much</a:t>
             </a:r>
           </a:p>
         </p:txBody>
@@ -16197,6 +16234,168 @@
       <p:grpSpPr/>
       <p:sp>
         <p:nvSpPr>
+          <p:cNvPr id="2" name="Rectangle 1"/>
+          <p:cNvSpPr/>
+          <p:nvPr/>
+        </p:nvSpPr>
+        <p:spPr>
+          <a:xfrm>
+            <a:off x="0" y="0"/>
+            <a:ext cx="12191695" cy="6858000"/>
+          </a:xfrm>
+          <a:prstGeom prst="rect">
+            <a:avLst/>
+          </a:prstGeom>
+          <a:solidFill>
+            <a:srgbClr val="14233D"/>
+          </a:solidFill>
+          <a:ln>
+            <a:noFill/>
+          </a:ln>
+          <a:effectLst/>
+        </p:spPr>
+        <p:style>
+          <a:lnRef idx="1">
+            <a:schemeClr val="accent1"/>
+          </a:lnRef>
+          <a:fillRef idx="3">
+            <a:schemeClr val="accent1"/>
+          </a:fillRef>
+          <a:effectRef idx="2">
+            <a:schemeClr val="accent1"/>
+          </a:effectRef>
+          <a:fontRef idx="minor">
+            <a:schemeClr val="lt1"/>
+          </a:fontRef>
+        </p:style>
+        <p:txBody>
+          <a:bodyPr rtlCol="0" anchor="ctr"/>
+          <a:lstStyle/>
+          <a:p/>
+        </p:txBody>
+      </p:sp>
+      <p:sp>
+        <p:nvSpPr>
+          <p:cNvPr id="3" name="TextBox 2"/>
+          <p:cNvSpPr txBox="1"/>
+          <p:nvPr/>
+        </p:nvSpPr>
+        <p:spPr>
+          <a:xfrm>
+            <a:off x="1188720" y="1874519"/>
+            <a:ext cx="2743200" cy="1143000"/>
+          </a:xfrm>
+          <a:prstGeom prst="rect">
+            <a:avLst/>
+          </a:prstGeom>
+          <a:noFill/>
+        </p:spPr>
+        <p:txBody>
+          <a:bodyPr wrap="square">
+            <a:spAutoFit/>
+          </a:bodyPr>
+          <a:lstStyle/>
+          <a:p>
+            <a:r>
+              <a:rPr sz="6600" b="1" i="0">
+                <a:solidFill>
+                  <a:srgbClr val="6B7C93"/>
+                </a:solidFill>
+                <a:latin typeface="Calibri"/>
+              </a:rPr>
+              <a:t>04</a:t>
+            </a:r>
+          </a:p>
+        </p:txBody>
+      </p:sp>
+      <p:sp>
+        <p:nvSpPr>
+          <p:cNvPr id="4" name="TextBox 3"/>
+          <p:cNvSpPr txBox="1"/>
+          <p:nvPr/>
+        </p:nvSpPr>
+        <p:spPr>
+          <a:xfrm>
+            <a:off x="1188720" y="3063240"/>
+            <a:ext cx="9692640" cy="1005840"/>
+          </a:xfrm>
+          <a:prstGeom prst="rect">
+            <a:avLst/>
+          </a:prstGeom>
+          <a:noFill/>
+        </p:spPr>
+        <p:txBody>
+          <a:bodyPr wrap="square">
+            <a:spAutoFit/>
+          </a:bodyPr>
+          <a:lstStyle/>
+          <a:p>
+            <a:r>
+              <a:rPr sz="4400" b="1" i="0">
+                <a:solidFill>
+                  <a:srgbClr val="F4F2EE"/>
+                </a:solidFill>
+                <a:latin typeface="Calibri"/>
+              </a:rPr>
+              <a:t>Where this goes</a:t>
+            </a:r>
+          </a:p>
+        </p:txBody>
+      </p:sp>
+      <p:sp>
+        <p:nvSpPr>
+          <p:cNvPr id="5" name="TextBox 4"/>
+          <p:cNvSpPr txBox="1"/>
+          <p:nvPr/>
+        </p:nvSpPr>
+        <p:spPr>
+          <a:xfrm>
+            <a:off x="1280160" y="4160520"/>
+            <a:ext cx="9509760" cy="731520"/>
+          </a:xfrm>
+          <a:prstGeom prst="rect">
+            <a:avLst/>
+          </a:prstGeom>
+          <a:noFill/>
+        </p:spPr>
+        <p:txBody>
+          <a:bodyPr wrap="square">
+            <a:spAutoFit/>
+          </a:bodyPr>
+          <a:lstStyle/>
+          <a:p>
+            <a:r>
+              <a:rPr sz="1700" b="0" i="0">
+                <a:solidFill>
+                  <a:srgbClr val="6B7C93"/>
+                </a:solidFill>
+                <a:latin typeface="Calibri"/>
+              </a:rPr>
+              <a:t>The deliverable, the limits, and Review-II</a:t>
+            </a:r>
+          </a:p>
+        </p:txBody>
+      </p:sp>
+    </p:spTree>
+  </p:cSld>
+  <p:clrMapOvr>
+    <a:masterClrMapping/>
+  </p:clrMapOvr>
+</p:sld>
+</file>
+
+<file path=ppt/slides/slide34.xml><?xml version="1.0" encoding="utf-8"?>
+<p:sld xmlns:a="http://schemas.openxmlformats.org/drawingml/2006/main" xmlns:p="http://schemas.openxmlformats.org/presentationml/2006/main" xmlns:r="http://schemas.openxmlformats.org/officeDocument/2006/relationships">
+  <p:cSld>
+    <p:spTree>
+      <p:nvGrpSpPr>
+        <p:cNvPr id="1" name=""/>
+        <p:cNvGrpSpPr/>
+        <p:nvPr/>
+      </p:nvGrpSpPr>
+      <p:grpSpPr/>
+      <p:sp>
+        <p:nvSpPr>
           <p:cNvPr id="2" name="Text 0"/>
           <p:cNvSpPr txBox="1"/>
           <p:nvPr/>
@@ -16228,7 +16427,7 @@
                 <a:ea typeface="Calibri" pitchFamily="34" charset="-122"/>
                 <a:cs typeface="Calibri" pitchFamily="34" charset="-120"/>
               </a:rPr>
-              <a:t>32</a:t>
+              <a:t>33</a:t>
             </a:r>
             <a:endParaRPr lang="en-US" sz="1000" dirty="0"/>
           </a:p>

--- a/review/Review1_GaN_Segmented_Gate_Driver.pptx
+++ b/review/Review1_GaN_Segmented_Gate_Driver.pptx
@@ -11,12 +11,12 @@
     <p:sldId id="256" r:id="rId2"/>
     <p:sldId id="257" r:id="rId3"/>
     <p:sldId id="258" r:id="rId4"/>
-    <p:sldId id="285" r:id="rId36"/>
+    <p:sldId id="286" r:id="rId37"/>
     <p:sldId id="259" r:id="rId5"/>
     <p:sldId id="260" r:id="rId6"/>
     <p:sldId id="267" r:id="rId18"/>
     <p:sldId id="282" r:id="rId33"/>
-    <p:sldId id="286" r:id="rId37"/>
+    <p:sldId id="287" r:id="rId38"/>
     <p:sldId id="261" r:id="rId7"/>
     <p:sldId id="280" r:id="rId31"/>
     <p:sldId id="274" r:id="rId25"/>
@@ -28,7 +28,8 @@
     <p:sldId id="281" r:id="rId32"/>
     <p:sldId id="273" r:id="rId24"/>
     <p:sldId id="284" r:id="rId35"/>
-    <p:sldId id="287" r:id="rId38"/>
+    <p:sldId id="285" r:id="rId36"/>
+    <p:sldId id="288" r:id="rId39"/>
     <p:sldId id="263" r:id="rId9"/>
     <p:sldId id="275" r:id="rId26"/>
     <p:sldId id="279" r:id="rId30"/>
@@ -37,10 +38,10 @@
     <p:sldId id="268" r:id="rId19"/>
     <p:sldId id="269" r:id="rId20"/>
     <p:sldId id="270" r:id="rId21"/>
-    <p:sldId id="288" r:id="rId39"/>
+    <p:sldId id="289" r:id="rId40"/>
     <p:sldId id="271" r:id="rId22"/>
     <p:sldId id="265" r:id="rId11"/>
-    <p:sldId id="289" r:id="rId40"/>
+    <p:sldId id="290" r:id="rId41"/>
     <p:sldId id="266" r:id="rId12"/>
   </p:sldIdLst>
   <p:sldSz cx="12192000" cy="6858000"/>
@@ -2529,18 +2530,7 @@
                 <a:ea typeface="Calibri" pitchFamily="34" charset="-122"/>
                 <a:cs typeface="Calibri" pitchFamily="34" charset="-120"/>
               </a:rPr>
-              <a:t xml:space="preserve">Timeline &amp; milestones</a:t>
-            </a:r>
-            <a:r>
-              <a:rPr lang="en-US" sz="1600" dirty="0">
-                <a:solidFill>
-                  <a:srgbClr val="000000"/>
-                </a:solidFill>
-                <a:latin typeface="Calibri" pitchFamily="34" charset="0"/>
-                <a:ea typeface="Calibri" pitchFamily="34" charset="-122"/>
-                <a:cs typeface="Calibri" pitchFamily="34" charset="-120"/>
-              </a:rPr>
-              <a:t xml:space="preserve">  (dates follow the department calendar)</a:t>
+              <a:t xml:space="preserve">Where we are</a:t>
             </a:r>
           </a:p>
           <a:p>
@@ -2560,7 +2550,7 @@
                 <a:ea typeface="Calibri" pitchFamily="34" charset="-122"/>
                 <a:cs typeface="Calibri" pitchFamily="34" charset="-120"/>
               </a:rPr>
-              <a:t xml:space="preserve">Review-I — complete. </a:t>
+              <a:t xml:space="preserve">Review-I is complete. </a:t>
             </a:r>
             <a:r>
               <a:rPr lang="en-US" sz="1500" dirty="0">
@@ -2571,7 +2561,27 @@
                 <a:ea typeface="Calibri" pitchFamily="34" charset="-122"/>
                 <a:cs typeface="Calibri" pitchFamily="34" charset="-120"/>
               </a:rPr>
-              <a:t xml:space="preserve">Problem reproduced, driver and testbench built, exhaustive search finished, ceiling established and stress-tested against the device model.</a:t>
+              <a:t xml:space="preserve">The failure is reproduced and fixed, the 720-word search is finished at every corner, and the answer has been stress-tested against the device model, the board layout and an EMI objective.</a:t>
+            </a:r>
+          </a:p>
+          <a:p>
+            <a:pPr marL="177800" indent="-177800">
+              <a:spcAft>
+                <a:spcPts val="600"/>
+              </a:spcAft>
+              <a:buSzPct val="100000"/>
+              <a:buChar char="•"/>
+            </a:pPr>
+            <a:r>
+              <a:rPr lang="en-US" sz="1600" b="1" dirty="0">
+                <a:solidFill>
+                  <a:srgbClr val="000000"/>
+                </a:solidFill>
+                <a:latin typeface="Calibri" pitchFamily="34" charset="0"/>
+                <a:ea typeface="Calibri" pitchFamily="34" charset="-122"/>
+                <a:cs typeface="Calibri" pitchFamily="34" charset="-120"/>
+              </a:rPr>
+              <a:t xml:space="preserve">What we aim to do next</a:t>
             </a:r>
           </a:p>
           <a:p>
@@ -2591,7 +2601,7 @@
                 <a:ea typeface="Calibri" pitchFamily="34" charset="-122"/>
                 <a:cs typeface="Calibri" pitchFamily="34" charset="-120"/>
               </a:rPr>
-              <a:t xml:space="preserve">Review-II. </a:t>
+              <a:t xml:space="preserve">Review-II — put it in silicon, not fabric.</a:t>
             </a:r>
             <a:r>
               <a:rPr lang="en-US" sz="1500" dirty="0">
@@ -2602,7 +2612,7 @@
                 <a:ea typeface="Calibri" pitchFamily="34" charset="-122"/>
                 <a:cs typeface="Calibri" pitchFamily="34" charset="-120"/>
               </a:rPr>
-              <a:t xml:space="preserve">M1 secure a 5 V-capable PDK · M2 draw the segmented output stage at transistor level in Cadence · M3 re-run the ceiling on real devices and compare it against the ideal-switch bound reported here.</a:t>
+              <a:t xml:space="preserve"> A 200 MHz FPGA can only place a dead-time edge every 5 ns; the light-load corner wants 15 ns and the rest want 5, so the grid is coarse exactly where the benefit lives. Drawing the segmented output stage at transistor level in SKY130 removes that quantisation, and lets us re-run the ceiling on real devices instead of ideal switches.</a:t>
             </a:r>
           </a:p>
           <a:p>
@@ -2622,7 +2632,7 @@
                 <a:ea typeface="Calibri" pitchFamily="34" charset="-122"/>
                 <a:cs typeface="Calibri" pitchFamily="34" charset="-120"/>
               </a:rPr>
-              <a:t xml:space="preserve">Review-III. </a:t>
+              <a:t xml:space="preserve">Review-III — measure one corner in hardware.</a:t>
             </a:r>
             <a:r>
               <a:rPr lang="en-US" sz="1500" dirty="0">
@@ -2633,7 +2643,38 @@
                 <a:ea typeface="Calibri" pitchFamily="34" charset="-122"/>
                 <a:cs typeface="Calibri" pitchFamily="34" charset="-120"/>
               </a:rPr>
-              <a:t xml:space="preserve">M4 build the half-bridge · M5 measure crosstalk margin at one corner against the simulated 1.65 V · M6 submit the manuscript.</a:t>
+              <a:t xml:space="preserve"> Build the half-bridge and measure the crosstalk margin against the simulated 1.65 V. One measured corner is what turns this from a simulation study into a result, and until that exists the title says simulation.</a:t>
+            </a:r>
+          </a:p>
+          <a:p>
+            <a:pPr marL="520700" indent="-177800">
+              <a:spcAft>
+                <a:spcPts val="600"/>
+              </a:spcAft>
+              <a:buSzPct val="100000"/>
+              <a:buChar char="–"/>
+            </a:pPr>
+            <a:r>
+              <a:rPr lang="en-US" sz="1500" b="1" dirty="0">
+                <a:solidFill>
+                  <a:srgbClr val="000000"/>
+                </a:solidFill>
+                <a:latin typeface="Calibri" pitchFamily="34" charset="0"/>
+                <a:ea typeface="Calibri" pitchFamily="34" charset="-122"/>
+                <a:cs typeface="Calibri" pitchFamily="34" charset="-120"/>
+              </a:rPr>
+              <a:t xml:space="preserve">The risk we already know about.</a:t>
+            </a:r>
+            <a:r>
+              <a:rPr lang="en-US" sz="1500" dirty="0">
+                <a:solidFill>
+                  <a:srgbClr val="000000"/>
+                </a:solidFill>
+                <a:latin typeface="Calibri" pitchFamily="34" charset="0"/>
+                <a:ea typeface="Calibri" pitchFamily="34" charset="-122"/>
+                <a:cs typeface="Calibri" pitchFamily="34" charset="-120"/>
+              </a:rPr>
+              <a:t xml:space="preserve"> A 1.8 V / 3.3 V teaching PDK cannot take a 5 V gate rail, so securing a 5 V-capable PDK is the first milestone and the one that can stall the rest.</a:t>
             </a:r>
           </a:p>
           <a:p>
@@ -2653,7 +2694,7 @@
                 <a:ea typeface="Calibri" pitchFamily="34" charset="-122"/>
                 <a:cs typeface="Calibri" pitchFamily="34" charset="-120"/>
               </a:rPr>
-              <a:t xml:space="preserve">Tools &amp; technologies</a:t>
+              <a:t xml:space="preserve">Tools, and how to check any of it</a:t>
             </a:r>
           </a:p>
           <a:p>
@@ -2673,37 +2714,19 @@
                 <a:ea typeface="Calibri" pitchFamily="34" charset="-122"/>
                 <a:cs typeface="Calibri" pitchFamily="34" charset="-120"/>
               </a:rPr>
-              <a:t xml:space="preserve">ngspice 42 (every sweep) · LTspice 24, in which the port was re-run · Icarus Verilog (RTL, 8 asserted properties) · Xilinx Vivado 2024.1.2, synthesised · Cadence Spectre / OCEAN · SKY130 PDK (BSIM4) · Python / NumPy / Matplotlib · MATLAB Online, an independent cross-check of the Pareto analysis · Git</a:t>
-            </a:r>
-          </a:p>
-          <a:p>
-            <a:pPr marL="177800" indent="-177800">
-              <a:spcAft>
-                <a:spcPts val="600"/>
-              </a:spcAft>
-              <a:buSzPct val="100000"/>
-              <a:buChar char="•"/>
-            </a:pPr>
-            <a:r>
-              <a:rPr lang="en-US" sz="1600" b="1" dirty="0">
-                <a:solidFill>
-                  <a:srgbClr val="000000"/>
-                </a:solidFill>
-                <a:latin typeface="Calibri" pitchFamily="34" charset="0"/>
-                <a:ea typeface="Calibri" pitchFamily="34" charset="-122"/>
-                <a:cs typeface="Calibri" pitchFamily="34" charset="-120"/>
-              </a:rPr>
-              <a:t xml:space="preserve">How to check any of it</a:t>
-            </a:r>
-          </a:p>
-          <a:p>
-            <a:pPr marL="520700" indent="-177800">
-              <a:spcAft>
-                <a:spcPts val="600"/>
-              </a:spcAft>
-              <a:buSzPct val="100000"/>
-              <a:buChar char="–"/>
-            </a:pPr>
+              <a:t xml:space="preserve">ngspice 42 · LTspice 24 · Icarus Verilog · Xilinx Vivado 2024.1.2 · Cadence Spectre · SKY130 · Python / NumPy · MATLAB Online and Octave. Every number is regenerated by a named script in </a:t>
+            </a:r>
+            <a:r>
+              <a:rPr lang="en-US" sz="1500" b="1" dirty="0">
+                <a:solidFill>
+                  <a:srgbClr val="000000"/>
+                </a:solidFill>
+                <a:latin typeface="Calibri" pitchFamily="34" charset="0"/>
+                <a:ea typeface="Calibri" pitchFamily="34" charset="-122"/>
+                <a:cs typeface="Calibri" pitchFamily="34" charset="-120"/>
+              </a:rPr>
+              <a:t xml:space="preserve">github.com/Amritha902/gan-driver</a:t>
+            </a:r>
             <a:r>
               <a:rPr lang="en-US" sz="1500" dirty="0">
                 <a:solidFill>
@@ -2713,29 +2736,7 @@
                 <a:ea typeface="Calibri" pitchFamily="34" charset="-122"/>
                 <a:cs typeface="Calibri" pitchFamily="34" charset="-120"/>
               </a:rPr>
-              <a:t xml:space="preserve">Every number on these slides is regenerated by a named script in the repository </a:t>
-            </a:r>
-            <a:r>
-              <a:rPr lang="en-US" sz="1500" b="1" dirty="0">
-                <a:solidFill>
-                  <a:srgbClr val="000000"/>
-                </a:solidFill>
-                <a:latin typeface="Calibri" pitchFamily="34" charset="0"/>
-                <a:ea typeface="Calibri" pitchFamily="34" charset="-122"/>
-                <a:cs typeface="Calibri" pitchFamily="34" charset="-120"/>
-              </a:rPr>
-              <a:t xml:space="preserve">github.com/Amritha902/gan-driver</a:t>
-            </a:r>
-            <a:r>
-              <a:rPr lang="en-US" sz="1500" dirty="0">
-                <a:solidFill>
-                  <a:srgbClr val="000000"/>
-                </a:solidFill>
-                <a:latin typeface="Calibri" pitchFamily="34" charset="0"/>
-                <a:ea typeface="Calibri" pitchFamily="34" charset="-122"/>
-                <a:cs typeface="Calibri" pitchFamily="34" charset="-120"/>
-              </a:rPr>
-              <a:t xml:space="preserve">. Netlists, raw sweep data and analysis scripts are all committed; no figure is drawn by hand, and no number is typed in twice.</a:t>
+              <a:t xml:space="preserve">.</a:t>
             </a:r>
           </a:p>
         </p:txBody>
@@ -3229,7 +3230,7 @@
                 <a:ea typeface="Calibri" pitchFamily="34" charset="-122"/>
                 <a:cs typeface="Calibri" pitchFamily="34" charset="-120"/>
               </a:rPr>
-              <a:t>22</a:t>
+              <a:t>23</a:t>
             </a:r>
             <a:endParaRPr lang="en-US" sz="1000" dirty="0"/>
           </a:p>
@@ -3745,7 +3746,7 @@
                 <a:ea typeface="Calibri" pitchFamily="34" charset="-122"/>
                 <a:cs typeface="Calibri" pitchFamily="34" charset="-120"/>
               </a:rPr>
-              <a:t>23</a:t>
+              <a:t>24</a:t>
             </a:r>
             <a:endParaRPr lang="en-US" sz="1000" dirty="0"/>
           </a:p>
@@ -4329,7 +4330,7 @@
                 <a:ea typeface="Calibri" pitchFamily="34" charset="-122"/>
                 <a:cs typeface="Calibri" pitchFamily="34" charset="-120"/>
               </a:rPr>
-              <a:t>25</a:t>
+              <a:t>26</a:t>
             </a:r>
             <a:endParaRPr lang="en-US" sz="1000" dirty="0"/>
           </a:p>
@@ -5133,7 +5134,7 @@
                 <a:ea typeface="Calibri" pitchFamily="34" charset="-122"/>
                 <a:cs typeface="Calibri" pitchFamily="34" charset="-120"/>
               </a:rPr>
-              <a:t>26</a:t>
+              <a:t>27</a:t>
             </a:r>
             <a:endParaRPr lang="en-US" sz="1000" dirty="0"/>
           </a:p>
@@ -5379,7 +5380,7 @@
                 <a:ea typeface="Calibri" pitchFamily="34" charset="-122"/>
                 <a:cs typeface="Calibri" pitchFamily="34" charset="-120"/>
               </a:rPr>
-              <a:t>27</a:t>
+              <a:t>28</a:t>
             </a:r>
             <a:endParaRPr lang="en-US" sz="1000" dirty="0"/>
           </a:p>
@@ -7358,7 +7359,7 @@
                 <a:ea typeface="Calibri" pitchFamily="34" charset="-122"/>
                 <a:cs typeface="Calibri" pitchFamily="34" charset="-120"/>
               </a:rPr>
-              <a:t>28</a:t>
+              <a:t>29</a:t>
             </a:r>
             <a:endParaRPr lang="en-US" sz="1000" dirty="0"/>
           </a:p>
@@ -7800,7 +7801,7 @@
                 <a:ea typeface="Calibri" pitchFamily="34" charset="-122"/>
                 <a:cs typeface="Calibri" pitchFamily="34" charset="-120"/>
               </a:rPr>
-              <a:t>29</a:t>
+              <a:t>30</a:t>
             </a:r>
             <a:endParaRPr lang="en-US" sz="1000" dirty="0"/>
           </a:p>
@@ -8321,7 +8322,7 @@
                 <a:ea typeface="Calibri" pitchFamily="34" charset="-122"/>
                 <a:cs typeface="Calibri" pitchFamily="34" charset="-120"/>
               </a:rPr>
-              <a:t>31</a:t>
+              <a:t>32</a:t>
             </a:r>
             <a:endParaRPr lang="en-US" sz="1000" dirty="0"/>
           </a:p>
@@ -9601,7 +9602,7 @@
                 <a:ea typeface="Calibri" pitchFamily="34" charset="-122"/>
                 <a:cs typeface="Calibri" pitchFamily="34" charset="-120"/>
               </a:rPr>
-              <a:t>32</a:t>
+              <a:t>33</a:t>
             </a:r>
             <a:endParaRPr lang="en-US" sz="1000" dirty="0"/>
           </a:p>
@@ -10276,7 +10277,7 @@
                 <a:ea typeface="Calibri" pitchFamily="34" charset="-122"/>
                 <a:cs typeface="Calibri" pitchFamily="34" charset="-120"/>
               </a:rPr>
-              <a:t>34</a:t>
+              <a:t>35</a:t>
             </a:r>
             <a:endParaRPr lang="en-US" sz="1000" dirty="0"/>
           </a:p>
@@ -12038,7 +12039,7 @@
                 <a:ea typeface="Calibri" pitchFamily="34" charset="-122"/>
                 <a:cs typeface="Calibri" pitchFamily="34" charset="-120"/>
               </a:rPr>
-              <a:t>24</a:t>
+              <a:t>25</a:t>
             </a:r>
             <a:endParaRPr lang="en-US" sz="1000" dirty="0"/>
           </a:p>
@@ -15748,144 +15749,258 @@
       <p:grpSpPr/>
       <p:sp>
         <p:nvSpPr>
-          <p:cNvPr id="2" name="Rectangle 1"/>
-          <p:cNvSpPr/>
-          <p:nvPr/>
-        </p:nvSpPr>
-        <p:spPr>
-          <a:xfrm>
-            <a:off x="0" y="0"/>
-            <a:ext cx="12191695" cy="6858000"/>
-          </a:xfrm>
-          <a:prstGeom prst="rect">
-            <a:avLst/>
-          </a:prstGeom>
-          <a:solidFill>
-            <a:srgbClr val="14233D"/>
-          </a:solidFill>
-          <a:ln>
-            <a:noFill/>
-          </a:ln>
-          <a:effectLst/>
-        </p:spPr>
-        <p:style>
-          <a:lnRef idx="1">
-            <a:schemeClr val="accent1"/>
-          </a:lnRef>
-          <a:fillRef idx="3">
-            <a:schemeClr val="accent1"/>
-          </a:fillRef>
-          <a:effectRef idx="2">
-            <a:schemeClr val="accent1"/>
-          </a:effectRef>
-          <a:fontRef idx="minor">
-            <a:schemeClr val="lt1"/>
-          </a:fontRef>
-        </p:style>
-        <p:txBody>
-          <a:bodyPr rtlCol="0" anchor="ctr"/>
-          <a:lstStyle/>
-          <a:p/>
-        </p:txBody>
-      </p:sp>
-      <p:sp>
-        <p:nvSpPr>
-          <p:cNvPr id="3" name="TextBox 2"/>
-          <p:cNvSpPr txBox="1"/>
-          <p:nvPr/>
-        </p:nvSpPr>
-        <p:spPr>
-          <a:xfrm>
-            <a:off x="1188720" y="1874519"/>
-            <a:ext cx="2743200" cy="1143000"/>
-          </a:xfrm>
-          <a:prstGeom prst="rect">
-            <a:avLst/>
-          </a:prstGeom>
-          <a:noFill/>
-        </p:spPr>
-        <p:txBody>
-          <a:bodyPr wrap="square">
+          <p:cNvPr id="2" name="Text 0"/>
+          <p:cNvSpPr txBox="1"/>
+          <p:nvPr/>
+        </p:nvSpPr>
+        <p:spPr>
+          <a:xfrm>
+            <a:off x="11460175" y="6446520"/>
+            <a:ext cx="457200" cy="274320"/>
+          </a:xfrm>
+          <a:prstGeom prst="rect">
+            <a:avLst/>
+          </a:prstGeom>
+          <a:noFill/>
+          <a:ln/>
+        </p:spPr>
+        <p:txBody>
+          <a:bodyPr wrap="square" lIns="0" tIns="0" rIns="0" bIns="0" rtlCol="0" anchor="ctr"/>
+          <a:lstStyle/>
+          <a:p>
+            <a:pPr marL="0" indent="0" algn="r">
+              <a:buNone/>
+            </a:pPr>
+            <a:r>
+              <a:rPr lang="en-US" sz="1000" dirty="0">
+                <a:solidFill>
+                  <a:srgbClr val="808080"/>
+                </a:solidFill>
+                <a:latin typeface="Calibri" pitchFamily="34" charset="0"/>
+                <a:ea typeface="Calibri" pitchFamily="34" charset="-122"/>
+                <a:cs typeface="Calibri" pitchFamily="34" charset="-120"/>
+              </a:rPr>
+              <a:t>21</a:t>
+            </a:r>
+            <a:endParaRPr lang="en-US" sz="1000" dirty="0"/>
+          </a:p>
+        </p:txBody>
+      </p:sp>
+      <p:sp>
+        <p:nvSpPr>
+          <p:cNvPr id="3" name="Text 1"/>
+          <p:cNvSpPr txBox="1"/>
+          <p:nvPr/>
+        </p:nvSpPr>
+        <p:spPr>
+          <a:xfrm>
+            <a:off x="548640" y="320040"/>
+            <a:ext cx="9601200" cy="685800"/>
+          </a:xfrm>
+          <a:prstGeom prst="rect">
+            <a:avLst/>
+          </a:prstGeom>
+          <a:noFill/>
+          <a:ln/>
+        </p:spPr>
+        <p:txBody>
+          <a:bodyPr wrap="square" lIns="0" tIns="0" rIns="0" bIns="0" rtlCol="0" anchor="ctr"/>
+          <a:lstStyle/>
+          <a:p>
+            <a:pPr marL="0" indent="0">
+              <a:buNone/>
+            </a:pPr>
+            <a:r>
+              <a:rPr lang="en-US" sz="2800" b="1" dirty="0">
+                <a:solidFill>
+                  <a:srgbClr val="1D2F82"/>
+                </a:solidFill>
+                <a:latin typeface="Calibri" pitchFamily="34" charset="0"/>
+                <a:ea typeface="Calibri" pitchFamily="34" charset="-122"/>
+                <a:cs typeface="Calibri" pitchFamily="34" charset="-120"/>
+              </a:rPr>
+              <a:t>Vivado — simulation and synthesis, on screen</a:t>
+            </a:r>
+            <a:endParaRPr lang="en-US" sz="2800" dirty="0"/>
+          </a:p>
+        </p:txBody>
+      </p:sp>
+      <p:pic>
+        <p:nvPicPr>
+          <p:cNvPr id="4" name="Image 0" descr="logo.png"/>
+          <p:cNvPicPr>
+            <a:picLocks noChangeAspect="1"/>
+          </p:cNvPicPr>
+          <p:nvPr/>
+        </p:nvPicPr>
+        <p:blipFill>
+          <a:blip r:embed="rId2"/>
+          <a:stretch>
+            <a:fillRect/>
+          </a:stretch>
+        </p:blipFill>
+        <p:spPr>
+          <a:xfrm>
+            <a:off x="10362895" y="320040"/>
+            <a:ext cx="1371600" cy="518746"/>
+          </a:xfrm>
+          <a:prstGeom prst="rect">
+            <a:avLst/>
+          </a:prstGeom>
+        </p:spPr>
+      </p:pic>
+      <p:pic>
+        <p:nvPicPr>
+          <p:cNvPr id="5" name="Picture 4" descr="vivado_simulation.jpeg"/>
+          <p:cNvPicPr>
+            <a:picLocks noChangeAspect="1"/>
+          </p:cNvPicPr>
+          <p:nvPr/>
+        </p:nvPicPr>
+        <p:blipFill>
+          <a:blip r:embed="rId5"/>
+          <a:stretch>
+            <a:fillRect/>
+          </a:stretch>
+        </p:blipFill>
+        <p:spPr>
+          <a:xfrm>
+            <a:off x="502920" y="1417320"/>
+            <a:ext cx="5532120" cy="3111818"/>
+          </a:xfrm>
+          <a:prstGeom prst="rect">
+            <a:avLst/>
+          </a:prstGeom>
+        </p:spPr>
+      </p:pic>
+      <p:pic>
+        <p:nvPicPr>
+          <p:cNvPr id="6" name="Picture 5" descr="vivado_console.jpeg"/>
+          <p:cNvPicPr>
+            <a:picLocks noChangeAspect="1"/>
+          </p:cNvPicPr>
+          <p:nvPr/>
+        </p:nvPicPr>
+        <p:blipFill>
+          <a:blip r:embed="rId6"/>
+          <a:stretch>
+            <a:fillRect/>
+          </a:stretch>
+        </p:blipFill>
+        <p:spPr>
+          <a:xfrm>
+            <a:off x="6263640" y="1417320"/>
+            <a:ext cx="5532120" cy="3111818"/>
+          </a:xfrm>
+          <a:prstGeom prst="rect">
+            <a:avLst/>
+          </a:prstGeom>
+        </p:spPr>
+      </p:pic>
+      <p:sp>
+        <p:nvSpPr>
+          <p:cNvPr id="7" name="TextBox 6"/>
+          <p:cNvSpPr txBox="1"/>
+          <p:nvPr/>
+        </p:nvSpPr>
+        <p:spPr>
+          <a:xfrm>
+            <a:off x="502920" y="4709160"/>
+            <a:ext cx="5532120" cy="731520"/>
+          </a:xfrm>
+          <a:prstGeom prst="rect">
+            <a:avLst/>
+          </a:prstGeom>
+          <a:noFill/>
+        </p:spPr>
+        <p:txBody>
+          <a:bodyPr wrap="square" lIns="0" tIns="0" rIns="0" bIns="0">
             <a:spAutoFit/>
           </a:bodyPr>
           <a:lstStyle/>
           <a:p>
-            <a:r>
-              <a:rPr sz="6600" b="1" i="0">
-                <a:solidFill>
-                  <a:srgbClr val="6B7C93"/>
-                </a:solidFill>
-                <a:latin typeface="Calibri"/>
-              </a:rPr>
-              <a:t>01</a:t>
-            </a:r>
-          </a:p>
-        </p:txBody>
-      </p:sp>
-      <p:sp>
-        <p:nvSpPr>
-          <p:cNvPr id="4" name="TextBox 3"/>
-          <p:cNvSpPr txBox="1"/>
-          <p:nvPr/>
-        </p:nvSpPr>
-        <p:spPr>
-          <a:xfrm>
-            <a:off x="1188720" y="3063240"/>
-            <a:ext cx="9692640" cy="1005840"/>
-          </a:xfrm>
-          <a:prstGeom prst="rect">
-            <a:avLst/>
-          </a:prstGeom>
-          <a:noFill/>
-        </p:spPr>
-        <p:txBody>
-          <a:bodyPr wrap="square">
+            <a:pPr marL="177800" indent="0">
+              <a:spcAft>
+                <a:spcPts val="0"/>
+              </a:spcAft>
+              <a:buSzPct val="100000"/>
+              <a:buNone/>
+            </a:pPr>
+            <a:r>
+              <a:rPr lang="en-US" sz="1150" b="1" dirty="0">
+                <a:solidFill>
+                  <a:srgbClr val="000000"/>
+                </a:solidFill>
+                <a:latin typeface="Calibri" pitchFamily="34" charset="0"/>
+                <a:ea typeface="Calibri" pitchFamily="34" charset="-122"/>
+                <a:cs typeface="Calibri" pitchFamily="34" charset="-120"/>
+              </a:rPr>
+              <a:t xml:space="preserve">Behavioural simulation. </a:t>
+            </a:r>
+            <a:r>
+              <a:rPr lang="en-US" sz="1150" dirty="0">
+                <a:solidFill>
+                  <a:srgbClr val="000000"/>
+                </a:solidFill>
+                <a:latin typeface="Calibri" pitchFamily="34" charset="0"/>
+                <a:ea typeface="Calibri" pitchFamily="34" charset="-122"/>
+                <a:cs typeface="Calibri" pitchFamily="34" charset="-120"/>
+              </a:rPr>
+              <a:t xml:space="preserve">fails[31:0] = 0 — every asserted property holds in Vivado's own simulator, a third tool after Icarus and the mutation test.</a:t>
+            </a:r>
+          </a:p>
+        </p:txBody>
+      </p:sp>
+      <p:sp>
+        <p:nvSpPr>
+          <p:cNvPr id="8" name="TextBox 7"/>
+          <p:cNvSpPr txBox="1"/>
+          <p:nvPr/>
+        </p:nvSpPr>
+        <p:spPr>
+          <a:xfrm>
+            <a:off x="6263640" y="4709160"/>
+            <a:ext cx="5532120" cy="731520"/>
+          </a:xfrm>
+          <a:prstGeom prst="rect">
+            <a:avLst/>
+          </a:prstGeom>
+          <a:noFill/>
+        </p:spPr>
+        <p:txBody>
+          <a:bodyPr wrap="square" lIns="0" tIns="0" rIns="0" bIns="0">
             <a:spAutoFit/>
           </a:bodyPr>
           <a:lstStyle/>
           <a:p>
-            <a:r>
-              <a:rPr sz="4400" b="1" i="0">
-                <a:solidFill>
-                  <a:srgbClr val="F4F2EE"/>
-                </a:solidFill>
-                <a:latin typeface="Calibri"/>
-              </a:rPr>
-              <a:t>The problem</a:t>
-            </a:r>
-          </a:p>
-        </p:txBody>
-      </p:sp>
-      <p:sp>
-        <p:nvSpPr>
-          <p:cNvPr id="5" name="TextBox 4"/>
-          <p:cNvSpPr txBox="1"/>
-          <p:nvPr/>
-        </p:nvSpPr>
-        <p:spPr>
-          <a:xfrm>
-            <a:off x="1280160" y="4160520"/>
-            <a:ext cx="9509760" cy="731520"/>
-          </a:xfrm>
-          <a:prstGeom prst="rect">
-            <a:avLst/>
-          </a:prstGeom>
-          <a:noFill/>
-        </p:spPr>
-        <p:txBody>
-          <a:bodyPr wrap="square">
-            <a:spAutoFit/>
-          </a:bodyPr>
-          <a:lstStyle/>
-          <a:p>
-            <a:r>
-              <a:rPr sz="1700" b="0" i="0">
-                <a:solidFill>
-                  <a:srgbClr val="6B7C93"/>
-                </a:solidFill>
-                <a:latin typeface="Calibri"/>
-              </a:rPr>
-              <a:t>A real failure, and the question nobody has answered</a:t>
+            <a:pPr marL="177800" indent="0">
+              <a:spcAft>
+                <a:spcPts val="0"/>
+              </a:spcAft>
+              <a:buSzPct val="100000"/>
+              <a:buNone/>
+            </a:pPr>
+            <a:r>
+              <a:rPr lang="en-US" sz="1150" b="1" dirty="0">
+                <a:solidFill>
+                  <a:srgbClr val="000000"/>
+                </a:solidFill>
+                <a:latin typeface="Calibri" pitchFamily="34" charset="0"/>
+                <a:ea typeface="Calibri" pitchFamily="34" charset="-122"/>
+                <a:cs typeface="Calibri" pitchFamily="34" charset="-120"/>
+              </a:rPr>
+              <a:t xml:space="preserve">Synthesis console. </a:t>
+            </a:r>
+            <a:r>
+              <a:rPr lang="en-US" sz="1150" dirty="0">
+                <a:solidFill>
+                  <a:srgbClr val="000000"/>
+                </a:solidFill>
+                <a:latin typeface="Calibri" pitchFamily="34" charset="0"/>
+                <a:ea typeface="Calibri" pitchFamily="34" charset="-122"/>
+                <a:cs typeface="Calibri" pitchFamily="34" charset="-120"/>
+              </a:rPr>
+              <a:t xml:space="preserve">33 LUTs programmable against 20 strapped — the cost of programmability, printed by the tool.</a:t>
             </a:r>
           </a:p>
         </p:txBody>
@@ -15979,7 +16094,7 @@
                 </a:solidFill>
                 <a:latin typeface="Calibri"/>
               </a:rPr>
-              <a:t>02</a:t>
+              <a:t>01</a:t>
             </a:r>
           </a:p>
         </p:txBody>
@@ -16013,7 +16128,7 @@
                 </a:solidFill>
                 <a:latin typeface="Calibri"/>
               </a:rPr>
-              <a:t>What we built</a:t>
+              <a:t>The problem</a:t>
             </a:r>
           </a:p>
         </p:txBody>
@@ -16047,7 +16162,7 @@
                 </a:solidFill>
                 <a:latin typeface="Calibri"/>
               </a:rPr>
-              <a:t>A 720-point control word, and an exhaustive search</a:t>
+              <a:t>A real failure, and the question nobody has answered</a:t>
             </a:r>
           </a:p>
         </p:txBody>
@@ -16141,7 +16256,7 @@
                 </a:solidFill>
                 <a:latin typeface="Calibri"/>
               </a:rPr>
-              <a:t>03</a:t>
+              <a:t>02</a:t>
             </a:r>
           </a:p>
         </p:txBody>
@@ -16175,7 +16290,7 @@
                 </a:solidFill>
                 <a:latin typeface="Calibri"/>
               </a:rPr>
-              <a:t>What we found</a:t>
+              <a:t>What we built</a:t>
             </a:r>
           </a:p>
         </p:txBody>
@@ -16209,7 +16324,7 @@
                 </a:solidFill>
                 <a:latin typeface="Calibri"/>
               </a:rPr>
-              <a:t>Choosing well beats adapting — and by how much</a:t>
+              <a:t>A 720-point control word, and an exhaustive search</a:t>
             </a:r>
           </a:p>
         </p:txBody>
@@ -16303,7 +16418,7 @@
                 </a:solidFill>
                 <a:latin typeface="Calibri"/>
               </a:rPr>
-              <a:t>04</a:t>
+              <a:t>03</a:t>
             </a:r>
           </a:p>
         </p:txBody>
@@ -16337,7 +16452,7 @@
                 </a:solidFill>
                 <a:latin typeface="Calibri"/>
               </a:rPr>
-              <a:t>Where this goes</a:t>
+              <a:t>What we found</a:t>
             </a:r>
           </a:p>
         </p:txBody>
@@ -16371,7 +16486,7 @@
                 </a:solidFill>
                 <a:latin typeface="Calibri"/>
               </a:rPr>
-              <a:t>The deliverable, the limits, and Review-II</a:t>
+              <a:t>Choosing well beats adapting — and by how much</a:t>
             </a:r>
           </a:p>
         </p:txBody>
@@ -16396,6 +16511,168 @@
       <p:grpSpPr/>
       <p:sp>
         <p:nvSpPr>
+          <p:cNvPr id="2" name="Rectangle 1"/>
+          <p:cNvSpPr/>
+          <p:nvPr/>
+        </p:nvSpPr>
+        <p:spPr>
+          <a:xfrm>
+            <a:off x="0" y="0"/>
+            <a:ext cx="12191695" cy="6858000"/>
+          </a:xfrm>
+          <a:prstGeom prst="rect">
+            <a:avLst/>
+          </a:prstGeom>
+          <a:solidFill>
+            <a:srgbClr val="14233D"/>
+          </a:solidFill>
+          <a:ln>
+            <a:noFill/>
+          </a:ln>
+          <a:effectLst/>
+        </p:spPr>
+        <p:style>
+          <a:lnRef idx="1">
+            <a:schemeClr val="accent1"/>
+          </a:lnRef>
+          <a:fillRef idx="3">
+            <a:schemeClr val="accent1"/>
+          </a:fillRef>
+          <a:effectRef idx="2">
+            <a:schemeClr val="accent1"/>
+          </a:effectRef>
+          <a:fontRef idx="minor">
+            <a:schemeClr val="lt1"/>
+          </a:fontRef>
+        </p:style>
+        <p:txBody>
+          <a:bodyPr rtlCol="0" anchor="ctr"/>
+          <a:lstStyle/>
+          <a:p/>
+        </p:txBody>
+      </p:sp>
+      <p:sp>
+        <p:nvSpPr>
+          <p:cNvPr id="3" name="TextBox 2"/>
+          <p:cNvSpPr txBox="1"/>
+          <p:nvPr/>
+        </p:nvSpPr>
+        <p:spPr>
+          <a:xfrm>
+            <a:off x="1188720" y="1874519"/>
+            <a:ext cx="2743200" cy="1143000"/>
+          </a:xfrm>
+          <a:prstGeom prst="rect">
+            <a:avLst/>
+          </a:prstGeom>
+          <a:noFill/>
+        </p:spPr>
+        <p:txBody>
+          <a:bodyPr wrap="square">
+            <a:spAutoFit/>
+          </a:bodyPr>
+          <a:lstStyle/>
+          <a:p>
+            <a:r>
+              <a:rPr sz="6600" b="1" i="0">
+                <a:solidFill>
+                  <a:srgbClr val="6B7C93"/>
+                </a:solidFill>
+                <a:latin typeface="Calibri"/>
+              </a:rPr>
+              <a:t>04</a:t>
+            </a:r>
+          </a:p>
+        </p:txBody>
+      </p:sp>
+      <p:sp>
+        <p:nvSpPr>
+          <p:cNvPr id="4" name="TextBox 3"/>
+          <p:cNvSpPr txBox="1"/>
+          <p:nvPr/>
+        </p:nvSpPr>
+        <p:spPr>
+          <a:xfrm>
+            <a:off x="1188720" y="3063240"/>
+            <a:ext cx="9692640" cy="1005840"/>
+          </a:xfrm>
+          <a:prstGeom prst="rect">
+            <a:avLst/>
+          </a:prstGeom>
+          <a:noFill/>
+        </p:spPr>
+        <p:txBody>
+          <a:bodyPr wrap="square">
+            <a:spAutoFit/>
+          </a:bodyPr>
+          <a:lstStyle/>
+          <a:p>
+            <a:r>
+              <a:rPr sz="4400" b="1" i="0">
+                <a:solidFill>
+                  <a:srgbClr val="F4F2EE"/>
+                </a:solidFill>
+                <a:latin typeface="Calibri"/>
+              </a:rPr>
+              <a:t>Where this goes</a:t>
+            </a:r>
+          </a:p>
+        </p:txBody>
+      </p:sp>
+      <p:sp>
+        <p:nvSpPr>
+          <p:cNvPr id="5" name="TextBox 4"/>
+          <p:cNvSpPr txBox="1"/>
+          <p:nvPr/>
+        </p:nvSpPr>
+        <p:spPr>
+          <a:xfrm>
+            <a:off x="1280160" y="4160520"/>
+            <a:ext cx="9509760" cy="731520"/>
+          </a:xfrm>
+          <a:prstGeom prst="rect">
+            <a:avLst/>
+          </a:prstGeom>
+          <a:noFill/>
+        </p:spPr>
+        <p:txBody>
+          <a:bodyPr wrap="square">
+            <a:spAutoFit/>
+          </a:bodyPr>
+          <a:lstStyle/>
+          <a:p>
+            <a:r>
+              <a:rPr sz="1700" b="0" i="0">
+                <a:solidFill>
+                  <a:srgbClr val="6B7C93"/>
+                </a:solidFill>
+                <a:latin typeface="Calibri"/>
+              </a:rPr>
+              <a:t>The deliverable, the limits, and Review-II</a:t>
+            </a:r>
+          </a:p>
+        </p:txBody>
+      </p:sp>
+    </p:spTree>
+  </p:cSld>
+  <p:clrMapOvr>
+    <a:masterClrMapping/>
+  </p:clrMapOvr>
+</p:sld>
+</file>
+
+<file path=ppt/slides/slide35.xml><?xml version="1.0" encoding="utf-8"?>
+<p:sld xmlns:a="http://schemas.openxmlformats.org/drawingml/2006/main" xmlns:p="http://schemas.openxmlformats.org/presentationml/2006/main" xmlns:r="http://schemas.openxmlformats.org/officeDocument/2006/relationships">
+  <p:cSld>
+    <p:spTree>
+      <p:nvGrpSpPr>
+        <p:cNvPr id="1" name=""/>
+        <p:cNvGrpSpPr/>
+        <p:nvPr/>
+      </p:nvGrpSpPr>
+      <p:grpSpPr/>
+      <p:sp>
+        <p:nvSpPr>
           <p:cNvPr id="2" name="Text 0"/>
           <p:cNvSpPr txBox="1"/>
           <p:nvPr/>
@@ -16427,7 +16704,7 @@
                 <a:ea typeface="Calibri" pitchFamily="34" charset="-122"/>
                 <a:cs typeface="Calibri" pitchFamily="34" charset="-120"/>
               </a:rPr>
-              <a:t>33</a:t>
+              <a:t>34</a:t>
             </a:r>
             <a:endParaRPr lang="en-US" sz="1000" dirty="0"/>
           </a:p>

--- a/review/Review1_GaN_Segmented_Gate_Driver.pptx
+++ b/review/Review1_GaN_Segmented_Gate_Driver.pptx
@@ -11,6 +11,7 @@
     <p:sldId id="256" r:id="rId2"/>
     <p:sldId id="257" r:id="rId3"/>
     <p:sldId id="258" r:id="rId4"/>
+    <p:sldId id="291" r:id="rId35"/>
     <p:sldId id="286" r:id="rId37"/>
     <p:sldId id="259" r:id="rId5"/>
     <p:sldId id="260" r:id="rId6"/>
@@ -28,6 +29,7 @@
     <p:sldId id="285" r:id="rId36"/>
     <p:sldId id="288" r:id="rId39"/>
     <p:sldId id="263" r:id="rId9"/>
+    <p:sldId id="292" r:id="rId32"/>
     <p:sldId id="275" r:id="rId26"/>
     <p:sldId id="279" r:id="rId30"/>
     <p:sldId id="276" r:id="rId27"/>
@@ -2280,7 +2282,7 @@
                 <a:ea typeface="Calibri" pitchFamily="34" charset="-122"/>
                 <a:cs typeface="Calibri" pitchFamily="34" charset="-120"/>
               </a:rPr>
-              <a:t>10</a:t>
+              <a:t>11</a:t>
             </a:r>
             <a:endParaRPr lang="en-US" sz="1000" dirty="0"/>
           </a:p>
@@ -2710,7 +2712,7 @@
                 <a:ea typeface="Calibri" pitchFamily="34" charset="-122"/>
                 <a:cs typeface="Calibri" pitchFamily="34" charset="-120"/>
               </a:rPr>
-              <a:t>11</a:t>
+              <a:t>12</a:t>
             </a:r>
             <a:endParaRPr lang="en-US" sz="1000" dirty="0"/>
           </a:p>
@@ -2923,7 +2925,7 @@
                 <a:ea typeface="Calibri" pitchFamily="34" charset="-122"/>
                 <a:cs typeface="Calibri" pitchFamily="34" charset="-120"/>
               </a:rPr>
-              <a:t>12</a:t>
+              <a:t>13</a:t>
             </a:r>
             <a:endParaRPr lang="en-US" sz="1000" dirty="0"/>
           </a:p>
@@ -3067,7 +3069,7 @@
                 <a:ea typeface="Calibri" pitchFamily="34" charset="-122"/>
                 <a:cs typeface="Calibri" pitchFamily="34" charset="-120"/>
               </a:rPr>
-              <a:t>13</a:t>
+              <a:t>14</a:t>
             </a:r>
             <a:endParaRPr lang="en-US" sz="1000" dirty="0"/>
           </a:p>
@@ -3233,7 +3235,7 @@
 </p:sld>
 </file>
 
-<file path=ppt/slides/slide15.xml><?xml version="1.0" encoding="utf-8"?>
+<file path=ppt/slides/slide14.xml><?xml version="1.0" encoding="utf-8"?>
 <p:sld xmlns:a="http://schemas.openxmlformats.org/drawingml/2006/main" xmlns:p="http://schemas.openxmlformats.org/presentationml/2006/main" xmlns:r="http://schemas.openxmlformats.org/officeDocument/2006/relationships">
   <p:cSld>
     <p:spTree>
@@ -3348,7 +3350,7 @@
                 <a:ea typeface="Calibri" pitchFamily="34" charset="-122"/>
                 <a:cs typeface="Calibri" pitchFamily="34" charset="-120"/>
               </a:rPr>
-              <a:t xml:space="preserve">14</a:t>
+              <a:t xml:space="preserve">15</a:t>
             </a:r>
           </a:p>
         </p:txBody>
@@ -4027,7 +4029,7 @@
 </p:sld>
 </file>
 
-<file path=ppt/slides/slide16.xml><?xml version="1.0" encoding="utf-8"?>
+<file path=ppt/slides/slide15.xml><?xml version="1.0" encoding="utf-8"?>
 <p:sld xmlns:a="http://schemas.openxmlformats.org/drawingml/2006/main" xmlns:r="http://schemas.openxmlformats.org/officeDocument/2006/relationships" xmlns:p="http://schemas.openxmlformats.org/presentationml/2006/main">
   <p:cSld name="Slide 7">
     <p:bg>
@@ -4085,7 +4087,7 @@
                 <a:ea typeface="Calibri" pitchFamily="34" charset="-122"/>
                 <a:cs typeface="Calibri" pitchFamily="34" charset="-120"/>
               </a:rPr>
-              <a:t>15</a:t>
+              <a:t>16</a:t>
             </a:r>
             <a:endParaRPr lang="en-US" sz="1000" dirty="0"/>
           </a:p>
@@ -4363,6 +4365,389 @@
                 <a:cs typeface="Calibri" pitchFamily="34" charset="-120"/>
               </a:rPr>
               <a:t xml:space="preserve">34,622 simulation runs.</a:t>
+            </a:r>
+          </a:p>
+        </p:txBody>
+      </p:sp>
+    </p:spTree>
+  </p:cSld>
+  <p:clrMapOvr>
+    <a:masterClrMapping/>
+  </p:clrMapOvr>
+</p:sld>
+</file>
+
+<file path=ppt/slides/slide16.xml><?xml version="1.0" encoding="utf-8"?>
+<p:sld xmlns:a="http://schemas.openxmlformats.org/drawingml/2006/main" xmlns:r="http://schemas.openxmlformats.org/officeDocument/2006/relationships" xmlns:p="http://schemas.openxmlformats.org/presentationml/2006/main">
+  <p:cSld name="Slide 4">
+    <p:bg>
+      <p:bgPr>
+        <a:solidFill>
+          <a:srgbClr val="FFFFFF"/>
+        </a:solidFill>
+        <a:effectLst/>
+      </p:bgPr>
+    </p:bg>
+    <p:spTree>
+      <p:nvGrpSpPr>
+        <p:cNvPr id="1" name=""/>
+        <p:cNvGrpSpPr/>
+        <p:nvPr/>
+      </p:nvGrpSpPr>
+      <p:grpSpPr>
+        <a:xfrm>
+          <a:off x="0" y="0"/>
+          <a:ext cx="0" cy="0"/>
+          <a:chOff x="0" y="0"/>
+          <a:chExt cx="0" cy="0"/>
+        </a:xfrm>
+      </p:grpSpPr>
+      <p:sp>
+        <p:nvSpPr>
+          <p:cNvPr id="2" name="Text 0"/>
+          <p:cNvSpPr txBox="1"/>
+          <p:nvPr/>
+        </p:nvSpPr>
+        <p:spPr>
+          <a:xfrm>
+            <a:off x="11460175" y="6446520"/>
+            <a:ext cx="457200" cy="274320"/>
+          </a:xfrm>
+          <a:prstGeom prst="rect">
+            <a:avLst/>
+          </a:prstGeom>
+          <a:noFill/>
+          <a:ln/>
+        </p:spPr>
+        <p:txBody>
+          <a:bodyPr wrap="square" lIns="0" tIns="0" rIns="0" bIns="0" rtlCol="0" anchor="ctr"/>
+          <a:lstStyle/>
+          <a:p>
+            <a:pPr marL="0" indent="0" algn="r">
+              <a:buNone/>
+            </a:pPr>
+            <a:r>
+              <a:rPr lang="en-US" sz="1000" dirty="0">
+                <a:solidFill>
+                  <a:srgbClr val="808080"/>
+                </a:solidFill>
+                <a:latin typeface="Calibri" pitchFamily="34" charset="0"/>
+                <a:ea typeface="Calibri" pitchFamily="34" charset="-122"/>
+                <a:cs typeface="Calibri" pitchFamily="34" charset="-120"/>
+              </a:rPr>
+              <a:t>17</a:t>
+            </a:r>
+            <a:endParaRPr lang="en-US" sz="1000" dirty="0"/>
+          </a:p>
+        </p:txBody>
+      </p:sp>
+      <p:sp>
+        <p:nvSpPr>
+          <p:cNvPr id="3" name="Text 1"/>
+          <p:cNvSpPr txBox="1"/>
+          <p:nvPr/>
+        </p:nvSpPr>
+        <p:spPr>
+          <a:xfrm>
+            <a:off x="548640" y="320040"/>
+            <a:ext cx="9601200" cy="685800"/>
+          </a:xfrm>
+          <a:prstGeom prst="rect">
+            <a:avLst/>
+          </a:prstGeom>
+          <a:noFill/>
+          <a:ln/>
+        </p:spPr>
+        <p:txBody>
+          <a:bodyPr wrap="square" lIns="0" tIns="0" rIns="0" bIns="0" rtlCol="0" anchor="ctr"/>
+          <a:lstStyle/>
+          <a:p>
+            <a:pPr marL="0" indent="0">
+              <a:buNone/>
+            </a:pPr>
+            <a:r>
+              <a:rPr lang="en-US" sz="2800" b="1" dirty="0">
+                <a:solidFill>
+                  <a:srgbClr val="1D2F82"/>
+                </a:solidFill>
+                <a:latin typeface="Calibri" pitchFamily="34" charset="0"/>
+                <a:ea typeface="Calibri" pitchFamily="34" charset="-122"/>
+                <a:cs typeface="Calibri" pitchFamily="34" charset="-120"/>
+              </a:rPr>
+              <a:t>Timeline, Milestones &amp; Tools</a:t>
+            </a:r>
+            <a:endParaRPr lang="en-US" sz="2800" dirty="0"/>
+          </a:p>
+        </p:txBody>
+      </p:sp>
+      <p:pic>
+        <p:nvPicPr>
+          <p:cNvPr id="4" name="Image 0" descr="logo.png"/>
+          <p:cNvPicPr>
+            <a:picLocks noChangeAspect="1"/>
+          </p:cNvPicPr>
+          <p:nvPr/>
+        </p:nvPicPr>
+        <p:blipFill>
+          <a:blip r:embed="rId3"/>
+          <a:stretch>
+            <a:fillRect/>
+          </a:stretch>
+        </p:blipFill>
+        <p:spPr>
+          <a:xfrm>
+            <a:off x="10362895" y="320040"/>
+            <a:ext cx="1371600" cy="518746"/>
+          </a:xfrm>
+          <a:prstGeom prst="rect">
+            <a:avLst/>
+          </a:prstGeom>
+        </p:spPr>
+      </p:pic>
+      <p:sp>
+        <p:nvSpPr>
+          <p:cNvPr id="5" name="Text 2"/>
+          <p:cNvSpPr txBox="1"/>
+          <p:nvPr/>
+        </p:nvSpPr>
+        <p:spPr>
+          <a:xfrm>
+            <a:off x="640080" y="1325880"/>
+            <a:ext cx="10881360" cy="4937760"/>
+          </a:xfrm>
+          <a:prstGeom prst="rect">
+            <a:avLst/>
+          </a:prstGeom>
+          <a:noFill/>
+          <a:ln/>
+        </p:spPr>
+        <p:txBody>
+          <a:bodyPr wrap="square" lIns="0" tIns="0" rIns="0" bIns="0" rtlCol="0" anchor="t"/>
+          <a:lstStyle/>
+          <a:p>
+            <a:pPr marL="177800" indent="-177800">
+              <a:spcAft>
+                <a:spcPts val="600"/>
+              </a:spcAft>
+              <a:buSzPct val="100000"/>
+              <a:buChar char="•"/>
+            </a:pPr>
+            <a:r>
+              <a:rPr lang="en-US" sz="1600" b="1" dirty="0">
+                <a:solidFill>
+                  <a:srgbClr val="000000"/>
+                </a:solidFill>
+                <a:latin typeface="Calibri" pitchFamily="34" charset="0"/>
+                <a:ea typeface="Calibri" pitchFamily="34" charset="-122"/>
+                <a:cs typeface="Calibri" pitchFamily="34" charset="-120"/>
+              </a:rPr>
+              <a:t xml:space="preserve">Where we are</a:t>
+            </a:r>
+          </a:p>
+          <a:p>
+            <a:pPr marL="520700" indent="-177800">
+              <a:spcAft>
+                <a:spcPts val="600"/>
+              </a:spcAft>
+              <a:buSzPct val="100000"/>
+              <a:buChar char="–"/>
+            </a:pPr>
+            <a:r>
+              <a:rPr lang="en-US" sz="1500" b="1" dirty="0">
+                <a:solidFill>
+                  <a:srgbClr val="000000"/>
+                </a:solidFill>
+                <a:latin typeface="Calibri" pitchFamily="34" charset="0"/>
+                <a:ea typeface="Calibri" pitchFamily="34" charset="-122"/>
+                <a:cs typeface="Calibri" pitchFamily="34" charset="-120"/>
+              </a:rPr>
+              <a:t xml:space="preserve">Review-I is done. </a:t>
+            </a:r>
+            <a:r>
+              <a:rPr lang="en-US" sz="1500" dirty="0">
+                <a:solidFill>
+                  <a:srgbClr val="000000"/>
+                </a:solidFill>
+                <a:latin typeface="Calibri" pitchFamily="34" charset="0"/>
+                <a:ea typeface="Calibri" pitchFamily="34" charset="-122"/>
+                <a:cs typeface="Calibri" pitchFamily="34" charset="-120"/>
+              </a:rPr>
+              <a:t xml:space="preserve">The fault is reproduced and fixed, all 720 settings have been tested at every operating point, and the answer has been stress-tested against the device model, the board layout and EMI.</a:t>
+            </a:r>
+          </a:p>
+          <a:p>
+            <a:pPr marL="177800" indent="-177800">
+              <a:spcAft>
+                <a:spcPts val="600"/>
+              </a:spcAft>
+              <a:buSzPct val="100000"/>
+              <a:buChar char="•"/>
+            </a:pPr>
+            <a:r>
+              <a:rPr lang="en-US" sz="1600" b="1" dirty="0">
+                <a:solidFill>
+                  <a:srgbClr val="000000"/>
+                </a:solidFill>
+                <a:latin typeface="Calibri" pitchFamily="34" charset="0"/>
+                <a:ea typeface="Calibri" pitchFamily="34" charset="-122"/>
+                <a:cs typeface="Calibri" pitchFamily="34" charset="-120"/>
+              </a:rPr>
+              <a:t xml:space="preserve">What we aim to do next</a:t>
+            </a:r>
+          </a:p>
+          <a:p>
+            <a:pPr marL="520700" indent="-177800">
+              <a:spcAft>
+                <a:spcPts val="600"/>
+              </a:spcAft>
+              <a:buSzPct val="100000"/>
+              <a:buChar char="–"/>
+            </a:pPr>
+            <a:r>
+              <a:rPr lang="en-US" sz="1500" b="1" dirty="0">
+                <a:solidFill>
+                  <a:srgbClr val="000000"/>
+                </a:solidFill>
+                <a:latin typeface="Calibri" pitchFamily="34" charset="0"/>
+                <a:ea typeface="Calibri" pitchFamily="34" charset="-122"/>
+                <a:cs typeface="Calibri" pitchFamily="34" charset="-120"/>
+              </a:rPr>
+              <a:t xml:space="preserve">Review-II — build it in silicon, not on an FPGA.</a:t>
+            </a:r>
+            <a:r>
+              <a:rPr lang="en-US" sz="1500" dirty="0">
+                <a:solidFill>
+                  <a:srgbClr val="000000"/>
+                </a:solidFill>
+                <a:latin typeface="Calibri" pitchFamily="34" charset="0"/>
+                <a:ea typeface="Calibri" pitchFamily="34" charset="-122"/>
+                <a:cs typeface="Calibri" pitchFamily="34" charset="-120"/>
+              </a:rPr>
+              <a:t xml:space="preserve"> A 200 MHz FPGA can only move the dead time in 5 ns steps. Light load wants 15 ns and everything else wants 5 ns, so the steps are too coarse exactly where the benefit is. Drawing the output stage transistor by transistor in SKY130 removes that limit.</a:t>
+            </a:r>
+          </a:p>
+          <a:p>
+            <a:pPr marL="520700" indent="-177800">
+              <a:spcAft>
+                <a:spcPts val="600"/>
+              </a:spcAft>
+              <a:buSzPct val="100000"/>
+              <a:buChar char="–"/>
+            </a:pPr>
+            <a:r>
+              <a:rPr lang="en-US" sz="1500" b="1" dirty="0">
+                <a:solidFill>
+                  <a:srgbClr val="000000"/>
+                </a:solidFill>
+                <a:latin typeface="Calibri" pitchFamily="34" charset="0"/>
+                <a:ea typeface="Calibri" pitchFamily="34" charset="-122"/>
+                <a:cs typeface="Calibri" pitchFamily="34" charset="-120"/>
+              </a:rPr>
+              <a:t xml:space="preserve">Review-III — measure one operating point on real hardware.</a:t>
+            </a:r>
+            <a:r>
+              <a:rPr lang="en-US" sz="1500" dirty="0">
+                <a:solidFill>
+                  <a:srgbClr val="000000"/>
+                </a:solidFill>
+                <a:latin typeface="Calibri" pitchFamily="34" charset="0"/>
+                <a:ea typeface="Calibri" pitchFamily="34" charset="-122"/>
+                <a:cs typeface="Calibri" pitchFamily="34" charset="-120"/>
+              </a:rPr>
+              <a:t xml:space="preserve"> Build the half-bridge and measure the off-gate voltage against the simulated 1.65 V. Until that exists this is a simulation study, and the title says so.</a:t>
+            </a:r>
+          </a:p>
+          <a:p>
+            <a:pPr marL="520700" indent="-177800">
+              <a:spcAft>
+                <a:spcPts val="600"/>
+              </a:spcAft>
+              <a:buSzPct val="100000"/>
+              <a:buChar char="–"/>
+            </a:pPr>
+            <a:r>
+              <a:rPr lang="en-US" sz="1500" b="1" dirty="0">
+                <a:solidFill>
+                  <a:srgbClr val="000000"/>
+                </a:solidFill>
+                <a:latin typeface="Calibri" pitchFamily="34" charset="0"/>
+                <a:ea typeface="Calibri" pitchFamily="34" charset="-122"/>
+                <a:cs typeface="Calibri" pitchFamily="34" charset="-120"/>
+              </a:rPr>
+              <a:t xml:space="preserve">The risk we already know.</a:t>
+            </a:r>
+            <a:r>
+              <a:rPr lang="en-US" sz="1500" dirty="0">
+                <a:solidFill>
+                  <a:srgbClr val="000000"/>
+                </a:solidFill>
+                <a:latin typeface="Calibri" pitchFamily="34" charset="0"/>
+                <a:ea typeface="Calibri" pitchFamily="34" charset="-122"/>
+                <a:cs typeface="Calibri" pitchFamily="34" charset="-120"/>
+              </a:rPr>
+              <a:t xml:space="preserve"> A 1.8 V / 3.3 V teaching PDK cannot take a 5 V gate supply. Getting a 5 V-capable PDK is the first milestone, and the one that can hold up the rest.</a:t>
+            </a:r>
+          </a:p>
+          <a:p>
+            <a:pPr marL="177800" indent="-177800">
+              <a:spcAft>
+                <a:spcPts val="600"/>
+              </a:spcAft>
+              <a:buSzPct val="100000"/>
+              <a:buChar char="•"/>
+            </a:pPr>
+            <a:r>
+              <a:rPr lang="en-US" sz="1600" b="1" dirty="0">
+                <a:solidFill>
+                  <a:srgbClr val="000000"/>
+                </a:solidFill>
+                <a:latin typeface="Calibri" pitchFamily="34" charset="0"/>
+                <a:ea typeface="Calibri" pitchFamily="34" charset="-122"/>
+                <a:cs typeface="Calibri" pitchFamily="34" charset="-120"/>
+              </a:rPr>
+              <a:t xml:space="preserve">Tools, and how to check any of it</a:t>
+            </a:r>
+          </a:p>
+          <a:p>
+            <a:pPr marL="520700" indent="-177800">
+              <a:spcAft>
+                <a:spcPts val="600"/>
+              </a:spcAft>
+              <a:buSzPct val="100000"/>
+              <a:buChar char="–"/>
+            </a:pPr>
+            <a:r>
+              <a:rPr lang="en-US" sz="1500" dirty="0">
+                <a:solidFill>
+                  <a:srgbClr val="000000"/>
+                </a:solidFill>
+                <a:latin typeface="Calibri" pitchFamily="34" charset="0"/>
+                <a:ea typeface="Calibri" pitchFamily="34" charset="-122"/>
+                <a:cs typeface="Calibri" pitchFamily="34" charset="-120"/>
+              </a:rPr>
+              <a:t xml:space="preserve">ngspice 42 · LTspice 24 · Icarus Verilog · Xilinx Vivado 2024.1.2 · Cadence · SKY130 · Python · MATLAB and Octave. Every number can be regenerated by a named script at </a:t>
+            </a:r>
+            <a:r>
+              <a:rPr lang="en-US" sz="1500" b="1" dirty="0">
+                <a:solidFill>
+                  <a:srgbClr val="000000"/>
+                </a:solidFill>
+                <a:latin typeface="Calibri" pitchFamily="34" charset="0"/>
+                <a:ea typeface="Calibri" pitchFamily="34" charset="-122"/>
+                <a:cs typeface="Calibri" pitchFamily="34" charset="-120"/>
+              </a:rPr>
+              <a:t xml:space="preserve">github.com/Amritha902/gan-driver</a:t>
+            </a:r>
+            <a:r>
+              <a:rPr lang="en-US" sz="1500" dirty="0">
+                <a:solidFill>
+                  <a:srgbClr val="000000"/>
+                </a:solidFill>
+                <a:latin typeface="Calibri" pitchFamily="34" charset="0"/>
+                <a:ea typeface="Calibri" pitchFamily="34" charset="-122"/>
+                <a:cs typeface="Calibri" pitchFamily="34" charset="-120"/>
+              </a:rPr>
+              <a:t xml:space="preserve">.</a:t>
             </a:r>
           </a:p>
         </p:txBody>
@@ -4433,7 +4818,7 @@
                 <a:ea typeface="Calibri" pitchFamily="34" charset="-122"/>
                 <a:cs typeface="Calibri" pitchFamily="34" charset="-120"/>
               </a:rPr>
-              <a:t>16</a:t>
+              <a:t>18</a:t>
             </a:r>
             <a:endParaRPr lang="en-US" sz="1000" dirty="0"/>
           </a:p>
@@ -4472,7 +4857,7 @@
                 <a:ea typeface="Calibri" pitchFamily="34" charset="-122"/>
                 <a:cs typeface="Calibri" pitchFamily="34" charset="-120"/>
               </a:rPr>
-              <a:t>Timeline, Milestones &amp; Tools</a:t>
+              <a:t>FPGA Controller — verified RTL</a:t>
             </a:r>
             <a:endParaRPr lang="en-US" sz="2800" dirty="0"/>
           </a:p>
@@ -4523,23 +4908,23 @@
           <a:bodyPr wrap="square" lIns="0" tIns="0" rIns="0" bIns="0" rtlCol="0" anchor="t"/>
           <a:lstStyle/>
           <a:p>
-            <a:pPr marL="177800" indent="-177800">
+            <a:pPr marL="520700" indent="-177800">
               <a:spcAft>
                 <a:spcPts val="600"/>
               </a:spcAft>
               <a:buSzPct val="100000"/>
-              <a:buChar char="•"/>
-            </a:pPr>
-            <a:r>
-              <a:rPr lang="en-US" sz="1600" b="1" dirty="0">
-                <a:solidFill>
-                  <a:srgbClr val="000000"/>
-                </a:solidFill>
-                <a:latin typeface="Calibri" pitchFamily="34" charset="0"/>
-                <a:ea typeface="Calibri" pitchFamily="34" charset="-122"/>
-                <a:cs typeface="Calibri" pitchFamily="34" charset="-120"/>
-              </a:rPr>
-              <a:t xml:space="preserve">Where we are</a:t>
+              <a:buChar char="–"/>
+            </a:pPr>
+            <a:r>
+              <a:rPr lang="en-US" sz="1500" dirty="0">
+                <a:solidFill>
+                  <a:srgbClr val="000000"/>
+                </a:solidFill>
+                <a:latin typeface="Calibri" pitchFamily="34" charset="0"/>
+                <a:ea typeface="Calibri" pitchFamily="34" charset="-122"/>
+                <a:cs typeface="Calibri" pitchFamily="34" charset="-120"/>
+              </a:rPr>
+              <a:t xml:space="preserve">Three Verilog modules that produce exactly the 720 settings the SPICE model uses.</a:t>
             </a:r>
           </a:p>
           <a:p>
@@ -4551,6 +4936,17 @@
               <a:buChar char="–"/>
             </a:pPr>
             <a:r>
+              <a:rPr lang="en-US" sz="1500" dirty="0">
+                <a:solidFill>
+                  <a:srgbClr val="000000"/>
+                </a:solidFill>
+                <a:latin typeface="Calibri" pitchFamily="34" charset="0"/>
+                <a:ea typeface="Calibri" pitchFamily="34" charset="-122"/>
+                <a:cs typeface="Calibri" pitchFamily="34" charset="-120"/>
+              </a:rPr>
+              <a:t xml:space="preserve">Dead time is a </a:t>
+            </a:r>
+            <a:r>
               <a:rPr lang="en-US" sz="1500" b="1" dirty="0">
                 <a:solidFill>
                   <a:srgbClr val="000000"/>
@@ -4559,7 +4955,7 @@
                 <a:ea typeface="Calibri" pitchFamily="34" charset="-122"/>
                 <a:cs typeface="Calibri" pitchFamily="34" charset="-120"/>
               </a:rPr>
-              <a:t xml:space="preserve">Review-I is done. </a:t>
+              <a:t xml:space="preserve">live register</a:t>
             </a:r>
             <a:r>
               <a:rPr lang="en-US" sz="1500" dirty="0">
@@ -4570,27 +4966,49 @@
                 <a:ea typeface="Calibri" pitchFamily="34" charset="-122"/>
                 <a:cs typeface="Calibri" pitchFamily="34" charset="-120"/>
               </a:rPr>
-              <a:t xml:space="preserve">The fault is reproduced and fixed, all 720 settings have been tested at every operating point, and the answer has been stress-tested against the device model, the board layout and EMI.</a:t>
-            </a:r>
-          </a:p>
-          <a:p>
-            <a:pPr marL="177800" indent="-177800">
+              <a:t xml:space="preserve">; drive strength is </a:t>
+            </a:r>
+            <a:r>
+              <a:rPr lang="en-US" sz="1500" b="1" dirty="0">
+                <a:solidFill>
+                  <a:srgbClr val="000000"/>
+                </a:solidFill>
+                <a:latin typeface="Calibri" pitchFamily="34" charset="0"/>
+                <a:ea typeface="Calibri" pitchFamily="34" charset="-122"/>
+                <a:cs typeface="Calibri" pitchFamily="34" charset="-120"/>
+              </a:rPr>
+              <a:t xml:space="preserve">fixed at power-up</a:t>
+            </a:r>
+            <a:r>
+              <a:rPr lang="en-US" sz="1500" dirty="0">
+                <a:solidFill>
+                  <a:srgbClr val="000000"/>
+                </a:solidFill>
+                <a:latin typeface="Calibri" pitchFamily="34" charset="0"/>
+                <a:ea typeface="Calibri" pitchFamily="34" charset="-122"/>
+                <a:cs typeface="Calibri" pitchFamily="34" charset="-120"/>
+              </a:rPr>
+              <a:t xml:space="preserve"> — worth 5.45 % against 0.00 %.</a:t>
+            </a:r>
+          </a:p>
+          <a:p>
+            <a:pPr marL="520700" indent="-177800">
               <a:spcAft>
                 <a:spcPts val="600"/>
               </a:spcAft>
               <a:buSzPct val="100000"/>
-              <a:buChar char="•"/>
-            </a:pPr>
-            <a:r>
-              <a:rPr lang="en-US" sz="1600" b="1" dirty="0">
-                <a:solidFill>
-                  <a:srgbClr val="000000"/>
-                </a:solidFill>
-                <a:latin typeface="Calibri" pitchFamily="34" charset="0"/>
-                <a:ea typeface="Calibri" pitchFamily="34" charset="-122"/>
-                <a:cs typeface="Calibri" pitchFamily="34" charset="-120"/>
-              </a:rPr>
-              <a:t xml:space="preserve">What we aim to do next</a:t>
+              <a:buChar char="–"/>
+            </a:pPr>
+            <a:r>
+              <a:rPr lang="en-US" sz="1500" dirty="0">
+                <a:solidFill>
+                  <a:srgbClr val="000000"/>
+                </a:solidFill>
+                <a:latin typeface="Calibri" pitchFamily="34" charset="0"/>
+                <a:ea typeface="Calibri" pitchFamily="34" charset="-122"/>
+                <a:cs typeface="Calibri" pitchFamily="34" charset="-120"/>
+              </a:rPr>
+              <a:t xml:space="preserve">Eight checks pass in Icarus Verilog, safe reset included. A deliberately broken version is caught 221 times (sh rtl/mutate.sh).</a:t>
             </a:r>
           </a:p>
           <a:p>
@@ -4610,7 +5028,7 @@
                 <a:ea typeface="Calibri" pitchFamily="34" charset="-122"/>
                 <a:cs typeface="Calibri" pitchFamily="34" charset="-120"/>
               </a:rPr>
-              <a:t xml:space="preserve">Review-II — build it in silicon, not on an FPGA.</a:t>
+              <a:t xml:space="preserve">Built in Vivado 2024.1.2</a:t>
             </a:r>
             <a:r>
               <a:rPr lang="en-US" sz="1500" dirty="0">
@@ -4621,7 +5039,51 @@
                 <a:ea typeface="Calibri" pitchFamily="34" charset="-122"/>
                 <a:cs typeface="Calibri" pitchFamily="34" charset="-120"/>
               </a:rPr>
-              <a:t xml:space="preserve"> A 200 MHz FPGA can only move the dead time in 5 ns steps. Light load wants 15 ns and everything else wants 5 ns, so the steps are too coarse exactly where the benefit is. Drawing the output stage transistor by transistor in SKY130 removes that limit.</a:t>
+              <a:t xml:space="preserve"> on an xc7a35t FPGA: </a:t>
+            </a:r>
+            <a:r>
+              <a:rPr lang="en-US" sz="1500" b="1" dirty="0">
+                <a:solidFill>
+                  <a:srgbClr val="000000"/>
+                </a:solidFill>
+                <a:latin typeface="Calibri" pitchFamily="34" charset="0"/>
+                <a:ea typeface="Calibri" pitchFamily="34" charset="-122"/>
+                <a:cs typeface="Calibri" pitchFamily="34" charset="-120"/>
+              </a:rPr>
+              <a:t xml:space="preserve">20 LUTs, 20 flip-flops</a:t>
+            </a:r>
+            <a:r>
+              <a:rPr lang="en-US" sz="1500" dirty="0">
+                <a:solidFill>
+                  <a:srgbClr val="000000"/>
+                </a:solidFill>
+                <a:latin typeface="Calibri" pitchFamily="34" charset="0"/>
+                <a:ea typeface="Calibri" pitchFamily="34" charset="-122"/>
+                <a:cs typeface="Calibri" pitchFamily="34" charset="-120"/>
+              </a:rPr>
+              <a:t xml:space="preserve"> — 0.10 % of the chip. 200 MHz timing is </a:t>
+            </a:r>
+            <a:r>
+              <a:rPr lang="en-US" sz="1500" b="1" dirty="0">
+                <a:solidFill>
+                  <a:srgbClr val="000000"/>
+                </a:solidFill>
+                <a:latin typeface="Calibri" pitchFamily="34" charset="0"/>
+                <a:ea typeface="Calibri" pitchFamily="34" charset="-122"/>
+                <a:cs typeface="Calibri" pitchFamily="34" charset="-120"/>
+              </a:rPr>
+              <a:t xml:space="preserve">met, with 1.996 ns to spare</a:t>
+            </a:r>
+            <a:r>
+              <a:rPr lang="en-US" sz="1500" dirty="0">
+                <a:solidFill>
+                  <a:srgbClr val="000000"/>
+                </a:solidFill>
+                <a:latin typeface="Calibri" pitchFamily="34" charset="0"/>
+                <a:ea typeface="Calibri" pitchFamily="34" charset="-122"/>
+                <a:cs typeface="Calibri" pitchFamily="34" charset="-120"/>
+              </a:rPr>
+              <a:t xml:space="preserve">.</a:t>
             </a:r>
           </a:p>
           <a:p>
@@ -4633,17 +5095,6 @@
               <a:buChar char="–"/>
             </a:pPr>
             <a:r>
-              <a:rPr lang="en-US" sz="1500" b="1" dirty="0">
-                <a:solidFill>
-                  <a:srgbClr val="000000"/>
-                </a:solidFill>
-                <a:latin typeface="Calibri" pitchFamily="34" charset="0"/>
-                <a:ea typeface="Calibri" pitchFamily="34" charset="-122"/>
-                <a:cs typeface="Calibri" pitchFamily="34" charset="-120"/>
-              </a:rPr>
-              <a:t xml:space="preserve">Review-III — measure one operating point on real hardware.</a:t>
-            </a:r>
-            <a:r>
               <a:rPr lang="en-US" sz="1500" dirty="0">
                 <a:solidFill>
                   <a:srgbClr val="000000"/>
@@ -4652,100 +5103,350 @@
                 <a:ea typeface="Calibri" pitchFamily="34" charset="-122"/>
                 <a:cs typeface="Calibri" pitchFamily="34" charset="-120"/>
               </a:rPr>
-              <a:t xml:space="preserve"> Build the half-bridge and measure the off-gate voltage against the simulated 1.65 V. Until that exists this is a simulation study, and the title says so.</a:t>
-            </a:r>
-          </a:p>
-          <a:p>
-            <a:pPr marL="520700" indent="-177800">
-              <a:spcAft>
-                <a:spcPts val="600"/>
-              </a:spcAft>
-              <a:buSzPct val="100000"/>
-              <a:buChar char="–"/>
-            </a:pPr>
-            <a:r>
-              <a:rPr lang="en-US" sz="1500" b="1" dirty="0">
-                <a:solidFill>
-                  <a:srgbClr val="000000"/>
-                </a:solidFill>
-                <a:latin typeface="Calibri" pitchFamily="34" charset="0"/>
-                <a:ea typeface="Calibri" pitchFamily="34" charset="-122"/>
-                <a:cs typeface="Calibri" pitchFamily="34" charset="-120"/>
-              </a:rPr>
-              <a:t xml:space="preserve">The risk we already know.</a:t>
-            </a:r>
-            <a:r>
-              <a:rPr lang="en-US" sz="1500" dirty="0">
-                <a:solidFill>
-                  <a:srgbClr val="000000"/>
-                </a:solidFill>
-                <a:latin typeface="Calibri" pitchFamily="34" charset="0"/>
-                <a:ea typeface="Calibri" pitchFamily="34" charset="-122"/>
-                <a:cs typeface="Calibri" pitchFamily="34" charset="-120"/>
-              </a:rPr>
-              <a:t xml:space="preserve"> A 1.8 V / 3.3 V teaching PDK cannot take a 5 V gate supply. Getting a 5 V-capable PDK is the first milestone, and the one that can hold up the rest.</a:t>
-            </a:r>
-          </a:p>
-          <a:p>
-            <a:pPr marL="177800" indent="-177800">
-              <a:spcAft>
-                <a:spcPts val="600"/>
-              </a:spcAft>
-              <a:buSzPct val="100000"/>
-              <a:buChar char="•"/>
-            </a:pPr>
-            <a:r>
-              <a:rPr lang="en-US" sz="1600" b="1" dirty="0">
-                <a:solidFill>
-                  <a:srgbClr val="000000"/>
-                </a:solidFill>
-                <a:latin typeface="Calibri" pitchFamily="34" charset="0"/>
-                <a:ea typeface="Calibri" pitchFamily="34" charset="-122"/>
-                <a:cs typeface="Calibri" pitchFamily="34" charset="-120"/>
-              </a:rPr>
-              <a:t xml:space="preserve">Tools, and how to check any of it</a:t>
-            </a:r>
-          </a:p>
-          <a:p>
-            <a:pPr marL="520700" indent="-177800">
-              <a:spcAft>
-                <a:spcPts val="600"/>
-              </a:spcAft>
-              <a:buSzPct val="100000"/>
-              <a:buChar char="–"/>
-            </a:pPr>
-            <a:r>
-              <a:rPr lang="en-US" sz="1500" dirty="0">
-                <a:solidFill>
-                  <a:srgbClr val="000000"/>
-                </a:solidFill>
-                <a:latin typeface="Calibri" pitchFamily="34" charset="0"/>
-                <a:ea typeface="Calibri" pitchFamily="34" charset="-122"/>
-                <a:cs typeface="Calibri" pitchFamily="34" charset="-120"/>
-              </a:rPr>
-              <a:t xml:space="preserve">ngspice 42 · LTspice 24 · Icarus Verilog · Xilinx Vivado 2024.1.2 · Cadence · SKY130 · Python · MATLAB and Octave. Every number can be regenerated by a named script at </a:t>
-            </a:r>
-            <a:r>
-              <a:rPr lang="en-US" sz="1500" b="1" dirty="0">
-                <a:solidFill>
-                  <a:srgbClr val="000000"/>
-                </a:solidFill>
-                <a:latin typeface="Calibri" pitchFamily="34" charset="0"/>
-                <a:ea typeface="Calibri" pitchFamily="34" charset="-122"/>
-                <a:cs typeface="Calibri" pitchFamily="34" charset="-120"/>
-              </a:rPr>
-              <a:t xml:space="preserve">github.com/Amritha902/gan-driver</a:t>
-            </a:r>
-            <a:r>
-              <a:rPr lang="en-US" sz="1500" dirty="0">
-                <a:solidFill>
-                  <a:srgbClr val="000000"/>
-                </a:solidFill>
-                <a:latin typeface="Calibri" pitchFamily="34" charset="0"/>
-                <a:ea typeface="Calibri" pitchFamily="34" charset="-122"/>
-                <a:cs typeface="Calibri" pitchFamily="34" charset="-120"/>
-              </a:rPr>
-              <a:t xml:space="preserve">.</a:t>
+              <a:t xml:space="preserve">The 34 failing paths are all chip-output paths against a placeholder 4 ns constraint — the output buffer alone takes 3.49 ns.</a:t>
+            </a:r>
+          </a:p>
+        </p:txBody>
+      </p:sp>
+      <p:pic>
+        <p:nvPicPr>
+          <p:cNvPr id="6" name="Picture 5" descr="fig_rtl_waveform.png"/>
+          <p:cNvPicPr>
+            <a:picLocks noChangeAspect="1"/>
+          </p:cNvPicPr>
+          <p:nvPr/>
+        </p:nvPicPr>
+        <p:blipFill>
+          <a:blip r:embed="rId4"/>
+          <a:stretch>
+            <a:fillRect/>
+          </a:stretch>
+        </p:blipFill>
+        <p:spPr>
+          <a:xfrm>
+            <a:off x="2743200" y="3703320"/>
+            <a:ext cx="6675120" cy="2422423"/>
+          </a:xfrm>
+          <a:prstGeom prst="rect">
+            <a:avLst/>
+          </a:prstGeom>
+        </p:spPr>
+      </p:pic>
+      <p:sp>
+        <p:nvSpPr>
+          <p:cNvPr id="7" name="TextBox 6"/>
+          <p:cNvSpPr txBox="1"/>
+          <p:nvPr/>
+        </p:nvSpPr>
+        <p:spPr>
+          <a:xfrm>
+            <a:off x="2743200" y="6217920"/>
+            <a:ext cx="6675120" cy="310896"/>
+          </a:xfrm>
+          <a:prstGeom prst="rect">
+            <a:avLst/>
+          </a:prstGeom>
+          <a:noFill/>
+        </p:spPr>
+        <p:txBody>
+          <a:bodyPr wrap="square" lIns="0" tIns="0" rIns="0" bIns="0">
+            <a:spAutoFit/>
+          </a:bodyPr>
+          <a:lstStyle/>
+          <a:p>
+            <a:pPr marL="177800" indent="0">
+              <a:spcAft>
+                <a:spcPts val="0"/>
+              </a:spcAft>
+              <a:buSzPct val="100000"/>
+              <a:buNone/>
+            </a:pPr>
+            <a:r>
+              <a:rPr lang="en-US" sz="1000" dirty="0">
+                <a:solidFill>
+                  <a:srgbClr val="000000"/>
+                </a:solidFill>
+                <a:latin typeface="Calibri" pitchFamily="34" charset="0"/>
+                <a:ea typeface="Calibri" pitchFamily="34" charset="-122"/>
+                <a:cs typeface="Calibri" pitchFamily="34" charset="-120"/>
+              </a:rPr>
+              <a:t xml:space="preserve">Icarus Verilog VCD. ls_pu falls to 0 before hs_pu rises — the shaded dead time is the gap, and no shoot-through window exists.</a:t>
+            </a:r>
+          </a:p>
+        </p:txBody>
+      </p:sp>
+    </p:spTree>
+  </p:cSld>
+  <p:clrMapOvr>
+    <a:masterClrMapping/>
+  </p:clrMapOvr>
+</p:sld>
+</file>
+
+<file path=ppt/slides/slide18.xml><?xml version="1.0" encoding="utf-8"?>
+<p:sld xmlns:a="http://schemas.openxmlformats.org/drawingml/2006/main" xmlns:p="http://schemas.openxmlformats.org/presentationml/2006/main" xmlns:r="http://schemas.openxmlformats.org/officeDocument/2006/relationships">
+  <p:cSld>
+    <p:spTree>
+      <p:nvGrpSpPr>
+        <p:cNvPr id="1" name=""/>
+        <p:cNvGrpSpPr/>
+        <p:nvPr/>
+      </p:nvGrpSpPr>
+      <p:grpSpPr/>
+      <p:sp>
+        <p:nvSpPr>
+          <p:cNvPr id="2" name="Text 0"/>
+          <p:cNvSpPr txBox="1"/>
+          <p:nvPr/>
+        </p:nvSpPr>
+        <p:spPr>
+          <a:xfrm>
+            <a:off x="11460175" y="6446520"/>
+            <a:ext cx="457200" cy="274320"/>
+          </a:xfrm>
+          <a:prstGeom prst="rect">
+            <a:avLst/>
+          </a:prstGeom>
+          <a:noFill/>
+          <a:ln/>
+        </p:spPr>
+        <p:txBody>
+          <a:bodyPr wrap="square" lIns="0" tIns="0" rIns="0" bIns="0" rtlCol="0" anchor="ctr"/>
+          <a:lstStyle/>
+          <a:p>
+            <a:pPr marL="0" indent="0" algn="r">
+              <a:buNone/>
+            </a:pPr>
+            <a:r>
+              <a:rPr lang="en-US" sz="1000" dirty="0">
+                <a:solidFill>
+                  <a:srgbClr val="808080"/>
+                </a:solidFill>
+                <a:latin typeface="Calibri" pitchFamily="34" charset="0"/>
+                <a:ea typeface="Calibri" pitchFamily="34" charset="-122"/>
+                <a:cs typeface="Calibri" pitchFamily="34" charset="-120"/>
+              </a:rPr>
+              <a:t>19</a:t>
+            </a:r>
+            <a:endParaRPr lang="en-US" sz="1000" dirty="0"/>
+          </a:p>
+        </p:txBody>
+      </p:sp>
+      <p:sp>
+        <p:nvSpPr>
+          <p:cNvPr id="3" name="Text 1"/>
+          <p:cNvSpPr txBox="1"/>
+          <p:nvPr/>
+        </p:nvSpPr>
+        <p:spPr>
+          <a:xfrm>
+            <a:off x="548640" y="320040"/>
+            <a:ext cx="9601200" cy="685800"/>
+          </a:xfrm>
+          <a:prstGeom prst="rect">
+            <a:avLst/>
+          </a:prstGeom>
+          <a:noFill/>
+          <a:ln/>
+        </p:spPr>
+        <p:txBody>
+          <a:bodyPr wrap="square" lIns="0" tIns="0" rIns="0" bIns="0" rtlCol="0" anchor="ctr"/>
+          <a:lstStyle/>
+          <a:p>
+            <a:pPr marL="0" indent="0">
+              <a:buNone/>
+            </a:pPr>
+            <a:r>
+              <a:rPr lang="en-US" sz="2800" b="1" dirty="0">
+                <a:solidFill>
+                  <a:srgbClr val="1D2F82"/>
+                </a:solidFill>
+                <a:latin typeface="Calibri" pitchFamily="34" charset="0"/>
+                <a:ea typeface="Calibri" pitchFamily="34" charset="-122"/>
+                <a:cs typeface="Calibri" pitchFamily="34" charset="-120"/>
+              </a:rPr>
+              <a:t>Vivado — simulation and synthesis, on screen</a:t>
+            </a:r>
+            <a:endParaRPr lang="en-US" sz="2800" dirty="0"/>
+          </a:p>
+        </p:txBody>
+      </p:sp>
+      <p:pic>
+        <p:nvPicPr>
+          <p:cNvPr id="4" name="Image 0" descr="logo.png"/>
+          <p:cNvPicPr>
+            <a:picLocks noChangeAspect="1"/>
+          </p:cNvPicPr>
+          <p:nvPr/>
+        </p:nvPicPr>
+        <p:blipFill>
+          <a:blip r:embed="rId2"/>
+          <a:stretch>
+            <a:fillRect/>
+          </a:stretch>
+        </p:blipFill>
+        <p:spPr>
+          <a:xfrm>
+            <a:off x="10362895" y="320040"/>
+            <a:ext cx="1371600" cy="518746"/>
+          </a:xfrm>
+          <a:prstGeom prst="rect">
+            <a:avLst/>
+          </a:prstGeom>
+        </p:spPr>
+      </p:pic>
+      <p:pic>
+        <p:nvPicPr>
+          <p:cNvPr id="5" name="Picture 4" descr="vivado_simulation.png"/>
+          <p:cNvPicPr>
+            <a:picLocks noChangeAspect="1"/>
+          </p:cNvPicPr>
+          <p:nvPr/>
+        </p:nvPicPr>
+        <p:blipFill>
+          <a:blip r:embed="rId5"/>
+          <a:stretch>
+            <a:fillRect/>
+          </a:stretch>
+        </p:blipFill>
+        <p:spPr>
+          <a:xfrm>
+            <a:off x="502920" y="1417320"/>
+            <a:ext cx="5532120" cy="3111818"/>
+          </a:xfrm>
+          <a:prstGeom prst="rect">
+            <a:avLst/>
+          </a:prstGeom>
+        </p:spPr>
+      </p:pic>
+      <p:pic>
+        <p:nvPicPr>
+          <p:cNvPr id="6" name="Picture 5" descr="vivado_console.png"/>
+          <p:cNvPicPr>
+            <a:picLocks noChangeAspect="1"/>
+          </p:cNvPicPr>
+          <p:nvPr/>
+        </p:nvPicPr>
+        <p:blipFill>
+          <a:blip r:embed="rId6"/>
+          <a:stretch>
+            <a:fillRect/>
+          </a:stretch>
+        </p:blipFill>
+        <p:spPr>
+          <a:xfrm>
+            <a:off x="6263640" y="1417320"/>
+            <a:ext cx="5532120" cy="3111818"/>
+          </a:xfrm>
+          <a:prstGeom prst="rect">
+            <a:avLst/>
+          </a:prstGeom>
+        </p:spPr>
+      </p:pic>
+      <p:sp>
+        <p:nvSpPr>
+          <p:cNvPr id="7" name="TextBox 6"/>
+          <p:cNvSpPr txBox="1"/>
+          <p:nvPr/>
+        </p:nvSpPr>
+        <p:spPr>
+          <a:xfrm>
+            <a:off x="502920" y="4709160"/>
+            <a:ext cx="5532120" cy="731520"/>
+          </a:xfrm>
+          <a:prstGeom prst="rect">
+            <a:avLst/>
+          </a:prstGeom>
+          <a:noFill/>
+        </p:spPr>
+        <p:txBody>
+          <a:bodyPr wrap="square" lIns="0" tIns="0" rIns="0" bIns="0">
+            <a:spAutoFit/>
+          </a:bodyPr>
+          <a:lstStyle/>
+          <a:p>
+            <a:pPr marL="177800" indent="0">
+              <a:spcAft>
+                <a:spcPts val="0"/>
+              </a:spcAft>
+              <a:buSzPct val="100000"/>
+              <a:buNone/>
+            </a:pPr>
+            <a:r>
+              <a:rPr lang="en-US" sz="1150" b="1" dirty="0">
+                <a:solidFill>
+                  <a:srgbClr val="000000"/>
+                </a:solidFill>
+                <a:latin typeface="Calibri" pitchFamily="34" charset="0"/>
+                <a:ea typeface="Calibri" pitchFamily="34" charset="-122"/>
+                <a:cs typeface="Calibri" pitchFamily="34" charset="-120"/>
+              </a:rPr>
+              <a:t xml:space="preserve">Behavioural simulation. </a:t>
+            </a:r>
+            <a:r>
+              <a:rPr lang="en-US" sz="1150" dirty="0">
+                <a:solidFill>
+                  <a:srgbClr val="000000"/>
+                </a:solidFill>
+                <a:latin typeface="Calibri" pitchFamily="34" charset="0"/>
+                <a:ea typeface="Calibri" pitchFamily="34" charset="-122"/>
+                <a:cs typeface="Calibri" pitchFamily="34" charset="-120"/>
+              </a:rPr>
+              <a:t xml:space="preserve">fails[31:0] = 0 — every asserted property holds in Vivado's own simulator, a third tool after Icarus and the mutation test.</a:t>
+            </a:r>
+          </a:p>
+        </p:txBody>
+      </p:sp>
+      <p:sp>
+        <p:nvSpPr>
+          <p:cNvPr id="8" name="TextBox 7"/>
+          <p:cNvSpPr txBox="1"/>
+          <p:nvPr/>
+        </p:nvSpPr>
+        <p:spPr>
+          <a:xfrm>
+            <a:off x="6263640" y="4709160"/>
+            <a:ext cx="5532120" cy="731520"/>
+          </a:xfrm>
+          <a:prstGeom prst="rect">
+            <a:avLst/>
+          </a:prstGeom>
+          <a:noFill/>
+        </p:spPr>
+        <p:txBody>
+          <a:bodyPr wrap="square" lIns="0" tIns="0" rIns="0" bIns="0">
+            <a:spAutoFit/>
+          </a:bodyPr>
+          <a:lstStyle/>
+          <a:p>
+            <a:pPr marL="177800" indent="0">
+              <a:spcAft>
+                <a:spcPts val="0"/>
+              </a:spcAft>
+              <a:buSzPct val="100000"/>
+              <a:buNone/>
+            </a:pPr>
+            <a:r>
+              <a:rPr lang="en-US" sz="1150" b="1" dirty="0">
+                <a:solidFill>
+                  <a:srgbClr val="000000"/>
+                </a:solidFill>
+                <a:latin typeface="Calibri" pitchFamily="34" charset="0"/>
+                <a:ea typeface="Calibri" pitchFamily="34" charset="-122"/>
+                <a:cs typeface="Calibri" pitchFamily="34" charset="-120"/>
+              </a:rPr>
+              <a:t xml:space="preserve">Synthesis console. </a:t>
+            </a:r>
+            <a:r>
+              <a:rPr lang="en-US" sz="1150" dirty="0">
+                <a:solidFill>
+                  <a:srgbClr val="000000"/>
+                </a:solidFill>
+                <a:latin typeface="Calibri" pitchFamily="34" charset="0"/>
+                <a:ea typeface="Calibri" pitchFamily="34" charset="-122"/>
+                <a:cs typeface="Calibri" pitchFamily="34" charset="-120"/>
+              </a:rPr>
+              <a:t xml:space="preserve">33 LUTs programmable against 20 strapped — the cost of programmability, printed by the tool.</a:t>
             </a:r>
           </a:p>
         </p:txBody>
@@ -4759,416 +5460,155 @@
 </file>
 
 <file path=ppt/slides/slide19.xml><?xml version="1.0" encoding="utf-8"?>
-<p:sld xmlns:a="http://schemas.openxmlformats.org/drawingml/2006/main" xmlns:r="http://schemas.openxmlformats.org/officeDocument/2006/relationships" xmlns:p="http://schemas.openxmlformats.org/presentationml/2006/main">
-  <p:cSld name="Slide 4">
-    <p:bg>
-      <p:bgPr>
-        <a:solidFill>
-          <a:srgbClr val="FFFFFF"/>
-        </a:solidFill>
-        <a:effectLst/>
-      </p:bgPr>
-    </p:bg>
+<p:sld xmlns:a="http://schemas.openxmlformats.org/drawingml/2006/main" xmlns:p="http://schemas.openxmlformats.org/presentationml/2006/main" xmlns:r="http://schemas.openxmlformats.org/officeDocument/2006/relationships">
+  <p:cSld>
     <p:spTree>
       <p:nvGrpSpPr>
         <p:cNvPr id="1" name=""/>
         <p:cNvGrpSpPr/>
         <p:nvPr/>
       </p:nvGrpSpPr>
-      <p:grpSpPr>
-        <a:xfrm>
-          <a:off x="0" y="0"/>
-          <a:ext cx="0" cy="0"/>
-          <a:chOff x="0" y="0"/>
-          <a:chExt cx="0" cy="0"/>
-        </a:xfrm>
-      </p:grpSpPr>
-      <p:sp>
-        <p:nvSpPr>
-          <p:cNvPr id="2" name="Text 0"/>
+      <p:grpSpPr/>
+      <p:sp>
+        <p:nvSpPr>
+          <p:cNvPr id="2" name="Rectangle 1"/>
+          <p:cNvSpPr/>
+          <p:nvPr/>
+        </p:nvSpPr>
+        <p:spPr>
+          <a:xfrm>
+            <a:off x="0" y="0"/>
+            <a:ext cx="12191695" cy="6858000"/>
+          </a:xfrm>
+          <a:prstGeom prst="rect">
+            <a:avLst/>
+          </a:prstGeom>
+          <a:solidFill>
+            <a:srgbClr val="14233D"/>
+          </a:solidFill>
+          <a:ln>
+            <a:noFill/>
+          </a:ln>
+          <a:effectLst/>
+        </p:spPr>
+        <p:style>
+          <a:lnRef idx="1">
+            <a:schemeClr val="accent1"/>
+          </a:lnRef>
+          <a:fillRef idx="3">
+            <a:schemeClr val="accent1"/>
+          </a:fillRef>
+          <a:effectRef idx="2">
+            <a:schemeClr val="accent1"/>
+          </a:effectRef>
+          <a:fontRef idx="minor">
+            <a:schemeClr val="lt1"/>
+          </a:fontRef>
+        </p:style>
+        <p:txBody>
+          <a:bodyPr rtlCol="0" anchor="ctr"/>
+          <a:lstStyle/>
+          <a:p/>
+        </p:txBody>
+      </p:sp>
+      <p:sp>
+        <p:nvSpPr>
+          <p:cNvPr id="3" name="TextBox 2"/>
           <p:cNvSpPr txBox="1"/>
           <p:nvPr/>
         </p:nvSpPr>
         <p:spPr>
           <a:xfrm>
-            <a:off x="11460175" y="6446520"/>
-            <a:ext cx="457200" cy="274320"/>
+            <a:off x="1188720" y="1874519"/>
+            <a:ext cx="2743200" cy="1143000"/>
           </a:xfrm>
           <a:prstGeom prst="rect">
             <a:avLst/>
           </a:prstGeom>
           <a:noFill/>
-          <a:ln/>
-        </p:spPr>
-        <p:txBody>
-          <a:bodyPr wrap="square" lIns="0" tIns="0" rIns="0" bIns="0" rtlCol="0" anchor="ctr"/>
-          <a:lstStyle/>
-          <a:p>
-            <a:pPr marL="0" indent="0" algn="r">
-              <a:buNone/>
-            </a:pPr>
-            <a:r>
-              <a:rPr lang="en-US" sz="1000" dirty="0">
-                <a:solidFill>
-                  <a:srgbClr val="808080"/>
-                </a:solidFill>
-                <a:latin typeface="Calibri" pitchFamily="34" charset="0"/>
-                <a:ea typeface="Calibri" pitchFamily="34" charset="-122"/>
-                <a:cs typeface="Calibri" pitchFamily="34" charset="-120"/>
-              </a:rPr>
-              <a:t>17</a:t>
-            </a:r>
-            <a:endParaRPr lang="en-US" sz="1000" dirty="0"/>
-          </a:p>
-        </p:txBody>
-      </p:sp>
-      <p:sp>
-        <p:nvSpPr>
-          <p:cNvPr id="3" name="Text 1"/>
-          <p:cNvSpPr txBox="1"/>
-          <p:nvPr/>
-        </p:nvSpPr>
-        <p:spPr>
-          <a:xfrm>
-            <a:off x="548640" y="320040"/>
-            <a:ext cx="9601200" cy="685800"/>
-          </a:xfrm>
-          <a:prstGeom prst="rect">
-            <a:avLst/>
-          </a:prstGeom>
-          <a:noFill/>
-          <a:ln/>
-        </p:spPr>
-        <p:txBody>
-          <a:bodyPr wrap="square" lIns="0" tIns="0" rIns="0" bIns="0" rtlCol="0" anchor="ctr"/>
-          <a:lstStyle/>
-          <a:p>
-            <a:pPr marL="0" indent="0">
-              <a:buNone/>
-            </a:pPr>
-            <a:r>
-              <a:rPr lang="en-US" sz="2800" b="1" dirty="0">
-                <a:solidFill>
-                  <a:srgbClr val="1D2F82"/>
-                </a:solidFill>
-                <a:latin typeface="Calibri" pitchFamily="34" charset="0"/>
-                <a:ea typeface="Calibri" pitchFamily="34" charset="-122"/>
-                <a:cs typeface="Calibri" pitchFamily="34" charset="-120"/>
-              </a:rPr>
-              <a:t>FPGA Controller — verified RTL</a:t>
-            </a:r>
-            <a:endParaRPr lang="en-US" sz="2800" dirty="0"/>
-          </a:p>
-        </p:txBody>
-      </p:sp>
-      <p:pic>
-        <p:nvPicPr>
-          <p:cNvPr id="4" name="Image 0" descr="logo.png"/>
-          <p:cNvPicPr>
-            <a:picLocks noChangeAspect="1"/>
-          </p:cNvPicPr>
-          <p:nvPr/>
-        </p:nvPicPr>
-        <p:blipFill>
-          <a:blip r:embed="rId3"/>
-          <a:stretch>
-            <a:fillRect/>
-          </a:stretch>
-        </p:blipFill>
-        <p:spPr>
-          <a:xfrm>
-            <a:off x="10362895" y="320040"/>
-            <a:ext cx="1371600" cy="518746"/>
-          </a:xfrm>
-          <a:prstGeom prst="rect">
-            <a:avLst/>
-          </a:prstGeom>
-        </p:spPr>
-      </p:pic>
-      <p:sp>
-        <p:nvSpPr>
-          <p:cNvPr id="5" name="Text 2"/>
-          <p:cNvSpPr txBox="1"/>
-          <p:nvPr/>
-        </p:nvSpPr>
-        <p:spPr>
-          <a:xfrm>
-            <a:off x="640080" y="1325880"/>
-            <a:ext cx="10881360" cy="4937760"/>
-          </a:xfrm>
-          <a:prstGeom prst="rect">
-            <a:avLst/>
-          </a:prstGeom>
-          <a:noFill/>
-          <a:ln/>
-        </p:spPr>
-        <p:txBody>
-          <a:bodyPr wrap="square" lIns="0" tIns="0" rIns="0" bIns="0" rtlCol="0" anchor="t"/>
-          <a:lstStyle/>
-          <a:p>
-            <a:pPr marL="520700" indent="-177800">
-              <a:spcAft>
-                <a:spcPts val="600"/>
-              </a:spcAft>
-              <a:buSzPct val="100000"/>
-              <a:buChar char="–"/>
-            </a:pPr>
-            <a:r>
-              <a:rPr lang="en-US" sz="1500" dirty="0">
-                <a:solidFill>
-                  <a:srgbClr val="000000"/>
-                </a:solidFill>
-                <a:latin typeface="Calibri" pitchFamily="34" charset="0"/>
-                <a:ea typeface="Calibri" pitchFamily="34" charset="-122"/>
-                <a:cs typeface="Calibri" pitchFamily="34" charset="-120"/>
-              </a:rPr>
-              <a:t xml:space="preserve">Three Verilog modules that produce exactly the 720 settings the SPICE model uses.</a:t>
-            </a:r>
-          </a:p>
-          <a:p>
-            <a:pPr marL="520700" indent="-177800">
-              <a:spcAft>
-                <a:spcPts val="600"/>
-              </a:spcAft>
-              <a:buSzPct val="100000"/>
-              <a:buChar char="–"/>
-            </a:pPr>
-            <a:r>
-              <a:rPr lang="en-US" sz="1500" dirty="0">
-                <a:solidFill>
-                  <a:srgbClr val="000000"/>
-                </a:solidFill>
-                <a:latin typeface="Calibri" pitchFamily="34" charset="0"/>
-                <a:ea typeface="Calibri" pitchFamily="34" charset="-122"/>
-                <a:cs typeface="Calibri" pitchFamily="34" charset="-120"/>
-              </a:rPr>
-              <a:t xml:space="preserve">Dead time is a </a:t>
-            </a:r>
-            <a:r>
-              <a:rPr lang="en-US" sz="1500" b="1" dirty="0">
-                <a:solidFill>
-                  <a:srgbClr val="000000"/>
-                </a:solidFill>
-                <a:latin typeface="Calibri" pitchFamily="34" charset="0"/>
-                <a:ea typeface="Calibri" pitchFamily="34" charset="-122"/>
-                <a:cs typeface="Calibri" pitchFamily="34" charset="-120"/>
-              </a:rPr>
-              <a:t xml:space="preserve">live register</a:t>
-            </a:r>
-            <a:r>
-              <a:rPr lang="en-US" sz="1500" dirty="0">
-                <a:solidFill>
-                  <a:srgbClr val="000000"/>
-                </a:solidFill>
-                <a:latin typeface="Calibri" pitchFamily="34" charset="0"/>
-                <a:ea typeface="Calibri" pitchFamily="34" charset="-122"/>
-                <a:cs typeface="Calibri" pitchFamily="34" charset="-120"/>
-              </a:rPr>
-              <a:t xml:space="preserve">; drive strength is </a:t>
-            </a:r>
-            <a:r>
-              <a:rPr lang="en-US" sz="1500" b="1" dirty="0">
-                <a:solidFill>
-                  <a:srgbClr val="000000"/>
-                </a:solidFill>
-                <a:latin typeface="Calibri" pitchFamily="34" charset="0"/>
-                <a:ea typeface="Calibri" pitchFamily="34" charset="-122"/>
-                <a:cs typeface="Calibri" pitchFamily="34" charset="-120"/>
-              </a:rPr>
-              <a:t xml:space="preserve">fixed at power-up</a:t>
-            </a:r>
-            <a:r>
-              <a:rPr lang="en-US" sz="1500" dirty="0">
-                <a:solidFill>
-                  <a:srgbClr val="000000"/>
-                </a:solidFill>
-                <a:latin typeface="Calibri" pitchFamily="34" charset="0"/>
-                <a:ea typeface="Calibri" pitchFamily="34" charset="-122"/>
-                <a:cs typeface="Calibri" pitchFamily="34" charset="-120"/>
-              </a:rPr>
-              <a:t xml:space="preserve"> — worth 5.45 % against 0.00 %.</a:t>
-            </a:r>
-          </a:p>
-          <a:p>
-            <a:pPr marL="520700" indent="-177800">
-              <a:spcAft>
-                <a:spcPts val="600"/>
-              </a:spcAft>
-              <a:buSzPct val="100000"/>
-              <a:buChar char="–"/>
-            </a:pPr>
-            <a:r>
-              <a:rPr lang="en-US" sz="1500" dirty="0">
-                <a:solidFill>
-                  <a:srgbClr val="000000"/>
-                </a:solidFill>
-                <a:latin typeface="Calibri" pitchFamily="34" charset="0"/>
-                <a:ea typeface="Calibri" pitchFamily="34" charset="-122"/>
-                <a:cs typeface="Calibri" pitchFamily="34" charset="-120"/>
-              </a:rPr>
-              <a:t xml:space="preserve">Eight checks pass in Icarus Verilog, safe reset included. A deliberately broken version is caught 221 times (sh rtl/mutate.sh).</a:t>
-            </a:r>
-          </a:p>
-          <a:p>
-            <a:pPr marL="520700" indent="-177800">
-              <a:spcAft>
-                <a:spcPts val="600"/>
-              </a:spcAft>
-              <a:buSzPct val="100000"/>
-              <a:buChar char="–"/>
-            </a:pPr>
-            <a:r>
-              <a:rPr lang="en-US" sz="1500" b="1" dirty="0">
-                <a:solidFill>
-                  <a:srgbClr val="000000"/>
-                </a:solidFill>
-                <a:latin typeface="Calibri" pitchFamily="34" charset="0"/>
-                <a:ea typeface="Calibri" pitchFamily="34" charset="-122"/>
-                <a:cs typeface="Calibri" pitchFamily="34" charset="-120"/>
-              </a:rPr>
-              <a:t xml:space="preserve">Built in Vivado 2024.1.2</a:t>
-            </a:r>
-            <a:r>
-              <a:rPr lang="en-US" sz="1500" dirty="0">
-                <a:solidFill>
-                  <a:srgbClr val="000000"/>
-                </a:solidFill>
-                <a:latin typeface="Calibri" pitchFamily="34" charset="0"/>
-                <a:ea typeface="Calibri" pitchFamily="34" charset="-122"/>
-                <a:cs typeface="Calibri" pitchFamily="34" charset="-120"/>
-              </a:rPr>
-              <a:t xml:space="preserve"> on an xc7a35t FPGA: </a:t>
-            </a:r>
-            <a:r>
-              <a:rPr lang="en-US" sz="1500" b="1" dirty="0">
-                <a:solidFill>
-                  <a:srgbClr val="000000"/>
-                </a:solidFill>
-                <a:latin typeface="Calibri" pitchFamily="34" charset="0"/>
-                <a:ea typeface="Calibri" pitchFamily="34" charset="-122"/>
-                <a:cs typeface="Calibri" pitchFamily="34" charset="-120"/>
-              </a:rPr>
-              <a:t xml:space="preserve">20 LUTs, 20 flip-flops</a:t>
-            </a:r>
-            <a:r>
-              <a:rPr lang="en-US" sz="1500" dirty="0">
-                <a:solidFill>
-                  <a:srgbClr val="000000"/>
-                </a:solidFill>
-                <a:latin typeface="Calibri" pitchFamily="34" charset="0"/>
-                <a:ea typeface="Calibri" pitchFamily="34" charset="-122"/>
-                <a:cs typeface="Calibri" pitchFamily="34" charset="-120"/>
-              </a:rPr>
-              <a:t xml:space="preserve"> — 0.10 % of the chip. 200 MHz timing is </a:t>
-            </a:r>
-            <a:r>
-              <a:rPr lang="en-US" sz="1500" b="1" dirty="0">
-                <a:solidFill>
-                  <a:srgbClr val="000000"/>
-                </a:solidFill>
-                <a:latin typeface="Calibri" pitchFamily="34" charset="0"/>
-                <a:ea typeface="Calibri" pitchFamily="34" charset="-122"/>
-                <a:cs typeface="Calibri" pitchFamily="34" charset="-120"/>
-              </a:rPr>
-              <a:t xml:space="preserve">met, with 1.996 ns to spare</a:t>
-            </a:r>
-            <a:r>
-              <a:rPr lang="en-US" sz="1500" dirty="0">
-                <a:solidFill>
-                  <a:srgbClr val="000000"/>
-                </a:solidFill>
-                <a:latin typeface="Calibri" pitchFamily="34" charset="0"/>
-                <a:ea typeface="Calibri" pitchFamily="34" charset="-122"/>
-                <a:cs typeface="Calibri" pitchFamily="34" charset="-120"/>
-              </a:rPr>
-              <a:t xml:space="preserve">.</a:t>
-            </a:r>
-          </a:p>
-          <a:p>
-            <a:pPr marL="520700" indent="-177800">
-              <a:spcAft>
-                <a:spcPts val="600"/>
-              </a:spcAft>
-              <a:buSzPct val="100000"/>
-              <a:buChar char="–"/>
-            </a:pPr>
-            <a:r>
-              <a:rPr lang="en-US" sz="1500" dirty="0">
-                <a:solidFill>
-                  <a:srgbClr val="000000"/>
-                </a:solidFill>
-                <a:latin typeface="Calibri" pitchFamily="34" charset="0"/>
-                <a:ea typeface="Calibri" pitchFamily="34" charset="-122"/>
-                <a:cs typeface="Calibri" pitchFamily="34" charset="-120"/>
-              </a:rPr>
-              <a:t xml:space="preserve">The 34 failing paths are all chip-output paths against a placeholder 4 ns constraint — the output buffer alone takes 3.49 ns.</a:t>
-            </a:r>
-          </a:p>
-        </p:txBody>
-      </p:sp>
-      <p:pic>
-        <p:nvPicPr>
-          <p:cNvPr id="6" name="Picture 5" descr="fig_rtl_waveform.png"/>
-          <p:cNvPicPr>
-            <a:picLocks noChangeAspect="1"/>
-          </p:cNvPicPr>
-          <p:nvPr/>
-        </p:nvPicPr>
-        <p:blipFill>
-          <a:blip r:embed="rId4"/>
-          <a:stretch>
-            <a:fillRect/>
-          </a:stretch>
-        </p:blipFill>
-        <p:spPr>
-          <a:xfrm>
-            <a:off x="2743200" y="3703320"/>
-            <a:ext cx="6675120" cy="2422423"/>
-          </a:xfrm>
-          <a:prstGeom prst="rect">
-            <a:avLst/>
-          </a:prstGeom>
-        </p:spPr>
-      </p:pic>
-      <p:sp>
-        <p:nvSpPr>
-          <p:cNvPr id="7" name="TextBox 6"/>
-          <p:cNvSpPr txBox="1"/>
-          <p:nvPr/>
-        </p:nvSpPr>
-        <p:spPr>
-          <a:xfrm>
-            <a:off x="2743200" y="6217920"/>
-            <a:ext cx="6675120" cy="310896"/>
-          </a:xfrm>
-          <a:prstGeom prst="rect">
-            <a:avLst/>
-          </a:prstGeom>
-          <a:noFill/>
-        </p:spPr>
-        <p:txBody>
-          <a:bodyPr wrap="square" lIns="0" tIns="0" rIns="0" bIns="0">
+        </p:spPr>
+        <p:txBody>
+          <a:bodyPr wrap="square">
             <a:spAutoFit/>
           </a:bodyPr>
           <a:lstStyle/>
           <a:p>
-            <a:pPr marL="177800" indent="0">
-              <a:spcAft>
-                <a:spcPts val="0"/>
-              </a:spcAft>
-              <a:buSzPct val="100000"/>
-              <a:buNone/>
-            </a:pPr>
-            <a:r>
-              <a:rPr lang="en-US" sz="1000" dirty="0">
-                <a:solidFill>
-                  <a:srgbClr val="000000"/>
-                </a:solidFill>
-                <a:latin typeface="Calibri" pitchFamily="34" charset="0"/>
-                <a:ea typeface="Calibri" pitchFamily="34" charset="-122"/>
-                <a:cs typeface="Calibri" pitchFamily="34" charset="-120"/>
-              </a:rPr>
-              <a:t xml:space="preserve">Icarus Verilog VCD. ls_pu falls to 0 before hs_pu rises — the shaded dead time is the gap, and no shoot-through window exists.</a:t>
+            <a:r>
+              <a:rPr sz="6600" b="1" i="0">
+                <a:solidFill>
+                  <a:srgbClr val="6B7C93"/>
+                </a:solidFill>
+                <a:latin typeface="Calibri"/>
+              </a:rPr>
+              <a:t>03</a:t>
+            </a:r>
+          </a:p>
+        </p:txBody>
+      </p:sp>
+      <p:sp>
+        <p:nvSpPr>
+          <p:cNvPr id="4" name="TextBox 3"/>
+          <p:cNvSpPr txBox="1"/>
+          <p:nvPr/>
+        </p:nvSpPr>
+        <p:spPr>
+          <a:xfrm>
+            <a:off x="1188720" y="3063240"/>
+            <a:ext cx="9692640" cy="1005840"/>
+          </a:xfrm>
+          <a:prstGeom prst="rect">
+            <a:avLst/>
+          </a:prstGeom>
+          <a:noFill/>
+        </p:spPr>
+        <p:txBody>
+          <a:bodyPr wrap="square">
+            <a:spAutoFit/>
+          </a:bodyPr>
+          <a:lstStyle/>
+          <a:p>
+            <a:r>
+              <a:rPr sz="4400" b="1" i="0">
+                <a:solidFill>
+                  <a:srgbClr val="F4F2EE"/>
+                </a:solidFill>
+                <a:latin typeface="Calibri"/>
+              </a:rPr>
+              <a:t>What we found</a:t>
+            </a:r>
+          </a:p>
+        </p:txBody>
+      </p:sp>
+      <p:sp>
+        <p:nvSpPr>
+          <p:cNvPr id="5" name="TextBox 4"/>
+          <p:cNvSpPr txBox="1"/>
+          <p:nvPr/>
+        </p:nvSpPr>
+        <p:spPr>
+          <a:xfrm>
+            <a:off x="1280160" y="4160520"/>
+            <a:ext cx="9509760" cy="731520"/>
+          </a:xfrm>
+          <a:prstGeom prst="rect">
+            <a:avLst/>
+          </a:prstGeom>
+          <a:noFill/>
+        </p:spPr>
+        <p:txBody>
+          <a:bodyPr wrap="square">
+            <a:spAutoFit/>
+          </a:bodyPr>
+          <a:lstStyle/>
+          <a:p>
+            <a:r>
+              <a:rPr sz="1700" b="0" i="0">
+                <a:solidFill>
+                  <a:srgbClr val="6B7C93"/>
+                </a:solidFill>
+                <a:latin typeface="Calibri"/>
+              </a:rPr>
+              <a:t>Choosing well beats adapting — and by how much</a:t>
             </a:r>
           </a:p>
         </p:txBody>
@@ -5380,9 +5820,24 @@
                 <a:ea typeface="Calibri" pitchFamily="34" charset="-122"/>
                 <a:cs typeface="Calibri" pitchFamily="34" charset="-120"/>
               </a:rPr>
-              <a:t>A Segmented Gate Driver for GaN HEMTs: Measuring What Operating-Point Scheduling Is Actually Worth</a:t>
-            </a:r>
-            <a:endParaRPr lang="en-US" sz="3200" dirty="0"/>
+              <a:t>GaN-Based Power Converter</a:t>
+            </a:r>
+          </a:p>
+          <a:p>
+            <a:pPr marL="0" indent="0" algn="ctr">
+              <a:buNone/>
+            </a:pPr>
+            <a:r>
+              <a:rPr lang="en-US" sz="1760" dirty="0">
+                <a:solidFill>
+                  <a:srgbClr val="1D2F82"/>
+                </a:solidFill>
+                <a:latin typeface="Calibri" pitchFamily="34" charset="0"/>
+                <a:ea typeface="Calibri" pitchFamily="34" charset="-122"/>
+                <a:cs typeface="Calibri" pitchFamily="34" charset="-120"/>
+              </a:rPr>
+              <a:t>A segmented gate driver for the GaN half-bridge inside it</a:t>
+            </a:r>
           </a:p>
         </p:txBody>
       </p:sp>
@@ -6014,445 +6469,7 @@
 </p:sld>
 </file>
 
-<file path=ppt/slides/slide21.xml><?xml version="1.0" encoding="utf-8"?>
-<p:sld xmlns:a="http://schemas.openxmlformats.org/drawingml/2006/main" xmlns:p="http://schemas.openxmlformats.org/presentationml/2006/main" xmlns:r="http://schemas.openxmlformats.org/officeDocument/2006/relationships">
-  <p:cSld>
-    <p:spTree>
-      <p:nvGrpSpPr>
-        <p:cNvPr id="1" name=""/>
-        <p:cNvGrpSpPr/>
-        <p:nvPr/>
-      </p:nvGrpSpPr>
-      <p:grpSpPr/>
-      <p:sp>
-        <p:nvSpPr>
-          <p:cNvPr id="2" name="Text 0"/>
-          <p:cNvSpPr txBox="1"/>
-          <p:nvPr/>
-        </p:nvSpPr>
-        <p:spPr>
-          <a:xfrm>
-            <a:off x="11460175" y="6446520"/>
-            <a:ext cx="457200" cy="274320"/>
-          </a:xfrm>
-          <a:prstGeom prst="rect">
-            <a:avLst/>
-          </a:prstGeom>
-          <a:noFill/>
-          <a:ln/>
-        </p:spPr>
-        <p:txBody>
-          <a:bodyPr wrap="square" lIns="0" tIns="0" rIns="0" bIns="0" rtlCol="0" anchor="ctr"/>
-          <a:lstStyle/>
-          <a:p>
-            <a:pPr marL="0" indent="0" algn="r">
-              <a:buNone/>
-            </a:pPr>
-            <a:r>
-              <a:rPr lang="en-US" sz="1000" dirty="0">
-                <a:solidFill>
-                  <a:srgbClr val="808080"/>
-                </a:solidFill>
-                <a:latin typeface="Calibri" pitchFamily="34" charset="0"/>
-                <a:ea typeface="Calibri" pitchFamily="34" charset="-122"/>
-                <a:cs typeface="Calibri" pitchFamily="34" charset="-120"/>
-              </a:rPr>
-              <a:t>18</a:t>
-            </a:r>
-            <a:endParaRPr lang="en-US" sz="1000" dirty="0"/>
-          </a:p>
-        </p:txBody>
-      </p:sp>
-      <p:sp>
-        <p:nvSpPr>
-          <p:cNvPr id="3" name="Text 1"/>
-          <p:cNvSpPr txBox="1"/>
-          <p:nvPr/>
-        </p:nvSpPr>
-        <p:spPr>
-          <a:xfrm>
-            <a:off x="548640" y="320040"/>
-            <a:ext cx="9601200" cy="685800"/>
-          </a:xfrm>
-          <a:prstGeom prst="rect">
-            <a:avLst/>
-          </a:prstGeom>
-          <a:noFill/>
-          <a:ln/>
-        </p:spPr>
-        <p:txBody>
-          <a:bodyPr wrap="square" lIns="0" tIns="0" rIns="0" bIns="0" rtlCol="0" anchor="ctr"/>
-          <a:lstStyle/>
-          <a:p>
-            <a:pPr marL="0" indent="0">
-              <a:buNone/>
-            </a:pPr>
-            <a:r>
-              <a:rPr lang="en-US" sz="2800" b="1" dirty="0">
-                <a:solidFill>
-                  <a:srgbClr val="1D2F82"/>
-                </a:solidFill>
-                <a:latin typeface="Calibri" pitchFamily="34" charset="0"/>
-                <a:ea typeface="Calibri" pitchFamily="34" charset="-122"/>
-                <a:cs typeface="Calibri" pitchFamily="34" charset="-120"/>
-              </a:rPr>
-              <a:t>Vivado — simulation and synthesis, on screen</a:t>
-            </a:r>
-            <a:endParaRPr lang="en-US" sz="2800" dirty="0"/>
-          </a:p>
-        </p:txBody>
-      </p:sp>
-      <p:pic>
-        <p:nvPicPr>
-          <p:cNvPr id="4" name="Image 0" descr="logo.png"/>
-          <p:cNvPicPr>
-            <a:picLocks noChangeAspect="1"/>
-          </p:cNvPicPr>
-          <p:nvPr/>
-        </p:nvPicPr>
-        <p:blipFill>
-          <a:blip r:embed="rId2"/>
-          <a:stretch>
-            <a:fillRect/>
-          </a:stretch>
-        </p:blipFill>
-        <p:spPr>
-          <a:xfrm>
-            <a:off x="10362895" y="320040"/>
-            <a:ext cx="1371600" cy="518746"/>
-          </a:xfrm>
-          <a:prstGeom prst="rect">
-            <a:avLst/>
-          </a:prstGeom>
-        </p:spPr>
-      </p:pic>
-      <p:pic>
-        <p:nvPicPr>
-          <p:cNvPr id="5" name="Picture 4" descr="vivado_simulation.png"/>
-          <p:cNvPicPr>
-            <a:picLocks noChangeAspect="1"/>
-          </p:cNvPicPr>
-          <p:nvPr/>
-        </p:nvPicPr>
-        <p:blipFill>
-          <a:blip r:embed="rId5"/>
-          <a:stretch>
-            <a:fillRect/>
-          </a:stretch>
-        </p:blipFill>
-        <p:spPr>
-          <a:xfrm>
-            <a:off x="502920" y="1417320"/>
-            <a:ext cx="5532120" cy="3111818"/>
-          </a:xfrm>
-          <a:prstGeom prst="rect">
-            <a:avLst/>
-          </a:prstGeom>
-        </p:spPr>
-      </p:pic>
-      <p:pic>
-        <p:nvPicPr>
-          <p:cNvPr id="6" name="Picture 5" descr="vivado_console.png"/>
-          <p:cNvPicPr>
-            <a:picLocks noChangeAspect="1"/>
-          </p:cNvPicPr>
-          <p:nvPr/>
-        </p:nvPicPr>
-        <p:blipFill>
-          <a:blip r:embed="rId6"/>
-          <a:stretch>
-            <a:fillRect/>
-          </a:stretch>
-        </p:blipFill>
-        <p:spPr>
-          <a:xfrm>
-            <a:off x="6263640" y="1417320"/>
-            <a:ext cx="5532120" cy="3111818"/>
-          </a:xfrm>
-          <a:prstGeom prst="rect">
-            <a:avLst/>
-          </a:prstGeom>
-        </p:spPr>
-      </p:pic>
-      <p:sp>
-        <p:nvSpPr>
-          <p:cNvPr id="7" name="TextBox 6"/>
-          <p:cNvSpPr txBox="1"/>
-          <p:nvPr/>
-        </p:nvSpPr>
-        <p:spPr>
-          <a:xfrm>
-            <a:off x="502920" y="4709160"/>
-            <a:ext cx="5532120" cy="731520"/>
-          </a:xfrm>
-          <a:prstGeom prst="rect">
-            <a:avLst/>
-          </a:prstGeom>
-          <a:noFill/>
-        </p:spPr>
-        <p:txBody>
-          <a:bodyPr wrap="square" lIns="0" tIns="0" rIns="0" bIns="0">
-            <a:spAutoFit/>
-          </a:bodyPr>
-          <a:lstStyle/>
-          <a:p>
-            <a:pPr marL="177800" indent="0">
-              <a:spcAft>
-                <a:spcPts val="0"/>
-              </a:spcAft>
-              <a:buSzPct val="100000"/>
-              <a:buNone/>
-            </a:pPr>
-            <a:r>
-              <a:rPr lang="en-US" sz="1150" b="1" dirty="0">
-                <a:solidFill>
-                  <a:srgbClr val="000000"/>
-                </a:solidFill>
-                <a:latin typeface="Calibri" pitchFamily="34" charset="0"/>
-                <a:ea typeface="Calibri" pitchFamily="34" charset="-122"/>
-                <a:cs typeface="Calibri" pitchFamily="34" charset="-120"/>
-              </a:rPr>
-              <a:t xml:space="preserve">Behavioural simulation. </a:t>
-            </a:r>
-            <a:r>
-              <a:rPr lang="en-US" sz="1150" dirty="0">
-                <a:solidFill>
-                  <a:srgbClr val="000000"/>
-                </a:solidFill>
-                <a:latin typeface="Calibri" pitchFamily="34" charset="0"/>
-                <a:ea typeface="Calibri" pitchFamily="34" charset="-122"/>
-                <a:cs typeface="Calibri" pitchFamily="34" charset="-120"/>
-              </a:rPr>
-              <a:t xml:space="preserve">fails[31:0] = 0 — every asserted property holds in Vivado's own simulator, a third tool after Icarus and the mutation test.</a:t>
-            </a:r>
-          </a:p>
-        </p:txBody>
-      </p:sp>
-      <p:sp>
-        <p:nvSpPr>
-          <p:cNvPr id="8" name="TextBox 7"/>
-          <p:cNvSpPr txBox="1"/>
-          <p:nvPr/>
-        </p:nvSpPr>
-        <p:spPr>
-          <a:xfrm>
-            <a:off x="6263640" y="4709160"/>
-            <a:ext cx="5532120" cy="731520"/>
-          </a:xfrm>
-          <a:prstGeom prst="rect">
-            <a:avLst/>
-          </a:prstGeom>
-          <a:noFill/>
-        </p:spPr>
-        <p:txBody>
-          <a:bodyPr wrap="square" lIns="0" tIns="0" rIns="0" bIns="0">
-            <a:spAutoFit/>
-          </a:bodyPr>
-          <a:lstStyle/>
-          <a:p>
-            <a:pPr marL="177800" indent="0">
-              <a:spcAft>
-                <a:spcPts val="0"/>
-              </a:spcAft>
-              <a:buSzPct val="100000"/>
-              <a:buNone/>
-            </a:pPr>
-            <a:r>
-              <a:rPr lang="en-US" sz="1150" b="1" dirty="0">
-                <a:solidFill>
-                  <a:srgbClr val="000000"/>
-                </a:solidFill>
-                <a:latin typeface="Calibri" pitchFamily="34" charset="0"/>
-                <a:ea typeface="Calibri" pitchFamily="34" charset="-122"/>
-                <a:cs typeface="Calibri" pitchFamily="34" charset="-120"/>
-              </a:rPr>
-              <a:t xml:space="preserve">Synthesis console. </a:t>
-            </a:r>
-            <a:r>
-              <a:rPr lang="en-US" sz="1150" dirty="0">
-                <a:solidFill>
-                  <a:srgbClr val="000000"/>
-                </a:solidFill>
-                <a:latin typeface="Calibri" pitchFamily="34" charset="0"/>
-                <a:ea typeface="Calibri" pitchFamily="34" charset="-122"/>
-                <a:cs typeface="Calibri" pitchFamily="34" charset="-120"/>
-              </a:rPr>
-              <a:t xml:space="preserve">33 LUTs programmable against 20 strapped — the cost of programmability, printed by the tool.</a:t>
-            </a:r>
-          </a:p>
-        </p:txBody>
-      </p:sp>
-    </p:spTree>
-  </p:cSld>
-  <p:clrMapOvr>
-    <a:masterClrMapping/>
-  </p:clrMapOvr>
-</p:sld>
-</file>
-
-<file path=ppt/slides/slide22.xml><?xml version="1.0" encoding="utf-8"?>
-<p:sld xmlns:a="http://schemas.openxmlformats.org/drawingml/2006/main" xmlns:p="http://schemas.openxmlformats.org/presentationml/2006/main" xmlns:r="http://schemas.openxmlformats.org/officeDocument/2006/relationships">
-  <p:cSld>
-    <p:spTree>
-      <p:nvGrpSpPr>
-        <p:cNvPr id="1" name=""/>
-        <p:cNvGrpSpPr/>
-        <p:nvPr/>
-      </p:nvGrpSpPr>
-      <p:grpSpPr/>
-      <p:sp>
-        <p:nvSpPr>
-          <p:cNvPr id="2" name="Rectangle 1"/>
-          <p:cNvSpPr/>
-          <p:nvPr/>
-        </p:nvSpPr>
-        <p:spPr>
-          <a:xfrm>
-            <a:off x="0" y="0"/>
-            <a:ext cx="12191695" cy="6858000"/>
-          </a:xfrm>
-          <a:prstGeom prst="rect">
-            <a:avLst/>
-          </a:prstGeom>
-          <a:solidFill>
-            <a:srgbClr val="14233D"/>
-          </a:solidFill>
-          <a:ln>
-            <a:noFill/>
-          </a:ln>
-          <a:effectLst/>
-        </p:spPr>
-        <p:style>
-          <a:lnRef idx="1">
-            <a:schemeClr val="accent1"/>
-          </a:lnRef>
-          <a:fillRef idx="3">
-            <a:schemeClr val="accent1"/>
-          </a:fillRef>
-          <a:effectRef idx="2">
-            <a:schemeClr val="accent1"/>
-          </a:effectRef>
-          <a:fontRef idx="minor">
-            <a:schemeClr val="lt1"/>
-          </a:fontRef>
-        </p:style>
-        <p:txBody>
-          <a:bodyPr rtlCol="0" anchor="ctr"/>
-          <a:lstStyle/>
-          <a:p/>
-        </p:txBody>
-      </p:sp>
-      <p:sp>
-        <p:nvSpPr>
-          <p:cNvPr id="3" name="TextBox 2"/>
-          <p:cNvSpPr txBox="1"/>
-          <p:nvPr/>
-        </p:nvSpPr>
-        <p:spPr>
-          <a:xfrm>
-            <a:off x="1188720" y="1874519"/>
-            <a:ext cx="2743200" cy="1143000"/>
-          </a:xfrm>
-          <a:prstGeom prst="rect">
-            <a:avLst/>
-          </a:prstGeom>
-          <a:noFill/>
-        </p:spPr>
-        <p:txBody>
-          <a:bodyPr wrap="square">
-            <a:spAutoFit/>
-          </a:bodyPr>
-          <a:lstStyle/>
-          <a:p>
-            <a:r>
-              <a:rPr sz="6600" b="1" i="0">
-                <a:solidFill>
-                  <a:srgbClr val="6B7C93"/>
-                </a:solidFill>
-                <a:latin typeface="Calibri"/>
-              </a:rPr>
-              <a:t>03</a:t>
-            </a:r>
-          </a:p>
-        </p:txBody>
-      </p:sp>
-      <p:sp>
-        <p:nvSpPr>
-          <p:cNvPr id="4" name="TextBox 3"/>
-          <p:cNvSpPr txBox="1"/>
-          <p:nvPr/>
-        </p:nvSpPr>
-        <p:spPr>
-          <a:xfrm>
-            <a:off x="1188720" y="3063240"/>
-            <a:ext cx="9692640" cy="1005840"/>
-          </a:xfrm>
-          <a:prstGeom prst="rect">
-            <a:avLst/>
-          </a:prstGeom>
-          <a:noFill/>
-        </p:spPr>
-        <p:txBody>
-          <a:bodyPr wrap="square">
-            <a:spAutoFit/>
-          </a:bodyPr>
-          <a:lstStyle/>
-          <a:p>
-            <a:r>
-              <a:rPr sz="4400" b="1" i="0">
-                <a:solidFill>
-                  <a:srgbClr val="F4F2EE"/>
-                </a:solidFill>
-                <a:latin typeface="Calibri"/>
-              </a:rPr>
-              <a:t>What we found</a:t>
-            </a:r>
-          </a:p>
-        </p:txBody>
-      </p:sp>
-      <p:sp>
-        <p:nvSpPr>
-          <p:cNvPr id="5" name="TextBox 4"/>
-          <p:cNvSpPr txBox="1"/>
-          <p:nvPr/>
-        </p:nvSpPr>
-        <p:spPr>
-          <a:xfrm>
-            <a:off x="1280160" y="4160520"/>
-            <a:ext cx="9509760" cy="731520"/>
-          </a:xfrm>
-          <a:prstGeom prst="rect">
-            <a:avLst/>
-          </a:prstGeom>
-          <a:noFill/>
-        </p:spPr>
-        <p:txBody>
-          <a:bodyPr wrap="square">
-            <a:spAutoFit/>
-          </a:bodyPr>
-          <a:lstStyle/>
-          <a:p>
-            <a:r>
-              <a:rPr sz="1700" b="0" i="0">
-                <a:solidFill>
-                  <a:srgbClr val="6B7C93"/>
-                </a:solidFill>
-                <a:latin typeface="Calibri"/>
-              </a:rPr>
-              <a:t>Choosing well beats adapting — and by how much</a:t>
-            </a:r>
-          </a:p>
-        </p:txBody>
-      </p:sp>
-    </p:spTree>
-  </p:cSld>
-  <p:clrMapOvr>
-    <a:masterClrMapping/>
-  </p:clrMapOvr>
-</p:sld>
-</file>
-
-<file path=ppt/slides/slide23.xml><?xml version="1.0" encoding="utf-8"?>
+<file path=ppt/slides/slide20.xml><?xml version="1.0" encoding="utf-8"?>
 <p:sld xmlns:a="http://schemas.openxmlformats.org/drawingml/2006/main" xmlns:r="http://schemas.openxmlformats.org/officeDocument/2006/relationships" xmlns:p="http://schemas.openxmlformats.org/presentationml/2006/main">
   <p:cSld name="Slide 8">
     <p:bg>
@@ -6510,7 +6527,7 @@
                 <a:ea typeface="Calibri" pitchFamily="34" charset="-122"/>
                 <a:cs typeface="Calibri" pitchFamily="34" charset="-120"/>
               </a:rPr>
-              <a:t>20</a:t>
+              <a:t>21</a:t>
             </a:r>
             <a:endParaRPr lang="en-US" sz="1000" dirty="0"/>
           </a:p>
@@ -6934,6 +6951,1513 @@
                 <a:cs typeface="Calibri" pitchFamily="34" charset="-120"/>
               </a:rPr>
               <a:t>The clamp is worth 9.7–12.2 % of the blended cost, with no sensor and no controller.</a:t>
+            </a:r>
+          </a:p>
+        </p:txBody>
+      </p:sp>
+    </p:spTree>
+  </p:cSld>
+  <p:clrMapOvr>
+    <a:masterClrMapping/>
+  </p:clrMapOvr>
+</p:sld>
+</file>
+
+<file path=ppt/slides/slide21.xml><?xml version="1.0" encoding="utf-8"?>
+<p:sld xmlns:a="http://schemas.openxmlformats.org/drawingml/2006/main" xmlns:r="http://schemas.openxmlformats.org/officeDocument/2006/relationships" xmlns:p="http://schemas.openxmlformats.org/presentationml/2006/main">
+  <p:cSld name="Slide 9">
+    <p:bg>
+      <p:bgPr>
+        <a:solidFill>
+          <a:srgbClr val="FFFFFF"/>
+        </a:solidFill>
+        <a:effectLst/>
+      </p:bgPr>
+    </p:bg>
+    <p:spTree>
+      <p:nvGrpSpPr>
+        <p:cNvPr id="1" name=""/>
+        <p:cNvGrpSpPr/>
+        <p:nvPr/>
+      </p:nvGrpSpPr>
+      <p:grpSpPr>
+        <a:xfrm>
+          <a:off x="0" y="0"/>
+          <a:ext cx="0" cy="0"/>
+          <a:chOff x="0" y="0"/>
+          <a:chExt cx="0" cy="0"/>
+        </a:xfrm>
+      </p:grpSpPr>
+      <p:sp>
+        <p:nvSpPr>
+          <p:cNvPr id="2" name="Text 0"/>
+          <p:cNvSpPr txBox="1"/>
+          <p:nvPr/>
+        </p:nvSpPr>
+        <p:spPr>
+          <a:xfrm>
+            <a:off x="11460175" y="6446520"/>
+            <a:ext cx="457200" cy="274320"/>
+          </a:xfrm>
+          <a:prstGeom prst="rect">
+            <a:avLst/>
+          </a:prstGeom>
+          <a:noFill/>
+          <a:ln/>
+        </p:spPr>
+        <p:txBody>
+          <a:bodyPr wrap="square" lIns="0" tIns="0" rIns="0" bIns="0" rtlCol="0" anchor="ctr"/>
+          <a:lstStyle/>
+          <a:p>
+            <a:pPr marL="0" indent="0" algn="r">
+              <a:buNone/>
+            </a:pPr>
+            <a:r>
+              <a:rPr lang="en-US" sz="1000" dirty="0">
+                <a:solidFill>
+                  <a:srgbClr val="808080"/>
+                </a:solidFill>
+                <a:latin typeface="Calibri" pitchFamily="34" charset="0"/>
+                <a:ea typeface="Calibri" pitchFamily="34" charset="-122"/>
+                <a:cs typeface="Calibri" pitchFamily="34" charset="-120"/>
+              </a:rPr>
+              <a:t>23</a:t>
+            </a:r>
+            <a:endParaRPr lang="en-US" sz="1000" dirty="0"/>
+          </a:p>
+        </p:txBody>
+      </p:sp>
+      <p:sp>
+        <p:nvSpPr>
+          <p:cNvPr id="3" name="Text 1"/>
+          <p:cNvSpPr txBox="1"/>
+          <p:nvPr/>
+        </p:nvSpPr>
+        <p:spPr>
+          <a:xfrm>
+            <a:off x="548640" y="320040"/>
+            <a:ext cx="9601200" cy="685800"/>
+          </a:xfrm>
+          <a:prstGeom prst="rect">
+            <a:avLst/>
+          </a:prstGeom>
+          <a:noFill/>
+          <a:ln/>
+        </p:spPr>
+        <p:txBody>
+          <a:bodyPr wrap="square" lIns="0" tIns="0" rIns="0" bIns="0" rtlCol="0" anchor="ctr"/>
+          <a:lstStyle/>
+          <a:p>
+            <a:pPr marL="0" indent="0">
+              <a:buNone/>
+            </a:pPr>
+            <a:r>
+              <a:rPr lang="en-US" sz="2800" dirty="0">
+                <a:solidFill>
+                  <a:srgbClr val="1D2F82"/>
+                </a:solidFill>
+                <a:latin typeface="Calibri" pitchFamily="34" charset="0"/>
+                <a:ea typeface="Calibri" pitchFamily="34" charset="-122"/>
+                <a:cs typeface="Calibri" pitchFamily="34" charset="-120"/>
+              </a:rPr>
+              <a:t>Result 3 — re-tuning is worth only 5.2 %</a:t>
+      